--- a/examples/gallery/pattern_gallery.pptx
+++ b/examples/gallery/pattern_gallery.pptx
@@ -27808,7 +27808,7 @@
           </a:solidFill>
         </p:spPr>
         <p:txBody>
-          <a:bodyPr wrap="square" anchor="ctr" lIns="0" rIns="0" tIns="0" bIns="0">
+          <a:bodyPr wrap="none" anchor="ctr" lIns="0" rIns="0" tIns="0" bIns="0">
             <a:spAutoFit/>
           </a:bodyPr>
           <a:lstStyle/>
@@ -27895,7 +27895,7 @@
           </a:solidFill>
         </p:spPr>
         <p:txBody>
-          <a:bodyPr wrap="square" anchor="ctr" lIns="0" rIns="0" tIns="0" bIns="0">
+          <a:bodyPr wrap="none" anchor="ctr" lIns="0" rIns="0" tIns="0" bIns="0">
             <a:spAutoFit/>
           </a:bodyPr>
           <a:lstStyle/>
@@ -27982,7 +27982,7 @@
           </a:solidFill>
         </p:spPr>
         <p:txBody>
-          <a:bodyPr wrap="square" anchor="ctr" lIns="0" rIns="0" tIns="0" bIns="0">
+          <a:bodyPr wrap="none" anchor="ctr" lIns="0" rIns="0" tIns="0" bIns="0">
             <a:spAutoFit/>
           </a:bodyPr>
           <a:lstStyle/>
@@ -28069,7 +28069,7 @@
           </a:solidFill>
         </p:spPr>
         <p:txBody>
-          <a:bodyPr wrap="square" anchor="ctr" lIns="0" rIns="0" tIns="0" bIns="0">
+          <a:bodyPr wrap="none" anchor="ctr" lIns="0" rIns="0" tIns="0" bIns="0">
             <a:spAutoFit/>
           </a:bodyPr>
           <a:lstStyle/>
@@ -28156,7 +28156,7 @@
           </a:solidFill>
         </p:spPr>
         <p:txBody>
-          <a:bodyPr wrap="square" anchor="ctr" lIns="0" rIns="0" tIns="0" bIns="0">
+          <a:bodyPr wrap="none" anchor="ctr" lIns="0" rIns="0" tIns="0" bIns="0">
             <a:spAutoFit/>
           </a:bodyPr>
           <a:lstStyle/>
@@ -28243,7 +28243,7 @@
           </a:solidFill>
         </p:spPr>
         <p:txBody>
-          <a:bodyPr wrap="square" anchor="ctr" lIns="0" rIns="0" tIns="0" bIns="0">
+          <a:bodyPr wrap="none" anchor="ctr" lIns="0" rIns="0" tIns="0" bIns="0">
             <a:spAutoFit/>
           </a:bodyPr>
           <a:lstStyle/>
@@ -28330,7 +28330,7 @@
           </a:solidFill>
         </p:spPr>
         <p:txBody>
-          <a:bodyPr wrap="square" anchor="ctr" lIns="0" rIns="0" tIns="0" bIns="0">
+          <a:bodyPr wrap="none" anchor="ctr" lIns="0" rIns="0" tIns="0" bIns="0">
             <a:spAutoFit/>
           </a:bodyPr>
           <a:lstStyle/>
@@ -28417,7 +28417,7 @@
           </a:solidFill>
         </p:spPr>
         <p:txBody>
-          <a:bodyPr wrap="square" anchor="ctr" lIns="0" rIns="0" tIns="0" bIns="0">
+          <a:bodyPr wrap="none" anchor="ctr" lIns="0" rIns="0" tIns="0" bIns="0">
             <a:spAutoFit/>
           </a:bodyPr>
           <a:lstStyle/>
@@ -28504,7 +28504,7 @@
           </a:solidFill>
         </p:spPr>
         <p:txBody>
-          <a:bodyPr wrap="square" anchor="ctr" lIns="0" rIns="0" tIns="0" bIns="0">
+          <a:bodyPr wrap="none" anchor="ctr" lIns="0" rIns="0" tIns="0" bIns="0">
             <a:spAutoFit/>
           </a:bodyPr>
           <a:lstStyle/>
@@ -29052,7 +29052,7 @@
           </a:solidFill>
         </p:spPr>
         <p:txBody>
-          <a:bodyPr wrap="square" anchor="ctr" lIns="0" rIns="0" tIns="0" bIns="0">
+          <a:bodyPr wrap="none" anchor="ctr" lIns="0" rIns="0" tIns="0" bIns="0">
             <a:spAutoFit/>
           </a:bodyPr>
           <a:lstStyle/>
@@ -29119,7 +29119,7 @@
           </a:solidFill>
         </p:spPr>
         <p:txBody>
-          <a:bodyPr wrap="square" anchor="ctr" lIns="0" rIns="0" tIns="0" bIns="0">
+          <a:bodyPr wrap="none" anchor="ctr" lIns="0" rIns="0" tIns="0" bIns="0">
             <a:spAutoFit/>
           </a:bodyPr>
           <a:lstStyle/>
@@ -29186,7 +29186,7 @@
           </a:solidFill>
         </p:spPr>
         <p:txBody>
-          <a:bodyPr wrap="square" anchor="ctr" lIns="0" rIns="0" tIns="0" bIns="0">
+          <a:bodyPr wrap="none" anchor="ctr" lIns="0" rIns="0" tIns="0" bIns="0">
             <a:spAutoFit/>
           </a:bodyPr>
           <a:lstStyle/>
@@ -29253,7 +29253,7 @@
           </a:solidFill>
         </p:spPr>
         <p:txBody>
-          <a:bodyPr wrap="square" anchor="ctr" lIns="0" rIns="0" tIns="0" bIns="0">
+          <a:bodyPr wrap="none" anchor="ctr" lIns="0" rIns="0" tIns="0" bIns="0">
             <a:spAutoFit/>
           </a:bodyPr>
           <a:lstStyle/>
@@ -29320,7 +29320,7 @@
           </a:solidFill>
         </p:spPr>
         <p:txBody>
-          <a:bodyPr wrap="square" anchor="ctr" lIns="0" rIns="0" tIns="0" bIns="0">
+          <a:bodyPr wrap="none" anchor="ctr" lIns="0" rIns="0" tIns="0" bIns="0">
             <a:spAutoFit/>
           </a:bodyPr>
           <a:lstStyle/>
@@ -29387,7 +29387,7 @@
           </a:solidFill>
         </p:spPr>
         <p:txBody>
-          <a:bodyPr wrap="square" anchor="ctr" lIns="0" rIns="0" tIns="0" bIns="0">
+          <a:bodyPr wrap="none" anchor="ctr" lIns="0" rIns="0" tIns="0" bIns="0">
             <a:spAutoFit/>
           </a:bodyPr>
           <a:lstStyle/>
@@ -29454,7 +29454,7 @@
           </a:solidFill>
         </p:spPr>
         <p:txBody>
-          <a:bodyPr wrap="square" anchor="ctr" lIns="0" rIns="0" tIns="0" bIns="0">
+          <a:bodyPr wrap="none" anchor="ctr" lIns="0" rIns="0" tIns="0" bIns="0">
             <a:spAutoFit/>
           </a:bodyPr>
           <a:lstStyle/>

--- a/examples/gallery/pattern_gallery.pptx
+++ b/examples/gallery/pattern_gallery.pptx
@@ -3288,7 +3288,7 @@
                 <a:ea typeface="Yu Gothic"/>
                 <a:cs typeface="Yu Gothic"/>
               </a:rPr>
-              <a:t>意思決定から技術研修まで、27のTypeを37枚で検証</a:t>
+              <a:t>意思決定から技術研修まで、26のTypeを37枚で検証</a:t>
             </a:r>
           </a:p>
         </p:txBody>
@@ -5182,7 +5182,7 @@
         </p:nvSpPr>
         <p:spPr>
           <a:xfrm>
-            <a:off x="502920" y="6053328"/>
+            <a:off x="502920" y="6053327"/>
             <a:ext cx="11185855" cy="228600"/>
           </a:xfrm>
           <a:prstGeom prst="rect">
@@ -7863,7 +7863,7 @@
         </p:nvSpPr>
         <p:spPr>
           <a:xfrm>
-            <a:off x="502920" y="6053328"/>
+            <a:off x="502920" y="6053327"/>
             <a:ext cx="11185855" cy="228600"/>
           </a:xfrm>
           <a:prstGeom prst="rect">
@@ -9409,7 +9409,7 @@
         </p:nvSpPr>
         <p:spPr>
           <a:xfrm>
-            <a:off x="502920" y="6053328"/>
+            <a:off x="502920" y="6053327"/>
             <a:ext cx="11185855" cy="228600"/>
           </a:xfrm>
           <a:prstGeom prst="rect">
@@ -20150,7 +20150,7 @@
         </p:nvSpPr>
         <p:spPr>
           <a:xfrm>
-            <a:off x="502920" y="6053328"/>
+            <a:off x="502920" y="6053327"/>
             <a:ext cx="11185855" cy="228600"/>
           </a:xfrm>
           <a:prstGeom prst="rect">
@@ -21404,7 +21404,7 @@
         </p:nvSpPr>
         <p:spPr>
           <a:xfrm>
-            <a:off x="502920" y="6053328"/>
+            <a:off x="502920" y="6053327"/>
             <a:ext cx="11185855" cy="228600"/>
           </a:xfrm>
           <a:prstGeom prst="rect">
@@ -25069,7 +25069,7 @@
         </p:nvSpPr>
         <p:spPr>
           <a:xfrm>
-            <a:off x="502920" y="6053328"/>
+            <a:off x="502920" y="6053327"/>
             <a:ext cx="11185855" cy="228600"/>
           </a:xfrm>
           <a:prstGeom prst="rect">
@@ -31117,7 +31117,7 @@
         </p:nvSpPr>
         <p:spPr>
           <a:xfrm>
-            <a:off x="502920" y="6053328"/>
+            <a:off x="502920" y="6053327"/>
             <a:ext cx="11185855" cy="228600"/>
           </a:xfrm>
           <a:prstGeom prst="rect">
@@ -33308,7 +33308,7 @@
         <p:spPr>
           <a:xfrm>
             <a:off x="539496" y="2633472"/>
-            <a:ext cx="4892040" cy="2916935"/>
+            <a:ext cx="4892040" cy="2988056"/>
           </a:xfrm>
           <a:prstGeom prst="rect">
             <a:avLst/>
@@ -33403,7 +33403,7 @@
         <p:spPr>
           <a:xfrm>
             <a:off x="5797296" y="1755648"/>
-            <a:ext cx="9144" cy="3794759"/>
+            <a:ext cx="9144" cy="3865880"/>
           </a:xfrm>
           <a:prstGeom prst="rect">
             <a:avLst/>
@@ -33488,7 +33488,7 @@
         <p:spPr>
           <a:xfrm>
             <a:off x="6144768" y="2061972"/>
-            <a:ext cx="5544007" cy="885443"/>
+            <a:ext cx="5544007" cy="909150"/>
           </a:xfrm>
           <a:prstGeom prst="rect">
             <a:avLst/>
@@ -33528,7 +33528,7 @@
         </p:nvSpPr>
         <p:spPr>
           <a:xfrm>
-            <a:off x="6144768" y="3002280"/>
+            <a:off x="6144768" y="3025986"/>
             <a:ext cx="5544007" cy="7315"/>
           </a:xfrm>
           <a:prstGeom prst="rect">
@@ -33572,7 +33572,7 @@
         </p:nvSpPr>
         <p:spPr>
           <a:xfrm>
-            <a:off x="6144768" y="3047999"/>
+            <a:off x="6144768" y="3071706"/>
             <a:ext cx="5544007" cy="196596"/>
           </a:xfrm>
           <a:prstGeom prst="rect">
@@ -33613,8 +33613,8 @@
         </p:nvSpPr>
         <p:spPr>
           <a:xfrm>
-            <a:off x="6144768" y="3326892"/>
-            <a:ext cx="5544007" cy="885443"/>
+            <a:off x="6144768" y="3350598"/>
+            <a:ext cx="5544007" cy="909150"/>
           </a:xfrm>
           <a:prstGeom prst="rect">
             <a:avLst/>
@@ -33654,7 +33654,7 @@
         </p:nvSpPr>
         <p:spPr>
           <a:xfrm>
-            <a:off x="6144768" y="4267200"/>
+            <a:off x="6144768" y="4314613"/>
             <a:ext cx="5544007" cy="7315"/>
           </a:xfrm>
           <a:prstGeom prst="rect">
@@ -33698,7 +33698,7 @@
         </p:nvSpPr>
         <p:spPr>
           <a:xfrm>
-            <a:off x="6144768" y="4312920"/>
+            <a:off x="6144768" y="4360333"/>
             <a:ext cx="5544007" cy="196596"/>
           </a:xfrm>
           <a:prstGeom prst="rect">
@@ -33739,8 +33739,8 @@
         </p:nvSpPr>
         <p:spPr>
           <a:xfrm>
-            <a:off x="6144768" y="4591812"/>
-            <a:ext cx="5544007" cy="885443"/>
+            <a:off x="6144768" y="4639225"/>
+            <a:ext cx="5544007" cy="909150"/>
           </a:xfrm>
           <a:prstGeom prst="rect">
             <a:avLst/>
@@ -33792,13 +33792,13 @@
       </p:sp>
       <p:sp>
         <p:nvSpPr>
-          <p:cNvPr id="17" name="Rectangle 16"/>
+          <p:cNvPr id="17" name="slide-footnote:rule"/>
           <p:cNvSpPr/>
           <p:nvPr/>
         </p:nvSpPr>
         <p:spPr>
           <a:xfrm>
-            <a:off x="502920" y="5687568"/>
+            <a:off x="502920" y="5822696"/>
             <a:ext cx="11185855" cy="9144"/>
           </a:xfrm>
           <a:prstGeom prst="rect">
@@ -33836,14 +33836,14 @@
       </p:sp>
       <p:sp>
         <p:nvSpPr>
-          <p:cNvPr id="18" name="TextBox 17"/>
-          <p:cNvSpPr txBox="1"/>
-          <p:nvPr/>
-        </p:nvSpPr>
-        <p:spPr>
-          <a:xfrm>
-            <a:off x="539496" y="5806440"/>
-            <a:ext cx="1078992" cy="219456"/>
+          <p:cNvPr id="18" name="slide-footnote:label"/>
+          <p:cNvSpPr txBox="1"/>
+          <p:nvPr/>
+        </p:nvSpPr>
+        <p:spPr>
+          <a:xfrm>
+            <a:off x="502920" y="5932424"/>
+            <a:ext cx="1271016" cy="221488"/>
           </a:xfrm>
           <a:prstGeom prst="rect">
             <a:avLst/>
@@ -33858,11 +33858,11 @@
           <a:p>
             <a:pPr algn="l">
               <a:lnSpc>
-                <a:spcPct val="130000"/>
-              </a:lnSpc>
-            </a:pPr>
-            <a:r>
-              <a:rPr sz="1050" b="1" lang="ja-JP">
+                <a:spcPct val="112000"/>
+              </a:lnSpc>
+            </a:pPr>
+            <a:r>
+              <a:rPr sz="1150" b="1" lang="ja-JP">
                 <a:solidFill>
                   <a:srgbClr val="C7583E"/>
                 </a:solidFill>
@@ -33877,14 +33877,14 @@
       </p:sp>
       <p:sp>
         <p:nvSpPr>
-          <p:cNvPr id="19" name="TextBox 18"/>
-          <p:cNvSpPr txBox="1"/>
-          <p:nvPr/>
-        </p:nvSpPr>
-        <p:spPr>
-          <a:xfrm>
-            <a:off x="1801368" y="5779007"/>
-            <a:ext cx="9887407" cy="347472"/>
+          <p:cNvPr id="19" name="slide-footnote:text"/>
+          <p:cNvSpPr txBox="1"/>
+          <p:nvPr/>
+        </p:nvSpPr>
+        <p:spPr>
+          <a:xfrm>
+            <a:off x="1920240" y="5932424"/>
+            <a:ext cx="9768535" cy="221488"/>
           </a:xfrm>
           <a:prstGeom prst="rect">
             <a:avLst/>
@@ -33899,7 +33899,7 @@
           <a:p>
             <a:pPr algn="l">
               <a:lnSpc>
-                <a:spcPct val="110000"/>
+                <a:spcPct val="112000"/>
               </a:lnSpc>
             </a:pPr>
             <a:r>
@@ -44989,58 +44989,86 @@
       </p:sp>
       <p:sp>
         <p:nvSpPr>
-          <p:cNvPr id="6" name="Oval 5"/>
-          <p:cNvSpPr/>
-          <p:nvPr/>
-        </p:nvSpPr>
-        <p:spPr>
-          <a:xfrm>
-            <a:off x="722376" y="2917332"/>
-            <a:ext cx="457200" cy="457200"/>
-          </a:xfrm>
-          <a:prstGeom prst="ellipse">
-            <a:avLst/>
-          </a:prstGeom>
-          <a:solidFill>
-            <a:srgbClr val="DFEBE8"/>
-          </a:solidFill>
-          <a:ln>
-            <a:noFill/>
-          </a:ln>
-          <a:effectLst/>
-        </p:spPr>
-        <p:txBody>
-          <a:bodyPr rtlCol="0" anchor="ctr"/>
-          <a:lstStyle/>
-          <a:p>
-            <a:pPr algn="ctr"/>
-          </a:p>
-        </p:txBody>
-      </p:sp>
-      <p:pic>
-        <p:nvPicPr>
-          <p:cNvPr id="7" name="Picture 6" descr="info.png"/>
-          <p:cNvPicPr>
-            <a:picLocks noChangeAspect="1"/>
-          </p:cNvPicPr>
-          <p:nvPr/>
-        </p:nvPicPr>
-        <p:blipFill>
-          <a:blip r:embed="rId2"/>
-          <a:stretch>
-            <a:fillRect/>
-          </a:stretch>
-        </p:blipFill>
-        <p:spPr>
-          <a:xfrm>
-            <a:off x="832104" y="3027060"/>
-            <a:ext cx="237744" cy="237744"/>
-          </a:xfrm>
-          <a:prstGeom prst="rect">
-            <a:avLst/>
-          </a:prstGeom>
-        </p:spPr>
-      </p:pic>
+          <p:cNvPr id="6" name="TextBox 5"/>
+          <p:cNvSpPr txBox="1"/>
+          <p:nvPr/>
+        </p:nvSpPr>
+        <p:spPr>
+          <a:xfrm>
+            <a:off x="713232" y="2514092"/>
+            <a:ext cx="530352" cy="329184"/>
+          </a:xfrm>
+          <a:prstGeom prst="rect">
+            <a:avLst/>
+          </a:prstGeom>
+          <a:noFill/>
+        </p:spPr>
+        <p:txBody>
+          <a:bodyPr wrap="square" anchor="t" lIns="0" rIns="0" tIns="0" bIns="0">
+            <a:spAutoFit/>
+          </a:bodyPr>
+          <a:lstStyle/>
+          <a:p>
+            <a:pPr algn="l">
+              <a:lnSpc>
+                <a:spcPct val="130000"/>
+              </a:lnSpc>
+            </a:pPr>
+            <a:r>
+              <a:rPr sz="1400" b="1" lang="ja-JP">
+                <a:solidFill>
+                  <a:srgbClr val="666E70"/>
+                </a:solidFill>
+                <a:latin typeface="Yu Gothic"/>
+                <a:ea typeface="Yu Gothic"/>
+                <a:cs typeface="Yu Gothic"/>
+              </a:rPr>
+              <a:t>01</a:t>
+            </a:r>
+          </a:p>
+        </p:txBody>
+      </p:sp>
+      <p:sp>
+        <p:nvSpPr>
+          <p:cNvPr id="7" name="TextBox 6"/>
+          <p:cNvSpPr txBox="1"/>
+          <p:nvPr/>
+        </p:nvSpPr>
+        <p:spPr>
+          <a:xfrm>
+            <a:off x="1371600" y="2495804"/>
+            <a:ext cx="2493264" cy="384048"/>
+          </a:xfrm>
+          <a:prstGeom prst="rect">
+            <a:avLst/>
+          </a:prstGeom>
+          <a:noFill/>
+        </p:spPr>
+        <p:txBody>
+          <a:bodyPr wrap="square" anchor="t" lIns="0" rIns="0" tIns="0" bIns="0">
+            <a:spAutoFit/>
+          </a:bodyPr>
+          <a:lstStyle/>
+          <a:p>
+            <a:pPr algn="l">
+              <a:lnSpc>
+                <a:spcPct val="130000"/>
+              </a:lnSpc>
+            </a:pPr>
+            <a:r>
+              <a:rPr sz="1650" b="1" lang="ja-JP">
+                <a:solidFill>
+                  <a:srgbClr val="182C43"/>
+                </a:solidFill>
+                <a:latin typeface="Yu Gothic"/>
+                <a:ea typeface="Yu Gothic"/>
+                <a:cs typeface="Yu Gothic"/>
+              </a:rPr>
+              <a:t>背景</a:t>
+            </a:r>
+          </a:p>
+        </p:txBody>
+      </p:sp>
       <p:sp>
         <p:nvSpPr>
           <p:cNvPr id="8" name="TextBox 7"/>
@@ -45049,8 +45077,8 @@
         </p:nvSpPr>
         <p:spPr>
           <a:xfrm>
-            <a:off x="1344168" y="2953908"/>
-            <a:ext cx="2667914" cy="292608"/>
+            <a:off x="1371600" y="3026156"/>
+            <a:ext cx="2401824" cy="2450591"/>
           </a:xfrm>
           <a:prstGeom prst="rect">
             <a:avLst/>
@@ -45065,7 +45093,89 @@
           <a:p>
             <a:pPr algn="l">
               <a:lnSpc>
-                <a:spcPct val="115000"/>
+                <a:spcPct val="120000"/>
+              </a:lnSpc>
+            </a:pPr>
+            <a:r>
+              <a:rPr sz="1400" b="0" lang="ja-JP">
+                <a:solidFill>
+                  <a:srgbClr val="202729"/>
+                </a:solidFill>
+                <a:latin typeface="Yu Gothic"/>
+                <a:ea typeface="Yu Gothic"/>
+                <a:cs typeface="Yu Gothic"/>
+              </a:rPr>
+              <a:t>部門ごとに資料の構成と確認方法が異なり、作成とレビューの双方に手戻りが発生している。</a:t>
+            </a:r>
+          </a:p>
+        </p:txBody>
+      </p:sp>
+      <p:sp>
+        <p:nvSpPr>
+          <p:cNvPr id="9" name="TextBox 8"/>
+          <p:cNvSpPr txBox="1"/>
+          <p:nvPr/>
+        </p:nvSpPr>
+        <p:spPr>
+          <a:xfrm>
+            <a:off x="4523232" y="2514092"/>
+            <a:ext cx="530352" cy="329184"/>
+          </a:xfrm>
+          <a:prstGeom prst="rect">
+            <a:avLst/>
+          </a:prstGeom>
+          <a:noFill/>
+        </p:spPr>
+        <p:txBody>
+          <a:bodyPr wrap="square" anchor="t" lIns="0" rIns="0" tIns="0" bIns="0">
+            <a:spAutoFit/>
+          </a:bodyPr>
+          <a:lstStyle/>
+          <a:p>
+            <a:pPr algn="l">
+              <a:lnSpc>
+                <a:spcPct val="130000"/>
+              </a:lnSpc>
+            </a:pPr>
+            <a:r>
+              <a:rPr sz="1400" b="1" lang="ja-JP">
+                <a:solidFill>
+                  <a:srgbClr val="666E70"/>
+                </a:solidFill>
+                <a:latin typeface="Yu Gothic"/>
+                <a:ea typeface="Yu Gothic"/>
+                <a:cs typeface="Yu Gothic"/>
+              </a:rPr>
+              <a:t>02</a:t>
+            </a:r>
+          </a:p>
+        </p:txBody>
+      </p:sp>
+      <p:sp>
+        <p:nvSpPr>
+          <p:cNvPr id="10" name="TextBox 9"/>
+          <p:cNvSpPr txBox="1"/>
+          <p:nvPr/>
+        </p:nvSpPr>
+        <p:spPr>
+          <a:xfrm>
+            <a:off x="5181600" y="2495804"/>
+            <a:ext cx="2493264" cy="384048"/>
+          </a:xfrm>
+          <a:prstGeom prst="rect">
+            <a:avLst/>
+          </a:prstGeom>
+          <a:noFill/>
+        </p:spPr>
+        <p:txBody>
+          <a:bodyPr wrap="square" anchor="t" lIns="0" rIns="0" tIns="0" bIns="0">
+            <a:spAutoFit/>
+          </a:bodyPr>
+          <a:lstStyle/>
+          <a:p>
+            <a:pPr algn="l">
+              <a:lnSpc>
+                <a:spcPct val="130000"/>
               </a:lnSpc>
             </a:pPr>
             <a:r>
@@ -45077,57 +45187,21 @@
                 <a:ea typeface="Yu Gothic"/>
                 <a:cs typeface="Yu Gothic"/>
               </a:rPr>
-              <a:t>背景</a:t>
-            </a:r>
-          </a:p>
-        </p:txBody>
-      </p:sp>
-      <p:cxnSp>
-        <p:nvCxnSpPr>
-          <p:cNvPr id="9" name="Connector 8"/>
-          <p:cNvCxnSpPr/>
-          <p:nvPr/>
-        </p:nvCxnSpPr>
-        <p:spPr>
-          <a:xfrm>
-            <a:off x="722376" y="3502548"/>
-            <a:ext cx="3289706" cy="0"/>
-          </a:xfrm>
-          <a:prstGeom prst="line">
-            <a:avLst/>
-          </a:prstGeom>
-          <a:ln w="10160">
-            <a:solidFill>
-              <a:srgbClr val="0D7870"/>
-            </a:solidFill>
-          </a:ln>
-          <a:effectLst/>
-        </p:spPr>
-        <p:style>
-          <a:lnRef idx="2">
-            <a:schemeClr val="accent1"/>
-          </a:lnRef>
-          <a:fillRef idx="0">
-            <a:schemeClr val="accent1"/>
-          </a:fillRef>
-          <a:effectRef idx="1">
-            <a:schemeClr val="accent1"/>
-          </a:effectRef>
-          <a:fontRef idx="minor">
-            <a:schemeClr val="tx1"/>
-          </a:fontRef>
-        </p:style>
-      </p:cxnSp>
-      <p:sp>
-        <p:nvSpPr>
-          <p:cNvPr id="10" name="TextBox 9"/>
-          <p:cNvSpPr txBox="1"/>
-          <p:nvPr/>
-        </p:nvSpPr>
-        <p:spPr>
-          <a:xfrm>
-            <a:off x="740664" y="3648852"/>
-            <a:ext cx="3253130" cy="1170432"/>
+              <a:t>判断</a:t>
+            </a:r>
+          </a:p>
+        </p:txBody>
+      </p:sp>
+      <p:sp>
+        <p:nvSpPr>
+          <p:cNvPr id="11" name="TextBox 10"/>
+          <p:cNvSpPr txBox="1"/>
+          <p:nvPr/>
+        </p:nvSpPr>
+        <p:spPr>
+          <a:xfrm>
+            <a:off x="5181600" y="3026156"/>
+            <a:ext cx="2401824" cy="2450591"/>
           </a:xfrm>
           <a:prstGeom prst="rect">
             <a:avLst/>
@@ -45142,11 +45216,11 @@
           <a:p>
             <a:pPr algn="l">
               <a:lnSpc>
-                <a:spcPct val="122000"/>
-              </a:lnSpc>
-            </a:pPr>
-            <a:r>
-              <a:rPr sz="1300" b="0" lang="ja-JP">
+                <a:spcPct val="120000"/>
+              </a:lnSpc>
+            </a:pPr>
+            <a:r>
+              <a:rPr sz="1400" b="0" lang="ja-JP">
                 <a:solidFill>
                   <a:srgbClr val="202729"/>
                 </a:solidFill>
@@ -45154,17 +45228,122 @@
                 <a:ea typeface="Yu Gothic"/>
                 <a:cs typeface="Yu Gothic"/>
               </a:rPr>
-              <a:t>部門ごとに資料の構成と確認方法が</a:t>
-            </a:r>
-          </a:p>
+              <a:t>全資料を一律化するのではなく、頻出する業務パターンから標準化する方が導入負荷を抑えられる。</a:t>
+            </a:r>
+          </a:p>
+        </p:txBody>
+      </p:sp>
+      <p:sp>
+        <p:nvSpPr>
+          <p:cNvPr id="12" name="TextBox 11"/>
+          <p:cNvSpPr txBox="1"/>
+          <p:nvPr/>
+        </p:nvSpPr>
+        <p:spPr>
+          <a:xfrm>
+            <a:off x="8333232" y="2514092"/>
+            <a:ext cx="530352" cy="329184"/>
+          </a:xfrm>
+          <a:prstGeom prst="rect">
+            <a:avLst/>
+          </a:prstGeom>
+          <a:noFill/>
+        </p:spPr>
+        <p:txBody>
+          <a:bodyPr wrap="square" anchor="t" lIns="0" rIns="0" tIns="0" bIns="0">
+            <a:spAutoFit/>
+          </a:bodyPr>
+          <a:lstStyle/>
           <a:p>
             <a:pPr algn="l">
               <a:lnSpc>
-                <a:spcPct val="122000"/>
-              </a:lnSpc>
-            </a:pPr>
-            <a:r>
-              <a:rPr sz="1300" b="0" lang="ja-JP">
+                <a:spcPct val="130000"/>
+              </a:lnSpc>
+            </a:pPr>
+            <a:r>
+              <a:rPr sz="1400" b="1" lang="ja-JP">
+                <a:solidFill>
+                  <a:srgbClr val="666E70"/>
+                </a:solidFill>
+                <a:latin typeface="Yu Gothic"/>
+                <a:ea typeface="Yu Gothic"/>
+                <a:cs typeface="Yu Gothic"/>
+              </a:rPr>
+              <a:t>03</a:t>
+            </a:r>
+          </a:p>
+        </p:txBody>
+      </p:sp>
+      <p:sp>
+        <p:nvSpPr>
+          <p:cNvPr id="13" name="TextBox 12"/>
+          <p:cNvSpPr txBox="1"/>
+          <p:nvPr/>
+        </p:nvSpPr>
+        <p:spPr>
+          <a:xfrm>
+            <a:off x="8991600" y="2495804"/>
+            <a:ext cx="2493264" cy="384048"/>
+          </a:xfrm>
+          <a:prstGeom prst="rect">
+            <a:avLst/>
+          </a:prstGeom>
+          <a:noFill/>
+        </p:spPr>
+        <p:txBody>
+          <a:bodyPr wrap="square" anchor="t" lIns="0" rIns="0" tIns="0" bIns="0">
+            <a:spAutoFit/>
+          </a:bodyPr>
+          <a:lstStyle/>
+          <a:p>
+            <a:pPr algn="l">
+              <a:lnSpc>
+                <a:spcPct val="130000"/>
+              </a:lnSpc>
+            </a:pPr>
+            <a:r>
+              <a:rPr sz="1650" b="1" lang="ja-JP">
+                <a:solidFill>
+                  <a:srgbClr val="182C43"/>
+                </a:solidFill>
+                <a:latin typeface="Yu Gothic"/>
+                <a:ea typeface="Yu Gothic"/>
+                <a:cs typeface="Yu Gothic"/>
+              </a:rPr>
+              <a:t>提案</a:t>
+            </a:r>
+          </a:p>
+        </p:txBody>
+      </p:sp>
+      <p:sp>
+        <p:nvSpPr>
+          <p:cNvPr id="14" name="TextBox 13"/>
+          <p:cNvSpPr txBox="1"/>
+          <p:nvPr/>
+        </p:nvSpPr>
+        <p:spPr>
+          <a:xfrm>
+            <a:off x="8991600" y="3026156"/>
+            <a:ext cx="2401824" cy="2450591"/>
+          </a:xfrm>
+          <a:prstGeom prst="rect">
+            <a:avLst/>
+          </a:prstGeom>
+          <a:noFill/>
+        </p:spPr>
+        <p:txBody>
+          <a:bodyPr wrap="square" anchor="t" lIns="0" rIns="0" tIns="0" bIns="0">
+            <a:spAutoFit/>
+          </a:bodyPr>
+          <a:lstStyle/>
+          <a:p>
+            <a:pPr algn="l">
+              <a:lnSpc>
+                <a:spcPct val="120000"/>
+              </a:lnSpc>
+            </a:pPr>
+            <a:r>
+              <a:rPr sz="1400" b="0" lang="ja-JP">
                 <a:solidFill>
                   <a:srgbClr val="202729"/>
                 </a:solidFill>
@@ -45172,520 +45351,14 @@
                 <a:ea typeface="Yu Gothic"/>
                 <a:cs typeface="Yu Gothic"/>
               </a:rPr>
-              <a:t>異なり、作成とレビューの双方に</a:t>
-            </a:r>
-          </a:p>
-          <a:p>
-            <a:pPr algn="l">
-              <a:lnSpc>
-                <a:spcPct val="122000"/>
-              </a:lnSpc>
-            </a:pPr>
-            <a:r>
-              <a:rPr sz="1300" b="0" lang="ja-JP">
-                <a:solidFill>
-                  <a:srgbClr val="202729"/>
-                </a:solidFill>
-                <a:latin typeface="Yu Gothic"/>
-                <a:ea typeface="Yu Gothic"/>
-                <a:cs typeface="Yu Gothic"/>
-              </a:rPr>
-              <a:t>手戻りが発生している。</a:t>
-            </a:r>
-          </a:p>
-        </p:txBody>
-      </p:sp>
-      <p:cxnSp>
-        <p:nvCxnSpPr>
-          <p:cNvPr id="11" name="Connector 10"/>
-          <p:cNvCxnSpPr/>
-          <p:nvPr/>
-        </p:nvCxnSpPr>
-        <p:spPr>
-          <a:xfrm>
-            <a:off x="4231538" y="2899044"/>
-            <a:ext cx="0" cy="1920240"/>
-          </a:xfrm>
-          <a:prstGeom prst="line">
-            <a:avLst/>
-          </a:prstGeom>
-          <a:ln w="8255">
-            <a:solidFill>
-              <a:srgbClr val="D1CFC8"/>
-            </a:solidFill>
-          </a:ln>
-          <a:effectLst/>
-        </p:spPr>
-        <p:style>
-          <a:lnRef idx="2">
-            <a:schemeClr val="accent1"/>
-          </a:lnRef>
-          <a:fillRef idx="0">
-            <a:schemeClr val="accent1"/>
-          </a:fillRef>
-          <a:effectRef idx="1">
-            <a:schemeClr val="accent1"/>
-          </a:effectRef>
-          <a:fontRef idx="minor">
-            <a:schemeClr val="tx1"/>
-          </a:fontRef>
-        </p:style>
-      </p:cxnSp>
-      <p:sp>
-        <p:nvSpPr>
-          <p:cNvPr id="12" name="Oval 11"/>
-          <p:cNvSpPr/>
-          <p:nvPr/>
-        </p:nvSpPr>
-        <p:spPr>
-          <a:xfrm>
-            <a:off x="4450994" y="2917332"/>
-            <a:ext cx="457200" cy="457200"/>
-          </a:xfrm>
-          <a:prstGeom prst="ellipse">
-            <a:avLst/>
-          </a:prstGeom>
-          <a:solidFill>
-            <a:srgbClr val="DFEBE8"/>
-          </a:solidFill>
-          <a:ln>
-            <a:noFill/>
-          </a:ln>
-          <a:effectLst/>
-        </p:spPr>
-        <p:txBody>
-          <a:bodyPr rtlCol="0" anchor="ctr"/>
-          <a:lstStyle/>
-          <a:p>
-            <a:pPr algn="ctr"/>
-          </a:p>
-        </p:txBody>
-      </p:sp>
-      <p:pic>
-        <p:nvPicPr>
-          <p:cNvPr id="13" name="Picture 12" descr="check.png"/>
-          <p:cNvPicPr>
-            <a:picLocks noChangeAspect="1"/>
-          </p:cNvPicPr>
-          <p:nvPr/>
-        </p:nvPicPr>
-        <p:blipFill>
-          <a:blip r:embed="rId3"/>
-          <a:stretch>
-            <a:fillRect/>
-          </a:stretch>
-        </p:blipFill>
-        <p:spPr>
-          <a:xfrm>
-            <a:off x="4560722" y="3027060"/>
-            <a:ext cx="237744" cy="237744"/>
-          </a:xfrm>
-          <a:prstGeom prst="rect">
-            <a:avLst/>
-          </a:prstGeom>
-        </p:spPr>
-      </p:pic>
-      <p:sp>
-        <p:nvSpPr>
-          <p:cNvPr id="14" name="TextBox 13"/>
-          <p:cNvSpPr txBox="1"/>
-          <p:nvPr/>
-        </p:nvSpPr>
-        <p:spPr>
-          <a:xfrm>
-            <a:off x="5072786" y="2953908"/>
-            <a:ext cx="2667914" cy="292608"/>
-          </a:xfrm>
-          <a:prstGeom prst="rect">
-            <a:avLst/>
-          </a:prstGeom>
-          <a:noFill/>
-        </p:spPr>
-        <p:txBody>
-          <a:bodyPr wrap="square" anchor="t" lIns="0" rIns="0" tIns="0" bIns="0">
-            <a:spAutoFit/>
-          </a:bodyPr>
-          <a:lstStyle/>
-          <a:p>
-            <a:pPr algn="l">
-              <a:lnSpc>
-                <a:spcPct val="115000"/>
-              </a:lnSpc>
-            </a:pPr>
-            <a:r>
-              <a:rPr sz="1650" b="1" lang="ja-JP">
-                <a:solidFill>
-                  <a:srgbClr val="182C43"/>
-                </a:solidFill>
-                <a:latin typeface="Yu Gothic"/>
-                <a:ea typeface="Yu Gothic"/>
-                <a:cs typeface="Yu Gothic"/>
-              </a:rPr>
-              <a:t>判断</a:t>
-            </a:r>
-          </a:p>
-        </p:txBody>
-      </p:sp>
-      <p:cxnSp>
-        <p:nvCxnSpPr>
-          <p:cNvPr id="15" name="Connector 14"/>
-          <p:cNvCxnSpPr/>
-          <p:nvPr/>
-        </p:nvCxnSpPr>
-        <p:spPr>
-          <a:xfrm>
-            <a:off x="4450994" y="3502548"/>
-            <a:ext cx="3289706" cy="0"/>
-          </a:xfrm>
-          <a:prstGeom prst="line">
-            <a:avLst/>
-          </a:prstGeom>
-          <a:ln w="10160">
-            <a:solidFill>
-              <a:srgbClr val="0D7870"/>
-            </a:solidFill>
-          </a:ln>
-          <a:effectLst/>
-        </p:spPr>
-        <p:style>
-          <a:lnRef idx="2">
-            <a:schemeClr val="accent1"/>
-          </a:lnRef>
-          <a:fillRef idx="0">
-            <a:schemeClr val="accent1"/>
-          </a:fillRef>
-          <a:effectRef idx="1">
-            <a:schemeClr val="accent1"/>
-          </a:effectRef>
-          <a:fontRef idx="minor">
-            <a:schemeClr val="tx1"/>
-          </a:fontRef>
-        </p:style>
-      </p:cxnSp>
-      <p:sp>
-        <p:nvSpPr>
-          <p:cNvPr id="16" name="TextBox 15"/>
-          <p:cNvSpPr txBox="1"/>
-          <p:nvPr/>
-        </p:nvSpPr>
-        <p:spPr>
-          <a:xfrm>
-            <a:off x="4469282" y="3648852"/>
-            <a:ext cx="3253130" cy="1170432"/>
-          </a:xfrm>
-          <a:prstGeom prst="rect">
-            <a:avLst/>
-          </a:prstGeom>
-          <a:noFill/>
-        </p:spPr>
-        <p:txBody>
-          <a:bodyPr wrap="square" anchor="t" lIns="0" rIns="0" tIns="0" bIns="0">
-            <a:spAutoFit/>
-          </a:bodyPr>
-          <a:lstStyle/>
-          <a:p>
-            <a:pPr algn="l">
-              <a:lnSpc>
-                <a:spcPct val="122000"/>
-              </a:lnSpc>
-            </a:pPr>
-            <a:r>
-              <a:rPr sz="1300" b="0" lang="ja-JP">
-                <a:solidFill>
-                  <a:srgbClr val="202729"/>
-                </a:solidFill>
-                <a:latin typeface="Yu Gothic"/>
-                <a:ea typeface="Yu Gothic"/>
-                <a:cs typeface="Yu Gothic"/>
-              </a:rPr>
-              <a:t>全資料を一律化するのではなく、</a:t>
-            </a:r>
-          </a:p>
-          <a:p>
-            <a:pPr algn="l">
-              <a:lnSpc>
-                <a:spcPct val="122000"/>
-              </a:lnSpc>
-            </a:pPr>
-            <a:r>
-              <a:rPr sz="1300" b="0" lang="ja-JP">
-                <a:solidFill>
-                  <a:srgbClr val="202729"/>
-                </a:solidFill>
-                <a:latin typeface="Yu Gothic"/>
-                <a:ea typeface="Yu Gothic"/>
-                <a:cs typeface="Yu Gothic"/>
-              </a:rPr>
-              <a:t>頻出する業務パターンから標準化する</a:t>
-            </a:r>
-          </a:p>
-          <a:p>
-            <a:pPr algn="l">
-              <a:lnSpc>
-                <a:spcPct val="122000"/>
-              </a:lnSpc>
-            </a:pPr>
-            <a:r>
-              <a:rPr sz="1300" b="0" lang="ja-JP">
-                <a:solidFill>
-                  <a:srgbClr val="202729"/>
-                </a:solidFill>
-                <a:latin typeface="Yu Gothic"/>
-                <a:ea typeface="Yu Gothic"/>
-                <a:cs typeface="Yu Gothic"/>
-              </a:rPr>
-              <a:t>方が導入負荷を抑えられる。</a:t>
-            </a:r>
-          </a:p>
-        </p:txBody>
-      </p:sp>
-      <p:cxnSp>
-        <p:nvCxnSpPr>
-          <p:cNvPr id="17" name="Connector 16"/>
-          <p:cNvCxnSpPr/>
-          <p:nvPr/>
-        </p:nvCxnSpPr>
-        <p:spPr>
-          <a:xfrm>
-            <a:off x="7960156" y="2899044"/>
-            <a:ext cx="0" cy="1920240"/>
-          </a:xfrm>
-          <a:prstGeom prst="line">
-            <a:avLst/>
-          </a:prstGeom>
-          <a:ln w="8255">
-            <a:solidFill>
-              <a:srgbClr val="D1CFC8"/>
-            </a:solidFill>
-          </a:ln>
-          <a:effectLst/>
-        </p:spPr>
-        <p:style>
-          <a:lnRef idx="2">
-            <a:schemeClr val="accent1"/>
-          </a:lnRef>
-          <a:fillRef idx="0">
-            <a:schemeClr val="accent1"/>
-          </a:fillRef>
-          <a:effectRef idx="1">
-            <a:schemeClr val="accent1"/>
-          </a:effectRef>
-          <a:fontRef idx="minor">
-            <a:schemeClr val="tx1"/>
-          </a:fontRef>
-        </p:style>
-      </p:cxnSp>
-      <p:sp>
-        <p:nvSpPr>
-          <p:cNvPr id="18" name="Oval 17"/>
-          <p:cNvSpPr/>
-          <p:nvPr/>
-        </p:nvSpPr>
-        <p:spPr>
-          <a:xfrm>
-            <a:off x="8179612" y="2917332"/>
-            <a:ext cx="457200" cy="457200"/>
-          </a:xfrm>
-          <a:prstGeom prst="ellipse">
-            <a:avLst/>
-          </a:prstGeom>
-          <a:solidFill>
-            <a:srgbClr val="DFEBE8"/>
-          </a:solidFill>
-          <a:ln>
-            <a:noFill/>
-          </a:ln>
-          <a:effectLst/>
-        </p:spPr>
-        <p:txBody>
-          <a:bodyPr rtlCol="0" anchor="ctr"/>
-          <a:lstStyle/>
-          <a:p>
-            <a:pPr algn="ctr"/>
-          </a:p>
-        </p:txBody>
-      </p:sp>
-      <p:pic>
-        <p:nvPicPr>
-          <p:cNvPr id="19" name="Picture 18" descr="send.png"/>
-          <p:cNvPicPr>
-            <a:picLocks noChangeAspect="1"/>
-          </p:cNvPicPr>
-          <p:nvPr/>
-        </p:nvPicPr>
-        <p:blipFill>
-          <a:blip r:embed="rId4"/>
-          <a:stretch>
-            <a:fillRect/>
-          </a:stretch>
-        </p:blipFill>
-        <p:spPr>
-          <a:xfrm>
-            <a:off x="8289340" y="3027060"/>
-            <a:ext cx="237744" cy="237744"/>
-          </a:xfrm>
-          <a:prstGeom prst="rect">
-            <a:avLst/>
-          </a:prstGeom>
-        </p:spPr>
-      </p:pic>
-      <p:sp>
-        <p:nvSpPr>
-          <p:cNvPr id="20" name="TextBox 19"/>
-          <p:cNvSpPr txBox="1"/>
-          <p:nvPr/>
-        </p:nvSpPr>
-        <p:spPr>
-          <a:xfrm>
-            <a:off x="8801404" y="2953908"/>
-            <a:ext cx="2667914" cy="292608"/>
-          </a:xfrm>
-          <a:prstGeom prst="rect">
-            <a:avLst/>
-          </a:prstGeom>
-          <a:noFill/>
-        </p:spPr>
-        <p:txBody>
-          <a:bodyPr wrap="square" anchor="t" lIns="0" rIns="0" tIns="0" bIns="0">
-            <a:spAutoFit/>
-          </a:bodyPr>
-          <a:lstStyle/>
-          <a:p>
-            <a:pPr algn="l">
-              <a:lnSpc>
-                <a:spcPct val="115000"/>
-              </a:lnSpc>
-            </a:pPr>
-            <a:r>
-              <a:rPr sz="1650" b="1" lang="ja-JP">
-                <a:solidFill>
-                  <a:srgbClr val="182C43"/>
-                </a:solidFill>
-                <a:latin typeface="Yu Gothic"/>
-                <a:ea typeface="Yu Gothic"/>
-                <a:cs typeface="Yu Gothic"/>
-              </a:rPr>
-              <a:t>提案</a:t>
-            </a:r>
-          </a:p>
-        </p:txBody>
-      </p:sp>
-      <p:cxnSp>
-        <p:nvCxnSpPr>
-          <p:cNvPr id="21" name="Connector 20"/>
-          <p:cNvCxnSpPr/>
-          <p:nvPr/>
-        </p:nvCxnSpPr>
-        <p:spPr>
-          <a:xfrm>
-            <a:off x="8179612" y="3502548"/>
-            <a:ext cx="3289707" cy="0"/>
-          </a:xfrm>
-          <a:prstGeom prst="line">
-            <a:avLst/>
-          </a:prstGeom>
-          <a:ln w="10160">
-            <a:solidFill>
-              <a:srgbClr val="0D7870"/>
-            </a:solidFill>
-          </a:ln>
-          <a:effectLst/>
-        </p:spPr>
-        <p:style>
-          <a:lnRef idx="2">
-            <a:schemeClr val="accent1"/>
-          </a:lnRef>
-          <a:fillRef idx="0">
-            <a:schemeClr val="accent1"/>
-          </a:fillRef>
-          <a:effectRef idx="1">
-            <a:schemeClr val="accent1"/>
-          </a:effectRef>
-          <a:fontRef idx="minor">
-            <a:schemeClr val="tx1"/>
-          </a:fontRef>
-        </p:style>
-      </p:cxnSp>
-      <p:sp>
-        <p:nvSpPr>
-          <p:cNvPr id="22" name="TextBox 21"/>
-          <p:cNvSpPr txBox="1"/>
-          <p:nvPr/>
-        </p:nvSpPr>
-        <p:spPr>
-          <a:xfrm>
-            <a:off x="8197900" y="3648852"/>
-            <a:ext cx="3253130" cy="1170432"/>
-          </a:xfrm>
-          <a:prstGeom prst="rect">
-            <a:avLst/>
-          </a:prstGeom>
-          <a:noFill/>
-        </p:spPr>
-        <p:txBody>
-          <a:bodyPr wrap="square" anchor="t" lIns="0" rIns="0" tIns="0" bIns="0">
-            <a:spAutoFit/>
-          </a:bodyPr>
-          <a:lstStyle/>
-          <a:p>
-            <a:pPr algn="l">
-              <a:lnSpc>
-                <a:spcPct val="122000"/>
-              </a:lnSpc>
-            </a:pPr>
-            <a:r>
-              <a:rPr sz="1300" b="0" lang="ja-JP">
-                <a:solidFill>
-                  <a:srgbClr val="202729"/>
-                </a:solidFill>
-                <a:latin typeface="Yu Gothic"/>
-                <a:ea typeface="Yu Gothic"/>
-                <a:cs typeface="Yu Gothic"/>
-              </a:rPr>
-              <a:t>対象部門で標準レイアウトを試行し、</a:t>
-            </a:r>
-          </a:p>
-          <a:p>
-            <a:pPr algn="l">
-              <a:lnSpc>
-                <a:spcPct val="122000"/>
-              </a:lnSpc>
-            </a:pPr>
-            <a:r>
-              <a:rPr sz="1300" b="0" lang="ja-JP">
-                <a:solidFill>
-                  <a:srgbClr val="202729"/>
-                </a:solidFill>
-                <a:latin typeface="Yu Gothic"/>
-                <a:ea typeface="Yu Gothic"/>
-                <a:cs typeface="Yu Gothic"/>
-              </a:rPr>
-              <a:t>品質・作成時間・運用負荷を測定して</a:t>
-            </a:r>
-          </a:p>
-          <a:p>
-            <a:pPr algn="l">
-              <a:lnSpc>
-                <a:spcPct val="122000"/>
-              </a:lnSpc>
-            </a:pPr>
-            <a:r>
-              <a:rPr sz="1300" b="0" lang="ja-JP">
-                <a:solidFill>
-                  <a:srgbClr val="202729"/>
-                </a:solidFill>
-                <a:latin typeface="Yu Gothic"/>
-                <a:ea typeface="Yu Gothic"/>
-                <a:cs typeface="Yu Gothic"/>
-              </a:rPr>
-              <a:t>展開可否を判断する。</a:t>
-            </a:r>
-          </a:p>
-        </p:txBody>
-      </p:sp>
-      <p:sp>
-        <p:nvSpPr>
-          <p:cNvPr id="23" name="Rectangle 22"/>
+              <a:t>対象部門で標準レイアウトを試行し、品質・作成時間・運用負荷を測定して展開可否を判断する。</a:t>
+            </a:r>
+          </a:p>
+        </p:txBody>
+      </p:sp>
+      <p:sp>
+        <p:nvSpPr>
+          <p:cNvPr id="15" name="Rectangle 14"/>
           <p:cNvSpPr/>
           <p:nvPr/>
         </p:nvSpPr>
@@ -45729,7 +45402,7 @@
       </p:sp>
       <p:sp>
         <p:nvSpPr>
-          <p:cNvPr id="24" name="TextBox 23"/>
+          <p:cNvPr id="16" name="TextBox 15"/>
           <p:cNvSpPr txBox="1"/>
           <p:nvPr/>
         </p:nvSpPr>
@@ -45770,7 +45443,7 @@
       </p:sp>
       <p:sp>
         <p:nvSpPr>
-          <p:cNvPr id="25" name="TextBox 24"/>
+          <p:cNvPr id="17" name="TextBox 16"/>
           <p:cNvSpPr txBox="1"/>
           <p:nvPr/>
         </p:nvSpPr>

--- a/examples/gallery/pattern_gallery.pptx
+++ b/examples/gallery/pattern_gallery.pptx
@@ -42,6 +42,7 @@
     <p:sldId id="290" r:id="rId41"/>
     <p:sldId id="291" r:id="rId42"/>
     <p:sldId id="292" r:id="rId43"/>
+    <p:sldId id="293" r:id="rId44"/>
   </p:sldIdLst>
   <p:sldSz cx="12191695" cy="6858000" type="screen4x3"/>
   <p:notesSz cx="6858000" cy="9144000"/>
@@ -5347,7 +5348,7 @@
                 <a:ea typeface="Yu Gothic"/>
                 <a:cs typeface="Yu Gothic"/>
               </a:rPr>
-              <a:t> / 37</a:t>
+              <a:t> / 38</a:t>
             </a:r>
           </a:p>
         </p:txBody>
@@ -8028,7 +8029,7 @@
                 <a:ea typeface="Yu Gothic"/>
                 <a:cs typeface="Yu Gothic"/>
               </a:rPr>
-              <a:t> / 37</a:t>
+              <a:t> / 38</a:t>
             </a:r>
           </a:p>
         </p:txBody>
@@ -9574,7 +9575,7 @@
                 <a:ea typeface="Yu Gothic"/>
                 <a:cs typeface="Yu Gothic"/>
               </a:rPr>
-              <a:t> / 37</a:t>
+              <a:t> / 38</a:t>
             </a:r>
           </a:p>
         </p:txBody>
@@ -9887,7 +9888,7 @@
                 <a:ea typeface="Yu Gothic"/>
                 <a:cs typeface="Yu Gothic"/>
               </a:rPr>
-              <a:t> / 37</a:t>
+              <a:t> / 38</a:t>
             </a:r>
           </a:p>
         </p:txBody>
@@ -10402,7 +10403,7 @@
                 <a:ea typeface="Yu Gothic"/>
                 <a:cs typeface="Yu Gothic"/>
               </a:rPr>
-              <a:t> / 37</a:t>
+              <a:t> / 38</a:t>
             </a:r>
           </a:p>
         </p:txBody>
@@ -11972,7 +11973,7 @@
                 <a:ea typeface="Yu Gothic"/>
                 <a:cs typeface="Yu Gothic"/>
               </a:rPr>
-              <a:t> / 37</a:t>
+              <a:t> / 38</a:t>
             </a:r>
           </a:p>
         </p:txBody>
@@ -13559,7 +13560,7 @@
                 <a:ea typeface="Yu Gothic"/>
                 <a:cs typeface="Yu Gothic"/>
               </a:rPr>
-              <a:t> / 37</a:t>
+              <a:t> / 38</a:t>
             </a:r>
           </a:p>
         </p:txBody>
@@ -16636,7 +16637,7 @@
                 <a:ea typeface="Yu Gothic"/>
                 <a:cs typeface="Yu Gothic"/>
               </a:rPr>
-              <a:t> / 37</a:t>
+              <a:t> / 38</a:t>
             </a:r>
           </a:p>
         </p:txBody>
@@ -20315,7 +20316,7 @@
                 <a:ea typeface="Yu Gothic"/>
                 <a:cs typeface="Yu Gothic"/>
               </a:rPr>
-              <a:t> / 37</a:t>
+              <a:t> / 38</a:t>
             </a:r>
           </a:p>
         </p:txBody>
@@ -21569,7 +21570,7 @@
                 <a:ea typeface="Yu Gothic"/>
                 <a:cs typeface="Yu Gothic"/>
               </a:rPr>
-              <a:t> / 37</a:t>
+              <a:t> / 38</a:t>
             </a:r>
           </a:p>
         </p:txBody>
@@ -21891,7 +21892,7 @@
                 <a:ea typeface="Yu Gothic"/>
                 <a:cs typeface="Yu Gothic"/>
               </a:rPr>
-              <a:t> / 37</a:t>
+              <a:t> / 38</a:t>
             </a:r>
           </a:p>
         </p:txBody>
@@ -23433,7 +23434,7 @@
                 <a:ea typeface="Yu Gothic"/>
                 <a:cs typeface="Yu Gothic"/>
               </a:rPr>
-              <a:t> / 37</a:t>
+              <a:t> / 38</a:t>
             </a:r>
           </a:p>
         </p:txBody>
@@ -25234,7 +25235,7 @@
                 <a:ea typeface="Yu Gothic"/>
                 <a:cs typeface="Yu Gothic"/>
               </a:rPr>
-              <a:t> / 37</a:t>
+              <a:t> / 38</a:t>
             </a:r>
           </a:p>
         </p:txBody>
@@ -27555,7 +27556,7 @@
                 <a:ea typeface="Yu Gothic"/>
                 <a:cs typeface="Yu Gothic"/>
               </a:rPr>
-              <a:t> / 37</a:t>
+              <a:t> / 38</a:t>
             </a:r>
           </a:p>
         </p:txBody>
@@ -29610,7 +29611,7 @@
                 <a:ea typeface="Yu Gothic"/>
                 <a:cs typeface="Yu Gothic"/>
               </a:rPr>
-              <a:t> / 37</a:t>
+              <a:t> / 38</a:t>
             </a:r>
           </a:p>
         </p:txBody>
@@ -31282,7 +31283,7 @@
                 <a:ea typeface="Yu Gothic"/>
                 <a:cs typeface="Yu Gothic"/>
               </a:rPr>
-              <a:t> / 37</a:t>
+              <a:t> / 38</a:t>
             </a:r>
           </a:p>
         </p:txBody>
@@ -33085,7 +33086,7 @@
                 <a:ea typeface="Yu Gothic"/>
                 <a:cs typeface="Yu Gothic"/>
               </a:rPr>
-              <a:t> / 37</a:t>
+              <a:t> / 38</a:t>
             </a:r>
           </a:p>
         </p:txBody>
@@ -34048,7 +34049,7 @@
                 <a:ea typeface="Yu Gothic"/>
                 <a:cs typeface="Yu Gothic"/>
               </a:rPr>
-              <a:t> / 37</a:t>
+              <a:t> / 38</a:t>
             </a:r>
           </a:p>
         </p:txBody>
@@ -36167,7 +36168,7 @@
                 <a:ea typeface="Yu Gothic"/>
                 <a:cs typeface="Yu Gothic"/>
               </a:rPr>
-              <a:t> / 37</a:t>
+              <a:t> / 38</a:t>
             </a:r>
           </a:p>
         </p:txBody>
@@ -38682,7 +38683,7 @@
                 <a:ea typeface="Yu Gothic"/>
                 <a:cs typeface="Yu Gothic"/>
               </a:rPr>
-              <a:t> / 37</a:t>
+              <a:t> / 38</a:t>
             </a:r>
           </a:p>
         </p:txBody>
@@ -40295,7 +40296,7 @@
                 <a:ea typeface="Yu Gothic"/>
                 <a:cs typeface="Yu Gothic"/>
               </a:rPr>
-              <a:t> / 37</a:t>
+              <a:t> / 38</a:t>
             </a:r>
           </a:p>
         </p:txBody>
@@ -40954,7 +40955,7 @@
                 <a:ea typeface="Yu Gothic"/>
                 <a:cs typeface="Yu Gothic"/>
               </a:rPr>
-              <a:t> / 37</a:t>
+              <a:t> / 38</a:t>
             </a:r>
           </a:p>
         </p:txBody>
@@ -42155,7 +42156,7 @@
                 <a:ea typeface="Yu Gothic"/>
                 <a:cs typeface="Yu Gothic"/>
               </a:rPr>
-              <a:t> / 37</a:t>
+              <a:t> / 38</a:t>
             </a:r>
           </a:p>
         </p:txBody>
@@ -43271,7 +43272,7 @@
                 <a:ea typeface="Yu Gothic"/>
                 <a:cs typeface="Yu Gothic"/>
               </a:rPr>
-              <a:t> / 37</a:t>
+              <a:t> / 38</a:t>
             </a:r>
           </a:p>
         </p:txBody>
@@ -44797,7 +44798,7 @@
                 <a:ea typeface="Yu Gothic"/>
                 <a:cs typeface="Yu Gothic"/>
               </a:rPr>
-              <a:t> / 37</a:t>
+              <a:t> / 38</a:t>
             </a:r>
           </a:p>
         </p:txBody>
@@ -45488,7 +45489,7 @@
                 <a:ea typeface="Yu Gothic"/>
                 <a:cs typeface="Yu Gothic"/>
               </a:rPr>
-              <a:t> / 37</a:t>
+              <a:t> / 38</a:t>
             </a:r>
           </a:p>
         </p:txBody>
@@ -47770,7 +47771,7 @@
                 <a:ea typeface="Yu Gothic"/>
                 <a:cs typeface="Yu Gothic"/>
               </a:rPr>
-              <a:t> / 37</a:t>
+              <a:t> / 38</a:t>
             </a:r>
           </a:p>
         </p:txBody>
@@ -50651,7 +50652,7 @@
                 <a:ea typeface="Yu Gothic"/>
                 <a:cs typeface="Yu Gothic"/>
               </a:rPr>
-              <a:t> / 37</a:t>
+              <a:t> / 38</a:t>
             </a:r>
           </a:p>
         </p:txBody>
@@ -53671,7 +53672,7 @@
                 <a:ea typeface="Yu Gothic"/>
                 <a:cs typeface="Yu Gothic"/>
               </a:rPr>
-              <a:t> / 37</a:t>
+              <a:t> / 38</a:t>
             </a:r>
           </a:p>
         </p:txBody>
@@ -55549,7 +55550,1044 @@
                 <a:ea typeface="Yu Gothic"/>
                 <a:cs typeface="Yu Gothic"/>
               </a:rPr>
-              <a:t> / 37</a:t>
+              <a:t> / 38</a:t>
+            </a:r>
+          </a:p>
+        </p:txBody>
+      </p:sp>
+    </p:spTree>
+  </p:cSld>
+  <p:clrMapOvr>
+    <a:masterClrMapping/>
+  </p:clrMapOvr>
+</p:sld>
+</file>
+
+<file path=ppt/slides/slide38.xml><?xml version="1.0" encoding="utf-8"?>
+<p:sld xmlns:a="http://schemas.openxmlformats.org/drawingml/2006/main" xmlns:p="http://schemas.openxmlformats.org/presentationml/2006/main" xmlns:r="http://schemas.openxmlformats.org/officeDocument/2006/relationships">
+  <p:cSld>
+    <p:spTree>
+      <p:nvGrpSpPr>
+        <p:cNvPr id="1" name=""/>
+        <p:cNvGrpSpPr/>
+        <p:nvPr/>
+      </p:nvGrpSpPr>
+      <p:grpSpPr/>
+      <p:sp>
+        <p:nvSpPr>
+          <p:cNvPr id="2" name="Rectangle 1"/>
+          <p:cNvSpPr/>
+          <p:nvPr/>
+        </p:nvSpPr>
+        <p:spPr>
+          <a:xfrm>
+            <a:off x="0" y="0"/>
+            <a:ext cx="12191695" cy="6858000"/>
+          </a:xfrm>
+          <a:prstGeom prst="rect">
+            <a:avLst/>
+          </a:prstGeom>
+          <a:solidFill>
+            <a:srgbClr val="F7F5EF"/>
+          </a:solidFill>
+          <a:ln>
+            <a:noFill/>
+          </a:ln>
+          <a:effectLst/>
+        </p:spPr>
+        <p:style>
+          <a:lnRef idx="1">
+            <a:schemeClr val="accent1"/>
+          </a:lnRef>
+          <a:fillRef idx="3">
+            <a:schemeClr val="accent1"/>
+          </a:fillRef>
+          <a:effectRef idx="2">
+            <a:schemeClr val="accent1"/>
+          </a:effectRef>
+          <a:fontRef idx="minor">
+            <a:schemeClr val="lt1"/>
+          </a:fontRef>
+        </p:style>
+        <p:txBody>
+          <a:bodyPr rtlCol="0" anchor="ctr"/>
+          <a:lstStyle/>
+          <a:p>
+            <a:pPr algn="ctr"/>
+          </a:p>
+        </p:txBody>
+      </p:sp>
+      <p:sp>
+        <p:nvSpPr>
+          <p:cNvPr id="3" name="TextBox 2"/>
+          <p:cNvSpPr txBox="1"/>
+          <p:nvPr/>
+        </p:nvSpPr>
+        <p:spPr>
+          <a:xfrm>
+            <a:off x="658368" y="246888"/>
+            <a:ext cx="4389120" cy="292608"/>
+          </a:xfrm>
+          <a:prstGeom prst="rect">
+            <a:avLst/>
+          </a:prstGeom>
+          <a:noFill/>
+        </p:spPr>
+        <p:txBody>
+          <a:bodyPr wrap="square" anchor="t" lIns="0" rIns="0" tIns="0" bIns="0">
+            <a:spAutoFit/>
+          </a:bodyPr>
+          <a:lstStyle/>
+          <a:p>
+            <a:pPr algn="l">
+              <a:lnSpc>
+                <a:spcPct val="130000"/>
+              </a:lnSpc>
+            </a:pPr>
+            <a:r>
+              <a:rPr sz="1150" b="1" lang="ja-JP">
+                <a:solidFill>
+                  <a:srgbClr val="0D7870"/>
+                </a:solidFill>
+                <a:latin typeface="Yu Gothic"/>
+                <a:ea typeface="Yu Gothic"/>
+                <a:cs typeface="Yu Gothic"/>
+              </a:rPr>
+              <a:t>参考資料</a:t>
+            </a:r>
+          </a:p>
+        </p:txBody>
+      </p:sp>
+      <p:sp>
+        <p:nvSpPr>
+          <p:cNvPr id="4" name="TextBox 3"/>
+          <p:cNvSpPr txBox="1"/>
+          <p:nvPr/>
+        </p:nvSpPr>
+        <p:spPr>
+          <a:xfrm>
+            <a:off x="658368" y="612648"/>
+            <a:ext cx="10881360" cy="786384"/>
+          </a:xfrm>
+          <a:prstGeom prst="rect">
+            <a:avLst/>
+          </a:prstGeom>
+          <a:noFill/>
+        </p:spPr>
+        <p:txBody>
+          <a:bodyPr wrap="square" anchor="t" lIns="0" rIns="0" tIns="0" bIns="0">
+            <a:spAutoFit/>
+          </a:bodyPr>
+          <a:lstStyle/>
+          <a:p>
+            <a:pPr algn="l">
+              <a:lnSpc>
+                <a:spcPct val="112000"/>
+              </a:lnSpc>
+            </a:pPr>
+            <a:r>
+              <a:rPr sz="2700" b="1" lang="ja-JP">
+                <a:solidFill>
+                  <a:srgbClr val="182C43"/>
+                </a:solidFill>
+                <a:latin typeface="Yu Gothic"/>
+                <a:ea typeface="Yu Gothic"/>
+                <a:cs typeface="Yu Gothic"/>
+              </a:rPr>
+              <a:t>確認に使用した情報源</a:t>
+            </a:r>
+          </a:p>
+        </p:txBody>
+      </p:sp>
+      <p:sp>
+        <p:nvSpPr>
+          <p:cNvPr id="5" name="TextBox 4"/>
+          <p:cNvSpPr txBox="1"/>
+          <p:nvPr/>
+        </p:nvSpPr>
+        <p:spPr>
+          <a:xfrm>
+            <a:off x="658368" y="1444752"/>
+            <a:ext cx="10881360" cy="237236"/>
+          </a:xfrm>
+          <a:prstGeom prst="rect">
+            <a:avLst/>
+          </a:prstGeom>
+          <a:noFill/>
+        </p:spPr>
+        <p:txBody>
+          <a:bodyPr wrap="square" anchor="t" lIns="0" rIns="0" tIns="0" bIns="0">
+            <a:spAutoFit/>
+          </a:bodyPr>
+          <a:lstStyle/>
+          <a:p>
+            <a:pPr algn="l">
+              <a:lnSpc>
+                <a:spcPct val="118000"/>
+              </a:lnSpc>
+            </a:pPr>
+            <a:r>
+              <a:rPr sz="1400" b="0" lang="ja-JP">
+                <a:solidFill>
+                  <a:srgbClr val="666E70"/>
+                </a:solidFill>
+                <a:latin typeface="Yu Gothic"/>
+                <a:ea typeface="Yu Gothic"/>
+                <a:cs typeface="Yu Gothic"/>
+              </a:rPr>
+              <a:t>参照先をタイトルと実URLで示し、原典へ移動できるようにする。</a:t>
+            </a:r>
+          </a:p>
+        </p:txBody>
+      </p:sp>
+      <p:sp>
+        <p:nvSpPr>
+          <p:cNvPr id="6" name="references:row[0]"/>
+          <p:cNvSpPr/>
+          <p:nvPr/>
+        </p:nvSpPr>
+        <p:spPr>
+          <a:xfrm>
+            <a:off x="502920" y="1947164"/>
+            <a:ext cx="11185855" cy="694944"/>
+          </a:xfrm>
+          <a:prstGeom prst="rect">
+            <a:avLst/>
+          </a:prstGeom>
+          <a:solidFill>
+            <a:srgbClr val="DFEBE8"/>
+          </a:solidFill>
+          <a:ln>
+            <a:noFill/>
+          </a:ln>
+          <a:effectLst/>
+        </p:spPr>
+        <p:style>
+          <a:lnRef idx="1">
+            <a:schemeClr val="accent1"/>
+          </a:lnRef>
+          <a:fillRef idx="3">
+            <a:schemeClr val="accent1"/>
+          </a:fillRef>
+          <a:effectRef idx="2">
+            <a:schemeClr val="accent1"/>
+          </a:effectRef>
+          <a:fontRef idx="minor">
+            <a:schemeClr val="lt1"/>
+          </a:fontRef>
+        </p:style>
+        <p:txBody>
+          <a:bodyPr rtlCol="0" anchor="ctr"/>
+          <a:lstStyle/>
+          <a:p>
+            <a:pPr algn="ctr"/>
+          </a:p>
+        </p:txBody>
+      </p:sp>
+      <p:sp>
+        <p:nvSpPr>
+          <p:cNvPr id="7" name="TextBox 6"/>
+          <p:cNvSpPr txBox="1"/>
+          <p:nvPr/>
+        </p:nvSpPr>
+        <p:spPr>
+          <a:xfrm>
+            <a:off x="594360" y="1947164"/>
+            <a:ext cx="548640" cy="694944"/>
+          </a:xfrm>
+          <a:prstGeom prst="rect">
+            <a:avLst/>
+          </a:prstGeom>
+          <a:noFill/>
+        </p:spPr>
+        <p:txBody>
+          <a:bodyPr wrap="square" anchor="ctr" lIns="0" rIns="0" tIns="0" bIns="0">
+            <a:spAutoFit/>
+          </a:bodyPr>
+          <a:lstStyle/>
+          <a:p>
+            <a:pPr algn="l">
+              <a:lnSpc>
+                <a:spcPct val="130000"/>
+              </a:lnSpc>
+            </a:pPr>
+            <a:r>
+              <a:rPr sz="1100" b="1" lang="ja-JP">
+                <a:solidFill>
+                  <a:srgbClr val="182C43"/>
+                </a:solidFill>
+                <a:latin typeface="Yu Gothic"/>
+                <a:ea typeface="Yu Gothic"/>
+                <a:cs typeface="Yu Gothic"/>
+              </a:rPr>
+              <a:t>[1]</a:t>
+            </a:r>
+          </a:p>
+        </p:txBody>
+      </p:sp>
+      <p:sp>
+        <p:nvSpPr>
+          <p:cNvPr id="8" name="TextBox 7"/>
+          <p:cNvSpPr txBox="1"/>
+          <p:nvPr/>
+        </p:nvSpPr>
+        <p:spPr>
+          <a:xfrm>
+            <a:off x="1325880" y="2038604"/>
+            <a:ext cx="6720840" cy="291876"/>
+          </a:xfrm>
+          <a:prstGeom prst="rect">
+            <a:avLst/>
+          </a:prstGeom>
+          <a:noFill/>
+        </p:spPr>
+        <p:txBody>
+          <a:bodyPr wrap="square" anchor="t" lIns="0" rIns="0" tIns="0" bIns="0">
+            <a:spAutoFit/>
+          </a:bodyPr>
+          <a:lstStyle/>
+          <a:p>
+            <a:pPr algn="l">
+              <a:lnSpc>
+                <a:spcPct val="108000"/>
+              </a:lnSpc>
+            </a:pPr>
+            <a:r>
+              <a:rPr sz="1300" b="1" lang="ja-JP">
+                <a:solidFill>
+                  <a:srgbClr val="182C43"/>
+                </a:solidFill>
+                <a:latin typeface="Yu Gothic"/>
+                <a:ea typeface="Yu Gothic"/>
+                <a:cs typeface="Yu Gothic"/>
+              </a:rPr>
+              <a:t>製品ドキュメント</a:t>
+            </a:r>
+          </a:p>
+        </p:txBody>
+      </p:sp>
+      <p:sp>
+        <p:nvSpPr>
+          <p:cNvPr id="9" name="references:url[0]"/>
+          <p:cNvSpPr txBox="1"/>
+          <p:nvPr/>
+        </p:nvSpPr>
+        <p:spPr>
+          <a:xfrm>
+            <a:off x="1325880" y="2394488"/>
+            <a:ext cx="6720840" cy="174467"/>
+          </a:xfrm>
+          <a:prstGeom prst="rect">
+            <a:avLst/>
+          </a:prstGeom>
+          <a:noFill/>
+        </p:spPr>
+        <p:txBody>
+          <a:bodyPr wrap="square" anchor="t" lIns="0" rIns="0" tIns="0" bIns="0">
+            <a:spAutoFit/>
+          </a:bodyPr>
+          <a:lstStyle/>
+          <a:p>
+            <a:pPr algn="l">
+              <a:lnSpc>
+                <a:spcPct val="103000"/>
+              </a:lnSpc>
+            </a:pPr>
+            <a:r>
+              <a:rPr sz="900" b="0" lang="ja-JP" u="sng">
+                <a:solidFill>
+                  <a:srgbClr val="0D7870"/>
+                </a:solidFill>
+                <a:latin typeface="Yu Gothic"/>
+                <a:ea typeface="Yu Gothic"/>
+                <a:cs typeface="Yu Gothic"/>
+                <a:hlinkClick r:id="rId2"/>
+              </a:rPr>
+              <a:t>https://example.com/docs/product-overview</a:t>
+            </a:r>
+          </a:p>
+        </p:txBody>
+      </p:sp>
+      <p:sp>
+        <p:nvSpPr>
+          <p:cNvPr id="10" name="TextBox 9"/>
+          <p:cNvSpPr txBox="1"/>
+          <p:nvPr/>
+        </p:nvSpPr>
+        <p:spPr>
+          <a:xfrm>
+            <a:off x="8302751" y="2029460"/>
+            <a:ext cx="3386023" cy="530352"/>
+          </a:xfrm>
+          <a:prstGeom prst="rect">
+            <a:avLst/>
+          </a:prstGeom>
+          <a:noFill/>
+        </p:spPr>
+        <p:txBody>
+          <a:bodyPr wrap="square" anchor="ctr" lIns="0" rIns="0" tIns="0" bIns="0">
+            <a:spAutoFit/>
+          </a:bodyPr>
+          <a:lstStyle/>
+          <a:p>
+            <a:pPr algn="l">
+              <a:lnSpc>
+                <a:spcPct val="108000"/>
+              </a:lnSpc>
+            </a:pPr>
+            <a:r>
+              <a:rPr sz="1100" b="0" lang="ja-JP">
+                <a:solidFill>
+                  <a:srgbClr val="666E70"/>
+                </a:solidFill>
+                <a:latin typeface="Yu Gothic"/>
+                <a:ea typeface="Yu Gothic"/>
+                <a:cs typeface="Yu Gothic"/>
+              </a:rPr>
+              <a:t>概要・仕様</a:t>
+            </a:r>
+          </a:p>
+        </p:txBody>
+      </p:sp>
+      <p:sp>
+        <p:nvSpPr>
+          <p:cNvPr id="11" name="Rectangle 10"/>
+          <p:cNvSpPr/>
+          <p:nvPr/>
+        </p:nvSpPr>
+        <p:spPr>
+          <a:xfrm>
+            <a:off x="502920" y="2687828"/>
+            <a:ext cx="11185855" cy="7315"/>
+          </a:xfrm>
+          <a:prstGeom prst="rect">
+            <a:avLst/>
+          </a:prstGeom>
+          <a:solidFill>
+            <a:srgbClr val="D1CFC8"/>
+          </a:solidFill>
+          <a:ln>
+            <a:noFill/>
+          </a:ln>
+          <a:effectLst/>
+        </p:spPr>
+        <p:style>
+          <a:lnRef idx="1">
+            <a:schemeClr val="accent1"/>
+          </a:lnRef>
+          <a:fillRef idx="3">
+            <a:schemeClr val="accent1"/>
+          </a:fillRef>
+          <a:effectRef idx="2">
+            <a:schemeClr val="accent1"/>
+          </a:effectRef>
+          <a:fontRef idx="minor">
+            <a:schemeClr val="lt1"/>
+          </a:fontRef>
+        </p:style>
+        <p:txBody>
+          <a:bodyPr rtlCol="0" anchor="ctr"/>
+          <a:lstStyle/>
+          <a:p>
+            <a:pPr algn="ctr"/>
+          </a:p>
+        </p:txBody>
+      </p:sp>
+      <p:sp>
+        <p:nvSpPr>
+          <p:cNvPr id="12" name="references:row[1]"/>
+          <p:cNvSpPr/>
+          <p:nvPr/>
+        </p:nvSpPr>
+        <p:spPr>
+          <a:xfrm>
+            <a:off x="502920" y="2733548"/>
+            <a:ext cx="11185855" cy="694944"/>
+          </a:xfrm>
+          <a:prstGeom prst="rect">
+            <a:avLst/>
+          </a:prstGeom>
+          <a:solidFill>
+            <a:srgbClr val="FAF9F5"/>
+          </a:solidFill>
+          <a:ln>
+            <a:noFill/>
+          </a:ln>
+          <a:effectLst/>
+        </p:spPr>
+        <p:style>
+          <a:lnRef idx="1">
+            <a:schemeClr val="accent1"/>
+          </a:lnRef>
+          <a:fillRef idx="3">
+            <a:schemeClr val="accent1"/>
+          </a:fillRef>
+          <a:effectRef idx="2">
+            <a:schemeClr val="accent1"/>
+          </a:effectRef>
+          <a:fontRef idx="minor">
+            <a:schemeClr val="lt1"/>
+          </a:fontRef>
+        </p:style>
+        <p:txBody>
+          <a:bodyPr rtlCol="0" anchor="ctr"/>
+          <a:lstStyle/>
+          <a:p>
+            <a:pPr algn="ctr"/>
+          </a:p>
+        </p:txBody>
+      </p:sp>
+      <p:sp>
+        <p:nvSpPr>
+          <p:cNvPr id="13" name="TextBox 12"/>
+          <p:cNvSpPr txBox="1"/>
+          <p:nvPr/>
+        </p:nvSpPr>
+        <p:spPr>
+          <a:xfrm>
+            <a:off x="594360" y="2733548"/>
+            <a:ext cx="548640" cy="694944"/>
+          </a:xfrm>
+          <a:prstGeom prst="rect">
+            <a:avLst/>
+          </a:prstGeom>
+          <a:noFill/>
+        </p:spPr>
+        <p:txBody>
+          <a:bodyPr wrap="square" anchor="ctr" lIns="0" rIns="0" tIns="0" bIns="0">
+            <a:spAutoFit/>
+          </a:bodyPr>
+          <a:lstStyle/>
+          <a:p>
+            <a:pPr algn="l">
+              <a:lnSpc>
+                <a:spcPct val="130000"/>
+              </a:lnSpc>
+            </a:pPr>
+            <a:r>
+              <a:rPr sz="1100" b="1" lang="ja-JP">
+                <a:solidFill>
+                  <a:srgbClr val="182C43"/>
+                </a:solidFill>
+                <a:latin typeface="Yu Gothic"/>
+                <a:ea typeface="Yu Gothic"/>
+                <a:cs typeface="Yu Gothic"/>
+              </a:rPr>
+              <a:t>[2]</a:t>
+            </a:r>
+          </a:p>
+        </p:txBody>
+      </p:sp>
+      <p:sp>
+        <p:nvSpPr>
+          <p:cNvPr id="14" name="TextBox 13"/>
+          <p:cNvSpPr txBox="1"/>
+          <p:nvPr/>
+        </p:nvSpPr>
+        <p:spPr>
+          <a:xfrm>
+            <a:off x="1325880" y="2824988"/>
+            <a:ext cx="6720840" cy="291876"/>
+          </a:xfrm>
+          <a:prstGeom prst="rect">
+            <a:avLst/>
+          </a:prstGeom>
+          <a:noFill/>
+        </p:spPr>
+        <p:txBody>
+          <a:bodyPr wrap="square" anchor="t" lIns="0" rIns="0" tIns="0" bIns="0">
+            <a:spAutoFit/>
+          </a:bodyPr>
+          <a:lstStyle/>
+          <a:p>
+            <a:pPr algn="l">
+              <a:lnSpc>
+                <a:spcPct val="108000"/>
+              </a:lnSpc>
+            </a:pPr>
+            <a:r>
+              <a:rPr sz="1300" b="1" lang="ja-JP">
+                <a:solidFill>
+                  <a:srgbClr val="182C43"/>
+                </a:solidFill>
+                <a:latin typeface="Yu Gothic"/>
+                <a:ea typeface="Yu Gothic"/>
+                <a:cs typeface="Yu Gothic"/>
+              </a:rPr>
+              <a:t>運用ガイド</a:t>
+            </a:r>
+          </a:p>
+        </p:txBody>
+      </p:sp>
+      <p:sp>
+        <p:nvSpPr>
+          <p:cNvPr id="15" name="references:url[1]"/>
+          <p:cNvSpPr txBox="1"/>
+          <p:nvPr/>
+        </p:nvSpPr>
+        <p:spPr>
+          <a:xfrm>
+            <a:off x="1325880" y="3180872"/>
+            <a:ext cx="6720840" cy="174467"/>
+          </a:xfrm>
+          <a:prstGeom prst="rect">
+            <a:avLst/>
+          </a:prstGeom>
+          <a:noFill/>
+        </p:spPr>
+        <p:txBody>
+          <a:bodyPr wrap="square" anchor="t" lIns="0" rIns="0" tIns="0" bIns="0">
+            <a:spAutoFit/>
+          </a:bodyPr>
+          <a:lstStyle/>
+          <a:p>
+            <a:pPr algn="l">
+              <a:lnSpc>
+                <a:spcPct val="103000"/>
+              </a:lnSpc>
+            </a:pPr>
+            <a:r>
+              <a:rPr sz="900" b="0" lang="ja-JP" u="sng">
+                <a:solidFill>
+                  <a:srgbClr val="0D7870"/>
+                </a:solidFill>
+                <a:latin typeface="Yu Gothic"/>
+                <a:ea typeface="Yu Gothic"/>
+                <a:cs typeface="Yu Gothic"/>
+                <a:hlinkClick r:id="rId3"/>
+              </a:rPr>
+              <a:t>https://example.com/docs/operations-guide</a:t>
+            </a:r>
+          </a:p>
+        </p:txBody>
+      </p:sp>
+      <p:sp>
+        <p:nvSpPr>
+          <p:cNvPr id="16" name="TextBox 15"/>
+          <p:cNvSpPr txBox="1"/>
+          <p:nvPr/>
+        </p:nvSpPr>
+        <p:spPr>
+          <a:xfrm>
+            <a:off x="8302751" y="2815844"/>
+            <a:ext cx="3386023" cy="530352"/>
+          </a:xfrm>
+          <a:prstGeom prst="rect">
+            <a:avLst/>
+          </a:prstGeom>
+          <a:noFill/>
+        </p:spPr>
+        <p:txBody>
+          <a:bodyPr wrap="square" anchor="ctr" lIns="0" rIns="0" tIns="0" bIns="0">
+            <a:spAutoFit/>
+          </a:bodyPr>
+          <a:lstStyle/>
+          <a:p>
+            <a:pPr algn="l">
+              <a:lnSpc>
+                <a:spcPct val="108000"/>
+              </a:lnSpc>
+            </a:pPr>
+            <a:r>
+              <a:rPr sz="1100" b="0" lang="ja-JP">
+                <a:solidFill>
+                  <a:srgbClr val="666E70"/>
+                </a:solidFill>
+                <a:latin typeface="Yu Gothic"/>
+                <a:ea typeface="Yu Gothic"/>
+                <a:cs typeface="Yu Gothic"/>
+              </a:rPr>
+              <a:t>監視・障害対応</a:t>
+            </a:r>
+          </a:p>
+        </p:txBody>
+      </p:sp>
+      <p:sp>
+        <p:nvSpPr>
+          <p:cNvPr id="17" name="Rectangle 16"/>
+          <p:cNvSpPr/>
+          <p:nvPr/>
+        </p:nvSpPr>
+        <p:spPr>
+          <a:xfrm>
+            <a:off x="502920" y="3474211"/>
+            <a:ext cx="11185855" cy="7315"/>
+          </a:xfrm>
+          <a:prstGeom prst="rect">
+            <a:avLst/>
+          </a:prstGeom>
+          <a:solidFill>
+            <a:srgbClr val="D1CFC8"/>
+          </a:solidFill>
+          <a:ln>
+            <a:noFill/>
+          </a:ln>
+          <a:effectLst/>
+        </p:spPr>
+        <p:style>
+          <a:lnRef idx="1">
+            <a:schemeClr val="accent1"/>
+          </a:lnRef>
+          <a:fillRef idx="3">
+            <a:schemeClr val="accent1"/>
+          </a:fillRef>
+          <a:effectRef idx="2">
+            <a:schemeClr val="accent1"/>
+          </a:effectRef>
+          <a:fontRef idx="minor">
+            <a:schemeClr val="lt1"/>
+          </a:fontRef>
+        </p:style>
+        <p:txBody>
+          <a:bodyPr rtlCol="0" anchor="ctr"/>
+          <a:lstStyle/>
+          <a:p>
+            <a:pPr algn="ctr"/>
+          </a:p>
+        </p:txBody>
+      </p:sp>
+      <p:sp>
+        <p:nvSpPr>
+          <p:cNvPr id="18" name="references:row[2]"/>
+          <p:cNvSpPr/>
+          <p:nvPr/>
+        </p:nvSpPr>
+        <p:spPr>
+          <a:xfrm>
+            <a:off x="502920" y="3519932"/>
+            <a:ext cx="11185855" cy="694944"/>
+          </a:xfrm>
+          <a:prstGeom prst="rect">
+            <a:avLst/>
+          </a:prstGeom>
+          <a:solidFill>
+            <a:srgbClr val="DFEBE8"/>
+          </a:solidFill>
+          <a:ln>
+            <a:noFill/>
+          </a:ln>
+          <a:effectLst/>
+        </p:spPr>
+        <p:style>
+          <a:lnRef idx="1">
+            <a:schemeClr val="accent1"/>
+          </a:lnRef>
+          <a:fillRef idx="3">
+            <a:schemeClr val="accent1"/>
+          </a:fillRef>
+          <a:effectRef idx="2">
+            <a:schemeClr val="accent1"/>
+          </a:effectRef>
+          <a:fontRef idx="minor">
+            <a:schemeClr val="lt1"/>
+          </a:fontRef>
+        </p:style>
+        <p:txBody>
+          <a:bodyPr rtlCol="0" anchor="ctr"/>
+          <a:lstStyle/>
+          <a:p>
+            <a:pPr algn="ctr"/>
+          </a:p>
+        </p:txBody>
+      </p:sp>
+      <p:sp>
+        <p:nvSpPr>
+          <p:cNvPr id="19" name="TextBox 18"/>
+          <p:cNvSpPr txBox="1"/>
+          <p:nvPr/>
+        </p:nvSpPr>
+        <p:spPr>
+          <a:xfrm>
+            <a:off x="594360" y="3519932"/>
+            <a:ext cx="548640" cy="694944"/>
+          </a:xfrm>
+          <a:prstGeom prst="rect">
+            <a:avLst/>
+          </a:prstGeom>
+          <a:noFill/>
+        </p:spPr>
+        <p:txBody>
+          <a:bodyPr wrap="square" anchor="ctr" lIns="0" rIns="0" tIns="0" bIns="0">
+            <a:spAutoFit/>
+          </a:bodyPr>
+          <a:lstStyle/>
+          <a:p>
+            <a:pPr algn="l">
+              <a:lnSpc>
+                <a:spcPct val="130000"/>
+              </a:lnSpc>
+            </a:pPr>
+            <a:r>
+              <a:rPr sz="1100" b="1" lang="ja-JP">
+                <a:solidFill>
+                  <a:srgbClr val="182C43"/>
+                </a:solidFill>
+                <a:latin typeface="Yu Gothic"/>
+                <a:ea typeface="Yu Gothic"/>
+                <a:cs typeface="Yu Gothic"/>
+              </a:rPr>
+              <a:t>[3]</a:t>
+            </a:r>
+          </a:p>
+        </p:txBody>
+      </p:sp>
+      <p:sp>
+        <p:nvSpPr>
+          <p:cNvPr id="20" name="TextBox 19"/>
+          <p:cNvSpPr txBox="1"/>
+          <p:nvPr/>
+        </p:nvSpPr>
+        <p:spPr>
+          <a:xfrm>
+            <a:off x="1325880" y="3611372"/>
+            <a:ext cx="6720840" cy="291876"/>
+          </a:xfrm>
+          <a:prstGeom prst="rect">
+            <a:avLst/>
+          </a:prstGeom>
+          <a:noFill/>
+        </p:spPr>
+        <p:txBody>
+          <a:bodyPr wrap="square" anchor="t" lIns="0" rIns="0" tIns="0" bIns="0">
+            <a:spAutoFit/>
+          </a:bodyPr>
+          <a:lstStyle/>
+          <a:p>
+            <a:pPr algn="l">
+              <a:lnSpc>
+                <a:spcPct val="108000"/>
+              </a:lnSpc>
+            </a:pPr>
+            <a:r>
+              <a:rPr sz="1300" b="1" lang="ja-JP">
+                <a:solidFill>
+                  <a:srgbClr val="182C43"/>
+                </a:solidFill>
+                <a:latin typeface="Yu Gothic"/>
+                <a:ea typeface="Yu Gothic"/>
+                <a:cs typeface="Yu Gothic"/>
+              </a:rPr>
+              <a:t>料金ページ</a:t>
+            </a:r>
+          </a:p>
+        </p:txBody>
+      </p:sp>
+      <p:sp>
+        <p:nvSpPr>
+          <p:cNvPr id="21" name="references:url[2]"/>
+          <p:cNvSpPr txBox="1"/>
+          <p:nvPr/>
+        </p:nvSpPr>
+        <p:spPr>
+          <a:xfrm>
+            <a:off x="1325880" y="3967256"/>
+            <a:ext cx="6720840" cy="174467"/>
+          </a:xfrm>
+          <a:prstGeom prst="rect">
+            <a:avLst/>
+          </a:prstGeom>
+          <a:noFill/>
+        </p:spPr>
+        <p:txBody>
+          <a:bodyPr wrap="square" anchor="t" lIns="0" rIns="0" tIns="0" bIns="0">
+            <a:spAutoFit/>
+          </a:bodyPr>
+          <a:lstStyle/>
+          <a:p>
+            <a:pPr algn="l">
+              <a:lnSpc>
+                <a:spcPct val="103000"/>
+              </a:lnSpc>
+            </a:pPr>
+            <a:r>
+              <a:rPr sz="900" b="0" lang="ja-JP" u="sng">
+                <a:solidFill>
+                  <a:srgbClr val="0D7870"/>
+                </a:solidFill>
+                <a:latin typeface="Yu Gothic"/>
+                <a:ea typeface="Yu Gothic"/>
+                <a:cs typeface="Yu Gothic"/>
+                <a:hlinkClick r:id="rId4"/>
+              </a:rPr>
+              <a:t>https://example.com/pricing</a:t>
+            </a:r>
+          </a:p>
+        </p:txBody>
+      </p:sp>
+      <p:sp>
+        <p:nvSpPr>
+          <p:cNvPr id="22" name="TextBox 21"/>
+          <p:cNvSpPr txBox="1"/>
+          <p:nvPr/>
+        </p:nvSpPr>
+        <p:spPr>
+          <a:xfrm>
+            <a:off x="8302751" y="3602228"/>
+            <a:ext cx="3386023" cy="530352"/>
+          </a:xfrm>
+          <a:prstGeom prst="rect">
+            <a:avLst/>
+          </a:prstGeom>
+          <a:noFill/>
+        </p:spPr>
+        <p:txBody>
+          <a:bodyPr wrap="square" anchor="ctr" lIns="0" rIns="0" tIns="0" bIns="0">
+            <a:spAutoFit/>
+          </a:bodyPr>
+          <a:lstStyle/>
+          <a:p>
+            <a:pPr algn="l">
+              <a:lnSpc>
+                <a:spcPct val="108000"/>
+              </a:lnSpc>
+            </a:pPr>
+            <a:r>
+              <a:rPr sz="1100" b="0" lang="ja-JP">
+                <a:solidFill>
+                  <a:srgbClr val="666E70"/>
+                </a:solidFill>
+                <a:latin typeface="Yu Gothic"/>
+                <a:ea typeface="Yu Gothic"/>
+                <a:cs typeface="Yu Gothic"/>
+              </a:rPr>
+              <a:t>費用</a:t>
+            </a:r>
+          </a:p>
+        </p:txBody>
+      </p:sp>
+      <p:sp>
+        <p:nvSpPr>
+          <p:cNvPr id="23" name="Rectangle 22"/>
+          <p:cNvSpPr/>
+          <p:nvPr/>
+        </p:nvSpPr>
+        <p:spPr>
+          <a:xfrm>
+            <a:off x="658368" y="6327648"/>
+            <a:ext cx="10881360" cy="9144"/>
+          </a:xfrm>
+          <a:prstGeom prst="rect">
+            <a:avLst/>
+          </a:prstGeom>
+          <a:solidFill>
+            <a:srgbClr val="D1CFC8"/>
+          </a:solidFill>
+          <a:ln>
+            <a:noFill/>
+          </a:ln>
+          <a:effectLst/>
+        </p:spPr>
+        <p:style>
+          <a:lnRef idx="1">
+            <a:schemeClr val="accent1"/>
+          </a:lnRef>
+          <a:fillRef idx="3">
+            <a:schemeClr val="accent1"/>
+          </a:fillRef>
+          <a:effectRef idx="2">
+            <a:schemeClr val="accent1"/>
+          </a:effectRef>
+          <a:fontRef idx="minor">
+            <a:schemeClr val="lt1"/>
+          </a:fontRef>
+        </p:style>
+        <p:txBody>
+          <a:bodyPr rtlCol="0" anchor="ctr"/>
+          <a:lstStyle/>
+          <a:p>
+            <a:pPr algn="ctr"/>
+          </a:p>
+        </p:txBody>
+      </p:sp>
+      <p:sp>
+        <p:nvSpPr>
+          <p:cNvPr id="24" name="TextBox 23"/>
+          <p:cNvSpPr txBox="1"/>
+          <p:nvPr/>
+        </p:nvSpPr>
+        <p:spPr>
+          <a:xfrm>
+            <a:off x="658368" y="6409944"/>
+            <a:ext cx="7132320" cy="228600"/>
+          </a:xfrm>
+          <a:prstGeom prst="rect">
+            <a:avLst/>
+          </a:prstGeom>
+          <a:noFill/>
+        </p:spPr>
+        <p:txBody>
+          <a:bodyPr wrap="square" anchor="ctr" lIns="0" rIns="0" tIns="0" bIns="0">
+            <a:spAutoFit/>
+          </a:bodyPr>
+          <a:lstStyle/>
+          <a:p>
+            <a:pPr algn="l">
+              <a:lnSpc>
+                <a:spcPct val="130000"/>
+              </a:lnSpc>
+            </a:pPr>
+            <a:r>
+              <a:rPr sz="819" b="0" lang="ja-JP">
+                <a:solidFill>
+                  <a:srgbClr val="666E70"/>
+                </a:solidFill>
+                <a:latin typeface="Yu Gothic"/>
+                <a:ea typeface="Yu Gothic"/>
+                <a:cs typeface="Yu Gothic"/>
+              </a:rPr>
+              <a:t>社内スライドパターン検証ギャラリー</a:t>
+            </a:r>
+          </a:p>
+        </p:txBody>
+      </p:sp>
+      <p:sp>
+        <p:nvSpPr>
+          <p:cNvPr id="25" name="TextBox 24"/>
+          <p:cNvSpPr txBox="1"/>
+          <p:nvPr/>
+        </p:nvSpPr>
+        <p:spPr>
+          <a:xfrm>
+            <a:off x="10405872" y="6382512"/>
+            <a:ext cx="1133856" cy="256032"/>
+          </a:xfrm>
+          <a:prstGeom prst="rect">
+            <a:avLst/>
+          </a:prstGeom>
+          <a:noFill/>
+        </p:spPr>
+        <p:txBody>
+          <a:bodyPr wrap="none" anchor="ctr" lIns="0" rIns="0" tIns="0" bIns="0">
+            <a:spAutoFit/>
+          </a:bodyPr>
+          <a:lstStyle/>
+          <a:p>
+            <a:pPr algn="r">
+              <a:lnSpc>
+                <a:spcPct val="130000"/>
+              </a:lnSpc>
+            </a:pPr>
+            <a:r>
+              <a:rPr sz="1100" b="1" lang="ja-JP">
+                <a:solidFill>
+                  <a:srgbClr val="182C43"/>
+                </a:solidFill>
+                <a:latin typeface="Yu Gothic"/>
+                <a:ea typeface="Yu Gothic"/>
+                <a:cs typeface="Yu Gothic"/>
+              </a:rPr>
+              <a:t>38</a:t>
+            </a:r>
+            <a:r>
+              <a:rPr sz="819" b="0" lang="ja-JP">
+                <a:solidFill>
+                  <a:srgbClr val="666E70"/>
+                </a:solidFill>
+                <a:latin typeface="Yu Gothic"/>
+                <a:ea typeface="Yu Gothic"/>
+                <a:cs typeface="Yu Gothic"/>
+              </a:rPr>
+              <a:t> / 38</a:t>
             </a:r>
           </a:p>
         </p:txBody>
@@ -56170,7 +57208,7 @@
                 <a:ea typeface="Yu Gothic"/>
                 <a:cs typeface="Yu Gothic"/>
               </a:rPr>
-              <a:t> / 37</a:t>
+              <a:t> / 38</a:t>
             </a:r>
           </a:p>
         </p:txBody>
@@ -56881,7 +57919,7 @@
                 <a:ea typeface="Yu Gothic"/>
                 <a:cs typeface="Yu Gothic"/>
               </a:rPr>
-              <a:t> / 37</a:t>
+              <a:t> / 38</a:t>
             </a:r>
           </a:p>
         </p:txBody>
@@ -57760,7 +58798,7 @@
                 <a:ea typeface="Yu Gothic"/>
                 <a:cs typeface="Yu Gothic"/>
               </a:rPr>
-              <a:t> / 37</a:t>
+              <a:t> / 38</a:t>
             </a:r>
           </a:p>
         </p:txBody>
@@ -58498,7 +59536,7 @@
                 <a:ea typeface="Yu Gothic"/>
                 <a:cs typeface="Yu Gothic"/>
               </a:rPr>
-              <a:t> / 37</a:t>
+              <a:t> / 38</a:t>
             </a:r>
           </a:p>
         </p:txBody>
@@ -59787,7 +60825,7 @@
                 <a:ea typeface="Yu Gothic"/>
                 <a:cs typeface="Yu Gothic"/>
               </a:rPr>
-              <a:t> / 37</a:t>
+              <a:t> / 38</a:t>
             </a:r>
           </a:p>
         </p:txBody>
@@ -60568,7 +61606,7 @@
                 <a:ea typeface="Yu Gothic"/>
                 <a:cs typeface="Yu Gothic"/>
               </a:rPr>
-              <a:t> / 37</a:t>
+              <a:t> / 38</a:t>
             </a:r>
           </a:p>
         </p:txBody>

--- a/examples/gallery/pattern_gallery.pptx
+++ b/examples/gallery/pattern_gallery.pptx
@@ -55742,17 +55742,235 @@
       </p:sp>
       <p:sp>
         <p:nvSpPr>
-          <p:cNvPr id="6" name="references:row[0]"/>
+          <p:cNvPr id="6" name="Rectangle 5"/>
           <p:cNvSpPr/>
           <p:nvPr/>
         </p:nvSpPr>
         <p:spPr>
           <a:xfrm>
-            <a:off x="502920" y="1947164"/>
-            <a:ext cx="11185855" cy="694944"/>
-          </a:xfrm>
-          <a:prstGeom prst="rect">
-            <a:avLst/>
+            <a:off x="1179576" y="1928876"/>
+            <a:ext cx="10509199" cy="9144"/>
+          </a:xfrm>
+          <a:prstGeom prst="rect">
+            <a:avLst/>
+          </a:prstGeom>
+          <a:solidFill>
+            <a:srgbClr val="D1CFC8"/>
+          </a:solidFill>
+          <a:ln>
+            <a:noFill/>
+          </a:ln>
+          <a:effectLst/>
+        </p:spPr>
+        <p:style>
+          <a:lnRef idx="1">
+            <a:schemeClr val="accent1"/>
+          </a:lnRef>
+          <a:fillRef idx="3">
+            <a:schemeClr val="accent1"/>
+          </a:fillRef>
+          <a:effectRef idx="2">
+            <a:schemeClr val="accent1"/>
+          </a:effectRef>
+          <a:fontRef idx="minor">
+            <a:schemeClr val="lt1"/>
+          </a:fontRef>
+        </p:style>
+        <p:txBody>
+          <a:bodyPr rtlCol="0" anchor="ctr"/>
+          <a:lstStyle/>
+          <a:p>
+            <a:pPr algn="ctr"/>
+          </a:p>
+        </p:txBody>
+      </p:sp>
+      <p:sp>
+        <p:nvSpPr>
+          <p:cNvPr id="7" name="Rectangle 6"/>
+          <p:cNvSpPr/>
+          <p:nvPr/>
+        </p:nvSpPr>
+        <p:spPr>
+          <a:xfrm>
+            <a:off x="1179576" y="1928876"/>
+            <a:ext cx="804672" cy="32004"/>
+          </a:xfrm>
+          <a:prstGeom prst="rect">
+            <a:avLst/>
+          </a:prstGeom>
+          <a:solidFill>
+            <a:srgbClr val="0D7870"/>
+          </a:solidFill>
+          <a:ln>
+            <a:noFill/>
+          </a:ln>
+          <a:effectLst/>
+        </p:spPr>
+        <p:style>
+          <a:lnRef idx="1">
+            <a:schemeClr val="accent1"/>
+          </a:lnRef>
+          <a:fillRef idx="3">
+            <a:schemeClr val="accent1"/>
+          </a:fillRef>
+          <a:effectRef idx="2">
+            <a:schemeClr val="accent1"/>
+          </a:effectRef>
+          <a:fontRef idx="minor">
+            <a:schemeClr val="lt1"/>
+          </a:fontRef>
+        </p:style>
+        <p:txBody>
+          <a:bodyPr rtlCol="0" anchor="ctr"/>
+          <a:lstStyle/>
+          <a:p>
+            <a:pPr algn="ctr"/>
+          </a:p>
+        </p:txBody>
+      </p:sp>
+      <p:sp>
+        <p:nvSpPr>
+          <p:cNvPr id="8" name="references:index[0]"/>
+          <p:cNvSpPr/>
+          <p:nvPr/>
+        </p:nvSpPr>
+        <p:spPr>
+          <a:xfrm>
+            <a:off x="521208" y="2038604"/>
+            <a:ext cx="457200" cy="292608"/>
+          </a:xfrm>
+          <a:prstGeom prst="roundRect">
+            <a:avLst>
+              <a:gd name="adj" fmla="val 6000"/>
+            </a:avLst>
+          </a:prstGeom>
+          <a:solidFill>
+            <a:srgbClr val="0D7870"/>
+          </a:solidFill>
+          <a:ln>
+            <a:noFill/>
+          </a:ln>
+          <a:effectLst/>
+        </p:spPr>
+        <p:style>
+          <a:lnRef idx="1">
+            <a:schemeClr val="accent1"/>
+          </a:lnRef>
+          <a:fillRef idx="3">
+            <a:schemeClr val="accent1"/>
+          </a:fillRef>
+          <a:effectRef idx="2">
+            <a:schemeClr val="accent1"/>
+          </a:effectRef>
+          <a:fontRef idx="minor">
+            <a:schemeClr val="lt1"/>
+          </a:fontRef>
+        </p:style>
+        <p:txBody>
+          <a:bodyPr rtlCol="0" anchor="ctr"/>
+          <a:lstStyle/>
+          <a:p>
+            <a:pPr algn="ctr"/>
+          </a:p>
+        </p:txBody>
+      </p:sp>
+      <p:sp>
+        <p:nvSpPr>
+          <p:cNvPr id="9" name="TextBox 8"/>
+          <p:cNvSpPr txBox="1"/>
+          <p:nvPr/>
+        </p:nvSpPr>
+        <p:spPr>
+          <a:xfrm>
+            <a:off x="521208" y="2038604"/>
+            <a:ext cx="457200" cy="292608"/>
+          </a:xfrm>
+          <a:prstGeom prst="rect">
+            <a:avLst/>
+          </a:prstGeom>
+          <a:noFill/>
+        </p:spPr>
+        <p:txBody>
+          <a:bodyPr wrap="square" anchor="ctr" lIns="0" rIns="0" tIns="0" bIns="0">
+            <a:spAutoFit/>
+          </a:bodyPr>
+          <a:lstStyle/>
+          <a:p>
+            <a:pPr algn="ctr">
+              <a:lnSpc>
+                <a:spcPct val="130000"/>
+              </a:lnSpc>
+            </a:pPr>
+            <a:r>
+              <a:rPr sz="900" b="1" lang="ja-JP">
+                <a:solidFill>
+                  <a:srgbClr val="FFFFFC"/>
+                </a:solidFill>
+                <a:latin typeface="Yu Gothic"/>
+                <a:ea typeface="Yu Gothic"/>
+                <a:cs typeface="Yu Gothic"/>
+              </a:rPr>
+              <a:t>[1]</a:t>
+            </a:r>
+          </a:p>
+        </p:txBody>
+      </p:sp>
+      <p:sp>
+        <p:nvSpPr>
+          <p:cNvPr id="10" name="TextBox 9"/>
+          <p:cNvSpPr txBox="1"/>
+          <p:nvPr/>
+        </p:nvSpPr>
+        <p:spPr>
+          <a:xfrm>
+            <a:off x="1179576" y="2020316"/>
+            <a:ext cx="7589520" cy="329184"/>
+          </a:xfrm>
+          <a:prstGeom prst="rect">
+            <a:avLst/>
+          </a:prstGeom>
+          <a:noFill/>
+        </p:spPr>
+        <p:txBody>
+          <a:bodyPr wrap="square" anchor="t" lIns="0" rIns="0" tIns="0" bIns="0">
+            <a:spAutoFit/>
+          </a:bodyPr>
+          <a:lstStyle/>
+          <a:p>
+            <a:pPr algn="l">
+              <a:lnSpc>
+                <a:spcPct val="104000"/>
+              </a:lnSpc>
+            </a:pPr>
+            <a:r>
+              <a:rPr sz="1450" b="1" lang="ja-JP">
+                <a:solidFill>
+                  <a:srgbClr val="182C43"/>
+                </a:solidFill>
+                <a:latin typeface="Yu Gothic"/>
+                <a:ea typeface="Yu Gothic"/>
+                <a:cs typeface="Yu Gothic"/>
+              </a:rPr>
+              <a:t>製品ドキュメント</a:t>
+            </a:r>
+          </a:p>
+        </p:txBody>
+      </p:sp>
+      <p:sp>
+        <p:nvSpPr>
+          <p:cNvPr id="11" name="Rounded Rectangle 10"/>
+          <p:cNvSpPr/>
+          <p:nvPr/>
+        </p:nvSpPr>
+        <p:spPr>
+          <a:xfrm>
+            <a:off x="10180015" y="2020316"/>
+            <a:ext cx="1508760" cy="256032"/>
+          </a:xfrm>
+          <a:prstGeom prst="roundRect">
+            <a:avLst>
+              <a:gd name="adj" fmla="val 6000"/>
+            </a:avLst>
           </a:prstGeom>
           <a:solidFill>
             <a:srgbClr val="DFEBE8"/>
@@ -55786,14 +56004,14 @@
       </p:sp>
       <p:sp>
         <p:nvSpPr>
-          <p:cNvPr id="7" name="TextBox 6"/>
-          <p:cNvSpPr txBox="1"/>
-          <p:nvPr/>
-        </p:nvSpPr>
-        <p:spPr>
-          <a:xfrm>
-            <a:off x="594360" y="1947164"/>
-            <a:ext cx="548640" cy="694944"/>
+          <p:cNvPr id="12" name="TextBox 11"/>
+          <p:cNvSpPr txBox="1"/>
+          <p:nvPr/>
+        </p:nvSpPr>
+        <p:spPr>
+          <a:xfrm>
+            <a:off x="10253167" y="2020316"/>
+            <a:ext cx="1362456" cy="256032"/>
           </a:xfrm>
           <a:prstGeom prst="rect">
             <a:avLst/>
@@ -55806,159 +56024,120 @@
           </a:bodyPr>
           <a:lstStyle/>
           <a:p>
+            <a:pPr algn="ctr">
+              <a:lnSpc>
+                <a:spcPct val="100000"/>
+              </a:lnSpc>
+            </a:pPr>
+            <a:r>
+              <a:rPr sz="900" b="1" lang="ja-JP">
+                <a:solidFill>
+                  <a:srgbClr val="0D7870"/>
+                </a:solidFill>
+                <a:latin typeface="Yu Gothic"/>
+                <a:ea typeface="Yu Gothic"/>
+                <a:cs typeface="Yu Gothic"/>
+              </a:rPr>
+              <a:t>概要・仕様</a:t>
+            </a:r>
+          </a:p>
+        </p:txBody>
+      </p:sp>
+      <p:sp>
+        <p:nvSpPr>
+          <p:cNvPr id="13" name="references:url[0]"/>
+          <p:cNvSpPr txBox="1"/>
+          <p:nvPr/>
+        </p:nvSpPr>
+        <p:spPr>
+          <a:xfrm>
+            <a:off x="1179576" y="2404364"/>
+            <a:ext cx="10509199" cy="274320"/>
+          </a:xfrm>
+          <a:prstGeom prst="rect">
+            <a:avLst/>
+          </a:prstGeom>
+          <a:noFill/>
+        </p:spPr>
+        <p:txBody>
+          <a:bodyPr wrap="square" anchor="t" lIns="0" rIns="0" tIns="0" bIns="0">
+            <a:spAutoFit/>
+          </a:bodyPr>
+          <a:lstStyle/>
+          <a:p>
             <a:pPr algn="l">
               <a:lnSpc>
-                <a:spcPct val="130000"/>
-              </a:lnSpc>
-            </a:pPr>
-            <a:r>
-              <a:rPr sz="1100" b="1" lang="ja-JP">
-                <a:solidFill>
-                  <a:srgbClr val="182C43"/>
-                </a:solidFill>
-                <a:latin typeface="Yu Gothic"/>
-                <a:ea typeface="Yu Gothic"/>
-                <a:cs typeface="Yu Gothic"/>
-              </a:rPr>
-              <a:t>[1]</a:t>
-            </a:r>
-          </a:p>
-        </p:txBody>
-      </p:sp>
-      <p:sp>
-        <p:nvSpPr>
-          <p:cNvPr id="8" name="TextBox 7"/>
-          <p:cNvSpPr txBox="1"/>
-          <p:nvPr/>
-        </p:nvSpPr>
-        <p:spPr>
-          <a:xfrm>
-            <a:off x="1325880" y="2038604"/>
-            <a:ext cx="6720840" cy="291876"/>
+                <a:spcPct val="100000"/>
+              </a:lnSpc>
+            </a:pPr>
+            <a:r>
+              <a:rPr sz="950" b="0" lang="ja-JP">
+                <a:solidFill>
+                  <a:srgbClr val="0D7870"/>
+                </a:solidFill>
+                <a:latin typeface="Yu Gothic"/>
+                <a:ea typeface="Yu Gothic"/>
+                <a:cs typeface="Yu Gothic"/>
+              </a:rPr>
+              <a:t>↗  https://example.com/docs/product-overview</a:t>
+            </a:r>
+          </a:p>
+        </p:txBody>
+      </p:sp>
+      <p:sp>
+        <p:nvSpPr>
+          <p:cNvPr id="14" name="references:link[0]">
+            <a:hlinkClick r:id="rId2"/>
+          </p:cNvPr>
+          <p:cNvSpPr/>
+          <p:nvPr/>
+        </p:nvSpPr>
+        <p:spPr>
+          <a:xfrm>
+            <a:off x="1179576" y="2404364"/>
+            <a:ext cx="10509199" cy="274320"/>
           </a:xfrm>
           <a:prstGeom prst="rect">
             <a:avLst/>
           </a:prstGeom>
           <a:noFill/>
-        </p:spPr>
-        <p:txBody>
-          <a:bodyPr wrap="square" anchor="t" lIns="0" rIns="0" tIns="0" bIns="0">
-            <a:spAutoFit/>
-          </a:bodyPr>
-          <a:lstStyle/>
-          <a:p>
-            <a:pPr algn="l">
-              <a:lnSpc>
-                <a:spcPct val="108000"/>
-              </a:lnSpc>
-            </a:pPr>
-            <a:r>
-              <a:rPr sz="1300" b="1" lang="ja-JP">
-                <a:solidFill>
-                  <a:srgbClr val="182C43"/>
-                </a:solidFill>
-                <a:latin typeface="Yu Gothic"/>
-                <a:ea typeface="Yu Gothic"/>
-                <a:cs typeface="Yu Gothic"/>
-              </a:rPr>
-              <a:t>製品ドキュメント</a:t>
-            </a:r>
-          </a:p>
-        </p:txBody>
-      </p:sp>
-      <p:sp>
-        <p:nvSpPr>
-          <p:cNvPr id="9" name="references:url[0]"/>
-          <p:cNvSpPr txBox="1"/>
-          <p:nvPr/>
-        </p:nvSpPr>
-        <p:spPr>
-          <a:xfrm>
-            <a:off x="1325880" y="2394488"/>
-            <a:ext cx="6720840" cy="174467"/>
-          </a:xfrm>
-          <a:prstGeom prst="rect">
-            <a:avLst/>
-          </a:prstGeom>
-          <a:noFill/>
-        </p:spPr>
-        <p:txBody>
-          <a:bodyPr wrap="square" anchor="t" lIns="0" rIns="0" tIns="0" bIns="0">
-            <a:spAutoFit/>
-          </a:bodyPr>
-          <a:lstStyle/>
-          <a:p>
-            <a:pPr algn="l">
-              <a:lnSpc>
-                <a:spcPct val="103000"/>
-              </a:lnSpc>
-            </a:pPr>
-            <a:r>
-              <a:rPr sz="900" b="0" lang="ja-JP" u="sng">
-                <a:solidFill>
-                  <a:srgbClr val="0D7870"/>
-                </a:solidFill>
-                <a:latin typeface="Yu Gothic"/>
-                <a:ea typeface="Yu Gothic"/>
-                <a:cs typeface="Yu Gothic"/>
-                <a:hlinkClick r:id="rId2"/>
-              </a:rPr>
-              <a:t>https://example.com/docs/product-overview</a:t>
-            </a:r>
-          </a:p>
-        </p:txBody>
-      </p:sp>
-      <p:sp>
-        <p:nvSpPr>
-          <p:cNvPr id="10" name="TextBox 9"/>
-          <p:cNvSpPr txBox="1"/>
-          <p:nvPr/>
-        </p:nvSpPr>
-        <p:spPr>
-          <a:xfrm>
-            <a:off x="8302751" y="2029460"/>
-            <a:ext cx="3386023" cy="530352"/>
-          </a:xfrm>
-          <a:prstGeom prst="rect">
-            <a:avLst/>
-          </a:prstGeom>
-          <a:noFill/>
-        </p:spPr>
-        <p:txBody>
-          <a:bodyPr wrap="square" anchor="ctr" lIns="0" rIns="0" tIns="0" bIns="0">
-            <a:spAutoFit/>
-          </a:bodyPr>
-          <a:lstStyle/>
-          <a:p>
-            <a:pPr algn="l">
-              <a:lnSpc>
-                <a:spcPct val="108000"/>
-              </a:lnSpc>
-            </a:pPr>
-            <a:r>
-              <a:rPr sz="1100" b="0" lang="ja-JP">
-                <a:solidFill>
-                  <a:srgbClr val="666E70"/>
-                </a:solidFill>
-                <a:latin typeface="Yu Gothic"/>
-                <a:ea typeface="Yu Gothic"/>
-                <a:cs typeface="Yu Gothic"/>
-              </a:rPr>
-              <a:t>概要・仕様</a:t>
-            </a:r>
-          </a:p>
-        </p:txBody>
-      </p:sp>
-      <p:sp>
-        <p:nvSpPr>
-          <p:cNvPr id="11" name="Rectangle 10"/>
+          <a:ln>
+            <a:noFill/>
+          </a:ln>
+          <a:effectLst/>
+        </p:spPr>
+        <p:style>
+          <a:lnRef idx="1">
+            <a:schemeClr val="accent1"/>
+          </a:lnRef>
+          <a:fillRef idx="3">
+            <a:schemeClr val="accent1"/>
+          </a:fillRef>
+          <a:effectRef idx="2">
+            <a:schemeClr val="accent1"/>
+          </a:effectRef>
+          <a:fontRef idx="minor">
+            <a:schemeClr val="lt1"/>
+          </a:fontRef>
+        </p:style>
+        <p:txBody>
+          <a:bodyPr rtlCol="0" anchor="ctr"/>
+          <a:lstStyle/>
+          <a:p>
+            <a:pPr algn="ctr"/>
+          </a:p>
+        </p:txBody>
+      </p:sp>
+      <p:sp>
+        <p:nvSpPr>
+          <p:cNvPr id="15" name="Rectangle 14"/>
           <p:cNvSpPr/>
           <p:nvPr/>
         </p:nvSpPr>
         <p:spPr>
           <a:xfrm>
-            <a:off x="502920" y="2687828"/>
-            <a:ext cx="11185855" cy="7315"/>
+            <a:off x="1179576" y="2843276"/>
+            <a:ext cx="10509199" cy="9144"/>
           </a:xfrm>
           <a:prstGeom prst="rect">
             <a:avLst/>
@@ -55995,20 +56174,20 @@
       </p:sp>
       <p:sp>
         <p:nvSpPr>
-          <p:cNvPr id="12" name="references:row[1]"/>
+          <p:cNvPr id="16" name="Rectangle 15"/>
           <p:cNvSpPr/>
           <p:nvPr/>
         </p:nvSpPr>
         <p:spPr>
           <a:xfrm>
-            <a:off x="502920" y="2733548"/>
-            <a:ext cx="11185855" cy="694944"/>
+            <a:off x="1179576" y="2843276"/>
+            <a:ext cx="804672" cy="32004"/>
           </a:xfrm>
           <a:prstGeom prst="rect">
             <a:avLst/>
           </a:prstGeom>
           <a:solidFill>
-            <a:srgbClr val="FAF9F5"/>
+            <a:srgbClr val="0D7870"/>
           </a:solidFill>
           <a:ln>
             <a:noFill/>
@@ -56039,14 +56218,60 @@
       </p:sp>
       <p:sp>
         <p:nvSpPr>
-          <p:cNvPr id="13" name="TextBox 12"/>
-          <p:cNvSpPr txBox="1"/>
-          <p:nvPr/>
-        </p:nvSpPr>
-        <p:spPr>
-          <a:xfrm>
-            <a:off x="594360" y="2733548"/>
-            <a:ext cx="548640" cy="694944"/>
+          <p:cNvPr id="17" name="references:index[1]"/>
+          <p:cNvSpPr/>
+          <p:nvPr/>
+        </p:nvSpPr>
+        <p:spPr>
+          <a:xfrm>
+            <a:off x="521208" y="2953004"/>
+            <a:ext cx="457200" cy="292608"/>
+          </a:xfrm>
+          <a:prstGeom prst="roundRect">
+            <a:avLst>
+              <a:gd name="adj" fmla="val 6000"/>
+            </a:avLst>
+          </a:prstGeom>
+          <a:solidFill>
+            <a:srgbClr val="0D7870"/>
+          </a:solidFill>
+          <a:ln>
+            <a:noFill/>
+          </a:ln>
+          <a:effectLst/>
+        </p:spPr>
+        <p:style>
+          <a:lnRef idx="1">
+            <a:schemeClr val="accent1"/>
+          </a:lnRef>
+          <a:fillRef idx="3">
+            <a:schemeClr val="accent1"/>
+          </a:fillRef>
+          <a:effectRef idx="2">
+            <a:schemeClr val="accent1"/>
+          </a:effectRef>
+          <a:fontRef idx="minor">
+            <a:schemeClr val="lt1"/>
+          </a:fontRef>
+        </p:style>
+        <p:txBody>
+          <a:bodyPr rtlCol="0" anchor="ctr"/>
+          <a:lstStyle/>
+          <a:p>
+            <a:pPr algn="ctr"/>
+          </a:p>
+        </p:txBody>
+      </p:sp>
+      <p:sp>
+        <p:nvSpPr>
+          <p:cNvPr id="18" name="TextBox 17"/>
+          <p:cNvSpPr txBox="1"/>
+          <p:nvPr/>
+        </p:nvSpPr>
+        <p:spPr>
+          <a:xfrm>
+            <a:off x="521208" y="2953004"/>
+            <a:ext cx="457200" cy="292608"/>
           </a:xfrm>
           <a:prstGeom prst="rect">
             <a:avLst/>
@@ -56059,13 +56284,54 @@
           </a:bodyPr>
           <a:lstStyle/>
           <a:p>
+            <a:pPr algn="ctr">
+              <a:lnSpc>
+                <a:spcPct val="130000"/>
+              </a:lnSpc>
+            </a:pPr>
+            <a:r>
+              <a:rPr sz="900" b="1" lang="ja-JP">
+                <a:solidFill>
+                  <a:srgbClr val="FFFFFC"/>
+                </a:solidFill>
+                <a:latin typeface="Yu Gothic"/>
+                <a:ea typeface="Yu Gothic"/>
+                <a:cs typeface="Yu Gothic"/>
+              </a:rPr>
+              <a:t>[2]</a:t>
+            </a:r>
+          </a:p>
+        </p:txBody>
+      </p:sp>
+      <p:sp>
+        <p:nvSpPr>
+          <p:cNvPr id="19" name="TextBox 18"/>
+          <p:cNvSpPr txBox="1"/>
+          <p:nvPr/>
+        </p:nvSpPr>
+        <p:spPr>
+          <a:xfrm>
+            <a:off x="1179576" y="2934716"/>
+            <a:ext cx="7589520" cy="329184"/>
+          </a:xfrm>
+          <a:prstGeom prst="rect">
+            <a:avLst/>
+          </a:prstGeom>
+          <a:noFill/>
+        </p:spPr>
+        <p:txBody>
+          <a:bodyPr wrap="square" anchor="t" lIns="0" rIns="0" tIns="0" bIns="0">
+            <a:spAutoFit/>
+          </a:bodyPr>
+          <a:lstStyle/>
+          <a:p>
             <a:pPr algn="l">
               <a:lnSpc>
-                <a:spcPct val="130000"/>
-              </a:lnSpc>
-            </a:pPr>
-            <a:r>
-              <a:rPr sz="1100" b="1" lang="ja-JP">
+                <a:spcPct val="104000"/>
+              </a:lnSpc>
+            </a:pPr>
+            <a:r>
+              <a:rPr sz="1450" b="1" lang="ja-JP">
                 <a:solidFill>
                   <a:srgbClr val="182C43"/>
                 </a:solidFill>
@@ -56073,21 +56339,67 @@
                 <a:ea typeface="Yu Gothic"/>
                 <a:cs typeface="Yu Gothic"/>
               </a:rPr>
-              <a:t>[2]</a:t>
-            </a:r>
-          </a:p>
-        </p:txBody>
-      </p:sp>
-      <p:sp>
-        <p:nvSpPr>
-          <p:cNvPr id="14" name="TextBox 13"/>
-          <p:cNvSpPr txBox="1"/>
-          <p:nvPr/>
-        </p:nvSpPr>
-        <p:spPr>
-          <a:xfrm>
-            <a:off x="1325880" y="2824988"/>
-            <a:ext cx="6720840" cy="291876"/>
+              <a:t>運用ガイド</a:t>
+            </a:r>
+          </a:p>
+        </p:txBody>
+      </p:sp>
+      <p:sp>
+        <p:nvSpPr>
+          <p:cNvPr id="20" name="Rounded Rectangle 19"/>
+          <p:cNvSpPr/>
+          <p:nvPr/>
+        </p:nvSpPr>
+        <p:spPr>
+          <a:xfrm>
+            <a:off x="10180015" y="2934716"/>
+            <a:ext cx="1508760" cy="256032"/>
+          </a:xfrm>
+          <a:prstGeom prst="roundRect">
+            <a:avLst>
+              <a:gd name="adj" fmla="val 6000"/>
+            </a:avLst>
+          </a:prstGeom>
+          <a:solidFill>
+            <a:srgbClr val="DFEBE8"/>
+          </a:solidFill>
+          <a:ln>
+            <a:noFill/>
+          </a:ln>
+          <a:effectLst/>
+        </p:spPr>
+        <p:style>
+          <a:lnRef idx="1">
+            <a:schemeClr val="accent1"/>
+          </a:lnRef>
+          <a:fillRef idx="3">
+            <a:schemeClr val="accent1"/>
+          </a:fillRef>
+          <a:effectRef idx="2">
+            <a:schemeClr val="accent1"/>
+          </a:effectRef>
+          <a:fontRef idx="minor">
+            <a:schemeClr val="lt1"/>
+          </a:fontRef>
+        </p:style>
+        <p:txBody>
+          <a:bodyPr rtlCol="0" anchor="ctr"/>
+          <a:lstStyle/>
+          <a:p>
+            <a:pPr algn="ctr"/>
+          </a:p>
+        </p:txBody>
+      </p:sp>
+      <p:sp>
+        <p:nvSpPr>
+          <p:cNvPr id="21" name="TextBox 20"/>
+          <p:cNvSpPr txBox="1"/>
+          <p:nvPr/>
+        </p:nvSpPr>
+        <p:spPr>
+          <a:xfrm>
+            <a:off x="10253167" y="2934716"/>
+            <a:ext cx="1362456" cy="256032"/>
           </a:xfrm>
           <a:prstGeom prst="rect">
             <a:avLst/>
@@ -56095,6 +56407,47 @@
           <a:noFill/>
         </p:spPr>
         <p:txBody>
+          <a:bodyPr wrap="square" anchor="ctr" lIns="0" rIns="0" tIns="0" bIns="0">
+            <a:spAutoFit/>
+          </a:bodyPr>
+          <a:lstStyle/>
+          <a:p>
+            <a:pPr algn="ctr">
+              <a:lnSpc>
+                <a:spcPct val="100000"/>
+              </a:lnSpc>
+            </a:pPr>
+            <a:r>
+              <a:rPr sz="900" b="1" lang="ja-JP">
+                <a:solidFill>
+                  <a:srgbClr val="0D7870"/>
+                </a:solidFill>
+                <a:latin typeface="Yu Gothic"/>
+                <a:ea typeface="Yu Gothic"/>
+                <a:cs typeface="Yu Gothic"/>
+              </a:rPr>
+              <a:t>監視・障害対応</a:t>
+            </a:r>
+          </a:p>
+        </p:txBody>
+      </p:sp>
+      <p:sp>
+        <p:nvSpPr>
+          <p:cNvPr id="22" name="references:url[1]"/>
+          <p:cNvSpPr txBox="1"/>
+          <p:nvPr/>
+        </p:nvSpPr>
+        <p:spPr>
+          <a:xfrm>
+            <a:off x="1179576" y="3318764"/>
+            <a:ext cx="10509199" cy="274320"/>
+          </a:xfrm>
+          <a:prstGeom prst="rect">
+            <a:avLst/>
+          </a:prstGeom>
+          <a:noFill/>
+        </p:spPr>
+        <p:txBody>
           <a:bodyPr wrap="square" anchor="t" lIns="0" rIns="0" tIns="0" bIns="0">
             <a:spAutoFit/>
           </a:bodyPr>
@@ -56102,116 +56455,77 @@
           <a:p>
             <a:pPr algn="l">
               <a:lnSpc>
-                <a:spcPct val="108000"/>
-              </a:lnSpc>
-            </a:pPr>
-            <a:r>
-              <a:rPr sz="1300" b="1" lang="ja-JP">
-                <a:solidFill>
-                  <a:srgbClr val="182C43"/>
-                </a:solidFill>
-                <a:latin typeface="Yu Gothic"/>
-                <a:ea typeface="Yu Gothic"/>
-                <a:cs typeface="Yu Gothic"/>
-              </a:rPr>
-              <a:t>運用ガイド</a:t>
-            </a:r>
-          </a:p>
-        </p:txBody>
-      </p:sp>
-      <p:sp>
-        <p:nvSpPr>
-          <p:cNvPr id="15" name="references:url[1]"/>
-          <p:cNvSpPr txBox="1"/>
-          <p:nvPr/>
-        </p:nvSpPr>
-        <p:spPr>
-          <a:xfrm>
-            <a:off x="1325880" y="3180872"/>
-            <a:ext cx="6720840" cy="174467"/>
+                <a:spcPct val="100000"/>
+              </a:lnSpc>
+            </a:pPr>
+            <a:r>
+              <a:rPr sz="950" b="0" lang="ja-JP">
+                <a:solidFill>
+                  <a:srgbClr val="0D7870"/>
+                </a:solidFill>
+                <a:latin typeface="Yu Gothic"/>
+                <a:ea typeface="Yu Gothic"/>
+                <a:cs typeface="Yu Gothic"/>
+              </a:rPr>
+              <a:t>↗  https://example.com/docs/operations-guide</a:t>
+            </a:r>
+          </a:p>
+        </p:txBody>
+      </p:sp>
+      <p:sp>
+        <p:nvSpPr>
+          <p:cNvPr id="23" name="references:link[1]">
+            <a:hlinkClick r:id="rId3"/>
+          </p:cNvPr>
+          <p:cNvSpPr/>
+          <p:nvPr/>
+        </p:nvSpPr>
+        <p:spPr>
+          <a:xfrm>
+            <a:off x="1179576" y="3318764"/>
+            <a:ext cx="10509199" cy="274320"/>
           </a:xfrm>
           <a:prstGeom prst="rect">
             <a:avLst/>
           </a:prstGeom>
           <a:noFill/>
-        </p:spPr>
-        <p:txBody>
-          <a:bodyPr wrap="square" anchor="t" lIns="0" rIns="0" tIns="0" bIns="0">
-            <a:spAutoFit/>
-          </a:bodyPr>
-          <a:lstStyle/>
-          <a:p>
-            <a:pPr algn="l">
-              <a:lnSpc>
-                <a:spcPct val="103000"/>
-              </a:lnSpc>
-            </a:pPr>
-            <a:r>
-              <a:rPr sz="900" b="0" lang="ja-JP" u="sng">
-                <a:solidFill>
-                  <a:srgbClr val="0D7870"/>
-                </a:solidFill>
-                <a:latin typeface="Yu Gothic"/>
-                <a:ea typeface="Yu Gothic"/>
-                <a:cs typeface="Yu Gothic"/>
-                <a:hlinkClick r:id="rId3"/>
-              </a:rPr>
-              <a:t>https://example.com/docs/operations-guide</a:t>
-            </a:r>
-          </a:p>
-        </p:txBody>
-      </p:sp>
-      <p:sp>
-        <p:nvSpPr>
-          <p:cNvPr id="16" name="TextBox 15"/>
-          <p:cNvSpPr txBox="1"/>
-          <p:nvPr/>
-        </p:nvSpPr>
-        <p:spPr>
-          <a:xfrm>
-            <a:off x="8302751" y="2815844"/>
-            <a:ext cx="3386023" cy="530352"/>
-          </a:xfrm>
-          <a:prstGeom prst="rect">
-            <a:avLst/>
-          </a:prstGeom>
-          <a:noFill/>
-        </p:spPr>
-        <p:txBody>
-          <a:bodyPr wrap="square" anchor="ctr" lIns="0" rIns="0" tIns="0" bIns="0">
-            <a:spAutoFit/>
-          </a:bodyPr>
-          <a:lstStyle/>
-          <a:p>
-            <a:pPr algn="l">
-              <a:lnSpc>
-                <a:spcPct val="108000"/>
-              </a:lnSpc>
-            </a:pPr>
-            <a:r>
-              <a:rPr sz="1100" b="0" lang="ja-JP">
-                <a:solidFill>
-                  <a:srgbClr val="666E70"/>
-                </a:solidFill>
-                <a:latin typeface="Yu Gothic"/>
-                <a:ea typeface="Yu Gothic"/>
-                <a:cs typeface="Yu Gothic"/>
-              </a:rPr>
-              <a:t>監視・障害対応</a:t>
-            </a:r>
-          </a:p>
-        </p:txBody>
-      </p:sp>
-      <p:sp>
-        <p:nvSpPr>
-          <p:cNvPr id="17" name="Rectangle 16"/>
+          <a:ln>
+            <a:noFill/>
+          </a:ln>
+          <a:effectLst/>
+        </p:spPr>
+        <p:style>
+          <a:lnRef idx="1">
+            <a:schemeClr val="accent1"/>
+          </a:lnRef>
+          <a:fillRef idx="3">
+            <a:schemeClr val="accent1"/>
+          </a:fillRef>
+          <a:effectRef idx="2">
+            <a:schemeClr val="accent1"/>
+          </a:effectRef>
+          <a:fontRef idx="minor">
+            <a:schemeClr val="lt1"/>
+          </a:fontRef>
+        </p:style>
+        <p:txBody>
+          <a:bodyPr rtlCol="0" anchor="ctr"/>
+          <a:lstStyle/>
+          <a:p>
+            <a:pPr algn="ctr"/>
+          </a:p>
+        </p:txBody>
+      </p:sp>
+      <p:sp>
+        <p:nvSpPr>
+          <p:cNvPr id="24" name="Rectangle 23"/>
           <p:cNvSpPr/>
           <p:nvPr/>
         </p:nvSpPr>
         <p:spPr>
           <a:xfrm>
-            <a:off x="502920" y="3474211"/>
-            <a:ext cx="11185855" cy="7315"/>
+            <a:off x="1179576" y="3757676"/>
+            <a:ext cx="10509199" cy="9144"/>
           </a:xfrm>
           <a:prstGeom prst="rect">
             <a:avLst/>
@@ -56248,17 +56562,191 @@
       </p:sp>
       <p:sp>
         <p:nvSpPr>
-          <p:cNvPr id="18" name="references:row[2]"/>
+          <p:cNvPr id="25" name="Rectangle 24"/>
           <p:cNvSpPr/>
           <p:nvPr/>
         </p:nvSpPr>
         <p:spPr>
           <a:xfrm>
-            <a:off x="502920" y="3519932"/>
-            <a:ext cx="11185855" cy="694944"/>
-          </a:xfrm>
-          <a:prstGeom prst="rect">
-            <a:avLst/>
+            <a:off x="1179576" y="3757676"/>
+            <a:ext cx="804672" cy="32004"/>
+          </a:xfrm>
+          <a:prstGeom prst="rect">
+            <a:avLst/>
+          </a:prstGeom>
+          <a:solidFill>
+            <a:srgbClr val="0D7870"/>
+          </a:solidFill>
+          <a:ln>
+            <a:noFill/>
+          </a:ln>
+          <a:effectLst/>
+        </p:spPr>
+        <p:style>
+          <a:lnRef idx="1">
+            <a:schemeClr val="accent1"/>
+          </a:lnRef>
+          <a:fillRef idx="3">
+            <a:schemeClr val="accent1"/>
+          </a:fillRef>
+          <a:effectRef idx="2">
+            <a:schemeClr val="accent1"/>
+          </a:effectRef>
+          <a:fontRef idx="minor">
+            <a:schemeClr val="lt1"/>
+          </a:fontRef>
+        </p:style>
+        <p:txBody>
+          <a:bodyPr rtlCol="0" anchor="ctr"/>
+          <a:lstStyle/>
+          <a:p>
+            <a:pPr algn="ctr"/>
+          </a:p>
+        </p:txBody>
+      </p:sp>
+      <p:sp>
+        <p:nvSpPr>
+          <p:cNvPr id="26" name="references:index[2]"/>
+          <p:cNvSpPr/>
+          <p:nvPr/>
+        </p:nvSpPr>
+        <p:spPr>
+          <a:xfrm>
+            <a:off x="521208" y="3867404"/>
+            <a:ext cx="457200" cy="292608"/>
+          </a:xfrm>
+          <a:prstGeom prst="roundRect">
+            <a:avLst>
+              <a:gd name="adj" fmla="val 6000"/>
+            </a:avLst>
+          </a:prstGeom>
+          <a:solidFill>
+            <a:srgbClr val="0D7870"/>
+          </a:solidFill>
+          <a:ln>
+            <a:noFill/>
+          </a:ln>
+          <a:effectLst/>
+        </p:spPr>
+        <p:style>
+          <a:lnRef idx="1">
+            <a:schemeClr val="accent1"/>
+          </a:lnRef>
+          <a:fillRef idx="3">
+            <a:schemeClr val="accent1"/>
+          </a:fillRef>
+          <a:effectRef idx="2">
+            <a:schemeClr val="accent1"/>
+          </a:effectRef>
+          <a:fontRef idx="minor">
+            <a:schemeClr val="lt1"/>
+          </a:fontRef>
+        </p:style>
+        <p:txBody>
+          <a:bodyPr rtlCol="0" anchor="ctr"/>
+          <a:lstStyle/>
+          <a:p>
+            <a:pPr algn="ctr"/>
+          </a:p>
+        </p:txBody>
+      </p:sp>
+      <p:sp>
+        <p:nvSpPr>
+          <p:cNvPr id="27" name="TextBox 26"/>
+          <p:cNvSpPr txBox="1"/>
+          <p:nvPr/>
+        </p:nvSpPr>
+        <p:spPr>
+          <a:xfrm>
+            <a:off x="521208" y="3867404"/>
+            <a:ext cx="457200" cy="292608"/>
+          </a:xfrm>
+          <a:prstGeom prst="rect">
+            <a:avLst/>
+          </a:prstGeom>
+          <a:noFill/>
+        </p:spPr>
+        <p:txBody>
+          <a:bodyPr wrap="square" anchor="ctr" lIns="0" rIns="0" tIns="0" bIns="0">
+            <a:spAutoFit/>
+          </a:bodyPr>
+          <a:lstStyle/>
+          <a:p>
+            <a:pPr algn="ctr">
+              <a:lnSpc>
+                <a:spcPct val="130000"/>
+              </a:lnSpc>
+            </a:pPr>
+            <a:r>
+              <a:rPr sz="900" b="1" lang="ja-JP">
+                <a:solidFill>
+                  <a:srgbClr val="FFFFFC"/>
+                </a:solidFill>
+                <a:latin typeface="Yu Gothic"/>
+                <a:ea typeface="Yu Gothic"/>
+                <a:cs typeface="Yu Gothic"/>
+              </a:rPr>
+              <a:t>[3]</a:t>
+            </a:r>
+          </a:p>
+        </p:txBody>
+      </p:sp>
+      <p:sp>
+        <p:nvSpPr>
+          <p:cNvPr id="28" name="TextBox 27"/>
+          <p:cNvSpPr txBox="1"/>
+          <p:nvPr/>
+        </p:nvSpPr>
+        <p:spPr>
+          <a:xfrm>
+            <a:off x="1179576" y="3849116"/>
+            <a:ext cx="7589520" cy="329184"/>
+          </a:xfrm>
+          <a:prstGeom prst="rect">
+            <a:avLst/>
+          </a:prstGeom>
+          <a:noFill/>
+        </p:spPr>
+        <p:txBody>
+          <a:bodyPr wrap="square" anchor="t" lIns="0" rIns="0" tIns="0" bIns="0">
+            <a:spAutoFit/>
+          </a:bodyPr>
+          <a:lstStyle/>
+          <a:p>
+            <a:pPr algn="l">
+              <a:lnSpc>
+                <a:spcPct val="104000"/>
+              </a:lnSpc>
+            </a:pPr>
+            <a:r>
+              <a:rPr sz="1450" b="1" lang="ja-JP">
+                <a:solidFill>
+                  <a:srgbClr val="182C43"/>
+                </a:solidFill>
+                <a:latin typeface="Yu Gothic"/>
+                <a:ea typeface="Yu Gothic"/>
+                <a:cs typeface="Yu Gothic"/>
+              </a:rPr>
+              <a:t>料金ページ</a:t>
+            </a:r>
+          </a:p>
+        </p:txBody>
+      </p:sp>
+      <p:sp>
+        <p:nvSpPr>
+          <p:cNvPr id="29" name="Rounded Rectangle 28"/>
+          <p:cNvSpPr/>
+          <p:nvPr/>
+        </p:nvSpPr>
+        <p:spPr>
+          <a:xfrm>
+            <a:off x="10180015" y="3849116"/>
+            <a:ext cx="1508760" cy="256032"/>
+          </a:xfrm>
+          <a:prstGeom prst="roundRect">
+            <a:avLst>
+              <a:gd name="adj" fmla="val 6000"/>
+            </a:avLst>
           </a:prstGeom>
           <a:solidFill>
             <a:srgbClr val="DFEBE8"/>
@@ -56292,14 +56780,14 @@
       </p:sp>
       <p:sp>
         <p:nvSpPr>
-          <p:cNvPr id="19" name="TextBox 18"/>
-          <p:cNvSpPr txBox="1"/>
-          <p:nvPr/>
-        </p:nvSpPr>
-        <p:spPr>
-          <a:xfrm>
-            <a:off x="594360" y="3519932"/>
-            <a:ext cx="548640" cy="694944"/>
+          <p:cNvPr id="30" name="TextBox 29"/>
+          <p:cNvSpPr txBox="1"/>
+          <p:nvPr/>
+        </p:nvSpPr>
+        <p:spPr>
+          <a:xfrm>
+            <a:off x="10253167" y="3849116"/>
+            <a:ext cx="1362456" cy="256032"/>
           </a:xfrm>
           <a:prstGeom prst="rect">
             <a:avLst/>
@@ -56312,152 +56800,113 @@
           </a:bodyPr>
           <a:lstStyle/>
           <a:p>
+            <a:pPr algn="ctr">
+              <a:lnSpc>
+                <a:spcPct val="100000"/>
+              </a:lnSpc>
+            </a:pPr>
+            <a:r>
+              <a:rPr sz="900" b="1" lang="ja-JP">
+                <a:solidFill>
+                  <a:srgbClr val="0D7870"/>
+                </a:solidFill>
+                <a:latin typeface="Yu Gothic"/>
+                <a:ea typeface="Yu Gothic"/>
+                <a:cs typeface="Yu Gothic"/>
+              </a:rPr>
+              <a:t>費用</a:t>
+            </a:r>
+          </a:p>
+        </p:txBody>
+      </p:sp>
+      <p:sp>
+        <p:nvSpPr>
+          <p:cNvPr id="31" name="references:url[2]"/>
+          <p:cNvSpPr txBox="1"/>
+          <p:nvPr/>
+        </p:nvSpPr>
+        <p:spPr>
+          <a:xfrm>
+            <a:off x="1179576" y="4233164"/>
+            <a:ext cx="10509199" cy="274320"/>
+          </a:xfrm>
+          <a:prstGeom prst="rect">
+            <a:avLst/>
+          </a:prstGeom>
+          <a:noFill/>
+        </p:spPr>
+        <p:txBody>
+          <a:bodyPr wrap="square" anchor="t" lIns="0" rIns="0" tIns="0" bIns="0">
+            <a:spAutoFit/>
+          </a:bodyPr>
+          <a:lstStyle/>
+          <a:p>
             <a:pPr algn="l">
               <a:lnSpc>
-                <a:spcPct val="130000"/>
-              </a:lnSpc>
-            </a:pPr>
-            <a:r>
-              <a:rPr sz="1100" b="1" lang="ja-JP">
-                <a:solidFill>
-                  <a:srgbClr val="182C43"/>
-                </a:solidFill>
-                <a:latin typeface="Yu Gothic"/>
-                <a:ea typeface="Yu Gothic"/>
-                <a:cs typeface="Yu Gothic"/>
-              </a:rPr>
-              <a:t>[3]</a:t>
-            </a:r>
-          </a:p>
-        </p:txBody>
-      </p:sp>
-      <p:sp>
-        <p:nvSpPr>
-          <p:cNvPr id="20" name="TextBox 19"/>
-          <p:cNvSpPr txBox="1"/>
-          <p:nvPr/>
-        </p:nvSpPr>
-        <p:spPr>
-          <a:xfrm>
-            <a:off x="1325880" y="3611372"/>
-            <a:ext cx="6720840" cy="291876"/>
+                <a:spcPct val="100000"/>
+              </a:lnSpc>
+            </a:pPr>
+            <a:r>
+              <a:rPr sz="950" b="0" lang="ja-JP">
+                <a:solidFill>
+                  <a:srgbClr val="0D7870"/>
+                </a:solidFill>
+                <a:latin typeface="Yu Gothic"/>
+                <a:ea typeface="Yu Gothic"/>
+                <a:cs typeface="Yu Gothic"/>
+              </a:rPr>
+              <a:t>↗  https://example.com/pricing</a:t>
+            </a:r>
+          </a:p>
+        </p:txBody>
+      </p:sp>
+      <p:sp>
+        <p:nvSpPr>
+          <p:cNvPr id="32" name="references:link[2]">
+            <a:hlinkClick r:id="rId4"/>
+          </p:cNvPr>
+          <p:cNvSpPr/>
+          <p:nvPr/>
+        </p:nvSpPr>
+        <p:spPr>
+          <a:xfrm>
+            <a:off x="1179576" y="4233164"/>
+            <a:ext cx="10509199" cy="274320"/>
           </a:xfrm>
           <a:prstGeom prst="rect">
             <a:avLst/>
           </a:prstGeom>
           <a:noFill/>
-        </p:spPr>
-        <p:txBody>
-          <a:bodyPr wrap="square" anchor="t" lIns="0" rIns="0" tIns="0" bIns="0">
-            <a:spAutoFit/>
-          </a:bodyPr>
-          <a:lstStyle/>
-          <a:p>
-            <a:pPr algn="l">
-              <a:lnSpc>
-                <a:spcPct val="108000"/>
-              </a:lnSpc>
-            </a:pPr>
-            <a:r>
-              <a:rPr sz="1300" b="1" lang="ja-JP">
-                <a:solidFill>
-                  <a:srgbClr val="182C43"/>
-                </a:solidFill>
-                <a:latin typeface="Yu Gothic"/>
-                <a:ea typeface="Yu Gothic"/>
-                <a:cs typeface="Yu Gothic"/>
-              </a:rPr>
-              <a:t>料金ページ</a:t>
-            </a:r>
-          </a:p>
-        </p:txBody>
-      </p:sp>
-      <p:sp>
-        <p:nvSpPr>
-          <p:cNvPr id="21" name="references:url[2]"/>
-          <p:cNvSpPr txBox="1"/>
-          <p:nvPr/>
-        </p:nvSpPr>
-        <p:spPr>
-          <a:xfrm>
-            <a:off x="1325880" y="3967256"/>
-            <a:ext cx="6720840" cy="174467"/>
-          </a:xfrm>
-          <a:prstGeom prst="rect">
-            <a:avLst/>
-          </a:prstGeom>
-          <a:noFill/>
-        </p:spPr>
-        <p:txBody>
-          <a:bodyPr wrap="square" anchor="t" lIns="0" rIns="0" tIns="0" bIns="0">
-            <a:spAutoFit/>
-          </a:bodyPr>
-          <a:lstStyle/>
-          <a:p>
-            <a:pPr algn="l">
-              <a:lnSpc>
-                <a:spcPct val="103000"/>
-              </a:lnSpc>
-            </a:pPr>
-            <a:r>
-              <a:rPr sz="900" b="0" lang="ja-JP" u="sng">
-                <a:solidFill>
-                  <a:srgbClr val="0D7870"/>
-                </a:solidFill>
-                <a:latin typeface="Yu Gothic"/>
-                <a:ea typeface="Yu Gothic"/>
-                <a:cs typeface="Yu Gothic"/>
-                <a:hlinkClick r:id="rId4"/>
-              </a:rPr>
-              <a:t>https://example.com/pricing</a:t>
-            </a:r>
-          </a:p>
-        </p:txBody>
-      </p:sp>
-      <p:sp>
-        <p:nvSpPr>
-          <p:cNvPr id="22" name="TextBox 21"/>
-          <p:cNvSpPr txBox="1"/>
-          <p:nvPr/>
-        </p:nvSpPr>
-        <p:spPr>
-          <a:xfrm>
-            <a:off x="8302751" y="3602228"/>
-            <a:ext cx="3386023" cy="530352"/>
-          </a:xfrm>
-          <a:prstGeom prst="rect">
-            <a:avLst/>
-          </a:prstGeom>
-          <a:noFill/>
-        </p:spPr>
-        <p:txBody>
-          <a:bodyPr wrap="square" anchor="ctr" lIns="0" rIns="0" tIns="0" bIns="0">
-            <a:spAutoFit/>
-          </a:bodyPr>
-          <a:lstStyle/>
-          <a:p>
-            <a:pPr algn="l">
-              <a:lnSpc>
-                <a:spcPct val="108000"/>
-              </a:lnSpc>
-            </a:pPr>
-            <a:r>
-              <a:rPr sz="1100" b="0" lang="ja-JP">
-                <a:solidFill>
-                  <a:srgbClr val="666E70"/>
-                </a:solidFill>
-                <a:latin typeface="Yu Gothic"/>
-                <a:ea typeface="Yu Gothic"/>
-                <a:cs typeface="Yu Gothic"/>
-              </a:rPr>
-              <a:t>費用</a:t>
-            </a:r>
-          </a:p>
-        </p:txBody>
-      </p:sp>
-      <p:sp>
-        <p:nvSpPr>
-          <p:cNvPr id="23" name="Rectangle 22"/>
+          <a:ln>
+            <a:noFill/>
+          </a:ln>
+          <a:effectLst/>
+        </p:spPr>
+        <p:style>
+          <a:lnRef idx="1">
+            <a:schemeClr val="accent1"/>
+          </a:lnRef>
+          <a:fillRef idx="3">
+            <a:schemeClr val="accent1"/>
+          </a:fillRef>
+          <a:effectRef idx="2">
+            <a:schemeClr val="accent1"/>
+          </a:effectRef>
+          <a:fontRef idx="minor">
+            <a:schemeClr val="lt1"/>
+          </a:fontRef>
+        </p:style>
+        <p:txBody>
+          <a:bodyPr rtlCol="0" anchor="ctr"/>
+          <a:lstStyle/>
+          <a:p>
+            <a:pPr algn="ctr"/>
+          </a:p>
+        </p:txBody>
+      </p:sp>
+      <p:sp>
+        <p:nvSpPr>
+          <p:cNvPr id="33" name="Rectangle 32"/>
           <p:cNvSpPr/>
           <p:nvPr/>
         </p:nvSpPr>
@@ -56501,7 +56950,7 @@
       </p:sp>
       <p:sp>
         <p:nvSpPr>
-          <p:cNvPr id="24" name="TextBox 23"/>
+          <p:cNvPr id="34" name="TextBox 33"/>
           <p:cNvSpPr txBox="1"/>
           <p:nvPr/>
         </p:nvSpPr>
@@ -56542,7 +56991,7 @@
       </p:sp>
       <p:sp>
         <p:nvSpPr>
-          <p:cNvPr id="25" name="TextBox 24"/>
+          <p:cNvPr id="35" name="TextBox 34"/>
           <p:cNvSpPr txBox="1"/>
           <p:nvPr/>
         </p:nvSpPr>

--- a/examples/gallery/pattern_gallery.pptx
+++ b/examples/gallery/pattern_gallery.pptx
@@ -55786,17 +55786,19 @@
       </p:sp>
       <p:sp>
         <p:nvSpPr>
-          <p:cNvPr id="7" name="Rectangle 6"/>
+          <p:cNvPr id="7" name="references:index[0]"/>
           <p:cNvSpPr/>
           <p:nvPr/>
         </p:nvSpPr>
         <p:spPr>
           <a:xfrm>
-            <a:off x="1179576" y="1928876"/>
-            <a:ext cx="804672" cy="32004"/>
-          </a:xfrm>
-          <a:prstGeom prst="rect">
-            <a:avLst/>
+            <a:off x="521208" y="2203196"/>
+            <a:ext cx="457200" cy="292608"/>
+          </a:xfrm>
+          <a:prstGeom prst="roundRect">
+            <a:avLst>
+              <a:gd name="adj" fmla="val 6000"/>
+            </a:avLst>
           </a:prstGeom>
           <a:solidFill>
             <a:srgbClr val="0D7870"/>
@@ -55830,13 +55832,311 @@
       </p:sp>
       <p:sp>
         <p:nvSpPr>
-          <p:cNvPr id="8" name="references:index[0]"/>
+          <p:cNvPr id="8" name="TextBox 7"/>
+          <p:cNvSpPr txBox="1"/>
+          <p:nvPr/>
+        </p:nvSpPr>
+        <p:spPr>
+          <a:xfrm>
+            <a:off x="521208" y="2203196"/>
+            <a:ext cx="457200" cy="292608"/>
+          </a:xfrm>
+          <a:prstGeom prst="rect">
+            <a:avLst/>
+          </a:prstGeom>
+          <a:noFill/>
+        </p:spPr>
+        <p:txBody>
+          <a:bodyPr wrap="square" anchor="ctr" lIns="0" rIns="0" tIns="0" bIns="0">
+            <a:spAutoFit/>
+          </a:bodyPr>
+          <a:lstStyle/>
+          <a:p>
+            <a:pPr algn="ctr">
+              <a:lnSpc>
+                <a:spcPct val="130000"/>
+              </a:lnSpc>
+            </a:pPr>
+            <a:r>
+              <a:rPr sz="900" b="1" lang="ja-JP">
+                <a:solidFill>
+                  <a:srgbClr val="FFFFFC"/>
+                </a:solidFill>
+                <a:latin typeface="Yu Gothic"/>
+                <a:ea typeface="Yu Gothic"/>
+                <a:cs typeface="Yu Gothic"/>
+              </a:rPr>
+              <a:t>[1]</a:t>
+            </a:r>
+          </a:p>
+        </p:txBody>
+      </p:sp>
+      <p:sp>
+        <p:nvSpPr>
+          <p:cNvPr id="9" name="TextBox 8"/>
+          <p:cNvSpPr txBox="1"/>
+          <p:nvPr/>
+        </p:nvSpPr>
+        <p:spPr>
+          <a:xfrm>
+            <a:off x="1179576" y="2020316"/>
+            <a:ext cx="7589520" cy="329184"/>
+          </a:xfrm>
+          <a:prstGeom prst="rect">
+            <a:avLst/>
+          </a:prstGeom>
+          <a:noFill/>
+        </p:spPr>
+        <p:txBody>
+          <a:bodyPr wrap="square" anchor="t" lIns="0" rIns="0" tIns="0" bIns="0">
+            <a:spAutoFit/>
+          </a:bodyPr>
+          <a:lstStyle/>
+          <a:p>
+            <a:pPr algn="l">
+              <a:lnSpc>
+                <a:spcPct val="104000"/>
+              </a:lnSpc>
+            </a:pPr>
+            <a:r>
+              <a:rPr sz="1450" b="1" lang="ja-JP">
+                <a:solidFill>
+                  <a:srgbClr val="182C43"/>
+                </a:solidFill>
+                <a:latin typeface="Yu Gothic"/>
+                <a:ea typeface="Yu Gothic"/>
+                <a:cs typeface="Yu Gothic"/>
+              </a:rPr>
+              <a:t>製品ドキュメント</a:t>
+            </a:r>
+          </a:p>
+        </p:txBody>
+      </p:sp>
+      <p:sp>
+        <p:nvSpPr>
+          <p:cNvPr id="10" name="Rounded Rectangle 9"/>
           <p:cNvSpPr/>
           <p:nvPr/>
         </p:nvSpPr>
         <p:spPr>
           <a:xfrm>
-            <a:off x="521208" y="2038604"/>
+            <a:off x="10180015" y="2020316"/>
+            <a:ext cx="1508760" cy="256032"/>
+          </a:xfrm>
+          <a:prstGeom prst="roundRect">
+            <a:avLst>
+              <a:gd name="adj" fmla="val 6000"/>
+            </a:avLst>
+          </a:prstGeom>
+          <a:solidFill>
+            <a:srgbClr val="DFEBE8"/>
+          </a:solidFill>
+          <a:ln>
+            <a:noFill/>
+          </a:ln>
+          <a:effectLst/>
+        </p:spPr>
+        <p:style>
+          <a:lnRef idx="1">
+            <a:schemeClr val="accent1"/>
+          </a:lnRef>
+          <a:fillRef idx="3">
+            <a:schemeClr val="accent1"/>
+          </a:fillRef>
+          <a:effectRef idx="2">
+            <a:schemeClr val="accent1"/>
+          </a:effectRef>
+          <a:fontRef idx="minor">
+            <a:schemeClr val="lt1"/>
+          </a:fontRef>
+        </p:style>
+        <p:txBody>
+          <a:bodyPr rtlCol="0" anchor="ctr"/>
+          <a:lstStyle/>
+          <a:p>
+            <a:pPr algn="ctr"/>
+          </a:p>
+        </p:txBody>
+      </p:sp>
+      <p:sp>
+        <p:nvSpPr>
+          <p:cNvPr id="11" name="TextBox 10"/>
+          <p:cNvSpPr txBox="1"/>
+          <p:nvPr/>
+        </p:nvSpPr>
+        <p:spPr>
+          <a:xfrm>
+            <a:off x="10253167" y="2020316"/>
+            <a:ext cx="1362456" cy="256032"/>
+          </a:xfrm>
+          <a:prstGeom prst="rect">
+            <a:avLst/>
+          </a:prstGeom>
+          <a:noFill/>
+        </p:spPr>
+        <p:txBody>
+          <a:bodyPr wrap="square" anchor="ctr" lIns="0" rIns="0" tIns="0" bIns="0">
+            <a:spAutoFit/>
+          </a:bodyPr>
+          <a:lstStyle/>
+          <a:p>
+            <a:pPr algn="ctr">
+              <a:lnSpc>
+                <a:spcPct val="100000"/>
+              </a:lnSpc>
+            </a:pPr>
+            <a:r>
+              <a:rPr sz="900" b="1" lang="ja-JP">
+                <a:solidFill>
+                  <a:srgbClr val="0D7870"/>
+                </a:solidFill>
+                <a:latin typeface="Yu Gothic"/>
+                <a:ea typeface="Yu Gothic"/>
+                <a:cs typeface="Yu Gothic"/>
+              </a:rPr>
+              <a:t>概要・仕様</a:t>
+            </a:r>
+          </a:p>
+        </p:txBody>
+      </p:sp>
+      <p:sp>
+        <p:nvSpPr>
+          <p:cNvPr id="12" name="references:url[0]"/>
+          <p:cNvSpPr txBox="1"/>
+          <p:nvPr/>
+        </p:nvSpPr>
+        <p:spPr>
+          <a:xfrm>
+            <a:off x="1179576" y="2404364"/>
+            <a:ext cx="10509199" cy="274320"/>
+          </a:xfrm>
+          <a:prstGeom prst="rect">
+            <a:avLst/>
+          </a:prstGeom>
+          <a:noFill/>
+        </p:spPr>
+        <p:txBody>
+          <a:bodyPr wrap="square" anchor="t" lIns="0" rIns="0" tIns="0" bIns="0">
+            <a:spAutoFit/>
+          </a:bodyPr>
+          <a:lstStyle/>
+          <a:p>
+            <a:pPr algn="l">
+              <a:lnSpc>
+                <a:spcPct val="100000"/>
+              </a:lnSpc>
+            </a:pPr>
+            <a:r>
+              <a:rPr sz="950" b="0" lang="ja-JP">
+                <a:solidFill>
+                  <a:srgbClr val="0D7870"/>
+                </a:solidFill>
+                <a:latin typeface="Yu Gothic"/>
+                <a:ea typeface="Yu Gothic"/>
+                <a:cs typeface="Yu Gothic"/>
+              </a:rPr>
+              <a:t>https://example.com/docs/product-overview</a:t>
+            </a:r>
+          </a:p>
+        </p:txBody>
+      </p:sp>
+      <p:sp>
+        <p:nvSpPr>
+          <p:cNvPr id="13" name="references:link[0]">
+            <a:hlinkClick r:id="rId2"/>
+          </p:cNvPr>
+          <p:cNvSpPr/>
+          <p:nvPr/>
+        </p:nvSpPr>
+        <p:spPr>
+          <a:xfrm>
+            <a:off x="1179576" y="2404364"/>
+            <a:ext cx="10509199" cy="274320"/>
+          </a:xfrm>
+          <a:prstGeom prst="rect">
+            <a:avLst/>
+          </a:prstGeom>
+          <a:noFill/>
+          <a:ln>
+            <a:noFill/>
+          </a:ln>
+          <a:effectLst/>
+        </p:spPr>
+        <p:style>
+          <a:lnRef idx="1">
+            <a:schemeClr val="accent1"/>
+          </a:lnRef>
+          <a:fillRef idx="3">
+            <a:schemeClr val="accent1"/>
+          </a:fillRef>
+          <a:effectRef idx="2">
+            <a:schemeClr val="accent1"/>
+          </a:effectRef>
+          <a:fontRef idx="minor">
+            <a:schemeClr val="lt1"/>
+          </a:fontRef>
+        </p:style>
+        <p:txBody>
+          <a:bodyPr rtlCol="0" anchor="ctr"/>
+          <a:lstStyle/>
+          <a:p>
+            <a:pPr algn="ctr"/>
+          </a:p>
+        </p:txBody>
+      </p:sp>
+      <p:sp>
+        <p:nvSpPr>
+          <p:cNvPr id="14" name="Rectangle 13"/>
+          <p:cNvSpPr/>
+          <p:nvPr/>
+        </p:nvSpPr>
+        <p:spPr>
+          <a:xfrm>
+            <a:off x="1179576" y="2843276"/>
+            <a:ext cx="10509199" cy="9144"/>
+          </a:xfrm>
+          <a:prstGeom prst="rect">
+            <a:avLst/>
+          </a:prstGeom>
+          <a:solidFill>
+            <a:srgbClr val="D1CFC8"/>
+          </a:solidFill>
+          <a:ln>
+            <a:noFill/>
+          </a:ln>
+          <a:effectLst/>
+        </p:spPr>
+        <p:style>
+          <a:lnRef idx="1">
+            <a:schemeClr val="accent1"/>
+          </a:lnRef>
+          <a:fillRef idx="3">
+            <a:schemeClr val="accent1"/>
+          </a:fillRef>
+          <a:effectRef idx="2">
+            <a:schemeClr val="accent1"/>
+          </a:effectRef>
+          <a:fontRef idx="minor">
+            <a:schemeClr val="lt1"/>
+          </a:fontRef>
+        </p:style>
+        <p:txBody>
+          <a:bodyPr rtlCol="0" anchor="ctr"/>
+          <a:lstStyle/>
+          <a:p>
+            <a:pPr algn="ctr"/>
+          </a:p>
+        </p:txBody>
+      </p:sp>
+      <p:sp>
+        <p:nvSpPr>
+          <p:cNvPr id="15" name="references:index[1]"/>
+          <p:cNvSpPr/>
+          <p:nvPr/>
+        </p:nvSpPr>
+        <p:spPr>
+          <a:xfrm>
+            <a:off x="521208" y="3117596"/>
             <a:ext cx="457200" cy="292608"/>
           </a:xfrm>
           <a:prstGeom prst="roundRect">
@@ -55876,13 +56176,13 @@
       </p:sp>
       <p:sp>
         <p:nvSpPr>
-          <p:cNvPr id="9" name="TextBox 8"/>
-          <p:cNvSpPr txBox="1"/>
-          <p:nvPr/>
-        </p:nvSpPr>
-        <p:spPr>
-          <a:xfrm>
-            <a:off x="521208" y="2038604"/>
+          <p:cNvPr id="16" name="TextBox 15"/>
+          <p:cNvSpPr txBox="1"/>
+          <p:nvPr/>
+        </p:nvSpPr>
+        <p:spPr>
+          <a:xfrm>
+            <a:off x="521208" y="3117596"/>
             <a:ext cx="457200" cy="292608"/>
           </a:xfrm>
           <a:prstGeom prst="rect">
@@ -55910,20 +56210,20 @@
                 <a:ea typeface="Yu Gothic"/>
                 <a:cs typeface="Yu Gothic"/>
               </a:rPr>
-              <a:t>[1]</a:t>
-            </a:r>
-          </a:p>
-        </p:txBody>
-      </p:sp>
-      <p:sp>
-        <p:nvSpPr>
-          <p:cNvPr id="10" name="TextBox 9"/>
-          <p:cNvSpPr txBox="1"/>
-          <p:nvPr/>
-        </p:nvSpPr>
-        <p:spPr>
-          <a:xfrm>
-            <a:off x="1179576" y="2020316"/>
+              <a:t>[2]</a:t>
+            </a:r>
+          </a:p>
+        </p:txBody>
+      </p:sp>
+      <p:sp>
+        <p:nvSpPr>
+          <p:cNvPr id="17" name="TextBox 16"/>
+          <p:cNvSpPr txBox="1"/>
+          <p:nvPr/>
+        </p:nvSpPr>
+        <p:spPr>
+          <a:xfrm>
+            <a:off x="1179576" y="2934716"/>
             <a:ext cx="7589520" cy="329184"/>
           </a:xfrm>
           <a:prstGeom prst="rect">
@@ -55951,20 +56251,20 @@
                 <a:ea typeface="Yu Gothic"/>
                 <a:cs typeface="Yu Gothic"/>
               </a:rPr>
-              <a:t>製品ドキュメント</a:t>
-            </a:r>
-          </a:p>
-        </p:txBody>
-      </p:sp>
-      <p:sp>
-        <p:nvSpPr>
-          <p:cNvPr id="11" name="Rounded Rectangle 10"/>
+              <a:t>運用ガイド</a:t>
+            </a:r>
+          </a:p>
+        </p:txBody>
+      </p:sp>
+      <p:sp>
+        <p:nvSpPr>
+          <p:cNvPr id="18" name="Rounded Rectangle 17"/>
           <p:cNvSpPr/>
           <p:nvPr/>
         </p:nvSpPr>
         <p:spPr>
           <a:xfrm>
-            <a:off x="10180015" y="2020316"/>
+            <a:off x="10180015" y="2934716"/>
             <a:ext cx="1508760" cy="256032"/>
           </a:xfrm>
           <a:prstGeom prst="roundRect">
@@ -56004,13 +56304,13 @@
       </p:sp>
       <p:sp>
         <p:nvSpPr>
-          <p:cNvPr id="12" name="TextBox 11"/>
-          <p:cNvSpPr txBox="1"/>
-          <p:nvPr/>
-        </p:nvSpPr>
-        <p:spPr>
-          <a:xfrm>
-            <a:off x="10253167" y="2020316"/>
+          <p:cNvPr id="19" name="TextBox 18"/>
+          <p:cNvSpPr txBox="1"/>
+          <p:nvPr/>
+        </p:nvSpPr>
+        <p:spPr>
+          <a:xfrm>
+            <a:off x="10253167" y="2934716"/>
             <a:ext cx="1362456" cy="256032"/>
           </a:xfrm>
           <a:prstGeom prst="rect">
@@ -56038,20 +56338,20 @@
                 <a:ea typeface="Yu Gothic"/>
                 <a:cs typeface="Yu Gothic"/>
               </a:rPr>
-              <a:t>概要・仕様</a:t>
-            </a:r>
-          </a:p>
-        </p:txBody>
-      </p:sp>
-      <p:sp>
-        <p:nvSpPr>
-          <p:cNvPr id="13" name="references:url[0]"/>
-          <p:cNvSpPr txBox="1"/>
-          <p:nvPr/>
-        </p:nvSpPr>
-        <p:spPr>
-          <a:xfrm>
-            <a:off x="1179576" y="2404364"/>
+              <a:t>監視・障害対応</a:t>
+            </a:r>
+          </a:p>
+        </p:txBody>
+      </p:sp>
+      <p:sp>
+        <p:nvSpPr>
+          <p:cNvPr id="20" name="references:url[1]"/>
+          <p:cNvSpPr txBox="1"/>
+          <p:nvPr/>
+        </p:nvSpPr>
+        <p:spPr>
+          <a:xfrm>
+            <a:off x="1179576" y="3318764"/>
             <a:ext cx="10509199" cy="274320"/>
           </a:xfrm>
           <a:prstGeom prst="rect">
@@ -56079,22 +56379,22 @@
                 <a:ea typeface="Yu Gothic"/>
                 <a:cs typeface="Yu Gothic"/>
               </a:rPr>
-              <a:t>↗  https://example.com/docs/product-overview</a:t>
-            </a:r>
-          </a:p>
-        </p:txBody>
-      </p:sp>
-      <p:sp>
-        <p:nvSpPr>
-          <p:cNvPr id="14" name="references:link[0]">
-            <a:hlinkClick r:id="rId2"/>
+              <a:t>https://example.com/docs/operations-guide</a:t>
+            </a:r>
+          </a:p>
+        </p:txBody>
+      </p:sp>
+      <p:sp>
+        <p:nvSpPr>
+          <p:cNvPr id="21" name="references:link[1]">
+            <a:hlinkClick r:id="rId3"/>
           </p:cNvPr>
           <p:cNvSpPr/>
           <p:nvPr/>
         </p:nvSpPr>
         <p:spPr>
           <a:xfrm>
-            <a:off x="1179576" y="2404364"/>
+            <a:off x="1179576" y="3318764"/>
             <a:ext cx="10509199" cy="274320"/>
           </a:xfrm>
           <a:prstGeom prst="rect">
@@ -56130,13 +56430,13 @@
       </p:sp>
       <p:sp>
         <p:nvSpPr>
-          <p:cNvPr id="15" name="Rectangle 14"/>
+          <p:cNvPr id="22" name="Rectangle 21"/>
           <p:cNvSpPr/>
           <p:nvPr/>
         </p:nvSpPr>
         <p:spPr>
           <a:xfrm>
-            <a:off x="1179576" y="2843276"/>
+            <a:off x="1179576" y="3757676"/>
             <a:ext cx="10509199" cy="9144"/>
           </a:xfrm>
           <a:prstGeom prst="rect">
@@ -56174,17 +56474,19 @@
       </p:sp>
       <p:sp>
         <p:nvSpPr>
-          <p:cNvPr id="16" name="Rectangle 15"/>
+          <p:cNvPr id="23" name="references:index[2]"/>
           <p:cNvSpPr/>
           <p:nvPr/>
         </p:nvSpPr>
         <p:spPr>
           <a:xfrm>
-            <a:off x="1179576" y="2843276"/>
-            <a:ext cx="804672" cy="32004"/>
-          </a:xfrm>
-          <a:prstGeom prst="rect">
-            <a:avLst/>
+            <a:off x="521208" y="4031996"/>
+            <a:ext cx="457200" cy="292608"/>
+          </a:xfrm>
+          <a:prstGeom prst="roundRect">
+            <a:avLst>
+              <a:gd name="adj" fmla="val 6000"/>
+            </a:avLst>
           </a:prstGeom>
           <a:solidFill>
             <a:srgbClr val="0D7870"/>
@@ -56218,23 +56520,144 @@
       </p:sp>
       <p:sp>
         <p:nvSpPr>
-          <p:cNvPr id="17" name="references:index[1]"/>
+          <p:cNvPr id="24" name="TextBox 23"/>
+          <p:cNvSpPr txBox="1"/>
+          <p:nvPr/>
+        </p:nvSpPr>
+        <p:spPr>
+          <a:xfrm>
+            <a:off x="521208" y="4031996"/>
+            <a:ext cx="457200" cy="292608"/>
+          </a:xfrm>
+          <a:prstGeom prst="rect">
+            <a:avLst/>
+          </a:prstGeom>
+          <a:noFill/>
+        </p:spPr>
+        <p:txBody>
+          <a:bodyPr wrap="square" anchor="ctr" lIns="0" rIns="0" tIns="0" bIns="0">
+            <a:spAutoFit/>
+          </a:bodyPr>
+          <a:lstStyle/>
+          <a:p>
+            <a:pPr algn="ctr">
+              <a:lnSpc>
+                <a:spcPct val="130000"/>
+              </a:lnSpc>
+            </a:pPr>
+            <a:r>
+              <a:rPr sz="900" b="1" lang="ja-JP">
+                <a:solidFill>
+                  <a:srgbClr val="FFFFFC"/>
+                </a:solidFill>
+                <a:latin typeface="Yu Gothic"/>
+                <a:ea typeface="Yu Gothic"/>
+                <a:cs typeface="Yu Gothic"/>
+              </a:rPr>
+              <a:t>[3]</a:t>
+            </a:r>
+          </a:p>
+        </p:txBody>
+      </p:sp>
+      <p:sp>
+        <p:nvSpPr>
+          <p:cNvPr id="25" name="TextBox 24"/>
+          <p:cNvSpPr txBox="1"/>
+          <p:nvPr/>
+        </p:nvSpPr>
+        <p:spPr>
+          <a:xfrm>
+            <a:off x="1179576" y="3849116"/>
+            <a:ext cx="10509199" cy="329184"/>
+          </a:xfrm>
+          <a:prstGeom prst="rect">
+            <a:avLst/>
+          </a:prstGeom>
+          <a:noFill/>
+        </p:spPr>
+        <p:txBody>
+          <a:bodyPr wrap="square" anchor="t" lIns="0" rIns="0" tIns="0" bIns="0">
+            <a:spAutoFit/>
+          </a:bodyPr>
+          <a:lstStyle/>
+          <a:p>
+            <a:pPr algn="l">
+              <a:lnSpc>
+                <a:spcPct val="104000"/>
+              </a:lnSpc>
+            </a:pPr>
+            <a:r>
+              <a:rPr sz="1450" b="1" lang="ja-JP">
+                <a:solidFill>
+                  <a:srgbClr val="182C43"/>
+                </a:solidFill>
+                <a:latin typeface="Yu Gothic"/>
+                <a:ea typeface="Yu Gothic"/>
+                <a:cs typeface="Yu Gothic"/>
+              </a:rPr>
+              <a:t>料金ページ</a:t>
+            </a:r>
+          </a:p>
+        </p:txBody>
+      </p:sp>
+      <p:sp>
+        <p:nvSpPr>
+          <p:cNvPr id="26" name="references:url[2]"/>
+          <p:cNvSpPr txBox="1"/>
+          <p:nvPr/>
+        </p:nvSpPr>
+        <p:spPr>
+          <a:xfrm>
+            <a:off x="1179576" y="4233164"/>
+            <a:ext cx="10509199" cy="274320"/>
+          </a:xfrm>
+          <a:prstGeom prst="rect">
+            <a:avLst/>
+          </a:prstGeom>
+          <a:noFill/>
+        </p:spPr>
+        <p:txBody>
+          <a:bodyPr wrap="square" anchor="t" lIns="0" rIns="0" tIns="0" bIns="0">
+            <a:spAutoFit/>
+          </a:bodyPr>
+          <a:lstStyle/>
+          <a:p>
+            <a:pPr algn="l">
+              <a:lnSpc>
+                <a:spcPct val="100000"/>
+              </a:lnSpc>
+            </a:pPr>
+            <a:r>
+              <a:rPr sz="950" b="0" lang="ja-JP">
+                <a:solidFill>
+                  <a:srgbClr val="0D7870"/>
+                </a:solidFill>
+                <a:latin typeface="Yu Gothic"/>
+                <a:ea typeface="Yu Gothic"/>
+                <a:cs typeface="Yu Gothic"/>
+              </a:rPr>
+              <a:t>https://example.com/pricing</a:t>
+            </a:r>
+          </a:p>
+        </p:txBody>
+      </p:sp>
+      <p:sp>
+        <p:nvSpPr>
+          <p:cNvPr id="27" name="references:link[2]">
+            <a:hlinkClick r:id="rId4"/>
+          </p:cNvPr>
           <p:cNvSpPr/>
           <p:nvPr/>
         </p:nvSpPr>
         <p:spPr>
           <a:xfrm>
-            <a:off x="521208" y="2953004"/>
-            <a:ext cx="457200" cy="292608"/>
-          </a:xfrm>
-          <a:prstGeom prst="roundRect">
-            <a:avLst>
-              <a:gd name="adj" fmla="val 6000"/>
-            </a:avLst>
-          </a:prstGeom>
-          <a:solidFill>
-            <a:srgbClr val="0D7870"/>
-          </a:solidFill>
+            <a:off x="1179576" y="4233164"/>
+            <a:ext cx="10509199" cy="274320"/>
+          </a:xfrm>
+          <a:prstGeom prst="rect">
+            <a:avLst/>
+          </a:prstGeom>
+          <a:noFill/>
           <a:ln>
             <a:noFill/>
           </a:ln>
@@ -56264,104 +56687,20 @@
       </p:sp>
       <p:sp>
         <p:nvSpPr>
-          <p:cNvPr id="18" name="TextBox 17"/>
-          <p:cNvSpPr txBox="1"/>
-          <p:nvPr/>
-        </p:nvSpPr>
-        <p:spPr>
-          <a:xfrm>
-            <a:off x="521208" y="2953004"/>
-            <a:ext cx="457200" cy="292608"/>
-          </a:xfrm>
-          <a:prstGeom prst="rect">
-            <a:avLst/>
-          </a:prstGeom>
-          <a:noFill/>
-        </p:spPr>
-        <p:txBody>
-          <a:bodyPr wrap="square" anchor="ctr" lIns="0" rIns="0" tIns="0" bIns="0">
-            <a:spAutoFit/>
-          </a:bodyPr>
-          <a:lstStyle/>
-          <a:p>
-            <a:pPr algn="ctr">
-              <a:lnSpc>
-                <a:spcPct val="130000"/>
-              </a:lnSpc>
-            </a:pPr>
-            <a:r>
-              <a:rPr sz="900" b="1" lang="ja-JP">
-                <a:solidFill>
-                  <a:srgbClr val="FFFFFC"/>
-                </a:solidFill>
-                <a:latin typeface="Yu Gothic"/>
-                <a:ea typeface="Yu Gothic"/>
-                <a:cs typeface="Yu Gothic"/>
-              </a:rPr>
-              <a:t>[2]</a:t>
-            </a:r>
-          </a:p>
-        </p:txBody>
-      </p:sp>
-      <p:sp>
-        <p:nvSpPr>
-          <p:cNvPr id="19" name="TextBox 18"/>
-          <p:cNvSpPr txBox="1"/>
-          <p:nvPr/>
-        </p:nvSpPr>
-        <p:spPr>
-          <a:xfrm>
-            <a:off x="1179576" y="2934716"/>
-            <a:ext cx="7589520" cy="329184"/>
-          </a:xfrm>
-          <a:prstGeom prst="rect">
-            <a:avLst/>
-          </a:prstGeom>
-          <a:noFill/>
-        </p:spPr>
-        <p:txBody>
-          <a:bodyPr wrap="square" anchor="t" lIns="0" rIns="0" tIns="0" bIns="0">
-            <a:spAutoFit/>
-          </a:bodyPr>
-          <a:lstStyle/>
-          <a:p>
-            <a:pPr algn="l">
-              <a:lnSpc>
-                <a:spcPct val="104000"/>
-              </a:lnSpc>
-            </a:pPr>
-            <a:r>
-              <a:rPr sz="1450" b="1" lang="ja-JP">
-                <a:solidFill>
-                  <a:srgbClr val="182C43"/>
-                </a:solidFill>
-                <a:latin typeface="Yu Gothic"/>
-                <a:ea typeface="Yu Gothic"/>
-                <a:cs typeface="Yu Gothic"/>
-              </a:rPr>
-              <a:t>運用ガイド</a:t>
-            </a:r>
-          </a:p>
-        </p:txBody>
-      </p:sp>
-      <p:sp>
-        <p:nvSpPr>
-          <p:cNvPr id="20" name="Rounded Rectangle 19"/>
+          <p:cNvPr id="28" name="Rectangle 27"/>
           <p:cNvSpPr/>
           <p:nvPr/>
         </p:nvSpPr>
         <p:spPr>
           <a:xfrm>
-            <a:off x="10180015" y="2934716"/>
-            <a:ext cx="1508760" cy="256032"/>
-          </a:xfrm>
-          <a:prstGeom prst="roundRect">
-            <a:avLst>
-              <a:gd name="adj" fmla="val 6000"/>
-            </a:avLst>
+            <a:off x="658368" y="6327648"/>
+            <a:ext cx="10881360" cy="9144"/>
+          </a:xfrm>
+          <a:prstGeom prst="rect">
+            <a:avLst/>
           </a:prstGeom>
           <a:solidFill>
-            <a:srgbClr val="DFEBE8"/>
+            <a:srgbClr val="D1CFC8"/>
           </a:solidFill>
           <a:ln>
             <a:noFill/>
@@ -56392,565 +56731,7 @@
       </p:sp>
       <p:sp>
         <p:nvSpPr>
-          <p:cNvPr id="21" name="TextBox 20"/>
-          <p:cNvSpPr txBox="1"/>
-          <p:nvPr/>
-        </p:nvSpPr>
-        <p:spPr>
-          <a:xfrm>
-            <a:off x="10253167" y="2934716"/>
-            <a:ext cx="1362456" cy="256032"/>
-          </a:xfrm>
-          <a:prstGeom prst="rect">
-            <a:avLst/>
-          </a:prstGeom>
-          <a:noFill/>
-        </p:spPr>
-        <p:txBody>
-          <a:bodyPr wrap="square" anchor="ctr" lIns="0" rIns="0" tIns="0" bIns="0">
-            <a:spAutoFit/>
-          </a:bodyPr>
-          <a:lstStyle/>
-          <a:p>
-            <a:pPr algn="ctr">
-              <a:lnSpc>
-                <a:spcPct val="100000"/>
-              </a:lnSpc>
-            </a:pPr>
-            <a:r>
-              <a:rPr sz="900" b="1" lang="ja-JP">
-                <a:solidFill>
-                  <a:srgbClr val="0D7870"/>
-                </a:solidFill>
-                <a:latin typeface="Yu Gothic"/>
-                <a:ea typeface="Yu Gothic"/>
-                <a:cs typeface="Yu Gothic"/>
-              </a:rPr>
-              <a:t>監視・障害対応</a:t>
-            </a:r>
-          </a:p>
-        </p:txBody>
-      </p:sp>
-      <p:sp>
-        <p:nvSpPr>
-          <p:cNvPr id="22" name="references:url[1]"/>
-          <p:cNvSpPr txBox="1"/>
-          <p:nvPr/>
-        </p:nvSpPr>
-        <p:spPr>
-          <a:xfrm>
-            <a:off x="1179576" y="3318764"/>
-            <a:ext cx="10509199" cy="274320"/>
-          </a:xfrm>
-          <a:prstGeom prst="rect">
-            <a:avLst/>
-          </a:prstGeom>
-          <a:noFill/>
-        </p:spPr>
-        <p:txBody>
-          <a:bodyPr wrap="square" anchor="t" lIns="0" rIns="0" tIns="0" bIns="0">
-            <a:spAutoFit/>
-          </a:bodyPr>
-          <a:lstStyle/>
-          <a:p>
-            <a:pPr algn="l">
-              <a:lnSpc>
-                <a:spcPct val="100000"/>
-              </a:lnSpc>
-            </a:pPr>
-            <a:r>
-              <a:rPr sz="950" b="0" lang="ja-JP">
-                <a:solidFill>
-                  <a:srgbClr val="0D7870"/>
-                </a:solidFill>
-                <a:latin typeface="Yu Gothic"/>
-                <a:ea typeface="Yu Gothic"/>
-                <a:cs typeface="Yu Gothic"/>
-              </a:rPr>
-              <a:t>↗  https://example.com/docs/operations-guide</a:t>
-            </a:r>
-          </a:p>
-        </p:txBody>
-      </p:sp>
-      <p:sp>
-        <p:nvSpPr>
-          <p:cNvPr id="23" name="references:link[1]">
-            <a:hlinkClick r:id="rId3"/>
-          </p:cNvPr>
-          <p:cNvSpPr/>
-          <p:nvPr/>
-        </p:nvSpPr>
-        <p:spPr>
-          <a:xfrm>
-            <a:off x="1179576" y="3318764"/>
-            <a:ext cx="10509199" cy="274320"/>
-          </a:xfrm>
-          <a:prstGeom prst="rect">
-            <a:avLst/>
-          </a:prstGeom>
-          <a:noFill/>
-          <a:ln>
-            <a:noFill/>
-          </a:ln>
-          <a:effectLst/>
-        </p:spPr>
-        <p:style>
-          <a:lnRef idx="1">
-            <a:schemeClr val="accent1"/>
-          </a:lnRef>
-          <a:fillRef idx="3">
-            <a:schemeClr val="accent1"/>
-          </a:fillRef>
-          <a:effectRef idx="2">
-            <a:schemeClr val="accent1"/>
-          </a:effectRef>
-          <a:fontRef idx="minor">
-            <a:schemeClr val="lt1"/>
-          </a:fontRef>
-        </p:style>
-        <p:txBody>
-          <a:bodyPr rtlCol="0" anchor="ctr"/>
-          <a:lstStyle/>
-          <a:p>
-            <a:pPr algn="ctr"/>
-          </a:p>
-        </p:txBody>
-      </p:sp>
-      <p:sp>
-        <p:nvSpPr>
-          <p:cNvPr id="24" name="Rectangle 23"/>
-          <p:cNvSpPr/>
-          <p:nvPr/>
-        </p:nvSpPr>
-        <p:spPr>
-          <a:xfrm>
-            <a:off x="1179576" y="3757676"/>
-            <a:ext cx="10509199" cy="9144"/>
-          </a:xfrm>
-          <a:prstGeom prst="rect">
-            <a:avLst/>
-          </a:prstGeom>
-          <a:solidFill>
-            <a:srgbClr val="D1CFC8"/>
-          </a:solidFill>
-          <a:ln>
-            <a:noFill/>
-          </a:ln>
-          <a:effectLst/>
-        </p:spPr>
-        <p:style>
-          <a:lnRef idx="1">
-            <a:schemeClr val="accent1"/>
-          </a:lnRef>
-          <a:fillRef idx="3">
-            <a:schemeClr val="accent1"/>
-          </a:fillRef>
-          <a:effectRef idx="2">
-            <a:schemeClr val="accent1"/>
-          </a:effectRef>
-          <a:fontRef idx="minor">
-            <a:schemeClr val="lt1"/>
-          </a:fontRef>
-        </p:style>
-        <p:txBody>
-          <a:bodyPr rtlCol="0" anchor="ctr"/>
-          <a:lstStyle/>
-          <a:p>
-            <a:pPr algn="ctr"/>
-          </a:p>
-        </p:txBody>
-      </p:sp>
-      <p:sp>
-        <p:nvSpPr>
-          <p:cNvPr id="25" name="Rectangle 24"/>
-          <p:cNvSpPr/>
-          <p:nvPr/>
-        </p:nvSpPr>
-        <p:spPr>
-          <a:xfrm>
-            <a:off x="1179576" y="3757676"/>
-            <a:ext cx="804672" cy="32004"/>
-          </a:xfrm>
-          <a:prstGeom prst="rect">
-            <a:avLst/>
-          </a:prstGeom>
-          <a:solidFill>
-            <a:srgbClr val="0D7870"/>
-          </a:solidFill>
-          <a:ln>
-            <a:noFill/>
-          </a:ln>
-          <a:effectLst/>
-        </p:spPr>
-        <p:style>
-          <a:lnRef idx="1">
-            <a:schemeClr val="accent1"/>
-          </a:lnRef>
-          <a:fillRef idx="3">
-            <a:schemeClr val="accent1"/>
-          </a:fillRef>
-          <a:effectRef idx="2">
-            <a:schemeClr val="accent1"/>
-          </a:effectRef>
-          <a:fontRef idx="minor">
-            <a:schemeClr val="lt1"/>
-          </a:fontRef>
-        </p:style>
-        <p:txBody>
-          <a:bodyPr rtlCol="0" anchor="ctr"/>
-          <a:lstStyle/>
-          <a:p>
-            <a:pPr algn="ctr"/>
-          </a:p>
-        </p:txBody>
-      </p:sp>
-      <p:sp>
-        <p:nvSpPr>
-          <p:cNvPr id="26" name="references:index[2]"/>
-          <p:cNvSpPr/>
-          <p:nvPr/>
-        </p:nvSpPr>
-        <p:spPr>
-          <a:xfrm>
-            <a:off x="521208" y="3867404"/>
-            <a:ext cx="457200" cy="292608"/>
-          </a:xfrm>
-          <a:prstGeom prst="roundRect">
-            <a:avLst>
-              <a:gd name="adj" fmla="val 6000"/>
-            </a:avLst>
-          </a:prstGeom>
-          <a:solidFill>
-            <a:srgbClr val="0D7870"/>
-          </a:solidFill>
-          <a:ln>
-            <a:noFill/>
-          </a:ln>
-          <a:effectLst/>
-        </p:spPr>
-        <p:style>
-          <a:lnRef idx="1">
-            <a:schemeClr val="accent1"/>
-          </a:lnRef>
-          <a:fillRef idx="3">
-            <a:schemeClr val="accent1"/>
-          </a:fillRef>
-          <a:effectRef idx="2">
-            <a:schemeClr val="accent1"/>
-          </a:effectRef>
-          <a:fontRef idx="minor">
-            <a:schemeClr val="lt1"/>
-          </a:fontRef>
-        </p:style>
-        <p:txBody>
-          <a:bodyPr rtlCol="0" anchor="ctr"/>
-          <a:lstStyle/>
-          <a:p>
-            <a:pPr algn="ctr"/>
-          </a:p>
-        </p:txBody>
-      </p:sp>
-      <p:sp>
-        <p:nvSpPr>
-          <p:cNvPr id="27" name="TextBox 26"/>
-          <p:cNvSpPr txBox="1"/>
-          <p:nvPr/>
-        </p:nvSpPr>
-        <p:spPr>
-          <a:xfrm>
-            <a:off x="521208" y="3867404"/>
-            <a:ext cx="457200" cy="292608"/>
-          </a:xfrm>
-          <a:prstGeom prst="rect">
-            <a:avLst/>
-          </a:prstGeom>
-          <a:noFill/>
-        </p:spPr>
-        <p:txBody>
-          <a:bodyPr wrap="square" anchor="ctr" lIns="0" rIns="0" tIns="0" bIns="0">
-            <a:spAutoFit/>
-          </a:bodyPr>
-          <a:lstStyle/>
-          <a:p>
-            <a:pPr algn="ctr">
-              <a:lnSpc>
-                <a:spcPct val="130000"/>
-              </a:lnSpc>
-            </a:pPr>
-            <a:r>
-              <a:rPr sz="900" b="1" lang="ja-JP">
-                <a:solidFill>
-                  <a:srgbClr val="FFFFFC"/>
-                </a:solidFill>
-                <a:latin typeface="Yu Gothic"/>
-                <a:ea typeface="Yu Gothic"/>
-                <a:cs typeface="Yu Gothic"/>
-              </a:rPr>
-              <a:t>[3]</a:t>
-            </a:r>
-          </a:p>
-        </p:txBody>
-      </p:sp>
-      <p:sp>
-        <p:nvSpPr>
-          <p:cNvPr id="28" name="TextBox 27"/>
-          <p:cNvSpPr txBox="1"/>
-          <p:nvPr/>
-        </p:nvSpPr>
-        <p:spPr>
-          <a:xfrm>
-            <a:off x="1179576" y="3849116"/>
-            <a:ext cx="7589520" cy="329184"/>
-          </a:xfrm>
-          <a:prstGeom prst="rect">
-            <a:avLst/>
-          </a:prstGeom>
-          <a:noFill/>
-        </p:spPr>
-        <p:txBody>
-          <a:bodyPr wrap="square" anchor="t" lIns="0" rIns="0" tIns="0" bIns="0">
-            <a:spAutoFit/>
-          </a:bodyPr>
-          <a:lstStyle/>
-          <a:p>
-            <a:pPr algn="l">
-              <a:lnSpc>
-                <a:spcPct val="104000"/>
-              </a:lnSpc>
-            </a:pPr>
-            <a:r>
-              <a:rPr sz="1450" b="1" lang="ja-JP">
-                <a:solidFill>
-                  <a:srgbClr val="182C43"/>
-                </a:solidFill>
-                <a:latin typeface="Yu Gothic"/>
-                <a:ea typeface="Yu Gothic"/>
-                <a:cs typeface="Yu Gothic"/>
-              </a:rPr>
-              <a:t>料金ページ</a:t>
-            </a:r>
-          </a:p>
-        </p:txBody>
-      </p:sp>
-      <p:sp>
-        <p:nvSpPr>
-          <p:cNvPr id="29" name="Rounded Rectangle 28"/>
-          <p:cNvSpPr/>
-          <p:nvPr/>
-        </p:nvSpPr>
-        <p:spPr>
-          <a:xfrm>
-            <a:off x="10180015" y="3849116"/>
-            <a:ext cx="1508760" cy="256032"/>
-          </a:xfrm>
-          <a:prstGeom prst="roundRect">
-            <a:avLst>
-              <a:gd name="adj" fmla="val 6000"/>
-            </a:avLst>
-          </a:prstGeom>
-          <a:solidFill>
-            <a:srgbClr val="DFEBE8"/>
-          </a:solidFill>
-          <a:ln>
-            <a:noFill/>
-          </a:ln>
-          <a:effectLst/>
-        </p:spPr>
-        <p:style>
-          <a:lnRef idx="1">
-            <a:schemeClr val="accent1"/>
-          </a:lnRef>
-          <a:fillRef idx="3">
-            <a:schemeClr val="accent1"/>
-          </a:fillRef>
-          <a:effectRef idx="2">
-            <a:schemeClr val="accent1"/>
-          </a:effectRef>
-          <a:fontRef idx="minor">
-            <a:schemeClr val="lt1"/>
-          </a:fontRef>
-        </p:style>
-        <p:txBody>
-          <a:bodyPr rtlCol="0" anchor="ctr"/>
-          <a:lstStyle/>
-          <a:p>
-            <a:pPr algn="ctr"/>
-          </a:p>
-        </p:txBody>
-      </p:sp>
-      <p:sp>
-        <p:nvSpPr>
-          <p:cNvPr id="30" name="TextBox 29"/>
-          <p:cNvSpPr txBox="1"/>
-          <p:nvPr/>
-        </p:nvSpPr>
-        <p:spPr>
-          <a:xfrm>
-            <a:off x="10253167" y="3849116"/>
-            <a:ext cx="1362456" cy="256032"/>
-          </a:xfrm>
-          <a:prstGeom prst="rect">
-            <a:avLst/>
-          </a:prstGeom>
-          <a:noFill/>
-        </p:spPr>
-        <p:txBody>
-          <a:bodyPr wrap="square" anchor="ctr" lIns="0" rIns="0" tIns="0" bIns="0">
-            <a:spAutoFit/>
-          </a:bodyPr>
-          <a:lstStyle/>
-          <a:p>
-            <a:pPr algn="ctr">
-              <a:lnSpc>
-                <a:spcPct val="100000"/>
-              </a:lnSpc>
-            </a:pPr>
-            <a:r>
-              <a:rPr sz="900" b="1" lang="ja-JP">
-                <a:solidFill>
-                  <a:srgbClr val="0D7870"/>
-                </a:solidFill>
-                <a:latin typeface="Yu Gothic"/>
-                <a:ea typeface="Yu Gothic"/>
-                <a:cs typeface="Yu Gothic"/>
-              </a:rPr>
-              <a:t>費用</a:t>
-            </a:r>
-          </a:p>
-        </p:txBody>
-      </p:sp>
-      <p:sp>
-        <p:nvSpPr>
-          <p:cNvPr id="31" name="references:url[2]"/>
-          <p:cNvSpPr txBox="1"/>
-          <p:nvPr/>
-        </p:nvSpPr>
-        <p:spPr>
-          <a:xfrm>
-            <a:off x="1179576" y="4233164"/>
-            <a:ext cx="10509199" cy="274320"/>
-          </a:xfrm>
-          <a:prstGeom prst="rect">
-            <a:avLst/>
-          </a:prstGeom>
-          <a:noFill/>
-        </p:spPr>
-        <p:txBody>
-          <a:bodyPr wrap="square" anchor="t" lIns="0" rIns="0" tIns="0" bIns="0">
-            <a:spAutoFit/>
-          </a:bodyPr>
-          <a:lstStyle/>
-          <a:p>
-            <a:pPr algn="l">
-              <a:lnSpc>
-                <a:spcPct val="100000"/>
-              </a:lnSpc>
-            </a:pPr>
-            <a:r>
-              <a:rPr sz="950" b="0" lang="ja-JP">
-                <a:solidFill>
-                  <a:srgbClr val="0D7870"/>
-                </a:solidFill>
-                <a:latin typeface="Yu Gothic"/>
-                <a:ea typeface="Yu Gothic"/>
-                <a:cs typeface="Yu Gothic"/>
-              </a:rPr>
-              <a:t>↗  https://example.com/pricing</a:t>
-            </a:r>
-          </a:p>
-        </p:txBody>
-      </p:sp>
-      <p:sp>
-        <p:nvSpPr>
-          <p:cNvPr id="32" name="references:link[2]">
-            <a:hlinkClick r:id="rId4"/>
-          </p:cNvPr>
-          <p:cNvSpPr/>
-          <p:nvPr/>
-        </p:nvSpPr>
-        <p:spPr>
-          <a:xfrm>
-            <a:off x="1179576" y="4233164"/>
-            <a:ext cx="10509199" cy="274320"/>
-          </a:xfrm>
-          <a:prstGeom prst="rect">
-            <a:avLst/>
-          </a:prstGeom>
-          <a:noFill/>
-          <a:ln>
-            <a:noFill/>
-          </a:ln>
-          <a:effectLst/>
-        </p:spPr>
-        <p:style>
-          <a:lnRef idx="1">
-            <a:schemeClr val="accent1"/>
-          </a:lnRef>
-          <a:fillRef idx="3">
-            <a:schemeClr val="accent1"/>
-          </a:fillRef>
-          <a:effectRef idx="2">
-            <a:schemeClr val="accent1"/>
-          </a:effectRef>
-          <a:fontRef idx="minor">
-            <a:schemeClr val="lt1"/>
-          </a:fontRef>
-        </p:style>
-        <p:txBody>
-          <a:bodyPr rtlCol="0" anchor="ctr"/>
-          <a:lstStyle/>
-          <a:p>
-            <a:pPr algn="ctr"/>
-          </a:p>
-        </p:txBody>
-      </p:sp>
-      <p:sp>
-        <p:nvSpPr>
-          <p:cNvPr id="33" name="Rectangle 32"/>
-          <p:cNvSpPr/>
-          <p:nvPr/>
-        </p:nvSpPr>
-        <p:spPr>
-          <a:xfrm>
-            <a:off x="658368" y="6327648"/>
-            <a:ext cx="10881360" cy="9144"/>
-          </a:xfrm>
-          <a:prstGeom prst="rect">
-            <a:avLst/>
-          </a:prstGeom>
-          <a:solidFill>
-            <a:srgbClr val="D1CFC8"/>
-          </a:solidFill>
-          <a:ln>
-            <a:noFill/>
-          </a:ln>
-          <a:effectLst/>
-        </p:spPr>
-        <p:style>
-          <a:lnRef idx="1">
-            <a:schemeClr val="accent1"/>
-          </a:lnRef>
-          <a:fillRef idx="3">
-            <a:schemeClr val="accent1"/>
-          </a:fillRef>
-          <a:effectRef idx="2">
-            <a:schemeClr val="accent1"/>
-          </a:effectRef>
-          <a:fontRef idx="minor">
-            <a:schemeClr val="lt1"/>
-          </a:fontRef>
-        </p:style>
-        <p:txBody>
-          <a:bodyPr rtlCol="0" anchor="ctr"/>
-          <a:lstStyle/>
-          <a:p>
-            <a:pPr algn="ctr"/>
-          </a:p>
-        </p:txBody>
-      </p:sp>
-      <p:sp>
-        <p:nvSpPr>
-          <p:cNvPr id="34" name="TextBox 33"/>
+          <p:cNvPr id="29" name="TextBox 28"/>
           <p:cNvSpPr txBox="1"/>
           <p:nvPr/>
         </p:nvSpPr>
@@ -56991,7 +56772,7 @@
       </p:sp>
       <p:sp>
         <p:nvSpPr>
-          <p:cNvPr id="35" name="TextBox 34"/>
+          <p:cNvPr id="30" name="TextBox 29"/>
           <p:cNvSpPr txBox="1"/>
           <p:nvPr/>
         </p:nvSpPr>

--- a/examples/gallery/pattern_gallery.pptx
+++ b/examples/gallery/pattern_gallery.pptx
@@ -52836,7 +52836,7 @@
       </p:cxnSp>
       <p:cxnSp>
         <p:nvCxnSpPr>
-          <p:cNvPr id="12" name="Connector 11"/>
+          <p:cNvPr id="12" name="sequence-lifeline:ops"/>
           <p:cNvCxnSpPr/>
           <p:nvPr/>
         </p:nvCxnSpPr>
@@ -52848,10 +52848,9 @@
           <a:prstGeom prst="line">
             <a:avLst/>
           </a:prstGeom>
-          <a:ln w="9525">
-            <a:prstDash val="dash"/>
+          <a:ln w="7620">
             <a:solidFill>
-              <a:srgbClr val="666E70"/>
+              <a:srgbClr val="D1CFC8"/>
             </a:solidFill>
           </a:ln>
           <a:effectLst/>
@@ -52950,7 +52949,7 @@
       </p:cxnSp>
       <p:cxnSp>
         <p:nvCxnSpPr>
-          <p:cNvPr id="15" name="Connector 14"/>
+          <p:cNvPr id="15" name="sequence-lifeline:monitor"/>
           <p:cNvCxnSpPr/>
           <p:nvPr/>
         </p:nvCxnSpPr>
@@ -52962,10 +52961,9 @@
           <a:prstGeom prst="line">
             <a:avLst/>
           </a:prstGeom>
-          <a:ln w="9525">
-            <a:prstDash val="dash"/>
+          <a:ln w="7620">
             <a:solidFill>
-              <a:srgbClr val="666E70"/>
+              <a:srgbClr val="D1CFC8"/>
             </a:solidFill>
           </a:ln>
           <a:effectLst/>
@@ -53064,7 +53062,7 @@
       </p:cxnSp>
       <p:cxnSp>
         <p:nvCxnSpPr>
-          <p:cNvPr id="18" name="Connector 17"/>
+          <p:cNvPr id="18" name="sequence-lifeline:branch"/>
           <p:cNvCxnSpPr/>
           <p:nvPr/>
         </p:nvCxnSpPr>
@@ -53076,10 +53074,9 @@
           <a:prstGeom prst="line">
             <a:avLst/>
           </a:prstGeom>
-          <a:ln w="9525">
-            <a:prstDash val="dash"/>
+          <a:ln w="7620">
             <a:solidFill>
-              <a:srgbClr val="666E70"/>
+              <a:srgbClr val="D1CFC8"/>
             </a:solidFill>
           </a:ln>
           <a:effectLst/>
@@ -53178,7 +53175,7 @@
       </p:cxnSp>
       <p:cxnSp>
         <p:nvCxnSpPr>
-          <p:cNvPr id="21" name="Connector 20"/>
+          <p:cNvPr id="21" name="sequence-lifeline:center"/>
           <p:cNvCxnSpPr/>
           <p:nvPr/>
         </p:nvCxnSpPr>
@@ -53190,10 +53187,9 @@
           <a:prstGeom prst="line">
             <a:avLst/>
           </a:prstGeom>
-          <a:ln w="9525">
-            <a:prstDash val="dash"/>
+          <a:ln w="7620">
             <a:solidFill>
-              <a:srgbClr val="666E70"/>
+              <a:srgbClr val="D1CFC8"/>
             </a:solidFill>
           </a:ln>
           <a:effectLst/>
@@ -53292,7 +53288,7 @@
       </p:cxnSp>
       <p:cxnSp>
         <p:nvCxnSpPr>
-          <p:cNvPr id="24" name="Connector 23"/>
+          <p:cNvPr id="24" name="sequence-lifeline:carrier"/>
           <p:cNvCxnSpPr/>
           <p:nvPr/>
         </p:nvCxnSpPr>
@@ -53304,10 +53300,9 @@
           <a:prstGeom prst="line">
             <a:avLst/>
           </a:prstGeom>
-          <a:ln w="9525">
-            <a:prstDash val="dash"/>
+          <a:ln w="7620">
             <a:solidFill>
-              <a:srgbClr val="666E70"/>
+              <a:srgbClr val="D1CFC8"/>
             </a:solidFill>
           </a:ln>
           <a:effectLst/>

--- a/examples/gallery/pattern_gallery.pptx
+++ b/examples/gallery/pattern_gallery.pptx
@@ -8287,20 +8287,61 @@
       </p:sp>
       <p:sp>
         <p:nvSpPr>
-          <p:cNvPr id="5" name="Rectangle 4"/>
+          <p:cNvPr id="5" name="image-compare:label:0"/>
+          <p:cNvSpPr txBox="1"/>
+          <p:nvPr/>
+        </p:nvSpPr>
+        <p:spPr>
+          <a:xfrm>
+            <a:off x="694944" y="1664208"/>
+            <a:ext cx="5212080" cy="214630"/>
+          </a:xfrm>
+          <a:prstGeom prst="rect">
+            <a:avLst/>
+          </a:prstGeom>
+          <a:noFill/>
+        </p:spPr>
+        <p:txBody>
+          <a:bodyPr wrap="none" anchor="t" lIns="0" rIns="0" tIns="0" bIns="0">
+            <a:spAutoFit/>
+          </a:bodyPr>
+          <a:lstStyle/>
+          <a:p>
+            <a:pPr algn="l">
+              <a:lnSpc>
+                <a:spcPct val="130000"/>
+              </a:lnSpc>
+            </a:pPr>
+            <a:r>
+              <a:rPr sz="1300" b="1" lang="ja-JP">
+                <a:solidFill>
+                  <a:srgbClr val="182C43"/>
+                </a:solidFill>
+                <a:latin typeface="Yu Gothic"/>
+                <a:ea typeface="Yu Gothic"/>
+                <a:cs typeface="Yu Gothic"/>
+              </a:rPr>
+              <a:t>変更前</a:t>
+            </a:r>
+          </a:p>
+        </p:txBody>
+      </p:sp>
+      <p:sp>
+        <p:nvSpPr>
+          <p:cNvPr id="6" name="Rectangle 5"/>
           <p:cNvSpPr/>
           <p:nvPr/>
         </p:nvSpPr>
         <p:spPr>
           <a:xfrm>
-            <a:off x="694944" y="1444752"/>
-            <a:ext cx="5212080" cy="3566160"/>
+            <a:off x="694944" y="1897126"/>
+            <a:ext cx="5212080" cy="7315"/>
           </a:xfrm>
           <a:prstGeom prst="rect">
             <a:avLst/>
           </a:prstGeom>
           <a:solidFill>
-            <a:srgbClr val="ECEAE4"/>
+            <a:srgbClr val="D1CFC8"/>
           </a:solidFill>
           <a:ln>
             <a:noFill/>
@@ -8329,50 +8370,9 @@
           </a:p>
         </p:txBody>
       </p:sp>
-      <p:sp>
-        <p:nvSpPr>
-          <p:cNvPr id="6" name="TextBox 5"/>
-          <p:cNvSpPr txBox="1"/>
-          <p:nvPr/>
-        </p:nvSpPr>
-        <p:spPr>
-          <a:xfrm>
-            <a:off x="969264" y="1664208"/>
-            <a:ext cx="4663440" cy="274320"/>
-          </a:xfrm>
-          <a:prstGeom prst="rect">
-            <a:avLst/>
-          </a:prstGeom>
-          <a:noFill/>
-        </p:spPr>
-        <p:txBody>
-          <a:bodyPr wrap="square" anchor="t" lIns="0" rIns="0" tIns="0" bIns="0">
-            <a:spAutoFit/>
-          </a:bodyPr>
-          <a:lstStyle/>
-          <a:p>
-            <a:pPr algn="l">
-              <a:lnSpc>
-                <a:spcPct val="130000"/>
-              </a:lnSpc>
-            </a:pPr>
-            <a:r>
-              <a:rPr sz="950" b="1" lang="ja-JP">
-                <a:solidFill>
-                  <a:srgbClr val="666E70"/>
-                </a:solidFill>
-                <a:latin typeface="Yu Gothic"/>
-                <a:ea typeface="Yu Gothic"/>
-                <a:cs typeface="Yu Gothic"/>
-              </a:rPr>
-              <a:t>変更前</a:t>
-            </a:r>
-          </a:p>
-        </p:txBody>
-      </p:sp>
       <p:pic>
         <p:nvPicPr>
-          <p:cNvPr id="7" name="ComparisonImage" descr="GitHubで公開されているpptxdslリポジトリのトップ画面"/>
+          <p:cNvPr id="7" name="ComparisonImage" descr="架空の申請一覧画面。すべての申請を同じ文字階層で表示した変更前のサンプル"/>
           <p:cNvPicPr>
             <a:picLocks noChangeAspect="1"/>
           </p:cNvPicPr>
@@ -8380,15 +8380,14 @@
         </p:nvPicPr>
         <p:blipFill>
           <a:blip r:embed="rId2"/>
-          <a:srcRect l="4407" r="4407"/>
           <a:stretch>
             <a:fillRect/>
           </a:stretch>
         </p:blipFill>
         <p:spPr>
           <a:xfrm>
-            <a:off x="877824" y="2084832"/>
-            <a:ext cx="4846320" cy="2743200"/>
+            <a:off x="694944" y="2025142"/>
+            <a:ext cx="5212080" cy="3449170"/>
           </a:xfrm>
           <a:prstGeom prst="rect">
             <a:avLst/>
@@ -8404,20 +8403,61 @@
       </p:pic>
       <p:sp>
         <p:nvSpPr>
-          <p:cNvPr id="8" name="Rectangle 7"/>
+          <p:cNvPr id="8" name="image-compare:label:1"/>
+          <p:cNvSpPr txBox="1"/>
+          <p:nvPr/>
+        </p:nvSpPr>
+        <p:spPr>
+          <a:xfrm>
+            <a:off x="6291072" y="1664208"/>
+            <a:ext cx="5212080" cy="214630"/>
+          </a:xfrm>
+          <a:prstGeom prst="rect">
+            <a:avLst/>
+          </a:prstGeom>
+          <a:noFill/>
+        </p:spPr>
+        <p:txBody>
+          <a:bodyPr wrap="none" anchor="t" lIns="0" rIns="0" tIns="0" bIns="0">
+            <a:spAutoFit/>
+          </a:bodyPr>
+          <a:lstStyle/>
+          <a:p>
+            <a:pPr algn="l">
+              <a:lnSpc>
+                <a:spcPct val="130000"/>
+              </a:lnSpc>
+            </a:pPr>
+            <a:r>
+              <a:rPr sz="1300" b="1" lang="ja-JP">
+                <a:solidFill>
+                  <a:srgbClr val="182C43"/>
+                </a:solidFill>
+                <a:latin typeface="Yu Gothic"/>
+                <a:ea typeface="Yu Gothic"/>
+                <a:cs typeface="Yu Gothic"/>
+              </a:rPr>
+              <a:t>変更後</a:t>
+            </a:r>
+          </a:p>
+        </p:txBody>
+      </p:sp>
+      <p:sp>
+        <p:nvSpPr>
+          <p:cNvPr id="9" name="Rectangle 8"/>
           <p:cNvSpPr/>
           <p:nvPr/>
         </p:nvSpPr>
         <p:spPr>
           <a:xfrm>
-            <a:off x="6291072" y="1444752"/>
-            <a:ext cx="5212080" cy="3566160"/>
+            <a:off x="6291072" y="1897126"/>
+            <a:ext cx="5212080" cy="7315"/>
           </a:xfrm>
           <a:prstGeom prst="rect">
             <a:avLst/>
           </a:prstGeom>
           <a:solidFill>
-            <a:srgbClr val="DFEBE8"/>
+            <a:srgbClr val="D1CFC8"/>
           </a:solidFill>
           <a:ln>
             <a:noFill/>
@@ -8446,50 +8486,9 @@
           </a:p>
         </p:txBody>
       </p:sp>
-      <p:sp>
-        <p:nvSpPr>
-          <p:cNvPr id="9" name="TextBox 8"/>
-          <p:cNvSpPr txBox="1"/>
-          <p:nvPr/>
-        </p:nvSpPr>
-        <p:spPr>
-          <a:xfrm>
-            <a:off x="6565392" y="1664208"/>
-            <a:ext cx="4663440" cy="274320"/>
-          </a:xfrm>
-          <a:prstGeom prst="rect">
-            <a:avLst/>
-          </a:prstGeom>
-          <a:noFill/>
-        </p:spPr>
-        <p:txBody>
-          <a:bodyPr wrap="square" anchor="t" lIns="0" rIns="0" tIns="0" bIns="0">
-            <a:spAutoFit/>
-          </a:bodyPr>
-          <a:lstStyle/>
-          <a:p>
-            <a:pPr algn="l">
-              <a:lnSpc>
-                <a:spcPct val="130000"/>
-              </a:lnSpc>
-            </a:pPr>
-            <a:r>
-              <a:rPr sz="950" b="1" lang="ja-JP">
-                <a:solidFill>
-                  <a:srgbClr val="0D7870"/>
-                </a:solidFill>
-                <a:latin typeface="Yu Gothic"/>
-                <a:ea typeface="Yu Gothic"/>
-                <a:cs typeface="Yu Gothic"/>
-              </a:rPr>
-              <a:t>変更後</a:t>
-            </a:r>
-          </a:p>
-        </p:txBody>
-      </p:sp>
       <p:pic>
         <p:nvPicPr>
-          <p:cNvPr id="10" name="ComparisonImage" descr="濃紺のグラデーションに幾何学的な線を重ねた背景素材"/>
+          <p:cNvPr id="10" name="ComparisonImage" descr="同じ申請一覧の条件表示・申請名・状態を強調した変更後のサンプル"/>
           <p:cNvPicPr>
             <a:picLocks noChangeAspect="1"/>
           </p:cNvPicPr>
@@ -8497,15 +8496,14 @@
         </p:nvPicPr>
         <p:blipFill>
           <a:blip r:embed="rId3"/>
-          <a:srcRect l="286" r="286"/>
           <a:stretch>
             <a:fillRect/>
           </a:stretch>
         </p:blipFill>
         <p:spPr>
           <a:xfrm>
-            <a:off x="6473952" y="2084832"/>
-            <a:ext cx="4846320" cy="2743200"/>
+            <a:off x="6291072" y="2025142"/>
+            <a:ext cx="5212080" cy="3449170"/>
           </a:xfrm>
           <a:prstGeom prst="rect">
             <a:avLst/>

--- a/examples/gallery/pattern_gallery.pptx
+++ b/examples/gallery/pattern_gallery.pptx
@@ -3747,14 +3747,14 @@
       </p:sp>
       <p:cxnSp>
         <p:nvCxnSpPr>
-          <p:cNvPr id="5" name="Connector 4"/>
+          <p:cNvPr id="5" name="chart:grid"/>
           <p:cNvCxnSpPr/>
           <p:nvPr/>
         </p:nvCxnSpPr>
         <p:spPr>
           <a:xfrm>
-            <a:off x="1417319" y="5138927"/>
-            <a:ext cx="9848089" cy="0"/>
+            <a:off x="1081278" y="5047488"/>
+            <a:ext cx="10187178" cy="0"/>
           </a:xfrm>
           <a:prstGeom prst="line">
             <a:avLst/>
@@ -3764,6 +3764,7 @@
               <a:srgbClr val="D1CFC8"/>
             </a:solidFill>
           </a:ln>
+          <a:effectLst/>
         </p:spPr>
         <p:style>
           <a:lnRef idx="2">
@@ -3772,387 +3773,7 @@
           <a:fillRef idx="0">
             <a:schemeClr val="accent1"/>
           </a:fillRef>
-          <a:effectRef idx="1">
-            <a:schemeClr val="accent1"/>
-          </a:effectRef>
-          <a:fontRef idx="minor">
-            <a:schemeClr val="tx1"/>
-          </a:fontRef>
-        </p:style>
-      </p:cxnSp>
-      <p:sp>
-        <p:nvSpPr>
-          <p:cNvPr id="6" name="TextBox 5"/>
-          <p:cNvSpPr txBox="1"/>
-          <p:nvPr/>
-        </p:nvSpPr>
-        <p:spPr>
-          <a:xfrm>
-            <a:off x="996695" y="5056631"/>
-            <a:ext cx="329184" cy="164592"/>
-          </a:xfrm>
-          <a:prstGeom prst="rect">
-            <a:avLst/>
-          </a:prstGeom>
-          <a:noFill/>
-        </p:spPr>
-        <p:txBody>
-          <a:bodyPr wrap="square" anchor="t" lIns="0" rIns="0" tIns="0" bIns="0">
-            <a:spAutoFit/>
-          </a:bodyPr>
-          <a:lstStyle/>
-          <a:p>
-            <a:pPr algn="r">
-              <a:lnSpc>
-                <a:spcPct val="130000"/>
-              </a:lnSpc>
-            </a:pPr>
-            <a:r>
-              <a:rPr sz="780" b="0" lang="ja-JP">
-                <a:solidFill>
-                  <a:srgbClr val="666E70"/>
-                </a:solidFill>
-                <a:latin typeface="Yu Gothic"/>
-                <a:ea typeface="Yu Gothic"/>
-                <a:cs typeface="Yu Gothic"/>
-              </a:rPr>
-              <a:t>0</a:t>
-            </a:r>
-          </a:p>
-        </p:txBody>
-      </p:sp>
-      <p:cxnSp>
-        <p:nvCxnSpPr>
-          <p:cNvPr id="7" name="Connector 6"/>
-          <p:cNvCxnSpPr/>
-          <p:nvPr/>
-        </p:nvCxnSpPr>
-        <p:spPr>
-          <a:xfrm>
-            <a:off x="1417319" y="4299966"/>
-            <a:ext cx="9848089" cy="0"/>
-          </a:xfrm>
-          <a:prstGeom prst="line">
-            <a:avLst/>
-          </a:prstGeom>
-          <a:ln w="6985">
-            <a:solidFill>
-              <a:srgbClr val="D1CFC8"/>
-            </a:solidFill>
-          </a:ln>
-        </p:spPr>
-        <p:style>
-          <a:lnRef idx="2">
-            <a:schemeClr val="accent1"/>
-          </a:lnRef>
-          <a:fillRef idx="0">
-            <a:schemeClr val="accent1"/>
-          </a:fillRef>
-          <a:effectRef idx="1">
-            <a:schemeClr val="accent1"/>
-          </a:effectRef>
-          <a:fontRef idx="minor">
-            <a:schemeClr val="tx1"/>
-          </a:fontRef>
-        </p:style>
-      </p:cxnSp>
-      <p:sp>
-        <p:nvSpPr>
-          <p:cNvPr id="8" name="TextBox 7"/>
-          <p:cNvSpPr txBox="1"/>
-          <p:nvPr/>
-        </p:nvSpPr>
-        <p:spPr>
-          <a:xfrm>
-            <a:off x="996695" y="4217670"/>
-            <a:ext cx="329184" cy="164592"/>
-          </a:xfrm>
-          <a:prstGeom prst="rect">
-            <a:avLst/>
-          </a:prstGeom>
-          <a:noFill/>
-        </p:spPr>
-        <p:txBody>
-          <a:bodyPr wrap="square" anchor="t" lIns="0" rIns="0" tIns="0" bIns="0">
-            <a:spAutoFit/>
-          </a:bodyPr>
-          <a:lstStyle/>
-          <a:p>
-            <a:pPr algn="r">
-              <a:lnSpc>
-                <a:spcPct val="130000"/>
-              </a:lnSpc>
-            </a:pPr>
-            <a:r>
-              <a:rPr sz="780" b="0" lang="ja-JP">
-                <a:solidFill>
-                  <a:srgbClr val="666E70"/>
-                </a:solidFill>
-                <a:latin typeface="Yu Gothic"/>
-                <a:ea typeface="Yu Gothic"/>
-                <a:cs typeface="Yu Gothic"/>
-              </a:rPr>
-              <a:t>20</a:t>
-            </a:r>
-          </a:p>
-        </p:txBody>
-      </p:sp>
-      <p:cxnSp>
-        <p:nvCxnSpPr>
-          <p:cNvPr id="9" name="Connector 8"/>
-          <p:cNvCxnSpPr/>
-          <p:nvPr/>
-        </p:nvCxnSpPr>
-        <p:spPr>
-          <a:xfrm>
-            <a:off x="1417319" y="3461003"/>
-            <a:ext cx="9848089" cy="0"/>
-          </a:xfrm>
-          <a:prstGeom prst="line">
-            <a:avLst/>
-          </a:prstGeom>
-          <a:ln w="6985">
-            <a:solidFill>
-              <a:srgbClr val="D1CFC8"/>
-            </a:solidFill>
-          </a:ln>
-        </p:spPr>
-        <p:style>
-          <a:lnRef idx="2">
-            <a:schemeClr val="accent1"/>
-          </a:lnRef>
-          <a:fillRef idx="0">
-            <a:schemeClr val="accent1"/>
-          </a:fillRef>
-          <a:effectRef idx="1">
-            <a:schemeClr val="accent1"/>
-          </a:effectRef>
-          <a:fontRef idx="minor">
-            <a:schemeClr val="tx1"/>
-          </a:fontRef>
-        </p:style>
-      </p:cxnSp>
-      <p:sp>
-        <p:nvSpPr>
-          <p:cNvPr id="10" name="TextBox 9"/>
-          <p:cNvSpPr txBox="1"/>
-          <p:nvPr/>
-        </p:nvSpPr>
-        <p:spPr>
-          <a:xfrm>
-            <a:off x="996695" y="3378707"/>
-            <a:ext cx="329184" cy="164592"/>
-          </a:xfrm>
-          <a:prstGeom prst="rect">
-            <a:avLst/>
-          </a:prstGeom>
-          <a:noFill/>
-        </p:spPr>
-        <p:txBody>
-          <a:bodyPr wrap="square" anchor="t" lIns="0" rIns="0" tIns="0" bIns="0">
-            <a:spAutoFit/>
-          </a:bodyPr>
-          <a:lstStyle/>
-          <a:p>
-            <a:pPr algn="r">
-              <a:lnSpc>
-                <a:spcPct val="130000"/>
-              </a:lnSpc>
-            </a:pPr>
-            <a:r>
-              <a:rPr sz="780" b="0" lang="ja-JP">
-                <a:solidFill>
-                  <a:srgbClr val="666E70"/>
-                </a:solidFill>
-                <a:latin typeface="Yu Gothic"/>
-                <a:ea typeface="Yu Gothic"/>
-                <a:cs typeface="Yu Gothic"/>
-              </a:rPr>
-              <a:t>40</a:t>
-            </a:r>
-          </a:p>
-        </p:txBody>
-      </p:sp>
-      <p:cxnSp>
-        <p:nvCxnSpPr>
-          <p:cNvPr id="11" name="Connector 10"/>
-          <p:cNvCxnSpPr/>
-          <p:nvPr/>
-        </p:nvCxnSpPr>
-        <p:spPr>
-          <a:xfrm>
-            <a:off x="1417319" y="2622041"/>
-            <a:ext cx="9848089" cy="0"/>
-          </a:xfrm>
-          <a:prstGeom prst="line">
-            <a:avLst/>
-          </a:prstGeom>
-          <a:ln w="6985">
-            <a:solidFill>
-              <a:srgbClr val="D1CFC8"/>
-            </a:solidFill>
-          </a:ln>
-        </p:spPr>
-        <p:style>
-          <a:lnRef idx="2">
-            <a:schemeClr val="accent1"/>
-          </a:lnRef>
-          <a:fillRef idx="0">
-            <a:schemeClr val="accent1"/>
-          </a:fillRef>
-          <a:effectRef idx="1">
-            <a:schemeClr val="accent1"/>
-          </a:effectRef>
-          <a:fontRef idx="minor">
-            <a:schemeClr val="tx1"/>
-          </a:fontRef>
-        </p:style>
-      </p:cxnSp>
-      <p:sp>
-        <p:nvSpPr>
-          <p:cNvPr id="12" name="TextBox 11"/>
-          <p:cNvSpPr txBox="1"/>
-          <p:nvPr/>
-        </p:nvSpPr>
-        <p:spPr>
-          <a:xfrm>
-            <a:off x="996695" y="2539746"/>
-            <a:ext cx="329184" cy="164592"/>
-          </a:xfrm>
-          <a:prstGeom prst="rect">
-            <a:avLst/>
-          </a:prstGeom>
-          <a:noFill/>
-        </p:spPr>
-        <p:txBody>
-          <a:bodyPr wrap="square" anchor="t" lIns="0" rIns="0" tIns="0" bIns="0">
-            <a:spAutoFit/>
-          </a:bodyPr>
-          <a:lstStyle/>
-          <a:p>
-            <a:pPr algn="r">
-              <a:lnSpc>
-                <a:spcPct val="130000"/>
-              </a:lnSpc>
-            </a:pPr>
-            <a:r>
-              <a:rPr sz="780" b="0" lang="ja-JP">
-                <a:solidFill>
-                  <a:srgbClr val="666E70"/>
-                </a:solidFill>
-                <a:latin typeface="Yu Gothic"/>
-                <a:ea typeface="Yu Gothic"/>
-                <a:cs typeface="Yu Gothic"/>
-              </a:rPr>
-              <a:t>60</a:t>
-            </a:r>
-          </a:p>
-        </p:txBody>
-      </p:sp>
-      <p:cxnSp>
-        <p:nvCxnSpPr>
-          <p:cNvPr id="13" name="Connector 12"/>
-          <p:cNvCxnSpPr/>
-          <p:nvPr/>
-        </p:nvCxnSpPr>
-        <p:spPr>
-          <a:xfrm>
-            <a:off x="1417319" y="1783079"/>
-            <a:ext cx="9848089" cy="0"/>
-          </a:xfrm>
-          <a:prstGeom prst="line">
-            <a:avLst/>
-          </a:prstGeom>
-          <a:ln w="6985">
-            <a:solidFill>
-              <a:srgbClr val="D1CFC8"/>
-            </a:solidFill>
-          </a:ln>
-        </p:spPr>
-        <p:style>
-          <a:lnRef idx="2">
-            <a:schemeClr val="accent1"/>
-          </a:lnRef>
-          <a:fillRef idx="0">
-            <a:schemeClr val="accent1"/>
-          </a:fillRef>
-          <a:effectRef idx="1">
-            <a:schemeClr val="accent1"/>
-          </a:effectRef>
-          <a:fontRef idx="minor">
-            <a:schemeClr val="tx1"/>
-          </a:fontRef>
-        </p:style>
-      </p:cxnSp>
-      <p:sp>
-        <p:nvSpPr>
-          <p:cNvPr id="14" name="TextBox 13"/>
-          <p:cNvSpPr txBox="1"/>
-          <p:nvPr/>
-        </p:nvSpPr>
-        <p:spPr>
-          <a:xfrm>
-            <a:off x="996695" y="1700783"/>
-            <a:ext cx="329184" cy="164592"/>
-          </a:xfrm>
-          <a:prstGeom prst="rect">
-            <a:avLst/>
-          </a:prstGeom>
-          <a:noFill/>
-        </p:spPr>
-        <p:txBody>
-          <a:bodyPr wrap="square" anchor="t" lIns="0" rIns="0" tIns="0" bIns="0">
-            <a:spAutoFit/>
-          </a:bodyPr>
-          <a:lstStyle/>
-          <a:p>
-            <a:pPr algn="r">
-              <a:lnSpc>
-                <a:spcPct val="130000"/>
-              </a:lnSpc>
-            </a:pPr>
-            <a:r>
-              <a:rPr sz="780" b="0" lang="ja-JP">
-                <a:solidFill>
-                  <a:srgbClr val="666E70"/>
-                </a:solidFill>
-                <a:latin typeface="Yu Gothic"/>
-                <a:ea typeface="Yu Gothic"/>
-                <a:cs typeface="Yu Gothic"/>
-              </a:rPr>
-              <a:t>80</a:t>
-            </a:r>
-          </a:p>
-        </p:txBody>
-      </p:sp>
-      <p:cxnSp>
-        <p:nvCxnSpPr>
-          <p:cNvPr id="15" name="Connector 14"/>
-          <p:cNvCxnSpPr/>
-          <p:nvPr/>
-        </p:nvCxnSpPr>
-        <p:spPr>
-          <a:xfrm>
-            <a:off x="1417319" y="1783080"/>
-            <a:ext cx="0" cy="3355847"/>
-          </a:xfrm>
-          <a:prstGeom prst="line">
-            <a:avLst/>
-          </a:prstGeom>
-          <a:ln w="10160">
-            <a:solidFill>
-              <a:srgbClr val="666E70"/>
-            </a:solidFill>
-          </a:ln>
-        </p:spPr>
-        <p:style>
-          <a:lnRef idx="2">
-            <a:schemeClr val="accent1"/>
-          </a:lnRef>
-          <a:fillRef idx="0">
-            <a:schemeClr val="accent1"/>
-          </a:fillRef>
-          <a:effectRef idx="1">
+          <a:effectRef idx="0">
             <a:schemeClr val="accent1"/>
           </a:effectRef>
           <a:fontRef idx="minor">
@@ -4162,23 +3783,24 @@
       </p:cxnSp>
       <p:cxnSp>
         <p:nvCxnSpPr>
-          <p:cNvPr id="16" name="Connector 15"/>
+          <p:cNvPr id="6" name="chart:grid"/>
           <p:cNvCxnSpPr/>
           <p:nvPr/>
         </p:nvCxnSpPr>
         <p:spPr>
           <a:xfrm>
-            <a:off x="1417319" y="5138927"/>
-            <a:ext cx="9848089" cy="0"/>
+            <a:off x="1081278" y="4283201"/>
+            <a:ext cx="10187178" cy="0"/>
           </a:xfrm>
           <a:prstGeom prst="line">
             <a:avLst/>
           </a:prstGeom>
-          <a:ln w="10160">
+          <a:ln w="6985">
             <a:solidFill>
-              <a:srgbClr val="666E70"/>
+              <a:srgbClr val="D1CFC8"/>
             </a:solidFill>
           </a:ln>
+          <a:effectLst/>
         </p:spPr>
         <p:style>
           <a:lnRef idx="2">
@@ -4187,411 +3809,7 @@
           <a:fillRef idx="0">
             <a:schemeClr val="accent1"/>
           </a:fillRef>
-          <a:effectRef idx="1">
-            <a:schemeClr val="accent1"/>
-          </a:effectRef>
-          <a:fontRef idx="minor">
-            <a:schemeClr val="tx1"/>
-          </a:fontRef>
-        </p:style>
-      </p:cxnSp>
-      <p:sp>
-        <p:nvSpPr>
-          <p:cNvPr id="17" name="TextBox 16"/>
-          <p:cNvSpPr txBox="1"/>
-          <p:nvPr/>
-        </p:nvSpPr>
-        <p:spPr>
-          <a:xfrm>
-            <a:off x="1106423" y="5230367"/>
-            <a:ext cx="621792" cy="219456"/>
-          </a:xfrm>
-          <a:prstGeom prst="rect">
-            <a:avLst/>
-          </a:prstGeom>
-          <a:noFill/>
-        </p:spPr>
-        <p:txBody>
-          <a:bodyPr wrap="square" anchor="t" lIns="0" rIns="0" tIns="0" bIns="0">
-            <a:spAutoFit/>
-          </a:bodyPr>
-          <a:lstStyle/>
-          <a:p>
-            <a:pPr algn="ctr">
-              <a:lnSpc>
-                <a:spcPct val="130000"/>
-              </a:lnSpc>
-            </a:pPr>
-            <a:r>
-              <a:rPr sz="800" b="0" lang="ja-JP">
-                <a:solidFill>
-                  <a:srgbClr val="666E70"/>
-                </a:solidFill>
-                <a:latin typeface="Yu Gothic"/>
-                <a:ea typeface="Yu Gothic"/>
-                <a:cs typeface="Yu Gothic"/>
-              </a:rPr>
-              <a:t>4月</a:t>
-            </a:r>
-          </a:p>
-        </p:txBody>
-      </p:sp>
-      <p:sp>
-        <p:nvSpPr>
-          <p:cNvPr id="18" name="TextBox 17"/>
-          <p:cNvSpPr txBox="1"/>
-          <p:nvPr/>
-        </p:nvSpPr>
-        <p:spPr>
-          <a:xfrm>
-            <a:off x="2337435" y="5230367"/>
-            <a:ext cx="621792" cy="219456"/>
-          </a:xfrm>
-          <a:prstGeom prst="rect">
-            <a:avLst/>
-          </a:prstGeom>
-          <a:noFill/>
-        </p:spPr>
-        <p:txBody>
-          <a:bodyPr wrap="square" anchor="t" lIns="0" rIns="0" tIns="0" bIns="0">
-            <a:spAutoFit/>
-          </a:bodyPr>
-          <a:lstStyle/>
-          <a:p>
-            <a:pPr algn="ctr">
-              <a:lnSpc>
-                <a:spcPct val="130000"/>
-              </a:lnSpc>
-            </a:pPr>
-            <a:r>
-              <a:rPr sz="800" b="0" lang="ja-JP">
-                <a:solidFill>
-                  <a:srgbClr val="666E70"/>
-                </a:solidFill>
-                <a:latin typeface="Yu Gothic"/>
-                <a:ea typeface="Yu Gothic"/>
-                <a:cs typeface="Yu Gothic"/>
-              </a:rPr>
-              <a:t>5月</a:t>
-            </a:r>
-          </a:p>
-        </p:txBody>
-      </p:sp>
-      <p:sp>
-        <p:nvSpPr>
-          <p:cNvPr id="19" name="TextBox 18"/>
-          <p:cNvSpPr txBox="1"/>
-          <p:nvPr/>
-        </p:nvSpPr>
-        <p:spPr>
-          <a:xfrm>
-            <a:off x="3568446" y="5230367"/>
-            <a:ext cx="621792" cy="219456"/>
-          </a:xfrm>
-          <a:prstGeom prst="rect">
-            <a:avLst/>
-          </a:prstGeom>
-          <a:noFill/>
-        </p:spPr>
-        <p:txBody>
-          <a:bodyPr wrap="square" anchor="t" lIns="0" rIns="0" tIns="0" bIns="0">
-            <a:spAutoFit/>
-          </a:bodyPr>
-          <a:lstStyle/>
-          <a:p>
-            <a:pPr algn="ctr">
-              <a:lnSpc>
-                <a:spcPct val="130000"/>
-              </a:lnSpc>
-            </a:pPr>
-            <a:r>
-              <a:rPr sz="800" b="0" lang="ja-JP">
-                <a:solidFill>
-                  <a:srgbClr val="666E70"/>
-                </a:solidFill>
-                <a:latin typeface="Yu Gothic"/>
-                <a:ea typeface="Yu Gothic"/>
-                <a:cs typeface="Yu Gothic"/>
-              </a:rPr>
-              <a:t>6月</a:t>
-            </a:r>
-          </a:p>
-        </p:txBody>
-      </p:sp>
-      <p:sp>
-        <p:nvSpPr>
-          <p:cNvPr id="20" name="TextBox 19"/>
-          <p:cNvSpPr txBox="1"/>
-          <p:nvPr/>
-        </p:nvSpPr>
-        <p:spPr>
-          <a:xfrm>
-            <a:off x="4799457" y="5230367"/>
-            <a:ext cx="621792" cy="219456"/>
-          </a:xfrm>
-          <a:prstGeom prst="rect">
-            <a:avLst/>
-          </a:prstGeom>
-          <a:noFill/>
-        </p:spPr>
-        <p:txBody>
-          <a:bodyPr wrap="square" anchor="t" lIns="0" rIns="0" tIns="0" bIns="0">
-            <a:spAutoFit/>
-          </a:bodyPr>
-          <a:lstStyle/>
-          <a:p>
-            <a:pPr algn="ctr">
-              <a:lnSpc>
-                <a:spcPct val="130000"/>
-              </a:lnSpc>
-            </a:pPr>
-            <a:r>
-              <a:rPr sz="800" b="0" lang="ja-JP">
-                <a:solidFill>
-                  <a:srgbClr val="666E70"/>
-                </a:solidFill>
-                <a:latin typeface="Yu Gothic"/>
-                <a:ea typeface="Yu Gothic"/>
-                <a:cs typeface="Yu Gothic"/>
-              </a:rPr>
-              <a:t>7月</a:t>
-            </a:r>
-          </a:p>
-        </p:txBody>
-      </p:sp>
-      <p:sp>
-        <p:nvSpPr>
-          <p:cNvPr id="21" name="TextBox 20"/>
-          <p:cNvSpPr txBox="1"/>
-          <p:nvPr/>
-        </p:nvSpPr>
-        <p:spPr>
-          <a:xfrm>
-            <a:off x="6030468" y="5230367"/>
-            <a:ext cx="621792" cy="219456"/>
-          </a:xfrm>
-          <a:prstGeom prst="rect">
-            <a:avLst/>
-          </a:prstGeom>
-          <a:noFill/>
-        </p:spPr>
-        <p:txBody>
-          <a:bodyPr wrap="square" anchor="t" lIns="0" rIns="0" tIns="0" bIns="0">
-            <a:spAutoFit/>
-          </a:bodyPr>
-          <a:lstStyle/>
-          <a:p>
-            <a:pPr algn="ctr">
-              <a:lnSpc>
-                <a:spcPct val="130000"/>
-              </a:lnSpc>
-            </a:pPr>
-            <a:r>
-              <a:rPr sz="800" b="0" lang="ja-JP">
-                <a:solidFill>
-                  <a:srgbClr val="666E70"/>
-                </a:solidFill>
-                <a:latin typeface="Yu Gothic"/>
-                <a:ea typeface="Yu Gothic"/>
-                <a:cs typeface="Yu Gothic"/>
-              </a:rPr>
-              <a:t>8月</a:t>
-            </a:r>
-          </a:p>
-        </p:txBody>
-      </p:sp>
-      <p:sp>
-        <p:nvSpPr>
-          <p:cNvPr id="22" name="TextBox 21"/>
-          <p:cNvSpPr txBox="1"/>
-          <p:nvPr/>
-        </p:nvSpPr>
-        <p:spPr>
-          <a:xfrm>
-            <a:off x="7261479" y="5230367"/>
-            <a:ext cx="621792" cy="219456"/>
-          </a:xfrm>
-          <a:prstGeom prst="rect">
-            <a:avLst/>
-          </a:prstGeom>
-          <a:noFill/>
-        </p:spPr>
-        <p:txBody>
-          <a:bodyPr wrap="square" anchor="t" lIns="0" rIns="0" tIns="0" bIns="0">
-            <a:spAutoFit/>
-          </a:bodyPr>
-          <a:lstStyle/>
-          <a:p>
-            <a:pPr algn="ctr">
-              <a:lnSpc>
-                <a:spcPct val="130000"/>
-              </a:lnSpc>
-            </a:pPr>
-            <a:r>
-              <a:rPr sz="800" b="0" lang="ja-JP">
-                <a:solidFill>
-                  <a:srgbClr val="666E70"/>
-                </a:solidFill>
-                <a:latin typeface="Yu Gothic"/>
-                <a:ea typeface="Yu Gothic"/>
-                <a:cs typeface="Yu Gothic"/>
-              </a:rPr>
-              <a:t>9月</a:t>
-            </a:r>
-          </a:p>
-        </p:txBody>
-      </p:sp>
-      <p:sp>
-        <p:nvSpPr>
-          <p:cNvPr id="23" name="TextBox 22"/>
-          <p:cNvSpPr txBox="1"/>
-          <p:nvPr/>
-        </p:nvSpPr>
-        <p:spPr>
-          <a:xfrm>
-            <a:off x="8492490" y="5230367"/>
-            <a:ext cx="621792" cy="219456"/>
-          </a:xfrm>
-          <a:prstGeom prst="rect">
-            <a:avLst/>
-          </a:prstGeom>
-          <a:noFill/>
-        </p:spPr>
-        <p:txBody>
-          <a:bodyPr wrap="square" anchor="t" lIns="0" rIns="0" tIns="0" bIns="0">
-            <a:spAutoFit/>
-          </a:bodyPr>
-          <a:lstStyle/>
-          <a:p>
-            <a:pPr algn="ctr">
-              <a:lnSpc>
-                <a:spcPct val="130000"/>
-              </a:lnSpc>
-            </a:pPr>
-            <a:r>
-              <a:rPr sz="800" b="0" lang="ja-JP">
-                <a:solidFill>
-                  <a:srgbClr val="666E70"/>
-                </a:solidFill>
-                <a:latin typeface="Yu Gothic"/>
-                <a:ea typeface="Yu Gothic"/>
-                <a:cs typeface="Yu Gothic"/>
-              </a:rPr>
-              <a:t>10月</a:t>
-            </a:r>
-          </a:p>
-        </p:txBody>
-      </p:sp>
-      <p:sp>
-        <p:nvSpPr>
-          <p:cNvPr id="24" name="TextBox 23"/>
-          <p:cNvSpPr txBox="1"/>
-          <p:nvPr/>
-        </p:nvSpPr>
-        <p:spPr>
-          <a:xfrm>
-            <a:off x="9723501" y="5230367"/>
-            <a:ext cx="621792" cy="219456"/>
-          </a:xfrm>
-          <a:prstGeom prst="rect">
-            <a:avLst/>
-          </a:prstGeom>
-          <a:noFill/>
-        </p:spPr>
-        <p:txBody>
-          <a:bodyPr wrap="square" anchor="t" lIns="0" rIns="0" tIns="0" bIns="0">
-            <a:spAutoFit/>
-          </a:bodyPr>
-          <a:lstStyle/>
-          <a:p>
-            <a:pPr algn="ctr">
-              <a:lnSpc>
-                <a:spcPct val="130000"/>
-              </a:lnSpc>
-            </a:pPr>
-            <a:r>
-              <a:rPr sz="800" b="0" lang="ja-JP">
-                <a:solidFill>
-                  <a:srgbClr val="666E70"/>
-                </a:solidFill>
-                <a:latin typeface="Yu Gothic"/>
-                <a:ea typeface="Yu Gothic"/>
-                <a:cs typeface="Yu Gothic"/>
-              </a:rPr>
-              <a:t>11月</a:t>
-            </a:r>
-          </a:p>
-        </p:txBody>
-      </p:sp>
-      <p:sp>
-        <p:nvSpPr>
-          <p:cNvPr id="25" name="TextBox 24"/>
-          <p:cNvSpPr txBox="1"/>
-          <p:nvPr/>
-        </p:nvSpPr>
-        <p:spPr>
-          <a:xfrm>
-            <a:off x="10954512" y="5230367"/>
-            <a:ext cx="621792" cy="219456"/>
-          </a:xfrm>
-          <a:prstGeom prst="rect">
-            <a:avLst/>
-          </a:prstGeom>
-          <a:noFill/>
-        </p:spPr>
-        <p:txBody>
-          <a:bodyPr wrap="square" anchor="t" lIns="0" rIns="0" tIns="0" bIns="0">
-            <a:spAutoFit/>
-          </a:bodyPr>
-          <a:lstStyle/>
-          <a:p>
-            <a:pPr algn="ctr">
-              <a:lnSpc>
-                <a:spcPct val="130000"/>
-              </a:lnSpc>
-            </a:pPr>
-            <a:r>
-              <a:rPr sz="800" b="0" lang="ja-JP">
-                <a:solidFill>
-                  <a:srgbClr val="666E70"/>
-                </a:solidFill>
-                <a:latin typeface="Yu Gothic"/>
-                <a:ea typeface="Yu Gothic"/>
-                <a:cs typeface="Yu Gothic"/>
-              </a:rPr>
-              <a:t>12月</a:t>
-            </a:r>
-          </a:p>
-        </p:txBody>
-      </p:sp>
-      <p:cxnSp>
-        <p:nvCxnSpPr>
-          <p:cNvPr id="26" name="Connector 25"/>
-          <p:cNvCxnSpPr/>
-          <p:nvPr/>
-        </p:nvCxnSpPr>
-        <p:spPr>
-          <a:xfrm flipV="1">
-            <a:off x="1417319" y="4383862"/>
-            <a:ext cx="1231012" cy="251688"/>
-          </a:xfrm>
-          <a:prstGeom prst="line">
-            <a:avLst/>
-          </a:prstGeom>
-          <a:ln w="22860">
-            <a:solidFill>
-              <a:srgbClr val="0D7870"/>
-            </a:solidFill>
-          </a:ln>
-        </p:spPr>
-        <p:style>
-          <a:lnRef idx="2">
-            <a:schemeClr val="accent1"/>
-          </a:lnRef>
-          <a:fillRef idx="0">
-            <a:schemeClr val="accent1"/>
-          </a:fillRef>
-          <a:effectRef idx="1">
+          <a:effectRef idx="0">
             <a:schemeClr val="accent1"/>
           </a:effectRef>
           <a:fontRef idx="minor">
@@ -4601,23 +3819,24 @@
       </p:cxnSp>
       <p:cxnSp>
         <p:nvCxnSpPr>
-          <p:cNvPr id="27" name="Connector 26"/>
+          <p:cNvPr id="7" name="chart:grid"/>
           <p:cNvCxnSpPr/>
           <p:nvPr/>
         </p:nvCxnSpPr>
         <p:spPr>
-          <a:xfrm flipV="1">
-            <a:off x="2648331" y="4090225"/>
-            <a:ext cx="1231010" cy="293637"/>
+          <a:xfrm>
+            <a:off x="1081278" y="3518915"/>
+            <a:ext cx="10187178" cy="0"/>
           </a:xfrm>
           <a:prstGeom prst="line">
             <a:avLst/>
           </a:prstGeom>
-          <a:ln w="22860">
+          <a:ln w="6985">
             <a:solidFill>
-              <a:srgbClr val="0D7870"/>
+              <a:srgbClr val="D1CFC8"/>
             </a:solidFill>
           </a:ln>
+          <a:effectLst/>
         </p:spPr>
         <p:style>
           <a:lnRef idx="2">
@@ -4626,7 +3845,7 @@
           <a:fillRef idx="0">
             <a:schemeClr val="accent1"/>
           </a:fillRef>
-          <a:effectRef idx="1">
+          <a:effectRef idx="0">
             <a:schemeClr val="accent1"/>
           </a:effectRef>
           <a:fontRef idx="minor">
@@ -4636,23 +3855,24 @@
       </p:cxnSp>
       <p:cxnSp>
         <p:nvCxnSpPr>
-          <p:cNvPr id="28" name="Connector 27"/>
+          <p:cNvPr id="8" name="chart:grid"/>
           <p:cNvCxnSpPr/>
           <p:nvPr/>
         </p:nvCxnSpPr>
         <p:spPr>
-          <a:xfrm flipV="1">
-            <a:off x="3879341" y="3838536"/>
-            <a:ext cx="1231012" cy="251689"/>
+          <a:xfrm>
+            <a:off x="1081278" y="2754629"/>
+            <a:ext cx="10187178" cy="0"/>
           </a:xfrm>
           <a:prstGeom prst="line">
             <a:avLst/>
           </a:prstGeom>
-          <a:ln w="22860">
+          <a:ln w="6985">
             <a:solidFill>
-              <a:srgbClr val="0D7870"/>
+              <a:srgbClr val="D1CFC8"/>
             </a:solidFill>
           </a:ln>
+          <a:effectLst/>
         </p:spPr>
         <p:style>
           <a:lnRef idx="2">
@@ -4661,7 +3881,7 @@
           <a:fillRef idx="0">
             <a:schemeClr val="accent1"/>
           </a:fillRef>
-          <a:effectRef idx="1">
+          <a:effectRef idx="0">
             <a:schemeClr val="accent1"/>
           </a:effectRef>
           <a:fontRef idx="minor">
@@ -4671,23 +3891,24 @@
       </p:cxnSp>
       <p:cxnSp>
         <p:nvCxnSpPr>
-          <p:cNvPr id="29" name="Connector 28"/>
+          <p:cNvPr id="9" name="chart:grid"/>
           <p:cNvCxnSpPr/>
           <p:nvPr/>
         </p:nvCxnSpPr>
         <p:spPr>
-          <a:xfrm flipV="1">
-            <a:off x="5110353" y="3293211"/>
-            <a:ext cx="1231011" cy="545325"/>
+          <a:xfrm>
+            <a:off x="1081278" y="1990344"/>
+            <a:ext cx="10187178" cy="0"/>
           </a:xfrm>
           <a:prstGeom prst="line">
             <a:avLst/>
           </a:prstGeom>
-          <a:ln w="22860">
+          <a:ln w="6985">
             <a:solidFill>
-              <a:srgbClr val="0D7870"/>
+              <a:srgbClr val="D1CFC8"/>
             </a:solidFill>
           </a:ln>
+          <a:effectLst/>
         </p:spPr>
         <p:style>
           <a:lnRef idx="2">
@@ -4696,7 +3917,7 @@
           <a:fillRef idx="0">
             <a:schemeClr val="accent1"/>
           </a:fillRef>
-          <a:effectRef idx="1">
+          <a:effectRef idx="0">
             <a:schemeClr val="accent1"/>
           </a:effectRef>
           <a:fontRef idx="minor">
@@ -4706,23 +3927,24 @@
       </p:cxnSp>
       <p:cxnSp>
         <p:nvCxnSpPr>
-          <p:cNvPr id="30" name="Connector 29"/>
+          <p:cNvPr id="10" name="chart:zero-axis"/>
           <p:cNvCxnSpPr/>
           <p:nvPr/>
         </p:nvCxnSpPr>
         <p:spPr>
-          <a:xfrm flipV="1">
-            <a:off x="6341364" y="2957626"/>
-            <a:ext cx="1231011" cy="335585"/>
+          <a:xfrm>
+            <a:off x="1081278" y="5047488"/>
+            <a:ext cx="10187178" cy="0"/>
           </a:xfrm>
           <a:prstGeom prst="line">
             <a:avLst/>
           </a:prstGeom>
-          <a:ln w="22860">
+          <a:ln w="11430">
             <a:solidFill>
-              <a:srgbClr val="0D7870"/>
+              <a:srgbClr val="666E70"/>
             </a:solidFill>
           </a:ln>
+          <a:effectLst/>
         </p:spPr>
         <p:style>
           <a:lnRef idx="2">
@@ -4731,7 +3953,7 @@
           <a:fillRef idx="0">
             <a:schemeClr val="accent1"/>
           </a:fillRef>
-          <a:effectRef idx="1">
+          <a:effectRef idx="0">
             <a:schemeClr val="accent1"/>
           </a:effectRef>
           <a:fontRef idx="minor">
@@ -4741,14 +3963,14 @@
       </p:cxnSp>
       <p:cxnSp>
         <p:nvCxnSpPr>
-          <p:cNvPr id="31" name="Connector 30"/>
+          <p:cNvPr id="11" name="chart:data-line"/>
           <p:cNvCxnSpPr/>
           <p:nvPr/>
         </p:nvCxnSpPr>
         <p:spPr>
           <a:xfrm flipV="1">
-            <a:off x="7572375" y="2580093"/>
-            <a:ext cx="1231011" cy="377533"/>
+            <a:off x="1647232" y="4359630"/>
+            <a:ext cx="1131909" cy="229286"/>
           </a:xfrm>
           <a:prstGeom prst="line">
             <a:avLst/>
@@ -4758,6 +3980,7 @@
               <a:srgbClr val="0D7870"/>
             </a:solidFill>
           </a:ln>
+          <a:effectLst/>
         </p:spPr>
         <p:style>
           <a:lnRef idx="2">
@@ -4766,7 +3989,7 @@
           <a:fillRef idx="0">
             <a:schemeClr val="accent1"/>
           </a:fillRef>
-          <a:effectRef idx="1">
+          <a:effectRef idx="0">
             <a:schemeClr val="accent1"/>
           </a:effectRef>
           <a:fontRef idx="minor">
@@ -4776,14 +3999,14 @@
       </p:cxnSp>
       <p:cxnSp>
         <p:nvCxnSpPr>
-          <p:cNvPr id="32" name="Connector 31"/>
+          <p:cNvPr id="12" name="chart:data-line"/>
           <p:cNvCxnSpPr/>
           <p:nvPr/>
         </p:nvCxnSpPr>
         <p:spPr>
           <a:xfrm flipV="1">
-            <a:off x="8803386" y="2328405"/>
-            <a:ext cx="1231011" cy="251688"/>
+            <a:off x="2779141" y="4092130"/>
+            <a:ext cx="1131908" cy="267500"/>
           </a:xfrm>
           <a:prstGeom prst="line">
             <a:avLst/>
@@ -4793,6 +4016,7 @@
               <a:srgbClr val="0D7870"/>
             </a:solidFill>
           </a:ln>
+          <a:effectLst/>
         </p:spPr>
         <p:style>
           <a:lnRef idx="2">
@@ -4801,7 +4025,7 @@
           <a:fillRef idx="0">
             <a:schemeClr val="accent1"/>
           </a:fillRef>
-          <a:effectRef idx="1">
+          <a:effectRef idx="0">
             <a:schemeClr val="accent1"/>
           </a:effectRef>
           <a:fontRef idx="minor">
@@ -4811,14 +4035,14 @@
       </p:cxnSp>
       <p:cxnSp>
         <p:nvCxnSpPr>
-          <p:cNvPr id="33" name="Connector 32"/>
+          <p:cNvPr id="13" name="chart:data-line"/>
           <p:cNvCxnSpPr/>
           <p:nvPr/>
         </p:nvCxnSpPr>
         <p:spPr>
           <a:xfrm flipV="1">
-            <a:off x="10034397" y="2034768"/>
-            <a:ext cx="1231011" cy="293637"/>
+            <a:off x="3911049" y="3862844"/>
+            <a:ext cx="1131909" cy="229286"/>
           </a:xfrm>
           <a:prstGeom prst="line">
             <a:avLst/>
@@ -4828,6 +4052,7 @@
               <a:srgbClr val="0D7870"/>
             </a:solidFill>
           </a:ln>
+          <a:effectLst/>
         </p:spPr>
         <p:style>
           <a:lnRef idx="2">
@@ -4836,447 +4061,7 @@
           <a:fillRef idx="0">
             <a:schemeClr val="accent1"/>
           </a:fillRef>
-          <a:effectRef idx="1">
-            <a:schemeClr val="accent1"/>
-          </a:effectRef>
-          <a:fontRef idx="minor">
-            <a:schemeClr val="tx1"/>
-          </a:fontRef>
-        </p:style>
-      </p:cxnSp>
-      <p:sp>
-        <p:nvSpPr>
-          <p:cNvPr id="34" name="Oval 33"/>
-          <p:cNvSpPr/>
-          <p:nvPr/>
-        </p:nvSpPr>
-        <p:spPr>
-          <a:xfrm>
-            <a:off x="1371599" y="4589830"/>
-            <a:ext cx="91440" cy="91440"/>
-          </a:xfrm>
-          <a:prstGeom prst="ellipse">
-            <a:avLst/>
-          </a:prstGeom>
-          <a:solidFill>
-            <a:srgbClr val="0D7870"/>
-          </a:solidFill>
-          <a:ln w="7620">
-            <a:solidFill>
-              <a:srgbClr val="FFFFFC"/>
-            </a:solidFill>
-          </a:ln>
-        </p:spPr>
-        <p:style>
-          <a:lnRef idx="1">
-            <a:schemeClr val="accent1"/>
-          </a:lnRef>
-          <a:fillRef idx="3">
-            <a:schemeClr val="accent1"/>
-          </a:fillRef>
-          <a:effectRef idx="2">
-            <a:schemeClr val="accent1"/>
-          </a:effectRef>
-          <a:fontRef idx="minor">
-            <a:schemeClr val="lt1"/>
-          </a:fontRef>
-        </p:style>
-        <p:txBody>
-          <a:bodyPr rtlCol="0" anchor="ctr"/>
-          <a:lstStyle/>
-          <a:p>
-            <a:pPr algn="ctr"/>
-          </a:p>
-        </p:txBody>
-      </p:sp>
-      <p:sp>
-        <p:nvSpPr>
-          <p:cNvPr id="35" name="Oval 34"/>
-          <p:cNvSpPr/>
-          <p:nvPr/>
-        </p:nvSpPr>
-        <p:spPr>
-          <a:xfrm>
-            <a:off x="2602611" y="4338142"/>
-            <a:ext cx="91440" cy="91440"/>
-          </a:xfrm>
-          <a:prstGeom prst="ellipse">
-            <a:avLst/>
-          </a:prstGeom>
-          <a:solidFill>
-            <a:srgbClr val="0D7870"/>
-          </a:solidFill>
-          <a:ln w="7620">
-            <a:solidFill>
-              <a:srgbClr val="FFFFFC"/>
-            </a:solidFill>
-          </a:ln>
-        </p:spPr>
-        <p:style>
-          <a:lnRef idx="1">
-            <a:schemeClr val="accent1"/>
-          </a:lnRef>
-          <a:fillRef idx="3">
-            <a:schemeClr val="accent1"/>
-          </a:fillRef>
-          <a:effectRef idx="2">
-            <a:schemeClr val="accent1"/>
-          </a:effectRef>
-          <a:fontRef idx="minor">
-            <a:schemeClr val="lt1"/>
-          </a:fontRef>
-        </p:style>
-        <p:txBody>
-          <a:bodyPr rtlCol="0" anchor="ctr"/>
-          <a:lstStyle/>
-          <a:p>
-            <a:pPr algn="ctr"/>
-          </a:p>
-        </p:txBody>
-      </p:sp>
-      <p:sp>
-        <p:nvSpPr>
-          <p:cNvPr id="36" name="Oval 35"/>
-          <p:cNvSpPr/>
-          <p:nvPr/>
-        </p:nvSpPr>
-        <p:spPr>
-          <a:xfrm>
-            <a:off x="3833622" y="4044505"/>
-            <a:ext cx="91440" cy="91440"/>
-          </a:xfrm>
-          <a:prstGeom prst="ellipse">
-            <a:avLst/>
-          </a:prstGeom>
-          <a:solidFill>
-            <a:srgbClr val="0D7870"/>
-          </a:solidFill>
-          <a:ln w="7620">
-            <a:solidFill>
-              <a:srgbClr val="FFFFFC"/>
-            </a:solidFill>
-          </a:ln>
-        </p:spPr>
-        <p:style>
-          <a:lnRef idx="1">
-            <a:schemeClr val="accent1"/>
-          </a:lnRef>
-          <a:fillRef idx="3">
-            <a:schemeClr val="accent1"/>
-          </a:fillRef>
-          <a:effectRef idx="2">
-            <a:schemeClr val="accent1"/>
-          </a:effectRef>
-          <a:fontRef idx="minor">
-            <a:schemeClr val="lt1"/>
-          </a:fontRef>
-        </p:style>
-        <p:txBody>
-          <a:bodyPr rtlCol="0" anchor="ctr"/>
-          <a:lstStyle/>
-          <a:p>
-            <a:pPr algn="ctr"/>
-          </a:p>
-        </p:txBody>
-      </p:sp>
-      <p:sp>
-        <p:nvSpPr>
-          <p:cNvPr id="37" name="Oval 36"/>
-          <p:cNvSpPr/>
-          <p:nvPr/>
-        </p:nvSpPr>
-        <p:spPr>
-          <a:xfrm>
-            <a:off x="5064633" y="3792816"/>
-            <a:ext cx="91440" cy="91440"/>
-          </a:xfrm>
-          <a:prstGeom prst="ellipse">
-            <a:avLst/>
-          </a:prstGeom>
-          <a:solidFill>
-            <a:srgbClr val="0D7870"/>
-          </a:solidFill>
-          <a:ln w="7620">
-            <a:solidFill>
-              <a:srgbClr val="FFFFFC"/>
-            </a:solidFill>
-          </a:ln>
-        </p:spPr>
-        <p:style>
-          <a:lnRef idx="1">
-            <a:schemeClr val="accent1"/>
-          </a:lnRef>
-          <a:fillRef idx="3">
-            <a:schemeClr val="accent1"/>
-          </a:fillRef>
-          <a:effectRef idx="2">
-            <a:schemeClr val="accent1"/>
-          </a:effectRef>
-          <a:fontRef idx="minor">
-            <a:schemeClr val="lt1"/>
-          </a:fontRef>
-        </p:style>
-        <p:txBody>
-          <a:bodyPr rtlCol="0" anchor="ctr"/>
-          <a:lstStyle/>
-          <a:p>
-            <a:pPr algn="ctr"/>
-          </a:p>
-        </p:txBody>
-      </p:sp>
-      <p:sp>
-        <p:nvSpPr>
-          <p:cNvPr id="38" name="Oval 37"/>
-          <p:cNvSpPr/>
-          <p:nvPr/>
-        </p:nvSpPr>
-        <p:spPr>
-          <a:xfrm>
-            <a:off x="6295644" y="3247491"/>
-            <a:ext cx="91440" cy="91440"/>
-          </a:xfrm>
-          <a:prstGeom prst="ellipse">
-            <a:avLst/>
-          </a:prstGeom>
-          <a:solidFill>
-            <a:srgbClr val="0D7870"/>
-          </a:solidFill>
-          <a:ln w="7620">
-            <a:solidFill>
-              <a:srgbClr val="FFFFFC"/>
-            </a:solidFill>
-          </a:ln>
-        </p:spPr>
-        <p:style>
-          <a:lnRef idx="1">
-            <a:schemeClr val="accent1"/>
-          </a:lnRef>
-          <a:fillRef idx="3">
-            <a:schemeClr val="accent1"/>
-          </a:fillRef>
-          <a:effectRef idx="2">
-            <a:schemeClr val="accent1"/>
-          </a:effectRef>
-          <a:fontRef idx="minor">
-            <a:schemeClr val="lt1"/>
-          </a:fontRef>
-        </p:style>
-        <p:txBody>
-          <a:bodyPr rtlCol="0" anchor="ctr"/>
-          <a:lstStyle/>
-          <a:p>
-            <a:pPr algn="ctr"/>
-          </a:p>
-        </p:txBody>
-      </p:sp>
-      <p:sp>
-        <p:nvSpPr>
-          <p:cNvPr id="39" name="Oval 38"/>
-          <p:cNvSpPr/>
-          <p:nvPr/>
-        </p:nvSpPr>
-        <p:spPr>
-          <a:xfrm>
-            <a:off x="7526654" y="2911906"/>
-            <a:ext cx="91440" cy="91440"/>
-          </a:xfrm>
-          <a:prstGeom prst="ellipse">
-            <a:avLst/>
-          </a:prstGeom>
-          <a:solidFill>
-            <a:srgbClr val="0D7870"/>
-          </a:solidFill>
-          <a:ln w="7620">
-            <a:solidFill>
-              <a:srgbClr val="FFFFFC"/>
-            </a:solidFill>
-          </a:ln>
-        </p:spPr>
-        <p:style>
-          <a:lnRef idx="1">
-            <a:schemeClr val="accent1"/>
-          </a:lnRef>
-          <a:fillRef idx="3">
-            <a:schemeClr val="accent1"/>
-          </a:fillRef>
-          <a:effectRef idx="2">
-            <a:schemeClr val="accent1"/>
-          </a:effectRef>
-          <a:fontRef idx="minor">
-            <a:schemeClr val="lt1"/>
-          </a:fontRef>
-        </p:style>
-        <p:txBody>
-          <a:bodyPr rtlCol="0" anchor="ctr"/>
-          <a:lstStyle/>
-          <a:p>
-            <a:pPr algn="ctr"/>
-          </a:p>
-        </p:txBody>
-      </p:sp>
-      <p:sp>
-        <p:nvSpPr>
-          <p:cNvPr id="40" name="Oval 39"/>
-          <p:cNvSpPr/>
-          <p:nvPr/>
-        </p:nvSpPr>
-        <p:spPr>
-          <a:xfrm>
-            <a:off x="8757666" y="2534373"/>
-            <a:ext cx="91440" cy="91440"/>
-          </a:xfrm>
-          <a:prstGeom prst="ellipse">
-            <a:avLst/>
-          </a:prstGeom>
-          <a:solidFill>
-            <a:srgbClr val="0D7870"/>
-          </a:solidFill>
-          <a:ln w="7620">
-            <a:solidFill>
-              <a:srgbClr val="FFFFFC"/>
-            </a:solidFill>
-          </a:ln>
-        </p:spPr>
-        <p:style>
-          <a:lnRef idx="1">
-            <a:schemeClr val="accent1"/>
-          </a:lnRef>
-          <a:fillRef idx="3">
-            <a:schemeClr val="accent1"/>
-          </a:fillRef>
-          <a:effectRef idx="2">
-            <a:schemeClr val="accent1"/>
-          </a:effectRef>
-          <a:fontRef idx="minor">
-            <a:schemeClr val="lt1"/>
-          </a:fontRef>
-        </p:style>
-        <p:txBody>
-          <a:bodyPr rtlCol="0" anchor="ctr"/>
-          <a:lstStyle/>
-          <a:p>
-            <a:pPr algn="ctr"/>
-          </a:p>
-        </p:txBody>
-      </p:sp>
-      <p:sp>
-        <p:nvSpPr>
-          <p:cNvPr id="41" name="Oval 40"/>
-          <p:cNvSpPr/>
-          <p:nvPr/>
-        </p:nvSpPr>
-        <p:spPr>
-          <a:xfrm>
-            <a:off x="9988677" y="2282685"/>
-            <a:ext cx="91440" cy="91440"/>
-          </a:xfrm>
-          <a:prstGeom prst="ellipse">
-            <a:avLst/>
-          </a:prstGeom>
-          <a:solidFill>
-            <a:srgbClr val="0D7870"/>
-          </a:solidFill>
-          <a:ln w="7620">
-            <a:solidFill>
-              <a:srgbClr val="FFFFFC"/>
-            </a:solidFill>
-          </a:ln>
-        </p:spPr>
-        <p:style>
-          <a:lnRef idx="1">
-            <a:schemeClr val="accent1"/>
-          </a:lnRef>
-          <a:fillRef idx="3">
-            <a:schemeClr val="accent1"/>
-          </a:fillRef>
-          <a:effectRef idx="2">
-            <a:schemeClr val="accent1"/>
-          </a:effectRef>
-          <a:fontRef idx="minor">
-            <a:schemeClr val="lt1"/>
-          </a:fontRef>
-        </p:style>
-        <p:txBody>
-          <a:bodyPr rtlCol="0" anchor="ctr"/>
-          <a:lstStyle/>
-          <a:p>
-            <a:pPr algn="ctr"/>
-          </a:p>
-        </p:txBody>
-      </p:sp>
-      <p:sp>
-        <p:nvSpPr>
-          <p:cNvPr id="42" name="Oval 41"/>
-          <p:cNvSpPr/>
-          <p:nvPr/>
-        </p:nvSpPr>
-        <p:spPr>
-          <a:xfrm>
-            <a:off x="11219688" y="1989048"/>
-            <a:ext cx="91440" cy="91440"/>
-          </a:xfrm>
-          <a:prstGeom prst="ellipse">
-            <a:avLst/>
-          </a:prstGeom>
-          <a:solidFill>
-            <a:srgbClr val="0D7870"/>
-          </a:solidFill>
-          <a:ln w="7620">
-            <a:solidFill>
-              <a:srgbClr val="FFFFFC"/>
-            </a:solidFill>
-          </a:ln>
-        </p:spPr>
-        <p:style>
-          <a:lnRef idx="1">
-            <a:schemeClr val="accent1"/>
-          </a:lnRef>
-          <a:fillRef idx="3">
-            <a:schemeClr val="accent1"/>
-          </a:fillRef>
-          <a:effectRef idx="2">
-            <a:schemeClr val="accent1"/>
-          </a:effectRef>
-          <a:fontRef idx="minor">
-            <a:schemeClr val="lt1"/>
-          </a:fontRef>
-        </p:style>
-        <p:txBody>
-          <a:bodyPr rtlCol="0" anchor="ctr"/>
-          <a:lstStyle/>
-          <a:p>
-            <a:pPr algn="ctr"/>
-          </a:p>
-        </p:txBody>
-      </p:sp>
-      <p:cxnSp>
-        <p:nvCxnSpPr>
-          <p:cNvPr id="43" name="Connector 42"/>
-          <p:cNvCxnSpPr/>
-          <p:nvPr/>
-        </p:nvCxnSpPr>
-        <p:spPr>
-          <a:xfrm flipV="1">
-            <a:off x="1417319" y="4090225"/>
-            <a:ext cx="1231012" cy="209741"/>
-          </a:xfrm>
-          <a:prstGeom prst="line">
-            <a:avLst/>
-          </a:prstGeom>
-          <a:ln w="22860">
-            <a:solidFill>
-              <a:srgbClr val="182C43"/>
-            </a:solidFill>
-          </a:ln>
-        </p:spPr>
-        <p:style>
-          <a:lnRef idx="2">
-            <a:schemeClr val="accent1"/>
-          </a:lnRef>
-          <a:fillRef idx="0">
-            <a:schemeClr val="accent1"/>
-          </a:fillRef>
-          <a:effectRef idx="1">
+          <a:effectRef idx="0">
             <a:schemeClr val="accent1"/>
           </a:effectRef>
           <a:fontRef idx="minor">
@@ -5286,23 +4071,24 @@
       </p:cxnSp>
       <p:cxnSp>
         <p:nvCxnSpPr>
-          <p:cNvPr id="44" name="Connector 43"/>
+          <p:cNvPr id="14" name="chart:data-line"/>
           <p:cNvCxnSpPr/>
           <p:nvPr/>
         </p:nvCxnSpPr>
         <p:spPr>
           <a:xfrm flipV="1">
-            <a:off x="2648331" y="3880484"/>
-            <a:ext cx="1231010" cy="209741"/>
+            <a:off x="5042958" y="3366058"/>
+            <a:ext cx="1131909" cy="496786"/>
           </a:xfrm>
           <a:prstGeom prst="line">
             <a:avLst/>
           </a:prstGeom>
           <a:ln w="22860">
             <a:solidFill>
-              <a:srgbClr val="182C43"/>
+              <a:srgbClr val="0D7870"/>
             </a:solidFill>
           </a:ln>
+          <a:effectLst/>
         </p:spPr>
         <p:style>
           <a:lnRef idx="2">
@@ -5311,7 +4097,7 @@
           <a:fillRef idx="0">
             <a:schemeClr val="accent1"/>
           </a:fillRef>
-          <a:effectRef idx="1">
+          <a:effectRef idx="0">
             <a:schemeClr val="accent1"/>
           </a:effectRef>
           <a:fontRef idx="minor">
@@ -5321,23 +4107,24 @@
       </p:cxnSp>
       <p:cxnSp>
         <p:nvCxnSpPr>
-          <p:cNvPr id="45" name="Connector 44"/>
+          <p:cNvPr id="15" name="chart:data-line"/>
           <p:cNvCxnSpPr/>
           <p:nvPr/>
         </p:nvCxnSpPr>
         <p:spPr>
           <a:xfrm flipV="1">
-            <a:off x="3879341" y="3670744"/>
-            <a:ext cx="1231012" cy="209740"/>
+            <a:off x="6174867" y="3060344"/>
+            <a:ext cx="1131908" cy="305714"/>
           </a:xfrm>
           <a:prstGeom prst="line">
             <a:avLst/>
           </a:prstGeom>
           <a:ln w="22860">
             <a:solidFill>
-              <a:srgbClr val="182C43"/>
+              <a:srgbClr val="0D7870"/>
             </a:solidFill>
           </a:ln>
+          <a:effectLst/>
         </p:spPr>
         <p:style>
           <a:lnRef idx="2">
@@ -5346,7 +4133,7 @@
           <a:fillRef idx="0">
             <a:schemeClr val="accent1"/>
           </a:fillRef>
-          <a:effectRef idx="1">
+          <a:effectRef idx="0">
             <a:schemeClr val="accent1"/>
           </a:effectRef>
           <a:fontRef idx="minor">
@@ -5356,23 +4143,24 @@
       </p:cxnSp>
       <p:cxnSp>
         <p:nvCxnSpPr>
-          <p:cNvPr id="46" name="Connector 45"/>
+          <p:cNvPr id="16" name="chart:data-line"/>
           <p:cNvCxnSpPr/>
           <p:nvPr/>
         </p:nvCxnSpPr>
         <p:spPr>
           <a:xfrm flipV="1">
-            <a:off x="5110353" y="3461003"/>
-            <a:ext cx="1231011" cy="209741"/>
+            <a:off x="7306775" y="2716415"/>
+            <a:ext cx="1131909" cy="343929"/>
           </a:xfrm>
           <a:prstGeom prst="line">
             <a:avLst/>
           </a:prstGeom>
           <a:ln w="22860">
             <a:solidFill>
-              <a:srgbClr val="182C43"/>
+              <a:srgbClr val="0D7870"/>
             </a:solidFill>
           </a:ln>
+          <a:effectLst/>
         </p:spPr>
         <p:style>
           <a:lnRef idx="2">
@@ -5381,7 +4169,7 @@
           <a:fillRef idx="0">
             <a:schemeClr val="accent1"/>
           </a:fillRef>
-          <a:effectRef idx="1">
+          <a:effectRef idx="0">
             <a:schemeClr val="accent1"/>
           </a:effectRef>
           <a:fontRef idx="minor">
@@ -5391,23 +4179,24 @@
       </p:cxnSp>
       <p:cxnSp>
         <p:nvCxnSpPr>
-          <p:cNvPr id="47" name="Connector 46"/>
+          <p:cNvPr id="17" name="chart:data-line"/>
           <p:cNvCxnSpPr/>
           <p:nvPr/>
         </p:nvCxnSpPr>
         <p:spPr>
           <a:xfrm flipV="1">
-            <a:off x="6341364" y="3041522"/>
-            <a:ext cx="1231011" cy="419481"/>
+            <a:off x="8438684" y="2487129"/>
+            <a:ext cx="1131909" cy="229286"/>
           </a:xfrm>
           <a:prstGeom prst="line">
             <a:avLst/>
           </a:prstGeom>
           <a:ln w="22860">
             <a:solidFill>
-              <a:srgbClr val="182C43"/>
+              <a:srgbClr val="0D7870"/>
             </a:solidFill>
           </a:ln>
+          <a:effectLst/>
         </p:spPr>
         <p:style>
           <a:lnRef idx="2">
@@ -5416,7 +4205,7 @@
           <a:fillRef idx="0">
             <a:schemeClr val="accent1"/>
           </a:fillRef>
-          <a:effectRef idx="1">
+          <a:effectRef idx="0">
             <a:schemeClr val="accent1"/>
           </a:effectRef>
           <a:fontRef idx="minor">
@@ -5426,23 +4215,24 @@
       </p:cxnSp>
       <p:cxnSp>
         <p:nvCxnSpPr>
-          <p:cNvPr id="48" name="Connector 47"/>
+          <p:cNvPr id="18" name="chart:data-line"/>
           <p:cNvCxnSpPr/>
           <p:nvPr/>
         </p:nvCxnSpPr>
         <p:spPr>
           <a:xfrm flipV="1">
-            <a:off x="7572375" y="2622041"/>
-            <a:ext cx="1231011" cy="419481"/>
+            <a:off x="9570593" y="2219629"/>
+            <a:ext cx="1131908" cy="267500"/>
           </a:xfrm>
           <a:prstGeom prst="line">
             <a:avLst/>
           </a:prstGeom>
           <a:ln w="22860">
             <a:solidFill>
-              <a:srgbClr val="182C43"/>
+              <a:srgbClr val="0D7870"/>
             </a:solidFill>
           </a:ln>
+          <a:effectLst/>
         </p:spPr>
         <p:style>
           <a:lnRef idx="2">
@@ -5451,7 +4241,7 @@
           <a:fillRef idx="0">
             <a:schemeClr val="accent1"/>
           </a:fillRef>
-          <a:effectRef idx="1">
+          <a:effectRef idx="0">
             <a:schemeClr val="accent1"/>
           </a:effectRef>
           <a:fontRef idx="minor">
@@ -5461,14 +4251,14 @@
       </p:cxnSp>
       <p:cxnSp>
         <p:nvCxnSpPr>
-          <p:cNvPr id="49" name="Connector 48"/>
+          <p:cNvPr id="19" name="chart:data-line"/>
           <p:cNvCxnSpPr/>
           <p:nvPr/>
         </p:nvCxnSpPr>
         <p:spPr>
           <a:xfrm flipV="1">
-            <a:off x="8803386" y="2202560"/>
-            <a:ext cx="1231011" cy="419481"/>
+            <a:off x="1647232" y="4092130"/>
+            <a:ext cx="1131909" cy="191071"/>
           </a:xfrm>
           <a:prstGeom prst="line">
             <a:avLst/>
@@ -5478,6 +4268,7 @@
               <a:srgbClr val="182C43"/>
             </a:solidFill>
           </a:ln>
+          <a:effectLst/>
         </p:spPr>
         <p:style>
           <a:lnRef idx="2">
@@ -5486,7 +4277,7 @@
           <a:fillRef idx="0">
             <a:schemeClr val="accent1"/>
           </a:fillRef>
-          <a:effectRef idx="1">
+          <a:effectRef idx="0">
             <a:schemeClr val="accent1"/>
           </a:effectRef>
           <a:fontRef idx="minor">
@@ -5496,14 +4287,14 @@
       </p:cxnSp>
       <p:cxnSp>
         <p:nvCxnSpPr>
-          <p:cNvPr id="50" name="Connector 49"/>
+          <p:cNvPr id="20" name="chart:data-line"/>
           <p:cNvCxnSpPr/>
           <p:nvPr/>
         </p:nvCxnSpPr>
         <p:spPr>
           <a:xfrm flipV="1">
-            <a:off x="10034397" y="1783079"/>
-            <a:ext cx="1231011" cy="419481"/>
+            <a:off x="2779141" y="3901058"/>
+            <a:ext cx="1131908" cy="191072"/>
           </a:xfrm>
           <a:prstGeom prst="line">
             <a:avLst/>
@@ -5513,6 +4304,7 @@
               <a:srgbClr val="182C43"/>
             </a:solidFill>
           </a:ln>
+          <a:effectLst/>
         </p:spPr>
         <p:style>
           <a:lnRef idx="2">
@@ -5521,7 +4313,7 @@
           <a:fillRef idx="0">
             <a:schemeClr val="accent1"/>
           </a:fillRef>
-          <a:effectRef idx="1">
+          <a:effectRef idx="0">
             <a:schemeClr val="accent1"/>
           </a:effectRef>
           <a:fontRef idx="minor">
@@ -5529,15 +4321,733 @@
           </a:fontRef>
         </p:style>
       </p:cxnSp>
-      <p:sp>
-        <p:nvSpPr>
-          <p:cNvPr id="51" name="Oval 50"/>
+      <p:cxnSp>
+        <p:nvCxnSpPr>
+          <p:cNvPr id="21" name="chart:data-line"/>
+          <p:cNvCxnSpPr/>
+          <p:nvPr/>
+        </p:nvCxnSpPr>
+        <p:spPr>
+          <a:xfrm flipV="1">
+            <a:off x="3911049" y="3709987"/>
+            <a:ext cx="1131909" cy="191071"/>
+          </a:xfrm>
+          <a:prstGeom prst="line">
+            <a:avLst/>
+          </a:prstGeom>
+          <a:ln w="22860">
+            <a:solidFill>
+              <a:srgbClr val="182C43"/>
+            </a:solidFill>
+          </a:ln>
+          <a:effectLst/>
+        </p:spPr>
+        <p:style>
+          <a:lnRef idx="2">
+            <a:schemeClr val="accent1"/>
+          </a:lnRef>
+          <a:fillRef idx="0">
+            <a:schemeClr val="accent1"/>
+          </a:fillRef>
+          <a:effectRef idx="0">
+            <a:schemeClr val="accent1"/>
+          </a:effectRef>
+          <a:fontRef idx="minor">
+            <a:schemeClr val="tx1"/>
+          </a:fontRef>
+        </p:style>
+      </p:cxnSp>
+      <p:cxnSp>
+        <p:nvCxnSpPr>
+          <p:cNvPr id="22" name="chart:data-line"/>
+          <p:cNvCxnSpPr/>
+          <p:nvPr/>
+        </p:nvCxnSpPr>
+        <p:spPr>
+          <a:xfrm flipV="1">
+            <a:off x="5042958" y="3518915"/>
+            <a:ext cx="1131909" cy="191072"/>
+          </a:xfrm>
+          <a:prstGeom prst="line">
+            <a:avLst/>
+          </a:prstGeom>
+          <a:ln w="22860">
+            <a:solidFill>
+              <a:srgbClr val="182C43"/>
+            </a:solidFill>
+          </a:ln>
+          <a:effectLst/>
+        </p:spPr>
+        <p:style>
+          <a:lnRef idx="2">
+            <a:schemeClr val="accent1"/>
+          </a:lnRef>
+          <a:fillRef idx="0">
+            <a:schemeClr val="accent1"/>
+          </a:fillRef>
+          <a:effectRef idx="0">
+            <a:schemeClr val="accent1"/>
+          </a:effectRef>
+          <a:fontRef idx="minor">
+            <a:schemeClr val="tx1"/>
+          </a:fontRef>
+        </p:style>
+      </p:cxnSp>
+      <p:cxnSp>
+        <p:nvCxnSpPr>
+          <p:cNvPr id="23" name="chart:data-line"/>
+          <p:cNvCxnSpPr/>
+          <p:nvPr/>
+        </p:nvCxnSpPr>
+        <p:spPr>
+          <a:xfrm flipV="1">
+            <a:off x="6174867" y="3136773"/>
+            <a:ext cx="1131908" cy="382142"/>
+          </a:xfrm>
+          <a:prstGeom prst="line">
+            <a:avLst/>
+          </a:prstGeom>
+          <a:ln w="22860">
+            <a:solidFill>
+              <a:srgbClr val="182C43"/>
+            </a:solidFill>
+          </a:ln>
+          <a:effectLst/>
+        </p:spPr>
+        <p:style>
+          <a:lnRef idx="2">
+            <a:schemeClr val="accent1"/>
+          </a:lnRef>
+          <a:fillRef idx="0">
+            <a:schemeClr val="accent1"/>
+          </a:fillRef>
+          <a:effectRef idx="0">
+            <a:schemeClr val="accent1"/>
+          </a:effectRef>
+          <a:fontRef idx="minor">
+            <a:schemeClr val="tx1"/>
+          </a:fontRef>
+        </p:style>
+      </p:cxnSp>
+      <p:cxnSp>
+        <p:nvCxnSpPr>
+          <p:cNvPr id="24" name="chart:data-line"/>
+          <p:cNvCxnSpPr/>
+          <p:nvPr/>
+        </p:nvCxnSpPr>
+        <p:spPr>
+          <a:xfrm flipV="1">
+            <a:off x="7306775" y="2754629"/>
+            <a:ext cx="1131909" cy="382144"/>
+          </a:xfrm>
+          <a:prstGeom prst="line">
+            <a:avLst/>
+          </a:prstGeom>
+          <a:ln w="22860">
+            <a:solidFill>
+              <a:srgbClr val="182C43"/>
+            </a:solidFill>
+          </a:ln>
+          <a:effectLst/>
+        </p:spPr>
+        <p:style>
+          <a:lnRef idx="2">
+            <a:schemeClr val="accent1"/>
+          </a:lnRef>
+          <a:fillRef idx="0">
+            <a:schemeClr val="accent1"/>
+          </a:fillRef>
+          <a:effectRef idx="0">
+            <a:schemeClr val="accent1"/>
+          </a:effectRef>
+          <a:fontRef idx="minor">
+            <a:schemeClr val="tx1"/>
+          </a:fontRef>
+        </p:style>
+      </p:cxnSp>
+      <p:cxnSp>
+        <p:nvCxnSpPr>
+          <p:cNvPr id="25" name="chart:data-line"/>
+          <p:cNvCxnSpPr/>
+          <p:nvPr/>
+        </p:nvCxnSpPr>
+        <p:spPr>
+          <a:xfrm flipV="1">
+            <a:off x="8438684" y="2372487"/>
+            <a:ext cx="1131909" cy="382142"/>
+          </a:xfrm>
+          <a:prstGeom prst="line">
+            <a:avLst/>
+          </a:prstGeom>
+          <a:ln w="22860">
+            <a:solidFill>
+              <a:srgbClr val="182C43"/>
+            </a:solidFill>
+          </a:ln>
+          <a:effectLst/>
+        </p:spPr>
+        <p:style>
+          <a:lnRef idx="2">
+            <a:schemeClr val="accent1"/>
+          </a:lnRef>
+          <a:fillRef idx="0">
+            <a:schemeClr val="accent1"/>
+          </a:fillRef>
+          <a:effectRef idx="0">
+            <a:schemeClr val="accent1"/>
+          </a:effectRef>
+          <a:fontRef idx="minor">
+            <a:schemeClr val="tx1"/>
+          </a:fontRef>
+        </p:style>
+      </p:cxnSp>
+      <p:cxnSp>
+        <p:nvCxnSpPr>
+          <p:cNvPr id="26" name="chart:data-line"/>
+          <p:cNvCxnSpPr/>
+          <p:nvPr/>
+        </p:nvCxnSpPr>
+        <p:spPr>
+          <a:xfrm flipV="1">
+            <a:off x="9570593" y="1990344"/>
+            <a:ext cx="1131908" cy="382143"/>
+          </a:xfrm>
+          <a:prstGeom prst="line">
+            <a:avLst/>
+          </a:prstGeom>
+          <a:ln w="22860">
+            <a:solidFill>
+              <a:srgbClr val="182C43"/>
+            </a:solidFill>
+          </a:ln>
+          <a:effectLst/>
+        </p:spPr>
+        <p:style>
+          <a:lnRef idx="2">
+            <a:schemeClr val="accent1"/>
+          </a:lnRef>
+          <a:fillRef idx="0">
+            <a:schemeClr val="accent1"/>
+          </a:fillRef>
+          <a:effectRef idx="0">
+            <a:schemeClr val="accent1"/>
+          </a:effectRef>
+          <a:fontRef idx="minor">
+            <a:schemeClr val="tx1"/>
+          </a:fontRef>
+        </p:style>
+      </p:cxnSp>
+      <p:sp>
+        <p:nvSpPr>
+          <p:cNvPr id="27" name="chart:legend-key"/>
           <p:cNvSpPr/>
           <p:nvPr/>
         </p:nvSpPr>
         <p:spPr>
           <a:xfrm>
-            <a:off x="1371599" y="4254246"/>
+            <a:off x="694944" y="5900928"/>
+            <a:ext cx="109728" cy="109728"/>
+          </a:xfrm>
+          <a:prstGeom prst="rect">
+            <a:avLst/>
+          </a:prstGeom>
+          <a:solidFill>
+            <a:srgbClr val="0D7870"/>
+          </a:solidFill>
+          <a:ln>
+            <a:noFill/>
+          </a:ln>
+          <a:effectLst/>
+        </p:spPr>
+        <p:style>
+          <a:lnRef idx="1">
+            <a:schemeClr val="accent1"/>
+          </a:lnRef>
+          <a:fillRef idx="3">
+            <a:schemeClr val="accent1"/>
+          </a:fillRef>
+          <a:effectRef idx="0">
+            <a:schemeClr val="accent1"/>
+          </a:effectRef>
+          <a:fontRef idx="minor">
+            <a:schemeClr val="lt1"/>
+          </a:fontRef>
+        </p:style>
+        <p:txBody>
+          <a:bodyPr rtlCol="0" anchor="ctr"/>
+          <a:lstStyle/>
+          <a:p>
+            <a:pPr algn="ctr"/>
+          </a:p>
+        </p:txBody>
+      </p:sp>
+      <p:sp>
+        <p:nvSpPr>
+          <p:cNvPr id="28" name="chart:legend-key"/>
+          <p:cNvSpPr/>
+          <p:nvPr/>
+        </p:nvSpPr>
+        <p:spPr>
+          <a:xfrm>
+            <a:off x="1554480" y="5900928"/>
+            <a:ext cx="109728" cy="109728"/>
+          </a:xfrm>
+          <a:prstGeom prst="rect">
+            <a:avLst/>
+          </a:prstGeom>
+          <a:solidFill>
+            <a:srgbClr val="182C43"/>
+          </a:solidFill>
+          <a:ln>
+            <a:noFill/>
+          </a:ln>
+          <a:effectLst/>
+        </p:spPr>
+        <p:style>
+          <a:lnRef idx="1">
+            <a:schemeClr val="accent1"/>
+          </a:lnRef>
+          <a:fillRef idx="3">
+            <a:schemeClr val="accent1"/>
+          </a:fillRef>
+          <a:effectRef idx="0">
+            <a:schemeClr val="accent1"/>
+          </a:effectRef>
+          <a:fontRef idx="minor">
+            <a:schemeClr val="lt1"/>
+          </a:fontRef>
+        </p:style>
+        <p:txBody>
+          <a:bodyPr rtlCol="0" anchor="ctr"/>
+          <a:lstStyle/>
+          <a:p>
+            <a:pPr algn="ctr"/>
+          </a:p>
+        </p:txBody>
+      </p:sp>
+      <p:sp>
+        <p:nvSpPr>
+          <p:cNvPr id="29" name="chart:data-dot"/>
+          <p:cNvSpPr/>
+          <p:nvPr/>
+        </p:nvSpPr>
+        <p:spPr>
+          <a:xfrm>
+            <a:off x="1601512" y="4543196"/>
+            <a:ext cx="91440" cy="91440"/>
+          </a:xfrm>
+          <a:prstGeom prst="ellipse">
+            <a:avLst/>
+          </a:prstGeom>
+          <a:solidFill>
+            <a:srgbClr val="0D7870"/>
+          </a:solidFill>
+          <a:ln w="7620">
+            <a:solidFill>
+              <a:srgbClr val="FFFFFC"/>
+            </a:solidFill>
+          </a:ln>
+          <a:effectLst/>
+        </p:spPr>
+        <p:style>
+          <a:lnRef idx="1">
+            <a:schemeClr val="accent1"/>
+          </a:lnRef>
+          <a:fillRef idx="3">
+            <a:schemeClr val="accent1"/>
+          </a:fillRef>
+          <a:effectRef idx="0">
+            <a:schemeClr val="accent1"/>
+          </a:effectRef>
+          <a:fontRef idx="minor">
+            <a:schemeClr val="lt1"/>
+          </a:fontRef>
+        </p:style>
+        <p:txBody>
+          <a:bodyPr rtlCol="0" anchor="ctr"/>
+          <a:lstStyle/>
+          <a:p>
+            <a:pPr algn="ctr"/>
+          </a:p>
+        </p:txBody>
+      </p:sp>
+      <p:sp>
+        <p:nvSpPr>
+          <p:cNvPr id="30" name="chart:data-dot"/>
+          <p:cNvSpPr/>
+          <p:nvPr/>
+        </p:nvSpPr>
+        <p:spPr>
+          <a:xfrm>
+            <a:off x="2733421" y="4313910"/>
+            <a:ext cx="91440" cy="91440"/>
+          </a:xfrm>
+          <a:prstGeom prst="ellipse">
+            <a:avLst/>
+          </a:prstGeom>
+          <a:solidFill>
+            <a:srgbClr val="0D7870"/>
+          </a:solidFill>
+          <a:ln w="7620">
+            <a:solidFill>
+              <a:srgbClr val="FFFFFC"/>
+            </a:solidFill>
+          </a:ln>
+          <a:effectLst/>
+        </p:spPr>
+        <p:style>
+          <a:lnRef idx="1">
+            <a:schemeClr val="accent1"/>
+          </a:lnRef>
+          <a:fillRef idx="3">
+            <a:schemeClr val="accent1"/>
+          </a:fillRef>
+          <a:effectRef idx="0">
+            <a:schemeClr val="accent1"/>
+          </a:effectRef>
+          <a:fontRef idx="minor">
+            <a:schemeClr val="lt1"/>
+          </a:fontRef>
+        </p:style>
+        <p:txBody>
+          <a:bodyPr rtlCol="0" anchor="ctr"/>
+          <a:lstStyle/>
+          <a:p>
+            <a:pPr algn="ctr"/>
+          </a:p>
+        </p:txBody>
+      </p:sp>
+      <p:sp>
+        <p:nvSpPr>
+          <p:cNvPr id="31" name="chart:data-dot"/>
+          <p:cNvSpPr/>
+          <p:nvPr/>
+        </p:nvSpPr>
+        <p:spPr>
+          <a:xfrm>
+            <a:off x="3865329" y="4046410"/>
+            <a:ext cx="91440" cy="91440"/>
+          </a:xfrm>
+          <a:prstGeom prst="ellipse">
+            <a:avLst/>
+          </a:prstGeom>
+          <a:solidFill>
+            <a:srgbClr val="0D7870"/>
+          </a:solidFill>
+          <a:ln w="7620">
+            <a:solidFill>
+              <a:srgbClr val="FFFFFC"/>
+            </a:solidFill>
+          </a:ln>
+          <a:effectLst/>
+        </p:spPr>
+        <p:style>
+          <a:lnRef idx="1">
+            <a:schemeClr val="accent1"/>
+          </a:lnRef>
+          <a:fillRef idx="3">
+            <a:schemeClr val="accent1"/>
+          </a:fillRef>
+          <a:effectRef idx="0">
+            <a:schemeClr val="accent1"/>
+          </a:effectRef>
+          <a:fontRef idx="minor">
+            <a:schemeClr val="lt1"/>
+          </a:fontRef>
+        </p:style>
+        <p:txBody>
+          <a:bodyPr rtlCol="0" anchor="ctr"/>
+          <a:lstStyle/>
+          <a:p>
+            <a:pPr algn="ctr"/>
+          </a:p>
+        </p:txBody>
+      </p:sp>
+      <p:sp>
+        <p:nvSpPr>
+          <p:cNvPr id="32" name="chart:data-dot"/>
+          <p:cNvSpPr/>
+          <p:nvPr/>
+        </p:nvSpPr>
+        <p:spPr>
+          <a:xfrm>
+            <a:off x="4997238" y="3817124"/>
+            <a:ext cx="91440" cy="91440"/>
+          </a:xfrm>
+          <a:prstGeom prst="ellipse">
+            <a:avLst/>
+          </a:prstGeom>
+          <a:solidFill>
+            <a:srgbClr val="0D7870"/>
+          </a:solidFill>
+          <a:ln w="7620">
+            <a:solidFill>
+              <a:srgbClr val="FFFFFC"/>
+            </a:solidFill>
+          </a:ln>
+          <a:effectLst/>
+        </p:spPr>
+        <p:style>
+          <a:lnRef idx="1">
+            <a:schemeClr val="accent1"/>
+          </a:lnRef>
+          <a:fillRef idx="3">
+            <a:schemeClr val="accent1"/>
+          </a:fillRef>
+          <a:effectRef idx="0">
+            <a:schemeClr val="accent1"/>
+          </a:effectRef>
+          <a:fontRef idx="minor">
+            <a:schemeClr val="lt1"/>
+          </a:fontRef>
+        </p:style>
+        <p:txBody>
+          <a:bodyPr rtlCol="0" anchor="ctr"/>
+          <a:lstStyle/>
+          <a:p>
+            <a:pPr algn="ctr"/>
+          </a:p>
+        </p:txBody>
+      </p:sp>
+      <p:sp>
+        <p:nvSpPr>
+          <p:cNvPr id="33" name="chart:data-dot"/>
+          <p:cNvSpPr/>
+          <p:nvPr/>
+        </p:nvSpPr>
+        <p:spPr>
+          <a:xfrm>
+            <a:off x="6129147" y="3320338"/>
+            <a:ext cx="91440" cy="91440"/>
+          </a:xfrm>
+          <a:prstGeom prst="ellipse">
+            <a:avLst/>
+          </a:prstGeom>
+          <a:solidFill>
+            <a:srgbClr val="0D7870"/>
+          </a:solidFill>
+          <a:ln w="7620">
+            <a:solidFill>
+              <a:srgbClr val="FFFFFC"/>
+            </a:solidFill>
+          </a:ln>
+          <a:effectLst/>
+        </p:spPr>
+        <p:style>
+          <a:lnRef idx="1">
+            <a:schemeClr val="accent1"/>
+          </a:lnRef>
+          <a:fillRef idx="3">
+            <a:schemeClr val="accent1"/>
+          </a:fillRef>
+          <a:effectRef idx="0">
+            <a:schemeClr val="accent1"/>
+          </a:effectRef>
+          <a:fontRef idx="minor">
+            <a:schemeClr val="lt1"/>
+          </a:fontRef>
+        </p:style>
+        <p:txBody>
+          <a:bodyPr rtlCol="0" anchor="ctr"/>
+          <a:lstStyle/>
+          <a:p>
+            <a:pPr algn="ctr"/>
+          </a:p>
+        </p:txBody>
+      </p:sp>
+      <p:sp>
+        <p:nvSpPr>
+          <p:cNvPr id="34" name="chart:data-dot"/>
+          <p:cNvSpPr/>
+          <p:nvPr/>
+        </p:nvSpPr>
+        <p:spPr>
+          <a:xfrm>
+            <a:off x="7261055" y="3014624"/>
+            <a:ext cx="91440" cy="91440"/>
+          </a:xfrm>
+          <a:prstGeom prst="ellipse">
+            <a:avLst/>
+          </a:prstGeom>
+          <a:solidFill>
+            <a:srgbClr val="0D7870"/>
+          </a:solidFill>
+          <a:ln w="7620">
+            <a:solidFill>
+              <a:srgbClr val="FFFFFC"/>
+            </a:solidFill>
+          </a:ln>
+          <a:effectLst/>
+        </p:spPr>
+        <p:style>
+          <a:lnRef idx="1">
+            <a:schemeClr val="accent1"/>
+          </a:lnRef>
+          <a:fillRef idx="3">
+            <a:schemeClr val="accent1"/>
+          </a:fillRef>
+          <a:effectRef idx="0">
+            <a:schemeClr val="accent1"/>
+          </a:effectRef>
+          <a:fontRef idx="minor">
+            <a:schemeClr val="lt1"/>
+          </a:fontRef>
+        </p:style>
+        <p:txBody>
+          <a:bodyPr rtlCol="0" anchor="ctr"/>
+          <a:lstStyle/>
+          <a:p>
+            <a:pPr algn="ctr"/>
+          </a:p>
+        </p:txBody>
+      </p:sp>
+      <p:sp>
+        <p:nvSpPr>
+          <p:cNvPr id="35" name="chart:data-dot"/>
+          <p:cNvSpPr/>
+          <p:nvPr/>
+        </p:nvSpPr>
+        <p:spPr>
+          <a:xfrm>
+            <a:off x="8392964" y="2670695"/>
+            <a:ext cx="91440" cy="91440"/>
+          </a:xfrm>
+          <a:prstGeom prst="ellipse">
+            <a:avLst/>
+          </a:prstGeom>
+          <a:solidFill>
+            <a:srgbClr val="0D7870"/>
+          </a:solidFill>
+          <a:ln w="7620">
+            <a:solidFill>
+              <a:srgbClr val="FFFFFC"/>
+            </a:solidFill>
+          </a:ln>
+          <a:effectLst/>
+        </p:spPr>
+        <p:style>
+          <a:lnRef idx="1">
+            <a:schemeClr val="accent1"/>
+          </a:lnRef>
+          <a:fillRef idx="3">
+            <a:schemeClr val="accent1"/>
+          </a:fillRef>
+          <a:effectRef idx="0">
+            <a:schemeClr val="accent1"/>
+          </a:effectRef>
+          <a:fontRef idx="minor">
+            <a:schemeClr val="lt1"/>
+          </a:fontRef>
+        </p:style>
+        <p:txBody>
+          <a:bodyPr rtlCol="0" anchor="ctr"/>
+          <a:lstStyle/>
+          <a:p>
+            <a:pPr algn="ctr"/>
+          </a:p>
+        </p:txBody>
+      </p:sp>
+      <p:sp>
+        <p:nvSpPr>
+          <p:cNvPr id="36" name="chart:data-dot"/>
+          <p:cNvSpPr/>
+          <p:nvPr/>
+        </p:nvSpPr>
+        <p:spPr>
+          <a:xfrm>
+            <a:off x="9524873" y="2441409"/>
+            <a:ext cx="91440" cy="91440"/>
+          </a:xfrm>
+          <a:prstGeom prst="ellipse">
+            <a:avLst/>
+          </a:prstGeom>
+          <a:solidFill>
+            <a:srgbClr val="0D7870"/>
+          </a:solidFill>
+          <a:ln w="7620">
+            <a:solidFill>
+              <a:srgbClr val="FFFFFC"/>
+            </a:solidFill>
+          </a:ln>
+          <a:effectLst/>
+        </p:spPr>
+        <p:style>
+          <a:lnRef idx="1">
+            <a:schemeClr val="accent1"/>
+          </a:lnRef>
+          <a:fillRef idx="3">
+            <a:schemeClr val="accent1"/>
+          </a:fillRef>
+          <a:effectRef idx="0">
+            <a:schemeClr val="accent1"/>
+          </a:effectRef>
+          <a:fontRef idx="minor">
+            <a:schemeClr val="lt1"/>
+          </a:fontRef>
+        </p:style>
+        <p:txBody>
+          <a:bodyPr rtlCol="0" anchor="ctr"/>
+          <a:lstStyle/>
+          <a:p>
+            <a:pPr algn="ctr"/>
+          </a:p>
+        </p:txBody>
+      </p:sp>
+      <p:sp>
+        <p:nvSpPr>
+          <p:cNvPr id="37" name="chart:data-dot"/>
+          <p:cNvSpPr/>
+          <p:nvPr/>
+        </p:nvSpPr>
+        <p:spPr>
+          <a:xfrm>
+            <a:off x="10656781" y="2173909"/>
+            <a:ext cx="91440" cy="91440"/>
+          </a:xfrm>
+          <a:prstGeom prst="ellipse">
+            <a:avLst/>
+          </a:prstGeom>
+          <a:solidFill>
+            <a:srgbClr val="0D7870"/>
+          </a:solidFill>
+          <a:ln w="7620">
+            <a:solidFill>
+              <a:srgbClr val="FFFFFC"/>
+            </a:solidFill>
+          </a:ln>
+          <a:effectLst/>
+        </p:spPr>
+        <p:style>
+          <a:lnRef idx="1">
+            <a:schemeClr val="accent1"/>
+          </a:lnRef>
+          <a:fillRef idx="3">
+            <a:schemeClr val="accent1"/>
+          </a:fillRef>
+          <a:effectRef idx="0">
+            <a:schemeClr val="accent1"/>
+          </a:effectRef>
+          <a:fontRef idx="minor">
+            <a:schemeClr val="lt1"/>
+          </a:fontRef>
+        </p:style>
+        <p:txBody>
+          <a:bodyPr rtlCol="0" anchor="ctr"/>
+          <a:lstStyle/>
+          <a:p>
+            <a:pPr algn="ctr"/>
+          </a:p>
+        </p:txBody>
+      </p:sp>
+      <p:sp>
+        <p:nvSpPr>
+          <p:cNvPr id="38" name="chart:data-dot"/>
+          <p:cNvSpPr/>
+          <p:nvPr/>
+        </p:nvSpPr>
+        <p:spPr>
+          <a:xfrm>
+            <a:off x="1601512" y="4237482"/>
             <a:ext cx="91440" cy="91440"/>
           </a:xfrm>
           <a:prstGeom prst="ellipse">
@@ -5551,6 +5061,7 @@
               <a:srgbClr val="FFFFFC"/>
             </a:solidFill>
           </a:ln>
+          <a:effectLst/>
         </p:spPr>
         <p:style>
           <a:lnRef idx="1">
@@ -5559,7 +5070,7 @@
           <a:fillRef idx="3">
             <a:schemeClr val="accent1"/>
           </a:fillRef>
-          <a:effectRef idx="2">
+          <a:effectRef idx="0">
             <a:schemeClr val="accent1"/>
           </a:effectRef>
           <a:fontRef idx="minor">
@@ -5576,13 +5087,13 @@
       </p:sp>
       <p:sp>
         <p:nvSpPr>
-          <p:cNvPr id="52" name="Oval 51"/>
+          <p:cNvPr id="39" name="chart:data-dot"/>
           <p:cNvSpPr/>
           <p:nvPr/>
         </p:nvSpPr>
         <p:spPr>
           <a:xfrm>
-            <a:off x="2602611" y="4044505"/>
+            <a:off x="2733421" y="4046410"/>
             <a:ext cx="91440" cy="91440"/>
           </a:xfrm>
           <a:prstGeom prst="ellipse">
@@ -5596,6 +5107,7 @@
               <a:srgbClr val="FFFFFC"/>
             </a:solidFill>
           </a:ln>
+          <a:effectLst/>
         </p:spPr>
         <p:style>
           <a:lnRef idx="1">
@@ -5604,7 +5116,7 @@
           <a:fillRef idx="3">
             <a:schemeClr val="accent1"/>
           </a:fillRef>
-          <a:effectRef idx="2">
+          <a:effectRef idx="0">
             <a:schemeClr val="accent1"/>
           </a:effectRef>
           <a:fontRef idx="minor">
@@ -5621,13 +5133,13 @@
       </p:sp>
       <p:sp>
         <p:nvSpPr>
-          <p:cNvPr id="53" name="Oval 52"/>
+          <p:cNvPr id="40" name="chart:data-dot"/>
           <p:cNvSpPr/>
           <p:nvPr/>
         </p:nvSpPr>
         <p:spPr>
           <a:xfrm>
-            <a:off x="3833622" y="3834764"/>
+            <a:off x="3865329" y="3855338"/>
             <a:ext cx="91440" cy="91440"/>
           </a:xfrm>
           <a:prstGeom prst="ellipse">
@@ -5641,6 +5153,7 @@
               <a:srgbClr val="FFFFFC"/>
             </a:solidFill>
           </a:ln>
+          <a:effectLst/>
         </p:spPr>
         <p:style>
           <a:lnRef idx="1">
@@ -5649,7 +5162,7 @@
           <a:fillRef idx="3">
             <a:schemeClr val="accent1"/>
           </a:fillRef>
-          <a:effectRef idx="2">
+          <a:effectRef idx="0">
             <a:schemeClr val="accent1"/>
           </a:effectRef>
           <a:fontRef idx="minor">
@@ -5666,13 +5179,13 @@
       </p:sp>
       <p:sp>
         <p:nvSpPr>
-          <p:cNvPr id="54" name="Oval 53"/>
+          <p:cNvPr id="41" name="chart:data-dot"/>
           <p:cNvSpPr/>
           <p:nvPr/>
         </p:nvSpPr>
         <p:spPr>
           <a:xfrm>
-            <a:off x="5064633" y="3625024"/>
+            <a:off x="4997238" y="3664267"/>
             <a:ext cx="91440" cy="91440"/>
           </a:xfrm>
           <a:prstGeom prst="ellipse">
@@ -5686,6 +5199,7 @@
               <a:srgbClr val="FFFFFC"/>
             </a:solidFill>
           </a:ln>
+          <a:effectLst/>
         </p:spPr>
         <p:style>
           <a:lnRef idx="1">
@@ -5694,7 +5208,7 @@
           <a:fillRef idx="3">
             <a:schemeClr val="accent1"/>
           </a:fillRef>
-          <a:effectRef idx="2">
+          <a:effectRef idx="0">
             <a:schemeClr val="accent1"/>
           </a:effectRef>
           <a:fontRef idx="minor">
@@ -5711,13 +5225,13 @@
       </p:sp>
       <p:sp>
         <p:nvSpPr>
-          <p:cNvPr id="55" name="Oval 54"/>
+          <p:cNvPr id="42" name="chart:data-dot"/>
           <p:cNvSpPr/>
           <p:nvPr/>
         </p:nvSpPr>
         <p:spPr>
           <a:xfrm>
-            <a:off x="6295644" y="3415283"/>
+            <a:off x="6129147" y="3473195"/>
             <a:ext cx="91440" cy="91440"/>
           </a:xfrm>
           <a:prstGeom prst="ellipse">
@@ -5731,6 +5245,7 @@
               <a:srgbClr val="FFFFFC"/>
             </a:solidFill>
           </a:ln>
+          <a:effectLst/>
         </p:spPr>
         <p:style>
           <a:lnRef idx="1">
@@ -5739,7 +5254,7 @@
           <a:fillRef idx="3">
             <a:schemeClr val="accent1"/>
           </a:fillRef>
-          <a:effectRef idx="2">
+          <a:effectRef idx="0">
             <a:schemeClr val="accent1"/>
           </a:effectRef>
           <a:fontRef idx="minor">
@@ -5756,13 +5271,13 @@
       </p:sp>
       <p:sp>
         <p:nvSpPr>
-          <p:cNvPr id="56" name="Oval 55"/>
+          <p:cNvPr id="43" name="chart:data-dot"/>
           <p:cNvSpPr/>
           <p:nvPr/>
         </p:nvSpPr>
         <p:spPr>
           <a:xfrm>
-            <a:off x="7526654" y="2995802"/>
+            <a:off x="7261055" y="3091053"/>
             <a:ext cx="91440" cy="91440"/>
           </a:xfrm>
           <a:prstGeom prst="ellipse">
@@ -5776,6 +5291,7 @@
               <a:srgbClr val="FFFFFC"/>
             </a:solidFill>
           </a:ln>
+          <a:effectLst/>
         </p:spPr>
         <p:style>
           <a:lnRef idx="1">
@@ -5784,7 +5300,7 @@
           <a:fillRef idx="3">
             <a:schemeClr val="accent1"/>
           </a:fillRef>
-          <a:effectRef idx="2">
+          <a:effectRef idx="0">
             <a:schemeClr val="accent1"/>
           </a:effectRef>
           <a:fontRef idx="minor">
@@ -5801,13 +5317,13 @@
       </p:sp>
       <p:sp>
         <p:nvSpPr>
-          <p:cNvPr id="57" name="Oval 56"/>
+          <p:cNvPr id="44" name="chart:data-dot"/>
           <p:cNvSpPr/>
           <p:nvPr/>
         </p:nvSpPr>
         <p:spPr>
           <a:xfrm>
-            <a:off x="8757666" y="2576322"/>
+            <a:off x="8392964" y="2708910"/>
             <a:ext cx="91440" cy="91440"/>
           </a:xfrm>
           <a:prstGeom prst="ellipse">
@@ -5821,6 +5337,7 @@
               <a:srgbClr val="FFFFFC"/>
             </a:solidFill>
           </a:ln>
+          <a:effectLst/>
         </p:spPr>
         <p:style>
           <a:lnRef idx="1">
@@ -5829,7 +5346,7 @@
           <a:fillRef idx="3">
             <a:schemeClr val="accent1"/>
           </a:fillRef>
-          <a:effectRef idx="2">
+          <a:effectRef idx="0">
             <a:schemeClr val="accent1"/>
           </a:effectRef>
           <a:fontRef idx="minor">
@@ -5846,13 +5363,13 @@
       </p:sp>
       <p:sp>
         <p:nvSpPr>
-          <p:cNvPr id="58" name="Oval 57"/>
+          <p:cNvPr id="45" name="chart:data-dot"/>
           <p:cNvSpPr/>
           <p:nvPr/>
         </p:nvSpPr>
         <p:spPr>
           <a:xfrm>
-            <a:off x="9988677" y="2156840"/>
+            <a:off x="9524873" y="2326767"/>
             <a:ext cx="91440" cy="91440"/>
           </a:xfrm>
           <a:prstGeom prst="ellipse">
@@ -5866,6 +5383,7 @@
               <a:srgbClr val="FFFFFC"/>
             </a:solidFill>
           </a:ln>
+          <a:effectLst/>
         </p:spPr>
         <p:style>
           <a:lnRef idx="1">
@@ -5874,7 +5392,7 @@
           <a:fillRef idx="3">
             <a:schemeClr val="accent1"/>
           </a:fillRef>
-          <a:effectRef idx="2">
+          <a:effectRef idx="0">
             <a:schemeClr val="accent1"/>
           </a:effectRef>
           <a:fontRef idx="minor">
@@ -5891,13 +5409,13 @@
       </p:sp>
       <p:sp>
         <p:nvSpPr>
-          <p:cNvPr id="59" name="Oval 58"/>
+          <p:cNvPr id="46" name="chart:data-dot"/>
           <p:cNvSpPr/>
           <p:nvPr/>
         </p:nvSpPr>
         <p:spPr>
           <a:xfrm>
-            <a:off x="11219688" y="1737359"/>
+            <a:off x="10656781" y="1944624"/>
             <a:ext cx="91440" cy="91440"/>
           </a:xfrm>
           <a:prstGeom prst="ellipse">
@@ -5911,6 +5429,7 @@
               <a:srgbClr val="FFFFFC"/>
             </a:solidFill>
           </a:ln>
+          <a:effectLst/>
         </p:spPr>
         <p:style>
           <a:lnRef idx="1">
@@ -5919,7 +5438,7 @@
           <a:fillRef idx="3">
             <a:schemeClr val="accent1"/>
           </a:fillRef>
-          <a:effectRef idx="2">
+          <a:effectRef idx="0">
             <a:schemeClr val="accent1"/>
           </a:effectRef>
           <a:fontRef idx="minor">
@@ -5936,20 +5455,717 @@
       </p:sp>
       <p:sp>
         <p:nvSpPr>
-          <p:cNvPr id="60" name="Rectangle 59"/>
+          <p:cNvPr id="47" name="chart:axis-value"/>
+          <p:cNvSpPr txBox="1"/>
+          <p:nvPr/>
+        </p:nvSpPr>
+        <p:spPr>
+          <a:xfrm>
+            <a:off x="694944" y="4939284"/>
+            <a:ext cx="221742" cy="216408"/>
+          </a:xfrm>
+          <a:prstGeom prst="rect">
+            <a:avLst/>
+          </a:prstGeom>
+          <a:noFill/>
+        </p:spPr>
+        <p:txBody>
+          <a:bodyPr wrap="square" anchor="t" lIns="0" rIns="0" tIns="0" bIns="0">
+            <a:spAutoFit/>
+          </a:bodyPr>
+          <a:lstStyle/>
+          <a:p>
+            <a:pPr algn="r">
+              <a:lnSpc>
+                <a:spcPct val="130000"/>
+              </a:lnSpc>
+            </a:pPr>
+            <a:r>
+              <a:rPr sz="1200" b="0" lang="ja-JP">
+                <a:solidFill>
+                  <a:srgbClr val="666E70"/>
+                </a:solidFill>
+                <a:latin typeface="Yu Gothic"/>
+                <a:ea typeface="Yu Gothic"/>
+                <a:cs typeface="Yu Gothic"/>
+              </a:rPr>
+              <a:t>0</a:t>
+            </a:r>
+          </a:p>
+        </p:txBody>
+      </p:sp>
+      <p:sp>
+        <p:nvSpPr>
+          <p:cNvPr id="48" name="chart:axis-value"/>
+          <p:cNvSpPr txBox="1"/>
+          <p:nvPr/>
+        </p:nvSpPr>
+        <p:spPr>
+          <a:xfrm>
+            <a:off x="694944" y="4174997"/>
+            <a:ext cx="221742" cy="216408"/>
+          </a:xfrm>
+          <a:prstGeom prst="rect">
+            <a:avLst/>
+          </a:prstGeom>
+          <a:noFill/>
+        </p:spPr>
+        <p:txBody>
+          <a:bodyPr wrap="square" anchor="t" lIns="0" rIns="0" tIns="0" bIns="0">
+            <a:spAutoFit/>
+          </a:bodyPr>
+          <a:lstStyle/>
+          <a:p>
+            <a:pPr algn="r">
+              <a:lnSpc>
+                <a:spcPct val="130000"/>
+              </a:lnSpc>
+            </a:pPr>
+            <a:r>
+              <a:rPr sz="1200" b="0" lang="ja-JP">
+                <a:solidFill>
+                  <a:srgbClr val="666E70"/>
+                </a:solidFill>
+                <a:latin typeface="Yu Gothic"/>
+                <a:ea typeface="Yu Gothic"/>
+                <a:cs typeface="Yu Gothic"/>
+              </a:rPr>
+              <a:t>20</a:t>
+            </a:r>
+          </a:p>
+        </p:txBody>
+      </p:sp>
+      <p:sp>
+        <p:nvSpPr>
+          <p:cNvPr id="49" name="chart:axis-value"/>
+          <p:cNvSpPr txBox="1"/>
+          <p:nvPr/>
+        </p:nvSpPr>
+        <p:spPr>
+          <a:xfrm>
+            <a:off x="694944" y="3410711"/>
+            <a:ext cx="221742" cy="216408"/>
+          </a:xfrm>
+          <a:prstGeom prst="rect">
+            <a:avLst/>
+          </a:prstGeom>
+          <a:noFill/>
+        </p:spPr>
+        <p:txBody>
+          <a:bodyPr wrap="square" anchor="t" lIns="0" rIns="0" tIns="0" bIns="0">
+            <a:spAutoFit/>
+          </a:bodyPr>
+          <a:lstStyle/>
+          <a:p>
+            <a:pPr algn="r">
+              <a:lnSpc>
+                <a:spcPct val="130000"/>
+              </a:lnSpc>
+            </a:pPr>
+            <a:r>
+              <a:rPr sz="1200" b="0" lang="ja-JP">
+                <a:solidFill>
+                  <a:srgbClr val="666E70"/>
+                </a:solidFill>
+                <a:latin typeface="Yu Gothic"/>
+                <a:ea typeface="Yu Gothic"/>
+                <a:cs typeface="Yu Gothic"/>
+              </a:rPr>
+              <a:t>40</a:t>
+            </a:r>
+          </a:p>
+        </p:txBody>
+      </p:sp>
+      <p:sp>
+        <p:nvSpPr>
+          <p:cNvPr id="50" name="chart:axis-value"/>
+          <p:cNvSpPr txBox="1"/>
+          <p:nvPr/>
+        </p:nvSpPr>
+        <p:spPr>
+          <a:xfrm>
+            <a:off x="694944" y="2646426"/>
+            <a:ext cx="221742" cy="216408"/>
+          </a:xfrm>
+          <a:prstGeom prst="rect">
+            <a:avLst/>
+          </a:prstGeom>
+          <a:noFill/>
+        </p:spPr>
+        <p:txBody>
+          <a:bodyPr wrap="square" anchor="t" lIns="0" rIns="0" tIns="0" bIns="0">
+            <a:spAutoFit/>
+          </a:bodyPr>
+          <a:lstStyle/>
+          <a:p>
+            <a:pPr algn="r">
+              <a:lnSpc>
+                <a:spcPct val="130000"/>
+              </a:lnSpc>
+            </a:pPr>
+            <a:r>
+              <a:rPr sz="1200" b="0" lang="ja-JP">
+                <a:solidFill>
+                  <a:srgbClr val="666E70"/>
+                </a:solidFill>
+                <a:latin typeface="Yu Gothic"/>
+                <a:ea typeface="Yu Gothic"/>
+                <a:cs typeface="Yu Gothic"/>
+              </a:rPr>
+              <a:t>60</a:t>
+            </a:r>
+          </a:p>
+        </p:txBody>
+      </p:sp>
+      <p:sp>
+        <p:nvSpPr>
+          <p:cNvPr id="51" name="chart:axis-value"/>
+          <p:cNvSpPr txBox="1"/>
+          <p:nvPr/>
+        </p:nvSpPr>
+        <p:spPr>
+          <a:xfrm>
+            <a:off x="694944" y="1882140"/>
+            <a:ext cx="221742" cy="216408"/>
+          </a:xfrm>
+          <a:prstGeom prst="rect">
+            <a:avLst/>
+          </a:prstGeom>
+          <a:noFill/>
+        </p:spPr>
+        <p:txBody>
+          <a:bodyPr wrap="square" anchor="t" lIns="0" rIns="0" tIns="0" bIns="0">
+            <a:spAutoFit/>
+          </a:bodyPr>
+          <a:lstStyle/>
+          <a:p>
+            <a:pPr algn="r">
+              <a:lnSpc>
+                <a:spcPct val="130000"/>
+              </a:lnSpc>
+            </a:pPr>
+            <a:r>
+              <a:rPr sz="1200" b="0" lang="ja-JP">
+                <a:solidFill>
+                  <a:srgbClr val="666E70"/>
+                </a:solidFill>
+                <a:latin typeface="Yu Gothic"/>
+                <a:ea typeface="Yu Gothic"/>
+                <a:cs typeface="Yu Gothic"/>
+              </a:rPr>
+              <a:t>80</a:t>
+            </a:r>
+          </a:p>
+        </p:txBody>
+      </p:sp>
+      <p:sp>
+        <p:nvSpPr>
+          <p:cNvPr id="52" name="chart:category"/>
+          <p:cNvSpPr txBox="1"/>
+          <p:nvPr/>
+        </p:nvSpPr>
+        <p:spPr>
+          <a:xfrm>
+            <a:off x="1163574" y="5355335"/>
+            <a:ext cx="967316" cy="216408"/>
+          </a:xfrm>
+          <a:prstGeom prst="rect">
+            <a:avLst/>
+          </a:prstGeom>
+          <a:noFill/>
+        </p:spPr>
+        <p:txBody>
+          <a:bodyPr wrap="square" anchor="t" lIns="0" rIns="0" tIns="0" bIns="0">
+            <a:spAutoFit/>
+          </a:bodyPr>
+          <a:lstStyle/>
+          <a:p>
+            <a:pPr algn="ctr">
+              <a:lnSpc>
+                <a:spcPct val="130000"/>
+              </a:lnSpc>
+            </a:pPr>
+            <a:r>
+              <a:rPr sz="1200" b="0" lang="ja-JP">
+                <a:solidFill>
+                  <a:srgbClr val="666E70"/>
+                </a:solidFill>
+                <a:latin typeface="Yu Gothic"/>
+                <a:ea typeface="Yu Gothic"/>
+                <a:cs typeface="Yu Gothic"/>
+              </a:rPr>
+              <a:t>4月</a:t>
+            </a:r>
+          </a:p>
+        </p:txBody>
+      </p:sp>
+      <p:sp>
+        <p:nvSpPr>
+          <p:cNvPr id="53" name="chart:category"/>
+          <p:cNvSpPr txBox="1"/>
+          <p:nvPr/>
+        </p:nvSpPr>
+        <p:spPr>
+          <a:xfrm>
+            <a:off x="2295482" y="5355335"/>
+            <a:ext cx="967316" cy="216408"/>
+          </a:xfrm>
+          <a:prstGeom prst="rect">
+            <a:avLst/>
+          </a:prstGeom>
+          <a:noFill/>
+        </p:spPr>
+        <p:txBody>
+          <a:bodyPr wrap="square" anchor="t" lIns="0" rIns="0" tIns="0" bIns="0">
+            <a:spAutoFit/>
+          </a:bodyPr>
+          <a:lstStyle/>
+          <a:p>
+            <a:pPr algn="ctr">
+              <a:lnSpc>
+                <a:spcPct val="130000"/>
+              </a:lnSpc>
+            </a:pPr>
+            <a:r>
+              <a:rPr sz="1200" b="0" lang="ja-JP">
+                <a:solidFill>
+                  <a:srgbClr val="666E70"/>
+                </a:solidFill>
+                <a:latin typeface="Yu Gothic"/>
+                <a:ea typeface="Yu Gothic"/>
+                <a:cs typeface="Yu Gothic"/>
+              </a:rPr>
+              <a:t>5月</a:t>
+            </a:r>
+          </a:p>
+        </p:txBody>
+      </p:sp>
+      <p:sp>
+        <p:nvSpPr>
+          <p:cNvPr id="54" name="chart:category"/>
+          <p:cNvSpPr txBox="1"/>
+          <p:nvPr/>
+        </p:nvSpPr>
+        <p:spPr>
+          <a:xfrm>
+            <a:off x="3427391" y="5355335"/>
+            <a:ext cx="967316" cy="216408"/>
+          </a:xfrm>
+          <a:prstGeom prst="rect">
+            <a:avLst/>
+          </a:prstGeom>
+          <a:noFill/>
+        </p:spPr>
+        <p:txBody>
+          <a:bodyPr wrap="square" anchor="t" lIns="0" rIns="0" tIns="0" bIns="0">
+            <a:spAutoFit/>
+          </a:bodyPr>
+          <a:lstStyle/>
+          <a:p>
+            <a:pPr algn="ctr">
+              <a:lnSpc>
+                <a:spcPct val="130000"/>
+              </a:lnSpc>
+            </a:pPr>
+            <a:r>
+              <a:rPr sz="1200" b="0" lang="ja-JP">
+                <a:solidFill>
+                  <a:srgbClr val="666E70"/>
+                </a:solidFill>
+                <a:latin typeface="Yu Gothic"/>
+                <a:ea typeface="Yu Gothic"/>
+                <a:cs typeface="Yu Gothic"/>
+              </a:rPr>
+              <a:t>6月</a:t>
+            </a:r>
+          </a:p>
+        </p:txBody>
+      </p:sp>
+      <p:sp>
+        <p:nvSpPr>
+          <p:cNvPr id="55" name="chart:category"/>
+          <p:cNvSpPr txBox="1"/>
+          <p:nvPr/>
+        </p:nvSpPr>
+        <p:spPr>
+          <a:xfrm>
+            <a:off x="4559300" y="5355335"/>
+            <a:ext cx="967316" cy="216408"/>
+          </a:xfrm>
+          <a:prstGeom prst="rect">
+            <a:avLst/>
+          </a:prstGeom>
+          <a:noFill/>
+        </p:spPr>
+        <p:txBody>
+          <a:bodyPr wrap="square" anchor="t" lIns="0" rIns="0" tIns="0" bIns="0">
+            <a:spAutoFit/>
+          </a:bodyPr>
+          <a:lstStyle/>
+          <a:p>
+            <a:pPr algn="ctr">
+              <a:lnSpc>
+                <a:spcPct val="130000"/>
+              </a:lnSpc>
+            </a:pPr>
+            <a:r>
+              <a:rPr sz="1200" b="0" lang="ja-JP">
+                <a:solidFill>
+                  <a:srgbClr val="666E70"/>
+                </a:solidFill>
+                <a:latin typeface="Yu Gothic"/>
+                <a:ea typeface="Yu Gothic"/>
+                <a:cs typeface="Yu Gothic"/>
+              </a:rPr>
+              <a:t>7月</a:t>
+            </a:r>
+          </a:p>
+        </p:txBody>
+      </p:sp>
+      <p:sp>
+        <p:nvSpPr>
+          <p:cNvPr id="56" name="chart:category"/>
+          <p:cNvSpPr txBox="1"/>
+          <p:nvPr/>
+        </p:nvSpPr>
+        <p:spPr>
+          <a:xfrm>
+            <a:off x="5691208" y="5355335"/>
+            <a:ext cx="967316" cy="216408"/>
+          </a:xfrm>
+          <a:prstGeom prst="rect">
+            <a:avLst/>
+          </a:prstGeom>
+          <a:noFill/>
+        </p:spPr>
+        <p:txBody>
+          <a:bodyPr wrap="square" anchor="t" lIns="0" rIns="0" tIns="0" bIns="0">
+            <a:spAutoFit/>
+          </a:bodyPr>
+          <a:lstStyle/>
+          <a:p>
+            <a:pPr algn="ctr">
+              <a:lnSpc>
+                <a:spcPct val="130000"/>
+              </a:lnSpc>
+            </a:pPr>
+            <a:r>
+              <a:rPr sz="1200" b="0" lang="ja-JP">
+                <a:solidFill>
+                  <a:srgbClr val="666E70"/>
+                </a:solidFill>
+                <a:latin typeface="Yu Gothic"/>
+                <a:ea typeface="Yu Gothic"/>
+                <a:cs typeface="Yu Gothic"/>
+              </a:rPr>
+              <a:t>8月</a:t>
+            </a:r>
+          </a:p>
+        </p:txBody>
+      </p:sp>
+      <p:sp>
+        <p:nvSpPr>
+          <p:cNvPr id="57" name="chart:category"/>
+          <p:cNvSpPr txBox="1"/>
+          <p:nvPr/>
+        </p:nvSpPr>
+        <p:spPr>
+          <a:xfrm>
+            <a:off x="6823117" y="5355335"/>
+            <a:ext cx="967316" cy="216408"/>
+          </a:xfrm>
+          <a:prstGeom prst="rect">
+            <a:avLst/>
+          </a:prstGeom>
+          <a:noFill/>
+        </p:spPr>
+        <p:txBody>
+          <a:bodyPr wrap="square" anchor="t" lIns="0" rIns="0" tIns="0" bIns="0">
+            <a:spAutoFit/>
+          </a:bodyPr>
+          <a:lstStyle/>
+          <a:p>
+            <a:pPr algn="ctr">
+              <a:lnSpc>
+                <a:spcPct val="130000"/>
+              </a:lnSpc>
+            </a:pPr>
+            <a:r>
+              <a:rPr sz="1200" b="0" lang="ja-JP">
+                <a:solidFill>
+                  <a:srgbClr val="666E70"/>
+                </a:solidFill>
+                <a:latin typeface="Yu Gothic"/>
+                <a:ea typeface="Yu Gothic"/>
+                <a:cs typeface="Yu Gothic"/>
+              </a:rPr>
+              <a:t>9月</a:t>
+            </a:r>
+          </a:p>
+        </p:txBody>
+      </p:sp>
+      <p:sp>
+        <p:nvSpPr>
+          <p:cNvPr id="58" name="chart:category"/>
+          <p:cNvSpPr txBox="1"/>
+          <p:nvPr/>
+        </p:nvSpPr>
+        <p:spPr>
+          <a:xfrm>
+            <a:off x="7955026" y="5355335"/>
+            <a:ext cx="967316" cy="216408"/>
+          </a:xfrm>
+          <a:prstGeom prst="rect">
+            <a:avLst/>
+          </a:prstGeom>
+          <a:noFill/>
+        </p:spPr>
+        <p:txBody>
+          <a:bodyPr wrap="square" anchor="t" lIns="0" rIns="0" tIns="0" bIns="0">
+            <a:spAutoFit/>
+          </a:bodyPr>
+          <a:lstStyle/>
+          <a:p>
+            <a:pPr algn="ctr">
+              <a:lnSpc>
+                <a:spcPct val="130000"/>
+              </a:lnSpc>
+            </a:pPr>
+            <a:r>
+              <a:rPr sz="1200" b="0" lang="ja-JP">
+                <a:solidFill>
+                  <a:srgbClr val="666E70"/>
+                </a:solidFill>
+                <a:latin typeface="Yu Gothic"/>
+                <a:ea typeface="Yu Gothic"/>
+                <a:cs typeface="Yu Gothic"/>
+              </a:rPr>
+              <a:t>10月</a:t>
+            </a:r>
+          </a:p>
+        </p:txBody>
+      </p:sp>
+      <p:sp>
+        <p:nvSpPr>
+          <p:cNvPr id="59" name="chart:category"/>
+          <p:cNvSpPr txBox="1"/>
+          <p:nvPr/>
+        </p:nvSpPr>
+        <p:spPr>
+          <a:xfrm>
+            <a:off x="9086934" y="5355335"/>
+            <a:ext cx="967316" cy="216408"/>
+          </a:xfrm>
+          <a:prstGeom prst="rect">
+            <a:avLst/>
+          </a:prstGeom>
+          <a:noFill/>
+        </p:spPr>
+        <p:txBody>
+          <a:bodyPr wrap="square" anchor="t" lIns="0" rIns="0" tIns="0" bIns="0">
+            <a:spAutoFit/>
+          </a:bodyPr>
+          <a:lstStyle/>
+          <a:p>
+            <a:pPr algn="ctr">
+              <a:lnSpc>
+                <a:spcPct val="130000"/>
+              </a:lnSpc>
+            </a:pPr>
+            <a:r>
+              <a:rPr sz="1200" b="0" lang="ja-JP">
+                <a:solidFill>
+                  <a:srgbClr val="666E70"/>
+                </a:solidFill>
+                <a:latin typeface="Yu Gothic"/>
+                <a:ea typeface="Yu Gothic"/>
+                <a:cs typeface="Yu Gothic"/>
+              </a:rPr>
+              <a:t>11月</a:t>
+            </a:r>
+          </a:p>
+        </p:txBody>
+      </p:sp>
+      <p:sp>
+        <p:nvSpPr>
+          <p:cNvPr id="60" name="chart:category"/>
+          <p:cNvSpPr txBox="1"/>
+          <p:nvPr/>
+        </p:nvSpPr>
+        <p:spPr>
+          <a:xfrm>
+            <a:off x="10218843" y="5355335"/>
+            <a:ext cx="967316" cy="216408"/>
+          </a:xfrm>
+          <a:prstGeom prst="rect">
+            <a:avLst/>
+          </a:prstGeom>
+          <a:noFill/>
+        </p:spPr>
+        <p:txBody>
+          <a:bodyPr wrap="square" anchor="t" lIns="0" rIns="0" tIns="0" bIns="0">
+            <a:spAutoFit/>
+          </a:bodyPr>
+          <a:lstStyle/>
+          <a:p>
+            <a:pPr algn="ctr">
+              <a:lnSpc>
+                <a:spcPct val="130000"/>
+              </a:lnSpc>
+            </a:pPr>
+            <a:r>
+              <a:rPr sz="1200" b="0" lang="ja-JP">
+                <a:solidFill>
+                  <a:srgbClr val="666E70"/>
+                </a:solidFill>
+                <a:latin typeface="Yu Gothic"/>
+                <a:ea typeface="Yu Gothic"/>
+                <a:cs typeface="Yu Gothic"/>
+              </a:rPr>
+              <a:t>12月</a:t>
+            </a:r>
+          </a:p>
+        </p:txBody>
+      </p:sp>
+      <p:sp>
+        <p:nvSpPr>
+          <p:cNvPr id="61" name="chart:legend"/>
+          <p:cNvSpPr txBox="1"/>
+          <p:nvPr/>
+        </p:nvSpPr>
+        <p:spPr>
+          <a:xfrm>
+            <a:off x="896112" y="5864352"/>
+            <a:ext cx="493776" cy="216408"/>
+          </a:xfrm>
+          <a:prstGeom prst="rect">
+            <a:avLst/>
+          </a:prstGeom>
+          <a:noFill/>
+        </p:spPr>
+        <p:txBody>
+          <a:bodyPr wrap="square" anchor="t" lIns="0" rIns="0" tIns="0" bIns="0">
+            <a:spAutoFit/>
+          </a:bodyPr>
+          <a:lstStyle/>
+          <a:p>
+            <a:pPr algn="l">
+              <a:lnSpc>
+                <a:spcPct val="130000"/>
+              </a:lnSpc>
+            </a:pPr>
+            <a:r>
+              <a:rPr sz="1200" b="0" lang="ja-JP">
+                <a:solidFill>
+                  <a:srgbClr val="666E70"/>
+                </a:solidFill>
+                <a:latin typeface="Yu Gothic"/>
+                <a:ea typeface="Yu Gothic"/>
+                <a:cs typeface="Yu Gothic"/>
+              </a:rPr>
+              <a:t>利用率</a:t>
+            </a:r>
+          </a:p>
+        </p:txBody>
+      </p:sp>
+      <p:sp>
+        <p:nvSpPr>
+          <p:cNvPr id="62" name="chart:legend"/>
+          <p:cNvSpPr txBox="1"/>
+          <p:nvPr/>
+        </p:nvSpPr>
+        <p:spPr>
+          <a:xfrm>
+            <a:off x="1755648" y="5864352"/>
+            <a:ext cx="457200" cy="216408"/>
+          </a:xfrm>
+          <a:prstGeom prst="rect">
+            <a:avLst/>
+          </a:prstGeom>
+          <a:noFill/>
+        </p:spPr>
+        <p:txBody>
+          <a:bodyPr wrap="square" anchor="t" lIns="0" rIns="0" tIns="0" bIns="0">
+            <a:spAutoFit/>
+          </a:bodyPr>
+          <a:lstStyle/>
+          <a:p>
+            <a:pPr algn="l">
+              <a:lnSpc>
+                <a:spcPct val="130000"/>
+              </a:lnSpc>
+            </a:pPr>
+            <a:r>
+              <a:rPr sz="1200" b="0" lang="ja-JP">
+                <a:solidFill>
+                  <a:srgbClr val="666E70"/>
+                </a:solidFill>
+                <a:latin typeface="Yu Gothic"/>
+                <a:ea typeface="Yu Gothic"/>
+                <a:cs typeface="Yu Gothic"/>
+              </a:rPr>
+              <a:t>目標</a:t>
+            </a:r>
+          </a:p>
+        </p:txBody>
+      </p:sp>
+      <p:sp>
+        <p:nvSpPr>
+          <p:cNvPr id="63" name="TextBox 62"/>
+          <p:cNvSpPr txBox="1"/>
+          <p:nvPr/>
+        </p:nvSpPr>
+        <p:spPr>
+          <a:xfrm>
+            <a:off x="502920" y="6053327"/>
+            <a:ext cx="11185855" cy="228600"/>
+          </a:xfrm>
+          <a:prstGeom prst="rect">
+            <a:avLst/>
+          </a:prstGeom>
+          <a:noFill/>
+        </p:spPr>
+        <p:txBody>
+          <a:bodyPr wrap="square" anchor="t" lIns="0" rIns="0" tIns="0" bIns="0">
+            <a:spAutoFit/>
+          </a:bodyPr>
+          <a:lstStyle/>
+          <a:p>
+            <a:pPr algn="r">
+              <a:lnSpc>
+                <a:spcPct val="130000"/>
+              </a:lnSpc>
+            </a:pPr>
+            <a:r>
+              <a:rPr sz="850" b="0" lang="ja-JP">
+                <a:solidFill>
+                  <a:srgbClr val="666E70"/>
+                </a:solidFill>
+                <a:latin typeface="Yu Gothic"/>
+                <a:ea typeface="Yu Gothic"/>
+                <a:cs typeface="Yu Gothic"/>
+              </a:rPr>
+              <a:t>値は検証用のサンプルデータ。</a:t>
+            </a:r>
+          </a:p>
+        </p:txBody>
+      </p:sp>
+      <p:sp>
+        <p:nvSpPr>
+          <p:cNvPr id="64" name="Rectangle 63"/>
           <p:cNvSpPr/>
           <p:nvPr/>
         </p:nvSpPr>
         <p:spPr>
           <a:xfrm>
-            <a:off x="1435607" y="5788152"/>
-            <a:ext cx="109728" cy="109728"/>
+            <a:off x="658368" y="6327648"/>
+            <a:ext cx="10881360" cy="9144"/>
           </a:xfrm>
           <a:prstGeom prst="rect">
             <a:avLst/>
           </a:prstGeom>
           <a:solidFill>
-            <a:srgbClr val="0D7870"/>
+            <a:srgbClr val="D1CFC8"/>
           </a:solidFill>
           <a:ln>
             <a:noFill/>
@@ -5980,218 +6196,7 @@
       </p:sp>
       <p:sp>
         <p:nvSpPr>
-          <p:cNvPr id="61" name="TextBox 60"/>
-          <p:cNvSpPr txBox="1"/>
-          <p:nvPr/>
-        </p:nvSpPr>
-        <p:spPr>
-          <a:xfrm>
-            <a:off x="1600199" y="5724144"/>
-            <a:ext cx="1572768" cy="237744"/>
-          </a:xfrm>
-          <a:prstGeom prst="rect">
-            <a:avLst/>
-          </a:prstGeom>
-          <a:noFill/>
-        </p:spPr>
-        <p:txBody>
-          <a:bodyPr wrap="square" anchor="t" lIns="0" rIns="0" tIns="0" bIns="0">
-            <a:spAutoFit/>
-          </a:bodyPr>
-          <a:lstStyle/>
-          <a:p>
-            <a:pPr algn="l">
-              <a:lnSpc>
-                <a:spcPct val="130000"/>
-              </a:lnSpc>
-            </a:pPr>
-            <a:r>
-              <a:rPr sz="819" b="0" lang="ja-JP">
-                <a:solidFill>
-                  <a:srgbClr val="666E70"/>
-                </a:solidFill>
-                <a:latin typeface="Yu Gothic"/>
-                <a:ea typeface="Yu Gothic"/>
-                <a:cs typeface="Yu Gothic"/>
-              </a:rPr>
-              <a:t>利用率</a:t>
-            </a:r>
-          </a:p>
-        </p:txBody>
-      </p:sp>
-      <p:sp>
-        <p:nvSpPr>
-          <p:cNvPr id="62" name="Rectangle 61"/>
-          <p:cNvSpPr/>
-          <p:nvPr/>
-        </p:nvSpPr>
-        <p:spPr>
-          <a:xfrm>
-            <a:off x="3310127" y="5788152"/>
-            <a:ext cx="109728" cy="109728"/>
-          </a:xfrm>
-          <a:prstGeom prst="rect">
-            <a:avLst/>
-          </a:prstGeom>
-          <a:solidFill>
-            <a:srgbClr val="182C43"/>
-          </a:solidFill>
-          <a:ln>
-            <a:noFill/>
-          </a:ln>
-          <a:effectLst/>
-        </p:spPr>
-        <p:style>
-          <a:lnRef idx="1">
-            <a:schemeClr val="accent1"/>
-          </a:lnRef>
-          <a:fillRef idx="3">
-            <a:schemeClr val="accent1"/>
-          </a:fillRef>
-          <a:effectRef idx="2">
-            <a:schemeClr val="accent1"/>
-          </a:effectRef>
-          <a:fontRef idx="minor">
-            <a:schemeClr val="lt1"/>
-          </a:fontRef>
-        </p:style>
-        <p:txBody>
-          <a:bodyPr rtlCol="0" anchor="ctr"/>
-          <a:lstStyle/>
-          <a:p>
-            <a:pPr algn="ctr"/>
-          </a:p>
-        </p:txBody>
-      </p:sp>
-      <p:sp>
-        <p:nvSpPr>
-          <p:cNvPr id="63" name="TextBox 62"/>
-          <p:cNvSpPr txBox="1"/>
-          <p:nvPr/>
-        </p:nvSpPr>
-        <p:spPr>
-          <a:xfrm>
-            <a:off x="3474720" y="5724144"/>
-            <a:ext cx="1572768" cy="237744"/>
-          </a:xfrm>
-          <a:prstGeom prst="rect">
-            <a:avLst/>
-          </a:prstGeom>
-          <a:noFill/>
-        </p:spPr>
-        <p:txBody>
-          <a:bodyPr wrap="square" anchor="t" lIns="0" rIns="0" tIns="0" bIns="0">
-            <a:spAutoFit/>
-          </a:bodyPr>
-          <a:lstStyle/>
-          <a:p>
-            <a:pPr algn="l">
-              <a:lnSpc>
-                <a:spcPct val="130000"/>
-              </a:lnSpc>
-            </a:pPr>
-            <a:r>
-              <a:rPr sz="819" b="0" lang="ja-JP">
-                <a:solidFill>
-                  <a:srgbClr val="666E70"/>
-                </a:solidFill>
-                <a:latin typeface="Yu Gothic"/>
-                <a:ea typeface="Yu Gothic"/>
-                <a:cs typeface="Yu Gothic"/>
-              </a:rPr>
-              <a:t>目標</a:t>
-            </a:r>
-          </a:p>
-        </p:txBody>
-      </p:sp>
-      <p:sp>
-        <p:nvSpPr>
-          <p:cNvPr id="64" name="TextBox 63"/>
-          <p:cNvSpPr txBox="1"/>
-          <p:nvPr/>
-        </p:nvSpPr>
-        <p:spPr>
-          <a:xfrm>
-            <a:off x="502920" y="6053327"/>
-            <a:ext cx="11185855" cy="228600"/>
-          </a:xfrm>
-          <a:prstGeom prst="rect">
-            <a:avLst/>
-          </a:prstGeom>
-          <a:noFill/>
-        </p:spPr>
-        <p:txBody>
-          <a:bodyPr wrap="square" anchor="t" lIns="0" rIns="0" tIns="0" bIns="0">
-            <a:spAutoFit/>
-          </a:bodyPr>
-          <a:lstStyle/>
-          <a:p>
-            <a:pPr algn="r">
-              <a:lnSpc>
-                <a:spcPct val="130000"/>
-              </a:lnSpc>
-            </a:pPr>
-            <a:r>
-              <a:rPr sz="850" b="0" lang="ja-JP">
-                <a:solidFill>
-                  <a:srgbClr val="666E70"/>
-                </a:solidFill>
-                <a:latin typeface="Yu Gothic"/>
-                <a:ea typeface="Yu Gothic"/>
-                <a:cs typeface="Yu Gothic"/>
-              </a:rPr>
-              <a:t>値は検証用のサンプルデータ。</a:t>
-            </a:r>
-          </a:p>
-        </p:txBody>
-      </p:sp>
-      <p:sp>
-        <p:nvSpPr>
-          <p:cNvPr id="65" name="Rectangle 64"/>
-          <p:cNvSpPr/>
-          <p:nvPr/>
-        </p:nvSpPr>
-        <p:spPr>
-          <a:xfrm>
-            <a:off x="658368" y="6327648"/>
-            <a:ext cx="10881360" cy="9144"/>
-          </a:xfrm>
-          <a:prstGeom prst="rect">
-            <a:avLst/>
-          </a:prstGeom>
-          <a:solidFill>
-            <a:srgbClr val="D1CFC8"/>
-          </a:solidFill>
-          <a:ln>
-            <a:noFill/>
-          </a:ln>
-          <a:effectLst/>
-        </p:spPr>
-        <p:style>
-          <a:lnRef idx="1">
-            <a:schemeClr val="accent1"/>
-          </a:lnRef>
-          <a:fillRef idx="3">
-            <a:schemeClr val="accent1"/>
-          </a:fillRef>
-          <a:effectRef idx="2">
-            <a:schemeClr val="accent1"/>
-          </a:effectRef>
-          <a:fontRef idx="minor">
-            <a:schemeClr val="lt1"/>
-          </a:fontRef>
-        </p:style>
-        <p:txBody>
-          <a:bodyPr rtlCol="0" anchor="ctr"/>
-          <a:lstStyle/>
-          <a:p>
-            <a:pPr algn="ctr"/>
-          </a:p>
-        </p:txBody>
-      </p:sp>
-      <p:sp>
-        <p:nvSpPr>
-          <p:cNvPr id="66" name="TextBox 65"/>
+          <p:cNvPr id="65" name="TextBox 64"/>
           <p:cNvSpPr txBox="1"/>
           <p:nvPr/>
         </p:nvSpPr>
@@ -6232,7 +6237,7 @@
       </p:sp>
       <p:sp>
         <p:nvSpPr>
-          <p:cNvPr id="67" name="TextBox 66"/>
+          <p:cNvPr id="66" name="TextBox 65"/>
           <p:cNvSpPr txBox="1"/>
           <p:nvPr/>
         </p:nvSpPr>
@@ -6428,14 +6433,14 @@
       </p:sp>
       <p:cxnSp>
         <p:nvCxnSpPr>
-          <p:cNvPr id="5" name="Connector 4"/>
+          <p:cNvPr id="5" name="chart:grid"/>
           <p:cNvCxnSpPr/>
           <p:nvPr/>
         </p:nvCxnSpPr>
         <p:spPr>
           <a:xfrm>
-            <a:off x="1417319" y="5138927"/>
-            <a:ext cx="9848089" cy="0"/>
+            <a:off x="1307592" y="5047488"/>
+            <a:ext cx="9953244" cy="0"/>
           </a:xfrm>
           <a:prstGeom prst="line">
             <a:avLst/>
@@ -6445,6 +6450,7 @@
               <a:srgbClr val="D1CFC8"/>
             </a:solidFill>
           </a:ln>
+          <a:effectLst/>
         </p:spPr>
         <p:style>
           <a:lnRef idx="2">
@@ -6453,387 +6459,7 @@
           <a:fillRef idx="0">
             <a:schemeClr val="accent1"/>
           </a:fillRef>
-          <a:effectRef idx="1">
-            <a:schemeClr val="accent1"/>
-          </a:effectRef>
-          <a:fontRef idx="minor">
-            <a:schemeClr val="tx1"/>
-          </a:fontRef>
-        </p:style>
-      </p:cxnSp>
-      <p:sp>
-        <p:nvSpPr>
-          <p:cNvPr id="6" name="TextBox 5"/>
-          <p:cNvSpPr txBox="1"/>
-          <p:nvPr/>
-        </p:nvSpPr>
-        <p:spPr>
-          <a:xfrm>
-            <a:off x="996695" y="5056631"/>
-            <a:ext cx="329184" cy="164592"/>
-          </a:xfrm>
-          <a:prstGeom prst="rect">
-            <a:avLst/>
-          </a:prstGeom>
-          <a:noFill/>
-        </p:spPr>
-        <p:txBody>
-          <a:bodyPr wrap="square" anchor="t" lIns="0" rIns="0" tIns="0" bIns="0">
-            <a:spAutoFit/>
-          </a:bodyPr>
-          <a:lstStyle/>
-          <a:p>
-            <a:pPr algn="r">
-              <a:lnSpc>
-                <a:spcPct val="130000"/>
-              </a:lnSpc>
-            </a:pPr>
-            <a:r>
-              <a:rPr sz="780" b="0" lang="ja-JP">
-                <a:solidFill>
-                  <a:srgbClr val="666E70"/>
-                </a:solidFill>
-                <a:latin typeface="Yu Gothic"/>
-                <a:ea typeface="Yu Gothic"/>
-                <a:cs typeface="Yu Gothic"/>
-              </a:rPr>
-              <a:t>0</a:t>
-            </a:r>
-          </a:p>
-        </p:txBody>
-      </p:sp>
-      <p:cxnSp>
-        <p:nvCxnSpPr>
-          <p:cNvPr id="7" name="Connector 6"/>
-          <p:cNvCxnSpPr/>
-          <p:nvPr/>
-        </p:nvCxnSpPr>
-        <p:spPr>
-          <a:xfrm>
-            <a:off x="1417319" y="4299966"/>
-            <a:ext cx="9848089" cy="0"/>
-          </a:xfrm>
-          <a:prstGeom prst="line">
-            <a:avLst/>
-          </a:prstGeom>
-          <a:ln w="6985">
-            <a:solidFill>
-              <a:srgbClr val="D1CFC8"/>
-            </a:solidFill>
-          </a:ln>
-        </p:spPr>
-        <p:style>
-          <a:lnRef idx="2">
-            <a:schemeClr val="accent1"/>
-          </a:lnRef>
-          <a:fillRef idx="0">
-            <a:schemeClr val="accent1"/>
-          </a:fillRef>
-          <a:effectRef idx="1">
-            <a:schemeClr val="accent1"/>
-          </a:effectRef>
-          <a:fontRef idx="minor">
-            <a:schemeClr val="tx1"/>
-          </a:fontRef>
-        </p:style>
-      </p:cxnSp>
-      <p:sp>
-        <p:nvSpPr>
-          <p:cNvPr id="8" name="TextBox 7"/>
-          <p:cNvSpPr txBox="1"/>
-          <p:nvPr/>
-        </p:nvSpPr>
-        <p:spPr>
-          <a:xfrm>
-            <a:off x="996695" y="4217670"/>
-            <a:ext cx="329184" cy="164592"/>
-          </a:xfrm>
-          <a:prstGeom prst="rect">
-            <a:avLst/>
-          </a:prstGeom>
-          <a:noFill/>
-        </p:spPr>
-        <p:txBody>
-          <a:bodyPr wrap="square" anchor="t" lIns="0" rIns="0" tIns="0" bIns="0">
-            <a:spAutoFit/>
-          </a:bodyPr>
-          <a:lstStyle/>
-          <a:p>
-            <a:pPr algn="r">
-              <a:lnSpc>
-                <a:spcPct val="130000"/>
-              </a:lnSpc>
-            </a:pPr>
-            <a:r>
-              <a:rPr sz="780" b="0" lang="ja-JP">
-                <a:solidFill>
-                  <a:srgbClr val="666E70"/>
-                </a:solidFill>
-                <a:latin typeface="Yu Gothic"/>
-                <a:ea typeface="Yu Gothic"/>
-                <a:cs typeface="Yu Gothic"/>
-              </a:rPr>
-              <a:t>50</a:t>
-            </a:r>
-          </a:p>
-        </p:txBody>
-      </p:sp>
-      <p:cxnSp>
-        <p:nvCxnSpPr>
-          <p:cNvPr id="9" name="Connector 8"/>
-          <p:cNvCxnSpPr/>
-          <p:nvPr/>
-        </p:nvCxnSpPr>
-        <p:spPr>
-          <a:xfrm>
-            <a:off x="1417319" y="3461003"/>
-            <a:ext cx="9848089" cy="0"/>
-          </a:xfrm>
-          <a:prstGeom prst="line">
-            <a:avLst/>
-          </a:prstGeom>
-          <a:ln w="6985">
-            <a:solidFill>
-              <a:srgbClr val="D1CFC8"/>
-            </a:solidFill>
-          </a:ln>
-        </p:spPr>
-        <p:style>
-          <a:lnRef idx="2">
-            <a:schemeClr val="accent1"/>
-          </a:lnRef>
-          <a:fillRef idx="0">
-            <a:schemeClr val="accent1"/>
-          </a:fillRef>
-          <a:effectRef idx="1">
-            <a:schemeClr val="accent1"/>
-          </a:effectRef>
-          <a:fontRef idx="minor">
-            <a:schemeClr val="tx1"/>
-          </a:fontRef>
-        </p:style>
-      </p:cxnSp>
-      <p:sp>
-        <p:nvSpPr>
-          <p:cNvPr id="10" name="TextBox 9"/>
-          <p:cNvSpPr txBox="1"/>
-          <p:nvPr/>
-        </p:nvSpPr>
-        <p:spPr>
-          <a:xfrm>
-            <a:off x="996695" y="3378707"/>
-            <a:ext cx="329184" cy="164592"/>
-          </a:xfrm>
-          <a:prstGeom prst="rect">
-            <a:avLst/>
-          </a:prstGeom>
-          <a:noFill/>
-        </p:spPr>
-        <p:txBody>
-          <a:bodyPr wrap="square" anchor="t" lIns="0" rIns="0" tIns="0" bIns="0">
-            <a:spAutoFit/>
-          </a:bodyPr>
-          <a:lstStyle/>
-          <a:p>
-            <a:pPr algn="r">
-              <a:lnSpc>
-                <a:spcPct val="130000"/>
-              </a:lnSpc>
-            </a:pPr>
-            <a:r>
-              <a:rPr sz="780" b="0" lang="ja-JP">
-                <a:solidFill>
-                  <a:srgbClr val="666E70"/>
-                </a:solidFill>
-                <a:latin typeface="Yu Gothic"/>
-                <a:ea typeface="Yu Gothic"/>
-                <a:cs typeface="Yu Gothic"/>
-              </a:rPr>
-              <a:t>100</a:t>
-            </a:r>
-          </a:p>
-        </p:txBody>
-      </p:sp>
-      <p:cxnSp>
-        <p:nvCxnSpPr>
-          <p:cNvPr id="11" name="Connector 10"/>
-          <p:cNvCxnSpPr/>
-          <p:nvPr/>
-        </p:nvCxnSpPr>
-        <p:spPr>
-          <a:xfrm>
-            <a:off x="1417319" y="2622041"/>
-            <a:ext cx="9848089" cy="0"/>
-          </a:xfrm>
-          <a:prstGeom prst="line">
-            <a:avLst/>
-          </a:prstGeom>
-          <a:ln w="6985">
-            <a:solidFill>
-              <a:srgbClr val="D1CFC8"/>
-            </a:solidFill>
-          </a:ln>
-        </p:spPr>
-        <p:style>
-          <a:lnRef idx="2">
-            <a:schemeClr val="accent1"/>
-          </a:lnRef>
-          <a:fillRef idx="0">
-            <a:schemeClr val="accent1"/>
-          </a:fillRef>
-          <a:effectRef idx="1">
-            <a:schemeClr val="accent1"/>
-          </a:effectRef>
-          <a:fontRef idx="minor">
-            <a:schemeClr val="tx1"/>
-          </a:fontRef>
-        </p:style>
-      </p:cxnSp>
-      <p:sp>
-        <p:nvSpPr>
-          <p:cNvPr id="12" name="TextBox 11"/>
-          <p:cNvSpPr txBox="1"/>
-          <p:nvPr/>
-        </p:nvSpPr>
-        <p:spPr>
-          <a:xfrm>
-            <a:off x="996695" y="2539746"/>
-            <a:ext cx="329184" cy="164592"/>
-          </a:xfrm>
-          <a:prstGeom prst="rect">
-            <a:avLst/>
-          </a:prstGeom>
-          <a:noFill/>
-        </p:spPr>
-        <p:txBody>
-          <a:bodyPr wrap="square" anchor="t" lIns="0" rIns="0" tIns="0" bIns="0">
-            <a:spAutoFit/>
-          </a:bodyPr>
-          <a:lstStyle/>
-          <a:p>
-            <a:pPr algn="r">
-              <a:lnSpc>
-                <a:spcPct val="130000"/>
-              </a:lnSpc>
-            </a:pPr>
-            <a:r>
-              <a:rPr sz="780" b="0" lang="ja-JP">
-                <a:solidFill>
-                  <a:srgbClr val="666E70"/>
-                </a:solidFill>
-                <a:latin typeface="Yu Gothic"/>
-                <a:ea typeface="Yu Gothic"/>
-                <a:cs typeface="Yu Gothic"/>
-              </a:rPr>
-              <a:t>150</a:t>
-            </a:r>
-          </a:p>
-        </p:txBody>
-      </p:sp>
-      <p:cxnSp>
-        <p:nvCxnSpPr>
-          <p:cNvPr id="13" name="Connector 12"/>
-          <p:cNvCxnSpPr/>
-          <p:nvPr/>
-        </p:nvCxnSpPr>
-        <p:spPr>
-          <a:xfrm>
-            <a:off x="1417319" y="1783079"/>
-            <a:ext cx="9848089" cy="0"/>
-          </a:xfrm>
-          <a:prstGeom prst="line">
-            <a:avLst/>
-          </a:prstGeom>
-          <a:ln w="6985">
-            <a:solidFill>
-              <a:srgbClr val="D1CFC8"/>
-            </a:solidFill>
-          </a:ln>
-        </p:spPr>
-        <p:style>
-          <a:lnRef idx="2">
-            <a:schemeClr val="accent1"/>
-          </a:lnRef>
-          <a:fillRef idx="0">
-            <a:schemeClr val="accent1"/>
-          </a:fillRef>
-          <a:effectRef idx="1">
-            <a:schemeClr val="accent1"/>
-          </a:effectRef>
-          <a:fontRef idx="minor">
-            <a:schemeClr val="tx1"/>
-          </a:fontRef>
-        </p:style>
-      </p:cxnSp>
-      <p:sp>
-        <p:nvSpPr>
-          <p:cNvPr id="14" name="TextBox 13"/>
-          <p:cNvSpPr txBox="1"/>
-          <p:nvPr/>
-        </p:nvSpPr>
-        <p:spPr>
-          <a:xfrm>
-            <a:off x="996695" y="1700783"/>
-            <a:ext cx="329184" cy="164592"/>
-          </a:xfrm>
-          <a:prstGeom prst="rect">
-            <a:avLst/>
-          </a:prstGeom>
-          <a:noFill/>
-        </p:spPr>
-        <p:txBody>
-          <a:bodyPr wrap="square" anchor="t" lIns="0" rIns="0" tIns="0" bIns="0">
-            <a:spAutoFit/>
-          </a:bodyPr>
-          <a:lstStyle/>
-          <a:p>
-            <a:pPr algn="r">
-              <a:lnSpc>
-                <a:spcPct val="130000"/>
-              </a:lnSpc>
-            </a:pPr>
-            <a:r>
-              <a:rPr sz="780" b="0" lang="ja-JP">
-                <a:solidFill>
-                  <a:srgbClr val="666E70"/>
-                </a:solidFill>
-                <a:latin typeface="Yu Gothic"/>
-                <a:ea typeface="Yu Gothic"/>
-                <a:cs typeface="Yu Gothic"/>
-              </a:rPr>
-              <a:t>200</a:t>
-            </a:r>
-          </a:p>
-        </p:txBody>
-      </p:sp>
-      <p:cxnSp>
-        <p:nvCxnSpPr>
-          <p:cNvPr id="15" name="Connector 14"/>
-          <p:cNvCxnSpPr/>
-          <p:nvPr/>
-        </p:nvCxnSpPr>
-        <p:spPr>
-          <a:xfrm>
-            <a:off x="1417319" y="1783080"/>
-            <a:ext cx="0" cy="3355847"/>
-          </a:xfrm>
-          <a:prstGeom prst="line">
-            <a:avLst/>
-          </a:prstGeom>
-          <a:ln w="10160">
-            <a:solidFill>
-              <a:srgbClr val="666E70"/>
-            </a:solidFill>
-          </a:ln>
-        </p:spPr>
-        <p:style>
-          <a:lnRef idx="2">
-            <a:schemeClr val="accent1"/>
-          </a:lnRef>
-          <a:fillRef idx="0">
-            <a:schemeClr val="accent1"/>
-          </a:fillRef>
-          <a:effectRef idx="1">
+          <a:effectRef idx="0">
             <a:schemeClr val="accent1"/>
           </a:effectRef>
           <a:fontRef idx="minor">
@@ -6843,23 +6469,24 @@
       </p:cxnSp>
       <p:cxnSp>
         <p:nvCxnSpPr>
-          <p:cNvPr id="16" name="Connector 15"/>
+          <p:cNvPr id="6" name="chart:grid"/>
           <p:cNvCxnSpPr/>
           <p:nvPr/>
         </p:nvCxnSpPr>
         <p:spPr>
           <a:xfrm>
-            <a:off x="1417319" y="5138927"/>
-            <a:ext cx="9848089" cy="0"/>
+            <a:off x="1307592" y="4436059"/>
+            <a:ext cx="4764595" cy="0"/>
           </a:xfrm>
           <a:prstGeom prst="line">
             <a:avLst/>
           </a:prstGeom>
-          <a:ln w="10160">
+          <a:ln w="6985">
             <a:solidFill>
-              <a:srgbClr val="666E70"/>
+              <a:srgbClr val="D1CFC8"/>
             </a:solidFill>
           </a:ln>
+          <a:effectLst/>
         </p:spPr>
         <p:style>
           <a:lnRef idx="2">
@@ -6868,7 +6495,7 @@
           <a:fillRef idx="0">
             <a:schemeClr val="accent1"/>
           </a:fillRef>
-          <a:effectRef idx="1">
+          <a:effectRef idx="0">
             <a:schemeClr val="accent1"/>
           </a:effectRef>
           <a:fontRef idx="minor">
@@ -6876,57 +6503,304 @@
           </a:fontRef>
         </p:style>
       </p:cxnSp>
-      <p:sp>
-        <p:nvSpPr>
-          <p:cNvPr id="17" name="TextBox 16"/>
-          <p:cNvSpPr txBox="1"/>
-          <p:nvPr/>
-        </p:nvSpPr>
-        <p:spPr>
-          <a:xfrm>
-            <a:off x="1444751" y="5230367"/>
-            <a:ext cx="3227832" cy="237744"/>
-          </a:xfrm>
-          <a:prstGeom prst="rect">
-            <a:avLst/>
-          </a:prstGeom>
-          <a:noFill/>
-        </p:spPr>
-        <p:txBody>
-          <a:bodyPr wrap="square" anchor="t" lIns="0" rIns="0" tIns="0" bIns="0">
-            <a:spAutoFit/>
-          </a:bodyPr>
-          <a:lstStyle/>
-          <a:p>
-            <a:pPr algn="ctr">
-              <a:lnSpc>
-                <a:spcPct val="130000"/>
-              </a:lnSpc>
-            </a:pPr>
-            <a:r>
-              <a:rPr sz="819" b="0" lang="ja-JP">
-                <a:solidFill>
-                  <a:srgbClr val="666E70"/>
-                </a:solidFill>
-                <a:latin typeface="Yu Gothic"/>
-                <a:ea typeface="Yu Gothic"/>
-                <a:cs typeface="Yu Gothic"/>
-              </a:rPr>
-              <a:t>導入前</a:t>
-            </a:r>
-          </a:p>
-        </p:txBody>
-      </p:sp>
-      <p:sp>
-        <p:nvSpPr>
-          <p:cNvPr id="18" name="Rectangle 17"/>
+      <p:cxnSp>
+        <p:nvCxnSpPr>
+          <p:cNvPr id="7" name="chart:grid"/>
+          <p:cNvCxnSpPr/>
+          <p:nvPr/>
+        </p:nvCxnSpPr>
+        <p:spPr>
+          <a:xfrm>
+            <a:off x="6496240" y="4436059"/>
+            <a:ext cx="4764596" cy="0"/>
+          </a:xfrm>
+          <a:prstGeom prst="line">
+            <a:avLst/>
+          </a:prstGeom>
+          <a:ln w="6985">
+            <a:solidFill>
+              <a:srgbClr val="D1CFC8"/>
+            </a:solidFill>
+          </a:ln>
+          <a:effectLst/>
+        </p:spPr>
+        <p:style>
+          <a:lnRef idx="2">
+            <a:schemeClr val="accent1"/>
+          </a:lnRef>
+          <a:fillRef idx="0">
+            <a:schemeClr val="accent1"/>
+          </a:fillRef>
+          <a:effectRef idx="0">
+            <a:schemeClr val="accent1"/>
+          </a:effectRef>
+          <a:fontRef idx="minor">
+            <a:schemeClr val="tx1"/>
+          </a:fontRef>
+        </p:style>
+      </p:cxnSp>
+      <p:cxnSp>
+        <p:nvCxnSpPr>
+          <p:cNvPr id="8" name="chart:grid"/>
+          <p:cNvCxnSpPr/>
+          <p:nvPr/>
+        </p:nvCxnSpPr>
+        <p:spPr>
+          <a:xfrm>
+            <a:off x="1307592" y="3824630"/>
+            <a:ext cx="8082343" cy="0"/>
+          </a:xfrm>
+          <a:prstGeom prst="line">
+            <a:avLst/>
+          </a:prstGeom>
+          <a:ln w="6985">
+            <a:solidFill>
+              <a:srgbClr val="D1CFC8"/>
+            </a:solidFill>
+          </a:ln>
+          <a:effectLst/>
+        </p:spPr>
+        <p:style>
+          <a:lnRef idx="2">
+            <a:schemeClr val="accent1"/>
+          </a:lnRef>
+          <a:fillRef idx="0">
+            <a:schemeClr val="accent1"/>
+          </a:fillRef>
+          <a:effectRef idx="0">
+            <a:schemeClr val="accent1"/>
+          </a:effectRef>
+          <a:fontRef idx="minor">
+            <a:schemeClr val="tx1"/>
+          </a:fontRef>
+        </p:style>
+      </p:cxnSp>
+      <p:cxnSp>
+        <p:nvCxnSpPr>
+          <p:cNvPr id="9" name="chart:grid"/>
+          <p:cNvCxnSpPr/>
+          <p:nvPr/>
+        </p:nvCxnSpPr>
+        <p:spPr>
+          <a:xfrm>
+            <a:off x="9813988" y="3824630"/>
+            <a:ext cx="1446848" cy="0"/>
+          </a:xfrm>
+          <a:prstGeom prst="line">
+            <a:avLst/>
+          </a:prstGeom>
+          <a:ln w="6985">
+            <a:solidFill>
+              <a:srgbClr val="D1CFC8"/>
+            </a:solidFill>
+          </a:ln>
+          <a:effectLst/>
+        </p:spPr>
+        <p:style>
+          <a:lnRef idx="2">
+            <a:schemeClr val="accent1"/>
+          </a:lnRef>
+          <a:fillRef idx="0">
+            <a:schemeClr val="accent1"/>
+          </a:fillRef>
+          <a:effectRef idx="0">
+            <a:schemeClr val="accent1"/>
+          </a:effectRef>
+          <a:fontRef idx="minor">
+            <a:schemeClr val="tx1"/>
+          </a:fontRef>
+        </p:style>
+      </p:cxnSp>
+      <p:cxnSp>
+        <p:nvCxnSpPr>
+          <p:cNvPr id="10" name="chart:grid"/>
+          <p:cNvCxnSpPr/>
+          <p:nvPr/>
+        </p:nvCxnSpPr>
+        <p:spPr>
+          <a:xfrm>
+            <a:off x="1307592" y="3213201"/>
+            <a:ext cx="9953244" cy="0"/>
+          </a:xfrm>
+          <a:prstGeom prst="line">
+            <a:avLst/>
+          </a:prstGeom>
+          <a:ln w="6985">
+            <a:solidFill>
+              <a:srgbClr val="D1CFC8"/>
+            </a:solidFill>
+          </a:ln>
+          <a:effectLst/>
+        </p:spPr>
+        <p:style>
+          <a:lnRef idx="2">
+            <a:schemeClr val="accent1"/>
+          </a:lnRef>
+          <a:fillRef idx="0">
+            <a:schemeClr val="accent1"/>
+          </a:fillRef>
+          <a:effectRef idx="0">
+            <a:schemeClr val="accent1"/>
+          </a:effectRef>
+          <a:fontRef idx="minor">
+            <a:schemeClr val="tx1"/>
+          </a:fontRef>
+        </p:style>
+      </p:cxnSp>
+      <p:cxnSp>
+        <p:nvCxnSpPr>
+          <p:cNvPr id="11" name="chart:grid"/>
+          <p:cNvCxnSpPr/>
+          <p:nvPr/>
+        </p:nvCxnSpPr>
+        <p:spPr>
+          <a:xfrm>
+            <a:off x="1307592" y="2601772"/>
+            <a:ext cx="1446847" cy="0"/>
+          </a:xfrm>
+          <a:prstGeom prst="line">
+            <a:avLst/>
+          </a:prstGeom>
+          <a:ln w="6985">
+            <a:solidFill>
+              <a:srgbClr val="D1CFC8"/>
+            </a:solidFill>
+          </a:ln>
+          <a:effectLst/>
+        </p:spPr>
+        <p:style>
+          <a:lnRef idx="2">
+            <a:schemeClr val="accent1"/>
+          </a:lnRef>
+          <a:fillRef idx="0">
+            <a:schemeClr val="accent1"/>
+          </a:fillRef>
+          <a:effectRef idx="0">
+            <a:schemeClr val="accent1"/>
+          </a:effectRef>
+          <a:fontRef idx="minor">
+            <a:schemeClr val="tx1"/>
+          </a:fontRef>
+        </p:style>
+      </p:cxnSp>
+      <p:cxnSp>
+        <p:nvCxnSpPr>
+          <p:cNvPr id="12" name="chart:grid"/>
+          <p:cNvCxnSpPr/>
+          <p:nvPr/>
+        </p:nvCxnSpPr>
+        <p:spPr>
+          <a:xfrm>
+            <a:off x="3178492" y="2601772"/>
+            <a:ext cx="8082344" cy="0"/>
+          </a:xfrm>
+          <a:prstGeom prst="line">
+            <a:avLst/>
+          </a:prstGeom>
+          <a:ln w="6985">
+            <a:solidFill>
+              <a:srgbClr val="D1CFC8"/>
+            </a:solidFill>
+          </a:ln>
+          <a:effectLst/>
+        </p:spPr>
+        <p:style>
+          <a:lnRef idx="2">
+            <a:schemeClr val="accent1"/>
+          </a:lnRef>
+          <a:fillRef idx="0">
+            <a:schemeClr val="accent1"/>
+          </a:fillRef>
+          <a:effectRef idx="0">
+            <a:schemeClr val="accent1"/>
+          </a:effectRef>
+          <a:fontRef idx="minor">
+            <a:schemeClr val="tx1"/>
+          </a:fontRef>
+        </p:style>
+      </p:cxnSp>
+      <p:cxnSp>
+        <p:nvCxnSpPr>
+          <p:cNvPr id="13" name="chart:grid"/>
+          <p:cNvCxnSpPr/>
+          <p:nvPr/>
+        </p:nvCxnSpPr>
+        <p:spPr>
+          <a:xfrm>
+            <a:off x="1307592" y="1990344"/>
+            <a:ext cx="9953244" cy="0"/>
+          </a:xfrm>
+          <a:prstGeom prst="line">
+            <a:avLst/>
+          </a:prstGeom>
+          <a:ln w="6985">
+            <a:solidFill>
+              <a:srgbClr val="D1CFC8"/>
+            </a:solidFill>
+          </a:ln>
+          <a:effectLst/>
+        </p:spPr>
+        <p:style>
+          <a:lnRef idx="2">
+            <a:schemeClr val="accent1"/>
+          </a:lnRef>
+          <a:fillRef idx="0">
+            <a:schemeClr val="accent1"/>
+          </a:fillRef>
+          <a:effectRef idx="0">
+            <a:schemeClr val="accent1"/>
+          </a:effectRef>
+          <a:fontRef idx="minor">
+            <a:schemeClr val="tx1"/>
+          </a:fontRef>
+        </p:style>
+      </p:cxnSp>
+      <p:cxnSp>
+        <p:nvCxnSpPr>
+          <p:cNvPr id="14" name="chart:zero-axis"/>
+          <p:cNvCxnSpPr/>
+          <p:nvPr/>
+        </p:nvCxnSpPr>
+        <p:spPr>
+          <a:xfrm>
+            <a:off x="1307592" y="5047488"/>
+            <a:ext cx="9953244" cy="0"/>
+          </a:xfrm>
+          <a:prstGeom prst="line">
+            <a:avLst/>
+          </a:prstGeom>
+          <a:ln w="11430">
+            <a:solidFill>
+              <a:srgbClr val="666E70"/>
+            </a:solidFill>
+          </a:ln>
+          <a:effectLst/>
+        </p:spPr>
+        <p:style>
+          <a:lnRef idx="2">
+            <a:schemeClr val="accent1"/>
+          </a:lnRef>
+          <a:fillRef idx="0">
+            <a:schemeClr val="accent1"/>
+          </a:fillRef>
+          <a:effectRef idx="0">
+            <a:schemeClr val="accent1"/>
+          </a:effectRef>
+          <a:fontRef idx="minor">
+            <a:schemeClr val="tx1"/>
+          </a:fontRef>
+        </p:style>
+      </p:cxnSp>
+      <p:sp>
+        <p:nvSpPr>
+          <p:cNvPr id="15" name="chart:data-bar"/>
           <p:cNvSpPr/>
           <p:nvPr/>
         </p:nvSpPr>
         <p:spPr>
           <a:xfrm>
-            <a:off x="2793491" y="3964381"/>
-            <a:ext cx="530352" cy="1174546"/>
+            <a:off x="2669286" y="2907487"/>
+            <a:ext cx="594360" cy="2140000"/>
           </a:xfrm>
           <a:prstGeom prst="rect">
             <a:avLst/>
@@ -6946,7 +6820,7 @@
           <a:fillRef idx="3">
             <a:schemeClr val="accent1"/>
           </a:fillRef>
-          <a:effectRef idx="2">
+          <a:effectRef idx="0">
             <a:schemeClr val="accent1"/>
           </a:effectRef>
           <a:fontRef idx="minor">
@@ -6963,14 +6837,14 @@
       </p:sp>
       <p:sp>
         <p:nvSpPr>
-          <p:cNvPr id="19" name="Rectangle 18"/>
+          <p:cNvPr id="16" name="chart:data-bar"/>
           <p:cNvSpPr/>
           <p:nvPr/>
         </p:nvSpPr>
         <p:spPr>
           <a:xfrm>
-            <a:off x="2793491" y="3628796"/>
-            <a:ext cx="530352" cy="335584"/>
+            <a:off x="2669286" y="2296058"/>
+            <a:ext cx="594360" cy="611428"/>
           </a:xfrm>
           <a:prstGeom prst="rect">
             <a:avLst/>
@@ -6990,7 +6864,7 @@
           <a:fillRef idx="3">
             <a:schemeClr val="accent1"/>
           </a:fillRef>
-          <a:effectRef idx="2">
+          <a:effectRef idx="0">
             <a:schemeClr val="accent1"/>
           </a:effectRef>
           <a:fontRef idx="minor">
@@ -7007,14 +6881,14 @@
       </p:sp>
       <p:sp>
         <p:nvSpPr>
-          <p:cNvPr id="20" name="Rectangle 19"/>
+          <p:cNvPr id="17" name="chart:data-bar"/>
           <p:cNvSpPr/>
           <p:nvPr/>
         </p:nvSpPr>
         <p:spPr>
           <a:xfrm>
-            <a:off x="2793491" y="3461003"/>
-            <a:ext cx="530352" cy="167792"/>
+            <a:off x="2669286" y="1990344"/>
+            <a:ext cx="594360" cy="305714"/>
           </a:xfrm>
           <a:prstGeom prst="rect">
             <a:avLst/>
@@ -7034,7 +6908,7 @@
           <a:fillRef idx="3">
             <a:schemeClr val="accent1"/>
           </a:fillRef>
-          <a:effectRef idx="2">
+          <a:effectRef idx="0">
             <a:schemeClr val="accent1"/>
           </a:effectRef>
           <a:fontRef idx="minor">
@@ -7051,55 +6925,14 @@
       </p:sp>
       <p:sp>
         <p:nvSpPr>
-          <p:cNvPr id="21" name="TextBox 20"/>
-          <p:cNvSpPr txBox="1"/>
-          <p:nvPr/>
-        </p:nvSpPr>
-        <p:spPr>
-          <a:xfrm>
-            <a:off x="4727448" y="5230367"/>
-            <a:ext cx="3227832" cy="237744"/>
-          </a:xfrm>
-          <a:prstGeom prst="rect">
-            <a:avLst/>
-          </a:prstGeom>
-          <a:noFill/>
-        </p:spPr>
-        <p:txBody>
-          <a:bodyPr wrap="square" anchor="t" lIns="0" rIns="0" tIns="0" bIns="0">
-            <a:spAutoFit/>
-          </a:bodyPr>
-          <a:lstStyle/>
-          <a:p>
-            <a:pPr algn="ctr">
-              <a:lnSpc>
-                <a:spcPct val="130000"/>
-              </a:lnSpc>
-            </a:pPr>
-            <a:r>
-              <a:rPr sz="819" b="0" lang="ja-JP">
-                <a:solidFill>
-                  <a:srgbClr val="666E70"/>
-                </a:solidFill>
-                <a:latin typeface="Yu Gothic"/>
-                <a:ea typeface="Yu Gothic"/>
-                <a:cs typeface="Yu Gothic"/>
-              </a:rPr>
-              <a:t>試行中</a:t>
-            </a:r>
-          </a:p>
-        </p:txBody>
-      </p:sp>
-      <p:sp>
-        <p:nvSpPr>
-          <p:cNvPr id="22" name="Rectangle 21"/>
+          <p:cNvPr id="18" name="chart:data-bar"/>
           <p:cNvSpPr/>
           <p:nvPr/>
         </p:nvSpPr>
         <p:spPr>
           <a:xfrm>
-            <a:off x="6076188" y="4501316"/>
-            <a:ext cx="530352" cy="637611"/>
+            <a:off x="5987034" y="3885773"/>
+            <a:ext cx="594360" cy="1161714"/>
           </a:xfrm>
           <a:prstGeom prst="rect">
             <a:avLst/>
@@ -7119,7 +6952,7 @@
           <a:fillRef idx="3">
             <a:schemeClr val="accent1"/>
           </a:fillRef>
-          <a:effectRef idx="2">
+          <a:effectRef idx="0">
             <a:schemeClr val="accent1"/>
           </a:effectRef>
           <a:fontRef idx="minor">
@@ -7136,14 +6969,14 @@
       </p:sp>
       <p:sp>
         <p:nvSpPr>
-          <p:cNvPr id="23" name="Rectangle 22"/>
+          <p:cNvPr id="19" name="chart:data-bar"/>
           <p:cNvSpPr/>
           <p:nvPr/>
         </p:nvSpPr>
         <p:spPr>
           <a:xfrm>
-            <a:off x="6076188" y="3964381"/>
-            <a:ext cx="530352" cy="536935"/>
+            <a:off x="5987034" y="2907487"/>
+            <a:ext cx="594360" cy="978286"/>
           </a:xfrm>
           <a:prstGeom prst="rect">
             <a:avLst/>
@@ -7163,7 +6996,7 @@
           <a:fillRef idx="3">
             <a:schemeClr val="accent1"/>
           </a:fillRef>
-          <a:effectRef idx="2">
+          <a:effectRef idx="0">
             <a:schemeClr val="accent1"/>
           </a:effectRef>
           <a:fontRef idx="minor">
@@ -7180,14 +7013,14 @@
       </p:sp>
       <p:sp>
         <p:nvSpPr>
-          <p:cNvPr id="24" name="Rectangle 23"/>
+          <p:cNvPr id="20" name="chart:data-bar"/>
           <p:cNvSpPr/>
           <p:nvPr/>
         </p:nvSpPr>
         <p:spPr>
           <a:xfrm>
-            <a:off x="6076188" y="3461003"/>
-            <a:ext cx="530352" cy="503377"/>
+            <a:off x="5987034" y="1990344"/>
+            <a:ext cx="594360" cy="917143"/>
           </a:xfrm>
           <a:prstGeom prst="rect">
             <a:avLst/>
@@ -7207,7 +7040,7 @@
           <a:fillRef idx="3">
             <a:schemeClr val="accent1"/>
           </a:fillRef>
-          <a:effectRef idx="2">
+          <a:effectRef idx="0">
             <a:schemeClr val="accent1"/>
           </a:effectRef>
           <a:fontRef idx="minor">
@@ -7224,55 +7057,14 @@
       </p:sp>
       <p:sp>
         <p:nvSpPr>
-          <p:cNvPr id="25" name="TextBox 24"/>
-          <p:cNvSpPr txBox="1"/>
-          <p:nvPr/>
-        </p:nvSpPr>
-        <p:spPr>
-          <a:xfrm>
-            <a:off x="8010144" y="5230367"/>
-            <a:ext cx="3227832" cy="237744"/>
-          </a:xfrm>
-          <a:prstGeom prst="rect">
-            <a:avLst/>
-          </a:prstGeom>
-          <a:noFill/>
-        </p:spPr>
-        <p:txBody>
-          <a:bodyPr wrap="square" anchor="t" lIns="0" rIns="0" tIns="0" bIns="0">
-            <a:spAutoFit/>
-          </a:bodyPr>
-          <a:lstStyle/>
-          <a:p>
-            <a:pPr algn="ctr">
-              <a:lnSpc>
-                <a:spcPct val="130000"/>
-              </a:lnSpc>
-            </a:pPr>
-            <a:r>
-              <a:rPr sz="819" b="0" lang="ja-JP">
-                <a:solidFill>
-                  <a:srgbClr val="666E70"/>
-                </a:solidFill>
-                <a:latin typeface="Yu Gothic"/>
-                <a:ea typeface="Yu Gothic"/>
-                <a:cs typeface="Yu Gothic"/>
-              </a:rPr>
-              <a:t>標準化後</a:t>
-            </a:r>
-          </a:p>
-        </p:txBody>
-      </p:sp>
-      <p:sp>
-        <p:nvSpPr>
-          <p:cNvPr id="26" name="Rectangle 25"/>
+          <p:cNvPr id="21" name="chart:data-bar"/>
           <p:cNvSpPr/>
           <p:nvPr/>
         </p:nvSpPr>
         <p:spPr>
           <a:xfrm>
-            <a:off x="9358884" y="4836901"/>
-            <a:ext cx="530352" cy="302026"/>
+            <a:off x="9304782" y="4497202"/>
+            <a:ext cx="594360" cy="550285"/>
           </a:xfrm>
           <a:prstGeom prst="rect">
             <a:avLst/>
@@ -7292,7 +7084,7 @@
           <a:fillRef idx="3">
             <a:schemeClr val="accent1"/>
           </a:fillRef>
-          <a:effectRef idx="2">
+          <a:effectRef idx="0">
             <a:schemeClr val="accent1"/>
           </a:effectRef>
           <a:fontRef idx="minor">
@@ -7309,14 +7101,14 @@
       </p:sp>
       <p:sp>
         <p:nvSpPr>
-          <p:cNvPr id="27" name="Rectangle 26"/>
+          <p:cNvPr id="22" name="chart:data-bar"/>
           <p:cNvSpPr/>
           <p:nvPr/>
         </p:nvSpPr>
         <p:spPr>
           <a:xfrm>
-            <a:off x="9358884" y="4132173"/>
-            <a:ext cx="530352" cy="704728"/>
+            <a:off x="9304782" y="3213201"/>
+            <a:ext cx="594360" cy="1284000"/>
           </a:xfrm>
           <a:prstGeom prst="rect">
             <a:avLst/>
@@ -7336,7 +7128,7 @@
           <a:fillRef idx="3">
             <a:schemeClr val="accent1"/>
           </a:fillRef>
-          <a:effectRef idx="2">
+          <a:effectRef idx="0">
             <a:schemeClr val="accent1"/>
           </a:effectRef>
           <a:fontRef idx="minor">
@@ -7353,14 +7145,14 @@
       </p:sp>
       <p:sp>
         <p:nvSpPr>
-          <p:cNvPr id="28" name="Rectangle 27"/>
+          <p:cNvPr id="23" name="chart:data-bar"/>
           <p:cNvSpPr/>
           <p:nvPr/>
         </p:nvSpPr>
         <p:spPr>
           <a:xfrm>
-            <a:off x="9358884" y="3461003"/>
-            <a:ext cx="530352" cy="671169"/>
+            <a:off x="9304782" y="1990344"/>
+            <a:ext cx="594360" cy="1222857"/>
           </a:xfrm>
           <a:prstGeom prst="rect">
             <a:avLst/>
@@ -7380,7 +7172,7 @@
           <a:fillRef idx="3">
             <a:schemeClr val="accent1"/>
           </a:fillRef>
-          <a:effectRef idx="2">
+          <a:effectRef idx="0">
             <a:schemeClr val="accent1"/>
           </a:effectRef>
           <a:fontRef idx="minor">
@@ -7397,13 +7189,13 @@
       </p:sp>
       <p:sp>
         <p:nvSpPr>
-          <p:cNvPr id="29" name="Rectangle 28"/>
+          <p:cNvPr id="24" name="chart:legend-key"/>
           <p:cNvSpPr/>
           <p:nvPr/>
         </p:nvSpPr>
         <p:spPr>
           <a:xfrm>
-            <a:off x="1435607" y="5788152"/>
+            <a:off x="694944" y="5900928"/>
             <a:ext cx="109728" cy="109728"/>
           </a:xfrm>
           <a:prstGeom prst="rect">
@@ -7424,7 +7216,7 @@
           <a:fillRef idx="3">
             <a:schemeClr val="accent1"/>
           </a:fillRef>
-          <a:effectRef idx="2">
+          <a:effectRef idx="0">
             <a:schemeClr val="accent1"/>
           </a:effectRef>
           <a:fontRef idx="minor">
@@ -7441,54 +7233,13 @@
       </p:sp>
       <p:sp>
         <p:nvSpPr>
-          <p:cNvPr id="30" name="TextBox 29"/>
-          <p:cNvSpPr txBox="1"/>
-          <p:nvPr/>
-        </p:nvSpPr>
-        <p:spPr>
-          <a:xfrm>
-            <a:off x="1600199" y="5724144"/>
-            <a:ext cx="1572768" cy="237744"/>
-          </a:xfrm>
-          <a:prstGeom prst="rect">
-            <a:avLst/>
-          </a:prstGeom>
-          <a:noFill/>
-        </p:spPr>
-        <p:txBody>
-          <a:bodyPr wrap="square" anchor="t" lIns="0" rIns="0" tIns="0" bIns="0">
-            <a:spAutoFit/>
-          </a:bodyPr>
-          <a:lstStyle/>
-          <a:p>
-            <a:pPr algn="l">
-              <a:lnSpc>
-                <a:spcPct val="130000"/>
-              </a:lnSpc>
-            </a:pPr>
-            <a:r>
-              <a:rPr sz="819" b="0" lang="ja-JP">
-                <a:solidFill>
-                  <a:srgbClr val="666E70"/>
-                </a:solidFill>
-                <a:latin typeface="Yu Gothic"/>
-                <a:ea typeface="Yu Gothic"/>
-                <a:cs typeface="Yu Gothic"/>
-              </a:rPr>
-              <a:t>作成</a:t>
-            </a:r>
-          </a:p>
-        </p:txBody>
-      </p:sp>
-      <p:sp>
-        <p:nvSpPr>
-          <p:cNvPr id="31" name="Rectangle 30"/>
+          <p:cNvPr id="25" name="chart:legend-key"/>
           <p:cNvSpPr/>
           <p:nvPr/>
         </p:nvSpPr>
         <p:spPr>
           <a:xfrm>
-            <a:off x="3310127" y="5788152"/>
+            <a:off x="1517904" y="5900928"/>
             <a:ext cx="109728" cy="109728"/>
           </a:xfrm>
           <a:prstGeom prst="rect">
@@ -7509,7 +7260,7 @@
           <a:fillRef idx="3">
             <a:schemeClr val="accent1"/>
           </a:fillRef>
-          <a:effectRef idx="2">
+          <a:effectRef idx="0">
             <a:schemeClr val="accent1"/>
           </a:effectRef>
           <a:fontRef idx="minor">
@@ -7526,54 +7277,13 @@
       </p:sp>
       <p:sp>
         <p:nvSpPr>
-          <p:cNvPr id="32" name="TextBox 31"/>
-          <p:cNvSpPr txBox="1"/>
-          <p:nvPr/>
-        </p:nvSpPr>
-        <p:spPr>
-          <a:xfrm>
-            <a:off x="3474720" y="5724144"/>
-            <a:ext cx="1572768" cy="237744"/>
-          </a:xfrm>
-          <a:prstGeom prst="rect">
-            <a:avLst/>
-          </a:prstGeom>
-          <a:noFill/>
-        </p:spPr>
-        <p:txBody>
-          <a:bodyPr wrap="square" anchor="t" lIns="0" rIns="0" tIns="0" bIns="0">
-            <a:spAutoFit/>
-          </a:bodyPr>
-          <a:lstStyle/>
-          <a:p>
-            <a:pPr algn="l">
-              <a:lnSpc>
-                <a:spcPct val="130000"/>
-              </a:lnSpc>
-            </a:pPr>
-            <a:r>
-              <a:rPr sz="819" b="0" lang="ja-JP">
-                <a:solidFill>
-                  <a:srgbClr val="666E70"/>
-                </a:solidFill>
-                <a:latin typeface="Yu Gothic"/>
-                <a:ea typeface="Yu Gothic"/>
-                <a:cs typeface="Yu Gothic"/>
-              </a:rPr>
-              <a:t>レビュー</a:t>
-            </a:r>
-          </a:p>
-        </p:txBody>
-      </p:sp>
-      <p:sp>
-        <p:nvSpPr>
-          <p:cNvPr id="33" name="Rectangle 32"/>
+          <p:cNvPr id="26" name="chart:legend-key"/>
           <p:cNvSpPr/>
           <p:nvPr/>
         </p:nvSpPr>
         <p:spPr>
           <a:xfrm>
-            <a:off x="5184648" y="5788152"/>
+            <a:off x="2542032" y="5900928"/>
             <a:ext cx="109728" cy="109728"/>
           </a:xfrm>
           <a:prstGeom prst="rect">
@@ -7594,7 +7304,7 @@
           <a:fillRef idx="3">
             <a:schemeClr val="accent1"/>
           </a:fillRef>
-          <a:effectRef idx="2">
+          <a:effectRef idx="0">
             <a:schemeClr val="accent1"/>
           </a:effectRef>
           <a:fontRef idx="minor">
@@ -7611,14 +7321,14 @@
       </p:sp>
       <p:sp>
         <p:nvSpPr>
-          <p:cNvPr id="34" name="TextBox 33"/>
-          <p:cNvSpPr txBox="1"/>
-          <p:nvPr/>
-        </p:nvSpPr>
-        <p:spPr>
-          <a:xfrm>
-            <a:off x="5349240" y="5724144"/>
-            <a:ext cx="1572768" cy="237744"/>
+          <p:cNvPr id="27" name="chart:axis-value"/>
+          <p:cNvSpPr txBox="1"/>
+          <p:nvPr/>
+        </p:nvSpPr>
+        <p:spPr>
+          <a:xfrm>
+            <a:off x="694944" y="4939284"/>
+            <a:ext cx="448056" cy="216408"/>
           </a:xfrm>
           <a:prstGeom prst="rect">
             <a:avLst/>
@@ -7631,13 +7341,382 @@
           </a:bodyPr>
           <a:lstStyle/>
           <a:p>
+            <a:pPr algn="r">
+              <a:lnSpc>
+                <a:spcPct val="130000"/>
+              </a:lnSpc>
+            </a:pPr>
+            <a:r>
+              <a:rPr sz="1200" b="0" lang="ja-JP">
+                <a:solidFill>
+                  <a:srgbClr val="666E70"/>
+                </a:solidFill>
+                <a:latin typeface="Yu Gothic"/>
+                <a:ea typeface="Yu Gothic"/>
+                <a:cs typeface="Yu Gothic"/>
+              </a:rPr>
+              <a:t>0%</a:t>
+            </a:r>
+          </a:p>
+        </p:txBody>
+      </p:sp>
+      <p:sp>
+        <p:nvSpPr>
+          <p:cNvPr id="28" name="chart:axis-value"/>
+          <p:cNvSpPr txBox="1"/>
+          <p:nvPr/>
+        </p:nvSpPr>
+        <p:spPr>
+          <a:xfrm>
+            <a:off x="694944" y="4327855"/>
+            <a:ext cx="448056" cy="216408"/>
+          </a:xfrm>
+          <a:prstGeom prst="rect">
+            <a:avLst/>
+          </a:prstGeom>
+          <a:noFill/>
+        </p:spPr>
+        <p:txBody>
+          <a:bodyPr wrap="square" anchor="t" lIns="0" rIns="0" tIns="0" bIns="0">
+            <a:spAutoFit/>
+          </a:bodyPr>
+          <a:lstStyle/>
+          <a:p>
+            <a:pPr algn="r">
+              <a:lnSpc>
+                <a:spcPct val="130000"/>
+              </a:lnSpc>
+            </a:pPr>
+            <a:r>
+              <a:rPr sz="1200" b="0" lang="ja-JP">
+                <a:solidFill>
+                  <a:srgbClr val="666E70"/>
+                </a:solidFill>
+                <a:latin typeface="Yu Gothic"/>
+                <a:ea typeface="Yu Gothic"/>
+                <a:cs typeface="Yu Gothic"/>
+              </a:rPr>
+              <a:t>20%</a:t>
+            </a:r>
+          </a:p>
+        </p:txBody>
+      </p:sp>
+      <p:sp>
+        <p:nvSpPr>
+          <p:cNvPr id="29" name="chart:axis-value"/>
+          <p:cNvSpPr txBox="1"/>
+          <p:nvPr/>
+        </p:nvSpPr>
+        <p:spPr>
+          <a:xfrm>
+            <a:off x="694944" y="3716426"/>
+            <a:ext cx="448056" cy="216408"/>
+          </a:xfrm>
+          <a:prstGeom prst="rect">
+            <a:avLst/>
+          </a:prstGeom>
+          <a:noFill/>
+        </p:spPr>
+        <p:txBody>
+          <a:bodyPr wrap="square" anchor="t" lIns="0" rIns="0" tIns="0" bIns="0">
+            <a:spAutoFit/>
+          </a:bodyPr>
+          <a:lstStyle/>
+          <a:p>
+            <a:pPr algn="r">
+              <a:lnSpc>
+                <a:spcPct val="130000"/>
+              </a:lnSpc>
+            </a:pPr>
+            <a:r>
+              <a:rPr sz="1200" b="0" lang="ja-JP">
+                <a:solidFill>
+                  <a:srgbClr val="666E70"/>
+                </a:solidFill>
+                <a:latin typeface="Yu Gothic"/>
+                <a:ea typeface="Yu Gothic"/>
+                <a:cs typeface="Yu Gothic"/>
+              </a:rPr>
+              <a:t>40%</a:t>
+            </a:r>
+          </a:p>
+        </p:txBody>
+      </p:sp>
+      <p:sp>
+        <p:nvSpPr>
+          <p:cNvPr id="30" name="chart:axis-value"/>
+          <p:cNvSpPr txBox="1"/>
+          <p:nvPr/>
+        </p:nvSpPr>
+        <p:spPr>
+          <a:xfrm>
+            <a:off x="694944" y="3104997"/>
+            <a:ext cx="448056" cy="216408"/>
+          </a:xfrm>
+          <a:prstGeom prst="rect">
+            <a:avLst/>
+          </a:prstGeom>
+          <a:noFill/>
+        </p:spPr>
+        <p:txBody>
+          <a:bodyPr wrap="square" anchor="t" lIns="0" rIns="0" tIns="0" bIns="0">
+            <a:spAutoFit/>
+          </a:bodyPr>
+          <a:lstStyle/>
+          <a:p>
+            <a:pPr algn="r">
+              <a:lnSpc>
+                <a:spcPct val="130000"/>
+              </a:lnSpc>
+            </a:pPr>
+            <a:r>
+              <a:rPr sz="1200" b="0" lang="ja-JP">
+                <a:solidFill>
+                  <a:srgbClr val="666E70"/>
+                </a:solidFill>
+                <a:latin typeface="Yu Gothic"/>
+                <a:ea typeface="Yu Gothic"/>
+                <a:cs typeface="Yu Gothic"/>
+              </a:rPr>
+              <a:t>60%</a:t>
+            </a:r>
+          </a:p>
+        </p:txBody>
+      </p:sp>
+      <p:sp>
+        <p:nvSpPr>
+          <p:cNvPr id="31" name="chart:axis-value"/>
+          <p:cNvSpPr txBox="1"/>
+          <p:nvPr/>
+        </p:nvSpPr>
+        <p:spPr>
+          <a:xfrm>
+            <a:off x="694944" y="2493568"/>
+            <a:ext cx="448056" cy="216408"/>
+          </a:xfrm>
+          <a:prstGeom prst="rect">
+            <a:avLst/>
+          </a:prstGeom>
+          <a:noFill/>
+        </p:spPr>
+        <p:txBody>
+          <a:bodyPr wrap="square" anchor="t" lIns="0" rIns="0" tIns="0" bIns="0">
+            <a:spAutoFit/>
+          </a:bodyPr>
+          <a:lstStyle/>
+          <a:p>
+            <a:pPr algn="r">
+              <a:lnSpc>
+                <a:spcPct val="130000"/>
+              </a:lnSpc>
+            </a:pPr>
+            <a:r>
+              <a:rPr sz="1200" b="0" lang="ja-JP">
+                <a:solidFill>
+                  <a:srgbClr val="666E70"/>
+                </a:solidFill>
+                <a:latin typeface="Yu Gothic"/>
+                <a:ea typeface="Yu Gothic"/>
+                <a:cs typeface="Yu Gothic"/>
+              </a:rPr>
+              <a:t>80%</a:t>
+            </a:r>
+          </a:p>
+        </p:txBody>
+      </p:sp>
+      <p:sp>
+        <p:nvSpPr>
+          <p:cNvPr id="32" name="chart:axis-value"/>
+          <p:cNvSpPr txBox="1"/>
+          <p:nvPr/>
+        </p:nvSpPr>
+        <p:spPr>
+          <a:xfrm>
+            <a:off x="694944" y="1882140"/>
+            <a:ext cx="448056" cy="216408"/>
+          </a:xfrm>
+          <a:prstGeom prst="rect">
+            <a:avLst/>
+          </a:prstGeom>
+          <a:noFill/>
+        </p:spPr>
+        <p:txBody>
+          <a:bodyPr wrap="square" anchor="t" lIns="0" rIns="0" tIns="0" bIns="0">
+            <a:spAutoFit/>
+          </a:bodyPr>
+          <a:lstStyle/>
+          <a:p>
+            <a:pPr algn="r">
+              <a:lnSpc>
+                <a:spcPct val="130000"/>
+              </a:lnSpc>
+            </a:pPr>
+            <a:r>
+              <a:rPr sz="1200" b="0" lang="ja-JP">
+                <a:solidFill>
+                  <a:srgbClr val="666E70"/>
+                </a:solidFill>
+                <a:latin typeface="Yu Gothic"/>
+                <a:ea typeface="Yu Gothic"/>
+                <a:cs typeface="Yu Gothic"/>
+              </a:rPr>
+              <a:t>100%</a:t>
+            </a:r>
+          </a:p>
+        </p:txBody>
+      </p:sp>
+      <p:sp>
+        <p:nvSpPr>
+          <p:cNvPr id="33" name="chart:category"/>
+          <p:cNvSpPr txBox="1"/>
+          <p:nvPr/>
+        </p:nvSpPr>
+        <p:spPr>
+          <a:xfrm>
+            <a:off x="1389888" y="5355335"/>
+            <a:ext cx="3153156" cy="216408"/>
+          </a:xfrm>
+          <a:prstGeom prst="rect">
+            <a:avLst/>
+          </a:prstGeom>
+          <a:noFill/>
+        </p:spPr>
+        <p:txBody>
+          <a:bodyPr wrap="square" anchor="t" lIns="0" rIns="0" tIns="0" bIns="0">
+            <a:spAutoFit/>
+          </a:bodyPr>
+          <a:lstStyle/>
+          <a:p>
+            <a:pPr algn="ctr">
+              <a:lnSpc>
+                <a:spcPct val="130000"/>
+              </a:lnSpc>
+            </a:pPr>
+            <a:r>
+              <a:rPr sz="1200" b="0" lang="ja-JP">
+                <a:solidFill>
+                  <a:srgbClr val="666E70"/>
+                </a:solidFill>
+                <a:latin typeface="Yu Gothic"/>
+                <a:ea typeface="Yu Gothic"/>
+                <a:cs typeface="Yu Gothic"/>
+              </a:rPr>
+              <a:t>導入前</a:t>
+            </a:r>
+          </a:p>
+        </p:txBody>
+      </p:sp>
+      <p:sp>
+        <p:nvSpPr>
+          <p:cNvPr id="34" name="chart:category"/>
+          <p:cNvSpPr txBox="1"/>
+          <p:nvPr/>
+        </p:nvSpPr>
+        <p:spPr>
+          <a:xfrm>
+            <a:off x="4707636" y="5355335"/>
+            <a:ext cx="3153156" cy="216408"/>
+          </a:xfrm>
+          <a:prstGeom prst="rect">
+            <a:avLst/>
+          </a:prstGeom>
+          <a:noFill/>
+        </p:spPr>
+        <p:txBody>
+          <a:bodyPr wrap="square" anchor="t" lIns="0" rIns="0" tIns="0" bIns="0">
+            <a:spAutoFit/>
+          </a:bodyPr>
+          <a:lstStyle/>
+          <a:p>
+            <a:pPr algn="ctr">
+              <a:lnSpc>
+                <a:spcPct val="130000"/>
+              </a:lnSpc>
+            </a:pPr>
+            <a:r>
+              <a:rPr sz="1200" b="0" lang="ja-JP">
+                <a:solidFill>
+                  <a:srgbClr val="666E70"/>
+                </a:solidFill>
+                <a:latin typeface="Yu Gothic"/>
+                <a:ea typeface="Yu Gothic"/>
+                <a:cs typeface="Yu Gothic"/>
+              </a:rPr>
+              <a:t>試行中</a:t>
+            </a:r>
+          </a:p>
+        </p:txBody>
+      </p:sp>
+      <p:sp>
+        <p:nvSpPr>
+          <p:cNvPr id="35" name="chart:category"/>
+          <p:cNvSpPr txBox="1"/>
+          <p:nvPr/>
+        </p:nvSpPr>
+        <p:spPr>
+          <a:xfrm>
+            <a:off x="8025384" y="5355335"/>
+            <a:ext cx="3153156" cy="216408"/>
+          </a:xfrm>
+          <a:prstGeom prst="rect">
+            <a:avLst/>
+          </a:prstGeom>
+          <a:noFill/>
+        </p:spPr>
+        <p:txBody>
+          <a:bodyPr wrap="square" anchor="t" lIns="0" rIns="0" tIns="0" bIns="0">
+            <a:spAutoFit/>
+          </a:bodyPr>
+          <a:lstStyle/>
+          <a:p>
+            <a:pPr algn="ctr">
+              <a:lnSpc>
+                <a:spcPct val="130000"/>
+              </a:lnSpc>
+            </a:pPr>
+            <a:r>
+              <a:rPr sz="1200" b="0" lang="ja-JP">
+                <a:solidFill>
+                  <a:srgbClr val="666E70"/>
+                </a:solidFill>
+                <a:latin typeface="Yu Gothic"/>
+                <a:ea typeface="Yu Gothic"/>
+                <a:cs typeface="Yu Gothic"/>
+              </a:rPr>
+              <a:t>標準化後</a:t>
+            </a:r>
+          </a:p>
+        </p:txBody>
+      </p:sp>
+      <p:sp>
+        <p:nvSpPr>
+          <p:cNvPr id="36" name="chart:legend"/>
+          <p:cNvSpPr txBox="1"/>
+          <p:nvPr/>
+        </p:nvSpPr>
+        <p:spPr>
+          <a:xfrm>
+            <a:off x="896112" y="5864352"/>
+            <a:ext cx="457200" cy="216408"/>
+          </a:xfrm>
+          <a:prstGeom prst="rect">
+            <a:avLst/>
+          </a:prstGeom>
+          <a:noFill/>
+        </p:spPr>
+        <p:txBody>
+          <a:bodyPr wrap="square" anchor="t" lIns="0" rIns="0" tIns="0" bIns="0">
+            <a:spAutoFit/>
+          </a:bodyPr>
+          <a:lstStyle/>
+          <a:p>
             <a:pPr algn="l">
               <a:lnSpc>
                 <a:spcPct val="130000"/>
               </a:lnSpc>
             </a:pPr>
             <a:r>
-              <a:rPr sz="819" b="0" lang="ja-JP">
+              <a:rPr sz="1200" b="0" lang="ja-JP">
                 <a:solidFill>
                   <a:srgbClr val="666E70"/>
                 </a:solidFill>
@@ -7645,6 +7724,88 @@
                 <a:ea typeface="Yu Gothic"/>
                 <a:cs typeface="Yu Gothic"/>
               </a:rPr>
+              <a:t>作成</a:t>
+            </a:r>
+          </a:p>
+        </p:txBody>
+      </p:sp>
+      <p:sp>
+        <p:nvSpPr>
+          <p:cNvPr id="37" name="chart:legend"/>
+          <p:cNvSpPr txBox="1"/>
+          <p:nvPr/>
+        </p:nvSpPr>
+        <p:spPr>
+          <a:xfrm>
+            <a:off x="1719072" y="5864352"/>
+            <a:ext cx="658368" cy="216408"/>
+          </a:xfrm>
+          <a:prstGeom prst="rect">
+            <a:avLst/>
+          </a:prstGeom>
+          <a:noFill/>
+        </p:spPr>
+        <p:txBody>
+          <a:bodyPr wrap="square" anchor="t" lIns="0" rIns="0" tIns="0" bIns="0">
+            <a:spAutoFit/>
+          </a:bodyPr>
+          <a:lstStyle/>
+          <a:p>
+            <a:pPr algn="l">
+              <a:lnSpc>
+                <a:spcPct val="130000"/>
+              </a:lnSpc>
+            </a:pPr>
+            <a:r>
+              <a:rPr sz="1200" b="0" lang="ja-JP">
+                <a:solidFill>
+                  <a:srgbClr val="666E70"/>
+                </a:solidFill>
+                <a:latin typeface="Yu Gothic"/>
+                <a:ea typeface="Yu Gothic"/>
+                <a:cs typeface="Yu Gothic"/>
+              </a:rPr>
+              <a:t>レビュー</a:t>
+            </a:r>
+          </a:p>
+        </p:txBody>
+      </p:sp>
+      <p:sp>
+        <p:nvSpPr>
+          <p:cNvPr id="38" name="chart:legend"/>
+          <p:cNvSpPr txBox="1"/>
+          <p:nvPr/>
+        </p:nvSpPr>
+        <p:spPr>
+          <a:xfrm>
+            <a:off x="2743200" y="5864352"/>
+            <a:ext cx="658368" cy="216408"/>
+          </a:xfrm>
+          <a:prstGeom prst="rect">
+            <a:avLst/>
+          </a:prstGeom>
+          <a:noFill/>
+        </p:spPr>
+        <p:txBody>
+          <a:bodyPr wrap="square" anchor="t" lIns="0" rIns="0" tIns="0" bIns="0">
+            <a:spAutoFit/>
+          </a:bodyPr>
+          <a:lstStyle/>
+          <a:p>
+            <a:pPr algn="l">
+              <a:lnSpc>
+                <a:spcPct val="130000"/>
+              </a:lnSpc>
+            </a:pPr>
+            <a:r>
+              <a:rPr sz="1200" b="0" lang="ja-JP">
+                <a:solidFill>
+                  <a:srgbClr val="666E70"/>
+                </a:solidFill>
+                <a:latin typeface="Yu Gothic"/>
+                <a:ea typeface="Yu Gothic"/>
+                <a:cs typeface="Yu Gothic"/>
+              </a:rPr>
               <a:t>意思決定</a:t>
             </a:r>
           </a:p>
@@ -7652,7 +7813,376 @@
       </p:sp>
       <p:sp>
         <p:nvSpPr>
-          <p:cNvPr id="35" name="TextBox 34"/>
+          <p:cNvPr id="39" name="chart:data-value"/>
+          <p:cNvSpPr txBox="1"/>
+          <p:nvPr/>
+        </p:nvSpPr>
+        <p:spPr>
+          <a:xfrm>
+            <a:off x="2791015" y="3869283"/>
+            <a:ext cx="350901" cy="216408"/>
+          </a:xfrm>
+          <a:prstGeom prst="rect">
+            <a:avLst/>
+          </a:prstGeom>
+          <a:noFill/>
+        </p:spPr>
+        <p:txBody>
+          <a:bodyPr wrap="square" anchor="t" lIns="0" rIns="0" tIns="0" bIns="0">
+            <a:spAutoFit/>
+          </a:bodyPr>
+          <a:lstStyle/>
+          <a:p>
+            <a:pPr algn="l">
+              <a:lnSpc>
+                <a:spcPct val="130000"/>
+              </a:lnSpc>
+            </a:pPr>
+            <a:r>
+              <a:rPr sz="1200" b="0" lang="ja-JP">
+                <a:solidFill>
+                  <a:srgbClr val="FFFFFC"/>
+                </a:solidFill>
+                <a:latin typeface="Yu Gothic"/>
+                <a:ea typeface="Yu Gothic"/>
+                <a:cs typeface="Yu Gothic"/>
+              </a:rPr>
+              <a:t>70%</a:t>
+            </a:r>
+          </a:p>
+        </p:txBody>
+      </p:sp>
+      <p:sp>
+        <p:nvSpPr>
+          <p:cNvPr id="40" name="chart:data-value"/>
+          <p:cNvSpPr txBox="1"/>
+          <p:nvPr/>
+        </p:nvSpPr>
+        <p:spPr>
+          <a:xfrm>
+            <a:off x="2791015" y="2493568"/>
+            <a:ext cx="350901" cy="216408"/>
+          </a:xfrm>
+          <a:prstGeom prst="rect">
+            <a:avLst/>
+          </a:prstGeom>
+          <a:noFill/>
+        </p:spPr>
+        <p:txBody>
+          <a:bodyPr wrap="square" anchor="t" lIns="0" rIns="0" tIns="0" bIns="0">
+            <a:spAutoFit/>
+          </a:bodyPr>
+          <a:lstStyle/>
+          <a:p>
+            <a:pPr algn="l">
+              <a:lnSpc>
+                <a:spcPct val="130000"/>
+              </a:lnSpc>
+            </a:pPr>
+            <a:r>
+              <a:rPr sz="1200" b="0" lang="ja-JP">
+                <a:solidFill>
+                  <a:srgbClr val="FFFFFC"/>
+                </a:solidFill>
+                <a:latin typeface="Yu Gothic"/>
+                <a:ea typeface="Yu Gothic"/>
+                <a:cs typeface="Yu Gothic"/>
+              </a:rPr>
+              <a:t>20%</a:t>
+            </a:r>
+          </a:p>
+        </p:txBody>
+      </p:sp>
+      <p:sp>
+        <p:nvSpPr>
+          <p:cNvPr id="41" name="chart:data-value"/>
+          <p:cNvSpPr txBox="1"/>
+          <p:nvPr/>
+        </p:nvSpPr>
+        <p:spPr>
+          <a:xfrm>
+            <a:off x="2791015" y="1682496"/>
+            <a:ext cx="350901" cy="216408"/>
+          </a:xfrm>
+          <a:prstGeom prst="rect">
+            <a:avLst/>
+          </a:prstGeom>
+          <a:noFill/>
+        </p:spPr>
+        <p:txBody>
+          <a:bodyPr wrap="square" anchor="t" lIns="0" rIns="0" tIns="0" bIns="0">
+            <a:spAutoFit/>
+          </a:bodyPr>
+          <a:lstStyle/>
+          <a:p>
+            <a:pPr algn="l">
+              <a:lnSpc>
+                <a:spcPct val="130000"/>
+              </a:lnSpc>
+            </a:pPr>
+            <a:r>
+              <a:rPr sz="1200" b="0" lang="ja-JP">
+                <a:solidFill>
+                  <a:srgbClr val="202729"/>
+                </a:solidFill>
+                <a:latin typeface="Yu Gothic"/>
+                <a:ea typeface="Yu Gothic"/>
+                <a:cs typeface="Yu Gothic"/>
+              </a:rPr>
+              <a:t>10%</a:t>
+            </a:r>
+          </a:p>
+        </p:txBody>
+      </p:sp>
+      <p:sp>
+        <p:nvSpPr>
+          <p:cNvPr id="42" name="chart:data-value"/>
+          <p:cNvSpPr txBox="1"/>
+          <p:nvPr/>
+        </p:nvSpPr>
+        <p:spPr>
+          <a:xfrm>
+            <a:off x="6108763" y="4358426"/>
+            <a:ext cx="350901" cy="216408"/>
+          </a:xfrm>
+          <a:prstGeom prst="rect">
+            <a:avLst/>
+          </a:prstGeom>
+          <a:noFill/>
+        </p:spPr>
+        <p:txBody>
+          <a:bodyPr wrap="square" anchor="t" lIns="0" rIns="0" tIns="0" bIns="0">
+            <a:spAutoFit/>
+          </a:bodyPr>
+          <a:lstStyle/>
+          <a:p>
+            <a:pPr algn="l">
+              <a:lnSpc>
+                <a:spcPct val="130000"/>
+              </a:lnSpc>
+            </a:pPr>
+            <a:r>
+              <a:rPr sz="1200" b="0" lang="ja-JP">
+                <a:solidFill>
+                  <a:srgbClr val="FFFFFC"/>
+                </a:solidFill>
+                <a:latin typeface="Yu Gothic"/>
+                <a:ea typeface="Yu Gothic"/>
+                <a:cs typeface="Yu Gothic"/>
+              </a:rPr>
+              <a:t>38%</a:t>
+            </a:r>
+          </a:p>
+        </p:txBody>
+      </p:sp>
+      <p:sp>
+        <p:nvSpPr>
+          <p:cNvPr id="43" name="chart:data-value"/>
+          <p:cNvSpPr txBox="1"/>
+          <p:nvPr/>
+        </p:nvSpPr>
+        <p:spPr>
+          <a:xfrm>
+            <a:off x="6108763" y="3288426"/>
+            <a:ext cx="350901" cy="216408"/>
+          </a:xfrm>
+          <a:prstGeom prst="rect">
+            <a:avLst/>
+          </a:prstGeom>
+          <a:noFill/>
+        </p:spPr>
+        <p:txBody>
+          <a:bodyPr wrap="square" anchor="t" lIns="0" rIns="0" tIns="0" bIns="0">
+            <a:spAutoFit/>
+          </a:bodyPr>
+          <a:lstStyle/>
+          <a:p>
+            <a:pPr algn="l">
+              <a:lnSpc>
+                <a:spcPct val="130000"/>
+              </a:lnSpc>
+            </a:pPr>
+            <a:r>
+              <a:rPr sz="1200" b="0" lang="ja-JP">
+                <a:solidFill>
+                  <a:srgbClr val="FFFFFC"/>
+                </a:solidFill>
+                <a:latin typeface="Yu Gothic"/>
+                <a:ea typeface="Yu Gothic"/>
+                <a:cs typeface="Yu Gothic"/>
+              </a:rPr>
+              <a:t>32%</a:t>
+            </a:r>
+          </a:p>
+        </p:txBody>
+      </p:sp>
+      <p:sp>
+        <p:nvSpPr>
+          <p:cNvPr id="44" name="chart:data-value"/>
+          <p:cNvSpPr txBox="1"/>
+          <p:nvPr/>
+        </p:nvSpPr>
+        <p:spPr>
+          <a:xfrm>
+            <a:off x="6108763" y="1682496"/>
+            <a:ext cx="350901" cy="216408"/>
+          </a:xfrm>
+          <a:prstGeom prst="rect">
+            <a:avLst/>
+          </a:prstGeom>
+          <a:noFill/>
+        </p:spPr>
+        <p:txBody>
+          <a:bodyPr wrap="square" anchor="t" lIns="0" rIns="0" tIns="0" bIns="0">
+            <a:spAutoFit/>
+          </a:bodyPr>
+          <a:lstStyle/>
+          <a:p>
+            <a:pPr algn="l">
+              <a:lnSpc>
+                <a:spcPct val="130000"/>
+              </a:lnSpc>
+            </a:pPr>
+            <a:r>
+              <a:rPr sz="1200" b="0" lang="ja-JP">
+                <a:solidFill>
+                  <a:srgbClr val="202729"/>
+                </a:solidFill>
+                <a:latin typeface="Yu Gothic"/>
+                <a:ea typeface="Yu Gothic"/>
+                <a:cs typeface="Yu Gothic"/>
+              </a:rPr>
+              <a:t>30%</a:t>
+            </a:r>
+          </a:p>
+        </p:txBody>
+      </p:sp>
+      <p:sp>
+        <p:nvSpPr>
+          <p:cNvPr id="45" name="chart:data-value"/>
+          <p:cNvSpPr txBox="1"/>
+          <p:nvPr/>
+        </p:nvSpPr>
+        <p:spPr>
+          <a:xfrm>
+            <a:off x="9426511" y="4664141"/>
+            <a:ext cx="350901" cy="216408"/>
+          </a:xfrm>
+          <a:prstGeom prst="rect">
+            <a:avLst/>
+          </a:prstGeom>
+          <a:noFill/>
+        </p:spPr>
+        <p:txBody>
+          <a:bodyPr wrap="square" anchor="t" lIns="0" rIns="0" tIns="0" bIns="0">
+            <a:spAutoFit/>
+          </a:bodyPr>
+          <a:lstStyle/>
+          <a:p>
+            <a:pPr algn="l">
+              <a:lnSpc>
+                <a:spcPct val="130000"/>
+              </a:lnSpc>
+            </a:pPr>
+            <a:r>
+              <a:rPr sz="1200" b="0" lang="ja-JP">
+                <a:solidFill>
+                  <a:srgbClr val="FFFFFC"/>
+                </a:solidFill>
+                <a:latin typeface="Yu Gothic"/>
+                <a:ea typeface="Yu Gothic"/>
+                <a:cs typeface="Yu Gothic"/>
+              </a:rPr>
+              <a:t>18%</a:t>
+            </a:r>
+          </a:p>
+        </p:txBody>
+      </p:sp>
+      <p:sp>
+        <p:nvSpPr>
+          <p:cNvPr id="46" name="chart:data-value"/>
+          <p:cNvSpPr txBox="1"/>
+          <p:nvPr/>
+        </p:nvSpPr>
+        <p:spPr>
+          <a:xfrm>
+            <a:off x="9426511" y="3746997"/>
+            <a:ext cx="350901" cy="216408"/>
+          </a:xfrm>
+          <a:prstGeom prst="rect">
+            <a:avLst/>
+          </a:prstGeom>
+          <a:noFill/>
+        </p:spPr>
+        <p:txBody>
+          <a:bodyPr wrap="square" anchor="t" lIns="0" rIns="0" tIns="0" bIns="0">
+            <a:spAutoFit/>
+          </a:bodyPr>
+          <a:lstStyle/>
+          <a:p>
+            <a:pPr algn="l">
+              <a:lnSpc>
+                <a:spcPct val="130000"/>
+              </a:lnSpc>
+            </a:pPr>
+            <a:r>
+              <a:rPr sz="1200" b="0" lang="ja-JP">
+                <a:solidFill>
+                  <a:srgbClr val="FFFFFC"/>
+                </a:solidFill>
+                <a:latin typeface="Yu Gothic"/>
+                <a:ea typeface="Yu Gothic"/>
+                <a:cs typeface="Yu Gothic"/>
+              </a:rPr>
+              <a:t>42%</a:t>
+            </a:r>
+          </a:p>
+        </p:txBody>
+      </p:sp>
+      <p:sp>
+        <p:nvSpPr>
+          <p:cNvPr id="47" name="chart:data-value"/>
+          <p:cNvSpPr txBox="1"/>
+          <p:nvPr/>
+        </p:nvSpPr>
+        <p:spPr>
+          <a:xfrm>
+            <a:off x="9426511" y="1682496"/>
+            <a:ext cx="350901" cy="216408"/>
+          </a:xfrm>
+          <a:prstGeom prst="rect">
+            <a:avLst/>
+          </a:prstGeom>
+          <a:noFill/>
+        </p:spPr>
+        <p:txBody>
+          <a:bodyPr wrap="square" anchor="t" lIns="0" rIns="0" tIns="0" bIns="0">
+            <a:spAutoFit/>
+          </a:bodyPr>
+          <a:lstStyle/>
+          <a:p>
+            <a:pPr algn="l">
+              <a:lnSpc>
+                <a:spcPct val="130000"/>
+              </a:lnSpc>
+            </a:pPr>
+            <a:r>
+              <a:rPr sz="1200" b="0" lang="ja-JP">
+                <a:solidFill>
+                  <a:srgbClr val="202729"/>
+                </a:solidFill>
+                <a:latin typeface="Yu Gothic"/>
+                <a:ea typeface="Yu Gothic"/>
+                <a:cs typeface="Yu Gothic"/>
+              </a:rPr>
+              <a:t>40%</a:t>
+            </a:r>
+          </a:p>
+        </p:txBody>
+      </p:sp>
+      <p:sp>
+        <p:nvSpPr>
+          <p:cNvPr id="48" name="TextBox 47"/>
           <p:cNvSpPr txBox="1"/>
           <p:nvPr/>
         </p:nvSpPr>
@@ -7693,7 +8223,7 @@
       </p:sp>
       <p:sp>
         <p:nvSpPr>
-          <p:cNvPr id="36" name="Rectangle 35"/>
+          <p:cNvPr id="49" name="Rectangle 48"/>
           <p:cNvSpPr/>
           <p:nvPr/>
         </p:nvSpPr>
@@ -7737,7 +8267,7 @@
       </p:sp>
       <p:sp>
         <p:nvSpPr>
-          <p:cNvPr id="37" name="TextBox 36"/>
+          <p:cNvPr id="50" name="TextBox 49"/>
           <p:cNvSpPr txBox="1"/>
           <p:nvPr/>
         </p:nvSpPr>
@@ -7778,7 +8308,7 @@
       </p:sp>
       <p:sp>
         <p:nvSpPr>
-          <p:cNvPr id="38" name="TextBox 37"/>
+          <p:cNvPr id="51" name="TextBox 50"/>
           <p:cNvSpPr txBox="1"/>
           <p:nvPr/>
         </p:nvSpPr>
@@ -59852,14 +60382,14 @@
       </p:sp>
       <p:cxnSp>
         <p:nvCxnSpPr>
-          <p:cNvPr id="5" name="Connector 4"/>
+          <p:cNvPr id="5" name="chart:grid"/>
           <p:cNvCxnSpPr/>
           <p:nvPr/>
         </p:nvCxnSpPr>
         <p:spPr>
           <a:xfrm>
-            <a:off x="2441448" y="1783080"/>
-            <a:ext cx="0" cy="3703320"/>
+            <a:off x="2399157" y="1772412"/>
+            <a:ext cx="0" cy="3764280"/>
           </a:xfrm>
           <a:prstGeom prst="line">
             <a:avLst/>
@@ -59869,6 +60399,7 @@
               <a:srgbClr val="D1CFC8"/>
             </a:solidFill>
           </a:ln>
+          <a:effectLst/>
         </p:spPr>
         <p:style>
           <a:lnRef idx="2">
@@ -59877,7 +60408,7 @@
           <a:fillRef idx="0">
             <a:schemeClr val="accent1"/>
           </a:fillRef>
-          <a:effectRef idx="1">
+          <a:effectRef idx="0">
             <a:schemeClr val="accent1"/>
           </a:effectRef>
           <a:fontRef idx="minor">
@@ -59885,57 +60416,16 @@
           </a:fontRef>
         </p:style>
       </p:cxnSp>
-      <p:sp>
-        <p:nvSpPr>
-          <p:cNvPr id="6" name="TextBox 5"/>
-          <p:cNvSpPr txBox="1"/>
-          <p:nvPr/>
-        </p:nvSpPr>
-        <p:spPr>
-          <a:xfrm>
-            <a:off x="2276856" y="5559552"/>
-            <a:ext cx="329184" cy="164592"/>
-          </a:xfrm>
-          <a:prstGeom prst="rect">
-            <a:avLst/>
-          </a:prstGeom>
-          <a:noFill/>
-        </p:spPr>
-        <p:txBody>
-          <a:bodyPr wrap="square" anchor="t" lIns="0" rIns="0" tIns="0" bIns="0">
-            <a:spAutoFit/>
-          </a:bodyPr>
-          <a:lstStyle/>
-          <a:p>
-            <a:pPr algn="ctr">
-              <a:lnSpc>
-                <a:spcPct val="130000"/>
-              </a:lnSpc>
-            </a:pPr>
-            <a:r>
-              <a:rPr sz="780" b="0" lang="ja-JP">
-                <a:solidFill>
-                  <a:srgbClr val="666E70"/>
-                </a:solidFill>
-                <a:latin typeface="Yu Gothic"/>
-                <a:ea typeface="Yu Gothic"/>
-                <a:cs typeface="Yu Gothic"/>
-              </a:rPr>
-              <a:t>0</a:t>
-            </a:r>
-          </a:p>
-        </p:txBody>
-      </p:sp>
       <p:cxnSp>
         <p:nvCxnSpPr>
-          <p:cNvPr id="7" name="Connector 6"/>
+          <p:cNvPr id="6" name="chart:grid"/>
           <p:cNvCxnSpPr/>
           <p:nvPr/>
         </p:nvCxnSpPr>
         <p:spPr>
           <a:xfrm>
-            <a:off x="4654296" y="1783080"/>
-            <a:ext cx="0" cy="3703320"/>
+            <a:off x="4105884" y="1772412"/>
+            <a:ext cx="0" cy="135255"/>
           </a:xfrm>
           <a:prstGeom prst="line">
             <a:avLst/>
@@ -59945,6 +60435,7 @@
               <a:srgbClr val="D1CFC8"/>
             </a:solidFill>
           </a:ln>
+          <a:effectLst/>
         </p:spPr>
         <p:style>
           <a:lnRef idx="2">
@@ -59953,7 +60444,7 @@
           <a:fillRef idx="0">
             <a:schemeClr val="accent1"/>
           </a:fillRef>
-          <a:effectRef idx="1">
+          <a:effectRef idx="0">
             <a:schemeClr val="accent1"/>
           </a:effectRef>
           <a:fontRef idx="minor">
@@ -59961,57 +60452,16 @@
           </a:fontRef>
         </p:style>
       </p:cxnSp>
-      <p:sp>
-        <p:nvSpPr>
-          <p:cNvPr id="8" name="TextBox 7"/>
-          <p:cNvSpPr txBox="1"/>
-          <p:nvPr/>
-        </p:nvSpPr>
-        <p:spPr>
-          <a:xfrm>
-            <a:off x="4489704" y="5559552"/>
-            <a:ext cx="329184" cy="164592"/>
-          </a:xfrm>
-          <a:prstGeom prst="rect">
-            <a:avLst/>
-          </a:prstGeom>
-          <a:noFill/>
-        </p:spPr>
-        <p:txBody>
-          <a:bodyPr wrap="square" anchor="t" lIns="0" rIns="0" tIns="0" bIns="0">
-            <a:spAutoFit/>
-          </a:bodyPr>
-          <a:lstStyle/>
-          <a:p>
-            <a:pPr algn="ctr">
-              <a:lnSpc>
-                <a:spcPct val="130000"/>
-              </a:lnSpc>
-            </a:pPr>
-            <a:r>
-              <a:rPr sz="780" b="0" lang="ja-JP">
-                <a:solidFill>
-                  <a:srgbClr val="666E70"/>
-                </a:solidFill>
-                <a:latin typeface="Yu Gothic"/>
-                <a:ea typeface="Yu Gothic"/>
-                <a:cs typeface="Yu Gothic"/>
-              </a:rPr>
-              <a:t>100</a:t>
-            </a:r>
-          </a:p>
-        </p:txBody>
-      </p:sp>
       <p:cxnSp>
         <p:nvCxnSpPr>
-          <p:cNvPr id="9" name="Connector 8"/>
+          <p:cNvPr id="7" name="chart:grid"/>
           <p:cNvCxnSpPr/>
           <p:nvPr/>
         </p:nvCxnSpPr>
         <p:spPr>
           <a:xfrm>
-            <a:off x="6867144" y="1783080"/>
-            <a:ext cx="0" cy="3703320"/>
+            <a:off x="4105884" y="2197227"/>
+            <a:ext cx="0" cy="1032510"/>
           </a:xfrm>
           <a:prstGeom prst="line">
             <a:avLst/>
@@ -60021,6 +60471,7 @@
               <a:srgbClr val="D1CFC8"/>
             </a:solidFill>
           </a:ln>
+          <a:effectLst/>
         </p:spPr>
         <p:style>
           <a:lnRef idx="2">
@@ -60029,7 +60480,7 @@
           <a:fillRef idx="0">
             <a:schemeClr val="accent1"/>
           </a:fillRef>
-          <a:effectRef idx="1">
+          <a:effectRef idx="0">
             <a:schemeClr val="accent1"/>
           </a:effectRef>
           <a:fontRef idx="minor">
@@ -60037,57 +60488,16 @@
           </a:fontRef>
         </p:style>
       </p:cxnSp>
-      <p:sp>
-        <p:nvSpPr>
-          <p:cNvPr id="10" name="TextBox 9"/>
-          <p:cNvSpPr txBox="1"/>
-          <p:nvPr/>
-        </p:nvSpPr>
-        <p:spPr>
-          <a:xfrm>
-            <a:off x="6702552" y="5559552"/>
-            <a:ext cx="329184" cy="164592"/>
-          </a:xfrm>
-          <a:prstGeom prst="rect">
-            <a:avLst/>
-          </a:prstGeom>
-          <a:noFill/>
-        </p:spPr>
-        <p:txBody>
-          <a:bodyPr wrap="square" anchor="t" lIns="0" rIns="0" tIns="0" bIns="0">
-            <a:spAutoFit/>
-          </a:bodyPr>
-          <a:lstStyle/>
-          <a:p>
-            <a:pPr algn="ctr">
-              <a:lnSpc>
-                <a:spcPct val="130000"/>
-              </a:lnSpc>
-            </a:pPr>
-            <a:r>
-              <a:rPr sz="780" b="0" lang="ja-JP">
-                <a:solidFill>
-                  <a:srgbClr val="666E70"/>
-                </a:solidFill>
-                <a:latin typeface="Yu Gothic"/>
-                <a:ea typeface="Yu Gothic"/>
-                <a:cs typeface="Yu Gothic"/>
-              </a:rPr>
-              <a:t>200</a:t>
-            </a:r>
-          </a:p>
-        </p:txBody>
-      </p:sp>
       <p:cxnSp>
         <p:nvCxnSpPr>
-          <p:cNvPr id="11" name="Connector 10"/>
+          <p:cNvPr id="8" name="chart:grid"/>
           <p:cNvCxnSpPr/>
           <p:nvPr/>
         </p:nvCxnSpPr>
         <p:spPr>
           <a:xfrm>
-            <a:off x="9079992" y="1783080"/>
-            <a:ext cx="0" cy="3703320"/>
+            <a:off x="4105884" y="3519297"/>
+            <a:ext cx="0" cy="2017395"/>
           </a:xfrm>
           <a:prstGeom prst="line">
             <a:avLst/>
@@ -60097,6 +60507,7 @@
               <a:srgbClr val="D1CFC8"/>
             </a:solidFill>
           </a:ln>
+          <a:effectLst/>
         </p:spPr>
         <p:style>
           <a:lnRef idx="2">
@@ -60105,7 +60516,7 @@
           <a:fillRef idx="0">
             <a:schemeClr val="accent1"/>
           </a:fillRef>
-          <a:effectRef idx="1">
+          <a:effectRef idx="0">
             <a:schemeClr val="accent1"/>
           </a:effectRef>
           <a:fontRef idx="minor">
@@ -60113,57 +60524,16 @@
           </a:fontRef>
         </p:style>
       </p:cxnSp>
-      <p:sp>
-        <p:nvSpPr>
-          <p:cNvPr id="12" name="TextBox 11"/>
-          <p:cNvSpPr txBox="1"/>
-          <p:nvPr/>
-        </p:nvSpPr>
-        <p:spPr>
-          <a:xfrm>
-            <a:off x="8915400" y="5559552"/>
-            <a:ext cx="329184" cy="164592"/>
-          </a:xfrm>
-          <a:prstGeom prst="rect">
-            <a:avLst/>
-          </a:prstGeom>
-          <a:noFill/>
-        </p:spPr>
-        <p:txBody>
-          <a:bodyPr wrap="square" anchor="t" lIns="0" rIns="0" tIns="0" bIns="0">
-            <a:spAutoFit/>
-          </a:bodyPr>
-          <a:lstStyle/>
-          <a:p>
-            <a:pPr algn="ctr">
-              <a:lnSpc>
-                <a:spcPct val="130000"/>
-              </a:lnSpc>
-            </a:pPr>
-            <a:r>
-              <a:rPr sz="780" b="0" lang="ja-JP">
-                <a:solidFill>
-                  <a:srgbClr val="666E70"/>
-                </a:solidFill>
-                <a:latin typeface="Yu Gothic"/>
-                <a:ea typeface="Yu Gothic"/>
-                <a:cs typeface="Yu Gothic"/>
-              </a:rPr>
-              <a:t>300</a:t>
-            </a:r>
-          </a:p>
-        </p:txBody>
-      </p:sp>
       <p:cxnSp>
         <p:nvCxnSpPr>
-          <p:cNvPr id="13" name="Connector 12"/>
+          <p:cNvPr id="9" name="chart:grid"/>
           <p:cNvCxnSpPr/>
           <p:nvPr/>
         </p:nvCxnSpPr>
         <p:spPr>
           <a:xfrm>
-            <a:off x="11292840" y="1783080"/>
-            <a:ext cx="0" cy="3703320"/>
+            <a:off x="5812612" y="1772412"/>
+            <a:ext cx="0" cy="3764280"/>
           </a:xfrm>
           <a:prstGeom prst="line">
             <a:avLst/>
@@ -60173,6 +60543,7 @@
               <a:srgbClr val="D1CFC8"/>
             </a:solidFill>
           </a:ln>
+          <a:effectLst/>
         </p:spPr>
         <p:style>
           <a:lnRef idx="2">
@@ -60181,7 +60552,7 @@
           <a:fillRef idx="0">
             <a:schemeClr val="accent1"/>
           </a:fillRef>
-          <a:effectRef idx="1">
+          <a:effectRef idx="0">
             <a:schemeClr val="accent1"/>
           </a:effectRef>
           <a:fontRef idx="minor">
@@ -60189,66 +60560,26 @@
           </a:fontRef>
         </p:style>
       </p:cxnSp>
-      <p:sp>
-        <p:nvSpPr>
-          <p:cNvPr id="14" name="TextBox 13"/>
-          <p:cNvSpPr txBox="1"/>
-          <p:nvPr/>
-        </p:nvSpPr>
-        <p:spPr>
-          <a:xfrm>
-            <a:off x="11128248" y="5559552"/>
-            <a:ext cx="329184" cy="164592"/>
-          </a:xfrm>
-          <a:prstGeom prst="rect">
-            <a:avLst/>
-          </a:prstGeom>
-          <a:noFill/>
-        </p:spPr>
-        <p:txBody>
-          <a:bodyPr wrap="square" anchor="t" lIns="0" rIns="0" tIns="0" bIns="0">
-            <a:spAutoFit/>
-          </a:bodyPr>
-          <a:lstStyle/>
-          <a:p>
-            <a:pPr algn="ctr">
-              <a:lnSpc>
-                <a:spcPct val="130000"/>
-              </a:lnSpc>
-            </a:pPr>
-            <a:r>
-              <a:rPr sz="780" b="0" lang="ja-JP">
-                <a:solidFill>
-                  <a:srgbClr val="666E70"/>
-                </a:solidFill>
-                <a:latin typeface="Yu Gothic"/>
-                <a:ea typeface="Yu Gothic"/>
-                <a:cs typeface="Yu Gothic"/>
-              </a:rPr>
-              <a:t>400</a:t>
-            </a:r>
-          </a:p>
-        </p:txBody>
-      </p:sp>
       <p:cxnSp>
         <p:nvCxnSpPr>
-          <p:cNvPr id="15" name="Connector 14"/>
+          <p:cNvPr id="10" name="chart:grid"/>
           <p:cNvCxnSpPr/>
           <p:nvPr/>
         </p:nvCxnSpPr>
         <p:spPr>
           <a:xfrm>
-            <a:off x="2441448" y="5486400"/>
-            <a:ext cx="8851392" cy="0"/>
+            <a:off x="7519339" y="1772412"/>
+            <a:ext cx="0" cy="3764280"/>
           </a:xfrm>
           <a:prstGeom prst="line">
             <a:avLst/>
           </a:prstGeom>
-          <a:ln w="10160">
+          <a:ln w="6985">
             <a:solidFill>
-              <a:srgbClr val="666E70"/>
+              <a:srgbClr val="D1CFC8"/>
             </a:solidFill>
           </a:ln>
+          <a:effectLst/>
         </p:spPr>
         <p:style>
           <a:lnRef idx="2">
@@ -60257,7 +60588,7 @@
           <a:fillRef idx="0">
             <a:schemeClr val="accent1"/>
           </a:fillRef>
-          <a:effectRef idx="1">
+          <a:effectRef idx="0">
             <a:schemeClr val="accent1"/>
           </a:effectRef>
           <a:fontRef idx="minor">
@@ -60265,57 +60596,160 @@
           </a:fontRef>
         </p:style>
       </p:cxnSp>
-      <p:sp>
-        <p:nvSpPr>
-          <p:cNvPr id="16" name="TextBox 15"/>
-          <p:cNvSpPr txBox="1"/>
-          <p:nvPr/>
-        </p:nvSpPr>
-        <p:spPr>
-          <a:xfrm>
-            <a:off x="868680" y="2108835"/>
-            <a:ext cx="1389888" cy="274320"/>
-          </a:xfrm>
-          <a:prstGeom prst="rect">
-            <a:avLst/>
-          </a:prstGeom>
-          <a:noFill/>
-        </p:spPr>
-        <p:txBody>
-          <a:bodyPr wrap="square" anchor="t" lIns="0" rIns="0" tIns="0" bIns="0">
-            <a:spAutoFit/>
-          </a:bodyPr>
-          <a:lstStyle/>
-          <a:p>
-            <a:pPr algn="r">
-              <a:lnSpc>
-                <a:spcPct val="130000"/>
-              </a:lnSpc>
-            </a:pPr>
-            <a:r>
-              <a:rPr sz="940" b="1" lang="ja-JP">
-                <a:solidFill>
-                  <a:srgbClr val="182C43"/>
-                </a:solidFill>
-                <a:latin typeface="Yu Gothic"/>
-                <a:ea typeface="Yu Gothic"/>
-                <a:cs typeface="Yu Gothic"/>
-              </a:rPr>
-              <a:t>週次報告</a:t>
-            </a:r>
-          </a:p>
-        </p:txBody>
-      </p:sp>
-      <p:sp>
-        <p:nvSpPr>
-          <p:cNvPr id="17" name="Rectangle 16"/>
+      <p:cxnSp>
+        <p:nvCxnSpPr>
+          <p:cNvPr id="11" name="chart:grid"/>
+          <p:cNvCxnSpPr/>
+          <p:nvPr/>
+        </p:nvCxnSpPr>
+        <p:spPr>
+          <a:xfrm>
+            <a:off x="9226067" y="1772412"/>
+            <a:ext cx="0" cy="3764280"/>
+          </a:xfrm>
+          <a:prstGeom prst="line">
+            <a:avLst/>
+          </a:prstGeom>
+          <a:ln w="6985">
+            <a:solidFill>
+              <a:srgbClr val="D1CFC8"/>
+            </a:solidFill>
+          </a:ln>
+          <a:effectLst/>
+        </p:spPr>
+        <p:style>
+          <a:lnRef idx="2">
+            <a:schemeClr val="accent1"/>
+          </a:lnRef>
+          <a:fillRef idx="0">
+            <a:schemeClr val="accent1"/>
+          </a:fillRef>
+          <a:effectRef idx="0">
+            <a:schemeClr val="accent1"/>
+          </a:effectRef>
+          <a:fontRef idx="minor">
+            <a:schemeClr val="tx1"/>
+          </a:fontRef>
+        </p:style>
+      </p:cxnSp>
+      <p:cxnSp>
+        <p:nvCxnSpPr>
+          <p:cNvPr id="12" name="chart:grid"/>
+          <p:cNvCxnSpPr/>
+          <p:nvPr/>
+        </p:nvCxnSpPr>
+        <p:spPr>
+          <a:xfrm>
+            <a:off x="10932795" y="1772412"/>
+            <a:ext cx="0" cy="2017395"/>
+          </a:xfrm>
+          <a:prstGeom prst="line">
+            <a:avLst/>
+          </a:prstGeom>
+          <a:ln w="6985">
+            <a:solidFill>
+              <a:srgbClr val="D1CFC8"/>
+            </a:solidFill>
+          </a:ln>
+          <a:effectLst/>
+        </p:spPr>
+        <p:style>
+          <a:lnRef idx="2">
+            <a:schemeClr val="accent1"/>
+          </a:lnRef>
+          <a:fillRef idx="0">
+            <a:schemeClr val="accent1"/>
+          </a:fillRef>
+          <a:effectRef idx="0">
+            <a:schemeClr val="accent1"/>
+          </a:effectRef>
+          <a:fontRef idx="minor">
+            <a:schemeClr val="tx1"/>
+          </a:fontRef>
+        </p:style>
+      </p:cxnSp>
+      <p:cxnSp>
+        <p:nvCxnSpPr>
+          <p:cNvPr id="13" name="chart:grid"/>
+          <p:cNvCxnSpPr/>
+          <p:nvPr/>
+        </p:nvCxnSpPr>
+        <p:spPr>
+          <a:xfrm>
+            <a:off x="10932795" y="4079367"/>
+            <a:ext cx="0" cy="1457325"/>
+          </a:xfrm>
+          <a:prstGeom prst="line">
+            <a:avLst/>
+          </a:prstGeom>
+          <a:ln w="6985">
+            <a:solidFill>
+              <a:srgbClr val="D1CFC8"/>
+            </a:solidFill>
+          </a:ln>
+          <a:effectLst/>
+        </p:spPr>
+        <p:style>
+          <a:lnRef idx="2">
+            <a:schemeClr val="accent1"/>
+          </a:lnRef>
+          <a:fillRef idx="0">
+            <a:schemeClr val="accent1"/>
+          </a:fillRef>
+          <a:effectRef idx="0">
+            <a:schemeClr val="accent1"/>
+          </a:effectRef>
+          <a:fontRef idx="minor">
+            <a:schemeClr val="tx1"/>
+          </a:fontRef>
+        </p:style>
+      </p:cxnSp>
+      <p:cxnSp>
+        <p:nvCxnSpPr>
+          <p:cNvPr id="14" name="chart:zero-axis"/>
+          <p:cNvCxnSpPr/>
+          <p:nvPr/>
+        </p:nvCxnSpPr>
+        <p:spPr>
+          <a:xfrm>
+            <a:off x="2399157" y="1772412"/>
+            <a:ext cx="0" cy="3764280"/>
+          </a:xfrm>
+          <a:prstGeom prst="line">
+            <a:avLst/>
+          </a:prstGeom>
+          <a:ln w="11430">
+            <a:solidFill>
+              <a:srgbClr val="666E70"/>
+            </a:solidFill>
+          </a:ln>
+          <a:effectLst/>
+        </p:spPr>
+        <p:style>
+          <a:lnRef idx="2">
+            <a:schemeClr val="accent1"/>
+          </a:lnRef>
+          <a:fillRef idx="0">
+            <a:schemeClr val="accent1"/>
+          </a:fillRef>
+          <a:effectRef idx="0">
+            <a:schemeClr val="accent1"/>
+          </a:effectRef>
+          <a:fontRef idx="minor">
+            <a:schemeClr val="tx1"/>
+          </a:fontRef>
+        </p:style>
+      </p:cxnSp>
+      <p:sp>
+        <p:nvSpPr>
+          <p:cNvPr id="15" name="chart:data-bar"/>
           <p:cNvSpPr/>
           <p:nvPr/>
         </p:nvSpPr>
         <p:spPr>
           <a:xfrm>
-            <a:off x="2441448" y="2026539"/>
-            <a:ext cx="995781" cy="201168"/>
+            <a:off x="2399157" y="1957959"/>
+            <a:ext cx="1536054" cy="188976"/>
           </a:xfrm>
           <a:prstGeom prst="rect">
             <a:avLst/>
@@ -60335,7 +60769,7 @@
           <a:fillRef idx="3">
             <a:schemeClr val="accent1"/>
           </a:fillRef>
-          <a:effectRef idx="2">
+          <a:effectRef idx="0">
             <a:schemeClr val="accent1"/>
           </a:effectRef>
           <a:fontRef idx="minor">
@@ -60352,55 +60786,14 @@
       </p:sp>
       <p:sp>
         <p:nvSpPr>
-          <p:cNvPr id="18" name="TextBox 17"/>
-          <p:cNvSpPr txBox="1"/>
-          <p:nvPr/>
-        </p:nvSpPr>
-        <p:spPr>
-          <a:xfrm>
-            <a:off x="3492093" y="2008251"/>
-            <a:ext cx="512064" cy="237744"/>
-          </a:xfrm>
-          <a:prstGeom prst="rect">
-            <a:avLst/>
-          </a:prstGeom>
-          <a:noFill/>
-        </p:spPr>
-        <p:txBody>
-          <a:bodyPr wrap="square" anchor="t" lIns="0" rIns="0" tIns="0" bIns="0">
-            <a:spAutoFit/>
-          </a:bodyPr>
-          <a:lstStyle/>
-          <a:p>
-            <a:pPr algn="l">
-              <a:lnSpc>
-                <a:spcPct val="130000"/>
-              </a:lnSpc>
-            </a:pPr>
-            <a:r>
-              <a:rPr sz="760" b="0" lang="ja-JP">
-                <a:solidFill>
-                  <a:srgbClr val="666E70"/>
-                </a:solidFill>
-                <a:latin typeface="Yu Gothic"/>
-                <a:ea typeface="Yu Gothic"/>
-                <a:cs typeface="Yu Gothic"/>
-              </a:rPr>
-              <a:t>45</a:t>
-            </a:r>
-          </a:p>
-        </p:txBody>
-      </p:sp>
-      <p:sp>
-        <p:nvSpPr>
-          <p:cNvPr id="19" name="Rectangle 18"/>
+          <p:cNvPr id="16" name="chart:data-bar"/>
           <p:cNvSpPr/>
           <p:nvPr/>
         </p:nvSpPr>
         <p:spPr>
           <a:xfrm>
-            <a:off x="2441448" y="2264283"/>
-            <a:ext cx="287670" cy="201168"/>
+            <a:off x="2399157" y="2338958"/>
+            <a:ext cx="443749" cy="188976"/>
           </a:xfrm>
           <a:prstGeom prst="rect">
             <a:avLst/>
@@ -60420,7 +60813,7 @@
           <a:fillRef idx="3">
             <a:schemeClr val="accent1"/>
           </a:fillRef>
-          <a:effectRef idx="2">
+          <a:effectRef idx="0">
             <a:schemeClr val="accent1"/>
           </a:effectRef>
           <a:fontRef idx="minor">
@@ -60437,96 +60830,14 @@
       </p:sp>
       <p:sp>
         <p:nvSpPr>
-          <p:cNvPr id="20" name="TextBox 19"/>
-          <p:cNvSpPr txBox="1"/>
-          <p:nvPr/>
-        </p:nvSpPr>
-        <p:spPr>
-          <a:xfrm>
-            <a:off x="2783982" y="2245995"/>
-            <a:ext cx="512064" cy="237744"/>
-          </a:xfrm>
-          <a:prstGeom prst="rect">
-            <a:avLst/>
-          </a:prstGeom>
-          <a:noFill/>
-        </p:spPr>
-        <p:txBody>
-          <a:bodyPr wrap="square" anchor="t" lIns="0" rIns="0" tIns="0" bIns="0">
-            <a:spAutoFit/>
-          </a:bodyPr>
-          <a:lstStyle/>
-          <a:p>
-            <a:pPr algn="l">
-              <a:lnSpc>
-                <a:spcPct val="130000"/>
-              </a:lnSpc>
-            </a:pPr>
-            <a:r>
-              <a:rPr sz="760" b="0" lang="ja-JP">
-                <a:solidFill>
-                  <a:srgbClr val="666E70"/>
-                </a:solidFill>
-                <a:latin typeface="Yu Gothic"/>
-                <a:ea typeface="Yu Gothic"/>
-                <a:cs typeface="Yu Gothic"/>
-              </a:rPr>
-              <a:t>13</a:t>
-            </a:r>
-          </a:p>
-        </p:txBody>
-      </p:sp>
-      <p:sp>
-        <p:nvSpPr>
-          <p:cNvPr id="21" name="TextBox 20"/>
-          <p:cNvSpPr txBox="1"/>
-          <p:nvPr/>
-        </p:nvSpPr>
-        <p:spPr>
-          <a:xfrm>
-            <a:off x="868680" y="3034665"/>
-            <a:ext cx="1389888" cy="274320"/>
-          </a:xfrm>
-          <a:prstGeom prst="rect">
-            <a:avLst/>
-          </a:prstGeom>
-          <a:noFill/>
-        </p:spPr>
-        <p:txBody>
-          <a:bodyPr wrap="square" anchor="t" lIns="0" rIns="0" tIns="0" bIns="0">
-            <a:spAutoFit/>
-          </a:bodyPr>
-          <a:lstStyle/>
-          <a:p>
-            <a:pPr algn="r">
-              <a:lnSpc>
-                <a:spcPct val="130000"/>
-              </a:lnSpc>
-            </a:pPr>
-            <a:r>
-              <a:rPr sz="940" b="1" lang="ja-JP">
-                <a:solidFill>
-                  <a:srgbClr val="182C43"/>
-                </a:solidFill>
-                <a:latin typeface="Yu Gothic"/>
-                <a:ea typeface="Yu Gothic"/>
-                <a:cs typeface="Yu Gothic"/>
-              </a:rPr>
-              <a:t>月次レビュー</a:t>
-            </a:r>
-          </a:p>
-        </p:txBody>
-      </p:sp>
-      <p:sp>
-        <p:nvSpPr>
-          <p:cNvPr id="22" name="Rectangle 21"/>
+          <p:cNvPr id="17" name="chart:data-bar"/>
           <p:cNvSpPr/>
           <p:nvPr/>
         </p:nvSpPr>
         <p:spPr>
           <a:xfrm>
-            <a:off x="2441448" y="2952369"/>
-            <a:ext cx="2655417" cy="201168"/>
+            <a:off x="2399157" y="2899029"/>
+            <a:ext cx="4096146" cy="188976"/>
           </a:xfrm>
           <a:prstGeom prst="rect">
             <a:avLst/>
@@ -60546,7 +60857,7 @@
           <a:fillRef idx="3">
             <a:schemeClr val="accent1"/>
           </a:fillRef>
-          <a:effectRef idx="2">
+          <a:effectRef idx="0">
             <a:schemeClr val="accent1"/>
           </a:effectRef>
           <a:fontRef idx="minor">
@@ -60563,55 +60874,14 @@
       </p:sp>
       <p:sp>
         <p:nvSpPr>
-          <p:cNvPr id="23" name="TextBox 22"/>
-          <p:cNvSpPr txBox="1"/>
-          <p:nvPr/>
-        </p:nvSpPr>
-        <p:spPr>
-          <a:xfrm>
-            <a:off x="5151729" y="2934081"/>
-            <a:ext cx="512064" cy="237744"/>
-          </a:xfrm>
-          <a:prstGeom prst="rect">
-            <a:avLst/>
-          </a:prstGeom>
-          <a:noFill/>
-        </p:spPr>
-        <p:txBody>
-          <a:bodyPr wrap="square" anchor="t" lIns="0" rIns="0" tIns="0" bIns="0">
-            <a:spAutoFit/>
-          </a:bodyPr>
-          <a:lstStyle/>
-          <a:p>
-            <a:pPr algn="l">
-              <a:lnSpc>
-                <a:spcPct val="130000"/>
-              </a:lnSpc>
-            </a:pPr>
-            <a:r>
-              <a:rPr sz="760" b="0" lang="ja-JP">
-                <a:solidFill>
-                  <a:srgbClr val="666E70"/>
-                </a:solidFill>
-                <a:latin typeface="Yu Gothic"/>
-                <a:ea typeface="Yu Gothic"/>
-                <a:cs typeface="Yu Gothic"/>
-              </a:rPr>
-              <a:t>120</a:t>
-            </a:r>
-          </a:p>
-        </p:txBody>
-      </p:sp>
-      <p:sp>
-        <p:nvSpPr>
-          <p:cNvPr id="24" name="Rectangle 23"/>
+          <p:cNvPr id="18" name="chart:data-bar"/>
           <p:cNvSpPr/>
           <p:nvPr/>
         </p:nvSpPr>
         <p:spPr>
           <a:xfrm>
-            <a:off x="2441448" y="3190113"/>
-            <a:ext cx="929396" cy="201168"/>
+            <a:off x="2399157" y="3280029"/>
+            <a:ext cx="1433651" cy="188976"/>
           </a:xfrm>
           <a:prstGeom prst="rect">
             <a:avLst/>
@@ -60631,7 +60901,7 @@
           <a:fillRef idx="3">
             <a:schemeClr val="accent1"/>
           </a:fillRef>
-          <a:effectRef idx="2">
+          <a:effectRef idx="0">
             <a:schemeClr val="accent1"/>
           </a:effectRef>
           <a:fontRef idx="minor">
@@ -60648,96 +60918,14 @@
       </p:sp>
       <p:sp>
         <p:nvSpPr>
-          <p:cNvPr id="25" name="TextBox 24"/>
-          <p:cNvSpPr txBox="1"/>
-          <p:nvPr/>
-        </p:nvSpPr>
-        <p:spPr>
-          <a:xfrm>
-            <a:off x="3425708" y="3171825"/>
-            <a:ext cx="512064" cy="237744"/>
-          </a:xfrm>
-          <a:prstGeom prst="rect">
-            <a:avLst/>
-          </a:prstGeom>
-          <a:noFill/>
-        </p:spPr>
-        <p:txBody>
-          <a:bodyPr wrap="square" anchor="t" lIns="0" rIns="0" tIns="0" bIns="0">
-            <a:spAutoFit/>
-          </a:bodyPr>
-          <a:lstStyle/>
-          <a:p>
-            <a:pPr algn="l">
-              <a:lnSpc>
-                <a:spcPct val="130000"/>
-              </a:lnSpc>
-            </a:pPr>
-            <a:r>
-              <a:rPr sz="760" b="0" lang="ja-JP">
-                <a:solidFill>
-                  <a:srgbClr val="666E70"/>
-                </a:solidFill>
-                <a:latin typeface="Yu Gothic"/>
-                <a:ea typeface="Yu Gothic"/>
-                <a:cs typeface="Yu Gothic"/>
-              </a:rPr>
-              <a:t>42</a:t>
-            </a:r>
-          </a:p>
-        </p:txBody>
-      </p:sp>
-      <p:sp>
-        <p:nvSpPr>
-          <p:cNvPr id="26" name="TextBox 25"/>
-          <p:cNvSpPr txBox="1"/>
-          <p:nvPr/>
-        </p:nvSpPr>
-        <p:spPr>
-          <a:xfrm>
-            <a:off x="868680" y="3960495"/>
-            <a:ext cx="1389888" cy="274320"/>
-          </a:xfrm>
-          <a:prstGeom prst="rect">
-            <a:avLst/>
-          </a:prstGeom>
-          <a:noFill/>
-        </p:spPr>
-        <p:txBody>
-          <a:bodyPr wrap="square" anchor="t" lIns="0" rIns="0" tIns="0" bIns="0">
-            <a:spAutoFit/>
-          </a:bodyPr>
-          <a:lstStyle/>
-          <a:p>
-            <a:pPr algn="r">
-              <a:lnSpc>
-                <a:spcPct val="130000"/>
-              </a:lnSpc>
-            </a:pPr>
-            <a:r>
-              <a:rPr sz="940" b="1" lang="ja-JP">
-                <a:solidFill>
-                  <a:srgbClr val="182C43"/>
-                </a:solidFill>
-                <a:latin typeface="Yu Gothic"/>
-                <a:ea typeface="Yu Gothic"/>
-                <a:cs typeface="Yu Gothic"/>
-              </a:rPr>
-              <a:t>調査サマリ</a:t>
-            </a:r>
-          </a:p>
-        </p:txBody>
-      </p:sp>
-      <p:sp>
-        <p:nvSpPr>
-          <p:cNvPr id="27" name="Rectangle 26"/>
+          <p:cNvPr id="19" name="chart:data-bar"/>
           <p:cNvSpPr/>
           <p:nvPr/>
         </p:nvSpPr>
         <p:spPr>
           <a:xfrm>
-            <a:off x="2441448" y="3878199"/>
-            <a:ext cx="5310835" cy="201168"/>
+            <a:off x="2399157" y="3840099"/>
+            <a:ext cx="8192292" cy="188976"/>
           </a:xfrm>
           <a:prstGeom prst="rect">
             <a:avLst/>
@@ -60757,7 +60945,7 @@
           <a:fillRef idx="3">
             <a:schemeClr val="accent1"/>
           </a:fillRef>
-          <a:effectRef idx="2">
+          <a:effectRef idx="0">
             <a:schemeClr val="accent1"/>
           </a:effectRef>
           <a:fontRef idx="minor">
@@ -60774,55 +60962,14 @@
       </p:sp>
       <p:sp>
         <p:nvSpPr>
-          <p:cNvPr id="28" name="TextBox 27"/>
-          <p:cNvSpPr txBox="1"/>
-          <p:nvPr/>
-        </p:nvSpPr>
-        <p:spPr>
-          <a:xfrm>
-            <a:off x="7807147" y="3859911"/>
-            <a:ext cx="512064" cy="237744"/>
-          </a:xfrm>
-          <a:prstGeom prst="rect">
-            <a:avLst/>
-          </a:prstGeom>
-          <a:noFill/>
-        </p:spPr>
-        <p:txBody>
-          <a:bodyPr wrap="square" anchor="t" lIns="0" rIns="0" tIns="0" bIns="0">
-            <a:spAutoFit/>
-          </a:bodyPr>
-          <a:lstStyle/>
-          <a:p>
-            <a:pPr algn="l">
-              <a:lnSpc>
-                <a:spcPct val="130000"/>
-              </a:lnSpc>
-            </a:pPr>
-            <a:r>
-              <a:rPr sz="760" b="0" lang="ja-JP">
-                <a:solidFill>
-                  <a:srgbClr val="666E70"/>
-                </a:solidFill>
-                <a:latin typeface="Yu Gothic"/>
-                <a:ea typeface="Yu Gothic"/>
-                <a:cs typeface="Yu Gothic"/>
-              </a:rPr>
-              <a:t>240</a:t>
-            </a:r>
-          </a:p>
-        </p:txBody>
-      </p:sp>
-      <p:sp>
-        <p:nvSpPr>
-          <p:cNvPr id="29" name="Rectangle 28"/>
+          <p:cNvPr id="20" name="chart:data-bar"/>
           <p:cNvSpPr/>
           <p:nvPr/>
         </p:nvSpPr>
         <p:spPr>
           <a:xfrm>
-            <a:off x="2441448" y="4115943"/>
-            <a:ext cx="1880920" cy="201168"/>
+            <a:off x="2399157" y="4221099"/>
+            <a:ext cx="2901436" cy="188976"/>
           </a:xfrm>
           <a:prstGeom prst="rect">
             <a:avLst/>
@@ -60842,7 +60989,7 @@
           <a:fillRef idx="3">
             <a:schemeClr val="accent1"/>
           </a:fillRef>
-          <a:effectRef idx="2">
+          <a:effectRef idx="0">
             <a:schemeClr val="accent1"/>
           </a:effectRef>
           <a:fontRef idx="minor">
@@ -60859,96 +61006,14 @@
       </p:sp>
       <p:sp>
         <p:nvSpPr>
-          <p:cNvPr id="30" name="TextBox 29"/>
-          <p:cNvSpPr txBox="1"/>
-          <p:nvPr/>
-        </p:nvSpPr>
-        <p:spPr>
-          <a:xfrm>
-            <a:off x="4377232" y="4097655"/>
-            <a:ext cx="512064" cy="237744"/>
-          </a:xfrm>
-          <a:prstGeom prst="rect">
-            <a:avLst/>
-          </a:prstGeom>
-          <a:noFill/>
-        </p:spPr>
-        <p:txBody>
-          <a:bodyPr wrap="square" anchor="t" lIns="0" rIns="0" tIns="0" bIns="0">
-            <a:spAutoFit/>
-          </a:bodyPr>
-          <a:lstStyle/>
-          <a:p>
-            <a:pPr algn="l">
-              <a:lnSpc>
-                <a:spcPct val="130000"/>
-              </a:lnSpc>
-            </a:pPr>
-            <a:r>
-              <a:rPr sz="760" b="0" lang="ja-JP">
-                <a:solidFill>
-                  <a:srgbClr val="666E70"/>
-                </a:solidFill>
-                <a:latin typeface="Yu Gothic"/>
-                <a:ea typeface="Yu Gothic"/>
-                <a:cs typeface="Yu Gothic"/>
-              </a:rPr>
-              <a:t>85</a:t>
-            </a:r>
-          </a:p>
-        </p:txBody>
-      </p:sp>
-      <p:sp>
-        <p:nvSpPr>
-          <p:cNvPr id="31" name="TextBox 30"/>
-          <p:cNvSpPr txBox="1"/>
-          <p:nvPr/>
-        </p:nvSpPr>
-        <p:spPr>
-          <a:xfrm>
-            <a:off x="868680" y="4886324"/>
-            <a:ext cx="1389888" cy="274320"/>
-          </a:xfrm>
-          <a:prstGeom prst="rect">
-            <a:avLst/>
-          </a:prstGeom>
-          <a:noFill/>
-        </p:spPr>
-        <p:txBody>
-          <a:bodyPr wrap="square" anchor="t" lIns="0" rIns="0" tIns="0" bIns="0">
-            <a:spAutoFit/>
-          </a:bodyPr>
-          <a:lstStyle/>
-          <a:p>
-            <a:pPr algn="r">
-              <a:lnSpc>
-                <a:spcPct val="130000"/>
-              </a:lnSpc>
-            </a:pPr>
-            <a:r>
-              <a:rPr sz="940" b="1" lang="ja-JP">
-                <a:solidFill>
-                  <a:srgbClr val="182C43"/>
-                </a:solidFill>
-                <a:latin typeface="Yu Gothic"/>
-                <a:ea typeface="Yu Gothic"/>
-                <a:cs typeface="Yu Gothic"/>
-              </a:rPr>
-              <a:t>役員向け抜粋</a:t>
-            </a:r>
-          </a:p>
-        </p:txBody>
-      </p:sp>
-      <p:sp>
-        <p:nvSpPr>
-          <p:cNvPr id="32" name="Rectangle 31"/>
+          <p:cNvPr id="21" name="chart:data-bar"/>
           <p:cNvSpPr/>
           <p:nvPr/>
         </p:nvSpPr>
         <p:spPr>
           <a:xfrm>
-            <a:off x="2441448" y="4804028"/>
-            <a:ext cx="1991563" cy="201168"/>
+            <a:off x="2399157" y="4781169"/>
+            <a:ext cx="3072109" cy="188976"/>
           </a:xfrm>
           <a:prstGeom prst="rect">
             <a:avLst/>
@@ -60968,7 +61033,7 @@
           <a:fillRef idx="3">
             <a:schemeClr val="accent1"/>
           </a:fillRef>
-          <a:effectRef idx="2">
+          <a:effectRef idx="0">
             <a:schemeClr val="accent1"/>
           </a:effectRef>
           <a:fontRef idx="minor">
@@ -60985,55 +61050,14 @@
       </p:sp>
       <p:sp>
         <p:nvSpPr>
-          <p:cNvPr id="33" name="TextBox 32"/>
-          <p:cNvSpPr txBox="1"/>
-          <p:nvPr/>
-        </p:nvSpPr>
-        <p:spPr>
-          <a:xfrm>
-            <a:off x="4487875" y="4785741"/>
-            <a:ext cx="512064" cy="237744"/>
-          </a:xfrm>
-          <a:prstGeom prst="rect">
-            <a:avLst/>
-          </a:prstGeom>
-          <a:noFill/>
-        </p:spPr>
-        <p:txBody>
-          <a:bodyPr wrap="square" anchor="t" lIns="0" rIns="0" tIns="0" bIns="0">
-            <a:spAutoFit/>
-          </a:bodyPr>
-          <a:lstStyle/>
-          <a:p>
-            <a:pPr algn="l">
-              <a:lnSpc>
-                <a:spcPct val="130000"/>
-              </a:lnSpc>
-            </a:pPr>
-            <a:r>
-              <a:rPr sz="760" b="0" lang="ja-JP">
-                <a:solidFill>
-                  <a:srgbClr val="666E70"/>
-                </a:solidFill>
-                <a:latin typeface="Yu Gothic"/>
-                <a:ea typeface="Yu Gothic"/>
-                <a:cs typeface="Yu Gothic"/>
-              </a:rPr>
-              <a:t>90</a:t>
-            </a:r>
-          </a:p>
-        </p:txBody>
-      </p:sp>
-      <p:sp>
-        <p:nvSpPr>
-          <p:cNvPr id="34" name="Rectangle 33"/>
+          <p:cNvPr id="22" name="chart:data-bar"/>
           <p:cNvSpPr/>
           <p:nvPr/>
         </p:nvSpPr>
         <p:spPr>
           <a:xfrm>
-            <a:off x="2441448" y="5041772"/>
-            <a:ext cx="619597" cy="201168"/>
+            <a:off x="2399157" y="5162169"/>
+            <a:ext cx="955767" cy="188976"/>
           </a:xfrm>
           <a:prstGeom prst="rect">
             <a:avLst/>
@@ -61053,7 +61077,7 @@
           <a:fillRef idx="3">
             <a:schemeClr val="accent1"/>
           </a:fillRef>
-          <a:effectRef idx="2">
+          <a:effectRef idx="0">
             <a:schemeClr val="accent1"/>
           </a:effectRef>
           <a:fontRef idx="minor">
@@ -61070,54 +61094,13 @@
       </p:sp>
       <p:sp>
         <p:nvSpPr>
-          <p:cNvPr id="35" name="TextBox 34"/>
-          <p:cNvSpPr txBox="1"/>
-          <p:nvPr/>
-        </p:nvSpPr>
-        <p:spPr>
-          <a:xfrm>
-            <a:off x="3115909" y="5023484"/>
-            <a:ext cx="512064" cy="237744"/>
-          </a:xfrm>
-          <a:prstGeom prst="rect">
-            <a:avLst/>
-          </a:prstGeom>
-          <a:noFill/>
-        </p:spPr>
-        <p:txBody>
-          <a:bodyPr wrap="square" anchor="t" lIns="0" rIns="0" tIns="0" bIns="0">
-            <a:spAutoFit/>
-          </a:bodyPr>
-          <a:lstStyle/>
-          <a:p>
-            <a:pPr algn="l">
-              <a:lnSpc>
-                <a:spcPct val="130000"/>
-              </a:lnSpc>
-            </a:pPr>
-            <a:r>
-              <a:rPr sz="760" b="0" lang="ja-JP">
-                <a:solidFill>
-                  <a:srgbClr val="666E70"/>
-                </a:solidFill>
-                <a:latin typeface="Yu Gothic"/>
-                <a:ea typeface="Yu Gothic"/>
-                <a:cs typeface="Yu Gothic"/>
-              </a:rPr>
-              <a:t>28</a:t>
-            </a:r>
-          </a:p>
-        </p:txBody>
-      </p:sp>
-      <p:sp>
-        <p:nvSpPr>
-          <p:cNvPr id="36" name="Rectangle 35"/>
+          <p:cNvPr id="23" name="chart:legend-key"/>
           <p:cNvSpPr/>
           <p:nvPr/>
         </p:nvSpPr>
         <p:spPr>
           <a:xfrm>
-            <a:off x="1435607" y="5788152"/>
+            <a:off x="694944" y="5900928"/>
             <a:ext cx="109728" cy="109728"/>
           </a:xfrm>
           <a:prstGeom prst="rect">
@@ -61138,7 +61121,7 @@
           <a:fillRef idx="3">
             <a:schemeClr val="accent1"/>
           </a:fillRef>
-          <a:effectRef idx="2">
+          <a:effectRef idx="0">
             <a:schemeClr val="accent1"/>
           </a:effectRef>
           <a:fontRef idx="minor">
@@ -61155,54 +61138,13 @@
       </p:sp>
       <p:sp>
         <p:nvSpPr>
-          <p:cNvPr id="37" name="TextBox 36"/>
-          <p:cNvSpPr txBox="1"/>
-          <p:nvPr/>
-        </p:nvSpPr>
-        <p:spPr>
-          <a:xfrm>
-            <a:off x="1600199" y="5724144"/>
-            <a:ext cx="1572768" cy="237744"/>
-          </a:xfrm>
-          <a:prstGeom prst="rect">
-            <a:avLst/>
-          </a:prstGeom>
-          <a:noFill/>
-        </p:spPr>
-        <p:txBody>
-          <a:bodyPr wrap="square" anchor="t" lIns="0" rIns="0" tIns="0" bIns="0">
-            <a:spAutoFit/>
-          </a:bodyPr>
-          <a:lstStyle/>
-          <a:p>
-            <a:pPr algn="l">
-              <a:lnSpc>
-                <a:spcPct val="130000"/>
-              </a:lnSpc>
-            </a:pPr>
-            <a:r>
-              <a:rPr sz="819" b="0" lang="ja-JP">
-                <a:solidFill>
-                  <a:srgbClr val="666E70"/>
-                </a:solidFill>
-                <a:latin typeface="Yu Gothic"/>
-                <a:ea typeface="Yu Gothic"/>
-                <a:cs typeface="Yu Gothic"/>
-              </a:rPr>
-              <a:t>従来 (分)</a:t>
-            </a:r>
-          </a:p>
-        </p:txBody>
-      </p:sp>
-      <p:sp>
-        <p:nvSpPr>
-          <p:cNvPr id="38" name="Rectangle 37"/>
+          <p:cNvPr id="24" name="chart:legend-key"/>
           <p:cNvSpPr/>
           <p:nvPr/>
         </p:nvSpPr>
         <p:spPr>
           <a:xfrm>
-            <a:off x="3310127" y="5788152"/>
+            <a:off x="1729359" y="5900928"/>
             <a:ext cx="109728" cy="109728"/>
           </a:xfrm>
           <a:prstGeom prst="rect">
@@ -61223,7 +61165,7 @@
           <a:fillRef idx="3">
             <a:schemeClr val="accent1"/>
           </a:fillRef>
-          <a:effectRef idx="2">
+          <a:effectRef idx="0">
             <a:schemeClr val="accent1"/>
           </a:effectRef>
           <a:fontRef idx="minor">
@@ -61240,14 +61182,14 @@
       </p:sp>
       <p:sp>
         <p:nvSpPr>
-          <p:cNvPr id="39" name="TextBox 38"/>
-          <p:cNvSpPr txBox="1"/>
-          <p:nvPr/>
-        </p:nvSpPr>
-        <p:spPr>
-          <a:xfrm>
-            <a:off x="3474720" y="5724144"/>
-            <a:ext cx="1572768" cy="237744"/>
+          <p:cNvPr id="25" name="chart:axis-value"/>
+          <p:cNvSpPr txBox="1"/>
+          <p:nvPr/>
+        </p:nvSpPr>
+        <p:spPr>
+          <a:xfrm>
+            <a:off x="2334577" y="5600700"/>
+            <a:ext cx="129159" cy="216408"/>
           </a:xfrm>
           <a:prstGeom prst="rect">
             <a:avLst/>
@@ -61266,7 +61208,7 @@
               </a:lnSpc>
             </a:pPr>
             <a:r>
-              <a:rPr sz="819" b="0" lang="ja-JP">
+              <a:rPr sz="1200" b="0" lang="ja-JP">
                 <a:solidFill>
                   <a:srgbClr val="666E70"/>
                 </a:solidFill>
@@ -61274,6 +61216,457 @@
                 <a:ea typeface="Yu Gothic"/>
                 <a:cs typeface="Yu Gothic"/>
               </a:rPr>
+              <a:t>0</a:t>
+            </a:r>
+          </a:p>
+        </p:txBody>
+      </p:sp>
+      <p:sp>
+        <p:nvSpPr>
+          <p:cNvPr id="26" name="chart:axis-value"/>
+          <p:cNvSpPr txBox="1"/>
+          <p:nvPr/>
+        </p:nvSpPr>
+        <p:spPr>
+          <a:xfrm>
+            <a:off x="3995013" y="5600700"/>
+            <a:ext cx="221742" cy="216408"/>
+          </a:xfrm>
+          <a:prstGeom prst="rect">
+            <a:avLst/>
+          </a:prstGeom>
+          <a:noFill/>
+        </p:spPr>
+        <p:txBody>
+          <a:bodyPr wrap="square" anchor="t" lIns="0" rIns="0" tIns="0" bIns="0">
+            <a:spAutoFit/>
+          </a:bodyPr>
+          <a:lstStyle/>
+          <a:p>
+            <a:pPr algn="l">
+              <a:lnSpc>
+                <a:spcPct val="130000"/>
+              </a:lnSpc>
+            </a:pPr>
+            <a:r>
+              <a:rPr sz="1200" b="0" lang="ja-JP">
+                <a:solidFill>
+                  <a:srgbClr val="666E70"/>
+                </a:solidFill>
+                <a:latin typeface="Yu Gothic"/>
+                <a:ea typeface="Yu Gothic"/>
+                <a:cs typeface="Yu Gothic"/>
+              </a:rPr>
+              <a:t>50</a:t>
+            </a:r>
+          </a:p>
+        </p:txBody>
+      </p:sp>
+      <p:sp>
+        <p:nvSpPr>
+          <p:cNvPr id="27" name="chart:axis-value"/>
+          <p:cNvSpPr txBox="1"/>
+          <p:nvPr/>
+        </p:nvSpPr>
+        <p:spPr>
+          <a:xfrm>
+            <a:off x="5655449" y="5600700"/>
+            <a:ext cx="314325" cy="216408"/>
+          </a:xfrm>
+          <a:prstGeom prst="rect">
+            <a:avLst/>
+          </a:prstGeom>
+          <a:noFill/>
+        </p:spPr>
+        <p:txBody>
+          <a:bodyPr wrap="square" anchor="t" lIns="0" rIns="0" tIns="0" bIns="0">
+            <a:spAutoFit/>
+          </a:bodyPr>
+          <a:lstStyle/>
+          <a:p>
+            <a:pPr algn="l">
+              <a:lnSpc>
+                <a:spcPct val="130000"/>
+              </a:lnSpc>
+            </a:pPr>
+            <a:r>
+              <a:rPr sz="1200" b="0" lang="ja-JP">
+                <a:solidFill>
+                  <a:srgbClr val="666E70"/>
+                </a:solidFill>
+                <a:latin typeface="Yu Gothic"/>
+                <a:ea typeface="Yu Gothic"/>
+                <a:cs typeface="Yu Gothic"/>
+              </a:rPr>
+              <a:t>100</a:t>
+            </a:r>
+          </a:p>
+        </p:txBody>
+      </p:sp>
+      <p:sp>
+        <p:nvSpPr>
+          <p:cNvPr id="28" name="chart:axis-value"/>
+          <p:cNvSpPr txBox="1"/>
+          <p:nvPr/>
+        </p:nvSpPr>
+        <p:spPr>
+          <a:xfrm>
+            <a:off x="7362177" y="5600700"/>
+            <a:ext cx="314325" cy="216408"/>
+          </a:xfrm>
+          <a:prstGeom prst="rect">
+            <a:avLst/>
+          </a:prstGeom>
+          <a:noFill/>
+        </p:spPr>
+        <p:txBody>
+          <a:bodyPr wrap="square" anchor="t" lIns="0" rIns="0" tIns="0" bIns="0">
+            <a:spAutoFit/>
+          </a:bodyPr>
+          <a:lstStyle/>
+          <a:p>
+            <a:pPr algn="l">
+              <a:lnSpc>
+                <a:spcPct val="130000"/>
+              </a:lnSpc>
+            </a:pPr>
+            <a:r>
+              <a:rPr sz="1200" b="0" lang="ja-JP">
+                <a:solidFill>
+                  <a:srgbClr val="666E70"/>
+                </a:solidFill>
+                <a:latin typeface="Yu Gothic"/>
+                <a:ea typeface="Yu Gothic"/>
+                <a:cs typeface="Yu Gothic"/>
+              </a:rPr>
+              <a:t>150</a:t>
+            </a:r>
+          </a:p>
+        </p:txBody>
+      </p:sp>
+      <p:sp>
+        <p:nvSpPr>
+          <p:cNvPr id="29" name="chart:axis-value"/>
+          <p:cNvSpPr txBox="1"/>
+          <p:nvPr/>
+        </p:nvSpPr>
+        <p:spPr>
+          <a:xfrm>
+            <a:off x="9068904" y="5600700"/>
+            <a:ext cx="314325" cy="216408"/>
+          </a:xfrm>
+          <a:prstGeom prst="rect">
+            <a:avLst/>
+          </a:prstGeom>
+          <a:noFill/>
+        </p:spPr>
+        <p:txBody>
+          <a:bodyPr wrap="square" anchor="t" lIns="0" rIns="0" tIns="0" bIns="0">
+            <a:spAutoFit/>
+          </a:bodyPr>
+          <a:lstStyle/>
+          <a:p>
+            <a:pPr algn="l">
+              <a:lnSpc>
+                <a:spcPct val="130000"/>
+              </a:lnSpc>
+            </a:pPr>
+            <a:r>
+              <a:rPr sz="1200" b="0" lang="ja-JP">
+                <a:solidFill>
+                  <a:srgbClr val="666E70"/>
+                </a:solidFill>
+                <a:latin typeface="Yu Gothic"/>
+                <a:ea typeface="Yu Gothic"/>
+                <a:cs typeface="Yu Gothic"/>
+              </a:rPr>
+              <a:t>200</a:t>
+            </a:r>
+          </a:p>
+        </p:txBody>
+      </p:sp>
+      <p:sp>
+        <p:nvSpPr>
+          <p:cNvPr id="30" name="chart:axis-value"/>
+          <p:cNvSpPr txBox="1"/>
+          <p:nvPr/>
+        </p:nvSpPr>
+        <p:spPr>
+          <a:xfrm>
+            <a:off x="10775632" y="5600700"/>
+            <a:ext cx="314325" cy="216408"/>
+          </a:xfrm>
+          <a:prstGeom prst="rect">
+            <a:avLst/>
+          </a:prstGeom>
+          <a:noFill/>
+        </p:spPr>
+        <p:txBody>
+          <a:bodyPr wrap="square" anchor="t" lIns="0" rIns="0" tIns="0" bIns="0">
+            <a:spAutoFit/>
+          </a:bodyPr>
+          <a:lstStyle/>
+          <a:p>
+            <a:pPr algn="l">
+              <a:lnSpc>
+                <a:spcPct val="130000"/>
+              </a:lnSpc>
+            </a:pPr>
+            <a:r>
+              <a:rPr sz="1200" b="0" lang="ja-JP">
+                <a:solidFill>
+                  <a:srgbClr val="666E70"/>
+                </a:solidFill>
+                <a:latin typeface="Yu Gothic"/>
+                <a:ea typeface="Yu Gothic"/>
+                <a:cs typeface="Yu Gothic"/>
+              </a:rPr>
+              <a:t>250</a:t>
+            </a:r>
+          </a:p>
+        </p:txBody>
+      </p:sp>
+      <p:sp>
+        <p:nvSpPr>
+          <p:cNvPr id="31" name="chart:category"/>
+          <p:cNvSpPr txBox="1"/>
+          <p:nvPr/>
+        </p:nvSpPr>
+        <p:spPr>
+          <a:xfrm>
+            <a:off x="694944" y="2134743"/>
+            <a:ext cx="987552" cy="216408"/>
+          </a:xfrm>
+          <a:prstGeom prst="rect">
+            <a:avLst/>
+          </a:prstGeom>
+          <a:noFill/>
+        </p:spPr>
+        <p:txBody>
+          <a:bodyPr wrap="square" anchor="t" lIns="0" rIns="0" tIns="0" bIns="0">
+            <a:spAutoFit/>
+          </a:bodyPr>
+          <a:lstStyle/>
+          <a:p>
+            <a:pPr algn="r">
+              <a:lnSpc>
+                <a:spcPct val="130000"/>
+              </a:lnSpc>
+            </a:pPr>
+            <a:r>
+              <a:rPr sz="1200" b="1" lang="ja-JP">
+                <a:solidFill>
+                  <a:srgbClr val="182C43"/>
+                </a:solidFill>
+                <a:latin typeface="Yu Gothic"/>
+                <a:ea typeface="Yu Gothic"/>
+                <a:cs typeface="Yu Gothic"/>
+              </a:rPr>
+              <a:t>週次報告</a:t>
+            </a:r>
+          </a:p>
+        </p:txBody>
+      </p:sp>
+      <p:sp>
+        <p:nvSpPr>
+          <p:cNvPr id="32" name="chart:category"/>
+          <p:cNvSpPr txBox="1"/>
+          <p:nvPr/>
+        </p:nvSpPr>
+        <p:spPr>
+          <a:xfrm>
+            <a:off x="694944" y="3075813"/>
+            <a:ext cx="987552" cy="216408"/>
+          </a:xfrm>
+          <a:prstGeom prst="rect">
+            <a:avLst/>
+          </a:prstGeom>
+          <a:noFill/>
+        </p:spPr>
+        <p:txBody>
+          <a:bodyPr wrap="square" anchor="t" lIns="0" rIns="0" tIns="0" bIns="0">
+            <a:spAutoFit/>
+          </a:bodyPr>
+          <a:lstStyle/>
+          <a:p>
+            <a:pPr algn="r">
+              <a:lnSpc>
+                <a:spcPct val="130000"/>
+              </a:lnSpc>
+            </a:pPr>
+            <a:r>
+              <a:rPr sz="1200" b="1" lang="ja-JP">
+                <a:solidFill>
+                  <a:srgbClr val="182C43"/>
+                </a:solidFill>
+                <a:latin typeface="Yu Gothic"/>
+                <a:ea typeface="Yu Gothic"/>
+                <a:cs typeface="Yu Gothic"/>
+              </a:rPr>
+              <a:t>月次レビュー</a:t>
+            </a:r>
+          </a:p>
+        </p:txBody>
+      </p:sp>
+      <p:sp>
+        <p:nvSpPr>
+          <p:cNvPr id="33" name="chart:category"/>
+          <p:cNvSpPr txBox="1"/>
+          <p:nvPr/>
+        </p:nvSpPr>
+        <p:spPr>
+          <a:xfrm>
+            <a:off x="694944" y="4016883"/>
+            <a:ext cx="987552" cy="216408"/>
+          </a:xfrm>
+          <a:prstGeom prst="rect">
+            <a:avLst/>
+          </a:prstGeom>
+          <a:noFill/>
+        </p:spPr>
+        <p:txBody>
+          <a:bodyPr wrap="square" anchor="t" lIns="0" rIns="0" tIns="0" bIns="0">
+            <a:spAutoFit/>
+          </a:bodyPr>
+          <a:lstStyle/>
+          <a:p>
+            <a:pPr algn="r">
+              <a:lnSpc>
+                <a:spcPct val="130000"/>
+              </a:lnSpc>
+            </a:pPr>
+            <a:r>
+              <a:rPr sz="1200" b="1" lang="ja-JP">
+                <a:solidFill>
+                  <a:srgbClr val="182C43"/>
+                </a:solidFill>
+                <a:latin typeface="Yu Gothic"/>
+                <a:ea typeface="Yu Gothic"/>
+                <a:cs typeface="Yu Gothic"/>
+              </a:rPr>
+              <a:t>調査サマリ</a:t>
+            </a:r>
+          </a:p>
+        </p:txBody>
+      </p:sp>
+      <p:sp>
+        <p:nvSpPr>
+          <p:cNvPr id="34" name="chart:category"/>
+          <p:cNvSpPr txBox="1"/>
+          <p:nvPr/>
+        </p:nvSpPr>
+        <p:spPr>
+          <a:xfrm>
+            <a:off x="694944" y="4957953"/>
+            <a:ext cx="987552" cy="216408"/>
+          </a:xfrm>
+          <a:prstGeom prst="rect">
+            <a:avLst/>
+          </a:prstGeom>
+          <a:noFill/>
+        </p:spPr>
+        <p:txBody>
+          <a:bodyPr wrap="square" anchor="t" lIns="0" rIns="0" tIns="0" bIns="0">
+            <a:spAutoFit/>
+          </a:bodyPr>
+          <a:lstStyle/>
+          <a:p>
+            <a:pPr algn="r">
+              <a:lnSpc>
+                <a:spcPct val="130000"/>
+              </a:lnSpc>
+            </a:pPr>
+            <a:r>
+              <a:rPr sz="1200" b="1" lang="ja-JP">
+                <a:solidFill>
+                  <a:srgbClr val="182C43"/>
+                </a:solidFill>
+                <a:latin typeface="Yu Gothic"/>
+                <a:ea typeface="Yu Gothic"/>
+                <a:cs typeface="Yu Gothic"/>
+              </a:rPr>
+              <a:t>役員向け抜粋</a:t>
+            </a:r>
+          </a:p>
+        </p:txBody>
+      </p:sp>
+      <p:sp>
+        <p:nvSpPr>
+          <p:cNvPr id="35" name="chart:legend"/>
+          <p:cNvSpPr txBox="1"/>
+          <p:nvPr/>
+        </p:nvSpPr>
+        <p:spPr>
+          <a:xfrm>
+            <a:off x="896112" y="5864352"/>
+            <a:ext cx="668655" cy="216408"/>
+          </a:xfrm>
+          <a:prstGeom prst="rect">
+            <a:avLst/>
+          </a:prstGeom>
+          <a:noFill/>
+        </p:spPr>
+        <p:txBody>
+          <a:bodyPr wrap="square" anchor="t" lIns="0" rIns="0" tIns="0" bIns="0">
+            <a:spAutoFit/>
+          </a:bodyPr>
+          <a:lstStyle/>
+          <a:p>
+            <a:pPr algn="l">
+              <a:lnSpc>
+                <a:spcPct val="130000"/>
+              </a:lnSpc>
+            </a:pPr>
+            <a:r>
+              <a:rPr sz="1200" b="0" lang="ja-JP">
+                <a:solidFill>
+                  <a:srgbClr val="666E70"/>
+                </a:solidFill>
+                <a:latin typeface="Yu Gothic"/>
+                <a:ea typeface="Yu Gothic"/>
+                <a:cs typeface="Yu Gothic"/>
+              </a:rPr>
+              <a:t>従来 (分)</a:t>
+            </a:r>
+          </a:p>
+        </p:txBody>
+      </p:sp>
+      <p:sp>
+        <p:nvSpPr>
+          <p:cNvPr id="36" name="chart:legend"/>
+          <p:cNvSpPr txBox="1"/>
+          <p:nvPr/>
+        </p:nvSpPr>
+        <p:spPr>
+          <a:xfrm>
+            <a:off x="1930527" y="5864352"/>
+            <a:ext cx="833247" cy="216408"/>
+          </a:xfrm>
+          <a:prstGeom prst="rect">
+            <a:avLst/>
+          </a:prstGeom>
+          <a:noFill/>
+        </p:spPr>
+        <p:txBody>
+          <a:bodyPr wrap="square" anchor="t" lIns="0" rIns="0" tIns="0" bIns="0">
+            <a:spAutoFit/>
+          </a:bodyPr>
+          <a:lstStyle/>
+          <a:p>
+            <a:pPr algn="l">
+              <a:lnSpc>
+                <a:spcPct val="130000"/>
+              </a:lnSpc>
+            </a:pPr>
+            <a:r>
+              <a:rPr sz="1200" b="0" lang="ja-JP">
+                <a:solidFill>
+                  <a:srgbClr val="666E70"/>
+                </a:solidFill>
+                <a:latin typeface="Yu Gothic"/>
+                <a:ea typeface="Yu Gothic"/>
+                <a:cs typeface="Yu Gothic"/>
+              </a:rPr>
               <a:t>生成後 (分)</a:t>
             </a:r>
           </a:p>
@@ -61281,7 +61674,335 @@
       </p:sp>
       <p:sp>
         <p:nvSpPr>
-          <p:cNvPr id="40" name="TextBox 39"/>
+          <p:cNvPr id="37" name="chart:data-value"/>
+          <p:cNvSpPr txBox="1"/>
+          <p:nvPr/>
+        </p:nvSpPr>
+        <p:spPr>
+          <a:xfrm>
+            <a:off x="4017507" y="1944243"/>
+            <a:ext cx="217170" cy="216408"/>
+          </a:xfrm>
+          <a:prstGeom prst="rect">
+            <a:avLst/>
+          </a:prstGeom>
+          <a:noFill/>
+        </p:spPr>
+        <p:txBody>
+          <a:bodyPr wrap="square" anchor="t" lIns="0" rIns="0" tIns="0" bIns="0">
+            <a:spAutoFit/>
+          </a:bodyPr>
+          <a:lstStyle/>
+          <a:p>
+            <a:pPr algn="l">
+              <a:lnSpc>
+                <a:spcPct val="130000"/>
+              </a:lnSpc>
+            </a:pPr>
+            <a:r>
+              <a:rPr sz="1200" b="0" lang="ja-JP">
+                <a:solidFill>
+                  <a:srgbClr val="202729"/>
+                </a:solidFill>
+                <a:latin typeface="Yu Gothic"/>
+                <a:ea typeface="Yu Gothic"/>
+                <a:cs typeface="Yu Gothic"/>
+              </a:rPr>
+              <a:t>45</a:t>
+            </a:r>
+          </a:p>
+        </p:txBody>
+      </p:sp>
+      <p:sp>
+        <p:nvSpPr>
+          <p:cNvPr id="38" name="chart:data-value"/>
+          <p:cNvSpPr txBox="1"/>
+          <p:nvPr/>
+        </p:nvSpPr>
+        <p:spPr>
+          <a:xfrm>
+            <a:off x="2925202" y="2325243"/>
+            <a:ext cx="217170" cy="216408"/>
+          </a:xfrm>
+          <a:prstGeom prst="rect">
+            <a:avLst/>
+          </a:prstGeom>
+          <a:noFill/>
+        </p:spPr>
+        <p:txBody>
+          <a:bodyPr wrap="square" anchor="t" lIns="0" rIns="0" tIns="0" bIns="0">
+            <a:spAutoFit/>
+          </a:bodyPr>
+          <a:lstStyle/>
+          <a:p>
+            <a:pPr algn="l">
+              <a:lnSpc>
+                <a:spcPct val="130000"/>
+              </a:lnSpc>
+            </a:pPr>
+            <a:r>
+              <a:rPr sz="1200" b="0" lang="ja-JP">
+                <a:solidFill>
+                  <a:srgbClr val="202729"/>
+                </a:solidFill>
+                <a:latin typeface="Yu Gothic"/>
+                <a:ea typeface="Yu Gothic"/>
+                <a:cs typeface="Yu Gothic"/>
+              </a:rPr>
+              <a:t>13</a:t>
+            </a:r>
+          </a:p>
+        </p:txBody>
+      </p:sp>
+      <p:sp>
+        <p:nvSpPr>
+          <p:cNvPr id="39" name="chart:data-value"/>
+          <p:cNvSpPr txBox="1"/>
+          <p:nvPr/>
+        </p:nvSpPr>
+        <p:spPr>
+          <a:xfrm>
+            <a:off x="6577599" y="2885313"/>
+            <a:ext cx="309753" cy="216408"/>
+          </a:xfrm>
+          <a:prstGeom prst="rect">
+            <a:avLst/>
+          </a:prstGeom>
+          <a:noFill/>
+        </p:spPr>
+        <p:txBody>
+          <a:bodyPr wrap="square" anchor="t" lIns="0" rIns="0" tIns="0" bIns="0">
+            <a:spAutoFit/>
+          </a:bodyPr>
+          <a:lstStyle/>
+          <a:p>
+            <a:pPr algn="l">
+              <a:lnSpc>
+                <a:spcPct val="130000"/>
+              </a:lnSpc>
+            </a:pPr>
+            <a:r>
+              <a:rPr sz="1200" b="0" lang="ja-JP">
+                <a:solidFill>
+                  <a:srgbClr val="202729"/>
+                </a:solidFill>
+                <a:latin typeface="Yu Gothic"/>
+                <a:ea typeface="Yu Gothic"/>
+                <a:cs typeface="Yu Gothic"/>
+              </a:rPr>
+              <a:t>120</a:t>
+            </a:r>
+          </a:p>
+        </p:txBody>
+      </p:sp>
+      <p:sp>
+        <p:nvSpPr>
+          <p:cNvPr id="40" name="chart:data-value"/>
+          <p:cNvSpPr txBox="1"/>
+          <p:nvPr/>
+        </p:nvSpPr>
+        <p:spPr>
+          <a:xfrm>
+            <a:off x="3915104" y="3266313"/>
+            <a:ext cx="217170" cy="216408"/>
+          </a:xfrm>
+          <a:prstGeom prst="rect">
+            <a:avLst/>
+          </a:prstGeom>
+          <a:noFill/>
+        </p:spPr>
+        <p:txBody>
+          <a:bodyPr wrap="square" anchor="t" lIns="0" rIns="0" tIns="0" bIns="0">
+            <a:spAutoFit/>
+          </a:bodyPr>
+          <a:lstStyle/>
+          <a:p>
+            <a:pPr algn="l">
+              <a:lnSpc>
+                <a:spcPct val="130000"/>
+              </a:lnSpc>
+            </a:pPr>
+            <a:r>
+              <a:rPr sz="1200" b="0" lang="ja-JP">
+                <a:solidFill>
+                  <a:srgbClr val="202729"/>
+                </a:solidFill>
+                <a:latin typeface="Yu Gothic"/>
+                <a:ea typeface="Yu Gothic"/>
+                <a:cs typeface="Yu Gothic"/>
+              </a:rPr>
+              <a:t>42</a:t>
+            </a:r>
+          </a:p>
+        </p:txBody>
+      </p:sp>
+      <p:sp>
+        <p:nvSpPr>
+          <p:cNvPr id="41" name="chart:data-value"/>
+          <p:cNvSpPr txBox="1"/>
+          <p:nvPr/>
+        </p:nvSpPr>
+        <p:spPr>
+          <a:xfrm>
+            <a:off x="10673745" y="3826383"/>
+            <a:ext cx="309753" cy="216408"/>
+          </a:xfrm>
+          <a:prstGeom prst="rect">
+            <a:avLst/>
+          </a:prstGeom>
+          <a:noFill/>
+        </p:spPr>
+        <p:txBody>
+          <a:bodyPr wrap="square" anchor="t" lIns="0" rIns="0" tIns="0" bIns="0">
+            <a:spAutoFit/>
+          </a:bodyPr>
+          <a:lstStyle/>
+          <a:p>
+            <a:pPr algn="l">
+              <a:lnSpc>
+                <a:spcPct val="130000"/>
+              </a:lnSpc>
+            </a:pPr>
+            <a:r>
+              <a:rPr sz="1200" b="0" lang="ja-JP">
+                <a:solidFill>
+                  <a:srgbClr val="202729"/>
+                </a:solidFill>
+                <a:latin typeface="Yu Gothic"/>
+                <a:ea typeface="Yu Gothic"/>
+                <a:cs typeface="Yu Gothic"/>
+              </a:rPr>
+              <a:t>240</a:t>
+            </a:r>
+          </a:p>
+        </p:txBody>
+      </p:sp>
+      <p:sp>
+        <p:nvSpPr>
+          <p:cNvPr id="42" name="chart:data-value"/>
+          <p:cNvSpPr txBox="1"/>
+          <p:nvPr/>
+        </p:nvSpPr>
+        <p:spPr>
+          <a:xfrm>
+            <a:off x="5382889" y="4207383"/>
+            <a:ext cx="217170" cy="216408"/>
+          </a:xfrm>
+          <a:prstGeom prst="rect">
+            <a:avLst/>
+          </a:prstGeom>
+          <a:noFill/>
+        </p:spPr>
+        <p:txBody>
+          <a:bodyPr wrap="square" anchor="t" lIns="0" rIns="0" tIns="0" bIns="0">
+            <a:spAutoFit/>
+          </a:bodyPr>
+          <a:lstStyle/>
+          <a:p>
+            <a:pPr algn="l">
+              <a:lnSpc>
+                <a:spcPct val="130000"/>
+              </a:lnSpc>
+            </a:pPr>
+            <a:r>
+              <a:rPr sz="1200" b="0" lang="ja-JP">
+                <a:solidFill>
+                  <a:srgbClr val="202729"/>
+                </a:solidFill>
+                <a:latin typeface="Yu Gothic"/>
+                <a:ea typeface="Yu Gothic"/>
+                <a:cs typeface="Yu Gothic"/>
+              </a:rPr>
+              <a:t>85</a:t>
+            </a:r>
+          </a:p>
+        </p:txBody>
+      </p:sp>
+      <p:sp>
+        <p:nvSpPr>
+          <p:cNvPr id="43" name="chart:data-value"/>
+          <p:cNvSpPr txBox="1"/>
+          <p:nvPr/>
+        </p:nvSpPr>
+        <p:spPr>
+          <a:xfrm>
+            <a:off x="5553562" y="4767453"/>
+            <a:ext cx="217170" cy="216408"/>
+          </a:xfrm>
+          <a:prstGeom prst="rect">
+            <a:avLst/>
+          </a:prstGeom>
+          <a:noFill/>
+        </p:spPr>
+        <p:txBody>
+          <a:bodyPr wrap="square" anchor="t" lIns="0" rIns="0" tIns="0" bIns="0">
+            <a:spAutoFit/>
+          </a:bodyPr>
+          <a:lstStyle/>
+          <a:p>
+            <a:pPr algn="l">
+              <a:lnSpc>
+                <a:spcPct val="130000"/>
+              </a:lnSpc>
+            </a:pPr>
+            <a:r>
+              <a:rPr sz="1200" b="0" lang="ja-JP">
+                <a:solidFill>
+                  <a:srgbClr val="202729"/>
+                </a:solidFill>
+                <a:latin typeface="Yu Gothic"/>
+                <a:ea typeface="Yu Gothic"/>
+                <a:cs typeface="Yu Gothic"/>
+              </a:rPr>
+              <a:t>90</a:t>
+            </a:r>
+          </a:p>
+        </p:txBody>
+      </p:sp>
+      <p:sp>
+        <p:nvSpPr>
+          <p:cNvPr id="44" name="chart:data-value"/>
+          <p:cNvSpPr txBox="1"/>
+          <p:nvPr/>
+        </p:nvSpPr>
+        <p:spPr>
+          <a:xfrm>
+            <a:off x="3437220" y="5148453"/>
+            <a:ext cx="217170" cy="216408"/>
+          </a:xfrm>
+          <a:prstGeom prst="rect">
+            <a:avLst/>
+          </a:prstGeom>
+          <a:noFill/>
+        </p:spPr>
+        <p:txBody>
+          <a:bodyPr wrap="square" anchor="t" lIns="0" rIns="0" tIns="0" bIns="0">
+            <a:spAutoFit/>
+          </a:bodyPr>
+          <a:lstStyle/>
+          <a:p>
+            <a:pPr algn="l">
+              <a:lnSpc>
+                <a:spcPct val="130000"/>
+              </a:lnSpc>
+            </a:pPr>
+            <a:r>
+              <a:rPr sz="1200" b="0" lang="ja-JP">
+                <a:solidFill>
+                  <a:srgbClr val="202729"/>
+                </a:solidFill>
+                <a:latin typeface="Yu Gothic"/>
+                <a:ea typeface="Yu Gothic"/>
+                <a:cs typeface="Yu Gothic"/>
+              </a:rPr>
+              <a:t>28</a:t>
+            </a:r>
+          </a:p>
+        </p:txBody>
+      </p:sp>
+      <p:sp>
+        <p:nvSpPr>
+          <p:cNvPr id="45" name="TextBox 44"/>
           <p:cNvSpPr txBox="1"/>
           <p:nvPr/>
         </p:nvSpPr>
@@ -61322,7 +62043,7 @@
       </p:sp>
       <p:sp>
         <p:nvSpPr>
-          <p:cNvPr id="41" name="Rectangle 40"/>
+          <p:cNvPr id="46" name="Rectangle 45"/>
           <p:cNvSpPr/>
           <p:nvPr/>
         </p:nvSpPr>
@@ -61366,7 +62087,7 @@
       </p:sp>
       <p:sp>
         <p:nvSpPr>
-          <p:cNvPr id="42" name="TextBox 41"/>
+          <p:cNvPr id="47" name="TextBox 46"/>
           <p:cNvSpPr txBox="1"/>
           <p:nvPr/>
         </p:nvSpPr>
@@ -61407,7 +62128,7 @@
       </p:sp>
       <p:sp>
         <p:nvSpPr>
-          <p:cNvPr id="43" name="TextBox 42"/>
+          <p:cNvPr id="48" name="TextBox 47"/>
           <p:cNvSpPr txBox="1"/>
           <p:nvPr/>
         </p:nvSpPr>

--- a/examples/gallery/pattern_gallery.pptx
+++ b/examples/gallery/pattern_gallery.pptx
@@ -3797,14 +3797,14 @@
       </p:sp>
       <p:cxnSp>
         <p:nvCxnSpPr>
-          <p:cNvPr id="5" name="Connector 4"/>
+          <p:cNvPr id="5" name="chart:grid"/>
           <p:cNvCxnSpPr/>
           <p:nvPr/>
         </p:nvCxnSpPr>
         <p:spPr>
           <a:xfrm>
-            <a:off x="1417319" y="5138927"/>
-            <a:ext cx="9848089" cy="0"/>
+            <a:off x="1081278" y="5047488"/>
+            <a:ext cx="10187178" cy="0"/>
           </a:xfrm>
           <a:prstGeom prst="line">
             <a:avLst/>
@@ -3814,6 +3814,7 @@
               <a:srgbClr val="D1CFC8"/>
             </a:solidFill>
           </a:ln>
+          <a:effectLst/>
         </p:spPr>
         <p:style>
           <a:lnRef idx="2">
@@ -3822,412 +3823,7 @@
           <a:fillRef idx="0">
             <a:schemeClr val="accent1"/>
           </a:fillRef>
-          <a:effectRef idx="1">
-            <a:schemeClr val="accent1"/>
-          </a:effectRef>
-          <a:fontRef idx="minor">
-            <a:schemeClr val="tx1"/>
-          </a:fontRef>
-        </p:style>
-      </p:cxnSp>
-      <p:sp>
-        <p:nvSpPr>
-          <p:cNvPr id="6" name="TextBox 5"/>
-          <p:cNvSpPr txBox="1"/>
-          <p:nvPr/>
-        </p:nvSpPr>
-        <p:spPr>
-          <a:xfrm>
-            <a:off x="996695" y="5056631"/>
-            <a:ext cx="329184" cy="164592"/>
-          </a:xfrm>
-          <a:prstGeom prst="rect">
-            <a:avLst/>
-          </a:prstGeom>
-          <a:noFill/>
-        </p:spPr>
-        <p:txBody>
-          <a:bodyPr wrap="square" anchor="t" lIns="0" rIns="0" tIns="0" bIns="0">
-            <a:spAutoFit/>
-            <a:extLst>
-              <a:ext uri="{8AF73BB6-5E31-4F0F-A399-3D98F3B95FD9}">
-                <ns12:textLayout xmlns:ns12="urn:pptxdsl:text-layout:v1" role="body"/>
-              </a:ext>
-            </a:extLst>
-          </a:bodyPr>
-          <a:lstStyle/>
-          <a:p>
-            <a:pPr algn="r">
-              <a:lnSpc>
-                <a:spcPct val="130000"/>
-              </a:lnSpc>
-            </a:pPr>
-            <a:r>
-              <a:rPr sz="780" b="0" lang="ja-JP">
-                <a:solidFill>
-                  <a:srgbClr val="666E70"/>
-                </a:solidFill>
-                <a:latin typeface="Yu Gothic"/>
-                <a:ea typeface="Yu Gothic"/>
-                <a:cs typeface="Yu Gothic"/>
-              </a:rPr>
-              <a:t>0</a:t>
-            </a:r>
-          </a:p>
-        </p:txBody>
-      </p:sp>
-      <p:cxnSp>
-        <p:nvCxnSpPr>
-          <p:cNvPr id="7" name="Connector 6"/>
-          <p:cNvCxnSpPr/>
-          <p:nvPr/>
-        </p:nvCxnSpPr>
-        <p:spPr>
-          <a:xfrm>
-            <a:off x="1417319" y="4299966"/>
-            <a:ext cx="9848089" cy="0"/>
-          </a:xfrm>
-          <a:prstGeom prst="line">
-            <a:avLst/>
-          </a:prstGeom>
-          <a:ln w="6985">
-            <a:solidFill>
-              <a:srgbClr val="D1CFC8"/>
-            </a:solidFill>
-          </a:ln>
-        </p:spPr>
-        <p:style>
-          <a:lnRef idx="2">
-            <a:schemeClr val="accent1"/>
-          </a:lnRef>
-          <a:fillRef idx="0">
-            <a:schemeClr val="accent1"/>
-          </a:fillRef>
-          <a:effectRef idx="1">
-            <a:schemeClr val="accent1"/>
-          </a:effectRef>
-          <a:fontRef idx="minor">
-            <a:schemeClr val="tx1"/>
-          </a:fontRef>
-        </p:style>
-      </p:cxnSp>
-      <p:sp>
-        <p:nvSpPr>
-          <p:cNvPr id="8" name="TextBox 7"/>
-          <p:cNvSpPr txBox="1"/>
-          <p:nvPr/>
-        </p:nvSpPr>
-        <p:spPr>
-          <a:xfrm>
-            <a:off x="996695" y="4217670"/>
-            <a:ext cx="329184" cy="164592"/>
-          </a:xfrm>
-          <a:prstGeom prst="rect">
-            <a:avLst/>
-          </a:prstGeom>
-          <a:noFill/>
-        </p:spPr>
-        <p:txBody>
-          <a:bodyPr wrap="square" anchor="t" lIns="0" rIns="0" tIns="0" bIns="0">
-            <a:spAutoFit/>
-            <a:extLst>
-              <a:ext uri="{8AF73BB6-5E31-4F0F-A399-3D98F3B95FD9}">
-                <ns17:textLayout xmlns:ns17="urn:pptxdsl:text-layout:v1" role="body"/>
-              </a:ext>
-            </a:extLst>
-          </a:bodyPr>
-          <a:lstStyle/>
-          <a:p>
-            <a:pPr algn="r">
-              <a:lnSpc>
-                <a:spcPct val="130000"/>
-              </a:lnSpc>
-            </a:pPr>
-            <a:r>
-              <a:rPr sz="780" b="0" lang="ja-JP">
-                <a:solidFill>
-                  <a:srgbClr val="666E70"/>
-                </a:solidFill>
-                <a:latin typeface="Yu Gothic"/>
-                <a:ea typeface="Yu Gothic"/>
-                <a:cs typeface="Yu Gothic"/>
-              </a:rPr>
-              <a:t>20</a:t>
-            </a:r>
-          </a:p>
-        </p:txBody>
-      </p:sp>
-      <p:cxnSp>
-        <p:nvCxnSpPr>
-          <p:cNvPr id="9" name="Connector 8"/>
-          <p:cNvCxnSpPr/>
-          <p:nvPr/>
-        </p:nvCxnSpPr>
-        <p:spPr>
-          <a:xfrm>
-            <a:off x="1417319" y="3461003"/>
-            <a:ext cx="9848089" cy="0"/>
-          </a:xfrm>
-          <a:prstGeom prst="line">
-            <a:avLst/>
-          </a:prstGeom>
-          <a:ln w="6985">
-            <a:solidFill>
-              <a:srgbClr val="D1CFC8"/>
-            </a:solidFill>
-          </a:ln>
-        </p:spPr>
-        <p:style>
-          <a:lnRef idx="2">
-            <a:schemeClr val="accent1"/>
-          </a:lnRef>
-          <a:fillRef idx="0">
-            <a:schemeClr val="accent1"/>
-          </a:fillRef>
-          <a:effectRef idx="1">
-            <a:schemeClr val="accent1"/>
-          </a:effectRef>
-          <a:fontRef idx="minor">
-            <a:schemeClr val="tx1"/>
-          </a:fontRef>
-        </p:style>
-      </p:cxnSp>
-      <p:sp>
-        <p:nvSpPr>
-          <p:cNvPr id="10" name="TextBox 9"/>
-          <p:cNvSpPr txBox="1"/>
-          <p:nvPr/>
-        </p:nvSpPr>
-        <p:spPr>
-          <a:xfrm>
-            <a:off x="996695" y="3378707"/>
-            <a:ext cx="329184" cy="164592"/>
-          </a:xfrm>
-          <a:prstGeom prst="rect">
-            <a:avLst/>
-          </a:prstGeom>
-          <a:noFill/>
-        </p:spPr>
-        <p:txBody>
-          <a:bodyPr wrap="square" anchor="t" lIns="0" rIns="0" tIns="0" bIns="0">
-            <a:spAutoFit/>
-            <a:extLst>
-              <a:ext uri="{8AF73BB6-5E31-4F0F-A399-3D98F3B95FD9}">
-                <ns22:textLayout xmlns:ns22="urn:pptxdsl:text-layout:v1" role="body"/>
-              </a:ext>
-            </a:extLst>
-          </a:bodyPr>
-          <a:lstStyle/>
-          <a:p>
-            <a:pPr algn="r">
-              <a:lnSpc>
-                <a:spcPct val="130000"/>
-              </a:lnSpc>
-            </a:pPr>
-            <a:r>
-              <a:rPr sz="780" b="0" lang="ja-JP">
-                <a:solidFill>
-                  <a:srgbClr val="666E70"/>
-                </a:solidFill>
-                <a:latin typeface="Yu Gothic"/>
-                <a:ea typeface="Yu Gothic"/>
-                <a:cs typeface="Yu Gothic"/>
-              </a:rPr>
-              <a:t>40</a:t>
-            </a:r>
-          </a:p>
-        </p:txBody>
-      </p:sp>
-      <p:cxnSp>
-        <p:nvCxnSpPr>
-          <p:cNvPr id="11" name="Connector 10"/>
-          <p:cNvCxnSpPr/>
-          <p:nvPr/>
-        </p:nvCxnSpPr>
-        <p:spPr>
-          <a:xfrm>
-            <a:off x="1417319" y="2622041"/>
-            <a:ext cx="9848089" cy="0"/>
-          </a:xfrm>
-          <a:prstGeom prst="line">
-            <a:avLst/>
-          </a:prstGeom>
-          <a:ln w="6985">
-            <a:solidFill>
-              <a:srgbClr val="D1CFC8"/>
-            </a:solidFill>
-          </a:ln>
-        </p:spPr>
-        <p:style>
-          <a:lnRef idx="2">
-            <a:schemeClr val="accent1"/>
-          </a:lnRef>
-          <a:fillRef idx="0">
-            <a:schemeClr val="accent1"/>
-          </a:fillRef>
-          <a:effectRef idx="1">
-            <a:schemeClr val="accent1"/>
-          </a:effectRef>
-          <a:fontRef idx="minor">
-            <a:schemeClr val="tx1"/>
-          </a:fontRef>
-        </p:style>
-      </p:cxnSp>
-      <p:sp>
-        <p:nvSpPr>
-          <p:cNvPr id="12" name="TextBox 11"/>
-          <p:cNvSpPr txBox="1"/>
-          <p:nvPr/>
-        </p:nvSpPr>
-        <p:spPr>
-          <a:xfrm>
-            <a:off x="996695" y="2539746"/>
-            <a:ext cx="329184" cy="164592"/>
-          </a:xfrm>
-          <a:prstGeom prst="rect">
-            <a:avLst/>
-          </a:prstGeom>
-          <a:noFill/>
-        </p:spPr>
-        <p:txBody>
-          <a:bodyPr wrap="square" anchor="t" lIns="0" rIns="0" tIns="0" bIns="0">
-            <a:spAutoFit/>
-            <a:extLst>
-              <a:ext uri="{8AF73BB6-5E31-4F0F-A399-3D98F3B95FD9}">
-                <ns27:textLayout xmlns:ns27="urn:pptxdsl:text-layout:v1" role="body"/>
-              </a:ext>
-            </a:extLst>
-          </a:bodyPr>
-          <a:lstStyle/>
-          <a:p>
-            <a:pPr algn="r">
-              <a:lnSpc>
-                <a:spcPct val="130000"/>
-              </a:lnSpc>
-            </a:pPr>
-            <a:r>
-              <a:rPr sz="780" b="0" lang="ja-JP">
-                <a:solidFill>
-                  <a:srgbClr val="666E70"/>
-                </a:solidFill>
-                <a:latin typeface="Yu Gothic"/>
-                <a:ea typeface="Yu Gothic"/>
-                <a:cs typeface="Yu Gothic"/>
-              </a:rPr>
-              <a:t>60</a:t>
-            </a:r>
-          </a:p>
-        </p:txBody>
-      </p:sp>
-      <p:cxnSp>
-        <p:nvCxnSpPr>
-          <p:cNvPr id="13" name="Connector 12"/>
-          <p:cNvCxnSpPr/>
-          <p:nvPr/>
-        </p:nvCxnSpPr>
-        <p:spPr>
-          <a:xfrm>
-            <a:off x="1417319" y="1783079"/>
-            <a:ext cx="9848089" cy="0"/>
-          </a:xfrm>
-          <a:prstGeom prst="line">
-            <a:avLst/>
-          </a:prstGeom>
-          <a:ln w="6985">
-            <a:solidFill>
-              <a:srgbClr val="D1CFC8"/>
-            </a:solidFill>
-          </a:ln>
-        </p:spPr>
-        <p:style>
-          <a:lnRef idx="2">
-            <a:schemeClr val="accent1"/>
-          </a:lnRef>
-          <a:fillRef idx="0">
-            <a:schemeClr val="accent1"/>
-          </a:fillRef>
-          <a:effectRef idx="1">
-            <a:schemeClr val="accent1"/>
-          </a:effectRef>
-          <a:fontRef idx="minor">
-            <a:schemeClr val="tx1"/>
-          </a:fontRef>
-        </p:style>
-      </p:cxnSp>
-      <p:sp>
-        <p:nvSpPr>
-          <p:cNvPr id="14" name="TextBox 13"/>
-          <p:cNvSpPr txBox="1"/>
-          <p:nvPr/>
-        </p:nvSpPr>
-        <p:spPr>
-          <a:xfrm>
-            <a:off x="996695" y="1700783"/>
-            <a:ext cx="329184" cy="164592"/>
-          </a:xfrm>
-          <a:prstGeom prst="rect">
-            <a:avLst/>
-          </a:prstGeom>
-          <a:noFill/>
-        </p:spPr>
-        <p:txBody>
-          <a:bodyPr wrap="square" anchor="t" lIns="0" rIns="0" tIns="0" bIns="0">
-            <a:spAutoFit/>
-            <a:extLst>
-              <a:ext uri="{8AF73BB6-5E31-4F0F-A399-3D98F3B95FD9}">
-                <ns32:textLayout xmlns:ns32="urn:pptxdsl:text-layout:v1" role="body"/>
-              </a:ext>
-            </a:extLst>
-          </a:bodyPr>
-          <a:lstStyle/>
-          <a:p>
-            <a:pPr algn="r">
-              <a:lnSpc>
-                <a:spcPct val="130000"/>
-              </a:lnSpc>
-            </a:pPr>
-            <a:r>
-              <a:rPr sz="780" b="0" lang="ja-JP">
-                <a:solidFill>
-                  <a:srgbClr val="666E70"/>
-                </a:solidFill>
-                <a:latin typeface="Yu Gothic"/>
-                <a:ea typeface="Yu Gothic"/>
-                <a:cs typeface="Yu Gothic"/>
-              </a:rPr>
-              <a:t>80</a:t>
-            </a:r>
-          </a:p>
-        </p:txBody>
-      </p:sp>
-      <p:cxnSp>
-        <p:nvCxnSpPr>
-          <p:cNvPr id="15" name="Connector 14"/>
-          <p:cNvCxnSpPr/>
-          <p:nvPr/>
-        </p:nvCxnSpPr>
-        <p:spPr>
-          <a:xfrm>
-            <a:off x="1417319" y="1783080"/>
-            <a:ext cx="0" cy="3355847"/>
-          </a:xfrm>
-          <a:prstGeom prst="line">
-            <a:avLst/>
-          </a:prstGeom>
-          <a:ln w="10160">
-            <a:solidFill>
-              <a:srgbClr val="666E70"/>
-            </a:solidFill>
-          </a:ln>
-        </p:spPr>
-        <p:style>
-          <a:lnRef idx="2">
-            <a:schemeClr val="accent1"/>
-          </a:lnRef>
-          <a:fillRef idx="0">
-            <a:schemeClr val="accent1"/>
-          </a:fillRef>
-          <a:effectRef idx="1">
+          <a:effectRef idx="0">
             <a:schemeClr val="accent1"/>
           </a:effectRef>
           <a:fontRef idx="minor">
@@ -4237,23 +3833,24 @@
       </p:cxnSp>
       <p:cxnSp>
         <p:nvCxnSpPr>
-          <p:cNvPr id="16" name="Connector 15"/>
+          <p:cNvPr id="6" name="chart:grid"/>
           <p:cNvCxnSpPr/>
           <p:nvPr/>
         </p:nvCxnSpPr>
         <p:spPr>
           <a:xfrm>
-            <a:off x="1417319" y="5138927"/>
-            <a:ext cx="9848089" cy="0"/>
+            <a:off x="1081278" y="4283201"/>
+            <a:ext cx="10187178" cy="0"/>
           </a:xfrm>
           <a:prstGeom prst="line">
             <a:avLst/>
           </a:prstGeom>
-          <a:ln w="10160">
+          <a:ln w="6985">
             <a:solidFill>
-              <a:srgbClr val="666E70"/>
+              <a:srgbClr val="D1CFC8"/>
             </a:solidFill>
           </a:ln>
+          <a:effectLst/>
         </p:spPr>
         <p:style>
           <a:lnRef idx="2">
@@ -4262,456 +3859,7 @@
           <a:fillRef idx="0">
             <a:schemeClr val="accent1"/>
           </a:fillRef>
-          <a:effectRef idx="1">
-            <a:schemeClr val="accent1"/>
-          </a:effectRef>
-          <a:fontRef idx="minor">
-            <a:schemeClr val="tx1"/>
-          </a:fontRef>
-        </p:style>
-      </p:cxnSp>
-      <p:sp>
-        <p:nvSpPr>
-          <p:cNvPr id="17" name="TextBox 16"/>
-          <p:cNvSpPr txBox="1"/>
-          <p:nvPr/>
-        </p:nvSpPr>
-        <p:spPr>
-          <a:xfrm>
-            <a:off x="1106423" y="5230367"/>
-            <a:ext cx="621792" cy="219456"/>
-          </a:xfrm>
-          <a:prstGeom prst="rect">
-            <a:avLst/>
-          </a:prstGeom>
-          <a:noFill/>
-        </p:spPr>
-        <p:txBody>
-          <a:bodyPr wrap="square" anchor="t" lIns="0" rIns="0" tIns="0" bIns="0">
-            <a:spAutoFit/>
-            <a:extLst>
-              <a:ext uri="{8AF73BB6-5E31-4F0F-A399-3D98F3B95FD9}">
-                <ns37:textLayout xmlns:ns37="urn:pptxdsl:text-layout:v1" role="body"/>
-              </a:ext>
-            </a:extLst>
-          </a:bodyPr>
-          <a:lstStyle/>
-          <a:p>
-            <a:pPr algn="ctr">
-              <a:lnSpc>
-                <a:spcPct val="130000"/>
-              </a:lnSpc>
-            </a:pPr>
-            <a:r>
-              <a:rPr sz="800" b="0" lang="ja-JP">
-                <a:solidFill>
-                  <a:srgbClr val="666E70"/>
-                </a:solidFill>
-                <a:latin typeface="Yu Gothic"/>
-                <a:ea typeface="Yu Gothic"/>
-                <a:cs typeface="Yu Gothic"/>
-              </a:rPr>
-              <a:t>4月</a:t>
-            </a:r>
-          </a:p>
-        </p:txBody>
-      </p:sp>
-      <p:sp>
-        <p:nvSpPr>
-          <p:cNvPr id="18" name="TextBox 17"/>
-          <p:cNvSpPr txBox="1"/>
-          <p:nvPr/>
-        </p:nvSpPr>
-        <p:spPr>
-          <a:xfrm>
-            <a:off x="2337435" y="5230367"/>
-            <a:ext cx="621792" cy="219456"/>
-          </a:xfrm>
-          <a:prstGeom prst="rect">
-            <a:avLst/>
-          </a:prstGeom>
-          <a:noFill/>
-        </p:spPr>
-        <p:txBody>
-          <a:bodyPr wrap="square" anchor="t" lIns="0" rIns="0" tIns="0" bIns="0">
-            <a:spAutoFit/>
-            <a:extLst>
-              <a:ext uri="{8AF73BB6-5E31-4F0F-A399-3D98F3B95FD9}">
-                <ns42:textLayout xmlns:ns42="urn:pptxdsl:text-layout:v1" role="body"/>
-              </a:ext>
-            </a:extLst>
-          </a:bodyPr>
-          <a:lstStyle/>
-          <a:p>
-            <a:pPr algn="ctr">
-              <a:lnSpc>
-                <a:spcPct val="130000"/>
-              </a:lnSpc>
-            </a:pPr>
-            <a:r>
-              <a:rPr sz="800" b="0" lang="ja-JP">
-                <a:solidFill>
-                  <a:srgbClr val="666E70"/>
-                </a:solidFill>
-                <a:latin typeface="Yu Gothic"/>
-                <a:ea typeface="Yu Gothic"/>
-                <a:cs typeface="Yu Gothic"/>
-              </a:rPr>
-              <a:t>5月</a:t>
-            </a:r>
-          </a:p>
-        </p:txBody>
-      </p:sp>
-      <p:sp>
-        <p:nvSpPr>
-          <p:cNvPr id="19" name="TextBox 18"/>
-          <p:cNvSpPr txBox="1"/>
-          <p:nvPr/>
-        </p:nvSpPr>
-        <p:spPr>
-          <a:xfrm>
-            <a:off x="3568446" y="5230367"/>
-            <a:ext cx="621792" cy="219456"/>
-          </a:xfrm>
-          <a:prstGeom prst="rect">
-            <a:avLst/>
-          </a:prstGeom>
-          <a:noFill/>
-        </p:spPr>
-        <p:txBody>
-          <a:bodyPr wrap="square" anchor="t" lIns="0" rIns="0" tIns="0" bIns="0">
-            <a:spAutoFit/>
-            <a:extLst>
-              <a:ext uri="{8AF73BB6-5E31-4F0F-A399-3D98F3B95FD9}">
-                <ns47:textLayout xmlns:ns47="urn:pptxdsl:text-layout:v1" role="body"/>
-              </a:ext>
-            </a:extLst>
-          </a:bodyPr>
-          <a:lstStyle/>
-          <a:p>
-            <a:pPr algn="ctr">
-              <a:lnSpc>
-                <a:spcPct val="130000"/>
-              </a:lnSpc>
-            </a:pPr>
-            <a:r>
-              <a:rPr sz="800" b="0" lang="ja-JP">
-                <a:solidFill>
-                  <a:srgbClr val="666E70"/>
-                </a:solidFill>
-                <a:latin typeface="Yu Gothic"/>
-                <a:ea typeface="Yu Gothic"/>
-                <a:cs typeface="Yu Gothic"/>
-              </a:rPr>
-              <a:t>6月</a:t>
-            </a:r>
-          </a:p>
-        </p:txBody>
-      </p:sp>
-      <p:sp>
-        <p:nvSpPr>
-          <p:cNvPr id="20" name="TextBox 19"/>
-          <p:cNvSpPr txBox="1"/>
-          <p:nvPr/>
-        </p:nvSpPr>
-        <p:spPr>
-          <a:xfrm>
-            <a:off x="4799457" y="5230367"/>
-            <a:ext cx="621792" cy="219456"/>
-          </a:xfrm>
-          <a:prstGeom prst="rect">
-            <a:avLst/>
-          </a:prstGeom>
-          <a:noFill/>
-        </p:spPr>
-        <p:txBody>
-          <a:bodyPr wrap="square" anchor="t" lIns="0" rIns="0" tIns="0" bIns="0">
-            <a:spAutoFit/>
-            <a:extLst>
-              <a:ext uri="{8AF73BB6-5E31-4F0F-A399-3D98F3B95FD9}">
-                <ns52:textLayout xmlns:ns52="urn:pptxdsl:text-layout:v1" role="body"/>
-              </a:ext>
-            </a:extLst>
-          </a:bodyPr>
-          <a:lstStyle/>
-          <a:p>
-            <a:pPr algn="ctr">
-              <a:lnSpc>
-                <a:spcPct val="130000"/>
-              </a:lnSpc>
-            </a:pPr>
-            <a:r>
-              <a:rPr sz="800" b="0" lang="ja-JP">
-                <a:solidFill>
-                  <a:srgbClr val="666E70"/>
-                </a:solidFill>
-                <a:latin typeface="Yu Gothic"/>
-                <a:ea typeface="Yu Gothic"/>
-                <a:cs typeface="Yu Gothic"/>
-              </a:rPr>
-              <a:t>7月</a:t>
-            </a:r>
-          </a:p>
-        </p:txBody>
-      </p:sp>
-      <p:sp>
-        <p:nvSpPr>
-          <p:cNvPr id="21" name="TextBox 20"/>
-          <p:cNvSpPr txBox="1"/>
-          <p:nvPr/>
-        </p:nvSpPr>
-        <p:spPr>
-          <a:xfrm>
-            <a:off x="6030468" y="5230367"/>
-            <a:ext cx="621792" cy="219456"/>
-          </a:xfrm>
-          <a:prstGeom prst="rect">
-            <a:avLst/>
-          </a:prstGeom>
-          <a:noFill/>
-        </p:spPr>
-        <p:txBody>
-          <a:bodyPr wrap="square" anchor="t" lIns="0" rIns="0" tIns="0" bIns="0">
-            <a:spAutoFit/>
-            <a:extLst>
-              <a:ext uri="{8AF73BB6-5E31-4F0F-A399-3D98F3B95FD9}">
-                <ns57:textLayout xmlns:ns57="urn:pptxdsl:text-layout:v1" role="body"/>
-              </a:ext>
-            </a:extLst>
-          </a:bodyPr>
-          <a:lstStyle/>
-          <a:p>
-            <a:pPr algn="ctr">
-              <a:lnSpc>
-                <a:spcPct val="130000"/>
-              </a:lnSpc>
-            </a:pPr>
-            <a:r>
-              <a:rPr sz="800" b="0" lang="ja-JP">
-                <a:solidFill>
-                  <a:srgbClr val="666E70"/>
-                </a:solidFill>
-                <a:latin typeface="Yu Gothic"/>
-                <a:ea typeface="Yu Gothic"/>
-                <a:cs typeface="Yu Gothic"/>
-              </a:rPr>
-              <a:t>8月</a:t>
-            </a:r>
-          </a:p>
-        </p:txBody>
-      </p:sp>
-      <p:sp>
-        <p:nvSpPr>
-          <p:cNvPr id="22" name="TextBox 21"/>
-          <p:cNvSpPr txBox="1"/>
-          <p:nvPr/>
-        </p:nvSpPr>
-        <p:spPr>
-          <a:xfrm>
-            <a:off x="7261479" y="5230367"/>
-            <a:ext cx="621792" cy="219456"/>
-          </a:xfrm>
-          <a:prstGeom prst="rect">
-            <a:avLst/>
-          </a:prstGeom>
-          <a:noFill/>
-        </p:spPr>
-        <p:txBody>
-          <a:bodyPr wrap="square" anchor="t" lIns="0" rIns="0" tIns="0" bIns="0">
-            <a:spAutoFit/>
-            <a:extLst>
-              <a:ext uri="{8AF73BB6-5E31-4F0F-A399-3D98F3B95FD9}">
-                <ns62:textLayout xmlns:ns62="urn:pptxdsl:text-layout:v1" role="body"/>
-              </a:ext>
-            </a:extLst>
-          </a:bodyPr>
-          <a:lstStyle/>
-          <a:p>
-            <a:pPr algn="ctr">
-              <a:lnSpc>
-                <a:spcPct val="130000"/>
-              </a:lnSpc>
-            </a:pPr>
-            <a:r>
-              <a:rPr sz="800" b="0" lang="ja-JP">
-                <a:solidFill>
-                  <a:srgbClr val="666E70"/>
-                </a:solidFill>
-                <a:latin typeface="Yu Gothic"/>
-                <a:ea typeface="Yu Gothic"/>
-                <a:cs typeface="Yu Gothic"/>
-              </a:rPr>
-              <a:t>9月</a:t>
-            </a:r>
-          </a:p>
-        </p:txBody>
-      </p:sp>
-      <p:sp>
-        <p:nvSpPr>
-          <p:cNvPr id="23" name="TextBox 22"/>
-          <p:cNvSpPr txBox="1"/>
-          <p:nvPr/>
-        </p:nvSpPr>
-        <p:spPr>
-          <a:xfrm>
-            <a:off x="8492490" y="5230367"/>
-            <a:ext cx="621792" cy="219456"/>
-          </a:xfrm>
-          <a:prstGeom prst="rect">
-            <a:avLst/>
-          </a:prstGeom>
-          <a:noFill/>
-        </p:spPr>
-        <p:txBody>
-          <a:bodyPr wrap="square" anchor="t" lIns="0" rIns="0" tIns="0" bIns="0">
-            <a:spAutoFit/>
-            <a:extLst>
-              <a:ext uri="{8AF73BB6-5E31-4F0F-A399-3D98F3B95FD9}">
-                <ns67:textLayout xmlns:ns67="urn:pptxdsl:text-layout:v1" role="body"/>
-              </a:ext>
-            </a:extLst>
-          </a:bodyPr>
-          <a:lstStyle/>
-          <a:p>
-            <a:pPr algn="ctr">
-              <a:lnSpc>
-                <a:spcPct val="130000"/>
-              </a:lnSpc>
-            </a:pPr>
-            <a:r>
-              <a:rPr sz="800" b="0" lang="ja-JP">
-                <a:solidFill>
-                  <a:srgbClr val="666E70"/>
-                </a:solidFill>
-                <a:latin typeface="Yu Gothic"/>
-                <a:ea typeface="Yu Gothic"/>
-                <a:cs typeface="Yu Gothic"/>
-              </a:rPr>
-              <a:t>10月</a:t>
-            </a:r>
-          </a:p>
-        </p:txBody>
-      </p:sp>
-      <p:sp>
-        <p:nvSpPr>
-          <p:cNvPr id="24" name="TextBox 23"/>
-          <p:cNvSpPr txBox="1"/>
-          <p:nvPr/>
-        </p:nvSpPr>
-        <p:spPr>
-          <a:xfrm>
-            <a:off x="9723501" y="5230367"/>
-            <a:ext cx="621792" cy="219456"/>
-          </a:xfrm>
-          <a:prstGeom prst="rect">
-            <a:avLst/>
-          </a:prstGeom>
-          <a:noFill/>
-        </p:spPr>
-        <p:txBody>
-          <a:bodyPr wrap="square" anchor="t" lIns="0" rIns="0" tIns="0" bIns="0">
-            <a:spAutoFit/>
-            <a:extLst>
-              <a:ext uri="{8AF73BB6-5E31-4F0F-A399-3D98F3B95FD9}">
-                <ns72:textLayout xmlns:ns72="urn:pptxdsl:text-layout:v1" role="body"/>
-              </a:ext>
-            </a:extLst>
-          </a:bodyPr>
-          <a:lstStyle/>
-          <a:p>
-            <a:pPr algn="ctr">
-              <a:lnSpc>
-                <a:spcPct val="130000"/>
-              </a:lnSpc>
-            </a:pPr>
-            <a:r>
-              <a:rPr sz="800" b="0" lang="ja-JP">
-                <a:solidFill>
-                  <a:srgbClr val="666E70"/>
-                </a:solidFill>
-                <a:latin typeface="Yu Gothic"/>
-                <a:ea typeface="Yu Gothic"/>
-                <a:cs typeface="Yu Gothic"/>
-              </a:rPr>
-              <a:t>11月</a:t>
-            </a:r>
-          </a:p>
-        </p:txBody>
-      </p:sp>
-      <p:sp>
-        <p:nvSpPr>
-          <p:cNvPr id="25" name="TextBox 24"/>
-          <p:cNvSpPr txBox="1"/>
-          <p:nvPr/>
-        </p:nvSpPr>
-        <p:spPr>
-          <a:xfrm>
-            <a:off x="10954512" y="5230367"/>
-            <a:ext cx="621792" cy="219456"/>
-          </a:xfrm>
-          <a:prstGeom prst="rect">
-            <a:avLst/>
-          </a:prstGeom>
-          <a:noFill/>
-        </p:spPr>
-        <p:txBody>
-          <a:bodyPr wrap="square" anchor="t" lIns="0" rIns="0" tIns="0" bIns="0">
-            <a:spAutoFit/>
-            <a:extLst>
-              <a:ext uri="{8AF73BB6-5E31-4F0F-A399-3D98F3B95FD9}">
-                <ns77:textLayout xmlns:ns77="urn:pptxdsl:text-layout:v1" role="body"/>
-              </a:ext>
-            </a:extLst>
-          </a:bodyPr>
-          <a:lstStyle/>
-          <a:p>
-            <a:pPr algn="ctr">
-              <a:lnSpc>
-                <a:spcPct val="130000"/>
-              </a:lnSpc>
-            </a:pPr>
-            <a:r>
-              <a:rPr sz="800" b="0" lang="ja-JP">
-                <a:solidFill>
-                  <a:srgbClr val="666E70"/>
-                </a:solidFill>
-                <a:latin typeface="Yu Gothic"/>
-                <a:ea typeface="Yu Gothic"/>
-                <a:cs typeface="Yu Gothic"/>
-              </a:rPr>
-              <a:t>12月</a:t>
-            </a:r>
-          </a:p>
-        </p:txBody>
-      </p:sp>
-      <p:cxnSp>
-        <p:nvCxnSpPr>
-          <p:cNvPr id="26" name="Connector 25"/>
-          <p:cNvCxnSpPr/>
-          <p:nvPr/>
-        </p:nvCxnSpPr>
-        <p:spPr>
-          <a:xfrm flipV="1">
-            <a:off x="1417319" y="4383862"/>
-            <a:ext cx="1231012" cy="251688"/>
-          </a:xfrm>
-          <a:prstGeom prst="line">
-            <a:avLst/>
-          </a:prstGeom>
-          <a:ln w="22860">
-            <a:solidFill>
-              <a:srgbClr val="0D7870"/>
-            </a:solidFill>
-          </a:ln>
-        </p:spPr>
-        <p:style>
-          <a:lnRef idx="2">
-            <a:schemeClr val="accent1"/>
-          </a:lnRef>
-          <a:fillRef idx="0">
-            <a:schemeClr val="accent1"/>
-          </a:fillRef>
-          <a:effectRef idx="1">
+          <a:effectRef idx="0">
             <a:schemeClr val="accent1"/>
           </a:effectRef>
           <a:fontRef idx="minor">
@@ -4721,23 +3869,24 @@
       </p:cxnSp>
       <p:cxnSp>
         <p:nvCxnSpPr>
-          <p:cNvPr id="27" name="Connector 26"/>
+          <p:cNvPr id="7" name="chart:grid"/>
           <p:cNvCxnSpPr/>
           <p:nvPr/>
         </p:nvCxnSpPr>
         <p:spPr>
-          <a:xfrm flipV="1">
-            <a:off x="2648331" y="4090225"/>
-            <a:ext cx="1231010" cy="293637"/>
+          <a:xfrm>
+            <a:off x="1081278" y="3518915"/>
+            <a:ext cx="10187178" cy="0"/>
           </a:xfrm>
           <a:prstGeom prst="line">
             <a:avLst/>
           </a:prstGeom>
-          <a:ln w="22860">
+          <a:ln w="6985">
             <a:solidFill>
-              <a:srgbClr val="0D7870"/>
+              <a:srgbClr val="D1CFC8"/>
             </a:solidFill>
           </a:ln>
+          <a:effectLst/>
         </p:spPr>
         <p:style>
           <a:lnRef idx="2">
@@ -4746,7 +3895,7 @@
           <a:fillRef idx="0">
             <a:schemeClr val="accent1"/>
           </a:fillRef>
-          <a:effectRef idx="1">
+          <a:effectRef idx="0">
             <a:schemeClr val="accent1"/>
           </a:effectRef>
           <a:fontRef idx="minor">
@@ -4756,23 +3905,24 @@
       </p:cxnSp>
       <p:cxnSp>
         <p:nvCxnSpPr>
-          <p:cNvPr id="28" name="Connector 27"/>
+          <p:cNvPr id="8" name="chart:grid"/>
           <p:cNvCxnSpPr/>
           <p:nvPr/>
         </p:nvCxnSpPr>
         <p:spPr>
-          <a:xfrm flipV="1">
-            <a:off x="3879341" y="3838536"/>
-            <a:ext cx="1231012" cy="251689"/>
+          <a:xfrm>
+            <a:off x="1081278" y="2754629"/>
+            <a:ext cx="10187178" cy="0"/>
           </a:xfrm>
           <a:prstGeom prst="line">
             <a:avLst/>
           </a:prstGeom>
-          <a:ln w="22860">
+          <a:ln w="6985">
             <a:solidFill>
-              <a:srgbClr val="0D7870"/>
+              <a:srgbClr val="D1CFC8"/>
             </a:solidFill>
           </a:ln>
+          <a:effectLst/>
         </p:spPr>
         <p:style>
           <a:lnRef idx="2">
@@ -4781,7 +3931,7 @@
           <a:fillRef idx="0">
             <a:schemeClr val="accent1"/>
           </a:fillRef>
-          <a:effectRef idx="1">
+          <a:effectRef idx="0">
             <a:schemeClr val="accent1"/>
           </a:effectRef>
           <a:fontRef idx="minor">
@@ -4791,23 +3941,24 @@
       </p:cxnSp>
       <p:cxnSp>
         <p:nvCxnSpPr>
-          <p:cNvPr id="29" name="Connector 28"/>
+          <p:cNvPr id="9" name="chart:grid"/>
           <p:cNvCxnSpPr/>
           <p:nvPr/>
         </p:nvCxnSpPr>
         <p:spPr>
-          <a:xfrm flipV="1">
-            <a:off x="5110353" y="3293211"/>
-            <a:ext cx="1231011" cy="545325"/>
+          <a:xfrm>
+            <a:off x="1081278" y="1990344"/>
+            <a:ext cx="10187178" cy="0"/>
           </a:xfrm>
           <a:prstGeom prst="line">
             <a:avLst/>
           </a:prstGeom>
-          <a:ln w="22860">
+          <a:ln w="6985">
             <a:solidFill>
-              <a:srgbClr val="0D7870"/>
+              <a:srgbClr val="D1CFC8"/>
             </a:solidFill>
           </a:ln>
+          <a:effectLst/>
         </p:spPr>
         <p:style>
           <a:lnRef idx="2">
@@ -4816,7 +3967,7 @@
           <a:fillRef idx="0">
             <a:schemeClr val="accent1"/>
           </a:fillRef>
-          <a:effectRef idx="1">
+          <a:effectRef idx="0">
             <a:schemeClr val="accent1"/>
           </a:effectRef>
           <a:fontRef idx="minor">
@@ -4826,23 +3977,24 @@
       </p:cxnSp>
       <p:cxnSp>
         <p:nvCxnSpPr>
-          <p:cNvPr id="30" name="Connector 29"/>
+          <p:cNvPr id="10" name="chart:zero-axis"/>
           <p:cNvCxnSpPr/>
           <p:nvPr/>
         </p:nvCxnSpPr>
         <p:spPr>
-          <a:xfrm flipV="1">
-            <a:off x="6341364" y="2957626"/>
-            <a:ext cx="1231011" cy="335585"/>
+          <a:xfrm>
+            <a:off x="1081278" y="5047488"/>
+            <a:ext cx="10187178" cy="0"/>
           </a:xfrm>
           <a:prstGeom prst="line">
             <a:avLst/>
           </a:prstGeom>
-          <a:ln w="22860">
+          <a:ln w="11430">
             <a:solidFill>
-              <a:srgbClr val="0D7870"/>
+              <a:srgbClr val="666E70"/>
             </a:solidFill>
           </a:ln>
+          <a:effectLst/>
         </p:spPr>
         <p:style>
           <a:lnRef idx="2">
@@ -4851,7 +4003,7 @@
           <a:fillRef idx="0">
             <a:schemeClr val="accent1"/>
           </a:fillRef>
-          <a:effectRef idx="1">
+          <a:effectRef idx="0">
             <a:schemeClr val="accent1"/>
           </a:effectRef>
           <a:fontRef idx="minor">
@@ -4861,14 +4013,14 @@
       </p:cxnSp>
       <p:cxnSp>
         <p:nvCxnSpPr>
-          <p:cNvPr id="31" name="Connector 30"/>
+          <p:cNvPr id="11" name="chart:data-line"/>
           <p:cNvCxnSpPr/>
           <p:nvPr/>
         </p:nvCxnSpPr>
         <p:spPr>
           <a:xfrm flipV="1">
-            <a:off x="7572375" y="2580093"/>
-            <a:ext cx="1231011" cy="377533"/>
+            <a:off x="1647232" y="4359630"/>
+            <a:ext cx="1131909" cy="229286"/>
           </a:xfrm>
           <a:prstGeom prst="line">
             <a:avLst/>
@@ -4878,6 +4030,7 @@
               <a:srgbClr val="0D7870"/>
             </a:solidFill>
           </a:ln>
+          <a:effectLst/>
         </p:spPr>
         <p:style>
           <a:lnRef idx="2">
@@ -4886,7 +4039,7 @@
           <a:fillRef idx="0">
             <a:schemeClr val="accent1"/>
           </a:fillRef>
-          <a:effectRef idx="1">
+          <a:effectRef idx="0">
             <a:schemeClr val="accent1"/>
           </a:effectRef>
           <a:fontRef idx="minor">
@@ -4896,14 +4049,14 @@
       </p:cxnSp>
       <p:cxnSp>
         <p:nvCxnSpPr>
-          <p:cNvPr id="32" name="Connector 31"/>
+          <p:cNvPr id="12" name="chart:data-line"/>
           <p:cNvCxnSpPr/>
           <p:nvPr/>
         </p:nvCxnSpPr>
         <p:spPr>
           <a:xfrm flipV="1">
-            <a:off x="8803386" y="2328405"/>
-            <a:ext cx="1231011" cy="251688"/>
+            <a:off x="2779141" y="4092130"/>
+            <a:ext cx="1131908" cy="267500"/>
           </a:xfrm>
           <a:prstGeom prst="line">
             <a:avLst/>
@@ -4913,6 +4066,7 @@
               <a:srgbClr val="0D7870"/>
             </a:solidFill>
           </a:ln>
+          <a:effectLst/>
         </p:spPr>
         <p:style>
           <a:lnRef idx="2">
@@ -4921,7 +4075,7 @@
           <a:fillRef idx="0">
             <a:schemeClr val="accent1"/>
           </a:fillRef>
-          <a:effectRef idx="1">
+          <a:effectRef idx="0">
             <a:schemeClr val="accent1"/>
           </a:effectRef>
           <a:fontRef idx="minor">
@@ -4931,14 +4085,14 @@
       </p:cxnSp>
       <p:cxnSp>
         <p:nvCxnSpPr>
-          <p:cNvPr id="33" name="Connector 32"/>
+          <p:cNvPr id="13" name="chart:data-line"/>
           <p:cNvCxnSpPr/>
           <p:nvPr/>
         </p:nvCxnSpPr>
         <p:spPr>
           <a:xfrm flipV="1">
-            <a:off x="10034397" y="2034768"/>
-            <a:ext cx="1231011" cy="293637"/>
+            <a:off x="3911049" y="3862844"/>
+            <a:ext cx="1131909" cy="229286"/>
           </a:xfrm>
           <a:prstGeom prst="line">
             <a:avLst/>
@@ -4948,6 +4102,7 @@
               <a:srgbClr val="0D7870"/>
             </a:solidFill>
           </a:ln>
+          <a:effectLst/>
         </p:spPr>
         <p:style>
           <a:lnRef idx="2">
@@ -4956,7 +4111,7 @@
           <a:fillRef idx="0">
             <a:schemeClr val="accent1"/>
           </a:fillRef>
-          <a:effectRef idx="1">
+          <a:effectRef idx="0">
             <a:schemeClr val="accent1"/>
           </a:effectRef>
           <a:fontRef idx="minor">
@@ -4964,15 +4119,571 @@
           </a:fontRef>
         </p:style>
       </p:cxnSp>
-      <p:sp>
-        <p:nvSpPr>
-          <p:cNvPr id="34" name="Oval 33"/>
+      <p:cxnSp>
+        <p:nvCxnSpPr>
+          <p:cNvPr id="14" name="chart:data-line"/>
+          <p:cNvCxnSpPr/>
+          <p:nvPr/>
+        </p:nvCxnSpPr>
+        <p:spPr>
+          <a:xfrm flipV="1">
+            <a:off x="5042958" y="3366058"/>
+            <a:ext cx="1131909" cy="496786"/>
+          </a:xfrm>
+          <a:prstGeom prst="line">
+            <a:avLst/>
+          </a:prstGeom>
+          <a:ln w="22860">
+            <a:solidFill>
+              <a:srgbClr val="0D7870"/>
+            </a:solidFill>
+          </a:ln>
+          <a:effectLst/>
+        </p:spPr>
+        <p:style>
+          <a:lnRef idx="2">
+            <a:schemeClr val="accent1"/>
+          </a:lnRef>
+          <a:fillRef idx="0">
+            <a:schemeClr val="accent1"/>
+          </a:fillRef>
+          <a:effectRef idx="0">
+            <a:schemeClr val="accent1"/>
+          </a:effectRef>
+          <a:fontRef idx="minor">
+            <a:schemeClr val="tx1"/>
+          </a:fontRef>
+        </p:style>
+      </p:cxnSp>
+      <p:cxnSp>
+        <p:nvCxnSpPr>
+          <p:cNvPr id="15" name="chart:data-line"/>
+          <p:cNvCxnSpPr/>
+          <p:nvPr/>
+        </p:nvCxnSpPr>
+        <p:spPr>
+          <a:xfrm flipV="1">
+            <a:off x="6174867" y="3060344"/>
+            <a:ext cx="1131908" cy="305714"/>
+          </a:xfrm>
+          <a:prstGeom prst="line">
+            <a:avLst/>
+          </a:prstGeom>
+          <a:ln w="22860">
+            <a:solidFill>
+              <a:srgbClr val="0D7870"/>
+            </a:solidFill>
+          </a:ln>
+          <a:effectLst/>
+        </p:spPr>
+        <p:style>
+          <a:lnRef idx="2">
+            <a:schemeClr val="accent1"/>
+          </a:lnRef>
+          <a:fillRef idx="0">
+            <a:schemeClr val="accent1"/>
+          </a:fillRef>
+          <a:effectRef idx="0">
+            <a:schemeClr val="accent1"/>
+          </a:effectRef>
+          <a:fontRef idx="minor">
+            <a:schemeClr val="tx1"/>
+          </a:fontRef>
+        </p:style>
+      </p:cxnSp>
+      <p:cxnSp>
+        <p:nvCxnSpPr>
+          <p:cNvPr id="16" name="chart:data-line"/>
+          <p:cNvCxnSpPr/>
+          <p:nvPr/>
+        </p:nvCxnSpPr>
+        <p:spPr>
+          <a:xfrm flipV="1">
+            <a:off x="7306775" y="2716415"/>
+            <a:ext cx="1131909" cy="343929"/>
+          </a:xfrm>
+          <a:prstGeom prst="line">
+            <a:avLst/>
+          </a:prstGeom>
+          <a:ln w="22860">
+            <a:solidFill>
+              <a:srgbClr val="0D7870"/>
+            </a:solidFill>
+          </a:ln>
+          <a:effectLst/>
+        </p:spPr>
+        <p:style>
+          <a:lnRef idx="2">
+            <a:schemeClr val="accent1"/>
+          </a:lnRef>
+          <a:fillRef idx="0">
+            <a:schemeClr val="accent1"/>
+          </a:fillRef>
+          <a:effectRef idx="0">
+            <a:schemeClr val="accent1"/>
+          </a:effectRef>
+          <a:fontRef idx="minor">
+            <a:schemeClr val="tx1"/>
+          </a:fontRef>
+        </p:style>
+      </p:cxnSp>
+      <p:cxnSp>
+        <p:nvCxnSpPr>
+          <p:cNvPr id="17" name="chart:data-line"/>
+          <p:cNvCxnSpPr/>
+          <p:nvPr/>
+        </p:nvCxnSpPr>
+        <p:spPr>
+          <a:xfrm flipV="1">
+            <a:off x="8438684" y="2487129"/>
+            <a:ext cx="1131909" cy="229286"/>
+          </a:xfrm>
+          <a:prstGeom prst="line">
+            <a:avLst/>
+          </a:prstGeom>
+          <a:ln w="22860">
+            <a:solidFill>
+              <a:srgbClr val="0D7870"/>
+            </a:solidFill>
+          </a:ln>
+          <a:effectLst/>
+        </p:spPr>
+        <p:style>
+          <a:lnRef idx="2">
+            <a:schemeClr val="accent1"/>
+          </a:lnRef>
+          <a:fillRef idx="0">
+            <a:schemeClr val="accent1"/>
+          </a:fillRef>
+          <a:effectRef idx="0">
+            <a:schemeClr val="accent1"/>
+          </a:effectRef>
+          <a:fontRef idx="minor">
+            <a:schemeClr val="tx1"/>
+          </a:fontRef>
+        </p:style>
+      </p:cxnSp>
+      <p:cxnSp>
+        <p:nvCxnSpPr>
+          <p:cNvPr id="18" name="chart:data-line"/>
+          <p:cNvCxnSpPr/>
+          <p:nvPr/>
+        </p:nvCxnSpPr>
+        <p:spPr>
+          <a:xfrm flipV="1">
+            <a:off x="9570593" y="2219629"/>
+            <a:ext cx="1131908" cy="267500"/>
+          </a:xfrm>
+          <a:prstGeom prst="line">
+            <a:avLst/>
+          </a:prstGeom>
+          <a:ln w="22860">
+            <a:solidFill>
+              <a:srgbClr val="0D7870"/>
+            </a:solidFill>
+          </a:ln>
+          <a:effectLst/>
+        </p:spPr>
+        <p:style>
+          <a:lnRef idx="2">
+            <a:schemeClr val="accent1"/>
+          </a:lnRef>
+          <a:fillRef idx="0">
+            <a:schemeClr val="accent1"/>
+          </a:fillRef>
+          <a:effectRef idx="0">
+            <a:schemeClr val="accent1"/>
+          </a:effectRef>
+          <a:fontRef idx="minor">
+            <a:schemeClr val="tx1"/>
+          </a:fontRef>
+        </p:style>
+      </p:cxnSp>
+      <p:cxnSp>
+        <p:nvCxnSpPr>
+          <p:cNvPr id="19" name="chart:data-line"/>
+          <p:cNvCxnSpPr/>
+          <p:nvPr/>
+        </p:nvCxnSpPr>
+        <p:spPr>
+          <a:xfrm flipV="1">
+            <a:off x="1647232" y="4092130"/>
+            <a:ext cx="1131909" cy="191071"/>
+          </a:xfrm>
+          <a:prstGeom prst="line">
+            <a:avLst/>
+          </a:prstGeom>
+          <a:ln w="22860">
+            <a:solidFill>
+              <a:srgbClr val="182C43"/>
+            </a:solidFill>
+          </a:ln>
+          <a:effectLst/>
+        </p:spPr>
+        <p:style>
+          <a:lnRef idx="2">
+            <a:schemeClr val="accent1"/>
+          </a:lnRef>
+          <a:fillRef idx="0">
+            <a:schemeClr val="accent1"/>
+          </a:fillRef>
+          <a:effectRef idx="0">
+            <a:schemeClr val="accent1"/>
+          </a:effectRef>
+          <a:fontRef idx="minor">
+            <a:schemeClr val="tx1"/>
+          </a:fontRef>
+        </p:style>
+      </p:cxnSp>
+      <p:cxnSp>
+        <p:nvCxnSpPr>
+          <p:cNvPr id="20" name="chart:data-line"/>
+          <p:cNvCxnSpPr/>
+          <p:nvPr/>
+        </p:nvCxnSpPr>
+        <p:spPr>
+          <a:xfrm flipV="1">
+            <a:off x="2779141" y="3901058"/>
+            <a:ext cx="1131908" cy="191072"/>
+          </a:xfrm>
+          <a:prstGeom prst="line">
+            <a:avLst/>
+          </a:prstGeom>
+          <a:ln w="22860">
+            <a:solidFill>
+              <a:srgbClr val="182C43"/>
+            </a:solidFill>
+          </a:ln>
+          <a:effectLst/>
+        </p:spPr>
+        <p:style>
+          <a:lnRef idx="2">
+            <a:schemeClr val="accent1"/>
+          </a:lnRef>
+          <a:fillRef idx="0">
+            <a:schemeClr val="accent1"/>
+          </a:fillRef>
+          <a:effectRef idx="0">
+            <a:schemeClr val="accent1"/>
+          </a:effectRef>
+          <a:fontRef idx="minor">
+            <a:schemeClr val="tx1"/>
+          </a:fontRef>
+        </p:style>
+      </p:cxnSp>
+      <p:cxnSp>
+        <p:nvCxnSpPr>
+          <p:cNvPr id="21" name="chart:data-line"/>
+          <p:cNvCxnSpPr/>
+          <p:nvPr/>
+        </p:nvCxnSpPr>
+        <p:spPr>
+          <a:xfrm flipV="1">
+            <a:off x="3911049" y="3709987"/>
+            <a:ext cx="1131909" cy="191071"/>
+          </a:xfrm>
+          <a:prstGeom prst="line">
+            <a:avLst/>
+          </a:prstGeom>
+          <a:ln w="22860">
+            <a:solidFill>
+              <a:srgbClr val="182C43"/>
+            </a:solidFill>
+          </a:ln>
+          <a:effectLst/>
+        </p:spPr>
+        <p:style>
+          <a:lnRef idx="2">
+            <a:schemeClr val="accent1"/>
+          </a:lnRef>
+          <a:fillRef idx="0">
+            <a:schemeClr val="accent1"/>
+          </a:fillRef>
+          <a:effectRef idx="0">
+            <a:schemeClr val="accent1"/>
+          </a:effectRef>
+          <a:fontRef idx="minor">
+            <a:schemeClr val="tx1"/>
+          </a:fontRef>
+        </p:style>
+      </p:cxnSp>
+      <p:cxnSp>
+        <p:nvCxnSpPr>
+          <p:cNvPr id="22" name="chart:data-line"/>
+          <p:cNvCxnSpPr/>
+          <p:nvPr/>
+        </p:nvCxnSpPr>
+        <p:spPr>
+          <a:xfrm flipV="1">
+            <a:off x="5042958" y="3518915"/>
+            <a:ext cx="1131909" cy="191072"/>
+          </a:xfrm>
+          <a:prstGeom prst="line">
+            <a:avLst/>
+          </a:prstGeom>
+          <a:ln w="22860">
+            <a:solidFill>
+              <a:srgbClr val="182C43"/>
+            </a:solidFill>
+          </a:ln>
+          <a:effectLst/>
+        </p:spPr>
+        <p:style>
+          <a:lnRef idx="2">
+            <a:schemeClr val="accent1"/>
+          </a:lnRef>
+          <a:fillRef idx="0">
+            <a:schemeClr val="accent1"/>
+          </a:fillRef>
+          <a:effectRef idx="0">
+            <a:schemeClr val="accent1"/>
+          </a:effectRef>
+          <a:fontRef idx="minor">
+            <a:schemeClr val="tx1"/>
+          </a:fontRef>
+        </p:style>
+      </p:cxnSp>
+      <p:cxnSp>
+        <p:nvCxnSpPr>
+          <p:cNvPr id="23" name="chart:data-line"/>
+          <p:cNvCxnSpPr/>
+          <p:nvPr/>
+        </p:nvCxnSpPr>
+        <p:spPr>
+          <a:xfrm flipV="1">
+            <a:off x="6174867" y="3136773"/>
+            <a:ext cx="1131908" cy="382142"/>
+          </a:xfrm>
+          <a:prstGeom prst="line">
+            <a:avLst/>
+          </a:prstGeom>
+          <a:ln w="22860">
+            <a:solidFill>
+              <a:srgbClr val="182C43"/>
+            </a:solidFill>
+          </a:ln>
+          <a:effectLst/>
+        </p:spPr>
+        <p:style>
+          <a:lnRef idx="2">
+            <a:schemeClr val="accent1"/>
+          </a:lnRef>
+          <a:fillRef idx="0">
+            <a:schemeClr val="accent1"/>
+          </a:fillRef>
+          <a:effectRef idx="0">
+            <a:schemeClr val="accent1"/>
+          </a:effectRef>
+          <a:fontRef idx="minor">
+            <a:schemeClr val="tx1"/>
+          </a:fontRef>
+        </p:style>
+      </p:cxnSp>
+      <p:cxnSp>
+        <p:nvCxnSpPr>
+          <p:cNvPr id="24" name="chart:data-line"/>
+          <p:cNvCxnSpPr/>
+          <p:nvPr/>
+        </p:nvCxnSpPr>
+        <p:spPr>
+          <a:xfrm flipV="1">
+            <a:off x="7306775" y="2754629"/>
+            <a:ext cx="1131909" cy="382144"/>
+          </a:xfrm>
+          <a:prstGeom prst="line">
+            <a:avLst/>
+          </a:prstGeom>
+          <a:ln w="22860">
+            <a:solidFill>
+              <a:srgbClr val="182C43"/>
+            </a:solidFill>
+          </a:ln>
+          <a:effectLst/>
+        </p:spPr>
+        <p:style>
+          <a:lnRef idx="2">
+            <a:schemeClr val="accent1"/>
+          </a:lnRef>
+          <a:fillRef idx="0">
+            <a:schemeClr val="accent1"/>
+          </a:fillRef>
+          <a:effectRef idx="0">
+            <a:schemeClr val="accent1"/>
+          </a:effectRef>
+          <a:fontRef idx="minor">
+            <a:schemeClr val="tx1"/>
+          </a:fontRef>
+        </p:style>
+      </p:cxnSp>
+      <p:cxnSp>
+        <p:nvCxnSpPr>
+          <p:cNvPr id="25" name="chart:data-line"/>
+          <p:cNvCxnSpPr/>
+          <p:nvPr/>
+        </p:nvCxnSpPr>
+        <p:spPr>
+          <a:xfrm flipV="1">
+            <a:off x="8438684" y="2372487"/>
+            <a:ext cx="1131909" cy="382142"/>
+          </a:xfrm>
+          <a:prstGeom prst="line">
+            <a:avLst/>
+          </a:prstGeom>
+          <a:ln w="22860">
+            <a:solidFill>
+              <a:srgbClr val="182C43"/>
+            </a:solidFill>
+          </a:ln>
+          <a:effectLst/>
+        </p:spPr>
+        <p:style>
+          <a:lnRef idx="2">
+            <a:schemeClr val="accent1"/>
+          </a:lnRef>
+          <a:fillRef idx="0">
+            <a:schemeClr val="accent1"/>
+          </a:fillRef>
+          <a:effectRef idx="0">
+            <a:schemeClr val="accent1"/>
+          </a:effectRef>
+          <a:fontRef idx="minor">
+            <a:schemeClr val="tx1"/>
+          </a:fontRef>
+        </p:style>
+      </p:cxnSp>
+      <p:cxnSp>
+        <p:nvCxnSpPr>
+          <p:cNvPr id="26" name="chart:data-line"/>
+          <p:cNvCxnSpPr/>
+          <p:nvPr/>
+        </p:nvCxnSpPr>
+        <p:spPr>
+          <a:xfrm flipV="1">
+            <a:off x="9570593" y="1990344"/>
+            <a:ext cx="1131908" cy="382143"/>
+          </a:xfrm>
+          <a:prstGeom prst="line">
+            <a:avLst/>
+          </a:prstGeom>
+          <a:ln w="22860">
+            <a:solidFill>
+              <a:srgbClr val="182C43"/>
+            </a:solidFill>
+          </a:ln>
+          <a:effectLst/>
+        </p:spPr>
+        <p:style>
+          <a:lnRef idx="2">
+            <a:schemeClr val="accent1"/>
+          </a:lnRef>
+          <a:fillRef idx="0">
+            <a:schemeClr val="accent1"/>
+          </a:fillRef>
+          <a:effectRef idx="0">
+            <a:schemeClr val="accent1"/>
+          </a:effectRef>
+          <a:fontRef idx="minor">
+            <a:schemeClr val="tx1"/>
+          </a:fontRef>
+        </p:style>
+      </p:cxnSp>
+      <p:sp>
+        <p:nvSpPr>
+          <p:cNvPr id="27" name="chart:legend-key"/>
           <p:cNvSpPr/>
           <p:nvPr/>
         </p:nvSpPr>
         <p:spPr>
           <a:xfrm>
-            <a:off x="1371599" y="4589830"/>
+            <a:off x="694944" y="5900928"/>
+            <a:ext cx="109728" cy="109728"/>
+          </a:xfrm>
+          <a:prstGeom prst="rect">
+            <a:avLst/>
+          </a:prstGeom>
+          <a:solidFill>
+            <a:srgbClr val="0D7870"/>
+          </a:solidFill>
+          <a:ln>
+            <a:noFill/>
+          </a:ln>
+          <a:effectLst/>
+        </p:spPr>
+        <p:style>
+          <a:lnRef idx="1">
+            <a:schemeClr val="accent1"/>
+          </a:lnRef>
+          <a:fillRef idx="3">
+            <a:schemeClr val="accent1"/>
+          </a:fillRef>
+          <a:effectRef idx="0">
+            <a:schemeClr val="accent1"/>
+          </a:effectRef>
+          <a:fontRef idx="minor">
+            <a:schemeClr val="lt1"/>
+          </a:fontRef>
+        </p:style>
+        <p:txBody>
+          <a:bodyPr rtlCol="0" anchor="ctr"/>
+          <a:lstStyle/>
+          <a:p>
+            <a:pPr algn="ctr"/>
+          </a:p>
+        </p:txBody>
+      </p:sp>
+      <p:sp>
+        <p:nvSpPr>
+          <p:cNvPr id="28" name="chart:legend-key"/>
+          <p:cNvSpPr/>
+          <p:nvPr/>
+        </p:nvSpPr>
+        <p:spPr>
+          <a:xfrm>
+            <a:off x="1554480" y="5900928"/>
+            <a:ext cx="109728" cy="109728"/>
+          </a:xfrm>
+          <a:prstGeom prst="rect">
+            <a:avLst/>
+          </a:prstGeom>
+          <a:solidFill>
+            <a:srgbClr val="182C43"/>
+          </a:solidFill>
+          <a:ln>
+            <a:noFill/>
+          </a:ln>
+          <a:effectLst/>
+        </p:spPr>
+        <p:style>
+          <a:lnRef idx="1">
+            <a:schemeClr val="accent1"/>
+          </a:lnRef>
+          <a:fillRef idx="3">
+            <a:schemeClr val="accent1"/>
+          </a:fillRef>
+          <a:effectRef idx="0">
+            <a:schemeClr val="accent1"/>
+          </a:effectRef>
+          <a:fontRef idx="minor">
+            <a:schemeClr val="lt1"/>
+          </a:fontRef>
+        </p:style>
+        <p:txBody>
+          <a:bodyPr rtlCol="0" anchor="ctr"/>
+          <a:lstStyle/>
+          <a:p>
+            <a:pPr algn="ctr"/>
+          </a:p>
+        </p:txBody>
+      </p:sp>
+      <p:sp>
+        <p:nvSpPr>
+          <p:cNvPr id="29" name="chart:data-dot"/>
+          <p:cNvSpPr/>
+          <p:nvPr/>
+        </p:nvSpPr>
+        <p:spPr>
+          <a:xfrm>
+            <a:off x="1601512" y="4543196"/>
             <a:ext cx="91440" cy="91440"/>
           </a:xfrm>
           <a:prstGeom prst="ellipse">
@@ -4986,6 +4697,7 @@
               <a:srgbClr val="FFFFFC"/>
             </a:solidFill>
           </a:ln>
+          <a:effectLst/>
         </p:spPr>
         <p:style>
           <a:lnRef idx="1">
@@ -4994,7 +4706,7 @@
           <a:fillRef idx="3">
             <a:schemeClr val="accent1"/>
           </a:fillRef>
-          <a:effectRef idx="2">
+          <a:effectRef idx="0">
             <a:schemeClr val="accent1"/>
           </a:effectRef>
           <a:fontRef idx="minor">
@@ -5011,13 +4723,13 @@
       </p:sp>
       <p:sp>
         <p:nvSpPr>
-          <p:cNvPr id="35" name="Oval 34"/>
+          <p:cNvPr id="30" name="chart:data-dot"/>
           <p:cNvSpPr/>
           <p:nvPr/>
         </p:nvSpPr>
         <p:spPr>
           <a:xfrm>
-            <a:off x="2602611" y="4338142"/>
+            <a:off x="2733421" y="4313910"/>
             <a:ext cx="91440" cy="91440"/>
           </a:xfrm>
           <a:prstGeom prst="ellipse">
@@ -5031,6 +4743,7 @@
               <a:srgbClr val="FFFFFC"/>
             </a:solidFill>
           </a:ln>
+          <a:effectLst/>
         </p:spPr>
         <p:style>
           <a:lnRef idx="1">
@@ -5039,7 +4752,7 @@
           <a:fillRef idx="3">
             <a:schemeClr val="accent1"/>
           </a:fillRef>
-          <a:effectRef idx="2">
+          <a:effectRef idx="0">
             <a:schemeClr val="accent1"/>
           </a:effectRef>
           <a:fontRef idx="minor">
@@ -5056,13 +4769,13 @@
       </p:sp>
       <p:sp>
         <p:nvSpPr>
-          <p:cNvPr id="36" name="Oval 35"/>
+          <p:cNvPr id="31" name="chart:data-dot"/>
           <p:cNvSpPr/>
           <p:nvPr/>
         </p:nvSpPr>
         <p:spPr>
           <a:xfrm>
-            <a:off x="3833622" y="4044505"/>
+            <a:off x="3865329" y="4046410"/>
             <a:ext cx="91440" cy="91440"/>
           </a:xfrm>
           <a:prstGeom prst="ellipse">
@@ -5076,6 +4789,7 @@
               <a:srgbClr val="FFFFFC"/>
             </a:solidFill>
           </a:ln>
+          <a:effectLst/>
         </p:spPr>
         <p:style>
           <a:lnRef idx="1">
@@ -5084,7 +4798,7 @@
           <a:fillRef idx="3">
             <a:schemeClr val="accent1"/>
           </a:fillRef>
-          <a:effectRef idx="2">
+          <a:effectRef idx="0">
             <a:schemeClr val="accent1"/>
           </a:effectRef>
           <a:fontRef idx="minor">
@@ -5101,13 +4815,13 @@
       </p:sp>
       <p:sp>
         <p:nvSpPr>
-          <p:cNvPr id="37" name="Oval 36"/>
+          <p:cNvPr id="32" name="chart:data-dot"/>
           <p:cNvSpPr/>
           <p:nvPr/>
         </p:nvSpPr>
         <p:spPr>
           <a:xfrm>
-            <a:off x="5064633" y="3792816"/>
+            <a:off x="4997238" y="3817124"/>
             <a:ext cx="91440" cy="91440"/>
           </a:xfrm>
           <a:prstGeom prst="ellipse">
@@ -5121,6 +4835,7 @@
               <a:srgbClr val="FFFFFC"/>
             </a:solidFill>
           </a:ln>
+          <a:effectLst/>
         </p:spPr>
         <p:style>
           <a:lnRef idx="1">
@@ -5129,7 +4844,7 @@
           <a:fillRef idx="3">
             <a:schemeClr val="accent1"/>
           </a:fillRef>
-          <a:effectRef idx="2">
+          <a:effectRef idx="0">
             <a:schemeClr val="accent1"/>
           </a:effectRef>
           <a:fontRef idx="minor">
@@ -5146,13 +4861,13 @@
       </p:sp>
       <p:sp>
         <p:nvSpPr>
-          <p:cNvPr id="38" name="Oval 37"/>
+          <p:cNvPr id="33" name="chart:data-dot"/>
           <p:cNvSpPr/>
           <p:nvPr/>
         </p:nvSpPr>
         <p:spPr>
           <a:xfrm>
-            <a:off x="6295644" y="3247491"/>
+            <a:off x="6129147" y="3320338"/>
             <a:ext cx="91440" cy="91440"/>
           </a:xfrm>
           <a:prstGeom prst="ellipse">
@@ -5166,6 +4881,7 @@
               <a:srgbClr val="FFFFFC"/>
             </a:solidFill>
           </a:ln>
+          <a:effectLst/>
         </p:spPr>
         <p:style>
           <a:lnRef idx="1">
@@ -5174,7 +4890,7 @@
           <a:fillRef idx="3">
             <a:schemeClr val="accent1"/>
           </a:fillRef>
-          <a:effectRef idx="2">
+          <a:effectRef idx="0">
             <a:schemeClr val="accent1"/>
           </a:effectRef>
           <a:fontRef idx="minor">
@@ -5191,13 +4907,13 @@
       </p:sp>
       <p:sp>
         <p:nvSpPr>
-          <p:cNvPr id="39" name="Oval 38"/>
+          <p:cNvPr id="34" name="chart:data-dot"/>
           <p:cNvSpPr/>
           <p:nvPr/>
         </p:nvSpPr>
         <p:spPr>
           <a:xfrm>
-            <a:off x="7526654" y="2911906"/>
+            <a:off x="7261055" y="3014624"/>
             <a:ext cx="91440" cy="91440"/>
           </a:xfrm>
           <a:prstGeom prst="ellipse">
@@ -5211,6 +4927,7 @@
               <a:srgbClr val="FFFFFC"/>
             </a:solidFill>
           </a:ln>
+          <a:effectLst/>
         </p:spPr>
         <p:style>
           <a:lnRef idx="1">
@@ -5219,7 +4936,7 @@
           <a:fillRef idx="3">
             <a:schemeClr val="accent1"/>
           </a:fillRef>
-          <a:effectRef idx="2">
+          <a:effectRef idx="0">
             <a:schemeClr val="accent1"/>
           </a:effectRef>
           <a:fontRef idx="minor">
@@ -5236,13 +4953,13 @@
       </p:sp>
       <p:sp>
         <p:nvSpPr>
-          <p:cNvPr id="40" name="Oval 39"/>
+          <p:cNvPr id="35" name="chart:data-dot"/>
           <p:cNvSpPr/>
           <p:nvPr/>
         </p:nvSpPr>
         <p:spPr>
           <a:xfrm>
-            <a:off x="8757666" y="2534373"/>
+            <a:off x="8392964" y="2670695"/>
             <a:ext cx="91440" cy="91440"/>
           </a:xfrm>
           <a:prstGeom prst="ellipse">
@@ -5256,6 +4973,7 @@
               <a:srgbClr val="FFFFFC"/>
             </a:solidFill>
           </a:ln>
+          <a:effectLst/>
         </p:spPr>
         <p:style>
           <a:lnRef idx="1">
@@ -5264,7 +4982,7 @@
           <a:fillRef idx="3">
             <a:schemeClr val="accent1"/>
           </a:fillRef>
-          <a:effectRef idx="2">
+          <a:effectRef idx="0">
             <a:schemeClr val="accent1"/>
           </a:effectRef>
           <a:fontRef idx="minor">
@@ -5281,13 +4999,13 @@
       </p:sp>
       <p:sp>
         <p:nvSpPr>
-          <p:cNvPr id="41" name="Oval 40"/>
+          <p:cNvPr id="36" name="chart:data-dot"/>
           <p:cNvSpPr/>
           <p:nvPr/>
         </p:nvSpPr>
         <p:spPr>
           <a:xfrm>
-            <a:off x="9988677" y="2282685"/>
+            <a:off x="9524873" y="2441409"/>
             <a:ext cx="91440" cy="91440"/>
           </a:xfrm>
           <a:prstGeom prst="ellipse">
@@ -5301,6 +5019,7 @@
               <a:srgbClr val="FFFFFC"/>
             </a:solidFill>
           </a:ln>
+          <a:effectLst/>
         </p:spPr>
         <p:style>
           <a:lnRef idx="1">
@@ -5309,7 +5028,7 @@
           <a:fillRef idx="3">
             <a:schemeClr val="accent1"/>
           </a:fillRef>
-          <a:effectRef idx="2">
+          <a:effectRef idx="0">
             <a:schemeClr val="accent1"/>
           </a:effectRef>
           <a:fontRef idx="minor">
@@ -5326,13 +5045,13 @@
       </p:sp>
       <p:sp>
         <p:nvSpPr>
-          <p:cNvPr id="42" name="Oval 41"/>
+          <p:cNvPr id="37" name="chart:data-dot"/>
           <p:cNvSpPr/>
           <p:nvPr/>
         </p:nvSpPr>
         <p:spPr>
           <a:xfrm>
-            <a:off x="11219688" y="1989048"/>
+            <a:off x="10656781" y="2173909"/>
             <a:ext cx="91440" cy="91440"/>
           </a:xfrm>
           <a:prstGeom prst="ellipse">
@@ -5346,6 +5065,7 @@
               <a:srgbClr val="FFFFFC"/>
             </a:solidFill>
           </a:ln>
+          <a:effectLst/>
         </p:spPr>
         <p:style>
           <a:lnRef idx="1">
@@ -5354,7 +5074,7 @@
           <a:fillRef idx="3">
             <a:schemeClr val="accent1"/>
           </a:fillRef>
-          <a:effectRef idx="2">
+          <a:effectRef idx="0">
             <a:schemeClr val="accent1"/>
           </a:effectRef>
           <a:fontRef idx="minor">
@@ -5369,295 +5089,15 @@
           </a:p>
         </p:txBody>
       </p:sp>
-      <p:cxnSp>
-        <p:nvCxnSpPr>
-          <p:cNvPr id="43" name="Connector 42"/>
-          <p:cNvCxnSpPr/>
-          <p:nvPr/>
-        </p:nvCxnSpPr>
-        <p:spPr>
-          <a:xfrm flipV="1">
-            <a:off x="1417319" y="4090225"/>
-            <a:ext cx="1231012" cy="209741"/>
-          </a:xfrm>
-          <a:prstGeom prst="line">
-            <a:avLst/>
-          </a:prstGeom>
-          <a:ln w="22860">
-            <a:solidFill>
-              <a:srgbClr val="182C43"/>
-            </a:solidFill>
-          </a:ln>
-        </p:spPr>
-        <p:style>
-          <a:lnRef idx="2">
-            <a:schemeClr val="accent1"/>
-          </a:lnRef>
-          <a:fillRef idx="0">
-            <a:schemeClr val="accent1"/>
-          </a:fillRef>
-          <a:effectRef idx="1">
-            <a:schemeClr val="accent1"/>
-          </a:effectRef>
-          <a:fontRef idx="minor">
-            <a:schemeClr val="tx1"/>
-          </a:fontRef>
-        </p:style>
-      </p:cxnSp>
-      <p:cxnSp>
-        <p:nvCxnSpPr>
-          <p:cNvPr id="44" name="Connector 43"/>
-          <p:cNvCxnSpPr/>
-          <p:nvPr/>
-        </p:nvCxnSpPr>
-        <p:spPr>
-          <a:xfrm flipV="1">
-            <a:off x="2648331" y="3880484"/>
-            <a:ext cx="1231010" cy="209741"/>
-          </a:xfrm>
-          <a:prstGeom prst="line">
-            <a:avLst/>
-          </a:prstGeom>
-          <a:ln w="22860">
-            <a:solidFill>
-              <a:srgbClr val="182C43"/>
-            </a:solidFill>
-          </a:ln>
-        </p:spPr>
-        <p:style>
-          <a:lnRef idx="2">
-            <a:schemeClr val="accent1"/>
-          </a:lnRef>
-          <a:fillRef idx="0">
-            <a:schemeClr val="accent1"/>
-          </a:fillRef>
-          <a:effectRef idx="1">
-            <a:schemeClr val="accent1"/>
-          </a:effectRef>
-          <a:fontRef idx="minor">
-            <a:schemeClr val="tx1"/>
-          </a:fontRef>
-        </p:style>
-      </p:cxnSp>
-      <p:cxnSp>
-        <p:nvCxnSpPr>
-          <p:cNvPr id="45" name="Connector 44"/>
-          <p:cNvCxnSpPr/>
-          <p:nvPr/>
-        </p:nvCxnSpPr>
-        <p:spPr>
-          <a:xfrm flipV="1">
-            <a:off x="3879341" y="3670744"/>
-            <a:ext cx="1231012" cy="209740"/>
-          </a:xfrm>
-          <a:prstGeom prst="line">
-            <a:avLst/>
-          </a:prstGeom>
-          <a:ln w="22860">
-            <a:solidFill>
-              <a:srgbClr val="182C43"/>
-            </a:solidFill>
-          </a:ln>
-        </p:spPr>
-        <p:style>
-          <a:lnRef idx="2">
-            <a:schemeClr val="accent1"/>
-          </a:lnRef>
-          <a:fillRef idx="0">
-            <a:schemeClr val="accent1"/>
-          </a:fillRef>
-          <a:effectRef idx="1">
-            <a:schemeClr val="accent1"/>
-          </a:effectRef>
-          <a:fontRef idx="minor">
-            <a:schemeClr val="tx1"/>
-          </a:fontRef>
-        </p:style>
-      </p:cxnSp>
-      <p:cxnSp>
-        <p:nvCxnSpPr>
-          <p:cNvPr id="46" name="Connector 45"/>
-          <p:cNvCxnSpPr/>
-          <p:nvPr/>
-        </p:nvCxnSpPr>
-        <p:spPr>
-          <a:xfrm flipV="1">
-            <a:off x="5110353" y="3461003"/>
-            <a:ext cx="1231011" cy="209741"/>
-          </a:xfrm>
-          <a:prstGeom prst="line">
-            <a:avLst/>
-          </a:prstGeom>
-          <a:ln w="22860">
-            <a:solidFill>
-              <a:srgbClr val="182C43"/>
-            </a:solidFill>
-          </a:ln>
-        </p:spPr>
-        <p:style>
-          <a:lnRef idx="2">
-            <a:schemeClr val="accent1"/>
-          </a:lnRef>
-          <a:fillRef idx="0">
-            <a:schemeClr val="accent1"/>
-          </a:fillRef>
-          <a:effectRef idx="1">
-            <a:schemeClr val="accent1"/>
-          </a:effectRef>
-          <a:fontRef idx="minor">
-            <a:schemeClr val="tx1"/>
-          </a:fontRef>
-        </p:style>
-      </p:cxnSp>
-      <p:cxnSp>
-        <p:nvCxnSpPr>
-          <p:cNvPr id="47" name="Connector 46"/>
-          <p:cNvCxnSpPr/>
-          <p:nvPr/>
-        </p:nvCxnSpPr>
-        <p:spPr>
-          <a:xfrm flipV="1">
-            <a:off x="6341364" y="3041522"/>
-            <a:ext cx="1231011" cy="419481"/>
-          </a:xfrm>
-          <a:prstGeom prst="line">
-            <a:avLst/>
-          </a:prstGeom>
-          <a:ln w="22860">
-            <a:solidFill>
-              <a:srgbClr val="182C43"/>
-            </a:solidFill>
-          </a:ln>
-        </p:spPr>
-        <p:style>
-          <a:lnRef idx="2">
-            <a:schemeClr val="accent1"/>
-          </a:lnRef>
-          <a:fillRef idx="0">
-            <a:schemeClr val="accent1"/>
-          </a:fillRef>
-          <a:effectRef idx="1">
-            <a:schemeClr val="accent1"/>
-          </a:effectRef>
-          <a:fontRef idx="minor">
-            <a:schemeClr val="tx1"/>
-          </a:fontRef>
-        </p:style>
-      </p:cxnSp>
-      <p:cxnSp>
-        <p:nvCxnSpPr>
-          <p:cNvPr id="48" name="Connector 47"/>
-          <p:cNvCxnSpPr/>
-          <p:nvPr/>
-        </p:nvCxnSpPr>
-        <p:spPr>
-          <a:xfrm flipV="1">
-            <a:off x="7572375" y="2622041"/>
-            <a:ext cx="1231011" cy="419481"/>
-          </a:xfrm>
-          <a:prstGeom prst="line">
-            <a:avLst/>
-          </a:prstGeom>
-          <a:ln w="22860">
-            <a:solidFill>
-              <a:srgbClr val="182C43"/>
-            </a:solidFill>
-          </a:ln>
-        </p:spPr>
-        <p:style>
-          <a:lnRef idx="2">
-            <a:schemeClr val="accent1"/>
-          </a:lnRef>
-          <a:fillRef idx="0">
-            <a:schemeClr val="accent1"/>
-          </a:fillRef>
-          <a:effectRef idx="1">
-            <a:schemeClr val="accent1"/>
-          </a:effectRef>
-          <a:fontRef idx="minor">
-            <a:schemeClr val="tx1"/>
-          </a:fontRef>
-        </p:style>
-      </p:cxnSp>
-      <p:cxnSp>
-        <p:nvCxnSpPr>
-          <p:cNvPr id="49" name="Connector 48"/>
-          <p:cNvCxnSpPr/>
-          <p:nvPr/>
-        </p:nvCxnSpPr>
-        <p:spPr>
-          <a:xfrm flipV="1">
-            <a:off x="8803386" y="2202560"/>
-            <a:ext cx="1231011" cy="419481"/>
-          </a:xfrm>
-          <a:prstGeom prst="line">
-            <a:avLst/>
-          </a:prstGeom>
-          <a:ln w="22860">
-            <a:solidFill>
-              <a:srgbClr val="182C43"/>
-            </a:solidFill>
-          </a:ln>
-        </p:spPr>
-        <p:style>
-          <a:lnRef idx="2">
-            <a:schemeClr val="accent1"/>
-          </a:lnRef>
-          <a:fillRef idx="0">
-            <a:schemeClr val="accent1"/>
-          </a:fillRef>
-          <a:effectRef idx="1">
-            <a:schemeClr val="accent1"/>
-          </a:effectRef>
-          <a:fontRef idx="minor">
-            <a:schemeClr val="tx1"/>
-          </a:fontRef>
-        </p:style>
-      </p:cxnSp>
-      <p:cxnSp>
-        <p:nvCxnSpPr>
-          <p:cNvPr id="50" name="Connector 49"/>
-          <p:cNvCxnSpPr/>
-          <p:nvPr/>
-        </p:nvCxnSpPr>
-        <p:spPr>
-          <a:xfrm flipV="1">
-            <a:off x="10034397" y="1783079"/>
-            <a:ext cx="1231011" cy="419481"/>
-          </a:xfrm>
-          <a:prstGeom prst="line">
-            <a:avLst/>
-          </a:prstGeom>
-          <a:ln w="22860">
-            <a:solidFill>
-              <a:srgbClr val="182C43"/>
-            </a:solidFill>
-          </a:ln>
-        </p:spPr>
-        <p:style>
-          <a:lnRef idx="2">
-            <a:schemeClr val="accent1"/>
-          </a:lnRef>
-          <a:fillRef idx="0">
-            <a:schemeClr val="accent1"/>
-          </a:fillRef>
-          <a:effectRef idx="1">
-            <a:schemeClr val="accent1"/>
-          </a:effectRef>
-          <a:fontRef idx="minor">
-            <a:schemeClr val="tx1"/>
-          </a:fontRef>
-        </p:style>
-      </p:cxnSp>
-      <p:sp>
-        <p:nvSpPr>
-          <p:cNvPr id="51" name="Oval 50"/>
+      <p:sp>
+        <p:nvSpPr>
+          <p:cNvPr id="38" name="chart:data-dot"/>
           <p:cNvSpPr/>
           <p:nvPr/>
         </p:nvSpPr>
         <p:spPr>
           <a:xfrm>
-            <a:off x="1371599" y="4254246"/>
+            <a:off x="1601512" y="4237482"/>
             <a:ext cx="91440" cy="91440"/>
           </a:xfrm>
           <a:prstGeom prst="ellipse">
@@ -5671,6 +5111,7 @@
               <a:srgbClr val="FFFFFC"/>
             </a:solidFill>
           </a:ln>
+          <a:effectLst/>
         </p:spPr>
         <p:style>
           <a:lnRef idx="1">
@@ -5679,7 +5120,7 @@
           <a:fillRef idx="3">
             <a:schemeClr val="accent1"/>
           </a:fillRef>
-          <a:effectRef idx="2">
+          <a:effectRef idx="0">
             <a:schemeClr val="accent1"/>
           </a:effectRef>
           <a:fontRef idx="minor">
@@ -5696,13 +5137,13 @@
       </p:sp>
       <p:sp>
         <p:nvSpPr>
-          <p:cNvPr id="52" name="Oval 51"/>
+          <p:cNvPr id="39" name="chart:data-dot"/>
           <p:cNvSpPr/>
           <p:nvPr/>
         </p:nvSpPr>
         <p:spPr>
           <a:xfrm>
-            <a:off x="2602611" y="4044505"/>
+            <a:off x="2733421" y="4046410"/>
             <a:ext cx="91440" cy="91440"/>
           </a:xfrm>
           <a:prstGeom prst="ellipse">
@@ -5716,6 +5157,7 @@
               <a:srgbClr val="FFFFFC"/>
             </a:solidFill>
           </a:ln>
+          <a:effectLst/>
         </p:spPr>
         <p:style>
           <a:lnRef idx="1">
@@ -5724,7 +5166,7 @@
           <a:fillRef idx="3">
             <a:schemeClr val="accent1"/>
           </a:fillRef>
-          <a:effectRef idx="2">
+          <a:effectRef idx="0">
             <a:schemeClr val="accent1"/>
           </a:effectRef>
           <a:fontRef idx="minor">
@@ -5741,13 +5183,13 @@
       </p:sp>
       <p:sp>
         <p:nvSpPr>
-          <p:cNvPr id="53" name="Oval 52"/>
+          <p:cNvPr id="40" name="chart:data-dot"/>
           <p:cNvSpPr/>
           <p:nvPr/>
         </p:nvSpPr>
         <p:spPr>
           <a:xfrm>
-            <a:off x="3833622" y="3834764"/>
+            <a:off x="3865329" y="3855338"/>
             <a:ext cx="91440" cy="91440"/>
           </a:xfrm>
           <a:prstGeom prst="ellipse">
@@ -5761,6 +5203,7 @@
               <a:srgbClr val="FFFFFC"/>
             </a:solidFill>
           </a:ln>
+          <a:effectLst/>
         </p:spPr>
         <p:style>
           <a:lnRef idx="1">
@@ -5769,7 +5212,7 @@
           <a:fillRef idx="3">
             <a:schemeClr val="accent1"/>
           </a:fillRef>
-          <a:effectRef idx="2">
+          <a:effectRef idx="0">
             <a:schemeClr val="accent1"/>
           </a:effectRef>
           <a:fontRef idx="minor">
@@ -5786,13 +5229,13 @@
       </p:sp>
       <p:sp>
         <p:nvSpPr>
-          <p:cNvPr id="54" name="Oval 53"/>
+          <p:cNvPr id="41" name="chart:data-dot"/>
           <p:cNvSpPr/>
           <p:nvPr/>
         </p:nvSpPr>
         <p:spPr>
           <a:xfrm>
-            <a:off x="5064633" y="3625024"/>
+            <a:off x="4997238" y="3664267"/>
             <a:ext cx="91440" cy="91440"/>
           </a:xfrm>
           <a:prstGeom prst="ellipse">
@@ -5806,6 +5249,7 @@
               <a:srgbClr val="FFFFFC"/>
             </a:solidFill>
           </a:ln>
+          <a:effectLst/>
         </p:spPr>
         <p:style>
           <a:lnRef idx="1">
@@ -5814,7 +5258,7 @@
           <a:fillRef idx="3">
             <a:schemeClr val="accent1"/>
           </a:fillRef>
-          <a:effectRef idx="2">
+          <a:effectRef idx="0">
             <a:schemeClr val="accent1"/>
           </a:effectRef>
           <a:fontRef idx="minor">
@@ -5831,13 +5275,13 @@
       </p:sp>
       <p:sp>
         <p:nvSpPr>
-          <p:cNvPr id="55" name="Oval 54"/>
+          <p:cNvPr id="42" name="chart:data-dot"/>
           <p:cNvSpPr/>
           <p:nvPr/>
         </p:nvSpPr>
         <p:spPr>
           <a:xfrm>
-            <a:off x="6295644" y="3415283"/>
+            <a:off x="6129147" y="3473195"/>
             <a:ext cx="91440" cy="91440"/>
           </a:xfrm>
           <a:prstGeom prst="ellipse">
@@ -5851,6 +5295,7 @@
               <a:srgbClr val="FFFFFC"/>
             </a:solidFill>
           </a:ln>
+          <a:effectLst/>
         </p:spPr>
         <p:style>
           <a:lnRef idx="1">
@@ -5859,7 +5304,7 @@
           <a:fillRef idx="3">
             <a:schemeClr val="accent1"/>
           </a:fillRef>
-          <a:effectRef idx="2">
+          <a:effectRef idx="0">
             <a:schemeClr val="accent1"/>
           </a:effectRef>
           <a:fontRef idx="minor">
@@ -5876,13 +5321,13 @@
       </p:sp>
       <p:sp>
         <p:nvSpPr>
-          <p:cNvPr id="56" name="Oval 55"/>
+          <p:cNvPr id="43" name="chart:data-dot"/>
           <p:cNvSpPr/>
           <p:nvPr/>
         </p:nvSpPr>
         <p:spPr>
           <a:xfrm>
-            <a:off x="7526654" y="2995802"/>
+            <a:off x="7261055" y="3091053"/>
             <a:ext cx="91440" cy="91440"/>
           </a:xfrm>
           <a:prstGeom prst="ellipse">
@@ -5896,6 +5341,7 @@
               <a:srgbClr val="FFFFFC"/>
             </a:solidFill>
           </a:ln>
+          <a:effectLst/>
         </p:spPr>
         <p:style>
           <a:lnRef idx="1">
@@ -5904,7 +5350,7 @@
           <a:fillRef idx="3">
             <a:schemeClr val="accent1"/>
           </a:fillRef>
-          <a:effectRef idx="2">
+          <a:effectRef idx="0">
             <a:schemeClr val="accent1"/>
           </a:effectRef>
           <a:fontRef idx="minor">
@@ -5921,13 +5367,13 @@
       </p:sp>
       <p:sp>
         <p:nvSpPr>
-          <p:cNvPr id="57" name="Oval 56"/>
+          <p:cNvPr id="44" name="chart:data-dot"/>
           <p:cNvSpPr/>
           <p:nvPr/>
         </p:nvSpPr>
         <p:spPr>
           <a:xfrm>
-            <a:off x="8757666" y="2576322"/>
+            <a:off x="8392964" y="2708910"/>
             <a:ext cx="91440" cy="91440"/>
           </a:xfrm>
           <a:prstGeom prst="ellipse">
@@ -5941,6 +5387,7 @@
               <a:srgbClr val="FFFFFC"/>
             </a:solidFill>
           </a:ln>
+          <a:effectLst/>
         </p:spPr>
         <p:style>
           <a:lnRef idx="1">
@@ -5949,7 +5396,7 @@
           <a:fillRef idx="3">
             <a:schemeClr val="accent1"/>
           </a:fillRef>
-          <a:effectRef idx="2">
+          <a:effectRef idx="0">
             <a:schemeClr val="accent1"/>
           </a:effectRef>
           <a:fontRef idx="minor">
@@ -5966,13 +5413,13 @@
       </p:sp>
       <p:sp>
         <p:nvSpPr>
-          <p:cNvPr id="58" name="Oval 57"/>
+          <p:cNvPr id="45" name="chart:data-dot"/>
           <p:cNvSpPr/>
           <p:nvPr/>
         </p:nvSpPr>
         <p:spPr>
           <a:xfrm>
-            <a:off x="9988677" y="2156840"/>
+            <a:off x="9524873" y="2326767"/>
             <a:ext cx="91440" cy="91440"/>
           </a:xfrm>
           <a:prstGeom prst="ellipse">
@@ -5986,6 +5433,7 @@
               <a:srgbClr val="FFFFFC"/>
             </a:solidFill>
           </a:ln>
+          <a:effectLst/>
         </p:spPr>
         <p:style>
           <a:lnRef idx="1">
@@ -5994,7 +5442,7 @@
           <a:fillRef idx="3">
             <a:schemeClr val="accent1"/>
           </a:fillRef>
-          <a:effectRef idx="2">
+          <a:effectRef idx="0">
             <a:schemeClr val="accent1"/>
           </a:effectRef>
           <a:fontRef idx="minor">
@@ -6011,13 +5459,13 @@
       </p:sp>
       <p:sp>
         <p:nvSpPr>
-          <p:cNvPr id="59" name="Oval 58"/>
+          <p:cNvPr id="46" name="chart:data-dot"/>
           <p:cNvSpPr/>
           <p:nvPr/>
         </p:nvSpPr>
         <p:spPr>
           <a:xfrm>
-            <a:off x="11219688" y="1737359"/>
+            <a:off x="10656781" y="1944624"/>
             <a:ext cx="91440" cy="91440"/>
           </a:xfrm>
           <a:prstGeom prst="ellipse">
@@ -6031,6 +5479,7 @@
               <a:srgbClr val="FFFFFC"/>
             </a:solidFill>
           </a:ln>
+          <a:effectLst/>
         </p:spPr>
         <p:style>
           <a:lnRef idx="1">
@@ -6039,7 +5488,7 @@
           <a:fillRef idx="3">
             <a:schemeClr val="accent1"/>
           </a:fillRef>
-          <a:effectRef idx="2">
+          <a:effectRef idx="0">
             <a:schemeClr val="accent1"/>
           </a:effectRef>
           <a:fontRef idx="minor">
@@ -6056,58 +5505,14 @@
       </p:sp>
       <p:sp>
         <p:nvSpPr>
-          <p:cNvPr id="60" name="Rectangle 59"/>
-          <p:cNvSpPr/>
-          <p:nvPr/>
-        </p:nvSpPr>
-        <p:spPr>
-          <a:xfrm>
-            <a:off x="1435607" y="5788152"/>
-            <a:ext cx="109728" cy="109728"/>
-          </a:xfrm>
-          <a:prstGeom prst="rect">
-            <a:avLst/>
-          </a:prstGeom>
-          <a:solidFill>
-            <a:srgbClr val="0D7870"/>
-          </a:solidFill>
-          <a:ln>
-            <a:noFill/>
-          </a:ln>
-          <a:effectLst/>
-        </p:spPr>
-        <p:style>
-          <a:lnRef idx="1">
-            <a:schemeClr val="accent1"/>
-          </a:lnRef>
-          <a:fillRef idx="3">
-            <a:schemeClr val="accent1"/>
-          </a:fillRef>
-          <a:effectRef idx="2">
-            <a:schemeClr val="accent1"/>
-          </a:effectRef>
-          <a:fontRef idx="minor">
-            <a:schemeClr val="lt1"/>
-          </a:fontRef>
-        </p:style>
-        <p:txBody>
-          <a:bodyPr rtlCol="0" anchor="ctr"/>
-          <a:lstStyle/>
-          <a:p>
-            <a:pPr algn="ctr"/>
-          </a:p>
-        </p:txBody>
-      </p:sp>
-      <p:sp>
-        <p:nvSpPr>
-          <p:cNvPr id="61" name="TextBox 60"/>
-          <p:cNvSpPr txBox="1"/>
-          <p:nvPr/>
-        </p:nvSpPr>
-        <p:spPr>
-          <a:xfrm>
-            <a:off x="1600199" y="5724144"/>
-            <a:ext cx="1572768" cy="237744"/>
+          <p:cNvPr id="47" name="chart:axis-value"/>
+          <p:cNvSpPr txBox="1"/>
+          <p:nvPr/>
+        </p:nvSpPr>
+        <p:spPr>
+          <a:xfrm>
+            <a:off x="694944" y="4939284"/>
+            <a:ext cx="221742" cy="216408"/>
           </a:xfrm>
           <a:prstGeom prst="rect">
             <a:avLst/>
@@ -6119,6 +5524,650 @@
             <a:spAutoFit/>
             <a:extLst>
               <a:ext uri="{8AF73BB6-5E31-4F0F-A399-3D98F3B95FD9}">
+                <ns12:textLayout xmlns:ns12="urn:pptxdsl:text-layout:v1" role="body"/>
+              </a:ext>
+            </a:extLst>
+          </a:bodyPr>
+          <a:lstStyle/>
+          <a:p>
+            <a:pPr algn="r">
+              <a:lnSpc>
+                <a:spcPct val="130000"/>
+              </a:lnSpc>
+            </a:pPr>
+            <a:r>
+              <a:rPr sz="1200" b="0" lang="ja-JP">
+                <a:solidFill>
+                  <a:srgbClr val="666E70"/>
+                </a:solidFill>
+                <a:latin typeface="Yu Gothic"/>
+                <a:ea typeface="Yu Gothic"/>
+                <a:cs typeface="Yu Gothic"/>
+              </a:rPr>
+              <a:t>0</a:t>
+            </a:r>
+          </a:p>
+        </p:txBody>
+      </p:sp>
+      <p:sp>
+        <p:nvSpPr>
+          <p:cNvPr id="48" name="chart:axis-value"/>
+          <p:cNvSpPr txBox="1"/>
+          <p:nvPr/>
+        </p:nvSpPr>
+        <p:spPr>
+          <a:xfrm>
+            <a:off x="694944" y="4174997"/>
+            <a:ext cx="221742" cy="216408"/>
+          </a:xfrm>
+          <a:prstGeom prst="rect">
+            <a:avLst/>
+          </a:prstGeom>
+          <a:noFill/>
+        </p:spPr>
+        <p:txBody>
+          <a:bodyPr wrap="square" anchor="t" lIns="0" rIns="0" tIns="0" bIns="0">
+            <a:spAutoFit/>
+            <a:extLst>
+              <a:ext uri="{8AF73BB6-5E31-4F0F-A399-3D98F3B95FD9}">
+                <ns17:textLayout xmlns:ns17="urn:pptxdsl:text-layout:v1" role="body"/>
+              </a:ext>
+            </a:extLst>
+          </a:bodyPr>
+          <a:lstStyle/>
+          <a:p>
+            <a:pPr algn="r">
+              <a:lnSpc>
+                <a:spcPct val="130000"/>
+              </a:lnSpc>
+            </a:pPr>
+            <a:r>
+              <a:rPr sz="1200" b="0" lang="ja-JP">
+                <a:solidFill>
+                  <a:srgbClr val="666E70"/>
+                </a:solidFill>
+                <a:latin typeface="Yu Gothic"/>
+                <a:ea typeface="Yu Gothic"/>
+                <a:cs typeface="Yu Gothic"/>
+              </a:rPr>
+              <a:t>20</a:t>
+            </a:r>
+          </a:p>
+        </p:txBody>
+      </p:sp>
+      <p:sp>
+        <p:nvSpPr>
+          <p:cNvPr id="49" name="chart:axis-value"/>
+          <p:cNvSpPr txBox="1"/>
+          <p:nvPr/>
+        </p:nvSpPr>
+        <p:spPr>
+          <a:xfrm>
+            <a:off x="694944" y="3410711"/>
+            <a:ext cx="221742" cy="216408"/>
+          </a:xfrm>
+          <a:prstGeom prst="rect">
+            <a:avLst/>
+          </a:prstGeom>
+          <a:noFill/>
+        </p:spPr>
+        <p:txBody>
+          <a:bodyPr wrap="square" anchor="t" lIns="0" rIns="0" tIns="0" bIns="0">
+            <a:spAutoFit/>
+            <a:extLst>
+              <a:ext uri="{8AF73BB6-5E31-4F0F-A399-3D98F3B95FD9}">
+                <ns22:textLayout xmlns:ns22="urn:pptxdsl:text-layout:v1" role="body"/>
+              </a:ext>
+            </a:extLst>
+          </a:bodyPr>
+          <a:lstStyle/>
+          <a:p>
+            <a:pPr algn="r">
+              <a:lnSpc>
+                <a:spcPct val="130000"/>
+              </a:lnSpc>
+            </a:pPr>
+            <a:r>
+              <a:rPr sz="1200" b="0" lang="ja-JP">
+                <a:solidFill>
+                  <a:srgbClr val="666E70"/>
+                </a:solidFill>
+                <a:latin typeface="Yu Gothic"/>
+                <a:ea typeface="Yu Gothic"/>
+                <a:cs typeface="Yu Gothic"/>
+              </a:rPr>
+              <a:t>40</a:t>
+            </a:r>
+          </a:p>
+        </p:txBody>
+      </p:sp>
+      <p:sp>
+        <p:nvSpPr>
+          <p:cNvPr id="50" name="chart:axis-value"/>
+          <p:cNvSpPr txBox="1"/>
+          <p:nvPr/>
+        </p:nvSpPr>
+        <p:spPr>
+          <a:xfrm>
+            <a:off x="694944" y="2646426"/>
+            <a:ext cx="221742" cy="216408"/>
+          </a:xfrm>
+          <a:prstGeom prst="rect">
+            <a:avLst/>
+          </a:prstGeom>
+          <a:noFill/>
+        </p:spPr>
+        <p:txBody>
+          <a:bodyPr wrap="square" anchor="t" lIns="0" rIns="0" tIns="0" bIns="0">
+            <a:spAutoFit/>
+            <a:extLst>
+              <a:ext uri="{8AF73BB6-5E31-4F0F-A399-3D98F3B95FD9}">
+                <ns27:textLayout xmlns:ns27="urn:pptxdsl:text-layout:v1" role="body"/>
+              </a:ext>
+            </a:extLst>
+          </a:bodyPr>
+          <a:lstStyle/>
+          <a:p>
+            <a:pPr algn="r">
+              <a:lnSpc>
+                <a:spcPct val="130000"/>
+              </a:lnSpc>
+            </a:pPr>
+            <a:r>
+              <a:rPr sz="1200" b="0" lang="ja-JP">
+                <a:solidFill>
+                  <a:srgbClr val="666E70"/>
+                </a:solidFill>
+                <a:latin typeface="Yu Gothic"/>
+                <a:ea typeface="Yu Gothic"/>
+                <a:cs typeface="Yu Gothic"/>
+              </a:rPr>
+              <a:t>60</a:t>
+            </a:r>
+          </a:p>
+        </p:txBody>
+      </p:sp>
+      <p:sp>
+        <p:nvSpPr>
+          <p:cNvPr id="51" name="chart:axis-value"/>
+          <p:cNvSpPr txBox="1"/>
+          <p:nvPr/>
+        </p:nvSpPr>
+        <p:spPr>
+          <a:xfrm>
+            <a:off x="694944" y="1882140"/>
+            <a:ext cx="221742" cy="216408"/>
+          </a:xfrm>
+          <a:prstGeom prst="rect">
+            <a:avLst/>
+          </a:prstGeom>
+          <a:noFill/>
+        </p:spPr>
+        <p:txBody>
+          <a:bodyPr wrap="square" anchor="t" lIns="0" rIns="0" tIns="0" bIns="0">
+            <a:spAutoFit/>
+            <a:extLst>
+              <a:ext uri="{8AF73BB6-5E31-4F0F-A399-3D98F3B95FD9}">
+                <ns32:textLayout xmlns:ns32="urn:pptxdsl:text-layout:v1" role="body"/>
+              </a:ext>
+            </a:extLst>
+          </a:bodyPr>
+          <a:lstStyle/>
+          <a:p>
+            <a:pPr algn="r">
+              <a:lnSpc>
+                <a:spcPct val="130000"/>
+              </a:lnSpc>
+            </a:pPr>
+            <a:r>
+              <a:rPr sz="1200" b="0" lang="ja-JP">
+                <a:solidFill>
+                  <a:srgbClr val="666E70"/>
+                </a:solidFill>
+                <a:latin typeface="Yu Gothic"/>
+                <a:ea typeface="Yu Gothic"/>
+                <a:cs typeface="Yu Gothic"/>
+              </a:rPr>
+              <a:t>80</a:t>
+            </a:r>
+          </a:p>
+        </p:txBody>
+      </p:sp>
+      <p:sp>
+        <p:nvSpPr>
+          <p:cNvPr id="52" name="chart:category"/>
+          <p:cNvSpPr txBox="1"/>
+          <p:nvPr/>
+        </p:nvSpPr>
+        <p:spPr>
+          <a:xfrm>
+            <a:off x="1163574" y="5355335"/>
+            <a:ext cx="967316" cy="216408"/>
+          </a:xfrm>
+          <a:prstGeom prst="rect">
+            <a:avLst/>
+          </a:prstGeom>
+          <a:noFill/>
+        </p:spPr>
+        <p:txBody>
+          <a:bodyPr wrap="square" anchor="t" lIns="0" rIns="0" tIns="0" bIns="0">
+            <a:spAutoFit/>
+            <a:extLst>
+              <a:ext uri="{8AF73BB6-5E31-4F0F-A399-3D98F3B95FD9}">
+                <ns37:textLayout xmlns:ns37="urn:pptxdsl:text-layout:v1" role="body"/>
+              </a:ext>
+            </a:extLst>
+          </a:bodyPr>
+          <a:lstStyle/>
+          <a:p>
+            <a:pPr algn="ctr">
+              <a:lnSpc>
+                <a:spcPct val="130000"/>
+              </a:lnSpc>
+            </a:pPr>
+            <a:r>
+              <a:rPr sz="1200" b="0" lang="ja-JP">
+                <a:solidFill>
+                  <a:srgbClr val="666E70"/>
+                </a:solidFill>
+                <a:latin typeface="Yu Gothic"/>
+                <a:ea typeface="Yu Gothic"/>
+                <a:cs typeface="Yu Gothic"/>
+              </a:rPr>
+              <a:t>4月</a:t>
+            </a:r>
+          </a:p>
+        </p:txBody>
+      </p:sp>
+      <p:sp>
+        <p:nvSpPr>
+          <p:cNvPr id="53" name="chart:category"/>
+          <p:cNvSpPr txBox="1"/>
+          <p:nvPr/>
+        </p:nvSpPr>
+        <p:spPr>
+          <a:xfrm>
+            <a:off x="2295482" y="5355335"/>
+            <a:ext cx="967316" cy="216408"/>
+          </a:xfrm>
+          <a:prstGeom prst="rect">
+            <a:avLst/>
+          </a:prstGeom>
+          <a:noFill/>
+        </p:spPr>
+        <p:txBody>
+          <a:bodyPr wrap="square" anchor="t" lIns="0" rIns="0" tIns="0" bIns="0">
+            <a:spAutoFit/>
+            <a:extLst>
+              <a:ext uri="{8AF73BB6-5E31-4F0F-A399-3D98F3B95FD9}">
+                <ns42:textLayout xmlns:ns42="urn:pptxdsl:text-layout:v1" role="body"/>
+              </a:ext>
+            </a:extLst>
+          </a:bodyPr>
+          <a:lstStyle/>
+          <a:p>
+            <a:pPr algn="ctr">
+              <a:lnSpc>
+                <a:spcPct val="130000"/>
+              </a:lnSpc>
+            </a:pPr>
+            <a:r>
+              <a:rPr sz="1200" b="0" lang="ja-JP">
+                <a:solidFill>
+                  <a:srgbClr val="666E70"/>
+                </a:solidFill>
+                <a:latin typeface="Yu Gothic"/>
+                <a:ea typeface="Yu Gothic"/>
+                <a:cs typeface="Yu Gothic"/>
+              </a:rPr>
+              <a:t>5月</a:t>
+            </a:r>
+          </a:p>
+        </p:txBody>
+      </p:sp>
+      <p:sp>
+        <p:nvSpPr>
+          <p:cNvPr id="54" name="chart:category"/>
+          <p:cNvSpPr txBox="1"/>
+          <p:nvPr/>
+        </p:nvSpPr>
+        <p:spPr>
+          <a:xfrm>
+            <a:off x="3427391" y="5355335"/>
+            <a:ext cx="967316" cy="216408"/>
+          </a:xfrm>
+          <a:prstGeom prst="rect">
+            <a:avLst/>
+          </a:prstGeom>
+          <a:noFill/>
+        </p:spPr>
+        <p:txBody>
+          <a:bodyPr wrap="square" anchor="t" lIns="0" rIns="0" tIns="0" bIns="0">
+            <a:spAutoFit/>
+            <a:extLst>
+              <a:ext uri="{8AF73BB6-5E31-4F0F-A399-3D98F3B95FD9}">
+                <ns47:textLayout xmlns:ns47="urn:pptxdsl:text-layout:v1" role="body"/>
+              </a:ext>
+            </a:extLst>
+          </a:bodyPr>
+          <a:lstStyle/>
+          <a:p>
+            <a:pPr algn="ctr">
+              <a:lnSpc>
+                <a:spcPct val="130000"/>
+              </a:lnSpc>
+            </a:pPr>
+            <a:r>
+              <a:rPr sz="1200" b="0" lang="ja-JP">
+                <a:solidFill>
+                  <a:srgbClr val="666E70"/>
+                </a:solidFill>
+                <a:latin typeface="Yu Gothic"/>
+                <a:ea typeface="Yu Gothic"/>
+                <a:cs typeface="Yu Gothic"/>
+              </a:rPr>
+              <a:t>6月</a:t>
+            </a:r>
+          </a:p>
+        </p:txBody>
+      </p:sp>
+      <p:sp>
+        <p:nvSpPr>
+          <p:cNvPr id="55" name="chart:category"/>
+          <p:cNvSpPr txBox="1"/>
+          <p:nvPr/>
+        </p:nvSpPr>
+        <p:spPr>
+          <a:xfrm>
+            <a:off x="4559300" y="5355335"/>
+            <a:ext cx="967316" cy="216408"/>
+          </a:xfrm>
+          <a:prstGeom prst="rect">
+            <a:avLst/>
+          </a:prstGeom>
+          <a:noFill/>
+        </p:spPr>
+        <p:txBody>
+          <a:bodyPr wrap="square" anchor="t" lIns="0" rIns="0" tIns="0" bIns="0">
+            <a:spAutoFit/>
+            <a:extLst>
+              <a:ext uri="{8AF73BB6-5E31-4F0F-A399-3D98F3B95FD9}">
+                <ns52:textLayout xmlns:ns52="urn:pptxdsl:text-layout:v1" role="body"/>
+              </a:ext>
+            </a:extLst>
+          </a:bodyPr>
+          <a:lstStyle/>
+          <a:p>
+            <a:pPr algn="ctr">
+              <a:lnSpc>
+                <a:spcPct val="130000"/>
+              </a:lnSpc>
+            </a:pPr>
+            <a:r>
+              <a:rPr sz="1200" b="0" lang="ja-JP">
+                <a:solidFill>
+                  <a:srgbClr val="666E70"/>
+                </a:solidFill>
+                <a:latin typeface="Yu Gothic"/>
+                <a:ea typeface="Yu Gothic"/>
+                <a:cs typeface="Yu Gothic"/>
+              </a:rPr>
+              <a:t>7月</a:t>
+            </a:r>
+          </a:p>
+        </p:txBody>
+      </p:sp>
+      <p:sp>
+        <p:nvSpPr>
+          <p:cNvPr id="56" name="chart:category"/>
+          <p:cNvSpPr txBox="1"/>
+          <p:nvPr/>
+        </p:nvSpPr>
+        <p:spPr>
+          <a:xfrm>
+            <a:off x="5691208" y="5355335"/>
+            <a:ext cx="967316" cy="216408"/>
+          </a:xfrm>
+          <a:prstGeom prst="rect">
+            <a:avLst/>
+          </a:prstGeom>
+          <a:noFill/>
+        </p:spPr>
+        <p:txBody>
+          <a:bodyPr wrap="square" anchor="t" lIns="0" rIns="0" tIns="0" bIns="0">
+            <a:spAutoFit/>
+            <a:extLst>
+              <a:ext uri="{8AF73BB6-5E31-4F0F-A399-3D98F3B95FD9}">
+                <ns57:textLayout xmlns:ns57="urn:pptxdsl:text-layout:v1" role="body"/>
+              </a:ext>
+            </a:extLst>
+          </a:bodyPr>
+          <a:lstStyle/>
+          <a:p>
+            <a:pPr algn="ctr">
+              <a:lnSpc>
+                <a:spcPct val="130000"/>
+              </a:lnSpc>
+            </a:pPr>
+            <a:r>
+              <a:rPr sz="1200" b="0" lang="ja-JP">
+                <a:solidFill>
+                  <a:srgbClr val="666E70"/>
+                </a:solidFill>
+                <a:latin typeface="Yu Gothic"/>
+                <a:ea typeface="Yu Gothic"/>
+                <a:cs typeface="Yu Gothic"/>
+              </a:rPr>
+              <a:t>8月</a:t>
+            </a:r>
+          </a:p>
+        </p:txBody>
+      </p:sp>
+      <p:sp>
+        <p:nvSpPr>
+          <p:cNvPr id="57" name="chart:category"/>
+          <p:cNvSpPr txBox="1"/>
+          <p:nvPr/>
+        </p:nvSpPr>
+        <p:spPr>
+          <a:xfrm>
+            <a:off x="6823117" y="5355335"/>
+            <a:ext cx="967316" cy="216408"/>
+          </a:xfrm>
+          <a:prstGeom prst="rect">
+            <a:avLst/>
+          </a:prstGeom>
+          <a:noFill/>
+        </p:spPr>
+        <p:txBody>
+          <a:bodyPr wrap="square" anchor="t" lIns="0" rIns="0" tIns="0" bIns="0">
+            <a:spAutoFit/>
+            <a:extLst>
+              <a:ext uri="{8AF73BB6-5E31-4F0F-A399-3D98F3B95FD9}">
+                <ns62:textLayout xmlns:ns62="urn:pptxdsl:text-layout:v1" role="body"/>
+              </a:ext>
+            </a:extLst>
+          </a:bodyPr>
+          <a:lstStyle/>
+          <a:p>
+            <a:pPr algn="ctr">
+              <a:lnSpc>
+                <a:spcPct val="130000"/>
+              </a:lnSpc>
+            </a:pPr>
+            <a:r>
+              <a:rPr sz="1200" b="0" lang="ja-JP">
+                <a:solidFill>
+                  <a:srgbClr val="666E70"/>
+                </a:solidFill>
+                <a:latin typeface="Yu Gothic"/>
+                <a:ea typeface="Yu Gothic"/>
+                <a:cs typeface="Yu Gothic"/>
+              </a:rPr>
+              <a:t>9月</a:t>
+            </a:r>
+          </a:p>
+        </p:txBody>
+      </p:sp>
+      <p:sp>
+        <p:nvSpPr>
+          <p:cNvPr id="58" name="chart:category"/>
+          <p:cNvSpPr txBox="1"/>
+          <p:nvPr/>
+        </p:nvSpPr>
+        <p:spPr>
+          <a:xfrm>
+            <a:off x="7955026" y="5355335"/>
+            <a:ext cx="967316" cy="216408"/>
+          </a:xfrm>
+          <a:prstGeom prst="rect">
+            <a:avLst/>
+          </a:prstGeom>
+          <a:noFill/>
+        </p:spPr>
+        <p:txBody>
+          <a:bodyPr wrap="square" anchor="t" lIns="0" rIns="0" tIns="0" bIns="0">
+            <a:spAutoFit/>
+            <a:extLst>
+              <a:ext uri="{8AF73BB6-5E31-4F0F-A399-3D98F3B95FD9}">
+                <ns67:textLayout xmlns:ns67="urn:pptxdsl:text-layout:v1" role="body"/>
+              </a:ext>
+            </a:extLst>
+          </a:bodyPr>
+          <a:lstStyle/>
+          <a:p>
+            <a:pPr algn="ctr">
+              <a:lnSpc>
+                <a:spcPct val="130000"/>
+              </a:lnSpc>
+            </a:pPr>
+            <a:r>
+              <a:rPr sz="1200" b="0" lang="ja-JP">
+                <a:solidFill>
+                  <a:srgbClr val="666E70"/>
+                </a:solidFill>
+                <a:latin typeface="Yu Gothic"/>
+                <a:ea typeface="Yu Gothic"/>
+                <a:cs typeface="Yu Gothic"/>
+              </a:rPr>
+              <a:t>10月</a:t>
+            </a:r>
+          </a:p>
+        </p:txBody>
+      </p:sp>
+      <p:sp>
+        <p:nvSpPr>
+          <p:cNvPr id="59" name="chart:category"/>
+          <p:cNvSpPr txBox="1"/>
+          <p:nvPr/>
+        </p:nvSpPr>
+        <p:spPr>
+          <a:xfrm>
+            <a:off x="9086934" y="5355335"/>
+            <a:ext cx="967316" cy="216408"/>
+          </a:xfrm>
+          <a:prstGeom prst="rect">
+            <a:avLst/>
+          </a:prstGeom>
+          <a:noFill/>
+        </p:spPr>
+        <p:txBody>
+          <a:bodyPr wrap="square" anchor="t" lIns="0" rIns="0" tIns="0" bIns="0">
+            <a:spAutoFit/>
+            <a:extLst>
+              <a:ext uri="{8AF73BB6-5E31-4F0F-A399-3D98F3B95FD9}">
+                <ns72:textLayout xmlns:ns72="urn:pptxdsl:text-layout:v1" role="body"/>
+              </a:ext>
+            </a:extLst>
+          </a:bodyPr>
+          <a:lstStyle/>
+          <a:p>
+            <a:pPr algn="ctr">
+              <a:lnSpc>
+                <a:spcPct val="130000"/>
+              </a:lnSpc>
+            </a:pPr>
+            <a:r>
+              <a:rPr sz="1200" b="0" lang="ja-JP">
+                <a:solidFill>
+                  <a:srgbClr val="666E70"/>
+                </a:solidFill>
+                <a:latin typeface="Yu Gothic"/>
+                <a:ea typeface="Yu Gothic"/>
+                <a:cs typeface="Yu Gothic"/>
+              </a:rPr>
+              <a:t>11月</a:t>
+            </a:r>
+          </a:p>
+        </p:txBody>
+      </p:sp>
+      <p:sp>
+        <p:nvSpPr>
+          <p:cNvPr id="60" name="chart:category"/>
+          <p:cNvSpPr txBox="1"/>
+          <p:nvPr/>
+        </p:nvSpPr>
+        <p:spPr>
+          <a:xfrm>
+            <a:off x="10218843" y="5355335"/>
+            <a:ext cx="967316" cy="216408"/>
+          </a:xfrm>
+          <a:prstGeom prst="rect">
+            <a:avLst/>
+          </a:prstGeom>
+          <a:noFill/>
+        </p:spPr>
+        <p:txBody>
+          <a:bodyPr wrap="square" anchor="t" lIns="0" rIns="0" tIns="0" bIns="0">
+            <a:spAutoFit/>
+            <a:extLst>
+              <a:ext uri="{8AF73BB6-5E31-4F0F-A399-3D98F3B95FD9}">
+                <ns77:textLayout xmlns:ns77="urn:pptxdsl:text-layout:v1" role="body"/>
+              </a:ext>
+            </a:extLst>
+          </a:bodyPr>
+          <a:lstStyle/>
+          <a:p>
+            <a:pPr algn="ctr">
+              <a:lnSpc>
+                <a:spcPct val="130000"/>
+              </a:lnSpc>
+            </a:pPr>
+            <a:r>
+              <a:rPr sz="1200" b="0" lang="ja-JP">
+                <a:solidFill>
+                  <a:srgbClr val="666E70"/>
+                </a:solidFill>
+                <a:latin typeface="Yu Gothic"/>
+                <a:ea typeface="Yu Gothic"/>
+                <a:cs typeface="Yu Gothic"/>
+              </a:rPr>
+              <a:t>12月</a:t>
+            </a:r>
+          </a:p>
+        </p:txBody>
+      </p:sp>
+      <p:sp>
+        <p:nvSpPr>
+          <p:cNvPr id="61" name="chart:legend"/>
+          <p:cNvSpPr txBox="1"/>
+          <p:nvPr/>
+        </p:nvSpPr>
+        <p:spPr>
+          <a:xfrm>
+            <a:off x="896112" y="5864352"/>
+            <a:ext cx="493776" cy="216408"/>
+          </a:xfrm>
+          <a:prstGeom prst="rect">
+            <a:avLst/>
+          </a:prstGeom>
+          <a:noFill/>
+        </p:spPr>
+        <p:txBody>
+          <a:bodyPr wrap="square" anchor="t" lIns="0" rIns="0" tIns="0" bIns="0">
+            <a:spAutoFit/>
+            <a:extLst>
+              <a:ext uri="{8AF73BB6-5E31-4F0F-A399-3D98F3B95FD9}">
                 <ns82:textLayout xmlns:ns82="urn:pptxdsl:text-layout:v1" role="body"/>
               </a:ext>
             </a:extLst>
@@ -6131,7 +6180,7 @@
               </a:lnSpc>
             </a:pPr>
             <a:r>
-              <a:rPr sz="819" b="0" lang="ja-JP">
+              <a:rPr sz="1200" b="0" lang="ja-JP">
                 <a:solidFill>
                   <a:srgbClr val="666E70"/>
                 </a:solidFill>
@@ -6146,97 +6195,53 @@
       </p:sp>
       <p:sp>
         <p:nvSpPr>
-          <p:cNvPr id="62" name="Rectangle 61"/>
-          <p:cNvSpPr/>
-          <p:nvPr/>
-        </p:nvSpPr>
-        <p:spPr>
-          <a:xfrm>
-            <a:off x="3310127" y="5788152"/>
-            <a:ext cx="109728" cy="109728"/>
-          </a:xfrm>
-          <a:prstGeom prst="rect">
-            <a:avLst/>
-          </a:prstGeom>
-          <a:solidFill>
-            <a:srgbClr val="182C43"/>
-          </a:solidFill>
-          <a:ln>
-            <a:noFill/>
-          </a:ln>
-          <a:effectLst/>
-        </p:spPr>
-        <p:style>
-          <a:lnRef idx="1">
-            <a:schemeClr val="accent1"/>
-          </a:lnRef>
-          <a:fillRef idx="3">
-            <a:schemeClr val="accent1"/>
-          </a:fillRef>
-          <a:effectRef idx="2">
-            <a:schemeClr val="accent1"/>
-          </a:effectRef>
-          <a:fontRef idx="minor">
-            <a:schemeClr val="lt1"/>
-          </a:fontRef>
-        </p:style>
-        <p:txBody>
-          <a:bodyPr rtlCol="0" anchor="ctr"/>
-          <a:lstStyle/>
-          <a:p>
-            <a:pPr algn="ctr"/>
+          <p:cNvPr id="62" name="chart:legend"/>
+          <p:cNvSpPr txBox="1"/>
+          <p:nvPr/>
+        </p:nvSpPr>
+        <p:spPr>
+          <a:xfrm>
+            <a:off x="1755648" y="5864352"/>
+            <a:ext cx="457200" cy="216408"/>
+          </a:xfrm>
+          <a:prstGeom prst="rect">
+            <a:avLst/>
+          </a:prstGeom>
+          <a:noFill/>
+        </p:spPr>
+        <p:txBody>
+          <a:bodyPr wrap="square" anchor="t" lIns="0" rIns="0" tIns="0" bIns="0">
+            <a:spAutoFit/>
+            <a:extLst>
+              <a:ext uri="{8AF73BB6-5E31-4F0F-A399-3D98F3B95FD9}">
+                <ns87:textLayout xmlns:ns87="urn:pptxdsl:text-layout:v1" role="body"/>
+              </a:ext>
+            </a:extLst>
+          </a:bodyPr>
+          <a:lstStyle/>
+          <a:p>
+            <a:pPr algn="l">
+              <a:lnSpc>
+                <a:spcPct val="130000"/>
+              </a:lnSpc>
+            </a:pPr>
+            <a:r>
+              <a:rPr sz="1200" b="0" lang="ja-JP">
+                <a:solidFill>
+                  <a:srgbClr val="666E70"/>
+                </a:solidFill>
+                <a:latin typeface="Yu Gothic"/>
+                <a:ea typeface="Yu Gothic"/>
+                <a:cs typeface="Yu Gothic"/>
+              </a:rPr>
+              <a:t>目標</a:t>
+            </a:r>
           </a:p>
         </p:txBody>
       </p:sp>
       <p:sp>
         <p:nvSpPr>
           <p:cNvPr id="63" name="TextBox 62"/>
-          <p:cNvSpPr txBox="1"/>
-          <p:nvPr/>
-        </p:nvSpPr>
-        <p:spPr>
-          <a:xfrm>
-            <a:off x="3474720" y="5724144"/>
-            <a:ext cx="1572768" cy="237744"/>
-          </a:xfrm>
-          <a:prstGeom prst="rect">
-            <a:avLst/>
-          </a:prstGeom>
-          <a:noFill/>
-        </p:spPr>
-        <p:txBody>
-          <a:bodyPr wrap="square" anchor="t" lIns="0" rIns="0" tIns="0" bIns="0">
-            <a:spAutoFit/>
-            <a:extLst>
-              <a:ext uri="{8AF73BB6-5E31-4F0F-A399-3D98F3B95FD9}">
-                <ns87:textLayout xmlns:ns87="urn:pptxdsl:text-layout:v1" role="body"/>
-              </a:ext>
-            </a:extLst>
-          </a:bodyPr>
-          <a:lstStyle/>
-          <a:p>
-            <a:pPr algn="l">
-              <a:lnSpc>
-                <a:spcPct val="130000"/>
-              </a:lnSpc>
-            </a:pPr>
-            <a:r>
-              <a:rPr sz="819" b="0" lang="ja-JP">
-                <a:solidFill>
-                  <a:srgbClr val="666E70"/>
-                </a:solidFill>
-                <a:latin typeface="Yu Gothic"/>
-                <a:ea typeface="Yu Gothic"/>
-                <a:cs typeface="Yu Gothic"/>
-              </a:rPr>
-              <a:t>目標</a:t>
-            </a:r>
-          </a:p>
-        </p:txBody>
-      </p:sp>
-      <p:sp>
-        <p:nvSpPr>
-          <p:cNvPr id="64" name="TextBox 63"/>
           <p:cNvSpPr txBox="1"/>
           <p:nvPr/>
         </p:nvSpPr>
@@ -6282,7 +6287,7 @@
       </p:sp>
       <p:sp>
         <p:nvSpPr>
-          <p:cNvPr id="65" name="Rectangle 64"/>
+          <p:cNvPr id="64" name="Rectangle 63"/>
           <p:cNvSpPr/>
           <p:nvPr/>
         </p:nvSpPr>
@@ -6326,7 +6331,7 @@
       </p:sp>
       <p:sp>
         <p:nvSpPr>
-          <p:cNvPr id="66" name="TextBox 65"/>
+          <p:cNvPr id="65" name="TextBox 64"/>
           <p:cNvSpPr txBox="1"/>
           <p:nvPr/>
         </p:nvSpPr>
@@ -6372,7 +6377,7 @@
       </p:sp>
       <p:sp>
         <p:nvSpPr>
-          <p:cNvPr id="67" name="TextBox 66"/>
+          <p:cNvPr id="66" name="TextBox 65"/>
           <p:cNvSpPr txBox="1"/>
           <p:nvPr/>
         </p:nvSpPr>
@@ -6583,14 +6588,14 @@
       </p:sp>
       <p:cxnSp>
         <p:nvCxnSpPr>
-          <p:cNvPr id="5" name="Connector 4"/>
+          <p:cNvPr id="5" name="chart:grid"/>
           <p:cNvCxnSpPr/>
           <p:nvPr/>
         </p:nvCxnSpPr>
         <p:spPr>
           <a:xfrm>
-            <a:off x="1417319" y="5138927"/>
-            <a:ext cx="9848089" cy="0"/>
+            <a:off x="1307592" y="5047488"/>
+            <a:ext cx="9953244" cy="0"/>
           </a:xfrm>
           <a:prstGeom prst="line">
             <a:avLst/>
@@ -6600,6 +6605,7 @@
               <a:srgbClr val="D1CFC8"/>
             </a:solidFill>
           </a:ln>
+          <a:effectLst/>
         </p:spPr>
         <p:style>
           <a:lnRef idx="2">
@@ -6608,412 +6614,7 @@
           <a:fillRef idx="0">
             <a:schemeClr val="accent1"/>
           </a:fillRef>
-          <a:effectRef idx="1">
-            <a:schemeClr val="accent1"/>
-          </a:effectRef>
-          <a:fontRef idx="minor">
-            <a:schemeClr val="tx1"/>
-          </a:fontRef>
-        </p:style>
-      </p:cxnSp>
-      <p:sp>
-        <p:nvSpPr>
-          <p:cNvPr id="6" name="TextBox 5"/>
-          <p:cNvSpPr txBox="1"/>
-          <p:nvPr/>
-        </p:nvSpPr>
-        <p:spPr>
-          <a:xfrm>
-            <a:off x="996695" y="5056631"/>
-            <a:ext cx="329184" cy="164592"/>
-          </a:xfrm>
-          <a:prstGeom prst="rect">
-            <a:avLst/>
-          </a:prstGeom>
-          <a:noFill/>
-        </p:spPr>
-        <p:txBody>
-          <a:bodyPr wrap="square" anchor="t" lIns="0" rIns="0" tIns="0" bIns="0">
-            <a:spAutoFit/>
-            <a:extLst>
-              <a:ext uri="{8AF73BB6-5E31-4F0F-A399-3D98F3B95FD9}">
-                <ns12:textLayout xmlns:ns12="urn:pptxdsl:text-layout:v1" role="body"/>
-              </a:ext>
-            </a:extLst>
-          </a:bodyPr>
-          <a:lstStyle/>
-          <a:p>
-            <a:pPr algn="r">
-              <a:lnSpc>
-                <a:spcPct val="130000"/>
-              </a:lnSpc>
-            </a:pPr>
-            <a:r>
-              <a:rPr sz="780" b="0" lang="ja-JP">
-                <a:solidFill>
-                  <a:srgbClr val="666E70"/>
-                </a:solidFill>
-                <a:latin typeface="Yu Gothic"/>
-                <a:ea typeface="Yu Gothic"/>
-                <a:cs typeface="Yu Gothic"/>
-              </a:rPr>
-              <a:t>0</a:t>
-            </a:r>
-          </a:p>
-        </p:txBody>
-      </p:sp>
-      <p:cxnSp>
-        <p:nvCxnSpPr>
-          <p:cNvPr id="7" name="Connector 6"/>
-          <p:cNvCxnSpPr/>
-          <p:nvPr/>
-        </p:nvCxnSpPr>
-        <p:spPr>
-          <a:xfrm>
-            <a:off x="1417319" y="4299966"/>
-            <a:ext cx="9848089" cy="0"/>
-          </a:xfrm>
-          <a:prstGeom prst="line">
-            <a:avLst/>
-          </a:prstGeom>
-          <a:ln w="6985">
-            <a:solidFill>
-              <a:srgbClr val="D1CFC8"/>
-            </a:solidFill>
-          </a:ln>
-        </p:spPr>
-        <p:style>
-          <a:lnRef idx="2">
-            <a:schemeClr val="accent1"/>
-          </a:lnRef>
-          <a:fillRef idx="0">
-            <a:schemeClr val="accent1"/>
-          </a:fillRef>
-          <a:effectRef idx="1">
-            <a:schemeClr val="accent1"/>
-          </a:effectRef>
-          <a:fontRef idx="minor">
-            <a:schemeClr val="tx1"/>
-          </a:fontRef>
-        </p:style>
-      </p:cxnSp>
-      <p:sp>
-        <p:nvSpPr>
-          <p:cNvPr id="8" name="TextBox 7"/>
-          <p:cNvSpPr txBox="1"/>
-          <p:nvPr/>
-        </p:nvSpPr>
-        <p:spPr>
-          <a:xfrm>
-            <a:off x="996695" y="4217670"/>
-            <a:ext cx="329184" cy="164592"/>
-          </a:xfrm>
-          <a:prstGeom prst="rect">
-            <a:avLst/>
-          </a:prstGeom>
-          <a:noFill/>
-        </p:spPr>
-        <p:txBody>
-          <a:bodyPr wrap="square" anchor="t" lIns="0" rIns="0" tIns="0" bIns="0">
-            <a:spAutoFit/>
-            <a:extLst>
-              <a:ext uri="{8AF73BB6-5E31-4F0F-A399-3D98F3B95FD9}">
-                <ns17:textLayout xmlns:ns17="urn:pptxdsl:text-layout:v1" role="body"/>
-              </a:ext>
-            </a:extLst>
-          </a:bodyPr>
-          <a:lstStyle/>
-          <a:p>
-            <a:pPr algn="r">
-              <a:lnSpc>
-                <a:spcPct val="130000"/>
-              </a:lnSpc>
-            </a:pPr>
-            <a:r>
-              <a:rPr sz="780" b="0" lang="ja-JP">
-                <a:solidFill>
-                  <a:srgbClr val="666E70"/>
-                </a:solidFill>
-                <a:latin typeface="Yu Gothic"/>
-                <a:ea typeface="Yu Gothic"/>
-                <a:cs typeface="Yu Gothic"/>
-              </a:rPr>
-              <a:t>50</a:t>
-            </a:r>
-          </a:p>
-        </p:txBody>
-      </p:sp>
-      <p:cxnSp>
-        <p:nvCxnSpPr>
-          <p:cNvPr id="9" name="Connector 8"/>
-          <p:cNvCxnSpPr/>
-          <p:nvPr/>
-        </p:nvCxnSpPr>
-        <p:spPr>
-          <a:xfrm>
-            <a:off x="1417319" y="3461003"/>
-            <a:ext cx="9848089" cy="0"/>
-          </a:xfrm>
-          <a:prstGeom prst="line">
-            <a:avLst/>
-          </a:prstGeom>
-          <a:ln w="6985">
-            <a:solidFill>
-              <a:srgbClr val="D1CFC8"/>
-            </a:solidFill>
-          </a:ln>
-        </p:spPr>
-        <p:style>
-          <a:lnRef idx="2">
-            <a:schemeClr val="accent1"/>
-          </a:lnRef>
-          <a:fillRef idx="0">
-            <a:schemeClr val="accent1"/>
-          </a:fillRef>
-          <a:effectRef idx="1">
-            <a:schemeClr val="accent1"/>
-          </a:effectRef>
-          <a:fontRef idx="minor">
-            <a:schemeClr val="tx1"/>
-          </a:fontRef>
-        </p:style>
-      </p:cxnSp>
-      <p:sp>
-        <p:nvSpPr>
-          <p:cNvPr id="10" name="TextBox 9"/>
-          <p:cNvSpPr txBox="1"/>
-          <p:nvPr/>
-        </p:nvSpPr>
-        <p:spPr>
-          <a:xfrm>
-            <a:off x="996695" y="3378707"/>
-            <a:ext cx="329184" cy="164592"/>
-          </a:xfrm>
-          <a:prstGeom prst="rect">
-            <a:avLst/>
-          </a:prstGeom>
-          <a:noFill/>
-        </p:spPr>
-        <p:txBody>
-          <a:bodyPr wrap="square" anchor="t" lIns="0" rIns="0" tIns="0" bIns="0">
-            <a:spAutoFit/>
-            <a:extLst>
-              <a:ext uri="{8AF73BB6-5E31-4F0F-A399-3D98F3B95FD9}">
-                <ns22:textLayout xmlns:ns22="urn:pptxdsl:text-layout:v1" role="body"/>
-              </a:ext>
-            </a:extLst>
-          </a:bodyPr>
-          <a:lstStyle/>
-          <a:p>
-            <a:pPr algn="r">
-              <a:lnSpc>
-                <a:spcPct val="130000"/>
-              </a:lnSpc>
-            </a:pPr>
-            <a:r>
-              <a:rPr sz="780" b="0" lang="ja-JP">
-                <a:solidFill>
-                  <a:srgbClr val="666E70"/>
-                </a:solidFill>
-                <a:latin typeface="Yu Gothic"/>
-                <a:ea typeface="Yu Gothic"/>
-                <a:cs typeface="Yu Gothic"/>
-              </a:rPr>
-              <a:t>100</a:t>
-            </a:r>
-          </a:p>
-        </p:txBody>
-      </p:sp>
-      <p:cxnSp>
-        <p:nvCxnSpPr>
-          <p:cNvPr id="11" name="Connector 10"/>
-          <p:cNvCxnSpPr/>
-          <p:nvPr/>
-        </p:nvCxnSpPr>
-        <p:spPr>
-          <a:xfrm>
-            <a:off x="1417319" y="2622041"/>
-            <a:ext cx="9848089" cy="0"/>
-          </a:xfrm>
-          <a:prstGeom prst="line">
-            <a:avLst/>
-          </a:prstGeom>
-          <a:ln w="6985">
-            <a:solidFill>
-              <a:srgbClr val="D1CFC8"/>
-            </a:solidFill>
-          </a:ln>
-        </p:spPr>
-        <p:style>
-          <a:lnRef idx="2">
-            <a:schemeClr val="accent1"/>
-          </a:lnRef>
-          <a:fillRef idx="0">
-            <a:schemeClr val="accent1"/>
-          </a:fillRef>
-          <a:effectRef idx="1">
-            <a:schemeClr val="accent1"/>
-          </a:effectRef>
-          <a:fontRef idx="minor">
-            <a:schemeClr val="tx1"/>
-          </a:fontRef>
-        </p:style>
-      </p:cxnSp>
-      <p:sp>
-        <p:nvSpPr>
-          <p:cNvPr id="12" name="TextBox 11"/>
-          <p:cNvSpPr txBox="1"/>
-          <p:nvPr/>
-        </p:nvSpPr>
-        <p:spPr>
-          <a:xfrm>
-            <a:off x="996695" y="2539746"/>
-            <a:ext cx="329184" cy="164592"/>
-          </a:xfrm>
-          <a:prstGeom prst="rect">
-            <a:avLst/>
-          </a:prstGeom>
-          <a:noFill/>
-        </p:spPr>
-        <p:txBody>
-          <a:bodyPr wrap="square" anchor="t" lIns="0" rIns="0" tIns="0" bIns="0">
-            <a:spAutoFit/>
-            <a:extLst>
-              <a:ext uri="{8AF73BB6-5E31-4F0F-A399-3D98F3B95FD9}">
-                <ns27:textLayout xmlns:ns27="urn:pptxdsl:text-layout:v1" role="body"/>
-              </a:ext>
-            </a:extLst>
-          </a:bodyPr>
-          <a:lstStyle/>
-          <a:p>
-            <a:pPr algn="r">
-              <a:lnSpc>
-                <a:spcPct val="130000"/>
-              </a:lnSpc>
-            </a:pPr>
-            <a:r>
-              <a:rPr sz="780" b="0" lang="ja-JP">
-                <a:solidFill>
-                  <a:srgbClr val="666E70"/>
-                </a:solidFill>
-                <a:latin typeface="Yu Gothic"/>
-                <a:ea typeface="Yu Gothic"/>
-                <a:cs typeface="Yu Gothic"/>
-              </a:rPr>
-              <a:t>150</a:t>
-            </a:r>
-          </a:p>
-        </p:txBody>
-      </p:sp>
-      <p:cxnSp>
-        <p:nvCxnSpPr>
-          <p:cNvPr id="13" name="Connector 12"/>
-          <p:cNvCxnSpPr/>
-          <p:nvPr/>
-        </p:nvCxnSpPr>
-        <p:spPr>
-          <a:xfrm>
-            <a:off x="1417319" y="1783079"/>
-            <a:ext cx="9848089" cy="0"/>
-          </a:xfrm>
-          <a:prstGeom prst="line">
-            <a:avLst/>
-          </a:prstGeom>
-          <a:ln w="6985">
-            <a:solidFill>
-              <a:srgbClr val="D1CFC8"/>
-            </a:solidFill>
-          </a:ln>
-        </p:spPr>
-        <p:style>
-          <a:lnRef idx="2">
-            <a:schemeClr val="accent1"/>
-          </a:lnRef>
-          <a:fillRef idx="0">
-            <a:schemeClr val="accent1"/>
-          </a:fillRef>
-          <a:effectRef idx="1">
-            <a:schemeClr val="accent1"/>
-          </a:effectRef>
-          <a:fontRef idx="minor">
-            <a:schemeClr val="tx1"/>
-          </a:fontRef>
-        </p:style>
-      </p:cxnSp>
-      <p:sp>
-        <p:nvSpPr>
-          <p:cNvPr id="14" name="TextBox 13"/>
-          <p:cNvSpPr txBox="1"/>
-          <p:nvPr/>
-        </p:nvSpPr>
-        <p:spPr>
-          <a:xfrm>
-            <a:off x="996695" y="1700783"/>
-            <a:ext cx="329184" cy="164592"/>
-          </a:xfrm>
-          <a:prstGeom prst="rect">
-            <a:avLst/>
-          </a:prstGeom>
-          <a:noFill/>
-        </p:spPr>
-        <p:txBody>
-          <a:bodyPr wrap="square" anchor="t" lIns="0" rIns="0" tIns="0" bIns="0">
-            <a:spAutoFit/>
-            <a:extLst>
-              <a:ext uri="{8AF73BB6-5E31-4F0F-A399-3D98F3B95FD9}">
-                <ns32:textLayout xmlns:ns32="urn:pptxdsl:text-layout:v1" role="body"/>
-              </a:ext>
-            </a:extLst>
-          </a:bodyPr>
-          <a:lstStyle/>
-          <a:p>
-            <a:pPr algn="r">
-              <a:lnSpc>
-                <a:spcPct val="130000"/>
-              </a:lnSpc>
-            </a:pPr>
-            <a:r>
-              <a:rPr sz="780" b="0" lang="ja-JP">
-                <a:solidFill>
-                  <a:srgbClr val="666E70"/>
-                </a:solidFill>
-                <a:latin typeface="Yu Gothic"/>
-                <a:ea typeface="Yu Gothic"/>
-                <a:cs typeface="Yu Gothic"/>
-              </a:rPr>
-              <a:t>200</a:t>
-            </a:r>
-          </a:p>
-        </p:txBody>
-      </p:sp>
-      <p:cxnSp>
-        <p:nvCxnSpPr>
-          <p:cNvPr id="15" name="Connector 14"/>
-          <p:cNvCxnSpPr/>
-          <p:nvPr/>
-        </p:nvCxnSpPr>
-        <p:spPr>
-          <a:xfrm>
-            <a:off x="1417319" y="1783080"/>
-            <a:ext cx="0" cy="3355847"/>
-          </a:xfrm>
-          <a:prstGeom prst="line">
-            <a:avLst/>
-          </a:prstGeom>
-          <a:ln w="10160">
-            <a:solidFill>
-              <a:srgbClr val="666E70"/>
-            </a:solidFill>
-          </a:ln>
-        </p:spPr>
-        <p:style>
-          <a:lnRef idx="2">
-            <a:schemeClr val="accent1"/>
-          </a:lnRef>
-          <a:fillRef idx="0">
-            <a:schemeClr val="accent1"/>
-          </a:fillRef>
-          <a:effectRef idx="1">
+          <a:effectRef idx="0">
             <a:schemeClr val="accent1"/>
           </a:effectRef>
           <a:fontRef idx="minor">
@@ -7023,23 +6624,24 @@
       </p:cxnSp>
       <p:cxnSp>
         <p:nvCxnSpPr>
-          <p:cNvPr id="16" name="Connector 15"/>
+          <p:cNvPr id="6" name="chart:grid"/>
           <p:cNvCxnSpPr/>
           <p:nvPr/>
         </p:nvCxnSpPr>
         <p:spPr>
           <a:xfrm>
-            <a:off x="1417319" y="5138927"/>
-            <a:ext cx="9848089" cy="0"/>
+            <a:off x="1307592" y="4436059"/>
+            <a:ext cx="4764595" cy="0"/>
           </a:xfrm>
           <a:prstGeom prst="line">
             <a:avLst/>
           </a:prstGeom>
-          <a:ln w="10160">
+          <a:ln w="6985">
             <a:solidFill>
-              <a:srgbClr val="666E70"/>
+              <a:srgbClr val="D1CFC8"/>
             </a:solidFill>
           </a:ln>
+          <a:effectLst/>
         </p:spPr>
         <p:style>
           <a:lnRef idx="2">
@@ -7048,7 +6650,7 @@
           <a:fillRef idx="0">
             <a:schemeClr val="accent1"/>
           </a:fillRef>
-          <a:effectRef idx="1">
+          <a:effectRef idx="0">
             <a:schemeClr val="accent1"/>
           </a:effectRef>
           <a:fontRef idx="minor">
@@ -7056,62 +6658,304 @@
           </a:fontRef>
         </p:style>
       </p:cxnSp>
-      <p:sp>
-        <p:nvSpPr>
-          <p:cNvPr id="17" name="TextBox 16"/>
-          <p:cNvSpPr txBox="1"/>
-          <p:nvPr/>
-        </p:nvSpPr>
-        <p:spPr>
-          <a:xfrm>
-            <a:off x="1444751" y="5230367"/>
-            <a:ext cx="3227832" cy="237744"/>
-          </a:xfrm>
-          <a:prstGeom prst="rect">
-            <a:avLst/>
-          </a:prstGeom>
-          <a:noFill/>
-        </p:spPr>
-        <p:txBody>
-          <a:bodyPr wrap="square" anchor="t" lIns="0" rIns="0" tIns="0" bIns="0">
-            <a:spAutoFit/>
-            <a:extLst>
-              <a:ext uri="{8AF73BB6-5E31-4F0F-A399-3D98F3B95FD9}">
-                <ns37:textLayout xmlns:ns37="urn:pptxdsl:text-layout:v1" role="body"/>
-              </a:ext>
-            </a:extLst>
-          </a:bodyPr>
-          <a:lstStyle/>
-          <a:p>
-            <a:pPr algn="ctr">
-              <a:lnSpc>
-                <a:spcPct val="130000"/>
-              </a:lnSpc>
-            </a:pPr>
-            <a:r>
-              <a:rPr sz="819" b="0" lang="ja-JP">
-                <a:solidFill>
-                  <a:srgbClr val="666E70"/>
-                </a:solidFill>
-                <a:latin typeface="Yu Gothic"/>
-                <a:ea typeface="Yu Gothic"/>
-                <a:cs typeface="Yu Gothic"/>
-              </a:rPr>
-              <a:t>導入前</a:t>
-            </a:r>
-          </a:p>
-        </p:txBody>
-      </p:sp>
-      <p:sp>
-        <p:nvSpPr>
-          <p:cNvPr id="18" name="Rectangle 17"/>
+      <p:cxnSp>
+        <p:nvCxnSpPr>
+          <p:cNvPr id="7" name="chart:grid"/>
+          <p:cNvCxnSpPr/>
+          <p:nvPr/>
+        </p:nvCxnSpPr>
+        <p:spPr>
+          <a:xfrm>
+            <a:off x="6496240" y="4436059"/>
+            <a:ext cx="4764596" cy="0"/>
+          </a:xfrm>
+          <a:prstGeom prst="line">
+            <a:avLst/>
+          </a:prstGeom>
+          <a:ln w="6985">
+            <a:solidFill>
+              <a:srgbClr val="D1CFC8"/>
+            </a:solidFill>
+          </a:ln>
+          <a:effectLst/>
+        </p:spPr>
+        <p:style>
+          <a:lnRef idx="2">
+            <a:schemeClr val="accent1"/>
+          </a:lnRef>
+          <a:fillRef idx="0">
+            <a:schemeClr val="accent1"/>
+          </a:fillRef>
+          <a:effectRef idx="0">
+            <a:schemeClr val="accent1"/>
+          </a:effectRef>
+          <a:fontRef idx="minor">
+            <a:schemeClr val="tx1"/>
+          </a:fontRef>
+        </p:style>
+      </p:cxnSp>
+      <p:cxnSp>
+        <p:nvCxnSpPr>
+          <p:cNvPr id="8" name="chart:grid"/>
+          <p:cNvCxnSpPr/>
+          <p:nvPr/>
+        </p:nvCxnSpPr>
+        <p:spPr>
+          <a:xfrm>
+            <a:off x="1307592" y="3824630"/>
+            <a:ext cx="8082343" cy="0"/>
+          </a:xfrm>
+          <a:prstGeom prst="line">
+            <a:avLst/>
+          </a:prstGeom>
+          <a:ln w="6985">
+            <a:solidFill>
+              <a:srgbClr val="D1CFC8"/>
+            </a:solidFill>
+          </a:ln>
+          <a:effectLst/>
+        </p:spPr>
+        <p:style>
+          <a:lnRef idx="2">
+            <a:schemeClr val="accent1"/>
+          </a:lnRef>
+          <a:fillRef idx="0">
+            <a:schemeClr val="accent1"/>
+          </a:fillRef>
+          <a:effectRef idx="0">
+            <a:schemeClr val="accent1"/>
+          </a:effectRef>
+          <a:fontRef idx="minor">
+            <a:schemeClr val="tx1"/>
+          </a:fontRef>
+        </p:style>
+      </p:cxnSp>
+      <p:cxnSp>
+        <p:nvCxnSpPr>
+          <p:cNvPr id="9" name="chart:grid"/>
+          <p:cNvCxnSpPr/>
+          <p:nvPr/>
+        </p:nvCxnSpPr>
+        <p:spPr>
+          <a:xfrm>
+            <a:off x="9813988" y="3824630"/>
+            <a:ext cx="1446848" cy="0"/>
+          </a:xfrm>
+          <a:prstGeom prst="line">
+            <a:avLst/>
+          </a:prstGeom>
+          <a:ln w="6985">
+            <a:solidFill>
+              <a:srgbClr val="D1CFC8"/>
+            </a:solidFill>
+          </a:ln>
+          <a:effectLst/>
+        </p:spPr>
+        <p:style>
+          <a:lnRef idx="2">
+            <a:schemeClr val="accent1"/>
+          </a:lnRef>
+          <a:fillRef idx="0">
+            <a:schemeClr val="accent1"/>
+          </a:fillRef>
+          <a:effectRef idx="0">
+            <a:schemeClr val="accent1"/>
+          </a:effectRef>
+          <a:fontRef idx="minor">
+            <a:schemeClr val="tx1"/>
+          </a:fontRef>
+        </p:style>
+      </p:cxnSp>
+      <p:cxnSp>
+        <p:nvCxnSpPr>
+          <p:cNvPr id="10" name="chart:grid"/>
+          <p:cNvCxnSpPr/>
+          <p:nvPr/>
+        </p:nvCxnSpPr>
+        <p:spPr>
+          <a:xfrm>
+            <a:off x="1307592" y="3213201"/>
+            <a:ext cx="9953244" cy="0"/>
+          </a:xfrm>
+          <a:prstGeom prst="line">
+            <a:avLst/>
+          </a:prstGeom>
+          <a:ln w="6985">
+            <a:solidFill>
+              <a:srgbClr val="D1CFC8"/>
+            </a:solidFill>
+          </a:ln>
+          <a:effectLst/>
+        </p:spPr>
+        <p:style>
+          <a:lnRef idx="2">
+            <a:schemeClr val="accent1"/>
+          </a:lnRef>
+          <a:fillRef idx="0">
+            <a:schemeClr val="accent1"/>
+          </a:fillRef>
+          <a:effectRef idx="0">
+            <a:schemeClr val="accent1"/>
+          </a:effectRef>
+          <a:fontRef idx="minor">
+            <a:schemeClr val="tx1"/>
+          </a:fontRef>
+        </p:style>
+      </p:cxnSp>
+      <p:cxnSp>
+        <p:nvCxnSpPr>
+          <p:cNvPr id="11" name="chart:grid"/>
+          <p:cNvCxnSpPr/>
+          <p:nvPr/>
+        </p:nvCxnSpPr>
+        <p:spPr>
+          <a:xfrm>
+            <a:off x="1307592" y="2601772"/>
+            <a:ext cx="1446847" cy="0"/>
+          </a:xfrm>
+          <a:prstGeom prst="line">
+            <a:avLst/>
+          </a:prstGeom>
+          <a:ln w="6985">
+            <a:solidFill>
+              <a:srgbClr val="D1CFC8"/>
+            </a:solidFill>
+          </a:ln>
+          <a:effectLst/>
+        </p:spPr>
+        <p:style>
+          <a:lnRef idx="2">
+            <a:schemeClr val="accent1"/>
+          </a:lnRef>
+          <a:fillRef idx="0">
+            <a:schemeClr val="accent1"/>
+          </a:fillRef>
+          <a:effectRef idx="0">
+            <a:schemeClr val="accent1"/>
+          </a:effectRef>
+          <a:fontRef idx="minor">
+            <a:schemeClr val="tx1"/>
+          </a:fontRef>
+        </p:style>
+      </p:cxnSp>
+      <p:cxnSp>
+        <p:nvCxnSpPr>
+          <p:cNvPr id="12" name="chart:grid"/>
+          <p:cNvCxnSpPr/>
+          <p:nvPr/>
+        </p:nvCxnSpPr>
+        <p:spPr>
+          <a:xfrm>
+            <a:off x="3178492" y="2601772"/>
+            <a:ext cx="8082344" cy="0"/>
+          </a:xfrm>
+          <a:prstGeom prst="line">
+            <a:avLst/>
+          </a:prstGeom>
+          <a:ln w="6985">
+            <a:solidFill>
+              <a:srgbClr val="D1CFC8"/>
+            </a:solidFill>
+          </a:ln>
+          <a:effectLst/>
+        </p:spPr>
+        <p:style>
+          <a:lnRef idx="2">
+            <a:schemeClr val="accent1"/>
+          </a:lnRef>
+          <a:fillRef idx="0">
+            <a:schemeClr val="accent1"/>
+          </a:fillRef>
+          <a:effectRef idx="0">
+            <a:schemeClr val="accent1"/>
+          </a:effectRef>
+          <a:fontRef idx="minor">
+            <a:schemeClr val="tx1"/>
+          </a:fontRef>
+        </p:style>
+      </p:cxnSp>
+      <p:cxnSp>
+        <p:nvCxnSpPr>
+          <p:cNvPr id="13" name="chart:grid"/>
+          <p:cNvCxnSpPr/>
+          <p:nvPr/>
+        </p:nvCxnSpPr>
+        <p:spPr>
+          <a:xfrm>
+            <a:off x="1307592" y="1990344"/>
+            <a:ext cx="9953244" cy="0"/>
+          </a:xfrm>
+          <a:prstGeom prst="line">
+            <a:avLst/>
+          </a:prstGeom>
+          <a:ln w="6985">
+            <a:solidFill>
+              <a:srgbClr val="D1CFC8"/>
+            </a:solidFill>
+          </a:ln>
+          <a:effectLst/>
+        </p:spPr>
+        <p:style>
+          <a:lnRef idx="2">
+            <a:schemeClr val="accent1"/>
+          </a:lnRef>
+          <a:fillRef idx="0">
+            <a:schemeClr val="accent1"/>
+          </a:fillRef>
+          <a:effectRef idx="0">
+            <a:schemeClr val="accent1"/>
+          </a:effectRef>
+          <a:fontRef idx="minor">
+            <a:schemeClr val="tx1"/>
+          </a:fontRef>
+        </p:style>
+      </p:cxnSp>
+      <p:cxnSp>
+        <p:nvCxnSpPr>
+          <p:cNvPr id="14" name="chart:zero-axis"/>
+          <p:cNvCxnSpPr/>
+          <p:nvPr/>
+        </p:nvCxnSpPr>
+        <p:spPr>
+          <a:xfrm>
+            <a:off x="1307592" y="5047488"/>
+            <a:ext cx="9953244" cy="0"/>
+          </a:xfrm>
+          <a:prstGeom prst="line">
+            <a:avLst/>
+          </a:prstGeom>
+          <a:ln w="11430">
+            <a:solidFill>
+              <a:srgbClr val="666E70"/>
+            </a:solidFill>
+          </a:ln>
+          <a:effectLst/>
+        </p:spPr>
+        <p:style>
+          <a:lnRef idx="2">
+            <a:schemeClr val="accent1"/>
+          </a:lnRef>
+          <a:fillRef idx="0">
+            <a:schemeClr val="accent1"/>
+          </a:fillRef>
+          <a:effectRef idx="0">
+            <a:schemeClr val="accent1"/>
+          </a:effectRef>
+          <a:fontRef idx="minor">
+            <a:schemeClr val="tx1"/>
+          </a:fontRef>
+        </p:style>
+      </p:cxnSp>
+      <p:sp>
+        <p:nvSpPr>
+          <p:cNvPr id="15" name="chart:data-bar"/>
           <p:cNvSpPr/>
           <p:nvPr/>
         </p:nvSpPr>
         <p:spPr>
           <a:xfrm>
-            <a:off x="2793491" y="3964381"/>
-            <a:ext cx="530352" cy="1174546"/>
+            <a:off x="2669286" y="2907487"/>
+            <a:ext cx="594360" cy="2140000"/>
           </a:xfrm>
           <a:prstGeom prst="rect">
             <a:avLst/>
@@ -7131,7 +6975,7 @@
           <a:fillRef idx="3">
             <a:schemeClr val="accent1"/>
           </a:fillRef>
-          <a:effectRef idx="2">
+          <a:effectRef idx="0">
             <a:schemeClr val="accent1"/>
           </a:effectRef>
           <a:fontRef idx="minor">
@@ -7148,14 +6992,14 @@
       </p:sp>
       <p:sp>
         <p:nvSpPr>
-          <p:cNvPr id="19" name="Rectangle 18"/>
+          <p:cNvPr id="16" name="chart:data-bar"/>
           <p:cNvSpPr/>
           <p:nvPr/>
         </p:nvSpPr>
         <p:spPr>
           <a:xfrm>
-            <a:off x="2793491" y="3628796"/>
-            <a:ext cx="530352" cy="335584"/>
+            <a:off x="2669286" y="2296058"/>
+            <a:ext cx="594360" cy="611428"/>
           </a:xfrm>
           <a:prstGeom prst="rect">
             <a:avLst/>
@@ -7175,7 +7019,7 @@
           <a:fillRef idx="3">
             <a:schemeClr val="accent1"/>
           </a:fillRef>
-          <a:effectRef idx="2">
+          <a:effectRef idx="0">
             <a:schemeClr val="accent1"/>
           </a:effectRef>
           <a:fontRef idx="minor">
@@ -7192,14 +7036,14 @@
       </p:sp>
       <p:sp>
         <p:nvSpPr>
-          <p:cNvPr id="20" name="Rectangle 19"/>
+          <p:cNvPr id="17" name="chart:data-bar"/>
           <p:cNvSpPr/>
           <p:nvPr/>
         </p:nvSpPr>
         <p:spPr>
           <a:xfrm>
-            <a:off x="2793491" y="3461003"/>
-            <a:ext cx="530352" cy="167792"/>
+            <a:off x="2669286" y="1990344"/>
+            <a:ext cx="594360" cy="305714"/>
           </a:xfrm>
           <a:prstGeom prst="rect">
             <a:avLst/>
@@ -7219,7 +7063,7 @@
           <a:fillRef idx="3">
             <a:schemeClr val="accent1"/>
           </a:fillRef>
-          <a:effectRef idx="2">
+          <a:effectRef idx="0">
             <a:schemeClr val="accent1"/>
           </a:effectRef>
           <a:fontRef idx="minor">
@@ -7236,60 +7080,14 @@
       </p:sp>
       <p:sp>
         <p:nvSpPr>
-          <p:cNvPr id="21" name="TextBox 20"/>
-          <p:cNvSpPr txBox="1"/>
-          <p:nvPr/>
-        </p:nvSpPr>
-        <p:spPr>
-          <a:xfrm>
-            <a:off x="4727448" y="5230367"/>
-            <a:ext cx="3227832" cy="237744"/>
-          </a:xfrm>
-          <a:prstGeom prst="rect">
-            <a:avLst/>
-          </a:prstGeom>
-          <a:noFill/>
-        </p:spPr>
-        <p:txBody>
-          <a:bodyPr wrap="square" anchor="t" lIns="0" rIns="0" tIns="0" bIns="0">
-            <a:spAutoFit/>
-            <a:extLst>
-              <a:ext uri="{8AF73BB6-5E31-4F0F-A399-3D98F3B95FD9}">
-                <ns42:textLayout xmlns:ns42="urn:pptxdsl:text-layout:v1" role="body"/>
-              </a:ext>
-            </a:extLst>
-          </a:bodyPr>
-          <a:lstStyle/>
-          <a:p>
-            <a:pPr algn="ctr">
-              <a:lnSpc>
-                <a:spcPct val="130000"/>
-              </a:lnSpc>
-            </a:pPr>
-            <a:r>
-              <a:rPr sz="819" b="0" lang="ja-JP">
-                <a:solidFill>
-                  <a:srgbClr val="666E70"/>
-                </a:solidFill>
-                <a:latin typeface="Yu Gothic"/>
-                <a:ea typeface="Yu Gothic"/>
-                <a:cs typeface="Yu Gothic"/>
-              </a:rPr>
-              <a:t>試行中</a:t>
-            </a:r>
-          </a:p>
-        </p:txBody>
-      </p:sp>
-      <p:sp>
-        <p:nvSpPr>
-          <p:cNvPr id="22" name="Rectangle 21"/>
+          <p:cNvPr id="18" name="chart:data-bar"/>
           <p:cNvSpPr/>
           <p:nvPr/>
         </p:nvSpPr>
         <p:spPr>
           <a:xfrm>
-            <a:off x="6076188" y="4501316"/>
-            <a:ext cx="530352" cy="637611"/>
+            <a:off x="5987034" y="3885773"/>
+            <a:ext cx="594360" cy="1161714"/>
           </a:xfrm>
           <a:prstGeom prst="rect">
             <a:avLst/>
@@ -7309,7 +7107,7 @@
           <a:fillRef idx="3">
             <a:schemeClr val="accent1"/>
           </a:fillRef>
-          <a:effectRef idx="2">
+          <a:effectRef idx="0">
             <a:schemeClr val="accent1"/>
           </a:effectRef>
           <a:fontRef idx="minor">
@@ -7326,14 +7124,14 @@
       </p:sp>
       <p:sp>
         <p:nvSpPr>
-          <p:cNvPr id="23" name="Rectangle 22"/>
+          <p:cNvPr id="19" name="chart:data-bar"/>
           <p:cNvSpPr/>
           <p:nvPr/>
         </p:nvSpPr>
         <p:spPr>
           <a:xfrm>
-            <a:off x="6076188" y="3964381"/>
-            <a:ext cx="530352" cy="536935"/>
+            <a:off x="5987034" y="2907487"/>
+            <a:ext cx="594360" cy="978286"/>
           </a:xfrm>
           <a:prstGeom prst="rect">
             <a:avLst/>
@@ -7353,7 +7151,7 @@
           <a:fillRef idx="3">
             <a:schemeClr val="accent1"/>
           </a:fillRef>
-          <a:effectRef idx="2">
+          <a:effectRef idx="0">
             <a:schemeClr val="accent1"/>
           </a:effectRef>
           <a:fontRef idx="minor">
@@ -7370,14 +7168,14 @@
       </p:sp>
       <p:sp>
         <p:nvSpPr>
-          <p:cNvPr id="24" name="Rectangle 23"/>
+          <p:cNvPr id="20" name="chart:data-bar"/>
           <p:cNvSpPr/>
           <p:nvPr/>
         </p:nvSpPr>
         <p:spPr>
           <a:xfrm>
-            <a:off x="6076188" y="3461003"/>
-            <a:ext cx="530352" cy="503377"/>
+            <a:off x="5987034" y="1990344"/>
+            <a:ext cx="594360" cy="917143"/>
           </a:xfrm>
           <a:prstGeom prst="rect">
             <a:avLst/>
@@ -7397,7 +7195,7 @@
           <a:fillRef idx="3">
             <a:schemeClr val="accent1"/>
           </a:fillRef>
-          <a:effectRef idx="2">
+          <a:effectRef idx="0">
             <a:schemeClr val="accent1"/>
           </a:effectRef>
           <a:fontRef idx="minor">
@@ -7414,60 +7212,14 @@
       </p:sp>
       <p:sp>
         <p:nvSpPr>
-          <p:cNvPr id="25" name="TextBox 24"/>
-          <p:cNvSpPr txBox="1"/>
-          <p:nvPr/>
-        </p:nvSpPr>
-        <p:spPr>
-          <a:xfrm>
-            <a:off x="8010144" y="5230367"/>
-            <a:ext cx="3227832" cy="237744"/>
-          </a:xfrm>
-          <a:prstGeom prst="rect">
-            <a:avLst/>
-          </a:prstGeom>
-          <a:noFill/>
-        </p:spPr>
-        <p:txBody>
-          <a:bodyPr wrap="square" anchor="t" lIns="0" rIns="0" tIns="0" bIns="0">
-            <a:spAutoFit/>
-            <a:extLst>
-              <a:ext uri="{8AF73BB6-5E31-4F0F-A399-3D98F3B95FD9}">
-                <ns47:textLayout xmlns:ns47="urn:pptxdsl:text-layout:v1" role="body"/>
-              </a:ext>
-            </a:extLst>
-          </a:bodyPr>
-          <a:lstStyle/>
-          <a:p>
-            <a:pPr algn="ctr">
-              <a:lnSpc>
-                <a:spcPct val="130000"/>
-              </a:lnSpc>
-            </a:pPr>
-            <a:r>
-              <a:rPr sz="819" b="0" lang="ja-JP">
-                <a:solidFill>
-                  <a:srgbClr val="666E70"/>
-                </a:solidFill>
-                <a:latin typeface="Yu Gothic"/>
-                <a:ea typeface="Yu Gothic"/>
-                <a:cs typeface="Yu Gothic"/>
-              </a:rPr>
-              <a:t>標準化後</a:t>
-            </a:r>
-          </a:p>
-        </p:txBody>
-      </p:sp>
-      <p:sp>
-        <p:nvSpPr>
-          <p:cNvPr id="26" name="Rectangle 25"/>
+          <p:cNvPr id="21" name="chart:data-bar"/>
           <p:cNvSpPr/>
           <p:nvPr/>
         </p:nvSpPr>
         <p:spPr>
           <a:xfrm>
-            <a:off x="9358884" y="4836901"/>
-            <a:ext cx="530352" cy="302026"/>
+            <a:off x="9304782" y="4497202"/>
+            <a:ext cx="594360" cy="550285"/>
           </a:xfrm>
           <a:prstGeom prst="rect">
             <a:avLst/>
@@ -7487,7 +7239,7 @@
           <a:fillRef idx="3">
             <a:schemeClr val="accent1"/>
           </a:fillRef>
-          <a:effectRef idx="2">
+          <a:effectRef idx="0">
             <a:schemeClr val="accent1"/>
           </a:effectRef>
           <a:fontRef idx="minor">
@@ -7504,14 +7256,14 @@
       </p:sp>
       <p:sp>
         <p:nvSpPr>
-          <p:cNvPr id="27" name="Rectangle 26"/>
+          <p:cNvPr id="22" name="chart:data-bar"/>
           <p:cNvSpPr/>
           <p:nvPr/>
         </p:nvSpPr>
         <p:spPr>
           <a:xfrm>
-            <a:off x="9358884" y="4132173"/>
-            <a:ext cx="530352" cy="704728"/>
+            <a:off x="9304782" y="3213201"/>
+            <a:ext cx="594360" cy="1284000"/>
           </a:xfrm>
           <a:prstGeom prst="rect">
             <a:avLst/>
@@ -7531,7 +7283,7 @@
           <a:fillRef idx="3">
             <a:schemeClr val="accent1"/>
           </a:fillRef>
-          <a:effectRef idx="2">
+          <a:effectRef idx="0">
             <a:schemeClr val="accent1"/>
           </a:effectRef>
           <a:fontRef idx="minor">
@@ -7548,14 +7300,14 @@
       </p:sp>
       <p:sp>
         <p:nvSpPr>
-          <p:cNvPr id="28" name="Rectangle 27"/>
+          <p:cNvPr id="23" name="chart:data-bar"/>
           <p:cNvSpPr/>
           <p:nvPr/>
         </p:nvSpPr>
         <p:spPr>
           <a:xfrm>
-            <a:off x="9358884" y="3461003"/>
-            <a:ext cx="530352" cy="671169"/>
+            <a:off x="9304782" y="1990344"/>
+            <a:ext cx="594360" cy="1222857"/>
           </a:xfrm>
           <a:prstGeom prst="rect">
             <a:avLst/>
@@ -7575,7 +7327,7 @@
           <a:fillRef idx="3">
             <a:schemeClr val="accent1"/>
           </a:fillRef>
-          <a:effectRef idx="2">
+          <a:effectRef idx="0">
             <a:schemeClr val="accent1"/>
           </a:effectRef>
           <a:fontRef idx="minor">
@@ -7592,13 +7344,13 @@
       </p:sp>
       <p:sp>
         <p:nvSpPr>
-          <p:cNvPr id="29" name="Rectangle 28"/>
+          <p:cNvPr id="24" name="chart:legend-key"/>
           <p:cNvSpPr/>
           <p:nvPr/>
         </p:nvSpPr>
         <p:spPr>
           <a:xfrm>
-            <a:off x="1435607" y="5788152"/>
+            <a:off x="694944" y="5900928"/>
             <a:ext cx="109728" cy="109728"/>
           </a:xfrm>
           <a:prstGeom prst="rect">
@@ -7619,7 +7371,7 @@
           <a:fillRef idx="3">
             <a:schemeClr val="accent1"/>
           </a:fillRef>
-          <a:effectRef idx="2">
+          <a:effectRef idx="0">
             <a:schemeClr val="accent1"/>
           </a:effectRef>
           <a:fontRef idx="minor">
@@ -7636,59 +7388,13 @@
       </p:sp>
       <p:sp>
         <p:nvSpPr>
-          <p:cNvPr id="30" name="TextBox 29"/>
-          <p:cNvSpPr txBox="1"/>
-          <p:nvPr/>
-        </p:nvSpPr>
-        <p:spPr>
-          <a:xfrm>
-            <a:off x="1600199" y="5724144"/>
-            <a:ext cx="1572768" cy="237744"/>
-          </a:xfrm>
-          <a:prstGeom prst="rect">
-            <a:avLst/>
-          </a:prstGeom>
-          <a:noFill/>
-        </p:spPr>
-        <p:txBody>
-          <a:bodyPr wrap="square" anchor="t" lIns="0" rIns="0" tIns="0" bIns="0">
-            <a:spAutoFit/>
-            <a:extLst>
-              <a:ext uri="{8AF73BB6-5E31-4F0F-A399-3D98F3B95FD9}">
-                <ns52:textLayout xmlns:ns52="urn:pptxdsl:text-layout:v1" role="body"/>
-              </a:ext>
-            </a:extLst>
-          </a:bodyPr>
-          <a:lstStyle/>
-          <a:p>
-            <a:pPr algn="l">
-              <a:lnSpc>
-                <a:spcPct val="130000"/>
-              </a:lnSpc>
-            </a:pPr>
-            <a:r>
-              <a:rPr sz="819" b="0" lang="ja-JP">
-                <a:solidFill>
-                  <a:srgbClr val="666E70"/>
-                </a:solidFill>
-                <a:latin typeface="Yu Gothic"/>
-                <a:ea typeface="Yu Gothic"/>
-                <a:cs typeface="Yu Gothic"/>
-              </a:rPr>
-              <a:t>作成</a:t>
-            </a:r>
-          </a:p>
-        </p:txBody>
-      </p:sp>
-      <p:sp>
-        <p:nvSpPr>
-          <p:cNvPr id="31" name="Rectangle 30"/>
+          <p:cNvPr id="25" name="chart:legend-key"/>
           <p:cNvSpPr/>
           <p:nvPr/>
         </p:nvSpPr>
         <p:spPr>
           <a:xfrm>
-            <a:off x="3310127" y="5788152"/>
+            <a:off x="1517904" y="5900928"/>
             <a:ext cx="109728" cy="109728"/>
           </a:xfrm>
           <a:prstGeom prst="rect">
@@ -7709,7 +7415,7 @@
           <a:fillRef idx="3">
             <a:schemeClr val="accent1"/>
           </a:fillRef>
-          <a:effectRef idx="2">
+          <a:effectRef idx="0">
             <a:schemeClr val="accent1"/>
           </a:effectRef>
           <a:fontRef idx="minor">
@@ -7726,59 +7432,13 @@
       </p:sp>
       <p:sp>
         <p:nvSpPr>
-          <p:cNvPr id="32" name="TextBox 31"/>
-          <p:cNvSpPr txBox="1"/>
-          <p:nvPr/>
-        </p:nvSpPr>
-        <p:spPr>
-          <a:xfrm>
-            <a:off x="3474720" y="5724144"/>
-            <a:ext cx="1572768" cy="237744"/>
-          </a:xfrm>
-          <a:prstGeom prst="rect">
-            <a:avLst/>
-          </a:prstGeom>
-          <a:noFill/>
-        </p:spPr>
-        <p:txBody>
-          <a:bodyPr wrap="square" anchor="t" lIns="0" rIns="0" tIns="0" bIns="0">
-            <a:spAutoFit/>
-            <a:extLst>
-              <a:ext uri="{8AF73BB6-5E31-4F0F-A399-3D98F3B95FD9}">
-                <ns57:textLayout xmlns:ns57="urn:pptxdsl:text-layout:v1" role="body"/>
-              </a:ext>
-            </a:extLst>
-          </a:bodyPr>
-          <a:lstStyle/>
-          <a:p>
-            <a:pPr algn="l">
-              <a:lnSpc>
-                <a:spcPct val="130000"/>
-              </a:lnSpc>
-            </a:pPr>
-            <a:r>
-              <a:rPr sz="819" b="0" lang="ja-JP">
-                <a:solidFill>
-                  <a:srgbClr val="666E70"/>
-                </a:solidFill>
-                <a:latin typeface="Yu Gothic"/>
-                <a:ea typeface="Yu Gothic"/>
-                <a:cs typeface="Yu Gothic"/>
-              </a:rPr>
-              <a:t>レビュー</a:t>
-            </a:r>
-          </a:p>
-        </p:txBody>
-      </p:sp>
-      <p:sp>
-        <p:nvSpPr>
-          <p:cNvPr id="33" name="Rectangle 32"/>
+          <p:cNvPr id="26" name="chart:legend-key"/>
           <p:cNvSpPr/>
           <p:nvPr/>
         </p:nvSpPr>
         <p:spPr>
           <a:xfrm>
-            <a:off x="5184648" y="5788152"/>
+            <a:off x="2542031" y="5900928"/>
             <a:ext cx="109728" cy="109728"/>
           </a:xfrm>
           <a:prstGeom prst="rect">
@@ -7799,7 +7459,7 @@
           <a:fillRef idx="3">
             <a:schemeClr val="accent1"/>
           </a:fillRef>
-          <a:effectRef idx="2">
+          <a:effectRef idx="0">
             <a:schemeClr val="accent1"/>
           </a:effectRef>
           <a:fontRef idx="minor">
@@ -7816,14 +7476,14 @@
       </p:sp>
       <p:sp>
         <p:nvSpPr>
-          <p:cNvPr id="34" name="TextBox 33"/>
-          <p:cNvSpPr txBox="1"/>
-          <p:nvPr/>
-        </p:nvSpPr>
-        <p:spPr>
-          <a:xfrm>
-            <a:off x="5349240" y="5724144"/>
-            <a:ext cx="1572768" cy="237744"/>
+          <p:cNvPr id="27" name="chart:axis-value"/>
+          <p:cNvSpPr txBox="1"/>
+          <p:nvPr/>
+        </p:nvSpPr>
+        <p:spPr>
+          <a:xfrm>
+            <a:off x="694944" y="4939284"/>
+            <a:ext cx="448056" cy="216408"/>
           </a:xfrm>
           <a:prstGeom prst="rect">
             <a:avLst/>
@@ -7835,6 +7495,466 @@
             <a:spAutoFit/>
             <a:extLst>
               <a:ext uri="{8AF73BB6-5E31-4F0F-A399-3D98F3B95FD9}">
+                <ns12:textLayout xmlns:ns12="urn:pptxdsl:text-layout:v1" role="body"/>
+              </a:ext>
+            </a:extLst>
+          </a:bodyPr>
+          <a:lstStyle/>
+          <a:p>
+            <a:pPr algn="r">
+              <a:lnSpc>
+                <a:spcPct val="130000"/>
+              </a:lnSpc>
+            </a:pPr>
+            <a:r>
+              <a:rPr sz="1200" b="0" lang="ja-JP">
+                <a:solidFill>
+                  <a:srgbClr val="666E70"/>
+                </a:solidFill>
+                <a:latin typeface="Yu Gothic"/>
+                <a:ea typeface="Yu Gothic"/>
+                <a:cs typeface="Yu Gothic"/>
+              </a:rPr>
+              <a:t>0%</a:t>
+            </a:r>
+          </a:p>
+        </p:txBody>
+      </p:sp>
+      <p:sp>
+        <p:nvSpPr>
+          <p:cNvPr id="28" name="chart:axis-value"/>
+          <p:cNvSpPr txBox="1"/>
+          <p:nvPr/>
+        </p:nvSpPr>
+        <p:spPr>
+          <a:xfrm>
+            <a:off x="694944" y="4327855"/>
+            <a:ext cx="448056" cy="216408"/>
+          </a:xfrm>
+          <a:prstGeom prst="rect">
+            <a:avLst/>
+          </a:prstGeom>
+          <a:noFill/>
+        </p:spPr>
+        <p:txBody>
+          <a:bodyPr wrap="square" anchor="t" lIns="0" rIns="0" tIns="0" bIns="0">
+            <a:spAutoFit/>
+            <a:extLst>
+              <a:ext uri="{8AF73BB6-5E31-4F0F-A399-3D98F3B95FD9}">
+                <ns17:textLayout xmlns:ns17="urn:pptxdsl:text-layout:v1" role="body"/>
+              </a:ext>
+            </a:extLst>
+          </a:bodyPr>
+          <a:lstStyle/>
+          <a:p>
+            <a:pPr algn="r">
+              <a:lnSpc>
+                <a:spcPct val="130000"/>
+              </a:lnSpc>
+            </a:pPr>
+            <a:r>
+              <a:rPr sz="1200" b="0" lang="ja-JP">
+                <a:solidFill>
+                  <a:srgbClr val="666E70"/>
+                </a:solidFill>
+                <a:latin typeface="Yu Gothic"/>
+                <a:ea typeface="Yu Gothic"/>
+                <a:cs typeface="Yu Gothic"/>
+              </a:rPr>
+              <a:t>20%</a:t>
+            </a:r>
+          </a:p>
+        </p:txBody>
+      </p:sp>
+      <p:sp>
+        <p:nvSpPr>
+          <p:cNvPr id="29" name="chart:axis-value"/>
+          <p:cNvSpPr txBox="1"/>
+          <p:nvPr/>
+        </p:nvSpPr>
+        <p:spPr>
+          <a:xfrm>
+            <a:off x="694944" y="3716426"/>
+            <a:ext cx="448056" cy="216408"/>
+          </a:xfrm>
+          <a:prstGeom prst="rect">
+            <a:avLst/>
+          </a:prstGeom>
+          <a:noFill/>
+        </p:spPr>
+        <p:txBody>
+          <a:bodyPr wrap="square" anchor="t" lIns="0" rIns="0" tIns="0" bIns="0">
+            <a:spAutoFit/>
+            <a:extLst>
+              <a:ext uri="{8AF73BB6-5E31-4F0F-A399-3D98F3B95FD9}">
+                <ns22:textLayout xmlns:ns22="urn:pptxdsl:text-layout:v1" role="body"/>
+              </a:ext>
+            </a:extLst>
+          </a:bodyPr>
+          <a:lstStyle/>
+          <a:p>
+            <a:pPr algn="r">
+              <a:lnSpc>
+                <a:spcPct val="130000"/>
+              </a:lnSpc>
+            </a:pPr>
+            <a:r>
+              <a:rPr sz="1200" b="0" lang="ja-JP">
+                <a:solidFill>
+                  <a:srgbClr val="666E70"/>
+                </a:solidFill>
+                <a:latin typeface="Yu Gothic"/>
+                <a:ea typeface="Yu Gothic"/>
+                <a:cs typeface="Yu Gothic"/>
+              </a:rPr>
+              <a:t>40%</a:t>
+            </a:r>
+          </a:p>
+        </p:txBody>
+      </p:sp>
+      <p:sp>
+        <p:nvSpPr>
+          <p:cNvPr id="30" name="chart:axis-value"/>
+          <p:cNvSpPr txBox="1"/>
+          <p:nvPr/>
+        </p:nvSpPr>
+        <p:spPr>
+          <a:xfrm>
+            <a:off x="694944" y="3104997"/>
+            <a:ext cx="448056" cy="216408"/>
+          </a:xfrm>
+          <a:prstGeom prst="rect">
+            <a:avLst/>
+          </a:prstGeom>
+          <a:noFill/>
+        </p:spPr>
+        <p:txBody>
+          <a:bodyPr wrap="square" anchor="t" lIns="0" rIns="0" tIns="0" bIns="0">
+            <a:spAutoFit/>
+            <a:extLst>
+              <a:ext uri="{8AF73BB6-5E31-4F0F-A399-3D98F3B95FD9}">
+                <ns27:textLayout xmlns:ns27="urn:pptxdsl:text-layout:v1" role="body"/>
+              </a:ext>
+            </a:extLst>
+          </a:bodyPr>
+          <a:lstStyle/>
+          <a:p>
+            <a:pPr algn="r">
+              <a:lnSpc>
+                <a:spcPct val="130000"/>
+              </a:lnSpc>
+            </a:pPr>
+            <a:r>
+              <a:rPr sz="1200" b="0" lang="ja-JP">
+                <a:solidFill>
+                  <a:srgbClr val="666E70"/>
+                </a:solidFill>
+                <a:latin typeface="Yu Gothic"/>
+                <a:ea typeface="Yu Gothic"/>
+                <a:cs typeface="Yu Gothic"/>
+              </a:rPr>
+              <a:t>60%</a:t>
+            </a:r>
+          </a:p>
+        </p:txBody>
+      </p:sp>
+      <p:sp>
+        <p:nvSpPr>
+          <p:cNvPr id="31" name="chart:axis-value"/>
+          <p:cNvSpPr txBox="1"/>
+          <p:nvPr/>
+        </p:nvSpPr>
+        <p:spPr>
+          <a:xfrm>
+            <a:off x="694944" y="2493568"/>
+            <a:ext cx="448056" cy="216408"/>
+          </a:xfrm>
+          <a:prstGeom prst="rect">
+            <a:avLst/>
+          </a:prstGeom>
+          <a:noFill/>
+        </p:spPr>
+        <p:txBody>
+          <a:bodyPr wrap="square" anchor="t" lIns="0" rIns="0" tIns="0" bIns="0">
+            <a:spAutoFit/>
+            <a:extLst>
+              <a:ext uri="{8AF73BB6-5E31-4F0F-A399-3D98F3B95FD9}">
+                <ns32:textLayout xmlns:ns32="urn:pptxdsl:text-layout:v1" role="body"/>
+              </a:ext>
+            </a:extLst>
+          </a:bodyPr>
+          <a:lstStyle/>
+          <a:p>
+            <a:pPr algn="r">
+              <a:lnSpc>
+                <a:spcPct val="130000"/>
+              </a:lnSpc>
+            </a:pPr>
+            <a:r>
+              <a:rPr sz="1200" b="0" lang="ja-JP">
+                <a:solidFill>
+                  <a:srgbClr val="666E70"/>
+                </a:solidFill>
+                <a:latin typeface="Yu Gothic"/>
+                <a:ea typeface="Yu Gothic"/>
+                <a:cs typeface="Yu Gothic"/>
+              </a:rPr>
+              <a:t>80%</a:t>
+            </a:r>
+          </a:p>
+        </p:txBody>
+      </p:sp>
+      <p:sp>
+        <p:nvSpPr>
+          <p:cNvPr id="32" name="chart:axis-value"/>
+          <p:cNvSpPr txBox="1"/>
+          <p:nvPr/>
+        </p:nvSpPr>
+        <p:spPr>
+          <a:xfrm>
+            <a:off x="694944" y="1882140"/>
+            <a:ext cx="448056" cy="216408"/>
+          </a:xfrm>
+          <a:prstGeom prst="rect">
+            <a:avLst/>
+          </a:prstGeom>
+          <a:noFill/>
+        </p:spPr>
+        <p:txBody>
+          <a:bodyPr wrap="square" anchor="t" lIns="0" rIns="0" tIns="0" bIns="0">
+            <a:spAutoFit/>
+            <a:extLst>
+              <a:ext uri="{8AF73BB6-5E31-4F0F-A399-3D98F3B95FD9}">
+                <ns37:textLayout xmlns:ns37="urn:pptxdsl:text-layout:v1" role="body"/>
+              </a:ext>
+            </a:extLst>
+          </a:bodyPr>
+          <a:lstStyle/>
+          <a:p>
+            <a:pPr algn="r">
+              <a:lnSpc>
+                <a:spcPct val="130000"/>
+              </a:lnSpc>
+            </a:pPr>
+            <a:r>
+              <a:rPr sz="1200" b="0" lang="ja-JP">
+                <a:solidFill>
+                  <a:srgbClr val="666E70"/>
+                </a:solidFill>
+                <a:latin typeface="Yu Gothic"/>
+                <a:ea typeface="Yu Gothic"/>
+                <a:cs typeface="Yu Gothic"/>
+              </a:rPr>
+              <a:t>100%</a:t>
+            </a:r>
+          </a:p>
+        </p:txBody>
+      </p:sp>
+      <p:sp>
+        <p:nvSpPr>
+          <p:cNvPr id="33" name="chart:category"/>
+          <p:cNvSpPr txBox="1"/>
+          <p:nvPr/>
+        </p:nvSpPr>
+        <p:spPr>
+          <a:xfrm>
+            <a:off x="1389888" y="5355335"/>
+            <a:ext cx="3153156" cy="216408"/>
+          </a:xfrm>
+          <a:prstGeom prst="rect">
+            <a:avLst/>
+          </a:prstGeom>
+          <a:noFill/>
+        </p:spPr>
+        <p:txBody>
+          <a:bodyPr wrap="square" anchor="t" lIns="0" rIns="0" tIns="0" bIns="0">
+            <a:spAutoFit/>
+            <a:extLst>
+              <a:ext uri="{8AF73BB6-5E31-4F0F-A399-3D98F3B95FD9}">
+                <ns42:textLayout xmlns:ns42="urn:pptxdsl:text-layout:v1" role="body"/>
+              </a:ext>
+            </a:extLst>
+          </a:bodyPr>
+          <a:lstStyle/>
+          <a:p>
+            <a:pPr algn="ctr">
+              <a:lnSpc>
+                <a:spcPct val="130000"/>
+              </a:lnSpc>
+            </a:pPr>
+            <a:r>
+              <a:rPr sz="1200" b="0" lang="ja-JP">
+                <a:solidFill>
+                  <a:srgbClr val="666E70"/>
+                </a:solidFill>
+                <a:latin typeface="Yu Gothic"/>
+                <a:ea typeface="Yu Gothic"/>
+                <a:cs typeface="Yu Gothic"/>
+              </a:rPr>
+              <a:t>導入前</a:t>
+            </a:r>
+          </a:p>
+        </p:txBody>
+      </p:sp>
+      <p:sp>
+        <p:nvSpPr>
+          <p:cNvPr id="34" name="chart:category"/>
+          <p:cNvSpPr txBox="1"/>
+          <p:nvPr/>
+        </p:nvSpPr>
+        <p:spPr>
+          <a:xfrm>
+            <a:off x="4707636" y="5355335"/>
+            <a:ext cx="3153156" cy="216408"/>
+          </a:xfrm>
+          <a:prstGeom prst="rect">
+            <a:avLst/>
+          </a:prstGeom>
+          <a:noFill/>
+        </p:spPr>
+        <p:txBody>
+          <a:bodyPr wrap="square" anchor="t" lIns="0" rIns="0" tIns="0" bIns="0">
+            <a:spAutoFit/>
+            <a:extLst>
+              <a:ext uri="{8AF73BB6-5E31-4F0F-A399-3D98F3B95FD9}">
+                <ns47:textLayout xmlns:ns47="urn:pptxdsl:text-layout:v1" role="body"/>
+              </a:ext>
+            </a:extLst>
+          </a:bodyPr>
+          <a:lstStyle/>
+          <a:p>
+            <a:pPr algn="ctr">
+              <a:lnSpc>
+                <a:spcPct val="130000"/>
+              </a:lnSpc>
+            </a:pPr>
+            <a:r>
+              <a:rPr sz="1200" b="0" lang="ja-JP">
+                <a:solidFill>
+                  <a:srgbClr val="666E70"/>
+                </a:solidFill>
+                <a:latin typeface="Yu Gothic"/>
+                <a:ea typeface="Yu Gothic"/>
+                <a:cs typeface="Yu Gothic"/>
+              </a:rPr>
+              <a:t>試行中</a:t>
+            </a:r>
+          </a:p>
+        </p:txBody>
+      </p:sp>
+      <p:sp>
+        <p:nvSpPr>
+          <p:cNvPr id="35" name="chart:category"/>
+          <p:cNvSpPr txBox="1"/>
+          <p:nvPr/>
+        </p:nvSpPr>
+        <p:spPr>
+          <a:xfrm>
+            <a:off x="8025384" y="5355335"/>
+            <a:ext cx="3153156" cy="216408"/>
+          </a:xfrm>
+          <a:prstGeom prst="rect">
+            <a:avLst/>
+          </a:prstGeom>
+          <a:noFill/>
+        </p:spPr>
+        <p:txBody>
+          <a:bodyPr wrap="square" anchor="t" lIns="0" rIns="0" tIns="0" bIns="0">
+            <a:spAutoFit/>
+            <a:extLst>
+              <a:ext uri="{8AF73BB6-5E31-4F0F-A399-3D98F3B95FD9}">
+                <ns52:textLayout xmlns:ns52="urn:pptxdsl:text-layout:v1" role="body"/>
+              </a:ext>
+            </a:extLst>
+          </a:bodyPr>
+          <a:lstStyle/>
+          <a:p>
+            <a:pPr algn="ctr">
+              <a:lnSpc>
+                <a:spcPct val="130000"/>
+              </a:lnSpc>
+            </a:pPr>
+            <a:r>
+              <a:rPr sz="1200" b="0" lang="ja-JP">
+                <a:solidFill>
+                  <a:srgbClr val="666E70"/>
+                </a:solidFill>
+                <a:latin typeface="Yu Gothic"/>
+                <a:ea typeface="Yu Gothic"/>
+                <a:cs typeface="Yu Gothic"/>
+              </a:rPr>
+              <a:t>標準化後</a:t>
+            </a:r>
+          </a:p>
+        </p:txBody>
+      </p:sp>
+      <p:sp>
+        <p:nvSpPr>
+          <p:cNvPr id="36" name="chart:legend"/>
+          <p:cNvSpPr txBox="1"/>
+          <p:nvPr/>
+        </p:nvSpPr>
+        <p:spPr>
+          <a:xfrm>
+            <a:off x="896112" y="5864352"/>
+            <a:ext cx="457200" cy="216408"/>
+          </a:xfrm>
+          <a:prstGeom prst="rect">
+            <a:avLst/>
+          </a:prstGeom>
+          <a:noFill/>
+        </p:spPr>
+        <p:txBody>
+          <a:bodyPr wrap="square" anchor="t" lIns="0" rIns="0" tIns="0" bIns="0">
+            <a:spAutoFit/>
+            <a:extLst>
+              <a:ext uri="{8AF73BB6-5E31-4F0F-A399-3D98F3B95FD9}">
+                <ns57:textLayout xmlns:ns57="urn:pptxdsl:text-layout:v1" role="body"/>
+              </a:ext>
+            </a:extLst>
+          </a:bodyPr>
+          <a:lstStyle/>
+          <a:p>
+            <a:pPr algn="l">
+              <a:lnSpc>
+                <a:spcPct val="130000"/>
+              </a:lnSpc>
+            </a:pPr>
+            <a:r>
+              <a:rPr sz="1200" b="0" lang="ja-JP">
+                <a:solidFill>
+                  <a:srgbClr val="666E70"/>
+                </a:solidFill>
+                <a:latin typeface="Yu Gothic"/>
+                <a:ea typeface="Yu Gothic"/>
+                <a:cs typeface="Yu Gothic"/>
+              </a:rPr>
+              <a:t>作成</a:t>
+            </a:r>
+          </a:p>
+        </p:txBody>
+      </p:sp>
+      <p:sp>
+        <p:nvSpPr>
+          <p:cNvPr id="37" name="chart:legend"/>
+          <p:cNvSpPr txBox="1"/>
+          <p:nvPr/>
+        </p:nvSpPr>
+        <p:spPr>
+          <a:xfrm>
+            <a:off x="1719072" y="5864352"/>
+            <a:ext cx="658368" cy="216408"/>
+          </a:xfrm>
+          <a:prstGeom prst="rect">
+            <a:avLst/>
+          </a:prstGeom>
+          <a:noFill/>
+        </p:spPr>
+        <p:txBody>
+          <a:bodyPr wrap="square" anchor="t" lIns="0" rIns="0" tIns="0" bIns="0">
+            <a:spAutoFit/>
+            <a:extLst>
+              <a:ext uri="{8AF73BB6-5E31-4F0F-A399-3D98F3B95FD9}">
                 <ns62:textLayout xmlns:ns62="urn:pptxdsl:text-layout:v1" role="body"/>
               </a:ext>
             </a:extLst>
@@ -7847,7 +7967,7 @@
               </a:lnSpc>
             </a:pPr>
             <a:r>
-              <a:rPr sz="819" b="0" lang="ja-JP">
+              <a:rPr sz="1200" b="0" lang="ja-JP">
                 <a:solidFill>
                   <a:srgbClr val="666E70"/>
                 </a:solidFill>
@@ -7855,6 +7975,52 @@
                 <a:ea typeface="Yu Gothic"/>
                 <a:cs typeface="Yu Gothic"/>
               </a:rPr>
+              <a:t>レビュー</a:t>
+            </a:r>
+          </a:p>
+        </p:txBody>
+      </p:sp>
+      <p:sp>
+        <p:nvSpPr>
+          <p:cNvPr id="38" name="chart:legend"/>
+          <p:cNvSpPr txBox="1"/>
+          <p:nvPr/>
+        </p:nvSpPr>
+        <p:spPr>
+          <a:xfrm>
+            <a:off x="2743199" y="5864352"/>
+            <a:ext cx="658368" cy="216408"/>
+          </a:xfrm>
+          <a:prstGeom prst="rect">
+            <a:avLst/>
+          </a:prstGeom>
+          <a:noFill/>
+        </p:spPr>
+        <p:txBody>
+          <a:bodyPr wrap="square" anchor="t" lIns="0" rIns="0" tIns="0" bIns="0">
+            <a:spAutoFit/>
+            <a:extLst>
+              <a:ext uri="{8AF73BB6-5E31-4F0F-A399-3D98F3B95FD9}">
+                <ns67:textLayout xmlns:ns67="urn:pptxdsl:text-layout:v1" role="body"/>
+              </a:ext>
+            </a:extLst>
+          </a:bodyPr>
+          <a:lstStyle/>
+          <a:p>
+            <a:pPr algn="l">
+              <a:lnSpc>
+                <a:spcPct val="130000"/>
+              </a:lnSpc>
+            </a:pPr>
+            <a:r>
+              <a:rPr sz="1200" b="0" lang="ja-JP">
+                <a:solidFill>
+                  <a:srgbClr val="666E70"/>
+                </a:solidFill>
+                <a:latin typeface="Yu Gothic"/>
+                <a:ea typeface="Yu Gothic"/>
+                <a:cs typeface="Yu Gothic"/>
+              </a:rPr>
               <a:t>意思決定</a:t>
             </a:r>
           </a:p>
@@ -7862,7 +8028,421 @@
       </p:sp>
       <p:sp>
         <p:nvSpPr>
-          <p:cNvPr id="35" name="TextBox 34"/>
+          <p:cNvPr id="39" name="chart:data-value"/>
+          <p:cNvSpPr txBox="1"/>
+          <p:nvPr/>
+        </p:nvSpPr>
+        <p:spPr>
+          <a:xfrm>
+            <a:off x="2791015" y="3869283"/>
+            <a:ext cx="350901" cy="216408"/>
+          </a:xfrm>
+          <a:prstGeom prst="rect">
+            <a:avLst/>
+          </a:prstGeom>
+          <a:noFill/>
+        </p:spPr>
+        <p:txBody>
+          <a:bodyPr wrap="square" anchor="t" lIns="0" rIns="0" tIns="0" bIns="0">
+            <a:spAutoFit/>
+            <a:extLst>
+              <a:ext uri="{8AF73BB6-5E31-4F0F-A399-3D98F3B95FD9}">
+                <ns72:textLayout xmlns:ns72="urn:pptxdsl:text-layout:v1" role="body"/>
+              </a:ext>
+            </a:extLst>
+          </a:bodyPr>
+          <a:lstStyle/>
+          <a:p>
+            <a:pPr algn="l">
+              <a:lnSpc>
+                <a:spcPct val="130000"/>
+              </a:lnSpc>
+            </a:pPr>
+            <a:r>
+              <a:rPr sz="1200" b="0" lang="ja-JP">
+                <a:solidFill>
+                  <a:srgbClr val="FFFFFC"/>
+                </a:solidFill>
+                <a:latin typeface="Yu Gothic"/>
+                <a:ea typeface="Yu Gothic"/>
+                <a:cs typeface="Yu Gothic"/>
+              </a:rPr>
+              <a:t>70%</a:t>
+            </a:r>
+          </a:p>
+        </p:txBody>
+      </p:sp>
+      <p:sp>
+        <p:nvSpPr>
+          <p:cNvPr id="40" name="chart:data-value"/>
+          <p:cNvSpPr txBox="1"/>
+          <p:nvPr/>
+        </p:nvSpPr>
+        <p:spPr>
+          <a:xfrm>
+            <a:off x="2791015" y="2493568"/>
+            <a:ext cx="350901" cy="216408"/>
+          </a:xfrm>
+          <a:prstGeom prst="rect">
+            <a:avLst/>
+          </a:prstGeom>
+          <a:noFill/>
+        </p:spPr>
+        <p:txBody>
+          <a:bodyPr wrap="square" anchor="t" lIns="0" rIns="0" tIns="0" bIns="0">
+            <a:spAutoFit/>
+            <a:extLst>
+              <a:ext uri="{8AF73BB6-5E31-4F0F-A399-3D98F3B95FD9}">
+                <ns77:textLayout xmlns:ns77="urn:pptxdsl:text-layout:v1" role="body"/>
+              </a:ext>
+            </a:extLst>
+          </a:bodyPr>
+          <a:lstStyle/>
+          <a:p>
+            <a:pPr algn="l">
+              <a:lnSpc>
+                <a:spcPct val="130000"/>
+              </a:lnSpc>
+            </a:pPr>
+            <a:r>
+              <a:rPr sz="1200" b="0" lang="ja-JP">
+                <a:solidFill>
+                  <a:srgbClr val="FFFFFC"/>
+                </a:solidFill>
+                <a:latin typeface="Yu Gothic"/>
+                <a:ea typeface="Yu Gothic"/>
+                <a:cs typeface="Yu Gothic"/>
+              </a:rPr>
+              <a:t>20%</a:t>
+            </a:r>
+          </a:p>
+        </p:txBody>
+      </p:sp>
+      <p:sp>
+        <p:nvSpPr>
+          <p:cNvPr id="41" name="chart:data-value"/>
+          <p:cNvSpPr txBox="1"/>
+          <p:nvPr/>
+        </p:nvSpPr>
+        <p:spPr>
+          <a:xfrm>
+            <a:off x="2791015" y="1682496"/>
+            <a:ext cx="350901" cy="216408"/>
+          </a:xfrm>
+          <a:prstGeom prst="rect">
+            <a:avLst/>
+          </a:prstGeom>
+          <a:noFill/>
+        </p:spPr>
+        <p:txBody>
+          <a:bodyPr wrap="square" anchor="t" lIns="0" rIns="0" tIns="0" bIns="0">
+            <a:spAutoFit/>
+            <a:extLst>
+              <a:ext uri="{8AF73BB6-5E31-4F0F-A399-3D98F3B95FD9}">
+                <ns82:textLayout xmlns:ns82="urn:pptxdsl:text-layout:v1" role="body"/>
+              </a:ext>
+            </a:extLst>
+          </a:bodyPr>
+          <a:lstStyle/>
+          <a:p>
+            <a:pPr algn="l">
+              <a:lnSpc>
+                <a:spcPct val="130000"/>
+              </a:lnSpc>
+            </a:pPr>
+            <a:r>
+              <a:rPr sz="1200" b="0" lang="ja-JP">
+                <a:solidFill>
+                  <a:srgbClr val="202729"/>
+                </a:solidFill>
+                <a:latin typeface="Yu Gothic"/>
+                <a:ea typeface="Yu Gothic"/>
+                <a:cs typeface="Yu Gothic"/>
+              </a:rPr>
+              <a:t>10%</a:t>
+            </a:r>
+          </a:p>
+        </p:txBody>
+      </p:sp>
+      <p:sp>
+        <p:nvSpPr>
+          <p:cNvPr id="42" name="chart:data-value"/>
+          <p:cNvSpPr txBox="1"/>
+          <p:nvPr/>
+        </p:nvSpPr>
+        <p:spPr>
+          <a:xfrm>
+            <a:off x="6108763" y="4358426"/>
+            <a:ext cx="350901" cy="216408"/>
+          </a:xfrm>
+          <a:prstGeom prst="rect">
+            <a:avLst/>
+          </a:prstGeom>
+          <a:noFill/>
+        </p:spPr>
+        <p:txBody>
+          <a:bodyPr wrap="square" anchor="t" lIns="0" rIns="0" tIns="0" bIns="0">
+            <a:spAutoFit/>
+            <a:extLst>
+              <a:ext uri="{8AF73BB6-5E31-4F0F-A399-3D98F3B95FD9}">
+                <ns87:textLayout xmlns:ns87="urn:pptxdsl:text-layout:v1" role="body"/>
+              </a:ext>
+            </a:extLst>
+          </a:bodyPr>
+          <a:lstStyle/>
+          <a:p>
+            <a:pPr algn="l">
+              <a:lnSpc>
+                <a:spcPct val="130000"/>
+              </a:lnSpc>
+            </a:pPr>
+            <a:r>
+              <a:rPr sz="1200" b="0" lang="ja-JP">
+                <a:solidFill>
+                  <a:srgbClr val="FFFFFC"/>
+                </a:solidFill>
+                <a:latin typeface="Yu Gothic"/>
+                <a:ea typeface="Yu Gothic"/>
+                <a:cs typeface="Yu Gothic"/>
+              </a:rPr>
+              <a:t>38%</a:t>
+            </a:r>
+          </a:p>
+        </p:txBody>
+      </p:sp>
+      <p:sp>
+        <p:nvSpPr>
+          <p:cNvPr id="43" name="chart:data-value"/>
+          <p:cNvSpPr txBox="1"/>
+          <p:nvPr/>
+        </p:nvSpPr>
+        <p:spPr>
+          <a:xfrm>
+            <a:off x="6108763" y="3288426"/>
+            <a:ext cx="350901" cy="216408"/>
+          </a:xfrm>
+          <a:prstGeom prst="rect">
+            <a:avLst/>
+          </a:prstGeom>
+          <a:noFill/>
+        </p:spPr>
+        <p:txBody>
+          <a:bodyPr wrap="square" anchor="t" lIns="0" rIns="0" tIns="0" bIns="0">
+            <a:spAutoFit/>
+            <a:extLst>
+              <a:ext uri="{8AF73BB6-5E31-4F0F-A399-3D98F3B95FD9}">
+                <ns92:textLayout xmlns:ns92="urn:pptxdsl:text-layout:v1" role="body"/>
+              </a:ext>
+            </a:extLst>
+          </a:bodyPr>
+          <a:lstStyle/>
+          <a:p>
+            <a:pPr algn="l">
+              <a:lnSpc>
+                <a:spcPct val="130000"/>
+              </a:lnSpc>
+            </a:pPr>
+            <a:r>
+              <a:rPr sz="1200" b="0" lang="ja-JP">
+                <a:solidFill>
+                  <a:srgbClr val="FFFFFC"/>
+                </a:solidFill>
+                <a:latin typeface="Yu Gothic"/>
+                <a:ea typeface="Yu Gothic"/>
+                <a:cs typeface="Yu Gothic"/>
+              </a:rPr>
+              <a:t>32%</a:t>
+            </a:r>
+          </a:p>
+        </p:txBody>
+      </p:sp>
+      <p:sp>
+        <p:nvSpPr>
+          <p:cNvPr id="44" name="chart:data-value"/>
+          <p:cNvSpPr txBox="1"/>
+          <p:nvPr/>
+        </p:nvSpPr>
+        <p:spPr>
+          <a:xfrm>
+            <a:off x="6108763" y="1682496"/>
+            <a:ext cx="350901" cy="216408"/>
+          </a:xfrm>
+          <a:prstGeom prst="rect">
+            <a:avLst/>
+          </a:prstGeom>
+          <a:noFill/>
+        </p:spPr>
+        <p:txBody>
+          <a:bodyPr wrap="square" anchor="t" lIns="0" rIns="0" tIns="0" bIns="0">
+            <a:spAutoFit/>
+            <a:extLst>
+              <a:ext uri="{8AF73BB6-5E31-4F0F-A399-3D98F3B95FD9}">
+                <ns97:textLayout xmlns:ns97="urn:pptxdsl:text-layout:v1" role="body"/>
+              </a:ext>
+            </a:extLst>
+          </a:bodyPr>
+          <a:lstStyle/>
+          <a:p>
+            <a:pPr algn="l">
+              <a:lnSpc>
+                <a:spcPct val="130000"/>
+              </a:lnSpc>
+            </a:pPr>
+            <a:r>
+              <a:rPr sz="1200" b="0" lang="ja-JP">
+                <a:solidFill>
+                  <a:srgbClr val="202729"/>
+                </a:solidFill>
+                <a:latin typeface="Yu Gothic"/>
+                <a:ea typeface="Yu Gothic"/>
+                <a:cs typeface="Yu Gothic"/>
+              </a:rPr>
+              <a:t>30%</a:t>
+            </a:r>
+          </a:p>
+        </p:txBody>
+      </p:sp>
+      <p:sp>
+        <p:nvSpPr>
+          <p:cNvPr id="45" name="chart:data-value"/>
+          <p:cNvSpPr txBox="1"/>
+          <p:nvPr/>
+        </p:nvSpPr>
+        <p:spPr>
+          <a:xfrm>
+            <a:off x="9426511" y="4664141"/>
+            <a:ext cx="350901" cy="216408"/>
+          </a:xfrm>
+          <a:prstGeom prst="rect">
+            <a:avLst/>
+          </a:prstGeom>
+          <a:noFill/>
+        </p:spPr>
+        <p:txBody>
+          <a:bodyPr wrap="square" anchor="t" lIns="0" rIns="0" tIns="0" bIns="0">
+            <a:spAutoFit/>
+            <a:extLst>
+              <a:ext uri="{8AF73BB6-5E31-4F0F-A399-3D98F3B95FD9}">
+                <ns102:textLayout xmlns:ns102="urn:pptxdsl:text-layout:v1" role="body"/>
+              </a:ext>
+            </a:extLst>
+          </a:bodyPr>
+          <a:lstStyle/>
+          <a:p>
+            <a:pPr algn="l">
+              <a:lnSpc>
+                <a:spcPct val="130000"/>
+              </a:lnSpc>
+            </a:pPr>
+            <a:r>
+              <a:rPr sz="1200" b="0" lang="ja-JP">
+                <a:solidFill>
+                  <a:srgbClr val="FFFFFC"/>
+                </a:solidFill>
+                <a:latin typeface="Yu Gothic"/>
+                <a:ea typeface="Yu Gothic"/>
+                <a:cs typeface="Yu Gothic"/>
+              </a:rPr>
+              <a:t>18%</a:t>
+            </a:r>
+          </a:p>
+        </p:txBody>
+      </p:sp>
+      <p:sp>
+        <p:nvSpPr>
+          <p:cNvPr id="46" name="chart:data-value"/>
+          <p:cNvSpPr txBox="1"/>
+          <p:nvPr/>
+        </p:nvSpPr>
+        <p:spPr>
+          <a:xfrm>
+            <a:off x="9426511" y="3746997"/>
+            <a:ext cx="350901" cy="216408"/>
+          </a:xfrm>
+          <a:prstGeom prst="rect">
+            <a:avLst/>
+          </a:prstGeom>
+          <a:noFill/>
+        </p:spPr>
+        <p:txBody>
+          <a:bodyPr wrap="square" anchor="t" lIns="0" rIns="0" tIns="0" bIns="0">
+            <a:spAutoFit/>
+            <a:extLst>
+              <a:ext uri="{8AF73BB6-5E31-4F0F-A399-3D98F3B95FD9}">
+                <ns107:textLayout xmlns:ns107="urn:pptxdsl:text-layout:v1" role="body"/>
+              </a:ext>
+            </a:extLst>
+          </a:bodyPr>
+          <a:lstStyle/>
+          <a:p>
+            <a:pPr algn="l">
+              <a:lnSpc>
+                <a:spcPct val="130000"/>
+              </a:lnSpc>
+            </a:pPr>
+            <a:r>
+              <a:rPr sz="1200" b="0" lang="ja-JP">
+                <a:solidFill>
+                  <a:srgbClr val="FFFFFC"/>
+                </a:solidFill>
+                <a:latin typeface="Yu Gothic"/>
+                <a:ea typeface="Yu Gothic"/>
+                <a:cs typeface="Yu Gothic"/>
+              </a:rPr>
+              <a:t>42%</a:t>
+            </a:r>
+          </a:p>
+        </p:txBody>
+      </p:sp>
+      <p:sp>
+        <p:nvSpPr>
+          <p:cNvPr id="47" name="chart:data-value"/>
+          <p:cNvSpPr txBox="1"/>
+          <p:nvPr/>
+        </p:nvSpPr>
+        <p:spPr>
+          <a:xfrm>
+            <a:off x="9426511" y="1682496"/>
+            <a:ext cx="350901" cy="216408"/>
+          </a:xfrm>
+          <a:prstGeom prst="rect">
+            <a:avLst/>
+          </a:prstGeom>
+          <a:noFill/>
+        </p:spPr>
+        <p:txBody>
+          <a:bodyPr wrap="square" anchor="t" lIns="0" rIns="0" tIns="0" bIns="0">
+            <a:spAutoFit/>
+            <a:extLst>
+              <a:ext uri="{8AF73BB6-5E31-4F0F-A399-3D98F3B95FD9}">
+                <ns112:textLayout xmlns:ns112="urn:pptxdsl:text-layout:v1" role="body"/>
+              </a:ext>
+            </a:extLst>
+          </a:bodyPr>
+          <a:lstStyle/>
+          <a:p>
+            <a:pPr algn="l">
+              <a:lnSpc>
+                <a:spcPct val="130000"/>
+              </a:lnSpc>
+            </a:pPr>
+            <a:r>
+              <a:rPr sz="1200" b="0" lang="ja-JP">
+                <a:solidFill>
+                  <a:srgbClr val="202729"/>
+                </a:solidFill>
+                <a:latin typeface="Yu Gothic"/>
+                <a:ea typeface="Yu Gothic"/>
+                <a:cs typeface="Yu Gothic"/>
+              </a:rPr>
+              <a:t>40%</a:t>
+            </a:r>
+          </a:p>
+        </p:txBody>
+      </p:sp>
+      <p:sp>
+        <p:nvSpPr>
+          <p:cNvPr id="48" name="TextBox 47"/>
           <p:cNvSpPr txBox="1"/>
           <p:nvPr/>
         </p:nvSpPr>
@@ -7881,7 +8461,7 @@
             <a:spAutoFit/>
             <a:extLst>
               <a:ext uri="{8AF73BB6-5E31-4F0F-A399-3D98F3B95FD9}">
-                <ns67:textLayout xmlns:ns67="urn:pptxdsl:text-layout:v1" role="body"/>
+                <ns117:textLayout xmlns:ns117="urn:pptxdsl:text-layout:v1" role="body"/>
               </a:ext>
             </a:extLst>
           </a:bodyPr>
@@ -7908,7 +8488,7 @@
       </p:sp>
       <p:sp>
         <p:nvSpPr>
-          <p:cNvPr id="36" name="Rectangle 35"/>
+          <p:cNvPr id="49" name="Rectangle 48"/>
           <p:cNvSpPr/>
           <p:nvPr/>
         </p:nvSpPr>
@@ -7952,7 +8532,7 @@
       </p:sp>
       <p:sp>
         <p:nvSpPr>
-          <p:cNvPr id="37" name="TextBox 36"/>
+          <p:cNvPr id="50" name="TextBox 49"/>
           <p:cNvSpPr txBox="1"/>
           <p:nvPr/>
         </p:nvSpPr>
@@ -7971,7 +8551,7 @@
             <a:spAutoFit/>
             <a:extLst>
               <a:ext uri="{8AF73BB6-5E31-4F0F-A399-3D98F3B95FD9}">
-                <ns72:textLayout xmlns:ns72="urn:pptxdsl:text-layout:v1" role="body"/>
+                <ns122:textLayout xmlns:ns122="urn:pptxdsl:text-layout:v1" role="body"/>
               </a:ext>
             </a:extLst>
           </a:bodyPr>
@@ -7998,7 +8578,7 @@
       </p:sp>
       <p:sp>
         <p:nvSpPr>
-          <p:cNvPr id="38" name="TextBox 37"/>
+          <p:cNvPr id="51" name="TextBox 50"/>
           <p:cNvSpPr txBox="1"/>
           <p:nvPr/>
         </p:nvSpPr>
@@ -8017,7 +8597,7 @@
             <a:spAutoFit/>
             <a:extLst>
               <a:ext uri="{8AF73BB6-5E31-4F0F-A399-3D98F3B95FD9}">
-                <ns77:textLayout xmlns:ns77="urn:pptxdsl:text-layout:v1" role="body"/>
+                <ns127:textLayout xmlns:ns127="urn:pptxdsl:text-layout:v1" role="body"/>
               </a:ext>
             </a:extLst>
           </a:bodyPr>
@@ -63478,14 +64058,14 @@
       </p:sp>
       <p:cxnSp>
         <p:nvCxnSpPr>
-          <p:cNvPr id="5" name="Connector 4"/>
+          <p:cNvPr id="5" name="chart:grid"/>
           <p:cNvCxnSpPr/>
           <p:nvPr/>
         </p:nvCxnSpPr>
         <p:spPr>
           <a:xfrm>
-            <a:off x="2441448" y="1783080"/>
-            <a:ext cx="0" cy="3703320"/>
+            <a:off x="2399157" y="1772412"/>
+            <a:ext cx="0" cy="3764280"/>
           </a:xfrm>
           <a:prstGeom prst="line">
             <a:avLst/>
@@ -63495,6 +64075,7 @@
               <a:srgbClr val="D1CFC8"/>
             </a:solidFill>
           </a:ln>
+          <a:effectLst/>
         </p:spPr>
         <p:style>
           <a:lnRef idx="2">
@@ -63503,7 +64084,7 @@
           <a:fillRef idx="0">
             <a:schemeClr val="accent1"/>
           </a:fillRef>
-          <a:effectRef idx="1">
+          <a:effectRef idx="0">
             <a:schemeClr val="accent1"/>
           </a:effectRef>
           <a:fontRef idx="minor">
@@ -63511,62 +64092,16 @@
           </a:fontRef>
         </p:style>
       </p:cxnSp>
-      <p:sp>
-        <p:nvSpPr>
-          <p:cNvPr id="6" name="TextBox 5"/>
-          <p:cNvSpPr txBox="1"/>
-          <p:nvPr/>
-        </p:nvSpPr>
-        <p:spPr>
-          <a:xfrm>
-            <a:off x="2276856" y="5559552"/>
-            <a:ext cx="329184" cy="164592"/>
-          </a:xfrm>
-          <a:prstGeom prst="rect">
-            <a:avLst/>
-          </a:prstGeom>
-          <a:noFill/>
-        </p:spPr>
-        <p:txBody>
-          <a:bodyPr wrap="square" anchor="t" lIns="0" rIns="0" tIns="0" bIns="0">
-            <a:spAutoFit/>
-            <a:extLst>
-              <a:ext uri="{8AF73BB6-5E31-4F0F-A399-3D98F3B95FD9}">
-                <ns12:textLayout xmlns:ns12="urn:pptxdsl:text-layout:v1" role="body"/>
-              </a:ext>
-            </a:extLst>
-          </a:bodyPr>
-          <a:lstStyle/>
-          <a:p>
-            <a:pPr algn="ctr">
-              <a:lnSpc>
-                <a:spcPct val="130000"/>
-              </a:lnSpc>
-            </a:pPr>
-            <a:r>
-              <a:rPr sz="780" b="0" lang="ja-JP">
-                <a:solidFill>
-                  <a:srgbClr val="666E70"/>
-                </a:solidFill>
-                <a:latin typeface="Yu Gothic"/>
-                <a:ea typeface="Yu Gothic"/>
-                <a:cs typeface="Yu Gothic"/>
-              </a:rPr>
-              <a:t>0</a:t>
-            </a:r>
-          </a:p>
-        </p:txBody>
-      </p:sp>
       <p:cxnSp>
         <p:nvCxnSpPr>
-          <p:cNvPr id="7" name="Connector 6"/>
+          <p:cNvPr id="6" name="chart:grid"/>
           <p:cNvCxnSpPr/>
           <p:nvPr/>
         </p:nvCxnSpPr>
         <p:spPr>
           <a:xfrm>
-            <a:off x="4654296" y="1783080"/>
-            <a:ext cx="0" cy="3703320"/>
+            <a:off x="4105884" y="1772412"/>
+            <a:ext cx="0" cy="135255"/>
           </a:xfrm>
           <a:prstGeom prst="line">
             <a:avLst/>
@@ -63576,6 +64111,7 @@
               <a:srgbClr val="D1CFC8"/>
             </a:solidFill>
           </a:ln>
+          <a:effectLst/>
         </p:spPr>
         <p:style>
           <a:lnRef idx="2">
@@ -63584,7 +64120,7 @@
           <a:fillRef idx="0">
             <a:schemeClr val="accent1"/>
           </a:fillRef>
-          <a:effectRef idx="1">
+          <a:effectRef idx="0">
             <a:schemeClr val="accent1"/>
           </a:effectRef>
           <a:fontRef idx="minor">
@@ -63592,62 +64128,16 @@
           </a:fontRef>
         </p:style>
       </p:cxnSp>
-      <p:sp>
-        <p:nvSpPr>
-          <p:cNvPr id="8" name="TextBox 7"/>
-          <p:cNvSpPr txBox="1"/>
-          <p:nvPr/>
-        </p:nvSpPr>
-        <p:spPr>
-          <a:xfrm>
-            <a:off x="4489704" y="5559552"/>
-            <a:ext cx="329184" cy="164592"/>
-          </a:xfrm>
-          <a:prstGeom prst="rect">
-            <a:avLst/>
-          </a:prstGeom>
-          <a:noFill/>
-        </p:spPr>
-        <p:txBody>
-          <a:bodyPr wrap="square" anchor="t" lIns="0" rIns="0" tIns="0" bIns="0">
-            <a:spAutoFit/>
-            <a:extLst>
-              <a:ext uri="{8AF73BB6-5E31-4F0F-A399-3D98F3B95FD9}">
-                <ns17:textLayout xmlns:ns17="urn:pptxdsl:text-layout:v1" role="body"/>
-              </a:ext>
-            </a:extLst>
-          </a:bodyPr>
-          <a:lstStyle/>
-          <a:p>
-            <a:pPr algn="ctr">
-              <a:lnSpc>
-                <a:spcPct val="130000"/>
-              </a:lnSpc>
-            </a:pPr>
-            <a:r>
-              <a:rPr sz="780" b="0" lang="ja-JP">
-                <a:solidFill>
-                  <a:srgbClr val="666E70"/>
-                </a:solidFill>
-                <a:latin typeface="Yu Gothic"/>
-                <a:ea typeface="Yu Gothic"/>
-                <a:cs typeface="Yu Gothic"/>
-              </a:rPr>
-              <a:t>100</a:t>
-            </a:r>
-          </a:p>
-        </p:txBody>
-      </p:sp>
       <p:cxnSp>
         <p:nvCxnSpPr>
-          <p:cNvPr id="9" name="Connector 8"/>
+          <p:cNvPr id="7" name="chart:grid"/>
           <p:cNvCxnSpPr/>
           <p:nvPr/>
         </p:nvCxnSpPr>
         <p:spPr>
           <a:xfrm>
-            <a:off x="6867144" y="1783080"/>
-            <a:ext cx="0" cy="3703320"/>
+            <a:off x="4105884" y="2197227"/>
+            <a:ext cx="0" cy="1032510"/>
           </a:xfrm>
           <a:prstGeom prst="line">
             <a:avLst/>
@@ -63657,6 +64147,7 @@
               <a:srgbClr val="D1CFC8"/>
             </a:solidFill>
           </a:ln>
+          <a:effectLst/>
         </p:spPr>
         <p:style>
           <a:lnRef idx="2">
@@ -63665,7 +64156,7 @@
           <a:fillRef idx="0">
             <a:schemeClr val="accent1"/>
           </a:fillRef>
-          <a:effectRef idx="1">
+          <a:effectRef idx="0">
             <a:schemeClr val="accent1"/>
           </a:effectRef>
           <a:fontRef idx="minor">
@@ -63673,62 +64164,16 @@
           </a:fontRef>
         </p:style>
       </p:cxnSp>
-      <p:sp>
-        <p:nvSpPr>
-          <p:cNvPr id="10" name="TextBox 9"/>
-          <p:cNvSpPr txBox="1"/>
-          <p:nvPr/>
-        </p:nvSpPr>
-        <p:spPr>
-          <a:xfrm>
-            <a:off x="6702552" y="5559552"/>
-            <a:ext cx="329184" cy="164592"/>
-          </a:xfrm>
-          <a:prstGeom prst="rect">
-            <a:avLst/>
-          </a:prstGeom>
-          <a:noFill/>
-        </p:spPr>
-        <p:txBody>
-          <a:bodyPr wrap="square" anchor="t" lIns="0" rIns="0" tIns="0" bIns="0">
-            <a:spAutoFit/>
-            <a:extLst>
-              <a:ext uri="{8AF73BB6-5E31-4F0F-A399-3D98F3B95FD9}">
-                <ns22:textLayout xmlns:ns22="urn:pptxdsl:text-layout:v1" role="body"/>
-              </a:ext>
-            </a:extLst>
-          </a:bodyPr>
-          <a:lstStyle/>
-          <a:p>
-            <a:pPr algn="ctr">
-              <a:lnSpc>
-                <a:spcPct val="130000"/>
-              </a:lnSpc>
-            </a:pPr>
-            <a:r>
-              <a:rPr sz="780" b="0" lang="ja-JP">
-                <a:solidFill>
-                  <a:srgbClr val="666E70"/>
-                </a:solidFill>
-                <a:latin typeface="Yu Gothic"/>
-                <a:ea typeface="Yu Gothic"/>
-                <a:cs typeface="Yu Gothic"/>
-              </a:rPr>
-              <a:t>200</a:t>
-            </a:r>
-          </a:p>
-        </p:txBody>
-      </p:sp>
       <p:cxnSp>
         <p:nvCxnSpPr>
-          <p:cNvPr id="11" name="Connector 10"/>
+          <p:cNvPr id="8" name="chart:grid"/>
           <p:cNvCxnSpPr/>
           <p:nvPr/>
         </p:nvCxnSpPr>
         <p:spPr>
           <a:xfrm>
-            <a:off x="9079992" y="1783080"/>
-            <a:ext cx="0" cy="3703320"/>
+            <a:off x="4105884" y="3519297"/>
+            <a:ext cx="0" cy="2017395"/>
           </a:xfrm>
           <a:prstGeom prst="line">
             <a:avLst/>
@@ -63738,6 +64183,7 @@
               <a:srgbClr val="D1CFC8"/>
             </a:solidFill>
           </a:ln>
+          <a:effectLst/>
         </p:spPr>
         <p:style>
           <a:lnRef idx="2">
@@ -63746,7 +64192,7 @@
           <a:fillRef idx="0">
             <a:schemeClr val="accent1"/>
           </a:fillRef>
-          <a:effectRef idx="1">
+          <a:effectRef idx="0">
             <a:schemeClr val="accent1"/>
           </a:effectRef>
           <a:fontRef idx="minor">
@@ -63754,62 +64200,16 @@
           </a:fontRef>
         </p:style>
       </p:cxnSp>
-      <p:sp>
-        <p:nvSpPr>
-          <p:cNvPr id="12" name="TextBox 11"/>
-          <p:cNvSpPr txBox="1"/>
-          <p:nvPr/>
-        </p:nvSpPr>
-        <p:spPr>
-          <a:xfrm>
-            <a:off x="8915400" y="5559552"/>
-            <a:ext cx="329184" cy="164592"/>
-          </a:xfrm>
-          <a:prstGeom prst="rect">
-            <a:avLst/>
-          </a:prstGeom>
-          <a:noFill/>
-        </p:spPr>
-        <p:txBody>
-          <a:bodyPr wrap="square" anchor="t" lIns="0" rIns="0" tIns="0" bIns="0">
-            <a:spAutoFit/>
-            <a:extLst>
-              <a:ext uri="{8AF73BB6-5E31-4F0F-A399-3D98F3B95FD9}">
-                <ns27:textLayout xmlns:ns27="urn:pptxdsl:text-layout:v1" role="body"/>
-              </a:ext>
-            </a:extLst>
-          </a:bodyPr>
-          <a:lstStyle/>
-          <a:p>
-            <a:pPr algn="ctr">
-              <a:lnSpc>
-                <a:spcPct val="130000"/>
-              </a:lnSpc>
-            </a:pPr>
-            <a:r>
-              <a:rPr sz="780" b="0" lang="ja-JP">
-                <a:solidFill>
-                  <a:srgbClr val="666E70"/>
-                </a:solidFill>
-                <a:latin typeface="Yu Gothic"/>
-                <a:ea typeface="Yu Gothic"/>
-                <a:cs typeface="Yu Gothic"/>
-              </a:rPr>
-              <a:t>300</a:t>
-            </a:r>
-          </a:p>
-        </p:txBody>
-      </p:sp>
       <p:cxnSp>
         <p:nvCxnSpPr>
-          <p:cNvPr id="13" name="Connector 12"/>
+          <p:cNvPr id="9" name="chart:grid"/>
           <p:cNvCxnSpPr/>
           <p:nvPr/>
         </p:nvCxnSpPr>
         <p:spPr>
           <a:xfrm>
-            <a:off x="11292840" y="1783080"/>
-            <a:ext cx="0" cy="3703320"/>
+            <a:off x="5812612" y="1772412"/>
+            <a:ext cx="0" cy="3764280"/>
           </a:xfrm>
           <a:prstGeom prst="line">
             <a:avLst/>
@@ -63819,6 +64219,7 @@
               <a:srgbClr val="D1CFC8"/>
             </a:solidFill>
           </a:ln>
+          <a:effectLst/>
         </p:spPr>
         <p:style>
           <a:lnRef idx="2">
@@ -63827,7 +64228,7 @@
           <a:fillRef idx="0">
             <a:schemeClr val="accent1"/>
           </a:fillRef>
-          <a:effectRef idx="1">
+          <a:effectRef idx="0">
             <a:schemeClr val="accent1"/>
           </a:effectRef>
           <a:fontRef idx="minor">
@@ -63835,71 +64236,26 @@
           </a:fontRef>
         </p:style>
       </p:cxnSp>
-      <p:sp>
-        <p:nvSpPr>
-          <p:cNvPr id="14" name="TextBox 13"/>
-          <p:cNvSpPr txBox="1"/>
-          <p:nvPr/>
-        </p:nvSpPr>
-        <p:spPr>
-          <a:xfrm>
-            <a:off x="11128248" y="5559552"/>
-            <a:ext cx="329184" cy="164592"/>
-          </a:xfrm>
-          <a:prstGeom prst="rect">
-            <a:avLst/>
-          </a:prstGeom>
-          <a:noFill/>
-        </p:spPr>
-        <p:txBody>
-          <a:bodyPr wrap="square" anchor="t" lIns="0" rIns="0" tIns="0" bIns="0">
-            <a:spAutoFit/>
-            <a:extLst>
-              <a:ext uri="{8AF73BB6-5E31-4F0F-A399-3D98F3B95FD9}">
-                <ns32:textLayout xmlns:ns32="urn:pptxdsl:text-layout:v1" role="body"/>
-              </a:ext>
-            </a:extLst>
-          </a:bodyPr>
-          <a:lstStyle/>
-          <a:p>
-            <a:pPr algn="ctr">
-              <a:lnSpc>
-                <a:spcPct val="130000"/>
-              </a:lnSpc>
-            </a:pPr>
-            <a:r>
-              <a:rPr sz="780" b="0" lang="ja-JP">
-                <a:solidFill>
-                  <a:srgbClr val="666E70"/>
-                </a:solidFill>
-                <a:latin typeface="Yu Gothic"/>
-                <a:ea typeface="Yu Gothic"/>
-                <a:cs typeface="Yu Gothic"/>
-              </a:rPr>
-              <a:t>400</a:t>
-            </a:r>
-          </a:p>
-        </p:txBody>
-      </p:sp>
       <p:cxnSp>
         <p:nvCxnSpPr>
-          <p:cNvPr id="15" name="Connector 14"/>
+          <p:cNvPr id="10" name="chart:grid"/>
           <p:cNvCxnSpPr/>
           <p:nvPr/>
         </p:nvCxnSpPr>
         <p:spPr>
           <a:xfrm>
-            <a:off x="2441448" y="5486400"/>
-            <a:ext cx="8851392" cy="0"/>
+            <a:off x="7519339" y="1772412"/>
+            <a:ext cx="0" cy="3764280"/>
           </a:xfrm>
           <a:prstGeom prst="line">
             <a:avLst/>
           </a:prstGeom>
-          <a:ln w="10160">
+          <a:ln w="6985">
             <a:solidFill>
-              <a:srgbClr val="666E70"/>
+              <a:srgbClr val="D1CFC8"/>
             </a:solidFill>
           </a:ln>
+          <a:effectLst/>
         </p:spPr>
         <p:style>
           <a:lnRef idx="2">
@@ -63908,7 +64264,7 @@
           <a:fillRef idx="0">
             <a:schemeClr val="accent1"/>
           </a:fillRef>
-          <a:effectRef idx="1">
+          <a:effectRef idx="0">
             <a:schemeClr val="accent1"/>
           </a:effectRef>
           <a:fontRef idx="minor">
@@ -63916,62 +64272,160 @@
           </a:fontRef>
         </p:style>
       </p:cxnSp>
-      <p:sp>
-        <p:nvSpPr>
-          <p:cNvPr id="16" name="TextBox 15"/>
-          <p:cNvSpPr txBox="1"/>
-          <p:nvPr/>
-        </p:nvSpPr>
-        <p:spPr>
-          <a:xfrm>
-            <a:off x="868680" y="2108835"/>
-            <a:ext cx="1389888" cy="274320"/>
-          </a:xfrm>
-          <a:prstGeom prst="rect">
-            <a:avLst/>
-          </a:prstGeom>
-          <a:noFill/>
-        </p:spPr>
-        <p:txBody>
-          <a:bodyPr wrap="square" anchor="t" lIns="0" rIns="0" tIns="0" bIns="0">
-            <a:spAutoFit/>
-            <a:extLst>
-              <a:ext uri="{8AF73BB6-5E31-4F0F-A399-3D98F3B95FD9}">
-                <ns37:textLayout xmlns:ns37="urn:pptxdsl:text-layout:v1" role="natural"/>
-              </a:ext>
-            </a:extLst>
-          </a:bodyPr>
-          <a:lstStyle/>
-          <a:p>
-            <a:pPr algn="r">
-              <a:lnSpc>
-                <a:spcPct val="130000"/>
-              </a:lnSpc>
-            </a:pPr>
-            <a:r>
-              <a:rPr sz="940" b="1" lang="ja-JP">
-                <a:solidFill>
-                  <a:srgbClr val="182C43"/>
-                </a:solidFill>
-                <a:latin typeface="Yu Gothic"/>
-                <a:ea typeface="Yu Gothic"/>
-                <a:cs typeface="Yu Gothic"/>
-              </a:rPr>
-              <a:t>週次報告</a:t>
-            </a:r>
-          </a:p>
-        </p:txBody>
-      </p:sp>
-      <p:sp>
-        <p:nvSpPr>
-          <p:cNvPr id="17" name="Rectangle 16"/>
+      <p:cxnSp>
+        <p:nvCxnSpPr>
+          <p:cNvPr id="11" name="chart:grid"/>
+          <p:cNvCxnSpPr/>
+          <p:nvPr/>
+        </p:nvCxnSpPr>
+        <p:spPr>
+          <a:xfrm>
+            <a:off x="9226067" y="1772412"/>
+            <a:ext cx="0" cy="3764280"/>
+          </a:xfrm>
+          <a:prstGeom prst="line">
+            <a:avLst/>
+          </a:prstGeom>
+          <a:ln w="6985">
+            <a:solidFill>
+              <a:srgbClr val="D1CFC8"/>
+            </a:solidFill>
+          </a:ln>
+          <a:effectLst/>
+        </p:spPr>
+        <p:style>
+          <a:lnRef idx="2">
+            <a:schemeClr val="accent1"/>
+          </a:lnRef>
+          <a:fillRef idx="0">
+            <a:schemeClr val="accent1"/>
+          </a:fillRef>
+          <a:effectRef idx="0">
+            <a:schemeClr val="accent1"/>
+          </a:effectRef>
+          <a:fontRef idx="minor">
+            <a:schemeClr val="tx1"/>
+          </a:fontRef>
+        </p:style>
+      </p:cxnSp>
+      <p:cxnSp>
+        <p:nvCxnSpPr>
+          <p:cNvPr id="12" name="chart:grid"/>
+          <p:cNvCxnSpPr/>
+          <p:nvPr/>
+        </p:nvCxnSpPr>
+        <p:spPr>
+          <a:xfrm>
+            <a:off x="10932795" y="1772412"/>
+            <a:ext cx="0" cy="2017395"/>
+          </a:xfrm>
+          <a:prstGeom prst="line">
+            <a:avLst/>
+          </a:prstGeom>
+          <a:ln w="6985">
+            <a:solidFill>
+              <a:srgbClr val="D1CFC8"/>
+            </a:solidFill>
+          </a:ln>
+          <a:effectLst/>
+        </p:spPr>
+        <p:style>
+          <a:lnRef idx="2">
+            <a:schemeClr val="accent1"/>
+          </a:lnRef>
+          <a:fillRef idx="0">
+            <a:schemeClr val="accent1"/>
+          </a:fillRef>
+          <a:effectRef idx="0">
+            <a:schemeClr val="accent1"/>
+          </a:effectRef>
+          <a:fontRef idx="minor">
+            <a:schemeClr val="tx1"/>
+          </a:fontRef>
+        </p:style>
+      </p:cxnSp>
+      <p:cxnSp>
+        <p:nvCxnSpPr>
+          <p:cNvPr id="13" name="chart:grid"/>
+          <p:cNvCxnSpPr/>
+          <p:nvPr/>
+        </p:nvCxnSpPr>
+        <p:spPr>
+          <a:xfrm>
+            <a:off x="10932795" y="4079367"/>
+            <a:ext cx="0" cy="1457325"/>
+          </a:xfrm>
+          <a:prstGeom prst="line">
+            <a:avLst/>
+          </a:prstGeom>
+          <a:ln w="6985">
+            <a:solidFill>
+              <a:srgbClr val="D1CFC8"/>
+            </a:solidFill>
+          </a:ln>
+          <a:effectLst/>
+        </p:spPr>
+        <p:style>
+          <a:lnRef idx="2">
+            <a:schemeClr val="accent1"/>
+          </a:lnRef>
+          <a:fillRef idx="0">
+            <a:schemeClr val="accent1"/>
+          </a:fillRef>
+          <a:effectRef idx="0">
+            <a:schemeClr val="accent1"/>
+          </a:effectRef>
+          <a:fontRef idx="minor">
+            <a:schemeClr val="tx1"/>
+          </a:fontRef>
+        </p:style>
+      </p:cxnSp>
+      <p:cxnSp>
+        <p:nvCxnSpPr>
+          <p:cNvPr id="14" name="chart:zero-axis"/>
+          <p:cNvCxnSpPr/>
+          <p:nvPr/>
+        </p:nvCxnSpPr>
+        <p:spPr>
+          <a:xfrm>
+            <a:off x="2399157" y="1772412"/>
+            <a:ext cx="0" cy="3764280"/>
+          </a:xfrm>
+          <a:prstGeom prst="line">
+            <a:avLst/>
+          </a:prstGeom>
+          <a:ln w="11430">
+            <a:solidFill>
+              <a:srgbClr val="666E70"/>
+            </a:solidFill>
+          </a:ln>
+          <a:effectLst/>
+        </p:spPr>
+        <p:style>
+          <a:lnRef idx="2">
+            <a:schemeClr val="accent1"/>
+          </a:lnRef>
+          <a:fillRef idx="0">
+            <a:schemeClr val="accent1"/>
+          </a:fillRef>
+          <a:effectRef idx="0">
+            <a:schemeClr val="accent1"/>
+          </a:effectRef>
+          <a:fontRef idx="minor">
+            <a:schemeClr val="tx1"/>
+          </a:fontRef>
+        </p:style>
+      </p:cxnSp>
+      <p:sp>
+        <p:nvSpPr>
+          <p:cNvPr id="15" name="chart:data-bar"/>
           <p:cNvSpPr/>
           <p:nvPr/>
         </p:nvSpPr>
         <p:spPr>
           <a:xfrm>
-            <a:off x="2441448" y="2026539"/>
-            <a:ext cx="995781" cy="201168"/>
+            <a:off x="2399157" y="1957959"/>
+            <a:ext cx="1536054" cy="188976"/>
           </a:xfrm>
           <a:prstGeom prst="rect">
             <a:avLst/>
@@ -63991,7 +64445,7 @@
           <a:fillRef idx="3">
             <a:schemeClr val="accent1"/>
           </a:fillRef>
-          <a:effectRef idx="2">
+          <a:effectRef idx="0">
             <a:schemeClr val="accent1"/>
           </a:effectRef>
           <a:fontRef idx="minor">
@@ -64008,60 +64462,14 @@
       </p:sp>
       <p:sp>
         <p:nvSpPr>
-          <p:cNvPr id="18" name="TextBox 17"/>
-          <p:cNvSpPr txBox="1"/>
-          <p:nvPr/>
-        </p:nvSpPr>
-        <p:spPr>
-          <a:xfrm>
-            <a:off x="3492093" y="2008251"/>
-            <a:ext cx="512064" cy="237744"/>
-          </a:xfrm>
-          <a:prstGeom prst="rect">
-            <a:avLst/>
-          </a:prstGeom>
-          <a:noFill/>
-        </p:spPr>
-        <p:txBody>
-          <a:bodyPr wrap="square" anchor="t" lIns="0" rIns="0" tIns="0" bIns="0">
-            <a:spAutoFit/>
-            <a:extLst>
-              <a:ext uri="{8AF73BB6-5E31-4F0F-A399-3D98F3B95FD9}">
-                <ns42:textLayout xmlns:ns42="urn:pptxdsl:text-layout:v1" role="body"/>
-              </a:ext>
-            </a:extLst>
-          </a:bodyPr>
-          <a:lstStyle/>
-          <a:p>
-            <a:pPr algn="l">
-              <a:lnSpc>
-                <a:spcPct val="130000"/>
-              </a:lnSpc>
-            </a:pPr>
-            <a:r>
-              <a:rPr sz="760" b="0" lang="ja-JP">
-                <a:solidFill>
-                  <a:srgbClr val="666E70"/>
-                </a:solidFill>
-                <a:latin typeface="Yu Gothic"/>
-                <a:ea typeface="Yu Gothic"/>
-                <a:cs typeface="Yu Gothic"/>
-              </a:rPr>
-              <a:t>45</a:t>
-            </a:r>
-          </a:p>
-        </p:txBody>
-      </p:sp>
-      <p:sp>
-        <p:nvSpPr>
-          <p:cNvPr id="19" name="Rectangle 18"/>
+          <p:cNvPr id="16" name="chart:data-bar"/>
           <p:cNvSpPr/>
           <p:nvPr/>
         </p:nvSpPr>
         <p:spPr>
           <a:xfrm>
-            <a:off x="2441448" y="2264283"/>
-            <a:ext cx="287670" cy="201168"/>
+            <a:off x="2399157" y="2338958"/>
+            <a:ext cx="443749" cy="188976"/>
           </a:xfrm>
           <a:prstGeom prst="rect">
             <a:avLst/>
@@ -64081,7 +64489,7 @@
           <a:fillRef idx="3">
             <a:schemeClr val="accent1"/>
           </a:fillRef>
-          <a:effectRef idx="2">
+          <a:effectRef idx="0">
             <a:schemeClr val="accent1"/>
           </a:effectRef>
           <a:fontRef idx="minor">
@@ -64098,106 +64506,14 @@
       </p:sp>
       <p:sp>
         <p:nvSpPr>
-          <p:cNvPr id="20" name="TextBox 19"/>
-          <p:cNvSpPr txBox="1"/>
-          <p:nvPr/>
-        </p:nvSpPr>
-        <p:spPr>
-          <a:xfrm>
-            <a:off x="2783982" y="2245995"/>
-            <a:ext cx="512064" cy="237744"/>
-          </a:xfrm>
-          <a:prstGeom prst="rect">
-            <a:avLst/>
-          </a:prstGeom>
-          <a:noFill/>
-        </p:spPr>
-        <p:txBody>
-          <a:bodyPr wrap="square" anchor="t" lIns="0" rIns="0" tIns="0" bIns="0">
-            <a:spAutoFit/>
-            <a:extLst>
-              <a:ext uri="{8AF73BB6-5E31-4F0F-A399-3D98F3B95FD9}">
-                <ns47:textLayout xmlns:ns47="urn:pptxdsl:text-layout:v1" role="body"/>
-              </a:ext>
-            </a:extLst>
-          </a:bodyPr>
-          <a:lstStyle/>
-          <a:p>
-            <a:pPr algn="l">
-              <a:lnSpc>
-                <a:spcPct val="130000"/>
-              </a:lnSpc>
-            </a:pPr>
-            <a:r>
-              <a:rPr sz="760" b="0" lang="ja-JP">
-                <a:solidFill>
-                  <a:srgbClr val="666E70"/>
-                </a:solidFill>
-                <a:latin typeface="Yu Gothic"/>
-                <a:ea typeface="Yu Gothic"/>
-                <a:cs typeface="Yu Gothic"/>
-              </a:rPr>
-              <a:t>13</a:t>
-            </a:r>
-          </a:p>
-        </p:txBody>
-      </p:sp>
-      <p:sp>
-        <p:nvSpPr>
-          <p:cNvPr id="21" name="TextBox 20"/>
-          <p:cNvSpPr txBox="1"/>
-          <p:nvPr/>
-        </p:nvSpPr>
-        <p:spPr>
-          <a:xfrm>
-            <a:off x="868680" y="3034665"/>
-            <a:ext cx="1389888" cy="274320"/>
-          </a:xfrm>
-          <a:prstGeom prst="rect">
-            <a:avLst/>
-          </a:prstGeom>
-          <a:noFill/>
-        </p:spPr>
-        <p:txBody>
-          <a:bodyPr wrap="square" anchor="t" lIns="0" rIns="0" tIns="0" bIns="0">
-            <a:spAutoFit/>
-            <a:extLst>
-              <a:ext uri="{8AF73BB6-5E31-4F0F-A399-3D98F3B95FD9}">
-                <ns52:textLayout xmlns:ns52="urn:pptxdsl:text-layout:v1" role="natural"/>
-              </a:ext>
-            </a:extLst>
-          </a:bodyPr>
-          <a:lstStyle/>
-          <a:p>
-            <a:pPr algn="r">
-              <a:lnSpc>
-                <a:spcPct val="130000"/>
-              </a:lnSpc>
-            </a:pPr>
-            <a:r>
-              <a:rPr sz="940" b="1" lang="ja-JP">
-                <a:solidFill>
-                  <a:srgbClr val="182C43"/>
-                </a:solidFill>
-                <a:latin typeface="Yu Gothic"/>
-                <a:ea typeface="Yu Gothic"/>
-                <a:cs typeface="Yu Gothic"/>
-              </a:rPr>
-              <a:t>月次レビュー</a:t>
-            </a:r>
-          </a:p>
-        </p:txBody>
-      </p:sp>
-      <p:sp>
-        <p:nvSpPr>
-          <p:cNvPr id="22" name="Rectangle 21"/>
+          <p:cNvPr id="17" name="chart:data-bar"/>
           <p:cNvSpPr/>
           <p:nvPr/>
         </p:nvSpPr>
         <p:spPr>
           <a:xfrm>
-            <a:off x="2441448" y="2952369"/>
-            <a:ext cx="2655417" cy="201168"/>
+            <a:off x="2399157" y="2899029"/>
+            <a:ext cx="4096146" cy="188976"/>
           </a:xfrm>
           <a:prstGeom prst="rect">
             <a:avLst/>
@@ -64217,7 +64533,7 @@
           <a:fillRef idx="3">
             <a:schemeClr val="accent1"/>
           </a:fillRef>
-          <a:effectRef idx="2">
+          <a:effectRef idx="0">
             <a:schemeClr val="accent1"/>
           </a:effectRef>
           <a:fontRef idx="minor">
@@ -64234,60 +64550,14 @@
       </p:sp>
       <p:sp>
         <p:nvSpPr>
-          <p:cNvPr id="23" name="TextBox 22"/>
-          <p:cNvSpPr txBox="1"/>
-          <p:nvPr/>
-        </p:nvSpPr>
-        <p:spPr>
-          <a:xfrm>
-            <a:off x="5151729" y="2934081"/>
-            <a:ext cx="512064" cy="237744"/>
-          </a:xfrm>
-          <a:prstGeom prst="rect">
-            <a:avLst/>
-          </a:prstGeom>
-          <a:noFill/>
-        </p:spPr>
-        <p:txBody>
-          <a:bodyPr wrap="square" anchor="t" lIns="0" rIns="0" tIns="0" bIns="0">
-            <a:spAutoFit/>
-            <a:extLst>
-              <a:ext uri="{8AF73BB6-5E31-4F0F-A399-3D98F3B95FD9}">
-                <ns57:textLayout xmlns:ns57="urn:pptxdsl:text-layout:v1" role="body"/>
-              </a:ext>
-            </a:extLst>
-          </a:bodyPr>
-          <a:lstStyle/>
-          <a:p>
-            <a:pPr algn="l">
-              <a:lnSpc>
-                <a:spcPct val="130000"/>
-              </a:lnSpc>
-            </a:pPr>
-            <a:r>
-              <a:rPr sz="760" b="0" lang="ja-JP">
-                <a:solidFill>
-                  <a:srgbClr val="666E70"/>
-                </a:solidFill>
-                <a:latin typeface="Yu Gothic"/>
-                <a:ea typeface="Yu Gothic"/>
-                <a:cs typeface="Yu Gothic"/>
-              </a:rPr>
-              <a:t>120</a:t>
-            </a:r>
-          </a:p>
-        </p:txBody>
-      </p:sp>
-      <p:sp>
-        <p:nvSpPr>
-          <p:cNvPr id="24" name="Rectangle 23"/>
+          <p:cNvPr id="18" name="chart:data-bar"/>
           <p:cNvSpPr/>
           <p:nvPr/>
         </p:nvSpPr>
         <p:spPr>
           <a:xfrm>
-            <a:off x="2441448" y="3190113"/>
-            <a:ext cx="929396" cy="201168"/>
+            <a:off x="2399157" y="3280029"/>
+            <a:ext cx="1433651" cy="188976"/>
           </a:xfrm>
           <a:prstGeom prst="rect">
             <a:avLst/>
@@ -64307,7 +64577,7 @@
           <a:fillRef idx="3">
             <a:schemeClr val="accent1"/>
           </a:fillRef>
-          <a:effectRef idx="2">
+          <a:effectRef idx="0">
             <a:schemeClr val="accent1"/>
           </a:effectRef>
           <a:fontRef idx="minor">
@@ -64324,106 +64594,14 @@
       </p:sp>
       <p:sp>
         <p:nvSpPr>
-          <p:cNvPr id="25" name="TextBox 24"/>
-          <p:cNvSpPr txBox="1"/>
-          <p:nvPr/>
-        </p:nvSpPr>
-        <p:spPr>
-          <a:xfrm>
-            <a:off x="3425708" y="3171825"/>
-            <a:ext cx="512064" cy="237744"/>
-          </a:xfrm>
-          <a:prstGeom prst="rect">
-            <a:avLst/>
-          </a:prstGeom>
-          <a:noFill/>
-        </p:spPr>
-        <p:txBody>
-          <a:bodyPr wrap="square" anchor="t" lIns="0" rIns="0" tIns="0" bIns="0">
-            <a:spAutoFit/>
-            <a:extLst>
-              <a:ext uri="{8AF73BB6-5E31-4F0F-A399-3D98F3B95FD9}">
-                <ns62:textLayout xmlns:ns62="urn:pptxdsl:text-layout:v1" role="body"/>
-              </a:ext>
-            </a:extLst>
-          </a:bodyPr>
-          <a:lstStyle/>
-          <a:p>
-            <a:pPr algn="l">
-              <a:lnSpc>
-                <a:spcPct val="130000"/>
-              </a:lnSpc>
-            </a:pPr>
-            <a:r>
-              <a:rPr sz="760" b="0" lang="ja-JP">
-                <a:solidFill>
-                  <a:srgbClr val="666E70"/>
-                </a:solidFill>
-                <a:latin typeface="Yu Gothic"/>
-                <a:ea typeface="Yu Gothic"/>
-                <a:cs typeface="Yu Gothic"/>
-              </a:rPr>
-              <a:t>42</a:t>
-            </a:r>
-          </a:p>
-        </p:txBody>
-      </p:sp>
-      <p:sp>
-        <p:nvSpPr>
-          <p:cNvPr id="26" name="TextBox 25"/>
-          <p:cNvSpPr txBox="1"/>
-          <p:nvPr/>
-        </p:nvSpPr>
-        <p:spPr>
-          <a:xfrm>
-            <a:off x="868680" y="3960495"/>
-            <a:ext cx="1389888" cy="274320"/>
-          </a:xfrm>
-          <a:prstGeom prst="rect">
-            <a:avLst/>
-          </a:prstGeom>
-          <a:noFill/>
-        </p:spPr>
-        <p:txBody>
-          <a:bodyPr wrap="square" anchor="t" lIns="0" rIns="0" tIns="0" bIns="0">
-            <a:spAutoFit/>
-            <a:extLst>
-              <a:ext uri="{8AF73BB6-5E31-4F0F-A399-3D98F3B95FD9}">
-                <ns67:textLayout xmlns:ns67="urn:pptxdsl:text-layout:v1" role="natural"/>
-              </a:ext>
-            </a:extLst>
-          </a:bodyPr>
-          <a:lstStyle/>
-          <a:p>
-            <a:pPr algn="r">
-              <a:lnSpc>
-                <a:spcPct val="130000"/>
-              </a:lnSpc>
-            </a:pPr>
-            <a:r>
-              <a:rPr sz="940" b="1" lang="ja-JP">
-                <a:solidFill>
-                  <a:srgbClr val="182C43"/>
-                </a:solidFill>
-                <a:latin typeface="Yu Gothic"/>
-                <a:ea typeface="Yu Gothic"/>
-                <a:cs typeface="Yu Gothic"/>
-              </a:rPr>
-              <a:t>調査サマリ</a:t>
-            </a:r>
-          </a:p>
-        </p:txBody>
-      </p:sp>
-      <p:sp>
-        <p:nvSpPr>
-          <p:cNvPr id="27" name="Rectangle 26"/>
+          <p:cNvPr id="19" name="chart:data-bar"/>
           <p:cNvSpPr/>
           <p:nvPr/>
         </p:nvSpPr>
         <p:spPr>
           <a:xfrm>
-            <a:off x="2441448" y="3878199"/>
-            <a:ext cx="5310835" cy="201168"/>
+            <a:off x="2399157" y="3840099"/>
+            <a:ext cx="8192292" cy="188976"/>
           </a:xfrm>
           <a:prstGeom prst="rect">
             <a:avLst/>
@@ -64443,7 +64621,7 @@
           <a:fillRef idx="3">
             <a:schemeClr val="accent1"/>
           </a:fillRef>
-          <a:effectRef idx="2">
+          <a:effectRef idx="0">
             <a:schemeClr val="accent1"/>
           </a:effectRef>
           <a:fontRef idx="minor">
@@ -64460,60 +64638,14 @@
       </p:sp>
       <p:sp>
         <p:nvSpPr>
-          <p:cNvPr id="28" name="TextBox 27"/>
-          <p:cNvSpPr txBox="1"/>
-          <p:nvPr/>
-        </p:nvSpPr>
-        <p:spPr>
-          <a:xfrm>
-            <a:off x="7807147" y="3859911"/>
-            <a:ext cx="512064" cy="237744"/>
-          </a:xfrm>
-          <a:prstGeom prst="rect">
-            <a:avLst/>
-          </a:prstGeom>
-          <a:noFill/>
-        </p:spPr>
-        <p:txBody>
-          <a:bodyPr wrap="square" anchor="t" lIns="0" rIns="0" tIns="0" bIns="0">
-            <a:spAutoFit/>
-            <a:extLst>
-              <a:ext uri="{8AF73BB6-5E31-4F0F-A399-3D98F3B95FD9}">
-                <ns72:textLayout xmlns:ns72="urn:pptxdsl:text-layout:v1" role="body"/>
-              </a:ext>
-            </a:extLst>
-          </a:bodyPr>
-          <a:lstStyle/>
-          <a:p>
-            <a:pPr algn="l">
-              <a:lnSpc>
-                <a:spcPct val="130000"/>
-              </a:lnSpc>
-            </a:pPr>
-            <a:r>
-              <a:rPr sz="760" b="0" lang="ja-JP">
-                <a:solidFill>
-                  <a:srgbClr val="666E70"/>
-                </a:solidFill>
-                <a:latin typeface="Yu Gothic"/>
-                <a:ea typeface="Yu Gothic"/>
-                <a:cs typeface="Yu Gothic"/>
-              </a:rPr>
-              <a:t>240</a:t>
-            </a:r>
-          </a:p>
-        </p:txBody>
-      </p:sp>
-      <p:sp>
-        <p:nvSpPr>
-          <p:cNvPr id="29" name="Rectangle 28"/>
+          <p:cNvPr id="20" name="chart:data-bar"/>
           <p:cNvSpPr/>
           <p:nvPr/>
         </p:nvSpPr>
         <p:spPr>
           <a:xfrm>
-            <a:off x="2441448" y="4115943"/>
-            <a:ext cx="1880920" cy="201168"/>
+            <a:off x="2399157" y="4221099"/>
+            <a:ext cx="2901436" cy="188976"/>
           </a:xfrm>
           <a:prstGeom prst="rect">
             <a:avLst/>
@@ -64533,7 +64665,7 @@
           <a:fillRef idx="3">
             <a:schemeClr val="accent1"/>
           </a:fillRef>
-          <a:effectRef idx="2">
+          <a:effectRef idx="0">
             <a:schemeClr val="accent1"/>
           </a:effectRef>
           <a:fontRef idx="minor">
@@ -64550,106 +64682,14 @@
       </p:sp>
       <p:sp>
         <p:nvSpPr>
-          <p:cNvPr id="30" name="TextBox 29"/>
-          <p:cNvSpPr txBox="1"/>
-          <p:nvPr/>
-        </p:nvSpPr>
-        <p:spPr>
-          <a:xfrm>
-            <a:off x="4377232" y="4097655"/>
-            <a:ext cx="512064" cy="237744"/>
-          </a:xfrm>
-          <a:prstGeom prst="rect">
-            <a:avLst/>
-          </a:prstGeom>
-          <a:noFill/>
-        </p:spPr>
-        <p:txBody>
-          <a:bodyPr wrap="square" anchor="t" lIns="0" rIns="0" tIns="0" bIns="0">
-            <a:spAutoFit/>
-            <a:extLst>
-              <a:ext uri="{8AF73BB6-5E31-4F0F-A399-3D98F3B95FD9}">
-                <ns77:textLayout xmlns:ns77="urn:pptxdsl:text-layout:v1" role="body"/>
-              </a:ext>
-            </a:extLst>
-          </a:bodyPr>
-          <a:lstStyle/>
-          <a:p>
-            <a:pPr algn="l">
-              <a:lnSpc>
-                <a:spcPct val="130000"/>
-              </a:lnSpc>
-            </a:pPr>
-            <a:r>
-              <a:rPr sz="760" b="0" lang="ja-JP">
-                <a:solidFill>
-                  <a:srgbClr val="666E70"/>
-                </a:solidFill>
-                <a:latin typeface="Yu Gothic"/>
-                <a:ea typeface="Yu Gothic"/>
-                <a:cs typeface="Yu Gothic"/>
-              </a:rPr>
-              <a:t>85</a:t>
-            </a:r>
-          </a:p>
-        </p:txBody>
-      </p:sp>
-      <p:sp>
-        <p:nvSpPr>
-          <p:cNvPr id="31" name="TextBox 30"/>
-          <p:cNvSpPr txBox="1"/>
-          <p:nvPr/>
-        </p:nvSpPr>
-        <p:spPr>
-          <a:xfrm>
-            <a:off x="868680" y="4886324"/>
-            <a:ext cx="1389888" cy="274320"/>
-          </a:xfrm>
-          <a:prstGeom prst="rect">
-            <a:avLst/>
-          </a:prstGeom>
-          <a:noFill/>
-        </p:spPr>
-        <p:txBody>
-          <a:bodyPr wrap="square" anchor="t" lIns="0" rIns="0" tIns="0" bIns="0">
-            <a:spAutoFit/>
-            <a:extLst>
-              <a:ext uri="{8AF73BB6-5E31-4F0F-A399-3D98F3B95FD9}">
-                <ns82:textLayout xmlns:ns82="urn:pptxdsl:text-layout:v1" role="natural"/>
-              </a:ext>
-            </a:extLst>
-          </a:bodyPr>
-          <a:lstStyle/>
-          <a:p>
-            <a:pPr algn="r">
-              <a:lnSpc>
-                <a:spcPct val="130000"/>
-              </a:lnSpc>
-            </a:pPr>
-            <a:r>
-              <a:rPr sz="940" b="1" lang="ja-JP">
-                <a:solidFill>
-                  <a:srgbClr val="182C43"/>
-                </a:solidFill>
-                <a:latin typeface="Yu Gothic"/>
-                <a:ea typeface="Yu Gothic"/>
-                <a:cs typeface="Yu Gothic"/>
-              </a:rPr>
-              <a:t>役員向け抜粋</a:t>
-            </a:r>
-          </a:p>
-        </p:txBody>
-      </p:sp>
-      <p:sp>
-        <p:nvSpPr>
-          <p:cNvPr id="32" name="Rectangle 31"/>
+          <p:cNvPr id="21" name="chart:data-bar"/>
           <p:cNvSpPr/>
           <p:nvPr/>
         </p:nvSpPr>
         <p:spPr>
           <a:xfrm>
-            <a:off x="2441448" y="4804028"/>
-            <a:ext cx="1991563" cy="201168"/>
+            <a:off x="2399157" y="4781169"/>
+            <a:ext cx="3072109" cy="188976"/>
           </a:xfrm>
           <a:prstGeom prst="rect">
             <a:avLst/>
@@ -64669,7 +64709,7 @@
           <a:fillRef idx="3">
             <a:schemeClr val="accent1"/>
           </a:fillRef>
-          <a:effectRef idx="2">
+          <a:effectRef idx="0">
             <a:schemeClr val="accent1"/>
           </a:effectRef>
           <a:fontRef idx="minor">
@@ -64686,60 +64726,14 @@
       </p:sp>
       <p:sp>
         <p:nvSpPr>
-          <p:cNvPr id="33" name="TextBox 32"/>
-          <p:cNvSpPr txBox="1"/>
-          <p:nvPr/>
-        </p:nvSpPr>
-        <p:spPr>
-          <a:xfrm>
-            <a:off x="4487875" y="4785741"/>
-            <a:ext cx="512064" cy="237744"/>
-          </a:xfrm>
-          <a:prstGeom prst="rect">
-            <a:avLst/>
-          </a:prstGeom>
-          <a:noFill/>
-        </p:spPr>
-        <p:txBody>
-          <a:bodyPr wrap="square" anchor="t" lIns="0" rIns="0" tIns="0" bIns="0">
-            <a:spAutoFit/>
-            <a:extLst>
-              <a:ext uri="{8AF73BB6-5E31-4F0F-A399-3D98F3B95FD9}">
-                <ns87:textLayout xmlns:ns87="urn:pptxdsl:text-layout:v1" role="body"/>
-              </a:ext>
-            </a:extLst>
-          </a:bodyPr>
-          <a:lstStyle/>
-          <a:p>
-            <a:pPr algn="l">
-              <a:lnSpc>
-                <a:spcPct val="130000"/>
-              </a:lnSpc>
-            </a:pPr>
-            <a:r>
-              <a:rPr sz="760" b="0" lang="ja-JP">
-                <a:solidFill>
-                  <a:srgbClr val="666E70"/>
-                </a:solidFill>
-                <a:latin typeface="Yu Gothic"/>
-                <a:ea typeface="Yu Gothic"/>
-                <a:cs typeface="Yu Gothic"/>
-              </a:rPr>
-              <a:t>90</a:t>
-            </a:r>
-          </a:p>
-        </p:txBody>
-      </p:sp>
-      <p:sp>
-        <p:nvSpPr>
-          <p:cNvPr id="34" name="Rectangle 33"/>
+          <p:cNvPr id="22" name="chart:data-bar"/>
           <p:cNvSpPr/>
           <p:nvPr/>
         </p:nvSpPr>
         <p:spPr>
           <a:xfrm>
-            <a:off x="2441448" y="5041772"/>
-            <a:ext cx="619597" cy="201168"/>
+            <a:off x="2399157" y="5162169"/>
+            <a:ext cx="955767" cy="188976"/>
           </a:xfrm>
           <a:prstGeom prst="rect">
             <a:avLst/>
@@ -64759,7 +64753,7 @@
           <a:fillRef idx="3">
             <a:schemeClr val="accent1"/>
           </a:fillRef>
-          <a:effectRef idx="2">
+          <a:effectRef idx="0">
             <a:schemeClr val="accent1"/>
           </a:effectRef>
           <a:fontRef idx="minor">
@@ -64776,59 +64770,13 @@
       </p:sp>
       <p:sp>
         <p:nvSpPr>
-          <p:cNvPr id="35" name="TextBox 34"/>
-          <p:cNvSpPr txBox="1"/>
-          <p:nvPr/>
-        </p:nvSpPr>
-        <p:spPr>
-          <a:xfrm>
-            <a:off x="3115909" y="5023484"/>
-            <a:ext cx="512064" cy="237744"/>
-          </a:xfrm>
-          <a:prstGeom prst="rect">
-            <a:avLst/>
-          </a:prstGeom>
-          <a:noFill/>
-        </p:spPr>
-        <p:txBody>
-          <a:bodyPr wrap="square" anchor="t" lIns="0" rIns="0" tIns="0" bIns="0">
-            <a:spAutoFit/>
-            <a:extLst>
-              <a:ext uri="{8AF73BB6-5E31-4F0F-A399-3D98F3B95FD9}">
-                <ns92:textLayout xmlns:ns92="urn:pptxdsl:text-layout:v1" role="body"/>
-              </a:ext>
-            </a:extLst>
-          </a:bodyPr>
-          <a:lstStyle/>
-          <a:p>
-            <a:pPr algn="l">
-              <a:lnSpc>
-                <a:spcPct val="130000"/>
-              </a:lnSpc>
-            </a:pPr>
-            <a:r>
-              <a:rPr sz="760" b="0" lang="ja-JP">
-                <a:solidFill>
-                  <a:srgbClr val="666E70"/>
-                </a:solidFill>
-                <a:latin typeface="Yu Gothic"/>
-                <a:ea typeface="Yu Gothic"/>
-                <a:cs typeface="Yu Gothic"/>
-              </a:rPr>
-              <a:t>28</a:t>
-            </a:r>
-          </a:p>
-        </p:txBody>
-      </p:sp>
-      <p:sp>
-        <p:nvSpPr>
-          <p:cNvPr id="36" name="Rectangle 35"/>
+          <p:cNvPr id="23" name="chart:legend-key"/>
           <p:cNvSpPr/>
           <p:nvPr/>
         </p:nvSpPr>
         <p:spPr>
           <a:xfrm>
-            <a:off x="1435607" y="5788152"/>
+            <a:off x="694944" y="5900928"/>
             <a:ext cx="109728" cy="109728"/>
           </a:xfrm>
           <a:prstGeom prst="rect">
@@ -64849,7 +64797,7 @@
           <a:fillRef idx="3">
             <a:schemeClr val="accent1"/>
           </a:fillRef>
-          <a:effectRef idx="2">
+          <a:effectRef idx="0">
             <a:schemeClr val="accent1"/>
           </a:effectRef>
           <a:fontRef idx="minor">
@@ -64866,59 +64814,13 @@
       </p:sp>
       <p:sp>
         <p:nvSpPr>
-          <p:cNvPr id="37" name="TextBox 36"/>
-          <p:cNvSpPr txBox="1"/>
-          <p:nvPr/>
-        </p:nvSpPr>
-        <p:spPr>
-          <a:xfrm>
-            <a:off x="1600199" y="5724144"/>
-            <a:ext cx="1572768" cy="237744"/>
-          </a:xfrm>
-          <a:prstGeom prst="rect">
-            <a:avLst/>
-          </a:prstGeom>
-          <a:noFill/>
-        </p:spPr>
-        <p:txBody>
-          <a:bodyPr wrap="square" anchor="t" lIns="0" rIns="0" tIns="0" bIns="0">
-            <a:spAutoFit/>
-            <a:extLst>
-              <a:ext uri="{8AF73BB6-5E31-4F0F-A399-3D98F3B95FD9}">
-                <ns97:textLayout xmlns:ns97="urn:pptxdsl:text-layout:v1" role="body"/>
-              </a:ext>
-            </a:extLst>
-          </a:bodyPr>
-          <a:lstStyle/>
-          <a:p>
-            <a:pPr algn="l">
-              <a:lnSpc>
-                <a:spcPct val="130000"/>
-              </a:lnSpc>
-            </a:pPr>
-            <a:r>
-              <a:rPr sz="819" b="0" lang="ja-JP">
-                <a:solidFill>
-                  <a:srgbClr val="666E70"/>
-                </a:solidFill>
-                <a:latin typeface="Yu Gothic"/>
-                <a:ea typeface="Yu Gothic"/>
-                <a:cs typeface="Yu Gothic"/>
-              </a:rPr>
-              <a:t>従来 (分)</a:t>
-            </a:r>
-          </a:p>
-        </p:txBody>
-      </p:sp>
-      <p:sp>
-        <p:nvSpPr>
-          <p:cNvPr id="38" name="Rectangle 37"/>
+          <p:cNvPr id="24" name="chart:legend-key"/>
           <p:cNvSpPr/>
           <p:nvPr/>
         </p:nvSpPr>
         <p:spPr>
           <a:xfrm>
-            <a:off x="3310127" y="5788152"/>
+            <a:off x="1729359" y="5900928"/>
             <a:ext cx="109728" cy="109728"/>
           </a:xfrm>
           <a:prstGeom prst="rect">
@@ -64939,7 +64841,7 @@
           <a:fillRef idx="3">
             <a:schemeClr val="accent1"/>
           </a:fillRef>
-          <a:effectRef idx="2">
+          <a:effectRef idx="0">
             <a:schemeClr val="accent1"/>
           </a:effectRef>
           <a:fontRef idx="minor">
@@ -64956,14 +64858,14 @@
       </p:sp>
       <p:sp>
         <p:nvSpPr>
-          <p:cNvPr id="39" name="TextBox 38"/>
-          <p:cNvSpPr txBox="1"/>
-          <p:nvPr/>
-        </p:nvSpPr>
-        <p:spPr>
-          <a:xfrm>
-            <a:off x="3474720" y="5724144"/>
-            <a:ext cx="1572768" cy="237744"/>
+          <p:cNvPr id="25" name="chart:axis-value"/>
+          <p:cNvSpPr txBox="1"/>
+          <p:nvPr/>
+        </p:nvSpPr>
+        <p:spPr>
+          <a:xfrm>
+            <a:off x="2334577" y="5600700"/>
+            <a:ext cx="129159" cy="216408"/>
           </a:xfrm>
           <a:prstGeom prst="rect">
             <a:avLst/>
@@ -64975,6 +64877,834 @@
             <a:spAutoFit/>
             <a:extLst>
               <a:ext uri="{8AF73BB6-5E31-4F0F-A399-3D98F3B95FD9}">
+                <ns12:textLayout xmlns:ns12="urn:pptxdsl:text-layout:v1" role="body"/>
+              </a:ext>
+            </a:extLst>
+          </a:bodyPr>
+          <a:lstStyle/>
+          <a:p>
+            <a:pPr algn="l">
+              <a:lnSpc>
+                <a:spcPct val="130000"/>
+              </a:lnSpc>
+            </a:pPr>
+            <a:r>
+              <a:rPr sz="1200" b="0" lang="ja-JP">
+                <a:solidFill>
+                  <a:srgbClr val="666E70"/>
+                </a:solidFill>
+                <a:latin typeface="Yu Gothic"/>
+                <a:ea typeface="Yu Gothic"/>
+                <a:cs typeface="Yu Gothic"/>
+              </a:rPr>
+              <a:t>0</a:t>
+            </a:r>
+          </a:p>
+        </p:txBody>
+      </p:sp>
+      <p:sp>
+        <p:nvSpPr>
+          <p:cNvPr id="26" name="chart:axis-value"/>
+          <p:cNvSpPr txBox="1"/>
+          <p:nvPr/>
+        </p:nvSpPr>
+        <p:spPr>
+          <a:xfrm>
+            <a:off x="3995013" y="5600700"/>
+            <a:ext cx="221742" cy="216408"/>
+          </a:xfrm>
+          <a:prstGeom prst="rect">
+            <a:avLst/>
+          </a:prstGeom>
+          <a:noFill/>
+        </p:spPr>
+        <p:txBody>
+          <a:bodyPr wrap="square" anchor="t" lIns="0" rIns="0" tIns="0" bIns="0">
+            <a:spAutoFit/>
+            <a:extLst>
+              <a:ext uri="{8AF73BB6-5E31-4F0F-A399-3D98F3B95FD9}">
+                <ns17:textLayout xmlns:ns17="urn:pptxdsl:text-layout:v1" role="body"/>
+              </a:ext>
+            </a:extLst>
+          </a:bodyPr>
+          <a:lstStyle/>
+          <a:p>
+            <a:pPr algn="l">
+              <a:lnSpc>
+                <a:spcPct val="130000"/>
+              </a:lnSpc>
+            </a:pPr>
+            <a:r>
+              <a:rPr sz="1200" b="0" lang="ja-JP">
+                <a:solidFill>
+                  <a:srgbClr val="666E70"/>
+                </a:solidFill>
+                <a:latin typeface="Yu Gothic"/>
+                <a:ea typeface="Yu Gothic"/>
+                <a:cs typeface="Yu Gothic"/>
+              </a:rPr>
+              <a:t>50</a:t>
+            </a:r>
+          </a:p>
+        </p:txBody>
+      </p:sp>
+      <p:sp>
+        <p:nvSpPr>
+          <p:cNvPr id="27" name="chart:axis-value"/>
+          <p:cNvSpPr txBox="1"/>
+          <p:nvPr/>
+        </p:nvSpPr>
+        <p:spPr>
+          <a:xfrm>
+            <a:off x="5655449" y="5600700"/>
+            <a:ext cx="314325" cy="216408"/>
+          </a:xfrm>
+          <a:prstGeom prst="rect">
+            <a:avLst/>
+          </a:prstGeom>
+          <a:noFill/>
+        </p:spPr>
+        <p:txBody>
+          <a:bodyPr wrap="square" anchor="t" lIns="0" rIns="0" tIns="0" bIns="0">
+            <a:spAutoFit/>
+            <a:extLst>
+              <a:ext uri="{8AF73BB6-5E31-4F0F-A399-3D98F3B95FD9}">
+                <ns22:textLayout xmlns:ns22="urn:pptxdsl:text-layout:v1" role="body"/>
+              </a:ext>
+            </a:extLst>
+          </a:bodyPr>
+          <a:lstStyle/>
+          <a:p>
+            <a:pPr algn="l">
+              <a:lnSpc>
+                <a:spcPct val="130000"/>
+              </a:lnSpc>
+            </a:pPr>
+            <a:r>
+              <a:rPr sz="1200" b="0" lang="ja-JP">
+                <a:solidFill>
+                  <a:srgbClr val="666E70"/>
+                </a:solidFill>
+                <a:latin typeface="Yu Gothic"/>
+                <a:ea typeface="Yu Gothic"/>
+                <a:cs typeface="Yu Gothic"/>
+              </a:rPr>
+              <a:t>100</a:t>
+            </a:r>
+          </a:p>
+        </p:txBody>
+      </p:sp>
+      <p:sp>
+        <p:nvSpPr>
+          <p:cNvPr id="28" name="chart:axis-value"/>
+          <p:cNvSpPr txBox="1"/>
+          <p:nvPr/>
+        </p:nvSpPr>
+        <p:spPr>
+          <a:xfrm>
+            <a:off x="7362177" y="5600700"/>
+            <a:ext cx="314325" cy="216408"/>
+          </a:xfrm>
+          <a:prstGeom prst="rect">
+            <a:avLst/>
+          </a:prstGeom>
+          <a:noFill/>
+        </p:spPr>
+        <p:txBody>
+          <a:bodyPr wrap="square" anchor="t" lIns="0" rIns="0" tIns="0" bIns="0">
+            <a:spAutoFit/>
+            <a:extLst>
+              <a:ext uri="{8AF73BB6-5E31-4F0F-A399-3D98F3B95FD9}">
+                <ns27:textLayout xmlns:ns27="urn:pptxdsl:text-layout:v1" role="body"/>
+              </a:ext>
+            </a:extLst>
+          </a:bodyPr>
+          <a:lstStyle/>
+          <a:p>
+            <a:pPr algn="l">
+              <a:lnSpc>
+                <a:spcPct val="130000"/>
+              </a:lnSpc>
+            </a:pPr>
+            <a:r>
+              <a:rPr sz="1200" b="0" lang="ja-JP">
+                <a:solidFill>
+                  <a:srgbClr val="666E70"/>
+                </a:solidFill>
+                <a:latin typeface="Yu Gothic"/>
+                <a:ea typeface="Yu Gothic"/>
+                <a:cs typeface="Yu Gothic"/>
+              </a:rPr>
+              <a:t>150</a:t>
+            </a:r>
+          </a:p>
+        </p:txBody>
+      </p:sp>
+      <p:sp>
+        <p:nvSpPr>
+          <p:cNvPr id="29" name="chart:axis-value"/>
+          <p:cNvSpPr txBox="1"/>
+          <p:nvPr/>
+        </p:nvSpPr>
+        <p:spPr>
+          <a:xfrm>
+            <a:off x="9068904" y="5600700"/>
+            <a:ext cx="314325" cy="216408"/>
+          </a:xfrm>
+          <a:prstGeom prst="rect">
+            <a:avLst/>
+          </a:prstGeom>
+          <a:noFill/>
+        </p:spPr>
+        <p:txBody>
+          <a:bodyPr wrap="square" anchor="t" lIns="0" rIns="0" tIns="0" bIns="0">
+            <a:spAutoFit/>
+            <a:extLst>
+              <a:ext uri="{8AF73BB6-5E31-4F0F-A399-3D98F3B95FD9}">
+                <ns32:textLayout xmlns:ns32="urn:pptxdsl:text-layout:v1" role="body"/>
+              </a:ext>
+            </a:extLst>
+          </a:bodyPr>
+          <a:lstStyle/>
+          <a:p>
+            <a:pPr algn="l">
+              <a:lnSpc>
+                <a:spcPct val="130000"/>
+              </a:lnSpc>
+            </a:pPr>
+            <a:r>
+              <a:rPr sz="1200" b="0" lang="ja-JP">
+                <a:solidFill>
+                  <a:srgbClr val="666E70"/>
+                </a:solidFill>
+                <a:latin typeface="Yu Gothic"/>
+                <a:ea typeface="Yu Gothic"/>
+                <a:cs typeface="Yu Gothic"/>
+              </a:rPr>
+              <a:t>200</a:t>
+            </a:r>
+          </a:p>
+        </p:txBody>
+      </p:sp>
+      <p:sp>
+        <p:nvSpPr>
+          <p:cNvPr id="30" name="chart:axis-value"/>
+          <p:cNvSpPr txBox="1"/>
+          <p:nvPr/>
+        </p:nvSpPr>
+        <p:spPr>
+          <a:xfrm>
+            <a:off x="10775632" y="5600700"/>
+            <a:ext cx="314325" cy="216408"/>
+          </a:xfrm>
+          <a:prstGeom prst="rect">
+            <a:avLst/>
+          </a:prstGeom>
+          <a:noFill/>
+        </p:spPr>
+        <p:txBody>
+          <a:bodyPr wrap="square" anchor="t" lIns="0" rIns="0" tIns="0" bIns="0">
+            <a:spAutoFit/>
+            <a:extLst>
+              <a:ext uri="{8AF73BB6-5E31-4F0F-A399-3D98F3B95FD9}">
+                <ns37:textLayout xmlns:ns37="urn:pptxdsl:text-layout:v1" role="body"/>
+              </a:ext>
+            </a:extLst>
+          </a:bodyPr>
+          <a:lstStyle/>
+          <a:p>
+            <a:pPr algn="l">
+              <a:lnSpc>
+                <a:spcPct val="130000"/>
+              </a:lnSpc>
+            </a:pPr>
+            <a:r>
+              <a:rPr sz="1200" b="0" lang="ja-JP">
+                <a:solidFill>
+                  <a:srgbClr val="666E70"/>
+                </a:solidFill>
+                <a:latin typeface="Yu Gothic"/>
+                <a:ea typeface="Yu Gothic"/>
+                <a:cs typeface="Yu Gothic"/>
+              </a:rPr>
+              <a:t>250</a:t>
+            </a:r>
+          </a:p>
+        </p:txBody>
+      </p:sp>
+      <p:sp>
+        <p:nvSpPr>
+          <p:cNvPr id="31" name="chart:category"/>
+          <p:cNvSpPr txBox="1"/>
+          <p:nvPr/>
+        </p:nvSpPr>
+        <p:spPr>
+          <a:xfrm>
+            <a:off x="694944" y="2134743"/>
+            <a:ext cx="987552" cy="216408"/>
+          </a:xfrm>
+          <a:prstGeom prst="rect">
+            <a:avLst/>
+          </a:prstGeom>
+          <a:noFill/>
+        </p:spPr>
+        <p:txBody>
+          <a:bodyPr wrap="square" anchor="t" lIns="0" rIns="0" tIns="0" bIns="0">
+            <a:spAutoFit/>
+            <a:extLst>
+              <a:ext uri="{8AF73BB6-5E31-4F0F-A399-3D98F3B95FD9}">
+                <ns42:textLayout xmlns:ns42="urn:pptxdsl:text-layout:v1" role="natural"/>
+              </a:ext>
+            </a:extLst>
+          </a:bodyPr>
+          <a:lstStyle/>
+          <a:p>
+            <a:pPr algn="r">
+              <a:lnSpc>
+                <a:spcPct val="130000"/>
+              </a:lnSpc>
+            </a:pPr>
+            <a:r>
+              <a:rPr sz="1200" b="1" lang="ja-JP">
+                <a:solidFill>
+                  <a:srgbClr val="182C43"/>
+                </a:solidFill>
+                <a:latin typeface="Yu Gothic"/>
+                <a:ea typeface="Yu Gothic"/>
+                <a:cs typeface="Yu Gothic"/>
+              </a:rPr>
+              <a:t>週次報告</a:t>
+            </a:r>
+          </a:p>
+        </p:txBody>
+      </p:sp>
+      <p:sp>
+        <p:nvSpPr>
+          <p:cNvPr id="32" name="chart:category"/>
+          <p:cNvSpPr txBox="1"/>
+          <p:nvPr/>
+        </p:nvSpPr>
+        <p:spPr>
+          <a:xfrm>
+            <a:off x="694944" y="3075813"/>
+            <a:ext cx="987552" cy="216408"/>
+          </a:xfrm>
+          <a:prstGeom prst="rect">
+            <a:avLst/>
+          </a:prstGeom>
+          <a:noFill/>
+        </p:spPr>
+        <p:txBody>
+          <a:bodyPr wrap="square" anchor="t" lIns="0" rIns="0" tIns="0" bIns="0">
+            <a:spAutoFit/>
+            <a:extLst>
+              <a:ext uri="{8AF73BB6-5E31-4F0F-A399-3D98F3B95FD9}">
+                <ns47:textLayout xmlns:ns47="urn:pptxdsl:text-layout:v1" role="natural"/>
+              </a:ext>
+            </a:extLst>
+          </a:bodyPr>
+          <a:lstStyle/>
+          <a:p>
+            <a:pPr algn="r">
+              <a:lnSpc>
+                <a:spcPct val="130000"/>
+              </a:lnSpc>
+            </a:pPr>
+            <a:r>
+              <a:rPr sz="1200" b="1" lang="ja-JP">
+                <a:solidFill>
+                  <a:srgbClr val="182C43"/>
+                </a:solidFill>
+                <a:latin typeface="Yu Gothic"/>
+                <a:ea typeface="Yu Gothic"/>
+                <a:cs typeface="Yu Gothic"/>
+              </a:rPr>
+              <a:t>月次レビュー</a:t>
+            </a:r>
+          </a:p>
+        </p:txBody>
+      </p:sp>
+      <p:sp>
+        <p:nvSpPr>
+          <p:cNvPr id="33" name="chart:category"/>
+          <p:cNvSpPr txBox="1"/>
+          <p:nvPr/>
+        </p:nvSpPr>
+        <p:spPr>
+          <a:xfrm>
+            <a:off x="694944" y="4016883"/>
+            <a:ext cx="987552" cy="216408"/>
+          </a:xfrm>
+          <a:prstGeom prst="rect">
+            <a:avLst/>
+          </a:prstGeom>
+          <a:noFill/>
+        </p:spPr>
+        <p:txBody>
+          <a:bodyPr wrap="square" anchor="t" lIns="0" rIns="0" tIns="0" bIns="0">
+            <a:spAutoFit/>
+            <a:extLst>
+              <a:ext uri="{8AF73BB6-5E31-4F0F-A399-3D98F3B95FD9}">
+                <ns52:textLayout xmlns:ns52="urn:pptxdsl:text-layout:v1" role="natural"/>
+              </a:ext>
+            </a:extLst>
+          </a:bodyPr>
+          <a:lstStyle/>
+          <a:p>
+            <a:pPr algn="r">
+              <a:lnSpc>
+                <a:spcPct val="130000"/>
+              </a:lnSpc>
+            </a:pPr>
+            <a:r>
+              <a:rPr sz="1200" b="1" lang="ja-JP">
+                <a:solidFill>
+                  <a:srgbClr val="182C43"/>
+                </a:solidFill>
+                <a:latin typeface="Yu Gothic"/>
+                <a:ea typeface="Yu Gothic"/>
+                <a:cs typeface="Yu Gothic"/>
+              </a:rPr>
+              <a:t>調査サマリ</a:t>
+            </a:r>
+          </a:p>
+        </p:txBody>
+      </p:sp>
+      <p:sp>
+        <p:nvSpPr>
+          <p:cNvPr id="34" name="chart:category"/>
+          <p:cNvSpPr txBox="1"/>
+          <p:nvPr/>
+        </p:nvSpPr>
+        <p:spPr>
+          <a:xfrm>
+            <a:off x="694944" y="4957953"/>
+            <a:ext cx="987552" cy="216408"/>
+          </a:xfrm>
+          <a:prstGeom prst="rect">
+            <a:avLst/>
+          </a:prstGeom>
+          <a:noFill/>
+        </p:spPr>
+        <p:txBody>
+          <a:bodyPr wrap="square" anchor="t" lIns="0" rIns="0" tIns="0" bIns="0">
+            <a:spAutoFit/>
+            <a:extLst>
+              <a:ext uri="{8AF73BB6-5E31-4F0F-A399-3D98F3B95FD9}">
+                <ns57:textLayout xmlns:ns57="urn:pptxdsl:text-layout:v1" role="natural"/>
+              </a:ext>
+            </a:extLst>
+          </a:bodyPr>
+          <a:lstStyle/>
+          <a:p>
+            <a:pPr algn="r">
+              <a:lnSpc>
+                <a:spcPct val="130000"/>
+              </a:lnSpc>
+            </a:pPr>
+            <a:r>
+              <a:rPr sz="1200" b="1" lang="ja-JP">
+                <a:solidFill>
+                  <a:srgbClr val="182C43"/>
+                </a:solidFill>
+                <a:latin typeface="Yu Gothic"/>
+                <a:ea typeface="Yu Gothic"/>
+                <a:cs typeface="Yu Gothic"/>
+              </a:rPr>
+              <a:t>役員向け抜粋</a:t>
+            </a:r>
+          </a:p>
+        </p:txBody>
+      </p:sp>
+      <p:sp>
+        <p:nvSpPr>
+          <p:cNvPr id="35" name="chart:legend"/>
+          <p:cNvSpPr txBox="1"/>
+          <p:nvPr/>
+        </p:nvSpPr>
+        <p:spPr>
+          <a:xfrm>
+            <a:off x="896112" y="5864352"/>
+            <a:ext cx="668655" cy="216408"/>
+          </a:xfrm>
+          <a:prstGeom prst="rect">
+            <a:avLst/>
+          </a:prstGeom>
+          <a:noFill/>
+        </p:spPr>
+        <p:txBody>
+          <a:bodyPr wrap="square" anchor="t" lIns="0" rIns="0" tIns="0" bIns="0">
+            <a:spAutoFit/>
+            <a:extLst>
+              <a:ext uri="{8AF73BB6-5E31-4F0F-A399-3D98F3B95FD9}">
+                <ns62:textLayout xmlns:ns62="urn:pptxdsl:text-layout:v1" role="body"/>
+              </a:ext>
+            </a:extLst>
+          </a:bodyPr>
+          <a:lstStyle/>
+          <a:p>
+            <a:pPr algn="l">
+              <a:lnSpc>
+                <a:spcPct val="130000"/>
+              </a:lnSpc>
+            </a:pPr>
+            <a:r>
+              <a:rPr sz="1200" b="0" lang="ja-JP">
+                <a:solidFill>
+                  <a:srgbClr val="666E70"/>
+                </a:solidFill>
+                <a:latin typeface="Yu Gothic"/>
+                <a:ea typeface="Yu Gothic"/>
+                <a:cs typeface="Yu Gothic"/>
+              </a:rPr>
+              <a:t>従来 (分)</a:t>
+            </a:r>
+          </a:p>
+        </p:txBody>
+      </p:sp>
+      <p:sp>
+        <p:nvSpPr>
+          <p:cNvPr id="36" name="chart:legend"/>
+          <p:cNvSpPr txBox="1"/>
+          <p:nvPr/>
+        </p:nvSpPr>
+        <p:spPr>
+          <a:xfrm>
+            <a:off x="1930527" y="5864352"/>
+            <a:ext cx="833247" cy="216408"/>
+          </a:xfrm>
+          <a:prstGeom prst="rect">
+            <a:avLst/>
+          </a:prstGeom>
+          <a:noFill/>
+        </p:spPr>
+        <p:txBody>
+          <a:bodyPr wrap="square" anchor="t" lIns="0" rIns="0" tIns="0" bIns="0">
+            <a:spAutoFit/>
+            <a:extLst>
+              <a:ext uri="{8AF73BB6-5E31-4F0F-A399-3D98F3B95FD9}">
+                <ns67:textLayout xmlns:ns67="urn:pptxdsl:text-layout:v1" role="body"/>
+              </a:ext>
+            </a:extLst>
+          </a:bodyPr>
+          <a:lstStyle/>
+          <a:p>
+            <a:pPr algn="l">
+              <a:lnSpc>
+                <a:spcPct val="130000"/>
+              </a:lnSpc>
+            </a:pPr>
+            <a:r>
+              <a:rPr sz="1200" b="0" lang="ja-JP">
+                <a:solidFill>
+                  <a:srgbClr val="666E70"/>
+                </a:solidFill>
+                <a:latin typeface="Yu Gothic"/>
+                <a:ea typeface="Yu Gothic"/>
+                <a:cs typeface="Yu Gothic"/>
+              </a:rPr>
+              <a:t>生成後 (分)</a:t>
+            </a:r>
+          </a:p>
+        </p:txBody>
+      </p:sp>
+      <p:sp>
+        <p:nvSpPr>
+          <p:cNvPr id="37" name="chart:data-value"/>
+          <p:cNvSpPr txBox="1"/>
+          <p:nvPr/>
+        </p:nvSpPr>
+        <p:spPr>
+          <a:xfrm>
+            <a:off x="4017507" y="1944243"/>
+            <a:ext cx="217170" cy="216408"/>
+          </a:xfrm>
+          <a:prstGeom prst="rect">
+            <a:avLst/>
+          </a:prstGeom>
+          <a:noFill/>
+        </p:spPr>
+        <p:txBody>
+          <a:bodyPr wrap="square" anchor="t" lIns="0" rIns="0" tIns="0" bIns="0">
+            <a:spAutoFit/>
+            <a:extLst>
+              <a:ext uri="{8AF73BB6-5E31-4F0F-A399-3D98F3B95FD9}">
+                <ns72:textLayout xmlns:ns72="urn:pptxdsl:text-layout:v1" role="body"/>
+              </a:ext>
+            </a:extLst>
+          </a:bodyPr>
+          <a:lstStyle/>
+          <a:p>
+            <a:pPr algn="l">
+              <a:lnSpc>
+                <a:spcPct val="130000"/>
+              </a:lnSpc>
+            </a:pPr>
+            <a:r>
+              <a:rPr sz="1200" b="0" lang="ja-JP">
+                <a:solidFill>
+                  <a:srgbClr val="202729"/>
+                </a:solidFill>
+                <a:latin typeface="Yu Gothic"/>
+                <a:ea typeface="Yu Gothic"/>
+                <a:cs typeface="Yu Gothic"/>
+              </a:rPr>
+              <a:t>45</a:t>
+            </a:r>
+          </a:p>
+        </p:txBody>
+      </p:sp>
+      <p:sp>
+        <p:nvSpPr>
+          <p:cNvPr id="38" name="chart:data-value"/>
+          <p:cNvSpPr txBox="1"/>
+          <p:nvPr/>
+        </p:nvSpPr>
+        <p:spPr>
+          <a:xfrm>
+            <a:off x="2925202" y="2325243"/>
+            <a:ext cx="217170" cy="216408"/>
+          </a:xfrm>
+          <a:prstGeom prst="rect">
+            <a:avLst/>
+          </a:prstGeom>
+          <a:noFill/>
+        </p:spPr>
+        <p:txBody>
+          <a:bodyPr wrap="square" anchor="t" lIns="0" rIns="0" tIns="0" bIns="0">
+            <a:spAutoFit/>
+            <a:extLst>
+              <a:ext uri="{8AF73BB6-5E31-4F0F-A399-3D98F3B95FD9}">
+                <ns77:textLayout xmlns:ns77="urn:pptxdsl:text-layout:v1" role="body"/>
+              </a:ext>
+            </a:extLst>
+          </a:bodyPr>
+          <a:lstStyle/>
+          <a:p>
+            <a:pPr algn="l">
+              <a:lnSpc>
+                <a:spcPct val="130000"/>
+              </a:lnSpc>
+            </a:pPr>
+            <a:r>
+              <a:rPr sz="1200" b="0" lang="ja-JP">
+                <a:solidFill>
+                  <a:srgbClr val="202729"/>
+                </a:solidFill>
+                <a:latin typeface="Yu Gothic"/>
+                <a:ea typeface="Yu Gothic"/>
+                <a:cs typeface="Yu Gothic"/>
+              </a:rPr>
+              <a:t>13</a:t>
+            </a:r>
+          </a:p>
+        </p:txBody>
+      </p:sp>
+      <p:sp>
+        <p:nvSpPr>
+          <p:cNvPr id="39" name="chart:data-value"/>
+          <p:cNvSpPr txBox="1"/>
+          <p:nvPr/>
+        </p:nvSpPr>
+        <p:spPr>
+          <a:xfrm>
+            <a:off x="6577599" y="2885313"/>
+            <a:ext cx="309753" cy="216408"/>
+          </a:xfrm>
+          <a:prstGeom prst="rect">
+            <a:avLst/>
+          </a:prstGeom>
+          <a:noFill/>
+        </p:spPr>
+        <p:txBody>
+          <a:bodyPr wrap="square" anchor="t" lIns="0" rIns="0" tIns="0" bIns="0">
+            <a:spAutoFit/>
+            <a:extLst>
+              <a:ext uri="{8AF73BB6-5E31-4F0F-A399-3D98F3B95FD9}">
+                <ns82:textLayout xmlns:ns82="urn:pptxdsl:text-layout:v1" role="body"/>
+              </a:ext>
+            </a:extLst>
+          </a:bodyPr>
+          <a:lstStyle/>
+          <a:p>
+            <a:pPr algn="l">
+              <a:lnSpc>
+                <a:spcPct val="130000"/>
+              </a:lnSpc>
+            </a:pPr>
+            <a:r>
+              <a:rPr sz="1200" b="0" lang="ja-JP">
+                <a:solidFill>
+                  <a:srgbClr val="202729"/>
+                </a:solidFill>
+                <a:latin typeface="Yu Gothic"/>
+                <a:ea typeface="Yu Gothic"/>
+                <a:cs typeface="Yu Gothic"/>
+              </a:rPr>
+              <a:t>120</a:t>
+            </a:r>
+          </a:p>
+        </p:txBody>
+      </p:sp>
+      <p:sp>
+        <p:nvSpPr>
+          <p:cNvPr id="40" name="chart:data-value"/>
+          <p:cNvSpPr txBox="1"/>
+          <p:nvPr/>
+        </p:nvSpPr>
+        <p:spPr>
+          <a:xfrm>
+            <a:off x="3915104" y="3266313"/>
+            <a:ext cx="217170" cy="216408"/>
+          </a:xfrm>
+          <a:prstGeom prst="rect">
+            <a:avLst/>
+          </a:prstGeom>
+          <a:noFill/>
+        </p:spPr>
+        <p:txBody>
+          <a:bodyPr wrap="square" anchor="t" lIns="0" rIns="0" tIns="0" bIns="0">
+            <a:spAutoFit/>
+            <a:extLst>
+              <a:ext uri="{8AF73BB6-5E31-4F0F-A399-3D98F3B95FD9}">
+                <ns87:textLayout xmlns:ns87="urn:pptxdsl:text-layout:v1" role="body"/>
+              </a:ext>
+            </a:extLst>
+          </a:bodyPr>
+          <a:lstStyle/>
+          <a:p>
+            <a:pPr algn="l">
+              <a:lnSpc>
+                <a:spcPct val="130000"/>
+              </a:lnSpc>
+            </a:pPr>
+            <a:r>
+              <a:rPr sz="1200" b="0" lang="ja-JP">
+                <a:solidFill>
+                  <a:srgbClr val="202729"/>
+                </a:solidFill>
+                <a:latin typeface="Yu Gothic"/>
+                <a:ea typeface="Yu Gothic"/>
+                <a:cs typeface="Yu Gothic"/>
+              </a:rPr>
+              <a:t>42</a:t>
+            </a:r>
+          </a:p>
+        </p:txBody>
+      </p:sp>
+      <p:sp>
+        <p:nvSpPr>
+          <p:cNvPr id="41" name="chart:data-value"/>
+          <p:cNvSpPr txBox="1"/>
+          <p:nvPr/>
+        </p:nvSpPr>
+        <p:spPr>
+          <a:xfrm>
+            <a:off x="10673745" y="3826383"/>
+            <a:ext cx="309753" cy="216408"/>
+          </a:xfrm>
+          <a:prstGeom prst="rect">
+            <a:avLst/>
+          </a:prstGeom>
+          <a:noFill/>
+        </p:spPr>
+        <p:txBody>
+          <a:bodyPr wrap="square" anchor="t" lIns="0" rIns="0" tIns="0" bIns="0">
+            <a:spAutoFit/>
+            <a:extLst>
+              <a:ext uri="{8AF73BB6-5E31-4F0F-A399-3D98F3B95FD9}">
+                <ns92:textLayout xmlns:ns92="urn:pptxdsl:text-layout:v1" role="body"/>
+              </a:ext>
+            </a:extLst>
+          </a:bodyPr>
+          <a:lstStyle/>
+          <a:p>
+            <a:pPr algn="l">
+              <a:lnSpc>
+                <a:spcPct val="130000"/>
+              </a:lnSpc>
+            </a:pPr>
+            <a:r>
+              <a:rPr sz="1200" b="0" lang="ja-JP">
+                <a:solidFill>
+                  <a:srgbClr val="202729"/>
+                </a:solidFill>
+                <a:latin typeface="Yu Gothic"/>
+                <a:ea typeface="Yu Gothic"/>
+                <a:cs typeface="Yu Gothic"/>
+              </a:rPr>
+              <a:t>240</a:t>
+            </a:r>
+          </a:p>
+        </p:txBody>
+      </p:sp>
+      <p:sp>
+        <p:nvSpPr>
+          <p:cNvPr id="42" name="chart:data-value"/>
+          <p:cNvSpPr txBox="1"/>
+          <p:nvPr/>
+        </p:nvSpPr>
+        <p:spPr>
+          <a:xfrm>
+            <a:off x="5382889" y="4207383"/>
+            <a:ext cx="217170" cy="216408"/>
+          </a:xfrm>
+          <a:prstGeom prst="rect">
+            <a:avLst/>
+          </a:prstGeom>
+          <a:noFill/>
+        </p:spPr>
+        <p:txBody>
+          <a:bodyPr wrap="square" anchor="t" lIns="0" rIns="0" tIns="0" bIns="0">
+            <a:spAutoFit/>
+            <a:extLst>
+              <a:ext uri="{8AF73BB6-5E31-4F0F-A399-3D98F3B95FD9}">
+                <ns97:textLayout xmlns:ns97="urn:pptxdsl:text-layout:v1" role="body"/>
+              </a:ext>
+            </a:extLst>
+          </a:bodyPr>
+          <a:lstStyle/>
+          <a:p>
+            <a:pPr algn="l">
+              <a:lnSpc>
+                <a:spcPct val="130000"/>
+              </a:lnSpc>
+            </a:pPr>
+            <a:r>
+              <a:rPr sz="1200" b="0" lang="ja-JP">
+                <a:solidFill>
+                  <a:srgbClr val="202729"/>
+                </a:solidFill>
+                <a:latin typeface="Yu Gothic"/>
+                <a:ea typeface="Yu Gothic"/>
+                <a:cs typeface="Yu Gothic"/>
+              </a:rPr>
+              <a:t>85</a:t>
+            </a:r>
+          </a:p>
+        </p:txBody>
+      </p:sp>
+      <p:sp>
+        <p:nvSpPr>
+          <p:cNvPr id="43" name="chart:data-value"/>
+          <p:cNvSpPr txBox="1"/>
+          <p:nvPr/>
+        </p:nvSpPr>
+        <p:spPr>
+          <a:xfrm>
+            <a:off x="5553562" y="4767453"/>
+            <a:ext cx="217170" cy="216408"/>
+          </a:xfrm>
+          <a:prstGeom prst="rect">
+            <a:avLst/>
+          </a:prstGeom>
+          <a:noFill/>
+        </p:spPr>
+        <p:txBody>
+          <a:bodyPr wrap="square" anchor="t" lIns="0" rIns="0" tIns="0" bIns="0">
+            <a:spAutoFit/>
+            <a:extLst>
+              <a:ext uri="{8AF73BB6-5E31-4F0F-A399-3D98F3B95FD9}">
                 <ns102:textLayout xmlns:ns102="urn:pptxdsl:text-layout:v1" role="body"/>
               </a:ext>
             </a:extLst>
@@ -64987,22 +65717,68 @@
               </a:lnSpc>
             </a:pPr>
             <a:r>
-              <a:rPr sz="819" b="0" lang="ja-JP">
-                <a:solidFill>
-                  <a:srgbClr val="666E70"/>
-                </a:solidFill>
-                <a:latin typeface="Yu Gothic"/>
-                <a:ea typeface="Yu Gothic"/>
-                <a:cs typeface="Yu Gothic"/>
-              </a:rPr>
-              <a:t>生成後 (分)</a:t>
-            </a:r>
-          </a:p>
-        </p:txBody>
-      </p:sp>
-      <p:sp>
-        <p:nvSpPr>
-          <p:cNvPr id="40" name="TextBox 39"/>
+              <a:rPr sz="1200" b="0" lang="ja-JP">
+                <a:solidFill>
+                  <a:srgbClr val="202729"/>
+                </a:solidFill>
+                <a:latin typeface="Yu Gothic"/>
+                <a:ea typeface="Yu Gothic"/>
+                <a:cs typeface="Yu Gothic"/>
+              </a:rPr>
+              <a:t>90</a:t>
+            </a:r>
+          </a:p>
+        </p:txBody>
+      </p:sp>
+      <p:sp>
+        <p:nvSpPr>
+          <p:cNvPr id="44" name="chart:data-value"/>
+          <p:cNvSpPr txBox="1"/>
+          <p:nvPr/>
+        </p:nvSpPr>
+        <p:spPr>
+          <a:xfrm>
+            <a:off x="3437220" y="5148453"/>
+            <a:ext cx="217170" cy="216408"/>
+          </a:xfrm>
+          <a:prstGeom prst="rect">
+            <a:avLst/>
+          </a:prstGeom>
+          <a:noFill/>
+        </p:spPr>
+        <p:txBody>
+          <a:bodyPr wrap="square" anchor="t" lIns="0" rIns="0" tIns="0" bIns="0">
+            <a:spAutoFit/>
+            <a:extLst>
+              <a:ext uri="{8AF73BB6-5E31-4F0F-A399-3D98F3B95FD9}">
+                <ns107:textLayout xmlns:ns107="urn:pptxdsl:text-layout:v1" role="body"/>
+              </a:ext>
+            </a:extLst>
+          </a:bodyPr>
+          <a:lstStyle/>
+          <a:p>
+            <a:pPr algn="l">
+              <a:lnSpc>
+                <a:spcPct val="130000"/>
+              </a:lnSpc>
+            </a:pPr>
+            <a:r>
+              <a:rPr sz="1200" b="0" lang="ja-JP">
+                <a:solidFill>
+                  <a:srgbClr val="202729"/>
+                </a:solidFill>
+                <a:latin typeface="Yu Gothic"/>
+                <a:ea typeface="Yu Gothic"/>
+                <a:cs typeface="Yu Gothic"/>
+              </a:rPr>
+              <a:t>28</a:t>
+            </a:r>
+          </a:p>
+        </p:txBody>
+      </p:sp>
+      <p:sp>
+        <p:nvSpPr>
+          <p:cNvPr id="45" name="TextBox 44"/>
           <p:cNvSpPr txBox="1"/>
           <p:nvPr/>
         </p:nvSpPr>
@@ -65021,7 +65797,7 @@
             <a:spAutoFit/>
             <a:extLst>
               <a:ext uri="{8AF73BB6-5E31-4F0F-A399-3D98F3B95FD9}">
-                <ns107:textLayout xmlns:ns107="urn:pptxdsl:text-layout:v1" role="body"/>
+                <ns112:textLayout xmlns:ns112="urn:pptxdsl:text-layout:v1" role="body"/>
               </a:ext>
             </a:extLst>
           </a:bodyPr>
@@ -65048,7 +65824,7 @@
       </p:sp>
       <p:sp>
         <p:nvSpPr>
-          <p:cNvPr id="41" name="Rectangle 40"/>
+          <p:cNvPr id="46" name="Rectangle 45"/>
           <p:cNvSpPr/>
           <p:nvPr/>
         </p:nvSpPr>
@@ -65092,7 +65868,7 @@
       </p:sp>
       <p:sp>
         <p:nvSpPr>
-          <p:cNvPr id="42" name="TextBox 41"/>
+          <p:cNvPr id="47" name="TextBox 46"/>
           <p:cNvSpPr txBox="1"/>
           <p:nvPr/>
         </p:nvSpPr>
@@ -65111,7 +65887,7 @@
             <a:spAutoFit/>
             <a:extLst>
               <a:ext uri="{8AF73BB6-5E31-4F0F-A399-3D98F3B95FD9}">
-                <ns112:textLayout xmlns:ns112="urn:pptxdsl:text-layout:v1" role="body"/>
+                <ns117:textLayout xmlns:ns117="urn:pptxdsl:text-layout:v1" role="body"/>
               </a:ext>
             </a:extLst>
           </a:bodyPr>
@@ -65138,7 +65914,7 @@
       </p:sp>
       <p:sp>
         <p:nvSpPr>
-          <p:cNvPr id="43" name="TextBox 42"/>
+          <p:cNvPr id="48" name="TextBox 47"/>
           <p:cNvSpPr txBox="1"/>
           <p:nvPr/>
         </p:nvSpPr>
@@ -65157,7 +65933,7 @@
             <a:spAutoFit/>
             <a:extLst>
               <a:ext uri="{8AF73BB6-5E31-4F0F-A399-3D98F3B95FD9}">
-                <ns117:textLayout xmlns:ns117="urn:pptxdsl:text-layout:v1" role="body"/>
+                <ns122:textLayout xmlns:ns122="urn:pptxdsl:text-layout:v1" role="body"/>
               </a:ext>
             </a:extLst>
           </a:bodyPr>

--- a/examples/gallery/pattern_gallery.pptx
+++ b/examples/gallery/pattern_gallery.pptx
@@ -5470,7 +5470,7 @@
           <a:noFill/>
         </p:spPr>
         <p:txBody>
-          <a:bodyPr wrap="square" anchor="t" lIns="0" rIns="0" tIns="0" bIns="0">
+          <a:bodyPr wrap="none" anchor="t" lIns="0" rIns="0" tIns="0" bIns="0">
             <a:spAutoFit/>
           </a:bodyPr>
           <a:lstStyle/>
@@ -5511,7 +5511,7 @@
           <a:noFill/>
         </p:spPr>
         <p:txBody>
-          <a:bodyPr wrap="square" anchor="t" lIns="0" rIns="0" tIns="0" bIns="0">
+          <a:bodyPr wrap="none" anchor="t" lIns="0" rIns="0" tIns="0" bIns="0">
             <a:spAutoFit/>
           </a:bodyPr>
           <a:lstStyle/>
@@ -5552,7 +5552,7 @@
           <a:noFill/>
         </p:spPr>
         <p:txBody>
-          <a:bodyPr wrap="square" anchor="t" lIns="0" rIns="0" tIns="0" bIns="0">
+          <a:bodyPr wrap="none" anchor="t" lIns="0" rIns="0" tIns="0" bIns="0">
             <a:spAutoFit/>
           </a:bodyPr>
           <a:lstStyle/>
@@ -5593,7 +5593,7 @@
           <a:noFill/>
         </p:spPr>
         <p:txBody>
-          <a:bodyPr wrap="square" anchor="t" lIns="0" rIns="0" tIns="0" bIns="0">
+          <a:bodyPr wrap="none" anchor="t" lIns="0" rIns="0" tIns="0" bIns="0">
             <a:spAutoFit/>
           </a:bodyPr>
           <a:lstStyle/>
@@ -5634,7 +5634,7 @@
           <a:noFill/>
         </p:spPr>
         <p:txBody>
-          <a:bodyPr wrap="square" anchor="t" lIns="0" rIns="0" tIns="0" bIns="0">
+          <a:bodyPr wrap="none" anchor="t" lIns="0" rIns="0" tIns="0" bIns="0">
             <a:spAutoFit/>
           </a:bodyPr>
           <a:lstStyle/>
@@ -5675,7 +5675,7 @@
           <a:noFill/>
         </p:spPr>
         <p:txBody>
-          <a:bodyPr wrap="square" anchor="t" lIns="0" rIns="0" tIns="0" bIns="0">
+          <a:bodyPr wrap="none" anchor="t" lIns="0" rIns="0" tIns="0" bIns="0">
             <a:spAutoFit/>
           </a:bodyPr>
           <a:lstStyle/>
@@ -5716,7 +5716,7 @@
           <a:noFill/>
         </p:spPr>
         <p:txBody>
-          <a:bodyPr wrap="square" anchor="t" lIns="0" rIns="0" tIns="0" bIns="0">
+          <a:bodyPr wrap="none" anchor="t" lIns="0" rIns="0" tIns="0" bIns="0">
             <a:spAutoFit/>
           </a:bodyPr>
           <a:lstStyle/>
@@ -5757,7 +5757,7 @@
           <a:noFill/>
         </p:spPr>
         <p:txBody>
-          <a:bodyPr wrap="square" anchor="t" lIns="0" rIns="0" tIns="0" bIns="0">
+          <a:bodyPr wrap="none" anchor="t" lIns="0" rIns="0" tIns="0" bIns="0">
             <a:spAutoFit/>
           </a:bodyPr>
           <a:lstStyle/>
@@ -5798,7 +5798,7 @@
           <a:noFill/>
         </p:spPr>
         <p:txBody>
-          <a:bodyPr wrap="square" anchor="t" lIns="0" rIns="0" tIns="0" bIns="0">
+          <a:bodyPr wrap="none" anchor="t" lIns="0" rIns="0" tIns="0" bIns="0">
             <a:spAutoFit/>
           </a:bodyPr>
           <a:lstStyle/>
@@ -5839,7 +5839,7 @@
           <a:noFill/>
         </p:spPr>
         <p:txBody>
-          <a:bodyPr wrap="square" anchor="t" lIns="0" rIns="0" tIns="0" bIns="0">
+          <a:bodyPr wrap="none" anchor="t" lIns="0" rIns="0" tIns="0" bIns="0">
             <a:spAutoFit/>
           </a:bodyPr>
           <a:lstStyle/>
@@ -5880,7 +5880,7 @@
           <a:noFill/>
         </p:spPr>
         <p:txBody>
-          <a:bodyPr wrap="square" anchor="t" lIns="0" rIns="0" tIns="0" bIns="0">
+          <a:bodyPr wrap="none" anchor="t" lIns="0" rIns="0" tIns="0" bIns="0">
             <a:spAutoFit/>
           </a:bodyPr>
           <a:lstStyle/>
@@ -5921,7 +5921,7 @@
           <a:noFill/>
         </p:spPr>
         <p:txBody>
-          <a:bodyPr wrap="square" anchor="t" lIns="0" rIns="0" tIns="0" bIns="0">
+          <a:bodyPr wrap="none" anchor="t" lIns="0" rIns="0" tIns="0" bIns="0">
             <a:spAutoFit/>
           </a:bodyPr>
           <a:lstStyle/>
@@ -5962,7 +5962,7 @@
           <a:noFill/>
         </p:spPr>
         <p:txBody>
-          <a:bodyPr wrap="square" anchor="t" lIns="0" rIns="0" tIns="0" bIns="0">
+          <a:bodyPr wrap="none" anchor="t" lIns="0" rIns="0" tIns="0" bIns="0">
             <a:spAutoFit/>
           </a:bodyPr>
           <a:lstStyle/>
@@ -6003,7 +6003,7 @@
           <a:noFill/>
         </p:spPr>
         <p:txBody>
-          <a:bodyPr wrap="square" anchor="t" lIns="0" rIns="0" tIns="0" bIns="0">
+          <a:bodyPr wrap="none" anchor="t" lIns="0" rIns="0" tIns="0" bIns="0">
             <a:spAutoFit/>
           </a:bodyPr>
           <a:lstStyle/>
@@ -6044,7 +6044,7 @@
           <a:noFill/>
         </p:spPr>
         <p:txBody>
-          <a:bodyPr wrap="square" anchor="t" lIns="0" rIns="0" tIns="0" bIns="0">
+          <a:bodyPr wrap="none" anchor="t" lIns="0" rIns="0" tIns="0" bIns="0">
             <a:spAutoFit/>
           </a:bodyPr>
           <a:lstStyle/>
@@ -6085,7 +6085,7 @@
           <a:noFill/>
         </p:spPr>
         <p:txBody>
-          <a:bodyPr wrap="square" anchor="t" lIns="0" rIns="0" tIns="0" bIns="0">
+          <a:bodyPr wrap="none" anchor="t" lIns="0" rIns="0" tIns="0" bIns="0">
             <a:spAutoFit/>
           </a:bodyPr>
           <a:lstStyle/>
@@ -7336,7 +7336,7 @@
           <a:noFill/>
         </p:spPr>
         <p:txBody>
-          <a:bodyPr wrap="square" anchor="t" lIns="0" rIns="0" tIns="0" bIns="0">
+          <a:bodyPr wrap="none" anchor="t" lIns="0" rIns="0" tIns="0" bIns="0">
             <a:spAutoFit/>
           </a:bodyPr>
           <a:lstStyle/>
@@ -7377,7 +7377,7 @@
           <a:noFill/>
         </p:spPr>
         <p:txBody>
-          <a:bodyPr wrap="square" anchor="t" lIns="0" rIns="0" tIns="0" bIns="0">
+          <a:bodyPr wrap="none" anchor="t" lIns="0" rIns="0" tIns="0" bIns="0">
             <a:spAutoFit/>
           </a:bodyPr>
           <a:lstStyle/>
@@ -7418,7 +7418,7 @@
           <a:noFill/>
         </p:spPr>
         <p:txBody>
-          <a:bodyPr wrap="square" anchor="t" lIns="0" rIns="0" tIns="0" bIns="0">
+          <a:bodyPr wrap="none" anchor="t" lIns="0" rIns="0" tIns="0" bIns="0">
             <a:spAutoFit/>
           </a:bodyPr>
           <a:lstStyle/>
@@ -7459,7 +7459,7 @@
           <a:noFill/>
         </p:spPr>
         <p:txBody>
-          <a:bodyPr wrap="square" anchor="t" lIns="0" rIns="0" tIns="0" bIns="0">
+          <a:bodyPr wrap="none" anchor="t" lIns="0" rIns="0" tIns="0" bIns="0">
             <a:spAutoFit/>
           </a:bodyPr>
           <a:lstStyle/>
@@ -7500,7 +7500,7 @@
           <a:noFill/>
         </p:spPr>
         <p:txBody>
-          <a:bodyPr wrap="square" anchor="t" lIns="0" rIns="0" tIns="0" bIns="0">
+          <a:bodyPr wrap="none" anchor="t" lIns="0" rIns="0" tIns="0" bIns="0">
             <a:spAutoFit/>
           </a:bodyPr>
           <a:lstStyle/>
@@ -7541,7 +7541,7 @@
           <a:noFill/>
         </p:spPr>
         <p:txBody>
-          <a:bodyPr wrap="square" anchor="t" lIns="0" rIns="0" tIns="0" bIns="0">
+          <a:bodyPr wrap="none" anchor="t" lIns="0" rIns="0" tIns="0" bIns="0">
             <a:spAutoFit/>
           </a:bodyPr>
           <a:lstStyle/>
@@ -7582,7 +7582,7 @@
           <a:noFill/>
         </p:spPr>
         <p:txBody>
-          <a:bodyPr wrap="square" anchor="t" lIns="0" rIns="0" tIns="0" bIns="0">
+          <a:bodyPr wrap="none" anchor="t" lIns="0" rIns="0" tIns="0" bIns="0">
             <a:spAutoFit/>
           </a:bodyPr>
           <a:lstStyle/>
@@ -7623,7 +7623,7 @@
           <a:noFill/>
         </p:spPr>
         <p:txBody>
-          <a:bodyPr wrap="square" anchor="t" lIns="0" rIns="0" tIns="0" bIns="0">
+          <a:bodyPr wrap="none" anchor="t" lIns="0" rIns="0" tIns="0" bIns="0">
             <a:spAutoFit/>
           </a:bodyPr>
           <a:lstStyle/>
@@ -7664,7 +7664,7 @@
           <a:noFill/>
         </p:spPr>
         <p:txBody>
-          <a:bodyPr wrap="square" anchor="t" lIns="0" rIns="0" tIns="0" bIns="0">
+          <a:bodyPr wrap="none" anchor="t" lIns="0" rIns="0" tIns="0" bIns="0">
             <a:spAutoFit/>
           </a:bodyPr>
           <a:lstStyle/>
@@ -7705,7 +7705,7 @@
           <a:noFill/>
         </p:spPr>
         <p:txBody>
-          <a:bodyPr wrap="square" anchor="t" lIns="0" rIns="0" tIns="0" bIns="0">
+          <a:bodyPr wrap="none" anchor="t" lIns="0" rIns="0" tIns="0" bIns="0">
             <a:spAutoFit/>
           </a:bodyPr>
           <a:lstStyle/>
@@ -7746,7 +7746,7 @@
           <a:noFill/>
         </p:spPr>
         <p:txBody>
-          <a:bodyPr wrap="square" anchor="t" lIns="0" rIns="0" tIns="0" bIns="0">
+          <a:bodyPr wrap="none" anchor="t" lIns="0" rIns="0" tIns="0" bIns="0">
             <a:spAutoFit/>
           </a:bodyPr>
           <a:lstStyle/>
@@ -7787,7 +7787,7 @@
           <a:noFill/>
         </p:spPr>
         <p:txBody>
-          <a:bodyPr wrap="square" anchor="t" lIns="0" rIns="0" tIns="0" bIns="0">
+          <a:bodyPr wrap="none" anchor="t" lIns="0" rIns="0" tIns="0" bIns="0">
             <a:spAutoFit/>
           </a:bodyPr>
           <a:lstStyle/>
@@ -7828,7 +7828,7 @@
           <a:noFill/>
         </p:spPr>
         <p:txBody>
-          <a:bodyPr wrap="square" anchor="t" lIns="0" rIns="0" tIns="0" bIns="0">
+          <a:bodyPr wrap="none" anchor="t" lIns="0" rIns="0" tIns="0" bIns="0">
             <a:spAutoFit/>
           </a:bodyPr>
           <a:lstStyle/>
@@ -7869,7 +7869,7 @@
           <a:noFill/>
         </p:spPr>
         <p:txBody>
-          <a:bodyPr wrap="square" anchor="t" lIns="0" rIns="0" tIns="0" bIns="0">
+          <a:bodyPr wrap="none" anchor="t" lIns="0" rIns="0" tIns="0" bIns="0">
             <a:spAutoFit/>
           </a:bodyPr>
           <a:lstStyle/>
@@ -7910,7 +7910,7 @@
           <a:noFill/>
         </p:spPr>
         <p:txBody>
-          <a:bodyPr wrap="square" anchor="t" lIns="0" rIns="0" tIns="0" bIns="0">
+          <a:bodyPr wrap="none" anchor="t" lIns="0" rIns="0" tIns="0" bIns="0">
             <a:spAutoFit/>
           </a:bodyPr>
           <a:lstStyle/>
@@ -7951,7 +7951,7 @@
           <a:noFill/>
         </p:spPr>
         <p:txBody>
-          <a:bodyPr wrap="square" anchor="t" lIns="0" rIns="0" tIns="0" bIns="0">
+          <a:bodyPr wrap="none" anchor="t" lIns="0" rIns="0" tIns="0" bIns="0">
             <a:spAutoFit/>
           </a:bodyPr>
           <a:lstStyle/>
@@ -7992,7 +7992,7 @@
           <a:noFill/>
         </p:spPr>
         <p:txBody>
-          <a:bodyPr wrap="square" anchor="t" lIns="0" rIns="0" tIns="0" bIns="0">
+          <a:bodyPr wrap="none" anchor="t" lIns="0" rIns="0" tIns="0" bIns="0">
             <a:spAutoFit/>
           </a:bodyPr>
           <a:lstStyle/>
@@ -8033,7 +8033,7 @@
           <a:noFill/>
         </p:spPr>
         <p:txBody>
-          <a:bodyPr wrap="square" anchor="t" lIns="0" rIns="0" tIns="0" bIns="0">
+          <a:bodyPr wrap="none" anchor="t" lIns="0" rIns="0" tIns="0" bIns="0">
             <a:spAutoFit/>
           </a:bodyPr>
           <a:lstStyle/>
@@ -8074,7 +8074,7 @@
           <a:noFill/>
         </p:spPr>
         <p:txBody>
-          <a:bodyPr wrap="square" anchor="t" lIns="0" rIns="0" tIns="0" bIns="0">
+          <a:bodyPr wrap="none" anchor="t" lIns="0" rIns="0" tIns="0" bIns="0">
             <a:spAutoFit/>
           </a:bodyPr>
           <a:lstStyle/>
@@ -8115,7 +8115,7 @@
           <a:noFill/>
         </p:spPr>
         <p:txBody>
-          <a:bodyPr wrap="square" anchor="t" lIns="0" rIns="0" tIns="0" bIns="0">
+          <a:bodyPr wrap="none" anchor="t" lIns="0" rIns="0" tIns="0" bIns="0">
             <a:spAutoFit/>
           </a:bodyPr>
           <a:lstStyle/>
@@ -8156,7 +8156,7 @@
           <a:noFill/>
         </p:spPr>
         <p:txBody>
-          <a:bodyPr wrap="square" anchor="t" lIns="0" rIns="0" tIns="0" bIns="0">
+          <a:bodyPr wrap="none" anchor="t" lIns="0" rIns="0" tIns="0" bIns="0">
             <a:spAutoFit/>
           </a:bodyPr>
           <a:lstStyle/>
@@ -61197,7 +61197,7 @@
           <a:noFill/>
         </p:spPr>
         <p:txBody>
-          <a:bodyPr wrap="square" anchor="t" lIns="0" rIns="0" tIns="0" bIns="0">
+          <a:bodyPr wrap="none" anchor="t" lIns="0" rIns="0" tIns="0" bIns="0">
             <a:spAutoFit/>
           </a:bodyPr>
           <a:lstStyle/>
@@ -61238,7 +61238,7 @@
           <a:noFill/>
         </p:spPr>
         <p:txBody>
-          <a:bodyPr wrap="square" anchor="t" lIns="0" rIns="0" tIns="0" bIns="0">
+          <a:bodyPr wrap="none" anchor="t" lIns="0" rIns="0" tIns="0" bIns="0">
             <a:spAutoFit/>
           </a:bodyPr>
           <a:lstStyle/>
@@ -61279,7 +61279,7 @@
           <a:noFill/>
         </p:spPr>
         <p:txBody>
-          <a:bodyPr wrap="square" anchor="t" lIns="0" rIns="0" tIns="0" bIns="0">
+          <a:bodyPr wrap="none" anchor="t" lIns="0" rIns="0" tIns="0" bIns="0">
             <a:spAutoFit/>
           </a:bodyPr>
           <a:lstStyle/>
@@ -61320,7 +61320,7 @@
           <a:noFill/>
         </p:spPr>
         <p:txBody>
-          <a:bodyPr wrap="square" anchor="t" lIns="0" rIns="0" tIns="0" bIns="0">
+          <a:bodyPr wrap="none" anchor="t" lIns="0" rIns="0" tIns="0" bIns="0">
             <a:spAutoFit/>
           </a:bodyPr>
           <a:lstStyle/>
@@ -61361,7 +61361,7 @@
           <a:noFill/>
         </p:spPr>
         <p:txBody>
-          <a:bodyPr wrap="square" anchor="t" lIns="0" rIns="0" tIns="0" bIns="0">
+          <a:bodyPr wrap="none" anchor="t" lIns="0" rIns="0" tIns="0" bIns="0">
             <a:spAutoFit/>
           </a:bodyPr>
           <a:lstStyle/>
@@ -61402,7 +61402,7 @@
           <a:noFill/>
         </p:spPr>
         <p:txBody>
-          <a:bodyPr wrap="square" anchor="t" lIns="0" rIns="0" tIns="0" bIns="0">
+          <a:bodyPr wrap="none" anchor="t" lIns="0" rIns="0" tIns="0" bIns="0">
             <a:spAutoFit/>
           </a:bodyPr>
           <a:lstStyle/>
@@ -61443,7 +61443,7 @@
           <a:noFill/>
         </p:spPr>
         <p:txBody>
-          <a:bodyPr wrap="square" anchor="t" lIns="0" rIns="0" tIns="0" bIns="0">
+          <a:bodyPr wrap="none" anchor="t" lIns="0" rIns="0" tIns="0" bIns="0">
             <a:spAutoFit/>
           </a:bodyPr>
           <a:lstStyle/>
@@ -61484,7 +61484,7 @@
           <a:noFill/>
         </p:spPr>
         <p:txBody>
-          <a:bodyPr wrap="square" anchor="t" lIns="0" rIns="0" tIns="0" bIns="0">
+          <a:bodyPr wrap="none" anchor="t" lIns="0" rIns="0" tIns="0" bIns="0">
             <a:spAutoFit/>
           </a:bodyPr>
           <a:lstStyle/>
@@ -61525,7 +61525,7 @@
           <a:noFill/>
         </p:spPr>
         <p:txBody>
-          <a:bodyPr wrap="square" anchor="t" lIns="0" rIns="0" tIns="0" bIns="0">
+          <a:bodyPr wrap="none" anchor="t" lIns="0" rIns="0" tIns="0" bIns="0">
             <a:spAutoFit/>
           </a:bodyPr>
           <a:lstStyle/>
@@ -61566,7 +61566,7 @@
           <a:noFill/>
         </p:spPr>
         <p:txBody>
-          <a:bodyPr wrap="square" anchor="t" lIns="0" rIns="0" tIns="0" bIns="0">
+          <a:bodyPr wrap="none" anchor="t" lIns="0" rIns="0" tIns="0" bIns="0">
             <a:spAutoFit/>
           </a:bodyPr>
           <a:lstStyle/>
@@ -61607,7 +61607,7 @@
           <a:noFill/>
         </p:spPr>
         <p:txBody>
-          <a:bodyPr wrap="square" anchor="t" lIns="0" rIns="0" tIns="0" bIns="0">
+          <a:bodyPr wrap="none" anchor="t" lIns="0" rIns="0" tIns="0" bIns="0">
             <a:spAutoFit/>
           </a:bodyPr>
           <a:lstStyle/>
@@ -61648,7 +61648,7 @@
           <a:noFill/>
         </p:spPr>
         <p:txBody>
-          <a:bodyPr wrap="square" anchor="t" lIns="0" rIns="0" tIns="0" bIns="0">
+          <a:bodyPr wrap="none" anchor="t" lIns="0" rIns="0" tIns="0" bIns="0">
             <a:spAutoFit/>
           </a:bodyPr>
           <a:lstStyle/>
@@ -61689,7 +61689,7 @@
           <a:noFill/>
         </p:spPr>
         <p:txBody>
-          <a:bodyPr wrap="square" anchor="t" lIns="0" rIns="0" tIns="0" bIns="0">
+          <a:bodyPr wrap="none" anchor="t" lIns="0" rIns="0" tIns="0" bIns="0">
             <a:spAutoFit/>
           </a:bodyPr>
           <a:lstStyle/>
@@ -61730,7 +61730,7 @@
           <a:noFill/>
         </p:spPr>
         <p:txBody>
-          <a:bodyPr wrap="square" anchor="t" lIns="0" rIns="0" tIns="0" bIns="0">
+          <a:bodyPr wrap="none" anchor="t" lIns="0" rIns="0" tIns="0" bIns="0">
             <a:spAutoFit/>
           </a:bodyPr>
           <a:lstStyle/>
@@ -61771,7 +61771,7 @@
           <a:noFill/>
         </p:spPr>
         <p:txBody>
-          <a:bodyPr wrap="square" anchor="t" lIns="0" rIns="0" tIns="0" bIns="0">
+          <a:bodyPr wrap="none" anchor="t" lIns="0" rIns="0" tIns="0" bIns="0">
             <a:spAutoFit/>
           </a:bodyPr>
           <a:lstStyle/>
@@ -61812,7 +61812,7 @@
           <a:noFill/>
         </p:spPr>
         <p:txBody>
-          <a:bodyPr wrap="square" anchor="t" lIns="0" rIns="0" tIns="0" bIns="0">
+          <a:bodyPr wrap="none" anchor="t" lIns="0" rIns="0" tIns="0" bIns="0">
             <a:spAutoFit/>
           </a:bodyPr>
           <a:lstStyle/>
@@ -61853,7 +61853,7 @@
           <a:noFill/>
         </p:spPr>
         <p:txBody>
-          <a:bodyPr wrap="square" anchor="t" lIns="0" rIns="0" tIns="0" bIns="0">
+          <a:bodyPr wrap="none" anchor="t" lIns="0" rIns="0" tIns="0" bIns="0">
             <a:spAutoFit/>
           </a:bodyPr>
           <a:lstStyle/>
@@ -61894,7 +61894,7 @@
           <a:noFill/>
         </p:spPr>
         <p:txBody>
-          <a:bodyPr wrap="square" anchor="t" lIns="0" rIns="0" tIns="0" bIns="0">
+          <a:bodyPr wrap="none" anchor="t" lIns="0" rIns="0" tIns="0" bIns="0">
             <a:spAutoFit/>
           </a:bodyPr>
           <a:lstStyle/>
@@ -61935,7 +61935,7 @@
           <a:noFill/>
         </p:spPr>
         <p:txBody>
-          <a:bodyPr wrap="square" anchor="t" lIns="0" rIns="0" tIns="0" bIns="0">
+          <a:bodyPr wrap="none" anchor="t" lIns="0" rIns="0" tIns="0" bIns="0">
             <a:spAutoFit/>
           </a:bodyPr>
           <a:lstStyle/>
@@ -61976,7 +61976,7 @@
           <a:noFill/>
         </p:spPr>
         <p:txBody>
-          <a:bodyPr wrap="square" anchor="t" lIns="0" rIns="0" tIns="0" bIns="0">
+          <a:bodyPr wrap="none" anchor="t" lIns="0" rIns="0" tIns="0" bIns="0">
             <a:spAutoFit/>
           </a:bodyPr>
           <a:lstStyle/>

--- a/examples/gallery/pattern_gallery.pptx
+++ b/examples/gallery/pattern_gallery.pptx
@@ -5520,7 +5520,7 @@
           <a:noFill/>
         </p:spPr>
         <p:txBody>
-          <a:bodyPr wrap="square" anchor="t" lIns="0" rIns="0" tIns="0" bIns="0">
+          <a:bodyPr wrap="none" anchor="t" lIns="0" rIns="0" tIns="0" bIns="0">
             <a:spAutoFit/>
             <a:extLst>
               <a:ext uri="{8AF73BB6-5E31-4F0F-A399-3D98F3B95FD9}">
@@ -5566,7 +5566,7 @@
           <a:noFill/>
         </p:spPr>
         <p:txBody>
-          <a:bodyPr wrap="square" anchor="t" lIns="0" rIns="0" tIns="0" bIns="0">
+          <a:bodyPr wrap="none" anchor="t" lIns="0" rIns="0" tIns="0" bIns="0">
             <a:spAutoFit/>
             <a:extLst>
               <a:ext uri="{8AF73BB6-5E31-4F0F-A399-3D98F3B95FD9}">
@@ -5612,7 +5612,7 @@
           <a:noFill/>
         </p:spPr>
         <p:txBody>
-          <a:bodyPr wrap="square" anchor="t" lIns="0" rIns="0" tIns="0" bIns="0">
+          <a:bodyPr wrap="none" anchor="t" lIns="0" rIns="0" tIns="0" bIns="0">
             <a:spAutoFit/>
             <a:extLst>
               <a:ext uri="{8AF73BB6-5E31-4F0F-A399-3D98F3B95FD9}">
@@ -5658,7 +5658,7 @@
           <a:noFill/>
         </p:spPr>
         <p:txBody>
-          <a:bodyPr wrap="square" anchor="t" lIns="0" rIns="0" tIns="0" bIns="0">
+          <a:bodyPr wrap="none" anchor="t" lIns="0" rIns="0" tIns="0" bIns="0">
             <a:spAutoFit/>
             <a:extLst>
               <a:ext uri="{8AF73BB6-5E31-4F0F-A399-3D98F3B95FD9}">
@@ -5704,7 +5704,7 @@
           <a:noFill/>
         </p:spPr>
         <p:txBody>
-          <a:bodyPr wrap="square" anchor="t" lIns="0" rIns="0" tIns="0" bIns="0">
+          <a:bodyPr wrap="none" anchor="t" lIns="0" rIns="0" tIns="0" bIns="0">
             <a:spAutoFit/>
             <a:extLst>
               <a:ext uri="{8AF73BB6-5E31-4F0F-A399-3D98F3B95FD9}">
@@ -5750,7 +5750,7 @@
           <a:noFill/>
         </p:spPr>
         <p:txBody>
-          <a:bodyPr wrap="square" anchor="t" lIns="0" rIns="0" tIns="0" bIns="0">
+          <a:bodyPr wrap="none" anchor="t" lIns="0" rIns="0" tIns="0" bIns="0">
             <a:spAutoFit/>
             <a:extLst>
               <a:ext uri="{8AF73BB6-5E31-4F0F-A399-3D98F3B95FD9}">
@@ -5796,7 +5796,7 @@
           <a:noFill/>
         </p:spPr>
         <p:txBody>
-          <a:bodyPr wrap="square" anchor="t" lIns="0" rIns="0" tIns="0" bIns="0">
+          <a:bodyPr wrap="none" anchor="t" lIns="0" rIns="0" tIns="0" bIns="0">
             <a:spAutoFit/>
             <a:extLst>
               <a:ext uri="{8AF73BB6-5E31-4F0F-A399-3D98F3B95FD9}">
@@ -5842,7 +5842,7 @@
           <a:noFill/>
         </p:spPr>
         <p:txBody>
-          <a:bodyPr wrap="square" anchor="t" lIns="0" rIns="0" tIns="0" bIns="0">
+          <a:bodyPr wrap="none" anchor="t" lIns="0" rIns="0" tIns="0" bIns="0">
             <a:spAutoFit/>
             <a:extLst>
               <a:ext uri="{8AF73BB6-5E31-4F0F-A399-3D98F3B95FD9}">
@@ -5888,7 +5888,7 @@
           <a:noFill/>
         </p:spPr>
         <p:txBody>
-          <a:bodyPr wrap="square" anchor="t" lIns="0" rIns="0" tIns="0" bIns="0">
+          <a:bodyPr wrap="none" anchor="t" lIns="0" rIns="0" tIns="0" bIns="0">
             <a:spAutoFit/>
             <a:extLst>
               <a:ext uri="{8AF73BB6-5E31-4F0F-A399-3D98F3B95FD9}">
@@ -5934,7 +5934,7 @@
           <a:noFill/>
         </p:spPr>
         <p:txBody>
-          <a:bodyPr wrap="square" anchor="t" lIns="0" rIns="0" tIns="0" bIns="0">
+          <a:bodyPr wrap="none" anchor="t" lIns="0" rIns="0" tIns="0" bIns="0">
             <a:spAutoFit/>
             <a:extLst>
               <a:ext uri="{8AF73BB6-5E31-4F0F-A399-3D98F3B95FD9}">
@@ -5980,7 +5980,7 @@
           <a:noFill/>
         </p:spPr>
         <p:txBody>
-          <a:bodyPr wrap="square" anchor="t" lIns="0" rIns="0" tIns="0" bIns="0">
+          <a:bodyPr wrap="none" anchor="t" lIns="0" rIns="0" tIns="0" bIns="0">
             <a:spAutoFit/>
             <a:extLst>
               <a:ext uri="{8AF73BB6-5E31-4F0F-A399-3D98F3B95FD9}">
@@ -6026,7 +6026,7 @@
           <a:noFill/>
         </p:spPr>
         <p:txBody>
-          <a:bodyPr wrap="square" anchor="t" lIns="0" rIns="0" tIns="0" bIns="0">
+          <a:bodyPr wrap="none" anchor="t" lIns="0" rIns="0" tIns="0" bIns="0">
             <a:spAutoFit/>
             <a:extLst>
               <a:ext uri="{8AF73BB6-5E31-4F0F-A399-3D98F3B95FD9}">
@@ -6072,7 +6072,7 @@
           <a:noFill/>
         </p:spPr>
         <p:txBody>
-          <a:bodyPr wrap="square" anchor="t" lIns="0" rIns="0" tIns="0" bIns="0">
+          <a:bodyPr wrap="none" anchor="t" lIns="0" rIns="0" tIns="0" bIns="0">
             <a:spAutoFit/>
             <a:extLst>
               <a:ext uri="{8AF73BB6-5E31-4F0F-A399-3D98F3B95FD9}">
@@ -6118,7 +6118,7 @@
           <a:noFill/>
         </p:spPr>
         <p:txBody>
-          <a:bodyPr wrap="square" anchor="t" lIns="0" rIns="0" tIns="0" bIns="0">
+          <a:bodyPr wrap="none" anchor="t" lIns="0" rIns="0" tIns="0" bIns="0">
             <a:spAutoFit/>
             <a:extLst>
               <a:ext uri="{8AF73BB6-5E31-4F0F-A399-3D98F3B95FD9}">
@@ -6164,7 +6164,7 @@
           <a:noFill/>
         </p:spPr>
         <p:txBody>
-          <a:bodyPr wrap="square" anchor="t" lIns="0" rIns="0" tIns="0" bIns="0">
+          <a:bodyPr wrap="none" anchor="t" lIns="0" rIns="0" tIns="0" bIns="0">
             <a:spAutoFit/>
             <a:extLst>
               <a:ext uri="{8AF73BB6-5E31-4F0F-A399-3D98F3B95FD9}">
@@ -6210,7 +6210,7 @@
           <a:noFill/>
         </p:spPr>
         <p:txBody>
-          <a:bodyPr wrap="square" anchor="t" lIns="0" rIns="0" tIns="0" bIns="0">
+          <a:bodyPr wrap="none" anchor="t" lIns="0" rIns="0" tIns="0" bIns="0">
             <a:spAutoFit/>
             <a:extLst>
               <a:ext uri="{8AF73BB6-5E31-4F0F-A399-3D98F3B95FD9}">
@@ -7491,7 +7491,7 @@
           <a:noFill/>
         </p:spPr>
         <p:txBody>
-          <a:bodyPr wrap="square" anchor="t" lIns="0" rIns="0" tIns="0" bIns="0">
+          <a:bodyPr wrap="none" anchor="t" lIns="0" rIns="0" tIns="0" bIns="0">
             <a:spAutoFit/>
             <a:extLst>
               <a:ext uri="{8AF73BB6-5E31-4F0F-A399-3D98F3B95FD9}">
@@ -7537,7 +7537,7 @@
           <a:noFill/>
         </p:spPr>
         <p:txBody>
-          <a:bodyPr wrap="square" anchor="t" lIns="0" rIns="0" tIns="0" bIns="0">
+          <a:bodyPr wrap="none" anchor="t" lIns="0" rIns="0" tIns="0" bIns="0">
             <a:spAutoFit/>
             <a:extLst>
               <a:ext uri="{8AF73BB6-5E31-4F0F-A399-3D98F3B95FD9}">
@@ -7583,7 +7583,7 @@
           <a:noFill/>
         </p:spPr>
         <p:txBody>
-          <a:bodyPr wrap="square" anchor="t" lIns="0" rIns="0" tIns="0" bIns="0">
+          <a:bodyPr wrap="none" anchor="t" lIns="0" rIns="0" tIns="0" bIns="0">
             <a:spAutoFit/>
             <a:extLst>
               <a:ext uri="{8AF73BB6-5E31-4F0F-A399-3D98F3B95FD9}">
@@ -7629,7 +7629,7 @@
           <a:noFill/>
         </p:spPr>
         <p:txBody>
-          <a:bodyPr wrap="square" anchor="t" lIns="0" rIns="0" tIns="0" bIns="0">
+          <a:bodyPr wrap="none" anchor="t" lIns="0" rIns="0" tIns="0" bIns="0">
             <a:spAutoFit/>
             <a:extLst>
               <a:ext uri="{8AF73BB6-5E31-4F0F-A399-3D98F3B95FD9}">
@@ -7675,7 +7675,7 @@
           <a:noFill/>
         </p:spPr>
         <p:txBody>
-          <a:bodyPr wrap="square" anchor="t" lIns="0" rIns="0" tIns="0" bIns="0">
+          <a:bodyPr wrap="none" anchor="t" lIns="0" rIns="0" tIns="0" bIns="0">
             <a:spAutoFit/>
             <a:extLst>
               <a:ext uri="{8AF73BB6-5E31-4F0F-A399-3D98F3B95FD9}">
@@ -7721,7 +7721,7 @@
           <a:noFill/>
         </p:spPr>
         <p:txBody>
-          <a:bodyPr wrap="square" anchor="t" lIns="0" rIns="0" tIns="0" bIns="0">
+          <a:bodyPr wrap="none" anchor="t" lIns="0" rIns="0" tIns="0" bIns="0">
             <a:spAutoFit/>
             <a:extLst>
               <a:ext uri="{8AF73BB6-5E31-4F0F-A399-3D98F3B95FD9}">
@@ -7767,7 +7767,7 @@
           <a:noFill/>
         </p:spPr>
         <p:txBody>
-          <a:bodyPr wrap="square" anchor="t" lIns="0" rIns="0" tIns="0" bIns="0">
+          <a:bodyPr wrap="none" anchor="t" lIns="0" rIns="0" tIns="0" bIns="0">
             <a:spAutoFit/>
             <a:extLst>
               <a:ext uri="{8AF73BB6-5E31-4F0F-A399-3D98F3B95FD9}">
@@ -7813,7 +7813,7 @@
           <a:noFill/>
         </p:spPr>
         <p:txBody>
-          <a:bodyPr wrap="square" anchor="t" lIns="0" rIns="0" tIns="0" bIns="0">
+          <a:bodyPr wrap="none" anchor="t" lIns="0" rIns="0" tIns="0" bIns="0">
             <a:spAutoFit/>
             <a:extLst>
               <a:ext uri="{8AF73BB6-5E31-4F0F-A399-3D98F3B95FD9}">
@@ -7859,7 +7859,7 @@
           <a:noFill/>
         </p:spPr>
         <p:txBody>
-          <a:bodyPr wrap="square" anchor="t" lIns="0" rIns="0" tIns="0" bIns="0">
+          <a:bodyPr wrap="none" anchor="t" lIns="0" rIns="0" tIns="0" bIns="0">
             <a:spAutoFit/>
             <a:extLst>
               <a:ext uri="{8AF73BB6-5E31-4F0F-A399-3D98F3B95FD9}">
@@ -7905,7 +7905,7 @@
           <a:noFill/>
         </p:spPr>
         <p:txBody>
-          <a:bodyPr wrap="square" anchor="t" lIns="0" rIns="0" tIns="0" bIns="0">
+          <a:bodyPr wrap="none" anchor="t" lIns="0" rIns="0" tIns="0" bIns="0">
             <a:spAutoFit/>
             <a:extLst>
               <a:ext uri="{8AF73BB6-5E31-4F0F-A399-3D98F3B95FD9}">
@@ -7951,7 +7951,7 @@
           <a:noFill/>
         </p:spPr>
         <p:txBody>
-          <a:bodyPr wrap="square" anchor="t" lIns="0" rIns="0" tIns="0" bIns="0">
+          <a:bodyPr wrap="none" anchor="t" lIns="0" rIns="0" tIns="0" bIns="0">
             <a:spAutoFit/>
             <a:extLst>
               <a:ext uri="{8AF73BB6-5E31-4F0F-A399-3D98F3B95FD9}">
@@ -7997,7 +7997,7 @@
           <a:noFill/>
         </p:spPr>
         <p:txBody>
-          <a:bodyPr wrap="square" anchor="t" lIns="0" rIns="0" tIns="0" bIns="0">
+          <a:bodyPr wrap="none" anchor="t" lIns="0" rIns="0" tIns="0" bIns="0">
             <a:spAutoFit/>
             <a:extLst>
               <a:ext uri="{8AF73BB6-5E31-4F0F-A399-3D98F3B95FD9}">
@@ -8043,7 +8043,7 @@
           <a:noFill/>
         </p:spPr>
         <p:txBody>
-          <a:bodyPr wrap="square" anchor="t" lIns="0" rIns="0" tIns="0" bIns="0">
+          <a:bodyPr wrap="none" anchor="t" lIns="0" rIns="0" tIns="0" bIns="0">
             <a:spAutoFit/>
             <a:extLst>
               <a:ext uri="{8AF73BB6-5E31-4F0F-A399-3D98F3B95FD9}">
@@ -8089,7 +8089,7 @@
           <a:noFill/>
         </p:spPr>
         <p:txBody>
-          <a:bodyPr wrap="square" anchor="t" lIns="0" rIns="0" tIns="0" bIns="0">
+          <a:bodyPr wrap="none" anchor="t" lIns="0" rIns="0" tIns="0" bIns="0">
             <a:spAutoFit/>
             <a:extLst>
               <a:ext uri="{8AF73BB6-5E31-4F0F-A399-3D98F3B95FD9}">
@@ -8135,7 +8135,7 @@
           <a:noFill/>
         </p:spPr>
         <p:txBody>
-          <a:bodyPr wrap="square" anchor="t" lIns="0" rIns="0" tIns="0" bIns="0">
+          <a:bodyPr wrap="none" anchor="t" lIns="0" rIns="0" tIns="0" bIns="0">
             <a:spAutoFit/>
             <a:extLst>
               <a:ext uri="{8AF73BB6-5E31-4F0F-A399-3D98F3B95FD9}">
@@ -8181,7 +8181,7 @@
           <a:noFill/>
         </p:spPr>
         <p:txBody>
-          <a:bodyPr wrap="square" anchor="t" lIns="0" rIns="0" tIns="0" bIns="0">
+          <a:bodyPr wrap="none" anchor="t" lIns="0" rIns="0" tIns="0" bIns="0">
             <a:spAutoFit/>
             <a:extLst>
               <a:ext uri="{8AF73BB6-5E31-4F0F-A399-3D98F3B95FD9}">
@@ -8227,7 +8227,7 @@
           <a:noFill/>
         </p:spPr>
         <p:txBody>
-          <a:bodyPr wrap="square" anchor="t" lIns="0" rIns="0" tIns="0" bIns="0">
+          <a:bodyPr wrap="none" anchor="t" lIns="0" rIns="0" tIns="0" bIns="0">
             <a:spAutoFit/>
             <a:extLst>
               <a:ext uri="{8AF73BB6-5E31-4F0F-A399-3D98F3B95FD9}">
@@ -8273,7 +8273,7 @@
           <a:noFill/>
         </p:spPr>
         <p:txBody>
-          <a:bodyPr wrap="square" anchor="t" lIns="0" rIns="0" tIns="0" bIns="0">
+          <a:bodyPr wrap="none" anchor="t" lIns="0" rIns="0" tIns="0" bIns="0">
             <a:spAutoFit/>
             <a:extLst>
               <a:ext uri="{8AF73BB6-5E31-4F0F-A399-3D98F3B95FD9}">
@@ -8319,7 +8319,7 @@
           <a:noFill/>
         </p:spPr>
         <p:txBody>
-          <a:bodyPr wrap="square" anchor="t" lIns="0" rIns="0" tIns="0" bIns="0">
+          <a:bodyPr wrap="none" anchor="t" lIns="0" rIns="0" tIns="0" bIns="0">
             <a:spAutoFit/>
             <a:extLst>
               <a:ext uri="{8AF73BB6-5E31-4F0F-A399-3D98F3B95FD9}">
@@ -8365,7 +8365,7 @@
           <a:noFill/>
         </p:spPr>
         <p:txBody>
-          <a:bodyPr wrap="square" anchor="t" lIns="0" rIns="0" tIns="0" bIns="0">
+          <a:bodyPr wrap="none" anchor="t" lIns="0" rIns="0" tIns="0" bIns="0">
             <a:spAutoFit/>
             <a:extLst>
               <a:ext uri="{8AF73BB6-5E31-4F0F-A399-3D98F3B95FD9}">
@@ -8411,7 +8411,7 @@
           <a:noFill/>
         </p:spPr>
         <p:txBody>
-          <a:bodyPr wrap="square" anchor="t" lIns="0" rIns="0" tIns="0" bIns="0">
+          <a:bodyPr wrap="none" anchor="t" lIns="0" rIns="0" tIns="0" bIns="0">
             <a:spAutoFit/>
             <a:extLst>
               <a:ext uri="{8AF73BB6-5E31-4F0F-A399-3D98F3B95FD9}">
@@ -64873,7 +64873,7 @@
           <a:noFill/>
         </p:spPr>
         <p:txBody>
-          <a:bodyPr wrap="square" anchor="t" lIns="0" rIns="0" tIns="0" bIns="0">
+          <a:bodyPr wrap="none" anchor="t" lIns="0" rIns="0" tIns="0" bIns="0">
             <a:spAutoFit/>
             <a:extLst>
               <a:ext uri="{8AF73BB6-5E31-4F0F-A399-3D98F3B95FD9}">
@@ -64919,7 +64919,7 @@
           <a:noFill/>
         </p:spPr>
         <p:txBody>
-          <a:bodyPr wrap="square" anchor="t" lIns="0" rIns="0" tIns="0" bIns="0">
+          <a:bodyPr wrap="none" anchor="t" lIns="0" rIns="0" tIns="0" bIns="0">
             <a:spAutoFit/>
             <a:extLst>
               <a:ext uri="{8AF73BB6-5E31-4F0F-A399-3D98F3B95FD9}">
@@ -64965,7 +64965,7 @@
           <a:noFill/>
         </p:spPr>
         <p:txBody>
-          <a:bodyPr wrap="square" anchor="t" lIns="0" rIns="0" tIns="0" bIns="0">
+          <a:bodyPr wrap="none" anchor="t" lIns="0" rIns="0" tIns="0" bIns="0">
             <a:spAutoFit/>
             <a:extLst>
               <a:ext uri="{8AF73BB6-5E31-4F0F-A399-3D98F3B95FD9}">
@@ -65011,7 +65011,7 @@
           <a:noFill/>
         </p:spPr>
         <p:txBody>
-          <a:bodyPr wrap="square" anchor="t" lIns="0" rIns="0" tIns="0" bIns="0">
+          <a:bodyPr wrap="none" anchor="t" lIns="0" rIns="0" tIns="0" bIns="0">
             <a:spAutoFit/>
             <a:extLst>
               <a:ext uri="{8AF73BB6-5E31-4F0F-A399-3D98F3B95FD9}">
@@ -65057,7 +65057,7 @@
           <a:noFill/>
         </p:spPr>
         <p:txBody>
-          <a:bodyPr wrap="square" anchor="t" lIns="0" rIns="0" tIns="0" bIns="0">
+          <a:bodyPr wrap="none" anchor="t" lIns="0" rIns="0" tIns="0" bIns="0">
             <a:spAutoFit/>
             <a:extLst>
               <a:ext uri="{8AF73BB6-5E31-4F0F-A399-3D98F3B95FD9}">
@@ -65103,7 +65103,7 @@
           <a:noFill/>
         </p:spPr>
         <p:txBody>
-          <a:bodyPr wrap="square" anchor="t" lIns="0" rIns="0" tIns="0" bIns="0">
+          <a:bodyPr wrap="none" anchor="t" lIns="0" rIns="0" tIns="0" bIns="0">
             <a:spAutoFit/>
             <a:extLst>
               <a:ext uri="{8AF73BB6-5E31-4F0F-A399-3D98F3B95FD9}">
@@ -65149,7 +65149,7 @@
           <a:noFill/>
         </p:spPr>
         <p:txBody>
-          <a:bodyPr wrap="square" anchor="t" lIns="0" rIns="0" tIns="0" bIns="0">
+          <a:bodyPr wrap="none" anchor="t" lIns="0" rIns="0" tIns="0" bIns="0">
             <a:spAutoFit/>
             <a:extLst>
               <a:ext uri="{8AF73BB6-5E31-4F0F-A399-3D98F3B95FD9}">
@@ -65195,7 +65195,7 @@
           <a:noFill/>
         </p:spPr>
         <p:txBody>
-          <a:bodyPr wrap="square" anchor="t" lIns="0" rIns="0" tIns="0" bIns="0">
+          <a:bodyPr wrap="none" anchor="t" lIns="0" rIns="0" tIns="0" bIns="0">
             <a:spAutoFit/>
             <a:extLst>
               <a:ext uri="{8AF73BB6-5E31-4F0F-A399-3D98F3B95FD9}">
@@ -65241,7 +65241,7 @@
           <a:noFill/>
         </p:spPr>
         <p:txBody>
-          <a:bodyPr wrap="square" anchor="t" lIns="0" rIns="0" tIns="0" bIns="0">
+          <a:bodyPr wrap="none" anchor="t" lIns="0" rIns="0" tIns="0" bIns="0">
             <a:spAutoFit/>
             <a:extLst>
               <a:ext uri="{8AF73BB6-5E31-4F0F-A399-3D98F3B95FD9}">
@@ -65287,7 +65287,7 @@
           <a:noFill/>
         </p:spPr>
         <p:txBody>
-          <a:bodyPr wrap="square" anchor="t" lIns="0" rIns="0" tIns="0" bIns="0">
+          <a:bodyPr wrap="none" anchor="t" lIns="0" rIns="0" tIns="0" bIns="0">
             <a:spAutoFit/>
             <a:extLst>
               <a:ext uri="{8AF73BB6-5E31-4F0F-A399-3D98F3B95FD9}">
@@ -65333,7 +65333,7 @@
           <a:noFill/>
         </p:spPr>
         <p:txBody>
-          <a:bodyPr wrap="square" anchor="t" lIns="0" rIns="0" tIns="0" bIns="0">
+          <a:bodyPr wrap="none" anchor="t" lIns="0" rIns="0" tIns="0" bIns="0">
             <a:spAutoFit/>
             <a:extLst>
               <a:ext uri="{8AF73BB6-5E31-4F0F-A399-3D98F3B95FD9}">
@@ -65379,7 +65379,7 @@
           <a:noFill/>
         </p:spPr>
         <p:txBody>
-          <a:bodyPr wrap="square" anchor="t" lIns="0" rIns="0" tIns="0" bIns="0">
+          <a:bodyPr wrap="none" anchor="t" lIns="0" rIns="0" tIns="0" bIns="0">
             <a:spAutoFit/>
             <a:extLst>
               <a:ext uri="{8AF73BB6-5E31-4F0F-A399-3D98F3B95FD9}">
@@ -65425,7 +65425,7 @@
           <a:noFill/>
         </p:spPr>
         <p:txBody>
-          <a:bodyPr wrap="square" anchor="t" lIns="0" rIns="0" tIns="0" bIns="0">
+          <a:bodyPr wrap="none" anchor="t" lIns="0" rIns="0" tIns="0" bIns="0">
             <a:spAutoFit/>
             <a:extLst>
               <a:ext uri="{8AF73BB6-5E31-4F0F-A399-3D98F3B95FD9}">
@@ -65471,7 +65471,7 @@
           <a:noFill/>
         </p:spPr>
         <p:txBody>
-          <a:bodyPr wrap="square" anchor="t" lIns="0" rIns="0" tIns="0" bIns="0">
+          <a:bodyPr wrap="none" anchor="t" lIns="0" rIns="0" tIns="0" bIns="0">
             <a:spAutoFit/>
             <a:extLst>
               <a:ext uri="{8AF73BB6-5E31-4F0F-A399-3D98F3B95FD9}">
@@ -65517,7 +65517,7 @@
           <a:noFill/>
         </p:spPr>
         <p:txBody>
-          <a:bodyPr wrap="square" anchor="t" lIns="0" rIns="0" tIns="0" bIns="0">
+          <a:bodyPr wrap="none" anchor="t" lIns="0" rIns="0" tIns="0" bIns="0">
             <a:spAutoFit/>
             <a:extLst>
               <a:ext uri="{8AF73BB6-5E31-4F0F-A399-3D98F3B95FD9}">
@@ -65563,7 +65563,7 @@
           <a:noFill/>
         </p:spPr>
         <p:txBody>
-          <a:bodyPr wrap="square" anchor="t" lIns="0" rIns="0" tIns="0" bIns="0">
+          <a:bodyPr wrap="none" anchor="t" lIns="0" rIns="0" tIns="0" bIns="0">
             <a:spAutoFit/>
             <a:extLst>
               <a:ext uri="{8AF73BB6-5E31-4F0F-A399-3D98F3B95FD9}">
@@ -65609,7 +65609,7 @@
           <a:noFill/>
         </p:spPr>
         <p:txBody>
-          <a:bodyPr wrap="square" anchor="t" lIns="0" rIns="0" tIns="0" bIns="0">
+          <a:bodyPr wrap="none" anchor="t" lIns="0" rIns="0" tIns="0" bIns="0">
             <a:spAutoFit/>
             <a:extLst>
               <a:ext uri="{8AF73BB6-5E31-4F0F-A399-3D98F3B95FD9}">
@@ -65655,7 +65655,7 @@
           <a:noFill/>
         </p:spPr>
         <p:txBody>
-          <a:bodyPr wrap="square" anchor="t" lIns="0" rIns="0" tIns="0" bIns="0">
+          <a:bodyPr wrap="none" anchor="t" lIns="0" rIns="0" tIns="0" bIns="0">
             <a:spAutoFit/>
             <a:extLst>
               <a:ext uri="{8AF73BB6-5E31-4F0F-A399-3D98F3B95FD9}">
@@ -65701,7 +65701,7 @@
           <a:noFill/>
         </p:spPr>
         <p:txBody>
-          <a:bodyPr wrap="square" anchor="t" lIns="0" rIns="0" tIns="0" bIns="0">
+          <a:bodyPr wrap="none" anchor="t" lIns="0" rIns="0" tIns="0" bIns="0">
             <a:spAutoFit/>
             <a:extLst>
               <a:ext uri="{8AF73BB6-5E31-4F0F-A399-3D98F3B95FD9}">
@@ -65747,7 +65747,7 @@
           <a:noFill/>
         </p:spPr>
         <p:txBody>
-          <a:bodyPr wrap="square" anchor="t" lIns="0" rIns="0" tIns="0" bIns="0">
+          <a:bodyPr wrap="none" anchor="t" lIns="0" rIns="0" tIns="0" bIns="0">
             <a:spAutoFit/>
             <a:extLst>
               <a:ext uri="{8AF73BB6-5E31-4F0F-A399-3D98F3B95FD9}">

--- a/examples/gallery/pattern_gallery.pptx
+++ b/examples/gallery/pattern_gallery.pptx
@@ -3212,6 +3212,11 @@
         <p:txBody>
           <a:bodyPr wrap="square" anchor="t" lIns="0" rIns="0" tIns="0" bIns="0">
             <a:spAutoFit/>
+            <a:extLst>
+              <a:ext uri="{8AF73BB6-5E31-4F0F-A399-3D98F3B95FD9}">
+                <ns2:textLayout xmlns:ns2="urn:pptxdsl:text-layout:v1" role="natural"/>
+              </a:ext>
+            </a:extLst>
           </a:bodyPr>
           <a:lstStyle/>
           <a:p>
@@ -3271,6 +3276,11 @@
         <p:txBody>
           <a:bodyPr wrap="square" anchor="t" lIns="0" rIns="0" tIns="0" bIns="0">
             <a:spAutoFit/>
+            <a:extLst>
+              <a:ext uri="{8AF73BB6-5E31-4F0F-A399-3D98F3B95FD9}">
+                <ns9:textLayout xmlns:ns9="urn:pptxdsl:text-layout:v1" role="body"/>
+              </a:ext>
+            </a:extLst>
           </a:bodyPr>
           <a:lstStyle/>
           <a:p>
@@ -3356,6 +3366,11 @@
         <p:txBody>
           <a:bodyPr wrap="none" anchor="t" lIns="0" rIns="0" tIns="0" bIns="0">
             <a:spAutoFit/>
+            <a:extLst>
+              <a:ext uri="{8AF73BB6-5E31-4F0F-A399-3D98F3B95FD9}">
+                <ns14:textLayout xmlns:ns14="urn:pptxdsl:text-layout:v1" role="natural"/>
+              </a:ext>
+            </a:extLst>
           </a:bodyPr>
           <a:lstStyle/>
           <a:p>
@@ -3397,6 +3412,11 @@
         <p:txBody>
           <a:bodyPr wrap="none" anchor="t" lIns="0" rIns="0" tIns="0" bIns="0">
             <a:spAutoFit/>
+            <a:extLst>
+              <a:ext uri="{8AF73BB6-5E31-4F0F-A399-3D98F3B95FD9}">
+                <ns19:textLayout xmlns:ns19="urn:pptxdsl:text-layout:v1" role="natural"/>
+              </a:ext>
+            </a:extLst>
           </a:bodyPr>
           <a:lstStyle/>
           <a:p>
@@ -3438,6 +3458,11 @@
         <p:txBody>
           <a:bodyPr wrap="none" anchor="t" lIns="0" rIns="0" tIns="0" bIns="0">
             <a:spAutoFit/>
+            <a:extLst>
+              <a:ext uri="{8AF73BB6-5E31-4F0F-A399-3D98F3B95FD9}">
+                <ns24:textLayout xmlns:ns24="urn:pptxdsl:text-layout:v1" role="natural"/>
+              </a:ext>
+            </a:extLst>
           </a:bodyPr>
           <a:lstStyle/>
           <a:p>
@@ -3479,6 +3504,11 @@
         <p:txBody>
           <a:bodyPr wrap="none" anchor="t" lIns="0" rIns="0" tIns="0" bIns="0">
             <a:spAutoFit/>
+            <a:extLst>
+              <a:ext uri="{8AF73BB6-5E31-4F0F-A399-3D98F3B95FD9}">
+                <ns29:textLayout xmlns:ns29="urn:pptxdsl:text-layout:v1" role="natural"/>
+              </a:ext>
+            </a:extLst>
           </a:bodyPr>
           <a:lstStyle/>
           <a:p>
@@ -3538,6 +3568,11 @@
         <p:txBody>
           <a:bodyPr wrap="none" anchor="t" lIns="0" rIns="0" tIns="0" bIns="0">
             <a:spAutoFit/>
+            <a:extLst>
+              <a:ext uri="{8AF73BB6-5E31-4F0F-A399-3D98F3B95FD9}">
+                <ns36:textLayout xmlns:ns36="urn:pptxdsl:text-layout:v1" role="natural"/>
+              </a:ext>
+            </a:extLst>
           </a:bodyPr>
           <a:lstStyle/>
           <a:p>
@@ -3579,6 +3614,11 @@
         <p:txBody>
           <a:bodyPr wrap="none" anchor="t" lIns="0" rIns="0" tIns="0" bIns="0">
             <a:spAutoFit/>
+            <a:extLst>
+              <a:ext uri="{8AF73BB6-5E31-4F0F-A399-3D98F3B95FD9}">
+                <ns41:textLayout xmlns:ns41="urn:pptxdsl:text-layout:v1" role="natural"/>
+              </a:ext>
+            </a:extLst>
           </a:bodyPr>
           <a:lstStyle/>
           <a:p>
@@ -3682,6 +3722,11 @@
         <p:txBody>
           <a:bodyPr wrap="square" anchor="t" lIns="0" rIns="0" tIns="0" bIns="0">
             <a:spAutoFit/>
+            <a:extLst>
+              <a:ext uri="{8AF73BB6-5E31-4F0F-A399-3D98F3B95FD9}">
+                <ns2:textLayout xmlns:ns2="urn:pptxdsl:text-layout:v1" role="natural"/>
+              </a:ext>
+            </a:extLst>
           </a:bodyPr>
           <a:lstStyle/>
           <a:p>
@@ -3723,6 +3768,11 @@
         <p:txBody>
           <a:bodyPr wrap="square" anchor="t" lIns="0" rIns="0" tIns="0" bIns="0">
             <a:spAutoFit/>
+            <a:extLst>
+              <a:ext uri="{8AF73BB6-5E31-4F0F-A399-3D98F3B95FD9}">
+                <ns7:textLayout xmlns:ns7="urn:pptxdsl:text-layout:v1" role="natural"/>
+              </a:ext>
+            </a:extLst>
           </a:bodyPr>
           <a:lstStyle/>
           <a:p>
@@ -3799,6 +3849,11 @@
         <p:txBody>
           <a:bodyPr wrap="square" anchor="t" lIns="0" rIns="0" tIns="0" bIns="0">
             <a:spAutoFit/>
+            <a:extLst>
+              <a:ext uri="{8AF73BB6-5E31-4F0F-A399-3D98F3B95FD9}">
+                <ns12:textLayout xmlns:ns12="urn:pptxdsl:text-layout:v1" role="body"/>
+              </a:ext>
+            </a:extLst>
           </a:bodyPr>
           <a:lstStyle/>
           <a:p>
@@ -3875,6 +3930,11 @@
         <p:txBody>
           <a:bodyPr wrap="square" anchor="t" lIns="0" rIns="0" tIns="0" bIns="0">
             <a:spAutoFit/>
+            <a:extLst>
+              <a:ext uri="{8AF73BB6-5E31-4F0F-A399-3D98F3B95FD9}">
+                <ns17:textLayout xmlns:ns17="urn:pptxdsl:text-layout:v1" role="body"/>
+              </a:ext>
+            </a:extLst>
           </a:bodyPr>
           <a:lstStyle/>
           <a:p>
@@ -3951,6 +4011,11 @@
         <p:txBody>
           <a:bodyPr wrap="square" anchor="t" lIns="0" rIns="0" tIns="0" bIns="0">
             <a:spAutoFit/>
+            <a:extLst>
+              <a:ext uri="{8AF73BB6-5E31-4F0F-A399-3D98F3B95FD9}">
+                <ns22:textLayout xmlns:ns22="urn:pptxdsl:text-layout:v1" role="body"/>
+              </a:ext>
+            </a:extLst>
           </a:bodyPr>
           <a:lstStyle/>
           <a:p>
@@ -4027,6 +4092,11 @@
         <p:txBody>
           <a:bodyPr wrap="square" anchor="t" lIns="0" rIns="0" tIns="0" bIns="0">
             <a:spAutoFit/>
+            <a:extLst>
+              <a:ext uri="{8AF73BB6-5E31-4F0F-A399-3D98F3B95FD9}">
+                <ns27:textLayout xmlns:ns27="urn:pptxdsl:text-layout:v1" role="body"/>
+              </a:ext>
+            </a:extLst>
           </a:bodyPr>
           <a:lstStyle/>
           <a:p>
@@ -4103,6 +4173,11 @@
         <p:txBody>
           <a:bodyPr wrap="square" anchor="t" lIns="0" rIns="0" tIns="0" bIns="0">
             <a:spAutoFit/>
+            <a:extLst>
+              <a:ext uri="{8AF73BB6-5E31-4F0F-A399-3D98F3B95FD9}">
+                <ns32:textLayout xmlns:ns32="urn:pptxdsl:text-layout:v1" role="body"/>
+              </a:ext>
+            </a:extLst>
           </a:bodyPr>
           <a:lstStyle/>
           <a:p>
@@ -4214,6 +4289,11 @@
         <p:txBody>
           <a:bodyPr wrap="square" anchor="t" lIns="0" rIns="0" tIns="0" bIns="0">
             <a:spAutoFit/>
+            <a:extLst>
+              <a:ext uri="{8AF73BB6-5E31-4F0F-A399-3D98F3B95FD9}">
+                <ns37:textLayout xmlns:ns37="urn:pptxdsl:text-layout:v1" role="body"/>
+              </a:ext>
+            </a:extLst>
           </a:bodyPr>
           <a:lstStyle/>
           <a:p>
@@ -4255,6 +4335,11 @@
         <p:txBody>
           <a:bodyPr wrap="square" anchor="t" lIns="0" rIns="0" tIns="0" bIns="0">
             <a:spAutoFit/>
+            <a:extLst>
+              <a:ext uri="{8AF73BB6-5E31-4F0F-A399-3D98F3B95FD9}">
+                <ns42:textLayout xmlns:ns42="urn:pptxdsl:text-layout:v1" role="body"/>
+              </a:ext>
+            </a:extLst>
           </a:bodyPr>
           <a:lstStyle/>
           <a:p>
@@ -4296,6 +4381,11 @@
         <p:txBody>
           <a:bodyPr wrap="square" anchor="t" lIns="0" rIns="0" tIns="0" bIns="0">
             <a:spAutoFit/>
+            <a:extLst>
+              <a:ext uri="{8AF73BB6-5E31-4F0F-A399-3D98F3B95FD9}">
+                <ns47:textLayout xmlns:ns47="urn:pptxdsl:text-layout:v1" role="body"/>
+              </a:ext>
+            </a:extLst>
           </a:bodyPr>
           <a:lstStyle/>
           <a:p>
@@ -4337,6 +4427,11 @@
         <p:txBody>
           <a:bodyPr wrap="square" anchor="t" lIns="0" rIns="0" tIns="0" bIns="0">
             <a:spAutoFit/>
+            <a:extLst>
+              <a:ext uri="{8AF73BB6-5E31-4F0F-A399-3D98F3B95FD9}">
+                <ns52:textLayout xmlns:ns52="urn:pptxdsl:text-layout:v1" role="body"/>
+              </a:ext>
+            </a:extLst>
           </a:bodyPr>
           <a:lstStyle/>
           <a:p>
@@ -4378,6 +4473,11 @@
         <p:txBody>
           <a:bodyPr wrap="square" anchor="t" lIns="0" rIns="0" tIns="0" bIns="0">
             <a:spAutoFit/>
+            <a:extLst>
+              <a:ext uri="{8AF73BB6-5E31-4F0F-A399-3D98F3B95FD9}">
+                <ns57:textLayout xmlns:ns57="urn:pptxdsl:text-layout:v1" role="body"/>
+              </a:ext>
+            </a:extLst>
           </a:bodyPr>
           <a:lstStyle/>
           <a:p>
@@ -4419,6 +4519,11 @@
         <p:txBody>
           <a:bodyPr wrap="square" anchor="t" lIns="0" rIns="0" tIns="0" bIns="0">
             <a:spAutoFit/>
+            <a:extLst>
+              <a:ext uri="{8AF73BB6-5E31-4F0F-A399-3D98F3B95FD9}">
+                <ns62:textLayout xmlns:ns62="urn:pptxdsl:text-layout:v1" role="body"/>
+              </a:ext>
+            </a:extLst>
           </a:bodyPr>
           <a:lstStyle/>
           <a:p>
@@ -4460,6 +4565,11 @@
         <p:txBody>
           <a:bodyPr wrap="square" anchor="t" lIns="0" rIns="0" tIns="0" bIns="0">
             <a:spAutoFit/>
+            <a:extLst>
+              <a:ext uri="{8AF73BB6-5E31-4F0F-A399-3D98F3B95FD9}">
+                <ns67:textLayout xmlns:ns67="urn:pptxdsl:text-layout:v1" role="body"/>
+              </a:ext>
+            </a:extLst>
           </a:bodyPr>
           <a:lstStyle/>
           <a:p>
@@ -4501,6 +4611,11 @@
         <p:txBody>
           <a:bodyPr wrap="square" anchor="t" lIns="0" rIns="0" tIns="0" bIns="0">
             <a:spAutoFit/>
+            <a:extLst>
+              <a:ext uri="{8AF73BB6-5E31-4F0F-A399-3D98F3B95FD9}">
+                <ns72:textLayout xmlns:ns72="urn:pptxdsl:text-layout:v1" role="body"/>
+              </a:ext>
+            </a:extLst>
           </a:bodyPr>
           <a:lstStyle/>
           <a:p>
@@ -4542,6 +4657,11 @@
         <p:txBody>
           <a:bodyPr wrap="square" anchor="t" lIns="0" rIns="0" tIns="0" bIns="0">
             <a:spAutoFit/>
+            <a:extLst>
+              <a:ext uri="{8AF73BB6-5E31-4F0F-A399-3D98F3B95FD9}">
+                <ns77:textLayout xmlns:ns77="urn:pptxdsl:text-layout:v1" role="body"/>
+              </a:ext>
+            </a:extLst>
           </a:bodyPr>
           <a:lstStyle/>
           <a:p>
@@ -5997,6 +6117,11 @@
         <p:txBody>
           <a:bodyPr wrap="square" anchor="t" lIns="0" rIns="0" tIns="0" bIns="0">
             <a:spAutoFit/>
+            <a:extLst>
+              <a:ext uri="{8AF73BB6-5E31-4F0F-A399-3D98F3B95FD9}">
+                <ns82:textLayout xmlns:ns82="urn:pptxdsl:text-layout:v1" role="body"/>
+              </a:ext>
+            </a:extLst>
           </a:bodyPr>
           <a:lstStyle/>
           <a:p>
@@ -6082,6 +6207,11 @@
         <p:txBody>
           <a:bodyPr wrap="square" anchor="t" lIns="0" rIns="0" tIns="0" bIns="0">
             <a:spAutoFit/>
+            <a:extLst>
+              <a:ext uri="{8AF73BB6-5E31-4F0F-A399-3D98F3B95FD9}">
+                <ns87:textLayout xmlns:ns87="urn:pptxdsl:text-layout:v1" role="body"/>
+              </a:ext>
+            </a:extLst>
           </a:bodyPr>
           <a:lstStyle/>
           <a:p>
@@ -6123,6 +6253,11 @@
         <p:txBody>
           <a:bodyPr wrap="square" anchor="t" lIns="0" rIns="0" tIns="0" bIns="0">
             <a:spAutoFit/>
+            <a:extLst>
+              <a:ext uri="{8AF73BB6-5E31-4F0F-A399-3D98F3B95FD9}">
+                <ns92:textLayout xmlns:ns92="urn:pptxdsl:text-layout:v1" role="body"/>
+              </a:ext>
+            </a:extLst>
           </a:bodyPr>
           <a:lstStyle/>
           <a:p>
@@ -6208,6 +6343,11 @@
         <p:txBody>
           <a:bodyPr wrap="square" anchor="ctr" lIns="0" rIns="0" tIns="0" bIns="0">
             <a:spAutoFit/>
+            <a:extLst>
+              <a:ext uri="{8AF73BB6-5E31-4F0F-A399-3D98F3B95FD9}">
+                <ns97:textLayout xmlns:ns97="urn:pptxdsl:text-layout:v1" role="body"/>
+              </a:ext>
+            </a:extLst>
           </a:bodyPr>
           <a:lstStyle/>
           <a:p>
@@ -6249,6 +6389,11 @@
         <p:txBody>
           <a:bodyPr wrap="none" anchor="ctr" lIns="0" rIns="0" tIns="0" bIns="0">
             <a:spAutoFit/>
+            <a:extLst>
+              <a:ext uri="{8AF73BB6-5E31-4F0F-A399-3D98F3B95FD9}">
+                <ns102:textLayout xmlns:ns102="urn:pptxdsl:text-layout:v1" role="body"/>
+              </a:ext>
+            </a:extLst>
           </a:bodyPr>
           <a:lstStyle/>
           <a:p>
@@ -6363,6 +6508,11 @@
         <p:txBody>
           <a:bodyPr wrap="square" anchor="t" lIns="0" rIns="0" tIns="0" bIns="0">
             <a:spAutoFit/>
+            <a:extLst>
+              <a:ext uri="{8AF73BB6-5E31-4F0F-A399-3D98F3B95FD9}">
+                <ns2:textLayout xmlns:ns2="urn:pptxdsl:text-layout:v1" role="natural"/>
+              </a:ext>
+            </a:extLst>
           </a:bodyPr>
           <a:lstStyle/>
           <a:p>
@@ -6404,6 +6554,11 @@
         <p:txBody>
           <a:bodyPr wrap="square" anchor="t" lIns="0" rIns="0" tIns="0" bIns="0">
             <a:spAutoFit/>
+            <a:extLst>
+              <a:ext uri="{8AF73BB6-5E31-4F0F-A399-3D98F3B95FD9}">
+                <ns7:textLayout xmlns:ns7="urn:pptxdsl:text-layout:v1" role="natural"/>
+              </a:ext>
+            </a:extLst>
           </a:bodyPr>
           <a:lstStyle/>
           <a:p>
@@ -6480,6 +6635,11 @@
         <p:txBody>
           <a:bodyPr wrap="square" anchor="t" lIns="0" rIns="0" tIns="0" bIns="0">
             <a:spAutoFit/>
+            <a:extLst>
+              <a:ext uri="{8AF73BB6-5E31-4F0F-A399-3D98F3B95FD9}">
+                <ns12:textLayout xmlns:ns12="urn:pptxdsl:text-layout:v1" role="body"/>
+              </a:ext>
+            </a:extLst>
           </a:bodyPr>
           <a:lstStyle/>
           <a:p>
@@ -6556,6 +6716,11 @@
         <p:txBody>
           <a:bodyPr wrap="square" anchor="t" lIns="0" rIns="0" tIns="0" bIns="0">
             <a:spAutoFit/>
+            <a:extLst>
+              <a:ext uri="{8AF73BB6-5E31-4F0F-A399-3D98F3B95FD9}">
+                <ns17:textLayout xmlns:ns17="urn:pptxdsl:text-layout:v1" role="body"/>
+              </a:ext>
+            </a:extLst>
           </a:bodyPr>
           <a:lstStyle/>
           <a:p>
@@ -6632,6 +6797,11 @@
         <p:txBody>
           <a:bodyPr wrap="square" anchor="t" lIns="0" rIns="0" tIns="0" bIns="0">
             <a:spAutoFit/>
+            <a:extLst>
+              <a:ext uri="{8AF73BB6-5E31-4F0F-A399-3D98F3B95FD9}">
+                <ns22:textLayout xmlns:ns22="urn:pptxdsl:text-layout:v1" role="body"/>
+              </a:ext>
+            </a:extLst>
           </a:bodyPr>
           <a:lstStyle/>
           <a:p>
@@ -6708,6 +6878,11 @@
         <p:txBody>
           <a:bodyPr wrap="square" anchor="t" lIns="0" rIns="0" tIns="0" bIns="0">
             <a:spAutoFit/>
+            <a:extLst>
+              <a:ext uri="{8AF73BB6-5E31-4F0F-A399-3D98F3B95FD9}">
+                <ns27:textLayout xmlns:ns27="urn:pptxdsl:text-layout:v1" role="body"/>
+              </a:ext>
+            </a:extLst>
           </a:bodyPr>
           <a:lstStyle/>
           <a:p>
@@ -6784,6 +6959,11 @@
         <p:txBody>
           <a:bodyPr wrap="square" anchor="t" lIns="0" rIns="0" tIns="0" bIns="0">
             <a:spAutoFit/>
+            <a:extLst>
+              <a:ext uri="{8AF73BB6-5E31-4F0F-A399-3D98F3B95FD9}">
+                <ns32:textLayout xmlns:ns32="urn:pptxdsl:text-layout:v1" role="body"/>
+              </a:ext>
+            </a:extLst>
           </a:bodyPr>
           <a:lstStyle/>
           <a:p>
@@ -6895,6 +7075,11 @@
         <p:txBody>
           <a:bodyPr wrap="square" anchor="t" lIns="0" rIns="0" tIns="0" bIns="0">
             <a:spAutoFit/>
+            <a:extLst>
+              <a:ext uri="{8AF73BB6-5E31-4F0F-A399-3D98F3B95FD9}">
+                <ns37:textLayout xmlns:ns37="urn:pptxdsl:text-layout:v1" role="body"/>
+              </a:ext>
+            </a:extLst>
           </a:bodyPr>
           <a:lstStyle/>
           <a:p>
@@ -7068,6 +7253,11 @@
         <p:txBody>
           <a:bodyPr wrap="square" anchor="t" lIns="0" rIns="0" tIns="0" bIns="0">
             <a:spAutoFit/>
+            <a:extLst>
+              <a:ext uri="{8AF73BB6-5E31-4F0F-A399-3D98F3B95FD9}">
+                <ns42:textLayout xmlns:ns42="urn:pptxdsl:text-layout:v1" role="body"/>
+              </a:ext>
+            </a:extLst>
           </a:bodyPr>
           <a:lstStyle/>
           <a:p>
@@ -7241,6 +7431,11 @@
         <p:txBody>
           <a:bodyPr wrap="square" anchor="t" lIns="0" rIns="0" tIns="0" bIns="0">
             <a:spAutoFit/>
+            <a:extLst>
+              <a:ext uri="{8AF73BB6-5E31-4F0F-A399-3D98F3B95FD9}">
+                <ns47:textLayout xmlns:ns47="urn:pptxdsl:text-layout:v1" role="body"/>
+              </a:ext>
+            </a:extLst>
           </a:bodyPr>
           <a:lstStyle/>
           <a:p>
@@ -7458,6 +7653,11 @@
         <p:txBody>
           <a:bodyPr wrap="square" anchor="t" lIns="0" rIns="0" tIns="0" bIns="0">
             <a:spAutoFit/>
+            <a:extLst>
+              <a:ext uri="{8AF73BB6-5E31-4F0F-A399-3D98F3B95FD9}">
+                <ns52:textLayout xmlns:ns52="urn:pptxdsl:text-layout:v1" role="body"/>
+              </a:ext>
+            </a:extLst>
           </a:bodyPr>
           <a:lstStyle/>
           <a:p>
@@ -7543,6 +7743,11 @@
         <p:txBody>
           <a:bodyPr wrap="square" anchor="t" lIns="0" rIns="0" tIns="0" bIns="0">
             <a:spAutoFit/>
+            <a:extLst>
+              <a:ext uri="{8AF73BB6-5E31-4F0F-A399-3D98F3B95FD9}">
+                <ns57:textLayout xmlns:ns57="urn:pptxdsl:text-layout:v1" role="body"/>
+              </a:ext>
+            </a:extLst>
           </a:bodyPr>
           <a:lstStyle/>
           <a:p>
@@ -7628,6 +7833,11 @@
         <p:txBody>
           <a:bodyPr wrap="square" anchor="t" lIns="0" rIns="0" tIns="0" bIns="0">
             <a:spAutoFit/>
+            <a:extLst>
+              <a:ext uri="{8AF73BB6-5E31-4F0F-A399-3D98F3B95FD9}">
+                <ns62:textLayout xmlns:ns62="urn:pptxdsl:text-layout:v1" role="body"/>
+              </a:ext>
+            </a:extLst>
           </a:bodyPr>
           <a:lstStyle/>
           <a:p>
@@ -7669,6 +7879,11 @@
         <p:txBody>
           <a:bodyPr wrap="square" anchor="t" lIns="0" rIns="0" tIns="0" bIns="0">
             <a:spAutoFit/>
+            <a:extLst>
+              <a:ext uri="{8AF73BB6-5E31-4F0F-A399-3D98F3B95FD9}">
+                <ns67:textLayout xmlns:ns67="urn:pptxdsl:text-layout:v1" role="body"/>
+              </a:ext>
+            </a:extLst>
           </a:bodyPr>
           <a:lstStyle/>
           <a:p>
@@ -7754,6 +7969,11 @@
         <p:txBody>
           <a:bodyPr wrap="square" anchor="ctr" lIns="0" rIns="0" tIns="0" bIns="0">
             <a:spAutoFit/>
+            <a:extLst>
+              <a:ext uri="{8AF73BB6-5E31-4F0F-A399-3D98F3B95FD9}">
+                <ns72:textLayout xmlns:ns72="urn:pptxdsl:text-layout:v1" role="body"/>
+              </a:ext>
+            </a:extLst>
           </a:bodyPr>
           <a:lstStyle/>
           <a:p>
@@ -7795,6 +8015,11 @@
         <p:txBody>
           <a:bodyPr wrap="none" anchor="ctr" lIns="0" rIns="0" tIns="0" bIns="0">
             <a:spAutoFit/>
+            <a:extLst>
+              <a:ext uri="{8AF73BB6-5E31-4F0F-A399-3D98F3B95FD9}">
+                <ns77:textLayout xmlns:ns77="urn:pptxdsl:text-layout:v1" role="body"/>
+              </a:ext>
+            </a:extLst>
           </a:bodyPr>
           <a:lstStyle/>
           <a:p>
@@ -7909,6 +8134,11 @@
         <p:txBody>
           <a:bodyPr wrap="square" anchor="t" lIns="0" rIns="0" tIns="0" bIns="0">
             <a:spAutoFit/>
+            <a:extLst>
+              <a:ext uri="{8AF73BB6-5E31-4F0F-A399-3D98F3B95FD9}">
+                <ns2:textLayout xmlns:ns2="urn:pptxdsl:text-layout:v1" role="natural"/>
+              </a:ext>
+            </a:extLst>
           </a:bodyPr>
           <a:lstStyle/>
           <a:p>
@@ -7950,6 +8180,11 @@
         <p:txBody>
           <a:bodyPr wrap="square" anchor="t" lIns="0" rIns="0" tIns="0" bIns="0">
             <a:spAutoFit/>
+            <a:extLst>
+              <a:ext uri="{8AF73BB6-5E31-4F0F-A399-3D98F3B95FD9}">
+                <ns7:textLayout xmlns:ns7="urn:pptxdsl:text-layout:v1" role="natural"/>
+              </a:ext>
+            </a:extLst>
           </a:bodyPr>
           <a:lstStyle/>
           <a:p>
@@ -8067,6 +8302,11 @@
         <p:txBody>
           <a:bodyPr wrap="square" anchor="ctr" lIns="0" rIns="0" tIns="0" bIns="0">
             <a:spAutoFit/>
+            <a:extLst>
+              <a:ext uri="{8AF73BB6-5E31-4F0F-A399-3D98F3B95FD9}">
+                <ns12:textLayout xmlns:ns12="urn:pptxdsl:text-layout:v1" role="body"/>
+              </a:ext>
+            </a:extLst>
           </a:bodyPr>
           <a:lstStyle/>
           <a:p>
@@ -8108,6 +8348,11 @@
         <p:txBody>
           <a:bodyPr wrap="none" anchor="ctr" lIns="0" rIns="0" tIns="0" bIns="0">
             <a:spAutoFit/>
+            <a:extLst>
+              <a:ext uri="{8AF73BB6-5E31-4F0F-A399-3D98F3B95FD9}">
+                <ns17:textLayout xmlns:ns17="urn:pptxdsl:text-layout:v1" role="body"/>
+              </a:ext>
+            </a:extLst>
           </a:bodyPr>
           <a:lstStyle/>
           <a:p>
@@ -8222,6 +8467,11 @@
         <p:txBody>
           <a:bodyPr wrap="square" anchor="t" lIns="0" rIns="0" tIns="0" bIns="0">
             <a:spAutoFit/>
+            <a:extLst>
+              <a:ext uri="{8AF73BB6-5E31-4F0F-A399-3D98F3B95FD9}">
+                <ns2:textLayout xmlns:ns2="urn:pptxdsl:text-layout:v1" role="natural"/>
+              </a:ext>
+            </a:extLst>
           </a:bodyPr>
           <a:lstStyle/>
           <a:p>
@@ -8263,6 +8513,11 @@
         <p:txBody>
           <a:bodyPr wrap="square" anchor="t" lIns="0" rIns="0" tIns="0" bIns="0">
             <a:spAutoFit/>
+            <a:extLst>
+              <a:ext uri="{8AF73BB6-5E31-4F0F-A399-3D98F3B95FD9}">
+                <ns7:textLayout xmlns:ns7="urn:pptxdsl:text-layout:v1" role="natural"/>
+              </a:ext>
+            </a:extLst>
           </a:bodyPr>
           <a:lstStyle/>
           <a:p>
@@ -8348,6 +8603,11 @@
         <p:txBody>
           <a:bodyPr wrap="square" anchor="t" lIns="0" rIns="0" tIns="0" bIns="0">
             <a:spAutoFit/>
+            <a:extLst>
+              <a:ext uri="{8AF73BB6-5E31-4F0F-A399-3D98F3B95FD9}">
+                <ns12:textLayout xmlns:ns12="urn:pptxdsl:text-layout:v1" role="natural"/>
+              </a:ext>
+            </a:extLst>
           </a:bodyPr>
           <a:lstStyle/>
           <a:p>
@@ -8465,6 +8725,11 @@
         <p:txBody>
           <a:bodyPr wrap="square" anchor="t" lIns="0" rIns="0" tIns="0" bIns="0">
             <a:spAutoFit/>
+            <a:extLst>
+              <a:ext uri="{8AF73BB6-5E31-4F0F-A399-3D98F3B95FD9}">
+                <ns17:textLayout xmlns:ns17="urn:pptxdsl:text-layout:v1" role="natural"/>
+              </a:ext>
+            </a:extLst>
           </a:bodyPr>
           <a:lstStyle/>
           <a:p>
@@ -8582,6 +8847,11 @@
         <p:txBody>
           <a:bodyPr wrap="square" anchor="ctr" lIns="0" rIns="0" tIns="0" bIns="0">
             <a:spAutoFit/>
+            <a:extLst>
+              <a:ext uri="{8AF73BB6-5E31-4F0F-A399-3D98F3B95FD9}">
+                <ns22:textLayout xmlns:ns22="urn:pptxdsl:text-layout:v1" role="body"/>
+              </a:ext>
+            </a:extLst>
           </a:bodyPr>
           <a:lstStyle/>
           <a:p>
@@ -8623,6 +8893,11 @@
         <p:txBody>
           <a:bodyPr wrap="none" anchor="ctr" lIns="0" rIns="0" tIns="0" bIns="0">
             <a:spAutoFit/>
+            <a:extLst>
+              <a:ext uri="{8AF73BB6-5E31-4F0F-A399-3D98F3B95FD9}">
+                <ns27:textLayout xmlns:ns27="urn:pptxdsl:text-layout:v1" role="body"/>
+              </a:ext>
+            </a:extLst>
           </a:bodyPr>
           <a:lstStyle/>
           <a:p>
@@ -8737,6 +9012,11 @@
         <p:txBody>
           <a:bodyPr wrap="square" anchor="t" lIns="0" rIns="0" tIns="0" bIns="0">
             <a:spAutoFit/>
+            <a:extLst>
+              <a:ext uri="{8AF73BB6-5E31-4F0F-A399-3D98F3B95FD9}">
+                <ns2:textLayout xmlns:ns2="urn:pptxdsl:text-layout:v1" role="natural"/>
+              </a:ext>
+            </a:extLst>
           </a:bodyPr>
           <a:lstStyle/>
           <a:p>
@@ -8778,6 +9058,11 @@
         <p:txBody>
           <a:bodyPr wrap="square" anchor="t" lIns="0" rIns="0" tIns="0" bIns="0">
             <a:spAutoFit/>
+            <a:extLst>
+              <a:ext uri="{8AF73BB6-5E31-4F0F-A399-3D98F3B95FD9}">
+                <ns7:textLayout xmlns:ns7="urn:pptxdsl:text-layout:v1" role="natural"/>
+              </a:ext>
+            </a:extLst>
           </a:bodyPr>
           <a:lstStyle/>
           <a:p>
@@ -8907,6 +9192,11 @@
         <p:txBody>
           <a:bodyPr wrap="square" anchor="t" lIns="0" rIns="0" tIns="0" bIns="0">
             <a:spAutoFit/>
+            <a:extLst>
+              <a:ext uri="{8AF73BB6-5E31-4F0F-A399-3D98F3B95FD9}">
+                <ns12:textLayout xmlns:ns12="urn:pptxdsl:text-layout:v1" role="natural"/>
+              </a:ext>
+            </a:extLst>
           </a:bodyPr>
           <a:lstStyle/>
           <a:p>
@@ -8948,6 +9238,11 @@
         <p:txBody>
           <a:bodyPr wrap="square" anchor="t" lIns="0" rIns="0" tIns="0" bIns="0">
             <a:spAutoFit/>
+            <a:extLst>
+              <a:ext uri="{8AF73BB6-5E31-4F0F-A399-3D98F3B95FD9}">
+                <ns17:textLayout xmlns:ns17="urn:pptxdsl:text-layout:v1" role="natural"/>
+              </a:ext>
+            </a:extLst>
           </a:bodyPr>
           <a:lstStyle/>
           <a:p>
@@ -8989,6 +9284,11 @@
         <p:txBody>
           <a:bodyPr wrap="square" anchor="t" lIns="0" rIns="0" tIns="0" bIns="0">
             <a:spAutoFit/>
+            <a:extLst>
+              <a:ext uri="{8AF73BB6-5E31-4F0F-A399-3D98F3B95FD9}">
+                <ns22:textLayout xmlns:ns22="urn:pptxdsl:text-layout:v1" role="body"/>
+              </a:ext>
+            </a:extLst>
           </a:bodyPr>
           <a:lstStyle/>
           <a:p>
@@ -9030,6 +9330,11 @@
         <p:txBody>
           <a:bodyPr wrap="square" anchor="t" lIns="0" rIns="0" tIns="0" bIns="0">
             <a:spAutoFit/>
+            <a:extLst>
+              <a:ext uri="{8AF73BB6-5E31-4F0F-A399-3D98F3B95FD9}">
+                <ns27:textLayout xmlns:ns27="urn:pptxdsl:text-layout:v1" role="natural"/>
+              </a:ext>
+            </a:extLst>
           </a:bodyPr>
           <a:lstStyle/>
           <a:p>
@@ -9071,6 +9376,11 @@
         <p:txBody>
           <a:bodyPr wrap="square" anchor="t" lIns="0" rIns="0" tIns="0" bIns="0">
             <a:spAutoFit/>
+            <a:extLst>
+              <a:ext uri="{8AF73BB6-5E31-4F0F-A399-3D98F3B95FD9}">
+                <ns32:textLayout xmlns:ns32="urn:pptxdsl:text-layout:v1" role="natural"/>
+              </a:ext>
+            </a:extLst>
           </a:bodyPr>
           <a:lstStyle/>
           <a:p>
@@ -9156,6 +9466,11 @@
         <p:txBody>
           <a:bodyPr wrap="square" anchor="t" lIns="0" rIns="0" tIns="0" bIns="0">
             <a:spAutoFit/>
+            <a:extLst>
+              <a:ext uri="{8AF73BB6-5E31-4F0F-A399-3D98F3B95FD9}">
+                <ns37:textLayout xmlns:ns37="urn:pptxdsl:text-layout:v1" role="natural"/>
+              </a:ext>
+            </a:extLst>
           </a:bodyPr>
           <a:lstStyle/>
           <a:p>
@@ -9197,6 +9512,11 @@
         <p:txBody>
           <a:bodyPr wrap="square" anchor="t" lIns="0" rIns="0" tIns="0" bIns="0">
             <a:spAutoFit/>
+            <a:extLst>
+              <a:ext uri="{8AF73BB6-5E31-4F0F-A399-3D98F3B95FD9}">
+                <ns42:textLayout xmlns:ns42="urn:pptxdsl:text-layout:v1" role="natural"/>
+              </a:ext>
+            </a:extLst>
           </a:bodyPr>
           <a:lstStyle/>
           <a:p>
@@ -9238,6 +9558,11 @@
         <p:txBody>
           <a:bodyPr wrap="square" anchor="t" lIns="0" rIns="0" tIns="0" bIns="0">
             <a:spAutoFit/>
+            <a:extLst>
+              <a:ext uri="{8AF73BB6-5E31-4F0F-A399-3D98F3B95FD9}">
+                <ns47:textLayout xmlns:ns47="urn:pptxdsl:text-layout:v1" role="body"/>
+              </a:ext>
+            </a:extLst>
           </a:bodyPr>
           <a:lstStyle/>
           <a:p>
@@ -9279,6 +9604,11 @@
         <p:txBody>
           <a:bodyPr wrap="square" anchor="t" lIns="0" rIns="0" tIns="0" bIns="0">
             <a:spAutoFit/>
+            <a:extLst>
+              <a:ext uri="{8AF73BB6-5E31-4F0F-A399-3D98F3B95FD9}">
+                <ns52:textLayout xmlns:ns52="urn:pptxdsl:text-layout:v1" role="natural"/>
+              </a:ext>
+            </a:extLst>
           </a:bodyPr>
           <a:lstStyle/>
           <a:p>
@@ -9320,6 +9650,11 @@
         <p:txBody>
           <a:bodyPr wrap="square" anchor="t" lIns="0" rIns="0" tIns="0" bIns="0">
             <a:spAutoFit/>
+            <a:extLst>
+              <a:ext uri="{8AF73BB6-5E31-4F0F-A399-3D98F3B95FD9}">
+                <ns57:textLayout xmlns:ns57="urn:pptxdsl:text-layout:v1" role="natural"/>
+              </a:ext>
+            </a:extLst>
           </a:bodyPr>
           <a:lstStyle/>
           <a:p>
@@ -9405,6 +9740,11 @@
         <p:txBody>
           <a:bodyPr wrap="square" anchor="t" lIns="0" rIns="0" tIns="0" bIns="0">
             <a:spAutoFit/>
+            <a:extLst>
+              <a:ext uri="{8AF73BB6-5E31-4F0F-A399-3D98F3B95FD9}">
+                <ns62:textLayout xmlns:ns62="urn:pptxdsl:text-layout:v1" role="natural"/>
+              </a:ext>
+            </a:extLst>
           </a:bodyPr>
           <a:lstStyle/>
           <a:p>
@@ -9446,6 +9786,11 @@
         <p:txBody>
           <a:bodyPr wrap="square" anchor="t" lIns="0" rIns="0" tIns="0" bIns="0">
             <a:spAutoFit/>
+            <a:extLst>
+              <a:ext uri="{8AF73BB6-5E31-4F0F-A399-3D98F3B95FD9}">
+                <ns67:textLayout xmlns:ns67="urn:pptxdsl:text-layout:v1" role="natural"/>
+              </a:ext>
+            </a:extLst>
           </a:bodyPr>
           <a:lstStyle/>
           <a:p>
@@ -9487,6 +9832,11 @@
         <p:txBody>
           <a:bodyPr wrap="square" anchor="t" lIns="0" rIns="0" tIns="0" bIns="0">
             <a:spAutoFit/>
+            <a:extLst>
+              <a:ext uri="{8AF73BB6-5E31-4F0F-A399-3D98F3B95FD9}">
+                <ns72:textLayout xmlns:ns72="urn:pptxdsl:text-layout:v1" role="body"/>
+              </a:ext>
+            </a:extLst>
           </a:bodyPr>
           <a:lstStyle/>
           <a:p>
@@ -9528,6 +9878,11 @@
         <p:txBody>
           <a:bodyPr wrap="square" anchor="t" lIns="0" rIns="0" tIns="0" bIns="0">
             <a:spAutoFit/>
+            <a:extLst>
+              <a:ext uri="{8AF73BB6-5E31-4F0F-A399-3D98F3B95FD9}">
+                <ns77:textLayout xmlns:ns77="urn:pptxdsl:text-layout:v1" role="natural"/>
+              </a:ext>
+            </a:extLst>
           </a:bodyPr>
           <a:lstStyle/>
           <a:p>
@@ -9569,6 +9924,11 @@
         <p:txBody>
           <a:bodyPr wrap="square" anchor="t" lIns="0" rIns="0" tIns="0" bIns="0">
             <a:spAutoFit/>
+            <a:extLst>
+              <a:ext uri="{8AF73BB6-5E31-4F0F-A399-3D98F3B95FD9}">
+                <ns82:textLayout xmlns:ns82="urn:pptxdsl:text-layout:v1" role="natural"/>
+              </a:ext>
+            </a:extLst>
           </a:bodyPr>
           <a:lstStyle/>
           <a:p>
@@ -9654,6 +10014,11 @@
         <p:txBody>
           <a:bodyPr wrap="square" anchor="t" lIns="0" rIns="0" tIns="0" bIns="0">
             <a:spAutoFit/>
+            <a:extLst>
+              <a:ext uri="{8AF73BB6-5E31-4F0F-A399-3D98F3B95FD9}">
+                <ns87:textLayout xmlns:ns87="urn:pptxdsl:text-layout:v1" role="natural"/>
+              </a:ext>
+            </a:extLst>
           </a:bodyPr>
           <a:lstStyle/>
           <a:p>
@@ -9695,6 +10060,11 @@
         <p:txBody>
           <a:bodyPr wrap="square" anchor="t" lIns="0" rIns="0" tIns="0" bIns="0">
             <a:spAutoFit/>
+            <a:extLst>
+              <a:ext uri="{8AF73BB6-5E31-4F0F-A399-3D98F3B95FD9}">
+                <ns92:textLayout xmlns:ns92="urn:pptxdsl:text-layout:v1" role="natural"/>
+              </a:ext>
+            </a:extLst>
           </a:bodyPr>
           <a:lstStyle/>
           <a:p>
@@ -9736,6 +10106,11 @@
         <p:txBody>
           <a:bodyPr wrap="square" anchor="t" lIns="0" rIns="0" tIns="0" bIns="0">
             <a:spAutoFit/>
+            <a:extLst>
+              <a:ext uri="{8AF73BB6-5E31-4F0F-A399-3D98F3B95FD9}">
+                <ns97:textLayout xmlns:ns97="urn:pptxdsl:text-layout:v1" role="body"/>
+              </a:ext>
+            </a:extLst>
           </a:bodyPr>
           <a:lstStyle/>
           <a:p>
@@ -9777,6 +10152,11 @@
         <p:txBody>
           <a:bodyPr wrap="square" anchor="t" lIns="0" rIns="0" tIns="0" bIns="0">
             <a:spAutoFit/>
+            <a:extLst>
+              <a:ext uri="{8AF73BB6-5E31-4F0F-A399-3D98F3B95FD9}">
+                <ns102:textLayout xmlns:ns102="urn:pptxdsl:text-layout:v1" role="natural"/>
+              </a:ext>
+            </a:extLst>
           </a:bodyPr>
           <a:lstStyle/>
           <a:p>
@@ -9818,6 +10198,11 @@
         <p:txBody>
           <a:bodyPr wrap="square" anchor="t" lIns="0" rIns="0" tIns="0" bIns="0">
             <a:spAutoFit/>
+            <a:extLst>
+              <a:ext uri="{8AF73BB6-5E31-4F0F-A399-3D98F3B95FD9}">
+                <ns107:textLayout xmlns:ns107="urn:pptxdsl:text-layout:v1" role="natural"/>
+              </a:ext>
+            </a:extLst>
           </a:bodyPr>
           <a:lstStyle/>
           <a:p>
@@ -9903,6 +10288,11 @@
         <p:txBody>
           <a:bodyPr wrap="square" anchor="t" lIns="0" rIns="0" tIns="0" bIns="0">
             <a:spAutoFit/>
+            <a:extLst>
+              <a:ext uri="{8AF73BB6-5E31-4F0F-A399-3D98F3B95FD9}">
+                <ns112:textLayout xmlns:ns112="urn:pptxdsl:text-layout:v1" role="natural"/>
+              </a:ext>
+            </a:extLst>
           </a:bodyPr>
           <a:lstStyle/>
           <a:p>
@@ -9944,6 +10334,11 @@
         <p:txBody>
           <a:bodyPr wrap="square" anchor="t" lIns="0" rIns="0" tIns="0" bIns="0">
             <a:spAutoFit/>
+            <a:extLst>
+              <a:ext uri="{8AF73BB6-5E31-4F0F-A399-3D98F3B95FD9}">
+                <ns117:textLayout xmlns:ns117="urn:pptxdsl:text-layout:v1" role="natural"/>
+              </a:ext>
+            </a:extLst>
           </a:bodyPr>
           <a:lstStyle/>
           <a:p>
@@ -9985,6 +10380,11 @@
         <p:txBody>
           <a:bodyPr wrap="square" anchor="t" lIns="0" rIns="0" tIns="0" bIns="0">
             <a:spAutoFit/>
+            <a:extLst>
+              <a:ext uri="{8AF73BB6-5E31-4F0F-A399-3D98F3B95FD9}">
+                <ns122:textLayout xmlns:ns122="urn:pptxdsl:text-layout:v1" role="body"/>
+              </a:ext>
+            </a:extLst>
           </a:bodyPr>
           <a:lstStyle/>
           <a:p>
@@ -10026,6 +10426,11 @@
         <p:txBody>
           <a:bodyPr wrap="square" anchor="t" lIns="0" rIns="0" tIns="0" bIns="0">
             <a:spAutoFit/>
+            <a:extLst>
+              <a:ext uri="{8AF73BB6-5E31-4F0F-A399-3D98F3B95FD9}">
+                <ns127:textLayout xmlns:ns127="urn:pptxdsl:text-layout:v1" role="natural"/>
+              </a:ext>
+            </a:extLst>
           </a:bodyPr>
           <a:lstStyle/>
           <a:p>
@@ -10067,6 +10472,11 @@
         <p:txBody>
           <a:bodyPr wrap="square" anchor="t" lIns="0" rIns="0" tIns="0" bIns="0">
             <a:spAutoFit/>
+            <a:extLst>
+              <a:ext uri="{8AF73BB6-5E31-4F0F-A399-3D98F3B95FD9}">
+                <ns132:textLayout xmlns:ns132="urn:pptxdsl:text-layout:v1" role="natural"/>
+              </a:ext>
+            </a:extLst>
           </a:bodyPr>
           <a:lstStyle/>
           <a:p>
@@ -10152,6 +10562,11 @@
         <p:txBody>
           <a:bodyPr wrap="square" anchor="ctr" lIns="0" rIns="0" tIns="0" bIns="0">
             <a:spAutoFit/>
+            <a:extLst>
+              <a:ext uri="{8AF73BB6-5E31-4F0F-A399-3D98F3B95FD9}">
+                <ns137:textLayout xmlns:ns137="urn:pptxdsl:text-layout:v1" role="body"/>
+              </a:ext>
+            </a:extLst>
           </a:bodyPr>
           <a:lstStyle/>
           <a:p>
@@ -10193,6 +10608,11 @@
         <p:txBody>
           <a:bodyPr wrap="none" anchor="ctr" lIns="0" rIns="0" tIns="0" bIns="0">
             <a:spAutoFit/>
+            <a:extLst>
+              <a:ext uri="{8AF73BB6-5E31-4F0F-A399-3D98F3B95FD9}">
+                <ns142:textLayout xmlns:ns142="urn:pptxdsl:text-layout:v1" role="body"/>
+              </a:ext>
+            </a:extLst>
           </a:bodyPr>
           <a:lstStyle/>
           <a:p>
@@ -10307,6 +10727,11 @@
         <p:txBody>
           <a:bodyPr wrap="square" anchor="t" lIns="0" rIns="0" tIns="0" bIns="0">
             <a:spAutoFit/>
+            <a:extLst>
+              <a:ext uri="{8AF73BB6-5E31-4F0F-A399-3D98F3B95FD9}">
+                <ns2:textLayout xmlns:ns2="urn:pptxdsl:text-layout:v1" role="natural"/>
+              </a:ext>
+            </a:extLst>
           </a:bodyPr>
           <a:lstStyle/>
           <a:p>
@@ -10348,6 +10773,11 @@
         <p:txBody>
           <a:bodyPr wrap="square" anchor="t" lIns="0" rIns="0" tIns="0" bIns="0">
             <a:spAutoFit/>
+            <a:extLst>
+              <a:ext uri="{8AF73BB6-5E31-4F0F-A399-3D98F3B95FD9}">
+                <ns7:textLayout xmlns:ns7="urn:pptxdsl:text-layout:v1" role="natural"/>
+              </a:ext>
+            </a:extLst>
           </a:bodyPr>
           <a:lstStyle/>
           <a:p>
@@ -10767,6 +11197,11 @@
         <p:txBody>
           <a:bodyPr wrap="square" anchor="t" lIns="0" rIns="0" tIns="0" bIns="0">
             <a:spAutoFit/>
+            <a:extLst>
+              <a:ext uri="{8AF73BB6-5E31-4F0F-A399-3D98F3B95FD9}">
+                <ns20:textLayout xmlns:ns20="urn:pptxdsl:text-layout:v1" role="natural"/>
+              </a:ext>
+            </a:extLst>
           </a:bodyPr>
           <a:lstStyle/>
           <a:p>
@@ -10808,6 +11243,11 @@
         <p:txBody>
           <a:bodyPr wrap="square" anchor="t" lIns="0" rIns="0" tIns="0" bIns="0">
             <a:spAutoFit/>
+            <a:extLst>
+              <a:ext uri="{8AF73BB6-5E31-4F0F-A399-3D98F3B95FD9}">
+                <ns25:textLayout xmlns:ns25="urn:pptxdsl:text-layout:v1" role="body"/>
+              </a:ext>
+            </a:extLst>
           </a:bodyPr>
           <a:lstStyle/>
           <a:p>
@@ -10849,6 +11289,11 @@
         <p:txBody>
           <a:bodyPr wrap="square" anchor="t" lIns="0" rIns="0" tIns="0" bIns="0">
             <a:spAutoFit/>
+            <a:extLst>
+              <a:ext uri="{8AF73BB6-5E31-4F0F-A399-3D98F3B95FD9}">
+                <ns30:textLayout xmlns:ns30="urn:pptxdsl:text-layout:v1" role="natural"/>
+              </a:ext>
+            </a:extLst>
           </a:bodyPr>
           <a:lstStyle/>
           <a:p>
@@ -10936,6 +11381,11 @@
         <p:txBody>
           <a:bodyPr wrap="square" anchor="t" lIns="0" rIns="0" tIns="0" bIns="0">
             <a:spAutoFit/>
+            <a:extLst>
+              <a:ext uri="{8AF73BB6-5E31-4F0F-A399-3D98F3B95FD9}">
+                <ns35:textLayout xmlns:ns35="urn:pptxdsl:text-layout:v1" role="natural"/>
+              </a:ext>
+            </a:extLst>
           </a:bodyPr>
           <a:lstStyle/>
           <a:p>
@@ -10977,6 +11427,11 @@
         <p:txBody>
           <a:bodyPr wrap="square" anchor="t" lIns="0" rIns="0" tIns="0" bIns="0">
             <a:spAutoFit/>
+            <a:extLst>
+              <a:ext uri="{8AF73BB6-5E31-4F0F-A399-3D98F3B95FD9}">
+                <ns40:textLayout xmlns:ns40="urn:pptxdsl:text-layout:v1" role="body"/>
+              </a:ext>
+            </a:extLst>
           </a:bodyPr>
           <a:lstStyle/>
           <a:p>
@@ -11018,6 +11473,11 @@
         <p:txBody>
           <a:bodyPr wrap="square" anchor="t" lIns="0" rIns="0" tIns="0" bIns="0">
             <a:spAutoFit/>
+            <a:extLst>
+              <a:ext uri="{8AF73BB6-5E31-4F0F-A399-3D98F3B95FD9}">
+                <ns45:textLayout xmlns:ns45="urn:pptxdsl:text-layout:v1" role="natural"/>
+              </a:ext>
+            </a:extLst>
           </a:bodyPr>
           <a:lstStyle/>
           <a:p>
@@ -11105,6 +11565,11 @@
         <p:txBody>
           <a:bodyPr wrap="square" anchor="t" lIns="0" rIns="0" tIns="0" bIns="0">
             <a:spAutoFit/>
+            <a:extLst>
+              <a:ext uri="{8AF73BB6-5E31-4F0F-A399-3D98F3B95FD9}">
+                <ns50:textLayout xmlns:ns50="urn:pptxdsl:text-layout:v1" role="natural"/>
+              </a:ext>
+            </a:extLst>
           </a:bodyPr>
           <a:lstStyle/>
           <a:p>
@@ -11146,6 +11611,11 @@
         <p:txBody>
           <a:bodyPr wrap="square" anchor="t" lIns="0" rIns="0" tIns="0" bIns="0">
             <a:spAutoFit/>
+            <a:extLst>
+              <a:ext uri="{8AF73BB6-5E31-4F0F-A399-3D98F3B95FD9}">
+                <ns55:textLayout xmlns:ns55="urn:pptxdsl:text-layout:v1" role="body"/>
+              </a:ext>
+            </a:extLst>
           </a:bodyPr>
           <a:lstStyle/>
           <a:p>
@@ -11187,6 +11657,11 @@
         <p:txBody>
           <a:bodyPr wrap="square" anchor="t" lIns="0" rIns="0" tIns="0" bIns="0">
             <a:spAutoFit/>
+            <a:extLst>
+              <a:ext uri="{8AF73BB6-5E31-4F0F-A399-3D98F3B95FD9}">
+                <ns60:textLayout xmlns:ns60="urn:pptxdsl:text-layout:v1" role="natural"/>
+              </a:ext>
+            </a:extLst>
           </a:bodyPr>
           <a:lstStyle/>
           <a:p>
@@ -11274,6 +11749,11 @@
         <p:txBody>
           <a:bodyPr wrap="square" anchor="t" lIns="0" rIns="0" tIns="0" bIns="0">
             <a:spAutoFit/>
+            <a:extLst>
+              <a:ext uri="{8AF73BB6-5E31-4F0F-A399-3D98F3B95FD9}">
+                <ns65:textLayout xmlns:ns65="urn:pptxdsl:text-layout:v1" role="natural"/>
+              </a:ext>
+            </a:extLst>
           </a:bodyPr>
           <a:lstStyle/>
           <a:p>
@@ -11315,6 +11795,11 @@
         <p:txBody>
           <a:bodyPr wrap="square" anchor="t" lIns="0" rIns="0" tIns="0" bIns="0">
             <a:spAutoFit/>
+            <a:extLst>
+              <a:ext uri="{8AF73BB6-5E31-4F0F-A399-3D98F3B95FD9}">
+                <ns70:textLayout xmlns:ns70="urn:pptxdsl:text-layout:v1" role="body"/>
+              </a:ext>
+            </a:extLst>
           </a:bodyPr>
           <a:lstStyle/>
           <a:p>
@@ -11356,6 +11841,11 @@
         <p:txBody>
           <a:bodyPr wrap="square" anchor="t" lIns="0" rIns="0" tIns="0" bIns="0">
             <a:spAutoFit/>
+            <a:extLst>
+              <a:ext uri="{8AF73BB6-5E31-4F0F-A399-3D98F3B95FD9}">
+                <ns75:textLayout xmlns:ns75="urn:pptxdsl:text-layout:v1" role="natural"/>
+              </a:ext>
+            </a:extLst>
           </a:bodyPr>
           <a:lstStyle/>
           <a:p>
@@ -11443,6 +11933,11 @@
         <p:txBody>
           <a:bodyPr wrap="square" anchor="t" lIns="0" rIns="0" tIns="0" bIns="0">
             <a:spAutoFit/>
+            <a:extLst>
+              <a:ext uri="{8AF73BB6-5E31-4F0F-A399-3D98F3B95FD9}">
+                <ns80:textLayout xmlns:ns80="urn:pptxdsl:text-layout:v1" role="natural"/>
+              </a:ext>
+            </a:extLst>
           </a:bodyPr>
           <a:lstStyle/>
           <a:p>
@@ -11484,6 +11979,11 @@
         <p:txBody>
           <a:bodyPr wrap="square" anchor="t" lIns="0" rIns="0" tIns="0" bIns="0">
             <a:spAutoFit/>
+            <a:extLst>
+              <a:ext uri="{8AF73BB6-5E31-4F0F-A399-3D98F3B95FD9}">
+                <ns85:textLayout xmlns:ns85="urn:pptxdsl:text-layout:v1" role="body"/>
+              </a:ext>
+            </a:extLst>
           </a:bodyPr>
           <a:lstStyle/>
           <a:p>
@@ -11525,6 +12025,11 @@
         <p:txBody>
           <a:bodyPr wrap="square" anchor="t" lIns="0" rIns="0" tIns="0" bIns="0">
             <a:spAutoFit/>
+            <a:extLst>
+              <a:ext uri="{8AF73BB6-5E31-4F0F-A399-3D98F3B95FD9}">
+                <ns90:textLayout xmlns:ns90="urn:pptxdsl:text-layout:v1" role="natural"/>
+              </a:ext>
+            </a:extLst>
           </a:bodyPr>
           <a:lstStyle/>
           <a:p>
@@ -11568,6 +12073,11 @@
         <p:txBody>
           <a:bodyPr wrap="square" anchor="ctr" lIns="0" rIns="0" tIns="0" bIns="0">
             <a:spAutoFit/>
+            <a:extLst>
+              <a:ext uri="{8AF73BB6-5E31-4F0F-A399-3D98F3B95FD9}">
+                <ns95:textLayout xmlns:ns95="urn:pptxdsl:text-layout:v1" role="compact"/>
+              </a:ext>
+            </a:extLst>
           </a:bodyPr>
           <a:lstStyle/>
           <a:p>
@@ -11611,6 +12121,11 @@
         <p:txBody>
           <a:bodyPr wrap="square" anchor="ctr" lIns="0" rIns="0" tIns="0" bIns="0">
             <a:spAutoFit/>
+            <a:extLst>
+              <a:ext uri="{8AF73BB6-5E31-4F0F-A399-3D98F3B95FD9}">
+                <ns100:textLayout xmlns:ns100="urn:pptxdsl:text-layout:v1" role="compact"/>
+              </a:ext>
+            </a:extLst>
           </a:bodyPr>
           <a:lstStyle/>
           <a:p>
@@ -11654,6 +12169,11 @@
         <p:txBody>
           <a:bodyPr wrap="square" anchor="ctr" lIns="0" rIns="0" tIns="0" bIns="0">
             <a:spAutoFit/>
+            <a:extLst>
+              <a:ext uri="{8AF73BB6-5E31-4F0F-A399-3D98F3B95FD9}">
+                <ns105:textLayout xmlns:ns105="urn:pptxdsl:text-layout:v1" role="compact"/>
+              </a:ext>
+            </a:extLst>
           </a:bodyPr>
           <a:lstStyle/>
           <a:p>
@@ -11739,6 +12259,11 @@
         <p:txBody>
           <a:bodyPr wrap="square" anchor="ctr" lIns="0" rIns="0" tIns="0" bIns="0">
             <a:spAutoFit/>
+            <a:extLst>
+              <a:ext uri="{8AF73BB6-5E31-4F0F-A399-3D98F3B95FD9}">
+                <ns110:textLayout xmlns:ns110="urn:pptxdsl:text-layout:v1" role="body"/>
+              </a:ext>
+            </a:extLst>
           </a:bodyPr>
           <a:lstStyle/>
           <a:p>
@@ -11780,6 +12305,11 @@
         <p:txBody>
           <a:bodyPr wrap="none" anchor="ctr" lIns="0" rIns="0" tIns="0" bIns="0">
             <a:spAutoFit/>
+            <a:extLst>
+              <a:ext uri="{8AF73BB6-5E31-4F0F-A399-3D98F3B95FD9}">
+                <ns115:textLayout xmlns:ns115="urn:pptxdsl:text-layout:v1" role="body"/>
+              </a:ext>
+            </a:extLst>
           </a:bodyPr>
           <a:lstStyle/>
           <a:p>
@@ -11894,6 +12424,11 @@
         <p:txBody>
           <a:bodyPr wrap="square" anchor="t" lIns="0" rIns="0" tIns="0" bIns="0">
             <a:spAutoFit/>
+            <a:extLst>
+              <a:ext uri="{8AF73BB6-5E31-4F0F-A399-3D98F3B95FD9}">
+                <ns2:textLayout xmlns:ns2="urn:pptxdsl:text-layout:v1" role="natural"/>
+              </a:ext>
+            </a:extLst>
           </a:bodyPr>
           <a:lstStyle/>
           <a:p>
@@ -11935,6 +12470,11 @@
         <p:txBody>
           <a:bodyPr wrap="square" anchor="t" lIns="0" rIns="0" tIns="0" bIns="0">
             <a:spAutoFit/>
+            <a:extLst>
+              <a:ext uri="{8AF73BB6-5E31-4F0F-A399-3D98F3B95FD9}">
+                <ns7:textLayout xmlns:ns7="urn:pptxdsl:text-layout:v1" role="natural"/>
+              </a:ext>
+            </a:extLst>
           </a:bodyPr>
           <a:lstStyle/>
           <a:p>
@@ -12020,6 +12560,11 @@
         <p:txBody>
           <a:bodyPr wrap="square" anchor="t" lIns="0" rIns="0" tIns="0" bIns="0">
             <a:spAutoFit/>
+            <a:extLst>
+              <a:ext uri="{8AF73BB6-5E31-4F0F-A399-3D98F3B95FD9}">
+                <ns12:textLayout xmlns:ns12="urn:pptxdsl:text-layout:v1" role="natural"/>
+              </a:ext>
+            </a:extLst>
           </a:bodyPr>
           <a:lstStyle/>
           <a:p>
@@ -12105,6 +12650,11 @@
         <p:txBody>
           <a:bodyPr wrap="square" anchor="t" lIns="0" rIns="0" tIns="0" bIns="0">
             <a:spAutoFit/>
+            <a:extLst>
+              <a:ext uri="{8AF73BB6-5E31-4F0F-A399-3D98F3B95FD9}">
+                <ns17:textLayout xmlns:ns17="urn:pptxdsl:text-layout:v1" role="natural"/>
+              </a:ext>
+            </a:extLst>
           </a:bodyPr>
           <a:lstStyle/>
           <a:p>
@@ -12146,6 +12696,11 @@
         <p:txBody>
           <a:bodyPr wrap="square" anchor="t" lIns="0" rIns="0" tIns="0" bIns="0">
             <a:spAutoFit/>
+            <a:extLst>
+              <a:ext uri="{8AF73BB6-5E31-4F0F-A399-3D98F3B95FD9}">
+                <ns22:textLayout xmlns:ns22="urn:pptxdsl:text-layout:v1" role="natural"/>
+              </a:ext>
+            </a:extLst>
           </a:bodyPr>
           <a:lstStyle/>
           <a:p>
@@ -12187,6 +12742,11 @@
         <p:txBody>
           <a:bodyPr wrap="square" anchor="t" lIns="0" rIns="0" tIns="0" bIns="0">
             <a:spAutoFit/>
+            <a:extLst>
+              <a:ext uri="{8AF73BB6-5E31-4F0F-A399-3D98F3B95FD9}">
+                <ns27:textLayout xmlns:ns27="urn:pptxdsl:text-layout:v1" role="natural"/>
+              </a:ext>
+            </a:extLst>
           </a:bodyPr>
           <a:lstStyle/>
           <a:p>
@@ -12228,6 +12788,11 @@
         <p:txBody>
           <a:bodyPr wrap="square" anchor="t" lIns="0" rIns="0" tIns="0" bIns="0">
             <a:spAutoFit/>
+            <a:extLst>
+              <a:ext uri="{8AF73BB6-5E31-4F0F-A399-3D98F3B95FD9}">
+                <ns32:textLayout xmlns:ns32="urn:pptxdsl:text-layout:v1" role="natural"/>
+              </a:ext>
+            </a:extLst>
           </a:bodyPr>
           <a:lstStyle/>
           <a:p>
@@ -12269,6 +12834,11 @@
         <p:txBody>
           <a:bodyPr wrap="square" anchor="t" lIns="0" rIns="0" tIns="0" bIns="0">
             <a:spAutoFit/>
+            <a:extLst>
+              <a:ext uri="{8AF73BB6-5E31-4F0F-A399-3D98F3B95FD9}">
+                <ns37:textLayout xmlns:ns37="urn:pptxdsl:text-layout:v1" role="natural"/>
+              </a:ext>
+            </a:extLst>
           </a:bodyPr>
           <a:lstStyle/>
           <a:p>
@@ -12310,6 +12880,11 @@
         <p:txBody>
           <a:bodyPr wrap="square" anchor="t" lIns="0" rIns="0" tIns="0" bIns="0">
             <a:spAutoFit/>
+            <a:extLst>
+              <a:ext uri="{8AF73BB6-5E31-4F0F-A399-3D98F3B95FD9}">
+                <ns42:textLayout xmlns:ns42="urn:pptxdsl:text-layout:v1" role="natural"/>
+              </a:ext>
+            </a:extLst>
           </a:bodyPr>
           <a:lstStyle/>
           <a:p>
@@ -12351,6 +12926,11 @@
         <p:txBody>
           <a:bodyPr wrap="square" anchor="t" lIns="0" rIns="0" tIns="0" bIns="0">
             <a:spAutoFit/>
+            <a:extLst>
+              <a:ext uri="{8AF73BB6-5E31-4F0F-A399-3D98F3B95FD9}">
+                <ns47:textLayout xmlns:ns47="urn:pptxdsl:text-layout:v1" role="natural"/>
+              </a:ext>
+            </a:extLst>
           </a:bodyPr>
           <a:lstStyle/>
           <a:p>
@@ -12392,6 +12972,11 @@
         <p:txBody>
           <a:bodyPr wrap="square" anchor="t" lIns="0" rIns="0" tIns="0" bIns="0">
             <a:spAutoFit/>
+            <a:extLst>
+              <a:ext uri="{8AF73BB6-5E31-4F0F-A399-3D98F3B95FD9}">
+                <ns52:textLayout xmlns:ns52="urn:pptxdsl:text-layout:v1" role="natural"/>
+              </a:ext>
+            </a:extLst>
           </a:bodyPr>
           <a:lstStyle/>
           <a:p>
@@ -12433,6 +13018,11 @@
         <p:txBody>
           <a:bodyPr wrap="square" anchor="t" lIns="0" rIns="0" tIns="0" bIns="0">
             <a:spAutoFit/>
+            <a:extLst>
+              <a:ext uri="{8AF73BB6-5E31-4F0F-A399-3D98F3B95FD9}">
+                <ns57:textLayout xmlns:ns57="urn:pptxdsl:text-layout:v1" role="natural"/>
+              </a:ext>
+            </a:extLst>
           </a:bodyPr>
           <a:lstStyle/>
           <a:p>
@@ -12474,6 +13064,11 @@
         <p:txBody>
           <a:bodyPr wrap="square" anchor="t" lIns="0" rIns="0" tIns="0" bIns="0">
             <a:spAutoFit/>
+            <a:extLst>
+              <a:ext uri="{8AF73BB6-5E31-4F0F-A399-3D98F3B95FD9}">
+                <ns62:textLayout xmlns:ns62="urn:pptxdsl:text-layout:v1" role="natural"/>
+              </a:ext>
+            </a:extLst>
           </a:bodyPr>
           <a:lstStyle/>
           <a:p>
@@ -12515,6 +13110,11 @@
         <p:txBody>
           <a:bodyPr wrap="square" anchor="t" lIns="0" rIns="0" tIns="0" bIns="0">
             <a:spAutoFit/>
+            <a:extLst>
+              <a:ext uri="{8AF73BB6-5E31-4F0F-A399-3D98F3B95FD9}">
+                <ns67:textLayout xmlns:ns67="urn:pptxdsl:text-layout:v1" role="natural"/>
+              </a:ext>
+            </a:extLst>
           </a:bodyPr>
           <a:lstStyle/>
           <a:p>
@@ -12556,6 +13156,11 @@
         <p:txBody>
           <a:bodyPr wrap="square" anchor="t" lIns="0" rIns="0" tIns="0" bIns="0">
             <a:spAutoFit/>
+            <a:extLst>
+              <a:ext uri="{8AF73BB6-5E31-4F0F-A399-3D98F3B95FD9}">
+                <ns72:textLayout xmlns:ns72="urn:pptxdsl:text-layout:v1" role="natural"/>
+              </a:ext>
+            </a:extLst>
           </a:bodyPr>
           <a:lstStyle/>
           <a:p>
@@ -13321,6 +13926,11 @@
         <p:txBody>
           <a:bodyPr wrap="square" anchor="t" lIns="0" rIns="0" tIns="0" bIns="0">
             <a:spAutoFit/>
+            <a:extLst>
+              <a:ext uri="{8AF73BB6-5E31-4F0F-A399-3D98F3B95FD9}">
+                <ns77:textLayout xmlns:ns77="urn:pptxdsl:text-layout:v1" role="natural"/>
+              </a:ext>
+            </a:extLst>
           </a:bodyPr>
           <a:lstStyle/>
           <a:p>
@@ -13362,6 +13972,11 @@
         <p:txBody>
           <a:bodyPr wrap="none" anchor="t" lIns="0" rIns="0" tIns="0" bIns="0">
             <a:spAutoFit/>
+            <a:extLst>
+              <a:ext uri="{8AF73BB6-5E31-4F0F-A399-3D98F3B95FD9}">
+                <ns82:textLayout xmlns:ns82="urn:pptxdsl:text-layout:v1" role="natural"/>
+              </a:ext>
+            </a:extLst>
           </a:bodyPr>
           <a:lstStyle/>
           <a:p>
@@ -13403,6 +14018,11 @@
         <p:txBody>
           <a:bodyPr wrap="none" anchor="t" lIns="0" rIns="0" tIns="0" bIns="0">
             <a:spAutoFit/>
+            <a:extLst>
+              <a:ext uri="{8AF73BB6-5E31-4F0F-A399-3D98F3B95FD9}">
+                <ns87:textLayout xmlns:ns87="urn:pptxdsl:text-layout:v1" role="body"/>
+              </a:ext>
+            </a:extLst>
           </a:bodyPr>
           <a:lstStyle/>
           <a:p>
@@ -13482,6 +14102,11 @@
         <p:txBody>
           <a:bodyPr wrap="none" anchor="t" lIns="0" rIns="0" tIns="0" bIns="0">
             <a:spAutoFit/>
+            <a:extLst>
+              <a:ext uri="{8AF73BB6-5E31-4F0F-A399-3D98F3B95FD9}">
+                <ns92:textLayout xmlns:ns92="urn:pptxdsl:text-layout:v1" role="body"/>
+              </a:ext>
+            </a:extLst>
           </a:bodyPr>
           <a:lstStyle/>
           <a:p>
@@ -13569,6 +14194,11 @@
         <p:txBody>
           <a:bodyPr wrap="none" anchor="t" lIns="0" rIns="0" tIns="0" bIns="0">
             <a:spAutoFit/>
+            <a:extLst>
+              <a:ext uri="{8AF73BB6-5E31-4F0F-A399-3D98F3B95FD9}">
+                <ns97:textLayout xmlns:ns97="urn:pptxdsl:text-layout:v1" role="body"/>
+              </a:ext>
+            </a:extLst>
           </a:bodyPr>
           <a:lstStyle/>
           <a:p>
@@ -13646,6 +14276,11 @@
         <p:txBody>
           <a:bodyPr wrap="square" anchor="t" lIns="0" rIns="0" tIns="0" bIns="0">
             <a:spAutoFit/>
+            <a:extLst>
+              <a:ext uri="{8AF73BB6-5E31-4F0F-A399-3D98F3B95FD9}">
+                <ns102:textLayout xmlns:ns102="urn:pptxdsl:text-layout:v1" role="natural"/>
+              </a:ext>
+            </a:extLst>
           </a:bodyPr>
           <a:lstStyle/>
           <a:p>
@@ -13687,6 +14322,11 @@
         <p:txBody>
           <a:bodyPr wrap="none" anchor="t" lIns="0" rIns="0" tIns="0" bIns="0">
             <a:spAutoFit/>
+            <a:extLst>
+              <a:ext uri="{8AF73BB6-5E31-4F0F-A399-3D98F3B95FD9}">
+                <ns107:textLayout xmlns:ns107="urn:pptxdsl:text-layout:v1" role="natural"/>
+              </a:ext>
+            </a:extLst>
           </a:bodyPr>
           <a:lstStyle/>
           <a:p>
@@ -13728,6 +14368,11 @@
         <p:txBody>
           <a:bodyPr wrap="none" anchor="t" lIns="0" rIns="0" tIns="0" bIns="0">
             <a:spAutoFit/>
+            <a:extLst>
+              <a:ext uri="{8AF73BB6-5E31-4F0F-A399-3D98F3B95FD9}">
+                <ns112:textLayout xmlns:ns112="urn:pptxdsl:text-layout:v1" role="body"/>
+              </a:ext>
+            </a:extLst>
           </a:bodyPr>
           <a:lstStyle/>
           <a:p>
@@ -13807,6 +14452,11 @@
         <p:txBody>
           <a:bodyPr wrap="none" anchor="t" lIns="0" rIns="0" tIns="0" bIns="0">
             <a:spAutoFit/>
+            <a:extLst>
+              <a:ext uri="{8AF73BB6-5E31-4F0F-A399-3D98F3B95FD9}">
+                <ns117:textLayout xmlns:ns117="urn:pptxdsl:text-layout:v1" role="body"/>
+              </a:ext>
+            </a:extLst>
           </a:bodyPr>
           <a:lstStyle/>
           <a:p>
@@ -13884,6 +14534,11 @@
         <p:txBody>
           <a:bodyPr wrap="square" anchor="t" lIns="0" rIns="0" tIns="0" bIns="0">
             <a:spAutoFit/>
+            <a:extLst>
+              <a:ext uri="{8AF73BB6-5E31-4F0F-A399-3D98F3B95FD9}">
+                <ns122:textLayout xmlns:ns122="urn:pptxdsl:text-layout:v1" role="natural"/>
+              </a:ext>
+            </a:extLst>
           </a:bodyPr>
           <a:lstStyle/>
           <a:p>
@@ -13925,6 +14580,11 @@
         <p:txBody>
           <a:bodyPr wrap="none" anchor="t" lIns="0" rIns="0" tIns="0" bIns="0">
             <a:spAutoFit/>
+            <a:extLst>
+              <a:ext uri="{8AF73BB6-5E31-4F0F-A399-3D98F3B95FD9}">
+                <ns127:textLayout xmlns:ns127="urn:pptxdsl:text-layout:v1" role="natural"/>
+              </a:ext>
+            </a:extLst>
           </a:bodyPr>
           <a:lstStyle/>
           <a:p>
@@ -13966,6 +14626,11 @@
         <p:txBody>
           <a:bodyPr wrap="none" anchor="t" lIns="0" rIns="0" tIns="0" bIns="0">
             <a:spAutoFit/>
+            <a:extLst>
+              <a:ext uri="{8AF73BB6-5E31-4F0F-A399-3D98F3B95FD9}">
+                <ns132:textLayout xmlns:ns132="urn:pptxdsl:text-layout:v1" role="body"/>
+              </a:ext>
+            </a:extLst>
           </a:bodyPr>
           <a:lstStyle/>
           <a:p>
@@ -14045,6 +14710,11 @@
         <p:txBody>
           <a:bodyPr wrap="none" anchor="t" lIns="0" rIns="0" tIns="0" bIns="0">
             <a:spAutoFit/>
+            <a:extLst>
+              <a:ext uri="{8AF73BB6-5E31-4F0F-A399-3D98F3B95FD9}">
+                <ns137:textLayout xmlns:ns137="urn:pptxdsl:text-layout:v1" role="body"/>
+              </a:ext>
+            </a:extLst>
           </a:bodyPr>
           <a:lstStyle/>
           <a:p>
@@ -14132,6 +14802,11 @@
         <p:txBody>
           <a:bodyPr wrap="none" anchor="t" lIns="0" rIns="0" tIns="0" bIns="0">
             <a:spAutoFit/>
+            <a:extLst>
+              <a:ext uri="{8AF73BB6-5E31-4F0F-A399-3D98F3B95FD9}">
+                <ns142:textLayout xmlns:ns142="urn:pptxdsl:text-layout:v1" role="body"/>
+              </a:ext>
+            </a:extLst>
           </a:bodyPr>
           <a:lstStyle/>
           <a:p>
@@ -14209,6 +14884,11 @@
         <p:txBody>
           <a:bodyPr wrap="square" anchor="t" lIns="0" rIns="0" tIns="0" bIns="0">
             <a:spAutoFit/>
+            <a:extLst>
+              <a:ext uri="{8AF73BB6-5E31-4F0F-A399-3D98F3B95FD9}">
+                <ns147:textLayout xmlns:ns147="urn:pptxdsl:text-layout:v1" role="natural"/>
+              </a:ext>
+            </a:extLst>
           </a:bodyPr>
           <a:lstStyle/>
           <a:p>
@@ -14250,6 +14930,11 @@
         <p:txBody>
           <a:bodyPr wrap="none" anchor="t" lIns="0" rIns="0" tIns="0" bIns="0">
             <a:spAutoFit/>
+            <a:extLst>
+              <a:ext uri="{8AF73BB6-5E31-4F0F-A399-3D98F3B95FD9}">
+                <ns152:textLayout xmlns:ns152="urn:pptxdsl:text-layout:v1" role="natural"/>
+              </a:ext>
+            </a:extLst>
           </a:bodyPr>
           <a:lstStyle/>
           <a:p>
@@ -14291,6 +14976,11 @@
         <p:txBody>
           <a:bodyPr wrap="none" anchor="t" lIns="0" rIns="0" tIns="0" bIns="0">
             <a:spAutoFit/>
+            <a:extLst>
+              <a:ext uri="{8AF73BB6-5E31-4F0F-A399-3D98F3B95FD9}">
+                <ns157:textLayout xmlns:ns157="urn:pptxdsl:text-layout:v1" role="body"/>
+              </a:ext>
+            </a:extLst>
           </a:bodyPr>
           <a:lstStyle/>
           <a:p>
@@ -14370,6 +15060,11 @@
         <p:txBody>
           <a:bodyPr wrap="none" anchor="t" lIns="0" rIns="0" tIns="0" bIns="0">
             <a:spAutoFit/>
+            <a:extLst>
+              <a:ext uri="{8AF73BB6-5E31-4F0F-A399-3D98F3B95FD9}">
+                <ns162:textLayout xmlns:ns162="urn:pptxdsl:text-layout:v1" role="body"/>
+              </a:ext>
+            </a:extLst>
           </a:bodyPr>
           <a:lstStyle/>
           <a:p>
@@ -14447,6 +15142,11 @@
         <p:txBody>
           <a:bodyPr wrap="square" anchor="t" lIns="0" rIns="0" tIns="0" bIns="0">
             <a:spAutoFit/>
+            <a:extLst>
+              <a:ext uri="{8AF73BB6-5E31-4F0F-A399-3D98F3B95FD9}">
+                <ns167:textLayout xmlns:ns167="urn:pptxdsl:text-layout:v1" role="natural"/>
+              </a:ext>
+            </a:extLst>
           </a:bodyPr>
           <a:lstStyle/>
           <a:p>
@@ -14488,6 +15188,11 @@
         <p:txBody>
           <a:bodyPr wrap="none" anchor="t" lIns="0" rIns="0" tIns="0" bIns="0">
             <a:spAutoFit/>
+            <a:extLst>
+              <a:ext uri="{8AF73BB6-5E31-4F0F-A399-3D98F3B95FD9}">
+                <ns172:textLayout xmlns:ns172="urn:pptxdsl:text-layout:v1" role="natural"/>
+              </a:ext>
+            </a:extLst>
           </a:bodyPr>
           <a:lstStyle/>
           <a:p>
@@ -14529,6 +15234,11 @@
         <p:txBody>
           <a:bodyPr wrap="none" anchor="t" lIns="0" rIns="0" tIns="0" bIns="0">
             <a:spAutoFit/>
+            <a:extLst>
+              <a:ext uri="{8AF73BB6-5E31-4F0F-A399-3D98F3B95FD9}">
+                <ns177:textLayout xmlns:ns177="urn:pptxdsl:text-layout:v1" role="body"/>
+              </a:ext>
+            </a:extLst>
           </a:bodyPr>
           <a:lstStyle/>
           <a:p>
@@ -14608,6 +15318,11 @@
         <p:txBody>
           <a:bodyPr wrap="none" anchor="t" lIns="0" rIns="0" tIns="0" bIns="0">
             <a:spAutoFit/>
+            <a:extLst>
+              <a:ext uri="{8AF73BB6-5E31-4F0F-A399-3D98F3B95FD9}">
+                <ns182:textLayout xmlns:ns182="urn:pptxdsl:text-layout:v1" role="body"/>
+              </a:ext>
+            </a:extLst>
           </a:bodyPr>
           <a:lstStyle/>
           <a:p>
@@ -14695,6 +15410,11 @@
         <p:txBody>
           <a:bodyPr wrap="none" anchor="t" lIns="0" rIns="0" tIns="0" bIns="0">
             <a:spAutoFit/>
+            <a:extLst>
+              <a:ext uri="{8AF73BB6-5E31-4F0F-A399-3D98F3B95FD9}">
+                <ns187:textLayout xmlns:ns187="urn:pptxdsl:text-layout:v1" role="body"/>
+              </a:ext>
+            </a:extLst>
           </a:bodyPr>
           <a:lstStyle/>
           <a:p>
@@ -14816,6 +15536,11 @@
         <p:txBody>
           <a:bodyPr wrap="square" anchor="ctr" lIns="0" rIns="0" tIns="0" bIns="0">
             <a:spAutoFit/>
+            <a:extLst>
+              <a:ext uri="{8AF73BB6-5E31-4F0F-A399-3D98F3B95FD9}">
+                <ns192:textLayout xmlns:ns192="urn:pptxdsl:text-layout:v1" role="body"/>
+              </a:ext>
+            </a:extLst>
           </a:bodyPr>
           <a:lstStyle/>
           <a:p>
@@ -14857,6 +15582,11 @@
         <p:txBody>
           <a:bodyPr wrap="none" anchor="ctr" lIns="0" rIns="0" tIns="0" bIns="0">
             <a:spAutoFit/>
+            <a:extLst>
+              <a:ext uri="{8AF73BB6-5E31-4F0F-A399-3D98F3B95FD9}">
+                <ns197:textLayout xmlns:ns197="urn:pptxdsl:text-layout:v1" role="body"/>
+              </a:ext>
+            </a:extLst>
           </a:bodyPr>
           <a:lstStyle/>
           <a:p>
@@ -14971,6 +15701,11 @@
         <p:txBody>
           <a:bodyPr wrap="square" anchor="t" lIns="0" rIns="0" tIns="0" bIns="0">
             <a:spAutoFit/>
+            <a:extLst>
+              <a:ext uri="{8AF73BB6-5E31-4F0F-A399-3D98F3B95FD9}">
+                <ns2:textLayout xmlns:ns2="urn:pptxdsl:text-layout:v1" role="natural"/>
+              </a:ext>
+            </a:extLst>
           </a:bodyPr>
           <a:lstStyle/>
           <a:p>
@@ -15012,6 +15747,11 @@
         <p:txBody>
           <a:bodyPr wrap="square" anchor="t" lIns="0" rIns="0" tIns="0" bIns="0">
             <a:spAutoFit/>
+            <a:extLst>
+              <a:ext uri="{8AF73BB6-5E31-4F0F-A399-3D98F3B95FD9}">
+                <ns7:textLayout xmlns:ns7="urn:pptxdsl:text-layout:v1" role="natural"/>
+              </a:ext>
+            </a:extLst>
           </a:bodyPr>
           <a:lstStyle/>
           <a:p>
@@ -15097,6 +15837,11 @@
         <p:txBody>
           <a:bodyPr wrap="square" anchor="t" lIns="0" rIns="0" tIns="0" bIns="0">
             <a:spAutoFit/>
+            <a:extLst>
+              <a:ext uri="{8AF73BB6-5E31-4F0F-A399-3D98F3B95FD9}">
+                <ns12:textLayout xmlns:ns12="urn:pptxdsl:text-layout:v1" role="natural"/>
+              </a:ext>
+            </a:extLst>
           </a:bodyPr>
           <a:lstStyle/>
           <a:p>
@@ -15182,6 +15927,11 @@
         <p:txBody>
           <a:bodyPr wrap="square" anchor="t" lIns="0" rIns="0" tIns="0" bIns="0">
             <a:spAutoFit/>
+            <a:extLst>
+              <a:ext uri="{8AF73BB6-5E31-4F0F-A399-3D98F3B95FD9}">
+                <ns17:textLayout xmlns:ns17="urn:pptxdsl:text-layout:v1" role="natural"/>
+              </a:ext>
+            </a:extLst>
           </a:bodyPr>
           <a:lstStyle/>
           <a:p>
@@ -15223,6 +15973,11 @@
         <p:txBody>
           <a:bodyPr wrap="square" anchor="t" lIns="0" rIns="0" tIns="0" bIns="0">
             <a:spAutoFit/>
+            <a:extLst>
+              <a:ext uri="{8AF73BB6-5E31-4F0F-A399-3D98F3B95FD9}">
+                <ns22:textLayout xmlns:ns22="urn:pptxdsl:text-layout:v1" role="natural"/>
+              </a:ext>
+            </a:extLst>
           </a:bodyPr>
           <a:lstStyle/>
           <a:p>
@@ -15264,6 +16019,11 @@
         <p:txBody>
           <a:bodyPr wrap="square" anchor="t" lIns="0" rIns="0" tIns="0" bIns="0">
             <a:spAutoFit/>
+            <a:extLst>
+              <a:ext uri="{8AF73BB6-5E31-4F0F-A399-3D98F3B95FD9}">
+                <ns27:textLayout xmlns:ns27="urn:pptxdsl:text-layout:v1" role="natural"/>
+              </a:ext>
+            </a:extLst>
           </a:bodyPr>
           <a:lstStyle/>
           <a:p>
@@ -15305,6 +16065,11 @@
         <p:txBody>
           <a:bodyPr wrap="square" anchor="t" lIns="0" rIns="0" tIns="0" bIns="0">
             <a:spAutoFit/>
+            <a:extLst>
+              <a:ext uri="{8AF73BB6-5E31-4F0F-A399-3D98F3B95FD9}">
+                <ns32:textLayout xmlns:ns32="urn:pptxdsl:text-layout:v1" role="natural"/>
+              </a:ext>
+            </a:extLst>
           </a:bodyPr>
           <a:lstStyle/>
           <a:p>
@@ -15346,6 +16111,11 @@
         <p:txBody>
           <a:bodyPr wrap="square" anchor="t" lIns="0" rIns="0" tIns="0" bIns="0">
             <a:spAutoFit/>
+            <a:extLst>
+              <a:ext uri="{8AF73BB6-5E31-4F0F-A399-3D98F3B95FD9}">
+                <ns37:textLayout xmlns:ns37="urn:pptxdsl:text-layout:v1" role="natural"/>
+              </a:ext>
+            </a:extLst>
           </a:bodyPr>
           <a:lstStyle/>
           <a:p>
@@ -15387,6 +16157,11 @@
         <p:txBody>
           <a:bodyPr wrap="square" anchor="t" lIns="0" rIns="0" tIns="0" bIns="0">
             <a:spAutoFit/>
+            <a:extLst>
+              <a:ext uri="{8AF73BB6-5E31-4F0F-A399-3D98F3B95FD9}">
+                <ns42:textLayout xmlns:ns42="urn:pptxdsl:text-layout:v1" role="natural"/>
+              </a:ext>
+            </a:extLst>
           </a:bodyPr>
           <a:lstStyle/>
           <a:p>
@@ -15428,6 +16203,11 @@
         <p:txBody>
           <a:bodyPr wrap="square" anchor="t" lIns="0" rIns="0" tIns="0" bIns="0">
             <a:spAutoFit/>
+            <a:extLst>
+              <a:ext uri="{8AF73BB6-5E31-4F0F-A399-3D98F3B95FD9}">
+                <ns47:textLayout xmlns:ns47="urn:pptxdsl:text-layout:v1" role="natural"/>
+              </a:ext>
+            </a:extLst>
           </a:bodyPr>
           <a:lstStyle/>
           <a:p>
@@ -15469,6 +16249,11 @@
         <p:txBody>
           <a:bodyPr wrap="square" anchor="t" lIns="0" rIns="0" tIns="0" bIns="0">
             <a:spAutoFit/>
+            <a:extLst>
+              <a:ext uri="{8AF73BB6-5E31-4F0F-A399-3D98F3B95FD9}">
+                <ns52:textLayout xmlns:ns52="urn:pptxdsl:text-layout:v1" role="natural"/>
+              </a:ext>
+            </a:extLst>
           </a:bodyPr>
           <a:lstStyle/>
           <a:p>
@@ -15510,6 +16295,11 @@
         <p:txBody>
           <a:bodyPr wrap="square" anchor="t" lIns="0" rIns="0" tIns="0" bIns="0">
             <a:spAutoFit/>
+            <a:extLst>
+              <a:ext uri="{8AF73BB6-5E31-4F0F-A399-3D98F3B95FD9}">
+                <ns57:textLayout xmlns:ns57="urn:pptxdsl:text-layout:v1" role="natural"/>
+              </a:ext>
+            </a:extLst>
           </a:bodyPr>
           <a:lstStyle/>
           <a:p>
@@ -15551,6 +16341,11 @@
         <p:txBody>
           <a:bodyPr wrap="square" anchor="t" lIns="0" rIns="0" tIns="0" bIns="0">
             <a:spAutoFit/>
+            <a:extLst>
+              <a:ext uri="{8AF73BB6-5E31-4F0F-A399-3D98F3B95FD9}">
+                <ns62:textLayout xmlns:ns62="urn:pptxdsl:text-layout:v1" role="natural"/>
+              </a:ext>
+            </a:extLst>
           </a:bodyPr>
           <a:lstStyle/>
           <a:p>
@@ -15592,6 +16387,11 @@
         <p:txBody>
           <a:bodyPr wrap="square" anchor="t" lIns="0" rIns="0" tIns="0" bIns="0">
             <a:spAutoFit/>
+            <a:extLst>
+              <a:ext uri="{8AF73BB6-5E31-4F0F-A399-3D98F3B95FD9}">
+                <ns67:textLayout xmlns:ns67="urn:pptxdsl:text-layout:v1" role="natural"/>
+              </a:ext>
+            </a:extLst>
           </a:bodyPr>
           <a:lstStyle/>
           <a:p>
@@ -15633,6 +16433,11 @@
         <p:txBody>
           <a:bodyPr wrap="square" anchor="t" lIns="0" rIns="0" tIns="0" bIns="0">
             <a:spAutoFit/>
+            <a:extLst>
+              <a:ext uri="{8AF73BB6-5E31-4F0F-A399-3D98F3B95FD9}">
+                <ns72:textLayout xmlns:ns72="urn:pptxdsl:text-layout:v1" role="natural"/>
+              </a:ext>
+            </a:extLst>
           </a:bodyPr>
           <a:lstStyle/>
           <a:p>
@@ -16398,6 +17203,11 @@
         <p:txBody>
           <a:bodyPr wrap="square" anchor="t" lIns="0" rIns="0" tIns="0" bIns="0">
             <a:spAutoFit/>
+            <a:extLst>
+              <a:ext uri="{8AF73BB6-5E31-4F0F-A399-3D98F3B95FD9}">
+                <ns77:textLayout xmlns:ns77="urn:pptxdsl:text-layout:v1" role="natural"/>
+              </a:ext>
+            </a:extLst>
           </a:bodyPr>
           <a:lstStyle/>
           <a:p>
@@ -16439,6 +17249,11 @@
         <p:txBody>
           <a:bodyPr wrap="none" anchor="t" lIns="0" rIns="0" tIns="0" bIns="0">
             <a:spAutoFit/>
+            <a:extLst>
+              <a:ext uri="{8AF73BB6-5E31-4F0F-A399-3D98F3B95FD9}">
+                <ns82:textLayout xmlns:ns82="urn:pptxdsl:text-layout:v1" role="natural"/>
+              </a:ext>
+            </a:extLst>
           </a:bodyPr>
           <a:lstStyle/>
           <a:p>
@@ -16518,6 +17333,11 @@
         <p:txBody>
           <a:bodyPr wrap="none" anchor="t" lIns="0" rIns="0" tIns="0" bIns="0">
             <a:spAutoFit/>
+            <a:extLst>
+              <a:ext uri="{8AF73BB6-5E31-4F0F-A399-3D98F3B95FD9}">
+                <ns87:textLayout xmlns:ns87="urn:pptxdsl:text-layout:v1" role="body"/>
+              </a:ext>
+            </a:extLst>
           </a:bodyPr>
           <a:lstStyle/>
           <a:p>
@@ -16597,6 +17417,11 @@
         <p:txBody>
           <a:bodyPr wrap="none" anchor="t" lIns="0" rIns="0" tIns="0" bIns="0">
             <a:spAutoFit/>
+            <a:extLst>
+              <a:ext uri="{8AF73BB6-5E31-4F0F-A399-3D98F3B95FD9}">
+                <ns92:textLayout xmlns:ns92="urn:pptxdsl:text-layout:v1" role="natural"/>
+              </a:ext>
+            </a:extLst>
           </a:bodyPr>
           <a:lstStyle/>
           <a:p>
@@ -16674,6 +17499,11 @@
         <p:txBody>
           <a:bodyPr wrap="square" anchor="t" lIns="0" rIns="0" tIns="0" bIns="0">
             <a:spAutoFit/>
+            <a:extLst>
+              <a:ext uri="{8AF73BB6-5E31-4F0F-A399-3D98F3B95FD9}">
+                <ns97:textLayout xmlns:ns97="urn:pptxdsl:text-layout:v1" role="natural"/>
+              </a:ext>
+            </a:extLst>
           </a:bodyPr>
           <a:lstStyle/>
           <a:p>
@@ -16715,6 +17545,11 @@
         <p:txBody>
           <a:bodyPr wrap="none" anchor="t" lIns="0" rIns="0" tIns="0" bIns="0">
             <a:spAutoFit/>
+            <a:extLst>
+              <a:ext uri="{8AF73BB6-5E31-4F0F-A399-3D98F3B95FD9}">
+                <ns102:textLayout xmlns:ns102="urn:pptxdsl:text-layout:v1" role="natural"/>
+              </a:ext>
+            </a:extLst>
           </a:bodyPr>
           <a:lstStyle/>
           <a:p>
@@ -16794,6 +17629,11 @@
         <p:txBody>
           <a:bodyPr wrap="none" anchor="t" lIns="0" rIns="0" tIns="0" bIns="0">
             <a:spAutoFit/>
+            <a:extLst>
+              <a:ext uri="{8AF73BB6-5E31-4F0F-A399-3D98F3B95FD9}">
+                <ns107:textLayout xmlns:ns107="urn:pptxdsl:text-layout:v1" role="body"/>
+              </a:ext>
+            </a:extLst>
           </a:bodyPr>
           <a:lstStyle/>
           <a:p>
@@ -16873,6 +17713,11 @@
         <p:txBody>
           <a:bodyPr wrap="none" anchor="t" lIns="0" rIns="0" tIns="0" bIns="0">
             <a:spAutoFit/>
+            <a:extLst>
+              <a:ext uri="{8AF73BB6-5E31-4F0F-A399-3D98F3B95FD9}">
+                <ns112:textLayout xmlns:ns112="urn:pptxdsl:text-layout:v1" role="body"/>
+              </a:ext>
+            </a:extLst>
           </a:bodyPr>
           <a:lstStyle/>
           <a:p>
@@ -16952,6 +17797,11 @@
         <p:txBody>
           <a:bodyPr wrap="none" anchor="t" lIns="0" rIns="0" tIns="0" bIns="0">
             <a:spAutoFit/>
+            <a:extLst>
+              <a:ext uri="{8AF73BB6-5E31-4F0F-A399-3D98F3B95FD9}">
+                <ns117:textLayout xmlns:ns117="urn:pptxdsl:text-layout:v1" role="body"/>
+              </a:ext>
+            </a:extLst>
           </a:bodyPr>
           <a:lstStyle/>
           <a:p>
@@ -17029,6 +17879,11 @@
         <p:txBody>
           <a:bodyPr wrap="square" anchor="t" lIns="0" rIns="0" tIns="0" bIns="0">
             <a:spAutoFit/>
+            <a:extLst>
+              <a:ext uri="{8AF73BB6-5E31-4F0F-A399-3D98F3B95FD9}">
+                <ns122:textLayout xmlns:ns122="urn:pptxdsl:text-layout:v1" role="natural"/>
+              </a:ext>
+            </a:extLst>
           </a:bodyPr>
           <a:lstStyle/>
           <a:p>
@@ -17070,6 +17925,11 @@
         <p:txBody>
           <a:bodyPr wrap="none" anchor="t" lIns="0" rIns="0" tIns="0" bIns="0">
             <a:spAutoFit/>
+            <a:extLst>
+              <a:ext uri="{8AF73BB6-5E31-4F0F-A399-3D98F3B95FD9}">
+                <ns127:textLayout xmlns:ns127="urn:pptxdsl:text-layout:v1" role="natural"/>
+              </a:ext>
+            </a:extLst>
           </a:bodyPr>
           <a:lstStyle/>
           <a:p>
@@ -17149,6 +18009,11 @@
         <p:txBody>
           <a:bodyPr wrap="none" anchor="t" lIns="0" rIns="0" tIns="0" bIns="0">
             <a:spAutoFit/>
+            <a:extLst>
+              <a:ext uri="{8AF73BB6-5E31-4F0F-A399-3D98F3B95FD9}">
+                <ns132:textLayout xmlns:ns132="urn:pptxdsl:text-layout:v1" role="body"/>
+              </a:ext>
+            </a:extLst>
           </a:bodyPr>
           <a:lstStyle/>
           <a:p>
@@ -17228,6 +18093,11 @@
         <p:txBody>
           <a:bodyPr wrap="none" anchor="t" lIns="0" rIns="0" tIns="0" bIns="0">
             <a:spAutoFit/>
+            <a:extLst>
+              <a:ext uri="{8AF73BB6-5E31-4F0F-A399-3D98F3B95FD9}">
+                <ns137:textLayout xmlns:ns137="urn:pptxdsl:text-layout:v1" role="body"/>
+              </a:ext>
+            </a:extLst>
           </a:bodyPr>
           <a:lstStyle/>
           <a:p>
@@ -17307,6 +18177,11 @@
         <p:txBody>
           <a:bodyPr wrap="none" anchor="t" lIns="0" rIns="0" tIns="0" bIns="0">
             <a:spAutoFit/>
+            <a:extLst>
+              <a:ext uri="{8AF73BB6-5E31-4F0F-A399-3D98F3B95FD9}">
+                <ns142:textLayout xmlns:ns142="urn:pptxdsl:text-layout:v1" role="body"/>
+              </a:ext>
+            </a:extLst>
           </a:bodyPr>
           <a:lstStyle/>
           <a:p>
@@ -17386,6 +18261,11 @@
         <p:txBody>
           <a:bodyPr wrap="none" anchor="t" lIns="0" rIns="0" tIns="0" bIns="0">
             <a:spAutoFit/>
+            <a:extLst>
+              <a:ext uri="{8AF73BB6-5E31-4F0F-A399-3D98F3B95FD9}">
+                <ns147:textLayout xmlns:ns147="urn:pptxdsl:text-layout:v1" role="body"/>
+              </a:ext>
+            </a:extLst>
           </a:bodyPr>
           <a:lstStyle/>
           <a:p>
@@ -17465,6 +18345,11 @@
         <p:txBody>
           <a:bodyPr wrap="none" anchor="t" lIns="0" rIns="0" tIns="0" bIns="0">
             <a:spAutoFit/>
+            <a:extLst>
+              <a:ext uri="{8AF73BB6-5E31-4F0F-A399-3D98F3B95FD9}">
+                <ns152:textLayout xmlns:ns152="urn:pptxdsl:text-layout:v1" role="natural"/>
+              </a:ext>
+            </a:extLst>
           </a:bodyPr>
           <a:lstStyle/>
           <a:p>
@@ -17544,6 +18429,11 @@
         <p:txBody>
           <a:bodyPr wrap="none" anchor="t" lIns="0" rIns="0" tIns="0" bIns="0">
             <a:spAutoFit/>
+            <a:extLst>
+              <a:ext uri="{8AF73BB6-5E31-4F0F-A399-3D98F3B95FD9}">
+                <ns157:textLayout xmlns:ns157="urn:pptxdsl:text-layout:v1" role="body"/>
+              </a:ext>
+            </a:extLst>
           </a:bodyPr>
           <a:lstStyle/>
           <a:p>
@@ -17621,6 +18511,11 @@
         <p:txBody>
           <a:bodyPr wrap="square" anchor="t" lIns="0" rIns="0" tIns="0" bIns="0">
             <a:spAutoFit/>
+            <a:extLst>
+              <a:ext uri="{8AF73BB6-5E31-4F0F-A399-3D98F3B95FD9}">
+                <ns162:textLayout xmlns:ns162="urn:pptxdsl:text-layout:v1" role="natural"/>
+              </a:ext>
+            </a:extLst>
           </a:bodyPr>
           <a:lstStyle/>
           <a:p>
@@ -17662,6 +18557,11 @@
         <p:txBody>
           <a:bodyPr wrap="none" anchor="t" lIns="0" rIns="0" tIns="0" bIns="0">
             <a:spAutoFit/>
+            <a:extLst>
+              <a:ext uri="{8AF73BB6-5E31-4F0F-A399-3D98F3B95FD9}">
+                <ns167:textLayout xmlns:ns167="urn:pptxdsl:text-layout:v1" role="natural"/>
+              </a:ext>
+            </a:extLst>
           </a:bodyPr>
           <a:lstStyle/>
           <a:p>
@@ -17741,6 +18641,11 @@
         <p:txBody>
           <a:bodyPr wrap="none" anchor="t" lIns="0" rIns="0" tIns="0" bIns="0">
             <a:spAutoFit/>
+            <a:extLst>
+              <a:ext uri="{8AF73BB6-5E31-4F0F-A399-3D98F3B95FD9}">
+                <ns172:textLayout xmlns:ns172="urn:pptxdsl:text-layout:v1" role="body"/>
+              </a:ext>
+            </a:extLst>
           </a:bodyPr>
           <a:lstStyle/>
           <a:p>
@@ -17820,6 +18725,11 @@
         <p:txBody>
           <a:bodyPr wrap="none" anchor="t" lIns="0" rIns="0" tIns="0" bIns="0">
             <a:spAutoFit/>
+            <a:extLst>
+              <a:ext uri="{8AF73BB6-5E31-4F0F-A399-3D98F3B95FD9}">
+                <ns177:textLayout xmlns:ns177="urn:pptxdsl:text-layout:v1" role="body"/>
+              </a:ext>
+            </a:extLst>
           </a:bodyPr>
           <a:lstStyle/>
           <a:p>
@@ -17899,6 +18809,11 @@
         <p:txBody>
           <a:bodyPr wrap="none" anchor="t" lIns="0" rIns="0" tIns="0" bIns="0">
             <a:spAutoFit/>
+            <a:extLst>
+              <a:ext uri="{8AF73BB6-5E31-4F0F-A399-3D98F3B95FD9}">
+                <ns182:textLayout xmlns:ns182="urn:pptxdsl:text-layout:v1" role="body"/>
+              </a:ext>
+            </a:extLst>
           </a:bodyPr>
           <a:lstStyle/>
           <a:p>
@@ -17976,6 +18891,11 @@
         <p:txBody>
           <a:bodyPr wrap="square" anchor="t" lIns="0" rIns="0" tIns="0" bIns="0">
             <a:spAutoFit/>
+            <a:extLst>
+              <a:ext uri="{8AF73BB6-5E31-4F0F-A399-3D98F3B95FD9}">
+                <ns187:textLayout xmlns:ns187="urn:pptxdsl:text-layout:v1" role="natural"/>
+              </a:ext>
+            </a:extLst>
           </a:bodyPr>
           <a:lstStyle/>
           <a:p>
@@ -18017,6 +18937,11 @@
         <p:txBody>
           <a:bodyPr wrap="none" anchor="t" lIns="0" rIns="0" tIns="0" bIns="0">
             <a:spAutoFit/>
+            <a:extLst>
+              <a:ext uri="{8AF73BB6-5E31-4F0F-A399-3D98F3B95FD9}">
+                <ns192:textLayout xmlns:ns192="urn:pptxdsl:text-layout:v1" role="natural"/>
+              </a:ext>
+            </a:extLst>
           </a:bodyPr>
           <a:lstStyle/>
           <a:p>
@@ -18096,6 +19021,11 @@
         <p:txBody>
           <a:bodyPr wrap="none" anchor="t" lIns="0" rIns="0" tIns="0" bIns="0">
             <a:spAutoFit/>
+            <a:extLst>
+              <a:ext uri="{8AF73BB6-5E31-4F0F-A399-3D98F3B95FD9}">
+                <ns197:textLayout xmlns:ns197="urn:pptxdsl:text-layout:v1" role="body"/>
+              </a:ext>
+            </a:extLst>
           </a:bodyPr>
           <a:lstStyle/>
           <a:p>
@@ -18175,6 +19105,11 @@
         <p:txBody>
           <a:bodyPr wrap="none" anchor="t" lIns="0" rIns="0" tIns="0" bIns="0">
             <a:spAutoFit/>
+            <a:extLst>
+              <a:ext uri="{8AF73BB6-5E31-4F0F-A399-3D98F3B95FD9}">
+                <ns202:textLayout xmlns:ns202="urn:pptxdsl:text-layout:v1" role="body"/>
+              </a:ext>
+            </a:extLst>
           </a:bodyPr>
           <a:lstStyle/>
           <a:p>
@@ -18254,6 +19189,11 @@
         <p:txBody>
           <a:bodyPr wrap="none" anchor="t" lIns="0" rIns="0" tIns="0" bIns="0">
             <a:spAutoFit/>
+            <a:extLst>
+              <a:ext uri="{8AF73BB6-5E31-4F0F-A399-3D98F3B95FD9}">
+                <ns207:textLayout xmlns:ns207="urn:pptxdsl:text-layout:v1" role="body"/>
+              </a:ext>
+            </a:extLst>
           </a:bodyPr>
           <a:lstStyle/>
           <a:p>
@@ -18333,6 +19273,11 @@
         <p:txBody>
           <a:bodyPr wrap="none" anchor="t" lIns="0" rIns="0" tIns="0" bIns="0">
             <a:spAutoFit/>
+            <a:extLst>
+              <a:ext uri="{8AF73BB6-5E31-4F0F-A399-3D98F3B95FD9}">
+                <ns212:textLayout xmlns:ns212="urn:pptxdsl:text-layout:v1" role="natural"/>
+              </a:ext>
+            </a:extLst>
           </a:bodyPr>
           <a:lstStyle/>
           <a:p>
@@ -18410,6 +19355,11 @@
         <p:txBody>
           <a:bodyPr wrap="square" anchor="t" lIns="0" rIns="0" tIns="0" bIns="0">
             <a:spAutoFit/>
+            <a:extLst>
+              <a:ext uri="{8AF73BB6-5E31-4F0F-A399-3D98F3B95FD9}">
+                <ns217:textLayout xmlns:ns217="urn:pptxdsl:text-layout:v1" role="body"/>
+              </a:ext>
+            </a:extLst>
           </a:bodyPr>
           <a:lstStyle/>
           <a:p>
@@ -18495,6 +19445,11 @@
         <p:txBody>
           <a:bodyPr wrap="square" anchor="ctr" lIns="0" rIns="0" tIns="0" bIns="0">
             <a:spAutoFit/>
+            <a:extLst>
+              <a:ext uri="{8AF73BB6-5E31-4F0F-A399-3D98F3B95FD9}">
+                <ns222:textLayout xmlns:ns222="urn:pptxdsl:text-layout:v1" role="body"/>
+              </a:ext>
+            </a:extLst>
           </a:bodyPr>
           <a:lstStyle/>
           <a:p>
@@ -18536,6 +19491,11 @@
         <p:txBody>
           <a:bodyPr wrap="none" anchor="ctr" lIns="0" rIns="0" tIns="0" bIns="0">
             <a:spAutoFit/>
+            <a:extLst>
+              <a:ext uri="{8AF73BB6-5E31-4F0F-A399-3D98F3B95FD9}">
+                <ns227:textLayout xmlns:ns227="urn:pptxdsl:text-layout:v1" role="body"/>
+              </a:ext>
+            </a:extLst>
           </a:bodyPr>
           <a:lstStyle/>
           <a:p>
@@ -18650,6 +19610,11 @@
         <p:txBody>
           <a:bodyPr wrap="square" anchor="t" lIns="0" rIns="0" tIns="0" bIns="0">
             <a:spAutoFit/>
+            <a:extLst>
+              <a:ext uri="{8AF73BB6-5E31-4F0F-A399-3D98F3B95FD9}">
+                <ns2:textLayout xmlns:ns2="urn:pptxdsl:text-layout:v1" role="natural"/>
+              </a:ext>
+            </a:extLst>
           </a:bodyPr>
           <a:lstStyle/>
           <a:p>
@@ -18691,6 +19656,11 @@
         <p:txBody>
           <a:bodyPr wrap="square" anchor="t" lIns="0" rIns="0" tIns="0" bIns="0">
             <a:spAutoFit/>
+            <a:extLst>
+              <a:ext uri="{8AF73BB6-5E31-4F0F-A399-3D98F3B95FD9}">
+                <ns7:textLayout xmlns:ns7="urn:pptxdsl:text-layout:v1" role="natural"/>
+              </a:ext>
+            </a:extLst>
           </a:bodyPr>
           <a:lstStyle/>
           <a:p>
@@ -18822,6 +19792,11 @@
         <p:txBody>
           <a:bodyPr wrap="square" anchor="t" lIns="0" rIns="0" tIns="0" bIns="0">
             <a:spAutoFit/>
+            <a:extLst>
+              <a:ext uri="{8AF73BB6-5E31-4F0F-A399-3D98F3B95FD9}">
+                <ns12:textLayout xmlns:ns12="urn:pptxdsl:text-layout:v1" role="natural"/>
+              </a:ext>
+            </a:extLst>
           </a:bodyPr>
           <a:lstStyle/>
           <a:p>
@@ -18863,6 +19838,11 @@
         <p:txBody>
           <a:bodyPr wrap="square" anchor="t" lIns="0" rIns="0" tIns="0" bIns="0">
             <a:spAutoFit/>
+            <a:extLst>
+              <a:ext uri="{8AF73BB6-5E31-4F0F-A399-3D98F3B95FD9}">
+                <ns17:textLayout xmlns:ns17="urn:pptxdsl:text-layout:v1" role="natural"/>
+              </a:ext>
+            </a:extLst>
           </a:bodyPr>
           <a:lstStyle/>
           <a:p>
@@ -18904,6 +19884,11 @@
         <p:txBody>
           <a:bodyPr wrap="square" anchor="t" lIns="0" rIns="0" tIns="0" bIns="0">
             <a:spAutoFit/>
+            <a:extLst>
+              <a:ext uri="{8AF73BB6-5E31-4F0F-A399-3D98F3B95FD9}">
+                <ns22:textLayout xmlns:ns22="urn:pptxdsl:text-layout:v1" role="natural"/>
+              </a:ext>
+            </a:extLst>
           </a:bodyPr>
           <a:lstStyle/>
           <a:p>
@@ -18945,6 +19930,11 @@
         <p:txBody>
           <a:bodyPr wrap="square" anchor="t" lIns="0" rIns="0" tIns="0" bIns="0">
             <a:spAutoFit/>
+            <a:extLst>
+              <a:ext uri="{8AF73BB6-5E31-4F0F-A399-3D98F3B95FD9}">
+                <ns27:textLayout xmlns:ns27="urn:pptxdsl:text-layout:v1" role="natural"/>
+              </a:ext>
+            </a:extLst>
           </a:bodyPr>
           <a:lstStyle/>
           <a:p>
@@ -19060,6 +20050,11 @@
         <p:txBody>
           <a:bodyPr wrap="square" anchor="t" lIns="0" rIns="0" tIns="0" bIns="0">
             <a:spAutoFit/>
+            <a:extLst>
+              <a:ext uri="{8AF73BB6-5E31-4F0F-A399-3D98F3B95FD9}">
+                <ns34:textLayout xmlns:ns34="urn:pptxdsl:text-layout:v1" role="natural"/>
+              </a:ext>
+            </a:extLst>
           </a:bodyPr>
           <a:lstStyle/>
           <a:p>
@@ -19101,6 +20096,11 @@
         <p:txBody>
           <a:bodyPr wrap="square" anchor="t" lIns="0" rIns="0" tIns="0" bIns="0">
             <a:spAutoFit/>
+            <a:extLst>
+              <a:ext uri="{8AF73BB6-5E31-4F0F-A399-3D98F3B95FD9}">
+                <ns39:textLayout xmlns:ns39="urn:pptxdsl:text-layout:v1" role="natural"/>
+              </a:ext>
+            </a:extLst>
           </a:bodyPr>
           <a:lstStyle/>
           <a:p>
@@ -19418,6 +20418,11 @@
         <p:txBody>
           <a:bodyPr wrap="square" anchor="t" lIns="0" rIns="0" tIns="0" bIns="0">
             <a:spAutoFit/>
+            <a:extLst>
+              <a:ext uri="{8AF73BB6-5E31-4F0F-A399-3D98F3B95FD9}">
+                <ns44:textLayout xmlns:ns44="urn:pptxdsl:text-layout:v1" role="body"/>
+              </a:ext>
+            </a:extLst>
           </a:bodyPr>
           <a:lstStyle/>
           <a:p>
@@ -19459,6 +20464,11 @@
         <p:txBody>
           <a:bodyPr wrap="square" anchor="t" lIns="0" rIns="0" tIns="0" bIns="0">
             <a:spAutoFit/>
+            <a:extLst>
+              <a:ext uri="{8AF73BB6-5E31-4F0F-A399-3D98F3B95FD9}">
+                <ns49:textLayout xmlns:ns49="urn:pptxdsl:text-layout:v1" role="natural"/>
+              </a:ext>
+            </a:extLst>
           </a:bodyPr>
           <a:lstStyle/>
           <a:p>
@@ -19500,6 +20510,11 @@
         <p:txBody>
           <a:bodyPr wrap="square" anchor="t" lIns="0" rIns="0" tIns="0" bIns="0">
             <a:spAutoFit/>
+            <a:extLst>
+              <a:ext uri="{8AF73BB6-5E31-4F0F-A399-3D98F3B95FD9}">
+                <ns54:textLayout xmlns:ns54="urn:pptxdsl:text-layout:v1" role="body"/>
+              </a:ext>
+            </a:extLst>
           </a:bodyPr>
           <a:lstStyle/>
           <a:p>
@@ -19541,6 +20556,11 @@
         <p:txBody>
           <a:bodyPr wrap="square" anchor="t" lIns="0" rIns="0" tIns="0" bIns="0">
             <a:spAutoFit/>
+            <a:extLst>
+              <a:ext uri="{8AF73BB6-5E31-4F0F-A399-3D98F3B95FD9}">
+                <ns59:textLayout xmlns:ns59="urn:pptxdsl:text-layout:v1" role="body"/>
+              </a:ext>
+            </a:extLst>
           </a:bodyPr>
           <a:lstStyle/>
           <a:p>
@@ -19582,6 +20602,11 @@
         <p:txBody>
           <a:bodyPr wrap="square" anchor="t" lIns="0" rIns="0" tIns="0" bIns="0">
             <a:spAutoFit/>
+            <a:extLst>
+              <a:ext uri="{8AF73BB6-5E31-4F0F-A399-3D98F3B95FD9}">
+                <ns64:textLayout xmlns:ns64="urn:pptxdsl:text-layout:v1" role="body"/>
+              </a:ext>
+            </a:extLst>
           </a:bodyPr>
           <a:lstStyle/>
           <a:p>
@@ -19623,6 +20648,11 @@
         <p:txBody>
           <a:bodyPr wrap="square" anchor="t" lIns="0" rIns="0" tIns="0" bIns="0">
             <a:spAutoFit/>
+            <a:extLst>
+              <a:ext uri="{8AF73BB6-5E31-4F0F-A399-3D98F3B95FD9}">
+                <ns69:textLayout xmlns:ns69="urn:pptxdsl:text-layout:v1" role="body"/>
+              </a:ext>
+            </a:extLst>
           </a:bodyPr>
           <a:lstStyle/>
           <a:p>
@@ -19664,6 +20694,11 @@
         <p:txBody>
           <a:bodyPr wrap="square" anchor="t" lIns="0" rIns="0" tIns="0" bIns="0">
             <a:spAutoFit/>
+            <a:extLst>
+              <a:ext uri="{8AF73BB6-5E31-4F0F-A399-3D98F3B95FD9}">
+                <ns74:textLayout xmlns:ns74="urn:pptxdsl:text-layout:v1" role="body"/>
+              </a:ext>
+            </a:extLst>
           </a:bodyPr>
           <a:lstStyle/>
           <a:p>
@@ -19749,6 +20784,11 @@
         <p:txBody>
           <a:bodyPr wrap="square" anchor="ctr" lIns="0" rIns="0" tIns="0" bIns="0">
             <a:spAutoFit/>
+            <a:extLst>
+              <a:ext uri="{8AF73BB6-5E31-4F0F-A399-3D98F3B95FD9}">
+                <ns79:textLayout xmlns:ns79="urn:pptxdsl:text-layout:v1" role="body"/>
+              </a:ext>
+            </a:extLst>
           </a:bodyPr>
           <a:lstStyle/>
           <a:p>
@@ -19790,6 +20830,11 @@
         <p:txBody>
           <a:bodyPr wrap="none" anchor="ctr" lIns="0" rIns="0" tIns="0" bIns="0">
             <a:spAutoFit/>
+            <a:extLst>
+              <a:ext uri="{8AF73BB6-5E31-4F0F-A399-3D98F3B95FD9}">
+                <ns84:textLayout xmlns:ns84="urn:pptxdsl:text-layout:v1" role="body"/>
+              </a:ext>
+            </a:extLst>
           </a:bodyPr>
           <a:lstStyle/>
           <a:p>
@@ -19904,6 +20949,11 @@
         <p:txBody>
           <a:bodyPr wrap="square" anchor="t" lIns="0" rIns="0" tIns="0" bIns="0">
             <a:spAutoFit/>
+            <a:extLst>
+              <a:ext uri="{8AF73BB6-5E31-4F0F-A399-3D98F3B95FD9}">
+                <ns2:textLayout xmlns:ns2="urn:pptxdsl:text-layout:v1" role="natural"/>
+              </a:ext>
+            </a:extLst>
           </a:bodyPr>
           <a:lstStyle/>
           <a:p>
@@ -19945,6 +20995,11 @@
         <p:txBody>
           <a:bodyPr wrap="square" anchor="t" lIns="0" rIns="0" tIns="0" bIns="0">
             <a:spAutoFit/>
+            <a:extLst>
+              <a:ext uri="{8AF73BB6-5E31-4F0F-A399-3D98F3B95FD9}">
+                <ns7:textLayout xmlns:ns7="urn:pptxdsl:text-layout:v1" role="natural"/>
+              </a:ext>
+            </a:extLst>
           </a:bodyPr>
           <a:lstStyle/>
           <a:p>
@@ -20397,6 +21452,11 @@
         <p:txBody>
           <a:bodyPr wrap="square" anchor="t" lIns="0" rIns="0" tIns="0" bIns="0">
             <a:spAutoFit/>
+            <a:extLst>
+              <a:ext uri="{8AF73BB6-5E31-4F0F-A399-3D98F3B95FD9}">
+                <ns17:textLayout xmlns:ns17="urn:pptxdsl:text-layout:v1" role="natural"/>
+              </a:ext>
+            </a:extLst>
           </a:bodyPr>
           <a:lstStyle/>
           <a:p>
@@ -20438,6 +21498,11 @@
         <p:txBody>
           <a:bodyPr wrap="square" anchor="ctr" lIns="0" rIns="0" tIns="0" bIns="0">
             <a:spAutoFit/>
+            <a:extLst>
+              <a:ext uri="{8AF73BB6-5E31-4F0F-A399-3D98F3B95FD9}">
+                <ns22:textLayout xmlns:ns22="urn:pptxdsl:text-layout:v1" role="body"/>
+              </a:ext>
+            </a:extLst>
           </a:bodyPr>
           <a:lstStyle/>
           <a:p>
@@ -20525,6 +21590,11 @@
         <p:txBody>
           <a:bodyPr wrap="square" anchor="t" lIns="0" rIns="0" tIns="0" bIns="0">
             <a:spAutoFit/>
+            <a:extLst>
+              <a:ext uri="{8AF73BB6-5E31-4F0F-A399-3D98F3B95FD9}">
+                <ns27:textLayout xmlns:ns27="urn:pptxdsl:text-layout:v1" role="natural"/>
+              </a:ext>
+            </a:extLst>
           </a:bodyPr>
           <a:lstStyle/>
           <a:p>
@@ -20566,6 +21636,11 @@
         <p:txBody>
           <a:bodyPr wrap="square" anchor="ctr" lIns="0" rIns="0" tIns="0" bIns="0">
             <a:spAutoFit/>
+            <a:extLst>
+              <a:ext uri="{8AF73BB6-5E31-4F0F-A399-3D98F3B95FD9}">
+                <ns32:textLayout xmlns:ns32="urn:pptxdsl:text-layout:v1" role="body"/>
+              </a:ext>
+            </a:extLst>
           </a:bodyPr>
           <a:lstStyle/>
           <a:p>
@@ -20653,6 +21728,11 @@
         <p:txBody>
           <a:bodyPr wrap="square" anchor="t" lIns="0" rIns="0" tIns="0" bIns="0">
             <a:spAutoFit/>
+            <a:extLst>
+              <a:ext uri="{8AF73BB6-5E31-4F0F-A399-3D98F3B95FD9}">
+                <ns37:textLayout xmlns:ns37="urn:pptxdsl:text-layout:v1" role="natural"/>
+              </a:ext>
+            </a:extLst>
           </a:bodyPr>
           <a:lstStyle/>
           <a:p>
@@ -20694,6 +21774,11 @@
         <p:txBody>
           <a:bodyPr wrap="square" anchor="ctr" lIns="0" rIns="0" tIns="0" bIns="0">
             <a:spAutoFit/>
+            <a:extLst>
+              <a:ext uri="{8AF73BB6-5E31-4F0F-A399-3D98F3B95FD9}">
+                <ns42:textLayout xmlns:ns42="urn:pptxdsl:text-layout:v1" role="body"/>
+              </a:ext>
+            </a:extLst>
           </a:bodyPr>
           <a:lstStyle/>
           <a:p>
@@ -20781,6 +21866,11 @@
         <p:txBody>
           <a:bodyPr wrap="square" anchor="t" lIns="0" rIns="0" tIns="0" bIns="0">
             <a:spAutoFit/>
+            <a:extLst>
+              <a:ext uri="{8AF73BB6-5E31-4F0F-A399-3D98F3B95FD9}">
+                <ns47:textLayout xmlns:ns47="urn:pptxdsl:text-layout:v1" role="natural"/>
+              </a:ext>
+            </a:extLst>
           </a:bodyPr>
           <a:lstStyle/>
           <a:p>
@@ -20822,6 +21912,11 @@
         <p:txBody>
           <a:bodyPr wrap="square" anchor="ctr" lIns="0" rIns="0" tIns="0" bIns="0">
             <a:spAutoFit/>
+            <a:extLst>
+              <a:ext uri="{8AF73BB6-5E31-4F0F-A399-3D98F3B95FD9}">
+                <ns52:textLayout xmlns:ns52="urn:pptxdsl:text-layout:v1" role="body"/>
+              </a:ext>
+            </a:extLst>
           </a:bodyPr>
           <a:lstStyle/>
           <a:p>
@@ -20909,6 +22004,11 @@
         <p:txBody>
           <a:bodyPr wrap="square" anchor="t" lIns="0" rIns="0" tIns="0" bIns="0">
             <a:spAutoFit/>
+            <a:extLst>
+              <a:ext uri="{8AF73BB6-5E31-4F0F-A399-3D98F3B95FD9}">
+                <ns57:textLayout xmlns:ns57="urn:pptxdsl:text-layout:v1" role="natural"/>
+              </a:ext>
+            </a:extLst>
           </a:bodyPr>
           <a:lstStyle/>
           <a:p>
@@ -20950,6 +22050,11 @@
         <p:txBody>
           <a:bodyPr wrap="square" anchor="ctr" lIns="0" rIns="0" tIns="0" bIns="0">
             <a:spAutoFit/>
+            <a:extLst>
+              <a:ext uri="{8AF73BB6-5E31-4F0F-A399-3D98F3B95FD9}">
+                <ns62:textLayout xmlns:ns62="urn:pptxdsl:text-layout:v1" role="body"/>
+              </a:ext>
+            </a:extLst>
           </a:bodyPr>
           <a:lstStyle/>
           <a:p>
@@ -21037,6 +22142,11 @@
         <p:txBody>
           <a:bodyPr wrap="square" anchor="t" lIns="0" rIns="0" tIns="0" bIns="0">
             <a:spAutoFit/>
+            <a:extLst>
+              <a:ext uri="{8AF73BB6-5E31-4F0F-A399-3D98F3B95FD9}">
+                <ns67:textLayout xmlns:ns67="urn:pptxdsl:text-layout:v1" role="natural"/>
+              </a:ext>
+            </a:extLst>
           </a:bodyPr>
           <a:lstStyle/>
           <a:p>
@@ -21078,6 +22188,11 @@
         <p:txBody>
           <a:bodyPr wrap="square" anchor="ctr" lIns="0" rIns="0" tIns="0" bIns="0">
             <a:spAutoFit/>
+            <a:extLst>
+              <a:ext uri="{8AF73BB6-5E31-4F0F-A399-3D98F3B95FD9}">
+                <ns72:textLayout xmlns:ns72="urn:pptxdsl:text-layout:v1" role="body"/>
+              </a:ext>
+            </a:extLst>
           </a:bodyPr>
           <a:lstStyle/>
           <a:p>
@@ -21165,6 +22280,11 @@
         <p:txBody>
           <a:bodyPr wrap="square" anchor="t" lIns="0" rIns="0" tIns="0" bIns="0">
             <a:spAutoFit/>
+            <a:extLst>
+              <a:ext uri="{8AF73BB6-5E31-4F0F-A399-3D98F3B95FD9}">
+                <ns77:textLayout xmlns:ns77="urn:pptxdsl:text-layout:v1" role="natural"/>
+              </a:ext>
+            </a:extLst>
           </a:bodyPr>
           <a:lstStyle/>
           <a:p>
@@ -21206,6 +22326,11 @@
         <p:txBody>
           <a:bodyPr wrap="square" anchor="ctr" lIns="0" rIns="0" tIns="0" bIns="0">
             <a:spAutoFit/>
+            <a:extLst>
+              <a:ext uri="{8AF73BB6-5E31-4F0F-A399-3D98F3B95FD9}">
+                <ns82:textLayout xmlns:ns82="urn:pptxdsl:text-layout:v1" role="body"/>
+              </a:ext>
+            </a:extLst>
           </a:bodyPr>
           <a:lstStyle/>
           <a:p>
@@ -21291,6 +22416,11 @@
         <p:txBody>
           <a:bodyPr wrap="square" anchor="ctr" lIns="0" rIns="0" tIns="0" bIns="0">
             <a:spAutoFit/>
+            <a:extLst>
+              <a:ext uri="{8AF73BB6-5E31-4F0F-A399-3D98F3B95FD9}">
+                <ns87:textLayout xmlns:ns87="urn:pptxdsl:text-layout:v1" role="body"/>
+              </a:ext>
+            </a:extLst>
           </a:bodyPr>
           <a:lstStyle/>
           <a:p>
@@ -21332,6 +22462,11 @@
         <p:txBody>
           <a:bodyPr wrap="none" anchor="ctr" lIns="0" rIns="0" tIns="0" bIns="0">
             <a:spAutoFit/>
+            <a:extLst>
+              <a:ext uri="{8AF73BB6-5E31-4F0F-A399-3D98F3B95FD9}">
+                <ns92:textLayout xmlns:ns92="urn:pptxdsl:text-layout:v1" role="body"/>
+              </a:ext>
+            </a:extLst>
           </a:bodyPr>
           <a:lstStyle/>
           <a:p>
@@ -21446,6 +22581,11 @@
         <p:txBody>
           <a:bodyPr wrap="square" anchor="t" lIns="0" rIns="0" tIns="0" bIns="0">
             <a:spAutoFit/>
+            <a:extLst>
+              <a:ext uri="{8AF73BB6-5E31-4F0F-A399-3D98F3B95FD9}">
+                <ns2:textLayout xmlns:ns2="urn:pptxdsl:text-layout:v1" role="natural"/>
+              </a:ext>
+            </a:extLst>
           </a:bodyPr>
           <a:lstStyle/>
           <a:p>
@@ -21487,6 +22627,11 @@
         <p:txBody>
           <a:bodyPr wrap="square" anchor="t" lIns="0" rIns="0" tIns="0" bIns="0">
             <a:spAutoFit/>
+            <a:extLst>
+              <a:ext uri="{8AF73BB6-5E31-4F0F-A399-3D98F3B95FD9}">
+                <ns7:textLayout xmlns:ns7="urn:pptxdsl:text-layout:v1" role="natural"/>
+              </a:ext>
+            </a:extLst>
           </a:bodyPr>
           <a:lstStyle/>
           <a:p>
@@ -21528,6 +22673,11 @@
         <p:txBody>
           <a:bodyPr wrap="square" anchor="t" lIns="0" rIns="0" tIns="0" bIns="0">
             <a:spAutoFit/>
+            <a:extLst>
+              <a:ext uri="{8AF73BB6-5E31-4F0F-A399-3D98F3B95FD9}">
+                <ns12:textLayout xmlns:ns12="urn:pptxdsl:text-layout:v1" role="body"/>
+              </a:ext>
+            </a:extLst>
           </a:bodyPr>
           <a:lstStyle/>
           <a:p>
@@ -21613,6 +22763,11 @@
         <p:txBody>
           <a:bodyPr wrap="square" anchor="ctr" lIns="0" rIns="0" tIns="0" bIns="0">
             <a:spAutoFit/>
+            <a:extLst>
+              <a:ext uri="{8AF73BB6-5E31-4F0F-A399-3D98F3B95FD9}">
+                <ns17:textLayout xmlns:ns17="urn:pptxdsl:text-layout:v1" role="body"/>
+              </a:ext>
+            </a:extLst>
           </a:bodyPr>
           <a:lstStyle/>
           <a:p>
@@ -21654,6 +22809,11 @@
         <p:txBody>
           <a:bodyPr wrap="none" anchor="ctr" lIns="0" rIns="0" tIns="0" bIns="0">
             <a:spAutoFit/>
+            <a:extLst>
+              <a:ext uri="{8AF73BB6-5E31-4F0F-A399-3D98F3B95FD9}">
+                <ns22:textLayout xmlns:ns22="urn:pptxdsl:text-layout:v1" role="body"/>
+              </a:ext>
+            </a:extLst>
           </a:bodyPr>
           <a:lstStyle/>
           <a:p>
@@ -21768,6 +22928,11 @@
         <p:txBody>
           <a:bodyPr wrap="square" anchor="t" lIns="0" rIns="0" tIns="0" bIns="0">
             <a:spAutoFit/>
+            <a:extLst>
+              <a:ext uri="{8AF73BB6-5E31-4F0F-A399-3D98F3B95FD9}">
+                <ns2:textLayout xmlns:ns2="urn:pptxdsl:text-layout:v1" role="natural"/>
+              </a:ext>
+            </a:extLst>
           </a:bodyPr>
           <a:lstStyle/>
           <a:p>
@@ -21809,6 +22974,11 @@
         <p:txBody>
           <a:bodyPr wrap="square" anchor="t" lIns="0" rIns="0" tIns="0" bIns="0">
             <a:spAutoFit/>
+            <a:extLst>
+              <a:ext uri="{8AF73BB6-5E31-4F0F-A399-3D98F3B95FD9}">
+                <ns7:textLayout xmlns:ns7="urn:pptxdsl:text-layout:v1" role="natural"/>
+              </a:ext>
+            </a:extLst>
           </a:bodyPr>
           <a:lstStyle/>
           <a:p>
@@ -21894,6 +23064,11 @@
         <p:txBody>
           <a:bodyPr wrap="square" anchor="t" lIns="0" rIns="0" tIns="0" bIns="0">
             <a:spAutoFit/>
+            <a:extLst>
+              <a:ext uri="{8AF73BB6-5E31-4F0F-A399-3D98F3B95FD9}">
+                <ns12:textLayout xmlns:ns12="urn:pptxdsl:text-layout:v1" role="natural"/>
+              </a:ext>
+            </a:extLst>
           </a:bodyPr>
           <a:lstStyle/>
           <a:p>
@@ -21980,6 +23155,11 @@
         <p:txBody>
           <a:bodyPr wrap="square" anchor="t" lIns="0" rIns="0" tIns="0" bIns="0">
             <a:spAutoFit/>
+            <a:extLst>
+              <a:ext uri="{8AF73BB6-5E31-4F0F-A399-3D98F3B95FD9}">
+                <ns18:textLayout xmlns:ns18="urn:pptxdsl:text-layout:v1" role="natural"/>
+              </a:ext>
+            </a:extLst>
           </a:bodyPr>
           <a:lstStyle/>
           <a:p>
@@ -22400,7 +23580,7 @@
         </p:nvSpPr>
         <p:spPr>
           <a:xfrm>
-            <a:off x="1091565" y="3944721"/>
+            <a:off x="1091564" y="3944721"/>
             <a:ext cx="1017270" cy="190246"/>
           </a:xfrm>
           <a:prstGeom prst="rect">
@@ -22413,6 +23593,11 @@
         <p:txBody>
           <a:bodyPr wrap="square" anchor="ctr" lIns="0" rIns="0" tIns="0" bIns="0">
             <a:spAutoFit/>
+            <a:extLst>
+              <a:ext uri="{8AF73BB6-5E31-4F0F-A399-3D98F3B95FD9}">
+                <ns29:textLayout xmlns:ns29="urn:pptxdsl:text-layout:v1" role="natural"/>
+              </a:ext>
+            </a:extLst>
           </a:bodyPr>
           <a:lstStyle/>
           <a:p>
@@ -22456,6 +23641,11 @@
         <p:txBody>
           <a:bodyPr wrap="square" anchor="ctr" lIns="0" rIns="0" tIns="0" bIns="0">
             <a:spAutoFit/>
+            <a:extLst>
+              <a:ext uri="{8AF73BB6-5E31-4F0F-A399-3D98F3B95FD9}">
+                <ns34:textLayout xmlns:ns34="urn:pptxdsl:text-layout:v1" role="compact"/>
+              </a:ext>
+            </a:extLst>
           </a:bodyPr>
           <a:lstStyle/>
           <a:p>
@@ -22523,6 +23713,11 @@
         <p:txBody>
           <a:bodyPr wrap="square" anchor="ctr" lIns="0" rIns="0" tIns="0" bIns="0">
             <a:spAutoFit/>
+            <a:extLst>
+              <a:ext uri="{8AF73BB6-5E31-4F0F-A399-3D98F3B95FD9}">
+                <ns39:textLayout xmlns:ns39="urn:pptxdsl:text-layout:v1" role="natural"/>
+              </a:ext>
+            </a:extLst>
           </a:bodyPr>
           <a:lstStyle/>
           <a:p>
@@ -22566,6 +23761,11 @@
         <p:txBody>
           <a:bodyPr wrap="square" anchor="ctr" lIns="0" rIns="0" tIns="0" bIns="0">
             <a:spAutoFit/>
+            <a:extLst>
+              <a:ext uri="{8AF73BB6-5E31-4F0F-A399-3D98F3B95FD9}">
+                <ns44:textLayout xmlns:ns44="urn:pptxdsl:text-layout:v1" role="compact"/>
+              </a:ext>
+            </a:extLst>
           </a:bodyPr>
           <a:lstStyle/>
           <a:p>
@@ -22633,6 +23833,11 @@
         <p:txBody>
           <a:bodyPr wrap="square" anchor="ctr" lIns="0" rIns="0" tIns="0" bIns="0">
             <a:spAutoFit/>
+            <a:extLst>
+              <a:ext uri="{8AF73BB6-5E31-4F0F-A399-3D98F3B95FD9}">
+                <ns49:textLayout xmlns:ns49="urn:pptxdsl:text-layout:v1" role="natural"/>
+              </a:ext>
+            </a:extLst>
           </a:bodyPr>
           <a:lstStyle/>
           <a:p>
@@ -22676,6 +23881,11 @@
         <p:txBody>
           <a:bodyPr wrap="square" anchor="ctr" lIns="0" rIns="0" tIns="0" bIns="0">
             <a:spAutoFit/>
+            <a:extLst>
+              <a:ext uri="{8AF73BB6-5E31-4F0F-A399-3D98F3B95FD9}">
+                <ns54:textLayout xmlns:ns54="urn:pptxdsl:text-layout:v1" role="compact"/>
+              </a:ext>
+            </a:extLst>
           </a:bodyPr>
           <a:lstStyle/>
           <a:p>
@@ -22743,6 +23953,11 @@
         <p:txBody>
           <a:bodyPr wrap="square" anchor="ctr" lIns="0" rIns="0" tIns="0" bIns="0">
             <a:spAutoFit/>
+            <a:extLst>
+              <a:ext uri="{8AF73BB6-5E31-4F0F-A399-3D98F3B95FD9}">
+                <ns59:textLayout xmlns:ns59="urn:pptxdsl:text-layout:v1" role="natural"/>
+              </a:ext>
+            </a:extLst>
           </a:bodyPr>
           <a:lstStyle/>
           <a:p>
@@ -22786,6 +24001,11 @@
         <p:txBody>
           <a:bodyPr wrap="square" anchor="ctr" lIns="0" rIns="0" tIns="0" bIns="0">
             <a:spAutoFit/>
+            <a:extLst>
+              <a:ext uri="{8AF73BB6-5E31-4F0F-A399-3D98F3B95FD9}">
+                <ns64:textLayout xmlns:ns64="urn:pptxdsl:text-layout:v1" role="compact"/>
+              </a:ext>
+            </a:extLst>
           </a:bodyPr>
           <a:lstStyle/>
           <a:p>
@@ -22853,6 +24073,11 @@
         <p:txBody>
           <a:bodyPr wrap="square" anchor="ctr" lIns="0" rIns="0" tIns="0" bIns="0">
             <a:spAutoFit/>
+            <a:extLst>
+              <a:ext uri="{8AF73BB6-5E31-4F0F-A399-3D98F3B95FD9}">
+                <ns69:textLayout xmlns:ns69="urn:pptxdsl:text-layout:v1" role="natural"/>
+              </a:ext>
+            </a:extLst>
           </a:bodyPr>
           <a:lstStyle/>
           <a:p>
@@ -22896,6 +24121,11 @@
         <p:txBody>
           <a:bodyPr wrap="square" anchor="ctr" lIns="0" rIns="0" tIns="0" bIns="0">
             <a:spAutoFit/>
+            <a:extLst>
+              <a:ext uri="{8AF73BB6-5E31-4F0F-A399-3D98F3B95FD9}">
+                <ns74:textLayout xmlns:ns74="urn:pptxdsl:text-layout:v1" role="compact"/>
+              </a:ext>
+            </a:extLst>
           </a:bodyPr>
           <a:lstStyle/>
           <a:p>
@@ -22963,6 +24193,11 @@
         <p:txBody>
           <a:bodyPr wrap="square" anchor="ctr" lIns="0" rIns="0" tIns="0" bIns="0">
             <a:spAutoFit/>
+            <a:extLst>
+              <a:ext uri="{8AF73BB6-5E31-4F0F-A399-3D98F3B95FD9}">
+                <ns79:textLayout xmlns:ns79="urn:pptxdsl:text-layout:v1" role="natural"/>
+              </a:ext>
+            </a:extLst>
           </a:bodyPr>
           <a:lstStyle/>
           <a:p>
@@ -22994,7 +24229,7 @@
         <p:spPr>
           <a:xfrm>
             <a:off x="7865897" y="5444337"/>
-            <a:ext cx="955547" cy="162306"/>
+            <a:ext cx="955548" cy="162306"/>
           </a:xfrm>
           <a:prstGeom prst="rect">
             <a:avLst/>
@@ -23006,6 +24241,11 @@
         <p:txBody>
           <a:bodyPr wrap="square" anchor="ctr" lIns="0" rIns="0" tIns="0" bIns="0">
             <a:spAutoFit/>
+            <a:extLst>
+              <a:ext uri="{8AF73BB6-5E31-4F0F-A399-3D98F3B95FD9}">
+                <ns84:textLayout xmlns:ns84="urn:pptxdsl:text-layout:v1" role="compact"/>
+              </a:ext>
+            </a:extLst>
           </a:bodyPr>
           <a:lstStyle/>
           <a:p>
@@ -23073,6 +24313,11 @@
         <p:txBody>
           <a:bodyPr wrap="square" anchor="ctr" lIns="0" rIns="0" tIns="0" bIns="0">
             <a:spAutoFit/>
+            <a:extLst>
+              <a:ext uri="{8AF73BB6-5E31-4F0F-A399-3D98F3B95FD9}">
+                <ns89:textLayout xmlns:ns89="urn:pptxdsl:text-layout:v1" role="natural"/>
+              </a:ext>
+            </a:extLst>
           </a:bodyPr>
           <a:lstStyle/>
           <a:p>
@@ -23116,6 +24361,11 @@
         <p:txBody>
           <a:bodyPr wrap="square" anchor="ctr" lIns="0" rIns="0" tIns="0" bIns="0">
             <a:spAutoFit/>
+            <a:extLst>
+              <a:ext uri="{8AF73BB6-5E31-4F0F-A399-3D98F3B95FD9}">
+                <ns94:textLayout xmlns:ns94="urn:pptxdsl:text-layout:v1" role="compact"/>
+              </a:ext>
+            </a:extLst>
           </a:bodyPr>
           <a:lstStyle/>
           <a:p>
@@ -23159,6 +24409,11 @@
         <p:txBody>
           <a:bodyPr wrap="square" anchor="ctr" lIns="0" rIns="0" tIns="0" bIns="0">
             <a:spAutoFit/>
+            <a:extLst>
+              <a:ext uri="{8AF73BB6-5E31-4F0F-A399-3D98F3B95FD9}">
+                <ns99:textLayout xmlns:ns99="urn:pptxdsl:text-layout:v1" role="compact"/>
+              </a:ext>
+            </a:extLst>
           </a:bodyPr>
           <a:lstStyle/>
           <a:p>
@@ -23202,6 +24457,11 @@
         <p:txBody>
           <a:bodyPr wrap="square" anchor="ctr" lIns="0" rIns="0" tIns="0" bIns="0">
             <a:spAutoFit/>
+            <a:extLst>
+              <a:ext uri="{8AF73BB6-5E31-4F0F-A399-3D98F3B95FD9}">
+                <ns104:textLayout xmlns:ns104="urn:pptxdsl:text-layout:v1" role="compact"/>
+              </a:ext>
+            </a:extLst>
           </a:bodyPr>
           <a:lstStyle/>
           <a:p>
@@ -23245,6 +24505,11 @@
         <p:txBody>
           <a:bodyPr wrap="square" anchor="ctr" lIns="0" rIns="0" tIns="0" bIns="0">
             <a:spAutoFit/>
+            <a:extLst>
+              <a:ext uri="{8AF73BB6-5E31-4F0F-A399-3D98F3B95FD9}">
+                <ns109:textLayout xmlns:ns109="urn:pptxdsl:text-layout:v1" role="compact"/>
+              </a:ext>
+            </a:extLst>
           </a:bodyPr>
           <a:lstStyle/>
           <a:p>
@@ -23288,6 +24553,11 @@
         <p:txBody>
           <a:bodyPr wrap="square" anchor="ctr" lIns="0" rIns="0" tIns="0" bIns="0">
             <a:spAutoFit/>
+            <a:extLst>
+              <a:ext uri="{8AF73BB6-5E31-4F0F-A399-3D98F3B95FD9}">
+                <ns114:textLayout xmlns:ns114="urn:pptxdsl:text-layout:v1" role="compact"/>
+              </a:ext>
+            </a:extLst>
           </a:bodyPr>
           <a:lstStyle/>
           <a:p>
@@ -23329,6 +24599,11 @@
         <p:txBody>
           <a:bodyPr wrap="square" anchor="t" lIns="0" rIns="0" tIns="0" bIns="0">
             <a:spAutoFit/>
+            <a:extLst>
+              <a:ext uri="{8AF73BB6-5E31-4F0F-A399-3D98F3B95FD9}">
+                <ns119:textLayout xmlns:ns119="urn:pptxdsl:text-layout:v1" role="body"/>
+              </a:ext>
+            </a:extLst>
           </a:bodyPr>
           <a:lstStyle/>
           <a:p>
@@ -23414,6 +24689,11 @@
         <p:txBody>
           <a:bodyPr wrap="square" anchor="ctr" lIns="0" rIns="0" tIns="0" bIns="0">
             <a:spAutoFit/>
+            <a:extLst>
+              <a:ext uri="{8AF73BB6-5E31-4F0F-A399-3D98F3B95FD9}">
+                <ns124:textLayout xmlns:ns124="urn:pptxdsl:text-layout:v1" role="body"/>
+              </a:ext>
+            </a:extLst>
           </a:bodyPr>
           <a:lstStyle/>
           <a:p>
@@ -23455,6 +24735,11 @@
         <p:txBody>
           <a:bodyPr wrap="none" anchor="ctr" lIns="0" rIns="0" tIns="0" bIns="0">
             <a:spAutoFit/>
+            <a:extLst>
+              <a:ext uri="{8AF73BB6-5E31-4F0F-A399-3D98F3B95FD9}">
+                <ns129:textLayout xmlns:ns129="urn:pptxdsl:text-layout:v1" role="body"/>
+              </a:ext>
+            </a:extLst>
           </a:bodyPr>
           <a:lstStyle/>
           <a:p>
@@ -23569,6 +24854,11 @@
         <p:txBody>
           <a:bodyPr wrap="square" anchor="t" lIns="0" rIns="0" tIns="0" bIns="0">
             <a:spAutoFit/>
+            <a:extLst>
+              <a:ext uri="{8AF73BB6-5E31-4F0F-A399-3D98F3B95FD9}">
+                <ns2:textLayout xmlns:ns2="urn:pptxdsl:text-layout:v1" role="natural"/>
+              </a:ext>
+            </a:extLst>
           </a:bodyPr>
           <a:lstStyle/>
           <a:p>
@@ -23610,6 +24900,11 @@
         <p:txBody>
           <a:bodyPr wrap="square" anchor="t" lIns="0" rIns="0" tIns="0" bIns="0">
             <a:spAutoFit/>
+            <a:extLst>
+              <a:ext uri="{8AF73BB6-5E31-4F0F-A399-3D98F3B95FD9}">
+                <ns7:textLayout xmlns:ns7="urn:pptxdsl:text-layout:v1" role="natural"/>
+              </a:ext>
+            </a:extLst>
           </a:bodyPr>
           <a:lstStyle/>
           <a:p>
@@ -23695,6 +24990,11 @@
         <p:txBody>
           <a:bodyPr wrap="square" anchor="t" lIns="0" rIns="0" tIns="0" bIns="0">
             <a:spAutoFit/>
+            <a:extLst>
+              <a:ext uri="{8AF73BB6-5E31-4F0F-A399-3D98F3B95FD9}">
+                <ns12:textLayout xmlns:ns12="urn:pptxdsl:text-layout:v1" role="natural"/>
+              </a:ext>
+            </a:extLst>
           </a:bodyPr>
           <a:lstStyle/>
           <a:p>
@@ -23780,6 +25080,11 @@
         <p:txBody>
           <a:bodyPr wrap="square" anchor="t" lIns="0" rIns="0" tIns="0" bIns="0">
             <a:spAutoFit/>
+            <a:extLst>
+              <a:ext uri="{8AF73BB6-5E31-4F0F-A399-3D98F3B95FD9}">
+                <ns17:textLayout xmlns:ns17="urn:pptxdsl:text-layout:v1" role="natural"/>
+              </a:ext>
+            </a:extLst>
           </a:bodyPr>
           <a:lstStyle/>
           <a:p>
@@ -23866,6 +25171,11 @@
         <p:txBody>
           <a:bodyPr wrap="square" anchor="t" lIns="0" rIns="0" tIns="0" bIns="0">
             <a:spAutoFit/>
+            <a:extLst>
+              <a:ext uri="{8AF73BB6-5E31-4F0F-A399-3D98F3B95FD9}">
+                <ns23:textLayout xmlns:ns23="urn:pptxdsl:text-layout:v1" role="natural"/>
+              </a:ext>
+            </a:extLst>
           </a:bodyPr>
           <a:lstStyle/>
           <a:p>
@@ -23952,6 +25262,11 @@
         <p:txBody>
           <a:bodyPr wrap="square" anchor="t" lIns="0" rIns="0" tIns="0" bIns="0">
             <a:spAutoFit/>
+            <a:extLst>
+              <a:ext uri="{8AF73BB6-5E31-4F0F-A399-3D98F3B95FD9}">
+                <ns29:textLayout xmlns:ns29="urn:pptxdsl:text-layout:v1" role="natural"/>
+              </a:ext>
+            </a:extLst>
           </a:bodyPr>
           <a:lstStyle/>
           <a:p>
@@ -24776,7 +26091,7 @@
         </p:nvSpPr>
         <p:spPr>
           <a:xfrm>
-            <a:off x="1091565" y="3308390"/>
+            <a:off x="1091564" y="3308390"/>
             <a:ext cx="1017270" cy="190246"/>
           </a:xfrm>
           <a:prstGeom prst="rect">
@@ -24789,6 +26104,11 @@
         <p:txBody>
           <a:bodyPr wrap="square" anchor="ctr" lIns="0" rIns="0" tIns="0" bIns="0">
             <a:spAutoFit/>
+            <a:extLst>
+              <a:ext uri="{8AF73BB6-5E31-4F0F-A399-3D98F3B95FD9}">
+                <ns48:textLayout xmlns:ns48="urn:pptxdsl:text-layout:v1" role="natural"/>
+              </a:ext>
+            </a:extLst>
           </a:bodyPr>
           <a:lstStyle/>
           <a:p>
@@ -24856,6 +26176,11 @@
         <p:txBody>
           <a:bodyPr wrap="square" anchor="ctr" lIns="0" rIns="0" tIns="0" bIns="0">
             <a:spAutoFit/>
+            <a:extLst>
+              <a:ext uri="{8AF73BB6-5E31-4F0F-A399-3D98F3B95FD9}">
+                <ns53:textLayout xmlns:ns53="urn:pptxdsl:text-layout:v1" role="natural"/>
+              </a:ext>
+            </a:extLst>
           </a:bodyPr>
           <a:lstStyle/>
           <a:p>
@@ -24923,6 +26248,11 @@
         <p:txBody>
           <a:bodyPr wrap="square" anchor="ctr" lIns="0" rIns="0" tIns="0" bIns="0">
             <a:spAutoFit/>
+            <a:extLst>
+              <a:ext uri="{8AF73BB6-5E31-4F0F-A399-3D98F3B95FD9}">
+                <ns58:textLayout xmlns:ns58="urn:pptxdsl:text-layout:v1" role="natural"/>
+              </a:ext>
+            </a:extLst>
           </a:bodyPr>
           <a:lstStyle/>
           <a:p>
@@ -24990,6 +26320,11 @@
         <p:txBody>
           <a:bodyPr wrap="square" anchor="ctr" lIns="0" rIns="0" tIns="0" bIns="0">
             <a:spAutoFit/>
+            <a:extLst>
+              <a:ext uri="{8AF73BB6-5E31-4F0F-A399-3D98F3B95FD9}">
+                <ns63:textLayout xmlns:ns63="urn:pptxdsl:text-layout:v1" role="natural"/>
+              </a:ext>
+            </a:extLst>
           </a:bodyPr>
           <a:lstStyle/>
           <a:p>
@@ -25057,6 +26392,11 @@
         <p:txBody>
           <a:bodyPr wrap="square" anchor="ctr" lIns="0" rIns="0" tIns="0" bIns="0">
             <a:spAutoFit/>
+            <a:extLst>
+              <a:ext uri="{8AF73BB6-5E31-4F0F-A399-3D98F3B95FD9}">
+                <ns68:textLayout xmlns:ns68="urn:pptxdsl:text-layout:v1" role="natural"/>
+              </a:ext>
+            </a:extLst>
           </a:bodyPr>
           <a:lstStyle/>
           <a:p>
@@ -25124,6 +26464,11 @@
         <p:txBody>
           <a:bodyPr wrap="square" anchor="ctr" lIns="0" rIns="0" tIns="0" bIns="0">
             <a:spAutoFit/>
+            <a:extLst>
+              <a:ext uri="{8AF73BB6-5E31-4F0F-A399-3D98F3B95FD9}">
+                <ns73:textLayout xmlns:ns73="urn:pptxdsl:text-layout:v1" role="natural"/>
+              </a:ext>
+            </a:extLst>
           </a:bodyPr>
           <a:lstStyle/>
           <a:p>
@@ -25191,6 +26536,11 @@
         <p:txBody>
           <a:bodyPr wrap="square" anchor="ctr" lIns="0" rIns="0" tIns="0" bIns="0">
             <a:spAutoFit/>
+            <a:extLst>
+              <a:ext uri="{8AF73BB6-5E31-4F0F-A399-3D98F3B95FD9}">
+                <ns78:textLayout xmlns:ns78="urn:pptxdsl:text-layout:v1" role="natural"/>
+              </a:ext>
+            </a:extLst>
           </a:bodyPr>
           <a:lstStyle/>
           <a:p>
@@ -25258,6 +26608,11 @@
         <p:txBody>
           <a:bodyPr wrap="square" anchor="ctr" lIns="0" rIns="0" tIns="0" bIns="0">
             <a:spAutoFit/>
+            <a:extLst>
+              <a:ext uri="{8AF73BB6-5E31-4F0F-A399-3D98F3B95FD9}">
+                <ns83:textLayout xmlns:ns83="urn:pptxdsl:text-layout:v1" role="natural"/>
+              </a:ext>
+            </a:extLst>
           </a:bodyPr>
           <a:lstStyle/>
           <a:p>
@@ -25325,6 +26680,11 @@
         <p:txBody>
           <a:bodyPr wrap="square" anchor="ctr" lIns="0" rIns="0" tIns="0" bIns="0">
             <a:spAutoFit/>
+            <a:extLst>
+              <a:ext uri="{8AF73BB6-5E31-4F0F-A399-3D98F3B95FD9}">
+                <ns88:textLayout xmlns:ns88="urn:pptxdsl:text-layout:v1" role="natural"/>
+              </a:ext>
+            </a:extLst>
           </a:bodyPr>
           <a:lstStyle/>
           <a:p>
@@ -25368,6 +26728,11 @@
         <p:txBody>
           <a:bodyPr wrap="square" anchor="ctr" lIns="0" rIns="0" tIns="0" bIns="0">
             <a:spAutoFit/>
+            <a:extLst>
+              <a:ext uri="{8AF73BB6-5E31-4F0F-A399-3D98F3B95FD9}">
+                <ns93:textLayout xmlns:ns93="urn:pptxdsl:text-layout:v1" role="compact"/>
+              </a:ext>
+            </a:extLst>
           </a:bodyPr>
           <a:lstStyle/>
           <a:p>
@@ -25435,6 +26800,11 @@
         <p:txBody>
           <a:bodyPr wrap="square" anchor="ctr" lIns="0" rIns="0" tIns="0" bIns="0">
             <a:spAutoFit/>
+            <a:extLst>
+              <a:ext uri="{8AF73BB6-5E31-4F0F-A399-3D98F3B95FD9}">
+                <ns98:textLayout xmlns:ns98="urn:pptxdsl:text-layout:v1" role="natural"/>
+              </a:ext>
+            </a:extLst>
           </a:bodyPr>
           <a:lstStyle/>
           <a:p>
@@ -25478,6 +26848,11 @@
         <p:txBody>
           <a:bodyPr wrap="square" anchor="ctr" lIns="0" rIns="0" tIns="0" bIns="0">
             <a:spAutoFit/>
+            <a:extLst>
+              <a:ext uri="{8AF73BB6-5E31-4F0F-A399-3D98F3B95FD9}">
+                <ns103:textLayout xmlns:ns103="urn:pptxdsl:text-layout:v1" role="compact"/>
+              </a:ext>
+            </a:extLst>
           </a:bodyPr>
           <a:lstStyle/>
           <a:p>
@@ -25521,6 +26896,11 @@
         <p:txBody>
           <a:bodyPr wrap="square" anchor="ctr" lIns="0" rIns="0" tIns="0" bIns="0">
             <a:spAutoFit/>
+            <a:extLst>
+              <a:ext uri="{8AF73BB6-5E31-4F0F-A399-3D98F3B95FD9}">
+                <ns108:textLayout xmlns:ns108="urn:pptxdsl:text-layout:v1" role="compact"/>
+              </a:ext>
+            </a:extLst>
           </a:bodyPr>
           <a:lstStyle/>
           <a:p>
@@ -25564,6 +26944,11 @@
         <p:txBody>
           <a:bodyPr wrap="square" anchor="ctr" lIns="0" rIns="0" tIns="0" bIns="0">
             <a:spAutoFit/>
+            <a:extLst>
+              <a:ext uri="{8AF73BB6-5E31-4F0F-A399-3D98F3B95FD9}">
+                <ns113:textLayout xmlns:ns113="urn:pptxdsl:text-layout:v1" role="compact"/>
+              </a:ext>
+            </a:extLst>
           </a:bodyPr>
           <a:lstStyle/>
           <a:p>
@@ -25607,6 +26992,11 @@
         <p:txBody>
           <a:bodyPr wrap="square" anchor="ctr" lIns="0" rIns="0" tIns="0" bIns="0">
             <a:spAutoFit/>
+            <a:extLst>
+              <a:ext uri="{8AF73BB6-5E31-4F0F-A399-3D98F3B95FD9}">
+                <ns118:textLayout xmlns:ns118="urn:pptxdsl:text-layout:v1" role="compact"/>
+              </a:ext>
+            </a:extLst>
           </a:bodyPr>
           <a:lstStyle/>
           <a:p>
@@ -25650,6 +27040,11 @@
         <p:txBody>
           <a:bodyPr wrap="square" anchor="ctr" lIns="0" rIns="0" tIns="0" bIns="0">
             <a:spAutoFit/>
+            <a:extLst>
+              <a:ext uri="{8AF73BB6-5E31-4F0F-A399-3D98F3B95FD9}">
+                <ns123:textLayout xmlns:ns123="urn:pptxdsl:text-layout:v1" role="compact"/>
+              </a:ext>
+            </a:extLst>
           </a:bodyPr>
           <a:lstStyle/>
           <a:p>
@@ -25735,6 +27130,11 @@
         <p:txBody>
           <a:bodyPr wrap="square" anchor="ctr" lIns="0" rIns="0" tIns="0" bIns="0">
             <a:spAutoFit/>
+            <a:extLst>
+              <a:ext uri="{8AF73BB6-5E31-4F0F-A399-3D98F3B95FD9}">
+                <ns128:textLayout xmlns:ns128="urn:pptxdsl:text-layout:v1" role="body"/>
+              </a:ext>
+            </a:extLst>
           </a:bodyPr>
           <a:lstStyle/>
           <a:p>
@@ -25776,6 +27176,11 @@
         <p:txBody>
           <a:bodyPr wrap="none" anchor="ctr" lIns="0" rIns="0" tIns="0" bIns="0">
             <a:spAutoFit/>
+            <a:extLst>
+              <a:ext uri="{8AF73BB6-5E31-4F0F-A399-3D98F3B95FD9}">
+                <ns133:textLayout xmlns:ns133="urn:pptxdsl:text-layout:v1" role="body"/>
+              </a:ext>
+            </a:extLst>
           </a:bodyPr>
           <a:lstStyle/>
           <a:p>
@@ -25890,6 +27295,11 @@
         <p:txBody>
           <a:bodyPr wrap="square" anchor="t" lIns="0" rIns="0" tIns="0" bIns="0">
             <a:spAutoFit/>
+            <a:extLst>
+              <a:ext uri="{8AF73BB6-5E31-4F0F-A399-3D98F3B95FD9}">
+                <ns2:textLayout xmlns:ns2="urn:pptxdsl:text-layout:v1" role="natural"/>
+              </a:ext>
+            </a:extLst>
           </a:bodyPr>
           <a:lstStyle/>
           <a:p>
@@ -25931,6 +27341,11 @@
         <p:txBody>
           <a:bodyPr wrap="square" anchor="t" lIns="0" rIns="0" tIns="0" bIns="0">
             <a:spAutoFit/>
+            <a:extLst>
+              <a:ext uri="{8AF73BB6-5E31-4F0F-A399-3D98F3B95FD9}">
+                <ns7:textLayout xmlns:ns7="urn:pptxdsl:text-layout:v1" role="natural"/>
+              </a:ext>
+            </a:extLst>
           </a:bodyPr>
           <a:lstStyle/>
           <a:p>
@@ -25972,6 +27387,11 @@
         <p:txBody>
           <a:bodyPr wrap="square" anchor="t" lIns="0" rIns="0" tIns="0" bIns="0">
             <a:spAutoFit/>
+            <a:extLst>
+              <a:ext uri="{8AF73BB6-5E31-4F0F-A399-3D98F3B95FD9}">
+                <ns12:textLayout xmlns:ns12="urn:pptxdsl:text-layout:v1" role="body"/>
+              </a:ext>
+            </a:extLst>
           </a:bodyPr>
           <a:lstStyle/>
           <a:p>
@@ -26059,6 +27479,11 @@
         <p:txBody>
           <a:bodyPr wrap="none" anchor="ctr" lIns="0" rIns="0" tIns="0" bIns="0">
             <a:spAutoFit/>
+            <a:extLst>
+              <a:ext uri="{8AF73BB6-5E31-4F0F-A399-3D98F3B95FD9}">
+                <ns17:textLayout xmlns:ns17="urn:pptxdsl:text-layout:v1" role="compact"/>
+              </a:ext>
+            </a:extLst>
           </a:bodyPr>
           <a:lstStyle/>
           <a:p>
@@ -26146,6 +27571,11 @@
         <p:txBody>
           <a:bodyPr wrap="none" anchor="ctr" lIns="0" rIns="0" tIns="0" bIns="0">
             <a:spAutoFit/>
+            <a:extLst>
+              <a:ext uri="{8AF73BB6-5E31-4F0F-A399-3D98F3B95FD9}">
+                <ns22:textLayout xmlns:ns22="urn:pptxdsl:text-layout:v1" role="compact"/>
+              </a:ext>
+            </a:extLst>
           </a:bodyPr>
           <a:lstStyle/>
           <a:p>
@@ -26233,6 +27663,11 @@
         <p:txBody>
           <a:bodyPr wrap="none" anchor="ctr" lIns="0" rIns="0" tIns="0" bIns="0">
             <a:spAutoFit/>
+            <a:extLst>
+              <a:ext uri="{8AF73BB6-5E31-4F0F-A399-3D98F3B95FD9}">
+                <ns27:textLayout xmlns:ns27="urn:pptxdsl:text-layout:v1" role="compact"/>
+              </a:ext>
+            </a:extLst>
           </a:bodyPr>
           <a:lstStyle/>
           <a:p>
@@ -26320,6 +27755,11 @@
         <p:txBody>
           <a:bodyPr wrap="none" anchor="ctr" lIns="0" rIns="0" tIns="0" bIns="0">
             <a:spAutoFit/>
+            <a:extLst>
+              <a:ext uri="{8AF73BB6-5E31-4F0F-A399-3D98F3B95FD9}">
+                <ns32:textLayout xmlns:ns32="urn:pptxdsl:text-layout:v1" role="compact"/>
+              </a:ext>
+            </a:extLst>
           </a:bodyPr>
           <a:lstStyle/>
           <a:p>
@@ -26407,6 +27847,11 @@
         <p:txBody>
           <a:bodyPr wrap="none" anchor="ctr" lIns="0" rIns="0" tIns="0" bIns="0">
             <a:spAutoFit/>
+            <a:extLst>
+              <a:ext uri="{8AF73BB6-5E31-4F0F-A399-3D98F3B95FD9}">
+                <ns37:textLayout xmlns:ns37="urn:pptxdsl:text-layout:v1" role="compact"/>
+              </a:ext>
+            </a:extLst>
           </a:bodyPr>
           <a:lstStyle/>
           <a:p>
@@ -26494,6 +27939,11 @@
         <p:txBody>
           <a:bodyPr wrap="none" anchor="ctr" lIns="0" rIns="0" tIns="0" bIns="0">
             <a:spAutoFit/>
+            <a:extLst>
+              <a:ext uri="{8AF73BB6-5E31-4F0F-A399-3D98F3B95FD9}">
+                <ns42:textLayout xmlns:ns42="urn:pptxdsl:text-layout:v1" role="compact"/>
+              </a:ext>
+            </a:extLst>
           </a:bodyPr>
           <a:lstStyle/>
           <a:p>
@@ -26581,6 +28031,11 @@
         <p:txBody>
           <a:bodyPr wrap="none" anchor="ctr" lIns="0" rIns="0" tIns="0" bIns="0">
             <a:spAutoFit/>
+            <a:extLst>
+              <a:ext uri="{8AF73BB6-5E31-4F0F-A399-3D98F3B95FD9}">
+                <ns47:textLayout xmlns:ns47="urn:pptxdsl:text-layout:v1" role="compact"/>
+              </a:ext>
+            </a:extLst>
           </a:bodyPr>
           <a:lstStyle/>
           <a:p>
@@ -26668,6 +28123,11 @@
         <p:txBody>
           <a:bodyPr wrap="none" anchor="ctr" lIns="0" rIns="0" tIns="0" bIns="0">
             <a:spAutoFit/>
+            <a:extLst>
+              <a:ext uri="{8AF73BB6-5E31-4F0F-A399-3D98F3B95FD9}">
+                <ns52:textLayout xmlns:ns52="urn:pptxdsl:text-layout:v1" role="compact"/>
+              </a:ext>
+            </a:extLst>
           </a:bodyPr>
           <a:lstStyle/>
           <a:p>
@@ -26755,6 +28215,11 @@
         <p:txBody>
           <a:bodyPr wrap="none" anchor="ctr" lIns="0" rIns="0" tIns="0" bIns="0">
             <a:spAutoFit/>
+            <a:extLst>
+              <a:ext uri="{8AF73BB6-5E31-4F0F-A399-3D98F3B95FD9}">
+                <ns57:textLayout xmlns:ns57="urn:pptxdsl:text-layout:v1" role="compact"/>
+              </a:ext>
+            </a:extLst>
           </a:bodyPr>
           <a:lstStyle/>
           <a:p>
@@ -26835,6 +28300,11 @@
         <p:txBody>
           <a:bodyPr wrap="square" anchor="ctr" lIns="0" rIns="0" tIns="0" bIns="0">
             <a:spAutoFit/>
+            <a:extLst>
+              <a:ext uri="{8AF73BB6-5E31-4F0F-A399-3D98F3B95FD9}">
+                <ns63:textLayout xmlns:ns63="urn:pptxdsl:text-layout:v1" role="compact"/>
+              </a:ext>
+            </a:extLst>
           </a:bodyPr>
           <a:lstStyle/>
           <a:p>
@@ -26915,6 +28385,11 @@
         <p:txBody>
           <a:bodyPr wrap="square" anchor="ctr" lIns="0" rIns="0" tIns="0" bIns="0">
             <a:spAutoFit/>
+            <a:extLst>
+              <a:ext uri="{8AF73BB6-5E31-4F0F-A399-3D98F3B95FD9}">
+                <ns69:textLayout xmlns:ns69="urn:pptxdsl:text-layout:v1" role="compact"/>
+              </a:ext>
+            </a:extLst>
           </a:bodyPr>
           <a:lstStyle/>
           <a:p>
@@ -26995,6 +28470,11 @@
         <p:txBody>
           <a:bodyPr wrap="square" anchor="ctr" lIns="0" rIns="0" tIns="0" bIns="0">
             <a:spAutoFit/>
+            <a:extLst>
+              <a:ext uri="{8AF73BB6-5E31-4F0F-A399-3D98F3B95FD9}">
+                <ns75:textLayout xmlns:ns75="urn:pptxdsl:text-layout:v1" role="compact"/>
+              </a:ext>
+            </a:extLst>
           </a:bodyPr>
           <a:lstStyle/>
           <a:p>
@@ -27075,6 +28555,11 @@
         <p:txBody>
           <a:bodyPr wrap="square" anchor="ctr" lIns="0" rIns="0" tIns="0" bIns="0">
             <a:spAutoFit/>
+            <a:extLst>
+              <a:ext uri="{8AF73BB6-5E31-4F0F-A399-3D98F3B95FD9}">
+                <ns81:textLayout xmlns:ns81="urn:pptxdsl:text-layout:v1" role="compact"/>
+              </a:ext>
+            </a:extLst>
           </a:bodyPr>
           <a:lstStyle/>
           <a:p>
@@ -27155,6 +28640,11 @@
         <p:txBody>
           <a:bodyPr wrap="square" anchor="ctr" lIns="0" rIns="0" tIns="0" bIns="0">
             <a:spAutoFit/>
+            <a:extLst>
+              <a:ext uri="{8AF73BB6-5E31-4F0F-A399-3D98F3B95FD9}">
+                <ns87:textLayout xmlns:ns87="urn:pptxdsl:text-layout:v1" role="compact"/>
+              </a:ext>
+            </a:extLst>
           </a:bodyPr>
           <a:lstStyle/>
           <a:p>
@@ -27236,6 +28726,11 @@
         <p:txBody>
           <a:bodyPr wrap="square" anchor="ctr" lIns="0" rIns="0" tIns="0" bIns="0">
             <a:spAutoFit/>
+            <a:extLst>
+              <a:ext uri="{8AF73BB6-5E31-4F0F-A399-3D98F3B95FD9}">
+                <ns94:textLayout xmlns:ns94="urn:pptxdsl:text-layout:v1" role="compact"/>
+              </a:ext>
+            </a:extLst>
           </a:bodyPr>
           <a:lstStyle/>
           <a:p>
@@ -27303,6 +28798,11 @@
         <p:txBody>
           <a:bodyPr wrap="none" anchor="ctr" lIns="0" rIns="0" tIns="0" bIns="0">
             <a:spAutoFit/>
+            <a:extLst>
+              <a:ext uri="{8AF73BB6-5E31-4F0F-A399-3D98F3B95FD9}">
+                <ns99:textLayout xmlns:ns99="urn:pptxdsl:text-layout:v1" role="natural"/>
+              </a:ext>
+            </a:extLst>
           </a:bodyPr>
           <a:lstStyle/>
           <a:p>
@@ -27370,6 +28870,11 @@
         <p:txBody>
           <a:bodyPr wrap="none" anchor="ctr" lIns="0" rIns="0" tIns="0" bIns="0">
             <a:spAutoFit/>
+            <a:extLst>
+              <a:ext uri="{8AF73BB6-5E31-4F0F-A399-3D98F3B95FD9}">
+                <ns104:textLayout xmlns:ns104="urn:pptxdsl:text-layout:v1" role="natural"/>
+              </a:ext>
+            </a:extLst>
           </a:bodyPr>
           <a:lstStyle/>
           <a:p>
@@ -27437,6 +28942,11 @@
         <p:txBody>
           <a:bodyPr wrap="none" anchor="ctr" lIns="0" rIns="0" tIns="0" bIns="0">
             <a:spAutoFit/>
+            <a:extLst>
+              <a:ext uri="{8AF73BB6-5E31-4F0F-A399-3D98F3B95FD9}">
+                <ns109:textLayout xmlns:ns109="urn:pptxdsl:text-layout:v1" role="natural"/>
+              </a:ext>
+            </a:extLst>
           </a:bodyPr>
           <a:lstStyle/>
           <a:p>
@@ -27504,6 +29014,11 @@
         <p:txBody>
           <a:bodyPr wrap="none" anchor="ctr" lIns="0" rIns="0" tIns="0" bIns="0">
             <a:spAutoFit/>
+            <a:extLst>
+              <a:ext uri="{8AF73BB6-5E31-4F0F-A399-3D98F3B95FD9}">
+                <ns114:textLayout xmlns:ns114="urn:pptxdsl:text-layout:v1" role="natural"/>
+              </a:ext>
+            </a:extLst>
           </a:bodyPr>
           <a:lstStyle/>
           <a:p>
@@ -27571,6 +29086,11 @@
         <p:txBody>
           <a:bodyPr wrap="none" anchor="ctr" lIns="0" rIns="0" tIns="0" bIns="0">
             <a:spAutoFit/>
+            <a:extLst>
+              <a:ext uri="{8AF73BB6-5E31-4F0F-A399-3D98F3B95FD9}">
+                <ns119:textLayout xmlns:ns119="urn:pptxdsl:text-layout:v1" role="natural"/>
+              </a:ext>
+            </a:extLst>
           </a:bodyPr>
           <a:lstStyle/>
           <a:p>
@@ -27638,6 +29158,11 @@
         <p:txBody>
           <a:bodyPr wrap="none" anchor="ctr" lIns="0" rIns="0" tIns="0" bIns="0">
             <a:spAutoFit/>
+            <a:extLst>
+              <a:ext uri="{8AF73BB6-5E31-4F0F-A399-3D98F3B95FD9}">
+                <ns124:textLayout xmlns:ns124="urn:pptxdsl:text-layout:v1" role="natural"/>
+              </a:ext>
+            </a:extLst>
           </a:bodyPr>
           <a:lstStyle/>
           <a:p>
@@ -27705,6 +29230,11 @@
         <p:txBody>
           <a:bodyPr wrap="none" anchor="ctr" lIns="0" rIns="0" tIns="0" bIns="0">
             <a:spAutoFit/>
+            <a:extLst>
+              <a:ext uri="{8AF73BB6-5E31-4F0F-A399-3D98F3B95FD9}">
+                <ns129:textLayout xmlns:ns129="urn:pptxdsl:text-layout:v1" role="natural"/>
+              </a:ext>
+            </a:extLst>
           </a:bodyPr>
           <a:lstStyle/>
           <a:p>
@@ -27790,6 +29320,11 @@
         <p:txBody>
           <a:bodyPr wrap="square" anchor="ctr" lIns="0" rIns="0" tIns="0" bIns="0">
             <a:spAutoFit/>
+            <a:extLst>
+              <a:ext uri="{8AF73BB6-5E31-4F0F-A399-3D98F3B95FD9}">
+                <ns134:textLayout xmlns:ns134="urn:pptxdsl:text-layout:v1" role="body"/>
+              </a:ext>
+            </a:extLst>
           </a:bodyPr>
           <a:lstStyle/>
           <a:p>
@@ -27831,6 +29366,11 @@
         <p:txBody>
           <a:bodyPr wrap="none" anchor="ctr" lIns="0" rIns="0" tIns="0" bIns="0">
             <a:spAutoFit/>
+            <a:extLst>
+              <a:ext uri="{8AF73BB6-5E31-4F0F-A399-3D98F3B95FD9}">
+                <ns139:textLayout xmlns:ns139="urn:pptxdsl:text-layout:v1" role="body"/>
+              </a:ext>
+            </a:extLst>
           </a:bodyPr>
           <a:lstStyle/>
           <a:p>
@@ -27945,6 +29485,11 @@
         <p:txBody>
           <a:bodyPr wrap="square" anchor="t" lIns="0" rIns="0" tIns="0" bIns="0">
             <a:spAutoFit/>
+            <a:extLst>
+              <a:ext uri="{8AF73BB6-5E31-4F0F-A399-3D98F3B95FD9}">
+                <ns2:textLayout xmlns:ns2="urn:pptxdsl:text-layout:v1" role="natural"/>
+              </a:ext>
+            </a:extLst>
           </a:bodyPr>
           <a:lstStyle/>
           <a:p>
@@ -27986,6 +29531,11 @@
         <p:txBody>
           <a:bodyPr wrap="square" anchor="t" lIns="0" rIns="0" tIns="0" bIns="0">
             <a:spAutoFit/>
+            <a:extLst>
+              <a:ext uri="{8AF73BB6-5E31-4F0F-A399-3D98F3B95FD9}">
+                <ns7:textLayout xmlns:ns7="urn:pptxdsl:text-layout:v1" role="natural"/>
+              </a:ext>
+            </a:extLst>
           </a:bodyPr>
           <a:lstStyle/>
           <a:p>
@@ -28071,6 +29621,11 @@
         <p:txBody>
           <a:bodyPr wrap="square" anchor="t" lIns="0" rIns="0" tIns="0" bIns="0">
             <a:spAutoFit/>
+            <a:extLst>
+              <a:ext uri="{8AF73BB6-5E31-4F0F-A399-3D98F3B95FD9}">
+                <ns12:textLayout xmlns:ns12="urn:pptxdsl:text-layout:v1" role="natural"/>
+              </a:ext>
+            </a:extLst>
           </a:bodyPr>
           <a:lstStyle/>
           <a:p>
@@ -28547,6 +30102,11 @@
         <p:txBody>
           <a:bodyPr wrap="square" anchor="ctr" lIns="0" rIns="0" tIns="0" bIns="0">
             <a:spAutoFit/>
+            <a:extLst>
+              <a:ext uri="{8AF73BB6-5E31-4F0F-A399-3D98F3B95FD9}">
+                <ns30:textLayout xmlns:ns30="urn:pptxdsl:text-layout:v1" role="natural"/>
+              </a:ext>
+            </a:extLst>
           </a:bodyPr>
           <a:lstStyle/>
           <a:p>
@@ -28590,6 +30150,11 @@
         <p:txBody>
           <a:bodyPr wrap="square" anchor="ctr" lIns="0" rIns="0" tIns="0" bIns="0">
             <a:spAutoFit/>
+            <a:extLst>
+              <a:ext uri="{8AF73BB6-5E31-4F0F-A399-3D98F3B95FD9}">
+                <ns35:textLayout xmlns:ns35="urn:pptxdsl:text-layout:v1" role="compact"/>
+              </a:ext>
+            </a:extLst>
           </a:bodyPr>
           <a:lstStyle/>
           <a:p>
@@ -28657,6 +30222,11 @@
         <p:txBody>
           <a:bodyPr wrap="square" anchor="ctr" lIns="0" rIns="0" tIns="0" bIns="0">
             <a:spAutoFit/>
+            <a:extLst>
+              <a:ext uri="{8AF73BB6-5E31-4F0F-A399-3D98F3B95FD9}">
+                <ns40:textLayout xmlns:ns40="urn:pptxdsl:text-layout:v1" role="natural"/>
+              </a:ext>
+            </a:extLst>
           </a:bodyPr>
           <a:lstStyle/>
           <a:p>
@@ -28724,6 +30294,11 @@
         <p:txBody>
           <a:bodyPr wrap="square" anchor="ctr" lIns="0" rIns="0" tIns="0" bIns="0">
             <a:spAutoFit/>
+            <a:extLst>
+              <a:ext uri="{8AF73BB6-5E31-4F0F-A399-3D98F3B95FD9}">
+                <ns45:textLayout xmlns:ns45="urn:pptxdsl:text-layout:v1" role="natural"/>
+              </a:ext>
+            </a:extLst>
           </a:bodyPr>
           <a:lstStyle/>
           <a:p>
@@ -28791,6 +30366,11 @@
         <p:txBody>
           <a:bodyPr wrap="square" anchor="ctr" lIns="0" rIns="0" tIns="0" bIns="0">
             <a:spAutoFit/>
+            <a:extLst>
+              <a:ext uri="{8AF73BB6-5E31-4F0F-A399-3D98F3B95FD9}">
+                <ns50:textLayout xmlns:ns50="urn:pptxdsl:text-layout:v1" role="natural"/>
+              </a:ext>
+            </a:extLst>
           </a:bodyPr>
           <a:lstStyle/>
           <a:p>
@@ -28834,6 +30414,11 @@
         <p:txBody>
           <a:bodyPr wrap="square" anchor="ctr" lIns="0" rIns="0" tIns="0" bIns="0">
             <a:spAutoFit/>
+            <a:extLst>
+              <a:ext uri="{8AF73BB6-5E31-4F0F-A399-3D98F3B95FD9}">
+                <ns55:textLayout xmlns:ns55="urn:pptxdsl:text-layout:v1" role="compact"/>
+              </a:ext>
+            </a:extLst>
           </a:bodyPr>
           <a:lstStyle/>
           <a:p>
@@ -28901,6 +30486,11 @@
         <p:txBody>
           <a:bodyPr wrap="square" anchor="ctr" lIns="0" rIns="0" tIns="0" bIns="0">
             <a:spAutoFit/>
+            <a:extLst>
+              <a:ext uri="{8AF73BB6-5E31-4F0F-A399-3D98F3B95FD9}">
+                <ns60:textLayout xmlns:ns60="urn:pptxdsl:text-layout:v1" role="natural"/>
+              </a:ext>
+            </a:extLst>
           </a:bodyPr>
           <a:lstStyle/>
           <a:p>
@@ -28968,6 +30558,11 @@
         <p:txBody>
           <a:bodyPr wrap="square" anchor="ctr" lIns="0" rIns="0" tIns="0" bIns="0">
             <a:spAutoFit/>
+            <a:extLst>
+              <a:ext uri="{8AF73BB6-5E31-4F0F-A399-3D98F3B95FD9}">
+                <ns65:textLayout xmlns:ns65="urn:pptxdsl:text-layout:v1" role="natural"/>
+              </a:ext>
+            </a:extLst>
           </a:bodyPr>
           <a:lstStyle/>
           <a:p>
@@ -29011,6 +30606,11 @@
         <p:txBody>
           <a:bodyPr wrap="square" anchor="ctr" lIns="0" rIns="0" tIns="0" bIns="0">
             <a:spAutoFit/>
+            <a:extLst>
+              <a:ext uri="{8AF73BB6-5E31-4F0F-A399-3D98F3B95FD9}">
+                <ns70:textLayout xmlns:ns70="urn:pptxdsl:text-layout:v1" role="compact"/>
+              </a:ext>
+            </a:extLst>
           </a:bodyPr>
           <a:lstStyle/>
           <a:p>
@@ -29078,6 +30678,11 @@
         <p:txBody>
           <a:bodyPr wrap="square" anchor="ctr" lIns="0" rIns="0" tIns="0" bIns="0">
             <a:spAutoFit/>
+            <a:extLst>
+              <a:ext uri="{8AF73BB6-5E31-4F0F-A399-3D98F3B95FD9}">
+                <ns75:textLayout xmlns:ns75="urn:pptxdsl:text-layout:v1" role="natural"/>
+              </a:ext>
+            </a:extLst>
           </a:bodyPr>
           <a:lstStyle/>
           <a:p>
@@ -29121,6 +30726,11 @@
         <p:txBody>
           <a:bodyPr wrap="square" anchor="ctr" lIns="0" rIns="0" tIns="0" bIns="0">
             <a:spAutoFit/>
+            <a:extLst>
+              <a:ext uri="{8AF73BB6-5E31-4F0F-A399-3D98F3B95FD9}">
+                <ns80:textLayout xmlns:ns80="urn:pptxdsl:text-layout:v1" role="compact"/>
+              </a:ext>
+            </a:extLst>
           </a:bodyPr>
           <a:lstStyle/>
           <a:p>
@@ -29164,6 +30774,11 @@
         <p:txBody>
           <a:bodyPr wrap="square" anchor="ctr" lIns="0" rIns="0" tIns="0" bIns="0">
             <a:spAutoFit/>
+            <a:extLst>
+              <a:ext uri="{8AF73BB6-5E31-4F0F-A399-3D98F3B95FD9}">
+                <ns85:textLayout xmlns:ns85="urn:pptxdsl:text-layout:v1" role="compact"/>
+              </a:ext>
+            </a:extLst>
           </a:bodyPr>
           <a:lstStyle/>
           <a:p>
@@ -29207,6 +30822,11 @@
         <p:txBody>
           <a:bodyPr wrap="square" anchor="ctr" lIns="0" rIns="0" tIns="0" bIns="0">
             <a:spAutoFit/>
+            <a:extLst>
+              <a:ext uri="{8AF73BB6-5E31-4F0F-A399-3D98F3B95FD9}">
+                <ns90:textLayout xmlns:ns90="urn:pptxdsl:text-layout:v1" role="compact"/>
+              </a:ext>
+            </a:extLst>
           </a:bodyPr>
           <a:lstStyle/>
           <a:p>
@@ -29250,6 +30870,11 @@
         <p:txBody>
           <a:bodyPr wrap="square" anchor="ctr" lIns="0" rIns="0" tIns="0" bIns="0">
             <a:spAutoFit/>
+            <a:extLst>
+              <a:ext uri="{8AF73BB6-5E31-4F0F-A399-3D98F3B95FD9}">
+                <ns95:textLayout xmlns:ns95="urn:pptxdsl:text-layout:v1" role="compact"/>
+              </a:ext>
+            </a:extLst>
           </a:bodyPr>
           <a:lstStyle/>
           <a:p>
@@ -29293,6 +30918,11 @@
         <p:txBody>
           <a:bodyPr wrap="square" anchor="ctr" lIns="0" rIns="0" tIns="0" bIns="0">
             <a:spAutoFit/>
+            <a:extLst>
+              <a:ext uri="{8AF73BB6-5E31-4F0F-A399-3D98F3B95FD9}">
+                <ns100:textLayout xmlns:ns100="urn:pptxdsl:text-layout:v1" role="compact"/>
+              </a:ext>
+            </a:extLst>
           </a:bodyPr>
           <a:lstStyle/>
           <a:p>
@@ -29336,6 +30966,11 @@
         <p:txBody>
           <a:bodyPr wrap="square" anchor="ctr" lIns="0" rIns="0" tIns="0" bIns="0">
             <a:spAutoFit/>
+            <a:extLst>
+              <a:ext uri="{8AF73BB6-5E31-4F0F-A399-3D98F3B95FD9}">
+                <ns105:textLayout xmlns:ns105="urn:pptxdsl:text-layout:v1" role="compact"/>
+              </a:ext>
+            </a:extLst>
           </a:bodyPr>
           <a:lstStyle/>
           <a:p>
@@ -29377,6 +31012,11 @@
         <p:txBody>
           <a:bodyPr wrap="square" anchor="t" lIns="0" rIns="0" tIns="0" bIns="0">
             <a:spAutoFit/>
+            <a:extLst>
+              <a:ext uri="{8AF73BB6-5E31-4F0F-A399-3D98F3B95FD9}">
+                <ns110:textLayout xmlns:ns110="urn:pptxdsl:text-layout:v1" role="body"/>
+              </a:ext>
+            </a:extLst>
           </a:bodyPr>
           <a:lstStyle/>
           <a:p>
@@ -29462,6 +31102,11 @@
         <p:txBody>
           <a:bodyPr wrap="square" anchor="ctr" lIns="0" rIns="0" tIns="0" bIns="0">
             <a:spAutoFit/>
+            <a:extLst>
+              <a:ext uri="{8AF73BB6-5E31-4F0F-A399-3D98F3B95FD9}">
+                <ns115:textLayout xmlns:ns115="urn:pptxdsl:text-layout:v1" role="body"/>
+              </a:ext>
+            </a:extLst>
           </a:bodyPr>
           <a:lstStyle/>
           <a:p>
@@ -29503,6 +31148,11 @@
         <p:txBody>
           <a:bodyPr wrap="none" anchor="ctr" lIns="0" rIns="0" tIns="0" bIns="0">
             <a:spAutoFit/>
+            <a:extLst>
+              <a:ext uri="{8AF73BB6-5E31-4F0F-A399-3D98F3B95FD9}">
+                <ns120:textLayout xmlns:ns120="urn:pptxdsl:text-layout:v1" role="body"/>
+              </a:ext>
+            </a:extLst>
           </a:bodyPr>
           <a:lstStyle/>
           <a:p>
@@ -29617,6 +31267,11 @@
         <p:txBody>
           <a:bodyPr wrap="square" anchor="t" lIns="0" rIns="0" tIns="0" bIns="0">
             <a:spAutoFit/>
+            <a:extLst>
+              <a:ext uri="{8AF73BB6-5E31-4F0F-A399-3D98F3B95FD9}">
+                <ns2:textLayout xmlns:ns2="urn:pptxdsl:text-layout:v1" role="natural"/>
+              </a:ext>
+            </a:extLst>
           </a:bodyPr>
           <a:lstStyle/>
           <a:p>
@@ -29658,6 +31313,11 @@
         <p:txBody>
           <a:bodyPr wrap="square" anchor="t" lIns="0" rIns="0" tIns="0" bIns="0">
             <a:spAutoFit/>
+            <a:extLst>
+              <a:ext uri="{8AF73BB6-5E31-4F0F-A399-3D98F3B95FD9}">
+                <ns7:textLayout xmlns:ns7="urn:pptxdsl:text-layout:v1" role="natural"/>
+              </a:ext>
+            </a:extLst>
           </a:bodyPr>
           <a:lstStyle/>
           <a:p>
@@ -29743,6 +31403,11 @@
         <p:txBody>
           <a:bodyPr wrap="square" anchor="t" lIns="0" rIns="0" tIns="0" bIns="0">
             <a:spAutoFit/>
+            <a:extLst>
+              <a:ext uri="{8AF73BB6-5E31-4F0F-A399-3D98F3B95FD9}">
+                <ns12:textLayout xmlns:ns12="urn:pptxdsl:text-layout:v1" role="natural"/>
+              </a:ext>
+            </a:extLst>
           </a:bodyPr>
           <a:lstStyle/>
           <a:p>
@@ -29828,6 +31493,11 @@
         <p:txBody>
           <a:bodyPr wrap="square" anchor="t" lIns="0" rIns="0" tIns="0" bIns="0">
             <a:spAutoFit/>
+            <a:extLst>
+              <a:ext uri="{8AF73BB6-5E31-4F0F-A399-3D98F3B95FD9}">
+                <ns17:textLayout xmlns:ns17="urn:pptxdsl:text-layout:v1" role="natural"/>
+              </a:ext>
+            </a:extLst>
           </a:bodyPr>
           <a:lstStyle/>
           <a:p>
@@ -30249,7 +31919,7 @@
         </p:nvSpPr>
         <p:spPr>
           <a:xfrm>
-            <a:off x="1091565" y="3994099"/>
+            <a:off x="1091564" y="3994099"/>
             <a:ext cx="1017270" cy="190246"/>
           </a:xfrm>
           <a:prstGeom prst="rect">
@@ -30262,6 +31932,11 @@
         <p:txBody>
           <a:bodyPr wrap="square" anchor="ctr" lIns="0" rIns="0" tIns="0" bIns="0">
             <a:spAutoFit/>
+            <a:extLst>
+              <a:ext uri="{8AF73BB6-5E31-4F0F-A399-3D98F3B95FD9}">
+                <ns29:textLayout xmlns:ns29="urn:pptxdsl:text-layout:v1" role="natural"/>
+              </a:ext>
+            </a:extLst>
           </a:bodyPr>
           <a:lstStyle/>
           <a:p>
@@ -30293,7 +31968,7 @@
         <p:spPr>
           <a:xfrm>
             <a:off x="1122426" y="4250131"/>
-            <a:ext cx="955547" cy="162306"/>
+            <a:ext cx="955548" cy="162306"/>
           </a:xfrm>
           <a:prstGeom prst="rect">
             <a:avLst/>
@@ -30305,6 +31980,11 @@
         <p:txBody>
           <a:bodyPr wrap="square" anchor="ctr" lIns="0" rIns="0" tIns="0" bIns="0">
             <a:spAutoFit/>
+            <a:extLst>
+              <a:ext uri="{8AF73BB6-5E31-4F0F-A399-3D98F3B95FD9}">
+                <ns34:textLayout xmlns:ns34="urn:pptxdsl:text-layout:v1" role="compact"/>
+              </a:ext>
+            </a:extLst>
           </a:bodyPr>
           <a:lstStyle/>
           <a:p>
@@ -30372,6 +32052,11 @@
         <p:txBody>
           <a:bodyPr wrap="square" anchor="ctr" lIns="0" rIns="0" tIns="0" bIns="0">
             <a:spAutoFit/>
+            <a:extLst>
+              <a:ext uri="{8AF73BB6-5E31-4F0F-A399-3D98F3B95FD9}">
+                <ns39:textLayout xmlns:ns39="urn:pptxdsl:text-layout:v1" role="natural"/>
+              </a:ext>
+            </a:extLst>
           </a:bodyPr>
           <a:lstStyle/>
           <a:p>
@@ -30415,6 +32100,11 @@
         <p:txBody>
           <a:bodyPr wrap="square" anchor="ctr" lIns="0" rIns="0" tIns="0" bIns="0">
             <a:spAutoFit/>
+            <a:extLst>
+              <a:ext uri="{8AF73BB6-5E31-4F0F-A399-3D98F3B95FD9}">
+                <ns44:textLayout xmlns:ns44="urn:pptxdsl:text-layout:v1" role="compact"/>
+              </a:ext>
+            </a:extLst>
           </a:bodyPr>
           <a:lstStyle/>
           <a:p>
@@ -30482,6 +32172,11 @@
         <p:txBody>
           <a:bodyPr wrap="square" anchor="ctr" lIns="0" rIns="0" tIns="0" bIns="0">
             <a:spAutoFit/>
+            <a:extLst>
+              <a:ext uri="{8AF73BB6-5E31-4F0F-A399-3D98F3B95FD9}">
+                <ns49:textLayout xmlns:ns49="urn:pptxdsl:text-layout:v1" role="natural"/>
+              </a:ext>
+            </a:extLst>
           </a:bodyPr>
           <a:lstStyle/>
           <a:p>
@@ -30513,7 +32208,7 @@
         <p:spPr>
           <a:xfrm>
             <a:off x="5618073" y="4250131"/>
-            <a:ext cx="955547" cy="162306"/>
+            <a:ext cx="955548" cy="162306"/>
           </a:xfrm>
           <a:prstGeom prst="rect">
             <a:avLst/>
@@ -30525,6 +32220,11 @@
         <p:txBody>
           <a:bodyPr wrap="square" anchor="ctr" lIns="0" rIns="0" tIns="0" bIns="0">
             <a:spAutoFit/>
+            <a:extLst>
+              <a:ext uri="{8AF73BB6-5E31-4F0F-A399-3D98F3B95FD9}">
+                <ns54:textLayout xmlns:ns54="urn:pptxdsl:text-layout:v1" role="compact"/>
+              </a:ext>
+            </a:extLst>
           </a:bodyPr>
           <a:lstStyle/>
           <a:p>
@@ -30592,6 +32292,11 @@
         <p:txBody>
           <a:bodyPr wrap="square" anchor="ctr" lIns="0" rIns="0" tIns="0" bIns="0">
             <a:spAutoFit/>
+            <a:extLst>
+              <a:ext uri="{8AF73BB6-5E31-4F0F-A399-3D98F3B95FD9}">
+                <ns59:textLayout xmlns:ns59="urn:pptxdsl:text-layout:v1" role="natural"/>
+              </a:ext>
+            </a:extLst>
           </a:bodyPr>
           <a:lstStyle/>
           <a:p>
@@ -30635,6 +32340,11 @@
         <p:txBody>
           <a:bodyPr wrap="square" anchor="ctr" lIns="0" rIns="0" tIns="0" bIns="0">
             <a:spAutoFit/>
+            <a:extLst>
+              <a:ext uri="{8AF73BB6-5E31-4F0F-A399-3D98F3B95FD9}">
+                <ns64:textLayout xmlns:ns64="urn:pptxdsl:text-layout:v1" role="compact"/>
+              </a:ext>
+            </a:extLst>
           </a:bodyPr>
           <a:lstStyle/>
           <a:p>
@@ -30690,7 +32400,7 @@
         <p:spPr>
           <a:xfrm>
             <a:off x="10113721" y="2750515"/>
-            <a:ext cx="955547" cy="190246"/>
+            <a:ext cx="955548" cy="190246"/>
           </a:xfrm>
           <a:prstGeom prst="rect">
             <a:avLst/>
@@ -30702,6 +32412,11 @@
         <p:txBody>
           <a:bodyPr wrap="square" anchor="ctr" lIns="0" rIns="0" tIns="0" bIns="0">
             <a:spAutoFit/>
+            <a:extLst>
+              <a:ext uri="{8AF73BB6-5E31-4F0F-A399-3D98F3B95FD9}">
+                <ns69:textLayout xmlns:ns69="urn:pptxdsl:text-layout:v1" role="natural"/>
+              </a:ext>
+            </a:extLst>
           </a:bodyPr>
           <a:lstStyle/>
           <a:p>
@@ -30745,6 +32460,11 @@
         <p:txBody>
           <a:bodyPr wrap="square" anchor="ctr" lIns="0" rIns="0" tIns="0" bIns="0">
             <a:spAutoFit/>
+            <a:extLst>
+              <a:ext uri="{8AF73BB6-5E31-4F0F-A399-3D98F3B95FD9}">
+                <ns74:textLayout xmlns:ns74="urn:pptxdsl:text-layout:v1" role="compact"/>
+              </a:ext>
+            </a:extLst>
           </a:bodyPr>
           <a:lstStyle/>
           <a:p>
@@ -30812,6 +32532,11 @@
         <p:txBody>
           <a:bodyPr wrap="square" anchor="ctr" lIns="0" rIns="0" tIns="0" bIns="0">
             <a:spAutoFit/>
+            <a:extLst>
+              <a:ext uri="{8AF73BB6-5E31-4F0F-A399-3D98F3B95FD9}">
+                <ns79:textLayout xmlns:ns79="urn:pptxdsl:text-layout:v1" role="natural"/>
+              </a:ext>
+            </a:extLst>
           </a:bodyPr>
           <a:lstStyle/>
           <a:p>
@@ -30855,6 +32580,11 @@
         <p:txBody>
           <a:bodyPr wrap="square" anchor="ctr" lIns="0" rIns="0" tIns="0" bIns="0">
             <a:spAutoFit/>
+            <a:extLst>
+              <a:ext uri="{8AF73BB6-5E31-4F0F-A399-3D98F3B95FD9}">
+                <ns84:textLayout xmlns:ns84="urn:pptxdsl:text-layout:v1" role="compact"/>
+              </a:ext>
+            </a:extLst>
           </a:bodyPr>
           <a:lstStyle/>
           <a:p>
@@ -30922,6 +32652,11 @@
         <p:txBody>
           <a:bodyPr wrap="square" anchor="ctr" lIns="0" rIns="0" tIns="0" bIns="0">
             <a:spAutoFit/>
+            <a:extLst>
+              <a:ext uri="{8AF73BB6-5E31-4F0F-A399-3D98F3B95FD9}">
+                <ns89:textLayout xmlns:ns89="urn:pptxdsl:text-layout:v1" role="natural"/>
+              </a:ext>
+            </a:extLst>
           </a:bodyPr>
           <a:lstStyle/>
           <a:p>
@@ -30965,6 +32700,11 @@
         <p:txBody>
           <a:bodyPr wrap="square" anchor="ctr" lIns="0" rIns="0" tIns="0" bIns="0">
             <a:spAutoFit/>
+            <a:extLst>
+              <a:ext uri="{8AF73BB6-5E31-4F0F-A399-3D98F3B95FD9}">
+                <ns94:textLayout xmlns:ns94="urn:pptxdsl:text-layout:v1" role="compact"/>
+              </a:ext>
+            </a:extLst>
           </a:bodyPr>
           <a:lstStyle/>
           <a:p>
@@ -31008,6 +32748,11 @@
         <p:txBody>
           <a:bodyPr wrap="square" anchor="ctr" lIns="0" rIns="0" tIns="0" bIns="0">
             <a:spAutoFit/>
+            <a:extLst>
+              <a:ext uri="{8AF73BB6-5E31-4F0F-A399-3D98F3B95FD9}">
+                <ns99:textLayout xmlns:ns99="urn:pptxdsl:text-layout:v1" role="compact"/>
+              </a:ext>
+            </a:extLst>
           </a:bodyPr>
           <a:lstStyle/>
           <a:p>
@@ -31051,6 +32796,11 @@
         <p:txBody>
           <a:bodyPr wrap="square" anchor="ctr" lIns="0" rIns="0" tIns="0" bIns="0">
             <a:spAutoFit/>
+            <a:extLst>
+              <a:ext uri="{8AF73BB6-5E31-4F0F-A399-3D98F3B95FD9}">
+                <ns104:textLayout xmlns:ns104="urn:pptxdsl:text-layout:v1" role="compact"/>
+              </a:ext>
+            </a:extLst>
           </a:bodyPr>
           <a:lstStyle/>
           <a:p>
@@ -31094,6 +32844,11 @@
         <p:txBody>
           <a:bodyPr wrap="square" anchor="ctr" lIns="0" rIns="0" tIns="0" bIns="0">
             <a:spAutoFit/>
+            <a:extLst>
+              <a:ext uri="{8AF73BB6-5E31-4F0F-A399-3D98F3B95FD9}">
+                <ns109:textLayout xmlns:ns109="urn:pptxdsl:text-layout:v1" role="compact"/>
+              </a:ext>
+            </a:extLst>
           </a:bodyPr>
           <a:lstStyle/>
           <a:p>
@@ -31137,6 +32892,11 @@
         <p:txBody>
           <a:bodyPr wrap="square" anchor="ctr" lIns="0" rIns="0" tIns="0" bIns="0">
             <a:spAutoFit/>
+            <a:extLst>
+              <a:ext uri="{8AF73BB6-5E31-4F0F-A399-3D98F3B95FD9}">
+                <ns114:textLayout xmlns:ns114="urn:pptxdsl:text-layout:v1" role="compact"/>
+              </a:ext>
+            </a:extLst>
           </a:bodyPr>
           <a:lstStyle/>
           <a:p>
@@ -31180,6 +32940,11 @@
         <p:txBody>
           <a:bodyPr wrap="square" anchor="ctr" lIns="0" rIns="0" tIns="0" bIns="0">
             <a:spAutoFit/>
+            <a:extLst>
+              <a:ext uri="{8AF73BB6-5E31-4F0F-A399-3D98F3B95FD9}">
+                <ns119:textLayout xmlns:ns119="urn:pptxdsl:text-layout:v1" role="compact"/>
+              </a:ext>
+            </a:extLst>
           </a:bodyPr>
           <a:lstStyle/>
           <a:p>
@@ -31265,6 +33030,11 @@
         <p:txBody>
           <a:bodyPr wrap="square" anchor="ctr" lIns="0" rIns="0" tIns="0" bIns="0">
             <a:spAutoFit/>
+            <a:extLst>
+              <a:ext uri="{8AF73BB6-5E31-4F0F-A399-3D98F3B95FD9}">
+                <ns124:textLayout xmlns:ns124="urn:pptxdsl:text-layout:v1" role="body"/>
+              </a:ext>
+            </a:extLst>
           </a:bodyPr>
           <a:lstStyle/>
           <a:p>
@@ -31306,6 +33076,11 @@
         <p:txBody>
           <a:bodyPr wrap="none" anchor="ctr" lIns="0" rIns="0" tIns="0" bIns="0">
             <a:spAutoFit/>
+            <a:extLst>
+              <a:ext uri="{8AF73BB6-5E31-4F0F-A399-3D98F3B95FD9}">
+                <ns129:textLayout xmlns:ns129="urn:pptxdsl:text-layout:v1" role="body"/>
+              </a:ext>
+            </a:extLst>
           </a:bodyPr>
           <a:lstStyle/>
           <a:p>
@@ -31420,6 +33195,11 @@
         <p:txBody>
           <a:bodyPr wrap="square" anchor="t" lIns="0" rIns="0" tIns="0" bIns="0">
             <a:spAutoFit/>
+            <a:extLst>
+              <a:ext uri="{8AF73BB6-5E31-4F0F-A399-3D98F3B95FD9}">
+                <ns2:textLayout xmlns:ns2="urn:pptxdsl:text-layout:v1" role="natural"/>
+              </a:ext>
+            </a:extLst>
           </a:bodyPr>
           <a:lstStyle/>
           <a:p>
@@ -31461,6 +33241,11 @@
         <p:txBody>
           <a:bodyPr wrap="square" anchor="t" lIns="0" rIns="0" tIns="0" bIns="0">
             <a:spAutoFit/>
+            <a:extLst>
+              <a:ext uri="{8AF73BB6-5E31-4F0F-A399-3D98F3B95FD9}">
+                <ns7:textLayout xmlns:ns7="urn:pptxdsl:text-layout:v1" role="natural"/>
+              </a:ext>
+            </a:extLst>
           </a:bodyPr>
           <a:lstStyle/>
           <a:p>
@@ -31526,6 +33311,11 @@
         <p:txBody>
           <a:bodyPr wrap="square" anchor="ctr" lIns="0" rIns="0" tIns="0" bIns="0">
             <a:spAutoFit/>
+            <a:extLst>
+              <a:ext uri="{8AF73BB6-5E31-4F0F-A399-3D98F3B95FD9}">
+                <ns12:textLayout xmlns:ns12="urn:pptxdsl:text-layout:v1" role="natural"/>
+              </a:ext>
+            </a:extLst>
           </a:bodyPr>
           <a:lstStyle/>
           <a:p>
@@ -31567,6 +33357,11 @@
         <p:txBody>
           <a:bodyPr wrap="square" anchor="t" lIns="0" rIns="0" tIns="0" bIns="0">
             <a:spAutoFit/>
+            <a:extLst>
+              <a:ext uri="{8AF73BB6-5E31-4F0F-A399-3D98F3B95FD9}">
+                <ns17:textLayout xmlns:ns17="urn:pptxdsl:text-layout:v1" role="body"/>
+              </a:ext>
+            </a:extLst>
           </a:bodyPr>
           <a:lstStyle/>
           <a:p>
@@ -31706,6 +33501,11 @@
         <p:txBody>
           <a:bodyPr wrap="square" anchor="t" lIns="0" rIns="0" tIns="0" bIns="0">
             <a:spAutoFit/>
+            <a:extLst>
+              <a:ext uri="{8AF73BB6-5E31-4F0F-A399-3D98F3B95FD9}">
+                <ns28:textLayout xmlns:ns28="urn:pptxdsl:text-layout:v1" role="compact"/>
+              </a:ext>
+            </a:extLst>
           </a:bodyPr>
           <a:lstStyle/>
           <a:p>
@@ -31747,6 +33547,11 @@
         <p:txBody>
           <a:bodyPr wrap="square" anchor="t" lIns="0" rIns="0" tIns="0" bIns="0">
             <a:spAutoFit/>
+            <a:extLst>
+              <a:ext uri="{8AF73BB6-5E31-4F0F-A399-3D98F3B95FD9}">
+                <ns33:textLayout xmlns:ns33="urn:pptxdsl:text-layout:v1" role="body"/>
+              </a:ext>
+            </a:extLst>
           </a:bodyPr>
           <a:lstStyle/>
           <a:p>
@@ -31832,6 +33637,11 @@
         <p:txBody>
           <a:bodyPr wrap="square" anchor="t" lIns="0" rIns="0" tIns="0" bIns="0">
             <a:spAutoFit/>
+            <a:extLst>
+              <a:ext uri="{8AF73BB6-5E31-4F0F-A399-3D98F3B95FD9}">
+                <ns38:textLayout xmlns:ns38="urn:pptxdsl:text-layout:v1" role="compact"/>
+              </a:ext>
+            </a:extLst>
           </a:bodyPr>
           <a:lstStyle/>
           <a:p>
@@ -31873,6 +33683,11 @@
         <p:txBody>
           <a:bodyPr wrap="square" anchor="t" lIns="0" rIns="0" tIns="0" bIns="0">
             <a:spAutoFit/>
+            <a:extLst>
+              <a:ext uri="{8AF73BB6-5E31-4F0F-A399-3D98F3B95FD9}">
+                <ns43:textLayout xmlns:ns43="urn:pptxdsl:text-layout:v1" role="body"/>
+              </a:ext>
+            </a:extLst>
           </a:bodyPr>
           <a:lstStyle/>
           <a:p>
@@ -31958,6 +33773,11 @@
         <p:txBody>
           <a:bodyPr wrap="square" anchor="t" lIns="0" rIns="0" tIns="0" bIns="0">
             <a:spAutoFit/>
+            <a:extLst>
+              <a:ext uri="{8AF73BB6-5E31-4F0F-A399-3D98F3B95FD9}">
+                <ns48:textLayout xmlns:ns48="urn:pptxdsl:text-layout:v1" role="compact"/>
+              </a:ext>
+            </a:extLst>
           </a:bodyPr>
           <a:lstStyle/>
           <a:p>
@@ -31999,6 +33819,11 @@
         <p:txBody>
           <a:bodyPr wrap="square" anchor="t" lIns="0" rIns="0" tIns="0" bIns="0">
             <a:spAutoFit/>
+            <a:extLst>
+              <a:ext uri="{8AF73BB6-5E31-4F0F-A399-3D98F3B95FD9}">
+                <ns53:textLayout xmlns:ns53="urn:pptxdsl:text-layout:v1" role="body"/>
+              </a:ext>
+            </a:extLst>
           </a:bodyPr>
           <a:lstStyle/>
           <a:p>
@@ -32102,6 +33927,11 @@
         <p:txBody>
           <a:bodyPr wrap="square" anchor="t" lIns="0" rIns="0" tIns="0" bIns="0">
             <a:spAutoFit/>
+            <a:extLst>
+              <a:ext uri="{8AF73BB6-5E31-4F0F-A399-3D98F3B95FD9}">
+                <ns60:textLayout xmlns:ns60="urn:pptxdsl:text-layout:v1" role="natural"/>
+              </a:ext>
+            </a:extLst>
           </a:bodyPr>
           <a:lstStyle/>
           <a:p>
@@ -32143,6 +33973,11 @@
         <p:txBody>
           <a:bodyPr wrap="square" anchor="t" lIns="0" rIns="0" tIns="0" bIns="0">
             <a:spAutoFit/>
+            <a:extLst>
+              <a:ext uri="{8AF73BB6-5E31-4F0F-A399-3D98F3B95FD9}">
+                <ns65:textLayout xmlns:ns65="urn:pptxdsl:text-layout:v1" role="body"/>
+              </a:ext>
+            </a:extLst>
           </a:bodyPr>
           <a:lstStyle/>
           <a:p>
@@ -32228,6 +34063,11 @@
         <p:txBody>
           <a:bodyPr wrap="square" anchor="ctr" lIns="0" rIns="0" tIns="0" bIns="0">
             <a:spAutoFit/>
+            <a:extLst>
+              <a:ext uri="{8AF73BB6-5E31-4F0F-A399-3D98F3B95FD9}">
+                <ns70:textLayout xmlns:ns70="urn:pptxdsl:text-layout:v1" role="body"/>
+              </a:ext>
+            </a:extLst>
           </a:bodyPr>
           <a:lstStyle/>
           <a:p>
@@ -32269,6 +34109,11 @@
         <p:txBody>
           <a:bodyPr wrap="none" anchor="ctr" lIns="0" rIns="0" tIns="0" bIns="0">
             <a:spAutoFit/>
+            <a:extLst>
+              <a:ext uri="{8AF73BB6-5E31-4F0F-A399-3D98F3B95FD9}">
+                <ns75:textLayout xmlns:ns75="urn:pptxdsl:text-layout:v1" role="body"/>
+              </a:ext>
+            </a:extLst>
           </a:bodyPr>
           <a:lstStyle/>
           <a:p>
@@ -32383,6 +34228,11 @@
         <p:txBody>
           <a:bodyPr wrap="square" anchor="t" lIns="0" rIns="0" tIns="0" bIns="0">
             <a:spAutoFit/>
+            <a:extLst>
+              <a:ext uri="{8AF73BB6-5E31-4F0F-A399-3D98F3B95FD9}">
+                <ns2:textLayout xmlns:ns2="urn:pptxdsl:text-layout:v1" role="natural"/>
+              </a:ext>
+            </a:extLst>
           </a:bodyPr>
           <a:lstStyle/>
           <a:p>
@@ -32424,6 +34274,11 @@
         <p:txBody>
           <a:bodyPr wrap="square" anchor="t" lIns="0" rIns="0" tIns="0" bIns="0">
             <a:spAutoFit/>
+            <a:extLst>
+              <a:ext uri="{8AF73BB6-5E31-4F0F-A399-3D98F3B95FD9}">
+                <ns7:textLayout xmlns:ns7="urn:pptxdsl:text-layout:v1" role="natural"/>
+              </a:ext>
+            </a:extLst>
           </a:bodyPr>
           <a:lstStyle/>
           <a:p>
@@ -32509,6 +34364,11 @@
         <p:txBody>
           <a:bodyPr wrap="square" anchor="ctr" lIns="0" rIns="0" tIns="0" bIns="0">
             <a:spAutoFit/>
+            <a:extLst>
+              <a:ext uri="{8AF73BB6-5E31-4F0F-A399-3D98F3B95FD9}">
+                <ns12:textLayout xmlns:ns12="urn:pptxdsl:text-layout:v1" role="natural"/>
+              </a:ext>
+            </a:extLst>
           </a:bodyPr>
           <a:lstStyle/>
           <a:p>
@@ -32550,6 +34410,11 @@
         <p:txBody>
           <a:bodyPr wrap="square" anchor="t" lIns="0" rIns="0" tIns="0" bIns="0">
             <a:spAutoFit/>
+            <a:extLst>
+              <a:ext uri="{8AF73BB6-5E31-4F0F-A399-3D98F3B95FD9}">
+                <ns17:textLayout xmlns:ns17="urn:pptxdsl:text-layout:v1" role="body"/>
+              </a:ext>
+            </a:extLst>
           </a:bodyPr>
           <a:lstStyle/>
           <a:p>
@@ -32635,6 +34500,11 @@
         <p:txBody>
           <a:bodyPr wrap="square" anchor="ctr" lIns="0" rIns="0" tIns="0" bIns="0">
             <a:spAutoFit/>
+            <a:extLst>
+              <a:ext uri="{8AF73BB6-5E31-4F0F-A399-3D98F3B95FD9}">
+                <ns22:textLayout xmlns:ns22="urn:pptxdsl:text-layout:v1" role="natural"/>
+              </a:ext>
+            </a:extLst>
           </a:bodyPr>
           <a:lstStyle/>
           <a:p>
@@ -32676,6 +34546,11 @@
         <p:txBody>
           <a:bodyPr wrap="square" anchor="t" lIns="0" rIns="0" tIns="0" bIns="0">
             <a:spAutoFit/>
+            <a:extLst>
+              <a:ext uri="{8AF73BB6-5E31-4F0F-A399-3D98F3B95FD9}">
+                <ns27:textLayout xmlns:ns27="urn:pptxdsl:text-layout:v1" role="body"/>
+              </a:ext>
+            </a:extLst>
           </a:bodyPr>
           <a:lstStyle/>
           <a:p>
@@ -32717,6 +34592,11 @@
         <p:txBody>
           <a:bodyPr wrap="square" anchor="t" lIns="0" rIns="0" tIns="0" bIns="0">
             <a:spAutoFit/>
+            <a:extLst>
+              <a:ext uri="{8AF73BB6-5E31-4F0F-A399-3D98F3B95FD9}">
+                <ns32:textLayout xmlns:ns32="urn:pptxdsl:text-layout:v1" role="natural"/>
+              </a:ext>
+            </a:extLst>
           </a:bodyPr>
           <a:lstStyle/>
           <a:p>
@@ -32758,6 +34638,11 @@
         <p:txBody>
           <a:bodyPr wrap="square" anchor="t" lIns="0" rIns="0" tIns="0" bIns="0">
             <a:spAutoFit/>
+            <a:extLst>
+              <a:ext uri="{8AF73BB6-5E31-4F0F-A399-3D98F3B95FD9}">
+                <ns37:textLayout xmlns:ns37="urn:pptxdsl:text-layout:v1" role="natural"/>
+              </a:ext>
+            </a:extLst>
           </a:bodyPr>
           <a:lstStyle/>
           <a:p>
@@ -32799,6 +34684,11 @@
         <p:txBody>
           <a:bodyPr wrap="square" anchor="t" lIns="0" rIns="0" tIns="0" bIns="0">
             <a:spAutoFit/>
+            <a:extLst>
+              <a:ext uri="{8AF73BB6-5E31-4F0F-A399-3D98F3B95FD9}">
+                <ns42:textLayout xmlns:ns42="urn:pptxdsl:text-layout:v1" role="natural"/>
+              </a:ext>
+            </a:extLst>
           </a:bodyPr>
           <a:lstStyle/>
           <a:p>
@@ -32840,6 +34730,11 @@
         <p:txBody>
           <a:bodyPr wrap="square" anchor="t" lIns="0" rIns="0" tIns="0" bIns="0">
             <a:spAutoFit/>
+            <a:extLst>
+              <a:ext uri="{8AF73BB6-5E31-4F0F-A399-3D98F3B95FD9}">
+                <ns47:textLayout xmlns:ns47="urn:pptxdsl:text-layout:v1" role="natural"/>
+              </a:ext>
+            </a:extLst>
           </a:bodyPr>
           <a:lstStyle/>
           <a:p>
@@ -33349,6 +35244,11 @@
         <p:txBody>
           <a:bodyPr wrap="square" anchor="ctr" lIns="0" rIns="0" tIns="0" bIns="0">
             <a:spAutoFit/>
+            <a:extLst>
+              <a:ext uri="{8AF73BB6-5E31-4F0F-A399-3D98F3B95FD9}">
+                <ns54:textLayout xmlns:ns54="urn:pptxdsl:text-layout:v1" role="compact"/>
+              </a:ext>
+            </a:extLst>
           </a:bodyPr>
           <a:lstStyle/>
           <a:p>
@@ -33552,6 +35452,11 @@
         <p:txBody>
           <a:bodyPr wrap="square" anchor="ctr" lIns="0" rIns="0" tIns="0" bIns="0">
             <a:spAutoFit/>
+            <a:extLst>
+              <a:ext uri="{8AF73BB6-5E31-4F0F-A399-3D98F3B95FD9}">
+                <ns63:textLayout xmlns:ns63="urn:pptxdsl:text-layout:v1" role="compact"/>
+              </a:ext>
+            </a:extLst>
           </a:bodyPr>
           <a:lstStyle/>
           <a:p>
@@ -33663,6 +35568,11 @@
         <p:txBody>
           <a:bodyPr wrap="square" anchor="ctr" lIns="0" rIns="0" tIns="0" bIns="0">
             <a:spAutoFit/>
+            <a:extLst>
+              <a:ext uri="{8AF73BB6-5E31-4F0F-A399-3D98F3B95FD9}">
+                <ns68:textLayout xmlns:ns68="urn:pptxdsl:text-layout:v1" role="compact"/>
+              </a:ext>
+            </a:extLst>
           </a:bodyPr>
           <a:lstStyle/>
           <a:p>
@@ -33774,6 +35684,11 @@
         <p:txBody>
           <a:bodyPr wrap="square" anchor="ctr" lIns="0" rIns="0" tIns="0" bIns="0">
             <a:spAutoFit/>
+            <a:extLst>
+              <a:ext uri="{8AF73BB6-5E31-4F0F-A399-3D98F3B95FD9}">
+                <ns73:textLayout xmlns:ns73="urn:pptxdsl:text-layout:v1" role="compact"/>
+              </a:ext>
+            </a:extLst>
           </a:bodyPr>
           <a:lstStyle/>
           <a:p>
@@ -33885,6 +35800,11 @@
         <p:txBody>
           <a:bodyPr wrap="square" anchor="ctr" lIns="0" rIns="0" tIns="0" bIns="0">
             <a:spAutoFit/>
+            <a:extLst>
+              <a:ext uri="{8AF73BB6-5E31-4F0F-A399-3D98F3B95FD9}">
+                <ns78:textLayout xmlns:ns78="urn:pptxdsl:text-layout:v1" role="compact"/>
+              </a:ext>
+            </a:extLst>
           </a:bodyPr>
           <a:lstStyle/>
           <a:p>
@@ -33996,6 +35916,11 @@
         <p:txBody>
           <a:bodyPr wrap="square" anchor="ctr" lIns="0" rIns="0" tIns="0" bIns="0">
             <a:spAutoFit/>
+            <a:extLst>
+              <a:ext uri="{8AF73BB6-5E31-4F0F-A399-3D98F3B95FD9}">
+                <ns83:textLayout xmlns:ns83="urn:pptxdsl:text-layout:v1" role="compact"/>
+              </a:ext>
+            </a:extLst>
           </a:bodyPr>
           <a:lstStyle/>
           <a:p>
@@ -34107,6 +36032,11 @@
         <p:txBody>
           <a:bodyPr wrap="square" anchor="ctr" lIns="0" rIns="0" tIns="0" bIns="0">
             <a:spAutoFit/>
+            <a:extLst>
+              <a:ext uri="{8AF73BB6-5E31-4F0F-A399-3D98F3B95FD9}">
+                <ns88:textLayout xmlns:ns88="urn:pptxdsl:text-layout:v1" role="compact"/>
+              </a:ext>
+            </a:extLst>
           </a:bodyPr>
           <a:lstStyle/>
           <a:p>
@@ -34185,6 +36115,11 @@
         <p:txBody>
           <a:bodyPr wrap="square" anchor="t" lIns="0" rIns="0" tIns="0" bIns="0">
             <a:spAutoFit/>
+            <a:extLst>
+              <a:ext uri="{8AF73BB6-5E31-4F0F-A399-3D98F3B95FD9}">
+                <ns94:textLayout xmlns:ns94="urn:pptxdsl:text-layout:v1" role="body"/>
+              </a:ext>
+            </a:extLst>
           </a:bodyPr>
           <a:lstStyle/>
           <a:p>
@@ -34262,6 +36197,11 @@
         <p:txBody>
           <a:bodyPr wrap="square" anchor="t" lIns="0" rIns="0" tIns="0" bIns="0">
             <a:spAutoFit/>
+            <a:extLst>
+              <a:ext uri="{8AF73BB6-5E31-4F0F-A399-3D98F3B95FD9}">
+                <ns99:textLayout xmlns:ns99="urn:pptxdsl:text-layout:v1" role="body"/>
+              </a:ext>
+            </a:extLst>
           </a:bodyPr>
           <a:lstStyle/>
           <a:p>
@@ -34347,6 +36287,11 @@
         <p:txBody>
           <a:bodyPr wrap="square" anchor="ctr" lIns="0" rIns="0" tIns="0" bIns="0">
             <a:spAutoFit/>
+            <a:extLst>
+              <a:ext uri="{8AF73BB6-5E31-4F0F-A399-3D98F3B95FD9}">
+                <ns104:textLayout xmlns:ns104="urn:pptxdsl:text-layout:v1" role="body"/>
+              </a:ext>
+            </a:extLst>
           </a:bodyPr>
           <a:lstStyle/>
           <a:p>
@@ -34388,6 +36333,11 @@
         <p:txBody>
           <a:bodyPr wrap="none" anchor="ctr" lIns="0" rIns="0" tIns="0" bIns="0">
             <a:spAutoFit/>
+            <a:extLst>
+              <a:ext uri="{8AF73BB6-5E31-4F0F-A399-3D98F3B95FD9}">
+                <ns109:textLayout xmlns:ns109="urn:pptxdsl:text-layout:v1" role="body"/>
+              </a:ext>
+            </a:extLst>
           </a:bodyPr>
           <a:lstStyle/>
           <a:p>
@@ -34502,6 +36452,11 @@
         <p:txBody>
           <a:bodyPr wrap="square" anchor="t" lIns="0" rIns="0" tIns="0" bIns="0">
             <a:spAutoFit/>
+            <a:extLst>
+              <a:ext uri="{8AF73BB6-5E31-4F0F-A399-3D98F3B95FD9}">
+                <ns2:textLayout xmlns:ns2="urn:pptxdsl:text-layout:v1" role="natural"/>
+              </a:ext>
+            </a:extLst>
           </a:bodyPr>
           <a:lstStyle/>
           <a:p>
@@ -34543,6 +36498,11 @@
         <p:txBody>
           <a:bodyPr wrap="square" anchor="t" lIns="0" rIns="0" tIns="0" bIns="0">
             <a:spAutoFit/>
+            <a:extLst>
+              <a:ext uri="{8AF73BB6-5E31-4F0F-A399-3D98F3B95FD9}">
+                <ns7:textLayout xmlns:ns7="urn:pptxdsl:text-layout:v1" role="natural"/>
+              </a:ext>
+            </a:extLst>
           </a:bodyPr>
           <a:lstStyle/>
           <a:p>
@@ -34584,6 +36544,11 @@
         <p:txBody>
           <a:bodyPr wrap="square" anchor="t" lIns="0" rIns="0" tIns="0" bIns="0">
             <a:spAutoFit/>
+            <a:extLst>
+              <a:ext uri="{8AF73BB6-5E31-4F0F-A399-3D98F3B95FD9}">
+                <ns12:textLayout xmlns:ns12="urn:pptxdsl:text-layout:v1" role="body"/>
+              </a:ext>
+            </a:extLst>
           </a:bodyPr>
           <a:lstStyle/>
           <a:p>
@@ -34649,6 +36614,11 @@
         <p:txBody>
           <a:bodyPr wrap="square" anchor="t" lIns="0" rIns="0" tIns="0" bIns="0">
             <a:spAutoFit/>
+            <a:extLst>
+              <a:ext uri="{8AF73BB6-5E31-4F0F-A399-3D98F3B95FD9}">
+                <ns17:textLayout xmlns:ns17="urn:pptxdsl:text-layout:v1" role="compact"/>
+              </a:ext>
+            </a:extLst>
           </a:bodyPr>
           <a:lstStyle/>
           <a:p>
@@ -34714,6 +36684,11 @@
         <p:txBody>
           <a:bodyPr wrap="square" anchor="t" lIns="0" rIns="0" tIns="0" bIns="0">
             <a:spAutoFit/>
+            <a:extLst>
+              <a:ext uri="{8AF73BB6-5E31-4F0F-A399-3D98F3B95FD9}">
+                <ns22:textLayout xmlns:ns22="urn:pptxdsl:text-layout:v1" role="compact"/>
+              </a:ext>
+            </a:extLst>
           </a:bodyPr>
           <a:lstStyle/>
           <a:p>
@@ -34779,6 +36754,11 @@
         <p:txBody>
           <a:bodyPr wrap="square" anchor="t" lIns="0" rIns="0" tIns="0" bIns="0">
             <a:spAutoFit/>
+            <a:extLst>
+              <a:ext uri="{8AF73BB6-5E31-4F0F-A399-3D98F3B95FD9}">
+                <ns27:textLayout xmlns:ns27="urn:pptxdsl:text-layout:v1" role="compact"/>
+              </a:ext>
+            </a:extLst>
           </a:bodyPr>
           <a:lstStyle/>
           <a:p>
@@ -34888,6 +36868,11 @@
         <p:txBody>
           <a:bodyPr wrap="square" anchor="t" lIns="0" rIns="0" tIns="0" bIns="0">
             <a:spAutoFit/>
+            <a:extLst>
+              <a:ext uri="{8AF73BB6-5E31-4F0F-A399-3D98F3B95FD9}">
+                <ns32:textLayout xmlns:ns32="urn:pptxdsl:text-layout:v1" role="compact"/>
+              </a:ext>
+            </a:extLst>
           </a:bodyPr>
           <a:lstStyle/>
           <a:p>
@@ -34953,6 +36938,11 @@
         <p:txBody>
           <a:bodyPr wrap="square" anchor="t" lIns="0" rIns="0" tIns="0" bIns="0">
             <a:spAutoFit/>
+            <a:extLst>
+              <a:ext uri="{8AF73BB6-5E31-4F0F-A399-3D98F3B95FD9}">
+                <ns37:textLayout xmlns:ns37="urn:pptxdsl:text-layout:v1" role="compact"/>
+              </a:ext>
+            </a:extLst>
           </a:bodyPr>
           <a:lstStyle/>
           <a:p>
@@ -35038,6 +37028,11 @@
         <p:txBody>
           <a:bodyPr wrap="square" anchor="t" lIns="0" rIns="0" tIns="0" bIns="0">
             <a:spAutoFit/>
+            <a:extLst>
+              <a:ext uri="{8AF73BB6-5E31-4F0F-A399-3D98F3B95FD9}">
+                <ns42:textLayout xmlns:ns42="urn:pptxdsl:text-layout:v1" role="compact"/>
+              </a:ext>
+            </a:extLst>
           </a:bodyPr>
           <a:lstStyle/>
           <a:p>
@@ -35079,6 +37074,11 @@
         <p:txBody>
           <a:bodyPr wrap="square" anchor="t" lIns="0" rIns="0" tIns="0" bIns="0">
             <a:spAutoFit/>
+            <a:extLst>
+              <a:ext uri="{8AF73BB6-5E31-4F0F-A399-3D98F3B95FD9}">
+                <ns47:textLayout xmlns:ns47="urn:pptxdsl:text-layout:v1" role="compact"/>
+              </a:ext>
+            </a:extLst>
           </a:bodyPr>
           <a:lstStyle/>
           <a:p>
@@ -35314,6 +37314,11 @@
         <p:txBody>
           <a:bodyPr wrap="square" anchor="t" lIns="0" rIns="0" tIns="0" bIns="0">
             <a:spAutoFit/>
+            <a:extLst>
+              <a:ext uri="{8AF73BB6-5E31-4F0F-A399-3D98F3B95FD9}">
+                <ns56:textLayout xmlns:ns56="urn:pptxdsl:text-layout:v1" role="compact"/>
+              </a:ext>
+            </a:extLst>
           </a:bodyPr>
           <a:lstStyle/>
           <a:p>
@@ -35355,6 +37360,11 @@
         <p:txBody>
           <a:bodyPr wrap="square" anchor="t" lIns="0" rIns="0" tIns="0" bIns="0">
             <a:spAutoFit/>
+            <a:extLst>
+              <a:ext uri="{8AF73BB6-5E31-4F0F-A399-3D98F3B95FD9}">
+                <ns61:textLayout xmlns:ns61="urn:pptxdsl:text-layout:v1" role="compact"/>
+              </a:ext>
+            </a:extLst>
           </a:bodyPr>
           <a:lstStyle/>
           <a:p>
@@ -35442,6 +37452,11 @@
         <p:txBody>
           <a:bodyPr wrap="square" anchor="t" lIns="0" rIns="0" tIns="0" bIns="0">
             <a:spAutoFit/>
+            <a:extLst>
+              <a:ext uri="{8AF73BB6-5E31-4F0F-A399-3D98F3B95FD9}">
+                <ns66:textLayout xmlns:ns66="urn:pptxdsl:text-layout:v1" role="compact"/>
+              </a:ext>
+            </a:extLst>
           </a:bodyPr>
           <a:lstStyle/>
           <a:p>
@@ -35483,6 +37498,11 @@
         <p:txBody>
           <a:bodyPr wrap="square" anchor="t" lIns="0" rIns="0" tIns="0" bIns="0">
             <a:spAutoFit/>
+            <a:extLst>
+              <a:ext uri="{8AF73BB6-5E31-4F0F-A399-3D98F3B95FD9}">
+                <ns71:textLayout xmlns:ns71="urn:pptxdsl:text-layout:v1" role="compact"/>
+              </a:ext>
+            </a:extLst>
           </a:bodyPr>
           <a:lstStyle/>
           <a:p>
@@ -35568,6 +37588,11 @@
         <p:txBody>
           <a:bodyPr wrap="square" anchor="t" lIns="0" rIns="0" tIns="0" bIns="0">
             <a:spAutoFit/>
+            <a:extLst>
+              <a:ext uri="{8AF73BB6-5E31-4F0F-A399-3D98F3B95FD9}">
+                <ns76:textLayout xmlns:ns76="urn:pptxdsl:text-layout:v1" role="compact"/>
+              </a:ext>
+            </a:extLst>
           </a:bodyPr>
           <a:lstStyle/>
           <a:p>
@@ -35609,6 +37634,11 @@
         <p:txBody>
           <a:bodyPr wrap="square" anchor="t" lIns="0" rIns="0" tIns="0" bIns="0">
             <a:spAutoFit/>
+            <a:extLst>
+              <a:ext uri="{8AF73BB6-5E31-4F0F-A399-3D98F3B95FD9}">
+                <ns81:textLayout xmlns:ns81="urn:pptxdsl:text-layout:v1" role="compact"/>
+              </a:ext>
+            </a:extLst>
           </a:bodyPr>
           <a:lstStyle/>
           <a:p>
@@ -35696,6 +37726,11 @@
         <p:txBody>
           <a:bodyPr wrap="square" anchor="t" lIns="0" rIns="0" tIns="0" bIns="0">
             <a:spAutoFit/>
+            <a:extLst>
+              <a:ext uri="{8AF73BB6-5E31-4F0F-A399-3D98F3B95FD9}">
+                <ns86:textLayout xmlns:ns86="urn:pptxdsl:text-layout:v1" role="compact"/>
+              </a:ext>
+            </a:extLst>
           </a:bodyPr>
           <a:lstStyle/>
           <a:p>
@@ -35737,6 +37772,11 @@
         <p:txBody>
           <a:bodyPr wrap="square" anchor="t" lIns="0" rIns="0" tIns="0" bIns="0">
             <a:spAutoFit/>
+            <a:extLst>
+              <a:ext uri="{8AF73BB6-5E31-4F0F-A399-3D98F3B95FD9}">
+                <ns91:textLayout xmlns:ns91="urn:pptxdsl:text-layout:v1" role="compact"/>
+              </a:ext>
+            </a:extLst>
           </a:bodyPr>
           <a:lstStyle/>
           <a:p>
@@ -35824,6 +37864,11 @@
         <p:txBody>
           <a:bodyPr wrap="square" anchor="t" lIns="0" rIns="0" tIns="0" bIns="0">
             <a:spAutoFit/>
+            <a:extLst>
+              <a:ext uri="{8AF73BB6-5E31-4F0F-A399-3D98F3B95FD9}">
+                <ns96:textLayout xmlns:ns96="urn:pptxdsl:text-layout:v1" role="compact"/>
+              </a:ext>
+            </a:extLst>
           </a:bodyPr>
           <a:lstStyle/>
           <a:p>
@@ -35865,6 +37910,11 @@
         <p:txBody>
           <a:bodyPr wrap="square" anchor="t" lIns="0" rIns="0" tIns="0" bIns="0">
             <a:spAutoFit/>
+            <a:extLst>
+              <a:ext uri="{8AF73BB6-5E31-4F0F-A399-3D98F3B95FD9}">
+                <ns101:textLayout xmlns:ns101="urn:pptxdsl:text-layout:v1" role="compact"/>
+              </a:ext>
+            </a:extLst>
           </a:bodyPr>
           <a:lstStyle/>
           <a:p>
@@ -35950,6 +38000,11 @@
         <p:txBody>
           <a:bodyPr wrap="square" anchor="t" lIns="0" rIns="0" tIns="0" bIns="0">
             <a:spAutoFit/>
+            <a:extLst>
+              <a:ext uri="{8AF73BB6-5E31-4F0F-A399-3D98F3B95FD9}">
+                <ns106:textLayout xmlns:ns106="urn:pptxdsl:text-layout:v1" role="compact"/>
+              </a:ext>
+            </a:extLst>
           </a:bodyPr>
           <a:lstStyle/>
           <a:p>
@@ -35991,6 +38046,11 @@
         <p:txBody>
           <a:bodyPr wrap="square" anchor="t" lIns="0" rIns="0" tIns="0" bIns="0">
             <a:spAutoFit/>
+            <a:extLst>
+              <a:ext uri="{8AF73BB6-5E31-4F0F-A399-3D98F3B95FD9}">
+                <ns111:textLayout xmlns:ns111="urn:pptxdsl:text-layout:v1" role="compact"/>
+              </a:ext>
+            </a:extLst>
           </a:bodyPr>
           <a:lstStyle/>
           <a:p>
@@ -36226,6 +38286,11 @@
         <p:txBody>
           <a:bodyPr wrap="square" anchor="t" lIns="0" rIns="0" tIns="0" bIns="0">
             <a:spAutoFit/>
+            <a:extLst>
+              <a:ext uri="{8AF73BB6-5E31-4F0F-A399-3D98F3B95FD9}">
+                <ns120:textLayout xmlns:ns120="urn:pptxdsl:text-layout:v1" role="compact"/>
+              </a:ext>
+            </a:extLst>
           </a:bodyPr>
           <a:lstStyle/>
           <a:p>
@@ -36267,6 +38332,11 @@
         <p:txBody>
           <a:bodyPr wrap="square" anchor="t" lIns="0" rIns="0" tIns="0" bIns="0">
             <a:spAutoFit/>
+            <a:extLst>
+              <a:ext uri="{8AF73BB6-5E31-4F0F-A399-3D98F3B95FD9}">
+                <ns125:textLayout xmlns:ns125="urn:pptxdsl:text-layout:v1" role="compact"/>
+              </a:ext>
+            </a:extLst>
           </a:bodyPr>
           <a:lstStyle/>
           <a:p>
@@ -36354,6 +38424,11 @@
         <p:txBody>
           <a:bodyPr wrap="square" anchor="t" lIns="0" rIns="0" tIns="0" bIns="0">
             <a:spAutoFit/>
+            <a:extLst>
+              <a:ext uri="{8AF73BB6-5E31-4F0F-A399-3D98F3B95FD9}">
+                <ns130:textLayout xmlns:ns130="urn:pptxdsl:text-layout:v1" role="compact"/>
+              </a:ext>
+            </a:extLst>
           </a:bodyPr>
           <a:lstStyle/>
           <a:p>
@@ -36395,6 +38470,11 @@
         <p:txBody>
           <a:bodyPr wrap="square" anchor="t" lIns="0" rIns="0" tIns="0" bIns="0">
             <a:spAutoFit/>
+            <a:extLst>
+              <a:ext uri="{8AF73BB6-5E31-4F0F-A399-3D98F3B95FD9}">
+                <ns135:textLayout xmlns:ns135="urn:pptxdsl:text-layout:v1" role="compact"/>
+              </a:ext>
+            </a:extLst>
           </a:bodyPr>
           <a:lstStyle/>
           <a:p>
@@ -36480,6 +38560,11 @@
         <p:txBody>
           <a:bodyPr wrap="square" anchor="t" lIns="0" rIns="0" tIns="0" bIns="0">
             <a:spAutoFit/>
+            <a:extLst>
+              <a:ext uri="{8AF73BB6-5E31-4F0F-A399-3D98F3B95FD9}">
+                <ns140:textLayout xmlns:ns140="urn:pptxdsl:text-layout:v1" role="compact"/>
+              </a:ext>
+            </a:extLst>
           </a:bodyPr>
           <a:lstStyle/>
           <a:p>
@@ -36521,6 +38606,11 @@
         <p:txBody>
           <a:bodyPr wrap="square" anchor="t" lIns="0" rIns="0" tIns="0" bIns="0">
             <a:spAutoFit/>
+            <a:extLst>
+              <a:ext uri="{8AF73BB6-5E31-4F0F-A399-3D98F3B95FD9}">
+                <ns145:textLayout xmlns:ns145="urn:pptxdsl:text-layout:v1" role="compact"/>
+              </a:ext>
+            </a:extLst>
           </a:bodyPr>
           <a:lstStyle/>
           <a:p>
@@ -36608,6 +38698,11 @@
         <p:txBody>
           <a:bodyPr wrap="square" anchor="t" lIns="0" rIns="0" tIns="0" bIns="0">
             <a:spAutoFit/>
+            <a:extLst>
+              <a:ext uri="{8AF73BB6-5E31-4F0F-A399-3D98F3B95FD9}">
+                <ns150:textLayout xmlns:ns150="urn:pptxdsl:text-layout:v1" role="compact"/>
+              </a:ext>
+            </a:extLst>
           </a:bodyPr>
           <a:lstStyle/>
           <a:p>
@@ -36649,6 +38744,11 @@
         <p:txBody>
           <a:bodyPr wrap="square" anchor="t" lIns="0" rIns="0" tIns="0" bIns="0">
             <a:spAutoFit/>
+            <a:extLst>
+              <a:ext uri="{8AF73BB6-5E31-4F0F-A399-3D98F3B95FD9}">
+                <ns155:textLayout xmlns:ns155="urn:pptxdsl:text-layout:v1" role="compact"/>
+              </a:ext>
+            </a:extLst>
           </a:bodyPr>
           <a:lstStyle/>
           <a:p>
@@ -36736,6 +38836,11 @@
         <p:txBody>
           <a:bodyPr wrap="square" anchor="t" lIns="0" rIns="0" tIns="0" bIns="0">
             <a:spAutoFit/>
+            <a:extLst>
+              <a:ext uri="{8AF73BB6-5E31-4F0F-A399-3D98F3B95FD9}">
+                <ns160:textLayout xmlns:ns160="urn:pptxdsl:text-layout:v1" role="compact"/>
+              </a:ext>
+            </a:extLst>
           </a:bodyPr>
           <a:lstStyle/>
           <a:p>
@@ -36777,6 +38882,11 @@
         <p:txBody>
           <a:bodyPr wrap="square" anchor="t" lIns="0" rIns="0" tIns="0" bIns="0">
             <a:spAutoFit/>
+            <a:extLst>
+              <a:ext uri="{8AF73BB6-5E31-4F0F-A399-3D98F3B95FD9}">
+                <ns165:textLayout xmlns:ns165="urn:pptxdsl:text-layout:v1" role="compact"/>
+              </a:ext>
+            </a:extLst>
           </a:bodyPr>
           <a:lstStyle/>
           <a:p>
@@ -36862,6 +38972,11 @@
         <p:txBody>
           <a:bodyPr wrap="square" anchor="ctr" lIns="0" rIns="0" tIns="0" bIns="0">
             <a:spAutoFit/>
+            <a:extLst>
+              <a:ext uri="{8AF73BB6-5E31-4F0F-A399-3D98F3B95FD9}">
+                <ns170:textLayout xmlns:ns170="urn:pptxdsl:text-layout:v1" role="body"/>
+              </a:ext>
+            </a:extLst>
           </a:bodyPr>
           <a:lstStyle/>
           <a:p>
@@ -36903,6 +39018,11 @@
         <p:txBody>
           <a:bodyPr wrap="none" anchor="ctr" lIns="0" rIns="0" tIns="0" bIns="0">
             <a:spAutoFit/>
+            <a:extLst>
+              <a:ext uri="{8AF73BB6-5E31-4F0F-A399-3D98F3B95FD9}">
+                <ns175:textLayout xmlns:ns175="urn:pptxdsl:text-layout:v1" role="body"/>
+              </a:ext>
+            </a:extLst>
           </a:bodyPr>
           <a:lstStyle/>
           <a:p>
@@ -37017,6 +39137,11 @@
         <p:txBody>
           <a:bodyPr wrap="square" anchor="t" lIns="0" rIns="0" tIns="0" bIns="0">
             <a:spAutoFit/>
+            <a:extLst>
+              <a:ext uri="{8AF73BB6-5E31-4F0F-A399-3D98F3B95FD9}">
+                <ns2:textLayout xmlns:ns2="urn:pptxdsl:text-layout:v1" role="natural"/>
+              </a:ext>
+            </a:extLst>
           </a:bodyPr>
           <a:lstStyle/>
           <a:p>
@@ -37058,6 +39183,11 @@
         <p:txBody>
           <a:bodyPr wrap="square" anchor="t" lIns="0" rIns="0" tIns="0" bIns="0">
             <a:spAutoFit/>
+            <a:extLst>
+              <a:ext uri="{8AF73BB6-5E31-4F0F-A399-3D98F3B95FD9}">
+                <ns7:textLayout xmlns:ns7="urn:pptxdsl:text-layout:v1" role="natural"/>
+              </a:ext>
+            </a:extLst>
           </a:bodyPr>
           <a:lstStyle/>
           <a:p>
@@ -37099,6 +39229,11 @@
         <p:txBody>
           <a:bodyPr wrap="square" anchor="t" lIns="0" rIns="0" tIns="0" bIns="0">
             <a:spAutoFit/>
+            <a:extLst>
+              <a:ext uri="{8AF73BB6-5E31-4F0F-A399-3D98F3B95FD9}">
+                <ns12:textLayout xmlns:ns12="urn:pptxdsl:text-layout:v1" role="body"/>
+              </a:ext>
+            </a:extLst>
           </a:bodyPr>
           <a:lstStyle/>
           <a:p>
@@ -37140,6 +39275,11 @@
         <p:txBody>
           <a:bodyPr wrap="square" anchor="ctr" lIns="0" rIns="0" tIns="0" bIns="0">
             <a:spAutoFit/>
+            <a:extLst>
+              <a:ext uri="{8AF73BB6-5E31-4F0F-A399-3D98F3B95FD9}">
+                <ns17:textLayout xmlns:ns17="urn:pptxdsl:text-layout:v1" role="natural"/>
+              </a:ext>
+            </a:extLst>
           </a:bodyPr>
           <a:lstStyle/>
           <a:p>
@@ -37171,7 +39311,7 @@
         <p:spPr>
           <a:xfrm>
             <a:off x="1645920" y="2111756"/>
-            <a:ext cx="939546" cy="841248"/>
+            <a:ext cx="939545" cy="841248"/>
           </a:xfrm>
           <a:prstGeom prst="rect">
             <a:avLst/>
@@ -37217,7 +39357,7 @@
         <p:spPr>
           <a:xfrm>
             <a:off x="1691640" y="2221484"/>
-            <a:ext cx="848106" cy="403799"/>
+            <a:ext cx="848105" cy="403799"/>
           </a:xfrm>
           <a:prstGeom prst="rect">
             <a:avLst/>
@@ -37227,6 +39367,11 @@
         <p:txBody>
           <a:bodyPr wrap="square" anchor="ctr" lIns="0" rIns="0" tIns="0" bIns="0">
             <a:spAutoFit/>
+            <a:extLst>
+              <a:ext uri="{8AF73BB6-5E31-4F0F-A399-3D98F3B95FD9}">
+                <ns22:textLayout xmlns:ns22="urn:pptxdsl:text-layout:v1" role="compact"/>
+              </a:ext>
+            </a:extLst>
           </a:bodyPr>
           <a:lstStyle/>
           <a:p>
@@ -37258,7 +39403,7 @@
         <p:spPr>
           <a:xfrm>
             <a:off x="1682496" y="2724404"/>
-            <a:ext cx="866394" cy="146304"/>
+            <a:ext cx="866393" cy="146304"/>
           </a:xfrm>
           <a:prstGeom prst="rect">
             <a:avLst/>
@@ -37268,6 +39413,11 @@
         <p:txBody>
           <a:bodyPr wrap="square" anchor="t" lIns="0" rIns="0" tIns="0" bIns="0">
             <a:spAutoFit/>
+            <a:extLst>
+              <a:ext uri="{8AF73BB6-5E31-4F0F-A399-3D98F3B95FD9}">
+                <ns27:textLayout xmlns:ns27="urn:pptxdsl:text-layout:v1" role="body"/>
+              </a:ext>
+            </a:extLst>
           </a:bodyPr>
           <a:lstStyle/>
           <a:p>
@@ -37298,8 +39448,8 @@
         </p:nvSpPr>
         <p:spPr>
           <a:xfrm>
-            <a:off x="2585466" y="2111756"/>
-            <a:ext cx="939546" cy="841248"/>
+            <a:off x="2585465" y="2111756"/>
+            <a:ext cx="939545" cy="841248"/>
           </a:xfrm>
           <a:prstGeom prst="rect">
             <a:avLst/>
@@ -37344,8 +39494,8 @@
         </p:nvSpPr>
         <p:spPr>
           <a:xfrm>
-            <a:off x="2631186" y="2221484"/>
-            <a:ext cx="848106" cy="403799"/>
+            <a:off x="2631185" y="2221484"/>
+            <a:ext cx="848105" cy="403799"/>
           </a:xfrm>
           <a:prstGeom prst="rect">
             <a:avLst/>
@@ -37355,6 +39505,11 @@
         <p:txBody>
           <a:bodyPr wrap="square" anchor="ctr" lIns="0" rIns="0" tIns="0" bIns="0">
             <a:spAutoFit/>
+            <a:extLst>
+              <a:ext uri="{8AF73BB6-5E31-4F0F-A399-3D98F3B95FD9}">
+                <ns32:textLayout xmlns:ns32="urn:pptxdsl:text-layout:v1" role="compact"/>
+              </a:ext>
+            </a:extLst>
           </a:bodyPr>
           <a:lstStyle/>
           <a:p>
@@ -37385,8 +39540,8 @@
         </p:nvSpPr>
         <p:spPr>
           <a:xfrm>
-            <a:off x="2622042" y="2724404"/>
-            <a:ext cx="866394" cy="146304"/>
+            <a:off x="2622041" y="2724404"/>
+            <a:ext cx="866393" cy="146304"/>
           </a:xfrm>
           <a:prstGeom prst="rect">
             <a:avLst/>
@@ -37396,6 +39551,11 @@
         <p:txBody>
           <a:bodyPr wrap="square" anchor="t" lIns="0" rIns="0" tIns="0" bIns="0">
             <a:spAutoFit/>
+            <a:extLst>
+              <a:ext uri="{8AF73BB6-5E31-4F0F-A399-3D98F3B95FD9}">
+                <ns37:textLayout xmlns:ns37="urn:pptxdsl:text-layout:v1" role="body"/>
+              </a:ext>
+            </a:extLst>
           </a:bodyPr>
           <a:lstStyle/>
           <a:p>
@@ -37426,7 +39586,7 @@
         </p:nvSpPr>
         <p:spPr>
           <a:xfrm>
-            <a:off x="3525012" y="2111756"/>
+            <a:off x="3525011" y="2111756"/>
             <a:ext cx="1105738" cy="841248"/>
           </a:xfrm>
           <a:prstGeom prst="rect">
@@ -37472,7 +39632,7 @@
         </p:nvSpPr>
         <p:spPr>
           <a:xfrm>
-            <a:off x="3570732" y="2221484"/>
+            <a:off x="3570731" y="2221484"/>
             <a:ext cx="1014298" cy="403799"/>
           </a:xfrm>
           <a:prstGeom prst="rect">
@@ -37483,6 +39643,11 @@
         <p:txBody>
           <a:bodyPr wrap="square" anchor="ctr" lIns="0" rIns="0" tIns="0" bIns="0">
             <a:spAutoFit/>
+            <a:extLst>
+              <a:ext uri="{8AF73BB6-5E31-4F0F-A399-3D98F3B95FD9}">
+                <ns42:textLayout xmlns:ns42="urn:pptxdsl:text-layout:v1" role="compact"/>
+              </a:ext>
+            </a:extLst>
           </a:bodyPr>
           <a:lstStyle/>
           <a:p>
@@ -37513,7 +39678,7 @@
         </p:nvSpPr>
         <p:spPr>
           <a:xfrm>
-            <a:off x="3561588" y="2724404"/>
+            <a:off x="3561587" y="2724404"/>
             <a:ext cx="1032586" cy="146304"/>
           </a:xfrm>
           <a:prstGeom prst="rect">
@@ -37524,6 +39689,11 @@
         <p:txBody>
           <a:bodyPr wrap="square" anchor="t" lIns="0" rIns="0" tIns="0" bIns="0">
             <a:spAutoFit/>
+            <a:extLst>
+              <a:ext uri="{8AF73BB6-5E31-4F0F-A399-3D98F3B95FD9}">
+                <ns47:textLayout xmlns:ns47="urn:pptxdsl:text-layout:v1" role="body"/>
+              </a:ext>
+            </a:extLst>
           </a:bodyPr>
           <a:lstStyle/>
           <a:p>
@@ -37611,6 +39781,11 @@
         <p:txBody>
           <a:bodyPr wrap="square" anchor="ctr" lIns="0" rIns="0" tIns="0" bIns="0">
             <a:spAutoFit/>
+            <a:extLst>
+              <a:ext uri="{8AF73BB6-5E31-4F0F-A399-3D98F3B95FD9}">
+                <ns52:textLayout xmlns:ns52="urn:pptxdsl:text-layout:v1" role="compact"/>
+              </a:ext>
+            </a:extLst>
           </a:bodyPr>
           <a:lstStyle/>
           <a:p>
@@ -37652,6 +39827,11 @@
         <p:txBody>
           <a:bodyPr wrap="square" anchor="t" lIns="0" rIns="0" tIns="0" bIns="0">
             <a:spAutoFit/>
+            <a:extLst>
+              <a:ext uri="{8AF73BB6-5E31-4F0F-A399-3D98F3B95FD9}">
+                <ns57:textLayout xmlns:ns57="urn:pptxdsl:text-layout:v1" role="body"/>
+              </a:ext>
+            </a:extLst>
           </a:bodyPr>
           <a:lstStyle/>
           <a:p>
@@ -37739,6 +39919,11 @@
         <p:txBody>
           <a:bodyPr wrap="square" anchor="ctr" lIns="0" rIns="0" tIns="0" bIns="0">
             <a:spAutoFit/>
+            <a:extLst>
+              <a:ext uri="{8AF73BB6-5E31-4F0F-A399-3D98F3B95FD9}">
+                <ns62:textLayout xmlns:ns62="urn:pptxdsl:text-layout:v1" role="compact"/>
+              </a:ext>
+            </a:extLst>
           </a:bodyPr>
           <a:lstStyle/>
           <a:p>
@@ -37780,6 +39965,11 @@
         <p:txBody>
           <a:bodyPr wrap="square" anchor="t" lIns="0" rIns="0" tIns="0" bIns="0">
             <a:spAutoFit/>
+            <a:extLst>
+              <a:ext uri="{8AF73BB6-5E31-4F0F-A399-3D98F3B95FD9}">
+                <ns67:textLayout xmlns:ns67="urn:pptxdsl:text-layout:v1" role="body"/>
+              </a:ext>
+            </a:extLst>
           </a:bodyPr>
           <a:lstStyle/>
           <a:p>
@@ -37811,7 +40001,7 @@
         <p:spPr>
           <a:xfrm>
             <a:off x="6326276" y="2111756"/>
-            <a:ext cx="939546" cy="841248"/>
+            <a:ext cx="939545" cy="841248"/>
           </a:xfrm>
           <a:prstGeom prst="rect">
             <a:avLst/>
@@ -37857,7 +40047,7 @@
         <p:spPr>
           <a:xfrm>
             <a:off x="6371996" y="2221484"/>
-            <a:ext cx="848106" cy="403799"/>
+            <a:ext cx="848105" cy="403799"/>
           </a:xfrm>
           <a:prstGeom prst="rect">
             <a:avLst/>
@@ -37867,6 +40057,11 @@
         <p:txBody>
           <a:bodyPr wrap="square" anchor="ctr" lIns="0" rIns="0" tIns="0" bIns="0">
             <a:spAutoFit/>
+            <a:extLst>
+              <a:ext uri="{8AF73BB6-5E31-4F0F-A399-3D98F3B95FD9}">
+                <ns72:textLayout xmlns:ns72="urn:pptxdsl:text-layout:v1" role="compact"/>
+              </a:ext>
+            </a:extLst>
           </a:bodyPr>
           <a:lstStyle/>
           <a:p>
@@ -37898,7 +40093,7 @@
         <p:spPr>
           <a:xfrm>
             <a:off x="6362852" y="2724404"/>
-            <a:ext cx="866394" cy="146304"/>
+            <a:ext cx="866393" cy="146304"/>
           </a:xfrm>
           <a:prstGeom prst="rect">
             <a:avLst/>
@@ -37908,6 +40103,11 @@
         <p:txBody>
           <a:bodyPr wrap="square" anchor="t" lIns="0" rIns="0" tIns="0" bIns="0">
             <a:spAutoFit/>
+            <a:extLst>
+              <a:ext uri="{8AF73BB6-5E31-4F0F-A399-3D98F3B95FD9}">
+                <ns77:textLayout xmlns:ns77="urn:pptxdsl:text-layout:v1" role="body"/>
+              </a:ext>
+            </a:extLst>
           </a:bodyPr>
           <a:lstStyle/>
           <a:p>
@@ -37995,6 +40195,11 @@
         <p:txBody>
           <a:bodyPr wrap="square" anchor="ctr" lIns="0" rIns="0" tIns="0" bIns="0">
             <a:spAutoFit/>
+            <a:extLst>
+              <a:ext uri="{8AF73BB6-5E31-4F0F-A399-3D98F3B95FD9}">
+                <ns82:textLayout xmlns:ns82="urn:pptxdsl:text-layout:v1" role="compact"/>
+              </a:ext>
+            </a:extLst>
           </a:bodyPr>
           <a:lstStyle/>
           <a:p>
@@ -38036,6 +40241,11 @@
         <p:txBody>
           <a:bodyPr wrap="square" anchor="t" lIns="0" rIns="0" tIns="0" bIns="0">
             <a:spAutoFit/>
+            <a:extLst>
+              <a:ext uri="{8AF73BB6-5E31-4F0F-A399-3D98F3B95FD9}">
+                <ns87:textLayout xmlns:ns87="urn:pptxdsl:text-layout:v1" role="body"/>
+              </a:ext>
+            </a:extLst>
           </a:bodyPr>
           <a:lstStyle/>
           <a:p>
@@ -38113,6 +40323,11 @@
         <p:txBody>
           <a:bodyPr wrap="square" anchor="t" lIns="0" rIns="0" tIns="0" bIns="0">
             <a:spAutoFit/>
+            <a:extLst>
+              <a:ext uri="{8AF73BB6-5E31-4F0F-A399-3D98F3B95FD9}">
+                <ns92:textLayout xmlns:ns92="urn:pptxdsl:text-layout:v1" role="natural"/>
+              </a:ext>
+            </a:extLst>
           </a:bodyPr>
           <a:lstStyle/>
           <a:p>
@@ -38154,6 +40369,11 @@
         <p:txBody>
           <a:bodyPr wrap="square" anchor="t" lIns="0" rIns="0" tIns="0" bIns="0">
             <a:spAutoFit/>
+            <a:extLst>
+              <a:ext uri="{8AF73BB6-5E31-4F0F-A399-3D98F3B95FD9}">
+                <ns97:textLayout xmlns:ns97="urn:pptxdsl:text-layout:v1" role="compact"/>
+              </a:ext>
+            </a:extLst>
           </a:bodyPr>
           <a:lstStyle/>
           <a:p>
@@ -38231,6 +40451,11 @@
         <p:txBody>
           <a:bodyPr wrap="square" anchor="t" lIns="0" rIns="0" tIns="0" bIns="0">
             <a:spAutoFit/>
+            <a:extLst>
+              <a:ext uri="{8AF73BB6-5E31-4F0F-A399-3D98F3B95FD9}">
+                <ns102:textLayout xmlns:ns102="urn:pptxdsl:text-layout:v1" role="natural"/>
+              </a:ext>
+            </a:extLst>
           </a:bodyPr>
           <a:lstStyle/>
           <a:p>
@@ -38272,6 +40497,11 @@
         <p:txBody>
           <a:bodyPr wrap="square" anchor="t" lIns="0" rIns="0" tIns="0" bIns="0">
             <a:spAutoFit/>
+            <a:extLst>
+              <a:ext uri="{8AF73BB6-5E31-4F0F-A399-3D98F3B95FD9}">
+                <ns107:textLayout xmlns:ns107="urn:pptxdsl:text-layout:v1" role="compact"/>
+              </a:ext>
+            </a:extLst>
           </a:bodyPr>
           <a:lstStyle/>
           <a:p>
@@ -38349,6 +40579,11 @@
         <p:txBody>
           <a:bodyPr wrap="square" anchor="t" lIns="0" rIns="0" tIns="0" bIns="0">
             <a:spAutoFit/>
+            <a:extLst>
+              <a:ext uri="{8AF73BB6-5E31-4F0F-A399-3D98F3B95FD9}">
+                <ns112:textLayout xmlns:ns112="urn:pptxdsl:text-layout:v1" role="natural"/>
+              </a:ext>
+            </a:extLst>
           </a:bodyPr>
           <a:lstStyle/>
           <a:p>
@@ -38390,6 +40625,11 @@
         <p:txBody>
           <a:bodyPr wrap="square" anchor="t" lIns="0" rIns="0" tIns="0" bIns="0">
             <a:spAutoFit/>
+            <a:extLst>
+              <a:ext uri="{8AF73BB6-5E31-4F0F-A399-3D98F3B95FD9}">
+                <ns117:textLayout xmlns:ns117="urn:pptxdsl:text-layout:v1" role="compact"/>
+              </a:ext>
+            </a:extLst>
           </a:bodyPr>
           <a:lstStyle/>
           <a:p>
@@ -38475,6 +40715,11 @@
         <p:txBody>
           <a:bodyPr wrap="square" anchor="ctr" lIns="0" rIns="0" tIns="0" bIns="0">
             <a:spAutoFit/>
+            <a:extLst>
+              <a:ext uri="{8AF73BB6-5E31-4F0F-A399-3D98F3B95FD9}">
+                <ns122:textLayout xmlns:ns122="urn:pptxdsl:text-layout:v1" role="body"/>
+              </a:ext>
+            </a:extLst>
           </a:bodyPr>
           <a:lstStyle/>
           <a:p>
@@ -38516,6 +40761,11 @@
         <p:txBody>
           <a:bodyPr wrap="none" anchor="ctr" lIns="0" rIns="0" tIns="0" bIns="0">
             <a:spAutoFit/>
+            <a:extLst>
+              <a:ext uri="{8AF73BB6-5E31-4F0F-A399-3D98F3B95FD9}">
+                <ns127:textLayout xmlns:ns127="urn:pptxdsl:text-layout:v1" role="body"/>
+              </a:ext>
+            </a:extLst>
           </a:bodyPr>
           <a:lstStyle/>
           <a:p>
@@ -38630,6 +40880,11 @@
         <p:txBody>
           <a:bodyPr wrap="square" anchor="t" lIns="0" rIns="0" tIns="0" bIns="0">
             <a:spAutoFit/>
+            <a:extLst>
+              <a:ext uri="{8AF73BB6-5E31-4F0F-A399-3D98F3B95FD9}">
+                <ns2:textLayout xmlns:ns2="urn:pptxdsl:text-layout:v1" role="natural"/>
+              </a:ext>
+            </a:extLst>
           </a:bodyPr>
           <a:lstStyle/>
           <a:p>
@@ -38671,6 +40926,11 @@
         <p:txBody>
           <a:bodyPr wrap="square" anchor="t" lIns="0" rIns="0" tIns="0" bIns="0">
             <a:spAutoFit/>
+            <a:extLst>
+              <a:ext uri="{8AF73BB6-5E31-4F0F-A399-3D98F3B95FD9}">
+                <ns7:textLayout xmlns:ns7="urn:pptxdsl:text-layout:v1" role="natural"/>
+              </a:ext>
+            </a:extLst>
           </a:bodyPr>
           <a:lstStyle/>
           <a:p>
@@ -38712,6 +40972,11 @@
         <p:txBody>
           <a:bodyPr wrap="square" anchor="t" lIns="0" rIns="0" tIns="0" bIns="0">
             <a:spAutoFit/>
+            <a:extLst>
+              <a:ext uri="{8AF73BB6-5E31-4F0F-A399-3D98F3B95FD9}">
+                <ns12:textLayout xmlns:ns12="urn:pptxdsl:text-layout:v1" role="body"/>
+              </a:ext>
+            </a:extLst>
           </a:bodyPr>
           <a:lstStyle/>
           <a:p>
@@ -38797,6 +41062,11 @@
         <p:txBody>
           <a:bodyPr wrap="square" anchor="t" lIns="0" rIns="0" tIns="0" bIns="0">
             <a:spAutoFit/>
+            <a:extLst>
+              <a:ext uri="{8AF73BB6-5E31-4F0F-A399-3D98F3B95FD9}">
+                <ns17:textLayout xmlns:ns17="urn:pptxdsl:text-layout:v1" role="natural"/>
+              </a:ext>
+            </a:extLst>
           </a:bodyPr>
           <a:lstStyle/>
           <a:p>
@@ -38838,6 +41108,11 @@
         <p:txBody>
           <a:bodyPr wrap="none" anchor="t" lIns="0" rIns="0" tIns="0" bIns="0">
             <a:spAutoFit/>
+            <a:extLst>
+              <a:ext uri="{8AF73BB6-5E31-4F0F-A399-3D98F3B95FD9}">
+                <ns22:textLayout xmlns:ns22="urn:pptxdsl:text-layout:v1" role="compact"/>
+              </a:ext>
+            </a:extLst>
           </a:bodyPr>
           <a:lstStyle/>
           <a:p>
@@ -38951,6 +41226,11 @@
         <p:txBody>
           <a:bodyPr wrap="square" anchor="t" lIns="0" rIns="0" tIns="0" bIns="0">
             <a:spAutoFit/>
+            <a:extLst>
+              <a:ext uri="{8AF73BB6-5E31-4F0F-A399-3D98F3B95FD9}">
+                <ns35:textLayout xmlns:ns35="urn:pptxdsl:text-layout:v1" role="natural"/>
+              </a:ext>
+            </a:extLst>
           </a:bodyPr>
           <a:lstStyle/>
           <a:p>
@@ -38992,6 +41272,11 @@
         <p:txBody>
           <a:bodyPr wrap="none" anchor="t" lIns="0" rIns="0" tIns="0" bIns="0">
             <a:spAutoFit/>
+            <a:extLst>
+              <a:ext uri="{8AF73BB6-5E31-4F0F-A399-3D98F3B95FD9}">
+                <ns40:textLayout xmlns:ns40="urn:pptxdsl:text-layout:v1" role="compact"/>
+              </a:ext>
+            </a:extLst>
           </a:bodyPr>
           <a:lstStyle/>
           <a:p>
@@ -39069,6 +41354,11 @@
         <p:txBody>
           <a:bodyPr wrap="square" anchor="t" lIns="0" rIns="0" tIns="0" bIns="0">
             <a:spAutoFit/>
+            <a:extLst>
+              <a:ext uri="{8AF73BB6-5E31-4F0F-A399-3D98F3B95FD9}">
+                <ns49:textLayout xmlns:ns49="urn:pptxdsl:text-layout:v1" role="natural"/>
+              </a:ext>
+            </a:extLst>
           </a:bodyPr>
           <a:lstStyle/>
           <a:p>
@@ -39154,6 +41444,11 @@
         <p:txBody>
           <a:bodyPr wrap="square" anchor="t" lIns="0" rIns="0" tIns="0" bIns="0">
             <a:spAutoFit/>
+            <a:extLst>
+              <a:ext uri="{8AF73BB6-5E31-4F0F-A399-3D98F3B95FD9}">
+                <ns54:textLayout xmlns:ns54="urn:pptxdsl:text-layout:v1" role="natural"/>
+              </a:ext>
+            </a:extLst>
           </a:bodyPr>
           <a:lstStyle/>
           <a:p>
@@ -39195,6 +41490,11 @@
         <p:txBody>
           <a:bodyPr wrap="square" anchor="t" lIns="0" rIns="0" tIns="0" bIns="0">
             <a:spAutoFit/>
+            <a:extLst>
+              <a:ext uri="{8AF73BB6-5E31-4F0F-A399-3D98F3B95FD9}">
+                <ns59:textLayout xmlns:ns59="urn:pptxdsl:text-layout:v1" role="body"/>
+              </a:ext>
+            </a:extLst>
           </a:bodyPr>
           <a:lstStyle/>
           <a:p>
@@ -39280,6 +41580,11 @@
         <p:txBody>
           <a:bodyPr wrap="square" anchor="t" lIns="0" rIns="0" tIns="0" bIns="0">
             <a:spAutoFit/>
+            <a:extLst>
+              <a:ext uri="{8AF73BB6-5E31-4F0F-A399-3D98F3B95FD9}">
+                <ns64:textLayout xmlns:ns64="urn:pptxdsl:text-layout:v1" role="natural"/>
+              </a:ext>
+            </a:extLst>
           </a:bodyPr>
           <a:lstStyle/>
           <a:p>
@@ -39321,6 +41626,11 @@
         <p:txBody>
           <a:bodyPr wrap="square" anchor="t" lIns="0" rIns="0" tIns="0" bIns="0">
             <a:spAutoFit/>
+            <a:extLst>
+              <a:ext uri="{8AF73BB6-5E31-4F0F-A399-3D98F3B95FD9}">
+                <ns69:textLayout xmlns:ns69="urn:pptxdsl:text-layout:v1" role="body"/>
+              </a:ext>
+            </a:extLst>
           </a:bodyPr>
           <a:lstStyle/>
           <a:p>
@@ -39424,6 +41734,11 @@
         <p:txBody>
           <a:bodyPr wrap="square" anchor="t" lIns="0" rIns="0" tIns="0" bIns="0">
             <a:spAutoFit/>
+            <a:extLst>
+              <a:ext uri="{8AF73BB6-5E31-4F0F-A399-3D98F3B95FD9}">
+                <ns76:textLayout xmlns:ns76="urn:pptxdsl:text-layout:v1" role="natural"/>
+              </a:ext>
+            </a:extLst>
           </a:bodyPr>
           <a:lstStyle/>
           <a:p>
@@ -39465,6 +41780,11 @@
         <p:txBody>
           <a:bodyPr wrap="square" anchor="t" lIns="0" rIns="0" tIns="0" bIns="0">
             <a:spAutoFit/>
+            <a:extLst>
+              <a:ext uri="{8AF73BB6-5E31-4F0F-A399-3D98F3B95FD9}">
+                <ns81:textLayout xmlns:ns81="urn:pptxdsl:text-layout:v1" role="body"/>
+              </a:ext>
+            </a:extLst>
           </a:bodyPr>
           <a:lstStyle/>
           <a:p>
@@ -39550,6 +41870,11 @@
         <p:txBody>
           <a:bodyPr wrap="square" anchor="t" lIns="0" rIns="0" tIns="0" bIns="0">
             <a:spAutoFit/>
+            <a:extLst>
+              <a:ext uri="{8AF73BB6-5E31-4F0F-A399-3D98F3B95FD9}">
+                <ns86:textLayout xmlns:ns86="urn:pptxdsl:text-layout:v1" role="natural"/>
+              </a:ext>
+            </a:extLst>
           </a:bodyPr>
           <a:lstStyle/>
           <a:p>
@@ -39591,6 +41916,11 @@
         <p:txBody>
           <a:bodyPr wrap="square" anchor="t" lIns="0" rIns="0" tIns="0" bIns="0">
             <a:spAutoFit/>
+            <a:extLst>
+              <a:ext uri="{8AF73BB6-5E31-4F0F-A399-3D98F3B95FD9}">
+                <ns91:textLayout xmlns:ns91="urn:pptxdsl:text-layout:v1" role="body"/>
+              </a:ext>
+            </a:extLst>
           </a:bodyPr>
           <a:lstStyle/>
           <a:p>
@@ -39676,6 +42006,11 @@
         <p:txBody>
           <a:bodyPr wrap="square" anchor="ctr" lIns="0" rIns="0" tIns="0" bIns="0">
             <a:spAutoFit/>
+            <a:extLst>
+              <a:ext uri="{8AF73BB6-5E31-4F0F-A399-3D98F3B95FD9}">
+                <ns96:textLayout xmlns:ns96="urn:pptxdsl:text-layout:v1" role="body"/>
+              </a:ext>
+            </a:extLst>
           </a:bodyPr>
           <a:lstStyle/>
           <a:p>
@@ -39717,6 +42052,11 @@
         <p:txBody>
           <a:bodyPr wrap="none" anchor="ctr" lIns="0" rIns="0" tIns="0" bIns="0">
             <a:spAutoFit/>
+            <a:extLst>
+              <a:ext uri="{8AF73BB6-5E31-4F0F-A399-3D98F3B95FD9}">
+                <ns101:textLayout xmlns:ns101="urn:pptxdsl:text-layout:v1" role="body"/>
+              </a:ext>
+            </a:extLst>
           </a:bodyPr>
           <a:lstStyle/>
           <a:p>
@@ -39831,6 +42171,11 @@
         <p:txBody>
           <a:bodyPr wrap="square" anchor="t" lIns="0" rIns="0" tIns="0" bIns="0">
             <a:spAutoFit/>
+            <a:extLst>
+              <a:ext uri="{8AF73BB6-5E31-4F0F-A399-3D98F3B95FD9}">
+                <ns2:textLayout xmlns:ns2="urn:pptxdsl:text-layout:v1" role="natural"/>
+              </a:ext>
+            </a:extLst>
           </a:bodyPr>
           <a:lstStyle/>
           <a:p>
@@ -39872,6 +42217,11 @@
         <p:txBody>
           <a:bodyPr wrap="square" anchor="t" lIns="0" rIns="0" tIns="0" bIns="0">
             <a:spAutoFit/>
+            <a:extLst>
+              <a:ext uri="{8AF73BB6-5E31-4F0F-A399-3D98F3B95FD9}">
+                <ns7:textLayout xmlns:ns7="urn:pptxdsl:text-layout:v1" role="natural"/>
+              </a:ext>
+            </a:extLst>
           </a:bodyPr>
           <a:lstStyle/>
           <a:p>
@@ -39913,6 +42263,11 @@
         <p:txBody>
           <a:bodyPr wrap="square" anchor="ctr" lIns="0" rIns="0" tIns="0" bIns="0">
             <a:spAutoFit/>
+            <a:extLst>
+              <a:ext uri="{8AF73BB6-5E31-4F0F-A399-3D98F3B95FD9}">
+                <ns12:textLayout xmlns:ns12="urn:pptxdsl:text-layout:v1" role="natural"/>
+              </a:ext>
+            </a:extLst>
           </a:bodyPr>
           <a:lstStyle/>
           <a:p>
@@ -39954,6 +42309,11 @@
         <p:txBody>
           <a:bodyPr wrap="square" anchor="t" lIns="0" rIns="0" tIns="0" bIns="0">
             <a:spAutoFit/>
+            <a:extLst>
+              <a:ext uri="{8AF73BB6-5E31-4F0F-A399-3D98F3B95FD9}">
+                <ns17:textLayout xmlns:ns17="urn:pptxdsl:text-layout:v1" role="body"/>
+              </a:ext>
+            </a:extLst>
           </a:bodyPr>
           <a:lstStyle/>
           <a:p>
@@ -40039,6 +42399,11 @@
         <p:txBody>
           <a:bodyPr wrap="square" anchor="ctr" lIns="0" rIns="0" tIns="0" bIns="0">
             <a:spAutoFit/>
+            <a:extLst>
+              <a:ext uri="{8AF73BB6-5E31-4F0F-A399-3D98F3B95FD9}">
+                <ns22:textLayout xmlns:ns22="urn:pptxdsl:text-layout:v1" role="natural"/>
+              </a:ext>
+            </a:extLst>
           </a:bodyPr>
           <a:lstStyle/>
           <a:p>
@@ -40080,6 +42445,11 @@
         <p:txBody>
           <a:bodyPr wrap="square" anchor="t" lIns="0" rIns="0" tIns="0" bIns="0">
             <a:spAutoFit/>
+            <a:extLst>
+              <a:ext uri="{8AF73BB6-5E31-4F0F-A399-3D98F3B95FD9}">
+                <ns27:textLayout xmlns:ns27="urn:pptxdsl:text-layout:v1" role="body"/>
+              </a:ext>
+            </a:extLst>
           </a:bodyPr>
           <a:lstStyle/>
           <a:p>
@@ -40165,6 +42535,11 @@
         <p:txBody>
           <a:bodyPr wrap="square" anchor="ctr" lIns="0" rIns="0" tIns="0" bIns="0">
             <a:spAutoFit/>
+            <a:extLst>
+              <a:ext uri="{8AF73BB6-5E31-4F0F-A399-3D98F3B95FD9}">
+                <ns32:textLayout xmlns:ns32="urn:pptxdsl:text-layout:v1" role="natural"/>
+              </a:ext>
+            </a:extLst>
           </a:bodyPr>
           <a:lstStyle/>
           <a:p>
@@ -40206,6 +42581,11 @@
         <p:txBody>
           <a:bodyPr wrap="square" anchor="t" lIns="0" rIns="0" tIns="0" bIns="0">
             <a:spAutoFit/>
+            <a:extLst>
+              <a:ext uri="{8AF73BB6-5E31-4F0F-A399-3D98F3B95FD9}">
+                <ns37:textLayout xmlns:ns37="urn:pptxdsl:text-layout:v1" role="body"/>
+              </a:ext>
+            </a:extLst>
           </a:bodyPr>
           <a:lstStyle/>
           <a:p>
@@ -40335,6 +42715,11 @@
         <p:txBody>
           <a:bodyPr wrap="square" anchor="ctr" lIns="0" rIns="0" tIns="0" bIns="0">
             <a:spAutoFit/>
+            <a:extLst>
+              <a:ext uri="{8AF73BB6-5E31-4F0F-A399-3D98F3B95FD9}">
+                <ns42:textLayout xmlns:ns42="urn:pptxdsl:text-layout:v1" role="body"/>
+              </a:ext>
+            </a:extLst>
           </a:bodyPr>
           <a:lstStyle/>
           <a:p>
@@ -40376,6 +42761,11 @@
         <p:txBody>
           <a:bodyPr wrap="none" anchor="ctr" lIns="0" rIns="0" tIns="0" bIns="0">
             <a:spAutoFit/>
+            <a:extLst>
+              <a:ext uri="{8AF73BB6-5E31-4F0F-A399-3D98F3B95FD9}">
+                <ns47:textLayout xmlns:ns47="urn:pptxdsl:text-layout:v1" role="body"/>
+              </a:ext>
+            </a:extLst>
           </a:bodyPr>
           <a:lstStyle/>
           <a:p>
@@ -40490,6 +42880,11 @@
         <p:txBody>
           <a:bodyPr wrap="square" anchor="t" lIns="0" rIns="0" tIns="0" bIns="0">
             <a:spAutoFit/>
+            <a:extLst>
+              <a:ext uri="{8AF73BB6-5E31-4F0F-A399-3D98F3B95FD9}">
+                <ns2:textLayout xmlns:ns2="urn:pptxdsl:text-layout:v1" role="natural"/>
+              </a:ext>
+            </a:extLst>
           </a:bodyPr>
           <a:lstStyle/>
           <a:p>
@@ -40531,6 +42926,11 @@
         <p:txBody>
           <a:bodyPr wrap="square" anchor="t" lIns="0" rIns="0" tIns="0" bIns="0">
             <a:spAutoFit/>
+            <a:extLst>
+              <a:ext uri="{8AF73BB6-5E31-4F0F-A399-3D98F3B95FD9}">
+                <ns7:textLayout xmlns:ns7="urn:pptxdsl:text-layout:v1" role="natural"/>
+              </a:ext>
+            </a:extLst>
           </a:bodyPr>
           <a:lstStyle/>
           <a:p>
@@ -40616,6 +43016,11 @@
         <p:txBody>
           <a:bodyPr wrap="square" anchor="ctr" lIns="0" rIns="0" tIns="0" bIns="0">
             <a:spAutoFit/>
+            <a:extLst>
+              <a:ext uri="{8AF73BB6-5E31-4F0F-A399-3D98F3B95FD9}">
+                <ns12:textLayout xmlns:ns12="urn:pptxdsl:text-layout:v1" role="natural"/>
+              </a:ext>
+            </a:extLst>
           </a:bodyPr>
           <a:lstStyle/>
           <a:p>
@@ -40657,6 +43062,11 @@
         <p:txBody>
           <a:bodyPr wrap="square" anchor="t" lIns="0" rIns="0" tIns="0" bIns="0">
             <a:spAutoFit/>
+            <a:extLst>
+              <a:ext uri="{8AF73BB6-5E31-4F0F-A399-3D98F3B95FD9}">
+                <ns17:textLayout xmlns:ns17="urn:pptxdsl:text-layout:v1" role="natural"/>
+              </a:ext>
+            </a:extLst>
           </a:bodyPr>
           <a:lstStyle/>
           <a:p>
@@ -40698,6 +43108,11 @@
         <p:txBody>
           <a:bodyPr wrap="square" anchor="t" lIns="0" rIns="0" tIns="0" bIns="0">
             <a:spAutoFit/>
+            <a:extLst>
+              <a:ext uri="{8AF73BB6-5E31-4F0F-A399-3D98F3B95FD9}">
+                <ns22:textLayout xmlns:ns22="urn:pptxdsl:text-layout:v1" role="body"/>
+              </a:ext>
+            </a:extLst>
           </a:bodyPr>
           <a:lstStyle/>
           <a:p>
@@ -40739,6 +43154,11 @@
         <p:txBody>
           <a:bodyPr wrap="square" anchor="t" lIns="0" rIns="0" tIns="0" bIns="0">
             <a:spAutoFit/>
+            <a:extLst>
+              <a:ext uri="{8AF73BB6-5E31-4F0F-A399-3D98F3B95FD9}">
+                <ns27:textLayout xmlns:ns27="urn:pptxdsl:text-layout:v1" role="body"/>
+              </a:ext>
+            </a:extLst>
           </a:bodyPr>
           <a:lstStyle/>
           <a:p>
@@ -40780,6 +43200,11 @@
         <p:txBody>
           <a:bodyPr wrap="square" anchor="t" lIns="0" rIns="0" tIns="0" bIns="0">
             <a:spAutoFit/>
+            <a:extLst>
+              <a:ext uri="{8AF73BB6-5E31-4F0F-A399-3D98F3B95FD9}">
+                <ns32:textLayout xmlns:ns32="urn:pptxdsl:text-layout:v1" role="body"/>
+              </a:ext>
+            </a:extLst>
           </a:bodyPr>
           <a:lstStyle/>
           <a:p>
@@ -40909,6 +43334,11 @@
         <p:txBody>
           <a:bodyPr wrap="square" anchor="ctr" lIns="0" rIns="0" tIns="0" bIns="0">
             <a:spAutoFit/>
+            <a:extLst>
+              <a:ext uri="{8AF73BB6-5E31-4F0F-A399-3D98F3B95FD9}">
+                <ns37:textLayout xmlns:ns37="urn:pptxdsl:text-layout:v1" role="natural"/>
+              </a:ext>
+            </a:extLst>
           </a:bodyPr>
           <a:lstStyle/>
           <a:p>
@@ -40950,6 +43380,11 @@
         <p:txBody>
           <a:bodyPr wrap="square" anchor="t" lIns="0" rIns="0" tIns="0" bIns="0">
             <a:spAutoFit/>
+            <a:extLst>
+              <a:ext uri="{8AF73BB6-5E31-4F0F-A399-3D98F3B95FD9}">
+                <ns42:textLayout xmlns:ns42="urn:pptxdsl:text-layout:v1" role="natural"/>
+              </a:ext>
+            </a:extLst>
           </a:bodyPr>
           <a:lstStyle/>
           <a:p>
@@ -40991,6 +43426,11 @@
         <p:txBody>
           <a:bodyPr wrap="square" anchor="t" lIns="0" rIns="0" tIns="0" bIns="0">
             <a:spAutoFit/>
+            <a:extLst>
+              <a:ext uri="{8AF73BB6-5E31-4F0F-A399-3D98F3B95FD9}">
+                <ns47:textLayout xmlns:ns47="urn:pptxdsl:text-layout:v1" role="body"/>
+              </a:ext>
+            </a:extLst>
           </a:bodyPr>
           <a:lstStyle/>
           <a:p>
@@ -41032,6 +43472,11 @@
         <p:txBody>
           <a:bodyPr wrap="square" anchor="t" lIns="0" rIns="0" tIns="0" bIns="0">
             <a:spAutoFit/>
+            <a:extLst>
+              <a:ext uri="{8AF73BB6-5E31-4F0F-A399-3D98F3B95FD9}">
+                <ns52:textLayout xmlns:ns52="urn:pptxdsl:text-layout:v1" role="body"/>
+              </a:ext>
+            </a:extLst>
           </a:bodyPr>
           <a:lstStyle/>
           <a:p>
@@ -41073,6 +43518,11 @@
         <p:txBody>
           <a:bodyPr wrap="square" anchor="t" lIns="0" rIns="0" tIns="0" bIns="0">
             <a:spAutoFit/>
+            <a:extLst>
+              <a:ext uri="{8AF73BB6-5E31-4F0F-A399-3D98F3B95FD9}">
+                <ns57:textLayout xmlns:ns57="urn:pptxdsl:text-layout:v1" role="body"/>
+              </a:ext>
+            </a:extLst>
           </a:bodyPr>
           <a:lstStyle/>
           <a:p>
@@ -41202,6 +43652,11 @@
         <p:txBody>
           <a:bodyPr wrap="square" anchor="ctr" lIns="0" rIns="0" tIns="0" bIns="0">
             <a:spAutoFit/>
+            <a:extLst>
+              <a:ext uri="{8AF73BB6-5E31-4F0F-A399-3D98F3B95FD9}">
+                <ns62:textLayout xmlns:ns62="urn:pptxdsl:text-layout:v1" role="natural"/>
+              </a:ext>
+            </a:extLst>
           </a:bodyPr>
           <a:lstStyle/>
           <a:p>
@@ -41243,6 +43698,11 @@
         <p:txBody>
           <a:bodyPr wrap="square" anchor="t" lIns="0" rIns="0" tIns="0" bIns="0">
             <a:spAutoFit/>
+            <a:extLst>
+              <a:ext uri="{8AF73BB6-5E31-4F0F-A399-3D98F3B95FD9}">
+                <ns67:textLayout xmlns:ns67="urn:pptxdsl:text-layout:v1" role="natural"/>
+              </a:ext>
+            </a:extLst>
           </a:bodyPr>
           <a:lstStyle/>
           <a:p>
@@ -41284,6 +43744,11 @@
         <p:txBody>
           <a:bodyPr wrap="square" anchor="t" lIns="0" rIns="0" tIns="0" bIns="0">
             <a:spAutoFit/>
+            <a:extLst>
+              <a:ext uri="{8AF73BB6-5E31-4F0F-A399-3D98F3B95FD9}">
+                <ns72:textLayout xmlns:ns72="urn:pptxdsl:text-layout:v1" role="body"/>
+              </a:ext>
+            </a:extLst>
           </a:bodyPr>
           <a:lstStyle/>
           <a:p>
@@ -41325,6 +43790,11 @@
         <p:txBody>
           <a:bodyPr wrap="square" anchor="t" lIns="0" rIns="0" tIns="0" bIns="0">
             <a:spAutoFit/>
+            <a:extLst>
+              <a:ext uri="{8AF73BB6-5E31-4F0F-A399-3D98F3B95FD9}">
+                <ns77:textLayout xmlns:ns77="urn:pptxdsl:text-layout:v1" role="body"/>
+              </a:ext>
+            </a:extLst>
           </a:bodyPr>
           <a:lstStyle/>
           <a:p>
@@ -41366,6 +43836,11 @@
         <p:txBody>
           <a:bodyPr wrap="square" anchor="t" lIns="0" rIns="0" tIns="0" bIns="0">
             <a:spAutoFit/>
+            <a:extLst>
+              <a:ext uri="{8AF73BB6-5E31-4F0F-A399-3D98F3B95FD9}">
+                <ns82:textLayout xmlns:ns82="urn:pptxdsl:text-layout:v1" role="body"/>
+              </a:ext>
+            </a:extLst>
           </a:bodyPr>
           <a:lstStyle/>
           <a:p>
@@ -41451,6 +43926,11 @@
         <p:txBody>
           <a:bodyPr wrap="square" anchor="ctr" lIns="0" rIns="0" tIns="0" bIns="0">
             <a:spAutoFit/>
+            <a:extLst>
+              <a:ext uri="{8AF73BB6-5E31-4F0F-A399-3D98F3B95FD9}">
+                <ns87:textLayout xmlns:ns87="urn:pptxdsl:text-layout:v1" role="body"/>
+              </a:ext>
+            </a:extLst>
           </a:bodyPr>
           <a:lstStyle/>
           <a:p>
@@ -41492,6 +43972,11 @@
         <p:txBody>
           <a:bodyPr wrap="none" anchor="ctr" lIns="0" rIns="0" tIns="0" bIns="0">
             <a:spAutoFit/>
+            <a:extLst>
+              <a:ext uri="{8AF73BB6-5E31-4F0F-A399-3D98F3B95FD9}">
+                <ns92:textLayout xmlns:ns92="urn:pptxdsl:text-layout:v1" role="body"/>
+              </a:ext>
+            </a:extLst>
           </a:bodyPr>
           <a:lstStyle/>
           <a:p>
@@ -41606,6 +44091,11 @@
         <p:txBody>
           <a:bodyPr wrap="square" anchor="t" lIns="0" rIns="0" tIns="0" bIns="0">
             <a:spAutoFit/>
+            <a:extLst>
+              <a:ext uri="{8AF73BB6-5E31-4F0F-A399-3D98F3B95FD9}">
+                <ns2:textLayout xmlns:ns2="urn:pptxdsl:text-layout:v1" role="natural"/>
+              </a:ext>
+            </a:extLst>
           </a:bodyPr>
           <a:lstStyle/>
           <a:p>
@@ -41647,6 +44137,11 @@
         <p:txBody>
           <a:bodyPr wrap="square" anchor="t" lIns="0" rIns="0" tIns="0" bIns="0">
             <a:spAutoFit/>
+            <a:extLst>
+              <a:ext uri="{8AF73BB6-5E31-4F0F-A399-3D98F3B95FD9}">
+                <ns7:textLayout xmlns:ns7="urn:pptxdsl:text-layout:v1" role="natural"/>
+              </a:ext>
+            </a:extLst>
           </a:bodyPr>
           <a:lstStyle/>
           <a:p>
@@ -41688,6 +44183,11 @@
         <p:txBody>
           <a:bodyPr wrap="square" anchor="t" lIns="0" rIns="0" tIns="0" bIns="0">
             <a:spAutoFit/>
+            <a:extLst>
+              <a:ext uri="{8AF73BB6-5E31-4F0F-A399-3D98F3B95FD9}">
+                <ns12:textLayout xmlns:ns12="urn:pptxdsl:text-layout:v1" role="body"/>
+              </a:ext>
+            </a:extLst>
           </a:bodyPr>
           <a:lstStyle/>
           <a:p>
@@ -41821,6 +44321,11 @@
         <p:txBody>
           <a:bodyPr wrap="square" anchor="ctr" lIns="0" rIns="0" tIns="0" bIns="0">
             <a:spAutoFit/>
+            <a:extLst>
+              <a:ext uri="{8AF73BB6-5E31-4F0F-A399-3D98F3B95FD9}">
+                <ns17:textLayout xmlns:ns17="urn:pptxdsl:text-layout:v1" role="natural"/>
+              </a:ext>
+            </a:extLst>
           </a:bodyPr>
           <a:lstStyle/>
           <a:p>
@@ -41862,6 +44367,11 @@
         <p:txBody>
           <a:bodyPr wrap="square" anchor="ctr" lIns="0" rIns="0" tIns="0" bIns="0">
             <a:spAutoFit/>
+            <a:extLst>
+              <a:ext uri="{8AF73BB6-5E31-4F0F-A399-3D98F3B95FD9}">
+                <ns22:textLayout xmlns:ns22="urn:pptxdsl:text-layout:v1" role="natural"/>
+              </a:ext>
+            </a:extLst>
           </a:bodyPr>
           <a:lstStyle/>
           <a:p>
@@ -41969,6 +44479,11 @@
         <p:txBody>
           <a:bodyPr wrap="square" anchor="ctr" lIns="0" rIns="0" tIns="0" bIns="0">
             <a:spAutoFit/>
+            <a:extLst>
+              <a:ext uri="{8AF73BB6-5E31-4F0F-A399-3D98F3B95FD9}">
+                <ns27:textLayout xmlns:ns27="urn:pptxdsl:text-layout:v1" role="body"/>
+              </a:ext>
+            </a:extLst>
           </a:bodyPr>
           <a:lstStyle/>
           <a:p>
@@ -42076,6 +44591,11 @@
         <p:txBody>
           <a:bodyPr wrap="square" anchor="ctr" lIns="0" rIns="0" tIns="0" bIns="0">
             <a:spAutoFit/>
+            <a:extLst>
+              <a:ext uri="{8AF73BB6-5E31-4F0F-A399-3D98F3B95FD9}">
+                <ns32:textLayout xmlns:ns32="urn:pptxdsl:text-layout:v1" role="body"/>
+              </a:ext>
+            </a:extLst>
           </a:bodyPr>
           <a:lstStyle/>
           <a:p>
@@ -42183,6 +44703,11 @@
         <p:txBody>
           <a:bodyPr wrap="square" anchor="ctr" lIns="0" rIns="0" tIns="0" bIns="0">
             <a:spAutoFit/>
+            <a:extLst>
+              <a:ext uri="{8AF73BB6-5E31-4F0F-A399-3D98F3B95FD9}">
+                <ns37:textLayout xmlns:ns37="urn:pptxdsl:text-layout:v1" role="body"/>
+              </a:ext>
+            </a:extLst>
           </a:bodyPr>
           <a:lstStyle/>
           <a:p>
@@ -42290,6 +44815,11 @@
         <p:txBody>
           <a:bodyPr wrap="square" anchor="ctr" lIns="0" rIns="0" tIns="0" bIns="0">
             <a:spAutoFit/>
+            <a:extLst>
+              <a:ext uri="{8AF73BB6-5E31-4F0F-A399-3D98F3B95FD9}">
+                <ns42:textLayout xmlns:ns42="urn:pptxdsl:text-layout:v1" role="body"/>
+              </a:ext>
+            </a:extLst>
           </a:bodyPr>
           <a:lstStyle/>
           <a:p>
@@ -42423,6 +44953,11 @@
         <p:txBody>
           <a:bodyPr wrap="square" anchor="ctr" lIns="0" rIns="0" tIns="0" bIns="0">
             <a:spAutoFit/>
+            <a:extLst>
+              <a:ext uri="{8AF73BB6-5E31-4F0F-A399-3D98F3B95FD9}">
+                <ns47:textLayout xmlns:ns47="urn:pptxdsl:text-layout:v1" role="natural"/>
+              </a:ext>
+            </a:extLst>
           </a:bodyPr>
           <a:lstStyle/>
           <a:p>
@@ -42464,6 +44999,11 @@
         <p:txBody>
           <a:bodyPr wrap="square" anchor="ctr" lIns="0" rIns="0" tIns="0" bIns="0">
             <a:spAutoFit/>
+            <a:extLst>
+              <a:ext uri="{8AF73BB6-5E31-4F0F-A399-3D98F3B95FD9}">
+                <ns52:textLayout xmlns:ns52="urn:pptxdsl:text-layout:v1" role="natural"/>
+              </a:ext>
+            </a:extLst>
           </a:bodyPr>
           <a:lstStyle/>
           <a:p>
@@ -42571,6 +45111,11 @@
         <p:txBody>
           <a:bodyPr wrap="square" anchor="ctr" lIns="0" rIns="0" tIns="0" bIns="0">
             <a:spAutoFit/>
+            <a:extLst>
+              <a:ext uri="{8AF73BB6-5E31-4F0F-A399-3D98F3B95FD9}">
+                <ns57:textLayout xmlns:ns57="urn:pptxdsl:text-layout:v1" role="body"/>
+              </a:ext>
+            </a:extLst>
           </a:bodyPr>
           <a:lstStyle/>
           <a:p>
@@ -42678,6 +45223,11 @@
         <p:txBody>
           <a:bodyPr wrap="square" anchor="ctr" lIns="0" rIns="0" tIns="0" bIns="0">
             <a:spAutoFit/>
+            <a:extLst>
+              <a:ext uri="{8AF73BB6-5E31-4F0F-A399-3D98F3B95FD9}">
+                <ns62:textLayout xmlns:ns62="urn:pptxdsl:text-layout:v1" role="body"/>
+              </a:ext>
+            </a:extLst>
           </a:bodyPr>
           <a:lstStyle/>
           <a:p>
@@ -42785,6 +45335,11 @@
         <p:txBody>
           <a:bodyPr wrap="square" anchor="ctr" lIns="0" rIns="0" tIns="0" bIns="0">
             <a:spAutoFit/>
+            <a:extLst>
+              <a:ext uri="{8AF73BB6-5E31-4F0F-A399-3D98F3B95FD9}">
+                <ns67:textLayout xmlns:ns67="urn:pptxdsl:text-layout:v1" role="body"/>
+              </a:ext>
+            </a:extLst>
           </a:bodyPr>
           <a:lstStyle/>
           <a:p>
@@ -42892,6 +45447,11 @@
         <p:txBody>
           <a:bodyPr wrap="square" anchor="ctr" lIns="0" rIns="0" tIns="0" bIns="0">
             <a:spAutoFit/>
+            <a:extLst>
+              <a:ext uri="{8AF73BB6-5E31-4F0F-A399-3D98F3B95FD9}">
+                <ns72:textLayout xmlns:ns72="urn:pptxdsl:text-layout:v1" role="body"/>
+              </a:ext>
+            </a:extLst>
           </a:bodyPr>
           <a:lstStyle/>
           <a:p>
@@ -42977,6 +45537,11 @@
         <p:txBody>
           <a:bodyPr wrap="square" anchor="ctr" lIns="0" rIns="0" tIns="0" bIns="0">
             <a:spAutoFit/>
+            <a:extLst>
+              <a:ext uri="{8AF73BB6-5E31-4F0F-A399-3D98F3B95FD9}">
+                <ns77:textLayout xmlns:ns77="urn:pptxdsl:text-layout:v1" role="body"/>
+              </a:ext>
+            </a:extLst>
           </a:bodyPr>
           <a:lstStyle/>
           <a:p>
@@ -43018,6 +45583,11 @@
         <p:txBody>
           <a:bodyPr wrap="none" anchor="ctr" lIns="0" rIns="0" tIns="0" bIns="0">
             <a:spAutoFit/>
+            <a:extLst>
+              <a:ext uri="{8AF73BB6-5E31-4F0F-A399-3D98F3B95FD9}">
+                <ns82:textLayout xmlns:ns82="urn:pptxdsl:text-layout:v1" role="body"/>
+              </a:ext>
+            </a:extLst>
           </a:bodyPr>
           <a:lstStyle/>
           <a:p>
@@ -43132,6 +45702,11 @@
         <p:txBody>
           <a:bodyPr wrap="square" anchor="t" lIns="0" rIns="0" tIns="0" bIns="0">
             <a:spAutoFit/>
+            <a:extLst>
+              <a:ext uri="{8AF73BB6-5E31-4F0F-A399-3D98F3B95FD9}">
+                <ns2:textLayout xmlns:ns2="urn:pptxdsl:text-layout:v1" role="natural"/>
+              </a:ext>
+            </a:extLst>
           </a:bodyPr>
           <a:lstStyle/>
           <a:p>
@@ -43173,6 +45748,11 @@
         <p:txBody>
           <a:bodyPr wrap="square" anchor="t" lIns="0" rIns="0" tIns="0" bIns="0">
             <a:spAutoFit/>
+            <a:extLst>
+              <a:ext uri="{8AF73BB6-5E31-4F0F-A399-3D98F3B95FD9}">
+                <ns7:textLayout xmlns:ns7="urn:pptxdsl:text-layout:v1" role="natural"/>
+              </a:ext>
+            </a:extLst>
           </a:bodyPr>
           <a:lstStyle/>
           <a:p>
@@ -43214,6 +45794,11 @@
         <p:txBody>
           <a:bodyPr wrap="square" anchor="t" lIns="0" rIns="0" tIns="0" bIns="0">
             <a:spAutoFit/>
+            <a:extLst>
+              <a:ext uri="{8AF73BB6-5E31-4F0F-A399-3D98F3B95FD9}">
+                <ns12:textLayout xmlns:ns12="urn:pptxdsl:text-layout:v1" role="body"/>
+              </a:ext>
+            </a:extLst>
           </a:bodyPr>
           <a:lstStyle/>
           <a:p>
@@ -43255,6 +45840,11 @@
         <p:txBody>
           <a:bodyPr wrap="square" anchor="t" lIns="0" rIns="0" tIns="0" bIns="0">
             <a:spAutoFit/>
+            <a:extLst>
+              <a:ext uri="{8AF73BB6-5E31-4F0F-A399-3D98F3B95FD9}">
+                <ns17:textLayout xmlns:ns17="urn:pptxdsl:text-layout:v1" role="natural"/>
+              </a:ext>
+            </a:extLst>
           </a:bodyPr>
           <a:lstStyle/>
           <a:p>
@@ -43296,6 +45886,11 @@
         <p:txBody>
           <a:bodyPr wrap="square" anchor="t" lIns="0" rIns="0" tIns="0" bIns="0">
             <a:spAutoFit/>
+            <a:extLst>
+              <a:ext uri="{8AF73BB6-5E31-4F0F-A399-3D98F3B95FD9}">
+                <ns22:textLayout xmlns:ns22="urn:pptxdsl:text-layout:v1" role="natural"/>
+              </a:ext>
+            </a:extLst>
           </a:bodyPr>
           <a:lstStyle/>
           <a:p>
@@ -43337,6 +45932,11 @@
         <p:txBody>
           <a:bodyPr wrap="square" anchor="t" lIns="0" rIns="0" tIns="0" bIns="0">
             <a:spAutoFit/>
+            <a:extLst>
+              <a:ext uri="{8AF73BB6-5E31-4F0F-A399-3D98F3B95FD9}">
+                <ns27:textLayout xmlns:ns27="urn:pptxdsl:text-layout:v1" role="body"/>
+              </a:ext>
+            </a:extLst>
           </a:bodyPr>
           <a:lstStyle/>
           <a:p>
@@ -43422,6 +46022,11 @@
         <p:txBody>
           <a:bodyPr wrap="square" anchor="t" lIns="0" rIns="0" tIns="0" bIns="0">
             <a:spAutoFit/>
+            <a:extLst>
+              <a:ext uri="{8AF73BB6-5E31-4F0F-A399-3D98F3B95FD9}">
+                <ns32:textLayout xmlns:ns32="urn:pptxdsl:text-layout:v1" role="natural"/>
+              </a:ext>
+            </a:extLst>
           </a:bodyPr>
           <a:lstStyle/>
           <a:p>
@@ -43463,6 +46068,11 @@
         <p:txBody>
           <a:bodyPr wrap="square" anchor="t" lIns="0" rIns="0" tIns="0" bIns="0">
             <a:spAutoFit/>
+            <a:extLst>
+              <a:ext uri="{8AF73BB6-5E31-4F0F-A399-3D98F3B95FD9}">
+                <ns37:textLayout xmlns:ns37="urn:pptxdsl:text-layout:v1" role="natural"/>
+              </a:ext>
+            </a:extLst>
           </a:bodyPr>
           <a:lstStyle/>
           <a:p>
@@ -43504,6 +46114,11 @@
         <p:txBody>
           <a:bodyPr wrap="square" anchor="t" lIns="0" rIns="0" tIns="0" bIns="0">
             <a:spAutoFit/>
+            <a:extLst>
+              <a:ext uri="{8AF73BB6-5E31-4F0F-A399-3D98F3B95FD9}">
+                <ns42:textLayout xmlns:ns42="urn:pptxdsl:text-layout:v1" role="body"/>
+              </a:ext>
+            </a:extLst>
           </a:bodyPr>
           <a:lstStyle/>
           <a:p>
@@ -43589,6 +46204,11 @@
         <p:txBody>
           <a:bodyPr wrap="square" anchor="t" lIns="0" rIns="0" tIns="0" bIns="0">
             <a:spAutoFit/>
+            <a:extLst>
+              <a:ext uri="{8AF73BB6-5E31-4F0F-A399-3D98F3B95FD9}">
+                <ns47:textLayout xmlns:ns47="urn:pptxdsl:text-layout:v1" role="natural"/>
+              </a:ext>
+            </a:extLst>
           </a:bodyPr>
           <a:lstStyle/>
           <a:p>
@@ -43630,6 +46250,11 @@
         <p:txBody>
           <a:bodyPr wrap="square" anchor="t" lIns="0" rIns="0" tIns="0" bIns="0">
             <a:spAutoFit/>
+            <a:extLst>
+              <a:ext uri="{8AF73BB6-5E31-4F0F-A399-3D98F3B95FD9}">
+                <ns52:textLayout xmlns:ns52="urn:pptxdsl:text-layout:v1" role="natural"/>
+              </a:ext>
+            </a:extLst>
           </a:bodyPr>
           <a:lstStyle/>
           <a:p>
@@ -43671,6 +46296,11 @@
         <p:txBody>
           <a:bodyPr wrap="square" anchor="t" lIns="0" rIns="0" tIns="0" bIns="0">
             <a:spAutoFit/>
+            <a:extLst>
+              <a:ext uri="{8AF73BB6-5E31-4F0F-A399-3D98F3B95FD9}">
+                <ns57:textLayout xmlns:ns57="urn:pptxdsl:text-layout:v1" role="body"/>
+              </a:ext>
+            </a:extLst>
           </a:bodyPr>
           <a:lstStyle/>
           <a:p>
@@ -43756,6 +46386,11 @@
         <p:txBody>
           <a:bodyPr wrap="square" anchor="t" lIns="0" rIns="0" tIns="0" bIns="0">
             <a:spAutoFit/>
+            <a:extLst>
+              <a:ext uri="{8AF73BB6-5E31-4F0F-A399-3D98F3B95FD9}">
+                <ns62:textLayout xmlns:ns62="urn:pptxdsl:text-layout:v1" role="natural"/>
+              </a:ext>
+            </a:extLst>
           </a:bodyPr>
           <a:lstStyle/>
           <a:p>
@@ -43797,6 +46432,11 @@
         <p:txBody>
           <a:bodyPr wrap="square" anchor="t" lIns="0" rIns="0" tIns="0" bIns="0">
             <a:spAutoFit/>
+            <a:extLst>
+              <a:ext uri="{8AF73BB6-5E31-4F0F-A399-3D98F3B95FD9}">
+                <ns67:textLayout xmlns:ns67="urn:pptxdsl:text-layout:v1" role="natural"/>
+              </a:ext>
+            </a:extLst>
           </a:bodyPr>
           <a:lstStyle/>
           <a:p>
@@ -43838,6 +46478,11 @@
         <p:txBody>
           <a:bodyPr wrap="square" anchor="t" lIns="0" rIns="0" tIns="0" bIns="0">
             <a:spAutoFit/>
+            <a:extLst>
+              <a:ext uri="{8AF73BB6-5E31-4F0F-A399-3D98F3B95FD9}">
+                <ns72:textLayout xmlns:ns72="urn:pptxdsl:text-layout:v1" role="body"/>
+              </a:ext>
+            </a:extLst>
           </a:bodyPr>
           <a:lstStyle/>
           <a:p>
@@ -43879,6 +46524,11 @@
         <p:txBody>
           <a:bodyPr wrap="square" anchor="t" lIns="0" rIns="0" tIns="0" bIns="0">
             <a:spAutoFit/>
+            <a:extLst>
+              <a:ext uri="{8AF73BB6-5E31-4F0F-A399-3D98F3B95FD9}">
+                <ns77:textLayout xmlns:ns77="urn:pptxdsl:text-layout:v1" role="natural"/>
+              </a:ext>
+            </a:extLst>
           </a:bodyPr>
           <a:lstStyle/>
           <a:p>
@@ -43920,6 +46570,11 @@
         <p:txBody>
           <a:bodyPr wrap="square" anchor="t" lIns="0" rIns="0" tIns="0" bIns="0">
             <a:spAutoFit/>
+            <a:extLst>
+              <a:ext uri="{8AF73BB6-5E31-4F0F-A399-3D98F3B95FD9}">
+                <ns82:textLayout xmlns:ns82="urn:pptxdsl:text-layout:v1" role="natural"/>
+              </a:ext>
+            </a:extLst>
           </a:bodyPr>
           <a:lstStyle/>
           <a:p>
@@ -43961,6 +46616,11 @@
         <p:txBody>
           <a:bodyPr wrap="square" anchor="t" lIns="0" rIns="0" tIns="0" bIns="0">
             <a:spAutoFit/>
+            <a:extLst>
+              <a:ext uri="{8AF73BB6-5E31-4F0F-A399-3D98F3B95FD9}">
+                <ns87:textLayout xmlns:ns87="urn:pptxdsl:text-layout:v1" role="body"/>
+              </a:ext>
+            </a:extLst>
           </a:bodyPr>
           <a:lstStyle/>
           <a:p>
@@ -44002,6 +46662,11 @@
         <p:txBody>
           <a:bodyPr wrap="square" anchor="t" lIns="0" rIns="0" tIns="0" bIns="0">
             <a:spAutoFit/>
+            <a:extLst>
+              <a:ext uri="{8AF73BB6-5E31-4F0F-A399-3D98F3B95FD9}">
+                <ns92:textLayout xmlns:ns92="urn:pptxdsl:text-layout:v1" role="natural"/>
+              </a:ext>
+            </a:extLst>
           </a:bodyPr>
           <a:lstStyle/>
           <a:p>
@@ -44043,6 +46708,11 @@
         <p:txBody>
           <a:bodyPr wrap="square" anchor="t" lIns="0" rIns="0" tIns="0" bIns="0">
             <a:spAutoFit/>
+            <a:extLst>
+              <a:ext uri="{8AF73BB6-5E31-4F0F-A399-3D98F3B95FD9}">
+                <ns97:textLayout xmlns:ns97="urn:pptxdsl:text-layout:v1" role="natural"/>
+              </a:ext>
+            </a:extLst>
           </a:bodyPr>
           <a:lstStyle/>
           <a:p>
@@ -44084,6 +46754,11 @@
         <p:txBody>
           <a:bodyPr wrap="square" anchor="t" lIns="0" rIns="0" tIns="0" bIns="0">
             <a:spAutoFit/>
+            <a:extLst>
+              <a:ext uri="{8AF73BB6-5E31-4F0F-A399-3D98F3B95FD9}">
+                <ns102:textLayout xmlns:ns102="urn:pptxdsl:text-layout:v1" role="body"/>
+              </a:ext>
+            </a:extLst>
           </a:bodyPr>
           <a:lstStyle/>
           <a:p>
@@ -44169,6 +46844,11 @@
         <p:txBody>
           <a:bodyPr wrap="square" anchor="ctr" lIns="0" rIns="0" tIns="0" bIns="0">
             <a:spAutoFit/>
+            <a:extLst>
+              <a:ext uri="{8AF73BB6-5E31-4F0F-A399-3D98F3B95FD9}">
+                <ns107:textLayout xmlns:ns107="urn:pptxdsl:text-layout:v1" role="body"/>
+              </a:ext>
+            </a:extLst>
           </a:bodyPr>
           <a:lstStyle/>
           <a:p>
@@ -44210,6 +46890,11 @@
         <p:txBody>
           <a:bodyPr wrap="none" anchor="ctr" lIns="0" rIns="0" tIns="0" bIns="0">
             <a:spAutoFit/>
+            <a:extLst>
+              <a:ext uri="{8AF73BB6-5E31-4F0F-A399-3D98F3B95FD9}">
+                <ns112:textLayout xmlns:ns112="urn:pptxdsl:text-layout:v1" role="body"/>
+              </a:ext>
+            </a:extLst>
           </a:bodyPr>
           <a:lstStyle/>
           <a:p>
@@ -44324,6 +47009,11 @@
         <p:txBody>
           <a:bodyPr wrap="square" anchor="t" lIns="0" rIns="0" tIns="0" bIns="0">
             <a:spAutoFit/>
+            <a:extLst>
+              <a:ext uri="{8AF73BB6-5E31-4F0F-A399-3D98F3B95FD9}">
+                <ns2:textLayout xmlns:ns2="urn:pptxdsl:text-layout:v1" role="natural"/>
+              </a:ext>
+            </a:extLst>
           </a:bodyPr>
           <a:lstStyle/>
           <a:p>
@@ -44365,6 +47055,11 @@
         <p:txBody>
           <a:bodyPr wrap="square" anchor="t" lIns="0" rIns="0" tIns="0" bIns="0">
             <a:spAutoFit/>
+            <a:extLst>
+              <a:ext uri="{8AF73BB6-5E31-4F0F-A399-3D98F3B95FD9}">
+                <ns7:textLayout xmlns:ns7="urn:pptxdsl:text-layout:v1" role="natural"/>
+              </a:ext>
+            </a:extLst>
           </a:bodyPr>
           <a:lstStyle/>
           <a:p>
@@ -44406,6 +47101,11 @@
         <p:txBody>
           <a:bodyPr wrap="square" anchor="t" lIns="0" rIns="0" tIns="0" bIns="0">
             <a:spAutoFit/>
+            <a:extLst>
+              <a:ext uri="{8AF73BB6-5E31-4F0F-A399-3D98F3B95FD9}">
+                <ns12:textLayout xmlns:ns12="urn:pptxdsl:text-layout:v1" role="body"/>
+              </a:ext>
+            </a:extLst>
           </a:bodyPr>
           <a:lstStyle/>
           <a:p>
@@ -44511,6 +47211,11 @@
         <p:txBody>
           <a:bodyPr wrap="square" anchor="ctr" lIns="0" rIns="0" tIns="0" bIns="0">
             <a:spAutoFit/>
+            <a:extLst>
+              <a:ext uri="{8AF73BB6-5E31-4F0F-A399-3D98F3B95FD9}">
+                <ns17:textLayout xmlns:ns17="urn:pptxdsl:text-layout:v1" role="natural"/>
+              </a:ext>
+            </a:extLst>
           </a:bodyPr>
           <a:lstStyle/>
           <a:p>
@@ -44552,6 +47257,11 @@
         <p:txBody>
           <a:bodyPr wrap="square" anchor="ctr" lIns="0" rIns="0" tIns="0" bIns="0">
             <a:spAutoFit/>
+            <a:extLst>
+              <a:ext uri="{8AF73BB6-5E31-4F0F-A399-3D98F3B95FD9}">
+                <ns22:textLayout xmlns:ns22="urn:pptxdsl:text-layout:v1" role="natural"/>
+              </a:ext>
+            </a:extLst>
           </a:bodyPr>
           <a:lstStyle/>
           <a:p>
@@ -44593,6 +47303,11 @@
         <p:txBody>
           <a:bodyPr wrap="square" anchor="ctr" lIns="0" rIns="0" tIns="0" bIns="0">
             <a:spAutoFit/>
+            <a:extLst>
+              <a:ext uri="{8AF73BB6-5E31-4F0F-A399-3D98F3B95FD9}">
+                <ns27:textLayout xmlns:ns27="urn:pptxdsl:text-layout:v1" role="natural"/>
+              </a:ext>
+            </a:extLst>
           </a:bodyPr>
           <a:lstStyle/>
           <a:p>
@@ -45342,6 +48057,11 @@
         <p:txBody>
           <a:bodyPr wrap="square" anchor="ctr" lIns="0" rIns="0" tIns="0" bIns="0">
             <a:spAutoFit/>
+            <a:extLst>
+              <a:ext uri="{8AF73BB6-5E31-4F0F-A399-3D98F3B95FD9}">
+                <ns32:textLayout xmlns:ns32="urn:pptxdsl:text-layout:v1" role="body"/>
+              </a:ext>
+            </a:extLst>
           </a:bodyPr>
           <a:lstStyle/>
           <a:p>
@@ -45413,6 +48133,11 @@
         <p:txBody>
           <a:bodyPr wrap="square" anchor="ctr" lIns="0" rIns="0" tIns="0" bIns="0">
             <a:spAutoFit/>
+            <a:extLst>
+              <a:ext uri="{8AF73BB6-5E31-4F0F-A399-3D98F3B95FD9}">
+                <ns37:textLayout xmlns:ns37="urn:pptxdsl:text-layout:v1" role="compact"/>
+              </a:ext>
+            </a:extLst>
           </a:bodyPr>
           <a:lstStyle/>
           <a:p>
@@ -45454,6 +48179,11 @@
         <p:txBody>
           <a:bodyPr wrap="square" anchor="ctr" lIns="0" rIns="0" tIns="0" bIns="0">
             <a:spAutoFit/>
+            <a:extLst>
+              <a:ext uri="{8AF73BB6-5E31-4F0F-A399-3D98F3B95FD9}">
+                <ns42:textLayout xmlns:ns42="urn:pptxdsl:text-layout:v1" role="body"/>
+              </a:ext>
+            </a:extLst>
           </a:bodyPr>
           <a:lstStyle/>
           <a:p>
@@ -45495,6 +48225,11 @@
         <p:txBody>
           <a:bodyPr wrap="square" anchor="ctr" lIns="0" rIns="0" tIns="0" bIns="0">
             <a:spAutoFit/>
+            <a:extLst>
+              <a:ext uri="{8AF73BB6-5E31-4F0F-A399-3D98F3B95FD9}">
+                <ns47:textLayout xmlns:ns47="urn:pptxdsl:text-layout:v1" role="body"/>
+              </a:ext>
+            </a:extLst>
           </a:bodyPr>
           <a:lstStyle/>
           <a:p>
@@ -45566,6 +48301,11 @@
         <p:txBody>
           <a:bodyPr wrap="square" anchor="ctr" lIns="0" rIns="0" tIns="0" bIns="0">
             <a:spAutoFit/>
+            <a:extLst>
+              <a:ext uri="{8AF73BB6-5E31-4F0F-A399-3D98F3B95FD9}">
+                <ns52:textLayout xmlns:ns52="urn:pptxdsl:text-layout:v1" role="compact"/>
+              </a:ext>
+            </a:extLst>
           </a:bodyPr>
           <a:lstStyle/>
           <a:p>
@@ -45607,6 +48347,11 @@
         <p:txBody>
           <a:bodyPr wrap="square" anchor="ctr" lIns="0" rIns="0" tIns="0" bIns="0">
             <a:spAutoFit/>
+            <a:extLst>
+              <a:ext uri="{8AF73BB6-5E31-4F0F-A399-3D98F3B95FD9}">
+                <ns57:textLayout xmlns:ns57="urn:pptxdsl:text-layout:v1" role="body"/>
+              </a:ext>
+            </a:extLst>
           </a:bodyPr>
           <a:lstStyle/>
           <a:p>
@@ -45648,6 +48393,11 @@
         <p:txBody>
           <a:bodyPr wrap="square" anchor="ctr" lIns="0" rIns="0" tIns="0" bIns="0">
             <a:spAutoFit/>
+            <a:extLst>
+              <a:ext uri="{8AF73BB6-5E31-4F0F-A399-3D98F3B95FD9}">
+                <ns62:textLayout xmlns:ns62="urn:pptxdsl:text-layout:v1" role="body"/>
+              </a:ext>
+            </a:extLst>
           </a:bodyPr>
           <a:lstStyle/>
           <a:p>
@@ -45719,6 +48469,11 @@
         <p:txBody>
           <a:bodyPr wrap="square" anchor="ctr" lIns="0" rIns="0" tIns="0" bIns="0">
             <a:spAutoFit/>
+            <a:extLst>
+              <a:ext uri="{8AF73BB6-5E31-4F0F-A399-3D98F3B95FD9}">
+                <ns67:textLayout xmlns:ns67="urn:pptxdsl:text-layout:v1" role="compact"/>
+              </a:ext>
+            </a:extLst>
           </a:bodyPr>
           <a:lstStyle/>
           <a:p>
@@ -45760,6 +48515,11 @@
         <p:txBody>
           <a:bodyPr wrap="square" anchor="ctr" lIns="0" rIns="0" tIns="0" bIns="0">
             <a:spAutoFit/>
+            <a:extLst>
+              <a:ext uri="{8AF73BB6-5E31-4F0F-A399-3D98F3B95FD9}">
+                <ns72:textLayout xmlns:ns72="urn:pptxdsl:text-layout:v1" role="body"/>
+              </a:ext>
+            </a:extLst>
           </a:bodyPr>
           <a:lstStyle/>
           <a:p>
@@ -45801,6 +48561,11 @@
         <p:txBody>
           <a:bodyPr wrap="square" anchor="ctr" lIns="0" rIns="0" tIns="0" bIns="0">
             <a:spAutoFit/>
+            <a:extLst>
+              <a:ext uri="{8AF73BB6-5E31-4F0F-A399-3D98F3B95FD9}">
+                <ns77:textLayout xmlns:ns77="urn:pptxdsl:text-layout:v1" role="body"/>
+              </a:ext>
+            </a:extLst>
           </a:bodyPr>
           <a:lstStyle/>
           <a:p>
@@ -45872,6 +48637,11 @@
         <p:txBody>
           <a:bodyPr wrap="square" anchor="ctr" lIns="0" rIns="0" tIns="0" bIns="0">
             <a:spAutoFit/>
+            <a:extLst>
+              <a:ext uri="{8AF73BB6-5E31-4F0F-A399-3D98F3B95FD9}">
+                <ns82:textLayout xmlns:ns82="urn:pptxdsl:text-layout:v1" role="compact"/>
+              </a:ext>
+            </a:extLst>
           </a:bodyPr>
           <a:lstStyle/>
           <a:p>
@@ -45913,6 +48683,11 @@
         <p:txBody>
           <a:bodyPr wrap="square" anchor="ctr" lIns="0" rIns="0" tIns="0" bIns="0">
             <a:spAutoFit/>
+            <a:extLst>
+              <a:ext uri="{8AF73BB6-5E31-4F0F-A399-3D98F3B95FD9}">
+                <ns87:textLayout xmlns:ns87="urn:pptxdsl:text-layout:v1" role="body"/>
+              </a:ext>
+            </a:extLst>
           </a:bodyPr>
           <a:lstStyle/>
           <a:p>
@@ -45954,6 +48729,11 @@
         <p:txBody>
           <a:bodyPr wrap="square" anchor="ctr" lIns="0" rIns="0" tIns="0" bIns="0">
             <a:spAutoFit/>
+            <a:extLst>
+              <a:ext uri="{8AF73BB6-5E31-4F0F-A399-3D98F3B95FD9}">
+                <ns92:textLayout xmlns:ns92="urn:pptxdsl:text-layout:v1" role="body"/>
+              </a:ext>
+            </a:extLst>
           </a:bodyPr>
           <a:lstStyle/>
           <a:p>
@@ -46025,6 +48805,11 @@
         <p:txBody>
           <a:bodyPr wrap="square" anchor="ctr" lIns="0" rIns="0" tIns="0" bIns="0">
             <a:spAutoFit/>
+            <a:extLst>
+              <a:ext uri="{8AF73BB6-5E31-4F0F-A399-3D98F3B95FD9}">
+                <ns97:textLayout xmlns:ns97="urn:pptxdsl:text-layout:v1" role="compact"/>
+              </a:ext>
+            </a:extLst>
           </a:bodyPr>
           <a:lstStyle/>
           <a:p>
@@ -46066,6 +48851,11 @@
         <p:txBody>
           <a:bodyPr wrap="square" anchor="ctr" lIns="0" rIns="0" tIns="0" bIns="0">
             <a:spAutoFit/>
+            <a:extLst>
+              <a:ext uri="{8AF73BB6-5E31-4F0F-A399-3D98F3B95FD9}">
+                <ns102:textLayout xmlns:ns102="urn:pptxdsl:text-layout:v1" role="body"/>
+              </a:ext>
+            </a:extLst>
           </a:bodyPr>
           <a:lstStyle/>
           <a:p>
@@ -46451,6 +49241,11 @@
         <p:txBody>
           <a:bodyPr wrap="square" anchor="ctr" lIns="0" rIns="0" tIns="0" bIns="0">
             <a:spAutoFit/>
+            <a:extLst>
+              <a:ext uri="{8AF73BB6-5E31-4F0F-A399-3D98F3B95FD9}">
+                <ns107:textLayout xmlns:ns107="urn:pptxdsl:text-layout:v1" role="body"/>
+              </a:ext>
+            </a:extLst>
           </a:bodyPr>
           <a:lstStyle/>
           <a:p>
@@ -46492,6 +49287,11 @@
         <p:txBody>
           <a:bodyPr wrap="none" anchor="ctr" lIns="0" rIns="0" tIns="0" bIns="0">
             <a:spAutoFit/>
+            <a:extLst>
+              <a:ext uri="{8AF73BB6-5E31-4F0F-A399-3D98F3B95FD9}">
+                <ns112:textLayout xmlns:ns112="urn:pptxdsl:text-layout:v1" role="body"/>
+              </a:ext>
+            </a:extLst>
           </a:bodyPr>
           <a:lstStyle/>
           <a:p>
@@ -46606,6 +49406,11 @@
         <p:txBody>
           <a:bodyPr wrap="square" anchor="t" lIns="0" rIns="0" tIns="0" bIns="0">
             <a:spAutoFit/>
+            <a:extLst>
+              <a:ext uri="{8AF73BB6-5E31-4F0F-A399-3D98F3B95FD9}">
+                <ns2:textLayout xmlns:ns2="urn:pptxdsl:text-layout:v1" role="natural"/>
+              </a:ext>
+            </a:extLst>
           </a:bodyPr>
           <a:lstStyle/>
           <a:p>
@@ -46647,6 +49452,11 @@
         <p:txBody>
           <a:bodyPr wrap="square" anchor="t" lIns="0" rIns="0" tIns="0" bIns="0">
             <a:spAutoFit/>
+            <a:extLst>
+              <a:ext uri="{8AF73BB6-5E31-4F0F-A399-3D98F3B95FD9}">
+                <ns7:textLayout xmlns:ns7="urn:pptxdsl:text-layout:v1" role="natural"/>
+              </a:ext>
+            </a:extLst>
           </a:bodyPr>
           <a:lstStyle/>
           <a:p>
@@ -46688,6 +49498,11 @@
         <p:txBody>
           <a:bodyPr wrap="square" anchor="ctr" lIns="0" rIns="0" tIns="0" bIns="0">
             <a:spAutoFit/>
+            <a:extLst>
+              <a:ext uri="{8AF73BB6-5E31-4F0F-A399-3D98F3B95FD9}">
+                <ns12:textLayout xmlns:ns12="urn:pptxdsl:text-layout:v1" role="natural"/>
+              </a:ext>
+            </a:extLst>
           </a:bodyPr>
           <a:lstStyle/>
           <a:p>
@@ -46765,6 +49580,11 @@
         <p:txBody>
           <a:bodyPr wrap="square" anchor="ctr" lIns="0" rIns="0" tIns="0" bIns="0">
             <a:spAutoFit/>
+            <a:extLst>
+              <a:ext uri="{8AF73BB6-5E31-4F0F-A399-3D98F3B95FD9}">
+                <ns17:textLayout xmlns:ns17="urn:pptxdsl:text-layout:v1" role="natural"/>
+              </a:ext>
+            </a:extLst>
           </a:bodyPr>
           <a:lstStyle/>
           <a:p>
@@ -47340,6 +50160,11 @@
         <p:txBody>
           <a:bodyPr wrap="square" anchor="ctr" lIns="0" rIns="0" tIns="0" bIns="0">
             <a:spAutoFit/>
+            <a:extLst>
+              <a:ext uri="{8AF73BB6-5E31-4F0F-A399-3D98F3B95FD9}">
+                <ns28:textLayout xmlns:ns28="urn:pptxdsl:text-layout:v1" role="natural"/>
+              </a:ext>
+            </a:extLst>
           </a:bodyPr>
           <a:lstStyle/>
           <a:p>
@@ -47381,6 +50206,11 @@
         <p:txBody>
           <a:bodyPr wrap="square" anchor="ctr" lIns="0" rIns="0" tIns="0" bIns="0">
             <a:spAutoFit/>
+            <a:extLst>
+              <a:ext uri="{8AF73BB6-5E31-4F0F-A399-3D98F3B95FD9}">
+                <ns33:textLayout xmlns:ns33="urn:pptxdsl:text-layout:v1" role="natural"/>
+              </a:ext>
+            </a:extLst>
           </a:bodyPr>
           <a:lstStyle/>
           <a:p>
@@ -47518,6 +50348,11 @@
         <p:txBody>
           <a:bodyPr wrap="square" anchor="ctr" lIns="0" rIns="0" tIns="0" bIns="0">
             <a:spAutoFit/>
+            <a:extLst>
+              <a:ext uri="{8AF73BB6-5E31-4F0F-A399-3D98F3B95FD9}">
+                <ns38:textLayout xmlns:ns38="urn:pptxdsl:text-layout:v1" role="natural"/>
+              </a:ext>
+            </a:extLst>
           </a:bodyPr>
           <a:lstStyle/>
           <a:p>
@@ -47559,6 +50394,11 @@
         <p:txBody>
           <a:bodyPr wrap="square" anchor="ctr" lIns="0" rIns="0" tIns="0" bIns="0">
             <a:spAutoFit/>
+            <a:extLst>
+              <a:ext uri="{8AF73BB6-5E31-4F0F-A399-3D98F3B95FD9}">
+                <ns43:textLayout xmlns:ns43="urn:pptxdsl:text-layout:v1" role="natural"/>
+              </a:ext>
+            </a:extLst>
           </a:bodyPr>
           <a:lstStyle/>
           <a:p>
@@ -47696,6 +50536,11 @@
         <p:txBody>
           <a:bodyPr wrap="square" anchor="ctr" lIns="0" rIns="0" tIns="0" bIns="0">
             <a:spAutoFit/>
+            <a:extLst>
+              <a:ext uri="{8AF73BB6-5E31-4F0F-A399-3D98F3B95FD9}">
+                <ns48:textLayout xmlns:ns48="urn:pptxdsl:text-layout:v1" role="natural"/>
+              </a:ext>
+            </a:extLst>
           </a:bodyPr>
           <a:lstStyle/>
           <a:p>
@@ -47737,6 +50582,11 @@
         <p:txBody>
           <a:bodyPr wrap="square" anchor="ctr" lIns="0" rIns="0" tIns="0" bIns="0">
             <a:spAutoFit/>
+            <a:extLst>
+              <a:ext uri="{8AF73BB6-5E31-4F0F-A399-3D98F3B95FD9}">
+                <ns53:textLayout xmlns:ns53="urn:pptxdsl:text-layout:v1" role="natural"/>
+              </a:ext>
+            </a:extLst>
           </a:bodyPr>
           <a:lstStyle/>
           <a:p>
@@ -47874,6 +50724,11 @@
         <p:txBody>
           <a:bodyPr wrap="square" anchor="ctr" lIns="0" rIns="0" tIns="0" bIns="0">
             <a:spAutoFit/>
+            <a:extLst>
+              <a:ext uri="{8AF73BB6-5E31-4F0F-A399-3D98F3B95FD9}">
+                <ns58:textLayout xmlns:ns58="urn:pptxdsl:text-layout:v1" role="natural"/>
+              </a:ext>
+            </a:extLst>
           </a:bodyPr>
           <a:lstStyle/>
           <a:p>
@@ -47915,6 +50770,11 @@
         <p:txBody>
           <a:bodyPr wrap="square" anchor="ctr" lIns="0" rIns="0" tIns="0" bIns="0">
             <a:spAutoFit/>
+            <a:extLst>
+              <a:ext uri="{8AF73BB6-5E31-4F0F-A399-3D98F3B95FD9}">
+                <ns63:textLayout xmlns:ns63="urn:pptxdsl:text-layout:v1" role="natural"/>
+              </a:ext>
+            </a:extLst>
           </a:bodyPr>
           <a:lstStyle/>
           <a:p>
@@ -48052,6 +50912,11 @@
         <p:txBody>
           <a:bodyPr wrap="square" anchor="ctr" lIns="0" rIns="0" tIns="0" bIns="0">
             <a:spAutoFit/>
+            <a:extLst>
+              <a:ext uri="{8AF73BB6-5E31-4F0F-A399-3D98F3B95FD9}">
+                <ns68:textLayout xmlns:ns68="urn:pptxdsl:text-layout:v1" role="natural"/>
+              </a:ext>
+            </a:extLst>
           </a:bodyPr>
           <a:lstStyle/>
           <a:p>
@@ -48093,6 +50958,11 @@
         <p:txBody>
           <a:bodyPr wrap="square" anchor="ctr" lIns="0" rIns="0" tIns="0" bIns="0">
             <a:spAutoFit/>
+            <a:extLst>
+              <a:ext uri="{8AF73BB6-5E31-4F0F-A399-3D98F3B95FD9}">
+                <ns73:textLayout xmlns:ns73="urn:pptxdsl:text-layout:v1" role="natural"/>
+              </a:ext>
+            </a:extLst>
           </a:bodyPr>
           <a:lstStyle/>
           <a:p>
@@ -48194,6 +51064,11 @@
         <p:txBody>
           <a:bodyPr wrap="square" anchor="ctr" lIns="0" rIns="0" tIns="0" bIns="0">
             <a:spAutoFit/>
+            <a:extLst>
+              <a:ext uri="{8AF73BB6-5E31-4F0F-A399-3D98F3B95FD9}">
+                <ns78:textLayout xmlns:ns78="urn:pptxdsl:text-layout:v1" role="natural"/>
+              </a:ext>
+            </a:extLst>
           </a:bodyPr>
           <a:lstStyle/>
           <a:p>
@@ -48235,6 +51110,11 @@
         <p:txBody>
           <a:bodyPr wrap="square" anchor="ctr" lIns="0" rIns="0" tIns="0" bIns="0">
             <a:spAutoFit/>
+            <a:extLst>
+              <a:ext uri="{8AF73BB6-5E31-4F0F-A399-3D98F3B95FD9}">
+                <ns83:textLayout xmlns:ns83="urn:pptxdsl:text-layout:v1" role="natural"/>
+              </a:ext>
+            </a:extLst>
           </a:bodyPr>
           <a:lstStyle/>
           <a:p>
@@ -48372,6 +51252,11 @@
         <p:txBody>
           <a:bodyPr wrap="square" anchor="ctr" lIns="0" rIns="0" tIns="0" bIns="0">
             <a:spAutoFit/>
+            <a:extLst>
+              <a:ext uri="{8AF73BB6-5E31-4F0F-A399-3D98F3B95FD9}">
+                <ns88:textLayout xmlns:ns88="urn:pptxdsl:text-layout:v1" role="natural"/>
+              </a:ext>
+            </a:extLst>
           </a:bodyPr>
           <a:lstStyle/>
           <a:p>
@@ -48413,6 +51298,11 @@
         <p:txBody>
           <a:bodyPr wrap="square" anchor="ctr" lIns="0" rIns="0" tIns="0" bIns="0">
             <a:spAutoFit/>
+            <a:extLst>
+              <a:ext uri="{8AF73BB6-5E31-4F0F-A399-3D98F3B95FD9}">
+                <ns93:textLayout xmlns:ns93="urn:pptxdsl:text-layout:v1" role="natural"/>
+              </a:ext>
+            </a:extLst>
           </a:bodyPr>
           <a:lstStyle/>
           <a:p>
@@ -48550,6 +51440,11 @@
         <p:txBody>
           <a:bodyPr wrap="square" anchor="ctr" lIns="0" rIns="0" tIns="0" bIns="0">
             <a:spAutoFit/>
+            <a:extLst>
+              <a:ext uri="{8AF73BB6-5E31-4F0F-A399-3D98F3B95FD9}">
+                <ns98:textLayout xmlns:ns98="urn:pptxdsl:text-layout:v1" role="natural"/>
+              </a:ext>
+            </a:extLst>
           </a:bodyPr>
           <a:lstStyle/>
           <a:p>
@@ -48591,6 +51486,11 @@
         <p:txBody>
           <a:bodyPr wrap="square" anchor="ctr" lIns="0" rIns="0" tIns="0" bIns="0">
             <a:spAutoFit/>
+            <a:extLst>
+              <a:ext uri="{8AF73BB6-5E31-4F0F-A399-3D98F3B95FD9}">
+                <ns103:textLayout xmlns:ns103="urn:pptxdsl:text-layout:v1" role="natural"/>
+              </a:ext>
+            </a:extLst>
           </a:bodyPr>
           <a:lstStyle/>
           <a:p>
@@ -48728,6 +51628,11 @@
         <p:txBody>
           <a:bodyPr wrap="square" anchor="ctr" lIns="0" rIns="0" tIns="0" bIns="0">
             <a:spAutoFit/>
+            <a:extLst>
+              <a:ext uri="{8AF73BB6-5E31-4F0F-A399-3D98F3B95FD9}">
+                <ns108:textLayout xmlns:ns108="urn:pptxdsl:text-layout:v1" role="natural"/>
+              </a:ext>
+            </a:extLst>
           </a:bodyPr>
           <a:lstStyle/>
           <a:p>
@@ -48769,6 +51674,11 @@
         <p:txBody>
           <a:bodyPr wrap="square" anchor="ctr" lIns="0" rIns="0" tIns="0" bIns="0">
             <a:spAutoFit/>
+            <a:extLst>
+              <a:ext uri="{8AF73BB6-5E31-4F0F-A399-3D98F3B95FD9}">
+                <ns113:textLayout xmlns:ns113="urn:pptxdsl:text-layout:v1" role="natural"/>
+              </a:ext>
+            </a:extLst>
           </a:bodyPr>
           <a:lstStyle/>
           <a:p>
@@ -48906,6 +51816,11 @@
         <p:txBody>
           <a:bodyPr wrap="square" anchor="ctr" lIns="0" rIns="0" tIns="0" bIns="0">
             <a:spAutoFit/>
+            <a:extLst>
+              <a:ext uri="{8AF73BB6-5E31-4F0F-A399-3D98F3B95FD9}">
+                <ns118:textLayout xmlns:ns118="urn:pptxdsl:text-layout:v1" role="natural"/>
+              </a:ext>
+            </a:extLst>
           </a:bodyPr>
           <a:lstStyle/>
           <a:p>
@@ -48947,6 +51862,11 @@
         <p:txBody>
           <a:bodyPr wrap="square" anchor="ctr" lIns="0" rIns="0" tIns="0" bIns="0">
             <a:spAutoFit/>
+            <a:extLst>
+              <a:ext uri="{8AF73BB6-5E31-4F0F-A399-3D98F3B95FD9}">
+                <ns123:textLayout xmlns:ns123="urn:pptxdsl:text-layout:v1" role="natural"/>
+              </a:ext>
+            </a:extLst>
           </a:bodyPr>
           <a:lstStyle/>
           <a:p>
@@ -49332,6 +52252,11 @@
         <p:txBody>
           <a:bodyPr wrap="square" anchor="ctr" lIns="0" rIns="0" tIns="0" bIns="0">
             <a:spAutoFit/>
+            <a:extLst>
+              <a:ext uri="{8AF73BB6-5E31-4F0F-A399-3D98F3B95FD9}">
+                <ns128:textLayout xmlns:ns128="urn:pptxdsl:text-layout:v1" role="body"/>
+              </a:ext>
+            </a:extLst>
           </a:bodyPr>
           <a:lstStyle/>
           <a:p>
@@ -49373,6 +52298,11 @@
         <p:txBody>
           <a:bodyPr wrap="none" anchor="ctr" lIns="0" rIns="0" tIns="0" bIns="0">
             <a:spAutoFit/>
+            <a:extLst>
+              <a:ext uri="{8AF73BB6-5E31-4F0F-A399-3D98F3B95FD9}">
+                <ns133:textLayout xmlns:ns133="urn:pptxdsl:text-layout:v1" role="body"/>
+              </a:ext>
+            </a:extLst>
           </a:bodyPr>
           <a:lstStyle/>
           <a:p>
@@ -49487,6 +52417,11 @@
         <p:txBody>
           <a:bodyPr wrap="square" anchor="t" lIns="0" rIns="0" tIns="0" bIns="0">
             <a:spAutoFit/>
+            <a:extLst>
+              <a:ext uri="{8AF73BB6-5E31-4F0F-A399-3D98F3B95FD9}">
+                <ns2:textLayout xmlns:ns2="urn:pptxdsl:text-layout:v1" role="natural"/>
+              </a:ext>
+            </a:extLst>
           </a:bodyPr>
           <a:lstStyle/>
           <a:p>
@@ -49528,6 +52463,11 @@
         <p:txBody>
           <a:bodyPr wrap="square" anchor="t" lIns="0" rIns="0" tIns="0" bIns="0">
             <a:spAutoFit/>
+            <a:extLst>
+              <a:ext uri="{8AF73BB6-5E31-4F0F-A399-3D98F3B95FD9}">
+                <ns7:textLayout xmlns:ns7="urn:pptxdsl:text-layout:v1" role="natural"/>
+              </a:ext>
+            </a:extLst>
           </a:bodyPr>
           <a:lstStyle/>
           <a:p>
@@ -49569,6 +52509,11 @@
         <p:txBody>
           <a:bodyPr wrap="square" anchor="t" lIns="0" rIns="0" tIns="0" bIns="0">
             <a:spAutoFit/>
+            <a:extLst>
+              <a:ext uri="{8AF73BB6-5E31-4F0F-A399-3D98F3B95FD9}">
+                <ns12:textLayout xmlns:ns12="urn:pptxdsl:text-layout:v1" role="body"/>
+              </a:ext>
+            </a:extLst>
           </a:bodyPr>
           <a:lstStyle/>
           <a:p>
@@ -49642,6 +52587,11 @@
         <p:txBody>
           <a:bodyPr wrap="square" anchor="ctr" lIns="0" rIns="0" tIns="0" bIns="0">
             <a:spAutoFit/>
+            <a:extLst>
+              <a:ext uri="{8AF73BB6-5E31-4F0F-A399-3D98F3B95FD9}">
+                <ns17:textLayout xmlns:ns17="urn:pptxdsl:text-layout:v1" role="natural"/>
+              </a:ext>
+            </a:extLst>
           </a:bodyPr>
           <a:lstStyle/>
           <a:p>
@@ -49715,6 +52665,11 @@
         <p:txBody>
           <a:bodyPr wrap="square" anchor="ctr" lIns="0" rIns="0" tIns="0" bIns="0">
             <a:spAutoFit/>
+            <a:extLst>
+              <a:ext uri="{8AF73BB6-5E31-4F0F-A399-3D98F3B95FD9}">
+                <ns22:textLayout xmlns:ns22="urn:pptxdsl:text-layout:v1" role="natural"/>
+              </a:ext>
+            </a:extLst>
           </a:bodyPr>
           <a:lstStyle/>
           <a:p>
@@ -49788,6 +52743,11 @@
         <p:txBody>
           <a:bodyPr wrap="square" anchor="ctr" lIns="0" rIns="0" tIns="0" bIns="0">
             <a:spAutoFit/>
+            <a:extLst>
+              <a:ext uri="{8AF73BB6-5E31-4F0F-A399-3D98F3B95FD9}">
+                <ns27:textLayout xmlns:ns27="urn:pptxdsl:text-layout:v1" role="natural"/>
+              </a:ext>
+            </a:extLst>
           </a:bodyPr>
           <a:lstStyle/>
           <a:p>
@@ -49861,6 +52821,11 @@
         <p:txBody>
           <a:bodyPr wrap="square" anchor="ctr" lIns="0" rIns="0" tIns="0" bIns="0">
             <a:spAutoFit/>
+            <a:extLst>
+              <a:ext uri="{8AF73BB6-5E31-4F0F-A399-3D98F3B95FD9}">
+                <ns32:textLayout xmlns:ns32="urn:pptxdsl:text-layout:v1" role="natural"/>
+              </a:ext>
+            </a:extLst>
           </a:bodyPr>
           <a:lstStyle/>
           <a:p>
@@ -49962,6 +52927,11 @@
         <p:txBody>
           <a:bodyPr wrap="square" anchor="ctr" lIns="0" rIns="0" tIns="0" bIns="0">
             <a:spAutoFit/>
+            <a:extLst>
+              <a:ext uri="{8AF73BB6-5E31-4F0F-A399-3D98F3B95FD9}">
+                <ns37:textLayout xmlns:ns37="urn:pptxdsl:text-layout:v1" role="natural"/>
+              </a:ext>
+            </a:extLst>
           </a:bodyPr>
           <a:lstStyle/>
           <a:p>
@@ -50099,6 +53069,11 @@
         <p:txBody>
           <a:bodyPr wrap="square" anchor="ctr" lIns="0" rIns="0" tIns="0" bIns="0">
             <a:spAutoFit/>
+            <a:extLst>
+              <a:ext uri="{8AF73BB6-5E31-4F0F-A399-3D98F3B95FD9}">
+                <ns42:textLayout xmlns:ns42="urn:pptxdsl:text-layout:v1" role="natural"/>
+              </a:ext>
+            </a:extLst>
           </a:bodyPr>
           <a:lstStyle/>
           <a:p>
@@ -50236,6 +53211,11 @@
         <p:txBody>
           <a:bodyPr wrap="square" anchor="ctr" lIns="0" rIns="0" tIns="0" bIns="0">
             <a:spAutoFit/>
+            <a:extLst>
+              <a:ext uri="{8AF73BB6-5E31-4F0F-A399-3D98F3B95FD9}">
+                <ns47:textLayout xmlns:ns47="urn:pptxdsl:text-layout:v1" role="natural"/>
+              </a:ext>
+            </a:extLst>
           </a:bodyPr>
           <a:lstStyle/>
           <a:p>
@@ -50373,6 +53353,11 @@
         <p:txBody>
           <a:bodyPr wrap="square" anchor="ctr" lIns="0" rIns="0" tIns="0" bIns="0">
             <a:spAutoFit/>
+            <a:extLst>
+              <a:ext uri="{8AF73BB6-5E31-4F0F-A399-3D98F3B95FD9}">
+                <ns52:textLayout xmlns:ns52="urn:pptxdsl:text-layout:v1" role="natural"/>
+              </a:ext>
+            </a:extLst>
           </a:bodyPr>
           <a:lstStyle/>
           <a:p>
@@ -51537,6 +54522,11 @@
         <p:txBody>
           <a:bodyPr wrap="square" anchor="ctr" lIns="0" rIns="0" tIns="0" bIns="0">
             <a:spAutoFit/>
+            <a:extLst>
+              <a:ext uri="{8AF73BB6-5E31-4F0F-A399-3D98F3B95FD9}">
+                <ns68:textLayout xmlns:ns68="urn:pptxdsl:text-layout:v1" role="natural"/>
+              </a:ext>
+            </a:extLst>
           </a:bodyPr>
           <a:lstStyle/>
           <a:p>
@@ -51610,6 +54600,11 @@
         <p:txBody>
           <a:bodyPr wrap="square" anchor="ctr" lIns="0" rIns="0" tIns="0" bIns="0">
             <a:spAutoFit/>
+            <a:extLst>
+              <a:ext uri="{8AF73BB6-5E31-4F0F-A399-3D98F3B95FD9}">
+                <ns73:textLayout xmlns:ns73="urn:pptxdsl:text-layout:v1" role="natural"/>
+              </a:ext>
+            </a:extLst>
           </a:bodyPr>
           <a:lstStyle/>
           <a:p>
@@ -51641,7 +54636,7 @@
         <p:spPr>
           <a:xfrm>
             <a:off x="4215384" y="3305048"/>
-            <a:ext cx="873179" cy="457200"/>
+            <a:ext cx="873180" cy="457200"/>
           </a:xfrm>
           <a:prstGeom prst="rect">
             <a:avLst/>
@@ -51673,7 +54668,7 @@
         <p:spPr>
           <a:xfrm>
             <a:off x="4270248" y="3305048"/>
-            <a:ext cx="763451" cy="457200"/>
+            <a:ext cx="763452" cy="457200"/>
           </a:xfrm>
           <a:prstGeom prst="rect">
             <a:avLst/>
@@ -51683,6 +54678,11 @@
         <p:txBody>
           <a:bodyPr wrap="square" anchor="ctr" lIns="0" rIns="0" tIns="0" bIns="0">
             <a:spAutoFit/>
+            <a:extLst>
+              <a:ext uri="{8AF73BB6-5E31-4F0F-A399-3D98F3B95FD9}">
+                <ns78:textLayout xmlns:ns78="urn:pptxdsl:text-layout:v1" role="natural"/>
+              </a:ext>
+            </a:extLst>
           </a:bodyPr>
           <a:lstStyle/>
           <a:p>
@@ -51756,6 +54756,11 @@
         <p:txBody>
           <a:bodyPr wrap="square" anchor="ctr" lIns="0" rIns="0" tIns="0" bIns="0">
             <a:spAutoFit/>
+            <a:extLst>
+              <a:ext uri="{8AF73BB6-5E31-4F0F-A399-3D98F3B95FD9}">
+                <ns83:textLayout xmlns:ns83="urn:pptxdsl:text-layout:v1" role="natural"/>
+              </a:ext>
+            </a:extLst>
           </a:bodyPr>
           <a:lstStyle/>
           <a:p>
@@ -51818,7 +54823,7 @@
         </p:nvSpPr>
         <p:spPr>
           <a:xfrm>
-            <a:off x="5337810" y="4173727"/>
+            <a:off x="5337809" y="4173727"/>
             <a:ext cx="1083564" cy="457200"/>
           </a:xfrm>
           <a:prstGeom prst="rect">
@@ -51829,6 +54834,11 @@
         <p:txBody>
           <a:bodyPr wrap="square" anchor="ctr" lIns="0" rIns="0" tIns="0" bIns="0">
             <a:spAutoFit/>
+            <a:extLst>
+              <a:ext uri="{8AF73BB6-5E31-4F0F-A399-3D98F3B95FD9}">
+                <ns88:textLayout xmlns:ns88="urn:pptxdsl:text-layout:v1" role="natural"/>
+              </a:ext>
+            </a:extLst>
           </a:bodyPr>
           <a:lstStyle/>
           <a:p>
@@ -51902,6 +54912,11 @@
         <p:txBody>
           <a:bodyPr wrap="square" anchor="ctr" lIns="0" rIns="0" tIns="0" bIns="0">
             <a:spAutoFit/>
+            <a:extLst>
+              <a:ext uri="{8AF73BB6-5E31-4F0F-A399-3D98F3B95FD9}">
+                <ns93:textLayout xmlns:ns93="urn:pptxdsl:text-layout:v1" role="natural"/>
+              </a:ext>
+            </a:extLst>
           </a:bodyPr>
           <a:lstStyle/>
           <a:p>
@@ -51975,6 +54990,11 @@
         <p:txBody>
           <a:bodyPr wrap="square" anchor="ctr" lIns="0" rIns="0" tIns="0" bIns="0">
             <a:spAutoFit/>
+            <a:extLst>
+              <a:ext uri="{8AF73BB6-5E31-4F0F-A399-3D98F3B95FD9}">
+                <ns98:textLayout xmlns:ns98="urn:pptxdsl:text-layout:v1" role="natural"/>
+              </a:ext>
+            </a:extLst>
           </a:bodyPr>
           <a:lstStyle/>
           <a:p>
@@ -52048,6 +55068,11 @@
         <p:txBody>
           <a:bodyPr wrap="square" anchor="ctr" lIns="0" rIns="0" tIns="0" bIns="0">
             <a:spAutoFit/>
+            <a:extLst>
+              <a:ext uri="{8AF73BB6-5E31-4F0F-A399-3D98F3B95FD9}">
+                <ns103:textLayout xmlns:ns103="urn:pptxdsl:text-layout:v1" role="natural"/>
+              </a:ext>
+            </a:extLst>
           </a:bodyPr>
           <a:lstStyle/>
           <a:p>
@@ -52121,6 +55146,11 @@
         <p:txBody>
           <a:bodyPr wrap="square" anchor="ctr" lIns="0" rIns="0" tIns="0" bIns="0">
             <a:spAutoFit/>
+            <a:extLst>
+              <a:ext uri="{8AF73BB6-5E31-4F0F-A399-3D98F3B95FD9}">
+                <ns108:textLayout xmlns:ns108="urn:pptxdsl:text-layout:v1" role="natural"/>
+              </a:ext>
+            </a:extLst>
           </a:bodyPr>
           <a:lstStyle/>
           <a:p>
@@ -52194,6 +55224,11 @@
         <p:txBody>
           <a:bodyPr wrap="square" anchor="ctr" lIns="0" rIns="0" tIns="0" bIns="0">
             <a:spAutoFit/>
+            <a:extLst>
+              <a:ext uri="{8AF73BB6-5E31-4F0F-A399-3D98F3B95FD9}">
+                <ns113:textLayout xmlns:ns113="urn:pptxdsl:text-layout:v1" role="natural"/>
+              </a:ext>
+            </a:extLst>
           </a:bodyPr>
           <a:lstStyle/>
           <a:p>
@@ -52267,6 +55302,11 @@
         <p:txBody>
           <a:bodyPr wrap="square" anchor="ctr" lIns="0" rIns="0" tIns="0" bIns="0">
             <a:spAutoFit/>
+            <a:extLst>
+              <a:ext uri="{8AF73BB6-5E31-4F0F-A399-3D98F3B95FD9}">
+                <ns118:textLayout xmlns:ns118="urn:pptxdsl:text-layout:v1" role="natural"/>
+              </a:ext>
+            </a:extLst>
           </a:bodyPr>
           <a:lstStyle/>
           <a:p>
@@ -52352,6 +55392,11 @@
         <p:txBody>
           <a:bodyPr wrap="square" anchor="ctr" lIns="0" rIns="0" tIns="0" bIns="0">
             <a:spAutoFit/>
+            <a:extLst>
+              <a:ext uri="{8AF73BB6-5E31-4F0F-A399-3D98F3B95FD9}">
+                <ns123:textLayout xmlns:ns123="urn:pptxdsl:text-layout:v1" role="body"/>
+              </a:ext>
+            </a:extLst>
           </a:bodyPr>
           <a:lstStyle/>
           <a:p>
@@ -52393,6 +55438,11 @@
         <p:txBody>
           <a:bodyPr wrap="none" anchor="ctr" lIns="0" rIns="0" tIns="0" bIns="0">
             <a:spAutoFit/>
+            <a:extLst>
+              <a:ext uri="{8AF73BB6-5E31-4F0F-A399-3D98F3B95FD9}">
+                <ns128:textLayout xmlns:ns128="urn:pptxdsl:text-layout:v1" role="body"/>
+              </a:ext>
+            </a:extLst>
           </a:bodyPr>
           <a:lstStyle/>
           <a:p>
@@ -52507,6 +55557,11 @@
         <p:txBody>
           <a:bodyPr wrap="square" anchor="t" lIns="0" rIns="0" tIns="0" bIns="0">
             <a:spAutoFit/>
+            <a:extLst>
+              <a:ext uri="{8AF73BB6-5E31-4F0F-A399-3D98F3B95FD9}">
+                <ns2:textLayout xmlns:ns2="urn:pptxdsl:text-layout:v1" role="natural"/>
+              </a:ext>
+            </a:extLst>
           </a:bodyPr>
           <a:lstStyle/>
           <a:p>
@@ -52548,6 +55603,11 @@
         <p:txBody>
           <a:bodyPr wrap="square" anchor="t" lIns="0" rIns="0" tIns="0" bIns="0">
             <a:spAutoFit/>
+            <a:extLst>
+              <a:ext uri="{8AF73BB6-5E31-4F0F-A399-3D98F3B95FD9}">
+                <ns7:textLayout xmlns:ns7="urn:pptxdsl:text-layout:v1" role="natural"/>
+              </a:ext>
+            </a:extLst>
           </a:bodyPr>
           <a:lstStyle/>
           <a:p>
@@ -52589,6 +55649,11 @@
         <p:txBody>
           <a:bodyPr wrap="square" anchor="t" lIns="0" rIns="0" tIns="0" bIns="0">
             <a:spAutoFit/>
+            <a:extLst>
+              <a:ext uri="{8AF73BB6-5E31-4F0F-A399-3D98F3B95FD9}">
+                <ns12:textLayout xmlns:ns12="urn:pptxdsl:text-layout:v1" role="body"/>
+              </a:ext>
+            </a:extLst>
           </a:bodyPr>
           <a:lstStyle/>
           <a:p>
@@ -52662,6 +55727,11 @@
         <p:txBody>
           <a:bodyPr wrap="square" anchor="ctr" lIns="0" rIns="0" tIns="0" bIns="0">
             <a:spAutoFit/>
+            <a:extLst>
+              <a:ext uri="{8AF73BB6-5E31-4F0F-A399-3D98F3B95FD9}">
+                <ns17:textLayout xmlns:ns17="urn:pptxdsl:text-layout:v1" role="natural"/>
+              </a:ext>
+            </a:extLst>
           </a:bodyPr>
           <a:lstStyle/>
           <a:p>
@@ -52735,6 +55805,11 @@
         <p:txBody>
           <a:bodyPr wrap="square" anchor="ctr" lIns="0" rIns="0" tIns="0" bIns="0">
             <a:spAutoFit/>
+            <a:extLst>
+              <a:ext uri="{8AF73BB6-5E31-4F0F-A399-3D98F3B95FD9}">
+                <ns22:textLayout xmlns:ns22="urn:pptxdsl:text-layout:v1" role="natural"/>
+              </a:ext>
+            </a:extLst>
           </a:bodyPr>
           <a:lstStyle/>
           <a:p>
@@ -52776,6 +55851,11 @@
         <p:txBody>
           <a:bodyPr wrap="square" anchor="ctr" lIns="0" rIns="0" tIns="0" bIns="0">
             <a:spAutoFit/>
+            <a:extLst>
+              <a:ext uri="{8AF73BB6-5E31-4F0F-A399-3D98F3B95FD9}">
+                <ns27:textLayout xmlns:ns27="urn:pptxdsl:text-layout:v1" role="compact"/>
+              </a:ext>
+            </a:extLst>
           </a:bodyPr>
           <a:lstStyle/>
           <a:p>
@@ -52889,6 +55969,11 @@
         <p:txBody>
           <a:bodyPr wrap="square" anchor="ctr" lIns="0" rIns="0" tIns="0" bIns="0">
             <a:spAutoFit/>
+            <a:extLst>
+              <a:ext uri="{8AF73BB6-5E31-4F0F-A399-3D98F3B95FD9}">
+                <ns32:textLayout xmlns:ns32="urn:pptxdsl:text-layout:v1" role="compact"/>
+              </a:ext>
+            </a:extLst>
           </a:bodyPr>
           <a:lstStyle/>
           <a:p>
@@ -53002,6 +56087,11 @@
         <p:txBody>
           <a:bodyPr wrap="square" anchor="ctr" lIns="0" rIns="0" tIns="0" bIns="0">
             <a:spAutoFit/>
+            <a:extLst>
+              <a:ext uri="{8AF73BB6-5E31-4F0F-A399-3D98F3B95FD9}">
+                <ns37:textLayout xmlns:ns37="urn:pptxdsl:text-layout:v1" role="compact"/>
+              </a:ext>
+            </a:extLst>
           </a:bodyPr>
           <a:lstStyle/>
           <a:p>
@@ -53115,6 +56205,11 @@
         <p:txBody>
           <a:bodyPr wrap="square" anchor="ctr" lIns="0" rIns="0" tIns="0" bIns="0">
             <a:spAutoFit/>
+            <a:extLst>
+              <a:ext uri="{8AF73BB6-5E31-4F0F-A399-3D98F3B95FD9}">
+                <ns42:textLayout xmlns:ns42="urn:pptxdsl:text-layout:v1" role="compact"/>
+              </a:ext>
+            </a:extLst>
           </a:bodyPr>
           <a:lstStyle/>
           <a:p>
@@ -53228,6 +56323,11 @@
         <p:txBody>
           <a:bodyPr wrap="square" anchor="ctr" lIns="0" rIns="0" tIns="0" bIns="0">
             <a:spAutoFit/>
+            <a:extLst>
+              <a:ext uri="{8AF73BB6-5E31-4F0F-A399-3D98F3B95FD9}">
+                <ns47:textLayout xmlns:ns47="urn:pptxdsl:text-layout:v1" role="compact"/>
+              </a:ext>
+            </a:extLst>
           </a:bodyPr>
           <a:lstStyle/>
           <a:p>
@@ -53380,6 +56480,11 @@
         <p:txBody>
           <a:bodyPr wrap="square" anchor="ctr" lIns="0" rIns="0" tIns="0" bIns="0">
             <a:spAutoFit/>
+            <a:extLst>
+              <a:ext uri="{8AF73BB6-5E31-4F0F-A399-3D98F3B95FD9}">
+                <ns53:textLayout xmlns:ns53="urn:pptxdsl:text-layout:v1" role="compact"/>
+              </a:ext>
+            </a:extLst>
           </a:bodyPr>
           <a:lstStyle/>
           <a:p>
@@ -53460,6 +56565,11 @@
         <p:txBody>
           <a:bodyPr wrap="square" anchor="ctr" lIns="0" rIns="0" tIns="0" bIns="0">
             <a:spAutoFit/>
+            <a:extLst>
+              <a:ext uri="{8AF73BB6-5E31-4F0F-A399-3D98F3B95FD9}">
+                <ns59:textLayout xmlns:ns59="urn:pptxdsl:text-layout:v1" role="compact"/>
+              </a:ext>
+            </a:extLst>
           </a:bodyPr>
           <a:lstStyle/>
           <a:p>
@@ -53541,6 +56651,11 @@
         <p:txBody>
           <a:bodyPr wrap="square" anchor="ctr" lIns="0" rIns="0" tIns="0" bIns="0">
             <a:spAutoFit/>
+            <a:extLst>
+              <a:ext uri="{8AF73BB6-5E31-4F0F-A399-3D98F3B95FD9}">
+                <ns66:textLayout xmlns:ns66="urn:pptxdsl:text-layout:v1" role="compact"/>
+              </a:ext>
+            </a:extLst>
           </a:bodyPr>
           <a:lstStyle/>
           <a:p>
@@ -53621,6 +56736,11 @@
         <p:txBody>
           <a:bodyPr wrap="square" anchor="ctr" lIns="0" rIns="0" tIns="0" bIns="0">
             <a:spAutoFit/>
+            <a:extLst>
+              <a:ext uri="{8AF73BB6-5E31-4F0F-A399-3D98F3B95FD9}">
+                <ns72:textLayout xmlns:ns72="urn:pptxdsl:text-layout:v1" role="compact"/>
+              </a:ext>
+            </a:extLst>
           </a:bodyPr>
           <a:lstStyle/>
           <a:p>
@@ -53701,6 +56821,11 @@
         <p:txBody>
           <a:bodyPr wrap="square" anchor="ctr" lIns="0" rIns="0" tIns="0" bIns="0">
             <a:spAutoFit/>
+            <a:extLst>
+              <a:ext uri="{8AF73BB6-5E31-4F0F-A399-3D98F3B95FD9}">
+                <ns78:textLayout xmlns:ns78="urn:pptxdsl:text-layout:v1" role="compact"/>
+              </a:ext>
+            </a:extLst>
           </a:bodyPr>
           <a:lstStyle/>
           <a:p>
@@ -53781,6 +56906,11 @@
         <p:txBody>
           <a:bodyPr wrap="square" anchor="ctr" lIns="0" rIns="0" tIns="0" bIns="0">
             <a:spAutoFit/>
+            <a:extLst>
+              <a:ext uri="{8AF73BB6-5E31-4F0F-A399-3D98F3B95FD9}">
+                <ns84:textLayout xmlns:ns84="urn:pptxdsl:text-layout:v1" role="compact"/>
+              </a:ext>
+            </a:extLst>
           </a:bodyPr>
           <a:lstStyle/>
           <a:p>
@@ -53862,6 +56992,11 @@
         <p:txBody>
           <a:bodyPr wrap="square" anchor="ctr" lIns="0" rIns="0" tIns="0" bIns="0">
             <a:spAutoFit/>
+            <a:extLst>
+              <a:ext uri="{8AF73BB6-5E31-4F0F-A399-3D98F3B95FD9}">
+                <ns91:textLayout xmlns:ns91="urn:pptxdsl:text-layout:v1" role="compact"/>
+              </a:ext>
+            </a:extLst>
           </a:bodyPr>
           <a:lstStyle/>
           <a:p>
@@ -53942,6 +57077,11 @@
         <p:txBody>
           <a:bodyPr wrap="square" anchor="ctr" lIns="0" rIns="0" tIns="0" bIns="0">
             <a:spAutoFit/>
+            <a:extLst>
+              <a:ext uri="{8AF73BB6-5E31-4F0F-A399-3D98F3B95FD9}">
+                <ns97:textLayout xmlns:ns97="urn:pptxdsl:text-layout:v1" role="compact"/>
+              </a:ext>
+            </a:extLst>
           </a:bodyPr>
           <a:lstStyle/>
           <a:p>
@@ -53983,6 +57123,11 @@
         <p:txBody>
           <a:bodyPr wrap="square" anchor="ctr" lIns="0" rIns="0" tIns="0" bIns="0">
             <a:spAutoFit/>
+            <a:extLst>
+              <a:ext uri="{8AF73BB6-5E31-4F0F-A399-3D98F3B95FD9}">
+                <ns102:textLayout xmlns:ns102="urn:pptxdsl:text-layout:v1" role="natural"/>
+              </a:ext>
+            </a:extLst>
           </a:bodyPr>
           <a:lstStyle/>
           <a:p>
@@ -54061,6 +57206,11 @@
         <p:txBody>
           <a:bodyPr wrap="square" anchor="ctr" lIns="0" rIns="0" tIns="0" bIns="0">
             <a:spAutoFit/>
+            <a:extLst>
+              <a:ext uri="{8AF73BB6-5E31-4F0F-A399-3D98F3B95FD9}">
+                <ns108:textLayout xmlns:ns108="urn:pptxdsl:text-layout:v1" role="body"/>
+              </a:ext>
+            </a:extLst>
           </a:bodyPr>
           <a:lstStyle/>
           <a:p>
@@ -54140,6 +57290,11 @@
         <p:txBody>
           <a:bodyPr wrap="square" anchor="ctr" lIns="0" rIns="0" tIns="0" bIns="0">
             <a:spAutoFit/>
+            <a:extLst>
+              <a:ext uri="{8AF73BB6-5E31-4F0F-A399-3D98F3B95FD9}">
+                <ns115:textLayout xmlns:ns115="urn:pptxdsl:text-layout:v1" role="body"/>
+              </a:ext>
+            </a:extLst>
           </a:bodyPr>
           <a:lstStyle/>
           <a:p>
@@ -54225,6 +57380,11 @@
         <p:txBody>
           <a:bodyPr wrap="square" anchor="ctr" lIns="0" rIns="0" tIns="0" bIns="0">
             <a:spAutoFit/>
+            <a:extLst>
+              <a:ext uri="{8AF73BB6-5E31-4F0F-A399-3D98F3B95FD9}">
+                <ns120:textLayout xmlns:ns120="urn:pptxdsl:text-layout:v1" role="body"/>
+              </a:ext>
+            </a:extLst>
           </a:bodyPr>
           <a:lstStyle/>
           <a:p>
@@ -54266,6 +57426,11 @@
         <p:txBody>
           <a:bodyPr wrap="none" anchor="ctr" lIns="0" rIns="0" tIns="0" bIns="0">
             <a:spAutoFit/>
+            <a:extLst>
+              <a:ext uri="{8AF73BB6-5E31-4F0F-A399-3D98F3B95FD9}">
+                <ns125:textLayout xmlns:ns125="urn:pptxdsl:text-layout:v1" role="body"/>
+              </a:ext>
+            </a:extLst>
           </a:bodyPr>
           <a:lstStyle/>
           <a:p>
@@ -54380,6 +57545,11 @@
         <p:txBody>
           <a:bodyPr wrap="square" anchor="t" lIns="0" rIns="0" tIns="0" bIns="0">
             <a:spAutoFit/>
+            <a:extLst>
+              <a:ext uri="{8AF73BB6-5E31-4F0F-A399-3D98F3B95FD9}">
+                <ns2:textLayout xmlns:ns2="urn:pptxdsl:text-layout:v1" role="natural"/>
+              </a:ext>
+            </a:extLst>
           </a:bodyPr>
           <a:lstStyle/>
           <a:p>
@@ -54421,6 +57591,11 @@
         <p:txBody>
           <a:bodyPr wrap="square" anchor="t" lIns="0" rIns="0" tIns="0" bIns="0">
             <a:spAutoFit/>
+            <a:extLst>
+              <a:ext uri="{8AF73BB6-5E31-4F0F-A399-3D98F3B95FD9}">
+                <ns7:textLayout xmlns:ns7="urn:pptxdsl:text-layout:v1" role="natural"/>
+              </a:ext>
+            </a:extLst>
           </a:bodyPr>
           <a:lstStyle/>
           <a:p>
@@ -54462,6 +57637,11 @@
         <p:txBody>
           <a:bodyPr wrap="square" anchor="t" lIns="0" rIns="0" tIns="0" bIns="0">
             <a:spAutoFit/>
+            <a:extLst>
+              <a:ext uri="{8AF73BB6-5E31-4F0F-A399-3D98F3B95FD9}">
+                <ns12:textLayout xmlns:ns12="urn:pptxdsl:text-layout:v1" role="body"/>
+              </a:ext>
+            </a:extLst>
           </a:bodyPr>
           <a:lstStyle/>
           <a:p>
@@ -54593,6 +57773,11 @@
         <p:txBody>
           <a:bodyPr wrap="square" anchor="ctr" lIns="0" rIns="0" tIns="0" bIns="0">
             <a:spAutoFit/>
+            <a:extLst>
+              <a:ext uri="{8AF73BB6-5E31-4F0F-A399-3D98F3B95FD9}">
+                <ns17:textLayout xmlns:ns17="urn:pptxdsl:text-layout:v1" role="natural"/>
+              </a:ext>
+            </a:extLst>
           </a:bodyPr>
           <a:lstStyle/>
           <a:p>
@@ -54634,6 +57819,11 @@
         <p:txBody>
           <a:bodyPr wrap="square" anchor="t" lIns="0" rIns="0" tIns="0" bIns="0">
             <a:spAutoFit/>
+            <a:extLst>
+              <a:ext uri="{8AF73BB6-5E31-4F0F-A399-3D98F3B95FD9}">
+                <ns22:textLayout xmlns:ns22="urn:pptxdsl:text-layout:v1" role="natural"/>
+              </a:ext>
+            </a:extLst>
           </a:bodyPr>
           <a:lstStyle/>
           <a:p>
@@ -54721,6 +57911,11 @@
         <p:txBody>
           <a:bodyPr wrap="square" anchor="ctr" lIns="0" rIns="0" tIns="0" bIns="0">
             <a:spAutoFit/>
+            <a:extLst>
+              <a:ext uri="{8AF73BB6-5E31-4F0F-A399-3D98F3B95FD9}">
+                <ns27:textLayout xmlns:ns27="urn:pptxdsl:text-layout:v1" role="natural"/>
+              </a:ext>
+            </a:extLst>
           </a:bodyPr>
           <a:lstStyle/>
           <a:p>
@@ -54762,6 +57957,11 @@
         <p:txBody>
           <a:bodyPr wrap="square" anchor="t" lIns="0" rIns="0" tIns="0" bIns="0">
             <a:spAutoFit/>
+            <a:extLst>
+              <a:ext uri="{8AF73BB6-5E31-4F0F-A399-3D98F3B95FD9}">
+                <ns32:textLayout xmlns:ns32="urn:pptxdsl:text-layout:v1" role="body"/>
+              </a:ext>
+            </a:extLst>
           </a:bodyPr>
           <a:lstStyle/>
           <a:p>
@@ -54937,6 +58137,11 @@
         <p:txBody>
           <a:bodyPr wrap="square" anchor="ctr" lIns="0" rIns="0" tIns="0" bIns="0">
             <a:spAutoFit/>
+            <a:extLst>
+              <a:ext uri="{8AF73BB6-5E31-4F0F-A399-3D98F3B95FD9}">
+                <ns37:textLayout xmlns:ns37="urn:pptxdsl:text-layout:v1" role="natural"/>
+              </a:ext>
+            </a:extLst>
           </a:bodyPr>
           <a:lstStyle/>
           <a:p>
@@ -54978,6 +58183,11 @@
         <p:txBody>
           <a:bodyPr wrap="square" anchor="t" lIns="0" rIns="0" tIns="0" bIns="0">
             <a:spAutoFit/>
+            <a:extLst>
+              <a:ext uri="{8AF73BB6-5E31-4F0F-A399-3D98F3B95FD9}">
+                <ns42:textLayout xmlns:ns42="urn:pptxdsl:text-layout:v1" role="natural"/>
+              </a:ext>
+            </a:extLst>
           </a:bodyPr>
           <a:lstStyle/>
           <a:p>
@@ -55065,6 +58275,11 @@
         <p:txBody>
           <a:bodyPr wrap="square" anchor="ctr" lIns="0" rIns="0" tIns="0" bIns="0">
             <a:spAutoFit/>
+            <a:extLst>
+              <a:ext uri="{8AF73BB6-5E31-4F0F-A399-3D98F3B95FD9}">
+                <ns47:textLayout xmlns:ns47="urn:pptxdsl:text-layout:v1" role="natural"/>
+              </a:ext>
+            </a:extLst>
           </a:bodyPr>
           <a:lstStyle/>
           <a:p>
@@ -55106,6 +58321,11 @@
         <p:txBody>
           <a:bodyPr wrap="square" anchor="t" lIns="0" rIns="0" tIns="0" bIns="0">
             <a:spAutoFit/>
+            <a:extLst>
+              <a:ext uri="{8AF73BB6-5E31-4F0F-A399-3D98F3B95FD9}">
+                <ns52:textLayout xmlns:ns52="urn:pptxdsl:text-layout:v1" role="body"/>
+              </a:ext>
+            </a:extLst>
           </a:bodyPr>
           <a:lstStyle/>
           <a:p>
@@ -55281,6 +58501,11 @@
         <p:txBody>
           <a:bodyPr wrap="square" anchor="ctr" lIns="0" rIns="0" tIns="0" bIns="0">
             <a:spAutoFit/>
+            <a:extLst>
+              <a:ext uri="{8AF73BB6-5E31-4F0F-A399-3D98F3B95FD9}">
+                <ns57:textLayout xmlns:ns57="urn:pptxdsl:text-layout:v1" role="natural"/>
+              </a:ext>
+            </a:extLst>
           </a:bodyPr>
           <a:lstStyle/>
           <a:p>
@@ -55322,6 +58547,11 @@
         <p:txBody>
           <a:bodyPr wrap="square" anchor="t" lIns="0" rIns="0" tIns="0" bIns="0">
             <a:spAutoFit/>
+            <a:extLst>
+              <a:ext uri="{8AF73BB6-5E31-4F0F-A399-3D98F3B95FD9}">
+                <ns62:textLayout xmlns:ns62="urn:pptxdsl:text-layout:v1" role="natural"/>
+              </a:ext>
+            </a:extLst>
           </a:bodyPr>
           <a:lstStyle/>
           <a:p>
@@ -55363,6 +58593,11 @@
         <p:txBody>
           <a:bodyPr wrap="square" anchor="t" lIns="0" rIns="0" tIns="0" bIns="0">
             <a:spAutoFit/>
+            <a:extLst>
+              <a:ext uri="{8AF73BB6-5E31-4F0F-A399-3D98F3B95FD9}">
+                <ns67:textLayout xmlns:ns67="urn:pptxdsl:text-layout:v1" role="body"/>
+              </a:ext>
+            </a:extLst>
           </a:bodyPr>
           <a:lstStyle/>
           <a:p>
@@ -55492,6 +58727,11 @@
         <p:txBody>
           <a:bodyPr wrap="square" anchor="ctr" lIns="0" rIns="0" tIns="0" bIns="0">
             <a:spAutoFit/>
+            <a:extLst>
+              <a:ext uri="{8AF73BB6-5E31-4F0F-A399-3D98F3B95FD9}">
+                <ns72:textLayout xmlns:ns72="urn:pptxdsl:text-layout:v1" role="body"/>
+              </a:ext>
+            </a:extLst>
           </a:bodyPr>
           <a:lstStyle/>
           <a:p>
@@ -55533,6 +58773,11 @@
         <p:txBody>
           <a:bodyPr wrap="none" anchor="ctr" lIns="0" rIns="0" tIns="0" bIns="0">
             <a:spAutoFit/>
+            <a:extLst>
+              <a:ext uri="{8AF73BB6-5E31-4F0F-A399-3D98F3B95FD9}">
+                <ns77:textLayout xmlns:ns77="urn:pptxdsl:text-layout:v1" role="body"/>
+              </a:ext>
+            </a:extLst>
           </a:bodyPr>
           <a:lstStyle/>
           <a:p>
@@ -55647,6 +58892,11 @@
         <p:txBody>
           <a:bodyPr wrap="square" anchor="t" lIns="0" rIns="0" tIns="0" bIns="0">
             <a:spAutoFit/>
+            <a:extLst>
+              <a:ext uri="{8AF73BB6-5E31-4F0F-A399-3D98F3B95FD9}">
+                <ns2:textLayout xmlns:ns2="urn:pptxdsl:text-layout:v1" role="natural"/>
+              </a:ext>
+            </a:extLst>
           </a:bodyPr>
           <a:lstStyle/>
           <a:p>
@@ -55688,6 +58938,11 @@
         <p:txBody>
           <a:bodyPr wrap="square" anchor="t" lIns="0" rIns="0" tIns="0" bIns="0">
             <a:spAutoFit/>
+            <a:extLst>
+              <a:ext uri="{8AF73BB6-5E31-4F0F-A399-3D98F3B95FD9}">
+                <ns7:textLayout xmlns:ns7="urn:pptxdsl:text-layout:v1" role="natural"/>
+              </a:ext>
+            </a:extLst>
           </a:bodyPr>
           <a:lstStyle/>
           <a:p>
@@ -55773,6 +59028,11 @@
         <p:txBody>
           <a:bodyPr wrap="square" anchor="t" lIns="0" rIns="0" tIns="0" bIns="0">
             <a:spAutoFit/>
+            <a:extLst>
+              <a:ext uri="{8AF73BB6-5E31-4F0F-A399-3D98F3B95FD9}">
+                <ns12:textLayout xmlns:ns12="urn:pptxdsl:text-layout:v1" role="body"/>
+              </a:ext>
+            </a:extLst>
           </a:bodyPr>
           <a:lstStyle/>
           <a:p>
@@ -55858,6 +59118,11 @@
         <p:txBody>
           <a:bodyPr wrap="square" anchor="t" lIns="0" rIns="0" tIns="0" bIns="0">
             <a:spAutoFit/>
+            <a:extLst>
+              <a:ext uri="{8AF73BB6-5E31-4F0F-A399-3D98F3B95FD9}">
+                <ns17:textLayout xmlns:ns17="urn:pptxdsl:text-layout:v1" role="body"/>
+              </a:ext>
+            </a:extLst>
           </a:bodyPr>
           <a:lstStyle/>
           <a:p>
@@ -55943,6 +59208,11 @@
         <p:txBody>
           <a:bodyPr wrap="square" anchor="t" lIns="0" rIns="0" tIns="0" bIns="0">
             <a:spAutoFit/>
+            <a:extLst>
+              <a:ext uri="{8AF73BB6-5E31-4F0F-A399-3D98F3B95FD9}">
+                <ns22:textLayout xmlns:ns22="urn:pptxdsl:text-layout:v1" role="body"/>
+              </a:ext>
+            </a:extLst>
           </a:bodyPr>
           <a:lstStyle/>
           <a:p>
@@ -56028,6 +59298,11 @@
         <p:txBody>
           <a:bodyPr wrap="square" anchor="t" lIns="0" rIns="0" tIns="0" bIns="0">
             <a:spAutoFit/>
+            <a:extLst>
+              <a:ext uri="{8AF73BB6-5E31-4F0F-A399-3D98F3B95FD9}">
+                <ns27:textLayout xmlns:ns27="urn:pptxdsl:text-layout:v1" role="body"/>
+              </a:ext>
+            </a:extLst>
           </a:bodyPr>
           <a:lstStyle/>
           <a:p>
@@ -56113,6 +59388,11 @@
         <p:txBody>
           <a:bodyPr wrap="square" anchor="ctr" lIns="0" rIns="0" tIns="0" bIns="0">
             <a:spAutoFit/>
+            <a:extLst>
+              <a:ext uri="{8AF73BB6-5E31-4F0F-A399-3D98F3B95FD9}">
+                <ns32:textLayout xmlns:ns32="urn:pptxdsl:text-layout:v1" role="body"/>
+              </a:ext>
+            </a:extLst>
           </a:bodyPr>
           <a:lstStyle/>
           <a:p>
@@ -56154,6 +59434,11 @@
         <p:txBody>
           <a:bodyPr wrap="none" anchor="ctr" lIns="0" rIns="0" tIns="0" bIns="0">
             <a:spAutoFit/>
+            <a:extLst>
+              <a:ext uri="{8AF73BB6-5E31-4F0F-A399-3D98F3B95FD9}">
+                <ns37:textLayout xmlns:ns37="urn:pptxdsl:text-layout:v1" role="body"/>
+              </a:ext>
+            </a:extLst>
           </a:bodyPr>
           <a:lstStyle/>
           <a:p>
@@ -56268,6 +59553,11 @@
         <p:txBody>
           <a:bodyPr wrap="square" anchor="t" lIns="0" rIns="0" tIns="0" bIns="0">
             <a:spAutoFit/>
+            <a:extLst>
+              <a:ext uri="{8AF73BB6-5E31-4F0F-A399-3D98F3B95FD9}">
+                <ns2:textLayout xmlns:ns2="urn:pptxdsl:text-layout:v1" role="natural"/>
+              </a:ext>
+            </a:extLst>
           </a:bodyPr>
           <a:lstStyle/>
           <a:p>
@@ -56309,6 +59599,11 @@
         <p:txBody>
           <a:bodyPr wrap="square" anchor="t" lIns="0" rIns="0" tIns="0" bIns="0">
             <a:spAutoFit/>
+            <a:extLst>
+              <a:ext uri="{8AF73BB6-5E31-4F0F-A399-3D98F3B95FD9}">
+                <ns7:textLayout xmlns:ns7="urn:pptxdsl:text-layout:v1" role="natural"/>
+              </a:ext>
+            </a:extLst>
           </a:bodyPr>
           <a:lstStyle/>
           <a:p>
@@ -56396,6 +59691,11 @@
         <p:txBody>
           <a:bodyPr wrap="none" anchor="ctr" lIns="0" rIns="0" tIns="0" bIns="0">
             <a:spAutoFit/>
+            <a:extLst>
+              <a:ext uri="{8AF73BB6-5E31-4F0F-A399-3D98F3B95FD9}">
+                <ns12:textLayout xmlns:ns12="urn:pptxdsl:text-layout:v1" role="natural"/>
+              </a:ext>
+            </a:extLst>
           </a:bodyPr>
           <a:lstStyle/>
           <a:p>
@@ -56437,6 +59737,11 @@
         <p:txBody>
           <a:bodyPr wrap="square" anchor="t" lIns="0" rIns="0" tIns="0" bIns="0">
             <a:spAutoFit/>
+            <a:extLst>
+              <a:ext uri="{8AF73BB6-5E31-4F0F-A399-3D98F3B95FD9}">
+                <ns17:textLayout xmlns:ns17="urn:pptxdsl:text-layout:v1" role="body"/>
+              </a:ext>
+            </a:extLst>
           </a:bodyPr>
           <a:lstStyle/>
           <a:p>
@@ -56524,6 +59829,11 @@
         <p:txBody>
           <a:bodyPr wrap="none" anchor="ctr" lIns="0" rIns="0" tIns="0" bIns="0">
             <a:spAutoFit/>
+            <a:extLst>
+              <a:ext uri="{8AF73BB6-5E31-4F0F-A399-3D98F3B95FD9}">
+                <ns22:textLayout xmlns:ns22="urn:pptxdsl:text-layout:v1" role="natural"/>
+              </a:ext>
+            </a:extLst>
           </a:bodyPr>
           <a:lstStyle/>
           <a:p>
@@ -56565,6 +59875,11 @@
         <p:txBody>
           <a:bodyPr wrap="square" anchor="t" lIns="0" rIns="0" tIns="0" bIns="0">
             <a:spAutoFit/>
+            <a:extLst>
+              <a:ext uri="{8AF73BB6-5E31-4F0F-A399-3D98F3B95FD9}">
+                <ns27:textLayout xmlns:ns27="urn:pptxdsl:text-layout:v1" role="body"/>
+              </a:ext>
+            </a:extLst>
           </a:bodyPr>
           <a:lstStyle/>
           <a:p>
@@ -56652,6 +59967,11 @@
         <p:txBody>
           <a:bodyPr wrap="square" anchor="t" lIns="0" rIns="0" tIns="0" bIns="0">
             <a:spAutoFit/>
+            <a:extLst>
+              <a:ext uri="{8AF73BB6-5E31-4F0F-A399-3D98F3B95FD9}">
+                <ns32:textLayout xmlns:ns32="urn:pptxdsl:text-layout:v1" role="body"/>
+              </a:ext>
+            </a:extLst>
           </a:bodyPr>
           <a:lstStyle/>
           <a:p>
@@ -56739,6 +60059,11 @@
         <p:txBody>
           <a:bodyPr wrap="square" anchor="t" lIns="0" rIns="0" tIns="0" bIns="0">
             <a:spAutoFit/>
+            <a:extLst>
+              <a:ext uri="{8AF73BB6-5E31-4F0F-A399-3D98F3B95FD9}">
+                <ns37:textLayout xmlns:ns37="urn:pptxdsl:text-layout:v1" role="body"/>
+              </a:ext>
+            </a:extLst>
           </a:bodyPr>
           <a:lstStyle/>
           <a:p>
@@ -56824,6 +60149,11 @@
         <p:txBody>
           <a:bodyPr wrap="square" anchor="ctr" lIns="0" rIns="0" tIns="0" bIns="0">
             <a:spAutoFit/>
+            <a:extLst>
+              <a:ext uri="{8AF73BB6-5E31-4F0F-A399-3D98F3B95FD9}">
+                <ns42:textLayout xmlns:ns42="urn:pptxdsl:text-layout:v1" role="body"/>
+              </a:ext>
+            </a:extLst>
           </a:bodyPr>
           <a:lstStyle/>
           <a:p>
@@ -56865,6 +60195,11 @@
         <p:txBody>
           <a:bodyPr wrap="none" anchor="ctr" lIns="0" rIns="0" tIns="0" bIns="0">
             <a:spAutoFit/>
+            <a:extLst>
+              <a:ext uri="{8AF73BB6-5E31-4F0F-A399-3D98F3B95FD9}">
+                <ns47:textLayout xmlns:ns47="urn:pptxdsl:text-layout:v1" role="body"/>
+              </a:ext>
+            </a:extLst>
           </a:bodyPr>
           <a:lstStyle/>
           <a:p>
@@ -56979,6 +60314,11 @@
         <p:txBody>
           <a:bodyPr wrap="square" anchor="t" lIns="0" rIns="0" tIns="0" bIns="0">
             <a:spAutoFit/>
+            <a:extLst>
+              <a:ext uri="{8AF73BB6-5E31-4F0F-A399-3D98F3B95FD9}">
+                <ns2:textLayout xmlns:ns2="urn:pptxdsl:text-layout:v1" role="natural"/>
+              </a:ext>
+            </a:extLst>
           </a:bodyPr>
           <a:lstStyle/>
           <a:p>
@@ -57020,6 +60360,11 @@
         <p:txBody>
           <a:bodyPr wrap="square" anchor="t" lIns="0" rIns="0" tIns="0" bIns="0">
             <a:spAutoFit/>
+            <a:extLst>
+              <a:ext uri="{8AF73BB6-5E31-4F0F-A399-3D98F3B95FD9}">
+                <ns7:textLayout xmlns:ns7="urn:pptxdsl:text-layout:v1" role="natural"/>
+              </a:ext>
+            </a:extLst>
           </a:bodyPr>
           <a:lstStyle/>
           <a:p>
@@ -57061,6 +60406,11 @@
         <p:txBody>
           <a:bodyPr wrap="square" anchor="t" lIns="0" rIns="0" tIns="0" bIns="0">
             <a:spAutoFit/>
+            <a:extLst>
+              <a:ext uri="{8AF73BB6-5E31-4F0F-A399-3D98F3B95FD9}">
+                <ns12:textLayout xmlns:ns12="urn:pptxdsl:text-layout:v1" role="natural"/>
+              </a:ext>
+            </a:extLst>
           </a:bodyPr>
           <a:lstStyle/>
           <a:p>
@@ -57102,6 +60452,11 @@
         <p:txBody>
           <a:bodyPr wrap="square" anchor="t" lIns="0" rIns="0" tIns="0" bIns="0">
             <a:spAutoFit/>
+            <a:extLst>
+              <a:ext uri="{8AF73BB6-5E31-4F0F-A399-3D98F3B95FD9}">
+                <ns17:textLayout xmlns:ns17="urn:pptxdsl:text-layout:v1" role="natural"/>
+              </a:ext>
+            </a:extLst>
           </a:bodyPr>
           <a:lstStyle/>
           <a:p>
@@ -57143,6 +60498,11 @@
         <p:txBody>
           <a:bodyPr wrap="square" anchor="t" lIns="0" rIns="0" tIns="0" bIns="0">
             <a:spAutoFit/>
+            <a:extLst>
+              <a:ext uri="{8AF73BB6-5E31-4F0F-A399-3D98F3B95FD9}">
+                <ns22:textLayout xmlns:ns22="urn:pptxdsl:text-layout:v1" role="body"/>
+              </a:ext>
+            </a:extLst>
           </a:bodyPr>
           <a:lstStyle/>
           <a:p>
@@ -57228,6 +60588,11 @@
         <p:txBody>
           <a:bodyPr wrap="square" anchor="t" lIns="0" rIns="0" tIns="0" bIns="0">
             <a:spAutoFit/>
+            <a:extLst>
+              <a:ext uri="{8AF73BB6-5E31-4F0F-A399-3D98F3B95FD9}">
+                <ns27:textLayout xmlns:ns27="urn:pptxdsl:text-layout:v1" role="natural"/>
+              </a:ext>
+            </a:extLst>
           </a:bodyPr>
           <a:lstStyle/>
           <a:p>
@@ -57269,6 +60634,11 @@
         <p:txBody>
           <a:bodyPr wrap="square" anchor="t" lIns="0" rIns="0" tIns="0" bIns="0">
             <a:spAutoFit/>
+            <a:extLst>
+              <a:ext uri="{8AF73BB6-5E31-4F0F-A399-3D98F3B95FD9}">
+                <ns32:textLayout xmlns:ns32="urn:pptxdsl:text-layout:v1" role="natural"/>
+              </a:ext>
+            </a:extLst>
           </a:bodyPr>
           <a:lstStyle/>
           <a:p>
@@ -57310,6 +60680,11 @@
         <p:txBody>
           <a:bodyPr wrap="square" anchor="t" lIns="0" rIns="0" tIns="0" bIns="0">
             <a:spAutoFit/>
+            <a:extLst>
+              <a:ext uri="{8AF73BB6-5E31-4F0F-A399-3D98F3B95FD9}">
+                <ns37:textLayout xmlns:ns37="urn:pptxdsl:text-layout:v1" role="body"/>
+              </a:ext>
+            </a:extLst>
           </a:bodyPr>
           <a:lstStyle/>
           <a:p>
@@ -57395,6 +60770,11 @@
         <p:txBody>
           <a:bodyPr wrap="square" anchor="t" lIns="0" rIns="0" tIns="0" bIns="0">
             <a:spAutoFit/>
+            <a:extLst>
+              <a:ext uri="{8AF73BB6-5E31-4F0F-A399-3D98F3B95FD9}">
+                <ns42:textLayout xmlns:ns42="urn:pptxdsl:text-layout:v1" role="natural"/>
+              </a:ext>
+            </a:extLst>
           </a:bodyPr>
           <a:lstStyle/>
           <a:p>
@@ -57436,6 +60816,11 @@
         <p:txBody>
           <a:bodyPr wrap="square" anchor="t" lIns="0" rIns="0" tIns="0" bIns="0">
             <a:spAutoFit/>
+            <a:extLst>
+              <a:ext uri="{8AF73BB6-5E31-4F0F-A399-3D98F3B95FD9}">
+                <ns47:textLayout xmlns:ns47="urn:pptxdsl:text-layout:v1" role="natural"/>
+              </a:ext>
+            </a:extLst>
           </a:bodyPr>
           <a:lstStyle/>
           <a:p>
@@ -57477,6 +60862,11 @@
         <p:txBody>
           <a:bodyPr wrap="square" anchor="t" lIns="0" rIns="0" tIns="0" bIns="0">
             <a:spAutoFit/>
+            <a:extLst>
+              <a:ext uri="{8AF73BB6-5E31-4F0F-A399-3D98F3B95FD9}">
+                <ns52:textLayout xmlns:ns52="urn:pptxdsl:text-layout:v1" role="body"/>
+              </a:ext>
+            </a:extLst>
           </a:bodyPr>
           <a:lstStyle/>
           <a:p>
@@ -57562,6 +60952,11 @@
         <p:txBody>
           <a:bodyPr wrap="square" anchor="ctr" lIns="0" rIns="0" tIns="0" bIns="0">
             <a:spAutoFit/>
+            <a:extLst>
+              <a:ext uri="{8AF73BB6-5E31-4F0F-A399-3D98F3B95FD9}">
+                <ns57:textLayout xmlns:ns57="urn:pptxdsl:text-layout:v1" role="body"/>
+              </a:ext>
+            </a:extLst>
           </a:bodyPr>
           <a:lstStyle/>
           <a:p>
@@ -57603,6 +60998,11 @@
         <p:txBody>
           <a:bodyPr wrap="none" anchor="ctr" lIns="0" rIns="0" tIns="0" bIns="0">
             <a:spAutoFit/>
+            <a:extLst>
+              <a:ext uri="{8AF73BB6-5E31-4F0F-A399-3D98F3B95FD9}">
+                <ns62:textLayout xmlns:ns62="urn:pptxdsl:text-layout:v1" role="body"/>
+              </a:ext>
+            </a:extLst>
           </a:bodyPr>
           <a:lstStyle/>
           <a:p>
@@ -57717,6 +61117,11 @@
         <p:txBody>
           <a:bodyPr wrap="square" anchor="t" lIns="0" rIns="0" tIns="0" bIns="0">
             <a:spAutoFit/>
+            <a:extLst>
+              <a:ext uri="{8AF73BB6-5E31-4F0F-A399-3D98F3B95FD9}">
+                <ns2:textLayout xmlns:ns2="urn:pptxdsl:text-layout:v1" role="natural"/>
+              </a:ext>
+            </a:extLst>
           </a:bodyPr>
           <a:lstStyle/>
           <a:p>
@@ -57758,6 +61163,11 @@
         <p:txBody>
           <a:bodyPr wrap="square" anchor="t" lIns="0" rIns="0" tIns="0" bIns="0">
             <a:spAutoFit/>
+            <a:extLst>
+              <a:ext uri="{8AF73BB6-5E31-4F0F-A399-3D98F3B95FD9}">
+                <ns7:textLayout xmlns:ns7="urn:pptxdsl:text-layout:v1" role="natural"/>
+              </a:ext>
+            </a:extLst>
           </a:bodyPr>
           <a:lstStyle/>
           <a:p>
@@ -57843,6 +61253,11 @@
         <p:txBody>
           <a:bodyPr wrap="square" anchor="t" lIns="0" rIns="0" tIns="0" bIns="0">
             <a:spAutoFit/>
+            <a:extLst>
+              <a:ext uri="{8AF73BB6-5E31-4F0F-A399-3D98F3B95FD9}">
+                <ns12:textLayout xmlns:ns12="urn:pptxdsl:text-layout:v1" role="natural"/>
+              </a:ext>
+            </a:extLst>
           </a:bodyPr>
           <a:lstStyle/>
           <a:p>
@@ -57884,6 +61299,11 @@
         <p:txBody>
           <a:bodyPr wrap="square" anchor="t" lIns="0" rIns="0" tIns="0" bIns="0">
             <a:spAutoFit/>
+            <a:extLst>
+              <a:ext uri="{8AF73BB6-5E31-4F0F-A399-3D98F3B95FD9}">
+                <ns17:textLayout xmlns:ns17="urn:pptxdsl:text-layout:v1" role="natural"/>
+              </a:ext>
+            </a:extLst>
           </a:bodyPr>
           <a:lstStyle/>
           <a:p>
@@ -57969,6 +61389,11 @@
         <p:txBody>
           <a:bodyPr wrap="square" anchor="t" lIns="0" rIns="0" tIns="0" bIns="0">
             <a:spAutoFit/>
+            <a:extLst>
+              <a:ext uri="{8AF73BB6-5E31-4F0F-A399-3D98F3B95FD9}">
+                <ns22:textLayout xmlns:ns22="urn:pptxdsl:text-layout:v1" role="natural"/>
+              </a:ext>
+            </a:extLst>
           </a:bodyPr>
           <a:lstStyle/>
           <a:p>
@@ -58010,6 +61435,11 @@
         <p:txBody>
           <a:bodyPr wrap="square" anchor="t" lIns="0" rIns="0" tIns="0" bIns="0">
             <a:spAutoFit/>
+            <a:extLst>
+              <a:ext uri="{8AF73BB6-5E31-4F0F-A399-3D98F3B95FD9}">
+                <ns27:textLayout xmlns:ns27="urn:pptxdsl:text-layout:v1" role="body"/>
+              </a:ext>
+            </a:extLst>
           </a:bodyPr>
           <a:lstStyle/>
           <a:p>
@@ -58095,6 +61525,11 @@
         <p:txBody>
           <a:bodyPr wrap="square" anchor="t" lIns="0" rIns="0" tIns="0" bIns="0">
             <a:spAutoFit/>
+            <a:extLst>
+              <a:ext uri="{8AF73BB6-5E31-4F0F-A399-3D98F3B95FD9}">
+                <ns32:textLayout xmlns:ns32="urn:pptxdsl:text-layout:v1" role="natural"/>
+              </a:ext>
+            </a:extLst>
           </a:bodyPr>
           <a:lstStyle/>
           <a:p>
@@ -58136,6 +61571,11 @@
         <p:txBody>
           <a:bodyPr wrap="square" anchor="t" lIns="0" rIns="0" tIns="0" bIns="0">
             <a:spAutoFit/>
+            <a:extLst>
+              <a:ext uri="{8AF73BB6-5E31-4F0F-A399-3D98F3B95FD9}">
+                <ns37:textLayout xmlns:ns37="urn:pptxdsl:text-layout:v1" role="body"/>
+              </a:ext>
+            </a:extLst>
           </a:bodyPr>
           <a:lstStyle/>
           <a:p>
@@ -58221,6 +61661,11 @@
         <p:txBody>
           <a:bodyPr wrap="square" anchor="t" lIns="0" rIns="0" tIns="0" bIns="0">
             <a:spAutoFit/>
+            <a:extLst>
+              <a:ext uri="{8AF73BB6-5E31-4F0F-A399-3D98F3B95FD9}">
+                <ns42:textLayout xmlns:ns42="urn:pptxdsl:text-layout:v1" role="natural"/>
+              </a:ext>
+            </a:extLst>
           </a:bodyPr>
           <a:lstStyle/>
           <a:p>
@@ -58262,6 +61707,11 @@
         <p:txBody>
           <a:bodyPr wrap="square" anchor="t" lIns="0" rIns="0" tIns="0" bIns="0">
             <a:spAutoFit/>
+            <a:extLst>
+              <a:ext uri="{8AF73BB6-5E31-4F0F-A399-3D98F3B95FD9}">
+                <ns47:textLayout xmlns:ns47="urn:pptxdsl:text-layout:v1" role="body"/>
+              </a:ext>
+            </a:extLst>
           </a:bodyPr>
           <a:lstStyle/>
           <a:p>
@@ -58347,6 +61797,11 @@
         <p:txBody>
           <a:bodyPr wrap="square" anchor="t" lIns="0" rIns="0" tIns="0" bIns="0">
             <a:spAutoFit/>
+            <a:extLst>
+              <a:ext uri="{8AF73BB6-5E31-4F0F-A399-3D98F3B95FD9}">
+                <ns52:textLayout xmlns:ns52="urn:pptxdsl:text-layout:v1" role="natural"/>
+              </a:ext>
+            </a:extLst>
           </a:bodyPr>
           <a:lstStyle/>
           <a:p>
@@ -58388,6 +61843,11 @@
         <p:txBody>
           <a:bodyPr wrap="square" anchor="t" lIns="0" rIns="0" tIns="0" bIns="0">
             <a:spAutoFit/>
+            <a:extLst>
+              <a:ext uri="{8AF73BB6-5E31-4F0F-A399-3D98F3B95FD9}">
+                <ns57:textLayout xmlns:ns57="urn:pptxdsl:text-layout:v1" role="natural"/>
+              </a:ext>
+            </a:extLst>
           </a:bodyPr>
           <a:lstStyle/>
           <a:p>
@@ -58473,6 +61933,11 @@
         <p:txBody>
           <a:bodyPr wrap="square" anchor="t" lIns="0" rIns="0" tIns="0" bIns="0">
             <a:spAutoFit/>
+            <a:extLst>
+              <a:ext uri="{8AF73BB6-5E31-4F0F-A399-3D98F3B95FD9}">
+                <ns62:textLayout xmlns:ns62="urn:pptxdsl:text-layout:v1" role="natural"/>
+              </a:ext>
+            </a:extLst>
           </a:bodyPr>
           <a:lstStyle/>
           <a:p>
@@ -58514,6 +61979,11 @@
         <p:txBody>
           <a:bodyPr wrap="square" anchor="t" lIns="0" rIns="0" tIns="0" bIns="0">
             <a:spAutoFit/>
+            <a:extLst>
+              <a:ext uri="{8AF73BB6-5E31-4F0F-A399-3D98F3B95FD9}">
+                <ns67:textLayout xmlns:ns67="urn:pptxdsl:text-layout:v1" role="body"/>
+              </a:ext>
+            </a:extLst>
           </a:bodyPr>
           <a:lstStyle/>
           <a:p>
@@ -58599,6 +62069,11 @@
         <p:txBody>
           <a:bodyPr wrap="square" anchor="t" lIns="0" rIns="0" tIns="0" bIns="0">
             <a:spAutoFit/>
+            <a:extLst>
+              <a:ext uri="{8AF73BB6-5E31-4F0F-A399-3D98F3B95FD9}">
+                <ns72:textLayout xmlns:ns72="urn:pptxdsl:text-layout:v1" role="natural"/>
+              </a:ext>
+            </a:extLst>
           </a:bodyPr>
           <a:lstStyle/>
           <a:p>
@@ -58640,6 +62115,11 @@
         <p:txBody>
           <a:bodyPr wrap="square" anchor="t" lIns="0" rIns="0" tIns="0" bIns="0">
             <a:spAutoFit/>
+            <a:extLst>
+              <a:ext uri="{8AF73BB6-5E31-4F0F-A399-3D98F3B95FD9}">
+                <ns77:textLayout xmlns:ns77="urn:pptxdsl:text-layout:v1" role="body"/>
+              </a:ext>
+            </a:extLst>
           </a:bodyPr>
           <a:lstStyle/>
           <a:p>
@@ -58725,6 +62205,11 @@
         <p:txBody>
           <a:bodyPr wrap="square" anchor="t" lIns="0" rIns="0" tIns="0" bIns="0">
             <a:spAutoFit/>
+            <a:extLst>
+              <a:ext uri="{8AF73BB6-5E31-4F0F-A399-3D98F3B95FD9}">
+                <ns82:textLayout xmlns:ns82="urn:pptxdsl:text-layout:v1" role="natural"/>
+              </a:ext>
+            </a:extLst>
           </a:bodyPr>
           <a:lstStyle/>
           <a:p>
@@ -58766,6 +62251,11 @@
         <p:txBody>
           <a:bodyPr wrap="square" anchor="t" lIns="0" rIns="0" tIns="0" bIns="0">
             <a:spAutoFit/>
+            <a:extLst>
+              <a:ext uri="{8AF73BB6-5E31-4F0F-A399-3D98F3B95FD9}">
+                <ns87:textLayout xmlns:ns87="urn:pptxdsl:text-layout:v1" role="body"/>
+              </a:ext>
+            </a:extLst>
           </a:bodyPr>
           <a:lstStyle/>
           <a:p>
@@ -58851,6 +62341,11 @@
         <p:txBody>
           <a:bodyPr wrap="square" anchor="ctr" lIns="0" rIns="0" tIns="0" bIns="0">
             <a:spAutoFit/>
+            <a:extLst>
+              <a:ext uri="{8AF73BB6-5E31-4F0F-A399-3D98F3B95FD9}">
+                <ns92:textLayout xmlns:ns92="urn:pptxdsl:text-layout:v1" role="body"/>
+              </a:ext>
+            </a:extLst>
           </a:bodyPr>
           <a:lstStyle/>
           <a:p>
@@ -58892,6 +62387,11 @@
         <p:txBody>
           <a:bodyPr wrap="none" anchor="ctr" lIns="0" rIns="0" tIns="0" bIns="0">
             <a:spAutoFit/>
+            <a:extLst>
+              <a:ext uri="{8AF73BB6-5E31-4F0F-A399-3D98F3B95FD9}">
+                <ns97:textLayout xmlns:ns97="urn:pptxdsl:text-layout:v1" role="body"/>
+              </a:ext>
+            </a:extLst>
           </a:bodyPr>
           <a:lstStyle/>
           <a:p>
@@ -59006,6 +62506,11 @@
         <p:txBody>
           <a:bodyPr wrap="square" anchor="t" lIns="0" rIns="0" tIns="0" bIns="0">
             <a:spAutoFit/>
+            <a:extLst>
+              <a:ext uri="{8AF73BB6-5E31-4F0F-A399-3D98F3B95FD9}">
+                <ns2:textLayout xmlns:ns2="urn:pptxdsl:text-layout:v1" role="natural"/>
+              </a:ext>
+            </a:extLst>
           </a:bodyPr>
           <a:lstStyle/>
           <a:p>
@@ -59047,6 +62552,11 @@
         <p:txBody>
           <a:bodyPr wrap="square" anchor="t" lIns="0" rIns="0" tIns="0" bIns="0">
             <a:spAutoFit/>
+            <a:extLst>
+              <a:ext uri="{8AF73BB6-5E31-4F0F-A399-3D98F3B95FD9}">
+                <ns7:textLayout xmlns:ns7="urn:pptxdsl:text-layout:v1" role="natural"/>
+              </a:ext>
+            </a:extLst>
           </a:bodyPr>
           <a:lstStyle/>
           <a:p>
@@ -59096,7 +62606,13 @@
               <a:tr h="658368">
                 <a:tc>
                   <a:txBody>
-                    <a:bodyPr wrap="square"/>
+                    <a:bodyPr wrap="square">
+                      <a:extLst>
+                        <a:ext uri="{8AF73BB6-5E31-4F0F-A399-3D98F3B95FD9}">
+                          <ns12:textLayout xmlns:ns12="urn:pptxdsl:text-layout:v1" role="compact"/>
+                        </a:ext>
+                      </a:extLst>
+                    </a:bodyPr>
                     <a:lstStyle/>
                     <a:p>
                       <a:pPr algn="l">
@@ -59125,7 +62641,13 @@
                 </a:tc>
                 <a:tc>
                   <a:txBody>
-                    <a:bodyPr wrap="square"/>
+                    <a:bodyPr wrap="square">
+                      <a:extLst>
+                        <a:ext uri="{8AF73BB6-5E31-4F0F-A399-3D98F3B95FD9}">
+                          <ns17:textLayout xmlns:ns17="urn:pptxdsl:text-layout:v1" role="compact"/>
+                        </a:ext>
+                      </a:extLst>
+                    </a:bodyPr>
                     <a:lstStyle/>
                     <a:p>
                       <a:pPr algn="l">
@@ -59154,7 +62676,13 @@
                 </a:tc>
                 <a:tc>
                   <a:txBody>
-                    <a:bodyPr wrap="square"/>
+                    <a:bodyPr wrap="square">
+                      <a:extLst>
+                        <a:ext uri="{8AF73BB6-5E31-4F0F-A399-3D98F3B95FD9}">
+                          <ns22:textLayout xmlns:ns22="urn:pptxdsl:text-layout:v1" role="compact"/>
+                        </a:ext>
+                      </a:extLst>
+                    </a:bodyPr>
                     <a:lstStyle/>
                     <a:p>
                       <a:pPr algn="l">
@@ -59183,7 +62711,13 @@
                 </a:tc>
                 <a:tc>
                   <a:txBody>
-                    <a:bodyPr wrap="square"/>
+                    <a:bodyPr wrap="square">
+                      <a:extLst>
+                        <a:ext uri="{8AF73BB6-5E31-4F0F-A399-3D98F3B95FD9}">
+                          <ns27:textLayout xmlns:ns27="urn:pptxdsl:text-layout:v1" role="compact"/>
+                        </a:ext>
+                      </a:extLst>
+                    </a:bodyPr>
                     <a:lstStyle/>
                     <a:p>
                       <a:pPr algn="l">
@@ -59214,7 +62748,13 @@
               <a:tr h="950976">
                 <a:tc>
                   <a:txBody>
-                    <a:bodyPr wrap="square"/>
+                    <a:bodyPr wrap="square">
+                      <a:extLst>
+                        <a:ext uri="{8AF73BB6-5E31-4F0F-A399-3D98F3B95FD9}">
+                          <ns32:textLayout xmlns:ns32="urn:pptxdsl:text-layout:v1" role="compact"/>
+                        </a:ext>
+                      </a:extLst>
+                    </a:bodyPr>
                     <a:lstStyle/>
                     <a:p>
                       <a:pPr algn="l">
@@ -59243,7 +62783,13 @@
                 </a:tc>
                 <a:tc>
                   <a:txBody>
-                    <a:bodyPr wrap="square"/>
+                    <a:bodyPr wrap="square">
+                      <a:extLst>
+                        <a:ext uri="{8AF73BB6-5E31-4F0F-A399-3D98F3B95FD9}">
+                          <ns37:textLayout xmlns:ns37="urn:pptxdsl:text-layout:v1" role="compact"/>
+                        </a:ext>
+                      </a:extLst>
+                    </a:bodyPr>
                     <a:lstStyle/>
                     <a:p>
                       <a:pPr algn="l">
@@ -59272,7 +62818,13 @@
                 </a:tc>
                 <a:tc>
                   <a:txBody>
-                    <a:bodyPr wrap="square"/>
+                    <a:bodyPr wrap="square">
+                      <a:extLst>
+                        <a:ext uri="{8AF73BB6-5E31-4F0F-A399-3D98F3B95FD9}">
+                          <ns42:textLayout xmlns:ns42="urn:pptxdsl:text-layout:v1" role="compact"/>
+                        </a:ext>
+                      </a:extLst>
+                    </a:bodyPr>
                     <a:lstStyle/>
                     <a:p>
                       <a:pPr algn="l">
@@ -59301,7 +62853,13 @@
                 </a:tc>
                 <a:tc>
                   <a:txBody>
-                    <a:bodyPr wrap="square"/>
+                    <a:bodyPr wrap="square">
+                      <a:extLst>
+                        <a:ext uri="{8AF73BB6-5E31-4F0F-A399-3D98F3B95FD9}">
+                          <ns47:textLayout xmlns:ns47="urn:pptxdsl:text-layout:v1" role="compact"/>
+                        </a:ext>
+                      </a:extLst>
+                    </a:bodyPr>
                     <a:lstStyle/>
                     <a:p>
                       <a:pPr algn="l">
@@ -59332,7 +62890,13 @@
               <a:tr h="950976">
                 <a:tc>
                   <a:txBody>
-                    <a:bodyPr wrap="square"/>
+                    <a:bodyPr wrap="square">
+                      <a:extLst>
+                        <a:ext uri="{8AF73BB6-5E31-4F0F-A399-3D98F3B95FD9}">
+                          <ns52:textLayout xmlns:ns52="urn:pptxdsl:text-layout:v1" role="compact"/>
+                        </a:ext>
+                      </a:extLst>
+                    </a:bodyPr>
                     <a:lstStyle/>
                     <a:p>
                       <a:pPr algn="l">
@@ -59361,7 +62925,13 @@
                 </a:tc>
                 <a:tc>
                   <a:txBody>
-                    <a:bodyPr wrap="square"/>
+                    <a:bodyPr wrap="square">
+                      <a:extLst>
+                        <a:ext uri="{8AF73BB6-5E31-4F0F-A399-3D98F3B95FD9}">
+                          <ns57:textLayout xmlns:ns57="urn:pptxdsl:text-layout:v1" role="compact"/>
+                        </a:ext>
+                      </a:extLst>
+                    </a:bodyPr>
                     <a:lstStyle/>
                     <a:p>
                       <a:pPr algn="l">
@@ -59390,7 +62960,13 @@
                 </a:tc>
                 <a:tc>
                   <a:txBody>
-                    <a:bodyPr wrap="square"/>
+                    <a:bodyPr wrap="square">
+                      <a:extLst>
+                        <a:ext uri="{8AF73BB6-5E31-4F0F-A399-3D98F3B95FD9}">
+                          <ns62:textLayout xmlns:ns62="urn:pptxdsl:text-layout:v1" role="compact"/>
+                        </a:ext>
+                      </a:extLst>
+                    </a:bodyPr>
                     <a:lstStyle/>
                     <a:p>
                       <a:pPr algn="l">
@@ -59419,7 +62995,13 @@
                 </a:tc>
                 <a:tc>
                   <a:txBody>
-                    <a:bodyPr wrap="square"/>
+                    <a:bodyPr wrap="square">
+                      <a:extLst>
+                        <a:ext uri="{8AF73BB6-5E31-4F0F-A399-3D98F3B95FD9}">
+                          <ns67:textLayout xmlns:ns67="urn:pptxdsl:text-layout:v1" role="compact"/>
+                        </a:ext>
+                      </a:extLst>
+                    </a:bodyPr>
                     <a:lstStyle/>
                     <a:p>
                       <a:pPr algn="l">
@@ -59450,7 +63032,13 @@
               <a:tr h="950976">
                 <a:tc>
                   <a:txBody>
-                    <a:bodyPr wrap="square"/>
+                    <a:bodyPr wrap="square">
+                      <a:extLst>
+                        <a:ext uri="{8AF73BB6-5E31-4F0F-A399-3D98F3B95FD9}">
+                          <ns72:textLayout xmlns:ns72="urn:pptxdsl:text-layout:v1" role="compact"/>
+                        </a:ext>
+                      </a:extLst>
+                    </a:bodyPr>
                     <a:lstStyle/>
                     <a:p>
                       <a:pPr algn="l">
@@ -59479,7 +63067,13 @@
                 </a:tc>
                 <a:tc>
                   <a:txBody>
-                    <a:bodyPr wrap="square"/>
+                    <a:bodyPr wrap="square">
+                      <a:extLst>
+                        <a:ext uri="{8AF73BB6-5E31-4F0F-A399-3D98F3B95FD9}">
+                          <ns77:textLayout xmlns:ns77="urn:pptxdsl:text-layout:v1" role="compact"/>
+                        </a:ext>
+                      </a:extLst>
+                    </a:bodyPr>
                     <a:lstStyle/>
                     <a:p>
                       <a:pPr algn="l">
@@ -59508,7 +63102,13 @@
                 </a:tc>
                 <a:tc>
                   <a:txBody>
-                    <a:bodyPr wrap="square"/>
+                    <a:bodyPr wrap="square">
+                      <a:extLst>
+                        <a:ext uri="{8AF73BB6-5E31-4F0F-A399-3D98F3B95FD9}">
+                          <ns82:textLayout xmlns:ns82="urn:pptxdsl:text-layout:v1" role="compact"/>
+                        </a:ext>
+                      </a:extLst>
+                    </a:bodyPr>
                     <a:lstStyle/>
                     <a:p>
                       <a:pPr algn="l">
@@ -59537,7 +63137,13 @@
                 </a:tc>
                 <a:tc>
                   <a:txBody>
-                    <a:bodyPr wrap="square"/>
+                    <a:bodyPr wrap="square">
+                      <a:extLst>
+                        <a:ext uri="{8AF73BB6-5E31-4F0F-A399-3D98F3B95FD9}">
+                          <ns87:textLayout xmlns:ns87="urn:pptxdsl:text-layout:v1" role="compact"/>
+                        </a:ext>
+                      </a:extLst>
+                    </a:bodyPr>
                     <a:lstStyle/>
                     <a:p>
                       <a:pPr algn="l">
@@ -59632,6 +63238,11 @@
         <p:txBody>
           <a:bodyPr wrap="square" anchor="ctr" lIns="0" rIns="0" tIns="0" bIns="0">
             <a:spAutoFit/>
+            <a:extLst>
+              <a:ext uri="{8AF73BB6-5E31-4F0F-A399-3D98F3B95FD9}">
+                <ns92:textLayout xmlns:ns92="urn:pptxdsl:text-layout:v1" role="body"/>
+              </a:ext>
+            </a:extLst>
           </a:bodyPr>
           <a:lstStyle/>
           <a:p>
@@ -59673,6 +63284,11 @@
         <p:txBody>
           <a:bodyPr wrap="none" anchor="ctr" lIns="0" rIns="0" tIns="0" bIns="0">
             <a:spAutoFit/>
+            <a:extLst>
+              <a:ext uri="{8AF73BB6-5E31-4F0F-A399-3D98F3B95FD9}">
+                <ns97:textLayout xmlns:ns97="urn:pptxdsl:text-layout:v1" role="body"/>
+              </a:ext>
+            </a:extLst>
           </a:bodyPr>
           <a:lstStyle/>
           <a:p>
@@ -59787,6 +63403,11 @@
         <p:txBody>
           <a:bodyPr wrap="square" anchor="t" lIns="0" rIns="0" tIns="0" bIns="0">
             <a:spAutoFit/>
+            <a:extLst>
+              <a:ext uri="{8AF73BB6-5E31-4F0F-A399-3D98F3B95FD9}">
+                <ns2:textLayout xmlns:ns2="urn:pptxdsl:text-layout:v1" role="natural"/>
+              </a:ext>
+            </a:extLst>
           </a:bodyPr>
           <a:lstStyle/>
           <a:p>
@@ -59828,6 +63449,11 @@
         <p:txBody>
           <a:bodyPr wrap="square" anchor="t" lIns="0" rIns="0" tIns="0" bIns="0">
             <a:spAutoFit/>
+            <a:extLst>
+              <a:ext uri="{8AF73BB6-5E31-4F0F-A399-3D98F3B95FD9}">
+                <ns7:textLayout xmlns:ns7="urn:pptxdsl:text-layout:v1" role="natural"/>
+              </a:ext>
+            </a:extLst>
           </a:bodyPr>
           <a:lstStyle/>
           <a:p>
@@ -59904,6 +63530,11 @@
         <p:txBody>
           <a:bodyPr wrap="square" anchor="t" lIns="0" rIns="0" tIns="0" bIns="0">
             <a:spAutoFit/>
+            <a:extLst>
+              <a:ext uri="{8AF73BB6-5E31-4F0F-A399-3D98F3B95FD9}">
+                <ns12:textLayout xmlns:ns12="urn:pptxdsl:text-layout:v1" role="body"/>
+              </a:ext>
+            </a:extLst>
           </a:bodyPr>
           <a:lstStyle/>
           <a:p>
@@ -59980,6 +63611,11 @@
         <p:txBody>
           <a:bodyPr wrap="square" anchor="t" lIns="0" rIns="0" tIns="0" bIns="0">
             <a:spAutoFit/>
+            <a:extLst>
+              <a:ext uri="{8AF73BB6-5E31-4F0F-A399-3D98F3B95FD9}">
+                <ns17:textLayout xmlns:ns17="urn:pptxdsl:text-layout:v1" role="body"/>
+              </a:ext>
+            </a:extLst>
           </a:bodyPr>
           <a:lstStyle/>
           <a:p>
@@ -60056,6 +63692,11 @@
         <p:txBody>
           <a:bodyPr wrap="square" anchor="t" lIns="0" rIns="0" tIns="0" bIns="0">
             <a:spAutoFit/>
+            <a:extLst>
+              <a:ext uri="{8AF73BB6-5E31-4F0F-A399-3D98F3B95FD9}">
+                <ns22:textLayout xmlns:ns22="urn:pptxdsl:text-layout:v1" role="body"/>
+              </a:ext>
+            </a:extLst>
           </a:bodyPr>
           <a:lstStyle/>
           <a:p>
@@ -60132,6 +63773,11 @@
         <p:txBody>
           <a:bodyPr wrap="square" anchor="t" lIns="0" rIns="0" tIns="0" bIns="0">
             <a:spAutoFit/>
+            <a:extLst>
+              <a:ext uri="{8AF73BB6-5E31-4F0F-A399-3D98F3B95FD9}">
+                <ns27:textLayout xmlns:ns27="urn:pptxdsl:text-layout:v1" role="body"/>
+              </a:ext>
+            </a:extLst>
           </a:bodyPr>
           <a:lstStyle/>
           <a:p>
@@ -60208,6 +63854,11 @@
         <p:txBody>
           <a:bodyPr wrap="square" anchor="t" lIns="0" rIns="0" tIns="0" bIns="0">
             <a:spAutoFit/>
+            <a:extLst>
+              <a:ext uri="{8AF73BB6-5E31-4F0F-A399-3D98F3B95FD9}">
+                <ns32:textLayout xmlns:ns32="urn:pptxdsl:text-layout:v1" role="body"/>
+              </a:ext>
+            </a:extLst>
           </a:bodyPr>
           <a:lstStyle/>
           <a:p>
@@ -60284,6 +63935,11 @@
         <p:txBody>
           <a:bodyPr wrap="square" anchor="t" lIns="0" rIns="0" tIns="0" bIns="0">
             <a:spAutoFit/>
+            <a:extLst>
+              <a:ext uri="{8AF73BB6-5E31-4F0F-A399-3D98F3B95FD9}">
+                <ns37:textLayout xmlns:ns37="urn:pptxdsl:text-layout:v1" role="natural"/>
+              </a:ext>
+            </a:extLst>
           </a:bodyPr>
           <a:lstStyle/>
           <a:p>
@@ -60369,6 +64025,11 @@
         <p:txBody>
           <a:bodyPr wrap="square" anchor="t" lIns="0" rIns="0" tIns="0" bIns="0">
             <a:spAutoFit/>
+            <a:extLst>
+              <a:ext uri="{8AF73BB6-5E31-4F0F-A399-3D98F3B95FD9}">
+                <ns42:textLayout xmlns:ns42="urn:pptxdsl:text-layout:v1" role="body"/>
+              </a:ext>
+            </a:extLst>
           </a:bodyPr>
           <a:lstStyle/>
           <a:p>
@@ -60454,6 +64115,11 @@
         <p:txBody>
           <a:bodyPr wrap="square" anchor="t" lIns="0" rIns="0" tIns="0" bIns="0">
             <a:spAutoFit/>
+            <a:extLst>
+              <a:ext uri="{8AF73BB6-5E31-4F0F-A399-3D98F3B95FD9}">
+                <ns47:textLayout xmlns:ns47="urn:pptxdsl:text-layout:v1" role="body"/>
+              </a:ext>
+            </a:extLst>
           </a:bodyPr>
           <a:lstStyle/>
           <a:p>
@@ -60495,6 +64161,11 @@
         <p:txBody>
           <a:bodyPr wrap="square" anchor="t" lIns="0" rIns="0" tIns="0" bIns="0">
             <a:spAutoFit/>
+            <a:extLst>
+              <a:ext uri="{8AF73BB6-5E31-4F0F-A399-3D98F3B95FD9}">
+                <ns52:textLayout xmlns:ns52="urn:pptxdsl:text-layout:v1" role="natural"/>
+              </a:ext>
+            </a:extLst>
           </a:bodyPr>
           <a:lstStyle/>
           <a:p>
@@ -60580,6 +64251,11 @@
         <p:txBody>
           <a:bodyPr wrap="square" anchor="t" lIns="0" rIns="0" tIns="0" bIns="0">
             <a:spAutoFit/>
+            <a:extLst>
+              <a:ext uri="{8AF73BB6-5E31-4F0F-A399-3D98F3B95FD9}">
+                <ns57:textLayout xmlns:ns57="urn:pptxdsl:text-layout:v1" role="body"/>
+              </a:ext>
+            </a:extLst>
           </a:bodyPr>
           <a:lstStyle/>
           <a:p>
@@ -60665,6 +64341,11 @@
         <p:txBody>
           <a:bodyPr wrap="square" anchor="t" lIns="0" rIns="0" tIns="0" bIns="0">
             <a:spAutoFit/>
+            <a:extLst>
+              <a:ext uri="{8AF73BB6-5E31-4F0F-A399-3D98F3B95FD9}">
+                <ns62:textLayout xmlns:ns62="urn:pptxdsl:text-layout:v1" role="body"/>
+              </a:ext>
+            </a:extLst>
           </a:bodyPr>
           <a:lstStyle/>
           <a:p>
@@ -60706,6 +64387,11 @@
         <p:txBody>
           <a:bodyPr wrap="square" anchor="t" lIns="0" rIns="0" tIns="0" bIns="0">
             <a:spAutoFit/>
+            <a:extLst>
+              <a:ext uri="{8AF73BB6-5E31-4F0F-A399-3D98F3B95FD9}">
+                <ns67:textLayout xmlns:ns67="urn:pptxdsl:text-layout:v1" role="natural"/>
+              </a:ext>
+            </a:extLst>
           </a:bodyPr>
           <a:lstStyle/>
           <a:p>
@@ -60791,6 +64477,11 @@
         <p:txBody>
           <a:bodyPr wrap="square" anchor="t" lIns="0" rIns="0" tIns="0" bIns="0">
             <a:spAutoFit/>
+            <a:extLst>
+              <a:ext uri="{8AF73BB6-5E31-4F0F-A399-3D98F3B95FD9}">
+                <ns72:textLayout xmlns:ns72="urn:pptxdsl:text-layout:v1" role="body"/>
+              </a:ext>
+            </a:extLst>
           </a:bodyPr>
           <a:lstStyle/>
           <a:p>
@@ -60876,6 +64567,11 @@
         <p:txBody>
           <a:bodyPr wrap="square" anchor="t" lIns="0" rIns="0" tIns="0" bIns="0">
             <a:spAutoFit/>
+            <a:extLst>
+              <a:ext uri="{8AF73BB6-5E31-4F0F-A399-3D98F3B95FD9}">
+                <ns77:textLayout xmlns:ns77="urn:pptxdsl:text-layout:v1" role="body"/>
+              </a:ext>
+            </a:extLst>
           </a:bodyPr>
           <a:lstStyle/>
           <a:p>
@@ -60917,6 +64613,11 @@
         <p:txBody>
           <a:bodyPr wrap="square" anchor="t" lIns="0" rIns="0" tIns="0" bIns="0">
             <a:spAutoFit/>
+            <a:extLst>
+              <a:ext uri="{8AF73BB6-5E31-4F0F-A399-3D98F3B95FD9}">
+                <ns82:textLayout xmlns:ns82="urn:pptxdsl:text-layout:v1" role="natural"/>
+              </a:ext>
+            </a:extLst>
           </a:bodyPr>
           <a:lstStyle/>
           <a:p>
@@ -61002,6 +64703,11 @@
         <p:txBody>
           <a:bodyPr wrap="square" anchor="t" lIns="0" rIns="0" tIns="0" bIns="0">
             <a:spAutoFit/>
+            <a:extLst>
+              <a:ext uri="{8AF73BB6-5E31-4F0F-A399-3D98F3B95FD9}">
+                <ns87:textLayout xmlns:ns87="urn:pptxdsl:text-layout:v1" role="body"/>
+              </a:ext>
+            </a:extLst>
           </a:bodyPr>
           <a:lstStyle/>
           <a:p>
@@ -61087,6 +64793,11 @@
         <p:txBody>
           <a:bodyPr wrap="square" anchor="t" lIns="0" rIns="0" tIns="0" bIns="0">
             <a:spAutoFit/>
+            <a:extLst>
+              <a:ext uri="{8AF73BB6-5E31-4F0F-A399-3D98F3B95FD9}">
+                <ns92:textLayout xmlns:ns92="urn:pptxdsl:text-layout:v1" role="body"/>
+              </a:ext>
+            </a:extLst>
           </a:bodyPr>
           <a:lstStyle/>
           <a:p>
@@ -61172,6 +64883,11 @@
         <p:txBody>
           <a:bodyPr wrap="square" anchor="t" lIns="0" rIns="0" tIns="0" bIns="0">
             <a:spAutoFit/>
+            <a:extLst>
+              <a:ext uri="{8AF73BB6-5E31-4F0F-A399-3D98F3B95FD9}">
+                <ns97:textLayout xmlns:ns97="urn:pptxdsl:text-layout:v1" role="body"/>
+              </a:ext>
+            </a:extLst>
           </a:bodyPr>
           <a:lstStyle/>
           <a:p>
@@ -61257,6 +64973,11 @@
         <p:txBody>
           <a:bodyPr wrap="square" anchor="t" lIns="0" rIns="0" tIns="0" bIns="0">
             <a:spAutoFit/>
+            <a:extLst>
+              <a:ext uri="{8AF73BB6-5E31-4F0F-A399-3D98F3B95FD9}">
+                <ns102:textLayout xmlns:ns102="urn:pptxdsl:text-layout:v1" role="body"/>
+              </a:ext>
+            </a:extLst>
           </a:bodyPr>
           <a:lstStyle/>
           <a:p>
@@ -61298,6 +65019,11 @@
         <p:txBody>
           <a:bodyPr wrap="square" anchor="t" lIns="0" rIns="0" tIns="0" bIns="0">
             <a:spAutoFit/>
+            <a:extLst>
+              <a:ext uri="{8AF73BB6-5E31-4F0F-A399-3D98F3B95FD9}">
+                <ns107:textLayout xmlns:ns107="urn:pptxdsl:text-layout:v1" role="body"/>
+              </a:ext>
+            </a:extLst>
           </a:bodyPr>
           <a:lstStyle/>
           <a:p>
@@ -61383,6 +65109,11 @@
         <p:txBody>
           <a:bodyPr wrap="square" anchor="ctr" lIns="0" rIns="0" tIns="0" bIns="0">
             <a:spAutoFit/>
+            <a:extLst>
+              <a:ext uri="{8AF73BB6-5E31-4F0F-A399-3D98F3B95FD9}">
+                <ns112:textLayout xmlns:ns112="urn:pptxdsl:text-layout:v1" role="body"/>
+              </a:ext>
+            </a:extLst>
           </a:bodyPr>
           <a:lstStyle/>
           <a:p>
@@ -61424,6 +65155,11 @@
         <p:txBody>
           <a:bodyPr wrap="none" anchor="ctr" lIns="0" rIns="0" tIns="0" bIns="0">
             <a:spAutoFit/>
+            <a:extLst>
+              <a:ext uri="{8AF73BB6-5E31-4F0F-A399-3D98F3B95FD9}">
+                <ns117:textLayout xmlns:ns117="urn:pptxdsl:text-layout:v1" role="body"/>
+              </a:ext>
+            </a:extLst>
           </a:bodyPr>
           <a:lstStyle/>
           <a:p>

--- a/examples/gallery/pattern_gallery.pptx
+++ b/examples/gallery/pattern_gallery.pptx
@@ -61471,14 +61471,14 @@
       </p:sp>
       <p:sp>
         <p:nvSpPr>
-          <p:cNvPr id="16" name="Rectangle 15"/>
+          <p:cNvPr id="16" name="slide-footnote:rule"/>
           <p:cNvSpPr/>
           <p:nvPr/>
         </p:nvSpPr>
         <p:spPr>
           <a:xfrm>
-            <a:off x="658368" y="6327648"/>
-            <a:ext cx="10881360" cy="9144"/>
+            <a:off x="502920" y="5822696"/>
+            <a:ext cx="11185855" cy="9144"/>
           </a:xfrm>
           <a:prstGeom prst="rect">
             <a:avLst/>
@@ -61515,7 +61515,143 @@
       </p:sp>
       <p:sp>
         <p:nvSpPr>
-          <p:cNvPr id="17" name="TextBox 16"/>
+          <p:cNvPr id="17" name="slide-footnote:label"/>
+          <p:cNvSpPr txBox="1"/>
+          <p:nvPr/>
+        </p:nvSpPr>
+        <p:spPr>
+          <a:xfrm>
+            <a:off x="502920" y="5932424"/>
+            <a:ext cx="1271016" cy="221488"/>
+          </a:xfrm>
+          <a:prstGeom prst="rect">
+            <a:avLst/>
+          </a:prstGeom>
+          <a:noFill/>
+        </p:spPr>
+        <p:txBody>
+          <a:bodyPr wrap="square" anchor="t" lIns="0" rIns="0" tIns="0" bIns="0">
+            <a:spAutoFit/>
+            <a:extLst>
+              <a:ext uri="{8AF73BB6-5E31-4F0F-A399-3D98F3B95FD9}">
+                <ns57:textLayout xmlns:ns57="urn:pptxdsl:text-layout:v1" role="natural"/>
+              </a:ext>
+            </a:extLst>
+          </a:bodyPr>
+          <a:lstStyle/>
+          <a:p>
+            <a:pPr algn="l">
+              <a:lnSpc>
+                <a:spcPct val="112000"/>
+              </a:lnSpc>
+            </a:pPr>
+            <a:r>
+              <a:rPr sz="1150" b="1" lang="ja-JP">
+                <a:solidFill>
+                  <a:srgbClr val="C7583E"/>
+                </a:solidFill>
+                <a:latin typeface="Yu Gothic"/>
+                <a:ea typeface="Yu Gothic"/>
+                <a:cs typeface="Yu Gothic"/>
+              </a:rPr>
+              <a:t>架空データ</a:t>
+            </a:r>
+          </a:p>
+        </p:txBody>
+      </p:sp>
+      <p:sp>
+        <p:nvSpPr>
+          <p:cNvPr id="18" name="slide-footnote:text"/>
+          <p:cNvSpPr txBox="1"/>
+          <p:nvPr/>
+        </p:nvSpPr>
+        <p:spPr>
+          <a:xfrm>
+            <a:off x="1920240" y="5932424"/>
+            <a:ext cx="9768535" cy="221488"/>
+          </a:xfrm>
+          <a:prstGeom prst="rect">
+            <a:avLst/>
+          </a:prstGeom>
+          <a:noFill/>
+        </p:spPr>
+        <p:txBody>
+          <a:bodyPr wrap="square" anchor="t" lIns="0" rIns="0" tIns="0" bIns="0">
+            <a:spAutoFit/>
+            <a:extLst>
+              <a:ext uri="{8AF73BB6-5E31-4F0F-A399-3D98F3B95FD9}">
+                <ns62:textLayout xmlns:ns62="urn:pptxdsl:text-layout:v1" role="body"/>
+              </a:ext>
+            </a:extLst>
+          </a:bodyPr>
+          <a:lstStyle/>
+          <a:p>
+            <a:pPr algn="l">
+              <a:lnSpc>
+                <a:spcPct val="112000"/>
+              </a:lnSpc>
+            </a:pPr>
+            <a:r>
+              <a:rPr sz="1300" b="0" lang="ja-JP">
+                <a:solidFill>
+                  <a:srgbClr val="202729"/>
+                </a:solidFill>
+                <a:latin typeface="Yu Gothic"/>
+                <a:ea typeface="Yu Gothic"/>
+                <a:cs typeface="Yu Gothic"/>
+              </a:rPr>
+              <a:t>数値と効果の説明は表示検証用のサンプルであり、実績や測定結果ではありません。</a:t>
+            </a:r>
+          </a:p>
+        </p:txBody>
+      </p:sp>
+      <p:sp>
+        <p:nvSpPr>
+          <p:cNvPr id="19" name="Rectangle 18"/>
+          <p:cNvSpPr/>
+          <p:nvPr/>
+        </p:nvSpPr>
+        <p:spPr>
+          <a:xfrm>
+            <a:off x="658368" y="6327648"/>
+            <a:ext cx="10881360" cy="9144"/>
+          </a:xfrm>
+          <a:prstGeom prst="rect">
+            <a:avLst/>
+          </a:prstGeom>
+          <a:solidFill>
+            <a:srgbClr val="D1CFC8"/>
+          </a:solidFill>
+          <a:ln>
+            <a:noFill/>
+          </a:ln>
+          <a:effectLst/>
+        </p:spPr>
+        <p:style>
+          <a:lnRef idx="1">
+            <a:schemeClr val="accent1"/>
+          </a:lnRef>
+          <a:fillRef idx="3">
+            <a:schemeClr val="accent1"/>
+          </a:fillRef>
+          <a:effectRef idx="2">
+            <a:schemeClr val="accent1"/>
+          </a:effectRef>
+          <a:fontRef idx="minor">
+            <a:schemeClr val="lt1"/>
+          </a:fontRef>
+        </p:style>
+        <p:txBody>
+          <a:bodyPr rtlCol="0" anchor="ctr"/>
+          <a:lstStyle/>
+          <a:p>
+            <a:pPr algn="ctr"/>
+          </a:p>
+        </p:txBody>
+      </p:sp>
+      <p:sp>
+        <p:nvSpPr>
+          <p:cNvPr id="20" name="TextBox 19"/>
           <p:cNvSpPr txBox="1"/>
           <p:nvPr/>
         </p:nvSpPr>
@@ -61534,7 +61670,7 @@
             <a:spAutoFit/>
             <a:extLst>
               <a:ext uri="{8AF73BB6-5E31-4F0F-A399-3D98F3B95FD9}">
-                <ns57:textLayout xmlns:ns57="urn:pptxdsl:text-layout:v1" role="body"/>
+                <ns67:textLayout xmlns:ns67="urn:pptxdsl:text-layout:v1" role="body"/>
               </a:ext>
             </a:extLst>
           </a:bodyPr>
@@ -61561,7 +61697,7 @@
       </p:sp>
       <p:sp>
         <p:nvSpPr>
-          <p:cNvPr id="18" name="TextBox 17"/>
+          <p:cNvPr id="21" name="TextBox 20"/>
           <p:cNvSpPr txBox="1"/>
           <p:nvPr/>
         </p:nvSpPr>
@@ -61580,7 +61716,7 @@
             <a:spAutoFit/>
             <a:extLst>
               <a:ext uri="{8AF73BB6-5E31-4F0F-A399-3D98F3B95FD9}">
-                <ns62:textLayout xmlns:ns62="urn:pptxdsl:text-layout:v1" role="body"/>
+                <ns72:textLayout xmlns:ns72="urn:pptxdsl:text-layout:v1" role="body"/>
               </a:ext>
             </a:extLst>
           </a:bodyPr>

--- a/examples/gallery/pattern_gallery.pptx
+++ b/examples/gallery/pattern_gallery.pptx
@@ -37151,1666 +37151,16 @@
           </a:p>
         </p:txBody>
       </p:sp>
-      <p:pic>
-        <p:nvPicPr>
-          <p:cNvPr id="6" name="Picture 5" descr="laptop.png"/>
-          <p:cNvPicPr>
-            <a:picLocks noChangeAspect="1"/>
-          </p:cNvPicPr>
-          <p:nvPr/>
-        </p:nvPicPr>
-        <p:blipFill>
-          <a:blip r:embed="rId2"/>
-          <a:stretch>
-            <a:fillRect/>
-          </a:stretch>
-        </p:blipFill>
-        <p:spPr>
-          <a:xfrm>
-            <a:off x="2568823" y="1910588"/>
-            <a:ext cx="310896" cy="310896"/>
-          </a:xfrm>
-          <a:prstGeom prst="rect">
-            <a:avLst/>
-          </a:prstGeom>
-        </p:spPr>
-      </p:pic>
-      <p:sp>
-        <p:nvSpPr>
-          <p:cNvPr id="7" name="TextBox 6"/>
-          <p:cNvSpPr txBox="1"/>
-          <p:nvPr/>
-        </p:nvSpPr>
-        <p:spPr>
-          <a:xfrm>
-            <a:off x="1856232" y="2276348"/>
-            <a:ext cx="1736079" cy="219455"/>
-          </a:xfrm>
-          <a:prstGeom prst="rect">
-            <a:avLst/>
-          </a:prstGeom>
-          <a:noFill/>
-        </p:spPr>
-        <p:txBody>
-          <a:bodyPr wrap="square" anchor="t" lIns="0" rIns="0" tIns="0" bIns="0">
-            <a:spAutoFit/>
-            <a:extLst>
-              <a:ext uri="{8AF73BB6-5E31-4F0F-A399-3D98F3B95FD9}">
-                <ns17:textLayout xmlns:ns17="urn:pptxdsl:text-layout:v1" role="compact"/>
-              </a:ext>
-            </a:extLst>
-          </a:bodyPr>
-          <a:lstStyle/>
-          <a:p>
-            <a:pPr algn="ctr">
-              <a:lnSpc>
-                <a:spcPct val="100000"/>
-              </a:lnSpc>
-            </a:pPr>
-            <a:r>
-              <a:rPr sz="1050" b="1" lang="ja-JP">
-                <a:solidFill>
-                  <a:srgbClr val="182C43"/>
-                </a:solidFill>
-                <a:latin typeface="Yu Gothic"/>
-                <a:ea typeface="Yu Gothic"/>
-                <a:cs typeface="Yu Gothic"/>
-              </a:rPr>
-              <a:t>社内端末</a:t>
-            </a:r>
-          </a:p>
-        </p:txBody>
-      </p:sp>
-      <p:pic>
-        <p:nvPicPr>
-          <p:cNvPr id="8" name="Picture 7" descr="ethernet.png"/>
-          <p:cNvPicPr>
-            <a:picLocks noChangeAspect="1"/>
-          </p:cNvPicPr>
-          <p:nvPr/>
-        </p:nvPicPr>
-        <p:blipFill>
-          <a:blip r:embed="rId3"/>
-          <a:stretch>
-            <a:fillRect/>
-          </a:stretch>
-        </p:blipFill>
-        <p:spPr>
-          <a:xfrm>
-            <a:off x="4579223" y="1910588"/>
-            <a:ext cx="310896" cy="310896"/>
-          </a:xfrm>
-          <a:prstGeom prst="rect">
-            <a:avLst/>
-          </a:prstGeom>
-        </p:spPr>
-      </p:pic>
-      <p:sp>
-        <p:nvSpPr>
-          <p:cNvPr id="9" name="TextBox 8"/>
-          <p:cNvSpPr txBox="1"/>
-          <p:nvPr/>
-        </p:nvSpPr>
-        <p:spPr>
-          <a:xfrm>
-            <a:off x="3866631" y="2276348"/>
-            <a:ext cx="1736079" cy="219455"/>
-          </a:xfrm>
-          <a:prstGeom prst="rect">
-            <a:avLst/>
-          </a:prstGeom>
-          <a:noFill/>
-        </p:spPr>
-        <p:txBody>
-          <a:bodyPr wrap="square" anchor="t" lIns="0" rIns="0" tIns="0" bIns="0">
-            <a:spAutoFit/>
-            <a:extLst>
-              <a:ext uri="{8AF73BB6-5E31-4F0F-A399-3D98F3B95FD9}">
-                <ns22:textLayout xmlns:ns22="urn:pptxdsl:text-layout:v1" role="compact"/>
-              </a:ext>
-            </a:extLst>
-          </a:bodyPr>
-          <a:lstStyle/>
-          <a:p>
-            <a:pPr algn="ctr">
-              <a:lnSpc>
-                <a:spcPct val="100000"/>
-              </a:lnSpc>
-            </a:pPr>
-            <a:r>
-              <a:rPr sz="1050" b="1" lang="ja-JP">
-                <a:solidFill>
-                  <a:srgbClr val="182C43"/>
-                </a:solidFill>
-                <a:latin typeface="Yu Gothic"/>
-                <a:ea typeface="Yu Gothic"/>
-                <a:cs typeface="Yu Gothic"/>
-              </a:rPr>
-              <a:t>ルーター内側</a:t>
-            </a:r>
-          </a:p>
-        </p:txBody>
-      </p:sp>
-      <p:pic>
-        <p:nvPicPr>
-          <p:cNvPr id="10" name="Picture 9" descr="switch.png"/>
-          <p:cNvPicPr>
-            <a:picLocks noChangeAspect="1"/>
-          </p:cNvPicPr>
-          <p:nvPr/>
-        </p:nvPicPr>
-        <p:blipFill>
-          <a:blip r:embed="rId4"/>
-          <a:stretch>
-            <a:fillRect/>
-          </a:stretch>
-        </p:blipFill>
-        <p:spPr>
-          <a:xfrm>
-            <a:off x="6589623" y="1910588"/>
-            <a:ext cx="310896" cy="310896"/>
-          </a:xfrm>
-          <a:prstGeom prst="rect">
-            <a:avLst/>
-          </a:prstGeom>
-        </p:spPr>
-      </p:pic>
-      <p:sp>
-        <p:nvSpPr>
-          <p:cNvPr id="11" name="TextBox 10"/>
-          <p:cNvSpPr txBox="1"/>
-          <p:nvPr/>
-        </p:nvSpPr>
-        <p:spPr>
-          <a:xfrm>
-            <a:off x="5877031" y="2276348"/>
-            <a:ext cx="1736079" cy="219455"/>
-          </a:xfrm>
-          <a:prstGeom prst="rect">
-            <a:avLst/>
-          </a:prstGeom>
-          <a:noFill/>
-        </p:spPr>
-        <p:txBody>
-          <a:bodyPr wrap="square" anchor="t" lIns="0" rIns="0" tIns="0" bIns="0">
-            <a:spAutoFit/>
-            <a:extLst>
-              <a:ext uri="{8AF73BB6-5E31-4F0F-A399-3D98F3B95FD9}">
-                <ns27:textLayout xmlns:ns27="urn:pptxdsl:text-layout:v1" role="compact"/>
-              </a:ext>
-            </a:extLst>
-          </a:bodyPr>
-          <a:lstStyle/>
-          <a:p>
-            <a:pPr algn="ctr">
-              <a:lnSpc>
-                <a:spcPct val="100000"/>
-              </a:lnSpc>
-            </a:pPr>
-            <a:r>
-              <a:rPr sz="1050" b="1" lang="ja-JP">
-                <a:solidFill>
-                  <a:srgbClr val="182C43"/>
-                </a:solidFill>
-                <a:latin typeface="Yu Gothic"/>
-                <a:ea typeface="Yu Gothic"/>
-                <a:cs typeface="Yu Gothic"/>
-              </a:rPr>
-              <a:t>NAT処理</a:t>
-            </a:r>
-          </a:p>
-        </p:txBody>
-      </p:sp>
-      <p:sp>
-        <p:nvSpPr>
-          <p:cNvPr id="12" name="layout-background:protocol-state-flow:stage:internet"/>
+      <p:sp>
+        <p:nvSpPr>
+          <p:cNvPr id="6" name="protocol-state-flow:legend:protocol-state-flow:marker:plain"/>
           <p:cNvSpPr/>
           <p:nvPr/>
         </p:nvSpPr>
         <p:spPr>
           <a:xfrm>
-            <a:off x="7805135" y="2568956"/>
-            <a:ext cx="1900671" cy="2084832"/>
-          </a:xfrm>
-          <a:prstGeom prst="rect">
-            <a:avLst/>
-          </a:prstGeom>
-          <a:solidFill>
-            <a:srgbClr val="EAF0EF"/>
-          </a:solidFill>
-          <a:ln>
-            <a:noFill/>
-          </a:ln>
-          <a:effectLst/>
-        </p:spPr>
-        <p:style>
-          <a:lnRef idx="1">
-            <a:schemeClr val="accent1"/>
-          </a:lnRef>
-          <a:fillRef idx="3">
-            <a:schemeClr val="accent1"/>
-          </a:fillRef>
-          <a:effectRef idx="2">
-            <a:schemeClr val="accent1"/>
-          </a:effectRef>
-          <a:fontRef idx="minor">
-            <a:schemeClr val="lt1"/>
-          </a:fontRef>
-        </p:style>
-        <p:txBody>
-          <a:bodyPr rtlCol="0" anchor="ctr"/>
-          <a:lstStyle/>
-          <a:p>
-            <a:pPr algn="ctr"/>
-          </a:p>
-        </p:txBody>
-      </p:sp>
-      <p:pic>
-        <p:nvPicPr>
-          <p:cNvPr id="13" name="Picture 12" descr="link.png"/>
-          <p:cNvPicPr>
-            <a:picLocks noChangeAspect="1"/>
-          </p:cNvPicPr>
-          <p:nvPr/>
-        </p:nvPicPr>
-        <p:blipFill>
-          <a:blip r:embed="rId5"/>
-          <a:stretch>
-            <a:fillRect/>
-          </a:stretch>
-        </p:blipFill>
-        <p:spPr>
-          <a:xfrm>
-            <a:off x="8600023" y="1910588"/>
-            <a:ext cx="310896" cy="310896"/>
-          </a:xfrm>
-          <a:prstGeom prst="rect">
-            <a:avLst/>
-          </a:prstGeom>
-        </p:spPr>
-      </p:pic>
-      <p:sp>
-        <p:nvSpPr>
-          <p:cNvPr id="14" name="TextBox 13"/>
-          <p:cNvSpPr txBox="1"/>
-          <p:nvPr/>
-        </p:nvSpPr>
-        <p:spPr>
-          <a:xfrm>
-            <a:off x="7887431" y="2276348"/>
-            <a:ext cx="1736079" cy="219455"/>
-          </a:xfrm>
-          <a:prstGeom prst="rect">
-            <a:avLst/>
-          </a:prstGeom>
-          <a:noFill/>
-        </p:spPr>
-        <p:txBody>
-          <a:bodyPr wrap="square" anchor="t" lIns="0" rIns="0" tIns="0" bIns="0">
-            <a:spAutoFit/>
-            <a:extLst>
-              <a:ext uri="{8AF73BB6-5E31-4F0F-A399-3D98F3B95FD9}">
-                <ns32:textLayout xmlns:ns32="urn:pptxdsl:text-layout:v1" role="compact"/>
-              </a:ext>
-            </a:extLst>
-          </a:bodyPr>
-          <a:lstStyle/>
-          <a:p>
-            <a:pPr algn="ctr">
-              <a:lnSpc>
-                <a:spcPct val="100000"/>
-              </a:lnSpc>
-            </a:pPr>
-            <a:r>
-              <a:rPr sz="1050" b="1" lang="ja-JP">
-                <a:solidFill>
-                  <a:srgbClr val="182C43"/>
-                </a:solidFill>
-                <a:latin typeface="Yu Gothic"/>
-                <a:ea typeface="Yu Gothic"/>
-                <a:cs typeface="Yu Gothic"/>
-              </a:rPr>
-              <a:t>インターネット区間</a:t>
-            </a:r>
-          </a:p>
-        </p:txBody>
-      </p:sp>
-      <p:pic>
-        <p:nvPicPr>
-          <p:cNvPr id="15" name="Picture 14" descr="server.png"/>
-          <p:cNvPicPr>
-            <a:picLocks noChangeAspect="1"/>
-          </p:cNvPicPr>
-          <p:nvPr/>
-        </p:nvPicPr>
-        <p:blipFill>
-          <a:blip r:embed="rId6"/>
-          <a:stretch>
-            <a:fillRect/>
-          </a:stretch>
-        </p:blipFill>
-        <p:spPr>
-          <a:xfrm>
-            <a:off x="10610423" y="1910588"/>
-            <a:ext cx="310896" cy="310896"/>
-          </a:xfrm>
-          <a:prstGeom prst="rect">
-            <a:avLst/>
-          </a:prstGeom>
-        </p:spPr>
-      </p:pic>
-      <p:sp>
-        <p:nvSpPr>
-          <p:cNvPr id="16" name="TextBox 15"/>
-          <p:cNvSpPr txBox="1"/>
-          <p:nvPr/>
-        </p:nvSpPr>
-        <p:spPr>
-          <a:xfrm>
-            <a:off x="9897831" y="2276348"/>
-            <a:ext cx="1736079" cy="219455"/>
-          </a:xfrm>
-          <a:prstGeom prst="rect">
-            <a:avLst/>
-          </a:prstGeom>
-          <a:noFill/>
-        </p:spPr>
-        <p:txBody>
-          <a:bodyPr wrap="square" anchor="t" lIns="0" rIns="0" tIns="0" bIns="0">
-            <a:spAutoFit/>
-            <a:extLst>
-              <a:ext uri="{8AF73BB6-5E31-4F0F-A399-3D98F3B95FD9}">
-                <ns37:textLayout xmlns:ns37="urn:pptxdsl:text-layout:v1" role="compact"/>
-              </a:ext>
-            </a:extLst>
-          </a:bodyPr>
-          <a:lstStyle/>
-          <a:p>
-            <a:pPr algn="ctr">
-              <a:lnSpc>
-                <a:spcPct val="100000"/>
-              </a:lnSpc>
-            </a:pPr>
-            <a:r>
-              <a:rPr sz="1050" b="1" lang="ja-JP">
-                <a:solidFill>
-                  <a:srgbClr val="182C43"/>
-                </a:solidFill>
-                <a:latin typeface="Yu Gothic"/>
-                <a:ea typeface="Yu Gothic"/>
-                <a:cs typeface="Yu Gothic"/>
-              </a:rPr>
-              <a:t>外部サーバー</a:t>
-            </a:r>
-          </a:p>
-        </p:txBody>
-      </p:sp>
-      <p:sp>
-        <p:nvSpPr>
-          <p:cNvPr id="17" name="layout-background:protocol-state-flow:track:0"/>
-          <p:cNvSpPr/>
-          <p:nvPr/>
-        </p:nvSpPr>
-        <p:spPr>
-          <a:xfrm>
-            <a:off x="502920" y="2642108"/>
-            <a:ext cx="11185855" cy="896112"/>
-          </a:xfrm>
-          <a:prstGeom prst="rect">
-            <a:avLst/>
-          </a:prstGeom>
-          <a:solidFill>
-            <a:srgbClr val="D9EBE8"/>
-          </a:solidFill>
-          <a:ln>
-            <a:noFill/>
-          </a:ln>
-          <a:effectLst/>
-        </p:spPr>
-        <p:style>
-          <a:lnRef idx="1">
-            <a:schemeClr val="accent1"/>
-          </a:lnRef>
-          <a:fillRef idx="3">
-            <a:schemeClr val="accent1"/>
-          </a:fillRef>
-          <a:effectRef idx="2">
-            <a:schemeClr val="accent1"/>
-          </a:effectRef>
-          <a:fontRef idx="minor">
-            <a:schemeClr val="lt1"/>
-          </a:fontRef>
-        </p:style>
-        <p:txBody>
-          <a:bodyPr rtlCol="0" anchor="ctr"/>
-          <a:lstStyle/>
-          <a:p>
-            <a:pPr algn="ctr"/>
-          </a:p>
-        </p:txBody>
-      </p:sp>
-      <p:sp>
-        <p:nvSpPr>
-          <p:cNvPr id="18" name="TextBox 17"/>
-          <p:cNvSpPr txBox="1"/>
-          <p:nvPr/>
-        </p:nvSpPr>
-        <p:spPr>
-          <a:xfrm>
-            <a:off x="594360" y="2824988"/>
-            <a:ext cx="1115568" cy="177037"/>
-          </a:xfrm>
-          <a:prstGeom prst="rect">
-            <a:avLst/>
-          </a:prstGeom>
-          <a:noFill/>
-        </p:spPr>
-        <p:txBody>
-          <a:bodyPr wrap="square" anchor="t" lIns="0" rIns="0" tIns="0" bIns="0">
-            <a:spAutoFit/>
-            <a:extLst>
-              <a:ext uri="{8AF73BB6-5E31-4F0F-A399-3D98F3B95FD9}">
-                <ns42:textLayout xmlns:ns42="urn:pptxdsl:text-layout:v1" role="compact"/>
-              </a:ext>
-            </a:extLst>
-          </a:bodyPr>
-          <a:lstStyle/>
-          <a:p>
-            <a:pPr algn="l">
-              <a:lnSpc>
-                <a:spcPct val="100000"/>
-              </a:lnSpc>
-            </a:pPr>
-            <a:r>
-              <a:rPr sz="1250" b="1" lang="ja-JP">
-                <a:solidFill>
-                  <a:srgbClr val="0D7870"/>
-                </a:solidFill>
-                <a:latin typeface="Yu Gothic"/>
-                <a:ea typeface="Yu Gothic"/>
-                <a:cs typeface="Yu Gothic"/>
-              </a:rPr>
-              <a:t>送信元IP</a:t>
-            </a:r>
-          </a:p>
-        </p:txBody>
-      </p:sp>
-      <p:sp>
-        <p:nvSpPr>
-          <p:cNvPr id="19" name="TextBox 18"/>
-          <p:cNvSpPr txBox="1"/>
-          <p:nvPr/>
-        </p:nvSpPr>
-        <p:spPr>
-          <a:xfrm>
-            <a:off x="594360" y="3038602"/>
-            <a:ext cx="1115568" cy="408177"/>
-          </a:xfrm>
-          <a:prstGeom prst="rect">
-            <a:avLst/>
-          </a:prstGeom>
-          <a:noFill/>
-        </p:spPr>
-        <p:txBody>
-          <a:bodyPr wrap="square" anchor="t" lIns="0" rIns="0" tIns="0" bIns="0">
-            <a:spAutoFit/>
-            <a:extLst>
-              <a:ext uri="{8AF73BB6-5E31-4F0F-A399-3D98F3B95FD9}">
-                <ns47:textLayout xmlns:ns47="urn:pptxdsl:text-layout:v1" role="compact"/>
-              </a:ext>
-            </a:extLst>
-          </a:bodyPr>
-          <a:lstStyle/>
-          <a:p>
-            <a:pPr algn="l">
-              <a:lnSpc>
-                <a:spcPct val="100000"/>
-              </a:lnSpc>
-            </a:pPr>
-            <a:r>
-              <a:rPr sz="900" b="0" lang="ja-JP">
-                <a:solidFill>
-                  <a:srgbClr val="666E70"/>
-                </a:solidFill>
-                <a:latin typeface="Yu Gothic"/>
-                <a:ea typeface="Yu Gothic"/>
-                <a:cs typeface="Yu Gothic"/>
-              </a:rPr>
-              <a:t>アドレス変換</a:t>
-            </a:r>
-          </a:p>
-        </p:txBody>
-      </p:sp>
-      <p:cxnSp>
-        <p:nvCxnSpPr>
-          <p:cNvPr id="20" name="Connector 19"/>
-          <p:cNvCxnSpPr/>
-          <p:nvPr/>
-        </p:nvCxnSpPr>
-        <p:spPr>
-          <a:xfrm>
-            <a:off x="3227191" y="2898140"/>
-            <a:ext cx="1004560" cy="0"/>
-          </a:xfrm>
-          <a:prstGeom prst="line">
-            <a:avLst/>
-          </a:prstGeom>
-          <a:ln w="20320">
-            <a:solidFill>
-              <a:srgbClr val="0D7870"/>
-            </a:solidFill>
-            <a:tailEnd type="triangle" w="med" len="med"/>
-          </a:ln>
-          <a:effectLst/>
-        </p:spPr>
-        <p:style>
-          <a:lnRef idx="2">
-            <a:schemeClr val="accent1"/>
-          </a:lnRef>
-          <a:fillRef idx="0">
-            <a:schemeClr val="accent1"/>
-          </a:fillRef>
-          <a:effectRef idx="1">
-            <a:schemeClr val="accent1"/>
-          </a:effectRef>
-          <a:fontRef idx="minor">
-            <a:schemeClr val="tx1"/>
-          </a:fontRef>
-        </p:style>
-      </p:cxnSp>
-      <p:cxnSp>
-        <p:nvCxnSpPr>
-          <p:cNvPr id="21" name="Connector 20"/>
-          <p:cNvCxnSpPr/>
-          <p:nvPr/>
-        </p:nvCxnSpPr>
-        <p:spPr>
-          <a:xfrm>
-            <a:off x="5237591" y="2898140"/>
-            <a:ext cx="1004560" cy="0"/>
-          </a:xfrm>
-          <a:prstGeom prst="line">
-            <a:avLst/>
-          </a:prstGeom>
-          <a:ln w="20320">
-            <a:solidFill>
-              <a:srgbClr val="0D7870"/>
-            </a:solidFill>
-            <a:tailEnd type="triangle" w="med" len="med"/>
-          </a:ln>
-          <a:effectLst/>
-        </p:spPr>
-        <p:style>
-          <a:lnRef idx="2">
-            <a:schemeClr val="accent1"/>
-          </a:lnRef>
-          <a:fillRef idx="0">
-            <a:schemeClr val="accent1"/>
-          </a:fillRef>
-          <a:effectRef idx="1">
-            <a:schemeClr val="accent1"/>
-          </a:effectRef>
-          <a:fontRef idx="minor">
-            <a:schemeClr val="tx1"/>
-          </a:fontRef>
-        </p:style>
-      </p:cxnSp>
-      <p:cxnSp>
-        <p:nvCxnSpPr>
-          <p:cNvPr id="22" name="Connector 21"/>
-          <p:cNvCxnSpPr/>
-          <p:nvPr/>
-        </p:nvCxnSpPr>
-        <p:spPr>
-          <a:xfrm>
-            <a:off x="7247991" y="2898140"/>
-            <a:ext cx="1004560" cy="0"/>
-          </a:xfrm>
-          <a:prstGeom prst="line">
-            <a:avLst/>
-          </a:prstGeom>
-          <a:ln w="20320">
-            <a:solidFill>
-              <a:srgbClr val="0D7870"/>
-            </a:solidFill>
-            <a:tailEnd type="triangle" w="med" len="med"/>
-          </a:ln>
-          <a:effectLst/>
-        </p:spPr>
-        <p:style>
-          <a:lnRef idx="2">
-            <a:schemeClr val="accent1"/>
-          </a:lnRef>
-          <a:fillRef idx="0">
-            <a:schemeClr val="accent1"/>
-          </a:fillRef>
-          <a:effectRef idx="1">
-            <a:schemeClr val="accent1"/>
-          </a:effectRef>
-          <a:fontRef idx="minor">
-            <a:schemeClr val="tx1"/>
-          </a:fontRef>
-        </p:style>
-      </p:cxnSp>
-      <p:cxnSp>
-        <p:nvCxnSpPr>
-          <p:cNvPr id="23" name="Connector 22"/>
-          <p:cNvCxnSpPr/>
-          <p:nvPr/>
-        </p:nvCxnSpPr>
-        <p:spPr>
-          <a:xfrm>
-            <a:off x="9258391" y="2898140"/>
-            <a:ext cx="1004560" cy="0"/>
-          </a:xfrm>
-          <a:prstGeom prst="line">
-            <a:avLst/>
-          </a:prstGeom>
-          <a:ln w="20320">
-            <a:solidFill>
-              <a:srgbClr val="0D7870"/>
-            </a:solidFill>
-            <a:tailEnd type="triangle" w="med" len="med"/>
-          </a:ln>
-          <a:effectLst/>
-        </p:spPr>
-        <p:style>
-          <a:lnRef idx="2">
-            <a:schemeClr val="accent1"/>
-          </a:lnRef>
-          <a:fillRef idx="0">
-            <a:schemeClr val="accent1"/>
-          </a:fillRef>
-          <a:effectRef idx="1">
-            <a:schemeClr val="accent1"/>
-          </a:effectRef>
-          <a:fontRef idx="minor">
-            <a:schemeClr val="tx1"/>
-          </a:fontRef>
-        </p:style>
-      </p:cxnSp>
-      <p:sp>
-        <p:nvSpPr>
-          <p:cNvPr id="24" name="protocol-state-flow:marker:plain"/>
-          <p:cNvSpPr/>
-          <p:nvPr/>
-        </p:nvSpPr>
-        <p:spPr>
-          <a:xfrm>
-            <a:off x="2257927" y="2806700"/>
-            <a:ext cx="932688" cy="182880"/>
-          </a:xfrm>
-          <a:prstGeom prst="rect">
-            <a:avLst/>
-          </a:prstGeom>
-          <a:solidFill>
-            <a:srgbClr val="F9F8F4"/>
-          </a:solidFill>
-          <a:ln w="9525">
-            <a:solidFill>
-              <a:srgbClr val="0D7870"/>
-            </a:solidFill>
-          </a:ln>
-          <a:effectLst/>
-        </p:spPr>
-        <p:style>
-          <a:lnRef idx="1">
-            <a:schemeClr val="accent1"/>
-          </a:lnRef>
-          <a:fillRef idx="3">
-            <a:schemeClr val="accent1"/>
-          </a:fillRef>
-          <a:effectRef idx="2">
-            <a:schemeClr val="accent1"/>
-          </a:effectRef>
-          <a:fontRef idx="minor">
-            <a:schemeClr val="lt1"/>
-          </a:fontRef>
-        </p:style>
-        <p:txBody>
-          <a:bodyPr rtlCol="0" anchor="ctr"/>
-          <a:lstStyle/>
-          <a:p>
-            <a:pPr algn="ctr"/>
-          </a:p>
-        </p:txBody>
-      </p:sp>
-      <p:sp>
-        <p:nvSpPr>
-          <p:cNvPr id="25" name="TextBox 24"/>
-          <p:cNvSpPr txBox="1"/>
-          <p:nvPr/>
-        </p:nvSpPr>
-        <p:spPr>
-          <a:xfrm>
-            <a:off x="1883664" y="3081020"/>
-            <a:ext cx="1681215" cy="167132"/>
-          </a:xfrm>
-          <a:prstGeom prst="rect">
-            <a:avLst/>
-          </a:prstGeom>
-          <a:noFill/>
-        </p:spPr>
-        <p:txBody>
-          <a:bodyPr wrap="square" anchor="t" lIns="0" rIns="0" tIns="0" bIns="0">
-            <a:spAutoFit/>
-            <a:extLst>
-              <a:ext uri="{8AF73BB6-5E31-4F0F-A399-3D98F3B95FD9}">
-                <ns56:textLayout xmlns:ns56="urn:pptxdsl:text-layout:v1" role="compact"/>
-              </a:ext>
-            </a:extLst>
-          </a:bodyPr>
-          <a:lstStyle/>
-          <a:p>
-            <a:pPr algn="ctr">
-              <a:lnSpc>
-                <a:spcPct val="100000"/>
-              </a:lnSpc>
-            </a:pPr>
-            <a:r>
-              <a:rPr sz="1100" b="1" lang="ja-JP">
-                <a:solidFill>
-                  <a:srgbClr val="182C43"/>
-                </a:solidFill>
-                <a:latin typeface="Yu Gothic"/>
-                <a:ea typeface="Yu Gothic"/>
-                <a:cs typeface="Yu Gothic"/>
-              </a:rPr>
-              <a:t>10.0.0.25</a:t>
-            </a:r>
-          </a:p>
-        </p:txBody>
-      </p:sp>
-      <p:sp>
-        <p:nvSpPr>
-          <p:cNvPr id="26" name="TextBox 25"/>
-          <p:cNvSpPr txBox="1"/>
-          <p:nvPr/>
-        </p:nvSpPr>
-        <p:spPr>
-          <a:xfrm>
-            <a:off x="1883664" y="3275584"/>
-            <a:ext cx="1681215" cy="171196"/>
-          </a:xfrm>
-          <a:prstGeom prst="rect">
-            <a:avLst/>
-          </a:prstGeom>
-          <a:noFill/>
-        </p:spPr>
-        <p:txBody>
-          <a:bodyPr wrap="square" anchor="t" lIns="0" rIns="0" tIns="0" bIns="0">
-            <a:spAutoFit/>
-            <a:extLst>
-              <a:ext uri="{8AF73BB6-5E31-4F0F-A399-3D98F3B95FD9}">
-                <ns61:textLayout xmlns:ns61="urn:pptxdsl:text-layout:v1" role="compact"/>
-              </a:ext>
-            </a:extLst>
-          </a:bodyPr>
-          <a:lstStyle/>
-          <a:p>
-            <a:pPr algn="ctr">
-              <a:lnSpc>
-                <a:spcPct val="100000"/>
-              </a:lnSpc>
-            </a:pPr>
-            <a:r>
-              <a:rPr sz="900" b="0" lang="ja-JP">
-                <a:solidFill>
-                  <a:srgbClr val="666E70"/>
-                </a:solidFill>
-                <a:latin typeface="Yu Gothic"/>
-                <a:ea typeface="Yu Gothic"/>
-                <a:cs typeface="Yu Gothic"/>
-              </a:rPr>
-              <a:t>端末のプライベートIP</a:t>
-            </a:r>
-          </a:p>
-        </p:txBody>
-      </p:sp>
-      <p:sp>
-        <p:nvSpPr>
-          <p:cNvPr id="27" name="protocol-state-flow:marker:plain"/>
-          <p:cNvSpPr/>
-          <p:nvPr/>
-        </p:nvSpPr>
-        <p:spPr>
-          <a:xfrm>
-            <a:off x="4268327" y="2806700"/>
-            <a:ext cx="932688" cy="182880"/>
-          </a:xfrm>
-          <a:prstGeom prst="rect">
-            <a:avLst/>
-          </a:prstGeom>
-          <a:solidFill>
-            <a:srgbClr val="F9F8F4"/>
-          </a:solidFill>
-          <a:ln w="9525">
-            <a:solidFill>
-              <a:srgbClr val="0D7870"/>
-            </a:solidFill>
-          </a:ln>
-          <a:effectLst/>
-        </p:spPr>
-        <p:style>
-          <a:lnRef idx="1">
-            <a:schemeClr val="accent1"/>
-          </a:lnRef>
-          <a:fillRef idx="3">
-            <a:schemeClr val="accent1"/>
-          </a:fillRef>
-          <a:effectRef idx="2">
-            <a:schemeClr val="accent1"/>
-          </a:effectRef>
-          <a:fontRef idx="minor">
-            <a:schemeClr val="lt1"/>
-          </a:fontRef>
-        </p:style>
-        <p:txBody>
-          <a:bodyPr rtlCol="0" anchor="ctr"/>
-          <a:lstStyle/>
-          <a:p>
-            <a:pPr algn="ctr"/>
-          </a:p>
-        </p:txBody>
-      </p:sp>
-      <p:sp>
-        <p:nvSpPr>
-          <p:cNvPr id="28" name="TextBox 27"/>
-          <p:cNvSpPr txBox="1"/>
-          <p:nvPr/>
-        </p:nvSpPr>
-        <p:spPr>
-          <a:xfrm>
-            <a:off x="3894063" y="3081020"/>
-            <a:ext cx="1681215" cy="167132"/>
-          </a:xfrm>
-          <a:prstGeom prst="rect">
-            <a:avLst/>
-          </a:prstGeom>
-          <a:noFill/>
-        </p:spPr>
-        <p:txBody>
-          <a:bodyPr wrap="square" anchor="t" lIns="0" rIns="0" tIns="0" bIns="0">
-            <a:spAutoFit/>
-            <a:extLst>
-              <a:ext uri="{8AF73BB6-5E31-4F0F-A399-3D98F3B95FD9}">
-                <ns66:textLayout xmlns:ns66="urn:pptxdsl:text-layout:v1" role="compact"/>
-              </a:ext>
-            </a:extLst>
-          </a:bodyPr>
-          <a:lstStyle/>
-          <a:p>
-            <a:pPr algn="ctr">
-              <a:lnSpc>
-                <a:spcPct val="100000"/>
-              </a:lnSpc>
-            </a:pPr>
-            <a:r>
-              <a:rPr sz="1100" b="1" lang="ja-JP">
-                <a:solidFill>
-                  <a:srgbClr val="182C43"/>
-                </a:solidFill>
-                <a:latin typeface="Yu Gothic"/>
-                <a:ea typeface="Yu Gothic"/>
-                <a:cs typeface="Yu Gothic"/>
-              </a:rPr>
-              <a:t>10.0.0.25</a:t>
-            </a:r>
-          </a:p>
-        </p:txBody>
-      </p:sp>
-      <p:sp>
-        <p:nvSpPr>
-          <p:cNvPr id="29" name="TextBox 28"/>
-          <p:cNvSpPr txBox="1"/>
-          <p:nvPr/>
-        </p:nvSpPr>
-        <p:spPr>
-          <a:xfrm>
-            <a:off x="3894063" y="3275584"/>
-            <a:ext cx="1681215" cy="171196"/>
-          </a:xfrm>
-          <a:prstGeom prst="rect">
-            <a:avLst/>
-          </a:prstGeom>
-          <a:noFill/>
-        </p:spPr>
-        <p:txBody>
-          <a:bodyPr wrap="square" anchor="t" lIns="0" rIns="0" tIns="0" bIns="0">
-            <a:spAutoFit/>
-            <a:extLst>
-              <a:ext uri="{8AF73BB6-5E31-4F0F-A399-3D98F3B95FD9}">
-                <ns71:textLayout xmlns:ns71="urn:pptxdsl:text-layout:v1" role="compact"/>
-              </a:ext>
-            </a:extLst>
-          </a:bodyPr>
-          <a:lstStyle/>
-          <a:p>
-            <a:pPr algn="ctr">
-              <a:lnSpc>
-                <a:spcPct val="100000"/>
-              </a:lnSpc>
-            </a:pPr>
-            <a:r>
-              <a:rPr sz="900" b="0" lang="ja-JP">
-                <a:solidFill>
-                  <a:srgbClr val="666E70"/>
-                </a:solidFill>
-                <a:latin typeface="Yu Gothic"/>
-                <a:ea typeface="Yu Gothic"/>
-                <a:cs typeface="Yu Gothic"/>
-              </a:rPr>
-              <a:t>変換前の送信元</a:t>
-            </a:r>
-          </a:p>
-        </p:txBody>
-      </p:sp>
-      <p:sp>
-        <p:nvSpPr>
-          <p:cNvPr id="30" name="protocol-state-flow:marker:internal"/>
-          <p:cNvSpPr/>
-          <p:nvPr/>
-        </p:nvSpPr>
-        <p:spPr>
-          <a:xfrm>
-            <a:off x="6278727" y="2879852"/>
-            <a:ext cx="932688" cy="36576"/>
-          </a:xfrm>
-          <a:prstGeom prst="rect">
-            <a:avLst/>
-          </a:prstGeom>
-          <a:solidFill>
-            <a:srgbClr val="0D7870"/>
-          </a:solidFill>
-          <a:ln>
-            <a:noFill/>
-          </a:ln>
-          <a:effectLst/>
-        </p:spPr>
-        <p:style>
-          <a:lnRef idx="1">
-            <a:schemeClr val="accent1"/>
-          </a:lnRef>
-          <a:fillRef idx="3">
-            <a:schemeClr val="accent1"/>
-          </a:fillRef>
-          <a:effectRef idx="2">
-            <a:schemeClr val="accent1"/>
-          </a:effectRef>
-          <a:fontRef idx="minor">
-            <a:schemeClr val="lt1"/>
-          </a:fontRef>
-        </p:style>
-        <p:txBody>
-          <a:bodyPr rtlCol="0" anchor="ctr"/>
-          <a:lstStyle/>
-          <a:p>
-            <a:pPr algn="ctr"/>
-          </a:p>
-        </p:txBody>
-      </p:sp>
-      <p:sp>
-        <p:nvSpPr>
-          <p:cNvPr id="31" name="TextBox 30"/>
-          <p:cNvSpPr txBox="1"/>
-          <p:nvPr/>
-        </p:nvSpPr>
-        <p:spPr>
-          <a:xfrm>
-            <a:off x="5904463" y="3081020"/>
-            <a:ext cx="1681215" cy="167132"/>
-          </a:xfrm>
-          <a:prstGeom prst="rect">
-            <a:avLst/>
-          </a:prstGeom>
-          <a:noFill/>
-        </p:spPr>
-        <p:txBody>
-          <a:bodyPr wrap="square" anchor="t" lIns="0" rIns="0" tIns="0" bIns="0">
-            <a:spAutoFit/>
-            <a:extLst>
-              <a:ext uri="{8AF73BB6-5E31-4F0F-A399-3D98F3B95FD9}">
-                <ns76:textLayout xmlns:ns76="urn:pptxdsl:text-layout:v1" role="compact"/>
-              </a:ext>
-            </a:extLst>
-          </a:bodyPr>
-          <a:lstStyle/>
-          <a:p>
-            <a:pPr algn="ctr">
-              <a:lnSpc>
-                <a:spcPct val="100000"/>
-              </a:lnSpc>
-            </a:pPr>
-            <a:r>
-              <a:rPr sz="1100" b="1" lang="ja-JP">
-                <a:solidFill>
-                  <a:srgbClr val="182C43"/>
-                </a:solidFill>
-                <a:latin typeface="Yu Gothic"/>
-                <a:ea typeface="Yu Gothic"/>
-                <a:cs typeface="Yu Gothic"/>
-              </a:rPr>
-              <a:t>203.0.113.10</a:t>
-            </a:r>
-          </a:p>
-        </p:txBody>
-      </p:sp>
-      <p:sp>
-        <p:nvSpPr>
-          <p:cNvPr id="32" name="TextBox 31"/>
-          <p:cNvSpPr txBox="1"/>
-          <p:nvPr/>
-        </p:nvSpPr>
-        <p:spPr>
-          <a:xfrm>
-            <a:off x="5904463" y="3275584"/>
-            <a:ext cx="1681215" cy="171196"/>
-          </a:xfrm>
-          <a:prstGeom prst="rect">
-            <a:avLst/>
-          </a:prstGeom>
-          <a:noFill/>
-        </p:spPr>
-        <p:txBody>
-          <a:bodyPr wrap="square" anchor="t" lIns="0" rIns="0" tIns="0" bIns="0">
-            <a:spAutoFit/>
-            <a:extLst>
-              <a:ext uri="{8AF73BB6-5E31-4F0F-A399-3D98F3B95FD9}">
-                <ns81:textLayout xmlns:ns81="urn:pptxdsl:text-layout:v1" role="compact"/>
-              </a:ext>
-            </a:extLst>
-          </a:bodyPr>
-          <a:lstStyle/>
-          <a:p>
-            <a:pPr algn="ctr">
-              <a:lnSpc>
-                <a:spcPct val="100000"/>
-              </a:lnSpc>
-            </a:pPr>
-            <a:r>
-              <a:rPr sz="900" b="0" lang="ja-JP">
-                <a:solidFill>
-                  <a:srgbClr val="666E70"/>
-                </a:solidFill>
-                <a:latin typeface="Yu Gothic"/>
-                <a:ea typeface="Yu Gothic"/>
-                <a:cs typeface="Yu Gothic"/>
-              </a:rPr>
-              <a:t>送信元を書き換え</a:t>
-            </a:r>
-          </a:p>
-        </p:txBody>
-      </p:sp>
-      <p:sp>
-        <p:nvSpPr>
-          <p:cNvPr id="33" name="protocol-state-flow:marker:plain"/>
-          <p:cNvSpPr/>
-          <p:nvPr/>
-        </p:nvSpPr>
-        <p:spPr>
-          <a:xfrm>
-            <a:off x="8289127" y="2806700"/>
-            <a:ext cx="932688" cy="182880"/>
-          </a:xfrm>
-          <a:prstGeom prst="rect">
-            <a:avLst/>
-          </a:prstGeom>
-          <a:solidFill>
-            <a:srgbClr val="F9F8F4"/>
-          </a:solidFill>
-          <a:ln w="9525">
-            <a:solidFill>
-              <a:srgbClr val="0D7870"/>
-            </a:solidFill>
-          </a:ln>
-          <a:effectLst/>
-        </p:spPr>
-        <p:style>
-          <a:lnRef idx="1">
-            <a:schemeClr val="accent1"/>
-          </a:lnRef>
-          <a:fillRef idx="3">
-            <a:schemeClr val="accent1"/>
-          </a:fillRef>
-          <a:effectRef idx="2">
-            <a:schemeClr val="accent1"/>
-          </a:effectRef>
-          <a:fontRef idx="minor">
-            <a:schemeClr val="lt1"/>
-          </a:fontRef>
-        </p:style>
-        <p:txBody>
-          <a:bodyPr rtlCol="0" anchor="ctr"/>
-          <a:lstStyle/>
-          <a:p>
-            <a:pPr algn="ctr"/>
-          </a:p>
-        </p:txBody>
-      </p:sp>
-      <p:sp>
-        <p:nvSpPr>
-          <p:cNvPr id="34" name="TextBox 33"/>
-          <p:cNvSpPr txBox="1"/>
-          <p:nvPr/>
-        </p:nvSpPr>
-        <p:spPr>
-          <a:xfrm>
-            <a:off x="7914863" y="3081020"/>
-            <a:ext cx="1681215" cy="167132"/>
-          </a:xfrm>
-          <a:prstGeom prst="rect">
-            <a:avLst/>
-          </a:prstGeom>
-          <a:noFill/>
-        </p:spPr>
-        <p:txBody>
-          <a:bodyPr wrap="square" anchor="t" lIns="0" rIns="0" tIns="0" bIns="0">
-            <a:spAutoFit/>
-            <a:extLst>
-              <a:ext uri="{8AF73BB6-5E31-4F0F-A399-3D98F3B95FD9}">
-                <ns86:textLayout xmlns:ns86="urn:pptxdsl:text-layout:v1" role="compact"/>
-              </a:ext>
-            </a:extLst>
-          </a:bodyPr>
-          <a:lstStyle/>
-          <a:p>
-            <a:pPr algn="ctr">
-              <a:lnSpc>
-                <a:spcPct val="100000"/>
-              </a:lnSpc>
-            </a:pPr>
-            <a:r>
-              <a:rPr sz="1100" b="1" lang="ja-JP">
-                <a:solidFill>
-                  <a:srgbClr val="182C43"/>
-                </a:solidFill>
-                <a:latin typeface="Yu Gothic"/>
-                <a:ea typeface="Yu Gothic"/>
-                <a:cs typeface="Yu Gothic"/>
-              </a:rPr>
-              <a:t>203.0.113.10</a:t>
-            </a:r>
-          </a:p>
-        </p:txBody>
-      </p:sp>
-      <p:sp>
-        <p:nvSpPr>
-          <p:cNvPr id="35" name="TextBox 34"/>
-          <p:cNvSpPr txBox="1"/>
-          <p:nvPr/>
-        </p:nvSpPr>
-        <p:spPr>
-          <a:xfrm>
-            <a:off x="7914863" y="3275584"/>
-            <a:ext cx="1681215" cy="171196"/>
-          </a:xfrm>
-          <a:prstGeom prst="rect">
-            <a:avLst/>
-          </a:prstGeom>
-          <a:noFill/>
-        </p:spPr>
-        <p:txBody>
-          <a:bodyPr wrap="square" anchor="t" lIns="0" rIns="0" tIns="0" bIns="0">
-            <a:spAutoFit/>
-            <a:extLst>
-              <a:ext uri="{8AF73BB6-5E31-4F0F-A399-3D98F3B95FD9}">
-                <ns91:textLayout xmlns:ns91="urn:pptxdsl:text-layout:v1" role="compact"/>
-              </a:ext>
-            </a:extLst>
-          </a:bodyPr>
-          <a:lstStyle/>
-          <a:p>
-            <a:pPr algn="ctr">
-              <a:lnSpc>
-                <a:spcPct val="100000"/>
-              </a:lnSpc>
-            </a:pPr>
-            <a:r>
-              <a:rPr sz="900" b="0" lang="ja-JP">
-                <a:solidFill>
-                  <a:srgbClr val="666E70"/>
-                </a:solidFill>
-                <a:latin typeface="Yu Gothic"/>
-                <a:ea typeface="Yu Gothic"/>
-                <a:cs typeface="Yu Gothic"/>
-              </a:rPr>
-              <a:t>変換後のパケット</a:t>
-            </a:r>
-          </a:p>
-        </p:txBody>
-      </p:sp>
-      <p:sp>
-        <p:nvSpPr>
-          <p:cNvPr id="36" name="protocol-state-flow:marker:plain"/>
-          <p:cNvSpPr/>
-          <p:nvPr/>
-        </p:nvSpPr>
-        <p:spPr>
-          <a:xfrm>
-            <a:off x="10299527" y="2806700"/>
-            <a:ext cx="932688" cy="182880"/>
-          </a:xfrm>
-          <a:prstGeom prst="rect">
-            <a:avLst/>
-          </a:prstGeom>
-          <a:solidFill>
-            <a:srgbClr val="F9F8F4"/>
-          </a:solidFill>
-          <a:ln w="9525">
-            <a:solidFill>
-              <a:srgbClr val="0D7870"/>
-            </a:solidFill>
-          </a:ln>
-          <a:effectLst/>
-        </p:spPr>
-        <p:style>
-          <a:lnRef idx="1">
-            <a:schemeClr val="accent1"/>
-          </a:lnRef>
-          <a:fillRef idx="3">
-            <a:schemeClr val="accent1"/>
-          </a:fillRef>
-          <a:effectRef idx="2">
-            <a:schemeClr val="accent1"/>
-          </a:effectRef>
-          <a:fontRef idx="minor">
-            <a:schemeClr val="lt1"/>
-          </a:fontRef>
-        </p:style>
-        <p:txBody>
-          <a:bodyPr rtlCol="0" anchor="ctr"/>
-          <a:lstStyle/>
-          <a:p>
-            <a:pPr algn="ctr"/>
-          </a:p>
-        </p:txBody>
-      </p:sp>
-      <p:sp>
-        <p:nvSpPr>
-          <p:cNvPr id="37" name="TextBox 36"/>
-          <p:cNvSpPr txBox="1"/>
-          <p:nvPr/>
-        </p:nvSpPr>
-        <p:spPr>
-          <a:xfrm>
-            <a:off x="9925263" y="3081020"/>
-            <a:ext cx="1681215" cy="167132"/>
-          </a:xfrm>
-          <a:prstGeom prst="rect">
-            <a:avLst/>
-          </a:prstGeom>
-          <a:noFill/>
-        </p:spPr>
-        <p:txBody>
-          <a:bodyPr wrap="square" anchor="t" lIns="0" rIns="0" tIns="0" bIns="0">
-            <a:spAutoFit/>
-            <a:extLst>
-              <a:ext uri="{8AF73BB6-5E31-4F0F-A399-3D98F3B95FD9}">
-                <ns96:textLayout xmlns:ns96="urn:pptxdsl:text-layout:v1" role="compact"/>
-              </a:ext>
-            </a:extLst>
-          </a:bodyPr>
-          <a:lstStyle/>
-          <a:p>
-            <a:pPr algn="ctr">
-              <a:lnSpc>
-                <a:spcPct val="100000"/>
-              </a:lnSpc>
-            </a:pPr>
-            <a:r>
-              <a:rPr sz="1100" b="1" lang="ja-JP">
-                <a:solidFill>
-                  <a:srgbClr val="182C43"/>
-                </a:solidFill>
-                <a:latin typeface="Yu Gothic"/>
-                <a:ea typeface="Yu Gothic"/>
-                <a:cs typeface="Yu Gothic"/>
-              </a:rPr>
-              <a:t>203.0.113.10</a:t>
-            </a:r>
-          </a:p>
-        </p:txBody>
-      </p:sp>
-      <p:sp>
-        <p:nvSpPr>
-          <p:cNvPr id="38" name="TextBox 37"/>
-          <p:cNvSpPr txBox="1"/>
-          <p:nvPr/>
-        </p:nvSpPr>
-        <p:spPr>
-          <a:xfrm>
-            <a:off x="9925263" y="3275584"/>
-            <a:ext cx="1681215" cy="171196"/>
-          </a:xfrm>
-          <a:prstGeom prst="rect">
-            <a:avLst/>
-          </a:prstGeom>
-          <a:noFill/>
-        </p:spPr>
-        <p:txBody>
-          <a:bodyPr wrap="square" anchor="t" lIns="0" rIns="0" tIns="0" bIns="0">
-            <a:spAutoFit/>
-            <a:extLst>
-              <a:ext uri="{8AF73BB6-5E31-4F0F-A399-3D98F3B95FD9}">
-                <ns101:textLayout xmlns:ns101="urn:pptxdsl:text-layout:v1" role="compact"/>
-              </a:ext>
-            </a:extLst>
-          </a:bodyPr>
-          <a:lstStyle/>
-          <a:p>
-            <a:pPr algn="ctr">
-              <a:lnSpc>
-                <a:spcPct val="100000"/>
-              </a:lnSpc>
-            </a:pPr>
-            <a:r>
-              <a:rPr sz="900" b="0" lang="ja-JP">
-                <a:solidFill>
-                  <a:srgbClr val="666E70"/>
-                </a:solidFill>
-                <a:latin typeface="Yu Gothic"/>
-                <a:ea typeface="Yu Gothic"/>
-                <a:cs typeface="Yu Gothic"/>
-              </a:rPr>
-              <a:t>外部から見える送信元</a:t>
-            </a:r>
-          </a:p>
-        </p:txBody>
-      </p:sp>
-      <p:sp>
-        <p:nvSpPr>
-          <p:cNvPr id="39" name="layout-background:protocol-state-flow:track:1"/>
-          <p:cNvSpPr/>
-          <p:nvPr/>
-        </p:nvSpPr>
-        <p:spPr>
-          <a:xfrm>
-            <a:off x="502920" y="3684524"/>
-            <a:ext cx="11185855" cy="896112"/>
-          </a:xfrm>
-          <a:prstGeom prst="rect">
-            <a:avLst/>
-          </a:prstGeom>
-          <a:solidFill>
-            <a:srgbClr val="E4E9EE"/>
-          </a:solidFill>
-          <a:ln>
-            <a:noFill/>
-          </a:ln>
-          <a:effectLst/>
-        </p:spPr>
-        <p:style>
-          <a:lnRef idx="1">
-            <a:schemeClr val="accent1"/>
-          </a:lnRef>
-          <a:fillRef idx="3">
-            <a:schemeClr val="accent1"/>
-          </a:fillRef>
-          <a:effectRef idx="2">
-            <a:schemeClr val="accent1"/>
-          </a:effectRef>
-          <a:fontRef idx="minor">
-            <a:schemeClr val="lt1"/>
-          </a:fontRef>
-        </p:style>
-        <p:txBody>
-          <a:bodyPr rtlCol="0" anchor="ctr"/>
-          <a:lstStyle/>
-          <a:p>
-            <a:pPr algn="ctr"/>
-          </a:p>
-        </p:txBody>
-      </p:sp>
-      <p:sp>
-        <p:nvSpPr>
-          <p:cNvPr id="40" name="TextBox 39"/>
-          <p:cNvSpPr txBox="1"/>
-          <p:nvPr/>
-        </p:nvSpPr>
-        <p:spPr>
-          <a:xfrm>
-            <a:off x="594360" y="3867404"/>
-            <a:ext cx="1115568" cy="177037"/>
-          </a:xfrm>
-          <a:prstGeom prst="rect">
-            <a:avLst/>
-          </a:prstGeom>
-          <a:noFill/>
-        </p:spPr>
-        <p:txBody>
-          <a:bodyPr wrap="square" anchor="t" lIns="0" rIns="0" tIns="0" bIns="0">
-            <a:spAutoFit/>
-            <a:extLst>
-              <a:ext uri="{8AF73BB6-5E31-4F0F-A399-3D98F3B95FD9}">
-                <ns106:textLayout xmlns:ns106="urn:pptxdsl:text-layout:v1" role="compact"/>
-              </a:ext>
-            </a:extLst>
-          </a:bodyPr>
-          <a:lstStyle/>
-          <a:p>
-            <a:pPr algn="l">
-              <a:lnSpc>
-                <a:spcPct val="100000"/>
-              </a:lnSpc>
-            </a:pPr>
-            <a:r>
-              <a:rPr sz="1250" b="1" lang="ja-JP">
-                <a:solidFill>
-                  <a:srgbClr val="182C43"/>
-                </a:solidFill>
-                <a:latin typeface="Yu Gothic"/>
-                <a:ea typeface="Yu Gothic"/>
-                <a:cs typeface="Yu Gothic"/>
-              </a:rPr>
-              <a:t>宛先IP</a:t>
-            </a:r>
-          </a:p>
-        </p:txBody>
-      </p:sp>
-      <p:sp>
-        <p:nvSpPr>
-          <p:cNvPr id="41" name="TextBox 40"/>
-          <p:cNvSpPr txBox="1"/>
-          <p:nvPr/>
-        </p:nvSpPr>
-        <p:spPr>
-          <a:xfrm>
-            <a:off x="594360" y="4081018"/>
-            <a:ext cx="1115568" cy="408177"/>
-          </a:xfrm>
-          <a:prstGeom prst="rect">
-            <a:avLst/>
-          </a:prstGeom>
-          <a:noFill/>
-        </p:spPr>
-        <p:txBody>
-          <a:bodyPr wrap="square" anchor="t" lIns="0" rIns="0" tIns="0" bIns="0">
-            <a:spAutoFit/>
-            <a:extLst>
-              <a:ext uri="{8AF73BB6-5E31-4F0F-A399-3D98F3B95FD9}">
-                <ns111:textLayout xmlns:ns111="urn:pptxdsl:text-layout:v1" role="compact"/>
-              </a:ext>
-            </a:extLst>
-          </a:bodyPr>
-          <a:lstStyle/>
-          <a:p>
-            <a:pPr algn="l">
-              <a:lnSpc>
-                <a:spcPct val="100000"/>
-              </a:lnSpc>
-            </a:pPr>
-            <a:r>
-              <a:rPr sz="900" b="0" lang="ja-JP">
-                <a:solidFill>
-                  <a:srgbClr val="666E70"/>
-                </a:solidFill>
-                <a:latin typeface="Yu Gothic"/>
-                <a:ea typeface="Yu Gothic"/>
-                <a:cs typeface="Yu Gothic"/>
-              </a:rPr>
-              <a:t>変化なし</a:t>
-            </a:r>
-          </a:p>
-        </p:txBody>
-      </p:sp>
-      <p:cxnSp>
-        <p:nvCxnSpPr>
-          <p:cNvPr id="42" name="Connector 41"/>
-          <p:cNvCxnSpPr/>
-          <p:nvPr/>
-        </p:nvCxnSpPr>
-        <p:spPr>
-          <a:xfrm>
-            <a:off x="3227191" y="3940555"/>
-            <a:ext cx="1004560" cy="0"/>
-          </a:xfrm>
-          <a:prstGeom prst="line">
-            <a:avLst/>
-          </a:prstGeom>
-          <a:ln w="20320">
-            <a:solidFill>
-              <a:srgbClr val="182C43"/>
-            </a:solidFill>
-            <a:tailEnd type="triangle" w="med" len="med"/>
-          </a:ln>
-          <a:effectLst/>
-        </p:spPr>
-        <p:style>
-          <a:lnRef idx="2">
-            <a:schemeClr val="accent1"/>
-          </a:lnRef>
-          <a:fillRef idx="0">
-            <a:schemeClr val="accent1"/>
-          </a:fillRef>
-          <a:effectRef idx="1">
-            <a:schemeClr val="accent1"/>
-          </a:effectRef>
-          <a:fontRef idx="minor">
-            <a:schemeClr val="tx1"/>
-          </a:fontRef>
-        </p:style>
-      </p:cxnSp>
-      <p:cxnSp>
-        <p:nvCxnSpPr>
-          <p:cNvPr id="43" name="Connector 42"/>
-          <p:cNvCxnSpPr/>
-          <p:nvPr/>
-        </p:nvCxnSpPr>
-        <p:spPr>
-          <a:xfrm>
-            <a:off x="5237591" y="3940555"/>
-            <a:ext cx="1004560" cy="0"/>
-          </a:xfrm>
-          <a:prstGeom prst="line">
-            <a:avLst/>
-          </a:prstGeom>
-          <a:ln w="20320">
-            <a:solidFill>
-              <a:srgbClr val="182C43"/>
-            </a:solidFill>
-            <a:tailEnd type="triangle" w="med" len="med"/>
-          </a:ln>
-          <a:effectLst/>
-        </p:spPr>
-        <p:style>
-          <a:lnRef idx="2">
-            <a:schemeClr val="accent1"/>
-          </a:lnRef>
-          <a:fillRef idx="0">
-            <a:schemeClr val="accent1"/>
-          </a:fillRef>
-          <a:effectRef idx="1">
-            <a:schemeClr val="accent1"/>
-          </a:effectRef>
-          <a:fontRef idx="minor">
-            <a:schemeClr val="tx1"/>
-          </a:fontRef>
-        </p:style>
-      </p:cxnSp>
-      <p:cxnSp>
-        <p:nvCxnSpPr>
-          <p:cNvPr id="44" name="Connector 43"/>
-          <p:cNvCxnSpPr/>
-          <p:nvPr/>
-        </p:nvCxnSpPr>
-        <p:spPr>
-          <a:xfrm>
-            <a:off x="7247991" y="3940555"/>
-            <a:ext cx="1004560" cy="0"/>
-          </a:xfrm>
-          <a:prstGeom prst="line">
-            <a:avLst/>
-          </a:prstGeom>
-          <a:ln w="20320">
-            <a:solidFill>
-              <a:srgbClr val="182C43"/>
-            </a:solidFill>
-            <a:tailEnd type="triangle" w="med" len="med"/>
-          </a:ln>
-          <a:effectLst/>
-        </p:spPr>
-        <p:style>
-          <a:lnRef idx="2">
-            <a:schemeClr val="accent1"/>
-          </a:lnRef>
-          <a:fillRef idx="0">
-            <a:schemeClr val="accent1"/>
-          </a:fillRef>
-          <a:effectRef idx="1">
-            <a:schemeClr val="accent1"/>
-          </a:effectRef>
-          <a:fontRef idx="minor">
-            <a:schemeClr val="tx1"/>
-          </a:fontRef>
-        </p:style>
-      </p:cxnSp>
-      <p:cxnSp>
-        <p:nvCxnSpPr>
-          <p:cNvPr id="45" name="Connector 44"/>
-          <p:cNvCxnSpPr/>
-          <p:nvPr/>
-        </p:nvCxnSpPr>
-        <p:spPr>
-          <a:xfrm>
-            <a:off x="9258391" y="3940555"/>
-            <a:ext cx="1004560" cy="0"/>
-          </a:xfrm>
-          <a:prstGeom prst="line">
-            <a:avLst/>
-          </a:prstGeom>
-          <a:ln w="20320">
-            <a:solidFill>
-              <a:srgbClr val="182C43"/>
-            </a:solidFill>
-            <a:tailEnd type="triangle" w="med" len="med"/>
-          </a:ln>
-          <a:effectLst/>
-        </p:spPr>
-        <p:style>
-          <a:lnRef idx="2">
-            <a:schemeClr val="accent1"/>
-          </a:lnRef>
-          <a:fillRef idx="0">
-            <a:schemeClr val="accent1"/>
-          </a:fillRef>
-          <a:effectRef idx="1">
-            <a:schemeClr val="accent1"/>
-          </a:effectRef>
-          <a:fontRef idx="minor">
-            <a:schemeClr val="tx1"/>
-          </a:fontRef>
-        </p:style>
-      </p:cxnSp>
-      <p:sp>
-        <p:nvSpPr>
-          <p:cNvPr id="46" name="protocol-state-flow:marker:plain"/>
-          <p:cNvSpPr/>
-          <p:nvPr/>
-        </p:nvSpPr>
-        <p:spPr>
-          <a:xfrm>
-            <a:off x="2257927" y="3849116"/>
-            <a:ext cx="932688" cy="182880"/>
+            <a:off x="502920" y="1855724"/>
+            <a:ext cx="384048" cy="182880"/>
           </a:xfrm>
           <a:prstGeom prst="rect">
             <a:avLst/>
@@ -38849,14 +37199,14 @@
       </p:sp>
       <p:sp>
         <p:nvSpPr>
-          <p:cNvPr id="47" name="TextBox 46"/>
-          <p:cNvSpPr txBox="1"/>
-          <p:nvPr/>
-        </p:nvSpPr>
-        <p:spPr>
-          <a:xfrm>
-            <a:off x="1883664" y="4123435"/>
-            <a:ext cx="1681215" cy="167132"/>
+          <p:cNvPr id="7" name="protocol-state-flow:legend:plain"/>
+          <p:cNvSpPr txBox="1"/>
+          <p:nvPr/>
+        </p:nvSpPr>
+        <p:spPr>
+          <a:xfrm>
+            <a:off x="996696" y="1855724"/>
+            <a:ext cx="530352" cy="201168"/>
           </a:xfrm>
           <a:prstGeom prst="rect">
             <a:avLst/>
@@ -38864,11 +37214,217 @@
           <a:noFill/>
         </p:spPr>
         <p:txBody>
+          <a:bodyPr wrap="none" anchor="t" lIns="0" rIns="0" tIns="0" bIns="0">
+            <a:spAutoFit/>
+            <a:extLst>
+              <a:ext uri="{8AF73BB6-5E31-4F0F-A399-3D98F3B95FD9}">
+                <ns17:textLayout xmlns:ns17="urn:pptxdsl:text-layout:v1" role="compact"/>
+              </a:ext>
+            </a:extLst>
+          </a:bodyPr>
+          <a:lstStyle/>
+          <a:p>
+            <a:pPr algn="l">
+              <a:lnSpc>
+                <a:spcPct val="100000"/>
+              </a:lnSpc>
+            </a:pPr>
+            <a:r>
+              <a:rPr sz="900" b="0" lang="ja-JP">
+                <a:solidFill>
+                  <a:srgbClr val="202729"/>
+                </a:solidFill>
+                <a:latin typeface="Yu Gothic"/>
+                <a:ea typeface="Yu Gothic"/>
+                <a:cs typeface="Yu Gothic"/>
+              </a:rPr>
+              <a:t>通常の値</a:t>
+            </a:r>
+          </a:p>
+        </p:txBody>
+      </p:sp>
+      <p:sp>
+        <p:nvSpPr>
+          <p:cNvPr id="8" name="protocol-state-flow:legend:protocol-state-flow:marker:internal"/>
+          <p:cNvSpPr/>
+          <p:nvPr/>
+        </p:nvSpPr>
+        <p:spPr>
+          <a:xfrm>
+            <a:off x="1764792" y="1928876"/>
+            <a:ext cx="384048" cy="36576"/>
+          </a:xfrm>
+          <a:prstGeom prst="rect">
+            <a:avLst/>
+          </a:prstGeom>
+          <a:solidFill>
+            <a:srgbClr val="182C43"/>
+          </a:solidFill>
+          <a:ln>
+            <a:noFill/>
+          </a:ln>
+          <a:effectLst/>
+        </p:spPr>
+        <p:style>
+          <a:lnRef idx="1">
+            <a:schemeClr val="accent1"/>
+          </a:lnRef>
+          <a:fillRef idx="3">
+            <a:schemeClr val="accent1"/>
+          </a:fillRef>
+          <a:effectRef idx="2">
+            <a:schemeClr val="accent1"/>
+          </a:effectRef>
+          <a:fontRef idx="minor">
+            <a:schemeClr val="lt1"/>
+          </a:fontRef>
+        </p:style>
+        <p:txBody>
+          <a:bodyPr rtlCol="0" anchor="ctr"/>
+          <a:lstStyle/>
+          <a:p>
+            <a:pPr algn="ctr"/>
+          </a:p>
+        </p:txBody>
+      </p:sp>
+      <p:sp>
+        <p:nvSpPr>
+          <p:cNvPr id="9" name="protocol-state-flow:legend:internal"/>
+          <p:cNvSpPr txBox="1"/>
+          <p:nvPr/>
+        </p:nvSpPr>
+        <p:spPr>
+          <a:xfrm>
+            <a:off x="2258568" y="1855724"/>
+            <a:ext cx="777240" cy="201168"/>
+          </a:xfrm>
+          <a:prstGeom prst="rect">
+            <a:avLst/>
+          </a:prstGeom>
+          <a:noFill/>
+        </p:spPr>
+        <p:txBody>
+          <a:bodyPr wrap="none" anchor="t" lIns="0" rIns="0" tIns="0" bIns="0">
+            <a:spAutoFit/>
+            <a:extLst>
+              <a:ext uri="{8AF73BB6-5E31-4F0F-A399-3D98F3B95FD9}">
+                <ns22:textLayout xmlns:ns22="urn:pptxdsl:text-layout:v1" role="compact"/>
+              </a:ext>
+            </a:extLst>
+          </a:bodyPr>
+          <a:lstStyle/>
+          <a:p>
+            <a:pPr algn="l">
+              <a:lnSpc>
+                <a:spcPct val="100000"/>
+              </a:lnSpc>
+            </a:pPr>
+            <a:r>
+              <a:rPr sz="900" b="0" lang="ja-JP">
+                <a:solidFill>
+                  <a:srgbClr val="202729"/>
+                </a:solidFill>
+                <a:latin typeface="Yu Gothic"/>
+                <a:ea typeface="Yu Gothic"/>
+                <a:cs typeface="Yu Gothic"/>
+              </a:rPr>
+              <a:t>装置内部処理</a:t>
+            </a:r>
+          </a:p>
+        </p:txBody>
+      </p:sp>
+      <p:sp>
+        <p:nvSpPr>
+          <p:cNvPr id="10" name="protocol-state-flow:legend:change"/>
+          <p:cNvSpPr txBox="1"/>
+          <p:nvPr/>
+        </p:nvSpPr>
+        <p:spPr>
+          <a:xfrm>
+            <a:off x="3273552" y="1855724"/>
+            <a:ext cx="8415223" cy="219456"/>
+          </a:xfrm>
+          <a:prstGeom prst="rect">
+            <a:avLst/>
+          </a:prstGeom>
+          <a:noFill/>
+        </p:spPr>
+        <p:txBody>
+          <a:bodyPr wrap="none" anchor="t" lIns="0" rIns="0" tIns="0" bIns="0">
+            <a:spAutoFit/>
+            <a:extLst>
+              <a:ext uri="{8AF73BB6-5E31-4F0F-A399-3D98F3B95FD9}">
+                <ns27:textLayout xmlns:ns27="urn:pptxdsl:text-layout:v1" role="compact"/>
+              </a:ext>
+            </a:extLst>
+          </a:bodyPr>
+          <a:lstStyle/>
+          <a:p>
+            <a:pPr algn="l">
+              <a:lnSpc>
+                <a:spcPct val="100000"/>
+              </a:lnSpc>
+            </a:pPr>
+            <a:r>
+              <a:rPr sz="900" b="0" lang="ja-JP">
+                <a:solidFill>
+                  <a:srgbClr val="C7583E"/>
+                </a:solidFill>
+                <a:latin typeface="Yu Gothic"/>
+                <a:ea typeface="Yu Gothic"/>
+                <a:cs typeface="Yu Gothic"/>
+              </a:rPr>
+              <a:t>下線：直前から値・付加情報が変化</a:t>
+            </a:r>
+          </a:p>
+        </p:txBody>
+      </p:sp>
+      <p:pic>
+        <p:nvPicPr>
+          <p:cNvPr id="11" name="Picture 10" descr="laptop.png"/>
+          <p:cNvPicPr>
+            <a:picLocks noChangeAspect="1"/>
+          </p:cNvPicPr>
+          <p:nvPr/>
+        </p:nvPicPr>
+        <p:blipFill>
+          <a:blip r:embed="rId2"/>
+          <a:stretch>
+            <a:fillRect/>
+          </a:stretch>
+        </p:blipFill>
+        <p:spPr>
+          <a:xfrm>
+            <a:off x="2568823" y="2239772"/>
+            <a:ext cx="310896" cy="310896"/>
+          </a:xfrm>
+          <a:prstGeom prst="rect">
+            <a:avLst/>
+          </a:prstGeom>
+        </p:spPr>
+      </p:pic>
+      <p:sp>
+        <p:nvSpPr>
+          <p:cNvPr id="12" name="TextBox 11"/>
+          <p:cNvSpPr txBox="1"/>
+          <p:nvPr/>
+        </p:nvSpPr>
+        <p:spPr>
+          <a:xfrm>
+            <a:off x="1856232" y="2605532"/>
+            <a:ext cx="1736079" cy="219455"/>
+          </a:xfrm>
+          <a:prstGeom prst="rect">
+            <a:avLst/>
+          </a:prstGeom>
+          <a:noFill/>
+        </p:spPr>
+        <p:txBody>
           <a:bodyPr wrap="square" anchor="t" lIns="0" rIns="0" tIns="0" bIns="0">
             <a:spAutoFit/>
             <a:extLst>
               <a:ext uri="{8AF73BB6-5E31-4F0F-A399-3D98F3B95FD9}">
-                <ns120:textLayout xmlns:ns120="urn:pptxdsl:text-layout:v1" role="compact"/>
+                <ns32:textLayout xmlns:ns32="urn:pptxdsl:text-layout:v1" role="compact"/>
               </a:ext>
             </a:extLst>
           </a:bodyPr>
@@ -38880,7 +37436,7 @@
               </a:lnSpc>
             </a:pPr>
             <a:r>
-              <a:rPr sz="1100" b="1" lang="ja-JP">
+              <a:rPr sz="1050" b="1" lang="ja-JP">
                 <a:solidFill>
                   <a:srgbClr val="182C43"/>
                 </a:solidFill>
@@ -38888,21 +37444,45 @@
                 <a:ea typeface="Yu Gothic"/>
                 <a:cs typeface="Yu Gothic"/>
               </a:rPr>
-              <a:t>198.51.100.20</a:t>
-            </a:r>
-          </a:p>
-        </p:txBody>
-      </p:sp>
-      <p:sp>
-        <p:nvSpPr>
-          <p:cNvPr id="48" name="TextBox 47"/>
-          <p:cNvSpPr txBox="1"/>
-          <p:nvPr/>
-        </p:nvSpPr>
-        <p:spPr>
-          <a:xfrm>
-            <a:off x="1883664" y="4318000"/>
-            <a:ext cx="1681215" cy="171195"/>
+              <a:t>社内端末</a:t>
+            </a:r>
+          </a:p>
+        </p:txBody>
+      </p:sp>
+      <p:pic>
+        <p:nvPicPr>
+          <p:cNvPr id="13" name="Picture 12" descr="ethernet.png"/>
+          <p:cNvPicPr>
+            <a:picLocks noChangeAspect="1"/>
+          </p:cNvPicPr>
+          <p:nvPr/>
+        </p:nvPicPr>
+        <p:blipFill>
+          <a:blip r:embed="rId3"/>
+          <a:stretch>
+            <a:fillRect/>
+          </a:stretch>
+        </p:blipFill>
+        <p:spPr>
+          <a:xfrm>
+            <a:off x="4579223" y="2239772"/>
+            <a:ext cx="310896" cy="310896"/>
+          </a:xfrm>
+          <a:prstGeom prst="rect">
+            <a:avLst/>
+          </a:prstGeom>
+        </p:spPr>
+      </p:pic>
+      <p:sp>
+        <p:nvSpPr>
+          <p:cNvPr id="14" name="TextBox 13"/>
+          <p:cNvSpPr txBox="1"/>
+          <p:nvPr/>
+        </p:nvSpPr>
+        <p:spPr>
+          <a:xfrm>
+            <a:off x="3866631" y="2605532"/>
+            <a:ext cx="1736079" cy="219455"/>
           </a:xfrm>
           <a:prstGeom prst="rect">
             <a:avLst/>
@@ -38914,7 +37494,7 @@
             <a:spAutoFit/>
             <a:extLst>
               <a:ext uri="{8AF73BB6-5E31-4F0F-A399-3D98F3B95FD9}">
-                <ns125:textLayout xmlns:ns125="urn:pptxdsl:text-layout:v1" role="compact"/>
+                <ns37:textLayout xmlns:ns37="urn:pptxdsl:text-layout:v1" role="compact"/>
               </a:ext>
             </a:extLst>
           </a:bodyPr>
@@ -38926,6 +37506,396 @@
               </a:lnSpc>
             </a:pPr>
             <a:r>
+              <a:rPr sz="1050" b="1" lang="ja-JP">
+                <a:solidFill>
+                  <a:srgbClr val="182C43"/>
+                </a:solidFill>
+                <a:latin typeface="Yu Gothic"/>
+                <a:ea typeface="Yu Gothic"/>
+                <a:cs typeface="Yu Gothic"/>
+              </a:rPr>
+              <a:t>ルーター内側</a:t>
+            </a:r>
+          </a:p>
+        </p:txBody>
+      </p:sp>
+      <p:pic>
+        <p:nvPicPr>
+          <p:cNvPr id="15" name="Picture 14" descr="switch.png"/>
+          <p:cNvPicPr>
+            <a:picLocks noChangeAspect="1"/>
+          </p:cNvPicPr>
+          <p:nvPr/>
+        </p:nvPicPr>
+        <p:blipFill>
+          <a:blip r:embed="rId4"/>
+          <a:stretch>
+            <a:fillRect/>
+          </a:stretch>
+        </p:blipFill>
+        <p:spPr>
+          <a:xfrm>
+            <a:off x="6589623" y="2239772"/>
+            <a:ext cx="310896" cy="310896"/>
+          </a:xfrm>
+          <a:prstGeom prst="rect">
+            <a:avLst/>
+          </a:prstGeom>
+        </p:spPr>
+      </p:pic>
+      <p:sp>
+        <p:nvSpPr>
+          <p:cNvPr id="16" name="TextBox 15"/>
+          <p:cNvSpPr txBox="1"/>
+          <p:nvPr/>
+        </p:nvSpPr>
+        <p:spPr>
+          <a:xfrm>
+            <a:off x="5877031" y="2605532"/>
+            <a:ext cx="1736079" cy="219455"/>
+          </a:xfrm>
+          <a:prstGeom prst="rect">
+            <a:avLst/>
+          </a:prstGeom>
+          <a:noFill/>
+        </p:spPr>
+        <p:txBody>
+          <a:bodyPr wrap="square" anchor="t" lIns="0" rIns="0" tIns="0" bIns="0">
+            <a:spAutoFit/>
+            <a:extLst>
+              <a:ext uri="{8AF73BB6-5E31-4F0F-A399-3D98F3B95FD9}">
+                <ns42:textLayout xmlns:ns42="urn:pptxdsl:text-layout:v1" role="compact"/>
+              </a:ext>
+            </a:extLst>
+          </a:bodyPr>
+          <a:lstStyle/>
+          <a:p>
+            <a:pPr algn="ctr">
+              <a:lnSpc>
+                <a:spcPct val="100000"/>
+              </a:lnSpc>
+            </a:pPr>
+            <a:r>
+              <a:rPr sz="1050" b="1" lang="ja-JP">
+                <a:solidFill>
+                  <a:srgbClr val="182C43"/>
+                </a:solidFill>
+                <a:latin typeface="Yu Gothic"/>
+                <a:ea typeface="Yu Gothic"/>
+                <a:cs typeface="Yu Gothic"/>
+              </a:rPr>
+              <a:t>NAT処理</a:t>
+            </a:r>
+          </a:p>
+        </p:txBody>
+      </p:sp>
+      <p:sp>
+        <p:nvSpPr>
+          <p:cNvPr id="17" name="layout-background:protocol-state-flow:stage:internet"/>
+          <p:cNvSpPr/>
+          <p:nvPr/>
+        </p:nvSpPr>
+        <p:spPr>
+          <a:xfrm>
+            <a:off x="7805135" y="2898140"/>
+            <a:ext cx="1900671" cy="2084832"/>
+          </a:xfrm>
+          <a:prstGeom prst="rect">
+            <a:avLst/>
+          </a:prstGeom>
+          <a:solidFill>
+            <a:srgbClr val="EAF0EF"/>
+          </a:solidFill>
+          <a:ln>
+            <a:noFill/>
+          </a:ln>
+          <a:effectLst/>
+        </p:spPr>
+        <p:style>
+          <a:lnRef idx="1">
+            <a:schemeClr val="accent1"/>
+          </a:lnRef>
+          <a:fillRef idx="3">
+            <a:schemeClr val="accent1"/>
+          </a:fillRef>
+          <a:effectRef idx="2">
+            <a:schemeClr val="accent1"/>
+          </a:effectRef>
+          <a:fontRef idx="minor">
+            <a:schemeClr val="lt1"/>
+          </a:fontRef>
+        </p:style>
+        <p:txBody>
+          <a:bodyPr rtlCol="0" anchor="ctr"/>
+          <a:lstStyle/>
+          <a:p>
+            <a:pPr algn="ctr"/>
+          </a:p>
+        </p:txBody>
+      </p:sp>
+      <p:pic>
+        <p:nvPicPr>
+          <p:cNvPr id="18" name="Picture 17" descr="link.png"/>
+          <p:cNvPicPr>
+            <a:picLocks noChangeAspect="1"/>
+          </p:cNvPicPr>
+          <p:nvPr/>
+        </p:nvPicPr>
+        <p:blipFill>
+          <a:blip r:embed="rId5"/>
+          <a:stretch>
+            <a:fillRect/>
+          </a:stretch>
+        </p:blipFill>
+        <p:spPr>
+          <a:xfrm>
+            <a:off x="8600023" y="2239772"/>
+            <a:ext cx="310896" cy="310896"/>
+          </a:xfrm>
+          <a:prstGeom prst="rect">
+            <a:avLst/>
+          </a:prstGeom>
+        </p:spPr>
+      </p:pic>
+      <p:sp>
+        <p:nvSpPr>
+          <p:cNvPr id="19" name="TextBox 18"/>
+          <p:cNvSpPr txBox="1"/>
+          <p:nvPr/>
+        </p:nvSpPr>
+        <p:spPr>
+          <a:xfrm>
+            <a:off x="7887431" y="2605532"/>
+            <a:ext cx="1736079" cy="219455"/>
+          </a:xfrm>
+          <a:prstGeom prst="rect">
+            <a:avLst/>
+          </a:prstGeom>
+          <a:noFill/>
+        </p:spPr>
+        <p:txBody>
+          <a:bodyPr wrap="square" anchor="t" lIns="0" rIns="0" tIns="0" bIns="0">
+            <a:spAutoFit/>
+            <a:extLst>
+              <a:ext uri="{8AF73BB6-5E31-4F0F-A399-3D98F3B95FD9}">
+                <ns47:textLayout xmlns:ns47="urn:pptxdsl:text-layout:v1" role="compact"/>
+              </a:ext>
+            </a:extLst>
+          </a:bodyPr>
+          <a:lstStyle/>
+          <a:p>
+            <a:pPr algn="ctr">
+              <a:lnSpc>
+                <a:spcPct val="100000"/>
+              </a:lnSpc>
+            </a:pPr>
+            <a:r>
+              <a:rPr sz="1050" b="1" lang="ja-JP">
+                <a:solidFill>
+                  <a:srgbClr val="182C43"/>
+                </a:solidFill>
+                <a:latin typeface="Yu Gothic"/>
+                <a:ea typeface="Yu Gothic"/>
+                <a:cs typeface="Yu Gothic"/>
+              </a:rPr>
+              <a:t>インターネット区間</a:t>
+            </a:r>
+          </a:p>
+        </p:txBody>
+      </p:sp>
+      <p:pic>
+        <p:nvPicPr>
+          <p:cNvPr id="20" name="Picture 19" descr="server.png"/>
+          <p:cNvPicPr>
+            <a:picLocks noChangeAspect="1"/>
+          </p:cNvPicPr>
+          <p:nvPr/>
+        </p:nvPicPr>
+        <p:blipFill>
+          <a:blip r:embed="rId6"/>
+          <a:stretch>
+            <a:fillRect/>
+          </a:stretch>
+        </p:blipFill>
+        <p:spPr>
+          <a:xfrm>
+            <a:off x="10610423" y="2239772"/>
+            <a:ext cx="310896" cy="310896"/>
+          </a:xfrm>
+          <a:prstGeom prst="rect">
+            <a:avLst/>
+          </a:prstGeom>
+        </p:spPr>
+      </p:pic>
+      <p:sp>
+        <p:nvSpPr>
+          <p:cNvPr id="21" name="TextBox 20"/>
+          <p:cNvSpPr txBox="1"/>
+          <p:nvPr/>
+        </p:nvSpPr>
+        <p:spPr>
+          <a:xfrm>
+            <a:off x="9897831" y="2605532"/>
+            <a:ext cx="1736079" cy="219455"/>
+          </a:xfrm>
+          <a:prstGeom prst="rect">
+            <a:avLst/>
+          </a:prstGeom>
+          <a:noFill/>
+        </p:spPr>
+        <p:txBody>
+          <a:bodyPr wrap="square" anchor="t" lIns="0" rIns="0" tIns="0" bIns="0">
+            <a:spAutoFit/>
+            <a:extLst>
+              <a:ext uri="{8AF73BB6-5E31-4F0F-A399-3D98F3B95FD9}">
+                <ns52:textLayout xmlns:ns52="urn:pptxdsl:text-layout:v1" role="compact"/>
+              </a:ext>
+            </a:extLst>
+          </a:bodyPr>
+          <a:lstStyle/>
+          <a:p>
+            <a:pPr algn="ctr">
+              <a:lnSpc>
+                <a:spcPct val="100000"/>
+              </a:lnSpc>
+            </a:pPr>
+            <a:r>
+              <a:rPr sz="1050" b="1" lang="ja-JP">
+                <a:solidFill>
+                  <a:srgbClr val="182C43"/>
+                </a:solidFill>
+                <a:latin typeface="Yu Gothic"/>
+                <a:ea typeface="Yu Gothic"/>
+                <a:cs typeface="Yu Gothic"/>
+              </a:rPr>
+              <a:t>外部サーバー</a:t>
+            </a:r>
+          </a:p>
+        </p:txBody>
+      </p:sp>
+      <p:sp>
+        <p:nvSpPr>
+          <p:cNvPr id="22" name="layout-background:protocol-state-flow:track:0"/>
+          <p:cNvSpPr/>
+          <p:nvPr/>
+        </p:nvSpPr>
+        <p:spPr>
+          <a:xfrm>
+            <a:off x="502920" y="2971292"/>
+            <a:ext cx="11185855" cy="896112"/>
+          </a:xfrm>
+          <a:prstGeom prst="rect">
+            <a:avLst/>
+          </a:prstGeom>
+          <a:solidFill>
+            <a:srgbClr val="D9EBE8"/>
+          </a:solidFill>
+          <a:ln>
+            <a:noFill/>
+          </a:ln>
+          <a:effectLst/>
+        </p:spPr>
+        <p:style>
+          <a:lnRef idx="1">
+            <a:schemeClr val="accent1"/>
+          </a:lnRef>
+          <a:fillRef idx="3">
+            <a:schemeClr val="accent1"/>
+          </a:fillRef>
+          <a:effectRef idx="2">
+            <a:schemeClr val="accent1"/>
+          </a:effectRef>
+          <a:fontRef idx="minor">
+            <a:schemeClr val="lt1"/>
+          </a:fontRef>
+        </p:style>
+        <p:txBody>
+          <a:bodyPr rtlCol="0" anchor="ctr"/>
+          <a:lstStyle/>
+          <a:p>
+            <a:pPr algn="ctr"/>
+          </a:p>
+        </p:txBody>
+      </p:sp>
+      <p:sp>
+        <p:nvSpPr>
+          <p:cNvPr id="23" name="TextBox 22"/>
+          <p:cNvSpPr txBox="1"/>
+          <p:nvPr/>
+        </p:nvSpPr>
+        <p:spPr>
+          <a:xfrm>
+            <a:off x="594360" y="3154172"/>
+            <a:ext cx="1115568" cy="177037"/>
+          </a:xfrm>
+          <a:prstGeom prst="rect">
+            <a:avLst/>
+          </a:prstGeom>
+          <a:noFill/>
+        </p:spPr>
+        <p:txBody>
+          <a:bodyPr wrap="square" anchor="t" lIns="0" rIns="0" tIns="0" bIns="0">
+            <a:spAutoFit/>
+            <a:extLst>
+              <a:ext uri="{8AF73BB6-5E31-4F0F-A399-3D98F3B95FD9}">
+                <ns57:textLayout xmlns:ns57="urn:pptxdsl:text-layout:v1" role="compact"/>
+              </a:ext>
+            </a:extLst>
+          </a:bodyPr>
+          <a:lstStyle/>
+          <a:p>
+            <a:pPr algn="l">
+              <a:lnSpc>
+                <a:spcPct val="100000"/>
+              </a:lnSpc>
+            </a:pPr>
+            <a:r>
+              <a:rPr sz="1250" b="1" lang="ja-JP">
+                <a:solidFill>
+                  <a:srgbClr val="0D7870"/>
+                </a:solidFill>
+                <a:latin typeface="Yu Gothic"/>
+                <a:ea typeface="Yu Gothic"/>
+                <a:cs typeface="Yu Gothic"/>
+              </a:rPr>
+              <a:t>送信元IP</a:t>
+            </a:r>
+          </a:p>
+        </p:txBody>
+      </p:sp>
+      <p:sp>
+        <p:nvSpPr>
+          <p:cNvPr id="24" name="TextBox 23"/>
+          <p:cNvSpPr txBox="1"/>
+          <p:nvPr/>
+        </p:nvSpPr>
+        <p:spPr>
+          <a:xfrm>
+            <a:off x="594360" y="3367786"/>
+            <a:ext cx="1115568" cy="408177"/>
+          </a:xfrm>
+          <a:prstGeom prst="rect">
+            <a:avLst/>
+          </a:prstGeom>
+          <a:noFill/>
+        </p:spPr>
+        <p:txBody>
+          <a:bodyPr wrap="square" anchor="t" lIns="0" rIns="0" tIns="0" bIns="0">
+            <a:spAutoFit/>
+            <a:extLst>
+              <a:ext uri="{8AF73BB6-5E31-4F0F-A399-3D98F3B95FD9}">
+                <ns62:textLayout xmlns:ns62="urn:pptxdsl:text-layout:v1" role="compact"/>
+              </a:ext>
+            </a:extLst>
+          </a:bodyPr>
+          <a:lstStyle/>
+          <a:p>
+            <a:pPr algn="l">
+              <a:lnSpc>
+                <a:spcPct val="100000"/>
+              </a:lnSpc>
+            </a:pPr>
+            <a:r>
               <a:rPr sz="900" b="0" lang="ja-JP">
                 <a:solidFill>
                   <a:srgbClr val="666E70"/>
@@ -38934,20 +37904,168 @@
                 <a:ea typeface="Yu Gothic"/>
                 <a:cs typeface="Yu Gothic"/>
               </a:rPr>
-              <a:t>外部サーバー</a:t>
-            </a:r>
-          </a:p>
-        </p:txBody>
-      </p:sp>
-      <p:sp>
-        <p:nvSpPr>
-          <p:cNvPr id="49" name="protocol-state-flow:marker:plain"/>
+              <a:t>アドレス変換</a:t>
+            </a:r>
+          </a:p>
+        </p:txBody>
+      </p:sp>
+      <p:cxnSp>
+        <p:nvCxnSpPr>
+          <p:cNvPr id="25" name="Connector 24"/>
+          <p:cNvCxnSpPr/>
+          <p:nvPr/>
+        </p:nvCxnSpPr>
+        <p:spPr>
+          <a:xfrm>
+            <a:off x="3227191" y="3227324"/>
+            <a:ext cx="1004560" cy="0"/>
+          </a:xfrm>
+          <a:prstGeom prst="line">
+            <a:avLst/>
+          </a:prstGeom>
+          <a:ln w="20320">
+            <a:solidFill>
+              <a:srgbClr val="0D7870"/>
+            </a:solidFill>
+            <a:tailEnd type="triangle" w="med" len="med"/>
+          </a:ln>
+          <a:effectLst/>
+        </p:spPr>
+        <p:style>
+          <a:lnRef idx="2">
+            <a:schemeClr val="accent1"/>
+          </a:lnRef>
+          <a:fillRef idx="0">
+            <a:schemeClr val="accent1"/>
+          </a:fillRef>
+          <a:effectRef idx="1">
+            <a:schemeClr val="accent1"/>
+          </a:effectRef>
+          <a:fontRef idx="minor">
+            <a:schemeClr val="tx1"/>
+          </a:fontRef>
+        </p:style>
+      </p:cxnSp>
+      <p:cxnSp>
+        <p:nvCxnSpPr>
+          <p:cNvPr id="26" name="Connector 25"/>
+          <p:cNvCxnSpPr/>
+          <p:nvPr/>
+        </p:nvCxnSpPr>
+        <p:spPr>
+          <a:xfrm>
+            <a:off x="5237591" y="3227324"/>
+            <a:ext cx="1004560" cy="0"/>
+          </a:xfrm>
+          <a:prstGeom prst="line">
+            <a:avLst/>
+          </a:prstGeom>
+          <a:ln w="20320">
+            <a:solidFill>
+              <a:srgbClr val="0D7870"/>
+            </a:solidFill>
+            <a:tailEnd type="triangle" w="med" len="med"/>
+          </a:ln>
+          <a:effectLst/>
+        </p:spPr>
+        <p:style>
+          <a:lnRef idx="2">
+            <a:schemeClr val="accent1"/>
+          </a:lnRef>
+          <a:fillRef idx="0">
+            <a:schemeClr val="accent1"/>
+          </a:fillRef>
+          <a:effectRef idx="1">
+            <a:schemeClr val="accent1"/>
+          </a:effectRef>
+          <a:fontRef idx="minor">
+            <a:schemeClr val="tx1"/>
+          </a:fontRef>
+        </p:style>
+      </p:cxnSp>
+      <p:cxnSp>
+        <p:nvCxnSpPr>
+          <p:cNvPr id="27" name="Connector 26"/>
+          <p:cNvCxnSpPr/>
+          <p:nvPr/>
+        </p:nvCxnSpPr>
+        <p:spPr>
+          <a:xfrm>
+            <a:off x="7247991" y="3227324"/>
+            <a:ext cx="1004560" cy="0"/>
+          </a:xfrm>
+          <a:prstGeom prst="line">
+            <a:avLst/>
+          </a:prstGeom>
+          <a:ln w="20320">
+            <a:solidFill>
+              <a:srgbClr val="0D7870"/>
+            </a:solidFill>
+            <a:tailEnd type="triangle" w="med" len="med"/>
+          </a:ln>
+          <a:effectLst/>
+        </p:spPr>
+        <p:style>
+          <a:lnRef idx="2">
+            <a:schemeClr val="accent1"/>
+          </a:lnRef>
+          <a:fillRef idx="0">
+            <a:schemeClr val="accent1"/>
+          </a:fillRef>
+          <a:effectRef idx="1">
+            <a:schemeClr val="accent1"/>
+          </a:effectRef>
+          <a:fontRef idx="minor">
+            <a:schemeClr val="tx1"/>
+          </a:fontRef>
+        </p:style>
+      </p:cxnSp>
+      <p:cxnSp>
+        <p:nvCxnSpPr>
+          <p:cNvPr id="28" name="Connector 27"/>
+          <p:cNvCxnSpPr/>
+          <p:nvPr/>
+        </p:nvCxnSpPr>
+        <p:spPr>
+          <a:xfrm>
+            <a:off x="9258391" y="3227324"/>
+            <a:ext cx="1004560" cy="0"/>
+          </a:xfrm>
+          <a:prstGeom prst="line">
+            <a:avLst/>
+          </a:prstGeom>
+          <a:ln w="20320">
+            <a:solidFill>
+              <a:srgbClr val="0D7870"/>
+            </a:solidFill>
+            <a:tailEnd type="triangle" w="med" len="med"/>
+          </a:ln>
+          <a:effectLst/>
+        </p:spPr>
+        <p:style>
+          <a:lnRef idx="2">
+            <a:schemeClr val="accent1"/>
+          </a:lnRef>
+          <a:fillRef idx="0">
+            <a:schemeClr val="accent1"/>
+          </a:fillRef>
+          <a:effectRef idx="1">
+            <a:schemeClr val="accent1"/>
+          </a:effectRef>
+          <a:fontRef idx="minor">
+            <a:schemeClr val="tx1"/>
+          </a:fontRef>
+        </p:style>
+      </p:cxnSp>
+      <p:sp>
+        <p:nvSpPr>
+          <p:cNvPr id="29" name="protocol-state-flow:marker:plain"/>
           <p:cNvSpPr/>
           <p:nvPr/>
         </p:nvSpPr>
         <p:spPr>
           <a:xfrm>
-            <a:off x="4268327" y="3849116"/>
+            <a:off x="2257927" y="3135884"/>
             <a:ext cx="932688" cy="182880"/>
           </a:xfrm>
           <a:prstGeom prst="rect">
@@ -38987,13 +38105,13 @@
       </p:sp>
       <p:sp>
         <p:nvSpPr>
-          <p:cNvPr id="50" name="TextBox 49"/>
-          <p:cNvSpPr txBox="1"/>
-          <p:nvPr/>
-        </p:nvSpPr>
-        <p:spPr>
-          <a:xfrm>
-            <a:off x="3894063" y="4123435"/>
+          <p:cNvPr id="30" name="protocol-state-flow:value:unchanged:0:client"/>
+          <p:cNvSpPr txBox="1"/>
+          <p:nvPr/>
+        </p:nvSpPr>
+        <p:spPr>
+          <a:xfrm>
+            <a:off x="1883664" y="3410204"/>
             <a:ext cx="1681215" cy="167132"/>
           </a:xfrm>
           <a:prstGeom prst="rect">
@@ -39006,7 +38124,7 @@
             <a:spAutoFit/>
             <a:extLst>
               <a:ext uri="{8AF73BB6-5E31-4F0F-A399-3D98F3B95FD9}">
-                <ns130:textLayout xmlns:ns130="urn:pptxdsl:text-layout:v1" role="compact"/>
+                <ns71:textLayout xmlns:ns71="urn:pptxdsl:text-layout:v1" role="compact"/>
               </a:ext>
             </a:extLst>
           </a:bodyPr>
@@ -39026,21 +38144,21 @@
                 <a:ea typeface="Yu Gothic"/>
                 <a:cs typeface="Yu Gothic"/>
               </a:rPr>
-              <a:t>198.51.100.20</a:t>
-            </a:r>
-          </a:p>
-        </p:txBody>
-      </p:sp>
-      <p:sp>
-        <p:nvSpPr>
-          <p:cNvPr id="51" name="TextBox 50"/>
-          <p:cNvSpPr txBox="1"/>
-          <p:nvPr/>
-        </p:nvSpPr>
-        <p:spPr>
-          <a:xfrm>
-            <a:off x="3894063" y="4318000"/>
-            <a:ext cx="1681215" cy="171195"/>
+              <a:t>10.0.0.25</a:t>
+            </a:r>
+          </a:p>
+        </p:txBody>
+      </p:sp>
+      <p:sp>
+        <p:nvSpPr>
+          <p:cNvPr id="31" name="TextBox 30"/>
+          <p:cNvSpPr txBox="1"/>
+          <p:nvPr/>
+        </p:nvSpPr>
+        <p:spPr>
+          <a:xfrm>
+            <a:off x="1883664" y="3604768"/>
+            <a:ext cx="1681215" cy="171196"/>
           </a:xfrm>
           <a:prstGeom prst="rect">
             <a:avLst/>
@@ -39052,7 +38170,7 @@
             <a:spAutoFit/>
             <a:extLst>
               <a:ext uri="{8AF73BB6-5E31-4F0F-A399-3D98F3B95FD9}">
-                <ns135:textLayout xmlns:ns135="urn:pptxdsl:text-layout:v1" role="compact"/>
+                <ns76:textLayout xmlns:ns76="urn:pptxdsl:text-layout:v1" role="compact"/>
               </a:ext>
             </a:extLst>
           </a:bodyPr>
@@ -39072,156 +38190,20 @@
                 <a:ea typeface="Yu Gothic"/>
                 <a:cs typeface="Yu Gothic"/>
               </a:rPr>
-              <a:t>宛先を維持</a:t>
-            </a:r>
-          </a:p>
-        </p:txBody>
-      </p:sp>
-      <p:sp>
-        <p:nvSpPr>
-          <p:cNvPr id="52" name="protocol-state-flow:marker:internal"/>
+              <a:t>端末のプライベートIP</a:t>
+            </a:r>
+          </a:p>
+        </p:txBody>
+      </p:sp>
+      <p:sp>
+        <p:nvSpPr>
+          <p:cNvPr id="32" name="protocol-state-flow:marker:plain"/>
           <p:cNvSpPr/>
           <p:nvPr/>
         </p:nvSpPr>
         <p:spPr>
           <a:xfrm>
-            <a:off x="6278727" y="3922268"/>
-            <a:ext cx="932688" cy="36576"/>
-          </a:xfrm>
-          <a:prstGeom prst="rect">
-            <a:avLst/>
-          </a:prstGeom>
-          <a:solidFill>
-            <a:srgbClr val="182C43"/>
-          </a:solidFill>
-          <a:ln>
-            <a:noFill/>
-          </a:ln>
-          <a:effectLst/>
-        </p:spPr>
-        <p:style>
-          <a:lnRef idx="1">
-            <a:schemeClr val="accent1"/>
-          </a:lnRef>
-          <a:fillRef idx="3">
-            <a:schemeClr val="accent1"/>
-          </a:fillRef>
-          <a:effectRef idx="2">
-            <a:schemeClr val="accent1"/>
-          </a:effectRef>
-          <a:fontRef idx="minor">
-            <a:schemeClr val="lt1"/>
-          </a:fontRef>
-        </p:style>
-        <p:txBody>
-          <a:bodyPr rtlCol="0" anchor="ctr"/>
-          <a:lstStyle/>
-          <a:p>
-            <a:pPr algn="ctr"/>
-          </a:p>
-        </p:txBody>
-      </p:sp>
-      <p:sp>
-        <p:nvSpPr>
-          <p:cNvPr id="53" name="TextBox 52"/>
-          <p:cNvSpPr txBox="1"/>
-          <p:nvPr/>
-        </p:nvSpPr>
-        <p:spPr>
-          <a:xfrm>
-            <a:off x="5904463" y="4123435"/>
-            <a:ext cx="1681215" cy="167132"/>
-          </a:xfrm>
-          <a:prstGeom prst="rect">
-            <a:avLst/>
-          </a:prstGeom>
-          <a:noFill/>
-        </p:spPr>
-        <p:txBody>
-          <a:bodyPr wrap="square" anchor="t" lIns="0" rIns="0" tIns="0" bIns="0">
-            <a:spAutoFit/>
-            <a:extLst>
-              <a:ext uri="{8AF73BB6-5E31-4F0F-A399-3D98F3B95FD9}">
-                <ns140:textLayout xmlns:ns140="urn:pptxdsl:text-layout:v1" role="compact"/>
-              </a:ext>
-            </a:extLst>
-          </a:bodyPr>
-          <a:lstStyle/>
-          <a:p>
-            <a:pPr algn="ctr">
-              <a:lnSpc>
-                <a:spcPct val="100000"/>
-              </a:lnSpc>
-            </a:pPr>
-            <a:r>
-              <a:rPr sz="1100" b="1" lang="ja-JP">
-                <a:solidFill>
-                  <a:srgbClr val="182C43"/>
-                </a:solidFill>
-                <a:latin typeface="Yu Gothic"/>
-                <a:ea typeface="Yu Gothic"/>
-                <a:cs typeface="Yu Gothic"/>
-              </a:rPr>
-              <a:t>198.51.100.20</a:t>
-            </a:r>
-          </a:p>
-        </p:txBody>
-      </p:sp>
-      <p:sp>
-        <p:nvSpPr>
-          <p:cNvPr id="54" name="TextBox 53"/>
-          <p:cNvSpPr txBox="1"/>
-          <p:nvPr/>
-        </p:nvSpPr>
-        <p:spPr>
-          <a:xfrm>
-            <a:off x="5904463" y="4318000"/>
-            <a:ext cx="1681215" cy="171195"/>
-          </a:xfrm>
-          <a:prstGeom prst="rect">
-            <a:avLst/>
-          </a:prstGeom>
-          <a:noFill/>
-        </p:spPr>
-        <p:txBody>
-          <a:bodyPr wrap="square" anchor="t" lIns="0" rIns="0" tIns="0" bIns="0">
-            <a:spAutoFit/>
-            <a:extLst>
-              <a:ext uri="{8AF73BB6-5E31-4F0F-A399-3D98F3B95FD9}">
-                <ns145:textLayout xmlns:ns145="urn:pptxdsl:text-layout:v1" role="compact"/>
-              </a:ext>
-            </a:extLst>
-          </a:bodyPr>
-          <a:lstStyle/>
-          <a:p>
-            <a:pPr algn="ctr">
-              <a:lnSpc>
-                <a:spcPct val="100000"/>
-              </a:lnSpc>
-            </a:pPr>
-            <a:r>
-              <a:rPr sz="900" b="0" lang="ja-JP">
-                <a:solidFill>
-                  <a:srgbClr val="666E70"/>
-                </a:solidFill>
-                <a:latin typeface="Yu Gothic"/>
-                <a:ea typeface="Yu Gothic"/>
-                <a:cs typeface="Yu Gothic"/>
-              </a:rPr>
-              <a:t>宛先を維持</a:t>
-            </a:r>
-          </a:p>
-        </p:txBody>
-      </p:sp>
-      <p:sp>
-        <p:nvSpPr>
-          <p:cNvPr id="55" name="protocol-state-flow:marker:plain"/>
-          <p:cNvSpPr/>
-          <p:nvPr/>
-        </p:nvSpPr>
-        <p:spPr>
-          <a:xfrm>
-            <a:off x="8289127" y="3849116"/>
+            <a:off x="4268327" y="3135884"/>
             <a:ext cx="932688" cy="182880"/>
           </a:xfrm>
           <a:prstGeom prst="rect">
@@ -39261,13 +38243,13 @@
       </p:sp>
       <p:sp>
         <p:nvSpPr>
-          <p:cNvPr id="56" name="TextBox 55"/>
-          <p:cNvSpPr txBox="1"/>
-          <p:nvPr/>
-        </p:nvSpPr>
-        <p:spPr>
-          <a:xfrm>
-            <a:off x="7914863" y="4123435"/>
+          <p:cNvPr id="33" name="protocol-state-flow:value:unchanged:0:inside"/>
+          <p:cNvSpPr txBox="1"/>
+          <p:nvPr/>
+        </p:nvSpPr>
+        <p:spPr>
+          <a:xfrm>
+            <a:off x="3894063" y="3410204"/>
             <a:ext cx="1681215" cy="167132"/>
           </a:xfrm>
           <a:prstGeom prst="rect">
@@ -39280,7 +38262,7 @@
             <a:spAutoFit/>
             <a:extLst>
               <a:ext uri="{8AF73BB6-5E31-4F0F-A399-3D98F3B95FD9}">
-                <ns150:textLayout xmlns:ns150="urn:pptxdsl:text-layout:v1" role="compact"/>
+                <ns81:textLayout xmlns:ns81="urn:pptxdsl:text-layout:v1" role="compact"/>
               </a:ext>
             </a:extLst>
           </a:bodyPr>
@@ -39300,21 +38282,21 @@
                 <a:ea typeface="Yu Gothic"/>
                 <a:cs typeface="Yu Gothic"/>
               </a:rPr>
-              <a:t>198.51.100.20</a:t>
-            </a:r>
-          </a:p>
-        </p:txBody>
-      </p:sp>
-      <p:sp>
-        <p:nvSpPr>
-          <p:cNvPr id="57" name="TextBox 56"/>
-          <p:cNvSpPr txBox="1"/>
-          <p:nvPr/>
-        </p:nvSpPr>
-        <p:spPr>
-          <a:xfrm>
-            <a:off x="7914863" y="4318000"/>
-            <a:ext cx="1681215" cy="171195"/>
+              <a:t>10.0.0.25</a:t>
+            </a:r>
+          </a:p>
+        </p:txBody>
+      </p:sp>
+      <p:sp>
+        <p:nvSpPr>
+          <p:cNvPr id="34" name="TextBox 33"/>
+          <p:cNvSpPr txBox="1"/>
+          <p:nvPr/>
+        </p:nvSpPr>
+        <p:spPr>
+          <a:xfrm>
+            <a:off x="3894063" y="3604768"/>
+            <a:ext cx="1681215" cy="171196"/>
           </a:xfrm>
           <a:prstGeom prst="rect">
             <a:avLst/>
@@ -39326,7 +38308,7 @@
             <a:spAutoFit/>
             <a:extLst>
               <a:ext uri="{8AF73BB6-5E31-4F0F-A399-3D98F3B95FD9}">
-                <ns155:textLayout xmlns:ns155="urn:pptxdsl:text-layout:v1" role="compact"/>
+                <ns86:textLayout xmlns:ns86="urn:pptxdsl:text-layout:v1" role="compact"/>
               </a:ext>
             </a:extLst>
           </a:bodyPr>
@@ -39346,20 +38328,156 @@
                 <a:ea typeface="Yu Gothic"/>
                 <a:cs typeface="Yu Gothic"/>
               </a:rPr>
-              <a:t>外部へ転送</a:t>
-            </a:r>
-          </a:p>
-        </p:txBody>
-      </p:sp>
-      <p:sp>
-        <p:nvSpPr>
-          <p:cNvPr id="58" name="protocol-state-flow:marker:plain"/>
+              <a:t>変換前の送信元</a:t>
+            </a:r>
+          </a:p>
+        </p:txBody>
+      </p:sp>
+      <p:sp>
+        <p:nvSpPr>
+          <p:cNvPr id="35" name="protocol-state-flow:marker:internal"/>
           <p:cNvSpPr/>
           <p:nvPr/>
         </p:nvSpPr>
         <p:spPr>
           <a:xfrm>
-            <a:off x="10299527" y="3849116"/>
+            <a:off x="6278727" y="3209036"/>
+            <a:ext cx="932688" cy="36576"/>
+          </a:xfrm>
+          <a:prstGeom prst="rect">
+            <a:avLst/>
+          </a:prstGeom>
+          <a:solidFill>
+            <a:srgbClr val="182C43"/>
+          </a:solidFill>
+          <a:ln>
+            <a:noFill/>
+          </a:ln>
+          <a:effectLst/>
+        </p:spPr>
+        <p:style>
+          <a:lnRef idx="1">
+            <a:schemeClr val="accent1"/>
+          </a:lnRef>
+          <a:fillRef idx="3">
+            <a:schemeClr val="accent1"/>
+          </a:fillRef>
+          <a:effectRef idx="2">
+            <a:schemeClr val="accent1"/>
+          </a:effectRef>
+          <a:fontRef idx="minor">
+            <a:schemeClr val="lt1"/>
+          </a:fontRef>
+        </p:style>
+        <p:txBody>
+          <a:bodyPr rtlCol="0" anchor="ctr"/>
+          <a:lstStyle/>
+          <a:p>
+            <a:pPr algn="ctr"/>
+          </a:p>
+        </p:txBody>
+      </p:sp>
+      <p:sp>
+        <p:nvSpPr>
+          <p:cNvPr id="36" name="protocol-state-flow:value:changed:0:nat"/>
+          <p:cNvSpPr txBox="1"/>
+          <p:nvPr/>
+        </p:nvSpPr>
+        <p:spPr>
+          <a:xfrm>
+            <a:off x="5904463" y="3410204"/>
+            <a:ext cx="1681215" cy="167132"/>
+          </a:xfrm>
+          <a:prstGeom prst="rect">
+            <a:avLst/>
+          </a:prstGeom>
+          <a:noFill/>
+        </p:spPr>
+        <p:txBody>
+          <a:bodyPr wrap="square" anchor="t" lIns="0" rIns="0" tIns="0" bIns="0">
+            <a:spAutoFit/>
+            <a:extLst>
+              <a:ext uri="{8AF73BB6-5E31-4F0F-A399-3D98F3B95FD9}">
+                <ns91:textLayout xmlns:ns91="urn:pptxdsl:text-layout:v1" role="compact"/>
+              </a:ext>
+            </a:extLst>
+          </a:bodyPr>
+          <a:lstStyle/>
+          <a:p>
+            <a:pPr algn="ctr">
+              <a:lnSpc>
+                <a:spcPct val="100000"/>
+              </a:lnSpc>
+            </a:pPr>
+            <a:r>
+              <a:rPr sz="1100" b="1" lang="ja-JP" u="sng">
+                <a:solidFill>
+                  <a:srgbClr val="C7583E"/>
+                </a:solidFill>
+                <a:latin typeface="Yu Gothic"/>
+                <a:ea typeface="Yu Gothic"/>
+                <a:cs typeface="Yu Gothic"/>
+              </a:rPr>
+              <a:t>203.0.113.10</a:t>
+            </a:r>
+          </a:p>
+        </p:txBody>
+      </p:sp>
+      <p:sp>
+        <p:nvSpPr>
+          <p:cNvPr id="37" name="TextBox 36"/>
+          <p:cNvSpPr txBox="1"/>
+          <p:nvPr/>
+        </p:nvSpPr>
+        <p:spPr>
+          <a:xfrm>
+            <a:off x="5904463" y="3604768"/>
+            <a:ext cx="1681215" cy="171196"/>
+          </a:xfrm>
+          <a:prstGeom prst="rect">
+            <a:avLst/>
+          </a:prstGeom>
+          <a:noFill/>
+        </p:spPr>
+        <p:txBody>
+          <a:bodyPr wrap="square" anchor="t" lIns="0" rIns="0" tIns="0" bIns="0">
+            <a:spAutoFit/>
+            <a:extLst>
+              <a:ext uri="{8AF73BB6-5E31-4F0F-A399-3D98F3B95FD9}">
+                <ns96:textLayout xmlns:ns96="urn:pptxdsl:text-layout:v1" role="compact"/>
+              </a:ext>
+            </a:extLst>
+          </a:bodyPr>
+          <a:lstStyle/>
+          <a:p>
+            <a:pPr algn="ctr">
+              <a:lnSpc>
+                <a:spcPct val="100000"/>
+              </a:lnSpc>
+            </a:pPr>
+            <a:r>
+              <a:rPr sz="900" b="0" lang="ja-JP">
+                <a:solidFill>
+                  <a:srgbClr val="666E70"/>
+                </a:solidFill>
+                <a:latin typeface="Yu Gothic"/>
+                <a:ea typeface="Yu Gothic"/>
+                <a:cs typeface="Yu Gothic"/>
+              </a:rPr>
+              <a:t>送信元を書き換え</a:t>
+            </a:r>
+          </a:p>
+        </p:txBody>
+      </p:sp>
+      <p:sp>
+        <p:nvSpPr>
+          <p:cNvPr id="38" name="protocol-state-flow:marker:plain"/>
+          <p:cNvSpPr/>
+          <p:nvPr/>
+        </p:nvSpPr>
+        <p:spPr>
+          <a:xfrm>
+            <a:off x="8289127" y="3135884"/>
             <a:ext cx="932688" cy="182880"/>
           </a:xfrm>
           <a:prstGeom prst="rect">
@@ -39399,13 +38517,985 @@
       </p:sp>
       <p:sp>
         <p:nvSpPr>
+          <p:cNvPr id="39" name="protocol-state-flow:value:unchanged:0:internet"/>
+          <p:cNvSpPr txBox="1"/>
+          <p:nvPr/>
+        </p:nvSpPr>
+        <p:spPr>
+          <a:xfrm>
+            <a:off x="7914863" y="3410204"/>
+            <a:ext cx="1681215" cy="167132"/>
+          </a:xfrm>
+          <a:prstGeom prst="rect">
+            <a:avLst/>
+          </a:prstGeom>
+          <a:noFill/>
+        </p:spPr>
+        <p:txBody>
+          <a:bodyPr wrap="square" anchor="t" lIns="0" rIns="0" tIns="0" bIns="0">
+            <a:spAutoFit/>
+            <a:extLst>
+              <a:ext uri="{8AF73BB6-5E31-4F0F-A399-3D98F3B95FD9}">
+                <ns101:textLayout xmlns:ns101="urn:pptxdsl:text-layout:v1" role="compact"/>
+              </a:ext>
+            </a:extLst>
+          </a:bodyPr>
+          <a:lstStyle/>
+          <a:p>
+            <a:pPr algn="ctr">
+              <a:lnSpc>
+                <a:spcPct val="100000"/>
+              </a:lnSpc>
+            </a:pPr>
+            <a:r>
+              <a:rPr sz="1100" b="1" lang="ja-JP">
+                <a:solidFill>
+                  <a:srgbClr val="182C43"/>
+                </a:solidFill>
+                <a:latin typeface="Yu Gothic"/>
+                <a:ea typeface="Yu Gothic"/>
+                <a:cs typeface="Yu Gothic"/>
+              </a:rPr>
+              <a:t>203.0.113.10</a:t>
+            </a:r>
+          </a:p>
+        </p:txBody>
+      </p:sp>
+      <p:sp>
+        <p:nvSpPr>
+          <p:cNvPr id="40" name="TextBox 39"/>
+          <p:cNvSpPr txBox="1"/>
+          <p:nvPr/>
+        </p:nvSpPr>
+        <p:spPr>
+          <a:xfrm>
+            <a:off x="7914863" y="3604768"/>
+            <a:ext cx="1681215" cy="171196"/>
+          </a:xfrm>
+          <a:prstGeom prst="rect">
+            <a:avLst/>
+          </a:prstGeom>
+          <a:noFill/>
+        </p:spPr>
+        <p:txBody>
+          <a:bodyPr wrap="square" anchor="t" lIns="0" rIns="0" tIns="0" bIns="0">
+            <a:spAutoFit/>
+            <a:extLst>
+              <a:ext uri="{8AF73BB6-5E31-4F0F-A399-3D98F3B95FD9}">
+                <ns106:textLayout xmlns:ns106="urn:pptxdsl:text-layout:v1" role="compact"/>
+              </a:ext>
+            </a:extLst>
+          </a:bodyPr>
+          <a:lstStyle/>
+          <a:p>
+            <a:pPr algn="ctr">
+              <a:lnSpc>
+                <a:spcPct val="100000"/>
+              </a:lnSpc>
+            </a:pPr>
+            <a:r>
+              <a:rPr sz="900" b="0" lang="ja-JP">
+                <a:solidFill>
+                  <a:srgbClr val="666E70"/>
+                </a:solidFill>
+                <a:latin typeface="Yu Gothic"/>
+                <a:ea typeface="Yu Gothic"/>
+                <a:cs typeface="Yu Gothic"/>
+              </a:rPr>
+              <a:t>変換後のパケット</a:t>
+            </a:r>
+          </a:p>
+        </p:txBody>
+      </p:sp>
+      <p:sp>
+        <p:nvSpPr>
+          <p:cNvPr id="41" name="protocol-state-flow:marker:plain"/>
+          <p:cNvSpPr/>
+          <p:nvPr/>
+        </p:nvSpPr>
+        <p:spPr>
+          <a:xfrm>
+            <a:off x="10299527" y="3135884"/>
+            <a:ext cx="932688" cy="182880"/>
+          </a:xfrm>
+          <a:prstGeom prst="rect">
+            <a:avLst/>
+          </a:prstGeom>
+          <a:solidFill>
+            <a:srgbClr val="F9F8F4"/>
+          </a:solidFill>
+          <a:ln w="9525">
+            <a:solidFill>
+              <a:srgbClr val="182C43"/>
+            </a:solidFill>
+          </a:ln>
+          <a:effectLst/>
+        </p:spPr>
+        <p:style>
+          <a:lnRef idx="1">
+            <a:schemeClr val="accent1"/>
+          </a:lnRef>
+          <a:fillRef idx="3">
+            <a:schemeClr val="accent1"/>
+          </a:fillRef>
+          <a:effectRef idx="2">
+            <a:schemeClr val="accent1"/>
+          </a:effectRef>
+          <a:fontRef idx="minor">
+            <a:schemeClr val="lt1"/>
+          </a:fontRef>
+        </p:style>
+        <p:txBody>
+          <a:bodyPr rtlCol="0" anchor="ctr"/>
+          <a:lstStyle/>
+          <a:p>
+            <a:pPr algn="ctr"/>
+          </a:p>
+        </p:txBody>
+      </p:sp>
+      <p:sp>
+        <p:nvSpPr>
+          <p:cNvPr id="42" name="protocol-state-flow:value:unchanged:0:server"/>
+          <p:cNvSpPr txBox="1"/>
+          <p:nvPr/>
+        </p:nvSpPr>
+        <p:spPr>
+          <a:xfrm>
+            <a:off x="9925263" y="3410204"/>
+            <a:ext cx="1681215" cy="167132"/>
+          </a:xfrm>
+          <a:prstGeom prst="rect">
+            <a:avLst/>
+          </a:prstGeom>
+          <a:noFill/>
+        </p:spPr>
+        <p:txBody>
+          <a:bodyPr wrap="square" anchor="t" lIns="0" rIns="0" tIns="0" bIns="0">
+            <a:spAutoFit/>
+            <a:extLst>
+              <a:ext uri="{8AF73BB6-5E31-4F0F-A399-3D98F3B95FD9}">
+                <ns111:textLayout xmlns:ns111="urn:pptxdsl:text-layout:v1" role="compact"/>
+              </a:ext>
+            </a:extLst>
+          </a:bodyPr>
+          <a:lstStyle/>
+          <a:p>
+            <a:pPr algn="ctr">
+              <a:lnSpc>
+                <a:spcPct val="100000"/>
+              </a:lnSpc>
+            </a:pPr>
+            <a:r>
+              <a:rPr sz="1100" b="1" lang="ja-JP">
+                <a:solidFill>
+                  <a:srgbClr val="182C43"/>
+                </a:solidFill>
+                <a:latin typeface="Yu Gothic"/>
+                <a:ea typeface="Yu Gothic"/>
+                <a:cs typeface="Yu Gothic"/>
+              </a:rPr>
+              <a:t>203.0.113.10</a:t>
+            </a:r>
+          </a:p>
+        </p:txBody>
+      </p:sp>
+      <p:sp>
+        <p:nvSpPr>
+          <p:cNvPr id="43" name="TextBox 42"/>
+          <p:cNvSpPr txBox="1"/>
+          <p:nvPr/>
+        </p:nvSpPr>
+        <p:spPr>
+          <a:xfrm>
+            <a:off x="9925263" y="3604768"/>
+            <a:ext cx="1681215" cy="171196"/>
+          </a:xfrm>
+          <a:prstGeom prst="rect">
+            <a:avLst/>
+          </a:prstGeom>
+          <a:noFill/>
+        </p:spPr>
+        <p:txBody>
+          <a:bodyPr wrap="square" anchor="t" lIns="0" rIns="0" tIns="0" bIns="0">
+            <a:spAutoFit/>
+            <a:extLst>
+              <a:ext uri="{8AF73BB6-5E31-4F0F-A399-3D98F3B95FD9}">
+                <ns116:textLayout xmlns:ns116="urn:pptxdsl:text-layout:v1" role="compact"/>
+              </a:ext>
+            </a:extLst>
+          </a:bodyPr>
+          <a:lstStyle/>
+          <a:p>
+            <a:pPr algn="ctr">
+              <a:lnSpc>
+                <a:spcPct val="100000"/>
+              </a:lnSpc>
+            </a:pPr>
+            <a:r>
+              <a:rPr sz="900" b="0" lang="ja-JP">
+                <a:solidFill>
+                  <a:srgbClr val="666E70"/>
+                </a:solidFill>
+                <a:latin typeface="Yu Gothic"/>
+                <a:ea typeface="Yu Gothic"/>
+                <a:cs typeface="Yu Gothic"/>
+              </a:rPr>
+              <a:t>外部から見える送信元</a:t>
+            </a:r>
+          </a:p>
+        </p:txBody>
+      </p:sp>
+      <p:sp>
+        <p:nvSpPr>
+          <p:cNvPr id="44" name="layout-background:protocol-state-flow:track:1"/>
+          <p:cNvSpPr/>
+          <p:nvPr/>
+        </p:nvSpPr>
+        <p:spPr>
+          <a:xfrm>
+            <a:off x="502920" y="4013708"/>
+            <a:ext cx="11185855" cy="896112"/>
+          </a:xfrm>
+          <a:prstGeom prst="rect">
+            <a:avLst/>
+          </a:prstGeom>
+          <a:solidFill>
+            <a:srgbClr val="E4E9EE"/>
+          </a:solidFill>
+          <a:ln>
+            <a:noFill/>
+          </a:ln>
+          <a:effectLst/>
+        </p:spPr>
+        <p:style>
+          <a:lnRef idx="1">
+            <a:schemeClr val="accent1"/>
+          </a:lnRef>
+          <a:fillRef idx="3">
+            <a:schemeClr val="accent1"/>
+          </a:fillRef>
+          <a:effectRef idx="2">
+            <a:schemeClr val="accent1"/>
+          </a:effectRef>
+          <a:fontRef idx="minor">
+            <a:schemeClr val="lt1"/>
+          </a:fontRef>
+        </p:style>
+        <p:txBody>
+          <a:bodyPr rtlCol="0" anchor="ctr"/>
+          <a:lstStyle/>
+          <a:p>
+            <a:pPr algn="ctr"/>
+          </a:p>
+        </p:txBody>
+      </p:sp>
+      <p:sp>
+        <p:nvSpPr>
+          <p:cNvPr id="45" name="TextBox 44"/>
+          <p:cNvSpPr txBox="1"/>
+          <p:nvPr/>
+        </p:nvSpPr>
+        <p:spPr>
+          <a:xfrm>
+            <a:off x="594360" y="4196588"/>
+            <a:ext cx="1115568" cy="177037"/>
+          </a:xfrm>
+          <a:prstGeom prst="rect">
+            <a:avLst/>
+          </a:prstGeom>
+          <a:noFill/>
+        </p:spPr>
+        <p:txBody>
+          <a:bodyPr wrap="square" anchor="t" lIns="0" rIns="0" tIns="0" bIns="0">
+            <a:spAutoFit/>
+            <a:extLst>
+              <a:ext uri="{8AF73BB6-5E31-4F0F-A399-3D98F3B95FD9}">
+                <ns121:textLayout xmlns:ns121="urn:pptxdsl:text-layout:v1" role="compact"/>
+              </a:ext>
+            </a:extLst>
+          </a:bodyPr>
+          <a:lstStyle/>
+          <a:p>
+            <a:pPr algn="l">
+              <a:lnSpc>
+                <a:spcPct val="100000"/>
+              </a:lnSpc>
+            </a:pPr>
+            <a:r>
+              <a:rPr sz="1250" b="1" lang="ja-JP">
+                <a:solidFill>
+                  <a:srgbClr val="182C43"/>
+                </a:solidFill>
+                <a:latin typeface="Yu Gothic"/>
+                <a:ea typeface="Yu Gothic"/>
+                <a:cs typeface="Yu Gothic"/>
+              </a:rPr>
+              <a:t>宛先IP</a:t>
+            </a:r>
+          </a:p>
+        </p:txBody>
+      </p:sp>
+      <p:sp>
+        <p:nvSpPr>
+          <p:cNvPr id="46" name="TextBox 45"/>
+          <p:cNvSpPr txBox="1"/>
+          <p:nvPr/>
+        </p:nvSpPr>
+        <p:spPr>
+          <a:xfrm>
+            <a:off x="594360" y="4410202"/>
+            <a:ext cx="1115568" cy="408178"/>
+          </a:xfrm>
+          <a:prstGeom prst="rect">
+            <a:avLst/>
+          </a:prstGeom>
+          <a:noFill/>
+        </p:spPr>
+        <p:txBody>
+          <a:bodyPr wrap="square" anchor="t" lIns="0" rIns="0" tIns="0" bIns="0">
+            <a:spAutoFit/>
+            <a:extLst>
+              <a:ext uri="{8AF73BB6-5E31-4F0F-A399-3D98F3B95FD9}">
+                <ns126:textLayout xmlns:ns126="urn:pptxdsl:text-layout:v1" role="compact"/>
+              </a:ext>
+            </a:extLst>
+          </a:bodyPr>
+          <a:lstStyle/>
+          <a:p>
+            <a:pPr algn="l">
+              <a:lnSpc>
+                <a:spcPct val="100000"/>
+              </a:lnSpc>
+            </a:pPr>
+            <a:r>
+              <a:rPr sz="900" b="0" lang="ja-JP">
+                <a:solidFill>
+                  <a:srgbClr val="666E70"/>
+                </a:solidFill>
+                <a:latin typeface="Yu Gothic"/>
+                <a:ea typeface="Yu Gothic"/>
+                <a:cs typeface="Yu Gothic"/>
+              </a:rPr>
+              <a:t>変化なし</a:t>
+            </a:r>
+          </a:p>
+        </p:txBody>
+      </p:sp>
+      <p:cxnSp>
+        <p:nvCxnSpPr>
+          <p:cNvPr id="47" name="Connector 46"/>
+          <p:cNvCxnSpPr/>
+          <p:nvPr/>
+        </p:nvCxnSpPr>
+        <p:spPr>
+          <a:xfrm>
+            <a:off x="3227191" y="4269740"/>
+            <a:ext cx="1004560" cy="0"/>
+          </a:xfrm>
+          <a:prstGeom prst="line">
+            <a:avLst/>
+          </a:prstGeom>
+          <a:ln w="20320">
+            <a:solidFill>
+              <a:srgbClr val="182C43"/>
+            </a:solidFill>
+            <a:tailEnd type="triangle" w="med" len="med"/>
+          </a:ln>
+          <a:effectLst/>
+        </p:spPr>
+        <p:style>
+          <a:lnRef idx="2">
+            <a:schemeClr val="accent1"/>
+          </a:lnRef>
+          <a:fillRef idx="0">
+            <a:schemeClr val="accent1"/>
+          </a:fillRef>
+          <a:effectRef idx="1">
+            <a:schemeClr val="accent1"/>
+          </a:effectRef>
+          <a:fontRef idx="minor">
+            <a:schemeClr val="tx1"/>
+          </a:fontRef>
+        </p:style>
+      </p:cxnSp>
+      <p:cxnSp>
+        <p:nvCxnSpPr>
+          <p:cNvPr id="48" name="Connector 47"/>
+          <p:cNvCxnSpPr/>
+          <p:nvPr/>
+        </p:nvCxnSpPr>
+        <p:spPr>
+          <a:xfrm>
+            <a:off x="5237591" y="4269740"/>
+            <a:ext cx="1004560" cy="0"/>
+          </a:xfrm>
+          <a:prstGeom prst="line">
+            <a:avLst/>
+          </a:prstGeom>
+          <a:ln w="20320">
+            <a:solidFill>
+              <a:srgbClr val="182C43"/>
+            </a:solidFill>
+            <a:tailEnd type="triangle" w="med" len="med"/>
+          </a:ln>
+          <a:effectLst/>
+        </p:spPr>
+        <p:style>
+          <a:lnRef idx="2">
+            <a:schemeClr val="accent1"/>
+          </a:lnRef>
+          <a:fillRef idx="0">
+            <a:schemeClr val="accent1"/>
+          </a:fillRef>
+          <a:effectRef idx="1">
+            <a:schemeClr val="accent1"/>
+          </a:effectRef>
+          <a:fontRef idx="minor">
+            <a:schemeClr val="tx1"/>
+          </a:fontRef>
+        </p:style>
+      </p:cxnSp>
+      <p:cxnSp>
+        <p:nvCxnSpPr>
+          <p:cNvPr id="49" name="Connector 48"/>
+          <p:cNvCxnSpPr/>
+          <p:nvPr/>
+        </p:nvCxnSpPr>
+        <p:spPr>
+          <a:xfrm>
+            <a:off x="7247991" y="4269740"/>
+            <a:ext cx="1004560" cy="0"/>
+          </a:xfrm>
+          <a:prstGeom prst="line">
+            <a:avLst/>
+          </a:prstGeom>
+          <a:ln w="20320">
+            <a:solidFill>
+              <a:srgbClr val="182C43"/>
+            </a:solidFill>
+            <a:tailEnd type="triangle" w="med" len="med"/>
+          </a:ln>
+          <a:effectLst/>
+        </p:spPr>
+        <p:style>
+          <a:lnRef idx="2">
+            <a:schemeClr val="accent1"/>
+          </a:lnRef>
+          <a:fillRef idx="0">
+            <a:schemeClr val="accent1"/>
+          </a:fillRef>
+          <a:effectRef idx="1">
+            <a:schemeClr val="accent1"/>
+          </a:effectRef>
+          <a:fontRef idx="minor">
+            <a:schemeClr val="tx1"/>
+          </a:fontRef>
+        </p:style>
+      </p:cxnSp>
+      <p:cxnSp>
+        <p:nvCxnSpPr>
+          <p:cNvPr id="50" name="Connector 49"/>
+          <p:cNvCxnSpPr/>
+          <p:nvPr/>
+        </p:nvCxnSpPr>
+        <p:spPr>
+          <a:xfrm>
+            <a:off x="9258391" y="4269740"/>
+            <a:ext cx="1004560" cy="0"/>
+          </a:xfrm>
+          <a:prstGeom prst="line">
+            <a:avLst/>
+          </a:prstGeom>
+          <a:ln w="20320">
+            <a:solidFill>
+              <a:srgbClr val="182C43"/>
+            </a:solidFill>
+            <a:tailEnd type="triangle" w="med" len="med"/>
+          </a:ln>
+          <a:effectLst/>
+        </p:spPr>
+        <p:style>
+          <a:lnRef idx="2">
+            <a:schemeClr val="accent1"/>
+          </a:lnRef>
+          <a:fillRef idx="0">
+            <a:schemeClr val="accent1"/>
+          </a:fillRef>
+          <a:effectRef idx="1">
+            <a:schemeClr val="accent1"/>
+          </a:effectRef>
+          <a:fontRef idx="minor">
+            <a:schemeClr val="tx1"/>
+          </a:fontRef>
+        </p:style>
+      </p:cxnSp>
+      <p:sp>
+        <p:nvSpPr>
+          <p:cNvPr id="51" name="protocol-state-flow:marker:plain"/>
+          <p:cNvSpPr/>
+          <p:nvPr/>
+        </p:nvSpPr>
+        <p:spPr>
+          <a:xfrm>
+            <a:off x="2257927" y="4178300"/>
+            <a:ext cx="932688" cy="182880"/>
+          </a:xfrm>
+          <a:prstGeom prst="rect">
+            <a:avLst/>
+          </a:prstGeom>
+          <a:solidFill>
+            <a:srgbClr val="F9F8F4"/>
+          </a:solidFill>
+          <a:ln w="9525">
+            <a:solidFill>
+              <a:srgbClr val="182C43"/>
+            </a:solidFill>
+          </a:ln>
+          <a:effectLst/>
+        </p:spPr>
+        <p:style>
+          <a:lnRef idx="1">
+            <a:schemeClr val="accent1"/>
+          </a:lnRef>
+          <a:fillRef idx="3">
+            <a:schemeClr val="accent1"/>
+          </a:fillRef>
+          <a:effectRef idx="2">
+            <a:schemeClr val="accent1"/>
+          </a:effectRef>
+          <a:fontRef idx="minor">
+            <a:schemeClr val="lt1"/>
+          </a:fontRef>
+        </p:style>
+        <p:txBody>
+          <a:bodyPr rtlCol="0" anchor="ctr"/>
+          <a:lstStyle/>
+          <a:p>
+            <a:pPr algn="ctr"/>
+          </a:p>
+        </p:txBody>
+      </p:sp>
+      <p:sp>
+        <p:nvSpPr>
+          <p:cNvPr id="52" name="protocol-state-flow:value:unchanged:1:client"/>
+          <p:cNvSpPr txBox="1"/>
+          <p:nvPr/>
+        </p:nvSpPr>
+        <p:spPr>
+          <a:xfrm>
+            <a:off x="1883664" y="4452620"/>
+            <a:ext cx="1681215" cy="167132"/>
+          </a:xfrm>
+          <a:prstGeom prst="rect">
+            <a:avLst/>
+          </a:prstGeom>
+          <a:noFill/>
+        </p:spPr>
+        <p:txBody>
+          <a:bodyPr wrap="square" anchor="t" lIns="0" rIns="0" tIns="0" bIns="0">
+            <a:spAutoFit/>
+            <a:extLst>
+              <a:ext uri="{8AF73BB6-5E31-4F0F-A399-3D98F3B95FD9}">
+                <ns135:textLayout xmlns:ns135="urn:pptxdsl:text-layout:v1" role="compact"/>
+              </a:ext>
+            </a:extLst>
+          </a:bodyPr>
+          <a:lstStyle/>
+          <a:p>
+            <a:pPr algn="ctr">
+              <a:lnSpc>
+                <a:spcPct val="100000"/>
+              </a:lnSpc>
+            </a:pPr>
+            <a:r>
+              <a:rPr sz="1100" b="1" lang="ja-JP">
+                <a:solidFill>
+                  <a:srgbClr val="182C43"/>
+                </a:solidFill>
+                <a:latin typeface="Yu Gothic"/>
+                <a:ea typeface="Yu Gothic"/>
+                <a:cs typeface="Yu Gothic"/>
+              </a:rPr>
+              <a:t>198.51.100.20</a:t>
+            </a:r>
+          </a:p>
+        </p:txBody>
+      </p:sp>
+      <p:sp>
+        <p:nvSpPr>
+          <p:cNvPr id="53" name="TextBox 52"/>
+          <p:cNvSpPr txBox="1"/>
+          <p:nvPr/>
+        </p:nvSpPr>
+        <p:spPr>
+          <a:xfrm>
+            <a:off x="1883664" y="4647184"/>
+            <a:ext cx="1681215" cy="171196"/>
+          </a:xfrm>
+          <a:prstGeom prst="rect">
+            <a:avLst/>
+          </a:prstGeom>
+          <a:noFill/>
+        </p:spPr>
+        <p:txBody>
+          <a:bodyPr wrap="square" anchor="t" lIns="0" rIns="0" tIns="0" bIns="0">
+            <a:spAutoFit/>
+            <a:extLst>
+              <a:ext uri="{8AF73BB6-5E31-4F0F-A399-3D98F3B95FD9}">
+                <ns140:textLayout xmlns:ns140="urn:pptxdsl:text-layout:v1" role="compact"/>
+              </a:ext>
+            </a:extLst>
+          </a:bodyPr>
+          <a:lstStyle/>
+          <a:p>
+            <a:pPr algn="ctr">
+              <a:lnSpc>
+                <a:spcPct val="100000"/>
+              </a:lnSpc>
+            </a:pPr>
+            <a:r>
+              <a:rPr sz="900" b="0" lang="ja-JP">
+                <a:solidFill>
+                  <a:srgbClr val="666E70"/>
+                </a:solidFill>
+                <a:latin typeface="Yu Gothic"/>
+                <a:ea typeface="Yu Gothic"/>
+                <a:cs typeface="Yu Gothic"/>
+              </a:rPr>
+              <a:t>外部サーバー</a:t>
+            </a:r>
+          </a:p>
+        </p:txBody>
+      </p:sp>
+      <p:sp>
+        <p:nvSpPr>
+          <p:cNvPr id="54" name="protocol-state-flow:marker:plain"/>
+          <p:cNvSpPr/>
+          <p:nvPr/>
+        </p:nvSpPr>
+        <p:spPr>
+          <a:xfrm>
+            <a:off x="4268327" y="4178300"/>
+            <a:ext cx="932688" cy="182880"/>
+          </a:xfrm>
+          <a:prstGeom prst="rect">
+            <a:avLst/>
+          </a:prstGeom>
+          <a:solidFill>
+            <a:srgbClr val="F9F8F4"/>
+          </a:solidFill>
+          <a:ln w="9525">
+            <a:solidFill>
+              <a:srgbClr val="182C43"/>
+            </a:solidFill>
+          </a:ln>
+          <a:effectLst/>
+        </p:spPr>
+        <p:style>
+          <a:lnRef idx="1">
+            <a:schemeClr val="accent1"/>
+          </a:lnRef>
+          <a:fillRef idx="3">
+            <a:schemeClr val="accent1"/>
+          </a:fillRef>
+          <a:effectRef idx="2">
+            <a:schemeClr val="accent1"/>
+          </a:effectRef>
+          <a:fontRef idx="minor">
+            <a:schemeClr val="lt1"/>
+          </a:fontRef>
+        </p:style>
+        <p:txBody>
+          <a:bodyPr rtlCol="0" anchor="ctr"/>
+          <a:lstStyle/>
+          <a:p>
+            <a:pPr algn="ctr"/>
+          </a:p>
+        </p:txBody>
+      </p:sp>
+      <p:sp>
+        <p:nvSpPr>
+          <p:cNvPr id="55" name="protocol-state-flow:value:unchanged:1:inside"/>
+          <p:cNvSpPr txBox="1"/>
+          <p:nvPr/>
+        </p:nvSpPr>
+        <p:spPr>
+          <a:xfrm>
+            <a:off x="3894063" y="4452620"/>
+            <a:ext cx="1681215" cy="167132"/>
+          </a:xfrm>
+          <a:prstGeom prst="rect">
+            <a:avLst/>
+          </a:prstGeom>
+          <a:noFill/>
+        </p:spPr>
+        <p:txBody>
+          <a:bodyPr wrap="square" anchor="t" lIns="0" rIns="0" tIns="0" bIns="0">
+            <a:spAutoFit/>
+            <a:extLst>
+              <a:ext uri="{8AF73BB6-5E31-4F0F-A399-3D98F3B95FD9}">
+                <ns145:textLayout xmlns:ns145="urn:pptxdsl:text-layout:v1" role="compact"/>
+              </a:ext>
+            </a:extLst>
+          </a:bodyPr>
+          <a:lstStyle/>
+          <a:p>
+            <a:pPr algn="ctr">
+              <a:lnSpc>
+                <a:spcPct val="100000"/>
+              </a:lnSpc>
+            </a:pPr>
+            <a:r>
+              <a:rPr sz="1100" b="1" lang="ja-JP">
+                <a:solidFill>
+                  <a:srgbClr val="182C43"/>
+                </a:solidFill>
+                <a:latin typeface="Yu Gothic"/>
+                <a:ea typeface="Yu Gothic"/>
+                <a:cs typeface="Yu Gothic"/>
+              </a:rPr>
+              <a:t>198.51.100.20</a:t>
+            </a:r>
+          </a:p>
+        </p:txBody>
+      </p:sp>
+      <p:sp>
+        <p:nvSpPr>
+          <p:cNvPr id="56" name="TextBox 55"/>
+          <p:cNvSpPr txBox="1"/>
+          <p:nvPr/>
+        </p:nvSpPr>
+        <p:spPr>
+          <a:xfrm>
+            <a:off x="3894063" y="4647184"/>
+            <a:ext cx="1681215" cy="171196"/>
+          </a:xfrm>
+          <a:prstGeom prst="rect">
+            <a:avLst/>
+          </a:prstGeom>
+          <a:noFill/>
+        </p:spPr>
+        <p:txBody>
+          <a:bodyPr wrap="square" anchor="t" lIns="0" rIns="0" tIns="0" bIns="0">
+            <a:spAutoFit/>
+            <a:extLst>
+              <a:ext uri="{8AF73BB6-5E31-4F0F-A399-3D98F3B95FD9}">
+                <ns150:textLayout xmlns:ns150="urn:pptxdsl:text-layout:v1" role="compact"/>
+              </a:ext>
+            </a:extLst>
+          </a:bodyPr>
+          <a:lstStyle/>
+          <a:p>
+            <a:pPr algn="ctr">
+              <a:lnSpc>
+                <a:spcPct val="100000"/>
+              </a:lnSpc>
+            </a:pPr>
+            <a:r>
+              <a:rPr sz="900" b="0" lang="ja-JP">
+                <a:solidFill>
+                  <a:srgbClr val="666E70"/>
+                </a:solidFill>
+                <a:latin typeface="Yu Gothic"/>
+                <a:ea typeface="Yu Gothic"/>
+                <a:cs typeface="Yu Gothic"/>
+              </a:rPr>
+              <a:t>宛先を維持</a:t>
+            </a:r>
+          </a:p>
+        </p:txBody>
+      </p:sp>
+      <p:sp>
+        <p:nvSpPr>
+          <p:cNvPr id="57" name="protocol-state-flow:marker:internal"/>
+          <p:cNvSpPr/>
+          <p:nvPr/>
+        </p:nvSpPr>
+        <p:spPr>
+          <a:xfrm>
+            <a:off x="6278727" y="4251452"/>
+            <a:ext cx="932688" cy="36576"/>
+          </a:xfrm>
+          <a:prstGeom prst="rect">
+            <a:avLst/>
+          </a:prstGeom>
+          <a:solidFill>
+            <a:srgbClr val="182C43"/>
+          </a:solidFill>
+          <a:ln>
+            <a:noFill/>
+          </a:ln>
+          <a:effectLst/>
+        </p:spPr>
+        <p:style>
+          <a:lnRef idx="1">
+            <a:schemeClr val="accent1"/>
+          </a:lnRef>
+          <a:fillRef idx="3">
+            <a:schemeClr val="accent1"/>
+          </a:fillRef>
+          <a:effectRef idx="2">
+            <a:schemeClr val="accent1"/>
+          </a:effectRef>
+          <a:fontRef idx="minor">
+            <a:schemeClr val="lt1"/>
+          </a:fontRef>
+        </p:style>
+        <p:txBody>
+          <a:bodyPr rtlCol="0" anchor="ctr"/>
+          <a:lstStyle/>
+          <a:p>
+            <a:pPr algn="ctr"/>
+          </a:p>
+        </p:txBody>
+      </p:sp>
+      <p:sp>
+        <p:nvSpPr>
+          <p:cNvPr id="58" name="protocol-state-flow:value:unchanged:1:nat"/>
+          <p:cNvSpPr txBox="1"/>
+          <p:nvPr/>
+        </p:nvSpPr>
+        <p:spPr>
+          <a:xfrm>
+            <a:off x="5904463" y="4452620"/>
+            <a:ext cx="1681215" cy="167132"/>
+          </a:xfrm>
+          <a:prstGeom prst="rect">
+            <a:avLst/>
+          </a:prstGeom>
+          <a:noFill/>
+        </p:spPr>
+        <p:txBody>
+          <a:bodyPr wrap="square" anchor="t" lIns="0" rIns="0" tIns="0" bIns="0">
+            <a:spAutoFit/>
+            <a:extLst>
+              <a:ext uri="{8AF73BB6-5E31-4F0F-A399-3D98F3B95FD9}">
+                <ns155:textLayout xmlns:ns155="urn:pptxdsl:text-layout:v1" role="compact"/>
+              </a:ext>
+            </a:extLst>
+          </a:bodyPr>
+          <a:lstStyle/>
+          <a:p>
+            <a:pPr algn="ctr">
+              <a:lnSpc>
+                <a:spcPct val="100000"/>
+              </a:lnSpc>
+            </a:pPr>
+            <a:r>
+              <a:rPr sz="1100" b="1" lang="ja-JP">
+                <a:solidFill>
+                  <a:srgbClr val="182C43"/>
+                </a:solidFill>
+                <a:latin typeface="Yu Gothic"/>
+                <a:ea typeface="Yu Gothic"/>
+                <a:cs typeface="Yu Gothic"/>
+              </a:rPr>
+              <a:t>198.51.100.20</a:t>
+            </a:r>
+          </a:p>
+        </p:txBody>
+      </p:sp>
+      <p:sp>
+        <p:nvSpPr>
           <p:cNvPr id="59" name="TextBox 58"/>
           <p:cNvSpPr txBox="1"/>
           <p:nvPr/>
         </p:nvSpPr>
         <p:spPr>
           <a:xfrm>
-            <a:off x="9925263" y="4123435"/>
+            <a:off x="5904463" y="4647184"/>
+            <a:ext cx="1681215" cy="171196"/>
+          </a:xfrm>
+          <a:prstGeom prst="rect">
+            <a:avLst/>
+          </a:prstGeom>
+          <a:noFill/>
+        </p:spPr>
+        <p:txBody>
+          <a:bodyPr wrap="square" anchor="t" lIns="0" rIns="0" tIns="0" bIns="0">
+            <a:spAutoFit/>
+            <a:extLst>
+              <a:ext uri="{8AF73BB6-5E31-4F0F-A399-3D98F3B95FD9}">
+                <ns160:textLayout xmlns:ns160="urn:pptxdsl:text-layout:v1" role="compact"/>
+              </a:ext>
+            </a:extLst>
+          </a:bodyPr>
+          <a:lstStyle/>
+          <a:p>
+            <a:pPr algn="ctr">
+              <a:lnSpc>
+                <a:spcPct val="100000"/>
+              </a:lnSpc>
+            </a:pPr>
+            <a:r>
+              <a:rPr sz="900" b="0" lang="ja-JP">
+                <a:solidFill>
+                  <a:srgbClr val="666E70"/>
+                </a:solidFill>
+                <a:latin typeface="Yu Gothic"/>
+                <a:ea typeface="Yu Gothic"/>
+                <a:cs typeface="Yu Gothic"/>
+              </a:rPr>
+              <a:t>宛先を維持</a:t>
+            </a:r>
+          </a:p>
+        </p:txBody>
+      </p:sp>
+      <p:sp>
+        <p:nvSpPr>
+          <p:cNvPr id="60" name="protocol-state-flow:marker:plain"/>
+          <p:cNvSpPr/>
+          <p:nvPr/>
+        </p:nvSpPr>
+        <p:spPr>
+          <a:xfrm>
+            <a:off x="8289127" y="4178300"/>
+            <a:ext cx="932688" cy="182880"/>
+          </a:xfrm>
+          <a:prstGeom prst="rect">
+            <a:avLst/>
+          </a:prstGeom>
+          <a:solidFill>
+            <a:srgbClr val="F9F8F4"/>
+          </a:solidFill>
+          <a:ln w="9525">
+            <a:solidFill>
+              <a:srgbClr val="182C43"/>
+            </a:solidFill>
+          </a:ln>
+          <a:effectLst/>
+        </p:spPr>
+        <p:style>
+          <a:lnRef idx="1">
+            <a:schemeClr val="accent1"/>
+          </a:lnRef>
+          <a:fillRef idx="3">
+            <a:schemeClr val="accent1"/>
+          </a:fillRef>
+          <a:effectRef idx="2">
+            <a:schemeClr val="accent1"/>
+          </a:effectRef>
+          <a:fontRef idx="minor">
+            <a:schemeClr val="lt1"/>
+          </a:fontRef>
+        </p:style>
+        <p:txBody>
+          <a:bodyPr rtlCol="0" anchor="ctr"/>
+          <a:lstStyle/>
+          <a:p>
+            <a:pPr algn="ctr"/>
+          </a:p>
+        </p:txBody>
+      </p:sp>
+      <p:sp>
+        <p:nvSpPr>
+          <p:cNvPr id="61" name="protocol-state-flow:value:unchanged:1:internet"/>
+          <p:cNvSpPr txBox="1"/>
+          <p:nvPr/>
+        </p:nvSpPr>
+        <p:spPr>
+          <a:xfrm>
+            <a:off x="7914863" y="4452620"/>
             <a:ext cx="1681215" cy="167132"/>
           </a:xfrm>
           <a:prstGeom prst="rect">
@@ -39418,7 +39508,7 @@
             <a:spAutoFit/>
             <a:extLst>
               <a:ext uri="{8AF73BB6-5E31-4F0F-A399-3D98F3B95FD9}">
-                <ns160:textLayout xmlns:ns160="urn:pptxdsl:text-layout:v1" role="compact"/>
+                <ns165:textLayout xmlns:ns165="urn:pptxdsl:text-layout:v1" role="compact"/>
               </a:ext>
             </a:extLst>
           </a:bodyPr>
@@ -39445,14 +39535,14 @@
       </p:sp>
       <p:sp>
         <p:nvSpPr>
-          <p:cNvPr id="60" name="TextBox 59"/>
-          <p:cNvSpPr txBox="1"/>
-          <p:nvPr/>
-        </p:nvSpPr>
-        <p:spPr>
-          <a:xfrm>
-            <a:off x="9925263" y="4318000"/>
-            <a:ext cx="1681215" cy="171195"/>
+          <p:cNvPr id="62" name="TextBox 61"/>
+          <p:cNvSpPr txBox="1"/>
+          <p:nvPr/>
+        </p:nvSpPr>
+        <p:spPr>
+          <a:xfrm>
+            <a:off x="7914863" y="4647184"/>
+            <a:ext cx="1681215" cy="171196"/>
           </a:xfrm>
           <a:prstGeom prst="rect">
             <a:avLst/>
@@ -39464,7 +39554,7 @@
             <a:spAutoFit/>
             <a:extLst>
               <a:ext uri="{8AF73BB6-5E31-4F0F-A399-3D98F3B95FD9}">
-                <ns165:textLayout xmlns:ns165="urn:pptxdsl:text-layout:v1" role="compact"/>
+                <ns170:textLayout xmlns:ns170="urn:pptxdsl:text-layout:v1" role="compact"/>
               </a:ext>
             </a:extLst>
           </a:bodyPr>
@@ -39484,6 +39574,144 @@
                 <a:ea typeface="Yu Gothic"/>
                 <a:cs typeface="Yu Gothic"/>
               </a:rPr>
+              <a:t>外部へ転送</a:t>
+            </a:r>
+          </a:p>
+        </p:txBody>
+      </p:sp>
+      <p:sp>
+        <p:nvSpPr>
+          <p:cNvPr id="63" name="protocol-state-flow:marker:plain"/>
+          <p:cNvSpPr/>
+          <p:nvPr/>
+        </p:nvSpPr>
+        <p:spPr>
+          <a:xfrm>
+            <a:off x="10299527" y="4178300"/>
+            <a:ext cx="932688" cy="182880"/>
+          </a:xfrm>
+          <a:prstGeom prst="rect">
+            <a:avLst/>
+          </a:prstGeom>
+          <a:solidFill>
+            <a:srgbClr val="F9F8F4"/>
+          </a:solidFill>
+          <a:ln w="9525">
+            <a:solidFill>
+              <a:srgbClr val="182C43"/>
+            </a:solidFill>
+          </a:ln>
+          <a:effectLst/>
+        </p:spPr>
+        <p:style>
+          <a:lnRef idx="1">
+            <a:schemeClr val="accent1"/>
+          </a:lnRef>
+          <a:fillRef idx="3">
+            <a:schemeClr val="accent1"/>
+          </a:fillRef>
+          <a:effectRef idx="2">
+            <a:schemeClr val="accent1"/>
+          </a:effectRef>
+          <a:fontRef idx="minor">
+            <a:schemeClr val="lt1"/>
+          </a:fontRef>
+        </p:style>
+        <p:txBody>
+          <a:bodyPr rtlCol="0" anchor="ctr"/>
+          <a:lstStyle/>
+          <a:p>
+            <a:pPr algn="ctr"/>
+          </a:p>
+        </p:txBody>
+      </p:sp>
+      <p:sp>
+        <p:nvSpPr>
+          <p:cNvPr id="64" name="protocol-state-flow:value:unchanged:1:server"/>
+          <p:cNvSpPr txBox="1"/>
+          <p:nvPr/>
+        </p:nvSpPr>
+        <p:spPr>
+          <a:xfrm>
+            <a:off x="9925263" y="4452620"/>
+            <a:ext cx="1681215" cy="167132"/>
+          </a:xfrm>
+          <a:prstGeom prst="rect">
+            <a:avLst/>
+          </a:prstGeom>
+          <a:noFill/>
+        </p:spPr>
+        <p:txBody>
+          <a:bodyPr wrap="square" anchor="t" lIns="0" rIns="0" tIns="0" bIns="0">
+            <a:spAutoFit/>
+            <a:extLst>
+              <a:ext uri="{8AF73BB6-5E31-4F0F-A399-3D98F3B95FD9}">
+                <ns175:textLayout xmlns:ns175="urn:pptxdsl:text-layout:v1" role="compact"/>
+              </a:ext>
+            </a:extLst>
+          </a:bodyPr>
+          <a:lstStyle/>
+          <a:p>
+            <a:pPr algn="ctr">
+              <a:lnSpc>
+                <a:spcPct val="100000"/>
+              </a:lnSpc>
+            </a:pPr>
+            <a:r>
+              <a:rPr sz="1100" b="1" lang="ja-JP">
+                <a:solidFill>
+                  <a:srgbClr val="182C43"/>
+                </a:solidFill>
+                <a:latin typeface="Yu Gothic"/>
+                <a:ea typeface="Yu Gothic"/>
+                <a:cs typeface="Yu Gothic"/>
+              </a:rPr>
+              <a:t>198.51.100.20</a:t>
+            </a:r>
+          </a:p>
+        </p:txBody>
+      </p:sp>
+      <p:sp>
+        <p:nvSpPr>
+          <p:cNvPr id="65" name="TextBox 64"/>
+          <p:cNvSpPr txBox="1"/>
+          <p:nvPr/>
+        </p:nvSpPr>
+        <p:spPr>
+          <a:xfrm>
+            <a:off x="9925263" y="4647184"/>
+            <a:ext cx="1681215" cy="171196"/>
+          </a:xfrm>
+          <a:prstGeom prst="rect">
+            <a:avLst/>
+          </a:prstGeom>
+          <a:noFill/>
+        </p:spPr>
+        <p:txBody>
+          <a:bodyPr wrap="square" anchor="t" lIns="0" rIns="0" tIns="0" bIns="0">
+            <a:spAutoFit/>
+            <a:extLst>
+              <a:ext uri="{8AF73BB6-5E31-4F0F-A399-3D98F3B95FD9}">
+                <ns180:textLayout xmlns:ns180="urn:pptxdsl:text-layout:v1" role="compact"/>
+              </a:ext>
+            </a:extLst>
+          </a:bodyPr>
+          <a:lstStyle/>
+          <a:p>
+            <a:pPr algn="ctr">
+              <a:lnSpc>
+                <a:spcPct val="100000"/>
+              </a:lnSpc>
+            </a:pPr>
+            <a:r>
+              <a:rPr sz="900" b="0" lang="ja-JP">
+                <a:solidFill>
+                  <a:srgbClr val="666E70"/>
+                </a:solidFill>
+                <a:latin typeface="Yu Gothic"/>
+                <a:ea typeface="Yu Gothic"/>
+                <a:cs typeface="Yu Gothic"/>
+              </a:rPr>
               <a:t>自分宛てとして受信</a:t>
             </a:r>
           </a:p>
@@ -39491,7 +39719,7 @@
       </p:sp>
       <p:sp>
         <p:nvSpPr>
-          <p:cNvPr id="61" name="Rectangle 60"/>
+          <p:cNvPr id="66" name="Rectangle 65"/>
           <p:cNvSpPr/>
           <p:nvPr/>
         </p:nvSpPr>
@@ -39535,7 +39763,7 @@
       </p:sp>
       <p:sp>
         <p:nvSpPr>
-          <p:cNvPr id="62" name="TextBox 61"/>
+          <p:cNvPr id="67" name="TextBox 66"/>
           <p:cNvSpPr txBox="1"/>
           <p:nvPr/>
         </p:nvSpPr>
@@ -39554,7 +39782,7 @@
             <a:spAutoFit/>
             <a:extLst>
               <a:ext uri="{8AF73BB6-5E31-4F0F-A399-3D98F3B95FD9}">
-                <ns170:textLayout xmlns:ns170="urn:pptxdsl:text-layout:v1" role="body"/>
+                <ns185:textLayout xmlns:ns185="urn:pptxdsl:text-layout:v1" role="body"/>
               </a:ext>
             </a:extLst>
           </a:bodyPr>
@@ -39581,7 +39809,7 @@
       </p:sp>
       <p:sp>
         <p:nvSpPr>
-          <p:cNvPr id="63" name="TextBox 62"/>
+          <p:cNvPr id="68" name="TextBox 67"/>
           <p:cNvSpPr txBox="1"/>
           <p:nvPr/>
         </p:nvSpPr>
@@ -39600,7 +39828,7 @@
             <a:spAutoFit/>
             <a:extLst>
               <a:ext uri="{8AF73BB6-5E31-4F0F-A399-3D98F3B95FD9}">
-                <ns175:textLayout xmlns:ns175="urn:pptxdsl:text-layout:v1" role="body"/>
+                <ns190:textLayout xmlns:ns190="urn:pptxdsl:text-layout:v1" role="body"/>
               </a:ext>
             </a:extLst>
           </a:bodyPr>
@@ -39838,7 +40066,53 @@
       </p:sp>
       <p:sp>
         <p:nvSpPr>
-          <p:cNvPr id="6" name="TextBox 5"/>
+          <p:cNvPr id="6" name="protocol-anatomy:scale-note"/>
+          <p:cNvSpPr txBox="1"/>
+          <p:nvPr/>
+        </p:nvSpPr>
+        <p:spPr>
+          <a:xfrm>
+            <a:off x="502920" y="1855724"/>
+            <a:ext cx="11185855" cy="201168"/>
+          </a:xfrm>
+          <a:prstGeom prst="rect">
+            <a:avLst/>
+          </a:prstGeom>
+          <a:noFill/>
+        </p:spPr>
+        <p:txBody>
+          <a:bodyPr wrap="none" anchor="t" lIns="0" rIns="0" tIns="0" bIns="0">
+            <a:spAutoFit/>
+            <a:extLst>
+              <a:ext uri="{8AF73BB6-5E31-4F0F-A399-3D98F3B95FD9}">
+                <ns17:textLayout xmlns:ns17="urn:pptxdsl:text-layout:v1" role="compact"/>
+              </a:ext>
+            </a:extLst>
+          </a:bodyPr>
+          <a:lstStyle/>
+          <a:p>
+            <a:pPr algn="l">
+              <a:lnSpc>
+                <a:spcPct val="100000"/>
+              </a:lnSpc>
+            </a:pPr>
+            <a:r>
+              <a:rPr sz="900" b="0" lang="ja-JP">
+                <a:solidFill>
+                  <a:srgbClr val="202729"/>
+                </a:solidFill>
+                <a:latin typeface="Yu Gothic"/>
+                <a:ea typeface="Yu Gothic"/>
+                <a:cs typeface="Yu Gothic"/>
+              </a:rPr>
+              <a:t>幅はbit数に比例しない概念図</a:t>
+            </a:r>
+          </a:p>
+        </p:txBody>
+      </p:sp>
+      <p:sp>
+        <p:nvSpPr>
+          <p:cNvPr id="7" name="TextBox 6"/>
           <p:cNvSpPr txBox="1"/>
           <p:nvPr/>
         </p:nvSpPr>
@@ -39857,7 +40131,7 @@
             <a:spAutoFit/>
             <a:extLst>
               <a:ext uri="{8AF73BB6-5E31-4F0F-A399-3D98F3B95FD9}">
-                <ns17:textLayout xmlns:ns17="urn:pptxdsl:text-layout:v1" role="natural"/>
+                <ns22:textLayout xmlns:ns22="urn:pptxdsl:text-layout:v1" role="natural"/>
               </a:ext>
             </a:extLst>
           </a:bodyPr>
@@ -39884,7 +40158,7 @@
       </p:sp>
       <p:sp>
         <p:nvSpPr>
-          <p:cNvPr id="7" name="Rectangle 6"/>
+          <p:cNvPr id="8" name="Rectangle 7"/>
           <p:cNvSpPr/>
           <p:nvPr/>
         </p:nvSpPr>
@@ -39930,7 +40204,7 @@
       </p:sp>
       <p:sp>
         <p:nvSpPr>
-          <p:cNvPr id="8" name="TextBox 7"/>
+          <p:cNvPr id="9" name="TextBox 8"/>
           <p:cNvSpPr txBox="1"/>
           <p:nvPr/>
         </p:nvSpPr>
@@ -39949,7 +40223,7 @@
             <a:spAutoFit/>
             <a:extLst>
               <a:ext uri="{8AF73BB6-5E31-4F0F-A399-3D98F3B95FD9}">
-                <ns22:textLayout xmlns:ns22="urn:pptxdsl:text-layout:v1" role="compact"/>
+                <ns27:textLayout xmlns:ns27="urn:pptxdsl:text-layout:v1" role="compact"/>
               </a:ext>
             </a:extLst>
           </a:bodyPr>
@@ -39976,7 +40250,7 @@
       </p:sp>
       <p:sp>
         <p:nvSpPr>
-          <p:cNvPr id="9" name="TextBox 8"/>
+          <p:cNvPr id="10" name="TextBox 9"/>
           <p:cNvSpPr txBox="1"/>
           <p:nvPr/>
         </p:nvSpPr>
@@ -39995,7 +40269,7 @@
             <a:spAutoFit/>
             <a:extLst>
               <a:ext uri="{8AF73BB6-5E31-4F0F-A399-3D98F3B95FD9}">
-                <ns27:textLayout xmlns:ns27="urn:pptxdsl:text-layout:v1" role="body"/>
+                <ns32:textLayout xmlns:ns32="urn:pptxdsl:text-layout:v1" role="body"/>
               </a:ext>
             </a:extLst>
           </a:bodyPr>
@@ -40022,7 +40296,7 @@
       </p:sp>
       <p:sp>
         <p:nvSpPr>
-          <p:cNvPr id="10" name="Rectangle 9"/>
+          <p:cNvPr id="11" name="Rectangle 10"/>
           <p:cNvSpPr/>
           <p:nvPr/>
         </p:nvSpPr>
@@ -40068,7 +40342,7 @@
       </p:sp>
       <p:sp>
         <p:nvSpPr>
-          <p:cNvPr id="11" name="TextBox 10"/>
+          <p:cNvPr id="12" name="TextBox 11"/>
           <p:cNvSpPr txBox="1"/>
           <p:nvPr/>
         </p:nvSpPr>
@@ -40087,7 +40361,7 @@
             <a:spAutoFit/>
             <a:extLst>
               <a:ext uri="{8AF73BB6-5E31-4F0F-A399-3D98F3B95FD9}">
-                <ns32:textLayout xmlns:ns32="urn:pptxdsl:text-layout:v1" role="compact"/>
+                <ns37:textLayout xmlns:ns37="urn:pptxdsl:text-layout:v1" role="compact"/>
               </a:ext>
             </a:extLst>
           </a:bodyPr>
@@ -40114,7 +40388,7 @@
       </p:sp>
       <p:sp>
         <p:nvSpPr>
-          <p:cNvPr id="12" name="TextBox 11"/>
+          <p:cNvPr id="13" name="TextBox 12"/>
           <p:cNvSpPr txBox="1"/>
           <p:nvPr/>
         </p:nvSpPr>
@@ -40133,7 +40407,7 @@
             <a:spAutoFit/>
             <a:extLst>
               <a:ext uri="{8AF73BB6-5E31-4F0F-A399-3D98F3B95FD9}">
-                <ns37:textLayout xmlns:ns37="urn:pptxdsl:text-layout:v1" role="body"/>
+                <ns42:textLayout xmlns:ns42="urn:pptxdsl:text-layout:v1" role="body"/>
               </a:ext>
             </a:extLst>
           </a:bodyPr>
@@ -40160,7 +40434,7 @@
       </p:sp>
       <p:sp>
         <p:nvSpPr>
-          <p:cNvPr id="13" name="Rectangle 12"/>
+          <p:cNvPr id="14" name="Rectangle 13"/>
           <p:cNvSpPr/>
           <p:nvPr/>
         </p:nvSpPr>
@@ -40206,7 +40480,7 @@
       </p:sp>
       <p:sp>
         <p:nvSpPr>
-          <p:cNvPr id="14" name="TextBox 13"/>
+          <p:cNvPr id="15" name="TextBox 14"/>
           <p:cNvSpPr txBox="1"/>
           <p:nvPr/>
         </p:nvSpPr>
@@ -40225,7 +40499,7 @@
             <a:spAutoFit/>
             <a:extLst>
               <a:ext uri="{8AF73BB6-5E31-4F0F-A399-3D98F3B95FD9}">
-                <ns42:textLayout xmlns:ns42="urn:pptxdsl:text-layout:v1" role="compact"/>
+                <ns47:textLayout xmlns:ns47="urn:pptxdsl:text-layout:v1" role="compact"/>
               </a:ext>
             </a:extLst>
           </a:bodyPr>
@@ -40252,7 +40526,7 @@
       </p:sp>
       <p:sp>
         <p:nvSpPr>
-          <p:cNvPr id="15" name="TextBox 14"/>
+          <p:cNvPr id="16" name="TextBox 15"/>
           <p:cNvSpPr txBox="1"/>
           <p:nvPr/>
         </p:nvSpPr>
@@ -40271,7 +40545,7 @@
             <a:spAutoFit/>
             <a:extLst>
               <a:ext uri="{8AF73BB6-5E31-4F0F-A399-3D98F3B95FD9}">
-                <ns47:textLayout xmlns:ns47="urn:pptxdsl:text-layout:v1" role="body"/>
+                <ns52:textLayout xmlns:ns52="urn:pptxdsl:text-layout:v1" role="body"/>
               </a:ext>
             </a:extLst>
           </a:bodyPr>
@@ -40298,7 +40572,7 @@
       </p:sp>
       <p:sp>
         <p:nvSpPr>
-          <p:cNvPr id="16" name="Rectangle 15"/>
+          <p:cNvPr id="17" name="Rectangle 16"/>
           <p:cNvSpPr/>
           <p:nvPr/>
         </p:nvSpPr>
@@ -40344,7 +40618,7 @@
       </p:sp>
       <p:sp>
         <p:nvSpPr>
-          <p:cNvPr id="17" name="TextBox 16"/>
+          <p:cNvPr id="18" name="TextBox 17"/>
           <p:cNvSpPr txBox="1"/>
           <p:nvPr/>
         </p:nvSpPr>
@@ -40363,7 +40637,7 @@
             <a:spAutoFit/>
             <a:extLst>
               <a:ext uri="{8AF73BB6-5E31-4F0F-A399-3D98F3B95FD9}">
-                <ns52:textLayout xmlns:ns52="urn:pptxdsl:text-layout:v1" role="compact"/>
+                <ns57:textLayout xmlns:ns57="urn:pptxdsl:text-layout:v1" role="compact"/>
               </a:ext>
             </a:extLst>
           </a:bodyPr>
@@ -40390,7 +40664,7 @@
       </p:sp>
       <p:sp>
         <p:nvSpPr>
-          <p:cNvPr id="18" name="TextBox 17"/>
+          <p:cNvPr id="19" name="TextBox 18"/>
           <p:cNvSpPr txBox="1"/>
           <p:nvPr/>
         </p:nvSpPr>
@@ -40409,7 +40683,7 @@
             <a:spAutoFit/>
             <a:extLst>
               <a:ext uri="{8AF73BB6-5E31-4F0F-A399-3D98F3B95FD9}">
-                <ns57:textLayout xmlns:ns57="urn:pptxdsl:text-layout:v1" role="body"/>
+                <ns62:textLayout xmlns:ns62="urn:pptxdsl:text-layout:v1" role="body"/>
               </a:ext>
             </a:extLst>
           </a:bodyPr>
@@ -40436,7 +40710,7 @@
       </p:sp>
       <p:sp>
         <p:nvSpPr>
-          <p:cNvPr id="19" name="Rectangle 18"/>
+          <p:cNvPr id="20" name="Rectangle 19"/>
           <p:cNvSpPr/>
           <p:nvPr/>
         </p:nvSpPr>
@@ -40482,7 +40756,7 @@
       </p:sp>
       <p:sp>
         <p:nvSpPr>
-          <p:cNvPr id="20" name="TextBox 19"/>
+          <p:cNvPr id="21" name="TextBox 20"/>
           <p:cNvSpPr txBox="1"/>
           <p:nvPr/>
         </p:nvSpPr>
@@ -40501,7 +40775,7 @@
             <a:spAutoFit/>
             <a:extLst>
               <a:ext uri="{8AF73BB6-5E31-4F0F-A399-3D98F3B95FD9}">
-                <ns62:textLayout xmlns:ns62="urn:pptxdsl:text-layout:v1" role="compact"/>
+                <ns67:textLayout xmlns:ns67="urn:pptxdsl:text-layout:v1" role="compact"/>
               </a:ext>
             </a:extLst>
           </a:bodyPr>
@@ -40528,7 +40802,7 @@
       </p:sp>
       <p:sp>
         <p:nvSpPr>
-          <p:cNvPr id="21" name="TextBox 20"/>
+          <p:cNvPr id="22" name="TextBox 21"/>
           <p:cNvSpPr txBox="1"/>
           <p:nvPr/>
         </p:nvSpPr>
@@ -40547,7 +40821,7 @@
             <a:spAutoFit/>
             <a:extLst>
               <a:ext uri="{8AF73BB6-5E31-4F0F-A399-3D98F3B95FD9}">
-                <ns67:textLayout xmlns:ns67="urn:pptxdsl:text-layout:v1" role="body"/>
+                <ns72:textLayout xmlns:ns72="urn:pptxdsl:text-layout:v1" role="body"/>
               </a:ext>
             </a:extLst>
           </a:bodyPr>
@@ -40574,7 +40848,7 @@
       </p:sp>
       <p:sp>
         <p:nvSpPr>
-          <p:cNvPr id="22" name="Rectangle 21"/>
+          <p:cNvPr id="23" name="Rectangle 22"/>
           <p:cNvSpPr/>
           <p:nvPr/>
         </p:nvSpPr>
@@ -40620,7 +40894,7 @@
       </p:sp>
       <p:sp>
         <p:nvSpPr>
-          <p:cNvPr id="23" name="TextBox 22"/>
+          <p:cNvPr id="24" name="TextBox 23"/>
           <p:cNvSpPr txBox="1"/>
           <p:nvPr/>
         </p:nvSpPr>
@@ -40639,7 +40913,7 @@
             <a:spAutoFit/>
             <a:extLst>
               <a:ext uri="{8AF73BB6-5E31-4F0F-A399-3D98F3B95FD9}">
-                <ns72:textLayout xmlns:ns72="urn:pptxdsl:text-layout:v1" role="compact"/>
+                <ns77:textLayout xmlns:ns77="urn:pptxdsl:text-layout:v1" role="compact"/>
               </a:ext>
             </a:extLst>
           </a:bodyPr>
@@ -40666,7 +40940,7 @@
       </p:sp>
       <p:sp>
         <p:nvSpPr>
-          <p:cNvPr id="24" name="TextBox 23"/>
+          <p:cNvPr id="25" name="TextBox 24"/>
           <p:cNvSpPr txBox="1"/>
           <p:nvPr/>
         </p:nvSpPr>
@@ -40685,7 +40959,7 @@
             <a:spAutoFit/>
             <a:extLst>
               <a:ext uri="{8AF73BB6-5E31-4F0F-A399-3D98F3B95FD9}">
-                <ns77:textLayout xmlns:ns77="urn:pptxdsl:text-layout:v1" role="body"/>
+                <ns82:textLayout xmlns:ns82="urn:pptxdsl:text-layout:v1" role="body"/>
               </a:ext>
             </a:extLst>
           </a:bodyPr>
@@ -40712,7 +40986,7 @@
       </p:sp>
       <p:sp>
         <p:nvSpPr>
-          <p:cNvPr id="25" name="Rectangle 24"/>
+          <p:cNvPr id="26" name="Rectangle 25"/>
           <p:cNvSpPr/>
           <p:nvPr/>
         </p:nvSpPr>
@@ -40758,7 +41032,7 @@
       </p:sp>
       <p:sp>
         <p:nvSpPr>
-          <p:cNvPr id="26" name="TextBox 25"/>
+          <p:cNvPr id="27" name="TextBox 26"/>
           <p:cNvSpPr txBox="1"/>
           <p:nvPr/>
         </p:nvSpPr>
@@ -40777,7 +41051,7 @@
             <a:spAutoFit/>
             <a:extLst>
               <a:ext uri="{8AF73BB6-5E31-4F0F-A399-3D98F3B95FD9}">
-                <ns82:textLayout xmlns:ns82="urn:pptxdsl:text-layout:v1" role="compact"/>
+                <ns87:textLayout xmlns:ns87="urn:pptxdsl:text-layout:v1" role="compact"/>
               </a:ext>
             </a:extLst>
           </a:bodyPr>
@@ -40804,7 +41078,7 @@
       </p:sp>
       <p:sp>
         <p:nvSpPr>
-          <p:cNvPr id="27" name="TextBox 26"/>
+          <p:cNvPr id="28" name="TextBox 27"/>
           <p:cNvSpPr txBox="1"/>
           <p:nvPr/>
         </p:nvSpPr>
@@ -40823,7 +41097,7 @@
             <a:spAutoFit/>
             <a:extLst>
               <a:ext uri="{8AF73BB6-5E31-4F0F-A399-3D98F3B95FD9}">
-                <ns87:textLayout xmlns:ns87="urn:pptxdsl:text-layout:v1" role="body"/>
+                <ns92:textLayout xmlns:ns92="urn:pptxdsl:text-layout:v1" role="body"/>
               </a:ext>
             </a:extLst>
           </a:bodyPr>
@@ -40850,21 +41124,21 @@
       </p:sp>
       <p:cxnSp>
         <p:nvCxnSpPr>
-          <p:cNvPr id="28" name="Connector 27"/>
+          <p:cNvPr id="29" name="protocol-anatomy:annotation:0:seq"/>
           <p:cNvCxnSpPr/>
           <p:nvPr/>
         </p:nvCxnSpPr>
         <p:spPr>
           <a:xfrm flipH="1">
             <a:off x="685800" y="2971292"/>
-            <a:ext cx="3392081" cy="182879"/>
+            <a:ext cx="3392081" cy="54864"/>
           </a:xfrm>
           <a:prstGeom prst="line">
             <a:avLst/>
           </a:prstGeom>
-          <a:ln w="10160">
+          <a:ln w="13970">
             <a:solidFill>
-              <a:srgbClr val="D1CFC8"/>
+              <a:srgbClr val="666E70"/>
             </a:solidFill>
           </a:ln>
           <a:effectLst/>
@@ -40886,14 +41160,14 @@
       </p:cxnSp>
       <p:sp>
         <p:nvSpPr>
-          <p:cNvPr id="29" name="TextBox 28"/>
-          <p:cNvSpPr txBox="1"/>
-          <p:nvPr/>
-        </p:nvSpPr>
-        <p:spPr>
-          <a:xfrm>
-            <a:off x="502920" y="3209035"/>
-            <a:ext cx="566928" cy="201168"/>
+          <p:cNvPr id="30" name="TextBox 29"/>
+          <p:cNvSpPr txBox="1"/>
+          <p:nvPr/>
+        </p:nvSpPr>
+        <p:spPr>
+          <a:xfrm>
+            <a:off x="502920" y="3081020"/>
+            <a:ext cx="608075" cy="438912"/>
           </a:xfrm>
           <a:prstGeom prst="rect">
             <a:avLst/>
@@ -40901,11 +41175,11 @@
           <a:noFill/>
         </p:spPr>
         <p:txBody>
-          <a:bodyPr wrap="square" anchor="t" lIns="0" rIns="0" tIns="0" bIns="0">
-            <a:spAutoFit/>
-            <a:extLst>
-              <a:ext uri="{8AF73BB6-5E31-4F0F-A399-3D98F3B95FD9}">
-                <ns92:textLayout xmlns:ns92="urn:pptxdsl:text-layout:v1" role="natural"/>
+          <a:bodyPr wrap="none" anchor="t" lIns="0" rIns="0" tIns="0" bIns="0">
+            <a:spAutoFit/>
+            <a:extLst>
+              <a:ext uri="{8AF73BB6-5E31-4F0F-A399-3D98F3B95FD9}">
+                <ns97:textLayout xmlns:ns97="urn:pptxdsl:text-layout:v1" role="compact"/>
               </a:ext>
             </a:extLst>
           </a:bodyPr>
@@ -40913,7 +41187,7 @@
           <a:p>
             <a:pPr algn="l">
               <a:lnSpc>
-                <a:spcPct val="130000"/>
+                <a:spcPct val="108000"/>
               </a:lnSpc>
             </a:pPr>
             <a:r>
@@ -40932,14 +41206,14 @@
       </p:sp>
       <p:sp>
         <p:nvSpPr>
-          <p:cNvPr id="30" name="TextBox 29"/>
-          <p:cNvSpPr txBox="1"/>
-          <p:nvPr/>
-        </p:nvSpPr>
-        <p:spPr>
-          <a:xfrm>
-            <a:off x="1124712" y="3209035"/>
-            <a:ext cx="2972714" cy="438912"/>
+          <p:cNvPr id="31" name="TextBox 30"/>
+          <p:cNvSpPr txBox="1"/>
+          <p:nvPr/>
+        </p:nvSpPr>
+        <p:spPr>
+          <a:xfrm>
+            <a:off x="1165860" y="3081020"/>
+            <a:ext cx="2931566" cy="438912"/>
           </a:xfrm>
           <a:prstGeom prst="rect">
             <a:avLst/>
@@ -40947,11 +41221,11 @@
           <a:noFill/>
         </p:spPr>
         <p:txBody>
-          <a:bodyPr wrap="square" anchor="t" lIns="0" rIns="0" tIns="0" bIns="0">
-            <a:spAutoFit/>
-            <a:extLst>
-              <a:ext uri="{8AF73BB6-5E31-4F0F-A399-3D98F3B95FD9}">
-                <ns97:textLayout xmlns:ns97="urn:pptxdsl:text-layout:v1" role="compact"/>
+          <a:bodyPr wrap="none" anchor="t" lIns="0" rIns="0" tIns="0" bIns="0">
+            <a:spAutoFit/>
+            <a:extLst>
+              <a:ext uri="{8AF73BB6-5E31-4F0F-A399-3D98F3B95FD9}">
+                <ns102:textLayout xmlns:ns102="urn:pptxdsl:text-layout:v1" role="compact"/>
               </a:ext>
             </a:extLst>
           </a:bodyPr>
@@ -40978,21 +41252,21 @@
       </p:sp>
       <p:cxnSp>
         <p:nvCxnSpPr>
-          <p:cNvPr id="31" name="Connector 30"/>
+          <p:cNvPr id="32" name="protocol-anatomy:annotation:0:ack"/>
           <p:cNvCxnSpPr/>
           <p:nvPr/>
         </p:nvCxnSpPr>
         <p:spPr>
           <a:xfrm flipH="1">
             <a:off x="4481474" y="2971292"/>
-            <a:ext cx="702145" cy="182879"/>
+            <a:ext cx="702145" cy="54864"/>
           </a:xfrm>
           <a:prstGeom prst="line">
             <a:avLst/>
           </a:prstGeom>
-          <a:ln w="10160">
+          <a:ln w="13970">
             <a:solidFill>
-              <a:srgbClr val="D1CFC8"/>
+              <a:srgbClr val="666E70"/>
             </a:solidFill>
           </a:ln>
           <a:effectLst/>
@@ -41014,14 +41288,14 @@
       </p:cxnSp>
       <p:sp>
         <p:nvSpPr>
-          <p:cNvPr id="32" name="TextBox 31"/>
-          <p:cNvSpPr txBox="1"/>
-          <p:nvPr/>
-        </p:nvSpPr>
-        <p:spPr>
-          <a:xfrm>
-            <a:off x="4298594" y="3209035"/>
-            <a:ext cx="384048" cy="201168"/>
+          <p:cNvPr id="33" name="TextBox 32"/>
+          <p:cNvSpPr txBox="1"/>
+          <p:nvPr/>
+        </p:nvSpPr>
+        <p:spPr>
+          <a:xfrm>
+            <a:off x="4298594" y="3081020"/>
+            <a:ext cx="384048" cy="438912"/>
           </a:xfrm>
           <a:prstGeom prst="rect">
             <a:avLst/>
@@ -41029,11 +41303,11 @@
           <a:noFill/>
         </p:spPr>
         <p:txBody>
-          <a:bodyPr wrap="square" anchor="t" lIns="0" rIns="0" tIns="0" bIns="0">
-            <a:spAutoFit/>
-            <a:extLst>
-              <a:ext uri="{8AF73BB6-5E31-4F0F-A399-3D98F3B95FD9}">
-                <ns102:textLayout xmlns:ns102="urn:pptxdsl:text-layout:v1" role="natural"/>
+          <a:bodyPr wrap="none" anchor="t" lIns="0" rIns="0" tIns="0" bIns="0">
+            <a:spAutoFit/>
+            <a:extLst>
+              <a:ext uri="{8AF73BB6-5E31-4F0F-A399-3D98F3B95FD9}">
+                <ns107:textLayout xmlns:ns107="urn:pptxdsl:text-layout:v1" role="compact"/>
               </a:ext>
             </a:extLst>
           </a:bodyPr>
@@ -41041,7 +41315,7 @@
           <a:p>
             <a:pPr algn="l">
               <a:lnSpc>
-                <a:spcPct val="130000"/>
+                <a:spcPct val="108000"/>
               </a:lnSpc>
             </a:pPr>
             <a:r>
@@ -41060,13 +41334,13 @@
       </p:sp>
       <p:sp>
         <p:nvSpPr>
-          <p:cNvPr id="33" name="TextBox 32"/>
-          <p:cNvSpPr txBox="1"/>
-          <p:nvPr/>
-        </p:nvSpPr>
-        <p:spPr>
-          <a:xfrm>
-            <a:off x="4737506" y="3209035"/>
+          <p:cNvPr id="34" name="TextBox 33"/>
+          <p:cNvSpPr txBox="1"/>
+          <p:nvPr/>
+        </p:nvSpPr>
+        <p:spPr>
+          <a:xfrm>
+            <a:off x="4737506" y="3081020"/>
             <a:ext cx="3155594" cy="438912"/>
           </a:xfrm>
           <a:prstGeom prst="rect">
@@ -41075,11 +41349,11 @@
           <a:noFill/>
         </p:spPr>
         <p:txBody>
-          <a:bodyPr wrap="square" anchor="t" lIns="0" rIns="0" tIns="0" bIns="0">
-            <a:spAutoFit/>
-            <a:extLst>
-              <a:ext uri="{8AF73BB6-5E31-4F0F-A399-3D98F3B95FD9}">
-                <ns107:textLayout xmlns:ns107="urn:pptxdsl:text-layout:v1" role="compact"/>
+          <a:bodyPr wrap="none" anchor="t" lIns="0" rIns="0" tIns="0" bIns="0">
+            <a:spAutoFit/>
+            <a:extLst>
+              <a:ext uri="{8AF73BB6-5E31-4F0F-A399-3D98F3B95FD9}">
+                <ns112:textLayout xmlns:ns112="urn:pptxdsl:text-layout:v1" role="compact"/>
               </a:ext>
             </a:extLst>
           </a:bodyPr>
@@ -41106,21 +41380,21 @@
       </p:sp>
       <p:cxnSp>
         <p:nvCxnSpPr>
-          <p:cNvPr id="34" name="Connector 33"/>
+          <p:cNvPr id="35" name="protocol-anatomy:annotation:0:flags"/>
           <p:cNvCxnSpPr/>
           <p:nvPr/>
         </p:nvCxnSpPr>
         <p:spPr>
           <a:xfrm>
             <a:off x="6031382" y="2971292"/>
-            <a:ext cx="2245766" cy="182879"/>
+            <a:ext cx="2245766" cy="54864"/>
           </a:xfrm>
           <a:prstGeom prst="line">
             <a:avLst/>
           </a:prstGeom>
-          <a:ln w="10160">
+          <a:ln w="13970">
             <a:solidFill>
-              <a:srgbClr val="D1CFC8"/>
+              <a:srgbClr val="666E70"/>
             </a:solidFill>
           </a:ln>
           <a:effectLst/>
@@ -41142,14 +41416,14 @@
       </p:cxnSp>
       <p:sp>
         <p:nvSpPr>
-          <p:cNvPr id="35" name="TextBox 34"/>
-          <p:cNvSpPr txBox="1"/>
-          <p:nvPr/>
-        </p:nvSpPr>
-        <p:spPr>
-          <a:xfrm>
-            <a:off x="8094268" y="3209035"/>
-            <a:ext cx="384048" cy="201168"/>
+          <p:cNvPr id="36" name="TextBox 35"/>
+          <p:cNvSpPr txBox="1"/>
+          <p:nvPr/>
+        </p:nvSpPr>
+        <p:spPr>
+          <a:xfrm>
+            <a:off x="8094268" y="3081020"/>
+            <a:ext cx="384048" cy="438912"/>
           </a:xfrm>
           <a:prstGeom prst="rect">
             <a:avLst/>
@@ -41157,11 +41431,11 @@
           <a:noFill/>
         </p:spPr>
         <p:txBody>
-          <a:bodyPr wrap="square" anchor="t" lIns="0" rIns="0" tIns="0" bIns="0">
-            <a:spAutoFit/>
-            <a:extLst>
-              <a:ext uri="{8AF73BB6-5E31-4F0F-A399-3D98F3B95FD9}">
-                <ns112:textLayout xmlns:ns112="urn:pptxdsl:text-layout:v1" role="natural"/>
+          <a:bodyPr wrap="none" anchor="t" lIns="0" rIns="0" tIns="0" bIns="0">
+            <a:spAutoFit/>
+            <a:extLst>
+              <a:ext uri="{8AF73BB6-5E31-4F0F-A399-3D98F3B95FD9}">
+                <ns117:textLayout xmlns:ns117="urn:pptxdsl:text-layout:v1" role="compact"/>
               </a:ext>
             </a:extLst>
           </a:bodyPr>
@@ -41169,7 +41443,7 @@
           <a:p>
             <a:pPr algn="l">
               <a:lnSpc>
-                <a:spcPct val="130000"/>
+                <a:spcPct val="108000"/>
               </a:lnSpc>
             </a:pPr>
             <a:r>
@@ -41188,13 +41462,13 @@
       </p:sp>
       <p:sp>
         <p:nvSpPr>
-          <p:cNvPr id="36" name="TextBox 35"/>
-          <p:cNvSpPr txBox="1"/>
-          <p:nvPr/>
-        </p:nvSpPr>
-        <p:spPr>
-          <a:xfrm>
-            <a:off x="8533180" y="3209035"/>
+          <p:cNvPr id="37" name="TextBox 36"/>
+          <p:cNvSpPr txBox="1"/>
+          <p:nvPr/>
+        </p:nvSpPr>
+        <p:spPr>
+          <a:xfrm>
+            <a:off x="8533180" y="3081020"/>
             <a:ext cx="3155594" cy="438912"/>
           </a:xfrm>
           <a:prstGeom prst="rect">
@@ -41203,11 +41477,11 @@
           <a:noFill/>
         </p:spPr>
         <p:txBody>
-          <a:bodyPr wrap="square" anchor="t" lIns="0" rIns="0" tIns="0" bIns="0">
-            <a:spAutoFit/>
-            <a:extLst>
-              <a:ext uri="{8AF73BB6-5E31-4F0F-A399-3D98F3B95FD9}">
-                <ns117:textLayout xmlns:ns117="urn:pptxdsl:text-layout:v1" role="compact"/>
+          <a:bodyPr wrap="none" anchor="t" lIns="0" rIns="0" tIns="0" bIns="0">
+            <a:spAutoFit/>
+            <a:extLst>
+              <a:ext uri="{8AF73BB6-5E31-4F0F-A399-3D98F3B95FD9}">
+                <ns122:textLayout xmlns:ns122="urn:pptxdsl:text-layout:v1" role="compact"/>
               </a:ext>
             </a:extLst>
           </a:bodyPr>
@@ -41234,7 +41508,7 @@
       </p:sp>
       <p:sp>
         <p:nvSpPr>
-          <p:cNvPr id="37" name="Rectangle 36"/>
+          <p:cNvPr id="38" name="Rectangle 37"/>
           <p:cNvSpPr/>
           <p:nvPr/>
         </p:nvSpPr>
@@ -41278,7 +41552,7 @@
       </p:sp>
       <p:sp>
         <p:nvSpPr>
-          <p:cNvPr id="38" name="TextBox 37"/>
+          <p:cNvPr id="39" name="TextBox 38"/>
           <p:cNvSpPr txBox="1"/>
           <p:nvPr/>
         </p:nvSpPr>
@@ -41297,7 +41571,7 @@
             <a:spAutoFit/>
             <a:extLst>
               <a:ext uri="{8AF73BB6-5E31-4F0F-A399-3D98F3B95FD9}">
-                <ns122:textLayout xmlns:ns122="urn:pptxdsl:text-layout:v1" role="body"/>
+                <ns127:textLayout xmlns:ns127="urn:pptxdsl:text-layout:v1" role="body"/>
               </a:ext>
             </a:extLst>
           </a:bodyPr>
@@ -41324,7 +41598,7 @@
       </p:sp>
       <p:sp>
         <p:nvSpPr>
-          <p:cNvPr id="39" name="TextBox 38"/>
+          <p:cNvPr id="40" name="TextBox 39"/>
           <p:cNvSpPr txBox="1"/>
           <p:nvPr/>
         </p:nvSpPr>
@@ -41343,7 +41617,7 @@
             <a:spAutoFit/>
             <a:extLst>
               <a:ext uri="{8AF73BB6-5E31-4F0F-A399-3D98F3B95FD9}">
-                <ns127:textLayout xmlns:ns127="urn:pptxdsl:text-layout:v1" role="body"/>
+                <ns132:textLayout xmlns:ns132="urn:pptxdsl:text-layout:v1" role="body"/>
               </a:ext>
             </a:extLst>
           </a:bodyPr>

--- a/examples/gallery/pattern_gallery.pptx
+++ b/examples/gallery/pattern_gallery.pptx
@@ -33959,7 +33959,7 @@
                 <a:ea typeface="Yu Gothic"/>
                 <a:cs typeface="Yu Gothic"/>
               </a:rPr>
-              <a:t>Recovery Time Objectiveの略です。</a:t>
+              <a:t>障害発生から、業務やサービスの</a:t>
             </a:r>
           </a:p>
           <a:p>
@@ -33977,43 +33977,7 @@
                 <a:ea typeface="Yu Gothic"/>
                 <a:cs typeface="Yu Gothic"/>
               </a:rPr>
-              <a:t>障害が起きてから、業務やサービスを</a:t>
-            </a:r>
-          </a:p>
-          <a:p>
-            <a:pPr algn="l">
-              <a:lnSpc>
-                <a:spcPct val="118000"/>
-              </a:lnSpc>
-            </a:pPr>
-            <a:r>
-              <a:rPr sz="1850" b="0" lang="ja-JP">
-                <a:solidFill>
-                  <a:srgbClr val="202729"/>
-                </a:solidFill>
-                <a:latin typeface="Yu Gothic"/>
-                <a:ea typeface="Yu Gothic"/>
-                <a:cs typeface="Yu Gothic"/>
-              </a:rPr>
-              <a:t>再開するまでに許容する</a:t>
-            </a:r>
-          </a:p>
-          <a:p>
-            <a:pPr algn="l">
-              <a:lnSpc>
-                <a:spcPct val="118000"/>
-              </a:lnSpc>
-            </a:pPr>
-            <a:r>
-              <a:rPr sz="1850" b="0" lang="ja-JP">
-                <a:solidFill>
-                  <a:srgbClr val="202729"/>
-                </a:solidFill>
-                <a:latin typeface="Yu Gothic"/>
-                <a:ea typeface="Yu Gothic"/>
-                <a:cs typeface="Yu Gothic"/>
-              </a:rPr>
-              <a:t>目標時間を定めます。</a:t>
+              <a:t>再開までに許容する目標時間です。</a:t>
             </a:r>
           </a:p>
         </p:txBody>
@@ -34083,7 +34047,7 @@
             <a:spAutoFit/>
             <a:extLst>
               <a:ext uri="{8AF73BB6-5E31-4F0F-A399-3D98F3B95FD9}">
-                <ns28:textLayout xmlns:ns28="urn:pptxdsl:text-layout:v1" role="compact"/>
+                <ns24:textLayout xmlns:ns24="urn:pptxdsl:text-layout:v1" role="compact"/>
               </a:ext>
             </a:extLst>
           </a:bodyPr>
@@ -34103,7 +34067,7 @@
                 <a:ea typeface="Yu Gothic"/>
                 <a:cs typeface="Yu Gothic"/>
               </a:rPr>
-              <a:t>起点</a:t>
+              <a:t>名称</a:t>
             </a:r>
           </a:p>
         </p:txBody>
@@ -34117,7 +34081,7 @@
         <p:spPr>
           <a:xfrm>
             <a:off x="6144768" y="2061972"/>
-            <a:ext cx="5544007" cy="909150"/>
+            <a:ext cx="5544007" cy="586993"/>
           </a:xfrm>
           <a:prstGeom prst="rect">
             <a:avLst/>
@@ -34129,7 +34093,7 @@
             <a:spAutoFit/>
             <a:extLst>
               <a:ext uri="{8AF73BB6-5E31-4F0F-A399-3D98F3B95FD9}">
-                <ns33:textLayout xmlns:ns33="urn:pptxdsl:text-layout:v1" role="body"/>
+                <ns29:textLayout xmlns:ns29="urn:pptxdsl:text-layout:v1" role="body"/>
               </a:ext>
             </a:extLst>
           </a:bodyPr>
@@ -34149,7 +34113,7 @@
                 <a:ea typeface="Yu Gothic"/>
                 <a:cs typeface="Yu Gothic"/>
               </a:rPr>
-              <a:t>業務やサービスへ影響する障害が発生した時点。</a:t>
+              <a:t>Recovery Time Objectiveの略。</a:t>
             </a:r>
           </a:p>
         </p:txBody>
@@ -34162,7 +34126,7 @@
         </p:nvSpPr>
         <p:spPr>
           <a:xfrm>
-            <a:off x="6144768" y="3025986"/>
+            <a:off x="6144768" y="2703830"/>
             <a:ext cx="5544007" cy="7315"/>
           </a:xfrm>
           <a:prstGeom prst="rect">
@@ -34206,7 +34170,7 @@
         </p:nvSpPr>
         <p:spPr>
           <a:xfrm>
-            <a:off x="6144768" y="3071706"/>
+            <a:off x="6144768" y="2749550"/>
             <a:ext cx="5544007" cy="196596"/>
           </a:xfrm>
           <a:prstGeom prst="rect">
@@ -34219,7 +34183,7 @@
             <a:spAutoFit/>
             <a:extLst>
               <a:ext uri="{8AF73BB6-5E31-4F0F-A399-3D98F3B95FD9}">
-                <ns38:textLayout xmlns:ns38="urn:pptxdsl:text-layout:v1" role="compact"/>
+                <ns34:textLayout xmlns:ns34="urn:pptxdsl:text-layout:v1" role="compact"/>
               </a:ext>
             </a:extLst>
           </a:bodyPr>
@@ -34239,7 +34203,7 @@
                 <a:ea typeface="Yu Gothic"/>
                 <a:cs typeface="Yu Gothic"/>
               </a:rPr>
-              <a:t>終点</a:t>
+              <a:t>起点</a:t>
             </a:r>
           </a:p>
         </p:txBody>
@@ -34252,8 +34216,8 @@
         </p:nvSpPr>
         <p:spPr>
           <a:xfrm>
-            <a:off x="6144768" y="3350598"/>
-            <a:ext cx="5544007" cy="909150"/>
+            <a:off x="6144768" y="3028442"/>
+            <a:ext cx="5544007" cy="586994"/>
           </a:xfrm>
           <a:prstGeom prst="rect">
             <a:avLst/>
@@ -34265,7 +34229,7 @@
             <a:spAutoFit/>
             <a:extLst>
               <a:ext uri="{8AF73BB6-5E31-4F0F-A399-3D98F3B95FD9}">
-                <ns43:textLayout xmlns:ns43="urn:pptxdsl:text-layout:v1" role="body"/>
+                <ns39:textLayout xmlns:ns39="urn:pptxdsl:text-layout:v1" role="body"/>
               </a:ext>
             </a:extLst>
           </a:bodyPr>
@@ -34285,7 +34249,7 @@
                 <a:ea typeface="Yu Gothic"/>
                 <a:cs typeface="Yu Gothic"/>
               </a:rPr>
-              <a:t>利用者が必要な業務を再開できる状態へ戻った時点。</a:t>
+              <a:t>業務やサービスへ影響する障害が発生した時点。</a:t>
             </a:r>
           </a:p>
         </p:txBody>
@@ -34298,7 +34262,7 @@
         </p:nvSpPr>
         <p:spPr>
           <a:xfrm>
-            <a:off x="6144768" y="4314613"/>
+            <a:off x="6144768" y="3670300"/>
             <a:ext cx="5544007" cy="7315"/>
           </a:xfrm>
           <a:prstGeom prst="rect">
@@ -34342,7 +34306,7 @@
         </p:nvSpPr>
         <p:spPr>
           <a:xfrm>
-            <a:off x="6144768" y="4360333"/>
+            <a:off x="6144768" y="3716020"/>
             <a:ext cx="5544007" cy="196596"/>
           </a:xfrm>
           <a:prstGeom prst="rect">
@@ -34355,7 +34319,7 @@
             <a:spAutoFit/>
             <a:extLst>
               <a:ext uri="{8AF73BB6-5E31-4F0F-A399-3D98F3B95FD9}">
-                <ns48:textLayout xmlns:ns48="urn:pptxdsl:text-layout:v1" role="compact"/>
+                <ns44:textLayout xmlns:ns44="urn:pptxdsl:text-layout:v1" role="compact"/>
               </a:ext>
             </a:extLst>
           </a:bodyPr>
@@ -34375,7 +34339,7 @@
                 <a:ea typeface="Yu Gothic"/>
                 <a:cs typeface="Yu Gothic"/>
               </a:rPr>
-              <a:t>設計への反映</a:t>
+              <a:t>終点</a:t>
             </a:r>
           </a:p>
         </p:txBody>
@@ -34388,8 +34352,8 @@
         </p:nvSpPr>
         <p:spPr>
           <a:xfrm>
-            <a:off x="6144768" y="4639225"/>
-            <a:ext cx="5544007" cy="909150"/>
+            <a:off x="6144768" y="3994912"/>
+            <a:ext cx="5544007" cy="586994"/>
           </a:xfrm>
           <a:prstGeom prst="rect">
             <a:avLst/>
@@ -34401,7 +34365,7 @@
             <a:spAutoFit/>
             <a:extLst>
               <a:ext uri="{8AF73BB6-5E31-4F0F-A399-3D98F3B95FD9}">
-                <ns53:textLayout xmlns:ns53="urn:pptxdsl:text-layout:v1" role="body"/>
+                <ns49:textLayout xmlns:ns49="urn:pptxdsl:text-layout:v1" role="body"/>
               </a:ext>
             </a:extLst>
           </a:bodyPr>
@@ -34421,39 +34385,21 @@
                 <a:ea typeface="Yu Gothic"/>
                 <a:cs typeface="Yu Gothic"/>
               </a:rPr>
-              <a:t>復旧手順、冗長化、バックアップ方式の要求へ</a:t>
-            </a:r>
-          </a:p>
-          <a:p>
-            <a:pPr algn="l">
-              <a:lnSpc>
-                <a:spcPct val="114000"/>
-              </a:lnSpc>
-            </a:pPr>
-            <a:r>
-              <a:rPr sz="1500" b="0" lang="ja-JP">
-                <a:solidFill>
-                  <a:srgbClr val="202729"/>
-                </a:solidFill>
-                <a:latin typeface="Yu Gothic"/>
-                <a:ea typeface="Yu Gothic"/>
-                <a:cs typeface="Yu Gothic"/>
-              </a:rPr>
-              <a:t>落とし込む。</a:t>
-            </a:r>
-          </a:p>
-        </p:txBody>
-      </p:sp>
-      <p:sp>
-        <p:nvSpPr>
-          <p:cNvPr id="17" name="slide-footnote:rule"/>
+              <a:t>利用者が必要な業務を再開できる状態へ戻った時点。</a:t>
+            </a:r>
+          </a:p>
+        </p:txBody>
+      </p:sp>
+      <p:sp>
+        <p:nvSpPr>
+          <p:cNvPr id="17" name="Rectangle 16"/>
           <p:cNvSpPr/>
           <p:nvPr/>
         </p:nvSpPr>
         <p:spPr>
           <a:xfrm>
-            <a:off x="502920" y="5822696"/>
-            <a:ext cx="11185855" cy="9144"/>
+            <a:off x="6144768" y="4636770"/>
+            <a:ext cx="5544007" cy="7315"/>
           </a:xfrm>
           <a:prstGeom prst="rect">
             <a:avLst/>
@@ -34490,14 +34436,14 @@
       </p:sp>
       <p:sp>
         <p:nvSpPr>
-          <p:cNvPr id="18" name="slide-footnote:label"/>
-          <p:cNvSpPr txBox="1"/>
-          <p:nvPr/>
-        </p:nvSpPr>
-        <p:spPr>
-          <a:xfrm>
-            <a:off x="502920" y="5932424"/>
-            <a:ext cx="1271016" cy="221488"/>
+          <p:cNvPr id="18" name="TextBox 17"/>
+          <p:cNvSpPr txBox="1"/>
+          <p:nvPr/>
+        </p:nvSpPr>
+        <p:spPr>
+          <a:xfrm>
+            <a:off x="6144768" y="4682490"/>
+            <a:ext cx="5544007" cy="196596"/>
           </a:xfrm>
           <a:prstGeom prst="rect">
             <a:avLst/>
@@ -34509,7 +34455,7 @@
             <a:spAutoFit/>
             <a:extLst>
               <a:ext uri="{8AF73BB6-5E31-4F0F-A399-3D98F3B95FD9}">
-                <ns60:textLayout xmlns:ns60="urn:pptxdsl:text-layout:v1" role="natural"/>
+                <ns54:textLayout xmlns:ns54="urn:pptxdsl:text-layout:v1" role="compact"/>
               </a:ext>
             </a:extLst>
           </a:bodyPr>
@@ -34517,33 +34463,33 @@
           <a:p>
             <a:pPr algn="l">
               <a:lnSpc>
-                <a:spcPct val="112000"/>
-              </a:lnSpc>
-            </a:pPr>
-            <a:r>
-              <a:rPr sz="1150" b="1" lang="ja-JP">
-                <a:solidFill>
-                  <a:srgbClr val="C7583E"/>
-                </a:solidFill>
-                <a:latin typeface="Yu Gothic"/>
-                <a:ea typeface="Yu Gothic"/>
-                <a:cs typeface="Yu Gothic"/>
-              </a:rPr>
-              <a:t>誤解しやすい点</a:t>
-            </a:r>
-          </a:p>
-        </p:txBody>
-      </p:sp>
-      <p:sp>
-        <p:nvSpPr>
-          <p:cNvPr id="19" name="slide-footnote:text"/>
-          <p:cNvSpPr txBox="1"/>
-          <p:nvPr/>
-        </p:nvSpPr>
-        <p:spPr>
-          <a:xfrm>
-            <a:off x="1920240" y="5932424"/>
-            <a:ext cx="9768535" cy="221488"/>
+                <a:spcPct val="108000"/>
+              </a:lnSpc>
+            </a:pPr>
+            <a:r>
+              <a:rPr sz="1300" b="1" lang="ja-JP">
+                <a:solidFill>
+                  <a:srgbClr val="0D7870"/>
+                </a:solidFill>
+                <a:latin typeface="Yu Gothic"/>
+                <a:ea typeface="Yu Gothic"/>
+                <a:cs typeface="Yu Gothic"/>
+              </a:rPr>
+              <a:t>設計への反映</a:t>
+            </a:r>
+          </a:p>
+        </p:txBody>
+      </p:sp>
+      <p:sp>
+        <p:nvSpPr>
+          <p:cNvPr id="19" name="TextBox 18"/>
+          <p:cNvSpPr txBox="1"/>
+          <p:nvPr/>
+        </p:nvSpPr>
+        <p:spPr>
+          <a:xfrm>
+            <a:off x="6144768" y="4961382"/>
+            <a:ext cx="5544007" cy="586994"/>
           </a:xfrm>
           <a:prstGeom prst="rect">
             <a:avLst/>
@@ -34555,7 +34501,7 @@
             <a:spAutoFit/>
             <a:extLst>
               <a:ext uri="{8AF73BB6-5E31-4F0F-A399-3D98F3B95FD9}">
-                <ns65:textLayout xmlns:ns65="urn:pptxdsl:text-layout:v1" role="body"/>
+                <ns59:textLayout xmlns:ns59="urn:pptxdsl:text-layout:v1" role="body"/>
               </a:ext>
             </a:extLst>
           </a:bodyPr>
@@ -34563,11 +34509,11 @@
           <a:p>
             <a:pPr algn="l">
               <a:lnSpc>
-                <a:spcPct val="112000"/>
-              </a:lnSpc>
-            </a:pPr>
-            <a:r>
-              <a:rPr sz="1300" b="0" lang="ja-JP">
+                <a:spcPct val="114000"/>
+              </a:lnSpc>
+            </a:pPr>
+            <a:r>
+              <a:rPr sz="1500" b="0" lang="ja-JP">
                 <a:solidFill>
                   <a:srgbClr val="202729"/>
                 </a:solidFill>
@@ -34575,21 +34521,39 @@
                 <a:ea typeface="Yu Gothic"/>
                 <a:cs typeface="Yu Gothic"/>
               </a:rPr>
-              <a:t>実際に要した復旧時間の実績値ではなく、事前に合意する目標値です。</a:t>
-            </a:r>
-          </a:p>
-        </p:txBody>
-      </p:sp>
-      <p:sp>
-        <p:nvSpPr>
-          <p:cNvPr id="20" name="Rectangle 19"/>
+              <a:t>復旧手順、冗長化、バックアップ方式の要求へ</a:t>
+            </a:r>
+          </a:p>
+          <a:p>
+            <a:pPr algn="l">
+              <a:lnSpc>
+                <a:spcPct val="114000"/>
+              </a:lnSpc>
+            </a:pPr>
+            <a:r>
+              <a:rPr sz="1500" b="0" lang="ja-JP">
+                <a:solidFill>
+                  <a:srgbClr val="202729"/>
+                </a:solidFill>
+                <a:latin typeface="Yu Gothic"/>
+                <a:ea typeface="Yu Gothic"/>
+                <a:cs typeface="Yu Gothic"/>
+              </a:rPr>
+              <a:t>落とし込む。</a:t>
+            </a:r>
+          </a:p>
+        </p:txBody>
+      </p:sp>
+      <p:sp>
+        <p:nvSpPr>
+          <p:cNvPr id="20" name="slide-footnote:rule"/>
           <p:cNvSpPr/>
           <p:nvPr/>
         </p:nvSpPr>
         <p:spPr>
           <a:xfrm>
-            <a:off x="658368" y="6327648"/>
-            <a:ext cx="10881360" cy="9144"/>
+            <a:off x="502920" y="5822696"/>
+            <a:ext cx="11185855" cy="9144"/>
           </a:xfrm>
           <a:prstGeom prst="rect">
             <a:avLst/>
@@ -34626,7 +34590,143 @@
       </p:sp>
       <p:sp>
         <p:nvSpPr>
-          <p:cNvPr id="21" name="TextBox 20"/>
+          <p:cNvPr id="21" name="slide-footnote:label"/>
+          <p:cNvSpPr txBox="1"/>
+          <p:nvPr/>
+        </p:nvSpPr>
+        <p:spPr>
+          <a:xfrm>
+            <a:off x="502920" y="5932424"/>
+            <a:ext cx="1271016" cy="221488"/>
+          </a:xfrm>
+          <a:prstGeom prst="rect">
+            <a:avLst/>
+          </a:prstGeom>
+          <a:noFill/>
+        </p:spPr>
+        <p:txBody>
+          <a:bodyPr wrap="square" anchor="t" lIns="0" rIns="0" tIns="0" bIns="0">
+            <a:spAutoFit/>
+            <a:extLst>
+              <a:ext uri="{8AF73BB6-5E31-4F0F-A399-3D98F3B95FD9}">
+                <ns66:textLayout xmlns:ns66="urn:pptxdsl:text-layout:v1" role="natural"/>
+              </a:ext>
+            </a:extLst>
+          </a:bodyPr>
+          <a:lstStyle/>
+          <a:p>
+            <a:pPr algn="l">
+              <a:lnSpc>
+                <a:spcPct val="112000"/>
+              </a:lnSpc>
+            </a:pPr>
+            <a:r>
+              <a:rPr sz="1150" b="1" lang="ja-JP">
+                <a:solidFill>
+                  <a:srgbClr val="C7583E"/>
+                </a:solidFill>
+                <a:latin typeface="Yu Gothic"/>
+                <a:ea typeface="Yu Gothic"/>
+                <a:cs typeface="Yu Gothic"/>
+              </a:rPr>
+              <a:t>誤解しやすい点</a:t>
+            </a:r>
+          </a:p>
+        </p:txBody>
+      </p:sp>
+      <p:sp>
+        <p:nvSpPr>
+          <p:cNvPr id="22" name="slide-footnote:text"/>
+          <p:cNvSpPr txBox="1"/>
+          <p:nvPr/>
+        </p:nvSpPr>
+        <p:spPr>
+          <a:xfrm>
+            <a:off x="1920240" y="5932424"/>
+            <a:ext cx="9768535" cy="221488"/>
+          </a:xfrm>
+          <a:prstGeom prst="rect">
+            <a:avLst/>
+          </a:prstGeom>
+          <a:noFill/>
+        </p:spPr>
+        <p:txBody>
+          <a:bodyPr wrap="square" anchor="t" lIns="0" rIns="0" tIns="0" bIns="0">
+            <a:spAutoFit/>
+            <a:extLst>
+              <a:ext uri="{8AF73BB6-5E31-4F0F-A399-3D98F3B95FD9}">
+                <ns71:textLayout xmlns:ns71="urn:pptxdsl:text-layout:v1" role="body"/>
+              </a:ext>
+            </a:extLst>
+          </a:bodyPr>
+          <a:lstStyle/>
+          <a:p>
+            <a:pPr algn="l">
+              <a:lnSpc>
+                <a:spcPct val="112000"/>
+              </a:lnSpc>
+            </a:pPr>
+            <a:r>
+              <a:rPr sz="1300" b="0" lang="ja-JP">
+                <a:solidFill>
+                  <a:srgbClr val="202729"/>
+                </a:solidFill>
+                <a:latin typeface="Yu Gothic"/>
+                <a:ea typeface="Yu Gothic"/>
+                <a:cs typeface="Yu Gothic"/>
+              </a:rPr>
+              <a:t>実際に要した復旧時間の実績値ではなく、事前に合意する目標値です。</a:t>
+            </a:r>
+          </a:p>
+        </p:txBody>
+      </p:sp>
+      <p:sp>
+        <p:nvSpPr>
+          <p:cNvPr id="23" name="Rectangle 22"/>
+          <p:cNvSpPr/>
+          <p:nvPr/>
+        </p:nvSpPr>
+        <p:spPr>
+          <a:xfrm>
+            <a:off x="658368" y="6327648"/>
+            <a:ext cx="10881360" cy="9144"/>
+          </a:xfrm>
+          <a:prstGeom prst="rect">
+            <a:avLst/>
+          </a:prstGeom>
+          <a:solidFill>
+            <a:srgbClr val="D1CFC8"/>
+          </a:solidFill>
+          <a:ln>
+            <a:noFill/>
+          </a:ln>
+          <a:effectLst/>
+        </p:spPr>
+        <p:style>
+          <a:lnRef idx="1">
+            <a:schemeClr val="accent1"/>
+          </a:lnRef>
+          <a:fillRef idx="3">
+            <a:schemeClr val="accent1"/>
+          </a:fillRef>
+          <a:effectRef idx="2">
+            <a:schemeClr val="accent1"/>
+          </a:effectRef>
+          <a:fontRef idx="minor">
+            <a:schemeClr val="lt1"/>
+          </a:fontRef>
+        </p:style>
+        <p:txBody>
+          <a:bodyPr rtlCol="0" anchor="ctr"/>
+          <a:lstStyle/>
+          <a:p>
+            <a:pPr algn="ctr"/>
+          </a:p>
+        </p:txBody>
+      </p:sp>
+      <p:sp>
+        <p:nvSpPr>
+          <p:cNvPr id="24" name="TextBox 23"/>
           <p:cNvSpPr txBox="1"/>
           <p:nvPr/>
         </p:nvSpPr>
@@ -34645,7 +34745,7 @@
             <a:spAutoFit/>
             <a:extLst>
               <a:ext uri="{8AF73BB6-5E31-4F0F-A399-3D98F3B95FD9}">
-                <ns70:textLayout xmlns:ns70="urn:pptxdsl:text-layout:v1" role="body"/>
+                <ns76:textLayout xmlns:ns76="urn:pptxdsl:text-layout:v1" role="body"/>
               </a:ext>
             </a:extLst>
           </a:bodyPr>
@@ -34672,7 +34772,7 @@
       </p:sp>
       <p:sp>
         <p:nvSpPr>
-          <p:cNvPr id="22" name="TextBox 21"/>
+          <p:cNvPr id="25" name="TextBox 24"/>
           <p:cNvSpPr txBox="1"/>
           <p:nvPr/>
         </p:nvSpPr>
@@ -34691,7 +34791,7 @@
             <a:spAutoFit/>
             <a:extLst>
               <a:ext uri="{8AF73BB6-5E31-4F0F-A399-3D98F3B95FD9}">
-                <ns75:textLayout xmlns:ns75="urn:pptxdsl:text-layout:v1" role="body"/>
+                <ns81:textLayout xmlns:ns81="urn:pptxdsl:text-layout:v1" role="body"/>
               </a:ext>
             </a:extLst>
           </a:bodyPr>

--- a/examples/gallery/pattern_gallery.pptx
+++ b/examples/gallery/pattern_gallery.pptx
@@ -34989,7 +34989,7 @@
         </p:nvSpPr>
         <p:spPr>
           <a:xfrm>
-            <a:off x="502920" y="2060691"/>
+            <a:off x="502920" y="2031065"/>
             <a:ext cx="11185855" cy="1298448"/>
           </a:xfrm>
           <a:prstGeom prst="rect">
@@ -35033,8 +35033,8 @@
         </p:nvSpPr>
         <p:spPr>
           <a:xfrm>
-            <a:off x="649224" y="2243571"/>
-            <a:ext cx="1097280" cy="246888"/>
+            <a:off x="649224" y="2177369"/>
+            <a:ext cx="1097280" cy="274320"/>
           </a:xfrm>
           <a:prstGeom prst="rect">
             <a:avLst/>
@@ -35042,11 +35042,11 @@
           <a:noFill/>
         </p:spPr>
         <p:txBody>
-          <a:bodyPr wrap="square" anchor="ctr" lIns="0" rIns="0" tIns="0" bIns="0">
-            <a:spAutoFit/>
-            <a:extLst>
-              <a:ext uri="{8AF73BB6-5E31-4F0F-A399-3D98F3B95FD9}">
-                <ns12:textLayout xmlns:ns12="urn:pptxdsl:text-layout:v1" role="natural"/>
+          <a:bodyPr wrap="none" anchor="ctr" lIns="0" rIns="0" tIns="0" bIns="0">
+            <a:spAutoFit/>
+            <a:extLst>
+              <a:ext uri="{8AF73BB6-5E31-4F0F-A399-3D98F3B95FD9}">
+                <ns12:textLayout xmlns:ns12="urn:pptxdsl:text-layout:v1" role="compact"/>
               </a:ext>
             </a:extLst>
           </a:bodyPr>
@@ -35054,7 +35054,7 @@
           <a:p>
             <a:pPr algn="l">
               <a:lnSpc>
-                <a:spcPct val="130000"/>
+                <a:spcPct val="100000"/>
               </a:lnSpc>
             </a:pPr>
             <a:r>
@@ -35073,14 +35073,14 @@
       </p:sp>
       <p:sp>
         <p:nvSpPr>
-          <p:cNvPr id="7" name="TextBox 6"/>
-          <p:cNvSpPr txBox="1"/>
-          <p:nvPr/>
-        </p:nvSpPr>
-        <p:spPr>
-          <a:xfrm>
-            <a:off x="649224" y="2508747"/>
-            <a:ext cx="1097280" cy="201168"/>
+          <p:cNvPr id="7" name="network-lane:sub:business"/>
+          <p:cNvSpPr txBox="1"/>
+          <p:nvPr/>
+        </p:nvSpPr>
+        <p:spPr>
+          <a:xfrm>
+            <a:off x="649224" y="2479121"/>
+            <a:ext cx="1097280" cy="777240"/>
           </a:xfrm>
           <a:prstGeom prst="rect">
             <a:avLst/>
@@ -35088,11 +35088,11 @@
           <a:noFill/>
         </p:spPr>
         <p:txBody>
-          <a:bodyPr wrap="square" anchor="t" lIns="0" rIns="0" tIns="0" bIns="0">
-            <a:spAutoFit/>
-            <a:extLst>
-              <a:ext uri="{8AF73BB6-5E31-4F0F-A399-3D98F3B95FD9}">
-                <ns17:textLayout xmlns:ns17="urn:pptxdsl:text-layout:v1" role="body"/>
+          <a:bodyPr wrap="none" anchor="t" lIns="0" rIns="0" tIns="0" bIns="0">
+            <a:spAutoFit/>
+            <a:extLst>
+              <a:ext uri="{8AF73BB6-5E31-4F0F-A399-3D98F3B95FD9}">
+                <ns17:textLayout xmlns:ns17="urn:pptxdsl:text-layout:v1" role="compact"/>
               </a:ext>
             </a:extLst>
           </a:bodyPr>
@@ -35100,7 +35100,7 @@
           <a:p>
             <a:pPr algn="l">
               <a:lnSpc>
-                <a:spcPct val="130000"/>
+                <a:spcPct val="100000"/>
               </a:lnSpc>
             </a:pPr>
             <a:r>
@@ -35125,7 +35125,7 @@
         </p:nvSpPr>
         <p:spPr>
           <a:xfrm>
-            <a:off x="502920" y="3450579"/>
+            <a:off x="502920" y="3420953"/>
             <a:ext cx="11185855" cy="1298448"/>
           </a:xfrm>
           <a:prstGeom prst="rect">
@@ -35169,8 +35169,8 @@
         </p:nvSpPr>
         <p:spPr>
           <a:xfrm>
-            <a:off x="649224" y="3633459"/>
-            <a:ext cx="1097280" cy="246888"/>
+            <a:off x="649224" y="3567257"/>
+            <a:ext cx="1097280" cy="274320"/>
           </a:xfrm>
           <a:prstGeom prst="rect">
             <a:avLst/>
@@ -35178,11 +35178,11 @@
           <a:noFill/>
         </p:spPr>
         <p:txBody>
-          <a:bodyPr wrap="square" anchor="ctr" lIns="0" rIns="0" tIns="0" bIns="0">
-            <a:spAutoFit/>
-            <a:extLst>
-              <a:ext uri="{8AF73BB6-5E31-4F0F-A399-3D98F3B95FD9}">
-                <ns22:textLayout xmlns:ns22="urn:pptxdsl:text-layout:v1" role="natural"/>
+          <a:bodyPr wrap="none" anchor="ctr" lIns="0" rIns="0" tIns="0" bIns="0">
+            <a:spAutoFit/>
+            <a:extLst>
+              <a:ext uri="{8AF73BB6-5E31-4F0F-A399-3D98F3B95FD9}">
+                <ns22:textLayout xmlns:ns22="urn:pptxdsl:text-layout:v1" role="compact"/>
               </a:ext>
             </a:extLst>
           </a:bodyPr>
@@ -35190,33 +35190,125 @@
           <a:p>
             <a:pPr algn="l">
               <a:lnSpc>
+                <a:spcPct val="100000"/>
+              </a:lnSpc>
+            </a:pPr>
+            <a:r>
+              <a:rPr sz="1150" b="1" lang="ja-JP">
+                <a:solidFill>
+                  <a:srgbClr val="182C43"/>
+                </a:solidFill>
+                <a:latin typeface="Yu Gothic"/>
+                <a:ea typeface="Yu Gothic"/>
+                <a:cs typeface="Yu Gothic"/>
+              </a:rPr>
+              <a:t>ゲストVLAN</a:t>
+            </a:r>
+          </a:p>
+        </p:txBody>
+      </p:sp>
+      <p:sp>
+        <p:nvSpPr>
+          <p:cNvPr id="10" name="network-lane:sub:guest"/>
+          <p:cNvSpPr txBox="1"/>
+          <p:nvPr/>
+        </p:nvSpPr>
+        <p:spPr>
+          <a:xfrm>
+            <a:off x="649224" y="3869009"/>
+            <a:ext cx="1097280" cy="777240"/>
+          </a:xfrm>
+          <a:prstGeom prst="rect">
+            <a:avLst/>
+          </a:prstGeom>
+          <a:noFill/>
+        </p:spPr>
+        <p:txBody>
+          <a:bodyPr wrap="none" anchor="t" lIns="0" rIns="0" tIns="0" bIns="0">
+            <a:spAutoFit/>
+            <a:extLst>
+              <a:ext uri="{8AF73BB6-5E31-4F0F-A399-3D98F3B95FD9}">
+                <ns27:textLayout xmlns:ns27="urn:pptxdsl:text-layout:v1" role="compact"/>
+              </a:ext>
+            </a:extLst>
+          </a:bodyPr>
+          <a:lstStyle/>
+          <a:p>
+            <a:pPr algn="l">
+              <a:lnSpc>
+                <a:spcPct val="100000"/>
+              </a:lnSpc>
+            </a:pPr>
+            <a:r>
+              <a:rPr sz="850" b="0" lang="ja-JP">
+                <a:solidFill>
+                  <a:srgbClr val="666E70"/>
+                </a:solidFill>
+                <a:latin typeface="Yu Gothic"/>
+                <a:ea typeface="Yu Gothic"/>
+                <a:cs typeface="Yu Gothic"/>
+              </a:rPr>
+              <a:t>来訪者端末</a:t>
+            </a:r>
+          </a:p>
+        </p:txBody>
+      </p:sp>
+      <p:sp>
+        <p:nvSpPr>
+          <p:cNvPr id="11" name="TextBox 10"/>
+          <p:cNvSpPr txBox="1"/>
+          <p:nvPr/>
+        </p:nvSpPr>
+        <p:spPr>
+          <a:xfrm>
+            <a:off x="1837943" y="1729313"/>
+            <a:ext cx="2426131" cy="201168"/>
+          </a:xfrm>
+          <a:prstGeom prst="rect">
+            <a:avLst/>
+          </a:prstGeom>
+          <a:noFill/>
+        </p:spPr>
+        <p:txBody>
+          <a:bodyPr wrap="square" anchor="t" lIns="0" rIns="0" tIns="0" bIns="0">
+            <a:spAutoFit/>
+            <a:extLst>
+              <a:ext uri="{8AF73BB6-5E31-4F0F-A399-3D98F3B95FD9}">
+                <ns32:textLayout xmlns:ns32="urn:pptxdsl:text-layout:v1" role="natural"/>
+              </a:ext>
+            </a:extLst>
+          </a:bodyPr>
+          <a:lstStyle/>
+          <a:p>
+            <a:pPr algn="ctr">
+              <a:lnSpc>
                 <a:spcPct val="130000"/>
               </a:lnSpc>
             </a:pPr>
             <a:r>
-              <a:rPr sz="1150" b="1" lang="ja-JP">
-                <a:solidFill>
-                  <a:srgbClr val="182C43"/>
-                </a:solidFill>
-                <a:latin typeface="Yu Gothic"/>
-                <a:ea typeface="Yu Gothic"/>
-                <a:cs typeface="Yu Gothic"/>
-              </a:rPr>
-              <a:t>ゲストVLAN</a:t>
-            </a:r>
-          </a:p>
-        </p:txBody>
-      </p:sp>
-      <p:sp>
-        <p:nvSpPr>
-          <p:cNvPr id="10" name="TextBox 9"/>
-          <p:cNvSpPr txBox="1"/>
-          <p:nvPr/>
-        </p:nvSpPr>
-        <p:spPr>
-          <a:xfrm>
-            <a:off x="649224" y="3898635"/>
-            <a:ext cx="1097280" cy="201168"/>
+              <a:rPr sz="900" b="1" lang="ja-JP">
+                <a:solidFill>
+                  <a:srgbClr val="666E70"/>
+                </a:solidFill>
+                <a:latin typeface="Yu Gothic"/>
+                <a:ea typeface="Yu Gothic"/>
+                <a:cs typeface="Yu Gothic"/>
+              </a:rPr>
+              <a:t>フロアA</a:t>
+            </a:r>
+          </a:p>
+        </p:txBody>
+      </p:sp>
+      <p:sp>
+        <p:nvSpPr>
+          <p:cNvPr id="12" name="TextBox 11"/>
+          <p:cNvSpPr txBox="1"/>
+          <p:nvPr/>
+        </p:nvSpPr>
+        <p:spPr>
+          <a:xfrm>
+            <a:off x="4264075" y="1729313"/>
+            <a:ext cx="2426131" cy="201168"/>
           </a:xfrm>
           <a:prstGeom prst="rect">
             <a:avLst/>
@@ -35228,19 +35320,19 @@
             <a:spAutoFit/>
             <a:extLst>
               <a:ext uri="{8AF73BB6-5E31-4F0F-A399-3D98F3B95FD9}">
-                <ns27:textLayout xmlns:ns27="urn:pptxdsl:text-layout:v1" role="body"/>
-              </a:ext>
-            </a:extLst>
-          </a:bodyPr>
-          <a:lstStyle/>
-          <a:p>
-            <a:pPr algn="l">
+                <ns37:textLayout xmlns:ns37="urn:pptxdsl:text-layout:v1" role="natural"/>
+              </a:ext>
+            </a:extLst>
+          </a:bodyPr>
+          <a:lstStyle/>
+          <a:p>
+            <a:pPr algn="ctr">
               <a:lnSpc>
                 <a:spcPct val="130000"/>
               </a:lnSpc>
             </a:pPr>
             <a:r>
-              <a:rPr sz="850" b="0" lang="ja-JP">
+              <a:rPr sz="900" b="1" lang="ja-JP">
                 <a:solidFill>
                   <a:srgbClr val="666E70"/>
                 </a:solidFill>
@@ -35248,20 +35340,20 @@
                 <a:ea typeface="Yu Gothic"/>
                 <a:cs typeface="Yu Gothic"/>
               </a:rPr>
-              <a:t>来訪者端末</a:t>
-            </a:r>
-          </a:p>
-        </p:txBody>
-      </p:sp>
-      <p:sp>
-        <p:nvSpPr>
-          <p:cNvPr id="11" name="TextBox 10"/>
-          <p:cNvSpPr txBox="1"/>
-          <p:nvPr/>
-        </p:nvSpPr>
-        <p:spPr>
-          <a:xfrm>
-            <a:off x="1837943" y="1758939"/>
+              <a:t>スイッチA</a:t>
+            </a:r>
+          </a:p>
+        </p:txBody>
+      </p:sp>
+      <p:sp>
+        <p:nvSpPr>
+          <p:cNvPr id="13" name="TextBox 12"/>
+          <p:cNvSpPr txBox="1"/>
+          <p:nvPr/>
+        </p:nvSpPr>
+        <p:spPr>
+          <a:xfrm>
+            <a:off x="6690207" y="1729313"/>
             <a:ext cx="2426131" cy="201168"/>
           </a:xfrm>
           <a:prstGeom prst="rect">
@@ -35274,7 +35366,7 @@
             <a:spAutoFit/>
             <a:extLst>
               <a:ext uri="{8AF73BB6-5E31-4F0F-A399-3D98F3B95FD9}">
-                <ns32:textLayout xmlns:ns32="urn:pptxdsl:text-layout:v1" role="natural"/>
+                <ns42:textLayout xmlns:ns42="urn:pptxdsl:text-layout:v1" role="natural"/>
               </a:ext>
             </a:extLst>
           </a:bodyPr>
@@ -35294,98 +35386,6 @@
                 <a:ea typeface="Yu Gothic"/>
                 <a:cs typeface="Yu Gothic"/>
               </a:rPr>
-              <a:t>フロアA</a:t>
-            </a:r>
-          </a:p>
-        </p:txBody>
-      </p:sp>
-      <p:sp>
-        <p:nvSpPr>
-          <p:cNvPr id="12" name="TextBox 11"/>
-          <p:cNvSpPr txBox="1"/>
-          <p:nvPr/>
-        </p:nvSpPr>
-        <p:spPr>
-          <a:xfrm>
-            <a:off x="4264075" y="1758939"/>
-            <a:ext cx="2426131" cy="201168"/>
-          </a:xfrm>
-          <a:prstGeom prst="rect">
-            <a:avLst/>
-          </a:prstGeom>
-          <a:noFill/>
-        </p:spPr>
-        <p:txBody>
-          <a:bodyPr wrap="square" anchor="t" lIns="0" rIns="0" tIns="0" bIns="0">
-            <a:spAutoFit/>
-            <a:extLst>
-              <a:ext uri="{8AF73BB6-5E31-4F0F-A399-3D98F3B95FD9}">
-                <ns37:textLayout xmlns:ns37="urn:pptxdsl:text-layout:v1" role="natural"/>
-              </a:ext>
-            </a:extLst>
-          </a:bodyPr>
-          <a:lstStyle/>
-          <a:p>
-            <a:pPr algn="ctr">
-              <a:lnSpc>
-                <a:spcPct val="130000"/>
-              </a:lnSpc>
-            </a:pPr>
-            <a:r>
-              <a:rPr sz="900" b="1" lang="ja-JP">
-                <a:solidFill>
-                  <a:srgbClr val="666E70"/>
-                </a:solidFill>
-                <a:latin typeface="Yu Gothic"/>
-                <a:ea typeface="Yu Gothic"/>
-                <a:cs typeface="Yu Gothic"/>
-              </a:rPr>
-              <a:t>スイッチA</a:t>
-            </a:r>
-          </a:p>
-        </p:txBody>
-      </p:sp>
-      <p:sp>
-        <p:nvSpPr>
-          <p:cNvPr id="13" name="TextBox 12"/>
-          <p:cNvSpPr txBox="1"/>
-          <p:nvPr/>
-        </p:nvSpPr>
-        <p:spPr>
-          <a:xfrm>
-            <a:off x="6690207" y="1758939"/>
-            <a:ext cx="2426131" cy="201168"/>
-          </a:xfrm>
-          <a:prstGeom prst="rect">
-            <a:avLst/>
-          </a:prstGeom>
-          <a:noFill/>
-        </p:spPr>
-        <p:txBody>
-          <a:bodyPr wrap="square" anchor="t" lIns="0" rIns="0" tIns="0" bIns="0">
-            <a:spAutoFit/>
-            <a:extLst>
-              <a:ext uri="{8AF73BB6-5E31-4F0F-A399-3D98F3B95FD9}">
-                <ns42:textLayout xmlns:ns42="urn:pptxdsl:text-layout:v1" role="natural"/>
-              </a:ext>
-            </a:extLst>
-          </a:bodyPr>
-          <a:lstStyle/>
-          <a:p>
-            <a:pPr algn="ctr">
-              <a:lnSpc>
-                <a:spcPct val="130000"/>
-              </a:lnSpc>
-            </a:pPr>
-            <a:r>
-              <a:rPr sz="900" b="1" lang="ja-JP">
-                <a:solidFill>
-                  <a:srgbClr val="666E70"/>
-                </a:solidFill>
-                <a:latin typeface="Yu Gothic"/>
-                <a:ea typeface="Yu Gothic"/>
-                <a:cs typeface="Yu Gothic"/>
-              </a:rPr>
               <a:t>スイッチB</a:t>
             </a:r>
           </a:p>
@@ -35399,7 +35399,7 @@
         </p:nvSpPr>
         <p:spPr>
           <a:xfrm>
-            <a:off x="9116339" y="1758939"/>
+            <a:off x="9116339" y="1729313"/>
             <a:ext cx="2426131" cy="201168"/>
           </a:xfrm>
           <a:prstGeom prst="rect">
@@ -35445,7 +35445,7 @@
         </p:nvCxnSpPr>
         <p:spPr>
           <a:xfrm>
-            <a:off x="5477141" y="2709915"/>
+            <a:off x="5477141" y="2680289"/>
             <a:ext cx="0" cy="356616"/>
           </a:xfrm>
           <a:prstGeom prst="line">
@@ -35481,7 +35481,7 @@
         </p:nvCxnSpPr>
         <p:spPr>
           <a:xfrm>
-            <a:off x="5477141" y="3743187"/>
+            <a:off x="5477141" y="3713561"/>
             <a:ext cx="0" cy="356616"/>
           </a:xfrm>
           <a:prstGeom prst="line">
@@ -35517,7 +35517,7 @@
         </p:nvSpPr>
         <p:spPr>
           <a:xfrm>
-            <a:off x="5435993" y="2668767"/>
+            <a:off x="5435993" y="2639141"/>
             <a:ext cx="82296" cy="82296"/>
           </a:xfrm>
           <a:prstGeom prst="ellipse">
@@ -35561,7 +35561,7 @@
         </p:nvSpPr>
         <p:spPr>
           <a:xfrm>
-            <a:off x="5435993" y="4058655"/>
+            <a:off x="5435993" y="4029029"/>
             <a:ext cx="82296" cy="82296"/>
           </a:xfrm>
           <a:prstGeom prst="ellipse">
@@ -35605,7 +35605,7 @@
         </p:nvCxnSpPr>
         <p:spPr>
           <a:xfrm>
-            <a:off x="7903273" y="2709915"/>
+            <a:off x="7903273" y="2680289"/>
             <a:ext cx="0" cy="356616"/>
           </a:xfrm>
           <a:prstGeom prst="line">
@@ -35641,7 +35641,7 @@
         </p:nvCxnSpPr>
         <p:spPr>
           <a:xfrm>
-            <a:off x="7903273" y="3743187"/>
+            <a:off x="7903273" y="3713561"/>
             <a:ext cx="0" cy="356616"/>
           </a:xfrm>
           <a:prstGeom prst="line">
@@ -35677,7 +35677,7 @@
         </p:nvSpPr>
         <p:spPr>
           <a:xfrm>
-            <a:off x="7862125" y="2668767"/>
+            <a:off x="7862125" y="2639141"/>
             <a:ext cx="82296" cy="82296"/>
           </a:xfrm>
           <a:prstGeom prst="ellipse">
@@ -35721,7 +35721,7 @@
         </p:nvSpPr>
         <p:spPr>
           <a:xfrm>
-            <a:off x="7862125" y="4058655"/>
+            <a:off x="7862125" y="4029029"/>
             <a:ext cx="82296" cy="82296"/>
           </a:xfrm>
           <a:prstGeom prst="ellipse">
@@ -35765,7 +35765,7 @@
         </p:nvCxnSpPr>
         <p:spPr>
           <a:xfrm>
-            <a:off x="3371049" y="2709915"/>
+            <a:off x="3371049" y="2680289"/>
             <a:ext cx="2106092" cy="0"/>
           </a:xfrm>
           <a:prstGeom prst="line">
@@ -35802,7 +35802,7 @@
         </p:nvCxnSpPr>
         <p:spPr>
           <a:xfrm>
-            <a:off x="3371049" y="4099803"/>
+            <a:off x="3371049" y="4070177"/>
             <a:ext cx="2106092" cy="0"/>
           </a:xfrm>
           <a:prstGeom prst="line">
@@ -35833,21 +35833,21 @@
       </p:cxnSp>
       <p:cxnSp>
         <p:nvCxnSpPr>
-          <p:cNvPr id="25" name="Connector 24"/>
+          <p:cNvPr id="25" name="network-link:physical:2"/>
           <p:cNvCxnSpPr/>
           <p:nvPr/>
         </p:nvCxnSpPr>
         <p:spPr>
           <a:xfrm>
-            <a:off x="5477141" y="2709915"/>
-            <a:ext cx="2426132" cy="0"/>
+            <a:off x="5797181" y="3375233"/>
+            <a:ext cx="1786052" cy="0"/>
           </a:xfrm>
           <a:prstGeom prst="line">
             <a:avLst/>
           </a:prstGeom>
-          <a:ln w="25400">
+          <a:ln w="19050">
             <a:solidFill>
-              <a:srgbClr val="0D7870"/>
+              <a:srgbClr val="666E70"/>
             </a:solidFill>
           </a:ln>
           <a:effectLst/>
@@ -35875,119 +35875,16 @@
         </p:nvCxnSpPr>
         <p:spPr>
           <a:xfrm>
-            <a:off x="5477141" y="4099803"/>
+            <a:off x="5477141" y="2680289"/>
             <a:ext cx="2426132" cy="0"/>
           </a:xfrm>
           <a:prstGeom prst="line">
             <a:avLst/>
           </a:prstGeom>
           <a:ln w="25400">
-            <a:solidFill>
-              <a:srgbClr val="182C43"/>
-            </a:solidFill>
-          </a:ln>
-          <a:effectLst/>
-        </p:spPr>
-        <p:style>
-          <a:lnRef idx="2">
-            <a:schemeClr val="accent1"/>
-          </a:lnRef>
-          <a:fillRef idx="0">
-            <a:schemeClr val="accent1"/>
-          </a:fillRef>
-          <a:effectRef idx="1">
-            <a:schemeClr val="accent1"/>
-          </a:effectRef>
-          <a:fontRef idx="minor">
-            <a:schemeClr val="tx1"/>
-          </a:fontRef>
-        </p:style>
-      </p:cxnSp>
-      <p:sp>
-        <p:nvSpPr>
-          <p:cNvPr id="27" name="TextBox 26"/>
-          <p:cNvSpPr txBox="1"/>
-          <p:nvPr/>
-        </p:nvSpPr>
-        <p:spPr>
-          <a:xfrm>
-            <a:off x="5684367" y="3020811"/>
-            <a:ext cx="2011680" cy="310896"/>
-          </a:xfrm>
-          <a:prstGeom prst="rect">
-            <a:avLst/>
-          </a:prstGeom>
-          <a:solidFill>
-            <a:srgbClr val="F7F5EF"/>
-          </a:solidFill>
-        </p:spPr>
-        <p:txBody>
-          <a:bodyPr wrap="square" anchor="ctr" lIns="0" rIns="0" tIns="0" bIns="0">
-            <a:spAutoFit/>
-            <a:extLst>
-              <a:ext uri="{8AF73BB6-5E31-4F0F-A399-3D98F3B95FD9}">
-                <ns54:textLayout xmlns:ns54="urn:pptxdsl:text-layout:v1" role="compact"/>
-              </a:ext>
-            </a:extLst>
-          </a:bodyPr>
-          <a:lstStyle/>
-          <a:p>
-            <a:pPr algn="ctr">
-              <a:lnSpc>
-                <a:spcPct val="100000"/>
-              </a:lnSpc>
-            </a:pPr>
-            <a:r>
-              <a:rPr sz="850" b="1" lang="ja-JP">
-                <a:solidFill>
-                  <a:srgbClr val="182C43"/>
-                </a:solidFill>
-                <a:latin typeface="Yu Gothic"/>
-                <a:ea typeface="Yu Gothic"/>
-                <a:cs typeface="Yu Gothic"/>
-              </a:rPr>
-              <a:t>Trunk</a:t>
-            </a:r>
-          </a:p>
-          <a:p>
-            <a:pPr algn="ctr">
-              <a:lnSpc>
-                <a:spcPct val="100000"/>
-              </a:lnSpc>
-            </a:pPr>
-            <a:r>
-              <a:rPr sz="850" b="1" lang="ja-JP">
-                <a:solidFill>
-                  <a:srgbClr val="182C43"/>
-                </a:solidFill>
-                <a:latin typeface="Yu Gothic"/>
-                <a:ea typeface="Yu Gothic"/>
-                <a:cs typeface="Yu Gothic"/>
-              </a:rPr>
-              <a:t>業務VLAN / ゲストVLAN</a:t>
-            </a:r>
-          </a:p>
-        </p:txBody>
-      </p:sp>
-      <p:cxnSp>
-        <p:nvCxnSpPr>
-          <p:cNvPr id="28" name="Connector 27"/>
-          <p:cNvCxnSpPr/>
-          <p:nvPr/>
-        </p:nvCxnSpPr>
-        <p:spPr>
-          <a:xfrm>
-            <a:off x="7903273" y="2709915"/>
-            <a:ext cx="2106092" cy="0"/>
-          </a:xfrm>
-          <a:prstGeom prst="line">
-            <a:avLst/>
-          </a:prstGeom>
-          <a:ln w="20320">
             <a:solidFill>
               <a:srgbClr val="0D7870"/>
             </a:solidFill>
-            <a:tailEnd type="triangle" w="med" len="med"/>
           </a:ln>
           <a:effectLst/>
         </p:spPr>
@@ -36008,13 +35905,152 @@
       </p:cxnSp>
       <p:cxnSp>
         <p:nvCxnSpPr>
+          <p:cNvPr id="27" name="Connector 26"/>
+          <p:cNvCxnSpPr/>
+          <p:nvPr/>
+        </p:nvCxnSpPr>
+        <p:spPr>
+          <a:xfrm>
+            <a:off x="5477141" y="4070177"/>
+            <a:ext cx="2426132" cy="0"/>
+          </a:xfrm>
+          <a:prstGeom prst="line">
+            <a:avLst/>
+          </a:prstGeom>
+          <a:ln w="25400">
+            <a:solidFill>
+              <a:srgbClr val="182C43"/>
+            </a:solidFill>
+          </a:ln>
+          <a:effectLst/>
+        </p:spPr>
+        <p:style>
+          <a:lnRef idx="2">
+            <a:schemeClr val="accent1"/>
+          </a:lnRef>
+          <a:fillRef idx="0">
+            <a:schemeClr val="accent1"/>
+          </a:fillRef>
+          <a:effectRef idx="1">
+            <a:schemeClr val="accent1"/>
+          </a:effectRef>
+          <a:fontRef idx="minor">
+            <a:schemeClr val="tx1"/>
+          </a:fontRef>
+        </p:style>
+      </p:cxnSp>
+      <p:sp>
+        <p:nvSpPr>
+          <p:cNvPr id="28" name="network-link:trunk-label"/>
+          <p:cNvSpPr txBox="1"/>
+          <p:nvPr/>
+        </p:nvSpPr>
+        <p:spPr>
+          <a:xfrm>
+            <a:off x="5961545" y="2991185"/>
+            <a:ext cx="1457325" cy="310896"/>
+          </a:xfrm>
+          <a:prstGeom prst="rect">
+            <a:avLst/>
+          </a:prstGeom>
+          <a:solidFill>
+            <a:srgbClr val="F7F5EF"/>
+          </a:solidFill>
+        </p:spPr>
+        <p:txBody>
+          <a:bodyPr wrap="none" anchor="ctr" lIns="0" rIns="0" tIns="0" bIns="0">
+            <a:spAutoFit/>
+            <a:extLst>
+              <a:ext uri="{8AF73BB6-5E31-4F0F-A399-3D98F3B95FD9}">
+                <ns54:textLayout xmlns:ns54="urn:pptxdsl:text-layout:v1" role="compact"/>
+              </a:ext>
+            </a:extLst>
+          </a:bodyPr>
+          <a:lstStyle/>
+          <a:p>
+            <a:pPr algn="ctr">
+              <a:lnSpc>
+                <a:spcPct val="100000"/>
+              </a:lnSpc>
+            </a:pPr>
+            <a:r>
+              <a:rPr sz="850" b="1" lang="ja-JP">
+                <a:solidFill>
+                  <a:srgbClr val="182C43"/>
+                </a:solidFill>
+                <a:latin typeface="Yu Gothic"/>
+                <a:ea typeface="Yu Gothic"/>
+                <a:cs typeface="Yu Gothic"/>
+              </a:rPr>
+              <a:t>Trunk</a:t>
+            </a:r>
+          </a:p>
+          <a:p>
+            <a:pPr algn="ctr">
+              <a:lnSpc>
+                <a:spcPct val="100000"/>
+              </a:lnSpc>
+            </a:pPr>
+            <a:r>
+              <a:rPr sz="850" b="1" lang="ja-JP">
+                <a:solidFill>
+                  <a:srgbClr val="182C43"/>
+                </a:solidFill>
+                <a:latin typeface="Yu Gothic"/>
+                <a:ea typeface="Yu Gothic"/>
+                <a:cs typeface="Yu Gothic"/>
+              </a:rPr>
+              <a:t>業務VLAN / ゲストVLAN</a:t>
+            </a:r>
+          </a:p>
+        </p:txBody>
+      </p:sp>
+      <p:cxnSp>
+        <p:nvCxnSpPr>
           <p:cNvPr id="29" name="Connector 28"/>
           <p:cNvCxnSpPr/>
           <p:nvPr/>
         </p:nvCxnSpPr>
         <p:spPr>
           <a:xfrm>
-            <a:off x="7903273" y="4099803"/>
+            <a:off x="7903273" y="2680289"/>
+            <a:ext cx="2106092" cy="0"/>
+          </a:xfrm>
+          <a:prstGeom prst="line">
+            <a:avLst/>
+          </a:prstGeom>
+          <a:ln w="20320">
+            <a:solidFill>
+              <a:srgbClr val="0D7870"/>
+            </a:solidFill>
+            <a:tailEnd type="triangle" w="med" len="med"/>
+          </a:ln>
+          <a:effectLst/>
+        </p:spPr>
+        <p:style>
+          <a:lnRef idx="2">
+            <a:schemeClr val="accent1"/>
+          </a:lnRef>
+          <a:fillRef idx="0">
+            <a:schemeClr val="accent1"/>
+          </a:fillRef>
+          <a:effectRef idx="1">
+            <a:schemeClr val="accent1"/>
+          </a:effectRef>
+          <a:fontRef idx="minor">
+            <a:schemeClr val="tx1"/>
+          </a:fontRef>
+        </p:style>
+      </p:cxnSp>
+      <p:cxnSp>
+        <p:nvCxnSpPr>
+          <p:cNvPr id="30" name="Connector 29"/>
+          <p:cNvCxnSpPr/>
+          <p:nvPr/>
+        </p:nvCxnSpPr>
+        <p:spPr>
+          <a:xfrm>
+            <a:off x="7903273" y="4070177"/>
             <a:ext cx="2106092" cy="0"/>
           </a:xfrm>
           <a:prstGeom prst="line">
@@ -36045,13 +36081,245 @@
       </p:cxnSp>
       <p:sp>
         <p:nvSpPr>
-          <p:cNvPr id="30" name="Oval 29"/>
+          <p:cNvPr id="31" name="Oval 30"/>
           <p:cNvSpPr/>
           <p:nvPr/>
         </p:nvSpPr>
         <p:spPr>
           <a:xfrm>
-            <a:off x="2740113" y="2399019"/>
+            <a:off x="2740113" y="2369393"/>
+            <a:ext cx="621792" cy="621792"/>
+          </a:xfrm>
+          <a:prstGeom prst="ellipse">
+            <a:avLst/>
+          </a:prstGeom>
+          <a:solidFill>
+            <a:srgbClr val="D9EBE8"/>
+          </a:solidFill>
+          <a:ln>
+            <a:noFill/>
+          </a:ln>
+          <a:effectLst/>
+        </p:spPr>
+        <p:style>
+          <a:lnRef idx="1">
+            <a:schemeClr val="accent1"/>
+          </a:lnRef>
+          <a:fillRef idx="3">
+            <a:schemeClr val="accent1"/>
+          </a:fillRef>
+          <a:effectRef idx="2">
+            <a:schemeClr val="accent1"/>
+          </a:effectRef>
+          <a:fontRef idx="minor">
+            <a:schemeClr val="lt1"/>
+          </a:fontRef>
+        </p:style>
+        <p:txBody>
+          <a:bodyPr rtlCol="0" anchor="ctr"/>
+          <a:lstStyle/>
+          <a:p>
+            <a:pPr algn="ctr"/>
+          </a:p>
+        </p:txBody>
+      </p:sp>
+      <p:pic>
+        <p:nvPicPr>
+          <p:cNvPr id="32" name="Picture 31" descr="laptop.png"/>
+          <p:cNvPicPr>
+            <a:picLocks noChangeAspect="1"/>
+          </p:cNvPicPr>
+          <p:nvPr/>
+        </p:nvPicPr>
+        <p:blipFill>
+          <a:blip r:embed="rId2"/>
+          <a:stretch>
+            <a:fillRect/>
+          </a:stretch>
+        </p:blipFill>
+        <p:spPr>
+          <a:xfrm>
+            <a:off x="2794977" y="2424257"/>
+            <a:ext cx="512064" cy="512064"/>
+          </a:xfrm>
+          <a:prstGeom prst="rect">
+            <a:avLst/>
+          </a:prstGeom>
+        </p:spPr>
+      </p:pic>
+      <p:sp>
+        <p:nvSpPr>
+          <p:cNvPr id="33" name="network-node:label"/>
+          <p:cNvSpPr txBox="1"/>
+          <p:nvPr/>
+        </p:nvSpPr>
+        <p:spPr>
+          <a:xfrm>
+            <a:off x="2695536" y="3009473"/>
+            <a:ext cx="710946" cy="158305"/>
+          </a:xfrm>
+          <a:prstGeom prst="rect">
+            <a:avLst/>
+          </a:prstGeom>
+          <a:solidFill>
+            <a:srgbClr val="D9EBE8"/>
+          </a:solidFill>
+        </p:spPr>
+        <p:txBody>
+          <a:bodyPr wrap="none" anchor="ctr" lIns="0" rIns="0" tIns="0" bIns="0">
+            <a:spAutoFit/>
+            <a:extLst>
+              <a:ext uri="{8AF73BB6-5E31-4F0F-A399-3D98F3B95FD9}">
+                <ns63:textLayout xmlns:ns63="urn:pptxdsl:text-layout:v1" role="compact"/>
+              </a:ext>
+            </a:extLst>
+          </a:bodyPr>
+          <a:lstStyle/>
+          <a:p>
+            <a:pPr algn="ctr">
+              <a:lnSpc>
+                <a:spcPct val="105000"/>
+              </a:lnSpc>
+            </a:pPr>
+            <a:r>
+              <a:rPr sz="1050" b="1" lang="ja-JP">
+                <a:solidFill>
+                  <a:srgbClr val="182C43"/>
+                </a:solidFill>
+                <a:latin typeface="Yu Gothic"/>
+                <a:ea typeface="Yu Gothic"/>
+                <a:cs typeface="Yu Gothic"/>
+              </a:rPr>
+              <a:t>業務PC A</a:t>
+            </a:r>
+          </a:p>
+        </p:txBody>
+      </p:sp>
+      <p:sp>
+        <p:nvSpPr>
+          <p:cNvPr id="34" name="Oval 33"/>
+          <p:cNvSpPr/>
+          <p:nvPr/>
+        </p:nvSpPr>
+        <p:spPr>
+          <a:xfrm>
+            <a:off x="2740113" y="3759281"/>
+            <a:ext cx="621792" cy="621792"/>
+          </a:xfrm>
+          <a:prstGeom prst="ellipse">
+            <a:avLst/>
+          </a:prstGeom>
+          <a:solidFill>
+            <a:srgbClr val="E4E9EE"/>
+          </a:solidFill>
+          <a:ln>
+            <a:noFill/>
+          </a:ln>
+          <a:effectLst/>
+        </p:spPr>
+        <p:style>
+          <a:lnRef idx="1">
+            <a:schemeClr val="accent1"/>
+          </a:lnRef>
+          <a:fillRef idx="3">
+            <a:schemeClr val="accent1"/>
+          </a:fillRef>
+          <a:effectRef idx="2">
+            <a:schemeClr val="accent1"/>
+          </a:effectRef>
+          <a:fontRef idx="minor">
+            <a:schemeClr val="lt1"/>
+          </a:fontRef>
+        </p:style>
+        <p:txBody>
+          <a:bodyPr rtlCol="0" anchor="ctr"/>
+          <a:lstStyle/>
+          <a:p>
+            <a:pPr algn="ctr"/>
+          </a:p>
+        </p:txBody>
+      </p:sp>
+      <p:pic>
+        <p:nvPicPr>
+          <p:cNvPr id="35" name="Picture 34" descr="phone.png"/>
+          <p:cNvPicPr>
+            <a:picLocks noChangeAspect="1"/>
+          </p:cNvPicPr>
+          <p:nvPr/>
+        </p:nvPicPr>
+        <p:blipFill>
+          <a:blip r:embed="rId3"/>
+          <a:stretch>
+            <a:fillRect/>
+          </a:stretch>
+        </p:blipFill>
+        <p:spPr>
+          <a:xfrm>
+            <a:off x="2794977" y="3814145"/>
+            <a:ext cx="512064" cy="512064"/>
+          </a:xfrm>
+          <a:prstGeom prst="rect">
+            <a:avLst/>
+          </a:prstGeom>
+        </p:spPr>
+      </p:pic>
+      <p:sp>
+        <p:nvSpPr>
+          <p:cNvPr id="36" name="network-node:label"/>
+          <p:cNvSpPr txBox="1"/>
+          <p:nvPr/>
+        </p:nvSpPr>
+        <p:spPr>
+          <a:xfrm>
+            <a:off x="2582379" y="4399361"/>
+            <a:ext cx="937260" cy="158305"/>
+          </a:xfrm>
+          <a:prstGeom prst="rect">
+            <a:avLst/>
+          </a:prstGeom>
+          <a:solidFill>
+            <a:srgbClr val="E4E9EE"/>
+          </a:solidFill>
+        </p:spPr>
+        <p:txBody>
+          <a:bodyPr wrap="none" anchor="ctr" lIns="0" rIns="0" tIns="0" bIns="0">
+            <a:spAutoFit/>
+            <a:extLst>
+              <a:ext uri="{8AF73BB6-5E31-4F0F-A399-3D98F3B95FD9}">
+                <ns68:textLayout xmlns:ns68="urn:pptxdsl:text-layout:v1" role="compact"/>
+              </a:ext>
+            </a:extLst>
+          </a:bodyPr>
+          <a:lstStyle/>
+          <a:p>
+            <a:pPr algn="ctr">
+              <a:lnSpc>
+                <a:spcPct val="105000"/>
+              </a:lnSpc>
+            </a:pPr>
+            <a:r>
+              <a:rPr sz="1050" b="1" lang="ja-JP">
+                <a:solidFill>
+                  <a:srgbClr val="182C43"/>
+                </a:solidFill>
+                <a:latin typeface="Yu Gothic"/>
+                <a:ea typeface="Yu Gothic"/>
+                <a:cs typeface="Yu Gothic"/>
+              </a:rPr>
+              <a:t>ゲスト端末 A</a:t>
+            </a:r>
+          </a:p>
+        </p:txBody>
+      </p:sp>
+      <p:sp>
+        <p:nvSpPr>
+          <p:cNvPr id="37" name="Oval 36"/>
+          <p:cNvSpPr/>
+          <p:nvPr/>
+        </p:nvSpPr>
+        <p:spPr>
+          <a:xfrm>
+            <a:off x="5166245" y="3064337"/>
             <a:ext cx="621792" cy="621792"/>
           </a:xfrm>
           <a:prstGeom prst="ellipse">
@@ -36089,21 +36357,21 @@
       </p:sp>
       <p:pic>
         <p:nvPicPr>
-          <p:cNvPr id="31" name="Picture 30" descr="laptop.png"/>
+          <p:cNvPr id="38" name="Picture 37" descr="switch.png"/>
           <p:cNvPicPr>
             <a:picLocks noChangeAspect="1"/>
           </p:cNvPicPr>
           <p:nvPr/>
         </p:nvPicPr>
         <p:blipFill>
-          <a:blip r:embed="rId2"/>
+          <a:blip r:embed="rId4"/>
           <a:stretch>
             <a:fillRect/>
           </a:stretch>
         </p:blipFill>
         <p:spPr>
           <a:xfrm>
-            <a:off x="2794977" y="2453883"/>
+            <a:off x="5221109" y="3119201"/>
             <a:ext cx="512064" cy="512064"/>
           </a:xfrm>
           <a:prstGeom prst="rect">
@@ -36113,14 +36381,14 @@
       </p:pic>
       <p:sp>
         <p:nvSpPr>
-          <p:cNvPr id="32" name="TextBox 31"/>
-          <p:cNvSpPr txBox="1"/>
-          <p:nvPr/>
-        </p:nvSpPr>
-        <p:spPr>
-          <a:xfrm>
-            <a:off x="2282913" y="3039099"/>
-            <a:ext cx="1536192" cy="158305"/>
+          <p:cNvPr id="39" name="network-node:label"/>
+          <p:cNvSpPr txBox="1"/>
+          <p:nvPr/>
+        </p:nvSpPr>
+        <p:spPr>
+          <a:xfrm>
+            <a:off x="5101094" y="3704417"/>
+            <a:ext cx="752094" cy="158305"/>
           </a:xfrm>
           <a:prstGeom prst="rect">
             <a:avLst/>
@@ -36130,11 +36398,11 @@
           </a:solidFill>
         </p:spPr>
         <p:txBody>
-          <a:bodyPr wrap="square" anchor="ctr" lIns="0" rIns="0" tIns="0" bIns="0">
-            <a:spAutoFit/>
-            <a:extLst>
-              <a:ext uri="{8AF73BB6-5E31-4F0F-A399-3D98F3B95FD9}">
-                <ns63:textLayout xmlns:ns63="urn:pptxdsl:text-layout:v1" role="compact"/>
+          <a:bodyPr wrap="none" anchor="ctr" lIns="0" rIns="0" tIns="0" bIns="0">
+            <a:spAutoFit/>
+            <a:extLst>
+              <a:ext uri="{8AF73BB6-5E31-4F0F-A399-3D98F3B95FD9}">
+                <ns73:textLayout xmlns:ns73="urn:pptxdsl:text-layout:v1" role="compact"/>
               </a:ext>
             </a:extLst>
           </a:bodyPr>
@@ -36154,20 +36422,20 @@
                 <a:ea typeface="Yu Gothic"/>
                 <a:cs typeface="Yu Gothic"/>
               </a:rPr>
-              <a:t>業務PC A</a:t>
-            </a:r>
-          </a:p>
-        </p:txBody>
-      </p:sp>
-      <p:sp>
-        <p:nvSpPr>
-          <p:cNvPr id="33" name="Oval 32"/>
+              <a:t>スイッチA</a:t>
+            </a:r>
+          </a:p>
+        </p:txBody>
+      </p:sp>
+      <p:sp>
+        <p:nvSpPr>
+          <p:cNvPr id="40" name="Oval 39"/>
           <p:cNvSpPr/>
           <p:nvPr/>
         </p:nvSpPr>
         <p:spPr>
           <a:xfrm>
-            <a:off x="2740113" y="3788907"/>
+            <a:off x="7592377" y="3064337"/>
             <a:ext cx="621792" cy="621792"/>
           </a:xfrm>
           <a:prstGeom prst="ellipse">
@@ -36205,7 +36473,239 @@
       </p:sp>
       <p:pic>
         <p:nvPicPr>
-          <p:cNvPr id="34" name="Picture 33" descr="phone.png"/>
+          <p:cNvPr id="41" name="Picture 40" descr="switch.png"/>
+          <p:cNvPicPr>
+            <a:picLocks noChangeAspect="1"/>
+          </p:cNvPicPr>
+          <p:nvPr/>
+        </p:nvPicPr>
+        <p:blipFill>
+          <a:blip r:embed="rId4"/>
+          <a:stretch>
+            <a:fillRect/>
+          </a:stretch>
+        </p:blipFill>
+        <p:spPr>
+          <a:xfrm>
+            <a:off x="7647241" y="3119201"/>
+            <a:ext cx="512064" cy="512064"/>
+          </a:xfrm>
+          <a:prstGeom prst="rect">
+            <a:avLst/>
+          </a:prstGeom>
+        </p:spPr>
+      </p:pic>
+      <p:sp>
+        <p:nvSpPr>
+          <p:cNvPr id="42" name="network-node:label"/>
+          <p:cNvSpPr txBox="1"/>
+          <p:nvPr/>
+        </p:nvSpPr>
+        <p:spPr>
+          <a:xfrm>
+            <a:off x="7527226" y="3704417"/>
+            <a:ext cx="752094" cy="158305"/>
+          </a:xfrm>
+          <a:prstGeom prst="rect">
+            <a:avLst/>
+          </a:prstGeom>
+          <a:solidFill>
+            <a:srgbClr val="F7F5EF"/>
+          </a:solidFill>
+        </p:spPr>
+        <p:txBody>
+          <a:bodyPr wrap="none" anchor="ctr" lIns="0" rIns="0" tIns="0" bIns="0">
+            <a:spAutoFit/>
+            <a:extLst>
+              <a:ext uri="{8AF73BB6-5E31-4F0F-A399-3D98F3B95FD9}">
+                <ns78:textLayout xmlns:ns78="urn:pptxdsl:text-layout:v1" role="compact"/>
+              </a:ext>
+            </a:extLst>
+          </a:bodyPr>
+          <a:lstStyle/>
+          <a:p>
+            <a:pPr algn="ctr">
+              <a:lnSpc>
+                <a:spcPct val="105000"/>
+              </a:lnSpc>
+            </a:pPr>
+            <a:r>
+              <a:rPr sz="1050" b="1" lang="ja-JP">
+                <a:solidFill>
+                  <a:srgbClr val="182C43"/>
+                </a:solidFill>
+                <a:latin typeface="Yu Gothic"/>
+                <a:ea typeface="Yu Gothic"/>
+                <a:cs typeface="Yu Gothic"/>
+              </a:rPr>
+              <a:t>スイッチB</a:t>
+            </a:r>
+          </a:p>
+        </p:txBody>
+      </p:sp>
+      <p:sp>
+        <p:nvSpPr>
+          <p:cNvPr id="43" name="Oval 42"/>
+          <p:cNvSpPr/>
+          <p:nvPr/>
+        </p:nvSpPr>
+        <p:spPr>
+          <a:xfrm>
+            <a:off x="10018509" y="2369393"/>
+            <a:ext cx="621792" cy="621792"/>
+          </a:xfrm>
+          <a:prstGeom prst="ellipse">
+            <a:avLst/>
+          </a:prstGeom>
+          <a:solidFill>
+            <a:srgbClr val="D9EBE8"/>
+          </a:solidFill>
+          <a:ln>
+            <a:noFill/>
+          </a:ln>
+          <a:effectLst/>
+        </p:spPr>
+        <p:style>
+          <a:lnRef idx="1">
+            <a:schemeClr val="accent1"/>
+          </a:lnRef>
+          <a:fillRef idx="3">
+            <a:schemeClr val="accent1"/>
+          </a:fillRef>
+          <a:effectRef idx="2">
+            <a:schemeClr val="accent1"/>
+          </a:effectRef>
+          <a:fontRef idx="minor">
+            <a:schemeClr val="lt1"/>
+          </a:fontRef>
+        </p:style>
+        <p:txBody>
+          <a:bodyPr rtlCol="0" anchor="ctr"/>
+          <a:lstStyle/>
+          <a:p>
+            <a:pPr algn="ctr"/>
+          </a:p>
+        </p:txBody>
+      </p:sp>
+      <p:pic>
+        <p:nvPicPr>
+          <p:cNvPr id="44" name="Picture 43" descr="desktop.png"/>
+          <p:cNvPicPr>
+            <a:picLocks noChangeAspect="1"/>
+          </p:cNvPicPr>
+          <p:nvPr/>
+        </p:nvPicPr>
+        <p:blipFill>
+          <a:blip r:embed="rId5"/>
+          <a:stretch>
+            <a:fillRect/>
+          </a:stretch>
+        </p:blipFill>
+        <p:spPr>
+          <a:xfrm>
+            <a:off x="10073373" y="2424257"/>
+            <a:ext cx="512064" cy="512064"/>
+          </a:xfrm>
+          <a:prstGeom prst="rect">
+            <a:avLst/>
+          </a:prstGeom>
+        </p:spPr>
+      </p:pic>
+      <p:sp>
+        <p:nvSpPr>
+          <p:cNvPr id="45" name="network-node:label"/>
+          <p:cNvSpPr txBox="1"/>
+          <p:nvPr/>
+        </p:nvSpPr>
+        <p:spPr>
+          <a:xfrm>
+            <a:off x="9973932" y="3009473"/>
+            <a:ext cx="710946" cy="158305"/>
+          </a:xfrm>
+          <a:prstGeom prst="rect">
+            <a:avLst/>
+          </a:prstGeom>
+          <a:solidFill>
+            <a:srgbClr val="D9EBE8"/>
+          </a:solidFill>
+        </p:spPr>
+        <p:txBody>
+          <a:bodyPr wrap="none" anchor="ctr" lIns="0" rIns="0" tIns="0" bIns="0">
+            <a:spAutoFit/>
+            <a:extLst>
+              <a:ext uri="{8AF73BB6-5E31-4F0F-A399-3D98F3B95FD9}">
+                <ns83:textLayout xmlns:ns83="urn:pptxdsl:text-layout:v1" role="compact"/>
+              </a:ext>
+            </a:extLst>
+          </a:bodyPr>
+          <a:lstStyle/>
+          <a:p>
+            <a:pPr algn="ctr">
+              <a:lnSpc>
+                <a:spcPct val="105000"/>
+              </a:lnSpc>
+            </a:pPr>
+            <a:r>
+              <a:rPr sz="1050" b="1" lang="ja-JP">
+                <a:solidFill>
+                  <a:srgbClr val="182C43"/>
+                </a:solidFill>
+                <a:latin typeface="Yu Gothic"/>
+                <a:ea typeface="Yu Gothic"/>
+                <a:cs typeface="Yu Gothic"/>
+              </a:rPr>
+              <a:t>業務PC B</a:t>
+            </a:r>
+          </a:p>
+        </p:txBody>
+      </p:sp>
+      <p:sp>
+        <p:nvSpPr>
+          <p:cNvPr id="46" name="Oval 45"/>
+          <p:cNvSpPr/>
+          <p:nvPr/>
+        </p:nvSpPr>
+        <p:spPr>
+          <a:xfrm>
+            <a:off x="10018509" y="3759281"/>
+            <a:ext cx="621792" cy="621792"/>
+          </a:xfrm>
+          <a:prstGeom prst="ellipse">
+            <a:avLst/>
+          </a:prstGeom>
+          <a:solidFill>
+            <a:srgbClr val="E4E9EE"/>
+          </a:solidFill>
+          <a:ln>
+            <a:noFill/>
+          </a:ln>
+          <a:effectLst/>
+        </p:spPr>
+        <p:style>
+          <a:lnRef idx="1">
+            <a:schemeClr val="accent1"/>
+          </a:lnRef>
+          <a:fillRef idx="3">
+            <a:schemeClr val="accent1"/>
+          </a:fillRef>
+          <a:effectRef idx="2">
+            <a:schemeClr val="accent1"/>
+          </a:effectRef>
+          <a:fontRef idx="minor">
+            <a:schemeClr val="lt1"/>
+          </a:fontRef>
+        </p:style>
+        <p:txBody>
+          <a:bodyPr rtlCol="0" anchor="ctr"/>
+          <a:lstStyle/>
+          <a:p>
+            <a:pPr algn="ctr"/>
+          </a:p>
+        </p:txBody>
+      </p:sp>
+      <p:pic>
+        <p:nvPicPr>
+          <p:cNvPr id="47" name="Picture 46" descr="phone.png"/>
           <p:cNvPicPr>
             <a:picLocks noChangeAspect="1"/>
           </p:cNvPicPr>
@@ -36219,7 +36719,7 @@
         </p:blipFill>
         <p:spPr>
           <a:xfrm>
-            <a:off x="2794977" y="3843771"/>
+            <a:off x="10073373" y="3814145"/>
             <a:ext cx="512064" cy="512064"/>
           </a:xfrm>
           <a:prstGeom prst="rect">
@@ -36229,28 +36729,28 @@
       </p:pic>
       <p:sp>
         <p:nvSpPr>
-          <p:cNvPr id="35" name="TextBox 34"/>
-          <p:cNvSpPr txBox="1"/>
-          <p:nvPr/>
-        </p:nvSpPr>
-        <p:spPr>
-          <a:xfrm>
-            <a:off x="2282913" y="4428987"/>
-            <a:ext cx="1536192" cy="158305"/>
+          <p:cNvPr id="48" name="network-node:label"/>
+          <p:cNvSpPr txBox="1"/>
+          <p:nvPr/>
+        </p:nvSpPr>
+        <p:spPr>
+          <a:xfrm>
+            <a:off x="9860775" y="4399361"/>
+            <a:ext cx="937260" cy="158305"/>
           </a:xfrm>
           <a:prstGeom prst="rect">
             <a:avLst/>
           </a:prstGeom>
           <a:solidFill>
-            <a:srgbClr val="F7F5EF"/>
+            <a:srgbClr val="E4E9EE"/>
           </a:solidFill>
         </p:spPr>
         <p:txBody>
-          <a:bodyPr wrap="square" anchor="ctr" lIns="0" rIns="0" tIns="0" bIns="0">
-            <a:spAutoFit/>
-            <a:extLst>
-              <a:ext uri="{8AF73BB6-5E31-4F0F-A399-3D98F3B95FD9}">
-                <ns68:textLayout xmlns:ns68="urn:pptxdsl:text-layout:v1" role="compact"/>
+          <a:bodyPr wrap="none" anchor="ctr" lIns="0" rIns="0" tIns="0" bIns="0">
+            <a:spAutoFit/>
+            <a:extLst>
+              <a:ext uri="{8AF73BB6-5E31-4F0F-A399-3D98F3B95FD9}">
+                <ns88:textLayout xmlns:ns88="urn:pptxdsl:text-layout:v1" role="compact"/>
               </a:ext>
             </a:extLst>
           </a:bodyPr>
@@ -36270,484 +36770,102 @@
                 <a:ea typeface="Yu Gothic"/>
                 <a:cs typeface="Yu Gothic"/>
               </a:rPr>
-              <a:t>ゲスト端末 A</a:t>
-            </a:r>
-          </a:p>
-        </p:txBody>
-      </p:sp>
-      <p:sp>
-        <p:nvSpPr>
-          <p:cNvPr id="36" name="Oval 35"/>
-          <p:cNvSpPr/>
-          <p:nvPr/>
-        </p:nvSpPr>
-        <p:spPr>
-          <a:xfrm>
-            <a:off x="5166245" y="3093963"/>
-            <a:ext cx="621792" cy="621792"/>
-          </a:xfrm>
-          <a:prstGeom prst="ellipse">
-            <a:avLst/>
-          </a:prstGeom>
-          <a:solidFill>
-            <a:srgbClr val="F7F5EF"/>
-          </a:solidFill>
-          <a:ln>
-            <a:noFill/>
+              <a:t>ゲスト端末 B</a:t>
+            </a:r>
+          </a:p>
+        </p:txBody>
+      </p:sp>
+      <p:cxnSp>
+        <p:nvCxnSpPr>
+          <p:cNvPr id="49" name="Connector 48"/>
+          <p:cNvCxnSpPr/>
+          <p:nvPr/>
+        </p:nvCxnSpPr>
+        <p:spPr>
+          <a:xfrm>
+            <a:off x="576072" y="6126479"/>
+            <a:ext cx="256032" cy="0"/>
+          </a:xfrm>
+          <a:prstGeom prst="line">
+            <a:avLst/>
+          </a:prstGeom>
+          <a:ln w="19050">
+            <a:solidFill>
+              <a:srgbClr val="666E70"/>
+            </a:solidFill>
           </a:ln>
           <a:effectLst/>
         </p:spPr>
         <p:style>
-          <a:lnRef idx="1">
+          <a:lnRef idx="2">
             <a:schemeClr val="accent1"/>
           </a:lnRef>
-          <a:fillRef idx="3">
+          <a:fillRef idx="0">
             <a:schemeClr val="accent1"/>
           </a:fillRef>
-          <a:effectRef idx="2">
+          <a:effectRef idx="1">
             <a:schemeClr val="accent1"/>
           </a:effectRef>
           <a:fontRef idx="minor">
-            <a:schemeClr val="lt1"/>
+            <a:schemeClr val="tx1"/>
           </a:fontRef>
         </p:style>
-        <p:txBody>
-          <a:bodyPr rtlCol="0" anchor="ctr"/>
-          <a:lstStyle/>
-          <a:p>
-            <a:pPr algn="ctr"/>
-          </a:p>
-        </p:txBody>
-      </p:sp>
-      <p:pic>
-        <p:nvPicPr>
-          <p:cNvPr id="37" name="Picture 36" descr="switch.png"/>
-          <p:cNvPicPr>
-            <a:picLocks noChangeAspect="1"/>
-          </p:cNvPicPr>
-          <p:nvPr/>
-        </p:nvPicPr>
-        <p:blipFill>
-          <a:blip r:embed="rId4"/>
-          <a:stretch>
-            <a:fillRect/>
-          </a:stretch>
-        </p:blipFill>
-        <p:spPr>
-          <a:xfrm>
-            <a:off x="5221109" y="3148827"/>
-            <a:ext cx="512064" cy="512064"/>
-          </a:xfrm>
-          <a:prstGeom prst="rect">
-            <a:avLst/>
-          </a:prstGeom>
-        </p:spPr>
-      </p:pic>
-      <p:sp>
-        <p:nvSpPr>
-          <p:cNvPr id="38" name="TextBox 37"/>
-          <p:cNvSpPr txBox="1"/>
-          <p:nvPr/>
-        </p:nvSpPr>
-        <p:spPr>
-          <a:xfrm>
-            <a:off x="4709045" y="3734043"/>
-            <a:ext cx="1536192" cy="158305"/>
-          </a:xfrm>
-          <a:prstGeom prst="rect">
-            <a:avLst/>
-          </a:prstGeom>
-          <a:solidFill>
-            <a:srgbClr val="F7F5EF"/>
-          </a:solidFill>
-        </p:spPr>
-        <p:txBody>
-          <a:bodyPr wrap="square" anchor="ctr" lIns="0" rIns="0" tIns="0" bIns="0">
-            <a:spAutoFit/>
-            <a:extLst>
-              <a:ext uri="{8AF73BB6-5E31-4F0F-A399-3D98F3B95FD9}">
-                <ns73:textLayout xmlns:ns73="urn:pptxdsl:text-layout:v1" role="compact"/>
-              </a:ext>
-            </a:extLst>
-          </a:bodyPr>
-          <a:lstStyle/>
-          <a:p>
-            <a:pPr algn="ctr">
-              <a:lnSpc>
-                <a:spcPct val="105000"/>
-              </a:lnSpc>
-            </a:pPr>
-            <a:r>
-              <a:rPr sz="1050" b="1" lang="ja-JP">
-                <a:solidFill>
-                  <a:srgbClr val="182C43"/>
-                </a:solidFill>
-                <a:latin typeface="Yu Gothic"/>
-                <a:ea typeface="Yu Gothic"/>
-                <a:cs typeface="Yu Gothic"/>
-              </a:rPr>
-              <a:t>スイッチA</a:t>
-            </a:r>
-          </a:p>
-        </p:txBody>
-      </p:sp>
-      <p:sp>
-        <p:nvSpPr>
-          <p:cNvPr id="39" name="Oval 38"/>
-          <p:cNvSpPr/>
-          <p:nvPr/>
-        </p:nvSpPr>
-        <p:spPr>
-          <a:xfrm>
-            <a:off x="7592377" y="3093963"/>
-            <a:ext cx="621792" cy="621792"/>
-          </a:xfrm>
-          <a:prstGeom prst="ellipse">
-            <a:avLst/>
-          </a:prstGeom>
-          <a:solidFill>
-            <a:srgbClr val="F7F5EF"/>
-          </a:solidFill>
-          <a:ln>
-            <a:noFill/>
-          </a:ln>
-          <a:effectLst/>
-        </p:spPr>
-        <p:style>
-          <a:lnRef idx="1">
-            <a:schemeClr val="accent1"/>
-          </a:lnRef>
-          <a:fillRef idx="3">
-            <a:schemeClr val="accent1"/>
-          </a:fillRef>
-          <a:effectRef idx="2">
-            <a:schemeClr val="accent1"/>
-          </a:effectRef>
-          <a:fontRef idx="minor">
-            <a:schemeClr val="lt1"/>
-          </a:fontRef>
-        </p:style>
-        <p:txBody>
-          <a:bodyPr rtlCol="0" anchor="ctr"/>
-          <a:lstStyle/>
-          <a:p>
-            <a:pPr algn="ctr"/>
-          </a:p>
-        </p:txBody>
-      </p:sp>
-      <p:pic>
-        <p:nvPicPr>
-          <p:cNvPr id="40" name="Picture 39" descr="switch.png"/>
-          <p:cNvPicPr>
-            <a:picLocks noChangeAspect="1"/>
-          </p:cNvPicPr>
-          <p:nvPr/>
-        </p:nvPicPr>
-        <p:blipFill>
-          <a:blip r:embed="rId4"/>
-          <a:stretch>
-            <a:fillRect/>
-          </a:stretch>
-        </p:blipFill>
-        <p:spPr>
-          <a:xfrm>
-            <a:off x="7647241" y="3148827"/>
-            <a:ext cx="512064" cy="512064"/>
-          </a:xfrm>
-          <a:prstGeom prst="rect">
-            <a:avLst/>
-          </a:prstGeom>
-        </p:spPr>
-      </p:pic>
-      <p:sp>
-        <p:nvSpPr>
-          <p:cNvPr id="41" name="TextBox 40"/>
-          <p:cNvSpPr txBox="1"/>
-          <p:nvPr/>
-        </p:nvSpPr>
-        <p:spPr>
-          <a:xfrm>
-            <a:off x="7135177" y="3734043"/>
-            <a:ext cx="1536192" cy="158305"/>
-          </a:xfrm>
-          <a:prstGeom prst="rect">
-            <a:avLst/>
-          </a:prstGeom>
-          <a:solidFill>
-            <a:srgbClr val="F7F5EF"/>
-          </a:solidFill>
-        </p:spPr>
-        <p:txBody>
-          <a:bodyPr wrap="square" anchor="ctr" lIns="0" rIns="0" tIns="0" bIns="0">
-            <a:spAutoFit/>
-            <a:extLst>
-              <a:ext uri="{8AF73BB6-5E31-4F0F-A399-3D98F3B95FD9}">
-                <ns78:textLayout xmlns:ns78="urn:pptxdsl:text-layout:v1" role="compact"/>
-              </a:ext>
-            </a:extLst>
-          </a:bodyPr>
-          <a:lstStyle/>
-          <a:p>
-            <a:pPr algn="ctr">
-              <a:lnSpc>
-                <a:spcPct val="105000"/>
-              </a:lnSpc>
-            </a:pPr>
-            <a:r>
-              <a:rPr sz="1050" b="1" lang="ja-JP">
-                <a:solidFill>
-                  <a:srgbClr val="182C43"/>
-                </a:solidFill>
-                <a:latin typeface="Yu Gothic"/>
-                <a:ea typeface="Yu Gothic"/>
-                <a:cs typeface="Yu Gothic"/>
-              </a:rPr>
-              <a:t>スイッチB</a:t>
-            </a:r>
-          </a:p>
-        </p:txBody>
-      </p:sp>
-      <p:sp>
-        <p:nvSpPr>
-          <p:cNvPr id="42" name="Oval 41"/>
-          <p:cNvSpPr/>
-          <p:nvPr/>
-        </p:nvSpPr>
-        <p:spPr>
-          <a:xfrm>
-            <a:off x="10018509" y="2399019"/>
-            <a:ext cx="621792" cy="621792"/>
-          </a:xfrm>
-          <a:prstGeom prst="ellipse">
-            <a:avLst/>
-          </a:prstGeom>
-          <a:solidFill>
-            <a:srgbClr val="F7F5EF"/>
-          </a:solidFill>
-          <a:ln>
-            <a:noFill/>
-          </a:ln>
-          <a:effectLst/>
-        </p:spPr>
-        <p:style>
-          <a:lnRef idx="1">
-            <a:schemeClr val="accent1"/>
-          </a:lnRef>
-          <a:fillRef idx="3">
-            <a:schemeClr val="accent1"/>
-          </a:fillRef>
-          <a:effectRef idx="2">
-            <a:schemeClr val="accent1"/>
-          </a:effectRef>
-          <a:fontRef idx="minor">
-            <a:schemeClr val="lt1"/>
-          </a:fontRef>
-        </p:style>
-        <p:txBody>
-          <a:bodyPr rtlCol="0" anchor="ctr"/>
-          <a:lstStyle/>
-          <a:p>
-            <a:pPr algn="ctr"/>
-          </a:p>
-        </p:txBody>
-      </p:sp>
-      <p:pic>
-        <p:nvPicPr>
-          <p:cNvPr id="43" name="Picture 42" descr="desktop.png"/>
-          <p:cNvPicPr>
-            <a:picLocks noChangeAspect="1"/>
-          </p:cNvPicPr>
-          <p:nvPr/>
-        </p:nvPicPr>
-        <p:blipFill>
-          <a:blip r:embed="rId5"/>
-          <a:stretch>
-            <a:fillRect/>
-          </a:stretch>
-        </p:blipFill>
-        <p:spPr>
-          <a:xfrm>
-            <a:off x="10073373" y="2453883"/>
-            <a:ext cx="512064" cy="512064"/>
-          </a:xfrm>
-          <a:prstGeom prst="rect">
-            <a:avLst/>
-          </a:prstGeom>
-        </p:spPr>
-      </p:pic>
-      <p:sp>
-        <p:nvSpPr>
-          <p:cNvPr id="44" name="TextBox 43"/>
-          <p:cNvSpPr txBox="1"/>
-          <p:nvPr/>
-        </p:nvSpPr>
-        <p:spPr>
-          <a:xfrm>
-            <a:off x="9561309" y="3039099"/>
-            <a:ext cx="1536192" cy="158305"/>
-          </a:xfrm>
-          <a:prstGeom prst="rect">
-            <a:avLst/>
-          </a:prstGeom>
-          <a:solidFill>
-            <a:srgbClr val="F7F5EF"/>
-          </a:solidFill>
-        </p:spPr>
-        <p:txBody>
-          <a:bodyPr wrap="square" anchor="ctr" lIns="0" rIns="0" tIns="0" bIns="0">
-            <a:spAutoFit/>
-            <a:extLst>
-              <a:ext uri="{8AF73BB6-5E31-4F0F-A399-3D98F3B95FD9}">
-                <ns83:textLayout xmlns:ns83="urn:pptxdsl:text-layout:v1" role="compact"/>
-              </a:ext>
-            </a:extLst>
-          </a:bodyPr>
-          <a:lstStyle/>
-          <a:p>
-            <a:pPr algn="ctr">
-              <a:lnSpc>
-                <a:spcPct val="105000"/>
-              </a:lnSpc>
-            </a:pPr>
-            <a:r>
-              <a:rPr sz="1050" b="1" lang="ja-JP">
-                <a:solidFill>
-                  <a:srgbClr val="182C43"/>
-                </a:solidFill>
-                <a:latin typeface="Yu Gothic"/>
-                <a:ea typeface="Yu Gothic"/>
-                <a:cs typeface="Yu Gothic"/>
-              </a:rPr>
-              <a:t>業務PC B</a:t>
-            </a:r>
-          </a:p>
-        </p:txBody>
-      </p:sp>
-      <p:sp>
-        <p:nvSpPr>
-          <p:cNvPr id="45" name="Oval 44"/>
-          <p:cNvSpPr/>
-          <p:nvPr/>
-        </p:nvSpPr>
-        <p:spPr>
-          <a:xfrm>
-            <a:off x="10018509" y="3788907"/>
-            <a:ext cx="621792" cy="621792"/>
-          </a:xfrm>
-          <a:prstGeom prst="ellipse">
-            <a:avLst/>
-          </a:prstGeom>
-          <a:solidFill>
-            <a:srgbClr val="F7F5EF"/>
-          </a:solidFill>
-          <a:ln>
-            <a:noFill/>
-          </a:ln>
-          <a:effectLst/>
-        </p:spPr>
-        <p:style>
-          <a:lnRef idx="1">
-            <a:schemeClr val="accent1"/>
-          </a:lnRef>
-          <a:fillRef idx="3">
-            <a:schemeClr val="accent1"/>
-          </a:fillRef>
-          <a:effectRef idx="2">
-            <a:schemeClr val="accent1"/>
-          </a:effectRef>
-          <a:fontRef idx="minor">
-            <a:schemeClr val="lt1"/>
-          </a:fontRef>
-        </p:style>
-        <p:txBody>
-          <a:bodyPr rtlCol="0" anchor="ctr"/>
-          <a:lstStyle/>
-          <a:p>
-            <a:pPr algn="ctr"/>
-          </a:p>
-        </p:txBody>
-      </p:sp>
-      <p:pic>
-        <p:nvPicPr>
-          <p:cNvPr id="46" name="Picture 45" descr="phone.png"/>
-          <p:cNvPicPr>
-            <a:picLocks noChangeAspect="1"/>
-          </p:cNvPicPr>
-          <p:nvPr/>
-        </p:nvPicPr>
-        <p:blipFill>
-          <a:blip r:embed="rId3"/>
-          <a:stretch>
-            <a:fillRect/>
-          </a:stretch>
-        </p:blipFill>
-        <p:spPr>
-          <a:xfrm>
-            <a:off x="10073373" y="3843771"/>
-            <a:ext cx="512064" cy="512064"/>
-          </a:xfrm>
-          <a:prstGeom prst="rect">
-            <a:avLst/>
-          </a:prstGeom>
-        </p:spPr>
-      </p:pic>
-      <p:sp>
-        <p:nvSpPr>
-          <p:cNvPr id="47" name="TextBox 46"/>
-          <p:cNvSpPr txBox="1"/>
-          <p:nvPr/>
-        </p:nvSpPr>
-        <p:spPr>
-          <a:xfrm>
-            <a:off x="9561309" y="4428987"/>
-            <a:ext cx="1536192" cy="158305"/>
-          </a:xfrm>
-          <a:prstGeom prst="rect">
-            <a:avLst/>
-          </a:prstGeom>
-          <a:solidFill>
-            <a:srgbClr val="F7F5EF"/>
-          </a:solidFill>
-        </p:spPr>
-        <p:txBody>
-          <a:bodyPr wrap="square" anchor="ctr" lIns="0" rIns="0" tIns="0" bIns="0">
-            <a:spAutoFit/>
-            <a:extLst>
-              <a:ext uri="{8AF73BB6-5E31-4F0F-A399-3D98F3B95FD9}">
-                <ns88:textLayout xmlns:ns88="urn:pptxdsl:text-layout:v1" role="compact"/>
-              </a:ext>
-            </a:extLst>
-          </a:bodyPr>
-          <a:lstStyle/>
-          <a:p>
-            <a:pPr algn="ctr">
-              <a:lnSpc>
-                <a:spcPct val="105000"/>
-              </a:lnSpc>
-            </a:pPr>
-            <a:r>
-              <a:rPr sz="1050" b="1" lang="ja-JP">
-                <a:solidFill>
-                  <a:srgbClr val="182C43"/>
-                </a:solidFill>
-                <a:latin typeface="Yu Gothic"/>
-                <a:ea typeface="Yu Gothic"/>
-                <a:cs typeface="Yu Gothic"/>
-              </a:rPr>
-              <a:t>ゲスト端末 B</a:t>
+      </p:cxnSp>
+      <p:sp>
+        <p:nvSpPr>
+          <p:cNvPr id="50" name="network-legend:physical"/>
+          <p:cNvSpPr txBox="1"/>
+          <p:nvPr/>
+        </p:nvSpPr>
+        <p:spPr>
+          <a:xfrm>
+            <a:off x="905256" y="6044183"/>
+            <a:ext cx="814959" cy="219456"/>
+          </a:xfrm>
+          <a:prstGeom prst="rect">
+            <a:avLst/>
+          </a:prstGeom>
+          <a:noFill/>
+        </p:spPr>
+        <p:txBody>
+          <a:bodyPr wrap="none" anchor="t" lIns="0" rIns="0" tIns="0" bIns="0">
+            <a:spAutoFit/>
+            <a:extLst>
+              <a:ext uri="{8AF73BB6-5E31-4F0F-A399-3D98F3B95FD9}">
+                <ns93:textLayout xmlns:ns93="urn:pptxdsl:text-layout:v1" role="compact"/>
+              </a:ext>
+            </a:extLst>
+          </a:bodyPr>
+          <a:lstStyle/>
+          <a:p>
+            <a:pPr algn="l">
+              <a:lnSpc>
+                <a:spcPct val="100000"/>
+              </a:lnSpc>
+            </a:pPr>
+            <a:r>
+              <a:rPr sz="950" b="0" lang="ja-JP">
+                <a:solidFill>
+                  <a:srgbClr val="202729"/>
+                </a:solidFill>
+                <a:latin typeface="Yu Gothic"/>
+                <a:ea typeface="Yu Gothic"/>
+                <a:cs typeface="Yu Gothic"/>
+              </a:rPr>
+              <a:t>物理リンク</a:t>
             </a:r>
           </a:p>
         </p:txBody>
       </p:sp>
       <p:cxnSp>
         <p:nvCxnSpPr>
-          <p:cNvPr id="48" name="Connector 47"/>
+          <p:cNvPr id="51" name="Connector 50"/>
           <p:cNvCxnSpPr/>
           <p:nvPr/>
         </p:nvCxnSpPr>
         <p:spPr>
           <a:xfrm>
-            <a:off x="576072" y="6117336"/>
+            <a:off x="1939671" y="6126479"/>
             <a:ext cx="256032" cy="0"/>
           </a:xfrm>
           <a:prstGeom prst="line">
@@ -36778,14 +36896,14 @@
       </p:cxnSp>
       <p:sp>
         <p:nvSpPr>
-          <p:cNvPr id="49" name="TextBox 48"/>
-          <p:cNvSpPr txBox="1"/>
-          <p:nvPr/>
-        </p:nvSpPr>
-        <p:spPr>
-          <a:xfrm>
-            <a:off x="905256" y="6035040"/>
-            <a:ext cx="526923" cy="182880"/>
+          <p:cNvPr id="52" name="network-legend:access"/>
+          <p:cNvSpPr txBox="1"/>
+          <p:nvPr/>
+        </p:nvSpPr>
+        <p:spPr>
+          <a:xfrm>
+            <a:off x="2268855" y="6044183"/>
+            <a:ext cx="1792224" cy="219456"/>
           </a:xfrm>
           <a:prstGeom prst="rect">
             <a:avLst/>
@@ -36793,11 +36911,11 @@
           <a:noFill/>
         </p:spPr>
         <p:txBody>
-          <a:bodyPr wrap="square" anchor="t" lIns="0" rIns="0" tIns="0" bIns="0">
-            <a:spAutoFit/>
-            <a:extLst>
-              <a:ext uri="{8AF73BB6-5E31-4F0F-A399-3D98F3B95FD9}">
-                <ns94:textLayout xmlns:ns94="urn:pptxdsl:text-layout:v1" role="body"/>
+          <a:bodyPr wrap="none" anchor="t" lIns="0" rIns="0" tIns="0" bIns="0">
+            <a:spAutoFit/>
+            <a:extLst>
+              <a:ext uri="{8AF73BB6-5E31-4F0F-A399-3D98F3B95FD9}">
+                <ns99:textLayout xmlns:ns99="urn:pptxdsl:text-layout:v1" role="compact"/>
               </a:ext>
             </a:extLst>
           </a:bodyPr>
@@ -36805,33 +36923,33 @@
           <a:p>
             <a:pPr algn="l">
               <a:lnSpc>
-                <a:spcPct val="130000"/>
-              </a:lnSpc>
-            </a:pPr>
-            <a:r>
-              <a:rPr sz="850" b="0" lang="ja-JP">
-                <a:solidFill>
-                  <a:srgbClr val="666E70"/>
-                </a:solidFill>
-                <a:latin typeface="Yu Gothic"/>
-                <a:ea typeface="Yu Gothic"/>
-                <a:cs typeface="Yu Gothic"/>
-              </a:rPr>
-              <a:t>Access</a:t>
+                <a:spcPct val="100000"/>
+              </a:lnSpc>
+            </a:pPr>
+            <a:r>
+              <a:rPr sz="950" b="0" lang="ja-JP">
+                <a:solidFill>
+                  <a:srgbClr val="202729"/>
+                </a:solidFill>
+                <a:latin typeface="Yu Gothic"/>
+                <a:ea typeface="Yu Gothic"/>
+                <a:cs typeface="Yu Gothic"/>
+              </a:rPr>
+              <a:t>Access（単一セグメント）</a:t>
             </a:r>
           </a:p>
         </p:txBody>
       </p:sp>
       <p:cxnSp>
         <p:nvCxnSpPr>
-          <p:cNvPr id="50" name="Connector 49"/>
+          <p:cNvPr id="53" name="Connector 52"/>
           <p:cNvCxnSpPr/>
           <p:nvPr/>
         </p:nvCxnSpPr>
         <p:spPr>
           <a:xfrm>
-            <a:off x="1651635" y="6117336"/>
-            <a:ext cx="256031" cy="0"/>
+            <a:off x="4280535" y="6089903"/>
+            <a:ext cx="256032" cy="0"/>
           </a:xfrm>
           <a:prstGeom prst="line">
             <a:avLst/>
@@ -36858,16 +36976,52 @@
           </a:fontRef>
         </p:style>
       </p:cxnSp>
-      <p:sp>
-        <p:nvSpPr>
-          <p:cNvPr id="51" name="TextBox 50"/>
-          <p:cNvSpPr txBox="1"/>
-          <p:nvPr/>
-        </p:nvSpPr>
-        <p:spPr>
-          <a:xfrm>
-            <a:off x="1980818" y="6035040"/>
-            <a:ext cx="1082420" cy="182880"/>
+      <p:cxnSp>
+        <p:nvCxnSpPr>
+          <p:cNvPr id="54" name="Connector 53"/>
+          <p:cNvCxnSpPr/>
+          <p:nvPr/>
+        </p:nvCxnSpPr>
+        <p:spPr>
+          <a:xfrm>
+            <a:off x="4280535" y="6163055"/>
+            <a:ext cx="256032" cy="0"/>
+          </a:xfrm>
+          <a:prstGeom prst="line">
+            <a:avLst/>
+          </a:prstGeom>
+          <a:ln w="25400">
+            <a:solidFill>
+              <a:srgbClr val="182C43"/>
+            </a:solidFill>
+          </a:ln>
+          <a:effectLst/>
+        </p:spPr>
+        <p:style>
+          <a:lnRef idx="2">
+            <a:schemeClr val="accent1"/>
+          </a:lnRef>
+          <a:fillRef idx="0">
+            <a:schemeClr val="accent1"/>
+          </a:fillRef>
+          <a:effectRef idx="1">
+            <a:schemeClr val="accent1"/>
+          </a:effectRef>
+          <a:fontRef idx="minor">
+            <a:schemeClr val="tx1"/>
+          </a:fontRef>
+        </p:style>
+      </p:cxnSp>
+      <p:sp>
+        <p:nvSpPr>
+          <p:cNvPr id="55" name="network-legend:trunk"/>
+          <p:cNvSpPr txBox="1"/>
+          <p:nvPr/>
+        </p:nvSpPr>
+        <p:spPr>
+          <a:xfrm>
+            <a:off x="4609719" y="6044183"/>
+            <a:ext cx="1720215" cy="219456"/>
           </a:xfrm>
           <a:prstGeom prst="rect">
             <a:avLst/>
@@ -36875,11 +37029,11 @@
           <a:noFill/>
         </p:spPr>
         <p:txBody>
-          <a:bodyPr wrap="square" anchor="t" lIns="0" rIns="0" tIns="0" bIns="0">
-            <a:spAutoFit/>
-            <a:extLst>
-              <a:ext uri="{8AF73BB6-5E31-4F0F-A399-3D98F3B95FD9}">
-                <ns99:textLayout xmlns:ns99="urn:pptxdsl:text-layout:v1" role="body"/>
+          <a:bodyPr wrap="none" anchor="t" lIns="0" rIns="0" tIns="0" bIns="0">
+            <a:spAutoFit/>
+            <a:extLst>
+              <a:ext uri="{8AF73BB6-5E31-4F0F-A399-3D98F3B95FD9}">
+                <ns104:textLayout xmlns:ns104="urn:pptxdsl:text-layout:v1" role="compact"/>
               </a:ext>
             </a:extLst>
           </a:bodyPr>
@@ -36887,26 +37041,26 @@
           <a:p>
             <a:pPr algn="l">
               <a:lnSpc>
-                <a:spcPct val="130000"/>
-              </a:lnSpc>
-            </a:pPr>
-            <a:r>
-              <a:rPr sz="850" b="0" lang="ja-JP">
-                <a:solidFill>
-                  <a:srgbClr val="666E70"/>
-                </a:solidFill>
-                <a:latin typeface="Yu Gothic"/>
-                <a:ea typeface="Yu Gothic"/>
-                <a:cs typeface="Yu Gothic"/>
-              </a:rPr>
-              <a:t>Trunk (複数VLAN)</a:t>
-            </a:r>
-          </a:p>
-        </p:txBody>
-      </p:sp>
-      <p:sp>
-        <p:nvSpPr>
-          <p:cNvPr id="52" name="Rectangle 51"/>
+                <a:spcPct val="100000"/>
+              </a:lnSpc>
+            </a:pPr>
+            <a:r>
+              <a:rPr sz="950" b="0" lang="ja-JP">
+                <a:solidFill>
+                  <a:srgbClr val="202729"/>
+                </a:solidFill>
+                <a:latin typeface="Yu Gothic"/>
+                <a:ea typeface="Yu Gothic"/>
+                <a:cs typeface="Yu Gothic"/>
+              </a:rPr>
+              <a:t>Trunk（複数セグメント）</a:t>
+            </a:r>
+          </a:p>
+        </p:txBody>
+      </p:sp>
+      <p:sp>
+        <p:nvSpPr>
+          <p:cNvPr id="56" name="Rectangle 55"/>
           <p:cNvSpPr/>
           <p:nvPr/>
         </p:nvSpPr>
@@ -36950,7 +37104,7 @@
       </p:sp>
       <p:sp>
         <p:nvSpPr>
-          <p:cNvPr id="53" name="TextBox 52"/>
+          <p:cNvPr id="57" name="TextBox 56"/>
           <p:cNvSpPr txBox="1"/>
           <p:nvPr/>
         </p:nvSpPr>
@@ -36969,7 +37123,7 @@
             <a:spAutoFit/>
             <a:extLst>
               <a:ext uri="{8AF73BB6-5E31-4F0F-A399-3D98F3B95FD9}">
-                <ns104:textLayout xmlns:ns104="urn:pptxdsl:text-layout:v1" role="body"/>
+                <ns109:textLayout xmlns:ns109="urn:pptxdsl:text-layout:v1" role="body"/>
               </a:ext>
             </a:extLst>
           </a:bodyPr>
@@ -36996,7 +37150,7 @@
       </p:sp>
       <p:sp>
         <p:nvSpPr>
-          <p:cNvPr id="54" name="TextBox 53"/>
+          <p:cNvPr id="58" name="TextBox 57"/>
           <p:cNvSpPr txBox="1"/>
           <p:nvPr/>
         </p:nvSpPr>
@@ -37015,7 +37169,7 @@
             <a:spAutoFit/>
             <a:extLst>
               <a:ext uri="{8AF73BB6-5E31-4F0F-A399-3D98F3B95FD9}">
-                <ns109:textLayout xmlns:ns109="urn:pptxdsl:text-layout:v1" role="body"/>
+                <ns114:textLayout xmlns:ns114="urn:pptxdsl:text-layout:v1" role="body"/>
               </a:ext>
             </a:extLst>
           </a:bodyPr>

--- a/examples/gallery/pattern_gallery.pptx
+++ b/examples/gallery/pattern_gallery.pptx
@@ -56792,8 +56792,8 @@
         </p:nvSpPr>
         <p:spPr>
           <a:xfrm>
-            <a:off x="1587855" y="2912546"/>
-            <a:ext cx="9015984" cy="2185416"/>
+            <a:off x="655167" y="2912546"/>
+            <a:ext cx="9948672" cy="2185416"/>
           </a:xfrm>
           <a:prstGeom prst="rect">
             <a:avLst/>
@@ -56816,14 +56816,14 @@
       </p:sp>
       <p:sp>
         <p:nvSpPr>
-          <p:cNvPr id="7" name="TextBox 6"/>
-          <p:cNvSpPr txBox="1"/>
-          <p:nvPr/>
-        </p:nvSpPr>
-        <p:spPr>
-          <a:xfrm>
-            <a:off x="1715871" y="2930834"/>
-            <a:ext cx="1024128" cy="201168"/>
+          <p:cNvPr id="7" name="sequence-phase-label:0"/>
+          <p:cNvSpPr txBox="1"/>
+          <p:nvPr/>
+        </p:nvSpPr>
+        <p:spPr>
+          <a:xfrm>
+            <a:off x="764895" y="2949122"/>
+            <a:ext cx="1097280" cy="512064"/>
           </a:xfrm>
           <a:prstGeom prst="rect">
             <a:avLst/>
@@ -56833,11 +56833,11 @@
           </a:solidFill>
         </p:spPr>
         <p:txBody>
-          <a:bodyPr wrap="square" anchor="ctr" lIns="0" rIns="0" tIns="0" bIns="0">
-            <a:spAutoFit/>
-            <a:extLst>
-              <a:ext uri="{8AF73BB6-5E31-4F0F-A399-3D98F3B95FD9}">
-                <ns17:textLayout xmlns:ns17="urn:pptxdsl:text-layout:v1" role="natural"/>
+          <a:bodyPr wrap="none" anchor="t" lIns="0" rIns="0" tIns="0" bIns="0">
+            <a:spAutoFit/>
+            <a:extLst>
+              <a:ext uri="{8AF73BB6-5E31-4F0F-A399-3D98F3B95FD9}">
+                <ns17:textLayout xmlns:ns17="urn:pptxdsl:text-layout:v1" role="compact"/>
               </a:ext>
             </a:extLst>
           </a:bodyPr>
@@ -56845,11 +56845,11 @@
           <a:p>
             <a:pPr algn="l">
               <a:lnSpc>
-                <a:spcPct val="130000"/>
-              </a:lnSpc>
-            </a:pPr>
-            <a:r>
-              <a:rPr sz="850" b="1" lang="ja-JP">
+                <a:spcPct val="105000"/>
+              </a:lnSpc>
+            </a:pPr>
+            <a:r>
+              <a:rPr sz="1050" b="1" lang="ja-JP">
                 <a:solidFill>
                   <a:srgbClr val="0D7870"/>
                 </a:solidFill>
@@ -56870,8 +56870,8 @@
         </p:nvSpPr>
         <p:spPr>
           <a:xfrm>
-            <a:off x="1587855" y="5107106"/>
-            <a:ext cx="9015984" cy="960119"/>
+            <a:off x="655167" y="5107106"/>
+            <a:ext cx="9948672" cy="960119"/>
           </a:xfrm>
           <a:prstGeom prst="rect">
             <a:avLst/>
@@ -56894,14 +56894,14 @@
       </p:sp>
       <p:sp>
         <p:nvSpPr>
-          <p:cNvPr id="9" name="TextBox 8"/>
-          <p:cNvSpPr txBox="1"/>
-          <p:nvPr/>
-        </p:nvSpPr>
-        <p:spPr>
-          <a:xfrm>
-            <a:off x="1715871" y="5125394"/>
-            <a:ext cx="1024128" cy="201168"/>
+          <p:cNvPr id="9" name="sequence-phase-label:1"/>
+          <p:cNvSpPr txBox="1"/>
+          <p:nvPr/>
+        </p:nvSpPr>
+        <p:spPr>
+          <a:xfrm>
+            <a:off x="764895" y="5143682"/>
+            <a:ext cx="1097280" cy="512064"/>
           </a:xfrm>
           <a:prstGeom prst="rect">
             <a:avLst/>
@@ -56911,11 +56911,11 @@
           </a:solidFill>
         </p:spPr>
         <p:txBody>
-          <a:bodyPr wrap="square" anchor="ctr" lIns="0" rIns="0" tIns="0" bIns="0">
-            <a:spAutoFit/>
-            <a:extLst>
-              <a:ext uri="{8AF73BB6-5E31-4F0F-A399-3D98F3B95FD9}">
-                <ns22:textLayout xmlns:ns22="urn:pptxdsl:text-layout:v1" role="natural"/>
+          <a:bodyPr wrap="none" anchor="t" lIns="0" rIns="0" tIns="0" bIns="0">
+            <a:spAutoFit/>
+            <a:extLst>
+              <a:ext uri="{8AF73BB6-5E31-4F0F-A399-3D98F3B95FD9}">
+                <ns22:textLayout xmlns:ns22="urn:pptxdsl:text-layout:v1" role="compact"/>
               </a:ext>
             </a:extLst>
           </a:bodyPr>
@@ -56923,11 +56923,11 @@
           <a:p>
             <a:pPr algn="l">
               <a:lnSpc>
-                <a:spcPct val="130000"/>
-              </a:lnSpc>
-            </a:pPr>
-            <a:r>
-              <a:rPr sz="850" b="1" lang="ja-JP">
+                <a:spcPct val="105000"/>
+              </a:lnSpc>
+            </a:pPr>
+            <a:r>
+              <a:rPr sz="1050" b="1" lang="ja-JP">
                 <a:solidFill>
                   <a:srgbClr val="0D7870"/>
                 </a:solidFill>
@@ -57532,7 +57532,7 @@
       </p:cxnSp>
       <p:cxnSp>
         <p:nvCxnSpPr>
-          <p:cNvPr id="25" name="Connector 24"/>
+          <p:cNvPr id="25" name="sequence-message-line:detect"/>
           <p:cNvCxnSpPr/>
           <p:nvPr/>
         </p:nvCxnSpPr>
@@ -57544,9 +57544,9 @@
           <a:prstGeom prst="line">
             <a:avLst/>
           </a:prstGeom>
-          <a:ln w="13335">
+          <a:ln w="15875">
             <a:solidFill>
-              <a:srgbClr val="666E70"/>
+              <a:srgbClr val="182C43"/>
             </a:solidFill>
             <a:tailEnd type="triangle" w="med" len="med"/>
           </a:ln>
@@ -57617,7 +57617,7 @@
       </p:sp>
       <p:cxnSp>
         <p:nvCxnSpPr>
-          <p:cNvPr id="27" name="Connector 26"/>
+          <p:cNvPr id="27" name="sequence-message-line:request"/>
           <p:cNvCxnSpPr/>
           <p:nvPr/>
         </p:nvCxnSpPr>
@@ -57629,9 +57629,9 @@
           <a:prstGeom prst="line">
             <a:avLst/>
           </a:prstGeom>
-          <a:ln w="13335">
+          <a:ln w="15875">
             <a:solidFill>
-              <a:srgbClr val="666E70"/>
+              <a:srgbClr val="182C43"/>
             </a:solidFill>
             <a:tailEnd type="triangle" w="med" len="med"/>
           </a:ln>
@@ -57702,7 +57702,7 @@
       </p:sp>
       <p:cxnSp>
         <p:nvCxnSpPr>
-          <p:cNvPr id="29" name="Connector 28"/>
+          <p:cNvPr id="29" name="sequence-message-line:reply"/>
           <p:cNvCxnSpPr/>
           <p:nvPr/>
         </p:nvCxnSpPr>
@@ -57714,11 +57714,11 @@
           <a:prstGeom prst="line">
             <a:avLst/>
           </a:prstGeom>
-          <a:ln w="13335">
-            <a:prstDash val="dash"/>
+          <a:ln w="15875">
             <a:solidFill>
               <a:srgbClr val="666E70"/>
             </a:solidFill>
+            <a:prstDash val="dash"/>
             <a:tailEnd type="triangle" w="med" len="med"/>
           </a:ln>
           <a:effectLst/>
@@ -57761,7 +57761,7 @@
             <a:spAutoFit/>
             <a:extLst>
               <a:ext uri="{8AF73BB6-5E31-4F0F-A399-3D98F3B95FD9}">
-                <ns66:textLayout xmlns:ns66="urn:pptxdsl:text-layout:v1" role="compact"/>
+                <ns65:textLayout xmlns:ns65="urn:pptxdsl:text-layout:v1" role="compact"/>
               </a:ext>
             </a:extLst>
           </a:bodyPr>
@@ -57788,7 +57788,7 @@
       </p:sp>
       <p:cxnSp>
         <p:nvCxnSpPr>
-          <p:cNvPr id="31" name="Connector 30"/>
+          <p:cNvPr id="31" name="sequence-message-line:logs"/>
           <p:cNvCxnSpPr/>
           <p:nvPr/>
         </p:nvCxnSpPr>
@@ -57800,9 +57800,9 @@
           <a:prstGeom prst="line">
             <a:avLst/>
           </a:prstGeom>
-          <a:ln w="13335">
+          <a:ln w="15875">
             <a:solidFill>
-              <a:srgbClr val="666E70"/>
+              <a:srgbClr val="182C43"/>
             </a:solidFill>
             <a:tailEnd type="triangle" w="med" len="med"/>
           </a:ln>
@@ -57846,7 +57846,7 @@
             <a:spAutoFit/>
             <a:extLst>
               <a:ext uri="{8AF73BB6-5E31-4F0F-A399-3D98F3B95FD9}">
-                <ns72:textLayout xmlns:ns72="urn:pptxdsl:text-layout:v1" role="compact"/>
+                <ns71:textLayout xmlns:ns71="urn:pptxdsl:text-layout:v1" role="compact"/>
               </a:ext>
             </a:extLst>
           </a:bodyPr>
@@ -57873,7 +57873,7 @@
       </p:sp>
       <p:cxnSp>
         <p:nvCxnSpPr>
-          <p:cNvPr id="33" name="Connector 32"/>
+          <p:cNvPr id="33" name="sequence-message-line:isolate"/>
           <p:cNvCxnSpPr/>
           <p:nvPr/>
         </p:nvCxnSpPr>
@@ -57885,9 +57885,9 @@
           <a:prstGeom prst="line">
             <a:avLst/>
           </a:prstGeom>
-          <a:ln w="13335">
+          <a:ln w="15875">
             <a:solidFill>
-              <a:srgbClr val="666E70"/>
+              <a:srgbClr val="182C43"/>
             </a:solidFill>
             <a:tailEnd type="triangle" w="med" len="med"/>
           </a:ln>
@@ -57931,7 +57931,7 @@
             <a:spAutoFit/>
             <a:extLst>
               <a:ext uri="{8AF73BB6-5E31-4F0F-A399-3D98F3B95FD9}">
-                <ns78:textLayout xmlns:ns78="urn:pptxdsl:text-layout:v1" role="compact"/>
+                <ns77:textLayout xmlns:ns77="urn:pptxdsl:text-layout:v1" role="compact"/>
               </a:ext>
             </a:extLst>
           </a:bodyPr>
@@ -57958,7 +57958,7 @@
       </p:sp>
       <p:cxnSp>
         <p:nvCxnSpPr>
-          <p:cNvPr id="35" name="Connector 34"/>
+          <p:cNvPr id="35" name="sequence-message-line:carrier"/>
           <p:cNvCxnSpPr/>
           <p:nvPr/>
         </p:nvCxnSpPr>
@@ -57970,9 +57970,9 @@
           <a:prstGeom prst="line">
             <a:avLst/>
           </a:prstGeom>
-          <a:ln w="13335">
+          <a:ln w="15875">
             <a:solidFill>
-              <a:srgbClr val="666E70"/>
+              <a:srgbClr val="182C43"/>
             </a:solidFill>
             <a:tailEnd type="triangle" w="med" len="med"/>
           </a:ln>
@@ -58016,7 +58016,7 @@
             <a:spAutoFit/>
             <a:extLst>
               <a:ext uri="{8AF73BB6-5E31-4F0F-A399-3D98F3B95FD9}">
-                <ns84:textLayout xmlns:ns84="urn:pptxdsl:text-layout:v1" role="compact"/>
+                <ns83:textLayout xmlns:ns83="urn:pptxdsl:text-layout:v1" role="compact"/>
               </a:ext>
             </a:extLst>
           </a:bodyPr>
@@ -58043,7 +58043,7 @@
       </p:sp>
       <p:cxnSp>
         <p:nvCxnSpPr>
-          <p:cNvPr id="37" name="Connector 36"/>
+          <p:cNvPr id="37" name="sequence-message-line:recover"/>
           <p:cNvCxnSpPr/>
           <p:nvPr/>
         </p:nvCxnSpPr>
@@ -58055,11 +58055,11 @@
           <a:prstGeom prst="line">
             <a:avLst/>
           </a:prstGeom>
-          <a:ln w="13335">
-            <a:prstDash val="dash"/>
+          <a:ln w="15875">
             <a:solidFill>
               <a:srgbClr val="666E70"/>
             </a:solidFill>
+            <a:prstDash val="dash"/>
             <a:tailEnd type="triangle" w="med" len="med"/>
           </a:ln>
           <a:effectLst/>
@@ -58102,7 +58102,7 @@
             <a:spAutoFit/>
             <a:extLst>
               <a:ext uri="{8AF73BB6-5E31-4F0F-A399-3D98F3B95FD9}">
-                <ns91:textLayout xmlns:ns91="urn:pptxdsl:text-layout:v1" role="compact"/>
+                <ns89:textLayout xmlns:ns89="urn:pptxdsl:text-layout:v1" role="compact"/>
               </a:ext>
             </a:extLst>
           </a:bodyPr>
@@ -58129,7 +58129,7 @@
       </p:sp>
       <p:cxnSp>
         <p:nvCxnSpPr>
-          <p:cNvPr id="39" name="Connector 38"/>
+          <p:cNvPr id="39" name="sequence-message-line:report"/>
           <p:cNvCxnSpPr/>
           <p:nvPr/>
         </p:nvCxnSpPr>
@@ -58141,9 +58141,9 @@
           <a:prstGeom prst="line">
             <a:avLst/>
           </a:prstGeom>
-          <a:ln w="13335">
+          <a:ln w="15875">
             <a:solidFill>
-              <a:srgbClr val="666E70"/>
+              <a:srgbClr val="182C43"/>
             </a:solidFill>
             <a:tailEnd type="triangle" w="med" len="med"/>
           </a:ln>
@@ -58187,7 +58187,7 @@
             <a:spAutoFit/>
             <a:extLst>
               <a:ext uri="{8AF73BB6-5E31-4F0F-A399-3D98F3B95FD9}">
-                <ns97:textLayout xmlns:ns97="urn:pptxdsl:text-layout:v1" role="compact"/>
+                <ns95:textLayout xmlns:ns95="urn:pptxdsl:text-layout:v1" role="compact"/>
               </a:ext>
             </a:extLst>
           </a:bodyPr>
@@ -58233,7 +58233,7 @@
             <a:spAutoFit/>
             <a:extLst>
               <a:ext uri="{8AF73BB6-5E31-4F0F-A399-3D98F3B95FD9}">
-                <ns102:textLayout xmlns:ns102="urn:pptxdsl:text-layout:v1" role="natural"/>
+                <ns100:textLayout xmlns:ns100="urn:pptxdsl:text-layout:v1" role="natural"/>
               </a:ext>
             </a:extLst>
           </a:bodyPr>
@@ -58274,7 +58274,7 @@
           </a:prstGeom>
           <a:ln w="12700">
             <a:solidFill>
-              <a:srgbClr val="666E70"/>
+              <a:srgbClr val="182C43"/>
             </a:solidFill>
             <a:tailEnd type="triangle" w="med" len="med"/>
           </a:ln>
@@ -58316,7 +58316,7 @@
             <a:spAutoFit/>
             <a:extLst>
               <a:ext uri="{8AF73BB6-5E31-4F0F-A399-3D98F3B95FD9}">
-                <ns108:textLayout xmlns:ns108="urn:pptxdsl:text-layout:v1" role="body"/>
+                <ns106:textLayout xmlns:ns106="urn:pptxdsl:text-layout:v1" role="body"/>
               </a:ext>
             </a:extLst>
           </a:bodyPr>
@@ -58356,10 +58356,10 @@
             <a:avLst/>
           </a:prstGeom>
           <a:ln w="12700">
-            <a:prstDash val="dash"/>
             <a:solidFill>
               <a:srgbClr val="666E70"/>
             </a:solidFill>
+            <a:prstDash val="dash"/>
             <a:tailEnd type="triangle" w="med" len="med"/>
           </a:ln>
           <a:effectLst/>
@@ -58400,7 +58400,7 @@
             <a:spAutoFit/>
             <a:extLst>
               <a:ext uri="{8AF73BB6-5E31-4F0F-A399-3D98F3B95FD9}">
-                <ns115:textLayout xmlns:ns115="urn:pptxdsl:text-layout:v1" role="body"/>
+                <ns112:textLayout xmlns:ns112="urn:pptxdsl:text-layout:v1" role="body"/>
               </a:ext>
             </a:extLst>
           </a:bodyPr>
@@ -58490,7 +58490,7 @@
             <a:spAutoFit/>
             <a:extLst>
               <a:ext uri="{8AF73BB6-5E31-4F0F-A399-3D98F3B95FD9}">
-                <ns120:textLayout xmlns:ns120="urn:pptxdsl:text-layout:v1" role="body"/>
+                <ns117:textLayout xmlns:ns117="urn:pptxdsl:text-layout:v1" role="body"/>
               </a:ext>
             </a:extLst>
           </a:bodyPr>
@@ -58536,7 +58536,7 @@
             <a:spAutoFit/>
             <a:extLst>
               <a:ext uri="{8AF73BB6-5E31-4F0F-A399-3D98F3B95FD9}">
-                <ns125:textLayout xmlns:ns125="urn:pptxdsl:text-layout:v1" role="body"/>
+                <ns122:textLayout xmlns:ns122="urn:pptxdsl:text-layout:v1" role="body"/>
               </a:ext>
             </a:extLst>
           </a:bodyPr>

--- a/examples/gallery/pattern_gallery.pptx
+++ b/examples/gallery/pattern_gallery.pptx
@@ -28259,7 +28259,7 @@
             <a:r>
               <a:rPr sz="919" b="1" lang="ja-JP">
                 <a:solidFill>
-                  <a:srgbClr val="9AA09E"/>
+                  <a:srgbClr val="182C43"/>
                 </a:solidFill>
                 <a:latin typeface="Yu Gothic"/>
                 <a:ea typeface="Yu Gothic"/>
@@ -28351,7 +28351,7 @@
             <a:r>
               <a:rPr sz="919" b="1" lang="ja-JP">
                 <a:solidFill>
-                  <a:srgbClr val="9AA09E"/>
+                  <a:srgbClr val="182C43"/>
                 </a:solidFill>
                 <a:latin typeface="Yu Gothic"/>
                 <a:ea typeface="Yu Gothic"/>
@@ -28443,7 +28443,7 @@
             <a:r>
               <a:rPr sz="919" b="1" lang="ja-JP">
                 <a:solidFill>
-                  <a:srgbClr val="9AA09E"/>
+                  <a:srgbClr val="182C43"/>
                 </a:solidFill>
                 <a:latin typeface="Yu Gothic"/>
                 <a:ea typeface="Yu Gothic"/>
@@ -28627,7 +28627,7 @@
             <a:r>
               <a:rPr sz="919" b="1" lang="ja-JP">
                 <a:solidFill>
-                  <a:srgbClr val="9AA09E"/>
+                  <a:srgbClr val="182C43"/>
                 </a:solidFill>
                 <a:latin typeface="Yu Gothic"/>
                 <a:ea typeface="Yu Gothic"/>
@@ -28719,7 +28719,7 @@
             <a:r>
               <a:rPr sz="919" b="1" lang="ja-JP">
                 <a:solidFill>
-                  <a:srgbClr val="9AA09E"/>
+                  <a:srgbClr val="182C43"/>
                 </a:solidFill>
                 <a:latin typeface="Yu Gothic"/>
                 <a:ea typeface="Yu Gothic"/>
@@ -28811,7 +28811,7 @@
             <a:r>
               <a:rPr sz="919" b="1" lang="ja-JP">
                 <a:solidFill>
-                  <a:srgbClr val="9AA09E"/>
+                  <a:srgbClr val="182C43"/>
                 </a:solidFill>
                 <a:latin typeface="Yu Gothic"/>
                 <a:ea typeface="Yu Gothic"/>

--- a/examples/gallery/pattern_gallery.pptx
+++ b/examples/gallery/pattern_gallery.pptx
@@ -11615,10 +11615,10 @@
             <a:avLst/>
           </a:prstGeom>
           <a:ln w="15875">
-            <a:prstDash val="dash"/>
             <a:solidFill>
               <a:srgbClr val="6C7372"/>
             </a:solidFill>
+            <a:prstDash val="dash"/>
           </a:ln>
           <a:effectLst/>
         </p:spPr>
@@ -11652,10 +11652,10 @@
             <a:avLst/>
           </a:prstGeom>
           <a:ln w="15875">
-            <a:prstDash val="dash"/>
             <a:solidFill>
               <a:srgbClr val="6C7372"/>
             </a:solidFill>
+            <a:prstDash val="dash"/>
           </a:ln>
           <a:effectLst/>
         </p:spPr>
@@ -11689,10 +11689,10 @@
             <a:avLst/>
           </a:prstGeom>
           <a:ln w="15875">
-            <a:prstDash val="dash"/>
             <a:solidFill>
               <a:srgbClr val="6C7372"/>
             </a:solidFill>
+            <a:prstDash val="dash"/>
             <a:tailEnd type="triangle" w="med" len="med"/>
           </a:ln>
           <a:effectLst/>
@@ -11779,7 +11779,7 @@
             <a:spAutoFit/>
             <a:extLst>
               <a:ext uri="{8AF73BB6-5E31-4F0F-A399-3D98F3B95FD9}">
-                <ns20:textLayout xmlns:ns20="urn:pptxdsl:text-layout:v1" role="natural"/>
+                <ns17:textLayout xmlns:ns17="urn:pptxdsl:text-layout:v1" role="natural"/>
               </a:ext>
             </a:extLst>
           </a:bodyPr>
@@ -11825,7 +11825,7 @@
             <a:spAutoFit/>
             <a:extLst>
               <a:ext uri="{8AF73BB6-5E31-4F0F-A399-3D98F3B95FD9}">
-                <ns25:textLayout xmlns:ns25="urn:pptxdsl:text-layout:v1" role="body"/>
+                <ns22:textLayout xmlns:ns22="urn:pptxdsl:text-layout:v1" role="body"/>
               </a:ext>
             </a:extLst>
           </a:bodyPr>
@@ -11871,7 +11871,7 @@
             <a:spAutoFit/>
             <a:extLst>
               <a:ext uri="{8AF73BB6-5E31-4F0F-A399-3D98F3B95FD9}">
-                <ns30:textLayout xmlns:ns30="urn:pptxdsl:text-layout:v1" role="natural"/>
+                <ns27:textLayout xmlns:ns27="urn:pptxdsl:text-layout:v1" role="natural"/>
               </a:ext>
             </a:extLst>
           </a:bodyPr>
@@ -11963,7 +11963,7 @@
             <a:spAutoFit/>
             <a:extLst>
               <a:ext uri="{8AF73BB6-5E31-4F0F-A399-3D98F3B95FD9}">
-                <ns35:textLayout xmlns:ns35="urn:pptxdsl:text-layout:v1" role="natural"/>
+                <ns32:textLayout xmlns:ns32="urn:pptxdsl:text-layout:v1" role="natural"/>
               </a:ext>
             </a:extLst>
           </a:bodyPr>
@@ -12009,7 +12009,7 @@
             <a:spAutoFit/>
             <a:extLst>
               <a:ext uri="{8AF73BB6-5E31-4F0F-A399-3D98F3B95FD9}">
-                <ns40:textLayout xmlns:ns40="urn:pptxdsl:text-layout:v1" role="body"/>
+                <ns37:textLayout xmlns:ns37="urn:pptxdsl:text-layout:v1" role="body"/>
               </a:ext>
             </a:extLst>
           </a:bodyPr>
@@ -12055,7 +12055,7 @@
             <a:spAutoFit/>
             <a:extLst>
               <a:ext uri="{8AF73BB6-5E31-4F0F-A399-3D98F3B95FD9}">
-                <ns45:textLayout xmlns:ns45="urn:pptxdsl:text-layout:v1" role="natural"/>
+                <ns42:textLayout xmlns:ns42="urn:pptxdsl:text-layout:v1" role="natural"/>
               </a:ext>
             </a:extLst>
           </a:bodyPr>
@@ -12147,7 +12147,7 @@
             <a:spAutoFit/>
             <a:extLst>
               <a:ext uri="{8AF73BB6-5E31-4F0F-A399-3D98F3B95FD9}">
-                <ns50:textLayout xmlns:ns50="urn:pptxdsl:text-layout:v1" role="natural"/>
+                <ns47:textLayout xmlns:ns47="urn:pptxdsl:text-layout:v1" role="natural"/>
               </a:ext>
             </a:extLst>
           </a:bodyPr>
@@ -12193,7 +12193,7 @@
             <a:spAutoFit/>
             <a:extLst>
               <a:ext uri="{8AF73BB6-5E31-4F0F-A399-3D98F3B95FD9}">
-                <ns55:textLayout xmlns:ns55="urn:pptxdsl:text-layout:v1" role="body"/>
+                <ns52:textLayout xmlns:ns52="urn:pptxdsl:text-layout:v1" role="body"/>
               </a:ext>
             </a:extLst>
           </a:bodyPr>
@@ -12239,7 +12239,7 @@
             <a:spAutoFit/>
             <a:extLst>
               <a:ext uri="{8AF73BB6-5E31-4F0F-A399-3D98F3B95FD9}">
-                <ns60:textLayout xmlns:ns60="urn:pptxdsl:text-layout:v1" role="natural"/>
+                <ns57:textLayout xmlns:ns57="urn:pptxdsl:text-layout:v1" role="natural"/>
               </a:ext>
             </a:extLst>
           </a:bodyPr>
@@ -12331,7 +12331,7 @@
             <a:spAutoFit/>
             <a:extLst>
               <a:ext uri="{8AF73BB6-5E31-4F0F-A399-3D98F3B95FD9}">
-                <ns65:textLayout xmlns:ns65="urn:pptxdsl:text-layout:v1" role="natural"/>
+                <ns62:textLayout xmlns:ns62="urn:pptxdsl:text-layout:v1" role="natural"/>
               </a:ext>
             </a:extLst>
           </a:bodyPr>
@@ -12377,7 +12377,7 @@
             <a:spAutoFit/>
             <a:extLst>
               <a:ext uri="{8AF73BB6-5E31-4F0F-A399-3D98F3B95FD9}">
-                <ns70:textLayout xmlns:ns70="urn:pptxdsl:text-layout:v1" role="body"/>
+                <ns67:textLayout xmlns:ns67="urn:pptxdsl:text-layout:v1" role="body"/>
               </a:ext>
             </a:extLst>
           </a:bodyPr>
@@ -12423,7 +12423,7 @@
             <a:spAutoFit/>
             <a:extLst>
               <a:ext uri="{8AF73BB6-5E31-4F0F-A399-3D98F3B95FD9}">
-                <ns75:textLayout xmlns:ns75="urn:pptxdsl:text-layout:v1" role="natural"/>
+                <ns72:textLayout xmlns:ns72="urn:pptxdsl:text-layout:v1" role="natural"/>
               </a:ext>
             </a:extLst>
           </a:bodyPr>
@@ -12515,7 +12515,7 @@
             <a:spAutoFit/>
             <a:extLst>
               <a:ext uri="{8AF73BB6-5E31-4F0F-A399-3D98F3B95FD9}">
-                <ns80:textLayout xmlns:ns80="urn:pptxdsl:text-layout:v1" role="natural"/>
+                <ns77:textLayout xmlns:ns77="urn:pptxdsl:text-layout:v1" role="natural"/>
               </a:ext>
             </a:extLst>
           </a:bodyPr>
@@ -12561,7 +12561,7 @@
             <a:spAutoFit/>
             <a:extLst>
               <a:ext uri="{8AF73BB6-5E31-4F0F-A399-3D98F3B95FD9}">
-                <ns85:textLayout xmlns:ns85="urn:pptxdsl:text-layout:v1" role="body"/>
+                <ns82:textLayout xmlns:ns82="urn:pptxdsl:text-layout:v1" role="body"/>
               </a:ext>
             </a:extLst>
           </a:bodyPr>
@@ -12607,7 +12607,7 @@
             <a:spAutoFit/>
             <a:extLst>
               <a:ext uri="{8AF73BB6-5E31-4F0F-A399-3D98F3B95FD9}">
-                <ns90:textLayout xmlns:ns90="urn:pptxdsl:text-layout:v1" role="natural"/>
+                <ns87:textLayout xmlns:ns87="urn:pptxdsl:text-layout:v1" role="natural"/>
               </a:ext>
             </a:extLst>
           </a:bodyPr>
@@ -12655,7 +12655,7 @@
             <a:spAutoFit/>
             <a:extLst>
               <a:ext uri="{8AF73BB6-5E31-4F0F-A399-3D98F3B95FD9}">
-                <ns95:textLayout xmlns:ns95="urn:pptxdsl:text-layout:v1" role="compact"/>
+                <ns92:textLayout xmlns:ns92="urn:pptxdsl:text-layout:v1" role="compact"/>
               </a:ext>
             </a:extLst>
           </a:bodyPr>
@@ -12703,7 +12703,7 @@
             <a:spAutoFit/>
             <a:extLst>
               <a:ext uri="{8AF73BB6-5E31-4F0F-A399-3D98F3B95FD9}">
-                <ns100:textLayout xmlns:ns100="urn:pptxdsl:text-layout:v1" role="compact"/>
+                <ns97:textLayout xmlns:ns97="urn:pptxdsl:text-layout:v1" role="compact"/>
               </a:ext>
             </a:extLst>
           </a:bodyPr>
@@ -12751,7 +12751,7 @@
             <a:spAutoFit/>
             <a:extLst>
               <a:ext uri="{8AF73BB6-5E31-4F0F-A399-3D98F3B95FD9}">
-                <ns105:textLayout xmlns:ns105="urn:pptxdsl:text-layout:v1" role="compact"/>
+                <ns102:textLayout xmlns:ns102="urn:pptxdsl:text-layout:v1" role="compact"/>
               </a:ext>
             </a:extLst>
           </a:bodyPr>
@@ -12841,7 +12841,7 @@
             <a:spAutoFit/>
             <a:extLst>
               <a:ext uri="{8AF73BB6-5E31-4F0F-A399-3D98F3B95FD9}">
-                <ns110:textLayout xmlns:ns110="urn:pptxdsl:text-layout:v1" role="body"/>
+                <ns107:textLayout xmlns:ns107="urn:pptxdsl:text-layout:v1" role="body"/>
               </a:ext>
             </a:extLst>
           </a:bodyPr>
@@ -12887,7 +12887,7 @@
             <a:spAutoFit/>
             <a:extLst>
               <a:ext uri="{8AF73BB6-5E31-4F0F-A399-3D98F3B95FD9}">
-                <ns115:textLayout xmlns:ns115="urn:pptxdsl:text-layout:v1" role="body"/>
+                <ns112:textLayout xmlns:ns112="urn:pptxdsl:text-layout:v1" role="body"/>
               </a:ext>
             </a:extLst>
           </a:bodyPr>
@@ -23596,7 +23596,7 @@
             <a:avLst/>
           </a:prstGeom>
           <a:noFill/>
-          <a:ln w="15875">
+          <a:ln w="10795">
             <a:solidFill>
               <a:srgbClr val="6C7372"/>
             </a:solidFill>
@@ -23686,11 +23686,11 @@
             <a:avLst/>
           </a:prstGeom>
           <a:noFill/>
-          <a:ln w="15875">
-            <a:prstDash val="dash"/>
+          <a:ln w="10795">
             <a:solidFill>
               <a:srgbClr val="0D7870"/>
             </a:solidFill>
+            <a:prstDash val="dash"/>
           </a:ln>
           <a:effectLst/>
         </p:spPr>
@@ -23737,7 +23737,7 @@
             <a:spAutoFit/>
             <a:extLst>
               <a:ext uri="{8AF73BB6-5E31-4F0F-A399-3D98F3B95FD9}">
-                <ns18:textLayout xmlns:ns18="urn:pptxdsl:text-layout:v1" role="natural"/>
+                <ns17:textLayout xmlns:ns17="urn:pptxdsl:text-layout:v1" role="natural"/>
               </a:ext>
             </a:extLst>
           </a:bodyPr>
@@ -23776,9 +23776,9 @@
           <a:prstGeom prst="line">
             <a:avLst/>
           </a:prstGeom>
-          <a:ln w="15875">
+          <a:ln w="20320">
             <a:solidFill>
-              <a:srgbClr val="6C7372"/>
+              <a:srgbClr val="182C43"/>
             </a:solidFill>
             <a:tailEnd type="triangle" w="med" len="med"/>
           </a:ln>
@@ -23813,9 +23813,9 @@
           <a:prstGeom prst="line">
             <a:avLst/>
           </a:prstGeom>
-          <a:ln w="15875">
+          <a:ln w="20320">
             <a:solidFill>
-              <a:srgbClr val="6C7372"/>
+              <a:srgbClr val="182C43"/>
             </a:solidFill>
             <a:tailEnd type="triangle" w="med" len="med"/>
           </a:ln>
@@ -23850,9 +23850,9 @@
           <a:prstGeom prst="line">
             <a:avLst/>
           </a:prstGeom>
-          <a:ln w="15875">
+          <a:ln w="20320">
             <a:solidFill>
-              <a:srgbClr val="6C7372"/>
+              <a:srgbClr val="182C43"/>
             </a:solidFill>
           </a:ln>
           <a:effectLst/>
@@ -23886,9 +23886,9 @@
           <a:prstGeom prst="line">
             <a:avLst/>
           </a:prstGeom>
-          <a:ln w="15875">
+          <a:ln w="20320">
             <a:solidFill>
-              <a:srgbClr val="6C7372"/>
+              <a:srgbClr val="182C43"/>
             </a:solidFill>
           </a:ln>
           <a:effectLst/>
@@ -23922,9 +23922,9 @@
           <a:prstGeom prst="line">
             <a:avLst/>
           </a:prstGeom>
-          <a:ln w="15875">
+          <a:ln w="20320">
             <a:solidFill>
-              <a:srgbClr val="6C7372"/>
+              <a:srgbClr val="182C43"/>
             </a:solidFill>
             <a:tailEnd type="triangle" w="med" len="med"/>
           </a:ln>
@@ -23959,9 +23959,9 @@
           <a:prstGeom prst="line">
             <a:avLst/>
           </a:prstGeom>
-          <a:ln w="15875">
+          <a:ln w="20320">
             <a:solidFill>
-              <a:srgbClr val="6C7372"/>
+              <a:srgbClr val="182C43"/>
             </a:solidFill>
             <a:tailEnd type="triangle" w="med" len="med"/>
           </a:ln>
@@ -23996,9 +23996,9 @@
           <a:prstGeom prst="line">
             <a:avLst/>
           </a:prstGeom>
-          <a:ln w="15875">
+          <a:ln w="20320">
             <a:solidFill>
-              <a:srgbClr val="6C7372"/>
+              <a:srgbClr val="182C43"/>
             </a:solidFill>
           </a:ln>
           <a:effectLst/>
@@ -24032,9 +24032,9 @@
           <a:prstGeom prst="line">
             <a:avLst/>
           </a:prstGeom>
-          <a:ln w="15875">
+          <a:ln w="20320">
             <a:solidFill>
-              <a:srgbClr val="6C7372"/>
+              <a:srgbClr val="182C43"/>
             </a:solidFill>
           </a:ln>
           <a:effectLst/>
@@ -24068,9 +24068,9 @@
           <a:prstGeom prst="line">
             <a:avLst/>
           </a:prstGeom>
-          <a:ln w="15875">
+          <a:ln w="20320">
             <a:solidFill>
-              <a:srgbClr val="6C7372"/>
+              <a:srgbClr val="182C43"/>
             </a:solidFill>
             <a:tailEnd type="triangle" w="med" len="med"/>
           </a:ln>
@@ -24105,9 +24105,9 @@
           <a:prstGeom prst="line">
             <a:avLst/>
           </a:prstGeom>
-          <a:ln w="15875">
+          <a:ln w="20320">
             <a:solidFill>
-              <a:srgbClr val="6C7372"/>
+              <a:srgbClr val="182C43"/>
             </a:solidFill>
             <a:tailEnd type="triangle" w="med" len="med"/>
           </a:ln>
@@ -24175,7 +24175,7 @@
             <a:spAutoFit/>
             <a:extLst>
               <a:ext uri="{8AF73BB6-5E31-4F0F-A399-3D98F3B95FD9}">
-                <ns29:textLayout xmlns:ns29="urn:pptxdsl:text-layout:v1" role="natural"/>
+                <ns28:textLayout xmlns:ns28="urn:pptxdsl:text-layout:v1" role="natural"/>
               </a:ext>
             </a:extLst>
           </a:bodyPr>
@@ -24223,7 +24223,7 @@
             <a:spAutoFit/>
             <a:extLst>
               <a:ext uri="{8AF73BB6-5E31-4F0F-A399-3D98F3B95FD9}">
-                <ns34:textLayout xmlns:ns34="urn:pptxdsl:text-layout:v1" role="compact"/>
+                <ns33:textLayout xmlns:ns33="urn:pptxdsl:text-layout:v1" role="compact"/>
               </a:ext>
             </a:extLst>
           </a:bodyPr>
@@ -24295,7 +24295,7 @@
             <a:spAutoFit/>
             <a:extLst>
               <a:ext uri="{8AF73BB6-5E31-4F0F-A399-3D98F3B95FD9}">
-                <ns39:textLayout xmlns:ns39="urn:pptxdsl:text-layout:v1" role="natural"/>
+                <ns38:textLayout xmlns:ns38="urn:pptxdsl:text-layout:v1" role="natural"/>
               </a:ext>
             </a:extLst>
           </a:bodyPr>
@@ -24343,7 +24343,7 @@
             <a:spAutoFit/>
             <a:extLst>
               <a:ext uri="{8AF73BB6-5E31-4F0F-A399-3D98F3B95FD9}">
-                <ns44:textLayout xmlns:ns44="urn:pptxdsl:text-layout:v1" role="compact"/>
+                <ns43:textLayout xmlns:ns43="urn:pptxdsl:text-layout:v1" role="compact"/>
               </a:ext>
             </a:extLst>
           </a:bodyPr>
@@ -24415,7 +24415,7 @@
             <a:spAutoFit/>
             <a:extLst>
               <a:ext uri="{8AF73BB6-5E31-4F0F-A399-3D98F3B95FD9}">
-                <ns49:textLayout xmlns:ns49="urn:pptxdsl:text-layout:v1" role="natural"/>
+                <ns48:textLayout xmlns:ns48="urn:pptxdsl:text-layout:v1" role="natural"/>
               </a:ext>
             </a:extLst>
           </a:bodyPr>
@@ -24463,7 +24463,7 @@
             <a:spAutoFit/>
             <a:extLst>
               <a:ext uri="{8AF73BB6-5E31-4F0F-A399-3D98F3B95FD9}">
-                <ns54:textLayout xmlns:ns54="urn:pptxdsl:text-layout:v1" role="compact"/>
+                <ns53:textLayout xmlns:ns53="urn:pptxdsl:text-layout:v1" role="compact"/>
               </a:ext>
             </a:extLst>
           </a:bodyPr>
@@ -24535,7 +24535,7 @@
             <a:spAutoFit/>
             <a:extLst>
               <a:ext uri="{8AF73BB6-5E31-4F0F-A399-3D98F3B95FD9}">
-                <ns59:textLayout xmlns:ns59="urn:pptxdsl:text-layout:v1" role="natural"/>
+                <ns58:textLayout xmlns:ns58="urn:pptxdsl:text-layout:v1" role="natural"/>
               </a:ext>
             </a:extLst>
           </a:bodyPr>
@@ -24583,7 +24583,7 @@
             <a:spAutoFit/>
             <a:extLst>
               <a:ext uri="{8AF73BB6-5E31-4F0F-A399-3D98F3B95FD9}">
-                <ns64:textLayout xmlns:ns64="urn:pptxdsl:text-layout:v1" role="compact"/>
+                <ns63:textLayout xmlns:ns63="urn:pptxdsl:text-layout:v1" role="compact"/>
               </a:ext>
             </a:extLst>
           </a:bodyPr>
@@ -24655,7 +24655,7 @@
             <a:spAutoFit/>
             <a:extLst>
               <a:ext uri="{8AF73BB6-5E31-4F0F-A399-3D98F3B95FD9}">
-                <ns69:textLayout xmlns:ns69="urn:pptxdsl:text-layout:v1" role="natural"/>
+                <ns68:textLayout xmlns:ns68="urn:pptxdsl:text-layout:v1" role="natural"/>
               </a:ext>
             </a:extLst>
           </a:bodyPr>
@@ -24703,7 +24703,7 @@
             <a:spAutoFit/>
             <a:extLst>
               <a:ext uri="{8AF73BB6-5E31-4F0F-A399-3D98F3B95FD9}">
-                <ns74:textLayout xmlns:ns74="urn:pptxdsl:text-layout:v1" role="compact"/>
+                <ns73:textLayout xmlns:ns73="urn:pptxdsl:text-layout:v1" role="compact"/>
               </a:ext>
             </a:extLst>
           </a:bodyPr>
@@ -24775,7 +24775,7 @@
             <a:spAutoFit/>
             <a:extLst>
               <a:ext uri="{8AF73BB6-5E31-4F0F-A399-3D98F3B95FD9}">
-                <ns79:textLayout xmlns:ns79="urn:pptxdsl:text-layout:v1" role="natural"/>
+                <ns78:textLayout xmlns:ns78="urn:pptxdsl:text-layout:v1" role="natural"/>
               </a:ext>
             </a:extLst>
           </a:bodyPr>
@@ -24823,7 +24823,7 @@
             <a:spAutoFit/>
             <a:extLst>
               <a:ext uri="{8AF73BB6-5E31-4F0F-A399-3D98F3B95FD9}">
-                <ns84:textLayout xmlns:ns84="urn:pptxdsl:text-layout:v1" role="compact"/>
+                <ns83:textLayout xmlns:ns83="urn:pptxdsl:text-layout:v1" role="compact"/>
               </a:ext>
             </a:extLst>
           </a:bodyPr>
@@ -24895,7 +24895,7 @@
             <a:spAutoFit/>
             <a:extLst>
               <a:ext uri="{8AF73BB6-5E31-4F0F-A399-3D98F3B95FD9}">
-                <ns89:textLayout xmlns:ns89="urn:pptxdsl:text-layout:v1" role="natural"/>
+                <ns88:textLayout xmlns:ns88="urn:pptxdsl:text-layout:v1" role="natural"/>
               </a:ext>
             </a:extLst>
           </a:bodyPr>
@@ -24943,7 +24943,7 @@
             <a:spAutoFit/>
             <a:extLst>
               <a:ext uri="{8AF73BB6-5E31-4F0F-A399-3D98F3B95FD9}">
-                <ns94:textLayout xmlns:ns94="urn:pptxdsl:text-layout:v1" role="compact"/>
+                <ns93:textLayout xmlns:ns93="urn:pptxdsl:text-layout:v1" role="compact"/>
               </a:ext>
             </a:extLst>
           </a:bodyPr>
@@ -24970,14 +24970,14 @@
       </p:sp>
       <p:sp>
         <p:nvSpPr>
-          <p:cNvPr id="40" name="TextBox 39"/>
-          <p:cNvSpPr txBox="1"/>
-          <p:nvPr/>
-        </p:nvSpPr>
-        <p:spPr>
-          <a:xfrm>
-            <a:off x="2467508" y="3378936"/>
-            <a:ext cx="513207" cy="162306"/>
+          <p:cNvPr id="40" name="diagram:path-label"/>
+          <p:cNvSpPr txBox="1"/>
+          <p:nvPr/>
+        </p:nvSpPr>
+        <p:spPr>
+          <a:xfrm>
+            <a:off x="2354122" y="3371951"/>
+            <a:ext cx="533781" cy="176276"/>
           </a:xfrm>
           <a:prstGeom prst="rect">
             <a:avLst/>
@@ -24991,7 +24991,7 @@
             <a:spAutoFit/>
             <a:extLst>
               <a:ext uri="{8AF73BB6-5E31-4F0F-A399-3D98F3B95FD9}">
-                <ns99:textLayout xmlns:ns99="urn:pptxdsl:text-layout:v1" role="compact"/>
+                <ns98:textLayout xmlns:ns98="urn:pptxdsl:text-layout:v1" role="compact"/>
               </a:ext>
             </a:extLst>
           </a:bodyPr>
@@ -25003,7 +25003,7 @@
               </a:lnSpc>
             </a:pPr>
             <a:r>
-              <a:rPr sz="900" b="0" lang="ja-JP">
+              <a:rPr sz="1000" b="0" lang="ja-JP">
                 <a:solidFill>
                   <a:srgbClr val="202729"/>
                 </a:solidFill>
@@ -25018,14 +25018,14 @@
       </p:sp>
       <p:sp>
         <p:nvSpPr>
-          <p:cNvPr id="41" name="TextBox 40"/>
-          <p:cNvSpPr txBox="1"/>
-          <p:nvPr/>
-        </p:nvSpPr>
-        <p:spPr>
-          <a:xfrm>
-            <a:off x="6927151" y="2793720"/>
-            <a:ext cx="585216" cy="162306"/>
+          <p:cNvPr id="41" name="diagram:path-label"/>
+          <p:cNvSpPr txBox="1"/>
+          <p:nvPr/>
+        </p:nvSpPr>
+        <p:spPr>
+          <a:xfrm>
+            <a:off x="6906577" y="2786735"/>
+            <a:ext cx="626364" cy="176276"/>
           </a:xfrm>
           <a:prstGeom prst="rect">
             <a:avLst/>
@@ -25039,7 +25039,7 @@
             <a:spAutoFit/>
             <a:extLst>
               <a:ext uri="{8AF73BB6-5E31-4F0F-A399-3D98F3B95FD9}">
-                <ns104:textLayout xmlns:ns104="urn:pptxdsl:text-layout:v1" role="compact"/>
+                <ns103:textLayout xmlns:ns103="urn:pptxdsl:text-layout:v1" role="compact"/>
               </a:ext>
             </a:extLst>
           </a:bodyPr>
@@ -25051,7 +25051,7 @@
               </a:lnSpc>
             </a:pPr>
             <a:r>
-              <a:rPr sz="900" b="0" lang="ja-JP">
+              <a:rPr sz="1000" b="0" lang="ja-JP">
                 <a:solidFill>
                   <a:srgbClr val="202729"/>
                 </a:solidFill>
@@ -25066,14 +25066,14 @@
       </p:sp>
       <p:sp>
         <p:nvSpPr>
-          <p:cNvPr id="42" name="TextBox 41"/>
-          <p:cNvSpPr txBox="1"/>
-          <p:nvPr/>
-        </p:nvSpPr>
-        <p:spPr>
-          <a:xfrm>
-            <a:off x="6927151" y="3378936"/>
-            <a:ext cx="585216" cy="162306"/>
+          <p:cNvPr id="42" name="diagram:path-label"/>
+          <p:cNvSpPr txBox="1"/>
+          <p:nvPr/>
+        </p:nvSpPr>
+        <p:spPr>
+          <a:xfrm>
+            <a:off x="6906577" y="3371951"/>
+            <a:ext cx="626364" cy="176276"/>
           </a:xfrm>
           <a:prstGeom prst="rect">
             <a:avLst/>
@@ -25087,7 +25087,7 @@
             <a:spAutoFit/>
             <a:extLst>
               <a:ext uri="{8AF73BB6-5E31-4F0F-A399-3D98F3B95FD9}">
-                <ns109:textLayout xmlns:ns109="urn:pptxdsl:text-layout:v1" role="compact"/>
+                <ns108:textLayout xmlns:ns108="urn:pptxdsl:text-layout:v1" role="compact"/>
               </a:ext>
             </a:extLst>
           </a:bodyPr>
@@ -25099,7 +25099,7 @@
               </a:lnSpc>
             </a:pPr>
             <a:r>
-              <a:rPr sz="900" b="0" lang="ja-JP">
+              <a:rPr sz="1000" b="0" lang="ja-JP">
                 <a:solidFill>
                   <a:srgbClr val="202729"/>
                 </a:solidFill>
@@ -25114,14 +25114,14 @@
       </p:sp>
       <p:sp>
         <p:nvSpPr>
-          <p:cNvPr id="43" name="TextBox 42"/>
-          <p:cNvSpPr txBox="1"/>
-          <p:nvPr/>
-        </p:nvSpPr>
-        <p:spPr>
-          <a:xfrm>
-            <a:off x="9174975" y="3378936"/>
-            <a:ext cx="585216" cy="162306"/>
+          <p:cNvPr id="43" name="diagram:path-label"/>
+          <p:cNvSpPr txBox="1"/>
+          <p:nvPr/>
+        </p:nvSpPr>
+        <p:spPr>
+          <a:xfrm>
+            <a:off x="9314649" y="3371951"/>
+            <a:ext cx="636651" cy="176276"/>
           </a:xfrm>
           <a:prstGeom prst="rect">
             <a:avLst/>
@@ -25135,7 +25135,7 @@
             <a:spAutoFit/>
             <a:extLst>
               <a:ext uri="{8AF73BB6-5E31-4F0F-A399-3D98F3B95FD9}">
-                <ns114:textLayout xmlns:ns114="urn:pptxdsl:text-layout:v1" role="compact"/>
+                <ns113:textLayout xmlns:ns113="urn:pptxdsl:text-layout:v1" role="compact"/>
               </a:ext>
             </a:extLst>
           </a:bodyPr>
@@ -25147,7 +25147,7 @@
               </a:lnSpc>
             </a:pPr>
             <a:r>
-              <a:rPr sz="900" b="0" lang="ja-JP">
+              <a:rPr sz="1000" b="0" lang="ja-JP">
                 <a:solidFill>
                   <a:srgbClr val="202729"/>
                 </a:solidFill>
@@ -25181,7 +25181,7 @@
             <a:spAutoFit/>
             <a:extLst>
               <a:ext uri="{8AF73BB6-5E31-4F0F-A399-3D98F3B95FD9}">
-                <ns119:textLayout xmlns:ns119="urn:pptxdsl:text-layout:v1" role="body"/>
+                <ns118:textLayout xmlns:ns118="urn:pptxdsl:text-layout:v1" role="body"/>
               </a:ext>
             </a:extLst>
           </a:bodyPr>
@@ -25271,7 +25271,7 @@
             <a:spAutoFit/>
             <a:extLst>
               <a:ext uri="{8AF73BB6-5E31-4F0F-A399-3D98F3B95FD9}">
-                <ns124:textLayout xmlns:ns124="urn:pptxdsl:text-layout:v1" role="body"/>
+                <ns123:textLayout xmlns:ns123="urn:pptxdsl:text-layout:v1" role="body"/>
               </a:ext>
             </a:extLst>
           </a:bodyPr>
@@ -25317,7 +25317,7 @@
             <a:spAutoFit/>
             <a:extLst>
               <a:ext uri="{8AF73BB6-5E31-4F0F-A399-3D98F3B95FD9}">
-                <ns129:textLayout xmlns:ns129="urn:pptxdsl:text-layout:v1" role="body"/>
+                <ns128:textLayout xmlns:ns128="urn:pptxdsl:text-layout:v1" role="body"/>
               </a:ext>
             </a:extLst>
           </a:bodyPr>
@@ -25522,7 +25522,7 @@
             <a:avLst/>
           </a:prstGeom>
           <a:noFill/>
-          <a:ln w="15875">
+          <a:ln w="10795">
             <a:solidFill>
               <a:srgbClr val="6C7372"/>
             </a:solidFill>
@@ -25612,7 +25612,7 @@
             <a:avLst/>
           </a:prstGeom>
           <a:noFill/>
-          <a:ln w="15875">
+          <a:ln w="10795">
             <a:solidFill>
               <a:srgbClr val="182C43"/>
             </a:solidFill>
@@ -25702,11 +25702,11 @@
             <a:avLst/>
           </a:prstGeom>
           <a:noFill/>
-          <a:ln w="15875">
-            <a:prstDash val="dash"/>
+          <a:ln w="10795">
             <a:solidFill>
               <a:srgbClr val="6C7372"/>
             </a:solidFill>
+            <a:prstDash val="dash"/>
           </a:ln>
           <a:effectLst/>
         </p:spPr>
@@ -25753,7 +25753,7 @@
             <a:spAutoFit/>
             <a:extLst>
               <a:ext uri="{8AF73BB6-5E31-4F0F-A399-3D98F3B95FD9}">
-                <ns23:textLayout xmlns:ns23="urn:pptxdsl:text-layout:v1" role="natural"/>
+                <ns22:textLayout xmlns:ns22="urn:pptxdsl:text-layout:v1" role="natural"/>
               </a:ext>
             </a:extLst>
           </a:bodyPr>
@@ -25793,11 +25793,11 @@
             <a:avLst/>
           </a:prstGeom>
           <a:noFill/>
-          <a:ln w="15875">
-            <a:prstDash val="dash"/>
+          <a:ln w="10795">
             <a:solidFill>
               <a:srgbClr val="6C7372"/>
             </a:solidFill>
+            <a:prstDash val="dash"/>
           </a:ln>
           <a:effectLst/>
         </p:spPr>
@@ -25844,7 +25844,7 @@
             <a:spAutoFit/>
             <a:extLst>
               <a:ext uri="{8AF73BB6-5E31-4F0F-A399-3D98F3B95FD9}">
-                <ns29:textLayout xmlns:ns29="urn:pptxdsl:text-layout:v1" role="natural"/>
+                <ns27:textLayout xmlns:ns27="urn:pptxdsl:text-layout:v1" role="natural"/>
               </a:ext>
             </a:extLst>
           </a:bodyPr>
@@ -25883,9 +25883,9 @@
           <a:prstGeom prst="line">
             <a:avLst/>
           </a:prstGeom>
-          <a:ln w="15875">
+          <a:ln w="20320">
             <a:solidFill>
-              <a:srgbClr val="6C7372"/>
+              <a:srgbClr val="182C43"/>
             </a:solidFill>
             <a:tailEnd type="triangle" w="med" len="med"/>
           </a:ln>
@@ -25920,11 +25920,11 @@
           <a:prstGeom prst="line">
             <a:avLst/>
           </a:prstGeom>
-          <a:ln w="15875">
-            <a:prstDash val="dash"/>
+          <a:ln w="13970">
             <a:solidFill>
               <a:srgbClr val="6C7372"/>
             </a:solidFill>
+            <a:prstDash val="dash"/>
             <a:tailEnd type="triangle" w="med" len="med"/>
           </a:ln>
           <a:effectLst/>
@@ -25958,9 +25958,9 @@
           <a:prstGeom prst="line">
             <a:avLst/>
           </a:prstGeom>
-          <a:ln w="15875">
+          <a:ln w="20320">
             <a:solidFill>
-              <a:srgbClr val="6C7372"/>
+              <a:srgbClr val="182C43"/>
             </a:solidFill>
             <a:tailEnd type="triangle" w="med" len="med"/>
           </a:ln>
@@ -25995,9 +25995,9 @@
           <a:prstGeom prst="line">
             <a:avLst/>
           </a:prstGeom>
-          <a:ln w="15875">
+          <a:ln w="20320">
             <a:solidFill>
-              <a:srgbClr val="6C7372"/>
+              <a:srgbClr val="182C43"/>
             </a:solidFill>
           </a:ln>
           <a:effectLst/>
@@ -26031,9 +26031,9 @@
           <a:prstGeom prst="line">
             <a:avLst/>
           </a:prstGeom>
-          <a:ln w="15875">
+          <a:ln w="20320">
             <a:solidFill>
-              <a:srgbClr val="6C7372"/>
+              <a:srgbClr val="182C43"/>
             </a:solidFill>
           </a:ln>
           <a:effectLst/>
@@ -26067,9 +26067,9 @@
           <a:prstGeom prst="line">
             <a:avLst/>
           </a:prstGeom>
-          <a:ln w="15875">
+          <a:ln w="20320">
             <a:solidFill>
-              <a:srgbClr val="6C7372"/>
+              <a:srgbClr val="182C43"/>
             </a:solidFill>
             <a:tailEnd type="triangle" w="med" len="med"/>
           </a:ln>
@@ -26104,9 +26104,9 @@
           <a:prstGeom prst="line">
             <a:avLst/>
           </a:prstGeom>
-          <a:ln w="15875">
+          <a:ln w="20320">
             <a:solidFill>
-              <a:srgbClr val="6C7372"/>
+              <a:srgbClr val="182C43"/>
             </a:solidFill>
           </a:ln>
           <a:effectLst/>
@@ -26140,9 +26140,9 @@
           <a:prstGeom prst="line">
             <a:avLst/>
           </a:prstGeom>
-          <a:ln w="15875">
+          <a:ln w="20320">
             <a:solidFill>
-              <a:srgbClr val="6C7372"/>
+              <a:srgbClr val="182C43"/>
             </a:solidFill>
           </a:ln>
           <a:effectLst/>
@@ -26176,9 +26176,9 @@
           <a:prstGeom prst="line">
             <a:avLst/>
           </a:prstGeom>
-          <a:ln w="15875">
+          <a:ln w="20320">
             <a:solidFill>
-              <a:srgbClr val="6C7372"/>
+              <a:srgbClr val="182C43"/>
             </a:solidFill>
             <a:tailEnd type="triangle" w="med" len="med"/>
           </a:ln>
@@ -26213,9 +26213,9 @@
           <a:prstGeom prst="line">
             <a:avLst/>
           </a:prstGeom>
-          <a:ln w="15875">
+          <a:ln w="20320">
             <a:solidFill>
-              <a:srgbClr val="6C7372"/>
+              <a:srgbClr val="182C43"/>
             </a:solidFill>
           </a:ln>
           <a:effectLst/>
@@ -26249,9 +26249,9 @@
           <a:prstGeom prst="line">
             <a:avLst/>
           </a:prstGeom>
-          <a:ln w="15875">
+          <a:ln w="20320">
             <a:solidFill>
-              <a:srgbClr val="6C7372"/>
+              <a:srgbClr val="182C43"/>
             </a:solidFill>
           </a:ln>
           <a:effectLst/>
@@ -26285,9 +26285,9 @@
           <a:prstGeom prst="line">
             <a:avLst/>
           </a:prstGeom>
-          <a:ln w="15875">
+          <a:ln w="20320">
             <a:solidFill>
-              <a:srgbClr val="6C7372"/>
+              <a:srgbClr val="182C43"/>
             </a:solidFill>
             <a:tailEnd type="triangle" w="med" len="med"/>
           </a:ln>
@@ -26322,9 +26322,9 @@
           <a:prstGeom prst="line">
             <a:avLst/>
           </a:prstGeom>
-          <a:ln w="15875">
+          <a:ln w="20320">
             <a:solidFill>
-              <a:srgbClr val="6C7372"/>
+              <a:srgbClr val="182C43"/>
             </a:solidFill>
           </a:ln>
           <a:effectLst/>
@@ -26358,9 +26358,9 @@
           <a:prstGeom prst="line">
             <a:avLst/>
           </a:prstGeom>
-          <a:ln w="15875">
+          <a:ln w="20320">
             <a:solidFill>
-              <a:srgbClr val="6C7372"/>
+              <a:srgbClr val="182C43"/>
             </a:solidFill>
           </a:ln>
           <a:effectLst/>
@@ -26394,9 +26394,9 @@
           <a:prstGeom prst="line">
             <a:avLst/>
           </a:prstGeom>
-          <a:ln w="15875">
+          <a:ln w="20320">
             <a:solidFill>
-              <a:srgbClr val="6C7372"/>
+              <a:srgbClr val="182C43"/>
             </a:solidFill>
           </a:ln>
           <a:effectLst/>
@@ -26430,9 +26430,9 @@
           <a:prstGeom prst="line">
             <a:avLst/>
           </a:prstGeom>
-          <a:ln w="15875">
+          <a:ln w="20320">
             <a:solidFill>
-              <a:srgbClr val="6C7372"/>
+              <a:srgbClr val="182C43"/>
             </a:solidFill>
             <a:tailEnd type="triangle" w="med" len="med"/>
           </a:ln>
@@ -26467,13 +26467,13 @@
           <a:prstGeom prst="line">
             <a:avLst/>
           </a:prstGeom>
-          <a:ln w="19050">
-            <a:prstDash val="dash"/>
+          <a:ln w="13970">
             <a:solidFill>
               <a:srgbClr val="6C7372"/>
             </a:solidFill>
+            <a:prstDash val="dash"/>
+            <a:headEnd type="triangle" w="med" len="med"/>
             <a:tailEnd type="triangle" w="med" len="med"/>
-            <a:headEnd type="triangle" w="med" len="med"/>
           </a:ln>
           <a:effectLst/>
         </p:spPr>
@@ -26506,9 +26506,9 @@
           <a:prstGeom prst="line">
             <a:avLst/>
           </a:prstGeom>
-          <a:ln w="15875">
+          <a:ln w="20320">
             <a:solidFill>
-              <a:srgbClr val="6C7372"/>
+              <a:srgbClr val="182C43"/>
             </a:solidFill>
           </a:ln>
           <a:effectLst/>
@@ -26542,9 +26542,9 @@
           <a:prstGeom prst="line">
             <a:avLst/>
           </a:prstGeom>
-          <a:ln w="15875">
+          <a:ln w="20320">
             <a:solidFill>
-              <a:srgbClr val="6C7372"/>
+              <a:srgbClr val="182C43"/>
             </a:solidFill>
           </a:ln>
           <a:effectLst/>
@@ -26578,9 +26578,9 @@
           <a:prstGeom prst="line">
             <a:avLst/>
           </a:prstGeom>
-          <a:ln w="15875">
+          <a:ln w="20320">
             <a:solidFill>
-              <a:srgbClr val="6C7372"/>
+              <a:srgbClr val="182C43"/>
             </a:solidFill>
             <a:tailEnd type="triangle" w="med" len="med"/>
           </a:ln>
@@ -26615,11 +26615,11 @@
           <a:prstGeom prst="line">
             <a:avLst/>
           </a:prstGeom>
-          <a:ln w="15875">
-            <a:prstDash val="dash"/>
+          <a:ln w="13970">
             <a:solidFill>
               <a:srgbClr val="6C7372"/>
             </a:solidFill>
+            <a:prstDash val="dash"/>
             <a:tailEnd type="triangle" w="med" len="med"/>
           </a:ln>
           <a:effectLst/>
@@ -26686,7 +26686,7 @@
             <a:spAutoFit/>
             <a:extLst>
               <a:ext uri="{8AF73BB6-5E31-4F0F-A399-3D98F3B95FD9}">
-                <ns48:textLayout xmlns:ns48="urn:pptxdsl:text-layout:v1" role="natural"/>
+                <ns43:textLayout xmlns:ns43="urn:pptxdsl:text-layout:v1" role="natural"/>
               </a:ext>
             </a:extLst>
           </a:bodyPr>
@@ -26758,7 +26758,7 @@
             <a:spAutoFit/>
             <a:extLst>
               <a:ext uri="{8AF73BB6-5E31-4F0F-A399-3D98F3B95FD9}">
-                <ns53:textLayout xmlns:ns53="urn:pptxdsl:text-layout:v1" role="natural"/>
+                <ns48:textLayout xmlns:ns48="urn:pptxdsl:text-layout:v1" role="natural"/>
               </a:ext>
             </a:extLst>
           </a:bodyPr>
@@ -26830,7 +26830,7 @@
             <a:spAutoFit/>
             <a:extLst>
               <a:ext uri="{8AF73BB6-5E31-4F0F-A399-3D98F3B95FD9}">
-                <ns58:textLayout xmlns:ns58="urn:pptxdsl:text-layout:v1" role="natural"/>
+                <ns53:textLayout xmlns:ns53="urn:pptxdsl:text-layout:v1" role="natural"/>
               </a:ext>
             </a:extLst>
           </a:bodyPr>
@@ -26902,7 +26902,7 @@
             <a:spAutoFit/>
             <a:extLst>
               <a:ext uri="{8AF73BB6-5E31-4F0F-A399-3D98F3B95FD9}">
-                <ns63:textLayout xmlns:ns63="urn:pptxdsl:text-layout:v1" role="natural"/>
+                <ns58:textLayout xmlns:ns58="urn:pptxdsl:text-layout:v1" role="natural"/>
               </a:ext>
             </a:extLst>
           </a:bodyPr>
@@ -26974,7 +26974,7 @@
             <a:spAutoFit/>
             <a:extLst>
               <a:ext uri="{8AF73BB6-5E31-4F0F-A399-3D98F3B95FD9}">
-                <ns68:textLayout xmlns:ns68="urn:pptxdsl:text-layout:v1" role="natural"/>
+                <ns63:textLayout xmlns:ns63="urn:pptxdsl:text-layout:v1" role="natural"/>
               </a:ext>
             </a:extLst>
           </a:bodyPr>
@@ -27046,7 +27046,7 @@
             <a:spAutoFit/>
             <a:extLst>
               <a:ext uri="{8AF73BB6-5E31-4F0F-A399-3D98F3B95FD9}">
-                <ns73:textLayout xmlns:ns73="urn:pptxdsl:text-layout:v1" role="natural"/>
+                <ns68:textLayout xmlns:ns68="urn:pptxdsl:text-layout:v1" role="natural"/>
               </a:ext>
             </a:extLst>
           </a:bodyPr>
@@ -27118,7 +27118,7 @@
             <a:spAutoFit/>
             <a:extLst>
               <a:ext uri="{8AF73BB6-5E31-4F0F-A399-3D98F3B95FD9}">
-                <ns78:textLayout xmlns:ns78="urn:pptxdsl:text-layout:v1" role="natural"/>
+                <ns73:textLayout xmlns:ns73="urn:pptxdsl:text-layout:v1" role="natural"/>
               </a:ext>
             </a:extLst>
           </a:bodyPr>
@@ -27190,7 +27190,7 @@
             <a:spAutoFit/>
             <a:extLst>
               <a:ext uri="{8AF73BB6-5E31-4F0F-A399-3D98F3B95FD9}">
-                <ns83:textLayout xmlns:ns83="urn:pptxdsl:text-layout:v1" role="natural"/>
+                <ns78:textLayout xmlns:ns78="urn:pptxdsl:text-layout:v1" role="natural"/>
               </a:ext>
             </a:extLst>
           </a:bodyPr>
@@ -27262,7 +27262,7 @@
             <a:spAutoFit/>
             <a:extLst>
               <a:ext uri="{8AF73BB6-5E31-4F0F-A399-3D98F3B95FD9}">
-                <ns88:textLayout xmlns:ns88="urn:pptxdsl:text-layout:v1" role="natural"/>
+                <ns83:textLayout xmlns:ns83="urn:pptxdsl:text-layout:v1" role="natural"/>
               </a:ext>
             </a:extLst>
           </a:bodyPr>
@@ -27310,7 +27310,7 @@
             <a:spAutoFit/>
             <a:extLst>
               <a:ext uri="{8AF73BB6-5E31-4F0F-A399-3D98F3B95FD9}">
-                <ns93:textLayout xmlns:ns93="urn:pptxdsl:text-layout:v1" role="compact"/>
+                <ns88:textLayout xmlns:ns88="urn:pptxdsl:text-layout:v1" role="compact"/>
               </a:ext>
             </a:extLst>
           </a:bodyPr>
@@ -27382,7 +27382,7 @@
             <a:spAutoFit/>
             <a:extLst>
               <a:ext uri="{8AF73BB6-5E31-4F0F-A399-3D98F3B95FD9}">
-                <ns98:textLayout xmlns:ns98="urn:pptxdsl:text-layout:v1" role="natural"/>
+                <ns93:textLayout xmlns:ns93="urn:pptxdsl:text-layout:v1" role="natural"/>
               </a:ext>
             </a:extLst>
           </a:bodyPr>
@@ -27430,7 +27430,7 @@
             <a:spAutoFit/>
             <a:extLst>
               <a:ext uri="{8AF73BB6-5E31-4F0F-A399-3D98F3B95FD9}">
-                <ns103:textLayout xmlns:ns103="urn:pptxdsl:text-layout:v1" role="compact"/>
+                <ns98:textLayout xmlns:ns98="urn:pptxdsl:text-layout:v1" role="compact"/>
               </a:ext>
             </a:extLst>
           </a:bodyPr>
@@ -27457,14 +27457,14 @@
       </p:sp>
       <p:sp>
         <p:nvSpPr>
-          <p:cNvPr id="56" name="TextBox 55"/>
-          <p:cNvSpPr txBox="1"/>
-          <p:nvPr/>
-        </p:nvSpPr>
-        <p:spPr>
-          <a:xfrm>
-            <a:off x="2438339" y="2523149"/>
-            <a:ext cx="585216" cy="162306"/>
+          <p:cNvPr id="56" name="diagram:path-label"/>
+          <p:cNvSpPr txBox="1"/>
+          <p:nvPr/>
+        </p:nvSpPr>
+        <p:spPr>
+          <a:xfrm>
+            <a:off x="2674940" y="2516164"/>
+            <a:ext cx="626364" cy="176276"/>
           </a:xfrm>
           <a:prstGeom prst="rect">
             <a:avLst/>
@@ -27478,7 +27478,7 @@
             <a:spAutoFit/>
             <a:extLst>
               <a:ext uri="{8AF73BB6-5E31-4F0F-A399-3D98F3B95FD9}">
-                <ns108:textLayout xmlns:ns108="urn:pptxdsl:text-layout:v1" role="compact"/>
+                <ns103:textLayout xmlns:ns103="urn:pptxdsl:text-layout:v1" role="compact"/>
               </a:ext>
             </a:extLst>
           </a:bodyPr>
@@ -27490,7 +27490,7 @@
               </a:lnSpc>
             </a:pPr>
             <a:r>
-              <a:rPr sz="900" b="0" lang="ja-JP">
+              <a:rPr sz="1000" b="0" lang="ja-JP">
                 <a:solidFill>
                   <a:srgbClr val="202729"/>
                 </a:solidFill>
@@ -27505,14 +27505,14 @@
       </p:sp>
       <p:sp>
         <p:nvSpPr>
-          <p:cNvPr id="57" name="TextBox 56"/>
-          <p:cNvSpPr txBox="1"/>
-          <p:nvPr/>
-        </p:nvSpPr>
-        <p:spPr>
-          <a:xfrm>
-            <a:off x="4940114" y="2742605"/>
-            <a:ext cx="513207" cy="162306"/>
+          <p:cNvPr id="57" name="diagram:path-label"/>
+          <p:cNvSpPr txBox="1"/>
+          <p:nvPr/>
+        </p:nvSpPr>
+        <p:spPr>
+          <a:xfrm>
+            <a:off x="4929827" y="2735620"/>
+            <a:ext cx="533781" cy="176276"/>
           </a:xfrm>
           <a:prstGeom prst="rect">
             <a:avLst/>
@@ -27526,7 +27526,7 @@
             <a:spAutoFit/>
             <a:extLst>
               <a:ext uri="{8AF73BB6-5E31-4F0F-A399-3D98F3B95FD9}">
-                <ns113:textLayout xmlns:ns113="urn:pptxdsl:text-layout:v1" role="compact"/>
+                <ns108:textLayout xmlns:ns108="urn:pptxdsl:text-layout:v1" role="compact"/>
               </a:ext>
             </a:extLst>
           </a:bodyPr>
@@ -27538,7 +27538,7 @@
               </a:lnSpc>
             </a:pPr>
             <a:r>
-              <a:rPr sz="900" b="0" lang="ja-JP">
+              <a:rPr sz="1000" b="0" lang="ja-JP">
                 <a:solidFill>
                   <a:srgbClr val="202729"/>
                 </a:solidFill>
@@ -27553,14 +27553,14 @@
       </p:sp>
       <p:sp>
         <p:nvSpPr>
-          <p:cNvPr id="58" name="TextBox 57"/>
-          <p:cNvSpPr txBox="1"/>
-          <p:nvPr/>
-        </p:nvSpPr>
-        <p:spPr>
-          <a:xfrm>
-            <a:off x="6825813" y="4992029"/>
-            <a:ext cx="338328" cy="162306"/>
+          <p:cNvPr id="58" name="diagram:path-label"/>
+          <p:cNvSpPr txBox="1"/>
+          <p:nvPr/>
+        </p:nvSpPr>
+        <p:spPr>
+          <a:xfrm>
+            <a:off x="6815526" y="4985044"/>
+            <a:ext cx="358901" cy="176276"/>
           </a:xfrm>
           <a:prstGeom prst="rect">
             <a:avLst/>
@@ -27574,7 +27574,7 @@
             <a:spAutoFit/>
             <a:extLst>
               <a:ext uri="{8AF73BB6-5E31-4F0F-A399-3D98F3B95FD9}">
-                <ns118:textLayout xmlns:ns118="urn:pptxdsl:text-layout:v1" role="compact"/>
+                <ns113:textLayout xmlns:ns113="urn:pptxdsl:text-layout:v1" role="compact"/>
               </a:ext>
             </a:extLst>
           </a:bodyPr>
@@ -27586,7 +27586,7 @@
               </a:lnSpc>
             </a:pPr>
             <a:r>
-              <a:rPr sz="900" b="0" lang="ja-JP">
+              <a:rPr sz="1000" b="0" lang="ja-JP">
                 <a:solidFill>
                   <a:srgbClr val="202729"/>
                 </a:solidFill>
@@ -27601,14 +27601,14 @@
       </p:sp>
       <p:sp>
         <p:nvSpPr>
-          <p:cNvPr id="59" name="TextBox 58"/>
-          <p:cNvSpPr txBox="1"/>
-          <p:nvPr/>
-        </p:nvSpPr>
-        <p:spPr>
-          <a:xfrm>
-            <a:off x="9720209" y="3519845"/>
-            <a:ext cx="461772" cy="162306"/>
+          <p:cNvPr id="59" name="diagram:path-label"/>
+          <p:cNvSpPr txBox="1"/>
+          <p:nvPr/>
+        </p:nvSpPr>
+        <p:spPr>
+          <a:xfrm>
+            <a:off x="9531614" y="3379002"/>
+            <a:ext cx="492633" cy="176276"/>
           </a:xfrm>
           <a:prstGeom prst="rect">
             <a:avLst/>
@@ -27622,7 +27622,7 @@
             <a:spAutoFit/>
             <a:extLst>
               <a:ext uri="{8AF73BB6-5E31-4F0F-A399-3D98F3B95FD9}">
-                <ns123:textLayout xmlns:ns123="urn:pptxdsl:text-layout:v1" role="compact"/>
+                <ns118:textLayout xmlns:ns118="urn:pptxdsl:text-layout:v1" role="compact"/>
               </a:ext>
             </a:extLst>
           </a:bodyPr>
@@ -27634,7 +27634,7 @@
               </a:lnSpc>
             </a:pPr>
             <a:r>
-              <a:rPr sz="900" b="0" lang="ja-JP">
+              <a:rPr sz="1000" b="0" lang="ja-JP">
                 <a:solidFill>
                   <a:srgbClr val="202729"/>
                 </a:solidFill>
@@ -27712,7 +27712,7 @@
             <a:spAutoFit/>
             <a:extLst>
               <a:ext uri="{8AF73BB6-5E31-4F0F-A399-3D98F3B95FD9}">
-                <ns128:textLayout xmlns:ns128="urn:pptxdsl:text-layout:v1" role="body"/>
+                <ns123:textLayout xmlns:ns123="urn:pptxdsl:text-layout:v1" role="body"/>
               </a:ext>
             </a:extLst>
           </a:bodyPr>
@@ -27758,7 +27758,7 @@
             <a:spAutoFit/>
             <a:extLst>
               <a:ext uri="{8AF73BB6-5E31-4F0F-A399-3D98F3B95FD9}">
-                <ns133:textLayout xmlns:ns133="urn:pptxdsl:text-layout:v1" role="body"/>
+                <ns128:textLayout xmlns:ns128="urn:pptxdsl:text-layout:v1" role="body"/>
               </a:ext>
             </a:extLst>
           </a:bodyPr>
@@ -29262,10 +29262,10 @@
             <a:avLst/>
           </a:prstGeom>
           <a:ln w="19050">
-            <a:prstDash val="dash"/>
             <a:solidFill>
               <a:srgbClr val="6C7372"/>
             </a:solidFill>
+            <a:prstDash val="dash"/>
             <a:tailEnd type="triangle" w="med" len="med"/>
           </a:ln>
           <a:effectLst/>
@@ -29308,7 +29308,7 @@
             <a:spAutoFit/>
             <a:extLst>
               <a:ext uri="{8AF73BB6-5E31-4F0F-A399-3D98F3B95FD9}">
-                <ns94:textLayout xmlns:ns94="urn:pptxdsl:text-layout:v1" role="compact"/>
+                <ns93:textLayout xmlns:ns93="urn:pptxdsl:text-layout:v1" role="compact"/>
               </a:ext>
             </a:extLst>
           </a:bodyPr>
@@ -29380,7 +29380,7 @@
             <a:spAutoFit/>
             <a:extLst>
               <a:ext uri="{8AF73BB6-5E31-4F0F-A399-3D98F3B95FD9}">
-                <ns99:textLayout xmlns:ns99="urn:pptxdsl:text-layout:v1" role="natural"/>
+                <ns98:textLayout xmlns:ns98="urn:pptxdsl:text-layout:v1" role="natural"/>
               </a:ext>
             </a:extLst>
           </a:bodyPr>
@@ -29452,7 +29452,7 @@
             <a:spAutoFit/>
             <a:extLst>
               <a:ext uri="{8AF73BB6-5E31-4F0F-A399-3D98F3B95FD9}">
-                <ns104:textLayout xmlns:ns104="urn:pptxdsl:text-layout:v1" role="natural"/>
+                <ns103:textLayout xmlns:ns103="urn:pptxdsl:text-layout:v1" role="natural"/>
               </a:ext>
             </a:extLst>
           </a:bodyPr>
@@ -29524,7 +29524,7 @@
             <a:spAutoFit/>
             <a:extLst>
               <a:ext uri="{8AF73BB6-5E31-4F0F-A399-3D98F3B95FD9}">
-                <ns109:textLayout xmlns:ns109="urn:pptxdsl:text-layout:v1" role="natural"/>
+                <ns108:textLayout xmlns:ns108="urn:pptxdsl:text-layout:v1" role="natural"/>
               </a:ext>
             </a:extLst>
           </a:bodyPr>
@@ -29596,7 +29596,7 @@
             <a:spAutoFit/>
             <a:extLst>
               <a:ext uri="{8AF73BB6-5E31-4F0F-A399-3D98F3B95FD9}">
-                <ns114:textLayout xmlns:ns114="urn:pptxdsl:text-layout:v1" role="natural"/>
+                <ns113:textLayout xmlns:ns113="urn:pptxdsl:text-layout:v1" role="natural"/>
               </a:ext>
             </a:extLst>
           </a:bodyPr>
@@ -29668,7 +29668,7 @@
             <a:spAutoFit/>
             <a:extLst>
               <a:ext uri="{8AF73BB6-5E31-4F0F-A399-3D98F3B95FD9}">
-                <ns119:textLayout xmlns:ns119="urn:pptxdsl:text-layout:v1" role="natural"/>
+                <ns118:textLayout xmlns:ns118="urn:pptxdsl:text-layout:v1" role="natural"/>
               </a:ext>
             </a:extLst>
           </a:bodyPr>
@@ -29740,7 +29740,7 @@
             <a:spAutoFit/>
             <a:extLst>
               <a:ext uri="{8AF73BB6-5E31-4F0F-A399-3D98F3B95FD9}">
-                <ns124:textLayout xmlns:ns124="urn:pptxdsl:text-layout:v1" role="natural"/>
+                <ns123:textLayout xmlns:ns123="urn:pptxdsl:text-layout:v1" role="natural"/>
               </a:ext>
             </a:extLst>
           </a:bodyPr>
@@ -29812,7 +29812,7 @@
             <a:spAutoFit/>
             <a:extLst>
               <a:ext uri="{8AF73BB6-5E31-4F0F-A399-3D98F3B95FD9}">
-                <ns129:textLayout xmlns:ns129="urn:pptxdsl:text-layout:v1" role="natural"/>
+                <ns128:textLayout xmlns:ns128="urn:pptxdsl:text-layout:v1" role="natural"/>
               </a:ext>
             </a:extLst>
           </a:bodyPr>
@@ -29902,7 +29902,7 @@
             <a:spAutoFit/>
             <a:extLst>
               <a:ext uri="{8AF73BB6-5E31-4F0F-A399-3D98F3B95FD9}">
-                <ns134:textLayout xmlns:ns134="urn:pptxdsl:text-layout:v1" role="body"/>
+                <ns133:textLayout xmlns:ns133="urn:pptxdsl:text-layout:v1" role="body"/>
               </a:ext>
             </a:extLst>
           </a:bodyPr>
@@ -29948,7 +29948,7 @@
             <a:spAutoFit/>
             <a:extLst>
               <a:ext uri="{8AF73BB6-5E31-4F0F-A399-3D98F3B95FD9}">
-                <ns139:textLayout xmlns:ns139="urn:pptxdsl:text-layout:v1" role="body"/>
+                <ns138:textLayout xmlns:ns138="urn:pptxdsl:text-layout:v1" role="body"/>
               </a:ext>
             </a:extLst>
           </a:bodyPr>
@@ -30153,7 +30153,7 @@
             <a:avLst/>
           </a:prstGeom>
           <a:noFill/>
-          <a:ln w="15875">
+          <a:ln w="10795">
             <a:solidFill>
               <a:srgbClr val="6C7372"/>
             </a:solidFill>
@@ -30242,9 +30242,9 @@
           <a:prstGeom prst="line">
             <a:avLst/>
           </a:prstGeom>
-          <a:ln w="15875">
+          <a:ln w="20320">
             <a:solidFill>
-              <a:srgbClr val="6C7372"/>
+              <a:srgbClr val="182C43"/>
             </a:solidFill>
             <a:tailEnd type="triangle" w="med" len="med"/>
           </a:ln>
@@ -30279,9 +30279,9 @@
           <a:prstGeom prst="line">
             <a:avLst/>
           </a:prstGeom>
-          <a:ln w="15875">
+          <a:ln w="20320">
             <a:solidFill>
-              <a:srgbClr val="6C7372"/>
+              <a:srgbClr val="182C43"/>
             </a:solidFill>
             <a:tailEnd type="triangle" w="med" len="med"/>
           </a:ln>
@@ -30316,9 +30316,9 @@
           <a:prstGeom prst="line">
             <a:avLst/>
           </a:prstGeom>
-          <a:ln w="15875">
+          <a:ln w="20320">
             <a:solidFill>
-              <a:srgbClr val="6C7372"/>
+              <a:srgbClr val="182C43"/>
             </a:solidFill>
             <a:tailEnd type="triangle" w="med" len="med"/>
           </a:ln>
@@ -30353,9 +30353,9 @@
           <a:prstGeom prst="line">
             <a:avLst/>
           </a:prstGeom>
-          <a:ln w="15875">
+          <a:ln w="20320">
             <a:solidFill>
-              <a:srgbClr val="6C7372"/>
+              <a:srgbClr val="182C43"/>
             </a:solidFill>
             <a:tailEnd type="triangle" w="med" len="med"/>
           </a:ln>
@@ -30390,11 +30390,11 @@
           <a:prstGeom prst="line">
             <a:avLst/>
           </a:prstGeom>
-          <a:ln w="15875">
-            <a:prstDash val="dash"/>
+          <a:ln w="13970">
             <a:solidFill>
               <a:srgbClr val="6C7372"/>
             </a:solidFill>
+            <a:prstDash val="dash"/>
           </a:ln>
           <a:effectLst/>
         </p:spPr>
@@ -30427,11 +30427,11 @@
           <a:prstGeom prst="line">
             <a:avLst/>
           </a:prstGeom>
-          <a:ln w="15875">
-            <a:prstDash val="dash"/>
+          <a:ln w="13970">
             <a:solidFill>
               <a:srgbClr val="6C7372"/>
             </a:solidFill>
+            <a:prstDash val="dash"/>
           </a:ln>
           <a:effectLst/>
         </p:spPr>
@@ -30464,11 +30464,11 @@
           <a:prstGeom prst="line">
             <a:avLst/>
           </a:prstGeom>
-          <a:ln w="15875">
-            <a:prstDash val="dash"/>
+          <a:ln w="13970">
             <a:solidFill>
               <a:srgbClr val="6C7372"/>
             </a:solidFill>
+            <a:prstDash val="dash"/>
           </a:ln>
           <a:effectLst/>
         </p:spPr>
@@ -30501,11 +30501,11 @@
           <a:prstGeom prst="line">
             <a:avLst/>
           </a:prstGeom>
-          <a:ln w="15875">
-            <a:prstDash val="dash"/>
+          <a:ln w="13970">
             <a:solidFill>
               <a:srgbClr val="6C7372"/>
             </a:solidFill>
+            <a:prstDash val="dash"/>
             <a:tailEnd type="triangle" w="med" len="med"/>
           </a:ln>
           <a:effectLst/>
@@ -30539,11 +30539,11 @@
           <a:prstGeom prst="line">
             <a:avLst/>
           </a:prstGeom>
-          <a:ln w="15875">
-            <a:prstDash val="dash"/>
+          <a:ln w="13970">
             <a:solidFill>
               <a:srgbClr val="6C7372"/>
             </a:solidFill>
+            <a:prstDash val="dash"/>
           </a:ln>
           <a:effectLst/>
         </p:spPr>
@@ -30576,11 +30576,11 @@
           <a:prstGeom prst="line">
             <a:avLst/>
           </a:prstGeom>
-          <a:ln w="15875">
-            <a:prstDash val="dash"/>
+          <a:ln w="13970">
             <a:solidFill>
               <a:srgbClr val="6C7372"/>
             </a:solidFill>
+            <a:prstDash val="dash"/>
           </a:ln>
           <a:effectLst/>
         </p:spPr>
@@ -30613,11 +30613,11 @@
           <a:prstGeom prst="line">
             <a:avLst/>
           </a:prstGeom>
-          <a:ln w="15875">
-            <a:prstDash val="dash"/>
+          <a:ln w="13970">
             <a:solidFill>
               <a:srgbClr val="6C7372"/>
             </a:solidFill>
+            <a:prstDash val="dash"/>
             <a:tailEnd type="triangle" w="med" len="med"/>
           </a:ln>
           <a:effectLst/>
@@ -30684,7 +30684,7 @@
             <a:spAutoFit/>
             <a:extLst>
               <a:ext uri="{8AF73BB6-5E31-4F0F-A399-3D98F3B95FD9}">
-                <ns30:textLayout xmlns:ns30="urn:pptxdsl:text-layout:v1" role="natural"/>
+                <ns23:textLayout xmlns:ns23="urn:pptxdsl:text-layout:v1" role="natural"/>
               </a:ext>
             </a:extLst>
           </a:bodyPr>
@@ -30732,7 +30732,7 @@
             <a:spAutoFit/>
             <a:extLst>
               <a:ext uri="{8AF73BB6-5E31-4F0F-A399-3D98F3B95FD9}">
-                <ns35:textLayout xmlns:ns35="urn:pptxdsl:text-layout:v1" role="compact"/>
+                <ns28:textLayout xmlns:ns28="urn:pptxdsl:text-layout:v1" role="compact"/>
               </a:ext>
             </a:extLst>
           </a:bodyPr>
@@ -30804,7 +30804,7 @@
             <a:spAutoFit/>
             <a:extLst>
               <a:ext uri="{8AF73BB6-5E31-4F0F-A399-3D98F3B95FD9}">
-                <ns40:textLayout xmlns:ns40="urn:pptxdsl:text-layout:v1" role="natural"/>
+                <ns33:textLayout xmlns:ns33="urn:pptxdsl:text-layout:v1" role="natural"/>
               </a:ext>
             </a:extLst>
           </a:bodyPr>
@@ -30876,7 +30876,7 @@
             <a:spAutoFit/>
             <a:extLst>
               <a:ext uri="{8AF73BB6-5E31-4F0F-A399-3D98F3B95FD9}">
-                <ns45:textLayout xmlns:ns45="urn:pptxdsl:text-layout:v1" role="natural"/>
+                <ns38:textLayout xmlns:ns38="urn:pptxdsl:text-layout:v1" role="natural"/>
               </a:ext>
             </a:extLst>
           </a:bodyPr>
@@ -30948,7 +30948,7 @@
             <a:spAutoFit/>
             <a:extLst>
               <a:ext uri="{8AF73BB6-5E31-4F0F-A399-3D98F3B95FD9}">
-                <ns50:textLayout xmlns:ns50="urn:pptxdsl:text-layout:v1" role="natural"/>
+                <ns43:textLayout xmlns:ns43="urn:pptxdsl:text-layout:v1" role="natural"/>
               </a:ext>
             </a:extLst>
           </a:bodyPr>
@@ -30996,7 +30996,7 @@
             <a:spAutoFit/>
             <a:extLst>
               <a:ext uri="{8AF73BB6-5E31-4F0F-A399-3D98F3B95FD9}">
-                <ns55:textLayout xmlns:ns55="urn:pptxdsl:text-layout:v1" role="compact"/>
+                <ns48:textLayout xmlns:ns48="urn:pptxdsl:text-layout:v1" role="compact"/>
               </a:ext>
             </a:extLst>
           </a:bodyPr>
@@ -31068,7 +31068,7 @@
             <a:spAutoFit/>
             <a:extLst>
               <a:ext uri="{8AF73BB6-5E31-4F0F-A399-3D98F3B95FD9}">
-                <ns60:textLayout xmlns:ns60="urn:pptxdsl:text-layout:v1" role="natural"/>
+                <ns53:textLayout xmlns:ns53="urn:pptxdsl:text-layout:v1" role="natural"/>
               </a:ext>
             </a:extLst>
           </a:bodyPr>
@@ -31140,7 +31140,7 @@
             <a:spAutoFit/>
             <a:extLst>
               <a:ext uri="{8AF73BB6-5E31-4F0F-A399-3D98F3B95FD9}">
-                <ns65:textLayout xmlns:ns65="urn:pptxdsl:text-layout:v1" role="natural"/>
+                <ns58:textLayout xmlns:ns58="urn:pptxdsl:text-layout:v1" role="natural"/>
               </a:ext>
             </a:extLst>
           </a:bodyPr>
@@ -31188,7 +31188,7 @@
             <a:spAutoFit/>
             <a:extLst>
               <a:ext uri="{8AF73BB6-5E31-4F0F-A399-3D98F3B95FD9}">
-                <ns70:textLayout xmlns:ns70="urn:pptxdsl:text-layout:v1" role="compact"/>
+                <ns63:textLayout xmlns:ns63="urn:pptxdsl:text-layout:v1" role="compact"/>
               </a:ext>
             </a:extLst>
           </a:bodyPr>
@@ -31260,7 +31260,7 @@
             <a:spAutoFit/>
             <a:extLst>
               <a:ext uri="{8AF73BB6-5E31-4F0F-A399-3D98F3B95FD9}">
-                <ns75:textLayout xmlns:ns75="urn:pptxdsl:text-layout:v1" role="natural"/>
+                <ns68:textLayout xmlns:ns68="urn:pptxdsl:text-layout:v1" role="natural"/>
               </a:ext>
             </a:extLst>
           </a:bodyPr>
@@ -31308,7 +31308,7 @@
             <a:spAutoFit/>
             <a:extLst>
               <a:ext uri="{8AF73BB6-5E31-4F0F-A399-3D98F3B95FD9}">
-                <ns80:textLayout xmlns:ns80="urn:pptxdsl:text-layout:v1" role="compact"/>
+                <ns73:textLayout xmlns:ns73="urn:pptxdsl:text-layout:v1" role="compact"/>
               </a:ext>
             </a:extLst>
           </a:bodyPr>
@@ -31335,14 +31335,14 @@
       </p:sp>
       <p:sp>
         <p:nvSpPr>
-          <p:cNvPr id="36" name="TextBox 35"/>
-          <p:cNvSpPr txBox="1"/>
-          <p:nvPr/>
-        </p:nvSpPr>
-        <p:spPr>
-          <a:xfrm>
-            <a:off x="2842145" y="3248177"/>
-            <a:ext cx="513207" cy="162306"/>
+          <p:cNvPr id="36" name="diagram:path-label"/>
+          <p:cNvSpPr txBox="1"/>
+          <p:nvPr/>
+        </p:nvSpPr>
+        <p:spPr>
+          <a:xfrm>
+            <a:off x="2831858" y="3241192"/>
+            <a:ext cx="533781" cy="176276"/>
           </a:xfrm>
           <a:prstGeom prst="rect">
             <a:avLst/>
@@ -31356,7 +31356,7 @@
             <a:spAutoFit/>
             <a:extLst>
               <a:ext uri="{8AF73BB6-5E31-4F0F-A399-3D98F3B95FD9}">
-                <ns85:textLayout xmlns:ns85="urn:pptxdsl:text-layout:v1" role="compact"/>
+                <ns78:textLayout xmlns:ns78="urn:pptxdsl:text-layout:v1" role="compact"/>
               </a:ext>
             </a:extLst>
           </a:bodyPr>
@@ -31368,7 +31368,7 @@
               </a:lnSpc>
             </a:pPr>
             <a:r>
-              <a:rPr sz="900" b="0" lang="ja-JP">
+              <a:rPr sz="1000" b="0" lang="ja-JP">
                 <a:solidFill>
                   <a:srgbClr val="202729"/>
                 </a:solidFill>
@@ -31383,14 +31383,14 @@
       </p:sp>
       <p:sp>
         <p:nvSpPr>
-          <p:cNvPr id="37" name="TextBox 36"/>
-          <p:cNvSpPr txBox="1"/>
-          <p:nvPr/>
-        </p:nvSpPr>
-        <p:spPr>
-          <a:xfrm>
-            <a:off x="7425232" y="2754401"/>
-            <a:ext cx="338328" cy="162306"/>
+          <p:cNvPr id="37" name="diagram:path-label"/>
+          <p:cNvSpPr txBox="1"/>
+          <p:nvPr/>
+        </p:nvSpPr>
+        <p:spPr>
+          <a:xfrm>
+            <a:off x="7414945" y="2747416"/>
+            <a:ext cx="358901" cy="176276"/>
           </a:xfrm>
           <a:prstGeom prst="rect">
             <a:avLst/>
@@ -31404,7 +31404,7 @@
             <a:spAutoFit/>
             <a:extLst>
               <a:ext uri="{8AF73BB6-5E31-4F0F-A399-3D98F3B95FD9}">
-                <ns90:textLayout xmlns:ns90="urn:pptxdsl:text-layout:v1" role="compact"/>
+                <ns83:textLayout xmlns:ns83="urn:pptxdsl:text-layout:v1" role="compact"/>
               </a:ext>
             </a:extLst>
           </a:bodyPr>
@@ -31416,7 +31416,7 @@
               </a:lnSpc>
             </a:pPr>
             <a:r>
-              <a:rPr sz="900" b="0" lang="ja-JP">
+              <a:rPr sz="1000" b="0" lang="ja-JP">
                 <a:solidFill>
                   <a:srgbClr val="202729"/>
                 </a:solidFill>
@@ -31431,14 +31431,14 @@
       </p:sp>
       <p:sp>
         <p:nvSpPr>
-          <p:cNvPr id="38" name="TextBox 37"/>
-          <p:cNvSpPr txBox="1"/>
-          <p:nvPr/>
-        </p:nvSpPr>
-        <p:spPr>
-          <a:xfrm>
-            <a:off x="8923782" y="3248177"/>
-            <a:ext cx="338328" cy="162306"/>
+          <p:cNvPr id="38" name="diagram:path-label"/>
+          <p:cNvSpPr txBox="1"/>
+          <p:nvPr/>
+        </p:nvSpPr>
+        <p:spPr>
+          <a:xfrm>
+            <a:off x="8913495" y="3241192"/>
+            <a:ext cx="358901" cy="176276"/>
           </a:xfrm>
           <a:prstGeom prst="rect">
             <a:avLst/>
@@ -31452,7 +31452,7 @@
             <a:spAutoFit/>
             <a:extLst>
               <a:ext uri="{8AF73BB6-5E31-4F0F-A399-3D98F3B95FD9}">
-                <ns95:textLayout xmlns:ns95="urn:pptxdsl:text-layout:v1" role="compact"/>
+                <ns88:textLayout xmlns:ns88="urn:pptxdsl:text-layout:v1" role="compact"/>
               </a:ext>
             </a:extLst>
           </a:bodyPr>
@@ -31464,7 +31464,7 @@
               </a:lnSpc>
             </a:pPr>
             <a:r>
-              <a:rPr sz="900" b="0" lang="ja-JP">
+              <a:rPr sz="1000" b="0" lang="ja-JP">
                 <a:solidFill>
                   <a:srgbClr val="202729"/>
                 </a:solidFill>
@@ -31479,14 +31479,14 @@
       </p:sp>
       <p:sp>
         <p:nvSpPr>
-          <p:cNvPr id="39" name="TextBox 38"/>
-          <p:cNvSpPr txBox="1"/>
-          <p:nvPr/>
-        </p:nvSpPr>
-        <p:spPr>
-          <a:xfrm>
-            <a:off x="6552514" y="3632225"/>
-            <a:ext cx="585216" cy="162306"/>
+          <p:cNvPr id="39" name="diagram:path-label"/>
+          <p:cNvSpPr txBox="1"/>
+          <p:nvPr/>
+        </p:nvSpPr>
+        <p:spPr>
+          <a:xfrm>
+            <a:off x="6531940" y="3625240"/>
+            <a:ext cx="626364" cy="176276"/>
           </a:xfrm>
           <a:prstGeom prst="rect">
             <a:avLst/>
@@ -31500,7 +31500,7 @@
             <a:spAutoFit/>
             <a:extLst>
               <a:ext uri="{8AF73BB6-5E31-4F0F-A399-3D98F3B95FD9}">
-                <ns100:textLayout xmlns:ns100="urn:pptxdsl:text-layout:v1" role="compact"/>
+                <ns93:textLayout xmlns:ns93="urn:pptxdsl:text-layout:v1" role="compact"/>
               </a:ext>
             </a:extLst>
           </a:bodyPr>
@@ -31512,7 +31512,7 @@
               </a:lnSpc>
             </a:pPr>
             <a:r>
-              <a:rPr sz="900" b="0" lang="ja-JP">
+              <a:rPr sz="1000" b="0" lang="ja-JP">
                 <a:solidFill>
                   <a:srgbClr val="202729"/>
                 </a:solidFill>
@@ -31527,14 +31527,14 @@
       </p:sp>
       <p:sp>
         <p:nvSpPr>
-          <p:cNvPr id="40" name="TextBox 39"/>
-          <p:cNvSpPr txBox="1"/>
-          <p:nvPr/>
-        </p:nvSpPr>
-        <p:spPr>
-          <a:xfrm>
-            <a:off x="11315014" y="4025417"/>
-            <a:ext cx="338328" cy="162306"/>
+          <p:cNvPr id="40" name="diagram:path-label"/>
+          <p:cNvSpPr txBox="1"/>
+          <p:nvPr/>
+        </p:nvSpPr>
+        <p:spPr>
+          <a:xfrm>
+            <a:off x="11392738" y="4018432"/>
+            <a:ext cx="358901" cy="176276"/>
           </a:xfrm>
           <a:prstGeom prst="rect">
             <a:avLst/>
@@ -31548,7 +31548,7 @@
             <a:spAutoFit/>
             <a:extLst>
               <a:ext uri="{8AF73BB6-5E31-4F0F-A399-3D98F3B95FD9}">
-                <ns105:textLayout xmlns:ns105="urn:pptxdsl:text-layout:v1" role="compact"/>
+                <ns98:textLayout xmlns:ns98="urn:pptxdsl:text-layout:v1" role="compact"/>
               </a:ext>
             </a:extLst>
           </a:bodyPr>
@@ -31560,7 +31560,7 @@
               </a:lnSpc>
             </a:pPr>
             <a:r>
-              <a:rPr sz="900" b="0" lang="ja-JP">
+              <a:rPr sz="1000" b="0" lang="ja-JP">
                 <a:solidFill>
                   <a:srgbClr val="202729"/>
                 </a:solidFill>
@@ -31594,7 +31594,7 @@
             <a:spAutoFit/>
             <a:extLst>
               <a:ext uri="{8AF73BB6-5E31-4F0F-A399-3D98F3B95FD9}">
-                <ns110:textLayout xmlns:ns110="urn:pptxdsl:text-layout:v1" role="body"/>
+                <ns103:textLayout xmlns:ns103="urn:pptxdsl:text-layout:v1" role="body"/>
               </a:ext>
             </a:extLst>
           </a:bodyPr>
@@ -31684,7 +31684,7 @@
             <a:spAutoFit/>
             <a:extLst>
               <a:ext uri="{8AF73BB6-5E31-4F0F-A399-3D98F3B95FD9}">
-                <ns115:textLayout xmlns:ns115="urn:pptxdsl:text-layout:v1" role="body"/>
+                <ns108:textLayout xmlns:ns108="urn:pptxdsl:text-layout:v1" role="body"/>
               </a:ext>
             </a:extLst>
           </a:bodyPr>
@@ -31730,7 +31730,7 @@
             <a:spAutoFit/>
             <a:extLst>
               <a:ext uri="{8AF73BB6-5E31-4F0F-A399-3D98F3B95FD9}">
-                <ns120:textLayout xmlns:ns120="urn:pptxdsl:text-layout:v1" role="body"/>
+                <ns113:textLayout xmlns:ns113="urn:pptxdsl:text-layout:v1" role="body"/>
               </a:ext>
             </a:extLst>
           </a:bodyPr>
@@ -31935,7 +31935,7 @@
             <a:avLst/>
           </a:prstGeom>
           <a:noFill/>
-          <a:ln w="15875">
+          <a:ln w="10795">
             <a:solidFill>
               <a:srgbClr val="6C7372"/>
             </a:solidFill>
@@ -32025,7 +32025,7 @@
             <a:avLst/>
           </a:prstGeom>
           <a:noFill/>
-          <a:ln w="15875">
+          <a:ln w="10795">
             <a:solidFill>
               <a:srgbClr val="182C43"/>
             </a:solidFill>
@@ -32114,9 +32114,9 @@
           <a:prstGeom prst="line">
             <a:avLst/>
           </a:prstGeom>
-          <a:ln w="15875">
+          <a:ln w="20320">
             <a:solidFill>
-              <a:srgbClr val="6C7372"/>
+              <a:srgbClr val="182C43"/>
             </a:solidFill>
             <a:tailEnd type="triangle" w="med" len="med"/>
           </a:ln>
@@ -32151,9 +32151,9 @@
           <a:prstGeom prst="line">
             <a:avLst/>
           </a:prstGeom>
-          <a:ln w="15875">
+          <a:ln w="20320">
             <a:solidFill>
-              <a:srgbClr val="6C7372"/>
+              <a:srgbClr val="182C43"/>
             </a:solidFill>
             <a:tailEnd type="triangle" w="med" len="med"/>
           </a:ln>
@@ -32188,9 +32188,9 @@
           <a:prstGeom prst="line">
             <a:avLst/>
           </a:prstGeom>
-          <a:ln w="15875">
+          <a:ln w="20320">
             <a:solidFill>
-              <a:srgbClr val="6C7372"/>
+              <a:srgbClr val="182C43"/>
             </a:solidFill>
             <a:tailEnd type="triangle" w="med" len="med"/>
           </a:ln>
@@ -32225,9 +32225,9 @@
           <a:prstGeom prst="line">
             <a:avLst/>
           </a:prstGeom>
-          <a:ln w="15875">
+          <a:ln w="20320">
             <a:solidFill>
-              <a:srgbClr val="6C7372"/>
+              <a:srgbClr val="182C43"/>
             </a:solidFill>
           </a:ln>
           <a:effectLst/>
@@ -32261,9 +32261,9 @@
           <a:prstGeom prst="line">
             <a:avLst/>
           </a:prstGeom>
-          <a:ln w="15875">
+          <a:ln w="20320">
             <a:solidFill>
-              <a:srgbClr val="6C7372"/>
+              <a:srgbClr val="182C43"/>
             </a:solidFill>
           </a:ln>
           <a:effectLst/>
@@ -32297,9 +32297,9 @@
           <a:prstGeom prst="line">
             <a:avLst/>
           </a:prstGeom>
-          <a:ln w="15875">
+          <a:ln w="20320">
             <a:solidFill>
-              <a:srgbClr val="6C7372"/>
+              <a:srgbClr val="182C43"/>
             </a:solidFill>
             <a:tailEnd type="triangle" w="med" len="med"/>
           </a:ln>
@@ -32334,9 +32334,9 @@
           <a:prstGeom prst="line">
             <a:avLst/>
           </a:prstGeom>
-          <a:ln w="15875">
+          <a:ln w="20320">
             <a:solidFill>
-              <a:srgbClr val="6C7372"/>
+              <a:srgbClr val="182C43"/>
             </a:solidFill>
           </a:ln>
           <a:effectLst/>
@@ -32370,9 +32370,9 @@
           <a:prstGeom prst="line">
             <a:avLst/>
           </a:prstGeom>
-          <a:ln w="15875">
+          <a:ln w="20320">
             <a:solidFill>
-              <a:srgbClr val="6C7372"/>
+              <a:srgbClr val="182C43"/>
             </a:solidFill>
           </a:ln>
           <a:effectLst/>
@@ -32406,9 +32406,9 @@
           <a:prstGeom prst="line">
             <a:avLst/>
           </a:prstGeom>
-          <a:ln w="15875">
+          <a:ln w="20320">
             <a:solidFill>
-              <a:srgbClr val="6C7372"/>
+              <a:srgbClr val="182C43"/>
             </a:solidFill>
             <a:tailEnd type="triangle" w="med" len="med"/>
           </a:ln>
@@ -32443,11 +32443,11 @@
           <a:prstGeom prst="line">
             <a:avLst/>
           </a:prstGeom>
-          <a:ln w="15875">
-            <a:prstDash val="dash"/>
+          <a:ln w="13970">
             <a:solidFill>
               <a:srgbClr val="6C7372"/>
             </a:solidFill>
+            <a:prstDash val="dash"/>
             <a:tailEnd type="triangle" w="med" len="med"/>
           </a:ln>
           <a:effectLst/>
@@ -32514,7 +32514,7 @@
             <a:spAutoFit/>
             <a:extLst>
               <a:ext uri="{8AF73BB6-5E31-4F0F-A399-3D98F3B95FD9}">
-                <ns29:textLayout xmlns:ns29="urn:pptxdsl:text-layout:v1" role="natural"/>
+                <ns28:textLayout xmlns:ns28="urn:pptxdsl:text-layout:v1" role="natural"/>
               </a:ext>
             </a:extLst>
           </a:bodyPr>
@@ -32562,7 +32562,7 @@
             <a:spAutoFit/>
             <a:extLst>
               <a:ext uri="{8AF73BB6-5E31-4F0F-A399-3D98F3B95FD9}">
-                <ns34:textLayout xmlns:ns34="urn:pptxdsl:text-layout:v1" role="compact"/>
+                <ns33:textLayout xmlns:ns33="urn:pptxdsl:text-layout:v1" role="compact"/>
               </a:ext>
             </a:extLst>
           </a:bodyPr>
@@ -32634,7 +32634,7 @@
             <a:spAutoFit/>
             <a:extLst>
               <a:ext uri="{8AF73BB6-5E31-4F0F-A399-3D98F3B95FD9}">
-                <ns39:textLayout xmlns:ns39="urn:pptxdsl:text-layout:v1" role="natural"/>
+                <ns38:textLayout xmlns:ns38="urn:pptxdsl:text-layout:v1" role="natural"/>
               </a:ext>
             </a:extLst>
           </a:bodyPr>
@@ -32682,7 +32682,7 @@
             <a:spAutoFit/>
             <a:extLst>
               <a:ext uri="{8AF73BB6-5E31-4F0F-A399-3D98F3B95FD9}">
-                <ns44:textLayout xmlns:ns44="urn:pptxdsl:text-layout:v1" role="compact"/>
+                <ns43:textLayout xmlns:ns43="urn:pptxdsl:text-layout:v1" role="compact"/>
               </a:ext>
             </a:extLst>
           </a:bodyPr>
@@ -32754,7 +32754,7 @@
             <a:spAutoFit/>
             <a:extLst>
               <a:ext uri="{8AF73BB6-5E31-4F0F-A399-3D98F3B95FD9}">
-                <ns49:textLayout xmlns:ns49="urn:pptxdsl:text-layout:v1" role="natural"/>
+                <ns48:textLayout xmlns:ns48="urn:pptxdsl:text-layout:v1" role="natural"/>
               </a:ext>
             </a:extLst>
           </a:bodyPr>
@@ -32802,7 +32802,7 @@
             <a:spAutoFit/>
             <a:extLst>
               <a:ext uri="{8AF73BB6-5E31-4F0F-A399-3D98F3B95FD9}">
-                <ns54:textLayout xmlns:ns54="urn:pptxdsl:text-layout:v1" role="compact"/>
+                <ns53:textLayout xmlns:ns53="urn:pptxdsl:text-layout:v1" role="compact"/>
               </a:ext>
             </a:extLst>
           </a:bodyPr>
@@ -32874,7 +32874,7 @@
             <a:spAutoFit/>
             <a:extLst>
               <a:ext uri="{8AF73BB6-5E31-4F0F-A399-3D98F3B95FD9}">
-                <ns59:textLayout xmlns:ns59="urn:pptxdsl:text-layout:v1" role="natural"/>
+                <ns58:textLayout xmlns:ns58="urn:pptxdsl:text-layout:v1" role="natural"/>
               </a:ext>
             </a:extLst>
           </a:bodyPr>
@@ -32922,7 +32922,7 @@
             <a:spAutoFit/>
             <a:extLst>
               <a:ext uri="{8AF73BB6-5E31-4F0F-A399-3D98F3B95FD9}">
-                <ns64:textLayout xmlns:ns64="urn:pptxdsl:text-layout:v1" role="compact"/>
+                <ns63:textLayout xmlns:ns63="urn:pptxdsl:text-layout:v1" role="compact"/>
               </a:ext>
             </a:extLst>
           </a:bodyPr>
@@ -32994,7 +32994,7 @@
             <a:spAutoFit/>
             <a:extLst>
               <a:ext uri="{8AF73BB6-5E31-4F0F-A399-3D98F3B95FD9}">
-                <ns69:textLayout xmlns:ns69="urn:pptxdsl:text-layout:v1" role="natural"/>
+                <ns68:textLayout xmlns:ns68="urn:pptxdsl:text-layout:v1" role="natural"/>
               </a:ext>
             </a:extLst>
           </a:bodyPr>
@@ -33042,7 +33042,7 @@
             <a:spAutoFit/>
             <a:extLst>
               <a:ext uri="{8AF73BB6-5E31-4F0F-A399-3D98F3B95FD9}">
-                <ns74:textLayout xmlns:ns74="urn:pptxdsl:text-layout:v1" role="compact"/>
+                <ns73:textLayout xmlns:ns73="urn:pptxdsl:text-layout:v1" role="compact"/>
               </a:ext>
             </a:extLst>
           </a:bodyPr>
@@ -33114,7 +33114,7 @@
             <a:spAutoFit/>
             <a:extLst>
               <a:ext uri="{8AF73BB6-5E31-4F0F-A399-3D98F3B95FD9}">
-                <ns79:textLayout xmlns:ns79="urn:pptxdsl:text-layout:v1" role="natural"/>
+                <ns78:textLayout xmlns:ns78="urn:pptxdsl:text-layout:v1" role="natural"/>
               </a:ext>
             </a:extLst>
           </a:bodyPr>
@@ -33162,7 +33162,7 @@
             <a:spAutoFit/>
             <a:extLst>
               <a:ext uri="{8AF73BB6-5E31-4F0F-A399-3D98F3B95FD9}">
-                <ns84:textLayout xmlns:ns84="urn:pptxdsl:text-layout:v1" role="compact"/>
+                <ns83:textLayout xmlns:ns83="urn:pptxdsl:text-layout:v1" role="compact"/>
               </a:ext>
             </a:extLst>
           </a:bodyPr>
@@ -33234,7 +33234,7 @@
             <a:spAutoFit/>
             <a:extLst>
               <a:ext uri="{8AF73BB6-5E31-4F0F-A399-3D98F3B95FD9}">
-                <ns89:textLayout xmlns:ns89="urn:pptxdsl:text-layout:v1" role="natural"/>
+                <ns88:textLayout xmlns:ns88="urn:pptxdsl:text-layout:v1" role="natural"/>
               </a:ext>
             </a:extLst>
           </a:bodyPr>
@@ -33282,7 +33282,7 @@
             <a:spAutoFit/>
             <a:extLst>
               <a:ext uri="{8AF73BB6-5E31-4F0F-A399-3D98F3B95FD9}">
-                <ns94:textLayout xmlns:ns94="urn:pptxdsl:text-layout:v1" role="compact"/>
+                <ns93:textLayout xmlns:ns93="urn:pptxdsl:text-layout:v1" role="compact"/>
               </a:ext>
             </a:extLst>
           </a:bodyPr>
@@ -33309,14 +33309,14 @@
       </p:sp>
       <p:sp>
         <p:nvSpPr>
-          <p:cNvPr id="40" name="TextBox 39"/>
-          <p:cNvSpPr txBox="1"/>
-          <p:nvPr/>
-        </p:nvSpPr>
-        <p:spPr>
-          <a:xfrm>
-            <a:off x="2467508" y="3428314"/>
-            <a:ext cx="513207" cy="162306"/>
+          <p:cNvPr id="40" name="diagram:path-label"/>
+          <p:cNvSpPr txBox="1"/>
+          <p:nvPr/>
+        </p:nvSpPr>
+        <p:spPr>
+          <a:xfrm>
+            <a:off x="2354122" y="3421329"/>
+            <a:ext cx="533781" cy="176276"/>
           </a:xfrm>
           <a:prstGeom prst="rect">
             <a:avLst/>
@@ -33330,7 +33330,7 @@
             <a:spAutoFit/>
             <a:extLst>
               <a:ext uri="{8AF73BB6-5E31-4F0F-A399-3D98F3B95FD9}">
-                <ns99:textLayout xmlns:ns99="urn:pptxdsl:text-layout:v1" role="compact"/>
+                <ns98:textLayout xmlns:ns98="urn:pptxdsl:text-layout:v1" role="compact"/>
               </a:ext>
             </a:extLst>
           </a:bodyPr>
@@ -33342,7 +33342,7 @@
               </a:lnSpc>
             </a:pPr>
             <a:r>
-              <a:rPr sz="900" b="0" lang="ja-JP">
+              <a:rPr sz="1000" b="0" lang="ja-JP">
                 <a:solidFill>
                   <a:srgbClr val="202729"/>
                 </a:solidFill>
@@ -33357,14 +33357,14 @@
       </p:sp>
       <p:sp>
         <p:nvSpPr>
-          <p:cNvPr id="41" name="TextBox 40"/>
-          <p:cNvSpPr txBox="1"/>
-          <p:nvPr/>
-        </p:nvSpPr>
-        <p:spPr>
-          <a:xfrm>
-            <a:off x="4802771" y="3428314"/>
-            <a:ext cx="338328" cy="162306"/>
+          <p:cNvPr id="41" name="diagram:path-label"/>
+          <p:cNvSpPr txBox="1"/>
+          <p:nvPr/>
+        </p:nvSpPr>
+        <p:spPr>
+          <a:xfrm>
+            <a:off x="4792484" y="3421329"/>
+            <a:ext cx="358901" cy="176276"/>
           </a:xfrm>
           <a:prstGeom prst="rect">
             <a:avLst/>
@@ -33378,7 +33378,7 @@
             <a:spAutoFit/>
             <a:extLst>
               <a:ext uri="{8AF73BB6-5E31-4F0F-A399-3D98F3B95FD9}">
-                <ns104:textLayout xmlns:ns104="urn:pptxdsl:text-layout:v1" role="compact"/>
+                <ns103:textLayout xmlns:ns103="urn:pptxdsl:text-layout:v1" role="compact"/>
               </a:ext>
             </a:extLst>
           </a:bodyPr>
@@ -33390,7 +33390,7 @@
               </a:lnSpc>
             </a:pPr>
             <a:r>
-              <a:rPr sz="900" b="0" lang="ja-JP">
+              <a:rPr sz="1000" b="0" lang="ja-JP">
                 <a:solidFill>
                   <a:srgbClr val="202729"/>
                 </a:solidFill>
@@ -33405,14 +33405,14 @@
       </p:sp>
       <p:sp>
         <p:nvSpPr>
-          <p:cNvPr id="42" name="TextBox 41"/>
-          <p:cNvSpPr txBox="1"/>
-          <p:nvPr/>
-        </p:nvSpPr>
-        <p:spPr>
-          <a:xfrm>
-            <a:off x="6988873" y="3428314"/>
-            <a:ext cx="461772" cy="162306"/>
+          <p:cNvPr id="42" name="diagram:path-label"/>
+          <p:cNvSpPr txBox="1"/>
+          <p:nvPr/>
+        </p:nvSpPr>
+        <p:spPr>
+          <a:xfrm>
+            <a:off x="6973442" y="3421329"/>
+            <a:ext cx="492633" cy="176276"/>
           </a:xfrm>
           <a:prstGeom prst="rect">
             <a:avLst/>
@@ -33426,7 +33426,7 @@
             <a:spAutoFit/>
             <a:extLst>
               <a:ext uri="{8AF73BB6-5E31-4F0F-A399-3D98F3B95FD9}">
-                <ns109:textLayout xmlns:ns109="urn:pptxdsl:text-layout:v1" role="compact"/>
+                <ns108:textLayout xmlns:ns108="urn:pptxdsl:text-layout:v1" role="compact"/>
               </a:ext>
             </a:extLst>
           </a:bodyPr>
@@ -33438,7 +33438,7 @@
               </a:lnSpc>
             </a:pPr>
             <a:r>
-              <a:rPr sz="900" b="0" lang="ja-JP">
+              <a:rPr sz="1000" b="0" lang="ja-JP">
                 <a:solidFill>
                   <a:srgbClr val="202729"/>
                 </a:solidFill>
@@ -33453,14 +33453,14 @@
       </p:sp>
       <p:sp>
         <p:nvSpPr>
-          <p:cNvPr id="43" name="TextBox 42"/>
-          <p:cNvSpPr txBox="1"/>
-          <p:nvPr/>
-        </p:nvSpPr>
-        <p:spPr>
-          <a:xfrm>
-            <a:off x="9174975" y="2902534"/>
-            <a:ext cx="585216" cy="162306"/>
+          <p:cNvPr id="43" name="diagram:path-label"/>
+          <p:cNvSpPr txBox="1"/>
+          <p:nvPr/>
+        </p:nvSpPr>
+        <p:spPr>
+          <a:xfrm>
+            <a:off x="9222066" y="2895549"/>
+            <a:ext cx="626364" cy="176276"/>
           </a:xfrm>
           <a:prstGeom prst="rect">
             <a:avLst/>
@@ -33474,7 +33474,7 @@
             <a:spAutoFit/>
             <a:extLst>
               <a:ext uri="{8AF73BB6-5E31-4F0F-A399-3D98F3B95FD9}">
-                <ns114:textLayout xmlns:ns114="urn:pptxdsl:text-layout:v1" role="compact"/>
+                <ns113:textLayout xmlns:ns113="urn:pptxdsl:text-layout:v1" role="compact"/>
               </a:ext>
             </a:extLst>
           </a:bodyPr>
@@ -33486,7 +33486,7 @@
               </a:lnSpc>
             </a:pPr>
             <a:r>
-              <a:rPr sz="900" b="0" lang="ja-JP">
+              <a:rPr sz="1000" b="0" lang="ja-JP">
                 <a:solidFill>
                   <a:srgbClr val="202729"/>
                 </a:solidFill>
@@ -33501,14 +33501,14 @@
       </p:sp>
       <p:sp>
         <p:nvSpPr>
-          <p:cNvPr id="44" name="TextBox 43"/>
-          <p:cNvSpPr txBox="1"/>
-          <p:nvPr/>
-        </p:nvSpPr>
-        <p:spPr>
-          <a:xfrm>
-            <a:off x="9236697" y="4264990"/>
-            <a:ext cx="461772" cy="162306"/>
+          <p:cNvPr id="44" name="diagram:path-label"/>
+          <p:cNvSpPr txBox="1"/>
+          <p:nvPr/>
+        </p:nvSpPr>
+        <p:spPr>
+          <a:xfrm>
+            <a:off x="9221266" y="4258005"/>
+            <a:ext cx="492633" cy="176276"/>
           </a:xfrm>
           <a:prstGeom prst="rect">
             <a:avLst/>
@@ -33522,7 +33522,7 @@
             <a:spAutoFit/>
             <a:extLst>
               <a:ext uri="{8AF73BB6-5E31-4F0F-A399-3D98F3B95FD9}">
-                <ns119:textLayout xmlns:ns119="urn:pptxdsl:text-layout:v1" role="compact"/>
+                <ns118:textLayout xmlns:ns118="urn:pptxdsl:text-layout:v1" role="compact"/>
               </a:ext>
             </a:extLst>
           </a:bodyPr>
@@ -33534,7 +33534,7 @@
               </a:lnSpc>
             </a:pPr>
             <a:r>
-              <a:rPr sz="900" b="0" lang="ja-JP">
+              <a:rPr sz="1000" b="0" lang="ja-JP">
                 <a:solidFill>
                   <a:srgbClr val="202729"/>
                 </a:solidFill>
@@ -33612,7 +33612,7 @@
             <a:spAutoFit/>
             <a:extLst>
               <a:ext uri="{8AF73BB6-5E31-4F0F-A399-3D98F3B95FD9}">
-                <ns124:textLayout xmlns:ns124="urn:pptxdsl:text-layout:v1" role="body"/>
+                <ns123:textLayout xmlns:ns123="urn:pptxdsl:text-layout:v1" role="body"/>
               </a:ext>
             </a:extLst>
           </a:bodyPr>
@@ -33658,7 +33658,7 @@
             <a:spAutoFit/>
             <a:extLst>
               <a:ext uri="{8AF73BB6-5E31-4F0F-A399-3D98F3B95FD9}">
-                <ns129:textLayout xmlns:ns129="urn:pptxdsl:text-layout:v1" role="body"/>
+                <ns128:textLayout xmlns:ns128="urn:pptxdsl:text-layout:v1" role="body"/>
               </a:ext>
             </a:extLst>
           </a:bodyPr>

--- a/examples/gallery/pattern_gallery.pptx
+++ b/examples/gallery/pattern_gallery.pptx
@@ -23627,14 +23627,14 @@
       </p:sp>
       <p:sp>
         <p:nvSpPr>
-          <p:cNvPr id="6" name="TextBox 5"/>
-          <p:cNvSpPr txBox="1"/>
-          <p:nvPr/>
-        </p:nvSpPr>
-        <p:spPr>
-          <a:xfrm>
-            <a:off x="3015919" y="1594713"/>
-            <a:ext cx="854964" cy="256032"/>
+          <p:cNvPr id="6" name="diagram:container-label"/>
+          <p:cNvSpPr txBox="1"/>
+          <p:nvPr/>
+        </p:nvSpPr>
+        <p:spPr>
+          <a:xfrm>
+            <a:off x="3015919" y="1562709"/>
+            <a:ext cx="854964" cy="164973"/>
           </a:xfrm>
           <a:prstGeom prst="rect">
             <a:avLst/>
@@ -23642,7 +23642,7 @@
           <a:noFill/>
         </p:spPr>
         <p:txBody>
-          <a:bodyPr wrap="square" anchor="t" lIns="0" rIns="0" tIns="0" bIns="0">
+          <a:bodyPr wrap="none" anchor="t" lIns="0" rIns="0" tIns="0" bIns="0">
             <a:spAutoFit/>
             <a:extLst>
               <a:ext uri="{8AF73BB6-5E31-4F0F-A399-3D98F3B95FD9}">
@@ -23654,7 +23654,7 @@
           <a:p>
             <a:pPr algn="l">
               <a:lnSpc>
-                <a:spcPct val="130000"/>
+                <a:spcPct val="110000"/>
               </a:lnSpc>
             </a:pPr>
             <a:r>
@@ -23718,14 +23718,14 @@
       </p:sp>
       <p:sp>
         <p:nvSpPr>
-          <p:cNvPr id="8" name="TextBox 7"/>
-          <p:cNvSpPr txBox="1"/>
-          <p:nvPr/>
-        </p:nvSpPr>
-        <p:spPr>
-          <a:xfrm>
-            <a:off x="3290239" y="2838297"/>
-            <a:ext cx="1019556" cy="256032"/>
+          <p:cNvPr id="8" name="diagram:container-label"/>
+          <p:cNvSpPr txBox="1"/>
+          <p:nvPr/>
+        </p:nvSpPr>
+        <p:spPr>
+          <a:xfrm>
+            <a:off x="3290239" y="2806293"/>
+            <a:ext cx="1019556" cy="164973"/>
           </a:xfrm>
           <a:prstGeom prst="rect">
             <a:avLst/>
@@ -23733,7 +23733,7 @@
           <a:noFill/>
         </p:spPr>
         <p:txBody>
-          <a:bodyPr wrap="square" anchor="t" lIns="0" rIns="0" tIns="0" bIns="0">
+          <a:bodyPr wrap="none" anchor="t" lIns="0" rIns="0" tIns="0" bIns="0">
             <a:spAutoFit/>
             <a:extLst>
               <a:ext uri="{8AF73BB6-5E31-4F0F-A399-3D98F3B95FD9}">
@@ -23745,7 +23745,7 @@
           <a:p>
             <a:pPr algn="l">
               <a:lnSpc>
-                <a:spcPct val="130000"/>
+                <a:spcPct val="110000"/>
               </a:lnSpc>
             </a:pPr>
             <a:r>
@@ -25553,14 +25553,14 @@
       </p:sp>
       <p:sp>
         <p:nvSpPr>
-          <p:cNvPr id="6" name="TextBox 5"/>
-          <p:cNvSpPr txBox="1"/>
-          <p:nvPr/>
-        </p:nvSpPr>
-        <p:spPr>
-          <a:xfrm>
-            <a:off x="2766380" y="1397294"/>
-            <a:ext cx="854964" cy="256032"/>
+          <p:cNvPr id="6" name="diagram:container-label"/>
+          <p:cNvSpPr txBox="1"/>
+          <p:nvPr/>
+        </p:nvSpPr>
+        <p:spPr>
+          <a:xfrm>
+            <a:off x="2766380" y="1365290"/>
+            <a:ext cx="854964" cy="164973"/>
           </a:xfrm>
           <a:prstGeom prst="rect">
             <a:avLst/>
@@ -25568,7 +25568,7 @@
           <a:noFill/>
         </p:spPr>
         <p:txBody>
-          <a:bodyPr wrap="square" anchor="t" lIns="0" rIns="0" tIns="0" bIns="0">
+          <a:bodyPr wrap="none" anchor="t" lIns="0" rIns="0" tIns="0" bIns="0">
             <a:spAutoFit/>
             <a:extLst>
               <a:ext uri="{8AF73BB6-5E31-4F0F-A399-3D98F3B95FD9}">
@@ -25580,7 +25580,7 @@
           <a:p>
             <a:pPr algn="l">
               <a:lnSpc>
-                <a:spcPct val="130000"/>
+                <a:spcPct val="110000"/>
               </a:lnSpc>
             </a:pPr>
             <a:r>
@@ -25643,14 +25643,14 @@
       </p:sp>
       <p:sp>
         <p:nvSpPr>
-          <p:cNvPr id="8" name="TextBox 7"/>
-          <p:cNvSpPr txBox="1"/>
-          <p:nvPr/>
-        </p:nvSpPr>
-        <p:spPr>
-          <a:xfrm>
-            <a:off x="4067434" y="2439710"/>
-            <a:ext cx="1616202" cy="256032"/>
+          <p:cNvPr id="8" name="diagram:container-label"/>
+          <p:cNvSpPr txBox="1"/>
+          <p:nvPr/>
+        </p:nvSpPr>
+        <p:spPr>
+          <a:xfrm>
+            <a:off x="4067434" y="2407706"/>
+            <a:ext cx="1616202" cy="164973"/>
           </a:xfrm>
           <a:prstGeom prst="rect">
             <a:avLst/>
@@ -25658,7 +25658,7 @@
           <a:noFill/>
         </p:spPr>
         <p:txBody>
-          <a:bodyPr wrap="square" anchor="t" lIns="0" rIns="0" tIns="0" bIns="0">
+          <a:bodyPr wrap="none" anchor="t" lIns="0" rIns="0" tIns="0" bIns="0">
             <a:spAutoFit/>
             <a:extLst>
               <a:ext uri="{8AF73BB6-5E31-4F0F-A399-3D98F3B95FD9}">
@@ -25670,7 +25670,7 @@
           <a:p>
             <a:pPr algn="l">
               <a:lnSpc>
-                <a:spcPct val="130000"/>
+                <a:spcPct val="110000"/>
               </a:lnSpc>
             </a:pPr>
             <a:r>
@@ -25734,14 +25734,14 @@
       </p:sp>
       <p:sp>
         <p:nvSpPr>
-          <p:cNvPr id="10" name="TextBox 9"/>
-          <p:cNvSpPr txBox="1"/>
-          <p:nvPr/>
-        </p:nvSpPr>
-        <p:spPr>
-          <a:xfrm>
-            <a:off x="4469770" y="3628430"/>
-            <a:ext cx="412623" cy="256032"/>
+          <p:cNvPr id="10" name="diagram:container-label"/>
+          <p:cNvSpPr txBox="1"/>
+          <p:nvPr/>
+        </p:nvSpPr>
+        <p:spPr>
+          <a:xfrm>
+            <a:off x="4469770" y="3596426"/>
+            <a:ext cx="412623" cy="164973"/>
           </a:xfrm>
           <a:prstGeom prst="rect">
             <a:avLst/>
@@ -25749,7 +25749,7 @@
           <a:noFill/>
         </p:spPr>
         <p:txBody>
-          <a:bodyPr wrap="square" anchor="t" lIns="0" rIns="0" tIns="0" bIns="0">
+          <a:bodyPr wrap="none" anchor="t" lIns="0" rIns="0" tIns="0" bIns="0">
             <a:spAutoFit/>
             <a:extLst>
               <a:ext uri="{8AF73BB6-5E31-4F0F-A399-3D98F3B95FD9}">
@@ -25761,7 +25761,7 @@
           <a:p>
             <a:pPr algn="l">
               <a:lnSpc>
-                <a:spcPct val="130000"/>
+                <a:spcPct val="110000"/>
               </a:lnSpc>
             </a:pPr>
             <a:r>
@@ -25825,14 +25825,14 @@
       </p:sp>
       <p:sp>
         <p:nvSpPr>
-          <p:cNvPr id="12" name="TextBox 11"/>
-          <p:cNvSpPr txBox="1"/>
-          <p:nvPr/>
-        </p:nvSpPr>
-        <p:spPr>
-          <a:xfrm>
-            <a:off x="8056001" y="3628430"/>
-            <a:ext cx="412623" cy="256032"/>
+          <p:cNvPr id="12" name="diagram:container-label"/>
+          <p:cNvSpPr txBox="1"/>
+          <p:nvPr/>
+        </p:nvSpPr>
+        <p:spPr>
+          <a:xfrm>
+            <a:off x="8056001" y="3596426"/>
+            <a:ext cx="412623" cy="164973"/>
           </a:xfrm>
           <a:prstGeom prst="rect">
             <a:avLst/>
@@ -25840,7 +25840,7 @@
           <a:noFill/>
         </p:spPr>
         <p:txBody>
-          <a:bodyPr wrap="square" anchor="t" lIns="0" rIns="0" tIns="0" bIns="0">
+          <a:bodyPr wrap="none" anchor="t" lIns="0" rIns="0" tIns="0" bIns="0">
             <a:spAutoFit/>
             <a:extLst>
               <a:ext uri="{8AF73BB6-5E31-4F0F-A399-3D98F3B95FD9}">
@@ -25852,7 +25852,7 @@
           <a:p>
             <a:pPr algn="l">
               <a:lnSpc>
-                <a:spcPct val="130000"/>
+                <a:spcPct val="110000"/>
               </a:lnSpc>
             </a:pPr>
             <a:r>
@@ -30184,14 +30184,14 @@
       </p:sp>
       <p:sp>
         <p:nvSpPr>
-          <p:cNvPr id="6" name="TextBox 5"/>
-          <p:cNvSpPr txBox="1"/>
-          <p:nvPr/>
-        </p:nvSpPr>
-        <p:spPr>
-          <a:xfrm>
-            <a:off x="3769766" y="2707538"/>
-            <a:ext cx="1081278" cy="256032"/>
+          <p:cNvPr id="6" name="diagram:container-label"/>
+          <p:cNvSpPr txBox="1"/>
+          <p:nvPr/>
+        </p:nvSpPr>
+        <p:spPr>
+          <a:xfrm>
+            <a:off x="3769766" y="2675534"/>
+            <a:ext cx="1081278" cy="164973"/>
           </a:xfrm>
           <a:prstGeom prst="rect">
             <a:avLst/>
@@ -30199,7 +30199,7 @@
           <a:noFill/>
         </p:spPr>
         <p:txBody>
-          <a:bodyPr wrap="square" anchor="t" lIns="0" rIns="0" tIns="0" bIns="0">
+          <a:bodyPr wrap="none" anchor="t" lIns="0" rIns="0" tIns="0" bIns="0">
             <a:spAutoFit/>
             <a:extLst>
               <a:ext uri="{8AF73BB6-5E31-4F0F-A399-3D98F3B95FD9}">
@@ -30211,7 +30211,7 @@
           <a:p>
             <a:pPr algn="l">
               <a:lnSpc>
-                <a:spcPct val="130000"/>
+                <a:spcPct val="110000"/>
               </a:lnSpc>
             </a:pPr>
             <a:r>
@@ -31966,14 +31966,14 @@
       </p:sp>
       <p:sp>
         <p:nvSpPr>
-          <p:cNvPr id="6" name="TextBox 5"/>
-          <p:cNvSpPr txBox="1"/>
-          <p:nvPr/>
-        </p:nvSpPr>
-        <p:spPr>
-          <a:xfrm>
-            <a:off x="3015919" y="1644091"/>
-            <a:ext cx="854964" cy="256032"/>
+          <p:cNvPr id="6" name="diagram:container-label"/>
+          <p:cNvSpPr txBox="1"/>
+          <p:nvPr/>
+        </p:nvSpPr>
+        <p:spPr>
+          <a:xfrm>
+            <a:off x="3015919" y="1612087"/>
+            <a:ext cx="854964" cy="164973"/>
           </a:xfrm>
           <a:prstGeom prst="rect">
             <a:avLst/>
@@ -31981,7 +31981,7 @@
           <a:noFill/>
         </p:spPr>
         <p:txBody>
-          <a:bodyPr wrap="square" anchor="t" lIns="0" rIns="0" tIns="0" bIns="0">
+          <a:bodyPr wrap="none" anchor="t" lIns="0" rIns="0" tIns="0" bIns="0">
             <a:spAutoFit/>
             <a:extLst>
               <a:ext uri="{8AF73BB6-5E31-4F0F-A399-3D98F3B95FD9}">
@@ -31993,7 +31993,7 @@
           <a:p>
             <a:pPr algn="l">
               <a:lnSpc>
-                <a:spcPct val="130000"/>
+                <a:spcPct val="110000"/>
               </a:lnSpc>
             </a:pPr>
             <a:r>
@@ -32056,14 +32056,14 @@
       </p:sp>
       <p:sp>
         <p:nvSpPr>
-          <p:cNvPr id="8" name="TextBox 7"/>
-          <p:cNvSpPr txBox="1"/>
-          <p:nvPr/>
-        </p:nvSpPr>
-        <p:spPr>
-          <a:xfrm>
-            <a:off x="3290239" y="2887675"/>
-            <a:ext cx="1863090" cy="256032"/>
+          <p:cNvPr id="8" name="diagram:container-label"/>
+          <p:cNvSpPr txBox="1"/>
+          <p:nvPr/>
+        </p:nvSpPr>
+        <p:spPr>
+          <a:xfrm>
+            <a:off x="3290239" y="2855671"/>
+            <a:ext cx="1863090" cy="164973"/>
           </a:xfrm>
           <a:prstGeom prst="rect">
             <a:avLst/>
@@ -32071,7 +32071,7 @@
           <a:noFill/>
         </p:spPr>
         <p:txBody>
-          <a:bodyPr wrap="square" anchor="t" lIns="0" rIns="0" tIns="0" bIns="0">
+          <a:bodyPr wrap="none" anchor="t" lIns="0" rIns="0" tIns="0" bIns="0">
             <a:spAutoFit/>
             <a:extLst>
               <a:ext uri="{8AF73BB6-5E31-4F0F-A399-3D98F3B95FD9}">
@@ -32083,7 +32083,7 @@
           <a:p>
             <a:pPr algn="l">
               <a:lnSpc>
-                <a:spcPct val="130000"/>
+                <a:spcPct val="110000"/>
               </a:lnSpc>
             </a:pPr>
             <a:r>

--- a/examples/gallery/pattern_gallery.pptx
+++ b/examples/gallery/pattern_gallery.pptx
@@ -20705,7 +20705,7 @@
       </p:sp>
       <p:sp>
         <p:nvSpPr>
-          <p:cNvPr id="15" name="Oval 14"/>
+          <p:cNvPr id="15" name="matrix:point:0"/>
           <p:cNvSpPr/>
           <p:nvPr/>
         </p:nvSpPr>
@@ -20751,7 +20751,7 @@
       </p:sp>
       <p:sp>
         <p:nvSpPr>
-          <p:cNvPr id="16" name="Oval 15"/>
+          <p:cNvPr id="16" name="matrix:point:1"/>
           <p:cNvSpPr/>
           <p:nvPr/>
         </p:nvSpPr>
@@ -20797,7 +20797,7 @@
       </p:sp>
       <p:sp>
         <p:nvSpPr>
-          <p:cNvPr id="17" name="Oval 16"/>
+          <p:cNvPr id="17" name="matrix:point:2"/>
           <p:cNvSpPr/>
           <p:nvPr/>
         </p:nvSpPr>
@@ -20843,7 +20843,7 @@
       </p:sp>
       <p:sp>
         <p:nvSpPr>
-          <p:cNvPr id="18" name="Oval 17"/>
+          <p:cNvPr id="18" name="matrix:point:3"/>
           <p:cNvSpPr/>
           <p:nvPr/>
         </p:nvSpPr>
@@ -20889,7 +20889,7 @@
       </p:sp>
       <p:sp>
         <p:nvSpPr>
-          <p:cNvPr id="19" name="Oval 18"/>
+          <p:cNvPr id="19" name="matrix:point:4"/>
           <p:cNvSpPr/>
           <p:nvPr/>
         </p:nvSpPr>
@@ -20935,7 +20935,7 @@
       </p:sp>
       <p:sp>
         <p:nvSpPr>
-          <p:cNvPr id="20" name="Oval 19"/>
+          <p:cNvPr id="20" name="matrix:point:5"/>
           <p:cNvSpPr/>
           <p:nvPr/>
         </p:nvSpPr>
@@ -20981,14 +20981,14 @@
       </p:sp>
       <p:sp>
         <p:nvSpPr>
-          <p:cNvPr id="21" name="TextBox 20"/>
-          <p:cNvSpPr txBox="1"/>
-          <p:nvPr/>
-        </p:nvSpPr>
-        <p:spPr>
-          <a:xfrm>
-            <a:off x="2350008" y="3125784"/>
-            <a:ext cx="1828800" cy="283464"/>
+          <p:cNvPr id="21" name="matrix:label:0"/>
+          <p:cNvSpPr txBox="1"/>
+          <p:nvPr/>
+        </p:nvSpPr>
+        <p:spPr>
+          <a:xfrm>
+            <a:off x="2919222" y="3070920"/>
+            <a:ext cx="690371" cy="283464"/>
           </a:xfrm>
           <a:prstGeom prst="rect">
             <a:avLst/>
@@ -20996,7 +20996,7 @@
           <a:noFill/>
         </p:spPr>
         <p:txBody>
-          <a:bodyPr wrap="square" anchor="t" lIns="0" rIns="0" tIns="0" bIns="0">
+          <a:bodyPr wrap="none" anchor="t" lIns="0" rIns="0" tIns="0" bIns="0">
             <a:spAutoFit/>
             <a:extLst>
               <a:ext uri="{8AF73BB6-5E31-4F0F-A399-3D98F3B95FD9}">
@@ -21027,14 +21027,14 @@
       </p:sp>
       <p:sp>
         <p:nvSpPr>
-          <p:cNvPr id="22" name="TextBox 21"/>
-          <p:cNvSpPr txBox="1"/>
-          <p:nvPr/>
-        </p:nvSpPr>
-        <p:spPr>
-          <a:xfrm>
-            <a:off x="7534656" y="2464125"/>
-            <a:ext cx="1828800" cy="283464"/>
+          <p:cNvPr id="22" name="matrix:label:1"/>
+          <p:cNvSpPr txBox="1"/>
+          <p:nvPr/>
+        </p:nvSpPr>
+        <p:spPr>
+          <a:xfrm>
+            <a:off x="8181022" y="2409261"/>
+            <a:ext cx="536066" cy="283464"/>
           </a:xfrm>
           <a:prstGeom prst="rect">
             <a:avLst/>
@@ -21042,7 +21042,7 @@
           <a:noFill/>
         </p:spPr>
         <p:txBody>
-          <a:bodyPr wrap="square" anchor="t" lIns="0" rIns="0" tIns="0" bIns="0">
+          <a:bodyPr wrap="none" anchor="t" lIns="0" rIns="0" tIns="0" bIns="0">
             <a:spAutoFit/>
             <a:extLst>
               <a:ext uri="{8AF73BB6-5E31-4F0F-A399-3D98F3B95FD9}">
@@ -21073,14 +21073,14 @@
       </p:sp>
       <p:sp>
         <p:nvSpPr>
-          <p:cNvPr id="23" name="TextBox 22"/>
-          <p:cNvSpPr txBox="1"/>
-          <p:nvPr/>
-        </p:nvSpPr>
-        <p:spPr>
-          <a:xfrm>
-            <a:off x="7150608" y="3444361"/>
-            <a:ext cx="1828800" cy="283464"/>
+          <p:cNvPr id="23" name="matrix:label:2"/>
+          <p:cNvSpPr txBox="1"/>
+          <p:nvPr/>
+        </p:nvSpPr>
+        <p:spPr>
+          <a:xfrm>
+            <a:off x="7796974" y="3499225"/>
+            <a:ext cx="536066" cy="283463"/>
           </a:xfrm>
           <a:prstGeom prst="rect">
             <a:avLst/>
@@ -21088,7 +21088,7 @@
           <a:noFill/>
         </p:spPr>
         <p:txBody>
-          <a:bodyPr wrap="square" anchor="t" lIns="0" rIns="0" tIns="0" bIns="0">
+          <a:bodyPr wrap="none" anchor="t" lIns="0" rIns="0" tIns="0" bIns="0">
             <a:spAutoFit/>
             <a:extLst>
               <a:ext uri="{8AF73BB6-5E31-4F0F-A399-3D98F3B95FD9}">
@@ -21119,14 +21119,14 @@
       </p:sp>
       <p:sp>
         <p:nvSpPr>
-          <p:cNvPr id="24" name="TextBox 23"/>
-          <p:cNvSpPr txBox="1"/>
-          <p:nvPr/>
-        </p:nvSpPr>
-        <p:spPr>
-          <a:xfrm>
-            <a:off x="3767327" y="3554821"/>
-            <a:ext cx="1828800" cy="283464"/>
+          <p:cNvPr id="24" name="matrix:label:3"/>
+          <p:cNvSpPr txBox="1"/>
+          <p:nvPr/>
+        </p:nvSpPr>
+        <p:spPr>
+          <a:xfrm>
+            <a:off x="5261229" y="2923885"/>
+            <a:ext cx="998982" cy="283464"/>
           </a:xfrm>
           <a:prstGeom prst="rect">
             <a:avLst/>
@@ -21134,7 +21134,7 @@
           <a:noFill/>
         </p:spPr>
         <p:txBody>
-          <a:bodyPr wrap="square" anchor="t" lIns="0" rIns="0" tIns="0" bIns="0">
+          <a:bodyPr wrap="none" anchor="t" lIns="0" rIns="0" tIns="0" bIns="0">
             <a:spAutoFit/>
             <a:extLst>
               <a:ext uri="{8AF73BB6-5E31-4F0F-A399-3D98F3B95FD9}">
@@ -21163,16 +21163,52 @@
           </a:p>
         </p:txBody>
       </p:sp>
-      <p:sp>
-        <p:nvSpPr>
-          <p:cNvPr id="25" name="TextBox 24"/>
-          <p:cNvSpPr txBox="1"/>
-          <p:nvPr/>
-        </p:nvSpPr>
-        <p:spPr>
-          <a:xfrm>
-            <a:off x="3982211" y="2096536"/>
-            <a:ext cx="1828800" cy="283464"/>
+      <p:cxnSp>
+        <p:nvCxnSpPr>
+          <p:cNvPr id="25" name="matrix:leader:4"/>
+          <p:cNvCxnSpPr/>
+          <p:nvPr/>
+        </p:nvCxnSpPr>
+        <p:spPr>
+          <a:xfrm>
+            <a:off x="5052059" y="2544592"/>
+            <a:ext cx="114300" cy="0"/>
+          </a:xfrm>
+          <a:prstGeom prst="line">
+            <a:avLst/>
+          </a:prstGeom>
+          <a:ln w="8890">
+            <a:solidFill>
+              <a:srgbClr val="666E70"/>
+            </a:solidFill>
+          </a:ln>
+          <a:effectLst/>
+        </p:spPr>
+        <p:style>
+          <a:lnRef idx="2">
+            <a:schemeClr val="accent1"/>
+          </a:lnRef>
+          <a:fillRef idx="0">
+            <a:schemeClr val="accent1"/>
+          </a:fillRef>
+          <a:effectRef idx="1">
+            <a:schemeClr val="accent1"/>
+          </a:effectRef>
+          <a:fontRef idx="minor">
+            <a:schemeClr val="tx1"/>
+          </a:fontRef>
+        </p:style>
+      </p:cxnSp>
+      <p:sp>
+        <p:nvSpPr>
+          <p:cNvPr id="26" name="matrix:label:4"/>
+          <p:cNvSpPr txBox="1"/>
+          <p:nvPr/>
+        </p:nvSpPr>
+        <p:spPr>
+          <a:xfrm>
+            <a:off x="5189220" y="2402860"/>
+            <a:ext cx="998982" cy="283464"/>
           </a:xfrm>
           <a:prstGeom prst="rect">
             <a:avLst/>
@@ -21180,7 +21216,7 @@
           <a:noFill/>
         </p:spPr>
         <p:txBody>
-          <a:bodyPr wrap="square" anchor="t" lIns="0" rIns="0" tIns="0" bIns="0">
+          <a:bodyPr wrap="none" anchor="t" lIns="0" rIns="0" tIns="0" bIns="0">
             <a:spAutoFit/>
             <a:extLst>
               <a:ext uri="{8AF73BB6-5E31-4F0F-A399-3D98F3B95FD9}">
@@ -21211,14 +21247,14 @@
       </p:sp>
       <p:sp>
         <p:nvSpPr>
-          <p:cNvPr id="26" name="TextBox 25"/>
-          <p:cNvSpPr txBox="1"/>
-          <p:nvPr/>
-        </p:nvSpPr>
-        <p:spPr>
-          <a:xfrm>
-            <a:off x="2542032" y="4081515"/>
-            <a:ext cx="1828800" cy="283463"/>
+          <p:cNvPr id="27" name="matrix:label:5"/>
+          <p:cNvSpPr txBox="1"/>
+          <p:nvPr/>
+        </p:nvSpPr>
+        <p:spPr>
+          <a:xfrm>
+            <a:off x="3034093" y="4026651"/>
+            <a:ext cx="844677" cy="283463"/>
           </a:xfrm>
           <a:prstGeom prst="rect">
             <a:avLst/>
@@ -21226,7 +21262,7 @@
           <a:noFill/>
         </p:spPr>
         <p:txBody>
-          <a:bodyPr wrap="square" anchor="t" lIns="0" rIns="0" tIns="0" bIns="0">
+          <a:bodyPr wrap="none" anchor="t" lIns="0" rIns="0" tIns="0" bIns="0">
             <a:spAutoFit/>
             <a:extLst>
               <a:ext uri="{8AF73BB6-5E31-4F0F-A399-3D98F3B95FD9}">
@@ -21257,7 +21293,7 @@
       </p:sp>
       <p:sp>
         <p:nvSpPr>
-          <p:cNvPr id="27" name="TextBox 26"/>
+          <p:cNvPr id="28" name="TextBox 27"/>
           <p:cNvSpPr txBox="1"/>
           <p:nvPr/>
         </p:nvSpPr>
@@ -21303,7 +21339,7 @@
       </p:sp>
       <p:sp>
         <p:nvSpPr>
-          <p:cNvPr id="28" name="Rectangle 27"/>
+          <p:cNvPr id="29" name="Rectangle 28"/>
           <p:cNvSpPr/>
           <p:nvPr/>
         </p:nvSpPr>
@@ -21347,7 +21383,7 @@
       </p:sp>
       <p:sp>
         <p:nvSpPr>
-          <p:cNvPr id="29" name="TextBox 28"/>
+          <p:cNvPr id="30" name="TextBox 29"/>
           <p:cNvSpPr txBox="1"/>
           <p:nvPr/>
         </p:nvSpPr>
@@ -21393,7 +21429,7 @@
       </p:sp>
       <p:sp>
         <p:nvSpPr>
-          <p:cNvPr id="30" name="TextBox 29"/>
+          <p:cNvPr id="31" name="TextBox 30"/>
           <p:cNvSpPr txBox="1"/>
           <p:nvPr/>
         </p:nvSpPr>

--- a/examples/gallery/pattern_gallery.pptx
+++ b/examples/gallery/pattern_gallery.pptx
@@ -22005,7 +22005,7 @@
       </p:cxnSp>
       <p:sp>
         <p:nvSpPr>
-          <p:cNvPr id="15" name="Rectangle 14"/>
+          <p:cNvPr id="15" name="org:box:project_owner"/>
           <p:cNvSpPr/>
           <p:nvPr/>
         </p:nvSpPr>
@@ -22051,7 +22051,7 @@
       </p:sp>
       <p:sp>
         <p:nvSpPr>
-          <p:cNvPr id="16" name="TextBox 15"/>
+          <p:cNvPr id="16" name="org:name:project_owner"/>
           <p:cNvSpPr txBox="1"/>
           <p:nvPr/>
         </p:nvSpPr>
@@ -22066,7 +22066,7 @@
           <a:noFill/>
         </p:spPr>
         <p:txBody>
-          <a:bodyPr wrap="square" anchor="t" lIns="0" rIns="0" tIns="0" bIns="0">
+          <a:bodyPr wrap="none" anchor="t" lIns="0" rIns="0" tIns="0" bIns="0">
             <a:spAutoFit/>
             <a:extLst>
               <a:ext uri="{8AF73BB6-5E31-4F0F-A399-3D98F3B95FD9}">
@@ -22082,7 +22082,7 @@
               </a:lnSpc>
             </a:pPr>
             <a:r>
-              <a:rPr sz="1250" b="1" lang="ja-JP">
+              <a:rPr sz="1350" b="1" lang="ja-JP">
                 <a:solidFill>
                   <a:srgbClr val="FFFFFC"/>
                 </a:solidFill>
@@ -22097,7 +22097,7 @@
       </p:sp>
       <p:sp>
         <p:nvSpPr>
-          <p:cNvPr id="17" name="TextBox 16"/>
+          <p:cNvPr id="17" name="org:sub:project_owner"/>
           <p:cNvSpPr txBox="1"/>
           <p:nvPr/>
         </p:nvSpPr>
@@ -22112,7 +22112,7 @@
           <a:noFill/>
         </p:spPr>
         <p:txBody>
-          <a:bodyPr wrap="square" anchor="ctr" lIns="0" rIns="0" tIns="0" bIns="0">
+          <a:bodyPr wrap="none" anchor="ctr" lIns="0" rIns="0" tIns="0" bIns="0">
             <a:spAutoFit/>
             <a:extLst>
               <a:ext uri="{8AF73BB6-5E31-4F0F-A399-3D98F3B95FD9}">
@@ -22128,7 +22128,7 @@
               </a:lnSpc>
             </a:pPr>
             <a:r>
-              <a:rPr sz="950" b="0" lang="ja-JP">
+              <a:rPr sz="1150" b="0" lang="ja-JP">
                 <a:solidFill>
                   <a:srgbClr val="DFEBE8"/>
                 </a:solidFill>
@@ -22143,7 +22143,7 @@
       </p:sp>
       <p:sp>
         <p:nvSpPr>
-          <p:cNvPr id="18" name="Rectangle 17"/>
+          <p:cNvPr id="18" name="org:box:system_owner"/>
           <p:cNvSpPr/>
           <p:nvPr/>
         </p:nvSpPr>
@@ -22189,7 +22189,7 @@
       </p:sp>
       <p:sp>
         <p:nvSpPr>
-          <p:cNvPr id="19" name="TextBox 18"/>
+          <p:cNvPr id="19" name="org:name:system_owner"/>
           <p:cNvSpPr txBox="1"/>
           <p:nvPr/>
         </p:nvSpPr>
@@ -22204,7 +22204,7 @@
           <a:noFill/>
         </p:spPr>
         <p:txBody>
-          <a:bodyPr wrap="square" anchor="t" lIns="0" rIns="0" tIns="0" bIns="0">
+          <a:bodyPr wrap="none" anchor="t" lIns="0" rIns="0" tIns="0" bIns="0">
             <a:spAutoFit/>
             <a:extLst>
               <a:ext uri="{8AF73BB6-5E31-4F0F-A399-3D98F3B95FD9}">
@@ -22220,7 +22220,7 @@
               </a:lnSpc>
             </a:pPr>
             <a:r>
-              <a:rPr sz="1250" b="1" lang="ja-JP">
+              <a:rPr sz="1350" b="1" lang="ja-JP">
                 <a:solidFill>
                   <a:srgbClr val="FFFFFC"/>
                 </a:solidFill>
@@ -22235,7 +22235,7 @@
       </p:sp>
       <p:sp>
         <p:nvSpPr>
-          <p:cNvPr id="20" name="TextBox 19"/>
+          <p:cNvPr id="20" name="org:sub:system_owner"/>
           <p:cNvSpPr txBox="1"/>
           <p:nvPr/>
         </p:nvSpPr>
@@ -22250,7 +22250,7 @@
           <a:noFill/>
         </p:spPr>
         <p:txBody>
-          <a:bodyPr wrap="square" anchor="ctr" lIns="0" rIns="0" tIns="0" bIns="0">
+          <a:bodyPr wrap="none" anchor="ctr" lIns="0" rIns="0" tIns="0" bIns="0">
             <a:spAutoFit/>
             <a:extLst>
               <a:ext uri="{8AF73BB6-5E31-4F0F-A399-3D98F3B95FD9}">
@@ -22266,7 +22266,7 @@
               </a:lnSpc>
             </a:pPr>
             <a:r>
-              <a:rPr sz="950" b="0" lang="ja-JP">
+              <a:rPr sz="1150" b="0" lang="ja-JP">
                 <a:solidFill>
                   <a:srgbClr val="DFEBE8"/>
                 </a:solidFill>
@@ -22281,7 +22281,7 @@
       </p:sp>
       <p:sp>
         <p:nvSpPr>
-          <p:cNvPr id="21" name="Rectangle 20"/>
+          <p:cNvPr id="21" name="org:box:project_manager"/>
           <p:cNvSpPr/>
           <p:nvPr/>
         </p:nvSpPr>
@@ -22327,7 +22327,7 @@
       </p:sp>
       <p:sp>
         <p:nvSpPr>
-          <p:cNvPr id="22" name="TextBox 21"/>
+          <p:cNvPr id="22" name="org:name:project_manager"/>
           <p:cNvSpPr txBox="1"/>
           <p:nvPr/>
         </p:nvSpPr>
@@ -22342,7 +22342,7 @@
           <a:noFill/>
         </p:spPr>
         <p:txBody>
-          <a:bodyPr wrap="square" anchor="t" lIns="0" rIns="0" tIns="0" bIns="0">
+          <a:bodyPr wrap="none" anchor="t" lIns="0" rIns="0" tIns="0" bIns="0">
             <a:spAutoFit/>
             <a:extLst>
               <a:ext uri="{8AF73BB6-5E31-4F0F-A399-3D98F3B95FD9}">
@@ -22358,7 +22358,7 @@
               </a:lnSpc>
             </a:pPr>
             <a:r>
-              <a:rPr sz="1250" b="1" lang="ja-JP">
+              <a:rPr sz="1350" b="1" lang="ja-JP">
                 <a:solidFill>
                   <a:srgbClr val="182C43"/>
                 </a:solidFill>
@@ -22373,7 +22373,7 @@
       </p:sp>
       <p:sp>
         <p:nvSpPr>
-          <p:cNvPr id="23" name="TextBox 22"/>
+          <p:cNvPr id="23" name="org:sub:project_manager"/>
           <p:cNvSpPr txBox="1"/>
           <p:nvPr/>
         </p:nvSpPr>
@@ -22388,7 +22388,7 @@
           <a:noFill/>
         </p:spPr>
         <p:txBody>
-          <a:bodyPr wrap="square" anchor="ctr" lIns="0" rIns="0" tIns="0" bIns="0">
+          <a:bodyPr wrap="none" anchor="ctr" lIns="0" rIns="0" tIns="0" bIns="0">
             <a:spAutoFit/>
             <a:extLst>
               <a:ext uri="{8AF73BB6-5E31-4F0F-A399-3D98F3B95FD9}">
@@ -22404,9 +22404,9 @@
               </a:lnSpc>
             </a:pPr>
             <a:r>
-              <a:rPr sz="950" b="0" lang="ja-JP">
-                <a:solidFill>
-                  <a:srgbClr val="666E70"/>
+              <a:rPr sz="1150" b="0" lang="ja-JP">
+                <a:solidFill>
+                  <a:srgbClr val="202729"/>
                 </a:solidFill>
                 <a:latin typeface="Yu Gothic"/>
                 <a:ea typeface="Yu Gothic"/>
@@ -22419,7 +22419,7 @@
       </p:sp>
       <p:sp>
         <p:nvSpPr>
-          <p:cNvPr id="24" name="Rectangle 23"/>
+          <p:cNvPr id="24" name="org:box:business_team"/>
           <p:cNvSpPr/>
           <p:nvPr/>
         </p:nvSpPr>
@@ -22465,7 +22465,7 @@
       </p:sp>
       <p:sp>
         <p:nvSpPr>
-          <p:cNvPr id="25" name="TextBox 24"/>
+          <p:cNvPr id="25" name="org:name:business_team"/>
           <p:cNvSpPr txBox="1"/>
           <p:nvPr/>
         </p:nvSpPr>
@@ -22480,7 +22480,7 @@
           <a:noFill/>
         </p:spPr>
         <p:txBody>
-          <a:bodyPr wrap="square" anchor="t" lIns="0" rIns="0" tIns="0" bIns="0">
+          <a:bodyPr wrap="none" anchor="t" lIns="0" rIns="0" tIns="0" bIns="0">
             <a:spAutoFit/>
             <a:extLst>
               <a:ext uri="{8AF73BB6-5E31-4F0F-A399-3D98F3B95FD9}">
@@ -22496,7 +22496,7 @@
               </a:lnSpc>
             </a:pPr>
             <a:r>
-              <a:rPr sz="1250" b="1" lang="ja-JP">
+              <a:rPr sz="1350" b="1" lang="ja-JP">
                 <a:solidFill>
                   <a:srgbClr val="182C43"/>
                 </a:solidFill>
@@ -22511,7 +22511,7 @@
       </p:sp>
       <p:sp>
         <p:nvSpPr>
-          <p:cNvPr id="26" name="TextBox 25"/>
+          <p:cNvPr id="26" name="org:sub:business_team"/>
           <p:cNvSpPr txBox="1"/>
           <p:nvPr/>
         </p:nvSpPr>
@@ -22526,7 +22526,7 @@
           <a:noFill/>
         </p:spPr>
         <p:txBody>
-          <a:bodyPr wrap="square" anchor="ctr" lIns="0" rIns="0" tIns="0" bIns="0">
+          <a:bodyPr wrap="none" anchor="ctr" lIns="0" rIns="0" tIns="0" bIns="0">
             <a:spAutoFit/>
             <a:extLst>
               <a:ext uri="{8AF73BB6-5E31-4F0F-A399-3D98F3B95FD9}">
@@ -22542,9 +22542,9 @@
               </a:lnSpc>
             </a:pPr>
             <a:r>
-              <a:rPr sz="950" b="0" lang="ja-JP">
-                <a:solidFill>
-                  <a:srgbClr val="666E70"/>
+              <a:rPr sz="1150" b="0" lang="ja-JP">
+                <a:solidFill>
+                  <a:srgbClr val="202729"/>
                 </a:solidFill>
                 <a:latin typeface="Yu Gothic"/>
                 <a:ea typeface="Yu Gothic"/>
@@ -22557,7 +22557,7 @@
       </p:sp>
       <p:sp>
         <p:nvSpPr>
-          <p:cNvPr id="27" name="Rectangle 26"/>
+          <p:cNvPr id="27" name="org:box:application_team"/>
           <p:cNvSpPr/>
           <p:nvPr/>
         </p:nvSpPr>
@@ -22603,7 +22603,7 @@
       </p:sp>
       <p:sp>
         <p:nvSpPr>
-          <p:cNvPr id="28" name="TextBox 27"/>
+          <p:cNvPr id="28" name="org:name:application_team"/>
           <p:cNvSpPr txBox="1"/>
           <p:nvPr/>
         </p:nvSpPr>
@@ -22618,7 +22618,7 @@
           <a:noFill/>
         </p:spPr>
         <p:txBody>
-          <a:bodyPr wrap="square" anchor="t" lIns="0" rIns="0" tIns="0" bIns="0">
+          <a:bodyPr wrap="none" anchor="t" lIns="0" rIns="0" tIns="0" bIns="0">
             <a:spAutoFit/>
             <a:extLst>
               <a:ext uri="{8AF73BB6-5E31-4F0F-A399-3D98F3B95FD9}">
@@ -22634,7 +22634,7 @@
               </a:lnSpc>
             </a:pPr>
             <a:r>
-              <a:rPr sz="1250" b="1" lang="ja-JP">
+              <a:rPr sz="1350" b="1" lang="ja-JP">
                 <a:solidFill>
                   <a:srgbClr val="182C43"/>
                 </a:solidFill>
@@ -22649,7 +22649,7 @@
       </p:sp>
       <p:sp>
         <p:nvSpPr>
-          <p:cNvPr id="29" name="TextBox 28"/>
+          <p:cNvPr id="29" name="org:sub:application_team"/>
           <p:cNvSpPr txBox="1"/>
           <p:nvPr/>
         </p:nvSpPr>
@@ -22664,7 +22664,7 @@
           <a:noFill/>
         </p:spPr>
         <p:txBody>
-          <a:bodyPr wrap="square" anchor="ctr" lIns="0" rIns="0" tIns="0" bIns="0">
+          <a:bodyPr wrap="none" anchor="ctr" lIns="0" rIns="0" tIns="0" bIns="0">
             <a:spAutoFit/>
             <a:extLst>
               <a:ext uri="{8AF73BB6-5E31-4F0F-A399-3D98F3B95FD9}">
@@ -22680,9 +22680,9 @@
               </a:lnSpc>
             </a:pPr>
             <a:r>
-              <a:rPr sz="950" b="0" lang="ja-JP">
-                <a:solidFill>
-                  <a:srgbClr val="666E70"/>
+              <a:rPr sz="1150" b="0" lang="ja-JP">
+                <a:solidFill>
+                  <a:srgbClr val="202729"/>
                 </a:solidFill>
                 <a:latin typeface="Yu Gothic"/>
                 <a:ea typeface="Yu Gothic"/>
@@ -22695,7 +22695,7 @@
       </p:sp>
       <p:sp>
         <p:nvSpPr>
-          <p:cNvPr id="30" name="Rectangle 29"/>
+          <p:cNvPr id="30" name="org:box:platform_team"/>
           <p:cNvSpPr/>
           <p:nvPr/>
         </p:nvSpPr>
@@ -22741,7 +22741,7 @@
       </p:sp>
       <p:sp>
         <p:nvSpPr>
-          <p:cNvPr id="31" name="TextBox 30"/>
+          <p:cNvPr id="31" name="org:name:platform_team"/>
           <p:cNvSpPr txBox="1"/>
           <p:nvPr/>
         </p:nvSpPr>
@@ -22756,7 +22756,7 @@
           <a:noFill/>
         </p:spPr>
         <p:txBody>
-          <a:bodyPr wrap="square" anchor="t" lIns="0" rIns="0" tIns="0" bIns="0">
+          <a:bodyPr wrap="none" anchor="t" lIns="0" rIns="0" tIns="0" bIns="0">
             <a:spAutoFit/>
             <a:extLst>
               <a:ext uri="{8AF73BB6-5E31-4F0F-A399-3D98F3B95FD9}">
@@ -22772,7 +22772,7 @@
               </a:lnSpc>
             </a:pPr>
             <a:r>
-              <a:rPr sz="1250" b="1" lang="ja-JP">
+              <a:rPr sz="1350" b="1" lang="ja-JP">
                 <a:solidFill>
                   <a:srgbClr val="182C43"/>
                 </a:solidFill>
@@ -22787,7 +22787,7 @@
       </p:sp>
       <p:sp>
         <p:nvSpPr>
-          <p:cNvPr id="32" name="TextBox 31"/>
+          <p:cNvPr id="32" name="org:sub:platform_team"/>
           <p:cNvSpPr txBox="1"/>
           <p:nvPr/>
         </p:nvSpPr>
@@ -22802,7 +22802,7 @@
           <a:noFill/>
         </p:spPr>
         <p:txBody>
-          <a:bodyPr wrap="square" anchor="ctr" lIns="0" rIns="0" tIns="0" bIns="0">
+          <a:bodyPr wrap="none" anchor="ctr" lIns="0" rIns="0" tIns="0" bIns="0">
             <a:spAutoFit/>
             <a:extLst>
               <a:ext uri="{8AF73BB6-5E31-4F0F-A399-3D98F3B95FD9}">
@@ -22818,9 +22818,9 @@
               </a:lnSpc>
             </a:pPr>
             <a:r>
-              <a:rPr sz="950" b="0" lang="ja-JP">
-                <a:solidFill>
-                  <a:srgbClr val="666E70"/>
+              <a:rPr sz="1150" b="0" lang="ja-JP">
+                <a:solidFill>
+                  <a:srgbClr val="202729"/>
                 </a:solidFill>
                 <a:latin typeface="Yu Gothic"/>
                 <a:ea typeface="Yu Gothic"/>
@@ -22833,7 +22833,7 @@
       </p:sp>
       <p:sp>
         <p:nvSpPr>
-          <p:cNvPr id="33" name="Rectangle 32"/>
+          <p:cNvPr id="33" name="org:box:operation_team"/>
           <p:cNvSpPr/>
           <p:nvPr/>
         </p:nvSpPr>
@@ -22879,7 +22879,7 @@
       </p:sp>
       <p:sp>
         <p:nvSpPr>
-          <p:cNvPr id="34" name="TextBox 33"/>
+          <p:cNvPr id="34" name="org:name:operation_team"/>
           <p:cNvSpPr txBox="1"/>
           <p:nvPr/>
         </p:nvSpPr>
@@ -22894,7 +22894,7 @@
           <a:noFill/>
         </p:spPr>
         <p:txBody>
-          <a:bodyPr wrap="square" anchor="t" lIns="0" rIns="0" tIns="0" bIns="0">
+          <a:bodyPr wrap="none" anchor="t" lIns="0" rIns="0" tIns="0" bIns="0">
             <a:spAutoFit/>
             <a:extLst>
               <a:ext uri="{8AF73BB6-5E31-4F0F-A399-3D98F3B95FD9}">
@@ -22910,7 +22910,7 @@
               </a:lnSpc>
             </a:pPr>
             <a:r>
-              <a:rPr sz="1250" b="1" lang="ja-JP">
+              <a:rPr sz="1350" b="1" lang="ja-JP">
                 <a:solidFill>
                   <a:srgbClr val="182C43"/>
                 </a:solidFill>
@@ -22925,7 +22925,7 @@
       </p:sp>
       <p:sp>
         <p:nvSpPr>
-          <p:cNvPr id="35" name="TextBox 34"/>
+          <p:cNvPr id="35" name="org:sub:operation_team"/>
           <p:cNvSpPr txBox="1"/>
           <p:nvPr/>
         </p:nvSpPr>
@@ -22940,7 +22940,7 @@
           <a:noFill/>
         </p:spPr>
         <p:txBody>
-          <a:bodyPr wrap="square" anchor="ctr" lIns="0" rIns="0" tIns="0" bIns="0">
+          <a:bodyPr wrap="none" anchor="ctr" lIns="0" rIns="0" tIns="0" bIns="0">
             <a:spAutoFit/>
             <a:extLst>
               <a:ext uri="{8AF73BB6-5E31-4F0F-A399-3D98F3B95FD9}">
@@ -22956,9 +22956,9 @@
               </a:lnSpc>
             </a:pPr>
             <a:r>
-              <a:rPr sz="950" b="0" lang="ja-JP">
-                <a:solidFill>
-                  <a:srgbClr val="666E70"/>
+              <a:rPr sz="1150" b="0" lang="ja-JP">
+                <a:solidFill>
+                  <a:srgbClr val="202729"/>
                 </a:solidFill>
                 <a:latin typeface="Yu Gothic"/>
                 <a:ea typeface="Yu Gothic"/>

--- a/examples/gallery/pattern_gallery.pptx
+++ b/examples/gallery/pattern_gallery.pptx
@@ -9801,7 +9801,7 @@
       </p:sp>
       <p:sp>
         <p:nvSpPr>
-          <p:cNvPr id="8" name="TextBox 7"/>
+          <p:cNvPr id="8" name="process:name:0"/>
           <p:cNvSpPr txBox="1"/>
           <p:nvPr/>
         </p:nvSpPr>
@@ -9816,7 +9816,7 @@
           <a:noFill/>
         </p:spPr>
         <p:txBody>
-          <a:bodyPr wrap="square" anchor="t" lIns="0" rIns="0" tIns="0" bIns="0">
+          <a:bodyPr wrap="none" anchor="t" lIns="0" rIns="0" tIns="0" bIns="0">
             <a:spAutoFit/>
             <a:extLst>
               <a:ext uri="{8AF73BB6-5E31-4F0F-A399-3D98F3B95FD9}">
@@ -9847,14 +9847,14 @@
       </p:sp>
       <p:sp>
         <p:nvSpPr>
-          <p:cNvPr id="9" name="TextBox 8"/>
+          <p:cNvPr id="9" name="process:desc:0"/>
           <p:cNvSpPr txBox="1"/>
           <p:nvPr/>
         </p:nvSpPr>
         <p:spPr>
           <a:xfrm>
             <a:off x="868680" y="3255264"/>
-            <a:ext cx="1832457" cy="1234440"/>
+            <a:ext cx="1832457" cy="644652"/>
           </a:xfrm>
           <a:prstGeom prst="rect">
             <a:avLst/>
@@ -9862,7 +9862,7 @@
           <a:noFill/>
         </p:spPr>
         <p:txBody>
-          <a:bodyPr wrap="square" anchor="t" lIns="0" rIns="0" tIns="0" bIns="0">
+          <a:bodyPr wrap="none" anchor="t" lIns="0" rIns="0" tIns="0" bIns="0">
             <a:spAutoFit/>
             <a:extLst>
               <a:ext uri="{8AF73BB6-5E31-4F0F-A399-3D98F3B95FD9}">
@@ -9886,20 +9886,56 @@
                 <a:ea typeface="Yu Gothic"/>
                 <a:cs typeface="Yu Gothic"/>
               </a:rPr>
-              <a:t>目的・読み手・必須メッセージを整理する。</a:t>
-            </a:r>
-          </a:p>
-        </p:txBody>
-      </p:sp>
-      <p:sp>
-        <p:nvSpPr>
-          <p:cNvPr id="10" name="TextBox 9"/>
-          <p:cNvSpPr txBox="1"/>
-          <p:nvPr/>
-        </p:nvSpPr>
-        <p:spPr>
-          <a:xfrm>
-            <a:off x="850392" y="4818888"/>
+              <a:t>目的・読み手・必須</a:t>
+            </a:r>
+          </a:p>
+          <a:p>
+            <a:pPr algn="ctr">
+              <a:lnSpc>
+                <a:spcPct val="120000"/>
+              </a:lnSpc>
+            </a:pPr>
+            <a:r>
+              <a:rPr sz="1350" b="0" lang="ja-JP">
+                <a:solidFill>
+                  <a:srgbClr val="202729"/>
+                </a:solidFill>
+                <a:latin typeface="Yu Gothic"/>
+                <a:ea typeface="Yu Gothic"/>
+                <a:cs typeface="Yu Gothic"/>
+              </a:rPr>
+              <a:t>メッセージを</a:t>
+            </a:r>
+          </a:p>
+          <a:p>
+            <a:pPr algn="ctr">
+              <a:lnSpc>
+                <a:spcPct val="120000"/>
+              </a:lnSpc>
+            </a:pPr>
+            <a:r>
+              <a:rPr sz="1350" b="0" lang="ja-JP">
+                <a:solidFill>
+                  <a:srgbClr val="202729"/>
+                </a:solidFill>
+                <a:latin typeface="Yu Gothic"/>
+                <a:ea typeface="Yu Gothic"/>
+                <a:cs typeface="Yu Gothic"/>
+              </a:rPr>
+              <a:t>整理する。</a:t>
+            </a:r>
+          </a:p>
+        </p:txBody>
+      </p:sp>
+      <p:sp>
+        <p:nvSpPr>
+          <p:cNvPr id="10" name="process:attribute-label:0"/>
+          <p:cNvSpPr txBox="1"/>
+          <p:nvPr/>
+        </p:nvSpPr>
+        <p:spPr>
+          <a:xfrm>
+            <a:off x="850392" y="4082796"/>
             <a:ext cx="1869033" cy="201168"/>
           </a:xfrm>
           <a:prstGeom prst="rect">
@@ -9908,11 +9944,11 @@
           <a:noFill/>
         </p:spPr>
         <p:txBody>
-          <a:bodyPr wrap="square" anchor="t" lIns="0" rIns="0" tIns="0" bIns="0">
-            <a:spAutoFit/>
-            <a:extLst>
-              <a:ext uri="{8AF73BB6-5E31-4F0F-A399-3D98F3B95FD9}">
-                <ns27:textLayout xmlns:ns27="urn:pptxdsl:text-layout:v1" role="natural"/>
+          <a:bodyPr wrap="none" anchor="t" lIns="0" rIns="0" tIns="0" bIns="0">
+            <a:spAutoFit/>
+            <a:extLst>
+              <a:ext uri="{8AF73BB6-5E31-4F0F-A399-3D98F3B95FD9}">
+                <ns31:textLayout xmlns:ns31="urn:pptxdsl:text-layout:v1" role="natural"/>
               </a:ext>
             </a:extLst>
           </a:bodyPr>
@@ -9924,9 +9960,9 @@
               </a:lnSpc>
             </a:pPr>
             <a:r>
-              <a:rPr sz="950" b="1" lang="ja-JP">
-                <a:solidFill>
-                  <a:srgbClr val="666E70"/>
+              <a:rPr sz="1050" b="1" lang="ja-JP">
+                <a:solidFill>
+                  <a:srgbClr val="202729"/>
                 </a:solidFill>
                 <a:latin typeface="Yu Gothic"/>
                 <a:ea typeface="Yu Gothic"/>
@@ -9939,13 +9975,13 @@
       </p:sp>
       <p:sp>
         <p:nvSpPr>
-          <p:cNvPr id="11" name="TextBox 10"/>
-          <p:cNvSpPr txBox="1"/>
-          <p:nvPr/>
-        </p:nvSpPr>
-        <p:spPr>
-          <a:xfrm>
-            <a:off x="850392" y="5084064"/>
+          <p:cNvPr id="11" name="process:attribute-value:0"/>
+          <p:cNvSpPr txBox="1"/>
+          <p:nvPr/>
+        </p:nvSpPr>
+        <p:spPr>
+          <a:xfrm>
+            <a:off x="850392" y="4329683"/>
             <a:ext cx="1869033" cy="274320"/>
           </a:xfrm>
           <a:prstGeom prst="rect">
@@ -9954,11 +9990,11 @@
           <a:noFill/>
         </p:spPr>
         <p:txBody>
-          <a:bodyPr wrap="square" anchor="t" lIns="0" rIns="0" tIns="0" bIns="0">
-            <a:spAutoFit/>
-            <a:extLst>
-              <a:ext uri="{8AF73BB6-5E31-4F0F-A399-3D98F3B95FD9}">
-                <ns32:textLayout xmlns:ns32="urn:pptxdsl:text-layout:v1" role="natural"/>
+          <a:bodyPr wrap="none" anchor="t" lIns="0" rIns="0" tIns="0" bIns="0">
+            <a:spAutoFit/>
+            <a:extLst>
+              <a:ext uri="{8AF73BB6-5E31-4F0F-A399-3D98F3B95FD9}">
+                <ns36:textLayout xmlns:ns36="urn:pptxdsl:text-layout:v1" role="natural"/>
               </a:ext>
             </a:extLst>
           </a:bodyPr>
@@ -10048,7 +10084,7 @@
             <a:spAutoFit/>
             <a:extLst>
               <a:ext uri="{8AF73BB6-5E31-4F0F-A399-3D98F3B95FD9}">
-                <ns37:textLayout xmlns:ns37="urn:pptxdsl:text-layout:v1" role="natural"/>
+                <ns41:textLayout xmlns:ns41="urn:pptxdsl:text-layout:v1" role="natural"/>
               </a:ext>
             </a:extLst>
           </a:bodyPr>
@@ -10075,7 +10111,7 @@
       </p:sp>
       <p:sp>
         <p:nvSpPr>
-          <p:cNvPr id="14" name="TextBox 13"/>
+          <p:cNvPr id="14" name="process:name:1"/>
           <p:cNvSpPr txBox="1"/>
           <p:nvPr/>
         </p:nvSpPr>
@@ -10090,11 +10126,11 @@
           <a:noFill/>
         </p:spPr>
         <p:txBody>
-          <a:bodyPr wrap="square" anchor="t" lIns="0" rIns="0" tIns="0" bIns="0">
-            <a:spAutoFit/>
-            <a:extLst>
-              <a:ext uri="{8AF73BB6-5E31-4F0F-A399-3D98F3B95FD9}">
-                <ns42:textLayout xmlns:ns42="urn:pptxdsl:text-layout:v1" role="natural"/>
+          <a:bodyPr wrap="none" anchor="t" lIns="0" rIns="0" tIns="0" bIns="0">
+            <a:spAutoFit/>
+            <a:extLst>
+              <a:ext uri="{8AF73BB6-5E31-4F0F-A399-3D98F3B95FD9}">
+                <ns46:textLayout xmlns:ns46="urn:pptxdsl:text-layout:v1" role="natural"/>
               </a:ext>
             </a:extLst>
           </a:bodyPr>
@@ -10121,14 +10157,14 @@
       </p:sp>
       <p:sp>
         <p:nvSpPr>
-          <p:cNvPr id="15" name="TextBox 14"/>
+          <p:cNvPr id="15" name="process:desc:1"/>
           <p:cNvSpPr txBox="1"/>
           <p:nvPr/>
         </p:nvSpPr>
         <p:spPr>
           <a:xfrm>
             <a:off x="3012033" y="3255264"/>
-            <a:ext cx="1832457" cy="1234440"/>
+            <a:ext cx="1832457" cy="644652"/>
           </a:xfrm>
           <a:prstGeom prst="rect">
             <a:avLst/>
@@ -10136,11 +10172,11 @@
           <a:noFill/>
         </p:spPr>
         <p:txBody>
-          <a:bodyPr wrap="square" anchor="t" lIns="0" rIns="0" tIns="0" bIns="0">
-            <a:spAutoFit/>
-            <a:extLst>
-              <a:ext uri="{8AF73BB6-5E31-4F0F-A399-3D98F3B95FD9}">
-                <ns47:textLayout xmlns:ns47="urn:pptxdsl:text-layout:v1" role="body"/>
+          <a:bodyPr wrap="none" anchor="t" lIns="0" rIns="0" tIns="0" bIns="0">
+            <a:spAutoFit/>
+            <a:extLst>
+              <a:ext uri="{8AF73BB6-5E31-4F0F-A399-3D98F3B95FD9}">
+                <ns51:textLayout xmlns:ns51="urn:pptxdsl:text-layout:v1" role="body"/>
               </a:ext>
             </a:extLst>
           </a:bodyPr>
@@ -10160,20 +10196,56 @@
                 <a:ea typeface="Yu Gothic"/>
                 <a:cs typeface="Yu Gothic"/>
               </a:rPr>
-              <a:t>schemaに沿ってスライド種別と文言を作る。</a:t>
-            </a:r>
-          </a:p>
-        </p:txBody>
-      </p:sp>
-      <p:sp>
-        <p:nvSpPr>
-          <p:cNvPr id="16" name="TextBox 15"/>
-          <p:cNvSpPr txBox="1"/>
-          <p:nvPr/>
-        </p:nvSpPr>
-        <p:spPr>
-          <a:xfrm>
-            <a:off x="2993745" y="4818888"/>
+              <a:t>schemaに沿って</a:t>
+            </a:r>
+          </a:p>
+          <a:p>
+            <a:pPr algn="ctr">
+              <a:lnSpc>
+                <a:spcPct val="120000"/>
+              </a:lnSpc>
+            </a:pPr>
+            <a:r>
+              <a:rPr sz="1350" b="0" lang="ja-JP">
+                <a:solidFill>
+                  <a:srgbClr val="202729"/>
+                </a:solidFill>
+                <a:latin typeface="Yu Gothic"/>
+                <a:ea typeface="Yu Gothic"/>
+                <a:cs typeface="Yu Gothic"/>
+              </a:rPr>
+              <a:t>スライド種別と</a:t>
+            </a:r>
+          </a:p>
+          <a:p>
+            <a:pPr algn="ctr">
+              <a:lnSpc>
+                <a:spcPct val="120000"/>
+              </a:lnSpc>
+            </a:pPr>
+            <a:r>
+              <a:rPr sz="1350" b="0" lang="ja-JP">
+                <a:solidFill>
+                  <a:srgbClr val="202729"/>
+                </a:solidFill>
+                <a:latin typeface="Yu Gothic"/>
+                <a:ea typeface="Yu Gothic"/>
+                <a:cs typeface="Yu Gothic"/>
+              </a:rPr>
+              <a:t>文言を作る。</a:t>
+            </a:r>
+          </a:p>
+        </p:txBody>
+      </p:sp>
+      <p:sp>
+        <p:nvSpPr>
+          <p:cNvPr id="16" name="process:attribute-label:1"/>
+          <p:cNvSpPr txBox="1"/>
+          <p:nvPr/>
+        </p:nvSpPr>
+        <p:spPr>
+          <a:xfrm>
+            <a:off x="2993745" y="4082796"/>
             <a:ext cx="1869033" cy="201168"/>
           </a:xfrm>
           <a:prstGeom prst="rect">
@@ -10182,11 +10254,11 @@
           <a:noFill/>
         </p:spPr>
         <p:txBody>
-          <a:bodyPr wrap="square" anchor="t" lIns="0" rIns="0" tIns="0" bIns="0">
-            <a:spAutoFit/>
-            <a:extLst>
-              <a:ext uri="{8AF73BB6-5E31-4F0F-A399-3D98F3B95FD9}">
-                <ns52:textLayout xmlns:ns52="urn:pptxdsl:text-layout:v1" role="natural"/>
+          <a:bodyPr wrap="none" anchor="t" lIns="0" rIns="0" tIns="0" bIns="0">
+            <a:spAutoFit/>
+            <a:extLst>
+              <a:ext uri="{8AF73BB6-5E31-4F0F-A399-3D98F3B95FD9}">
+                <ns60:textLayout xmlns:ns60="urn:pptxdsl:text-layout:v1" role="natural"/>
               </a:ext>
             </a:extLst>
           </a:bodyPr>
@@ -10198,9 +10270,9 @@
               </a:lnSpc>
             </a:pPr>
             <a:r>
-              <a:rPr sz="950" b="1" lang="ja-JP">
-                <a:solidFill>
-                  <a:srgbClr val="666E70"/>
+              <a:rPr sz="1050" b="1" lang="ja-JP">
+                <a:solidFill>
+                  <a:srgbClr val="202729"/>
                 </a:solidFill>
                 <a:latin typeface="Yu Gothic"/>
                 <a:ea typeface="Yu Gothic"/>
@@ -10213,13 +10285,13 @@
       </p:sp>
       <p:sp>
         <p:nvSpPr>
-          <p:cNvPr id="17" name="TextBox 16"/>
-          <p:cNvSpPr txBox="1"/>
-          <p:nvPr/>
-        </p:nvSpPr>
-        <p:spPr>
-          <a:xfrm>
-            <a:off x="2993745" y="5084064"/>
+          <p:cNvPr id="17" name="process:attribute-value:1"/>
+          <p:cNvSpPr txBox="1"/>
+          <p:nvPr/>
+        </p:nvSpPr>
+        <p:spPr>
+          <a:xfrm>
+            <a:off x="2993745" y="4329683"/>
             <a:ext cx="1869033" cy="274320"/>
           </a:xfrm>
           <a:prstGeom prst="rect">
@@ -10228,11 +10300,11 @@
           <a:noFill/>
         </p:spPr>
         <p:txBody>
-          <a:bodyPr wrap="square" anchor="t" lIns="0" rIns="0" tIns="0" bIns="0">
-            <a:spAutoFit/>
-            <a:extLst>
-              <a:ext uri="{8AF73BB6-5E31-4F0F-A399-3D98F3B95FD9}">
-                <ns57:textLayout xmlns:ns57="urn:pptxdsl:text-layout:v1" role="natural"/>
+          <a:bodyPr wrap="none" anchor="t" lIns="0" rIns="0" tIns="0" bIns="0">
+            <a:spAutoFit/>
+            <a:extLst>
+              <a:ext uri="{8AF73BB6-5E31-4F0F-A399-3D98F3B95FD9}">
+                <ns65:textLayout xmlns:ns65="urn:pptxdsl:text-layout:v1" role="natural"/>
               </a:ext>
             </a:extLst>
           </a:bodyPr>
@@ -10322,7 +10394,7 @@
             <a:spAutoFit/>
             <a:extLst>
               <a:ext uri="{8AF73BB6-5E31-4F0F-A399-3D98F3B95FD9}">
-                <ns62:textLayout xmlns:ns62="urn:pptxdsl:text-layout:v1" role="natural"/>
+                <ns70:textLayout xmlns:ns70="urn:pptxdsl:text-layout:v1" role="natural"/>
               </a:ext>
             </a:extLst>
           </a:bodyPr>
@@ -10349,7 +10421,7 @@
       </p:sp>
       <p:sp>
         <p:nvSpPr>
-          <p:cNvPr id="20" name="TextBox 19"/>
+          <p:cNvPr id="20" name="process:name:2"/>
           <p:cNvSpPr txBox="1"/>
           <p:nvPr/>
         </p:nvSpPr>
@@ -10364,11 +10436,11 @@
           <a:noFill/>
         </p:spPr>
         <p:txBody>
-          <a:bodyPr wrap="square" anchor="t" lIns="0" rIns="0" tIns="0" bIns="0">
-            <a:spAutoFit/>
-            <a:extLst>
-              <a:ext uri="{8AF73BB6-5E31-4F0F-A399-3D98F3B95FD9}">
-                <ns67:textLayout xmlns:ns67="urn:pptxdsl:text-layout:v1" role="natural"/>
+          <a:bodyPr wrap="none" anchor="t" lIns="0" rIns="0" tIns="0" bIns="0">
+            <a:spAutoFit/>
+            <a:extLst>
+              <a:ext uri="{8AF73BB6-5E31-4F0F-A399-3D98F3B95FD9}">
+                <ns75:textLayout xmlns:ns75="urn:pptxdsl:text-layout:v1" role="natural"/>
               </a:ext>
             </a:extLst>
           </a:bodyPr>
@@ -10395,14 +10467,14 @@
       </p:sp>
       <p:sp>
         <p:nvSpPr>
-          <p:cNvPr id="21" name="TextBox 20"/>
+          <p:cNvPr id="21" name="process:desc:2"/>
           <p:cNvSpPr txBox="1"/>
           <p:nvPr/>
         </p:nvSpPr>
         <p:spPr>
           <a:xfrm>
             <a:off x="5155387" y="3255264"/>
-            <a:ext cx="1832457" cy="1234440"/>
+            <a:ext cx="1832457" cy="644652"/>
           </a:xfrm>
           <a:prstGeom prst="rect">
             <a:avLst/>
@@ -10410,11 +10482,11 @@
           <a:noFill/>
         </p:spPr>
         <p:txBody>
-          <a:bodyPr wrap="square" anchor="t" lIns="0" rIns="0" tIns="0" bIns="0">
-            <a:spAutoFit/>
-            <a:extLst>
-              <a:ext uri="{8AF73BB6-5E31-4F0F-A399-3D98F3B95FD9}">
-                <ns72:textLayout xmlns:ns72="urn:pptxdsl:text-layout:v1" role="body"/>
+          <a:bodyPr wrap="none" anchor="t" lIns="0" rIns="0" tIns="0" bIns="0">
+            <a:spAutoFit/>
+            <a:extLst>
+              <a:ext uri="{8AF73BB6-5E31-4F0F-A399-3D98F3B95FD9}">
+                <ns80:textLayout xmlns:ns80="urn:pptxdsl:text-layout:v1" role="body"/>
               </a:ext>
             </a:extLst>
           </a:bodyPr>
@@ -10434,20 +10506,56 @@
                 <a:ea typeface="Yu Gothic"/>
                 <a:cs typeface="Yu Gothic"/>
               </a:rPr>
-              <a:t>rendererがPPTXを決定論的に出力する。</a:t>
-            </a:r>
-          </a:p>
-        </p:txBody>
-      </p:sp>
-      <p:sp>
-        <p:nvSpPr>
-          <p:cNvPr id="22" name="TextBox 21"/>
-          <p:cNvSpPr txBox="1"/>
-          <p:nvPr/>
-        </p:nvSpPr>
-        <p:spPr>
-          <a:xfrm>
-            <a:off x="5137099" y="4818888"/>
+              <a:t>rendererがPPTXを</a:t>
+            </a:r>
+          </a:p>
+          <a:p>
+            <a:pPr algn="ctr">
+              <a:lnSpc>
+                <a:spcPct val="120000"/>
+              </a:lnSpc>
+            </a:pPr>
+            <a:r>
+              <a:rPr sz="1350" b="0" lang="ja-JP">
+                <a:solidFill>
+                  <a:srgbClr val="202729"/>
+                </a:solidFill>
+                <a:latin typeface="Yu Gothic"/>
+                <a:ea typeface="Yu Gothic"/>
+                <a:cs typeface="Yu Gothic"/>
+              </a:rPr>
+              <a:t>決定論的に</a:t>
+            </a:r>
+          </a:p>
+          <a:p>
+            <a:pPr algn="ctr">
+              <a:lnSpc>
+                <a:spcPct val="120000"/>
+              </a:lnSpc>
+            </a:pPr>
+            <a:r>
+              <a:rPr sz="1350" b="0" lang="ja-JP">
+                <a:solidFill>
+                  <a:srgbClr val="202729"/>
+                </a:solidFill>
+                <a:latin typeface="Yu Gothic"/>
+                <a:ea typeface="Yu Gothic"/>
+                <a:cs typeface="Yu Gothic"/>
+              </a:rPr>
+              <a:t>出力する。</a:t>
+            </a:r>
+          </a:p>
+        </p:txBody>
+      </p:sp>
+      <p:sp>
+        <p:nvSpPr>
+          <p:cNvPr id="22" name="process:attribute-label:2"/>
+          <p:cNvSpPr txBox="1"/>
+          <p:nvPr/>
+        </p:nvSpPr>
+        <p:spPr>
+          <a:xfrm>
+            <a:off x="5137099" y="4082796"/>
             <a:ext cx="1869033" cy="201168"/>
           </a:xfrm>
           <a:prstGeom prst="rect">
@@ -10456,11 +10564,11 @@
           <a:noFill/>
         </p:spPr>
         <p:txBody>
-          <a:bodyPr wrap="square" anchor="t" lIns="0" rIns="0" tIns="0" bIns="0">
-            <a:spAutoFit/>
-            <a:extLst>
-              <a:ext uri="{8AF73BB6-5E31-4F0F-A399-3D98F3B95FD9}">
-                <ns77:textLayout xmlns:ns77="urn:pptxdsl:text-layout:v1" role="natural"/>
+          <a:bodyPr wrap="none" anchor="t" lIns="0" rIns="0" tIns="0" bIns="0">
+            <a:spAutoFit/>
+            <a:extLst>
+              <a:ext uri="{8AF73BB6-5E31-4F0F-A399-3D98F3B95FD9}">
+                <ns89:textLayout xmlns:ns89="urn:pptxdsl:text-layout:v1" role="natural"/>
               </a:ext>
             </a:extLst>
           </a:bodyPr>
@@ -10472,9 +10580,9 @@
               </a:lnSpc>
             </a:pPr>
             <a:r>
-              <a:rPr sz="950" b="1" lang="ja-JP">
-                <a:solidFill>
-                  <a:srgbClr val="666E70"/>
+              <a:rPr sz="1050" b="1" lang="ja-JP">
+                <a:solidFill>
+                  <a:srgbClr val="202729"/>
                 </a:solidFill>
                 <a:latin typeface="Yu Gothic"/>
                 <a:ea typeface="Yu Gothic"/>
@@ -10487,13 +10595,13 @@
       </p:sp>
       <p:sp>
         <p:nvSpPr>
-          <p:cNvPr id="23" name="TextBox 22"/>
-          <p:cNvSpPr txBox="1"/>
-          <p:nvPr/>
-        </p:nvSpPr>
-        <p:spPr>
-          <a:xfrm>
-            <a:off x="5137099" y="5084064"/>
+          <p:cNvPr id="23" name="process:attribute-value:2"/>
+          <p:cNvSpPr txBox="1"/>
+          <p:nvPr/>
+        </p:nvSpPr>
+        <p:spPr>
+          <a:xfrm>
+            <a:off x="5137099" y="4329683"/>
             <a:ext cx="1869033" cy="274320"/>
           </a:xfrm>
           <a:prstGeom prst="rect">
@@ -10502,11 +10610,11 @@
           <a:noFill/>
         </p:spPr>
         <p:txBody>
-          <a:bodyPr wrap="square" anchor="t" lIns="0" rIns="0" tIns="0" bIns="0">
-            <a:spAutoFit/>
-            <a:extLst>
-              <a:ext uri="{8AF73BB6-5E31-4F0F-A399-3D98F3B95FD9}">
-                <ns82:textLayout xmlns:ns82="urn:pptxdsl:text-layout:v1" role="natural"/>
+          <a:bodyPr wrap="none" anchor="t" lIns="0" rIns="0" tIns="0" bIns="0">
+            <a:spAutoFit/>
+            <a:extLst>
+              <a:ext uri="{8AF73BB6-5E31-4F0F-A399-3D98F3B95FD9}">
+                <ns94:textLayout xmlns:ns94="urn:pptxdsl:text-layout:v1" role="natural"/>
               </a:ext>
             </a:extLst>
           </a:bodyPr>
@@ -10596,7 +10704,7 @@
             <a:spAutoFit/>
             <a:extLst>
               <a:ext uri="{8AF73BB6-5E31-4F0F-A399-3D98F3B95FD9}">
-                <ns87:textLayout xmlns:ns87="urn:pptxdsl:text-layout:v1" role="natural"/>
+                <ns99:textLayout xmlns:ns99="urn:pptxdsl:text-layout:v1" role="natural"/>
               </a:ext>
             </a:extLst>
           </a:bodyPr>
@@ -10623,7 +10731,7 @@
       </p:sp>
       <p:sp>
         <p:nvSpPr>
-          <p:cNvPr id="26" name="TextBox 25"/>
+          <p:cNvPr id="26" name="process:name:3"/>
           <p:cNvSpPr txBox="1"/>
           <p:nvPr/>
         </p:nvSpPr>
@@ -10638,11 +10746,11 @@
           <a:noFill/>
         </p:spPr>
         <p:txBody>
-          <a:bodyPr wrap="square" anchor="t" lIns="0" rIns="0" tIns="0" bIns="0">
-            <a:spAutoFit/>
-            <a:extLst>
-              <a:ext uri="{8AF73BB6-5E31-4F0F-A399-3D98F3B95FD9}">
-                <ns92:textLayout xmlns:ns92="urn:pptxdsl:text-layout:v1" role="natural"/>
+          <a:bodyPr wrap="none" anchor="t" lIns="0" rIns="0" tIns="0" bIns="0">
+            <a:spAutoFit/>
+            <a:extLst>
+              <a:ext uri="{8AF73BB6-5E31-4F0F-A399-3D98F3B95FD9}">
+                <ns104:textLayout xmlns:ns104="urn:pptxdsl:text-layout:v1" role="natural"/>
               </a:ext>
             </a:extLst>
           </a:bodyPr>
@@ -10669,14 +10777,14 @@
       </p:sp>
       <p:sp>
         <p:nvSpPr>
-          <p:cNvPr id="27" name="TextBox 26"/>
+          <p:cNvPr id="27" name="process:desc:3"/>
           <p:cNvSpPr txBox="1"/>
           <p:nvPr/>
         </p:nvSpPr>
         <p:spPr>
           <a:xfrm>
             <a:off x="7298740" y="3255264"/>
-            <a:ext cx="1832457" cy="1234440"/>
+            <a:ext cx="1832457" cy="438912"/>
           </a:xfrm>
           <a:prstGeom prst="rect">
             <a:avLst/>
@@ -10684,11 +10792,11 @@
           <a:noFill/>
         </p:spPr>
         <p:txBody>
-          <a:bodyPr wrap="square" anchor="t" lIns="0" rIns="0" tIns="0" bIns="0">
-            <a:spAutoFit/>
-            <a:extLst>
-              <a:ext uri="{8AF73BB6-5E31-4F0F-A399-3D98F3B95FD9}">
-                <ns97:textLayout xmlns:ns97="urn:pptxdsl:text-layout:v1" role="body"/>
+          <a:bodyPr wrap="none" anchor="t" lIns="0" rIns="0" tIns="0" bIns="0">
+            <a:spAutoFit/>
+            <a:extLst>
+              <a:ext uri="{8AF73BB6-5E31-4F0F-A399-3D98F3B95FD9}">
+                <ns109:textLayout xmlns:ns109="urn:pptxdsl:text-layout:v1" role="body"/>
               </a:ext>
             </a:extLst>
           </a:bodyPr>
@@ -10708,20 +10816,38 @@
                 <a:ea typeface="Yu Gothic"/>
                 <a:cs typeface="Yu Gothic"/>
               </a:rPr>
-              <a:t>機械検知と目視で崩れを確認する。</a:t>
-            </a:r>
-          </a:p>
-        </p:txBody>
-      </p:sp>
-      <p:sp>
-        <p:nvSpPr>
-          <p:cNvPr id="28" name="TextBox 27"/>
-          <p:cNvSpPr txBox="1"/>
-          <p:nvPr/>
-        </p:nvSpPr>
-        <p:spPr>
-          <a:xfrm>
-            <a:off x="7280452" y="4818888"/>
+              <a:t>機械検知と目視で</a:t>
+            </a:r>
+          </a:p>
+          <a:p>
+            <a:pPr algn="ctr">
+              <a:lnSpc>
+                <a:spcPct val="120000"/>
+              </a:lnSpc>
+            </a:pPr>
+            <a:r>
+              <a:rPr sz="1350" b="0" lang="ja-JP">
+                <a:solidFill>
+                  <a:srgbClr val="202729"/>
+                </a:solidFill>
+                <a:latin typeface="Yu Gothic"/>
+                <a:ea typeface="Yu Gothic"/>
+                <a:cs typeface="Yu Gothic"/>
+              </a:rPr>
+              <a:t>崩れを確認する。</a:t>
+            </a:r>
+          </a:p>
+        </p:txBody>
+      </p:sp>
+      <p:sp>
+        <p:nvSpPr>
+          <p:cNvPr id="28" name="process:attribute-label:3"/>
+          <p:cNvSpPr txBox="1"/>
+          <p:nvPr/>
+        </p:nvSpPr>
+        <p:spPr>
+          <a:xfrm>
+            <a:off x="7280452" y="3877056"/>
             <a:ext cx="1869033" cy="201168"/>
           </a:xfrm>
           <a:prstGeom prst="rect">
@@ -10730,11 +10856,11 @@
           <a:noFill/>
         </p:spPr>
         <p:txBody>
-          <a:bodyPr wrap="square" anchor="t" lIns="0" rIns="0" tIns="0" bIns="0">
-            <a:spAutoFit/>
-            <a:extLst>
-              <a:ext uri="{8AF73BB6-5E31-4F0F-A399-3D98F3B95FD9}">
-                <ns102:textLayout xmlns:ns102="urn:pptxdsl:text-layout:v1" role="natural"/>
+          <a:bodyPr wrap="none" anchor="t" lIns="0" rIns="0" tIns="0" bIns="0">
+            <a:spAutoFit/>
+            <a:extLst>
+              <a:ext uri="{8AF73BB6-5E31-4F0F-A399-3D98F3B95FD9}">
+                <ns116:textLayout xmlns:ns116="urn:pptxdsl:text-layout:v1" role="natural"/>
               </a:ext>
             </a:extLst>
           </a:bodyPr>
@@ -10746,9 +10872,9 @@
               </a:lnSpc>
             </a:pPr>
             <a:r>
-              <a:rPr sz="950" b="1" lang="ja-JP">
-                <a:solidFill>
-                  <a:srgbClr val="666E70"/>
+              <a:rPr sz="1050" b="1" lang="ja-JP">
+                <a:solidFill>
+                  <a:srgbClr val="202729"/>
                 </a:solidFill>
                 <a:latin typeface="Yu Gothic"/>
                 <a:ea typeface="Yu Gothic"/>
@@ -10761,13 +10887,13 @@
       </p:sp>
       <p:sp>
         <p:nvSpPr>
-          <p:cNvPr id="29" name="TextBox 28"/>
-          <p:cNvSpPr txBox="1"/>
-          <p:nvPr/>
-        </p:nvSpPr>
-        <p:spPr>
-          <a:xfrm>
-            <a:off x="7280452" y="5084064"/>
+          <p:cNvPr id="29" name="process:attribute-value:3"/>
+          <p:cNvSpPr txBox="1"/>
+          <p:nvPr/>
+        </p:nvSpPr>
+        <p:spPr>
+          <a:xfrm>
+            <a:off x="7280452" y="4123944"/>
             <a:ext cx="1869033" cy="274320"/>
           </a:xfrm>
           <a:prstGeom prst="rect">
@@ -10776,11 +10902,11 @@
           <a:noFill/>
         </p:spPr>
         <p:txBody>
-          <a:bodyPr wrap="square" anchor="t" lIns="0" rIns="0" tIns="0" bIns="0">
-            <a:spAutoFit/>
-            <a:extLst>
-              <a:ext uri="{8AF73BB6-5E31-4F0F-A399-3D98F3B95FD9}">
-                <ns107:textLayout xmlns:ns107="urn:pptxdsl:text-layout:v1" role="natural"/>
+          <a:bodyPr wrap="none" anchor="t" lIns="0" rIns="0" tIns="0" bIns="0">
+            <a:spAutoFit/>
+            <a:extLst>
+              <a:ext uri="{8AF73BB6-5E31-4F0F-A399-3D98F3B95FD9}">
+                <ns121:textLayout xmlns:ns121="urn:pptxdsl:text-layout:v1" role="natural"/>
               </a:ext>
             </a:extLst>
           </a:bodyPr>
@@ -10870,7 +10996,7 @@
             <a:spAutoFit/>
             <a:extLst>
               <a:ext uri="{8AF73BB6-5E31-4F0F-A399-3D98F3B95FD9}">
-                <ns112:textLayout xmlns:ns112="urn:pptxdsl:text-layout:v1" role="natural"/>
+                <ns126:textLayout xmlns:ns126="urn:pptxdsl:text-layout:v1" role="natural"/>
               </a:ext>
             </a:extLst>
           </a:bodyPr>
@@ -10897,7 +11023,7 @@
       </p:sp>
       <p:sp>
         <p:nvSpPr>
-          <p:cNvPr id="32" name="TextBox 31"/>
+          <p:cNvPr id="32" name="process:name:4"/>
           <p:cNvSpPr txBox="1"/>
           <p:nvPr/>
         </p:nvSpPr>
@@ -10912,11 +11038,11 @@
           <a:noFill/>
         </p:spPr>
         <p:txBody>
-          <a:bodyPr wrap="square" anchor="t" lIns="0" rIns="0" tIns="0" bIns="0">
-            <a:spAutoFit/>
-            <a:extLst>
-              <a:ext uri="{8AF73BB6-5E31-4F0F-A399-3D98F3B95FD9}">
-                <ns117:textLayout xmlns:ns117="urn:pptxdsl:text-layout:v1" role="natural"/>
+          <a:bodyPr wrap="none" anchor="t" lIns="0" rIns="0" tIns="0" bIns="0">
+            <a:spAutoFit/>
+            <a:extLst>
+              <a:ext uri="{8AF73BB6-5E31-4F0F-A399-3D98F3B95FD9}">
+                <ns131:textLayout xmlns:ns131="urn:pptxdsl:text-layout:v1" role="natural"/>
               </a:ext>
             </a:extLst>
           </a:bodyPr>
@@ -10943,14 +11069,14 @@
       </p:sp>
       <p:sp>
         <p:nvSpPr>
-          <p:cNvPr id="33" name="TextBox 32"/>
+          <p:cNvPr id="33" name="process:desc:4"/>
           <p:cNvSpPr txBox="1"/>
           <p:nvPr/>
         </p:nvSpPr>
         <p:spPr>
           <a:xfrm>
             <a:off x="9442094" y="3255264"/>
-            <a:ext cx="1832457" cy="1234440"/>
+            <a:ext cx="1832457" cy="644652"/>
           </a:xfrm>
           <a:prstGeom prst="rect">
             <a:avLst/>
@@ -10958,11 +11084,11 @@
           <a:noFill/>
         </p:spPr>
         <p:txBody>
-          <a:bodyPr wrap="square" anchor="t" lIns="0" rIns="0" tIns="0" bIns="0">
-            <a:spAutoFit/>
-            <a:extLst>
-              <a:ext uri="{8AF73BB6-5E31-4F0F-A399-3D98F3B95FD9}">
-                <ns122:textLayout xmlns:ns122="urn:pptxdsl:text-layout:v1" role="body"/>
+          <a:bodyPr wrap="none" anchor="t" lIns="0" rIns="0" tIns="0" bIns="0">
+            <a:spAutoFit/>
+            <a:extLst>
+              <a:ext uri="{8AF73BB6-5E31-4F0F-A399-3D98F3B95FD9}">
+                <ns136:textLayout xmlns:ns136="urn:pptxdsl:text-layout:v1" role="body"/>
               </a:ext>
             </a:extLst>
           </a:bodyPr>
@@ -10982,20 +11108,56 @@
                 <a:ea typeface="Yu Gothic"/>
                 <a:cs typeface="Yu Gothic"/>
               </a:rPr>
-              <a:t>contentを直して再生成し、提出する。</a:t>
-            </a:r>
-          </a:p>
-        </p:txBody>
-      </p:sp>
-      <p:sp>
-        <p:nvSpPr>
-          <p:cNvPr id="34" name="TextBox 33"/>
-          <p:cNvSpPr txBox="1"/>
-          <p:nvPr/>
-        </p:nvSpPr>
-        <p:spPr>
-          <a:xfrm>
-            <a:off x="9423806" y="4818888"/>
+              <a:t>contentを直して</a:t>
+            </a:r>
+          </a:p>
+          <a:p>
+            <a:pPr algn="ctr">
+              <a:lnSpc>
+                <a:spcPct val="120000"/>
+              </a:lnSpc>
+            </a:pPr>
+            <a:r>
+              <a:rPr sz="1350" b="0" lang="ja-JP">
+                <a:solidFill>
+                  <a:srgbClr val="202729"/>
+                </a:solidFill>
+                <a:latin typeface="Yu Gothic"/>
+                <a:ea typeface="Yu Gothic"/>
+                <a:cs typeface="Yu Gothic"/>
+              </a:rPr>
+              <a:t>再生成し、</a:t>
+            </a:r>
+          </a:p>
+          <a:p>
+            <a:pPr algn="ctr">
+              <a:lnSpc>
+                <a:spcPct val="120000"/>
+              </a:lnSpc>
+            </a:pPr>
+            <a:r>
+              <a:rPr sz="1350" b="0" lang="ja-JP">
+                <a:solidFill>
+                  <a:srgbClr val="202729"/>
+                </a:solidFill>
+                <a:latin typeface="Yu Gothic"/>
+                <a:ea typeface="Yu Gothic"/>
+                <a:cs typeface="Yu Gothic"/>
+              </a:rPr>
+              <a:t>提出する。</a:t>
+            </a:r>
+          </a:p>
+        </p:txBody>
+      </p:sp>
+      <p:sp>
+        <p:nvSpPr>
+          <p:cNvPr id="34" name="process:attribute-label:4"/>
+          <p:cNvSpPr txBox="1"/>
+          <p:nvPr/>
+        </p:nvSpPr>
+        <p:spPr>
+          <a:xfrm>
+            <a:off x="9423806" y="4082796"/>
             <a:ext cx="1869033" cy="201168"/>
           </a:xfrm>
           <a:prstGeom prst="rect">
@@ -11004,11 +11166,11 @@
           <a:noFill/>
         </p:spPr>
         <p:txBody>
-          <a:bodyPr wrap="square" anchor="t" lIns="0" rIns="0" tIns="0" bIns="0">
-            <a:spAutoFit/>
-            <a:extLst>
-              <a:ext uri="{8AF73BB6-5E31-4F0F-A399-3D98F3B95FD9}">
-                <ns127:textLayout xmlns:ns127="urn:pptxdsl:text-layout:v1" role="natural"/>
+          <a:bodyPr wrap="none" anchor="t" lIns="0" rIns="0" tIns="0" bIns="0">
+            <a:spAutoFit/>
+            <a:extLst>
+              <a:ext uri="{8AF73BB6-5E31-4F0F-A399-3D98F3B95FD9}">
+                <ns145:textLayout xmlns:ns145="urn:pptxdsl:text-layout:v1" role="natural"/>
               </a:ext>
             </a:extLst>
           </a:bodyPr>
@@ -11020,9 +11182,9 @@
               </a:lnSpc>
             </a:pPr>
             <a:r>
-              <a:rPr sz="950" b="1" lang="ja-JP">
-                <a:solidFill>
-                  <a:srgbClr val="666E70"/>
+              <a:rPr sz="1050" b="1" lang="ja-JP">
+                <a:solidFill>
+                  <a:srgbClr val="202729"/>
                 </a:solidFill>
                 <a:latin typeface="Yu Gothic"/>
                 <a:ea typeface="Yu Gothic"/>
@@ -11035,13 +11197,13 @@
       </p:sp>
       <p:sp>
         <p:nvSpPr>
-          <p:cNvPr id="35" name="TextBox 34"/>
-          <p:cNvSpPr txBox="1"/>
-          <p:nvPr/>
-        </p:nvSpPr>
-        <p:spPr>
-          <a:xfrm>
-            <a:off x="9423806" y="5084064"/>
+          <p:cNvPr id="35" name="process:attribute-value:4"/>
+          <p:cNvSpPr txBox="1"/>
+          <p:nvPr/>
+        </p:nvSpPr>
+        <p:spPr>
+          <a:xfrm>
+            <a:off x="9423806" y="4329683"/>
             <a:ext cx="1869033" cy="274320"/>
           </a:xfrm>
           <a:prstGeom prst="rect">
@@ -11050,11 +11212,11 @@
           <a:noFill/>
         </p:spPr>
         <p:txBody>
-          <a:bodyPr wrap="square" anchor="t" lIns="0" rIns="0" tIns="0" bIns="0">
-            <a:spAutoFit/>
-            <a:extLst>
-              <a:ext uri="{8AF73BB6-5E31-4F0F-A399-3D98F3B95FD9}">
-                <ns132:textLayout xmlns:ns132="urn:pptxdsl:text-layout:v1" role="natural"/>
+          <a:bodyPr wrap="none" anchor="t" lIns="0" rIns="0" tIns="0" bIns="0">
+            <a:spAutoFit/>
+            <a:extLst>
+              <a:ext uri="{8AF73BB6-5E31-4F0F-A399-3D98F3B95FD9}">
+                <ns150:textLayout xmlns:ns150="urn:pptxdsl:text-layout:v1" role="natural"/>
               </a:ext>
             </a:extLst>
           </a:bodyPr>
@@ -11144,7 +11306,7 @@
             <a:spAutoFit/>
             <a:extLst>
               <a:ext uri="{8AF73BB6-5E31-4F0F-A399-3D98F3B95FD9}">
-                <ns137:textLayout xmlns:ns137="urn:pptxdsl:text-layout:v1" role="body"/>
+                <ns155:textLayout xmlns:ns155="urn:pptxdsl:text-layout:v1" role="body"/>
               </a:ext>
             </a:extLst>
           </a:bodyPr>
@@ -11190,7 +11352,7 @@
             <a:spAutoFit/>
             <a:extLst>
               <a:ext uri="{8AF73BB6-5E31-4F0F-A399-3D98F3B95FD9}">
-                <ns142:textLayout xmlns:ns142="urn:pptxdsl:text-layout:v1" role="body"/>
+                <ns160:textLayout xmlns:ns160="urn:pptxdsl:text-layout:v1" role="body"/>
               </a:ext>
             </a:extLst>
           </a:bodyPr>
@@ -11388,8 +11550,8 @@
         </p:nvCxnSpPr>
         <p:spPr>
           <a:xfrm>
-            <a:off x="2994660" y="2517343"/>
-            <a:ext cx="512064" cy="0"/>
+            <a:off x="2761487" y="2517343"/>
+            <a:ext cx="822961" cy="0"/>
           </a:xfrm>
           <a:prstGeom prst="line">
             <a:avLst/>
@@ -11425,8 +11587,8 @@
         </p:nvCxnSpPr>
         <p:spPr>
           <a:xfrm>
-            <a:off x="5843016" y="2517343"/>
-            <a:ext cx="512064" cy="0"/>
+            <a:off x="5687568" y="2517343"/>
+            <a:ext cx="822959" cy="0"/>
           </a:xfrm>
           <a:prstGeom prst="line">
             <a:avLst/>
@@ -11462,8 +11624,8 @@
         </p:nvCxnSpPr>
         <p:spPr>
           <a:xfrm>
-            <a:off x="8691372" y="2517343"/>
-            <a:ext cx="512064" cy="0"/>
+            <a:off x="8613647" y="2517343"/>
+            <a:ext cx="822961" cy="0"/>
           </a:xfrm>
           <a:prstGeom prst="line">
             <a:avLst/>
@@ -11499,8 +11661,8 @@
         </p:nvCxnSpPr>
         <p:spPr>
           <a:xfrm>
-            <a:off x="8691372" y="2517343"/>
-            <a:ext cx="256032" cy="0"/>
+            <a:off x="8613647" y="2517343"/>
+            <a:ext cx="411481" cy="0"/>
           </a:xfrm>
           <a:prstGeom prst="line">
             <a:avLst/>
@@ -11535,7 +11697,7 @@
         </p:nvCxnSpPr>
         <p:spPr>
           <a:xfrm>
-            <a:off x="8947404" y="2517343"/>
+            <a:off x="9025128" y="2517343"/>
             <a:ext cx="0" cy="1316736"/>
           </a:xfrm>
           <a:prstGeom prst="line">
@@ -11571,8 +11733,8 @@
         </p:nvCxnSpPr>
         <p:spPr>
           <a:xfrm>
-            <a:off x="8947404" y="3834079"/>
-            <a:ext cx="256032" cy="0"/>
+            <a:off x="9025128" y="3834079"/>
+            <a:ext cx="411480" cy="0"/>
           </a:xfrm>
           <a:prstGeom prst="line">
             <a:avLst/>
@@ -11608,7 +11770,7 @@
         </p:nvCxnSpPr>
         <p:spPr>
           <a:xfrm>
-            <a:off x="10371582" y="4327855"/>
+            <a:off x="10488168" y="4327855"/>
             <a:ext cx="0" cy="384048"/>
           </a:xfrm>
           <a:prstGeom prst="line">
@@ -11645,8 +11807,8 @@
         </p:nvCxnSpPr>
         <p:spPr>
           <a:xfrm flipH="1">
-            <a:off x="4674870" y="4711903"/>
-            <a:ext cx="5696712" cy="0"/>
+            <a:off x="4636008" y="4711903"/>
+            <a:ext cx="5852160" cy="0"/>
           </a:xfrm>
           <a:prstGeom prst="line">
             <a:avLst/>
@@ -11682,7 +11844,7 @@
         </p:nvCxnSpPr>
         <p:spPr>
           <a:xfrm flipV="1">
-            <a:off x="4674870" y="3011119"/>
+            <a:off x="4636008" y="3011119"/>
             <a:ext cx="0" cy="1700784"/>
           </a:xfrm>
           <a:prstGeom prst="line">
@@ -11721,7 +11883,7 @@
         <p:spPr>
           <a:xfrm>
             <a:off x="658368" y="2023567"/>
-            <a:ext cx="2336292" cy="987552"/>
+            <a:ext cx="2103120" cy="987552"/>
           </a:xfrm>
           <a:prstGeom prst="rect">
             <a:avLst/>
@@ -11767,7 +11929,7 @@
         <p:spPr>
           <a:xfrm>
             <a:off x="786384" y="2142439"/>
-            <a:ext cx="2080260" cy="292608"/>
+            <a:ext cx="1847087" cy="292608"/>
           </a:xfrm>
           <a:prstGeom prst="rect">
             <a:avLst/>
@@ -11813,7 +11975,7 @@
         <p:spPr>
           <a:xfrm>
             <a:off x="795528" y="2480767"/>
-            <a:ext cx="2061972" cy="310896"/>
+            <a:ext cx="1828799" cy="310896"/>
           </a:xfrm>
           <a:prstGeom prst="rect">
             <a:avLst/>
@@ -11859,7 +12021,7 @@
         <p:spPr>
           <a:xfrm>
             <a:off x="795528" y="2764231"/>
-            <a:ext cx="2061972" cy="201168"/>
+            <a:ext cx="1828799" cy="201168"/>
           </a:xfrm>
           <a:prstGeom prst="rect">
             <a:avLst/>
@@ -11904,8 +12066,8 @@
         </p:nvSpPr>
         <p:spPr>
           <a:xfrm>
-            <a:off x="3506724" y="2023567"/>
-            <a:ext cx="2336292" cy="987552"/>
+            <a:off x="3584448" y="2023567"/>
+            <a:ext cx="2103120" cy="987552"/>
           </a:xfrm>
           <a:prstGeom prst="rect">
             <a:avLst/>
@@ -11950,8 +12112,8 @@
         </p:nvSpPr>
         <p:spPr>
           <a:xfrm>
-            <a:off x="3634740" y="2142439"/>
-            <a:ext cx="2080260" cy="292608"/>
+            <a:off x="3712463" y="2142439"/>
+            <a:ext cx="1847087" cy="292608"/>
           </a:xfrm>
           <a:prstGeom prst="rect">
             <a:avLst/>
@@ -11996,8 +12158,8 @@
         </p:nvSpPr>
         <p:spPr>
           <a:xfrm>
-            <a:off x="3643884" y="2480767"/>
-            <a:ext cx="2061972" cy="310896"/>
+            <a:off x="3721608" y="2480767"/>
+            <a:ext cx="1828799" cy="310896"/>
           </a:xfrm>
           <a:prstGeom prst="rect">
             <a:avLst/>
@@ -12042,8 +12204,8 @@
         </p:nvSpPr>
         <p:spPr>
           <a:xfrm>
-            <a:off x="3643884" y="2764231"/>
-            <a:ext cx="2061972" cy="201168"/>
+            <a:off x="3721608" y="2764231"/>
+            <a:ext cx="1828799" cy="201168"/>
           </a:xfrm>
           <a:prstGeom prst="rect">
             <a:avLst/>
@@ -12088,8 +12250,8 @@
         </p:nvSpPr>
         <p:spPr>
           <a:xfrm>
-            <a:off x="6355080" y="2023567"/>
-            <a:ext cx="2336292" cy="987552"/>
+            <a:off x="6510527" y="2023567"/>
+            <a:ext cx="2103120" cy="987552"/>
           </a:xfrm>
           <a:prstGeom prst="rect">
             <a:avLst/>
@@ -12134,8 +12296,8 @@
         </p:nvSpPr>
         <p:spPr>
           <a:xfrm>
-            <a:off x="6483096" y="2142439"/>
-            <a:ext cx="2080260" cy="292608"/>
+            <a:off x="6638543" y="2142439"/>
+            <a:ext cx="1847087" cy="292608"/>
           </a:xfrm>
           <a:prstGeom prst="rect">
             <a:avLst/>
@@ -12180,8 +12342,8 @@
         </p:nvSpPr>
         <p:spPr>
           <a:xfrm>
-            <a:off x="6492240" y="2480767"/>
-            <a:ext cx="2061972" cy="310896"/>
+            <a:off x="6647688" y="2480767"/>
+            <a:ext cx="1828799" cy="310896"/>
           </a:xfrm>
           <a:prstGeom prst="rect">
             <a:avLst/>
@@ -12226,8 +12388,8 @@
         </p:nvSpPr>
         <p:spPr>
           <a:xfrm>
-            <a:off x="6492240" y="2764231"/>
-            <a:ext cx="2061972" cy="201168"/>
+            <a:off x="6647688" y="2764231"/>
+            <a:ext cx="1828799" cy="201168"/>
           </a:xfrm>
           <a:prstGeom prst="rect">
             <a:avLst/>
@@ -12272,8 +12434,8 @@
         </p:nvSpPr>
         <p:spPr>
           <a:xfrm>
-            <a:off x="9203436" y="2023567"/>
-            <a:ext cx="2336292" cy="987552"/>
+            <a:off x="9436608" y="2023567"/>
+            <a:ext cx="2103120" cy="987552"/>
           </a:xfrm>
           <a:prstGeom prst="rect">
             <a:avLst/>
@@ -12318,8 +12480,8 @@
         </p:nvSpPr>
         <p:spPr>
           <a:xfrm>
-            <a:off x="9331452" y="2142439"/>
-            <a:ext cx="2080260" cy="292608"/>
+            <a:off x="9564624" y="2142439"/>
+            <a:ext cx="1847087" cy="292608"/>
           </a:xfrm>
           <a:prstGeom prst="rect">
             <a:avLst/>
@@ -12364,8 +12526,8 @@
         </p:nvSpPr>
         <p:spPr>
           <a:xfrm>
-            <a:off x="9340596" y="2480767"/>
-            <a:ext cx="2061972" cy="310896"/>
+            <a:off x="9573768" y="2480767"/>
+            <a:ext cx="1828799" cy="310896"/>
           </a:xfrm>
           <a:prstGeom prst="rect">
             <a:avLst/>
@@ -12410,8 +12572,8 @@
         </p:nvSpPr>
         <p:spPr>
           <a:xfrm>
-            <a:off x="9340596" y="2764231"/>
-            <a:ext cx="2061972" cy="201168"/>
+            <a:off x="9573768" y="2764231"/>
+            <a:ext cx="1828799" cy="201168"/>
           </a:xfrm>
           <a:prstGeom prst="rect">
             <a:avLst/>
@@ -12456,8 +12618,8 @@
         </p:nvSpPr>
         <p:spPr>
           <a:xfrm>
-            <a:off x="9203436" y="3340303"/>
-            <a:ext cx="2336292" cy="987552"/>
+            <a:off x="9436608" y="3340303"/>
+            <a:ext cx="2103120" cy="987552"/>
           </a:xfrm>
           <a:prstGeom prst="rect">
             <a:avLst/>
@@ -12502,8 +12664,8 @@
         </p:nvSpPr>
         <p:spPr>
           <a:xfrm>
-            <a:off x="9331452" y="3459175"/>
-            <a:ext cx="2080260" cy="292608"/>
+            <a:off x="9564624" y="3459175"/>
+            <a:ext cx="1847087" cy="292608"/>
           </a:xfrm>
           <a:prstGeom prst="rect">
             <a:avLst/>
@@ -12548,8 +12710,8 @@
         </p:nvSpPr>
         <p:spPr>
           <a:xfrm>
-            <a:off x="9340596" y="3797503"/>
-            <a:ext cx="2061972" cy="310896"/>
+            <a:off x="9573768" y="3797503"/>
+            <a:ext cx="1828799" cy="310896"/>
           </a:xfrm>
           <a:prstGeom prst="rect">
             <a:avLst/>
@@ -12594,8 +12756,8 @@
         </p:nvSpPr>
         <p:spPr>
           <a:xfrm>
-            <a:off x="9340596" y="4080967"/>
-            <a:ext cx="2061972" cy="201168"/>
+            <a:off x="9573768" y="4080967"/>
+            <a:ext cx="1828799" cy="201168"/>
           </a:xfrm>
           <a:prstGeom prst="rect">
             <a:avLst/>
@@ -12634,24 +12796,22 @@
       </p:sp>
       <p:sp>
         <p:nvSpPr>
-          <p:cNvPr id="34" name="TextBox 33"/>
-          <p:cNvSpPr txBox="1"/>
-          <p:nvPr/>
-        </p:nvSpPr>
-        <p:spPr>
-          <a:xfrm>
-            <a:off x="8788527" y="2439682"/>
-            <a:ext cx="317754" cy="155321"/>
-          </a:xfrm>
-          <a:prstGeom prst="rect">
-            <a:avLst/>
-          </a:prstGeom>
-          <a:solidFill>
-            <a:srgbClr val="F7F5EF"/>
-          </a:solidFill>
-        </p:spPr>
-        <p:txBody>
-          <a:bodyPr wrap="square" anchor="ctr" lIns="0" rIns="0" tIns="0" bIns="0">
+          <p:cNvPr id="34" name="process:condition:2"/>
+          <p:cNvSpPr txBox="1"/>
+          <p:nvPr/>
+        </p:nvSpPr>
+        <p:spPr>
+          <a:xfrm>
+            <a:off x="8871965" y="2247404"/>
+            <a:ext cx="306324" cy="174117"/>
+          </a:xfrm>
+          <a:prstGeom prst="rect">
+            <a:avLst/>
+          </a:prstGeom>
+          <a:noFill/>
+        </p:spPr>
+        <p:txBody>
+          <a:bodyPr wrap="none" anchor="t" lIns="0" rIns="0" tIns="0" bIns="0">
             <a:spAutoFit/>
             <a:extLst>
               <a:ext uri="{8AF73BB6-5E31-4F0F-A399-3D98F3B95FD9}">
@@ -12663,11 +12823,11 @@
           <a:p>
             <a:pPr algn="ctr">
               <a:lnSpc>
-                <a:spcPct val="130000"/>
-              </a:lnSpc>
-            </a:pPr>
-            <a:r>
-              <a:rPr sz="850" b="0" lang="ja-JP">
+                <a:spcPct val="110000"/>
+              </a:lnSpc>
+            </a:pPr>
+            <a:r>
+              <a:rPr sz="1050" b="0" lang="ja-JP">
                 <a:solidFill>
                   <a:srgbClr val="202729"/>
                 </a:solidFill>
@@ -12682,24 +12842,22 @@
       </p:sp>
       <p:sp>
         <p:nvSpPr>
-          <p:cNvPr id="35" name="TextBox 34"/>
-          <p:cNvSpPr txBox="1"/>
-          <p:nvPr/>
-        </p:nvSpPr>
-        <p:spPr>
-          <a:xfrm>
-            <a:off x="8731948" y="3756418"/>
-            <a:ext cx="430911" cy="155321"/>
-          </a:xfrm>
-          <a:prstGeom prst="rect">
-            <a:avLst/>
-          </a:prstGeom>
-          <a:solidFill>
-            <a:srgbClr val="F7F5EF"/>
-          </a:solidFill>
-        </p:spPr>
-        <p:txBody>
-          <a:bodyPr wrap="square" anchor="ctr" lIns="0" rIns="0" tIns="0" bIns="0">
+          <p:cNvPr id="35" name="process:condition:3"/>
+          <p:cNvSpPr txBox="1"/>
+          <p:nvPr/>
+        </p:nvSpPr>
+        <p:spPr>
+          <a:xfrm>
+            <a:off x="8799957" y="3929900"/>
+            <a:ext cx="450342" cy="174117"/>
+          </a:xfrm>
+          <a:prstGeom prst="rect">
+            <a:avLst/>
+          </a:prstGeom>
+          <a:noFill/>
+        </p:spPr>
+        <p:txBody>
+          <a:bodyPr wrap="none" anchor="t" lIns="0" rIns="0" tIns="0" bIns="0">
             <a:spAutoFit/>
             <a:extLst>
               <a:ext uri="{8AF73BB6-5E31-4F0F-A399-3D98F3B95FD9}">
@@ -12711,11 +12869,11 @@
           <a:p>
             <a:pPr algn="ctr">
               <a:lnSpc>
-                <a:spcPct val="130000"/>
-              </a:lnSpc>
-            </a:pPr>
-            <a:r>
-              <a:rPr sz="850" b="0" lang="ja-JP">
+                <a:spcPct val="110000"/>
+              </a:lnSpc>
+            </a:pPr>
+            <a:r>
+              <a:rPr sz="1050" b="0" lang="ja-JP">
                 <a:solidFill>
                   <a:srgbClr val="202729"/>
                 </a:solidFill>
@@ -12730,24 +12888,22 @@
       </p:sp>
       <p:sp>
         <p:nvSpPr>
-          <p:cNvPr id="36" name="TextBox 35"/>
-          <p:cNvSpPr txBox="1"/>
-          <p:nvPr/>
-        </p:nvSpPr>
-        <p:spPr>
-          <a:xfrm>
-            <a:off x="7307770" y="4634242"/>
-            <a:ext cx="430911" cy="155321"/>
-          </a:xfrm>
-          <a:prstGeom prst="rect">
-            <a:avLst/>
-          </a:prstGeom>
-          <a:solidFill>
-            <a:srgbClr val="F7F5EF"/>
-          </a:solidFill>
-        </p:spPr>
-        <p:txBody>
-          <a:bodyPr wrap="square" anchor="ctr" lIns="0" rIns="0" tIns="0" bIns="0">
+          <p:cNvPr id="36" name="process:condition:4"/>
+          <p:cNvSpPr txBox="1"/>
+          <p:nvPr/>
+        </p:nvSpPr>
+        <p:spPr>
+          <a:xfrm>
+            <a:off x="7336917" y="4807724"/>
+            <a:ext cx="450342" cy="174117"/>
+          </a:xfrm>
+          <a:prstGeom prst="rect">
+            <a:avLst/>
+          </a:prstGeom>
+          <a:noFill/>
+        </p:spPr>
+        <p:txBody>
+          <a:bodyPr wrap="none" anchor="t" lIns="0" rIns="0" tIns="0" bIns="0">
             <a:spAutoFit/>
             <a:extLst>
               <a:ext uri="{8AF73BB6-5E31-4F0F-A399-3D98F3B95FD9}">
@@ -12759,11 +12915,11 @@
           <a:p>
             <a:pPr algn="ctr">
               <a:lnSpc>
-                <a:spcPct val="130000"/>
-              </a:lnSpc>
-            </a:pPr>
-            <a:r>
-              <a:rPr sz="850" b="0" lang="ja-JP">
+                <a:spcPct val="110000"/>
+              </a:lnSpc>
+            </a:pPr>
+            <a:r>
+              <a:rPr sz="1050" b="0" lang="ja-JP">
                 <a:solidFill>
                   <a:srgbClr val="202729"/>
                 </a:solidFill>

--- a/examples/gallery/pattern_gallery.pptx
+++ b/examples/gallery/pattern_gallery.pptx
@@ -13310,7 +13310,7 @@
               </a:lnSpc>
             </a:pPr>
             <a:r>
-              <a:rPr sz="1000" b="1" lang="ja-JP">
+              <a:rPr sz="1100" b="1" lang="ja-JP">
                 <a:solidFill>
                   <a:srgbClr val="FFFFFC"/>
                 </a:solidFill>
@@ -13369,7 +13369,7 @@
       </p:sp>
       <p:sp>
         <p:nvSpPr>
-          <p:cNvPr id="8" name="TextBox 7"/>
+          <p:cNvPr id="8" name="roadmap:period:0"/>
           <p:cNvSpPr txBox="1"/>
           <p:nvPr/>
         </p:nvSpPr>
@@ -13400,7 +13400,7 @@
               </a:lnSpc>
             </a:pPr>
             <a:r>
-              <a:rPr sz="1000" b="1" lang="ja-JP">
+              <a:rPr sz="1100" b="1" lang="ja-JP">
                 <a:solidFill>
                   <a:srgbClr val="FFFFFC"/>
                 </a:solidFill>
@@ -13415,7 +13415,7 @@
       </p:sp>
       <p:sp>
         <p:nvSpPr>
-          <p:cNvPr id="9" name="TextBox 8"/>
+          <p:cNvPr id="9" name="roadmap:period:1"/>
           <p:cNvSpPr txBox="1"/>
           <p:nvPr/>
         </p:nvSpPr>
@@ -13446,7 +13446,7 @@
               </a:lnSpc>
             </a:pPr>
             <a:r>
-              <a:rPr sz="1000" b="1" lang="ja-JP">
+              <a:rPr sz="1100" b="1" lang="ja-JP">
                 <a:solidFill>
                   <a:srgbClr val="FFFFFC"/>
                 </a:solidFill>
@@ -13461,7 +13461,7 @@
       </p:sp>
       <p:sp>
         <p:nvSpPr>
-          <p:cNvPr id="10" name="TextBox 9"/>
+          <p:cNvPr id="10" name="roadmap:period:2"/>
           <p:cNvSpPr txBox="1"/>
           <p:nvPr/>
         </p:nvSpPr>
@@ -13492,7 +13492,7 @@
               </a:lnSpc>
             </a:pPr>
             <a:r>
-              <a:rPr sz="1000" b="1" lang="ja-JP">
+              <a:rPr sz="1100" b="1" lang="ja-JP">
                 <a:solidFill>
                   <a:srgbClr val="FFFFFC"/>
                 </a:solidFill>
@@ -13507,7 +13507,7 @@
       </p:sp>
       <p:sp>
         <p:nvSpPr>
-          <p:cNvPr id="11" name="TextBox 10"/>
+          <p:cNvPr id="11" name="roadmap:period:3"/>
           <p:cNvSpPr txBox="1"/>
           <p:nvPr/>
         </p:nvSpPr>
@@ -13538,7 +13538,7 @@
               </a:lnSpc>
             </a:pPr>
             <a:r>
-              <a:rPr sz="1000" b="1" lang="ja-JP">
+              <a:rPr sz="1100" b="1" lang="ja-JP">
                 <a:solidFill>
                   <a:srgbClr val="FFFFFC"/>
                 </a:solidFill>
@@ -13553,7 +13553,7 @@
       </p:sp>
       <p:sp>
         <p:nvSpPr>
-          <p:cNvPr id="12" name="TextBox 11"/>
+          <p:cNvPr id="12" name="roadmap:period:4"/>
           <p:cNvSpPr txBox="1"/>
           <p:nvPr/>
         </p:nvSpPr>
@@ -13584,7 +13584,7 @@
               </a:lnSpc>
             </a:pPr>
             <a:r>
-              <a:rPr sz="1000" b="1" lang="ja-JP">
+              <a:rPr sz="1100" b="1" lang="ja-JP">
                 <a:solidFill>
                   <a:srgbClr val="FFFFFC"/>
                 </a:solidFill>
@@ -13599,7 +13599,7 @@
       </p:sp>
       <p:sp>
         <p:nvSpPr>
-          <p:cNvPr id="13" name="TextBox 12"/>
+          <p:cNvPr id="13" name="roadmap:period:5"/>
           <p:cNvSpPr txBox="1"/>
           <p:nvPr/>
         </p:nvSpPr>
@@ -13630,7 +13630,7 @@
               </a:lnSpc>
             </a:pPr>
             <a:r>
-              <a:rPr sz="1000" b="1" lang="ja-JP">
+              <a:rPr sz="1100" b="1" lang="ja-JP">
                 <a:solidFill>
                   <a:srgbClr val="FFFFFC"/>
                 </a:solidFill>
@@ -13645,7 +13645,7 @@
       </p:sp>
       <p:sp>
         <p:nvSpPr>
-          <p:cNvPr id="14" name="TextBox 13"/>
+          <p:cNvPr id="14" name="roadmap:period:6"/>
           <p:cNvSpPr txBox="1"/>
           <p:nvPr/>
         </p:nvSpPr>
@@ -13676,7 +13676,7 @@
               </a:lnSpc>
             </a:pPr>
             <a:r>
-              <a:rPr sz="1000" b="1" lang="ja-JP">
+              <a:rPr sz="1100" b="1" lang="ja-JP">
                 <a:solidFill>
                   <a:srgbClr val="FFFFFC"/>
                 </a:solidFill>
@@ -13691,7 +13691,7 @@
       </p:sp>
       <p:sp>
         <p:nvSpPr>
-          <p:cNvPr id="15" name="TextBox 14"/>
+          <p:cNvPr id="15" name="roadmap:period:7"/>
           <p:cNvSpPr txBox="1"/>
           <p:nvPr/>
         </p:nvSpPr>
@@ -13722,7 +13722,7 @@
               </a:lnSpc>
             </a:pPr>
             <a:r>
-              <a:rPr sz="1000" b="1" lang="ja-JP">
+              <a:rPr sz="1100" b="1" lang="ja-JP">
                 <a:solidFill>
                   <a:srgbClr val="FFFFFC"/>
                 </a:solidFill>
@@ -13737,7 +13737,7 @@
       </p:sp>
       <p:sp>
         <p:nvSpPr>
-          <p:cNvPr id="16" name="TextBox 15"/>
+          <p:cNvPr id="16" name="roadmap:period:8"/>
           <p:cNvSpPr txBox="1"/>
           <p:nvPr/>
         </p:nvSpPr>
@@ -13768,7 +13768,7 @@
               </a:lnSpc>
             </a:pPr>
             <a:r>
-              <a:rPr sz="1000" b="1" lang="ja-JP">
+              <a:rPr sz="1100" b="1" lang="ja-JP">
                 <a:solidFill>
                   <a:srgbClr val="FFFFFC"/>
                 </a:solidFill>
@@ -13783,7 +13783,7 @@
       </p:sp>
       <p:sp>
         <p:nvSpPr>
-          <p:cNvPr id="17" name="TextBox 16"/>
+          <p:cNvPr id="17" name="roadmap:period:9"/>
           <p:cNvSpPr txBox="1"/>
           <p:nvPr/>
         </p:nvSpPr>
@@ -13814,7 +13814,7 @@
               </a:lnSpc>
             </a:pPr>
             <a:r>
-              <a:rPr sz="1000" b="1" lang="ja-JP">
+              <a:rPr sz="1100" b="1" lang="ja-JP">
                 <a:solidFill>
                   <a:srgbClr val="FFFFFC"/>
                 </a:solidFill>
@@ -13829,7 +13829,7 @@
       </p:sp>
       <p:sp>
         <p:nvSpPr>
-          <p:cNvPr id="18" name="TextBox 17"/>
+          <p:cNvPr id="18" name="roadmap:period:10"/>
           <p:cNvSpPr txBox="1"/>
           <p:nvPr/>
         </p:nvSpPr>
@@ -13860,7 +13860,7 @@
               </a:lnSpc>
             </a:pPr>
             <a:r>
-              <a:rPr sz="1000" b="1" lang="ja-JP">
+              <a:rPr sz="1100" b="1" lang="ja-JP">
                 <a:solidFill>
                   <a:srgbClr val="FFFFFC"/>
                 </a:solidFill>
@@ -13875,7 +13875,7 @@
       </p:sp>
       <p:sp>
         <p:nvSpPr>
-          <p:cNvPr id="19" name="TextBox 18"/>
+          <p:cNvPr id="19" name="roadmap:period:11"/>
           <p:cNvSpPr txBox="1"/>
           <p:nvPr/>
         </p:nvSpPr>
@@ -13906,7 +13906,7 @@
               </a:lnSpc>
             </a:pPr>
             <a:r>
-              <a:rPr sz="1000" b="1" lang="ja-JP">
+              <a:rPr sz="1100" b="1" lang="ja-JP">
                 <a:solidFill>
                   <a:srgbClr val="FFFFFC"/>
                 </a:solidFill>
@@ -14141,7 +14141,7 @@
       </p:sp>
       <p:cxnSp>
         <p:nvCxnSpPr>
-          <p:cNvPr id="25" name="Connector 24"/>
+          <p:cNvPr id="25" name="roadmap:grid"/>
           <p:cNvCxnSpPr/>
           <p:nvPr/>
         </p:nvCxnSpPr>
@@ -14177,7 +14177,7 @@
       </p:cxnSp>
       <p:cxnSp>
         <p:nvCxnSpPr>
-          <p:cNvPr id="26" name="Connector 25"/>
+          <p:cNvPr id="26" name="roadmap:grid"/>
           <p:cNvCxnSpPr/>
           <p:nvPr/>
         </p:nvCxnSpPr>
@@ -14213,7 +14213,7 @@
       </p:cxnSp>
       <p:cxnSp>
         <p:nvCxnSpPr>
-          <p:cNvPr id="27" name="Connector 26"/>
+          <p:cNvPr id="27" name="roadmap:grid"/>
           <p:cNvCxnSpPr/>
           <p:nvPr/>
         </p:nvCxnSpPr>
@@ -14249,7 +14249,7 @@
       </p:cxnSp>
       <p:cxnSp>
         <p:nvCxnSpPr>
-          <p:cNvPr id="28" name="Connector 27"/>
+          <p:cNvPr id="28" name="roadmap:grid"/>
           <p:cNvCxnSpPr/>
           <p:nvPr/>
         </p:nvCxnSpPr>
@@ -14285,7 +14285,7 @@
       </p:cxnSp>
       <p:cxnSp>
         <p:nvCxnSpPr>
-          <p:cNvPr id="29" name="Connector 28"/>
+          <p:cNvPr id="29" name="roadmap:grid"/>
           <p:cNvCxnSpPr/>
           <p:nvPr/>
         </p:nvCxnSpPr>
@@ -14321,7 +14321,7 @@
       </p:cxnSp>
       <p:cxnSp>
         <p:nvCxnSpPr>
-          <p:cNvPr id="30" name="Connector 29"/>
+          <p:cNvPr id="30" name="roadmap:grid"/>
           <p:cNvCxnSpPr/>
           <p:nvPr/>
         </p:nvCxnSpPr>
@@ -14357,7 +14357,7 @@
       </p:cxnSp>
       <p:cxnSp>
         <p:nvCxnSpPr>
-          <p:cNvPr id="31" name="Connector 30"/>
+          <p:cNvPr id="31" name="roadmap:grid"/>
           <p:cNvCxnSpPr/>
           <p:nvPr/>
         </p:nvCxnSpPr>
@@ -14393,7 +14393,7 @@
       </p:cxnSp>
       <p:cxnSp>
         <p:nvCxnSpPr>
-          <p:cNvPr id="32" name="Connector 31"/>
+          <p:cNvPr id="32" name="roadmap:grid"/>
           <p:cNvCxnSpPr/>
           <p:nvPr/>
         </p:nvCxnSpPr>
@@ -14429,7 +14429,7 @@
       </p:cxnSp>
       <p:cxnSp>
         <p:nvCxnSpPr>
-          <p:cNvPr id="33" name="Connector 32"/>
+          <p:cNvPr id="33" name="roadmap:grid"/>
           <p:cNvCxnSpPr/>
           <p:nvPr/>
         </p:nvCxnSpPr>
@@ -14465,7 +14465,7 @@
       </p:cxnSp>
       <p:cxnSp>
         <p:nvCxnSpPr>
-          <p:cNvPr id="34" name="Connector 33"/>
+          <p:cNvPr id="34" name="roadmap:grid"/>
           <p:cNvCxnSpPr/>
           <p:nvPr/>
         </p:nvCxnSpPr>
@@ -14501,7 +14501,7 @@
       </p:cxnSp>
       <p:cxnSp>
         <p:nvCxnSpPr>
-          <p:cNvPr id="35" name="Connector 34"/>
+          <p:cNvPr id="35" name="roadmap:grid"/>
           <p:cNvCxnSpPr/>
           <p:nvPr/>
         </p:nvCxnSpPr>
@@ -14537,7 +14537,7 @@
       </p:cxnSp>
       <p:cxnSp>
         <p:nvCxnSpPr>
-          <p:cNvPr id="36" name="Connector 35"/>
+          <p:cNvPr id="36" name="roadmap:grid"/>
           <p:cNvCxnSpPr/>
           <p:nvPr/>
         </p:nvCxnSpPr>
@@ -14573,7 +14573,7 @@
       </p:cxnSp>
       <p:cxnSp>
         <p:nvCxnSpPr>
-          <p:cNvPr id="37" name="Connector 36"/>
+          <p:cNvPr id="37" name="roadmap:grid"/>
           <p:cNvCxnSpPr/>
           <p:nvPr/>
         </p:nvCxnSpPr>
@@ -14609,7 +14609,7 @@
       </p:cxnSp>
       <p:cxnSp>
         <p:nvCxnSpPr>
-          <p:cNvPr id="38" name="Connector 37"/>
+          <p:cNvPr id="38" name="roadmap:grid"/>
           <p:cNvCxnSpPr/>
           <p:nvPr/>
         </p:nvCxnSpPr>
@@ -14676,7 +14676,7 @@
               </a:lnSpc>
             </a:pPr>
             <a:r>
-              <a:rPr sz="1150" b="1" lang="ja-JP">
+              <a:rPr sz="1250" b="1" lang="ja-JP">
                 <a:solidFill>
                   <a:srgbClr val="0D7870"/>
                 </a:solidFill>
@@ -14691,7 +14691,7 @@
       </p:sp>
       <p:sp>
         <p:nvSpPr>
-          <p:cNvPr id="40" name="TextBox 39"/>
+          <p:cNvPr id="40" name="roadmap:track:0"/>
           <p:cNvSpPr txBox="1"/>
           <p:nvPr/>
         </p:nvSpPr>
@@ -14722,7 +14722,7 @@
               </a:lnSpc>
             </a:pPr>
             <a:r>
-              <a:rPr sz="1150" b="1" lang="ja-JP">
+              <a:rPr sz="1250" b="1" lang="ja-JP">
                 <a:solidFill>
                   <a:srgbClr val="182C43"/>
                 </a:solidFill>
@@ -14768,9 +14768,9 @@
               </a:lnSpc>
             </a:pPr>
             <a:r>
-              <a:rPr sz="900" b="0" lang="ja-JP">
-                <a:solidFill>
-                  <a:srgbClr val="666E70"/>
+              <a:rPr sz="950" b="0" lang="ja-JP">
+                <a:solidFill>
+                  <a:srgbClr val="202729"/>
                 </a:solidFill>
                 <a:latin typeface="Yu Gothic"/>
                 <a:ea typeface="Yu Gothic"/>
@@ -14783,7 +14783,7 @@
       </p:sp>
       <p:cxnSp>
         <p:nvCxnSpPr>
-          <p:cNvPr id="42" name="Connector 41"/>
+          <p:cNvPr id="42" name="roadmap:span:0:0"/>
           <p:cNvCxnSpPr/>
           <p:nvPr/>
         </p:nvCxnSpPr>
@@ -14795,7 +14795,7 @@
           <a:prstGeom prst="line">
             <a:avLst/>
           </a:prstGeom>
-          <a:ln w="17780">
+          <a:ln w="30480">
             <a:solidFill>
               <a:srgbClr val="0D7870"/>
             </a:solidFill>
@@ -14819,14 +14819,14 @@
       </p:cxnSp>
       <p:sp>
         <p:nvSpPr>
-          <p:cNvPr id="43" name="TextBox 42"/>
-          <p:cNvSpPr txBox="1"/>
-          <p:nvPr/>
-        </p:nvSpPr>
-        <p:spPr>
-          <a:xfrm>
-            <a:off x="3248406" y="2130552"/>
-            <a:ext cx="1289304" cy="246888"/>
+          <p:cNvPr id="43" name="roadmap:activity:0:0"/>
+          <p:cNvSpPr txBox="1"/>
+          <p:nvPr/>
+        </p:nvSpPr>
+        <p:spPr>
+          <a:xfrm>
+            <a:off x="3218688" y="2130552"/>
+            <a:ext cx="1348740" cy="246888"/>
           </a:xfrm>
           <a:prstGeom prst="rect">
             <a:avLst/>
@@ -14852,7 +14852,7 @@
               </a:lnSpc>
             </a:pPr>
             <a:r>
-              <a:rPr sz="900" b="0" lang="ja-JP">
+              <a:rPr sz="1000" b="0" lang="ja-JP">
                 <a:solidFill>
                   <a:srgbClr val="202729"/>
                 </a:solidFill>
@@ -14867,14 +14867,14 @@
       </p:sp>
       <p:sp>
         <p:nvSpPr>
-          <p:cNvPr id="44" name="Diamond 43"/>
+          <p:cNvPr id="44" name="roadmap:milestone:0"/>
           <p:cNvSpPr/>
           <p:nvPr/>
         </p:nvSpPr>
         <p:spPr>
           <a:xfrm>
-            <a:off x="4179951" y="2350008"/>
-            <a:ext cx="118872" cy="118872"/>
+            <a:off x="4170807" y="2340864"/>
+            <a:ext cx="137160" cy="137160"/>
           </a:xfrm>
           <a:prstGeom prst="diamond">
             <a:avLst/>
@@ -14911,7 +14911,7 @@
       </p:sp>
       <p:sp>
         <p:nvSpPr>
-          <p:cNvPr id="45" name="TextBox 44"/>
+          <p:cNvPr id="45" name="roadmap:milestone-label:0"/>
           <p:cNvSpPr txBox="1"/>
           <p:nvPr/>
         </p:nvSpPr>
@@ -14944,7 +14944,7 @@
               </a:lnSpc>
             </a:pPr>
             <a:r>
-              <a:rPr sz="850" b="0" lang="ja-JP">
+              <a:rPr sz="950" b="0" lang="ja-JP">
                 <a:solidFill>
                   <a:srgbClr val="202729"/>
                 </a:solidFill>
@@ -14959,7 +14959,7 @@
       </p:sp>
       <p:cxnSp>
         <p:nvCxnSpPr>
-          <p:cNvPr id="46" name="Connector 45"/>
+          <p:cNvPr id="46" name="roadmap:grid"/>
           <p:cNvCxnSpPr/>
           <p:nvPr/>
         </p:nvCxnSpPr>
@@ -15026,7 +15026,7 @@
               </a:lnSpc>
             </a:pPr>
             <a:r>
-              <a:rPr sz="1150" b="1" lang="ja-JP">
+              <a:rPr sz="1250" b="1" lang="ja-JP">
                 <a:solidFill>
                   <a:srgbClr val="0D7870"/>
                 </a:solidFill>
@@ -15041,7 +15041,7 @@
       </p:sp>
       <p:sp>
         <p:nvSpPr>
-          <p:cNvPr id="48" name="TextBox 47"/>
+          <p:cNvPr id="48" name="roadmap:track:1"/>
           <p:cNvSpPr txBox="1"/>
           <p:nvPr/>
         </p:nvSpPr>
@@ -15072,7 +15072,7 @@
               </a:lnSpc>
             </a:pPr>
             <a:r>
-              <a:rPr sz="1150" b="1" lang="ja-JP">
+              <a:rPr sz="1250" b="1" lang="ja-JP">
                 <a:solidFill>
                   <a:srgbClr val="182C43"/>
                 </a:solidFill>
@@ -15118,9 +15118,9 @@
               </a:lnSpc>
             </a:pPr>
             <a:r>
-              <a:rPr sz="900" b="0" lang="ja-JP">
-                <a:solidFill>
-                  <a:srgbClr val="666E70"/>
+              <a:rPr sz="950" b="0" lang="ja-JP">
+                <a:solidFill>
+                  <a:srgbClr val="202729"/>
                 </a:solidFill>
                 <a:latin typeface="Yu Gothic"/>
                 <a:ea typeface="Yu Gothic"/>
@@ -15133,7 +15133,7 @@
       </p:sp>
       <p:cxnSp>
         <p:nvCxnSpPr>
-          <p:cNvPr id="50" name="Connector 49"/>
+          <p:cNvPr id="50" name="roadmap:span:1:0"/>
           <p:cNvCxnSpPr/>
           <p:nvPr/>
         </p:nvCxnSpPr>
@@ -15145,7 +15145,7 @@
           <a:prstGeom prst="line">
             <a:avLst/>
           </a:prstGeom>
-          <a:ln w="17780">
+          <a:ln w="30480">
             <a:solidFill>
               <a:srgbClr val="0D7870"/>
             </a:solidFill>
@@ -15169,14 +15169,14 @@
       </p:cxnSp>
       <p:sp>
         <p:nvSpPr>
-          <p:cNvPr id="51" name="TextBox 50"/>
-          <p:cNvSpPr txBox="1"/>
-          <p:nvPr/>
-        </p:nvSpPr>
-        <p:spPr>
-          <a:xfrm>
-            <a:off x="4287393" y="2926080"/>
-            <a:ext cx="1289304" cy="246888"/>
+          <p:cNvPr id="51" name="roadmap:activity:1:0"/>
+          <p:cNvSpPr txBox="1"/>
+          <p:nvPr/>
+        </p:nvSpPr>
+        <p:spPr>
+          <a:xfrm>
+            <a:off x="3578733" y="2926080"/>
+            <a:ext cx="2706624" cy="246888"/>
           </a:xfrm>
           <a:prstGeom prst="rect">
             <a:avLst/>
@@ -15202,7 +15202,7 @@
               </a:lnSpc>
             </a:pPr>
             <a:r>
-              <a:rPr sz="900" b="0" lang="ja-JP">
+              <a:rPr sz="1050" b="0" lang="ja-JP">
                 <a:solidFill>
                   <a:srgbClr val="202729"/>
                 </a:solidFill>
@@ -15217,7 +15217,7 @@
       </p:sp>
       <p:cxnSp>
         <p:nvCxnSpPr>
-          <p:cNvPr id="52" name="Connector 51"/>
+          <p:cNvPr id="52" name="roadmap:grid"/>
           <p:cNvCxnSpPr/>
           <p:nvPr/>
         </p:nvCxnSpPr>
@@ -15284,7 +15284,7 @@
               </a:lnSpc>
             </a:pPr>
             <a:r>
-              <a:rPr sz="1150" b="1" lang="ja-JP">
+              <a:rPr sz="1250" b="1" lang="ja-JP">
                 <a:solidFill>
                   <a:srgbClr val="0D7870"/>
                 </a:solidFill>
@@ -15299,7 +15299,7 @@
       </p:sp>
       <p:sp>
         <p:nvSpPr>
-          <p:cNvPr id="54" name="TextBox 53"/>
+          <p:cNvPr id="54" name="roadmap:track:2"/>
           <p:cNvSpPr txBox="1"/>
           <p:nvPr/>
         </p:nvSpPr>
@@ -15330,7 +15330,7 @@
               </a:lnSpc>
             </a:pPr>
             <a:r>
-              <a:rPr sz="1150" b="1" lang="ja-JP">
+              <a:rPr sz="1250" b="1" lang="ja-JP">
                 <a:solidFill>
                   <a:srgbClr val="182C43"/>
                 </a:solidFill>
@@ -15376,9 +15376,9 @@
               </a:lnSpc>
             </a:pPr>
             <a:r>
-              <a:rPr sz="900" b="0" lang="ja-JP">
-                <a:solidFill>
-                  <a:srgbClr val="666E70"/>
+              <a:rPr sz="950" b="0" lang="ja-JP">
+                <a:solidFill>
+                  <a:srgbClr val="202729"/>
                 </a:solidFill>
                 <a:latin typeface="Yu Gothic"/>
                 <a:ea typeface="Yu Gothic"/>
@@ -15391,7 +15391,7 @@
       </p:sp>
       <p:cxnSp>
         <p:nvCxnSpPr>
-          <p:cNvPr id="56" name="Connector 55"/>
+          <p:cNvPr id="56" name="roadmap:span:2:0"/>
           <p:cNvCxnSpPr/>
           <p:nvPr/>
         </p:nvCxnSpPr>
@@ -15403,7 +15403,7 @@
           <a:prstGeom prst="line">
             <a:avLst/>
           </a:prstGeom>
-          <a:ln w="17780">
+          <a:ln w="30480">
             <a:solidFill>
               <a:srgbClr val="0D7870"/>
             </a:solidFill>
@@ -15427,14 +15427,14 @@
       </p:cxnSp>
       <p:sp>
         <p:nvSpPr>
-          <p:cNvPr id="57" name="TextBox 56"/>
-          <p:cNvSpPr txBox="1"/>
-          <p:nvPr/>
-        </p:nvSpPr>
-        <p:spPr>
-          <a:xfrm>
-            <a:off x="6019038" y="3410712"/>
-            <a:ext cx="1289304" cy="246888"/>
+          <p:cNvPr id="57" name="roadmap:activity:2:0"/>
+          <p:cNvSpPr txBox="1"/>
+          <p:nvPr/>
+        </p:nvSpPr>
+        <p:spPr>
+          <a:xfrm>
+            <a:off x="5310377" y="3410712"/>
+            <a:ext cx="2706624" cy="246888"/>
           </a:xfrm>
           <a:prstGeom prst="rect">
             <a:avLst/>
@@ -15460,7 +15460,7 @@
               </a:lnSpc>
             </a:pPr>
             <a:r>
-              <a:rPr sz="950" b="0" lang="ja-JP">
+              <a:rPr sz="1050" b="0" lang="ja-JP">
                 <a:solidFill>
                   <a:srgbClr val="202729"/>
                 </a:solidFill>
@@ -15475,14 +15475,14 @@
       </p:sp>
       <p:sp>
         <p:nvSpPr>
-          <p:cNvPr id="58" name="Diamond 57"/>
+          <p:cNvPr id="58" name="roadmap:milestone:2"/>
           <p:cNvSpPr/>
           <p:nvPr/>
         </p:nvSpPr>
         <p:spPr>
           <a:xfrm>
-            <a:off x="7643241" y="3630168"/>
-            <a:ext cx="118872" cy="118872"/>
+            <a:off x="7634097" y="3621024"/>
+            <a:ext cx="137160" cy="137160"/>
           </a:xfrm>
           <a:prstGeom prst="diamond">
             <a:avLst/>
@@ -15519,7 +15519,7 @@
       </p:sp>
       <p:sp>
         <p:nvSpPr>
-          <p:cNvPr id="59" name="TextBox 58"/>
+          <p:cNvPr id="59" name="roadmap:milestone-label:2"/>
           <p:cNvSpPr txBox="1"/>
           <p:nvPr/>
         </p:nvSpPr>
@@ -15552,7 +15552,7 @@
               </a:lnSpc>
             </a:pPr>
             <a:r>
-              <a:rPr sz="850" b="0" lang="ja-JP">
+              <a:rPr sz="950" b="0" lang="ja-JP">
                 <a:solidFill>
                   <a:srgbClr val="202729"/>
                 </a:solidFill>
@@ -15567,7 +15567,7 @@
       </p:sp>
       <p:cxnSp>
         <p:nvCxnSpPr>
-          <p:cNvPr id="60" name="Connector 59"/>
+          <p:cNvPr id="60" name="roadmap:grid"/>
           <p:cNvCxnSpPr/>
           <p:nvPr/>
         </p:nvCxnSpPr>
@@ -15634,7 +15634,7 @@
               </a:lnSpc>
             </a:pPr>
             <a:r>
-              <a:rPr sz="1150" b="1" lang="ja-JP">
+              <a:rPr sz="1250" b="1" lang="ja-JP">
                 <a:solidFill>
                   <a:srgbClr val="0D7870"/>
                 </a:solidFill>
@@ -15649,7 +15649,7 @@
       </p:sp>
       <p:sp>
         <p:nvSpPr>
-          <p:cNvPr id="62" name="TextBox 61"/>
+          <p:cNvPr id="62" name="roadmap:track:3"/>
           <p:cNvSpPr txBox="1"/>
           <p:nvPr/>
         </p:nvSpPr>
@@ -15680,7 +15680,7 @@
               </a:lnSpc>
             </a:pPr>
             <a:r>
-              <a:rPr sz="1150" b="1" lang="ja-JP">
+              <a:rPr sz="1250" b="1" lang="ja-JP">
                 <a:solidFill>
                   <a:srgbClr val="182C43"/>
                 </a:solidFill>
@@ -15726,9 +15726,9 @@
               </a:lnSpc>
             </a:pPr>
             <a:r>
-              <a:rPr sz="900" b="0" lang="ja-JP">
-                <a:solidFill>
-                  <a:srgbClr val="666E70"/>
+              <a:rPr sz="950" b="0" lang="ja-JP">
+                <a:solidFill>
+                  <a:srgbClr val="202729"/>
                 </a:solidFill>
                 <a:latin typeface="Yu Gothic"/>
                 <a:ea typeface="Yu Gothic"/>
@@ -15741,7 +15741,7 @@
       </p:sp>
       <p:cxnSp>
         <p:nvCxnSpPr>
-          <p:cNvPr id="64" name="Connector 63"/>
+          <p:cNvPr id="64" name="roadmap:span:3:0"/>
           <p:cNvCxnSpPr/>
           <p:nvPr/>
         </p:nvCxnSpPr>
@@ -15753,7 +15753,7 @@
           <a:prstGeom prst="line">
             <a:avLst/>
           </a:prstGeom>
-          <a:ln w="17780">
+          <a:ln w="30480">
             <a:solidFill>
               <a:srgbClr val="0D7870"/>
             </a:solidFill>
@@ -15777,14 +15777,14 @@
       </p:cxnSp>
       <p:sp>
         <p:nvSpPr>
-          <p:cNvPr id="65" name="TextBox 64"/>
-          <p:cNvSpPr txBox="1"/>
-          <p:nvPr/>
-        </p:nvSpPr>
-        <p:spPr>
-          <a:xfrm>
-            <a:off x="7750682" y="4206240"/>
-            <a:ext cx="1289304" cy="246888"/>
+          <p:cNvPr id="65" name="roadmap:activity:3:0"/>
+          <p:cNvSpPr txBox="1"/>
+          <p:nvPr/>
+        </p:nvSpPr>
+        <p:spPr>
+          <a:xfrm>
+            <a:off x="7042022" y="4206240"/>
+            <a:ext cx="2706624" cy="246888"/>
           </a:xfrm>
           <a:prstGeom prst="rect">
             <a:avLst/>
@@ -15810,7 +15810,7 @@
               </a:lnSpc>
             </a:pPr>
             <a:r>
-              <a:rPr sz="950" b="0" lang="ja-JP">
+              <a:rPr sz="1050" b="0" lang="ja-JP">
                 <a:solidFill>
                   <a:srgbClr val="202729"/>
                 </a:solidFill>
@@ -15825,7 +15825,7 @@
       </p:sp>
       <p:cxnSp>
         <p:nvCxnSpPr>
-          <p:cNvPr id="66" name="Connector 65"/>
+          <p:cNvPr id="66" name="roadmap:grid"/>
           <p:cNvCxnSpPr/>
           <p:nvPr/>
         </p:nvCxnSpPr>
@@ -15892,7 +15892,7 @@
               </a:lnSpc>
             </a:pPr>
             <a:r>
-              <a:rPr sz="1150" b="1" lang="ja-JP">
+              <a:rPr sz="1250" b="1" lang="ja-JP">
                 <a:solidFill>
                   <a:srgbClr val="0D7870"/>
                 </a:solidFill>
@@ -15907,7 +15907,7 @@
       </p:sp>
       <p:sp>
         <p:nvSpPr>
-          <p:cNvPr id="68" name="TextBox 67"/>
+          <p:cNvPr id="68" name="roadmap:track:4"/>
           <p:cNvSpPr txBox="1"/>
           <p:nvPr/>
         </p:nvSpPr>
@@ -15938,7 +15938,7 @@
               </a:lnSpc>
             </a:pPr>
             <a:r>
-              <a:rPr sz="1150" b="1" lang="ja-JP">
+              <a:rPr sz="1250" b="1" lang="ja-JP">
                 <a:solidFill>
                   <a:srgbClr val="182C43"/>
                 </a:solidFill>
@@ -15984,9 +15984,9 @@
               </a:lnSpc>
             </a:pPr>
             <a:r>
-              <a:rPr sz="900" b="0" lang="ja-JP">
-                <a:solidFill>
-                  <a:srgbClr val="666E70"/>
+              <a:rPr sz="950" b="0" lang="ja-JP">
+                <a:solidFill>
+                  <a:srgbClr val="202729"/>
                 </a:solidFill>
                 <a:latin typeface="Yu Gothic"/>
                 <a:ea typeface="Yu Gothic"/>
@@ -15999,7 +15999,7 @@
       </p:sp>
       <p:cxnSp>
         <p:nvCxnSpPr>
-          <p:cNvPr id="70" name="Connector 69"/>
+          <p:cNvPr id="70" name="roadmap:span:4:0"/>
           <p:cNvCxnSpPr/>
           <p:nvPr/>
         </p:nvCxnSpPr>
@@ -16011,7 +16011,7 @@
           <a:prstGeom prst="line">
             <a:avLst/>
           </a:prstGeom>
-          <a:ln w="17780">
+          <a:ln w="30480">
             <a:solidFill>
               <a:srgbClr val="0D7870"/>
             </a:solidFill>
@@ -16035,14 +16035,14 @@
       </p:cxnSp>
       <p:sp>
         <p:nvSpPr>
-          <p:cNvPr id="71" name="TextBox 70"/>
-          <p:cNvSpPr txBox="1"/>
-          <p:nvPr/>
-        </p:nvSpPr>
-        <p:spPr>
-          <a:xfrm>
-            <a:off x="9828657" y="4690872"/>
-            <a:ext cx="1289304" cy="246888"/>
+          <p:cNvPr id="71" name="roadmap:activity:4:0"/>
+          <p:cNvSpPr txBox="1"/>
+          <p:nvPr/>
+        </p:nvSpPr>
+        <p:spPr>
+          <a:xfrm>
+            <a:off x="9452609" y="4690872"/>
+            <a:ext cx="2041398" cy="246888"/>
           </a:xfrm>
           <a:prstGeom prst="rect">
             <a:avLst/>
@@ -16068,7 +16068,7 @@
               </a:lnSpc>
             </a:pPr>
             <a:r>
-              <a:rPr sz="950" b="0" lang="ja-JP">
+              <a:rPr sz="1050" b="0" lang="ja-JP">
                 <a:solidFill>
                   <a:srgbClr val="202729"/>
                 </a:solidFill>
@@ -16083,14 +16083,14 @@
       </p:sp>
       <p:sp>
         <p:nvSpPr>
-          <p:cNvPr id="72" name="Diamond 71"/>
+          <p:cNvPr id="72" name="roadmap:milestone:4"/>
           <p:cNvSpPr/>
           <p:nvPr/>
         </p:nvSpPr>
         <p:spPr>
           <a:xfrm>
-            <a:off x="11106531" y="4910328"/>
-            <a:ext cx="118872" cy="118872"/>
+            <a:off x="11097387" y="4901184"/>
+            <a:ext cx="137160" cy="137160"/>
           </a:xfrm>
           <a:prstGeom prst="diamond">
             <a:avLst/>
@@ -16127,7 +16127,7 @@
       </p:sp>
       <p:sp>
         <p:nvSpPr>
-          <p:cNvPr id="73" name="TextBox 72"/>
+          <p:cNvPr id="73" name="roadmap:milestone-label:4"/>
           <p:cNvSpPr txBox="1"/>
           <p:nvPr/>
         </p:nvSpPr>
@@ -16160,7 +16160,7 @@
               </a:lnSpc>
             </a:pPr>
             <a:r>
-              <a:rPr sz="850" b="0" lang="ja-JP">
+              <a:rPr sz="950" b="0" lang="ja-JP">
                 <a:solidFill>
                   <a:srgbClr val="202729"/>
                 </a:solidFill>
@@ -16175,7 +16175,7 @@
       </p:sp>
       <p:cxnSp>
         <p:nvCxnSpPr>
-          <p:cNvPr id="74" name="Connector 73"/>
+          <p:cNvPr id="74" name="roadmap:grid"/>
           <p:cNvCxnSpPr/>
           <p:nvPr/>
         </p:nvCxnSpPr>
@@ -16587,7 +16587,7 @@
               </a:lnSpc>
             </a:pPr>
             <a:r>
-              <a:rPr sz="1000" b="1" lang="ja-JP">
+              <a:rPr sz="1100" b="1" lang="ja-JP">
                 <a:solidFill>
                   <a:srgbClr val="FFFFFC"/>
                 </a:solidFill>
@@ -16646,7 +16646,7 @@
       </p:sp>
       <p:sp>
         <p:nvSpPr>
-          <p:cNvPr id="8" name="TextBox 7"/>
+          <p:cNvPr id="8" name="roadmap:period:0"/>
           <p:cNvSpPr txBox="1"/>
           <p:nvPr/>
         </p:nvSpPr>
@@ -16677,7 +16677,7 @@
               </a:lnSpc>
             </a:pPr>
             <a:r>
-              <a:rPr sz="1000" b="1" lang="ja-JP">
+              <a:rPr sz="1100" b="1" lang="ja-JP">
                 <a:solidFill>
                   <a:srgbClr val="FFFFFC"/>
                 </a:solidFill>
@@ -16692,7 +16692,7 @@
       </p:sp>
       <p:sp>
         <p:nvSpPr>
-          <p:cNvPr id="9" name="TextBox 8"/>
+          <p:cNvPr id="9" name="roadmap:period:1"/>
           <p:cNvSpPr txBox="1"/>
           <p:nvPr/>
         </p:nvSpPr>
@@ -16723,7 +16723,7 @@
               </a:lnSpc>
             </a:pPr>
             <a:r>
-              <a:rPr sz="1000" b="1" lang="ja-JP">
+              <a:rPr sz="1100" b="1" lang="ja-JP">
                 <a:solidFill>
                   <a:srgbClr val="FFFFFC"/>
                 </a:solidFill>
@@ -16738,7 +16738,7 @@
       </p:sp>
       <p:sp>
         <p:nvSpPr>
-          <p:cNvPr id="10" name="TextBox 9"/>
+          <p:cNvPr id="10" name="roadmap:period:2"/>
           <p:cNvSpPr txBox="1"/>
           <p:nvPr/>
         </p:nvSpPr>
@@ -16769,7 +16769,7 @@
               </a:lnSpc>
             </a:pPr>
             <a:r>
-              <a:rPr sz="1000" b="1" lang="ja-JP">
+              <a:rPr sz="1100" b="1" lang="ja-JP">
                 <a:solidFill>
                   <a:srgbClr val="FFFFFC"/>
                 </a:solidFill>
@@ -16784,7 +16784,7 @@
       </p:sp>
       <p:sp>
         <p:nvSpPr>
-          <p:cNvPr id="11" name="TextBox 10"/>
+          <p:cNvPr id="11" name="roadmap:period:3"/>
           <p:cNvSpPr txBox="1"/>
           <p:nvPr/>
         </p:nvSpPr>
@@ -16815,7 +16815,7 @@
               </a:lnSpc>
             </a:pPr>
             <a:r>
-              <a:rPr sz="1000" b="1" lang="ja-JP">
+              <a:rPr sz="1100" b="1" lang="ja-JP">
                 <a:solidFill>
                   <a:srgbClr val="FFFFFC"/>
                 </a:solidFill>
@@ -16830,7 +16830,7 @@
       </p:sp>
       <p:sp>
         <p:nvSpPr>
-          <p:cNvPr id="12" name="TextBox 11"/>
+          <p:cNvPr id="12" name="roadmap:period:4"/>
           <p:cNvSpPr txBox="1"/>
           <p:nvPr/>
         </p:nvSpPr>
@@ -16861,7 +16861,7 @@
               </a:lnSpc>
             </a:pPr>
             <a:r>
-              <a:rPr sz="1000" b="1" lang="ja-JP">
+              <a:rPr sz="1100" b="1" lang="ja-JP">
                 <a:solidFill>
                   <a:srgbClr val="FFFFFC"/>
                 </a:solidFill>
@@ -16876,7 +16876,7 @@
       </p:sp>
       <p:sp>
         <p:nvSpPr>
-          <p:cNvPr id="13" name="TextBox 12"/>
+          <p:cNvPr id="13" name="roadmap:period:5"/>
           <p:cNvSpPr txBox="1"/>
           <p:nvPr/>
         </p:nvSpPr>
@@ -16907,7 +16907,7 @@
               </a:lnSpc>
             </a:pPr>
             <a:r>
-              <a:rPr sz="1000" b="1" lang="ja-JP">
+              <a:rPr sz="1100" b="1" lang="ja-JP">
                 <a:solidFill>
                   <a:srgbClr val="FFFFFC"/>
                 </a:solidFill>
@@ -16922,7 +16922,7 @@
       </p:sp>
       <p:sp>
         <p:nvSpPr>
-          <p:cNvPr id="14" name="TextBox 13"/>
+          <p:cNvPr id="14" name="roadmap:period:6"/>
           <p:cNvSpPr txBox="1"/>
           <p:nvPr/>
         </p:nvSpPr>
@@ -16953,7 +16953,7 @@
               </a:lnSpc>
             </a:pPr>
             <a:r>
-              <a:rPr sz="1000" b="1" lang="ja-JP">
+              <a:rPr sz="1100" b="1" lang="ja-JP">
                 <a:solidFill>
                   <a:srgbClr val="FFFFFC"/>
                 </a:solidFill>
@@ -16968,7 +16968,7 @@
       </p:sp>
       <p:sp>
         <p:nvSpPr>
-          <p:cNvPr id="15" name="TextBox 14"/>
+          <p:cNvPr id="15" name="roadmap:period:7"/>
           <p:cNvSpPr txBox="1"/>
           <p:nvPr/>
         </p:nvSpPr>
@@ -16999,7 +16999,7 @@
               </a:lnSpc>
             </a:pPr>
             <a:r>
-              <a:rPr sz="1000" b="1" lang="ja-JP">
+              <a:rPr sz="1100" b="1" lang="ja-JP">
                 <a:solidFill>
                   <a:srgbClr val="FFFFFC"/>
                 </a:solidFill>
@@ -17014,7 +17014,7 @@
       </p:sp>
       <p:sp>
         <p:nvSpPr>
-          <p:cNvPr id="16" name="TextBox 15"/>
+          <p:cNvPr id="16" name="roadmap:period:8"/>
           <p:cNvSpPr txBox="1"/>
           <p:nvPr/>
         </p:nvSpPr>
@@ -17045,7 +17045,7 @@
               </a:lnSpc>
             </a:pPr>
             <a:r>
-              <a:rPr sz="1000" b="1" lang="ja-JP">
+              <a:rPr sz="1100" b="1" lang="ja-JP">
                 <a:solidFill>
                   <a:srgbClr val="FFFFFC"/>
                 </a:solidFill>
@@ -17060,7 +17060,7 @@
       </p:sp>
       <p:sp>
         <p:nvSpPr>
-          <p:cNvPr id="17" name="TextBox 16"/>
+          <p:cNvPr id="17" name="roadmap:period:9"/>
           <p:cNvSpPr txBox="1"/>
           <p:nvPr/>
         </p:nvSpPr>
@@ -17091,7 +17091,7 @@
               </a:lnSpc>
             </a:pPr>
             <a:r>
-              <a:rPr sz="1000" b="1" lang="ja-JP">
+              <a:rPr sz="1100" b="1" lang="ja-JP">
                 <a:solidFill>
                   <a:srgbClr val="FFFFFC"/>
                 </a:solidFill>
@@ -17106,7 +17106,7 @@
       </p:sp>
       <p:sp>
         <p:nvSpPr>
-          <p:cNvPr id="18" name="TextBox 17"/>
+          <p:cNvPr id="18" name="roadmap:period:10"/>
           <p:cNvSpPr txBox="1"/>
           <p:nvPr/>
         </p:nvSpPr>
@@ -17137,7 +17137,7 @@
               </a:lnSpc>
             </a:pPr>
             <a:r>
-              <a:rPr sz="1000" b="1" lang="ja-JP">
+              <a:rPr sz="1100" b="1" lang="ja-JP">
                 <a:solidFill>
                   <a:srgbClr val="FFFFFC"/>
                 </a:solidFill>
@@ -17152,7 +17152,7 @@
       </p:sp>
       <p:sp>
         <p:nvSpPr>
-          <p:cNvPr id="19" name="TextBox 18"/>
+          <p:cNvPr id="19" name="roadmap:period:11"/>
           <p:cNvSpPr txBox="1"/>
           <p:nvPr/>
         </p:nvSpPr>
@@ -17183,7 +17183,7 @@
               </a:lnSpc>
             </a:pPr>
             <a:r>
-              <a:rPr sz="1000" b="1" lang="ja-JP">
+              <a:rPr sz="1100" b="1" lang="ja-JP">
                 <a:solidFill>
                   <a:srgbClr val="FFFFFC"/>
                 </a:solidFill>
@@ -17418,7 +17418,7 @@
       </p:sp>
       <p:cxnSp>
         <p:nvCxnSpPr>
-          <p:cNvPr id="25" name="Connector 24"/>
+          <p:cNvPr id="25" name="roadmap:grid"/>
           <p:cNvCxnSpPr/>
           <p:nvPr/>
         </p:nvCxnSpPr>
@@ -17454,7 +17454,7 @@
       </p:cxnSp>
       <p:cxnSp>
         <p:nvCxnSpPr>
-          <p:cNvPr id="26" name="Connector 25"/>
+          <p:cNvPr id="26" name="roadmap:grid"/>
           <p:cNvCxnSpPr/>
           <p:nvPr/>
         </p:nvCxnSpPr>
@@ -17490,7 +17490,7 @@
       </p:cxnSp>
       <p:cxnSp>
         <p:nvCxnSpPr>
-          <p:cNvPr id="27" name="Connector 26"/>
+          <p:cNvPr id="27" name="roadmap:grid"/>
           <p:cNvCxnSpPr/>
           <p:nvPr/>
         </p:nvCxnSpPr>
@@ -17526,7 +17526,7 @@
       </p:cxnSp>
       <p:cxnSp>
         <p:nvCxnSpPr>
-          <p:cNvPr id="28" name="Connector 27"/>
+          <p:cNvPr id="28" name="roadmap:grid"/>
           <p:cNvCxnSpPr/>
           <p:nvPr/>
         </p:nvCxnSpPr>
@@ -17562,7 +17562,7 @@
       </p:cxnSp>
       <p:cxnSp>
         <p:nvCxnSpPr>
-          <p:cNvPr id="29" name="Connector 28"/>
+          <p:cNvPr id="29" name="roadmap:grid"/>
           <p:cNvCxnSpPr/>
           <p:nvPr/>
         </p:nvCxnSpPr>
@@ -17598,7 +17598,7 @@
       </p:cxnSp>
       <p:cxnSp>
         <p:nvCxnSpPr>
-          <p:cNvPr id="30" name="Connector 29"/>
+          <p:cNvPr id="30" name="roadmap:grid"/>
           <p:cNvCxnSpPr/>
           <p:nvPr/>
         </p:nvCxnSpPr>
@@ -17634,7 +17634,7 @@
       </p:cxnSp>
       <p:cxnSp>
         <p:nvCxnSpPr>
-          <p:cNvPr id="31" name="Connector 30"/>
+          <p:cNvPr id="31" name="roadmap:grid"/>
           <p:cNvCxnSpPr/>
           <p:nvPr/>
         </p:nvCxnSpPr>
@@ -17670,7 +17670,7 @@
       </p:cxnSp>
       <p:cxnSp>
         <p:nvCxnSpPr>
-          <p:cNvPr id="32" name="Connector 31"/>
+          <p:cNvPr id="32" name="roadmap:grid"/>
           <p:cNvCxnSpPr/>
           <p:nvPr/>
         </p:nvCxnSpPr>
@@ -17706,7 +17706,7 @@
       </p:cxnSp>
       <p:cxnSp>
         <p:nvCxnSpPr>
-          <p:cNvPr id="33" name="Connector 32"/>
+          <p:cNvPr id="33" name="roadmap:grid"/>
           <p:cNvCxnSpPr/>
           <p:nvPr/>
         </p:nvCxnSpPr>
@@ -17742,7 +17742,7 @@
       </p:cxnSp>
       <p:cxnSp>
         <p:nvCxnSpPr>
-          <p:cNvPr id="34" name="Connector 33"/>
+          <p:cNvPr id="34" name="roadmap:grid"/>
           <p:cNvCxnSpPr/>
           <p:nvPr/>
         </p:nvCxnSpPr>
@@ -17778,7 +17778,7 @@
       </p:cxnSp>
       <p:cxnSp>
         <p:nvCxnSpPr>
-          <p:cNvPr id="35" name="Connector 34"/>
+          <p:cNvPr id="35" name="roadmap:grid"/>
           <p:cNvCxnSpPr/>
           <p:nvPr/>
         </p:nvCxnSpPr>
@@ -17814,7 +17814,7 @@
       </p:cxnSp>
       <p:cxnSp>
         <p:nvCxnSpPr>
-          <p:cNvPr id="36" name="Connector 35"/>
+          <p:cNvPr id="36" name="roadmap:grid"/>
           <p:cNvCxnSpPr/>
           <p:nvPr/>
         </p:nvCxnSpPr>
@@ -17850,7 +17850,7 @@
       </p:cxnSp>
       <p:cxnSp>
         <p:nvCxnSpPr>
-          <p:cNvPr id="37" name="Connector 36"/>
+          <p:cNvPr id="37" name="roadmap:grid"/>
           <p:cNvCxnSpPr/>
           <p:nvPr/>
         </p:nvCxnSpPr>
@@ -17886,7 +17886,7 @@
       </p:cxnSp>
       <p:cxnSp>
         <p:nvCxnSpPr>
-          <p:cNvPr id="38" name="Connector 37"/>
+          <p:cNvPr id="38" name="roadmap:grid"/>
           <p:cNvCxnSpPr/>
           <p:nvPr/>
         </p:nvCxnSpPr>
@@ -17953,7 +17953,7 @@
               </a:lnSpc>
             </a:pPr>
             <a:r>
-              <a:rPr sz="1150" b="1" lang="ja-JP">
+              <a:rPr sz="1250" b="1" lang="ja-JP">
                 <a:solidFill>
                   <a:srgbClr val="0D7870"/>
                 </a:solidFill>
@@ -17968,7 +17968,7 @@
       </p:sp>
       <p:sp>
         <p:nvSpPr>
-          <p:cNvPr id="40" name="TextBox 39"/>
+          <p:cNvPr id="40" name="roadmap:track:0"/>
           <p:cNvSpPr txBox="1"/>
           <p:nvPr/>
         </p:nvSpPr>
@@ -17999,7 +17999,7 @@
               </a:lnSpc>
             </a:pPr>
             <a:r>
-              <a:rPr sz="1150" b="1" lang="ja-JP">
+              <a:rPr sz="1250" b="1" lang="ja-JP">
                 <a:solidFill>
                   <a:srgbClr val="182C43"/>
                 </a:solidFill>
@@ -18014,7 +18014,7 @@
       </p:sp>
       <p:cxnSp>
         <p:nvCxnSpPr>
-          <p:cNvPr id="41" name="Connector 40"/>
+          <p:cNvPr id="41" name="roadmap:span:0:0"/>
           <p:cNvCxnSpPr/>
           <p:nvPr/>
         </p:nvCxnSpPr>
@@ -18026,7 +18026,7 @@
           <a:prstGeom prst="line">
             <a:avLst/>
           </a:prstGeom>
-          <a:ln w="17780">
+          <a:ln w="30480">
             <a:solidFill>
               <a:srgbClr val="0D7870"/>
             </a:solidFill>
@@ -18050,14 +18050,14 @@
       </p:cxnSp>
       <p:sp>
         <p:nvSpPr>
-          <p:cNvPr id="42" name="TextBox 41"/>
-          <p:cNvSpPr txBox="1"/>
-          <p:nvPr/>
-        </p:nvSpPr>
-        <p:spPr>
-          <a:xfrm>
-            <a:off x="3594735" y="2130552"/>
-            <a:ext cx="1289304" cy="246888"/>
+          <p:cNvPr id="42" name="roadmap:activity:0:0"/>
+          <p:cNvSpPr txBox="1"/>
+          <p:nvPr/>
+        </p:nvSpPr>
+        <p:spPr>
+          <a:xfrm>
+            <a:off x="3218688" y="2130552"/>
+            <a:ext cx="2041398" cy="246888"/>
           </a:xfrm>
           <a:prstGeom prst="rect">
             <a:avLst/>
@@ -18083,7 +18083,7 @@
               </a:lnSpc>
             </a:pPr>
             <a:r>
-              <a:rPr sz="950" b="0" lang="ja-JP">
+              <a:rPr sz="1050" b="0" lang="ja-JP">
                 <a:solidFill>
                   <a:srgbClr val="202729"/>
                 </a:solidFill>
@@ -18098,7 +18098,7 @@
       </p:sp>
       <p:cxnSp>
         <p:nvCxnSpPr>
-          <p:cNvPr id="43" name="Connector 42"/>
+          <p:cNvPr id="43" name="roadmap:span:0:1"/>
           <p:cNvCxnSpPr/>
           <p:nvPr/>
         </p:nvCxnSpPr>
@@ -18110,7 +18110,7 @@
           <a:prstGeom prst="line">
             <a:avLst/>
           </a:prstGeom>
-          <a:ln w="17780">
+          <a:ln w="30480">
             <a:solidFill>
               <a:srgbClr val="C7583E"/>
             </a:solidFill>
@@ -18134,14 +18134,14 @@
       </p:cxnSp>
       <p:sp>
         <p:nvSpPr>
-          <p:cNvPr id="44" name="TextBox 43"/>
-          <p:cNvSpPr txBox="1"/>
-          <p:nvPr/>
-        </p:nvSpPr>
-        <p:spPr>
-          <a:xfrm>
-            <a:off x="9309163" y="2130552"/>
-            <a:ext cx="1289304" cy="246888"/>
+          <p:cNvPr id="44" name="roadmap:activity:0:1"/>
+          <p:cNvSpPr txBox="1"/>
+          <p:nvPr/>
+        </p:nvSpPr>
+        <p:spPr>
+          <a:xfrm>
+            <a:off x="8600503" y="2130552"/>
+            <a:ext cx="2706624" cy="246888"/>
           </a:xfrm>
           <a:prstGeom prst="rect">
             <a:avLst/>
@@ -18167,7 +18167,7 @@
               </a:lnSpc>
             </a:pPr>
             <a:r>
-              <a:rPr sz="950" b="1" lang="ja-JP">
+              <a:rPr sz="1050" b="1" lang="ja-JP">
                 <a:solidFill>
                   <a:srgbClr val="202729"/>
                 </a:solidFill>
@@ -18182,7 +18182,7 @@
       </p:sp>
       <p:cxnSp>
         <p:nvCxnSpPr>
-          <p:cNvPr id="45" name="Connector 44"/>
+          <p:cNvPr id="45" name="roadmap:grid"/>
           <p:cNvCxnSpPr/>
           <p:nvPr/>
         </p:nvCxnSpPr>
@@ -18249,7 +18249,7 @@
               </a:lnSpc>
             </a:pPr>
             <a:r>
-              <a:rPr sz="1150" b="1" lang="ja-JP">
+              <a:rPr sz="1250" b="1" lang="ja-JP">
                 <a:solidFill>
                   <a:srgbClr val="0D7870"/>
                 </a:solidFill>
@@ -18264,7 +18264,7 @@
       </p:sp>
       <p:sp>
         <p:nvSpPr>
-          <p:cNvPr id="47" name="TextBox 46"/>
+          <p:cNvPr id="47" name="roadmap:track:1"/>
           <p:cNvSpPr txBox="1"/>
           <p:nvPr/>
         </p:nvSpPr>
@@ -18295,7 +18295,7 @@
               </a:lnSpc>
             </a:pPr>
             <a:r>
-              <a:rPr sz="1150" b="1" lang="ja-JP">
+              <a:rPr sz="1250" b="1" lang="ja-JP">
                 <a:solidFill>
                   <a:srgbClr val="182C43"/>
                 </a:solidFill>
@@ -18310,7 +18310,7 @@
       </p:sp>
       <p:cxnSp>
         <p:nvCxnSpPr>
-          <p:cNvPr id="48" name="Connector 47"/>
+          <p:cNvPr id="48" name="roadmap:span:1:0"/>
           <p:cNvCxnSpPr/>
           <p:nvPr/>
         </p:nvCxnSpPr>
@@ -18322,7 +18322,7 @@
           <a:prstGeom prst="line">
             <a:avLst/>
           </a:prstGeom>
-          <a:ln w="17780">
+          <a:ln w="30480">
             <a:solidFill>
               <a:srgbClr val="0D7870"/>
             </a:solidFill>
@@ -18346,14 +18346,14 @@
       </p:cxnSp>
       <p:sp>
         <p:nvSpPr>
-          <p:cNvPr id="49" name="TextBox 48"/>
-          <p:cNvSpPr txBox="1"/>
-          <p:nvPr/>
-        </p:nvSpPr>
-        <p:spPr>
-          <a:xfrm>
-            <a:off x="3594735" y="2615184"/>
-            <a:ext cx="1289304" cy="246888"/>
+          <p:cNvPr id="49" name="roadmap:activity:1:0"/>
+          <p:cNvSpPr txBox="1"/>
+          <p:nvPr/>
+        </p:nvSpPr>
+        <p:spPr>
+          <a:xfrm>
+            <a:off x="3218688" y="2615184"/>
+            <a:ext cx="2041398" cy="246888"/>
           </a:xfrm>
           <a:prstGeom prst="rect">
             <a:avLst/>
@@ -18379,7 +18379,7 @@
               </a:lnSpc>
             </a:pPr>
             <a:r>
-              <a:rPr sz="950" b="0" lang="ja-JP">
+              <a:rPr sz="1050" b="0" lang="ja-JP">
                 <a:solidFill>
                   <a:srgbClr val="202729"/>
                 </a:solidFill>
@@ -18394,7 +18394,7 @@
       </p:sp>
       <p:cxnSp>
         <p:nvCxnSpPr>
-          <p:cNvPr id="50" name="Connector 49"/>
+          <p:cNvPr id="50" name="roadmap:span:1:1"/>
           <p:cNvCxnSpPr/>
           <p:nvPr/>
         </p:nvCxnSpPr>
@@ -18406,7 +18406,7 @@
           <a:prstGeom prst="line">
             <a:avLst/>
           </a:prstGeom>
-          <a:ln w="17780">
+          <a:ln w="30480">
             <a:solidFill>
               <a:srgbClr val="0D7870"/>
             </a:solidFill>
@@ -18430,14 +18430,14 @@
       </p:cxnSp>
       <p:sp>
         <p:nvSpPr>
-          <p:cNvPr id="51" name="TextBox 50"/>
-          <p:cNvSpPr txBox="1"/>
-          <p:nvPr/>
-        </p:nvSpPr>
-        <p:spPr>
-          <a:xfrm>
-            <a:off x="5326379" y="2926079"/>
-            <a:ext cx="1289304" cy="246888"/>
+          <p:cNvPr id="51" name="roadmap:activity:1:1"/>
+          <p:cNvSpPr txBox="1"/>
+          <p:nvPr/>
+        </p:nvSpPr>
+        <p:spPr>
+          <a:xfrm>
+            <a:off x="4617719" y="2926079"/>
+            <a:ext cx="2706624" cy="246888"/>
           </a:xfrm>
           <a:prstGeom prst="rect">
             <a:avLst/>
@@ -18463,7 +18463,7 @@
               </a:lnSpc>
             </a:pPr>
             <a:r>
-              <a:rPr sz="950" b="0" lang="ja-JP">
+              <a:rPr sz="1050" b="0" lang="ja-JP">
                 <a:solidFill>
                   <a:srgbClr val="202729"/>
                 </a:solidFill>
@@ -18478,7 +18478,7 @@
       </p:sp>
       <p:cxnSp>
         <p:nvCxnSpPr>
-          <p:cNvPr id="52" name="Connector 51"/>
+          <p:cNvPr id="52" name="roadmap:span:1:2"/>
           <p:cNvCxnSpPr/>
           <p:nvPr/>
         </p:nvCxnSpPr>
@@ -18490,7 +18490,7 @@
           <a:prstGeom prst="line">
             <a:avLst/>
           </a:prstGeom>
-          <a:ln w="17780">
+          <a:ln w="30480">
             <a:solidFill>
               <a:srgbClr val="0D7870"/>
             </a:solidFill>
@@ -18514,14 +18514,14 @@
       </p:cxnSp>
       <p:sp>
         <p:nvSpPr>
-          <p:cNvPr id="53" name="TextBox 52"/>
-          <p:cNvSpPr txBox="1"/>
-          <p:nvPr/>
-        </p:nvSpPr>
-        <p:spPr>
-          <a:xfrm>
-            <a:off x="6019038" y="2615184"/>
-            <a:ext cx="1289304" cy="246888"/>
+          <p:cNvPr id="53" name="roadmap:activity:1:2"/>
+          <p:cNvSpPr txBox="1"/>
+          <p:nvPr/>
+        </p:nvSpPr>
+        <p:spPr>
+          <a:xfrm>
+            <a:off x="5469826" y="2615184"/>
+            <a:ext cx="2387726" cy="246888"/>
           </a:xfrm>
           <a:prstGeom prst="rect">
             <a:avLst/>
@@ -18547,7 +18547,7 @@
               </a:lnSpc>
             </a:pPr>
             <a:r>
-              <a:rPr sz="950" b="0" lang="ja-JP">
+              <a:rPr sz="1050" b="0" lang="ja-JP">
                 <a:solidFill>
                   <a:srgbClr val="202729"/>
                 </a:solidFill>
@@ -18562,7 +18562,7 @@
       </p:sp>
       <p:cxnSp>
         <p:nvCxnSpPr>
-          <p:cNvPr id="54" name="Connector 53"/>
+          <p:cNvPr id="54" name="roadmap:grid"/>
           <p:cNvCxnSpPr/>
           <p:nvPr/>
         </p:nvCxnSpPr>
@@ -18629,7 +18629,7 @@
               </a:lnSpc>
             </a:pPr>
             <a:r>
-              <a:rPr sz="1150" b="1" lang="ja-JP">
+              <a:rPr sz="1250" b="1" lang="ja-JP">
                 <a:solidFill>
                   <a:srgbClr val="0D7870"/>
                 </a:solidFill>
@@ -18644,7 +18644,7 @@
       </p:sp>
       <p:sp>
         <p:nvSpPr>
-          <p:cNvPr id="56" name="TextBox 55"/>
+          <p:cNvPr id="56" name="roadmap:track:2"/>
           <p:cNvSpPr txBox="1"/>
           <p:nvPr/>
         </p:nvSpPr>
@@ -18675,7 +18675,7 @@
               </a:lnSpc>
             </a:pPr>
             <a:r>
-              <a:rPr sz="1150" b="1" lang="ja-JP">
+              <a:rPr sz="1250" b="1" lang="ja-JP">
                 <a:solidFill>
                   <a:srgbClr val="182C43"/>
                 </a:solidFill>
@@ -18690,7 +18690,7 @@
       </p:sp>
       <p:cxnSp>
         <p:nvCxnSpPr>
-          <p:cNvPr id="57" name="Connector 56"/>
+          <p:cNvPr id="57" name="roadmap:span:2:0"/>
           <p:cNvCxnSpPr/>
           <p:nvPr/>
         </p:nvCxnSpPr>
@@ -18702,7 +18702,7 @@
           <a:prstGeom prst="line">
             <a:avLst/>
           </a:prstGeom>
-          <a:ln w="17780">
+          <a:ln w="30480">
             <a:solidFill>
               <a:srgbClr val="0D7870"/>
             </a:solidFill>
@@ -18726,14 +18726,14 @@
       </p:cxnSp>
       <p:sp>
         <p:nvSpPr>
-          <p:cNvPr id="58" name="TextBox 57"/>
-          <p:cNvSpPr txBox="1"/>
-          <p:nvPr/>
-        </p:nvSpPr>
-        <p:spPr>
-          <a:xfrm>
-            <a:off x="3248406" y="3410712"/>
-            <a:ext cx="1289304" cy="246888"/>
+          <p:cNvPr id="58" name="roadmap:activity:2:0"/>
+          <p:cNvSpPr txBox="1"/>
+          <p:nvPr/>
+        </p:nvSpPr>
+        <p:spPr>
+          <a:xfrm>
+            <a:off x="3218688" y="3410712"/>
+            <a:ext cx="1348740" cy="246888"/>
           </a:xfrm>
           <a:prstGeom prst="rect">
             <a:avLst/>
@@ -18759,7 +18759,7 @@
               </a:lnSpc>
             </a:pPr>
             <a:r>
-              <a:rPr sz="950" b="0" lang="ja-JP">
+              <a:rPr sz="1050" b="0" lang="ja-JP">
                 <a:solidFill>
                   <a:srgbClr val="202729"/>
                 </a:solidFill>
@@ -18774,7 +18774,7 @@
       </p:sp>
       <p:cxnSp>
         <p:nvCxnSpPr>
-          <p:cNvPr id="59" name="Connector 58"/>
+          <p:cNvPr id="59" name="roadmap:span:2:1"/>
           <p:cNvCxnSpPr/>
           <p:nvPr/>
         </p:nvCxnSpPr>
@@ -18786,7 +18786,7 @@
           <a:prstGeom prst="line">
             <a:avLst/>
           </a:prstGeom>
-          <a:ln w="17780">
+          <a:ln w="30480">
             <a:solidFill>
               <a:srgbClr val="0D7870"/>
             </a:solidFill>
@@ -18810,14 +18810,14 @@
       </p:cxnSp>
       <p:sp>
         <p:nvSpPr>
-          <p:cNvPr id="60" name="TextBox 59"/>
-          <p:cNvSpPr txBox="1"/>
-          <p:nvPr/>
-        </p:nvSpPr>
-        <p:spPr>
-          <a:xfrm>
-            <a:off x="5326379" y="3410712"/>
-            <a:ext cx="1289304" cy="246888"/>
+          <p:cNvPr id="60" name="roadmap:activity:2:1"/>
+          <p:cNvSpPr txBox="1"/>
+          <p:nvPr/>
+        </p:nvSpPr>
+        <p:spPr>
+          <a:xfrm>
+            <a:off x="4950332" y="3410712"/>
+            <a:ext cx="2041397" cy="246888"/>
           </a:xfrm>
           <a:prstGeom prst="rect">
             <a:avLst/>
@@ -18843,7 +18843,7 @@
               </a:lnSpc>
             </a:pPr>
             <a:r>
-              <a:rPr sz="950" b="0" lang="ja-JP">
+              <a:rPr sz="1050" b="0" lang="ja-JP">
                 <a:solidFill>
                   <a:srgbClr val="202729"/>
                 </a:solidFill>
@@ -18858,7 +18858,7 @@
       </p:sp>
       <p:cxnSp>
         <p:nvCxnSpPr>
-          <p:cNvPr id="61" name="Connector 60"/>
+          <p:cNvPr id="61" name="roadmap:span:2:2"/>
           <p:cNvCxnSpPr/>
           <p:nvPr/>
         </p:nvCxnSpPr>
@@ -18870,7 +18870,7 @@
           <a:prstGeom prst="line">
             <a:avLst/>
           </a:prstGeom>
-          <a:ln w="17780">
+          <a:ln w="30480">
             <a:solidFill>
               <a:srgbClr val="0D7870"/>
             </a:solidFill>
@@ -18894,14 +18894,14 @@
       </p:cxnSp>
       <p:sp>
         <p:nvSpPr>
-          <p:cNvPr id="62" name="TextBox 61"/>
-          <p:cNvSpPr txBox="1"/>
-          <p:nvPr/>
-        </p:nvSpPr>
-        <p:spPr>
-          <a:xfrm>
-            <a:off x="6019038" y="3721608"/>
-            <a:ext cx="1289304" cy="246888"/>
+          <p:cNvPr id="62" name="roadmap:activity:2:2"/>
+          <p:cNvSpPr txBox="1"/>
+          <p:nvPr/>
+        </p:nvSpPr>
+        <p:spPr>
+          <a:xfrm>
+            <a:off x="5310377" y="3721608"/>
+            <a:ext cx="2706624" cy="246888"/>
           </a:xfrm>
           <a:prstGeom prst="rect">
             <a:avLst/>
@@ -18927,7 +18927,7 @@
               </a:lnSpc>
             </a:pPr>
             <a:r>
-              <a:rPr sz="950" b="0" lang="ja-JP">
+              <a:rPr sz="1050" b="0" lang="ja-JP">
                 <a:solidFill>
                   <a:srgbClr val="202729"/>
                 </a:solidFill>
@@ -18942,7 +18942,7 @@
       </p:sp>
       <p:cxnSp>
         <p:nvCxnSpPr>
-          <p:cNvPr id="63" name="Connector 62"/>
+          <p:cNvPr id="63" name="roadmap:span:2:3"/>
           <p:cNvCxnSpPr/>
           <p:nvPr/>
         </p:nvCxnSpPr>
@@ -18954,7 +18954,7 @@
           <a:prstGeom prst="line">
             <a:avLst/>
           </a:prstGeom>
-          <a:ln w="17780">
+          <a:ln w="30480">
             <a:solidFill>
               <a:srgbClr val="0D7870"/>
             </a:solidFill>
@@ -18978,7 +18978,7 @@
       </p:cxnSp>
       <p:sp>
         <p:nvSpPr>
-          <p:cNvPr id="64" name="TextBox 63"/>
+          <p:cNvPr id="64" name="roadmap:activity:2:3"/>
           <p:cNvSpPr txBox="1"/>
           <p:nvPr/>
         </p:nvSpPr>
@@ -19011,7 +19011,7 @@
               </a:lnSpc>
             </a:pPr>
             <a:r>
-              <a:rPr sz="950" b="0" lang="ja-JP">
+              <a:rPr sz="1000" b="0" lang="ja-JP">
                 <a:solidFill>
                   <a:srgbClr val="202729"/>
                 </a:solidFill>
@@ -19026,7 +19026,7 @@
       </p:sp>
       <p:cxnSp>
         <p:nvCxnSpPr>
-          <p:cNvPr id="65" name="Connector 64"/>
+          <p:cNvPr id="65" name="roadmap:span:2:4"/>
           <p:cNvCxnSpPr/>
           <p:nvPr/>
         </p:nvCxnSpPr>
@@ -19038,7 +19038,7 @@
           <a:prstGeom prst="line">
             <a:avLst/>
           </a:prstGeom>
-          <a:ln w="17780">
+          <a:ln w="30480">
             <a:solidFill>
               <a:srgbClr val="C7583E"/>
             </a:solidFill>
@@ -19062,7 +19062,7 @@
       </p:cxnSp>
       <p:sp>
         <p:nvSpPr>
-          <p:cNvPr id="66" name="TextBox 65"/>
+          <p:cNvPr id="66" name="roadmap:activity:2:4"/>
           <p:cNvSpPr txBox="1"/>
           <p:nvPr/>
         </p:nvSpPr>
@@ -19095,7 +19095,7 @@
               </a:lnSpc>
             </a:pPr>
             <a:r>
-              <a:rPr sz="950" b="1" lang="ja-JP">
+              <a:rPr sz="1050" b="1" lang="ja-JP">
                 <a:solidFill>
                   <a:srgbClr val="202729"/>
                 </a:solidFill>
@@ -19110,7 +19110,7 @@
       </p:sp>
       <p:cxnSp>
         <p:nvCxnSpPr>
-          <p:cNvPr id="67" name="Connector 66"/>
+          <p:cNvPr id="67" name="roadmap:span:2:5"/>
           <p:cNvCxnSpPr/>
           <p:nvPr/>
         </p:nvCxnSpPr>
@@ -19122,7 +19122,7 @@
           <a:prstGeom prst="line">
             <a:avLst/>
           </a:prstGeom>
-          <a:ln w="17780">
+          <a:ln w="30480">
             <a:solidFill>
               <a:srgbClr val="0D7870"/>
             </a:solidFill>
@@ -19146,14 +19146,14 @@
       </p:cxnSp>
       <p:sp>
         <p:nvSpPr>
-          <p:cNvPr id="68" name="TextBox 67"/>
-          <p:cNvSpPr txBox="1"/>
-          <p:nvPr/>
-        </p:nvSpPr>
-        <p:spPr>
-          <a:xfrm>
-            <a:off x="9482328" y="3410712"/>
-            <a:ext cx="1289304" cy="246888"/>
+          <p:cNvPr id="68" name="roadmap:activity:2:5"/>
+          <p:cNvSpPr txBox="1"/>
+          <p:nvPr/>
+        </p:nvSpPr>
+        <p:spPr>
+          <a:xfrm>
+            <a:off x="8773667" y="3410712"/>
+            <a:ext cx="2706624" cy="246888"/>
           </a:xfrm>
           <a:prstGeom prst="rect">
             <a:avLst/>
@@ -19179,7 +19179,7 @@
               </a:lnSpc>
             </a:pPr>
             <a:r>
-              <a:rPr sz="950" b="0" lang="ja-JP">
+              <a:rPr sz="1050" b="0" lang="ja-JP">
                 <a:solidFill>
                   <a:srgbClr val="202729"/>
                 </a:solidFill>
@@ -19194,7 +19194,7 @@
       </p:sp>
       <p:cxnSp>
         <p:nvCxnSpPr>
-          <p:cNvPr id="69" name="Connector 68"/>
+          <p:cNvPr id="69" name="roadmap:grid"/>
           <p:cNvCxnSpPr/>
           <p:nvPr/>
         </p:nvCxnSpPr>
@@ -19261,7 +19261,7 @@
               </a:lnSpc>
             </a:pPr>
             <a:r>
-              <a:rPr sz="1150" b="1" lang="ja-JP">
+              <a:rPr sz="1250" b="1" lang="ja-JP">
                 <a:solidFill>
                   <a:srgbClr val="0D7870"/>
                 </a:solidFill>
@@ -19276,7 +19276,7 @@
       </p:sp>
       <p:sp>
         <p:nvSpPr>
-          <p:cNvPr id="71" name="TextBox 70"/>
+          <p:cNvPr id="71" name="roadmap:track:3"/>
           <p:cNvSpPr txBox="1"/>
           <p:nvPr/>
         </p:nvSpPr>
@@ -19307,7 +19307,7 @@
               </a:lnSpc>
             </a:pPr>
             <a:r>
-              <a:rPr sz="1150" b="1" lang="ja-JP">
+              <a:rPr sz="1250" b="1" lang="ja-JP">
                 <a:solidFill>
                   <a:srgbClr val="182C43"/>
                 </a:solidFill>
@@ -19322,7 +19322,7 @@
       </p:sp>
       <p:cxnSp>
         <p:nvCxnSpPr>
-          <p:cNvPr id="72" name="Connector 71"/>
+          <p:cNvPr id="72" name="roadmap:span:3:0"/>
           <p:cNvCxnSpPr/>
           <p:nvPr/>
         </p:nvCxnSpPr>
@@ -19334,7 +19334,7 @@
           <a:prstGeom prst="line">
             <a:avLst/>
           </a:prstGeom>
-          <a:ln w="17780">
+          <a:ln w="30480">
             <a:solidFill>
               <a:srgbClr val="0D7870"/>
             </a:solidFill>
@@ -19358,14 +19358,14 @@
       </p:cxnSp>
       <p:sp>
         <p:nvSpPr>
-          <p:cNvPr id="73" name="TextBox 72"/>
-          <p:cNvSpPr txBox="1"/>
-          <p:nvPr/>
-        </p:nvSpPr>
-        <p:spPr>
-          <a:xfrm>
-            <a:off x="3941064" y="4517136"/>
-            <a:ext cx="1289304" cy="246888"/>
+          <p:cNvPr id="73" name="roadmap:activity:3:0"/>
+          <p:cNvSpPr txBox="1"/>
+          <p:nvPr/>
+        </p:nvSpPr>
+        <p:spPr>
+          <a:xfrm>
+            <a:off x="3738181" y="4517136"/>
+            <a:ext cx="1695068" cy="246888"/>
           </a:xfrm>
           <a:prstGeom prst="rect">
             <a:avLst/>
@@ -19391,7 +19391,7 @@
               </a:lnSpc>
             </a:pPr>
             <a:r>
-              <a:rPr sz="950" b="0" lang="ja-JP">
+              <a:rPr sz="1050" b="0" lang="ja-JP">
                 <a:solidFill>
                   <a:srgbClr val="202729"/>
                 </a:solidFill>
@@ -19406,7 +19406,7 @@
       </p:sp>
       <p:cxnSp>
         <p:nvCxnSpPr>
-          <p:cNvPr id="74" name="Connector 73"/>
+          <p:cNvPr id="74" name="roadmap:span:3:1"/>
           <p:cNvCxnSpPr/>
           <p:nvPr/>
         </p:nvCxnSpPr>
@@ -19418,7 +19418,7 @@
           <a:prstGeom prst="line">
             <a:avLst/>
           </a:prstGeom>
-          <a:ln w="17780">
+          <a:ln w="30480">
             <a:solidFill>
               <a:srgbClr val="0D7870"/>
             </a:solidFill>
@@ -19442,14 +19442,14 @@
       </p:cxnSp>
       <p:sp>
         <p:nvSpPr>
-          <p:cNvPr id="75" name="TextBox 74"/>
-          <p:cNvSpPr txBox="1"/>
-          <p:nvPr/>
-        </p:nvSpPr>
-        <p:spPr>
-          <a:xfrm>
-            <a:off x="5672708" y="4517136"/>
-            <a:ext cx="1289304" cy="246888"/>
+          <p:cNvPr id="75" name="roadmap:activity:3:1"/>
+          <p:cNvSpPr txBox="1"/>
+          <p:nvPr/>
+        </p:nvSpPr>
+        <p:spPr>
+          <a:xfrm>
+            <a:off x="5642990" y="4517136"/>
+            <a:ext cx="1348740" cy="246888"/>
           </a:xfrm>
           <a:prstGeom prst="rect">
             <a:avLst/>
@@ -19475,7 +19475,7 @@
               </a:lnSpc>
             </a:pPr>
             <a:r>
-              <a:rPr sz="950" b="0" lang="ja-JP">
+              <a:rPr sz="1050" b="0" lang="ja-JP">
                 <a:solidFill>
                   <a:srgbClr val="202729"/>
                 </a:solidFill>
@@ -19490,7 +19490,7 @@
       </p:sp>
       <p:cxnSp>
         <p:nvCxnSpPr>
-          <p:cNvPr id="76" name="Connector 75"/>
+          <p:cNvPr id="76" name="roadmap:span:3:2"/>
           <p:cNvCxnSpPr/>
           <p:nvPr/>
         </p:nvCxnSpPr>
@@ -19502,7 +19502,7 @@
           <a:prstGeom prst="line">
             <a:avLst/>
           </a:prstGeom>
-          <a:ln w="17780">
+          <a:ln w="30480">
             <a:solidFill>
               <a:srgbClr val="0D7870"/>
             </a:solidFill>
@@ -19526,14 +19526,14 @@
       </p:cxnSp>
       <p:sp>
         <p:nvSpPr>
-          <p:cNvPr id="77" name="TextBox 76"/>
-          <p:cNvSpPr txBox="1"/>
-          <p:nvPr/>
-        </p:nvSpPr>
-        <p:spPr>
-          <a:xfrm>
-            <a:off x="7058024" y="4517136"/>
-            <a:ext cx="1289304" cy="246888"/>
+          <p:cNvPr id="77" name="roadmap:activity:3:2"/>
+          <p:cNvSpPr txBox="1"/>
+          <p:nvPr/>
+        </p:nvSpPr>
+        <p:spPr>
+          <a:xfrm>
+            <a:off x="7028306" y="4517136"/>
+            <a:ext cx="1348739" cy="246888"/>
           </a:xfrm>
           <a:prstGeom prst="rect">
             <a:avLst/>
@@ -19559,7 +19559,7 @@
               </a:lnSpc>
             </a:pPr>
             <a:r>
-              <a:rPr sz="950" b="0" lang="ja-JP">
+              <a:rPr sz="1050" b="0" lang="ja-JP">
                 <a:solidFill>
                   <a:srgbClr val="202729"/>
                 </a:solidFill>
@@ -19574,7 +19574,7 @@
       </p:sp>
       <p:cxnSp>
         <p:nvCxnSpPr>
-          <p:cNvPr id="78" name="Connector 77"/>
+          <p:cNvPr id="78" name="roadmap:grid"/>
           <p:cNvCxnSpPr/>
           <p:nvPr/>
         </p:nvCxnSpPr>
@@ -19641,7 +19641,7 @@
               </a:lnSpc>
             </a:pPr>
             <a:r>
-              <a:rPr sz="1150" b="1" lang="ja-JP">
+              <a:rPr sz="1250" b="1" lang="ja-JP">
                 <a:solidFill>
                   <a:srgbClr val="0D7870"/>
                 </a:solidFill>
@@ -19656,7 +19656,7 @@
       </p:sp>
       <p:sp>
         <p:nvSpPr>
-          <p:cNvPr id="80" name="TextBox 79"/>
+          <p:cNvPr id="80" name="roadmap:track:4"/>
           <p:cNvSpPr txBox="1"/>
           <p:nvPr/>
         </p:nvSpPr>
@@ -19687,7 +19687,7 @@
               </a:lnSpc>
             </a:pPr>
             <a:r>
-              <a:rPr sz="1150" b="1" lang="ja-JP">
+              <a:rPr sz="1250" b="1" lang="ja-JP">
                 <a:solidFill>
                   <a:srgbClr val="182C43"/>
                 </a:solidFill>
@@ -19702,7 +19702,7 @@
       </p:sp>
       <p:cxnSp>
         <p:nvCxnSpPr>
-          <p:cNvPr id="81" name="Connector 80"/>
+          <p:cNvPr id="81" name="roadmap:span:4:0"/>
           <p:cNvCxnSpPr/>
           <p:nvPr/>
         </p:nvCxnSpPr>
@@ -19714,7 +19714,7 @@
           <a:prstGeom prst="line">
             <a:avLst/>
           </a:prstGeom>
-          <a:ln w="17780">
+          <a:ln w="30480">
             <a:solidFill>
               <a:srgbClr val="0D7870"/>
             </a:solidFill>
@@ -19738,14 +19738,14 @@
       </p:cxnSp>
       <p:sp>
         <p:nvSpPr>
-          <p:cNvPr id="82" name="TextBox 81"/>
-          <p:cNvSpPr txBox="1"/>
-          <p:nvPr/>
-        </p:nvSpPr>
-        <p:spPr>
-          <a:xfrm>
-            <a:off x="3941064" y="5001768"/>
-            <a:ext cx="1289304" cy="246888"/>
+          <p:cNvPr id="82" name="roadmap:activity:4:0"/>
+          <p:cNvSpPr txBox="1"/>
+          <p:nvPr/>
+        </p:nvSpPr>
+        <p:spPr>
+          <a:xfrm>
+            <a:off x="3232404" y="5001768"/>
+            <a:ext cx="2706624" cy="246888"/>
           </a:xfrm>
           <a:prstGeom prst="rect">
             <a:avLst/>
@@ -19771,7 +19771,7 @@
               </a:lnSpc>
             </a:pPr>
             <a:r>
-              <a:rPr sz="950" b="0" lang="ja-JP">
+              <a:rPr sz="1050" b="0" lang="ja-JP">
                 <a:solidFill>
                   <a:srgbClr val="202729"/>
                 </a:solidFill>
@@ -19786,7 +19786,7 @@
       </p:sp>
       <p:cxnSp>
         <p:nvCxnSpPr>
-          <p:cNvPr id="83" name="Connector 82"/>
+          <p:cNvPr id="83" name="roadmap:span:4:1"/>
           <p:cNvCxnSpPr/>
           <p:nvPr/>
         </p:nvCxnSpPr>
@@ -19798,7 +19798,7 @@
           <a:prstGeom prst="line">
             <a:avLst/>
           </a:prstGeom>
-          <a:ln w="17780">
+          <a:ln w="30480">
             <a:solidFill>
               <a:srgbClr val="0D7870"/>
             </a:solidFill>
@@ -19822,14 +19822,14 @@
       </p:cxnSp>
       <p:sp>
         <p:nvSpPr>
-          <p:cNvPr id="84" name="TextBox 83"/>
-          <p:cNvSpPr txBox="1"/>
-          <p:nvPr/>
-        </p:nvSpPr>
-        <p:spPr>
-          <a:xfrm>
-            <a:off x="5326379" y="5312664"/>
-            <a:ext cx="1289304" cy="246888"/>
+          <p:cNvPr id="84" name="roadmap:activity:4:1"/>
+          <p:cNvSpPr txBox="1"/>
+          <p:nvPr/>
+        </p:nvSpPr>
+        <p:spPr>
+          <a:xfrm>
+            <a:off x="4617719" y="5312664"/>
+            <a:ext cx="2706624" cy="246888"/>
           </a:xfrm>
           <a:prstGeom prst="rect">
             <a:avLst/>
@@ -19855,7 +19855,7 @@
               </a:lnSpc>
             </a:pPr>
             <a:r>
-              <a:rPr sz="950" b="0" lang="ja-JP">
+              <a:rPr sz="1050" b="0" lang="ja-JP">
                 <a:solidFill>
                   <a:srgbClr val="202729"/>
                 </a:solidFill>
@@ -19870,7 +19870,7 @@
       </p:sp>
       <p:cxnSp>
         <p:nvCxnSpPr>
-          <p:cNvPr id="85" name="Connector 84"/>
+          <p:cNvPr id="85" name="roadmap:span:4:2"/>
           <p:cNvCxnSpPr/>
           <p:nvPr/>
         </p:nvCxnSpPr>
@@ -19882,7 +19882,7 @@
           <a:prstGeom prst="line">
             <a:avLst/>
           </a:prstGeom>
-          <a:ln w="17780">
+          <a:ln w="30480">
             <a:solidFill>
               <a:srgbClr val="0D7870"/>
             </a:solidFill>
@@ -19906,14 +19906,14 @@
       </p:cxnSp>
       <p:sp>
         <p:nvSpPr>
-          <p:cNvPr id="86" name="TextBox 85"/>
-          <p:cNvSpPr txBox="1"/>
-          <p:nvPr/>
-        </p:nvSpPr>
-        <p:spPr>
-          <a:xfrm>
-            <a:off x="7404353" y="5001768"/>
-            <a:ext cx="1289304" cy="246888"/>
+          <p:cNvPr id="86" name="roadmap:activity:4:2"/>
+          <p:cNvSpPr txBox="1"/>
+          <p:nvPr/>
+        </p:nvSpPr>
+        <p:spPr>
+          <a:xfrm>
+            <a:off x="7201471" y="5001768"/>
+            <a:ext cx="1695069" cy="246888"/>
           </a:xfrm>
           <a:prstGeom prst="rect">
             <a:avLst/>
@@ -19939,7 +19939,7 @@
               </a:lnSpc>
             </a:pPr>
             <a:r>
-              <a:rPr sz="950" b="0" lang="ja-JP">
+              <a:rPr sz="1050" b="0" lang="ja-JP">
                 <a:solidFill>
                   <a:srgbClr val="202729"/>
                 </a:solidFill>
@@ -19954,7 +19954,7 @@
       </p:sp>
       <p:cxnSp>
         <p:nvCxnSpPr>
-          <p:cNvPr id="87" name="Connector 86"/>
+          <p:cNvPr id="87" name="roadmap:span:4:3"/>
           <p:cNvCxnSpPr/>
           <p:nvPr/>
         </p:nvCxnSpPr>
@@ -19966,7 +19966,7 @@
           <a:prstGeom prst="line">
             <a:avLst/>
           </a:prstGeom>
-          <a:ln w="17780">
+          <a:ln w="30480">
             <a:solidFill>
               <a:srgbClr val="C7583E"/>
             </a:solidFill>
@@ -19990,14 +19990,14 @@
       </p:cxnSp>
       <p:sp>
         <p:nvSpPr>
-          <p:cNvPr id="88" name="TextBox 87"/>
-          <p:cNvSpPr txBox="1"/>
-          <p:nvPr/>
-        </p:nvSpPr>
-        <p:spPr>
-          <a:xfrm>
-            <a:off x="9135999" y="5001768"/>
-            <a:ext cx="1289304" cy="246888"/>
+          <p:cNvPr id="88" name="roadmap:activity:4:3"/>
+          <p:cNvSpPr txBox="1"/>
+          <p:nvPr/>
+        </p:nvSpPr>
+        <p:spPr>
+          <a:xfrm>
+            <a:off x="8933116" y="5001768"/>
+            <a:ext cx="1695069" cy="246888"/>
           </a:xfrm>
           <a:prstGeom prst="rect">
             <a:avLst/>
@@ -20023,7 +20023,7 @@
               </a:lnSpc>
             </a:pPr>
             <a:r>
-              <a:rPr sz="950" b="1" lang="ja-JP">
+              <a:rPr sz="1050" b="1" lang="ja-JP">
                 <a:solidFill>
                   <a:srgbClr val="202729"/>
                 </a:solidFill>
@@ -20038,7 +20038,7 @@
       </p:sp>
       <p:cxnSp>
         <p:nvCxnSpPr>
-          <p:cNvPr id="89" name="Connector 88"/>
+          <p:cNvPr id="89" name="roadmap:grid"/>
           <p:cNvCxnSpPr/>
           <p:nvPr/>
         </p:nvCxnSpPr>

--- a/examples/gallery/pattern_gallery.pptx
+++ b/examples/gallery/pattern_gallery.pptx
@@ -48437,7 +48437,7 @@
         <p:spPr>
           <a:xfrm>
             <a:off x="502920" y="2188372"/>
-            <a:ext cx="4526280" cy="512064"/>
+            <a:ext cx="4929987" cy="512064"/>
           </a:xfrm>
           <a:prstGeom prst="roundRect">
             <a:avLst>
@@ -48468,8 +48468,8 @@
         </p:nvSpPr>
         <p:spPr>
           <a:xfrm>
-            <a:off x="6931152" y="2188372"/>
-            <a:ext cx="4757623" cy="512064"/>
+            <a:off x="6758787" y="2188372"/>
+            <a:ext cx="4929987" cy="512064"/>
           </a:xfrm>
           <a:prstGeom prst="roundRect">
             <a:avLst>
@@ -48501,7 +48501,7 @@
         <p:spPr>
           <a:xfrm>
             <a:off x="667512" y="2188372"/>
-            <a:ext cx="4197096" cy="512064"/>
+            <a:ext cx="4600803" cy="512064"/>
           </a:xfrm>
           <a:prstGeom prst="rect">
             <a:avLst/>
@@ -48546,8 +48546,8 @@
         </p:nvSpPr>
         <p:spPr>
           <a:xfrm>
-            <a:off x="7095744" y="2188372"/>
-            <a:ext cx="4428439" cy="512064"/>
+            <a:off x="6923379" y="2188372"/>
+            <a:ext cx="4600803" cy="512064"/>
           </a:xfrm>
           <a:prstGeom prst="rect">
             <a:avLst/>
@@ -48592,8 +48592,8 @@
         </p:nvSpPr>
         <p:spPr>
           <a:xfrm>
-            <a:off x="5212080" y="2307244"/>
-            <a:ext cx="1536192" cy="256032"/>
+            <a:off x="5615787" y="2307244"/>
+            <a:ext cx="960120" cy="256032"/>
           </a:xfrm>
           <a:prstGeom prst="rect">
             <a:avLst/>
@@ -48639,7 +48639,7 @@
         <p:spPr>
           <a:xfrm>
             <a:off x="502920" y="2773588"/>
-            <a:ext cx="4526280" cy="3108960"/>
+            <a:ext cx="4929987" cy="3108960"/>
           </a:xfrm>
           <a:prstGeom prst="rect">
             <a:avLst/>
@@ -48668,8 +48668,8 @@
         </p:nvSpPr>
         <p:spPr>
           <a:xfrm>
-            <a:off x="6931152" y="2773588"/>
-            <a:ext cx="4757623" cy="3108960"/>
+            <a:off x="6758787" y="2773588"/>
+            <a:ext cx="4929987" cy="3108960"/>
           </a:xfrm>
           <a:prstGeom prst="rect">
             <a:avLst/>
@@ -48698,7 +48698,7 @@
         </p:nvCxnSpPr>
         <p:spPr>
           <a:xfrm>
-            <a:off x="5029200" y="3084484"/>
+            <a:off x="5432907" y="3084484"/>
             <a:ext cx="182880" cy="0"/>
           </a:xfrm>
           <a:prstGeom prst="line">
@@ -48734,7 +48734,7 @@
         </p:nvCxnSpPr>
         <p:spPr>
           <a:xfrm>
-            <a:off x="6748272" y="3084484"/>
+            <a:off x="6575907" y="3084484"/>
             <a:ext cx="182880" cy="0"/>
           </a:xfrm>
           <a:prstGeom prst="line">
@@ -48771,7 +48771,7 @@
         <p:spPr>
           <a:xfrm>
             <a:off x="667512" y="3395380"/>
-            <a:ext cx="4197096" cy="0"/>
+            <a:ext cx="4600803" cy="0"/>
           </a:xfrm>
           <a:prstGeom prst="line">
             <a:avLst/>
@@ -48806,8 +48806,8 @@
         </p:nvCxnSpPr>
         <p:spPr>
           <a:xfrm>
-            <a:off x="7095744" y="3395380"/>
-            <a:ext cx="4428439" cy="0"/>
+            <a:off x="6923379" y="3395380"/>
+            <a:ext cx="4600804" cy="0"/>
           </a:xfrm>
           <a:prstGeom prst="line">
             <a:avLst/>
@@ -48842,7 +48842,7 @@
         </p:nvCxnSpPr>
         <p:spPr>
           <a:xfrm>
-            <a:off x="5029200" y="3706276"/>
+            <a:off x="5432907" y="3706276"/>
             <a:ext cx="182880" cy="0"/>
           </a:xfrm>
           <a:prstGeom prst="line">
@@ -48878,7 +48878,7 @@
         </p:nvCxnSpPr>
         <p:spPr>
           <a:xfrm>
-            <a:off x="6748272" y="3706276"/>
+            <a:off x="6575907" y="3706276"/>
             <a:ext cx="182880" cy="0"/>
           </a:xfrm>
           <a:prstGeom prst="line">
@@ -48915,7 +48915,7 @@
         <p:spPr>
           <a:xfrm>
             <a:off x="667512" y="4017172"/>
-            <a:ext cx="4197096" cy="0"/>
+            <a:ext cx="4600803" cy="0"/>
           </a:xfrm>
           <a:prstGeom prst="line">
             <a:avLst/>
@@ -48950,8 +48950,8 @@
         </p:nvCxnSpPr>
         <p:spPr>
           <a:xfrm>
-            <a:off x="7095744" y="4017172"/>
-            <a:ext cx="4428439" cy="0"/>
+            <a:off x="6923379" y="4017172"/>
+            <a:ext cx="4600804" cy="0"/>
           </a:xfrm>
           <a:prstGeom prst="line">
             <a:avLst/>
@@ -48986,7 +48986,7 @@
         </p:nvCxnSpPr>
         <p:spPr>
           <a:xfrm>
-            <a:off x="5029200" y="4328068"/>
+            <a:off x="5432907" y="4328068"/>
             <a:ext cx="182880" cy="0"/>
           </a:xfrm>
           <a:prstGeom prst="line">
@@ -49022,7 +49022,7 @@
         </p:nvCxnSpPr>
         <p:spPr>
           <a:xfrm>
-            <a:off x="6748272" y="4328068"/>
+            <a:off x="6575907" y="4328068"/>
             <a:ext cx="182880" cy="0"/>
           </a:xfrm>
           <a:prstGeom prst="line">
@@ -49059,7 +49059,7 @@
         <p:spPr>
           <a:xfrm>
             <a:off x="667512" y="4638964"/>
-            <a:ext cx="4197096" cy="0"/>
+            <a:ext cx="4600803" cy="0"/>
           </a:xfrm>
           <a:prstGeom prst="line">
             <a:avLst/>
@@ -49094,8 +49094,8 @@
         </p:nvCxnSpPr>
         <p:spPr>
           <a:xfrm>
-            <a:off x="7095744" y="4638964"/>
-            <a:ext cx="4428439" cy="0"/>
+            <a:off x="6923379" y="4638964"/>
+            <a:ext cx="4600804" cy="0"/>
           </a:xfrm>
           <a:prstGeom prst="line">
             <a:avLst/>
@@ -49130,7 +49130,7 @@
         </p:nvCxnSpPr>
         <p:spPr>
           <a:xfrm>
-            <a:off x="5029200" y="4949860"/>
+            <a:off x="5432907" y="4949860"/>
             <a:ext cx="182880" cy="0"/>
           </a:xfrm>
           <a:prstGeom prst="line">
@@ -49166,7 +49166,7 @@
         </p:nvCxnSpPr>
         <p:spPr>
           <a:xfrm>
-            <a:off x="6748272" y="4949860"/>
+            <a:off x="6575907" y="4949860"/>
             <a:ext cx="182880" cy="0"/>
           </a:xfrm>
           <a:prstGeom prst="line">
@@ -49203,7 +49203,7 @@
         <p:spPr>
           <a:xfrm>
             <a:off x="667512" y="5260756"/>
-            <a:ext cx="4197096" cy="0"/>
+            <a:ext cx="4600803" cy="0"/>
           </a:xfrm>
           <a:prstGeom prst="line">
             <a:avLst/>
@@ -49238,8 +49238,8 @@
         </p:nvCxnSpPr>
         <p:spPr>
           <a:xfrm>
-            <a:off x="7095744" y="5260756"/>
-            <a:ext cx="4428439" cy="0"/>
+            <a:off x="6923379" y="5260756"/>
+            <a:ext cx="4600804" cy="0"/>
           </a:xfrm>
           <a:prstGeom prst="line">
             <a:avLst/>
@@ -49274,7 +49274,7 @@
         </p:nvCxnSpPr>
         <p:spPr>
           <a:xfrm>
-            <a:off x="5029200" y="5571652"/>
+            <a:off x="5432907" y="5571652"/>
             <a:ext cx="182880" cy="0"/>
           </a:xfrm>
           <a:prstGeom prst="line">
@@ -49310,7 +49310,7 @@
         </p:nvCxnSpPr>
         <p:spPr>
           <a:xfrm>
-            <a:off x="6748272" y="5571652"/>
+            <a:off x="6575907" y="5571652"/>
             <a:ext cx="182880" cy="0"/>
           </a:xfrm>
           <a:prstGeom prst="line">
@@ -49340,14 +49340,14 @@
       </p:cxnSp>
       <p:sp>
         <p:nvSpPr>
-          <p:cNvPr id="31" name="TextBox 30"/>
+          <p:cNvPr id="31" name="paired:left:0"/>
           <p:cNvSpPr txBox="1"/>
           <p:nvPr/>
         </p:nvSpPr>
         <p:spPr>
           <a:xfrm>
             <a:off x="685800" y="2773588"/>
-            <a:ext cx="4160520" cy="621792"/>
+            <a:ext cx="4564227" cy="621792"/>
           </a:xfrm>
           <a:prstGeom prst="rect">
             <a:avLst/>
@@ -49392,8 +49392,8 @@
         </p:nvSpPr>
         <p:spPr>
           <a:xfrm>
-            <a:off x="5266944" y="2883316"/>
-            <a:ext cx="1426464" cy="402336"/>
+            <a:off x="5670651" y="2883316"/>
+            <a:ext cx="850392" cy="402336"/>
           </a:xfrm>
           <a:prstGeom prst="rect">
             <a:avLst/>
@@ -49416,14 +49416,14 @@
       </p:sp>
       <p:sp>
         <p:nvSpPr>
-          <p:cNvPr id="33" name="TextBox 32"/>
-          <p:cNvSpPr txBox="1"/>
-          <p:nvPr/>
-        </p:nvSpPr>
-        <p:spPr>
-          <a:xfrm>
-            <a:off x="5266944" y="2883316"/>
-            <a:ext cx="1426464" cy="402336"/>
+          <p:cNvPr id="33" name="paired:criterion:0"/>
+          <p:cNvSpPr txBox="1"/>
+          <p:nvPr/>
+        </p:nvSpPr>
+        <p:spPr>
+          <a:xfrm>
+            <a:off x="5670651" y="2883316"/>
+            <a:ext cx="850392" cy="402336"/>
           </a:xfrm>
           <a:prstGeom prst="rect">
             <a:avLst/>
@@ -49462,14 +49462,14 @@
       </p:sp>
       <p:sp>
         <p:nvSpPr>
-          <p:cNvPr id="34" name="TextBox 33"/>
-          <p:cNvSpPr txBox="1"/>
-          <p:nvPr/>
-        </p:nvSpPr>
-        <p:spPr>
-          <a:xfrm>
-            <a:off x="7114032" y="2773588"/>
-            <a:ext cx="4391863" cy="621792"/>
+          <p:cNvPr id="34" name="paired:right:0"/>
+          <p:cNvSpPr txBox="1"/>
+          <p:nvPr/>
+        </p:nvSpPr>
+        <p:spPr>
+          <a:xfrm>
+            <a:off x="6941667" y="2773588"/>
+            <a:ext cx="4564227" cy="621792"/>
           </a:xfrm>
           <a:prstGeom prst="rect">
             <a:avLst/>
@@ -49508,14 +49508,14 @@
       </p:sp>
       <p:sp>
         <p:nvSpPr>
-          <p:cNvPr id="35" name="TextBox 34"/>
+          <p:cNvPr id="35" name="paired:left:1"/>
           <p:cNvSpPr txBox="1"/>
           <p:nvPr/>
         </p:nvSpPr>
         <p:spPr>
           <a:xfrm>
             <a:off x="685800" y="3395380"/>
-            <a:ext cx="4160520" cy="621792"/>
+            <a:ext cx="4564227" cy="621792"/>
           </a:xfrm>
           <a:prstGeom prst="rect">
             <a:avLst/>
@@ -49560,8 +49560,8 @@
         </p:nvSpPr>
         <p:spPr>
           <a:xfrm>
-            <a:off x="5266944" y="3505108"/>
-            <a:ext cx="1426464" cy="402336"/>
+            <a:off x="5670651" y="3505108"/>
+            <a:ext cx="850392" cy="402336"/>
           </a:xfrm>
           <a:prstGeom prst="rect">
             <a:avLst/>
@@ -49584,14 +49584,14 @@
       </p:sp>
       <p:sp>
         <p:nvSpPr>
-          <p:cNvPr id="37" name="TextBox 36"/>
-          <p:cNvSpPr txBox="1"/>
-          <p:nvPr/>
-        </p:nvSpPr>
-        <p:spPr>
-          <a:xfrm>
-            <a:off x="5266944" y="3505108"/>
-            <a:ext cx="1426464" cy="402336"/>
+          <p:cNvPr id="37" name="paired:criterion:1"/>
+          <p:cNvSpPr txBox="1"/>
+          <p:nvPr/>
+        </p:nvSpPr>
+        <p:spPr>
+          <a:xfrm>
+            <a:off x="5670651" y="3505108"/>
+            <a:ext cx="850392" cy="402336"/>
           </a:xfrm>
           <a:prstGeom prst="rect">
             <a:avLst/>
@@ -49630,14 +49630,14 @@
       </p:sp>
       <p:sp>
         <p:nvSpPr>
-          <p:cNvPr id="38" name="TextBox 37"/>
-          <p:cNvSpPr txBox="1"/>
-          <p:nvPr/>
-        </p:nvSpPr>
-        <p:spPr>
-          <a:xfrm>
-            <a:off x="7114032" y="3395380"/>
-            <a:ext cx="4391863" cy="621792"/>
+          <p:cNvPr id="38" name="paired:right:1"/>
+          <p:cNvSpPr txBox="1"/>
+          <p:nvPr/>
+        </p:nvSpPr>
+        <p:spPr>
+          <a:xfrm>
+            <a:off x="6941667" y="3395380"/>
+            <a:ext cx="4564227" cy="621792"/>
           </a:xfrm>
           <a:prstGeom prst="rect">
             <a:avLst/>
@@ -49676,14 +49676,14 @@
       </p:sp>
       <p:sp>
         <p:nvSpPr>
-          <p:cNvPr id="39" name="TextBox 38"/>
+          <p:cNvPr id="39" name="paired:left:2"/>
           <p:cNvSpPr txBox="1"/>
           <p:nvPr/>
         </p:nvSpPr>
         <p:spPr>
           <a:xfrm>
             <a:off x="685800" y="4017172"/>
-            <a:ext cx="4160520" cy="621792"/>
+            <a:ext cx="4564227" cy="621792"/>
           </a:xfrm>
           <a:prstGeom prst="rect">
             <a:avLst/>
@@ -49728,8 +49728,8 @@
         </p:nvSpPr>
         <p:spPr>
           <a:xfrm>
-            <a:off x="5266944" y="4126900"/>
-            <a:ext cx="1426464" cy="402336"/>
+            <a:off x="5670651" y="4126900"/>
+            <a:ext cx="850392" cy="402336"/>
           </a:xfrm>
           <a:prstGeom prst="rect">
             <a:avLst/>
@@ -49752,14 +49752,14 @@
       </p:sp>
       <p:sp>
         <p:nvSpPr>
-          <p:cNvPr id="41" name="TextBox 40"/>
-          <p:cNvSpPr txBox="1"/>
-          <p:nvPr/>
-        </p:nvSpPr>
-        <p:spPr>
-          <a:xfrm>
-            <a:off x="5266944" y="4126900"/>
-            <a:ext cx="1426464" cy="402336"/>
+          <p:cNvPr id="41" name="paired:criterion:2"/>
+          <p:cNvSpPr txBox="1"/>
+          <p:nvPr/>
+        </p:nvSpPr>
+        <p:spPr>
+          <a:xfrm>
+            <a:off x="5670651" y="4126900"/>
+            <a:ext cx="850392" cy="402336"/>
           </a:xfrm>
           <a:prstGeom prst="rect">
             <a:avLst/>
@@ -49798,14 +49798,14 @@
       </p:sp>
       <p:sp>
         <p:nvSpPr>
-          <p:cNvPr id="42" name="TextBox 41"/>
-          <p:cNvSpPr txBox="1"/>
-          <p:nvPr/>
-        </p:nvSpPr>
-        <p:spPr>
-          <a:xfrm>
-            <a:off x="7114032" y="4017172"/>
-            <a:ext cx="4391863" cy="621792"/>
+          <p:cNvPr id="42" name="paired:right:2"/>
+          <p:cNvSpPr txBox="1"/>
+          <p:nvPr/>
+        </p:nvSpPr>
+        <p:spPr>
+          <a:xfrm>
+            <a:off x="6941667" y="4017172"/>
+            <a:ext cx="4564227" cy="621792"/>
           </a:xfrm>
           <a:prstGeom prst="rect">
             <a:avLst/>
@@ -49844,14 +49844,14 @@
       </p:sp>
       <p:sp>
         <p:nvSpPr>
-          <p:cNvPr id="43" name="TextBox 42"/>
+          <p:cNvPr id="43" name="paired:left:3"/>
           <p:cNvSpPr txBox="1"/>
           <p:nvPr/>
         </p:nvSpPr>
         <p:spPr>
           <a:xfrm>
             <a:off x="685800" y="4638964"/>
-            <a:ext cx="4160520" cy="621792"/>
+            <a:ext cx="4564227" cy="621792"/>
           </a:xfrm>
           <a:prstGeom prst="rect">
             <a:avLst/>
@@ -49896,8 +49896,8 @@
         </p:nvSpPr>
         <p:spPr>
           <a:xfrm>
-            <a:off x="5266944" y="4748692"/>
-            <a:ext cx="1426464" cy="402336"/>
+            <a:off x="5670651" y="4748692"/>
+            <a:ext cx="850392" cy="402336"/>
           </a:xfrm>
           <a:prstGeom prst="rect">
             <a:avLst/>
@@ -49920,14 +49920,14 @@
       </p:sp>
       <p:sp>
         <p:nvSpPr>
-          <p:cNvPr id="45" name="TextBox 44"/>
-          <p:cNvSpPr txBox="1"/>
-          <p:nvPr/>
-        </p:nvSpPr>
-        <p:spPr>
-          <a:xfrm>
-            <a:off x="5266944" y="4748692"/>
-            <a:ext cx="1426464" cy="402336"/>
+          <p:cNvPr id="45" name="paired:criterion:3"/>
+          <p:cNvSpPr txBox="1"/>
+          <p:nvPr/>
+        </p:nvSpPr>
+        <p:spPr>
+          <a:xfrm>
+            <a:off x="5670651" y="4748692"/>
+            <a:ext cx="850392" cy="402336"/>
           </a:xfrm>
           <a:prstGeom prst="rect">
             <a:avLst/>
@@ -49966,14 +49966,14 @@
       </p:sp>
       <p:sp>
         <p:nvSpPr>
-          <p:cNvPr id="46" name="TextBox 45"/>
-          <p:cNvSpPr txBox="1"/>
-          <p:nvPr/>
-        </p:nvSpPr>
-        <p:spPr>
-          <a:xfrm>
-            <a:off x="7114032" y="4638964"/>
-            <a:ext cx="4391863" cy="621792"/>
+          <p:cNvPr id="46" name="paired:right:3"/>
+          <p:cNvSpPr txBox="1"/>
+          <p:nvPr/>
+        </p:nvSpPr>
+        <p:spPr>
+          <a:xfrm>
+            <a:off x="6941667" y="4638964"/>
+            <a:ext cx="4564227" cy="621792"/>
           </a:xfrm>
           <a:prstGeom prst="rect">
             <a:avLst/>
@@ -50012,14 +50012,14 @@
       </p:sp>
       <p:sp>
         <p:nvSpPr>
-          <p:cNvPr id="47" name="TextBox 46"/>
+          <p:cNvPr id="47" name="paired:left:4"/>
           <p:cNvSpPr txBox="1"/>
           <p:nvPr/>
         </p:nvSpPr>
         <p:spPr>
           <a:xfrm>
             <a:off x="685800" y="5260756"/>
-            <a:ext cx="4160520" cy="621792"/>
+            <a:ext cx="4564227" cy="621792"/>
           </a:xfrm>
           <a:prstGeom prst="rect">
             <a:avLst/>
@@ -50064,8 +50064,8 @@
         </p:nvSpPr>
         <p:spPr>
           <a:xfrm>
-            <a:off x="5266944" y="5370484"/>
-            <a:ext cx="1426464" cy="402336"/>
+            <a:off x="5670651" y="5370484"/>
+            <a:ext cx="850392" cy="402336"/>
           </a:xfrm>
           <a:prstGeom prst="rect">
             <a:avLst/>
@@ -50088,14 +50088,14 @@
       </p:sp>
       <p:sp>
         <p:nvSpPr>
-          <p:cNvPr id="49" name="TextBox 48"/>
-          <p:cNvSpPr txBox="1"/>
-          <p:nvPr/>
-        </p:nvSpPr>
-        <p:spPr>
-          <a:xfrm>
-            <a:off x="5266944" y="5370484"/>
-            <a:ext cx="1426464" cy="402336"/>
+          <p:cNvPr id="49" name="paired:criterion:4"/>
+          <p:cNvSpPr txBox="1"/>
+          <p:nvPr/>
+        </p:nvSpPr>
+        <p:spPr>
+          <a:xfrm>
+            <a:off x="5670651" y="5370484"/>
+            <a:ext cx="850392" cy="402336"/>
           </a:xfrm>
           <a:prstGeom prst="rect">
             <a:avLst/>
@@ -50134,14 +50134,14 @@
       </p:sp>
       <p:sp>
         <p:nvSpPr>
-          <p:cNvPr id="50" name="TextBox 49"/>
-          <p:cNvSpPr txBox="1"/>
-          <p:nvPr/>
-        </p:nvSpPr>
-        <p:spPr>
-          <a:xfrm>
-            <a:off x="7114032" y="5260756"/>
-            <a:ext cx="4391863" cy="621792"/>
+          <p:cNvPr id="50" name="paired:right:4"/>
+          <p:cNvSpPr txBox="1"/>
+          <p:nvPr/>
+        </p:nvSpPr>
+        <p:spPr>
+          <a:xfrm>
+            <a:off x="6941667" y="5260756"/>
+            <a:ext cx="4564227" cy="621792"/>
           </a:xfrm>
           <a:prstGeom prst="rect">
             <a:avLst/>
@@ -50186,7 +50186,7 @@
         </p:nvSpPr>
         <p:spPr>
           <a:xfrm>
-            <a:off x="4983480" y="3038764"/>
+            <a:off x="5387187" y="3038764"/>
             <a:ext cx="91440" cy="91440"/>
           </a:xfrm>
           <a:prstGeom prst="ellipse">
@@ -50216,7 +50216,7 @@
         </p:nvSpPr>
         <p:spPr>
           <a:xfrm>
-            <a:off x="6885432" y="3038764"/>
+            <a:off x="6713067" y="3038764"/>
             <a:ext cx="91440" cy="91440"/>
           </a:xfrm>
           <a:prstGeom prst="ellipse">
@@ -50246,7 +50246,7 @@
         </p:nvSpPr>
         <p:spPr>
           <a:xfrm>
-            <a:off x="4983480" y="3660556"/>
+            <a:off x="5387187" y="3660556"/>
             <a:ext cx="91440" cy="91440"/>
           </a:xfrm>
           <a:prstGeom prst="ellipse">
@@ -50276,7 +50276,7 @@
         </p:nvSpPr>
         <p:spPr>
           <a:xfrm>
-            <a:off x="6885432" y="3660556"/>
+            <a:off x="6713067" y="3660556"/>
             <a:ext cx="91440" cy="91440"/>
           </a:xfrm>
           <a:prstGeom prst="ellipse">
@@ -50306,7 +50306,7 @@
         </p:nvSpPr>
         <p:spPr>
           <a:xfrm>
-            <a:off x="4983480" y="4282348"/>
+            <a:off x="5387187" y="4282348"/>
             <a:ext cx="91440" cy="91440"/>
           </a:xfrm>
           <a:prstGeom prst="ellipse">
@@ -50336,7 +50336,7 @@
         </p:nvSpPr>
         <p:spPr>
           <a:xfrm>
-            <a:off x="6885432" y="4282348"/>
+            <a:off x="6713067" y="4282348"/>
             <a:ext cx="91440" cy="91440"/>
           </a:xfrm>
           <a:prstGeom prst="ellipse">
@@ -50366,7 +50366,7 @@
         </p:nvSpPr>
         <p:spPr>
           <a:xfrm>
-            <a:off x="4983480" y="4904140"/>
+            <a:off x="5387187" y="4904140"/>
             <a:ext cx="91440" cy="91440"/>
           </a:xfrm>
           <a:prstGeom prst="ellipse">
@@ -50396,7 +50396,7 @@
         </p:nvSpPr>
         <p:spPr>
           <a:xfrm>
-            <a:off x="6885432" y="4904140"/>
+            <a:off x="6713067" y="4904140"/>
             <a:ext cx="91440" cy="91440"/>
           </a:xfrm>
           <a:prstGeom prst="ellipse">
@@ -50426,7 +50426,7 @@
         </p:nvSpPr>
         <p:spPr>
           <a:xfrm>
-            <a:off x="4983480" y="5525932"/>
+            <a:off x="5387187" y="5525932"/>
             <a:ext cx="91440" cy="91440"/>
           </a:xfrm>
           <a:prstGeom prst="ellipse">
@@ -50456,7 +50456,7 @@
         </p:nvSpPr>
         <p:spPr>
           <a:xfrm>
-            <a:off x="6885432" y="5525932"/>
+            <a:off x="6713067" y="5525932"/>
             <a:ext cx="91440" cy="91440"/>
           </a:xfrm>
           <a:prstGeom prst="ellipse">

--- a/examples/gallery/pattern_gallery.pptx
+++ b/examples/gallery/pattern_gallery.pptx
@@ -50945,7 +50945,7 @@
       </p:cxnSp>
       <p:cxnSp>
         <p:nvCxnSpPr>
-          <p:cNvPr id="9" name="Connector 8"/>
+          <p:cNvPr id="9" name="mapping:crossing-mask:0"/>
           <p:cNvCxnSpPr/>
           <p:nvPr/>
         </p:nvCxnSpPr>
@@ -50981,7 +50981,7 @@
       </p:cxnSp>
       <p:cxnSp>
         <p:nvCxnSpPr>
-          <p:cNvPr id="10" name="Connector 9"/>
+          <p:cNvPr id="10" name="mapping:link:0"/>
           <p:cNvCxnSpPr/>
           <p:nvPr/>
         </p:nvCxnSpPr>
@@ -51018,14 +51018,14 @@
       </p:cxnSp>
       <p:cxnSp>
         <p:nvCxnSpPr>
-          <p:cNvPr id="11" name="Connector 10"/>
+          <p:cNvPr id="11" name="mapping:crossing-mask:1"/>
           <p:cNvCxnSpPr/>
           <p:nvPr/>
         </p:nvCxnSpPr>
         <p:spPr>
           <a:xfrm>
-            <a:off x="4855464" y="3721608"/>
-            <a:ext cx="2480767" cy="0"/>
+            <a:off x="4855464" y="3547872"/>
+            <a:ext cx="2480767" cy="173736"/>
           </a:xfrm>
           <a:prstGeom prst="line">
             <a:avLst/>
@@ -51054,14 +51054,14 @@
       </p:cxnSp>
       <p:cxnSp>
         <p:nvCxnSpPr>
-          <p:cNvPr id="12" name="Connector 11"/>
+          <p:cNvPr id="12" name="mapping:link:1"/>
           <p:cNvCxnSpPr/>
           <p:nvPr/>
         </p:nvCxnSpPr>
         <p:spPr>
           <a:xfrm>
-            <a:off x="4855464" y="3721608"/>
-            <a:ext cx="2480767" cy="0"/>
+            <a:off x="4855464" y="3547872"/>
+            <a:ext cx="2480767" cy="173736"/>
           </a:xfrm>
           <a:prstGeom prst="line">
             <a:avLst/>
@@ -51091,14 +51091,14 @@
       </p:cxnSp>
       <p:cxnSp>
         <p:nvCxnSpPr>
-          <p:cNvPr id="13" name="Connector 12"/>
+          <p:cNvPr id="13" name="mapping:crossing-mask:2"/>
           <p:cNvCxnSpPr/>
           <p:nvPr/>
         </p:nvCxnSpPr>
         <p:spPr>
           <a:xfrm>
-            <a:off x="4855464" y="3721608"/>
-            <a:ext cx="2480767" cy="649224"/>
+            <a:off x="4855464" y="3895344"/>
+            <a:ext cx="2480767" cy="301752"/>
           </a:xfrm>
           <a:prstGeom prst="line">
             <a:avLst/>
@@ -51127,14 +51127,14 @@
       </p:cxnSp>
       <p:cxnSp>
         <p:nvCxnSpPr>
-          <p:cNvPr id="14" name="Connector 13"/>
+          <p:cNvPr id="14" name="mapping:link:2"/>
           <p:cNvCxnSpPr/>
           <p:nvPr/>
         </p:nvCxnSpPr>
         <p:spPr>
           <a:xfrm>
-            <a:off x="4855464" y="3721608"/>
-            <a:ext cx="2480767" cy="649224"/>
+            <a:off x="4855464" y="3895344"/>
+            <a:ext cx="2480767" cy="301752"/>
           </a:xfrm>
           <a:prstGeom prst="line">
             <a:avLst/>
@@ -51164,7 +51164,7 @@
       </p:cxnSp>
       <p:cxnSp>
         <p:nvCxnSpPr>
-          <p:cNvPr id="15" name="Connector 14"/>
+          <p:cNvPr id="15" name="mapping:crossing-mask:3"/>
           <p:cNvCxnSpPr/>
           <p:nvPr/>
         </p:nvCxnSpPr>
@@ -51200,7 +51200,7 @@
       </p:cxnSp>
       <p:cxnSp>
         <p:nvCxnSpPr>
-          <p:cNvPr id="16" name="Connector 15"/>
+          <p:cNvPr id="16" name="mapping:link:3"/>
           <p:cNvCxnSpPr/>
           <p:nvPr/>
         </p:nvCxnSpPr>
@@ -51237,7 +51237,7 @@
       </p:cxnSp>
       <p:cxnSp>
         <p:nvCxnSpPr>
-          <p:cNvPr id="17" name="Connector 16"/>
+          <p:cNvPr id="17" name="mapping:crossing-mask:4"/>
           <p:cNvCxnSpPr/>
           <p:nvPr/>
         </p:nvCxnSpPr>
@@ -51273,7 +51273,7 @@
       </p:cxnSp>
       <p:cxnSp>
         <p:nvCxnSpPr>
-          <p:cNvPr id="18" name="Connector 17"/>
+          <p:cNvPr id="18" name="mapping:link:4"/>
           <p:cNvCxnSpPr/>
           <p:nvPr/>
         </p:nvCxnSpPr>
@@ -51310,14 +51310,14 @@
       </p:cxnSp>
       <p:cxnSp>
         <p:nvCxnSpPr>
-          <p:cNvPr id="19" name="Connector 18"/>
+          <p:cNvPr id="19" name="mapping:crossing-mask:5"/>
           <p:cNvCxnSpPr/>
           <p:nvPr/>
         </p:nvCxnSpPr>
         <p:spPr>
           <a:xfrm>
             <a:off x="4855464" y="4370832"/>
-            <a:ext cx="2480767" cy="0"/>
+            <a:ext cx="2480767" cy="173736"/>
           </a:xfrm>
           <a:prstGeom prst="line">
             <a:avLst/>
@@ -51346,14 +51346,14 @@
       </p:cxnSp>
       <p:cxnSp>
         <p:nvCxnSpPr>
-          <p:cNvPr id="20" name="Connector 19"/>
+          <p:cNvPr id="20" name="mapping:link:5"/>
           <p:cNvCxnSpPr/>
           <p:nvPr/>
         </p:nvCxnSpPr>
         <p:spPr>
           <a:xfrm>
             <a:off x="4855464" y="4370832"/>
-            <a:ext cx="2480767" cy="0"/>
+            <a:ext cx="2480767" cy="173736"/>
           </a:xfrm>
           <a:prstGeom prst="line">
             <a:avLst/>
@@ -51383,7 +51383,7 @@
       </p:cxnSp>
       <p:sp>
         <p:nvSpPr>
-          <p:cNvPr id="21" name="Rectangle 20"/>
+          <p:cNvPr id="21" name="mapping:item:left:manual"/>
           <p:cNvSpPr/>
           <p:nvPr/>
         </p:nvSpPr>
@@ -51489,7 +51489,7 @@
       </p:sp>
       <p:sp>
         <p:nvSpPr>
-          <p:cNvPr id="24" name="TextBox 23"/>
+          <p:cNvPr id="24" name="mapping:text:left:manual"/>
           <p:cNvSpPr txBox="1"/>
           <p:nvPr/>
         </p:nvSpPr>
@@ -51571,7 +51571,7 @@
       </p:cxnSp>
       <p:sp>
         <p:nvSpPr>
-          <p:cNvPr id="26" name="Rectangle 25"/>
+          <p:cNvPr id="26" name="mapping:item:left:approval"/>
           <p:cNvSpPr/>
           <p:nvPr/>
         </p:nvSpPr>
@@ -51677,7 +51677,7 @@
       </p:sp>
       <p:sp>
         <p:nvSpPr>
-          <p:cNvPr id="29" name="TextBox 28"/>
+          <p:cNvPr id="29" name="mapping:text:left:approval"/>
           <p:cNvSpPr txBox="1"/>
           <p:nvPr/>
         </p:nvSpPr>
@@ -51759,7 +51759,7 @@
       </p:cxnSp>
       <p:sp>
         <p:nvSpPr>
-          <p:cNvPr id="31" name="Rectangle 30"/>
+          <p:cNvPr id="31" name="mapping:item:left:data"/>
           <p:cNvSpPr/>
           <p:nvPr/>
         </p:nvSpPr>
@@ -51865,7 +51865,7 @@
       </p:sp>
       <p:sp>
         <p:nvSpPr>
-          <p:cNvPr id="34" name="TextBox 33"/>
+          <p:cNvPr id="34" name="mapping:text:left:data"/>
           <p:cNvSpPr txBox="1"/>
           <p:nvPr/>
         </p:nvSpPr>
@@ -51947,7 +51947,7 @@
       </p:cxnSp>
       <p:sp>
         <p:nvSpPr>
-          <p:cNvPr id="36" name="Rectangle 35"/>
+          <p:cNvPr id="36" name="mapping:item:left:visibility"/>
           <p:cNvSpPr/>
           <p:nvPr/>
         </p:nvSpPr>
@@ -52053,7 +52053,7 @@
       </p:sp>
       <p:sp>
         <p:nvSpPr>
-          <p:cNvPr id="39" name="TextBox 38"/>
+          <p:cNvPr id="39" name="mapping:text:left:visibility"/>
           <p:cNvSpPr txBox="1"/>
           <p:nvPr/>
         </p:nvSpPr>
@@ -52135,7 +52135,7 @@
       </p:cxnSp>
       <p:sp>
         <p:nvSpPr>
-          <p:cNvPr id="41" name="Rectangle 40"/>
+          <p:cNvPr id="41" name="mapping:item:left:quality"/>
           <p:cNvSpPr/>
           <p:nvPr/>
         </p:nvSpPr>
@@ -52241,7 +52241,7 @@
       </p:sp>
       <p:sp>
         <p:nvSpPr>
-          <p:cNvPr id="44" name="TextBox 43"/>
+          <p:cNvPr id="44" name="mapping:text:left:quality"/>
           <p:cNvSpPr txBox="1"/>
           <p:nvPr/>
         </p:nvSpPr>
@@ -52287,7 +52287,7 @@
       </p:sp>
       <p:sp>
         <p:nvSpPr>
-          <p:cNvPr id="45" name="Rectangle 44"/>
+          <p:cNvPr id="45" name="mapping:item:right:standardize"/>
           <p:cNvSpPr/>
           <p:nvPr/>
         </p:nvSpPr>
@@ -52393,7 +52393,7 @@
       </p:sp>
       <p:sp>
         <p:nvSpPr>
-          <p:cNvPr id="48" name="TextBox 47"/>
+          <p:cNvPr id="48" name="mapping:text:right:standardize"/>
           <p:cNvSpPr txBox="1"/>
           <p:nvPr/>
         </p:nvSpPr>
@@ -52475,7 +52475,7 @@
       </p:cxnSp>
       <p:sp>
         <p:nvSpPr>
-          <p:cNvPr id="50" name="Rectangle 49"/>
+          <p:cNvPr id="50" name="mapping:item:right:rules"/>
           <p:cNvSpPr/>
           <p:nvPr/>
         </p:nvSpPr>
@@ -52581,7 +52581,7 @@
       </p:sp>
       <p:sp>
         <p:nvSpPr>
-          <p:cNvPr id="53" name="TextBox 52"/>
+          <p:cNvPr id="53" name="mapping:text:right:rules"/>
           <p:cNvSpPr txBox="1"/>
           <p:nvPr/>
         </p:nvSpPr>
@@ -52663,7 +52663,7 @@
       </p:cxnSp>
       <p:sp>
         <p:nvSpPr>
-          <p:cNvPr id="55" name="Rectangle 54"/>
+          <p:cNvPr id="55" name="mapping:item:right:integrate"/>
           <p:cNvSpPr/>
           <p:nvPr/>
         </p:nvSpPr>
@@ -52769,7 +52769,7 @@
       </p:sp>
       <p:sp>
         <p:nvSpPr>
-          <p:cNvPr id="58" name="TextBox 57"/>
+          <p:cNvPr id="58" name="mapping:text:right:integrate"/>
           <p:cNvSpPr txBox="1"/>
           <p:nvPr/>
         </p:nvSpPr>
@@ -52851,7 +52851,7 @@
       </p:cxnSp>
       <p:sp>
         <p:nvSpPr>
-          <p:cNvPr id="60" name="Rectangle 59"/>
+          <p:cNvPr id="60" name="mapping:item:right:dashboard"/>
           <p:cNvSpPr/>
           <p:nvPr/>
         </p:nvSpPr>
@@ -52957,7 +52957,7 @@
       </p:sp>
       <p:sp>
         <p:nvSpPr>
-          <p:cNvPr id="63" name="TextBox 62"/>
+          <p:cNvPr id="63" name="mapping:text:right:dashboard"/>
           <p:cNvSpPr txBox="1"/>
           <p:nvPr/>
         </p:nvSpPr>
@@ -53039,7 +53039,7 @@
       </p:cxnSp>
       <p:sp>
         <p:nvSpPr>
-          <p:cNvPr id="65" name="Rectangle 64"/>
+          <p:cNvPr id="65" name="mapping:item:right:review"/>
           <p:cNvSpPr/>
           <p:nvPr/>
         </p:nvSpPr>
@@ -53145,7 +53145,7 @@
       </p:sp>
       <p:sp>
         <p:nvSpPr>
-          <p:cNvPr id="68" name="TextBox 67"/>
+          <p:cNvPr id="68" name="mapping:text:right:review"/>
           <p:cNvSpPr txBox="1"/>
           <p:nvPr/>
         </p:nvSpPr>
@@ -53191,14 +53191,14 @@
       </p:sp>
       <p:sp>
         <p:nvSpPr>
-          <p:cNvPr id="69" name="Oval 68"/>
+          <p:cNvPr id="69" name="mapping:port:left:0"/>
           <p:cNvSpPr/>
           <p:nvPr/>
         </p:nvSpPr>
         <p:spPr>
           <a:xfrm>
-            <a:off x="4818888" y="2386584"/>
-            <a:ext cx="73152" cy="73152"/>
+            <a:off x="4828031" y="2395728"/>
+            <a:ext cx="54864" cy="54864"/>
           </a:xfrm>
           <a:prstGeom prst="ellipse">
             <a:avLst/>
@@ -53221,14 +53221,44 @@
       </p:sp>
       <p:sp>
         <p:nvSpPr>
-          <p:cNvPr id="70" name="Oval 69"/>
+          <p:cNvPr id="70" name="mapping:port:right:0"/>
           <p:cNvSpPr/>
           <p:nvPr/>
         </p:nvSpPr>
         <p:spPr>
           <a:xfrm>
-            <a:off x="4818888" y="3035808"/>
-            <a:ext cx="73152" cy="73152"/>
+            <a:off x="7308799" y="2395728"/>
+            <a:ext cx="54864" cy="54864"/>
+          </a:xfrm>
+          <a:prstGeom prst="ellipse">
+            <a:avLst/>
+          </a:prstGeom>
+          <a:solidFill>
+            <a:srgbClr val="0D7870"/>
+          </a:solidFill>
+          <a:ln>
+            <a:noFill/>
+          </a:ln>
+          <a:effectLst/>
+        </p:spPr>
+        <p:txBody>
+          <a:bodyPr rtlCol="0" anchor="ctr"/>
+          <a:lstStyle/>
+          <a:p>
+            <a:pPr algn="ctr"/>
+          </a:p>
+        </p:txBody>
+      </p:sp>
+      <p:sp>
+        <p:nvSpPr>
+          <p:cNvPr id="71" name="mapping:port:left:1"/>
+          <p:cNvSpPr/>
+          <p:nvPr/>
+        </p:nvSpPr>
+        <p:spPr>
+          <a:xfrm>
+            <a:off x="4828031" y="3520440"/>
+            <a:ext cx="54864" cy="54864"/>
           </a:xfrm>
           <a:prstGeom prst="ellipse">
             <a:avLst/>
@@ -53251,14 +53281,14 @@
       </p:sp>
       <p:sp>
         <p:nvSpPr>
-          <p:cNvPr id="71" name="Oval 70"/>
+          <p:cNvPr id="72" name="mapping:port:right:1"/>
           <p:cNvSpPr/>
           <p:nvPr/>
         </p:nvSpPr>
         <p:spPr>
           <a:xfrm>
-            <a:off x="4818888" y="3685032"/>
-            <a:ext cx="73152" cy="73152"/>
+            <a:off x="7308799" y="3694176"/>
+            <a:ext cx="54864" cy="54864"/>
           </a:xfrm>
           <a:prstGeom prst="ellipse">
             <a:avLst/>
@@ -53281,14 +53311,14 @@
       </p:sp>
       <p:sp>
         <p:nvSpPr>
-          <p:cNvPr id="72" name="Oval 71"/>
+          <p:cNvPr id="73" name="mapping:port:left:2"/>
           <p:cNvSpPr/>
           <p:nvPr/>
         </p:nvSpPr>
         <p:spPr>
           <a:xfrm>
-            <a:off x="4818888" y="4334256"/>
-            <a:ext cx="73152" cy="73152"/>
+            <a:off x="4828031" y="3867912"/>
+            <a:ext cx="54864" cy="54864"/>
           </a:xfrm>
           <a:prstGeom prst="ellipse">
             <a:avLst/>
@@ -53311,14 +53341,14 @@
       </p:sp>
       <p:sp>
         <p:nvSpPr>
-          <p:cNvPr id="73" name="Oval 72"/>
+          <p:cNvPr id="74" name="mapping:port:right:2"/>
           <p:cNvSpPr/>
           <p:nvPr/>
         </p:nvSpPr>
         <p:spPr>
           <a:xfrm>
-            <a:off x="4818888" y="4983480"/>
-            <a:ext cx="73152" cy="73152"/>
+            <a:off x="7308799" y="4169663"/>
+            <a:ext cx="54864" cy="54864"/>
           </a:xfrm>
           <a:prstGeom prst="ellipse">
             <a:avLst/>
@@ -53341,44 +53371,14 @@
       </p:sp>
       <p:sp>
         <p:nvSpPr>
-          <p:cNvPr id="74" name="Oval 73"/>
+          <p:cNvPr id="75" name="mapping:port:left:3"/>
           <p:cNvSpPr/>
           <p:nvPr/>
         </p:nvSpPr>
         <p:spPr>
           <a:xfrm>
-            <a:off x="7299655" y="2386584"/>
-            <a:ext cx="73152" cy="73152"/>
-          </a:xfrm>
-          <a:prstGeom prst="ellipse">
-            <a:avLst/>
-          </a:prstGeom>
-          <a:solidFill>
-            <a:srgbClr val="0D7870"/>
-          </a:solidFill>
-          <a:ln>
-            <a:noFill/>
-          </a:ln>
-          <a:effectLst/>
-        </p:spPr>
-        <p:txBody>
-          <a:bodyPr rtlCol="0" anchor="ctr"/>
-          <a:lstStyle/>
-          <a:p>
-            <a:pPr algn="ctr"/>
-          </a:p>
-        </p:txBody>
-      </p:sp>
-      <p:sp>
-        <p:nvSpPr>
-          <p:cNvPr id="75" name="Oval 74"/>
-          <p:cNvSpPr/>
-          <p:nvPr/>
-        </p:nvSpPr>
-        <p:spPr>
-          <a:xfrm>
-            <a:off x="7299655" y="3035808"/>
-            <a:ext cx="73152" cy="73152"/>
+            <a:off x="4828031" y="3044952"/>
+            <a:ext cx="54864" cy="54864"/>
           </a:xfrm>
           <a:prstGeom prst="ellipse">
             <a:avLst/>
@@ -53401,14 +53401,14 @@
       </p:sp>
       <p:sp>
         <p:nvSpPr>
-          <p:cNvPr id="76" name="Oval 75"/>
+          <p:cNvPr id="76" name="mapping:port:right:3"/>
           <p:cNvSpPr/>
           <p:nvPr/>
         </p:nvSpPr>
         <p:spPr>
           <a:xfrm>
-            <a:off x="7299655" y="3685032"/>
-            <a:ext cx="73152" cy="73152"/>
+            <a:off x="7308799" y="3044952"/>
+            <a:ext cx="54864" cy="54864"/>
           </a:xfrm>
           <a:prstGeom prst="ellipse">
             <a:avLst/>
@@ -53431,14 +53431,14 @@
       </p:sp>
       <p:sp>
         <p:nvSpPr>
-          <p:cNvPr id="77" name="Oval 76"/>
+          <p:cNvPr id="77" name="mapping:port:left:4"/>
           <p:cNvSpPr/>
           <p:nvPr/>
         </p:nvSpPr>
         <p:spPr>
           <a:xfrm>
-            <a:off x="7299655" y="4334256"/>
-            <a:ext cx="73152" cy="73152"/>
+            <a:off x="4828031" y="4992624"/>
+            <a:ext cx="54864" cy="54864"/>
           </a:xfrm>
           <a:prstGeom prst="ellipse">
             <a:avLst/>
@@ -53461,14 +53461,14 @@
       </p:sp>
       <p:sp>
         <p:nvSpPr>
-          <p:cNvPr id="78" name="Oval 77"/>
+          <p:cNvPr id="78" name="mapping:port:right:4"/>
           <p:cNvSpPr/>
           <p:nvPr/>
         </p:nvSpPr>
         <p:spPr>
           <a:xfrm>
-            <a:off x="7299655" y="4983480"/>
-            <a:ext cx="73152" cy="73152"/>
+            <a:off x="7308799" y="4992624"/>
+            <a:ext cx="54864" cy="54864"/>
           </a:xfrm>
           <a:prstGeom prst="ellipse">
             <a:avLst/>
@@ -53491,7 +53491,67 @@
       </p:sp>
       <p:sp>
         <p:nvSpPr>
-          <p:cNvPr id="79" name="Rectangle 78"/>
+          <p:cNvPr id="79" name="mapping:port:left:5"/>
+          <p:cNvSpPr/>
+          <p:nvPr/>
+        </p:nvSpPr>
+        <p:spPr>
+          <a:xfrm>
+            <a:off x="4828031" y="4343400"/>
+            <a:ext cx="54864" cy="54864"/>
+          </a:xfrm>
+          <a:prstGeom prst="ellipse">
+            <a:avLst/>
+          </a:prstGeom>
+          <a:solidFill>
+            <a:srgbClr val="666E70"/>
+          </a:solidFill>
+          <a:ln>
+            <a:noFill/>
+          </a:ln>
+          <a:effectLst/>
+        </p:spPr>
+        <p:txBody>
+          <a:bodyPr rtlCol="0" anchor="ctr"/>
+          <a:lstStyle/>
+          <a:p>
+            <a:pPr algn="ctr"/>
+          </a:p>
+        </p:txBody>
+      </p:sp>
+      <p:sp>
+        <p:nvSpPr>
+          <p:cNvPr id="80" name="mapping:port:right:5"/>
+          <p:cNvSpPr/>
+          <p:nvPr/>
+        </p:nvSpPr>
+        <p:spPr>
+          <a:xfrm>
+            <a:off x="7308799" y="4517136"/>
+            <a:ext cx="54864" cy="54864"/>
+          </a:xfrm>
+          <a:prstGeom prst="ellipse">
+            <a:avLst/>
+          </a:prstGeom>
+          <a:solidFill>
+            <a:srgbClr val="666E70"/>
+          </a:solidFill>
+          <a:ln>
+            <a:noFill/>
+          </a:ln>
+          <a:effectLst/>
+        </p:spPr>
+        <p:txBody>
+          <a:bodyPr rtlCol="0" anchor="ctr"/>
+          <a:lstStyle/>
+          <a:p>
+            <a:pPr algn="ctr"/>
+          </a:p>
+        </p:txBody>
+      </p:sp>
+      <p:sp>
+        <p:nvSpPr>
+          <p:cNvPr id="81" name="Rectangle 80"/>
           <p:cNvSpPr/>
           <p:nvPr/>
         </p:nvSpPr>
@@ -53535,7 +53595,7 @@
       </p:sp>
       <p:sp>
         <p:nvSpPr>
-          <p:cNvPr id="80" name="TextBox 79"/>
+          <p:cNvPr id="82" name="TextBox 81"/>
           <p:cNvSpPr txBox="1"/>
           <p:nvPr/>
         </p:nvSpPr>
@@ -53581,7 +53641,7 @@
       </p:sp>
       <p:sp>
         <p:nvSpPr>
-          <p:cNvPr id="81" name="TextBox 80"/>
+          <p:cNvPr id="83" name="TextBox 82"/>
           <p:cNvSpPr txBox="1"/>
           <p:nvPr/>
         </p:nvSpPr>

--- a/examples/gallery/pattern_gallery.pptx
+++ b/examples/gallery/pattern_gallery.pptx
@@ -4639,7 +4639,7 @@
         </p:nvSpPr>
         <p:spPr>
           <a:xfrm>
-            <a:off x="1554480" y="5900928"/>
+            <a:off x="1664208" y="5900928"/>
             <a:ext cx="109728" cy="109728"/>
           </a:xfrm>
           <a:prstGeom prst="rect">
@@ -6156,7 +6156,7 @@
         <p:spPr>
           <a:xfrm>
             <a:off x="896112" y="5864352"/>
-            <a:ext cx="493776" cy="216408"/>
+            <a:ext cx="603504" cy="216408"/>
           </a:xfrm>
           <a:prstGeom prst="rect">
             <a:avLst/>
@@ -6201,7 +6201,7 @@
         </p:nvSpPr>
         <p:spPr>
           <a:xfrm>
-            <a:off x="1755648" y="5864352"/>
+            <a:off x="1865376" y="5864352"/>
             <a:ext cx="457200" cy="216408"/>
           </a:xfrm>
           <a:prstGeom prst="rect">
@@ -7438,7 +7438,7 @@
         </p:nvSpPr>
         <p:spPr>
           <a:xfrm>
-            <a:off x="2542031" y="5900928"/>
+            <a:off x="2651759" y="5900928"/>
             <a:ext cx="109728" cy="109728"/>
           </a:xfrm>
           <a:prstGeom prst="rect">
@@ -7943,7 +7943,7 @@
         <p:spPr>
           <a:xfrm>
             <a:off x="1719072" y="5864352"/>
-            <a:ext cx="658368" cy="216408"/>
+            <a:ext cx="768096" cy="216408"/>
           </a:xfrm>
           <a:prstGeom prst="rect">
             <a:avLst/>
@@ -7988,8 +7988,8 @@
         </p:nvSpPr>
         <p:spPr>
           <a:xfrm>
-            <a:off x="2743199" y="5864352"/>
-            <a:ext cx="658368" cy="216408"/>
+            <a:off x="2852927" y="5864352"/>
+            <a:ext cx="768096" cy="216408"/>
           </a:xfrm>
           <a:prstGeom prst="rect">
             <a:avLst/>
@@ -65600,7 +65600,7 @@
         </p:nvSpPr>
         <p:spPr>
           <a:xfrm>
-            <a:off x="1729359" y="5900928"/>
+            <a:off x="1839087" y="5900928"/>
             <a:ext cx="109728" cy="109728"/>
           </a:xfrm>
           <a:prstGeom prst="rect">
@@ -66105,7 +66105,7 @@
         <p:spPr>
           <a:xfrm>
             <a:off x="896112" y="5864352"/>
-            <a:ext cx="668655" cy="216408"/>
+            <a:ext cx="778383" cy="216408"/>
           </a:xfrm>
           <a:prstGeom prst="rect">
             <a:avLst/>
@@ -66150,8 +66150,8 @@
         </p:nvSpPr>
         <p:spPr>
           <a:xfrm>
-            <a:off x="1930527" y="5864352"/>
-            <a:ext cx="833247" cy="216408"/>
+            <a:off x="2040255" y="5864352"/>
+            <a:ext cx="942975" cy="216408"/>
           </a:xfrm>
           <a:prstGeom prst="rect">
             <a:avLst/>

--- a/examples/gallery/pattern_gallery.pptx
+++ b/examples/gallery/pattern_gallery.pptx
@@ -53915,7 +53915,7 @@
           </a:solidFill>
           <a:ln w="10795">
             <a:solidFill>
-              <a:srgbClr val="BBBABA"/>
+              <a:srgbClr val="8F979B"/>
             </a:solidFill>
           </a:ln>
           <a:effectLst/>
@@ -53930,14 +53930,14 @@
       </p:sp>
       <p:sp>
         <p:nvSpPr>
-          <p:cNvPr id="7" name="TextBox 6"/>
-          <p:cNvSpPr txBox="1"/>
-          <p:nvPr/>
-        </p:nvSpPr>
-        <p:spPr>
-          <a:xfrm>
-            <a:off x="1627632" y="1947164"/>
-            <a:ext cx="2331720" cy="237744"/>
+          <p:cNvPr id="7" name="swimlane:stage-label:detect"/>
+          <p:cNvSpPr txBox="1"/>
+          <p:nvPr/>
+        </p:nvSpPr>
+        <p:spPr>
+          <a:xfrm>
+            <a:off x="1627632" y="1915160"/>
+            <a:ext cx="2331720" cy="292608"/>
           </a:xfrm>
           <a:prstGeom prst="rect">
             <a:avLst/>
@@ -53945,7 +53945,7 @@
           <a:noFill/>
         </p:spPr>
         <p:txBody>
-          <a:bodyPr wrap="square" anchor="ctr" lIns="0" rIns="0" tIns="0" bIns="0">
+          <a:bodyPr wrap="none" anchor="ctr" lIns="0" rIns="0" tIns="0" bIns="0">
             <a:spAutoFit/>
             <a:extLst>
               <a:ext uri="{8AF73BB6-5E31-4F0F-A399-3D98F3B95FD9}">
@@ -53957,7 +53957,7 @@
           <a:p>
             <a:pPr algn="ctr">
               <a:lnSpc>
-                <a:spcPct val="130000"/>
+                <a:spcPct val="110000"/>
               </a:lnSpc>
             </a:pPr>
             <a:r>
@@ -53993,7 +53993,7 @@
           </a:solidFill>
           <a:ln w="10795">
             <a:solidFill>
-              <a:srgbClr val="BBBABA"/>
+              <a:srgbClr val="8F979B"/>
             </a:solidFill>
           </a:ln>
           <a:effectLst/>
@@ -54008,14 +54008,14 @@
       </p:sp>
       <p:sp>
         <p:nvSpPr>
-          <p:cNvPr id="9" name="TextBox 8"/>
-          <p:cNvSpPr txBox="1"/>
-          <p:nvPr/>
-        </p:nvSpPr>
-        <p:spPr>
-          <a:xfrm>
-            <a:off x="4215384" y="1947164"/>
-            <a:ext cx="2331720" cy="237744"/>
+          <p:cNvPr id="9" name="swimlane:stage-label:verify"/>
+          <p:cNvSpPr txBox="1"/>
+          <p:nvPr/>
+        </p:nvSpPr>
+        <p:spPr>
+          <a:xfrm>
+            <a:off x="4215384" y="1915160"/>
+            <a:ext cx="2331720" cy="292608"/>
           </a:xfrm>
           <a:prstGeom prst="rect">
             <a:avLst/>
@@ -54023,7 +54023,7 @@
           <a:noFill/>
         </p:spPr>
         <p:txBody>
-          <a:bodyPr wrap="square" anchor="ctr" lIns="0" rIns="0" tIns="0" bIns="0">
+          <a:bodyPr wrap="none" anchor="ctr" lIns="0" rIns="0" tIns="0" bIns="0">
             <a:spAutoFit/>
             <a:extLst>
               <a:ext uri="{8AF73BB6-5E31-4F0F-A399-3D98F3B95FD9}">
@@ -54035,7 +54035,7 @@
           <a:p>
             <a:pPr algn="ctr">
               <a:lnSpc>
-                <a:spcPct val="130000"/>
+                <a:spcPct val="110000"/>
               </a:lnSpc>
             </a:pPr>
             <a:r>
@@ -54071,7 +54071,7 @@
           </a:solidFill>
           <a:ln w="10795">
             <a:solidFill>
-              <a:srgbClr val="BBBABA"/>
+              <a:srgbClr val="8F979B"/>
             </a:solidFill>
           </a:ln>
           <a:effectLst/>
@@ -54086,14 +54086,14 @@
       </p:sp>
       <p:sp>
         <p:nvSpPr>
-          <p:cNvPr id="11" name="TextBox 10"/>
-          <p:cNvSpPr txBox="1"/>
-          <p:nvPr/>
-        </p:nvSpPr>
-        <p:spPr>
-          <a:xfrm>
-            <a:off x="6803136" y="1947164"/>
-            <a:ext cx="2331720" cy="237744"/>
+          <p:cNvPr id="11" name="swimlane:stage-label:recover"/>
+          <p:cNvSpPr txBox="1"/>
+          <p:nvPr/>
+        </p:nvSpPr>
+        <p:spPr>
+          <a:xfrm>
+            <a:off x="6803136" y="1915160"/>
+            <a:ext cx="2331720" cy="292608"/>
           </a:xfrm>
           <a:prstGeom prst="rect">
             <a:avLst/>
@@ -54101,7 +54101,7 @@
           <a:noFill/>
         </p:spPr>
         <p:txBody>
-          <a:bodyPr wrap="square" anchor="ctr" lIns="0" rIns="0" tIns="0" bIns="0">
+          <a:bodyPr wrap="none" anchor="ctr" lIns="0" rIns="0" tIns="0" bIns="0">
             <a:spAutoFit/>
             <a:extLst>
               <a:ext uri="{8AF73BB6-5E31-4F0F-A399-3D98F3B95FD9}">
@@ -54113,7 +54113,7 @@
           <a:p>
             <a:pPr algn="ctr">
               <a:lnSpc>
-                <a:spcPct val="130000"/>
+                <a:spcPct val="110000"/>
               </a:lnSpc>
             </a:pPr>
             <a:r>
@@ -54149,7 +54149,7 @@
           </a:solidFill>
           <a:ln w="10795">
             <a:solidFill>
-              <a:srgbClr val="BBBABA"/>
+              <a:srgbClr val="8F979B"/>
             </a:solidFill>
           </a:ln>
           <a:effectLst/>
@@ -54164,14 +54164,14 @@
       </p:sp>
       <p:sp>
         <p:nvSpPr>
-          <p:cNvPr id="13" name="TextBox 12"/>
-          <p:cNvSpPr txBox="1"/>
-          <p:nvPr/>
-        </p:nvSpPr>
-        <p:spPr>
-          <a:xfrm>
-            <a:off x="9390888" y="1947164"/>
-            <a:ext cx="2331720" cy="237744"/>
+          <p:cNvPr id="13" name="swimlane:stage-label:close"/>
+          <p:cNvSpPr txBox="1"/>
+          <p:nvPr/>
+        </p:nvSpPr>
+        <p:spPr>
+          <a:xfrm>
+            <a:off x="9390888" y="1915160"/>
+            <a:ext cx="2331720" cy="292608"/>
           </a:xfrm>
           <a:prstGeom prst="rect">
             <a:avLst/>
@@ -54179,7 +54179,7 @@
           <a:noFill/>
         </p:spPr>
         <p:txBody>
-          <a:bodyPr wrap="square" anchor="ctr" lIns="0" rIns="0" tIns="0" bIns="0">
+          <a:bodyPr wrap="none" anchor="ctr" lIns="0" rIns="0" tIns="0" bIns="0">
             <a:spAutoFit/>
             <a:extLst>
               <a:ext uri="{8AF73BB6-5E31-4F0F-A399-3D98F3B95FD9}">
@@ -54191,7 +54191,7 @@
           <a:p>
             <a:pPr algn="ctr">
               <a:lnSpc>
-                <a:spcPct val="130000"/>
+                <a:spcPct val="110000"/>
               </a:lnSpc>
             </a:pPr>
             <a:r>
@@ -54210,7 +54210,7 @@
       </p:sp>
       <p:sp>
         <p:nvSpPr>
-          <p:cNvPr id="14" name="Rectangle 13"/>
+          <p:cNvPr id="14" name="swimlane:lane-background:label:user"/>
           <p:cNvSpPr/>
           <p:nvPr/>
         </p:nvSpPr>
@@ -54240,7 +54240,7 @@
       </p:sp>
       <p:sp>
         <p:nvSpPr>
-          <p:cNvPr id="15" name="Rectangle 14"/>
+          <p:cNvPr id="15" name="swimlane:lane-background:canvas:user"/>
           <p:cNvSpPr/>
           <p:nvPr/>
         </p:nvSpPr>
@@ -54270,7 +54270,7 @@
       </p:sp>
       <p:sp>
         <p:nvSpPr>
-          <p:cNvPr id="16" name="TextBox 15"/>
+          <p:cNvPr id="16" name="swimlane:lane-label:user"/>
           <p:cNvSpPr txBox="1"/>
           <p:nvPr/>
         </p:nvSpPr>
@@ -54285,7 +54285,7 @@
           <a:noFill/>
         </p:spPr>
         <p:txBody>
-          <a:bodyPr wrap="square" anchor="ctr" lIns="0" rIns="0" tIns="0" bIns="0">
+          <a:bodyPr wrap="none" anchor="ctr" lIns="0" rIns="0" tIns="0" bIns="0">
             <a:spAutoFit/>
             <a:extLst>
               <a:ext uri="{8AF73BB6-5E31-4F0F-A399-3D98F3B95FD9}">
@@ -54295,9 +54295,9 @@
           </a:bodyPr>
           <a:lstStyle/>
           <a:p>
-            <a:pPr algn="l">
-              <a:lnSpc>
-                <a:spcPct val="130000"/>
+            <a:pPr algn="ctr">
+              <a:lnSpc>
+                <a:spcPct val="110000"/>
               </a:lnSpc>
             </a:pPr>
             <a:r>
@@ -54314,45 +54314,9 @@
           </a:p>
         </p:txBody>
       </p:sp>
-      <p:cxnSp>
-        <p:nvCxnSpPr>
-          <p:cNvPr id="17" name="Connector 16"/>
-          <p:cNvCxnSpPr/>
-          <p:nvPr/>
-        </p:nvCxnSpPr>
-        <p:spPr>
-          <a:xfrm>
-            <a:off x="338328" y="3099308"/>
-            <a:ext cx="11512296" cy="0"/>
-          </a:xfrm>
-          <a:prstGeom prst="line">
-            <a:avLst/>
-          </a:prstGeom>
-          <a:ln w="8255">
-            <a:solidFill>
-              <a:srgbClr val="BBBABA"/>
-            </a:solidFill>
-          </a:ln>
-          <a:effectLst/>
-        </p:spPr>
-        <p:style>
-          <a:lnRef idx="2">
-            <a:schemeClr val="accent1"/>
-          </a:lnRef>
-          <a:fillRef idx="0">
-            <a:schemeClr val="accent1"/>
-          </a:fillRef>
-          <a:effectRef idx="1">
-            <a:schemeClr val="accent1"/>
-          </a:effectRef>
-          <a:fontRef idx="minor">
-            <a:schemeClr val="tx1"/>
-          </a:fontRef>
-        </p:style>
-      </p:cxnSp>
-      <p:sp>
-        <p:nvSpPr>
-          <p:cNvPr id="18" name="Rectangle 17"/>
+      <p:sp>
+        <p:nvSpPr>
+          <p:cNvPr id="17" name="swimlane:lane-background:label:ops"/>
           <p:cNvSpPr/>
           <p:nvPr/>
         </p:nvSpPr>
@@ -54382,7 +54346,7 @@
       </p:sp>
       <p:sp>
         <p:nvSpPr>
-          <p:cNvPr id="19" name="Rectangle 18"/>
+          <p:cNvPr id="18" name="swimlane:lane-background:canvas:ops"/>
           <p:cNvSpPr/>
           <p:nvPr/>
         </p:nvSpPr>
@@ -54412,7 +54376,7 @@
       </p:sp>
       <p:sp>
         <p:nvSpPr>
-          <p:cNvPr id="20" name="TextBox 19"/>
+          <p:cNvPr id="19" name="swimlane:lane-label:ops"/>
           <p:cNvSpPr txBox="1"/>
           <p:nvPr/>
         </p:nvSpPr>
@@ -54427,7 +54391,7 @@
           <a:noFill/>
         </p:spPr>
         <p:txBody>
-          <a:bodyPr wrap="square" anchor="ctr" lIns="0" rIns="0" tIns="0" bIns="0">
+          <a:bodyPr wrap="none" anchor="ctr" lIns="0" rIns="0" tIns="0" bIns="0">
             <a:spAutoFit/>
             <a:extLst>
               <a:ext uri="{8AF73BB6-5E31-4F0F-A399-3D98F3B95FD9}">
@@ -54437,9 +54401,9 @@
           </a:bodyPr>
           <a:lstStyle/>
           <a:p>
-            <a:pPr algn="l">
-              <a:lnSpc>
-                <a:spcPct val="130000"/>
+            <a:pPr algn="ctr">
+              <a:lnSpc>
+                <a:spcPct val="110000"/>
               </a:lnSpc>
             </a:pPr>
             <a:r>
@@ -54456,45 +54420,9 @@
           </a:p>
         </p:txBody>
       </p:sp>
-      <p:cxnSp>
-        <p:nvCxnSpPr>
-          <p:cNvPr id="21" name="Connector 20"/>
-          <p:cNvCxnSpPr/>
-          <p:nvPr/>
-        </p:nvCxnSpPr>
-        <p:spPr>
-          <a:xfrm>
-            <a:off x="338328" y="3967988"/>
-            <a:ext cx="11512296" cy="0"/>
-          </a:xfrm>
-          <a:prstGeom prst="line">
-            <a:avLst/>
-          </a:prstGeom>
-          <a:ln w="8255">
-            <a:solidFill>
-              <a:srgbClr val="BBBABA"/>
-            </a:solidFill>
-          </a:ln>
-          <a:effectLst/>
-        </p:spPr>
-        <p:style>
-          <a:lnRef idx="2">
-            <a:schemeClr val="accent1"/>
-          </a:lnRef>
-          <a:fillRef idx="0">
-            <a:schemeClr val="accent1"/>
-          </a:fillRef>
-          <a:effectRef idx="1">
-            <a:schemeClr val="accent1"/>
-          </a:effectRef>
-          <a:fontRef idx="minor">
-            <a:schemeClr val="tx1"/>
-          </a:fontRef>
-        </p:style>
-      </p:cxnSp>
-      <p:sp>
-        <p:nvSpPr>
-          <p:cNvPr id="22" name="Rectangle 21"/>
+      <p:sp>
+        <p:nvSpPr>
+          <p:cNvPr id="20" name="swimlane:lane-background:label:network"/>
           <p:cNvSpPr/>
           <p:nvPr/>
         </p:nvSpPr>
@@ -54524,7 +54452,7 @@
       </p:sp>
       <p:sp>
         <p:nvSpPr>
-          <p:cNvPr id="23" name="Rectangle 22"/>
+          <p:cNvPr id="21" name="swimlane:lane-background:canvas:network"/>
           <p:cNvSpPr/>
           <p:nvPr/>
         </p:nvSpPr>
@@ -54554,7 +54482,7 @@
       </p:sp>
       <p:sp>
         <p:nvSpPr>
-          <p:cNvPr id="24" name="TextBox 23"/>
+          <p:cNvPr id="22" name="swimlane:lane-label:network"/>
           <p:cNvSpPr txBox="1"/>
           <p:nvPr/>
         </p:nvSpPr>
@@ -54569,7 +54497,7 @@
           <a:noFill/>
         </p:spPr>
         <p:txBody>
-          <a:bodyPr wrap="square" anchor="ctr" lIns="0" rIns="0" tIns="0" bIns="0">
+          <a:bodyPr wrap="none" anchor="ctr" lIns="0" rIns="0" tIns="0" bIns="0">
             <a:spAutoFit/>
             <a:extLst>
               <a:ext uri="{8AF73BB6-5E31-4F0F-A399-3D98F3B95FD9}">
@@ -54579,9 +54507,9 @@
           </a:bodyPr>
           <a:lstStyle/>
           <a:p>
-            <a:pPr algn="l">
-              <a:lnSpc>
-                <a:spcPct val="130000"/>
+            <a:pPr algn="ctr">
+              <a:lnSpc>
+                <a:spcPct val="110000"/>
               </a:lnSpc>
             </a:pPr>
             <a:r>
@@ -54598,45 +54526,9 @@
           </a:p>
         </p:txBody>
       </p:sp>
-      <p:cxnSp>
-        <p:nvCxnSpPr>
-          <p:cNvPr id="25" name="Connector 24"/>
-          <p:cNvCxnSpPr/>
-          <p:nvPr/>
-        </p:nvCxnSpPr>
-        <p:spPr>
-          <a:xfrm>
-            <a:off x="338328" y="4836668"/>
-            <a:ext cx="11512296" cy="0"/>
-          </a:xfrm>
-          <a:prstGeom prst="line">
-            <a:avLst/>
-          </a:prstGeom>
-          <a:ln w="8255">
-            <a:solidFill>
-              <a:srgbClr val="BBBABA"/>
-            </a:solidFill>
-          </a:ln>
-          <a:effectLst/>
-        </p:spPr>
-        <p:style>
-          <a:lnRef idx="2">
-            <a:schemeClr val="accent1"/>
-          </a:lnRef>
-          <a:fillRef idx="0">
-            <a:schemeClr val="accent1"/>
-          </a:fillRef>
-          <a:effectRef idx="1">
-            <a:schemeClr val="accent1"/>
-          </a:effectRef>
-          <a:fontRef idx="minor">
-            <a:schemeClr val="tx1"/>
-          </a:fontRef>
-        </p:style>
-      </p:cxnSp>
-      <p:sp>
-        <p:nvSpPr>
-          <p:cNvPr id="26" name="Rectangle 25"/>
+      <p:sp>
+        <p:nvSpPr>
+          <p:cNvPr id="23" name="swimlane:lane-background:label:carrier"/>
           <p:cNvSpPr/>
           <p:nvPr/>
         </p:nvSpPr>
@@ -54666,7 +54558,7 @@
       </p:sp>
       <p:sp>
         <p:nvSpPr>
-          <p:cNvPr id="27" name="Rectangle 26"/>
+          <p:cNvPr id="24" name="swimlane:lane-background:canvas:carrier"/>
           <p:cNvSpPr/>
           <p:nvPr/>
         </p:nvSpPr>
@@ -54696,7 +54588,7 @@
       </p:sp>
       <p:sp>
         <p:nvSpPr>
-          <p:cNvPr id="28" name="TextBox 27"/>
+          <p:cNvPr id="25" name="swimlane:lane-label:carrier"/>
           <p:cNvSpPr txBox="1"/>
           <p:nvPr/>
         </p:nvSpPr>
@@ -54711,7 +54603,7 @@
           <a:noFill/>
         </p:spPr>
         <p:txBody>
-          <a:bodyPr wrap="square" anchor="ctr" lIns="0" rIns="0" tIns="0" bIns="0">
+          <a:bodyPr wrap="none" anchor="ctr" lIns="0" rIns="0" tIns="0" bIns="0">
             <a:spAutoFit/>
             <a:extLst>
               <a:ext uri="{8AF73BB6-5E31-4F0F-A399-3D98F3B95FD9}">
@@ -54721,9 +54613,9 @@
           </a:bodyPr>
           <a:lstStyle/>
           <a:p>
-            <a:pPr algn="l">
-              <a:lnSpc>
-                <a:spcPct val="130000"/>
+            <a:pPr algn="ctr">
+              <a:lnSpc>
+                <a:spcPct val="110000"/>
               </a:lnSpc>
             </a:pPr>
             <a:r>
@@ -54742,7 +54634,115 @@
       </p:sp>
       <p:cxnSp>
         <p:nvCxnSpPr>
-          <p:cNvPr id="29" name="Connector 28"/>
+          <p:cNvPr id="26" name="swimlane:lane-boundary:user"/>
+          <p:cNvCxnSpPr/>
+          <p:nvPr/>
+        </p:nvCxnSpPr>
+        <p:spPr>
+          <a:xfrm>
+            <a:off x="338328" y="3099308"/>
+            <a:ext cx="11512296" cy="0"/>
+          </a:xfrm>
+          <a:prstGeom prst="line">
+            <a:avLst/>
+          </a:prstGeom>
+          <a:ln w="10160">
+            <a:solidFill>
+              <a:srgbClr val="8F979B"/>
+            </a:solidFill>
+          </a:ln>
+          <a:effectLst/>
+        </p:spPr>
+        <p:style>
+          <a:lnRef idx="2">
+            <a:schemeClr val="accent1"/>
+          </a:lnRef>
+          <a:fillRef idx="0">
+            <a:schemeClr val="accent1"/>
+          </a:fillRef>
+          <a:effectRef idx="1">
+            <a:schemeClr val="accent1"/>
+          </a:effectRef>
+          <a:fontRef idx="minor">
+            <a:schemeClr val="tx1"/>
+          </a:fontRef>
+        </p:style>
+      </p:cxnSp>
+      <p:cxnSp>
+        <p:nvCxnSpPr>
+          <p:cNvPr id="27" name="swimlane:lane-boundary:ops"/>
+          <p:cNvCxnSpPr/>
+          <p:nvPr/>
+        </p:nvCxnSpPr>
+        <p:spPr>
+          <a:xfrm>
+            <a:off x="338328" y="3967988"/>
+            <a:ext cx="11512296" cy="0"/>
+          </a:xfrm>
+          <a:prstGeom prst="line">
+            <a:avLst/>
+          </a:prstGeom>
+          <a:ln w="10160">
+            <a:solidFill>
+              <a:srgbClr val="8F979B"/>
+            </a:solidFill>
+          </a:ln>
+          <a:effectLst/>
+        </p:spPr>
+        <p:style>
+          <a:lnRef idx="2">
+            <a:schemeClr val="accent1"/>
+          </a:lnRef>
+          <a:fillRef idx="0">
+            <a:schemeClr val="accent1"/>
+          </a:fillRef>
+          <a:effectRef idx="1">
+            <a:schemeClr val="accent1"/>
+          </a:effectRef>
+          <a:fontRef idx="minor">
+            <a:schemeClr val="tx1"/>
+          </a:fontRef>
+        </p:style>
+      </p:cxnSp>
+      <p:cxnSp>
+        <p:nvCxnSpPr>
+          <p:cNvPr id="28" name="swimlane:lane-boundary:network"/>
+          <p:cNvCxnSpPr/>
+          <p:nvPr/>
+        </p:nvCxnSpPr>
+        <p:spPr>
+          <a:xfrm>
+            <a:off x="338328" y="4836668"/>
+            <a:ext cx="11512296" cy="0"/>
+          </a:xfrm>
+          <a:prstGeom prst="line">
+            <a:avLst/>
+          </a:prstGeom>
+          <a:ln w="10160">
+            <a:solidFill>
+              <a:srgbClr val="8F979B"/>
+            </a:solidFill>
+          </a:ln>
+          <a:effectLst/>
+        </p:spPr>
+        <p:style>
+          <a:lnRef idx="2">
+            <a:schemeClr val="accent1"/>
+          </a:lnRef>
+          <a:fillRef idx="0">
+            <a:schemeClr val="accent1"/>
+          </a:fillRef>
+          <a:effectRef idx="1">
+            <a:schemeClr val="accent1"/>
+          </a:effectRef>
+          <a:fontRef idx="minor">
+            <a:schemeClr val="tx1"/>
+          </a:fontRef>
+        </p:style>
+      </p:cxnSp>
+      <p:cxnSp>
+        <p:nvCxnSpPr>
+          <p:cNvPr id="29" name="swimlane:lane-boundary:carrier"/>
           <p:cNvCxnSpPr/>
           <p:nvPr/>
         </p:nvCxnSpPr>
@@ -54754,9 +54754,9 @@
           <a:prstGeom prst="line">
             <a:avLst/>
           </a:prstGeom>
-          <a:ln w="8255">
+          <a:ln w="10160">
             <a:solidFill>
-              <a:srgbClr val="BBBABA"/>
+              <a:srgbClr val="8F979B"/>
             </a:solidFill>
           </a:ln>
           <a:effectLst/>
@@ -54792,7 +54792,7 @@
           </a:prstGeom>
           <a:ln w="10795">
             <a:solidFill>
-              <a:srgbClr val="BBBABA"/>
+              <a:srgbClr val="8F979B"/>
             </a:solidFill>
           </a:ln>
           <a:effectLst/>
@@ -54828,7 +54828,7 @@
           </a:prstGeom>
           <a:ln w="10160">
             <a:solidFill>
-              <a:srgbClr val="BBBABA"/>
+              <a:srgbClr val="8F979B"/>
             </a:solidFill>
           </a:ln>
           <a:effectLst/>
@@ -54864,7 +54864,7 @@
           </a:prstGeom>
           <a:ln w="6985">
             <a:solidFill>
-              <a:srgbClr val="BBBABA"/>
+              <a:srgbClr val="8F979B"/>
             </a:solidFill>
           </a:ln>
           <a:effectLst/>
@@ -54900,7 +54900,7 @@
           </a:prstGeom>
           <a:ln w="6985">
             <a:solidFill>
-              <a:srgbClr val="BBBABA"/>
+              <a:srgbClr val="8F979B"/>
             </a:solidFill>
           </a:ln>
           <a:effectLst/>
@@ -54936,7 +54936,7 @@
           </a:prstGeom>
           <a:ln w="6985">
             <a:solidFill>
-              <a:srgbClr val="BBBABA"/>
+              <a:srgbClr val="8F979B"/>
             </a:solidFill>
           </a:ln>
           <a:effectLst/>
@@ -54958,7 +54958,7 @@
       </p:cxnSp>
       <p:cxnSp>
         <p:nvCxnSpPr>
-          <p:cNvPr id="35" name="Connector 34"/>
+          <p:cNvPr id="35" name="swimlane:edge:0:0"/>
           <p:cNvCxnSpPr/>
           <p:nvPr/>
         </p:nvCxnSpPr>
@@ -54994,7 +54994,7 @@
       </p:cxnSp>
       <p:cxnSp>
         <p:nvCxnSpPr>
-          <p:cNvPr id="36" name="Connector 35"/>
+          <p:cNvPr id="36" name="swimlane:edge:0:1"/>
           <p:cNvCxnSpPr/>
           <p:nvPr/>
         </p:nvCxnSpPr>
@@ -55030,7 +55030,7 @@
       </p:cxnSp>
       <p:cxnSp>
         <p:nvCxnSpPr>
-          <p:cNvPr id="37" name="Connector 36"/>
+          <p:cNvPr id="37" name="swimlane:edge:0:2"/>
           <p:cNvCxnSpPr/>
           <p:nvPr/>
         </p:nvCxnSpPr>
@@ -55067,7 +55067,7 @@
       </p:cxnSp>
       <p:cxnSp>
         <p:nvCxnSpPr>
-          <p:cNvPr id="38" name="Connector 37"/>
+          <p:cNvPr id="38" name="swimlane:edge:1:0"/>
           <p:cNvCxnSpPr/>
           <p:nvPr/>
         </p:nvCxnSpPr>
@@ -55104,7 +55104,7 @@
       </p:cxnSp>
       <p:cxnSp>
         <p:nvCxnSpPr>
-          <p:cNvPr id="39" name="Connector 38"/>
+          <p:cNvPr id="39" name="swimlane:edge:2:0"/>
           <p:cNvCxnSpPr/>
           <p:nvPr/>
         </p:nvCxnSpPr>
@@ -55140,7 +55140,7 @@
       </p:cxnSp>
       <p:cxnSp>
         <p:nvCxnSpPr>
-          <p:cNvPr id="40" name="Connector 39"/>
+          <p:cNvPr id="40" name="swimlane:edge:2:1"/>
           <p:cNvCxnSpPr/>
           <p:nvPr/>
         </p:nvCxnSpPr>
@@ -55176,7 +55176,7 @@
       </p:cxnSp>
       <p:cxnSp>
         <p:nvCxnSpPr>
-          <p:cNvPr id="41" name="Connector 40"/>
+          <p:cNvPr id="41" name="swimlane:edge:2:2"/>
           <p:cNvCxnSpPr/>
           <p:nvPr/>
         </p:nvCxnSpPr>
@@ -55213,13 +55213,13 @@
       </p:cxnSp>
       <p:cxnSp>
         <p:nvCxnSpPr>
-          <p:cNvPr id="42" name="Connector 41"/>
+          <p:cNvPr id="42" name="swimlane:edge:3:0"/>
           <p:cNvCxnSpPr/>
           <p:nvPr/>
         </p:nvCxnSpPr>
         <p:spPr>
           <a:xfrm>
-            <a:off x="5088564" y="3533648"/>
+            <a:off x="5065145" y="3533648"/>
             <a:ext cx="91440" cy="0"/>
           </a:xfrm>
           <a:prstGeom prst="line">
@@ -55250,7 +55250,7 @@
       </p:cxnSp>
       <p:cxnSp>
         <p:nvCxnSpPr>
-          <p:cNvPr id="43" name="Connector 42"/>
+          <p:cNvPr id="43" name="swimlane:edge:4:0"/>
           <p:cNvCxnSpPr/>
           <p:nvPr/>
         </p:nvCxnSpPr>
@@ -55287,13 +55287,13 @@
       </p:cxnSp>
       <p:cxnSp>
         <p:nvCxnSpPr>
-          <p:cNvPr id="44" name="Connector 43"/>
+          <p:cNvPr id="44" name="swimlane:edge:5:0"/>
           <p:cNvCxnSpPr/>
           <p:nvPr/>
         </p:nvCxnSpPr>
         <p:spPr>
           <a:xfrm>
-            <a:off x="5863554" y="3762248"/>
+            <a:off x="5851844" y="3762248"/>
             <a:ext cx="0" cy="205740"/>
           </a:xfrm>
           <a:prstGeom prst="line">
@@ -55323,14 +55323,14 @@
       </p:cxnSp>
       <p:cxnSp>
         <p:nvCxnSpPr>
-          <p:cNvPr id="45" name="Connector 44"/>
+          <p:cNvPr id="45" name="swimlane:edge:5:1"/>
           <p:cNvCxnSpPr/>
           <p:nvPr/>
         </p:nvCxnSpPr>
         <p:spPr>
           <a:xfrm>
-            <a:off x="5863554" y="3967988"/>
-            <a:ext cx="16038" cy="0"/>
+            <a:off x="5851844" y="3967988"/>
+            <a:ext cx="27748" cy="0"/>
           </a:xfrm>
           <a:prstGeom prst="line">
             <a:avLst/>
@@ -55359,7 +55359,7 @@
       </p:cxnSp>
       <p:cxnSp>
         <p:nvCxnSpPr>
-          <p:cNvPr id="46" name="Connector 45"/>
+          <p:cNvPr id="46" name="swimlane:edge:5:2"/>
           <p:cNvCxnSpPr/>
           <p:nvPr/>
         </p:nvCxnSpPr>
@@ -55396,7 +55396,7 @@
       </p:cxnSp>
       <p:cxnSp>
         <p:nvCxnSpPr>
-          <p:cNvPr id="47" name="Connector 46"/>
+          <p:cNvPr id="47" name="swimlane:edge:6:0"/>
           <p:cNvCxnSpPr/>
           <p:nvPr/>
         </p:nvCxnSpPr>
@@ -55432,7 +55432,7 @@
       </p:cxnSp>
       <p:cxnSp>
         <p:nvCxnSpPr>
-          <p:cNvPr id="48" name="Connector 47"/>
+          <p:cNvPr id="48" name="swimlane:edge:6:1"/>
           <p:cNvCxnSpPr/>
           <p:nvPr/>
         </p:nvCxnSpPr>
@@ -55468,14 +55468,14 @@
       </p:cxnSp>
       <p:cxnSp>
         <p:nvCxnSpPr>
-          <p:cNvPr id="49" name="Connector 48"/>
+          <p:cNvPr id="49" name="swimlane:edge:6:2"/>
           <p:cNvCxnSpPr/>
           <p:nvPr/>
         </p:nvCxnSpPr>
         <p:spPr>
           <a:xfrm>
             <a:off x="6638544" y="5271008"/>
-            <a:ext cx="621792" cy="0"/>
+            <a:ext cx="324612" cy="0"/>
           </a:xfrm>
           <a:prstGeom prst="line">
             <a:avLst/>
@@ -55505,14 +55505,14 @@
       </p:cxnSp>
       <p:cxnSp>
         <p:nvCxnSpPr>
-          <p:cNvPr id="50" name="Connector 49"/>
+          <p:cNvPr id="50" name="swimlane:edge:7:0"/>
           <p:cNvCxnSpPr/>
           <p:nvPr/>
         </p:nvCxnSpPr>
         <p:spPr>
           <a:xfrm>
-            <a:off x="8677656" y="5271008"/>
-            <a:ext cx="384048" cy="0"/>
+            <a:off x="8974836" y="5271008"/>
+            <a:ext cx="86868" cy="0"/>
           </a:xfrm>
           <a:prstGeom prst="line">
             <a:avLst/>
@@ -55541,7 +55541,7 @@
       </p:cxnSp>
       <p:cxnSp>
         <p:nvCxnSpPr>
-          <p:cNvPr id="51" name="Connector 50"/>
+          <p:cNvPr id="51" name="swimlane:edge:7:1"/>
           <p:cNvCxnSpPr/>
           <p:nvPr/>
         </p:nvCxnSpPr>
@@ -55577,7 +55577,7 @@
       </p:cxnSp>
       <p:cxnSp>
         <p:nvCxnSpPr>
-          <p:cNvPr id="52" name="Connector 51"/>
+          <p:cNvPr id="52" name="swimlane:edge:7:2"/>
           <p:cNvCxnSpPr/>
           <p:nvPr/>
         </p:nvCxnSpPr>
@@ -55613,7 +55613,7 @@
       </p:cxnSp>
       <p:cxnSp>
         <p:nvCxnSpPr>
-          <p:cNvPr id="53" name="Connector 52"/>
+          <p:cNvPr id="53" name="swimlane:edge:7:3"/>
           <p:cNvCxnSpPr/>
           <p:nvPr/>
         </p:nvCxnSpPr>
@@ -55650,7 +55650,7 @@
       </p:cxnSp>
       <p:cxnSp>
         <p:nvCxnSpPr>
-          <p:cNvPr id="54" name="Connector 53"/>
+          <p:cNvPr id="54" name="swimlane:edge:8:0"/>
           <p:cNvCxnSpPr/>
           <p:nvPr/>
         </p:nvCxnSpPr>
@@ -55687,7 +55687,7 @@
       </p:cxnSp>
       <p:cxnSp>
         <p:nvCxnSpPr>
-          <p:cNvPr id="55" name="Connector 54"/>
+          <p:cNvPr id="55" name="swimlane:edge:9:0"/>
           <p:cNvCxnSpPr/>
           <p:nvPr/>
         </p:nvCxnSpPr>
@@ -55723,7 +55723,7 @@
       </p:cxnSp>
       <p:cxnSp>
         <p:nvCxnSpPr>
-          <p:cNvPr id="56" name="Connector 55"/>
+          <p:cNvPr id="56" name="swimlane:edge:9:1"/>
           <p:cNvCxnSpPr/>
           <p:nvPr/>
         </p:nvCxnSpPr>
@@ -55759,7 +55759,7 @@
       </p:cxnSp>
       <p:cxnSp>
         <p:nvCxnSpPr>
-          <p:cNvPr id="57" name="Connector 56"/>
+          <p:cNvPr id="57" name="swimlane:edge:9:2"/>
           <p:cNvCxnSpPr/>
           <p:nvPr/>
         </p:nvCxnSpPr>
@@ -55796,7 +55796,7 @@
       </p:cxnSp>
       <p:cxnSp>
         <p:nvCxnSpPr>
-          <p:cNvPr id="58" name="Connector 57"/>
+          <p:cNvPr id="58" name="swimlane:edge:10:0"/>
           <p:cNvCxnSpPr/>
           <p:nvPr/>
         </p:nvCxnSpPr>
@@ -55833,7 +55833,7 @@
       </p:cxnSp>
       <p:sp>
         <p:nvSpPr>
-          <p:cNvPr id="59" name="Rectangle 58"/>
+          <p:cNvPr id="59" name="swimlane:step:report"/>
           <p:cNvSpPr/>
           <p:nvPr/>
         </p:nvSpPr>
@@ -55865,7 +55865,7 @@
       </p:sp>
       <p:sp>
         <p:nvSpPr>
-          <p:cNvPr id="60" name="TextBox 59"/>
+          <p:cNvPr id="60" name="swimlane:step-label:report"/>
           <p:cNvSpPr txBox="1"/>
           <p:nvPr/>
         </p:nvSpPr>
@@ -55880,7 +55880,7 @@
           <a:noFill/>
         </p:spPr>
         <p:txBody>
-          <a:bodyPr wrap="square" anchor="ctr" lIns="0" rIns="0" tIns="0" bIns="0">
+          <a:bodyPr wrap="none" anchor="ctr" lIns="0" rIns="0" tIns="0" bIns="0">
             <a:spAutoFit/>
             <a:extLst>
               <a:ext uri="{8AF73BB6-5E31-4F0F-A399-3D98F3B95FD9}">
@@ -55892,11 +55892,11 @@
           <a:p>
             <a:pPr algn="ctr">
               <a:lnSpc>
-                <a:spcPct val="130000"/>
-              </a:lnSpc>
-            </a:pPr>
-            <a:r>
-              <a:rPr sz="1050" b="1" lang="ja-JP">
+                <a:spcPct val="110000"/>
+              </a:lnSpc>
+            </a:pPr>
+            <a:r>
+              <a:rPr sz="1150" b="1" lang="ja-JP">
                 <a:solidFill>
                   <a:srgbClr val="0F2A46"/>
                 </a:solidFill>
@@ -55904,14 +55904,32 @@
                 <a:ea typeface="Yu Gothic"/>
                 <a:cs typeface="Yu Gothic"/>
               </a:rPr>
-              <a:t>① 障害申告</a:t>
-            </a:r>
-          </a:p>
-        </p:txBody>
-      </p:sp>
-      <p:sp>
-        <p:nvSpPr>
-          <p:cNvPr id="61" name="Rectangle 60"/>
+              <a:t>①</a:t>
+            </a:r>
+          </a:p>
+          <a:p>
+            <a:pPr algn="ctr">
+              <a:lnSpc>
+                <a:spcPct val="110000"/>
+              </a:lnSpc>
+            </a:pPr>
+            <a:r>
+              <a:rPr sz="1150" b="1" lang="ja-JP">
+                <a:solidFill>
+                  <a:srgbClr val="0F2A46"/>
+                </a:solidFill>
+                <a:latin typeface="Yu Gothic"/>
+                <a:ea typeface="Yu Gothic"/>
+                <a:cs typeface="Yu Gothic"/>
+              </a:rPr>
+              <a:t>障害申告</a:t>
+            </a:r>
+          </a:p>
+        </p:txBody>
+      </p:sp>
+      <p:sp>
+        <p:nvSpPr>
+          <p:cNvPr id="61" name="swimlane:step:triage"/>
           <p:cNvSpPr/>
           <p:nvPr/>
         </p:nvSpPr>
@@ -55943,7 +55961,7 @@
       </p:sp>
       <p:sp>
         <p:nvSpPr>
-          <p:cNvPr id="62" name="TextBox 61"/>
+          <p:cNvPr id="62" name="swimlane:step-label:triage"/>
           <p:cNvSpPr txBox="1"/>
           <p:nvPr/>
         </p:nvSpPr>
@@ -55958,11 +55976,11 @@
           <a:noFill/>
         </p:spPr>
         <p:txBody>
-          <a:bodyPr wrap="square" anchor="ctr" lIns="0" rIns="0" tIns="0" bIns="0">
-            <a:spAutoFit/>
-            <a:extLst>
-              <a:ext uri="{8AF73BB6-5E31-4F0F-A399-3D98F3B95FD9}">
-                <ns73:textLayout xmlns:ns73="urn:pptxdsl:text-layout:v1" role="natural"/>
+          <a:bodyPr wrap="none" anchor="ctr" lIns="0" rIns="0" tIns="0" bIns="0">
+            <a:spAutoFit/>
+            <a:extLst>
+              <a:ext uri="{8AF73BB6-5E31-4F0F-A399-3D98F3B95FD9}">
+                <ns75:textLayout xmlns:ns75="urn:pptxdsl:text-layout:v1" role="natural"/>
               </a:ext>
             </a:extLst>
           </a:bodyPr>
@@ -55970,11 +55988,11 @@
           <a:p>
             <a:pPr algn="ctr">
               <a:lnSpc>
-                <a:spcPct val="130000"/>
-              </a:lnSpc>
-            </a:pPr>
-            <a:r>
-              <a:rPr sz="1050" b="1" lang="ja-JP">
+                <a:spcPct val="110000"/>
+              </a:lnSpc>
+            </a:pPr>
+            <a:r>
+              <a:rPr sz="1150" b="1" lang="ja-JP">
                 <a:solidFill>
                   <a:srgbClr val="0F2A46"/>
                 </a:solidFill>
@@ -55982,21 +56000,39 @@
                 <a:ea typeface="Yu Gothic"/>
                 <a:cs typeface="Yu Gothic"/>
               </a:rPr>
-              <a:t>② 一次確認</a:t>
-            </a:r>
-          </a:p>
-        </p:txBody>
-      </p:sp>
-      <p:sp>
-        <p:nvSpPr>
-          <p:cNvPr id="63" name="Rectangle 62"/>
+              <a:t>②</a:t>
+            </a:r>
+          </a:p>
+          <a:p>
+            <a:pPr algn="ctr">
+              <a:lnSpc>
+                <a:spcPct val="110000"/>
+              </a:lnSpc>
+            </a:pPr>
+            <a:r>
+              <a:rPr sz="1150" b="1" lang="ja-JP">
+                <a:solidFill>
+                  <a:srgbClr val="0F2A46"/>
+                </a:solidFill>
+                <a:latin typeface="Yu Gothic"/>
+                <a:ea typeface="Yu Gothic"/>
+                <a:cs typeface="Yu Gothic"/>
+              </a:rPr>
+              <a:t>一次確認</a:t>
+            </a:r>
+          </a:p>
+        </p:txBody>
+      </p:sp>
+      <p:sp>
+        <p:nvSpPr>
+          <p:cNvPr id="63" name="swimlane:step:monitor"/>
           <p:cNvSpPr/>
           <p:nvPr/>
         </p:nvSpPr>
         <p:spPr>
           <a:xfrm>
             <a:off x="4215384" y="3305048"/>
-            <a:ext cx="873180" cy="457200"/>
+            <a:ext cx="849761" cy="457200"/>
           </a:xfrm>
           <a:prstGeom prst="rect">
             <a:avLst/>
@@ -56021,14 +56057,14 @@
       </p:sp>
       <p:sp>
         <p:nvSpPr>
-          <p:cNvPr id="64" name="TextBox 63"/>
+          <p:cNvPr id="64" name="swimlane:step-label:monitor"/>
           <p:cNvSpPr txBox="1"/>
           <p:nvPr/>
         </p:nvSpPr>
         <p:spPr>
           <a:xfrm>
             <a:off x="4270248" y="3305048"/>
-            <a:ext cx="763452" cy="457200"/>
+            <a:ext cx="740033" cy="457200"/>
           </a:xfrm>
           <a:prstGeom prst="rect">
             <a:avLst/>
@@ -56036,11 +56072,11 @@
           <a:noFill/>
         </p:spPr>
         <p:txBody>
-          <a:bodyPr wrap="square" anchor="ctr" lIns="0" rIns="0" tIns="0" bIns="0">
-            <a:spAutoFit/>
-            <a:extLst>
-              <a:ext uri="{8AF73BB6-5E31-4F0F-A399-3D98F3B95FD9}">
-                <ns78:textLayout xmlns:ns78="urn:pptxdsl:text-layout:v1" role="natural"/>
+          <a:bodyPr wrap="none" anchor="ctr" lIns="0" rIns="0" tIns="0" bIns="0">
+            <a:spAutoFit/>
+            <a:extLst>
+              <a:ext uri="{8AF73BB6-5E31-4F0F-A399-3D98F3B95FD9}">
+                <ns82:textLayout xmlns:ns82="urn:pptxdsl:text-layout:v1" role="natural"/>
               </a:ext>
             </a:extLst>
           </a:bodyPr>
@@ -56048,11 +56084,11 @@
           <a:p>
             <a:pPr algn="ctr">
               <a:lnSpc>
-                <a:spcPct val="130000"/>
-              </a:lnSpc>
-            </a:pPr>
-            <a:r>
-              <a:rPr sz="1050" b="1" lang="ja-JP">
+                <a:spcPct val="110000"/>
+              </a:lnSpc>
+            </a:pPr>
+            <a:r>
+              <a:rPr sz="1150" b="1" lang="ja-JP">
                 <a:solidFill>
                   <a:srgbClr val="0F2A46"/>
                 </a:solidFill>
@@ -56060,14 +56096,32 @@
                 <a:ea typeface="Yu Gothic"/>
                 <a:cs typeface="Yu Gothic"/>
               </a:rPr>
-              <a:t>③ 監視確認</a:t>
-            </a:r>
-          </a:p>
-        </p:txBody>
-      </p:sp>
-      <p:sp>
-        <p:nvSpPr>
-          <p:cNvPr id="65" name="Rectangle 64"/>
+              <a:t>③</a:t>
+            </a:r>
+          </a:p>
+          <a:p>
+            <a:pPr algn="ctr">
+              <a:lnSpc>
+                <a:spcPct val="110000"/>
+              </a:lnSpc>
+            </a:pPr>
+            <a:r>
+              <a:rPr sz="1150" b="1" lang="ja-JP">
+                <a:solidFill>
+                  <a:srgbClr val="0F2A46"/>
+                </a:solidFill>
+                <a:latin typeface="Yu Gothic"/>
+                <a:ea typeface="Yu Gothic"/>
+                <a:cs typeface="Yu Gothic"/>
+              </a:rPr>
+              <a:t>監視確認</a:t>
+            </a:r>
+          </a:p>
+        </p:txBody>
+      </p:sp>
+      <p:sp>
+        <p:nvSpPr>
+          <p:cNvPr id="65" name="swimlane:step:device"/>
           <p:cNvSpPr/>
           <p:nvPr/>
         </p:nvSpPr>
@@ -56099,7 +56153,7 @@
       </p:sp>
       <p:sp>
         <p:nvSpPr>
-          <p:cNvPr id="66" name="TextBox 65"/>
+          <p:cNvPr id="66" name="swimlane:step-label:device"/>
           <p:cNvSpPr txBox="1"/>
           <p:nvPr/>
         </p:nvSpPr>
@@ -56114,11 +56168,11 @@
           <a:noFill/>
         </p:spPr>
         <p:txBody>
-          <a:bodyPr wrap="square" anchor="ctr" lIns="0" rIns="0" tIns="0" bIns="0">
-            <a:spAutoFit/>
-            <a:extLst>
-              <a:ext uri="{8AF73BB6-5E31-4F0F-A399-3D98F3B95FD9}">
-                <ns83:textLayout xmlns:ns83="urn:pptxdsl:text-layout:v1" role="natural"/>
+          <a:bodyPr wrap="none" anchor="ctr" lIns="0" rIns="0" tIns="0" bIns="0">
+            <a:spAutoFit/>
+            <a:extLst>
+              <a:ext uri="{8AF73BB6-5E31-4F0F-A399-3D98F3B95FD9}">
+                <ns89:textLayout xmlns:ns89="urn:pptxdsl:text-layout:v1" role="natural"/>
               </a:ext>
             </a:extLst>
           </a:bodyPr>
@@ -56126,11 +56180,11 @@
           <a:p>
             <a:pPr algn="ctr">
               <a:lnSpc>
-                <a:spcPct val="130000"/>
-              </a:lnSpc>
-            </a:pPr>
-            <a:r>
-              <a:rPr sz="1050" b="1" lang="ja-JP">
+                <a:spcPct val="110000"/>
+              </a:lnSpc>
+            </a:pPr>
+            <a:r>
+              <a:rPr sz="1150" b="1" lang="ja-JP">
                 <a:solidFill>
                   <a:srgbClr val="0F2A46"/>
                 </a:solidFill>
@@ -56138,14 +56192,32 @@
                 <a:ea typeface="Yu Gothic"/>
                 <a:cs typeface="Yu Gothic"/>
               </a:rPr>
-              <a:t>④ 機器確認</a:t>
-            </a:r>
-          </a:p>
-        </p:txBody>
-      </p:sp>
-      <p:sp>
-        <p:nvSpPr>
-          <p:cNvPr id="67" name="Rectangle 66"/>
+              <a:t>④</a:t>
+            </a:r>
+          </a:p>
+          <a:p>
+            <a:pPr algn="ctr">
+              <a:lnSpc>
+                <a:spcPct val="110000"/>
+              </a:lnSpc>
+            </a:pPr>
+            <a:r>
+              <a:rPr sz="1150" b="1" lang="ja-JP">
+                <a:solidFill>
+                  <a:srgbClr val="0F2A46"/>
+                </a:solidFill>
+                <a:latin typeface="Yu Gothic"/>
+                <a:ea typeface="Yu Gothic"/>
+                <a:cs typeface="Yu Gothic"/>
+              </a:rPr>
+              <a:t>機器確認</a:t>
+            </a:r>
+          </a:p>
+        </p:txBody>
+      </p:sp>
+      <p:sp>
+        <p:nvSpPr>
+          <p:cNvPr id="67" name="swimlane:step:isolate"/>
           <p:cNvSpPr/>
           <p:nvPr/>
         </p:nvSpPr>
@@ -56177,7 +56249,7 @@
       </p:sp>
       <p:sp>
         <p:nvSpPr>
-          <p:cNvPr id="68" name="TextBox 67"/>
+          <p:cNvPr id="68" name="swimlane:step-label:isolate"/>
           <p:cNvSpPr txBox="1"/>
           <p:nvPr/>
         </p:nvSpPr>
@@ -56192,11 +56264,11 @@
           <a:noFill/>
         </p:spPr>
         <p:txBody>
-          <a:bodyPr wrap="square" anchor="ctr" lIns="0" rIns="0" tIns="0" bIns="0">
-            <a:spAutoFit/>
-            <a:extLst>
-              <a:ext uri="{8AF73BB6-5E31-4F0F-A399-3D98F3B95FD9}">
-                <ns88:textLayout xmlns:ns88="urn:pptxdsl:text-layout:v1" role="natural"/>
+          <a:bodyPr wrap="none" anchor="ctr" lIns="0" rIns="0" tIns="0" bIns="0">
+            <a:spAutoFit/>
+            <a:extLst>
+              <a:ext uri="{8AF73BB6-5E31-4F0F-A399-3D98F3B95FD9}">
+                <ns96:textLayout xmlns:ns96="urn:pptxdsl:text-layout:v1" role="natural"/>
               </a:ext>
             </a:extLst>
           </a:bodyPr>
@@ -56204,11 +56276,11 @@
           <a:p>
             <a:pPr algn="ctr">
               <a:lnSpc>
-                <a:spcPct val="130000"/>
-              </a:lnSpc>
-            </a:pPr>
-            <a:r>
-              <a:rPr sz="1050" b="1" lang="ja-JP">
+                <a:spcPct val="110000"/>
+              </a:lnSpc>
+            </a:pPr>
+            <a:r>
+              <a:rPr sz="1150" b="1" lang="ja-JP">
                 <a:solidFill>
                   <a:srgbClr val="0F2A46"/>
                 </a:solidFill>
@@ -56216,21 +56288,39 @@
                 <a:ea typeface="Yu Gothic"/>
                 <a:cs typeface="Yu Gothic"/>
               </a:rPr>
-              <a:t>⑤ 回線切り分け</a:t>
-            </a:r>
-          </a:p>
-        </p:txBody>
-      </p:sp>
-      <p:sp>
-        <p:nvSpPr>
-          <p:cNvPr id="69" name="Rectangle 68"/>
+              <a:t>⑤ 回線切り</a:t>
+            </a:r>
+          </a:p>
+          <a:p>
+            <a:pPr algn="ctr">
+              <a:lnSpc>
+                <a:spcPct val="110000"/>
+              </a:lnSpc>
+            </a:pPr>
+            <a:r>
+              <a:rPr sz="1150" b="1" lang="ja-JP">
+                <a:solidFill>
+                  <a:srgbClr val="0F2A46"/>
+                </a:solidFill>
+                <a:latin typeface="Yu Gothic"/>
+                <a:ea typeface="Yu Gothic"/>
+                <a:cs typeface="Yu Gothic"/>
+              </a:rPr>
+              <a:t>分け</a:t>
+            </a:r>
+          </a:p>
+        </p:txBody>
+      </p:sp>
+      <p:sp>
+        <p:nvSpPr>
+          <p:cNvPr id="69" name="swimlane:step:escalate"/>
           <p:cNvSpPr/>
           <p:nvPr/>
         </p:nvSpPr>
         <p:spPr>
           <a:xfrm>
-            <a:off x="5180004" y="3305048"/>
-            <a:ext cx="1367099" cy="457200"/>
+            <a:off x="5156585" y="3305048"/>
+            <a:ext cx="1390518" cy="457200"/>
           </a:xfrm>
           <a:prstGeom prst="rect">
             <a:avLst/>
@@ -56255,14 +56345,14 @@
       </p:sp>
       <p:sp>
         <p:nvSpPr>
-          <p:cNvPr id="70" name="TextBox 69"/>
-          <p:cNvSpPr txBox="1"/>
-          <p:nvPr/>
-        </p:nvSpPr>
-        <p:spPr>
-          <a:xfrm>
-            <a:off x="5234868" y="3305048"/>
-            <a:ext cx="1257371" cy="457200"/>
+          <p:cNvPr id="70" name="swimlane:step-label:escalate"/>
+          <p:cNvSpPr txBox="1"/>
+          <p:nvPr/>
+        </p:nvSpPr>
+        <p:spPr>
+          <a:xfrm>
+            <a:off x="5211449" y="3305048"/>
+            <a:ext cx="1280790" cy="457200"/>
           </a:xfrm>
           <a:prstGeom prst="rect">
             <a:avLst/>
@@ -56270,11 +56360,11 @@
           <a:noFill/>
         </p:spPr>
         <p:txBody>
-          <a:bodyPr wrap="square" anchor="ctr" lIns="0" rIns="0" tIns="0" bIns="0">
-            <a:spAutoFit/>
-            <a:extLst>
-              <a:ext uri="{8AF73BB6-5E31-4F0F-A399-3D98F3B95FD9}">
-                <ns93:textLayout xmlns:ns93="urn:pptxdsl:text-layout:v1" role="natural"/>
+          <a:bodyPr wrap="none" anchor="ctr" lIns="0" rIns="0" tIns="0" bIns="0">
+            <a:spAutoFit/>
+            <a:extLst>
+              <a:ext uri="{8AF73BB6-5E31-4F0F-A399-3D98F3B95FD9}">
+                <ns103:textLayout xmlns:ns103="urn:pptxdsl:text-layout:v1" role="natural"/>
               </a:ext>
             </a:extLst>
           </a:bodyPr>
@@ -56282,11 +56372,11 @@
           <a:p>
             <a:pPr algn="ctr">
               <a:lnSpc>
-                <a:spcPct val="130000"/>
-              </a:lnSpc>
-            </a:pPr>
-            <a:r>
-              <a:rPr sz="1000" b="1" lang="ja-JP">
+                <a:spcPct val="110000"/>
+              </a:lnSpc>
+            </a:pPr>
+            <a:r>
+              <a:rPr sz="1150" b="1" lang="ja-JP">
                 <a:solidFill>
                   <a:srgbClr val="0F2A46"/>
                 </a:solidFill>
@@ -56294,21 +56384,39 @@
                 <a:ea typeface="Yu Gothic"/>
                 <a:cs typeface="Yu Gothic"/>
               </a:rPr>
-              <a:t>⑥ エスカレーション</a:t>
-            </a:r>
-          </a:p>
-        </p:txBody>
-      </p:sp>
-      <p:sp>
-        <p:nvSpPr>
-          <p:cNvPr id="71" name="Rectangle 70"/>
+              <a:t>⑥</a:t>
+            </a:r>
+          </a:p>
+          <a:p>
+            <a:pPr algn="ctr">
+              <a:lnSpc>
+                <a:spcPct val="110000"/>
+              </a:lnSpc>
+            </a:pPr>
+            <a:r>
+              <a:rPr sz="1150" b="1" lang="ja-JP">
+                <a:solidFill>
+                  <a:srgbClr val="0F2A46"/>
+                </a:solidFill>
+                <a:latin typeface="Yu Gothic"/>
+                <a:ea typeface="Yu Gothic"/>
+                <a:cs typeface="Yu Gothic"/>
+              </a:rPr>
+              <a:t>エスカレーション</a:t>
+            </a:r>
+          </a:p>
+        </p:txBody>
+      </p:sp>
+      <p:sp>
+        <p:nvSpPr>
+          <p:cNvPr id="71" name="swimlane:step:provider"/>
           <p:cNvSpPr/>
           <p:nvPr/>
         </p:nvSpPr>
         <p:spPr>
           <a:xfrm>
-            <a:off x="7260336" y="5042408"/>
-            <a:ext cx="1417320" cy="457200"/>
+            <a:off x="6963156" y="5042408"/>
+            <a:ext cx="2011680" cy="457200"/>
           </a:xfrm>
           <a:prstGeom prst="rect">
             <a:avLst/>
@@ -56333,14 +56441,14 @@
       </p:sp>
       <p:sp>
         <p:nvSpPr>
-          <p:cNvPr id="72" name="TextBox 71"/>
-          <p:cNvSpPr txBox="1"/>
-          <p:nvPr/>
-        </p:nvSpPr>
-        <p:spPr>
-          <a:xfrm>
-            <a:off x="7315200" y="5042408"/>
-            <a:ext cx="1307592" cy="457200"/>
+          <p:cNvPr id="72" name="swimlane:step-label:provider"/>
+          <p:cNvSpPr txBox="1"/>
+          <p:nvPr/>
+        </p:nvSpPr>
+        <p:spPr>
+          <a:xfrm>
+            <a:off x="7018020" y="5042408"/>
+            <a:ext cx="1901952" cy="457200"/>
           </a:xfrm>
           <a:prstGeom prst="rect">
             <a:avLst/>
@@ -56348,11 +56456,11 @@
           <a:noFill/>
         </p:spPr>
         <p:txBody>
-          <a:bodyPr wrap="square" anchor="ctr" lIns="0" rIns="0" tIns="0" bIns="0">
-            <a:spAutoFit/>
-            <a:extLst>
-              <a:ext uri="{8AF73BB6-5E31-4F0F-A399-3D98F3B95FD9}">
-                <ns98:textLayout xmlns:ns98="urn:pptxdsl:text-layout:v1" role="natural"/>
+          <a:bodyPr wrap="none" anchor="ctr" lIns="0" rIns="0" tIns="0" bIns="0">
+            <a:spAutoFit/>
+            <a:extLst>
+              <a:ext uri="{8AF73BB6-5E31-4F0F-A399-3D98F3B95FD9}">
+                <ns110:textLayout xmlns:ns110="urn:pptxdsl:text-layout:v1" role="natural"/>
               </a:ext>
             </a:extLst>
           </a:bodyPr>
@@ -56360,11 +56468,11 @@
           <a:p>
             <a:pPr algn="ctr">
               <a:lnSpc>
-                <a:spcPct val="130000"/>
-              </a:lnSpc>
-            </a:pPr>
-            <a:r>
-              <a:rPr sz="750" b="1" lang="ja-JP">
+                <a:spcPct val="110000"/>
+              </a:lnSpc>
+            </a:pPr>
+            <a:r>
+              <a:rPr sz="1150" b="1" lang="ja-JP">
                 <a:solidFill>
                   <a:srgbClr val="0F2A46"/>
                 </a:solidFill>
@@ -56379,7 +56487,7 @@
       </p:sp>
       <p:sp>
         <p:nvSpPr>
-          <p:cNvPr id="73" name="Rectangle 72"/>
+          <p:cNvPr id="73" name="swimlane:step:recover"/>
           <p:cNvSpPr/>
           <p:nvPr/>
         </p:nvSpPr>
@@ -56411,7 +56519,7 @@
       </p:sp>
       <p:sp>
         <p:nvSpPr>
-          <p:cNvPr id="74" name="TextBox 73"/>
+          <p:cNvPr id="74" name="swimlane:step-label:recover"/>
           <p:cNvSpPr txBox="1"/>
           <p:nvPr/>
         </p:nvSpPr>
@@ -56426,11 +56534,11 @@
           <a:noFill/>
         </p:spPr>
         <p:txBody>
-          <a:bodyPr wrap="square" anchor="ctr" lIns="0" rIns="0" tIns="0" bIns="0">
-            <a:spAutoFit/>
-            <a:extLst>
-              <a:ext uri="{8AF73BB6-5E31-4F0F-A399-3D98F3B95FD9}">
-                <ns103:textLayout xmlns:ns103="urn:pptxdsl:text-layout:v1" role="natural"/>
+          <a:bodyPr wrap="none" anchor="ctr" lIns="0" rIns="0" tIns="0" bIns="0">
+            <a:spAutoFit/>
+            <a:extLst>
+              <a:ext uri="{8AF73BB6-5E31-4F0F-A399-3D98F3B95FD9}">
+                <ns115:textLayout xmlns:ns115="urn:pptxdsl:text-layout:v1" role="natural"/>
               </a:ext>
             </a:extLst>
           </a:bodyPr>
@@ -56438,11 +56546,11 @@
           <a:p>
             <a:pPr algn="ctr">
               <a:lnSpc>
-                <a:spcPct val="130000"/>
-              </a:lnSpc>
-            </a:pPr>
-            <a:r>
-              <a:rPr sz="1050" b="1" lang="ja-JP">
+                <a:spcPct val="110000"/>
+              </a:lnSpc>
+            </a:pPr>
+            <a:r>
+              <a:rPr sz="1150" b="1" lang="ja-JP">
                 <a:solidFill>
                   <a:srgbClr val="0F2A46"/>
                 </a:solidFill>
@@ -56450,14 +56558,32 @@
                 <a:ea typeface="Yu Gothic"/>
                 <a:cs typeface="Yu Gothic"/>
               </a:rPr>
-              <a:t>⑦ 復旧作業</a:t>
-            </a:r>
-          </a:p>
-        </p:txBody>
-      </p:sp>
-      <p:sp>
-        <p:nvSpPr>
-          <p:cNvPr id="75" name="Rectangle 74"/>
+              <a:t>⑦</a:t>
+            </a:r>
+          </a:p>
+          <a:p>
+            <a:pPr algn="ctr">
+              <a:lnSpc>
+                <a:spcPct val="110000"/>
+              </a:lnSpc>
+            </a:pPr>
+            <a:r>
+              <a:rPr sz="1150" b="1" lang="ja-JP">
+                <a:solidFill>
+                  <a:srgbClr val="0F2A46"/>
+                </a:solidFill>
+                <a:latin typeface="Yu Gothic"/>
+                <a:ea typeface="Yu Gothic"/>
+                <a:cs typeface="Yu Gothic"/>
+              </a:rPr>
+              <a:t>復旧作業</a:t>
+            </a:r>
+          </a:p>
+        </p:txBody>
+      </p:sp>
+      <p:sp>
+        <p:nvSpPr>
+          <p:cNvPr id="75" name="swimlane:step:notify"/>
           <p:cNvSpPr/>
           <p:nvPr/>
         </p:nvSpPr>
@@ -56489,7 +56615,7 @@
       </p:sp>
       <p:sp>
         <p:nvSpPr>
-          <p:cNvPr id="76" name="TextBox 75"/>
+          <p:cNvPr id="76" name="swimlane:step-label:notify"/>
           <p:cNvSpPr txBox="1"/>
           <p:nvPr/>
         </p:nvSpPr>
@@ -56504,11 +56630,11 @@
           <a:noFill/>
         </p:spPr>
         <p:txBody>
-          <a:bodyPr wrap="square" anchor="ctr" lIns="0" rIns="0" tIns="0" bIns="0">
-            <a:spAutoFit/>
-            <a:extLst>
-              <a:ext uri="{8AF73BB6-5E31-4F0F-A399-3D98F3B95FD9}">
-                <ns108:textLayout xmlns:ns108="urn:pptxdsl:text-layout:v1" role="natural"/>
+          <a:bodyPr wrap="none" anchor="ctr" lIns="0" rIns="0" tIns="0" bIns="0">
+            <a:spAutoFit/>
+            <a:extLst>
+              <a:ext uri="{8AF73BB6-5E31-4F0F-A399-3D98F3B95FD9}">
+                <ns122:textLayout xmlns:ns122="urn:pptxdsl:text-layout:v1" role="natural"/>
               </a:ext>
             </a:extLst>
           </a:bodyPr>
@@ -56516,11 +56642,11 @@
           <a:p>
             <a:pPr algn="ctr">
               <a:lnSpc>
-                <a:spcPct val="130000"/>
-              </a:lnSpc>
-            </a:pPr>
-            <a:r>
-              <a:rPr sz="1050" b="1" lang="ja-JP">
+                <a:spcPct val="110000"/>
+              </a:lnSpc>
+            </a:pPr>
+            <a:r>
+              <a:rPr sz="1150" b="1" lang="ja-JP">
                 <a:solidFill>
                   <a:srgbClr val="0F2A46"/>
                 </a:solidFill>
@@ -56528,14 +56654,32 @@
                 <a:ea typeface="Yu Gothic"/>
                 <a:cs typeface="Yu Gothic"/>
               </a:rPr>
-              <a:t>⑧ 利用者連絡</a:t>
-            </a:r>
-          </a:p>
-        </p:txBody>
-      </p:sp>
-      <p:sp>
-        <p:nvSpPr>
-          <p:cNvPr id="77" name="Rectangle 76"/>
+              <a:t>⑧</a:t>
+            </a:r>
+          </a:p>
+          <a:p>
+            <a:pPr algn="ctr">
+              <a:lnSpc>
+                <a:spcPct val="110000"/>
+              </a:lnSpc>
+            </a:pPr>
+            <a:r>
+              <a:rPr sz="1150" b="1" lang="ja-JP">
+                <a:solidFill>
+                  <a:srgbClr val="0F2A46"/>
+                </a:solidFill>
+                <a:latin typeface="Yu Gothic"/>
+                <a:ea typeface="Yu Gothic"/>
+                <a:cs typeface="Yu Gothic"/>
+              </a:rPr>
+              <a:t>利用者連絡</a:t>
+            </a:r>
+          </a:p>
+        </p:txBody>
+      </p:sp>
+      <p:sp>
+        <p:nvSpPr>
+          <p:cNvPr id="77" name="swimlane:step:result"/>
           <p:cNvSpPr/>
           <p:nvPr/>
         </p:nvSpPr>
@@ -56567,7 +56711,7 @@
       </p:sp>
       <p:sp>
         <p:nvSpPr>
-          <p:cNvPr id="78" name="TextBox 77"/>
+          <p:cNvPr id="78" name="swimlane:step-label:result"/>
           <p:cNvSpPr txBox="1"/>
           <p:nvPr/>
         </p:nvSpPr>
@@ -56582,11 +56726,11 @@
           <a:noFill/>
         </p:spPr>
         <p:txBody>
-          <a:bodyPr wrap="square" anchor="ctr" lIns="0" rIns="0" tIns="0" bIns="0">
-            <a:spAutoFit/>
-            <a:extLst>
-              <a:ext uri="{8AF73BB6-5E31-4F0F-A399-3D98F3B95FD9}">
-                <ns113:textLayout xmlns:ns113="urn:pptxdsl:text-layout:v1" role="natural"/>
+          <a:bodyPr wrap="none" anchor="ctr" lIns="0" rIns="0" tIns="0" bIns="0">
+            <a:spAutoFit/>
+            <a:extLst>
+              <a:ext uri="{8AF73BB6-5E31-4F0F-A399-3D98F3B95FD9}">
+                <ns129:textLayout xmlns:ns129="urn:pptxdsl:text-layout:v1" role="natural"/>
               </a:ext>
             </a:extLst>
           </a:bodyPr>
@@ -56594,11 +56738,11 @@
           <a:p>
             <a:pPr algn="ctr">
               <a:lnSpc>
-                <a:spcPct val="130000"/>
-              </a:lnSpc>
-            </a:pPr>
-            <a:r>
-              <a:rPr sz="1050" b="1" lang="ja-JP">
+                <a:spcPct val="110000"/>
+              </a:lnSpc>
+            </a:pPr>
+            <a:r>
+              <a:rPr sz="1150" b="1" lang="ja-JP">
                 <a:solidFill>
                   <a:srgbClr val="0F2A46"/>
                 </a:solidFill>
@@ -56606,14 +56750,32 @@
                 <a:ea typeface="Yu Gothic"/>
                 <a:cs typeface="Yu Gothic"/>
               </a:rPr>
-              <a:t>⑨ 結果確認</a:t>
-            </a:r>
-          </a:p>
-        </p:txBody>
-      </p:sp>
-      <p:sp>
-        <p:nvSpPr>
-          <p:cNvPr id="79" name="Rectangle 78"/>
+              <a:t>⑨</a:t>
+            </a:r>
+          </a:p>
+          <a:p>
+            <a:pPr algn="ctr">
+              <a:lnSpc>
+                <a:spcPct val="110000"/>
+              </a:lnSpc>
+            </a:pPr>
+            <a:r>
+              <a:rPr sz="1150" b="1" lang="ja-JP">
+                <a:solidFill>
+                  <a:srgbClr val="0F2A46"/>
+                </a:solidFill>
+                <a:latin typeface="Yu Gothic"/>
+                <a:ea typeface="Yu Gothic"/>
+                <a:cs typeface="Yu Gothic"/>
+              </a:rPr>
+              <a:t>結果確認</a:t>
+            </a:r>
+          </a:p>
+        </p:txBody>
+      </p:sp>
+      <p:sp>
+        <p:nvSpPr>
+          <p:cNvPr id="79" name="swimlane:step:close"/>
           <p:cNvSpPr/>
           <p:nvPr/>
         </p:nvSpPr>
@@ -56645,7 +56807,7 @@
       </p:sp>
       <p:sp>
         <p:nvSpPr>
-          <p:cNvPr id="80" name="TextBox 79"/>
+          <p:cNvPr id="80" name="swimlane:step-label:close"/>
           <p:cNvSpPr txBox="1"/>
           <p:nvPr/>
         </p:nvSpPr>
@@ -56660,11 +56822,11 @@
           <a:noFill/>
         </p:spPr>
         <p:txBody>
-          <a:bodyPr wrap="square" anchor="ctr" lIns="0" rIns="0" tIns="0" bIns="0">
-            <a:spAutoFit/>
-            <a:extLst>
-              <a:ext uri="{8AF73BB6-5E31-4F0F-A399-3D98F3B95FD9}">
-                <ns118:textLayout xmlns:ns118="urn:pptxdsl:text-layout:v1" role="natural"/>
+          <a:bodyPr wrap="none" anchor="ctr" lIns="0" rIns="0" tIns="0" bIns="0">
+            <a:spAutoFit/>
+            <a:extLst>
+              <a:ext uri="{8AF73BB6-5E31-4F0F-A399-3D98F3B95FD9}">
+                <ns136:textLayout xmlns:ns136="urn:pptxdsl:text-layout:v1" role="natural"/>
               </a:ext>
             </a:extLst>
           </a:bodyPr>
@@ -56672,11 +56834,11 @@
           <a:p>
             <a:pPr algn="ctr">
               <a:lnSpc>
-                <a:spcPct val="130000"/>
-              </a:lnSpc>
-            </a:pPr>
-            <a:r>
-              <a:rPr sz="1050" b="1" lang="ja-JP">
+                <a:spcPct val="110000"/>
+              </a:lnSpc>
+            </a:pPr>
+            <a:r>
+              <a:rPr sz="1150" b="1" lang="ja-JP">
                 <a:solidFill>
                   <a:srgbClr val="0F2A46"/>
                 </a:solidFill>
@@ -56684,7 +56846,25 @@
                 <a:ea typeface="Yu Gothic"/>
                 <a:cs typeface="Yu Gothic"/>
               </a:rPr>
-              <a:t>⑩ クローズ</a:t>
+              <a:t>⑩</a:t>
+            </a:r>
+          </a:p>
+          <a:p>
+            <a:pPr algn="ctr">
+              <a:lnSpc>
+                <a:spcPct val="110000"/>
+              </a:lnSpc>
+            </a:pPr>
+            <a:r>
+              <a:rPr sz="1150" b="1" lang="ja-JP">
+                <a:solidFill>
+                  <a:srgbClr val="0F2A46"/>
+                </a:solidFill>
+                <a:latin typeface="Yu Gothic"/>
+                <a:ea typeface="Yu Gothic"/>
+                <a:cs typeface="Yu Gothic"/>
+              </a:rPr>
+              <a:t>クローズ</a:t>
             </a:r>
           </a:p>
         </p:txBody>
@@ -56754,7 +56934,7 @@
             <a:spAutoFit/>
             <a:extLst>
               <a:ext uri="{8AF73BB6-5E31-4F0F-A399-3D98F3B95FD9}">
-                <ns123:textLayout xmlns:ns123="urn:pptxdsl:text-layout:v1" role="body"/>
+                <ns143:textLayout xmlns:ns143="urn:pptxdsl:text-layout:v1" role="body"/>
               </a:ext>
             </a:extLst>
           </a:bodyPr>
@@ -56800,7 +56980,7 @@
             <a:spAutoFit/>
             <a:extLst>
               <a:ext uri="{8AF73BB6-5E31-4F0F-A399-3D98F3B95FD9}">
-                <ns128:textLayout xmlns:ns128="urn:pptxdsl:text-layout:v1" role="body"/>
+                <ns148:textLayout xmlns:ns148="urn:pptxdsl:text-layout:v1" role="body"/>
               </a:ext>
             </a:extLst>
           </a:bodyPr>

--- a/examples/gallery/pattern_gallery.pptx
+++ b/examples/gallery/pattern_gallery.pptx
@@ -44345,7 +44345,7 @@
       </p:sp>
       <p:sp>
         <p:nvSpPr>
-          <p:cNvPr id="7" name="TextBox 6"/>
+          <p:cNvPr id="7" name="knowledge:question:0"/>
           <p:cNvSpPr txBox="1"/>
           <p:nvPr/>
         </p:nvSpPr>
@@ -44360,7 +44360,7 @@
           <a:noFill/>
         </p:spPr>
         <p:txBody>
-          <a:bodyPr wrap="square" anchor="t" lIns="0" rIns="0" tIns="0" bIns="0">
+          <a:bodyPr wrap="none" anchor="t" lIns="0" rIns="0" tIns="0" bIns="0">
             <a:spAutoFit/>
             <a:extLst>
               <a:ext uri="{8AF73BB6-5E31-4F0F-A399-3D98F3B95FD9}">
@@ -44391,14 +44391,14 @@
       </p:sp>
       <p:sp>
         <p:nvSpPr>
-          <p:cNvPr id="8" name="TextBox 7"/>
+          <p:cNvPr id="8" name="knowledge:option:0:0"/>
           <p:cNvSpPr txBox="1"/>
           <p:nvPr/>
         </p:nvSpPr>
         <p:spPr>
           <a:xfrm>
             <a:off x="1124712" y="2193218"/>
-            <a:ext cx="2334006" cy="256032"/>
+            <a:ext cx="3197352" cy="256032"/>
           </a:xfrm>
           <a:prstGeom prst="rect">
             <a:avLst/>
@@ -44406,11 +44406,11 @@
           <a:noFill/>
         </p:spPr>
         <p:txBody>
-          <a:bodyPr wrap="square" anchor="t" lIns="0" rIns="0" tIns="0" bIns="0">
-            <a:spAutoFit/>
-            <a:extLst>
-              <a:ext uri="{8AF73BB6-5E31-4F0F-A399-3D98F3B95FD9}">
-                <ns22:textLayout xmlns:ns22="urn:pptxdsl:text-layout:v1" role="body"/>
+          <a:bodyPr wrap="none" anchor="t" lIns="0" rIns="0" tIns="0" bIns="0">
+            <a:spAutoFit/>
+            <a:extLst>
+              <a:ext uri="{8AF73BB6-5E31-4F0F-A399-3D98F3B95FD9}">
+                <ns22:textLayout xmlns:ns22="urn:pptxdsl:text-layout:v1" role="compact"/>
               </a:ext>
             </a:extLst>
           </a:bodyPr>
@@ -44437,14 +44437,14 @@
       </p:sp>
       <p:sp>
         <p:nvSpPr>
-          <p:cNvPr id="9" name="TextBox 8"/>
-          <p:cNvSpPr txBox="1"/>
-          <p:nvPr/>
-        </p:nvSpPr>
-        <p:spPr>
-          <a:xfrm>
-            <a:off x="3623310" y="2193218"/>
-            <a:ext cx="1778508" cy="256032"/>
+          <p:cNvPr id="9" name="knowledge:option:0:1"/>
+          <p:cNvSpPr txBox="1"/>
+          <p:nvPr/>
+        </p:nvSpPr>
+        <p:spPr>
+          <a:xfrm>
+            <a:off x="4486656" y="2193218"/>
+            <a:ext cx="3197352" cy="256032"/>
           </a:xfrm>
           <a:prstGeom prst="rect">
             <a:avLst/>
@@ -44452,11 +44452,11 @@
           <a:noFill/>
         </p:spPr>
         <p:txBody>
-          <a:bodyPr wrap="square" anchor="t" lIns="0" rIns="0" tIns="0" bIns="0">
-            <a:spAutoFit/>
-            <a:extLst>
-              <a:ext uri="{8AF73BB6-5E31-4F0F-A399-3D98F3B95FD9}">
-                <ns27:textLayout xmlns:ns27="urn:pptxdsl:text-layout:v1" role="body"/>
+          <a:bodyPr wrap="none" anchor="t" lIns="0" rIns="0" tIns="0" bIns="0">
+            <a:spAutoFit/>
+            <a:extLst>
+              <a:ext uri="{8AF73BB6-5E31-4F0F-A399-3D98F3B95FD9}">
+                <ns27:textLayout xmlns:ns27="urn:pptxdsl:text-layout:v1" role="compact"/>
               </a:ext>
             </a:extLst>
           </a:bodyPr>
@@ -44483,14 +44483,14 @@
       </p:sp>
       <p:sp>
         <p:nvSpPr>
-          <p:cNvPr id="10" name="TextBox 9"/>
-          <p:cNvSpPr txBox="1"/>
-          <p:nvPr/>
-        </p:nvSpPr>
-        <p:spPr>
-          <a:xfrm>
-            <a:off x="5566410" y="2193218"/>
-            <a:ext cx="1593342" cy="256032"/>
+          <p:cNvPr id="10" name="knowledge:option:0:2"/>
+          <p:cNvSpPr txBox="1"/>
+          <p:nvPr/>
+        </p:nvSpPr>
+        <p:spPr>
+          <a:xfrm>
+            <a:off x="7848599" y="2193218"/>
+            <a:ext cx="3197352" cy="256032"/>
           </a:xfrm>
           <a:prstGeom prst="rect">
             <a:avLst/>
@@ -44498,11 +44498,11 @@
           <a:noFill/>
         </p:spPr>
         <p:txBody>
-          <a:bodyPr wrap="square" anchor="t" lIns="0" rIns="0" tIns="0" bIns="0">
-            <a:spAutoFit/>
-            <a:extLst>
-              <a:ext uri="{8AF73BB6-5E31-4F0F-A399-3D98F3B95FD9}">
-                <ns32:textLayout xmlns:ns32="urn:pptxdsl:text-layout:v1" role="body"/>
+          <a:bodyPr wrap="none" anchor="t" lIns="0" rIns="0" tIns="0" bIns="0">
+            <a:spAutoFit/>
+            <a:extLst>
+              <a:ext uri="{8AF73BB6-5E31-4F0F-A399-3D98F3B95FD9}">
+                <ns32:textLayout xmlns:ns32="urn:pptxdsl:text-layout:v1" role="compact"/>
               </a:ext>
             </a:extLst>
           </a:bodyPr>
@@ -44663,7 +44663,7 @@
       </p:sp>
       <p:sp>
         <p:nvSpPr>
-          <p:cNvPr id="14" name="TextBox 13"/>
+          <p:cNvPr id="14" name="knowledge:question:1"/>
           <p:cNvSpPr txBox="1"/>
           <p:nvPr/>
         </p:nvSpPr>
@@ -44678,7 +44678,7 @@
           <a:noFill/>
         </p:spPr>
         <p:txBody>
-          <a:bodyPr wrap="square" anchor="t" lIns="0" rIns="0" tIns="0" bIns="0">
+          <a:bodyPr wrap="none" anchor="t" lIns="0" rIns="0" tIns="0" bIns="0">
             <a:spAutoFit/>
             <a:extLst>
               <a:ext uri="{8AF73BB6-5E31-4F0F-A399-3D98F3B95FD9}">
@@ -44709,14 +44709,14 @@
       </p:sp>
       <p:sp>
         <p:nvSpPr>
-          <p:cNvPr id="15" name="TextBox 14"/>
+          <p:cNvPr id="15" name="knowledge:option:1:0"/>
           <p:cNvSpPr txBox="1"/>
           <p:nvPr/>
         </p:nvSpPr>
         <p:spPr>
           <a:xfrm>
             <a:off x="1124712" y="3107618"/>
-            <a:ext cx="2519172" cy="256032"/>
+            <a:ext cx="3197352" cy="256032"/>
           </a:xfrm>
           <a:prstGeom prst="rect">
             <a:avLst/>
@@ -44724,11 +44724,11 @@
           <a:noFill/>
         </p:spPr>
         <p:txBody>
-          <a:bodyPr wrap="square" anchor="t" lIns="0" rIns="0" tIns="0" bIns="0">
-            <a:spAutoFit/>
-            <a:extLst>
-              <a:ext uri="{8AF73BB6-5E31-4F0F-A399-3D98F3B95FD9}">
-                <ns47:textLayout xmlns:ns47="urn:pptxdsl:text-layout:v1" role="body"/>
+          <a:bodyPr wrap="none" anchor="t" lIns="0" rIns="0" tIns="0" bIns="0">
+            <a:spAutoFit/>
+            <a:extLst>
+              <a:ext uri="{8AF73BB6-5E31-4F0F-A399-3D98F3B95FD9}">
+                <ns47:textLayout xmlns:ns47="urn:pptxdsl:text-layout:v1" role="compact"/>
               </a:ext>
             </a:extLst>
           </a:bodyPr>
@@ -44755,14 +44755,14 @@
       </p:sp>
       <p:sp>
         <p:nvSpPr>
-          <p:cNvPr id="16" name="TextBox 15"/>
-          <p:cNvSpPr txBox="1"/>
-          <p:nvPr/>
-        </p:nvSpPr>
-        <p:spPr>
-          <a:xfrm>
-            <a:off x="3808476" y="3107618"/>
-            <a:ext cx="2519172" cy="256032"/>
+          <p:cNvPr id="16" name="knowledge:option:1:1"/>
+          <p:cNvSpPr txBox="1"/>
+          <p:nvPr/>
+        </p:nvSpPr>
+        <p:spPr>
+          <a:xfrm>
+            <a:off x="4486656" y="3107618"/>
+            <a:ext cx="3197352" cy="256032"/>
           </a:xfrm>
           <a:prstGeom prst="rect">
             <a:avLst/>
@@ -44770,11 +44770,11 @@
           <a:noFill/>
         </p:spPr>
         <p:txBody>
-          <a:bodyPr wrap="square" anchor="t" lIns="0" rIns="0" tIns="0" bIns="0">
-            <a:spAutoFit/>
-            <a:extLst>
-              <a:ext uri="{8AF73BB6-5E31-4F0F-A399-3D98F3B95FD9}">
-                <ns52:textLayout xmlns:ns52="urn:pptxdsl:text-layout:v1" role="body"/>
+          <a:bodyPr wrap="none" anchor="t" lIns="0" rIns="0" tIns="0" bIns="0">
+            <a:spAutoFit/>
+            <a:extLst>
+              <a:ext uri="{8AF73BB6-5E31-4F0F-A399-3D98F3B95FD9}">
+                <ns52:textLayout xmlns:ns52="urn:pptxdsl:text-layout:v1" role="compact"/>
               </a:ext>
             </a:extLst>
           </a:bodyPr>
@@ -44801,14 +44801,14 @@
       </p:sp>
       <p:sp>
         <p:nvSpPr>
-          <p:cNvPr id="17" name="TextBox 16"/>
-          <p:cNvSpPr txBox="1"/>
-          <p:nvPr/>
-        </p:nvSpPr>
-        <p:spPr>
-          <a:xfrm>
-            <a:off x="6492240" y="3107618"/>
-            <a:ext cx="1963674" cy="256032"/>
+          <p:cNvPr id="17" name="knowledge:option:1:2"/>
+          <p:cNvSpPr txBox="1"/>
+          <p:nvPr/>
+        </p:nvSpPr>
+        <p:spPr>
+          <a:xfrm>
+            <a:off x="7848599" y="3107618"/>
+            <a:ext cx="3197352" cy="256032"/>
           </a:xfrm>
           <a:prstGeom prst="rect">
             <a:avLst/>
@@ -44816,11 +44816,11 @@
           <a:noFill/>
         </p:spPr>
         <p:txBody>
-          <a:bodyPr wrap="square" anchor="t" lIns="0" rIns="0" tIns="0" bIns="0">
-            <a:spAutoFit/>
-            <a:extLst>
-              <a:ext uri="{8AF73BB6-5E31-4F0F-A399-3D98F3B95FD9}">
-                <ns57:textLayout xmlns:ns57="urn:pptxdsl:text-layout:v1" role="body"/>
+          <a:bodyPr wrap="none" anchor="t" lIns="0" rIns="0" tIns="0" bIns="0">
+            <a:spAutoFit/>
+            <a:extLst>
+              <a:ext uri="{8AF73BB6-5E31-4F0F-A399-3D98F3B95FD9}">
+                <ns57:textLayout xmlns:ns57="urn:pptxdsl:text-layout:v1" role="compact"/>
               </a:ext>
             </a:extLst>
           </a:bodyPr>
@@ -44981,7 +44981,7 @@
       </p:sp>
       <p:sp>
         <p:nvSpPr>
-          <p:cNvPr id="21" name="TextBox 20"/>
+          <p:cNvPr id="21" name="knowledge:question:2"/>
           <p:cNvSpPr txBox="1"/>
           <p:nvPr/>
         </p:nvSpPr>
@@ -44996,7 +44996,7 @@
           <a:noFill/>
         </p:spPr>
         <p:txBody>
-          <a:bodyPr wrap="square" anchor="t" lIns="0" rIns="0" tIns="0" bIns="0">
+          <a:bodyPr wrap="none" anchor="t" lIns="0" rIns="0" tIns="0" bIns="0">
             <a:spAutoFit/>
             <a:extLst>
               <a:ext uri="{8AF73BB6-5E31-4F0F-A399-3D98F3B95FD9}">
@@ -45027,14 +45027,14 @@
       </p:sp>
       <p:sp>
         <p:nvSpPr>
-          <p:cNvPr id="22" name="TextBox 21"/>
+          <p:cNvPr id="22" name="knowledge:option:2:0"/>
           <p:cNvSpPr txBox="1"/>
           <p:nvPr/>
         </p:nvSpPr>
         <p:spPr>
           <a:xfrm>
             <a:off x="1124712" y="4022018"/>
-            <a:ext cx="1963674" cy="256032"/>
+            <a:ext cx="3197352" cy="256032"/>
           </a:xfrm>
           <a:prstGeom prst="rect">
             <a:avLst/>
@@ -45042,11 +45042,11 @@
           <a:noFill/>
         </p:spPr>
         <p:txBody>
-          <a:bodyPr wrap="square" anchor="t" lIns="0" rIns="0" tIns="0" bIns="0">
-            <a:spAutoFit/>
-            <a:extLst>
-              <a:ext uri="{8AF73BB6-5E31-4F0F-A399-3D98F3B95FD9}">
-                <ns72:textLayout xmlns:ns72="urn:pptxdsl:text-layout:v1" role="body"/>
+          <a:bodyPr wrap="none" anchor="t" lIns="0" rIns="0" tIns="0" bIns="0">
+            <a:spAutoFit/>
+            <a:extLst>
+              <a:ext uri="{8AF73BB6-5E31-4F0F-A399-3D98F3B95FD9}">
+                <ns72:textLayout xmlns:ns72="urn:pptxdsl:text-layout:v1" role="compact"/>
               </a:ext>
             </a:extLst>
           </a:bodyPr>
@@ -45073,14 +45073,14 @@
       </p:sp>
       <p:sp>
         <p:nvSpPr>
-          <p:cNvPr id="23" name="TextBox 22"/>
-          <p:cNvSpPr txBox="1"/>
-          <p:nvPr/>
-        </p:nvSpPr>
-        <p:spPr>
-          <a:xfrm>
-            <a:off x="3252978" y="4022018"/>
-            <a:ext cx="1593342" cy="256032"/>
+          <p:cNvPr id="23" name="knowledge:option:2:1"/>
+          <p:cNvSpPr txBox="1"/>
+          <p:nvPr/>
+        </p:nvSpPr>
+        <p:spPr>
+          <a:xfrm>
+            <a:off x="4486656" y="4022018"/>
+            <a:ext cx="3197352" cy="256032"/>
           </a:xfrm>
           <a:prstGeom prst="rect">
             <a:avLst/>
@@ -45088,11 +45088,11 @@
           <a:noFill/>
         </p:spPr>
         <p:txBody>
-          <a:bodyPr wrap="square" anchor="t" lIns="0" rIns="0" tIns="0" bIns="0">
-            <a:spAutoFit/>
-            <a:extLst>
-              <a:ext uri="{8AF73BB6-5E31-4F0F-A399-3D98F3B95FD9}">
-                <ns77:textLayout xmlns:ns77="urn:pptxdsl:text-layout:v1" role="body"/>
+          <a:bodyPr wrap="none" anchor="t" lIns="0" rIns="0" tIns="0" bIns="0">
+            <a:spAutoFit/>
+            <a:extLst>
+              <a:ext uri="{8AF73BB6-5E31-4F0F-A399-3D98F3B95FD9}">
+                <ns77:textLayout xmlns:ns77="urn:pptxdsl:text-layout:v1" role="compact"/>
               </a:ext>
             </a:extLst>
           </a:bodyPr>
@@ -45119,14 +45119,14 @@
       </p:sp>
       <p:sp>
         <p:nvSpPr>
-          <p:cNvPr id="24" name="TextBox 23"/>
-          <p:cNvSpPr txBox="1"/>
-          <p:nvPr/>
-        </p:nvSpPr>
-        <p:spPr>
-          <a:xfrm>
-            <a:off x="5010912" y="4022018"/>
-            <a:ext cx="1408176" cy="256032"/>
+          <p:cNvPr id="24" name="knowledge:option:2:2"/>
+          <p:cNvSpPr txBox="1"/>
+          <p:nvPr/>
+        </p:nvSpPr>
+        <p:spPr>
+          <a:xfrm>
+            <a:off x="7848599" y="4022018"/>
+            <a:ext cx="3197352" cy="256032"/>
           </a:xfrm>
           <a:prstGeom prst="rect">
             <a:avLst/>
@@ -45134,11 +45134,11 @@
           <a:noFill/>
         </p:spPr>
         <p:txBody>
-          <a:bodyPr wrap="square" anchor="t" lIns="0" rIns="0" tIns="0" bIns="0">
-            <a:spAutoFit/>
-            <a:extLst>
-              <a:ext uri="{8AF73BB6-5E31-4F0F-A399-3D98F3B95FD9}">
-                <ns82:textLayout xmlns:ns82="urn:pptxdsl:text-layout:v1" role="body"/>
+          <a:bodyPr wrap="none" anchor="t" lIns="0" rIns="0" tIns="0" bIns="0">
+            <a:spAutoFit/>
+            <a:extLst>
+              <a:ext uri="{8AF73BB6-5E31-4F0F-A399-3D98F3B95FD9}">
+                <ns82:textLayout xmlns:ns82="urn:pptxdsl:text-layout:v1" role="compact"/>
               </a:ext>
             </a:extLst>
           </a:bodyPr>

--- a/examples/gallery/pattern_gallery.pptx
+++ b/examples/gallery/pattern_gallery.pptx
@@ -9122,20 +9122,66 @@
       </p:sp>
       <p:sp>
         <p:nvSpPr>
-          <p:cNvPr id="5" name="Rectangle 4"/>
+          <p:cNvPr id="5" name="image-compare:label:0"/>
+          <p:cNvSpPr txBox="1"/>
+          <p:nvPr/>
+        </p:nvSpPr>
+        <p:spPr>
+          <a:xfrm>
+            <a:off x="694944" y="1664208"/>
+            <a:ext cx="5212080" cy="214630"/>
+          </a:xfrm>
+          <a:prstGeom prst="rect">
+            <a:avLst/>
+          </a:prstGeom>
+          <a:noFill/>
+        </p:spPr>
+        <p:txBody>
+          <a:bodyPr wrap="none" anchor="t" lIns="0" rIns="0" tIns="0" bIns="0">
+            <a:spAutoFit/>
+            <a:extLst>
+              <a:ext uri="{8AF73BB6-5E31-4F0F-A399-3D98F3B95FD9}">
+                <ns12:textLayout xmlns:ns12="urn:pptxdsl:text-layout:v1" role="natural"/>
+              </a:ext>
+            </a:extLst>
+          </a:bodyPr>
+          <a:lstStyle/>
+          <a:p>
+            <a:pPr algn="l">
+              <a:lnSpc>
+                <a:spcPct val="130000"/>
+              </a:lnSpc>
+            </a:pPr>
+            <a:r>
+              <a:rPr sz="1300" b="1" lang="ja-JP">
+                <a:solidFill>
+                  <a:srgbClr val="182C43"/>
+                </a:solidFill>
+                <a:latin typeface="Yu Gothic"/>
+                <a:ea typeface="Yu Gothic"/>
+                <a:cs typeface="Yu Gothic"/>
+              </a:rPr>
+              <a:t>変更前</a:t>
+            </a:r>
+          </a:p>
+        </p:txBody>
+      </p:sp>
+      <p:sp>
+        <p:nvSpPr>
+          <p:cNvPr id="6" name="Rectangle 5"/>
           <p:cNvSpPr/>
           <p:nvPr/>
         </p:nvSpPr>
         <p:spPr>
           <a:xfrm>
-            <a:off x="694944" y="1444752"/>
-            <a:ext cx="5212080" cy="3566160"/>
+            <a:off x="694944" y="1897126"/>
+            <a:ext cx="5212080" cy="7315"/>
           </a:xfrm>
           <a:prstGeom prst="rect">
             <a:avLst/>
           </a:prstGeom>
           <a:solidFill>
-            <a:srgbClr val="ECEAE4"/>
+            <a:srgbClr val="D1CFC8"/>
           </a:solidFill>
           <a:ln>
             <a:noFill/>
@@ -9164,55 +9210,9 @@
           </a:p>
         </p:txBody>
       </p:sp>
-      <p:sp>
-        <p:nvSpPr>
-          <p:cNvPr id="6" name="TextBox 5"/>
-          <p:cNvSpPr txBox="1"/>
-          <p:nvPr/>
-        </p:nvSpPr>
-        <p:spPr>
-          <a:xfrm>
-            <a:off x="969264" y="1664208"/>
-            <a:ext cx="4663440" cy="274320"/>
-          </a:xfrm>
-          <a:prstGeom prst="rect">
-            <a:avLst/>
-          </a:prstGeom>
-          <a:noFill/>
-        </p:spPr>
-        <p:txBody>
-          <a:bodyPr wrap="square" anchor="t" lIns="0" rIns="0" tIns="0" bIns="0">
-            <a:spAutoFit/>
-            <a:extLst>
-              <a:ext uri="{8AF73BB6-5E31-4F0F-A399-3D98F3B95FD9}">
-                <ns12:textLayout xmlns:ns12="urn:pptxdsl:text-layout:v1" role="natural"/>
-              </a:ext>
-            </a:extLst>
-          </a:bodyPr>
-          <a:lstStyle/>
-          <a:p>
-            <a:pPr algn="l">
-              <a:lnSpc>
-                <a:spcPct val="130000"/>
-              </a:lnSpc>
-            </a:pPr>
-            <a:r>
-              <a:rPr sz="950" b="1" lang="ja-JP">
-                <a:solidFill>
-                  <a:srgbClr val="666E70"/>
-                </a:solidFill>
-                <a:latin typeface="Yu Gothic"/>
-                <a:ea typeface="Yu Gothic"/>
-                <a:cs typeface="Yu Gothic"/>
-              </a:rPr>
-              <a:t>変更前</a:t>
-            </a:r>
-          </a:p>
-        </p:txBody>
-      </p:sp>
       <p:pic>
         <p:nvPicPr>
-          <p:cNvPr id="7" name="ComparisonImage" descr="GitHubで公開されているpptxdslリポジトリのトップ画面"/>
+          <p:cNvPr id="7" name="ComparisonImage" descr="架空の申請一覧画面。すべての申請を同じ文字階層で表示した変更前のサンプル"/>
           <p:cNvPicPr>
             <a:picLocks noChangeAspect="1"/>
           </p:cNvPicPr>
@@ -9220,15 +9220,14 @@
         </p:nvPicPr>
         <p:blipFill>
           <a:blip r:embed="rId2"/>
-          <a:srcRect l="4407" r="4407"/>
           <a:stretch>
             <a:fillRect/>
           </a:stretch>
         </p:blipFill>
         <p:spPr>
           <a:xfrm>
-            <a:off x="877824" y="2084832"/>
-            <a:ext cx="4846320" cy="2743200"/>
+            <a:off x="694944" y="2025142"/>
+            <a:ext cx="5212080" cy="3449170"/>
           </a:xfrm>
           <a:prstGeom prst="rect">
             <a:avLst/>
@@ -9244,20 +9243,66 @@
       </p:pic>
       <p:sp>
         <p:nvSpPr>
-          <p:cNvPr id="8" name="Rectangle 7"/>
+          <p:cNvPr id="8" name="image-compare:label:1"/>
+          <p:cNvSpPr txBox="1"/>
+          <p:nvPr/>
+        </p:nvSpPr>
+        <p:spPr>
+          <a:xfrm>
+            <a:off x="6291072" y="1664208"/>
+            <a:ext cx="5212080" cy="214630"/>
+          </a:xfrm>
+          <a:prstGeom prst="rect">
+            <a:avLst/>
+          </a:prstGeom>
+          <a:noFill/>
+        </p:spPr>
+        <p:txBody>
+          <a:bodyPr wrap="none" anchor="t" lIns="0" rIns="0" tIns="0" bIns="0">
+            <a:spAutoFit/>
+            <a:extLst>
+              <a:ext uri="{8AF73BB6-5E31-4F0F-A399-3D98F3B95FD9}">
+                <ns17:textLayout xmlns:ns17="urn:pptxdsl:text-layout:v1" role="natural"/>
+              </a:ext>
+            </a:extLst>
+          </a:bodyPr>
+          <a:lstStyle/>
+          <a:p>
+            <a:pPr algn="l">
+              <a:lnSpc>
+                <a:spcPct val="130000"/>
+              </a:lnSpc>
+            </a:pPr>
+            <a:r>
+              <a:rPr sz="1300" b="1" lang="ja-JP">
+                <a:solidFill>
+                  <a:srgbClr val="182C43"/>
+                </a:solidFill>
+                <a:latin typeface="Yu Gothic"/>
+                <a:ea typeface="Yu Gothic"/>
+                <a:cs typeface="Yu Gothic"/>
+              </a:rPr>
+              <a:t>変更後</a:t>
+            </a:r>
+          </a:p>
+        </p:txBody>
+      </p:sp>
+      <p:sp>
+        <p:nvSpPr>
+          <p:cNvPr id="9" name="Rectangle 8"/>
           <p:cNvSpPr/>
           <p:nvPr/>
         </p:nvSpPr>
         <p:spPr>
           <a:xfrm>
-            <a:off x="6291072" y="1444752"/>
-            <a:ext cx="5212080" cy="3566160"/>
+            <a:off x="6291072" y="1897126"/>
+            <a:ext cx="5212080" cy="7315"/>
           </a:xfrm>
           <a:prstGeom prst="rect">
             <a:avLst/>
           </a:prstGeom>
           <a:solidFill>
-            <a:srgbClr val="DFEBE8"/>
+            <a:srgbClr val="D1CFC8"/>
           </a:solidFill>
           <a:ln>
             <a:noFill/>
@@ -9286,55 +9331,9 @@
           </a:p>
         </p:txBody>
       </p:sp>
-      <p:sp>
-        <p:nvSpPr>
-          <p:cNvPr id="9" name="TextBox 8"/>
-          <p:cNvSpPr txBox="1"/>
-          <p:nvPr/>
-        </p:nvSpPr>
-        <p:spPr>
-          <a:xfrm>
-            <a:off x="6565392" y="1664208"/>
-            <a:ext cx="4663440" cy="274320"/>
-          </a:xfrm>
-          <a:prstGeom prst="rect">
-            <a:avLst/>
-          </a:prstGeom>
-          <a:noFill/>
-        </p:spPr>
-        <p:txBody>
-          <a:bodyPr wrap="square" anchor="t" lIns="0" rIns="0" tIns="0" bIns="0">
-            <a:spAutoFit/>
-            <a:extLst>
-              <a:ext uri="{8AF73BB6-5E31-4F0F-A399-3D98F3B95FD9}">
-                <ns17:textLayout xmlns:ns17="urn:pptxdsl:text-layout:v1" role="natural"/>
-              </a:ext>
-            </a:extLst>
-          </a:bodyPr>
-          <a:lstStyle/>
-          <a:p>
-            <a:pPr algn="l">
-              <a:lnSpc>
-                <a:spcPct val="130000"/>
-              </a:lnSpc>
-            </a:pPr>
-            <a:r>
-              <a:rPr sz="950" b="1" lang="ja-JP">
-                <a:solidFill>
-                  <a:srgbClr val="0D7870"/>
-                </a:solidFill>
-                <a:latin typeface="Yu Gothic"/>
-                <a:ea typeface="Yu Gothic"/>
-                <a:cs typeface="Yu Gothic"/>
-              </a:rPr>
-              <a:t>変更後</a:t>
-            </a:r>
-          </a:p>
-        </p:txBody>
-      </p:sp>
       <p:pic>
         <p:nvPicPr>
-          <p:cNvPr id="10" name="ComparisonImage" descr="濃紺のグラデーションに幾何学的な線を重ねた背景素材"/>
+          <p:cNvPr id="10" name="ComparisonImage" descr="同じ申請一覧の条件表示・申請名・状態を強調した変更後のサンプル"/>
           <p:cNvPicPr>
             <a:picLocks noChangeAspect="1"/>
           </p:cNvPicPr>
@@ -9342,15 +9341,14 @@
         </p:nvPicPr>
         <p:blipFill>
           <a:blip r:embed="rId3"/>
-          <a:srcRect l="286" r="286"/>
           <a:stretch>
             <a:fillRect/>
           </a:stretch>
         </p:blipFill>
         <p:spPr>
           <a:xfrm>
-            <a:off x="6473952" y="2084832"/>
-            <a:ext cx="4846320" cy="2743200"/>
+            <a:off x="6291072" y="2025142"/>
+            <a:ext cx="5212080" cy="3449170"/>
           </a:xfrm>
           <a:prstGeom prst="rect">
             <a:avLst/>
@@ -62431,14 +62429,14 @@
       </p:sp>
       <p:sp>
         <p:nvSpPr>
-          <p:cNvPr id="16" name="Rectangle 15"/>
+          <p:cNvPr id="16" name="slide-footnote:rule"/>
           <p:cNvSpPr/>
           <p:nvPr/>
         </p:nvSpPr>
         <p:spPr>
           <a:xfrm>
-            <a:off x="658368" y="6327648"/>
-            <a:ext cx="10881360" cy="9144"/>
+            <a:off x="502920" y="5822696"/>
+            <a:ext cx="11185855" cy="9144"/>
           </a:xfrm>
           <a:prstGeom prst="rect">
             <a:avLst/>
@@ -62475,7 +62473,143 @@
       </p:sp>
       <p:sp>
         <p:nvSpPr>
-          <p:cNvPr id="17" name="TextBox 16"/>
+          <p:cNvPr id="17" name="slide-footnote:label"/>
+          <p:cNvSpPr txBox="1"/>
+          <p:nvPr/>
+        </p:nvSpPr>
+        <p:spPr>
+          <a:xfrm>
+            <a:off x="502920" y="5932424"/>
+            <a:ext cx="1271016" cy="221488"/>
+          </a:xfrm>
+          <a:prstGeom prst="rect">
+            <a:avLst/>
+          </a:prstGeom>
+          <a:noFill/>
+        </p:spPr>
+        <p:txBody>
+          <a:bodyPr wrap="square" anchor="t" lIns="0" rIns="0" tIns="0" bIns="0">
+            <a:spAutoFit/>
+            <a:extLst>
+              <a:ext uri="{8AF73BB6-5E31-4F0F-A399-3D98F3B95FD9}">
+                <ns57:textLayout xmlns:ns57="urn:pptxdsl:text-layout:v1" role="natural"/>
+              </a:ext>
+            </a:extLst>
+          </a:bodyPr>
+          <a:lstStyle/>
+          <a:p>
+            <a:pPr algn="l">
+              <a:lnSpc>
+                <a:spcPct val="112000"/>
+              </a:lnSpc>
+            </a:pPr>
+            <a:r>
+              <a:rPr sz="1150" b="1" lang="ja-JP">
+                <a:solidFill>
+                  <a:srgbClr val="C7583E"/>
+                </a:solidFill>
+                <a:latin typeface="Yu Gothic"/>
+                <a:ea typeface="Yu Gothic"/>
+                <a:cs typeface="Yu Gothic"/>
+              </a:rPr>
+              <a:t>架空データ</a:t>
+            </a:r>
+          </a:p>
+        </p:txBody>
+      </p:sp>
+      <p:sp>
+        <p:nvSpPr>
+          <p:cNvPr id="18" name="slide-footnote:text"/>
+          <p:cNvSpPr txBox="1"/>
+          <p:nvPr/>
+        </p:nvSpPr>
+        <p:spPr>
+          <a:xfrm>
+            <a:off x="1920240" y="5932424"/>
+            <a:ext cx="9768535" cy="221488"/>
+          </a:xfrm>
+          <a:prstGeom prst="rect">
+            <a:avLst/>
+          </a:prstGeom>
+          <a:noFill/>
+        </p:spPr>
+        <p:txBody>
+          <a:bodyPr wrap="square" anchor="t" lIns="0" rIns="0" tIns="0" bIns="0">
+            <a:spAutoFit/>
+            <a:extLst>
+              <a:ext uri="{8AF73BB6-5E31-4F0F-A399-3D98F3B95FD9}">
+                <ns62:textLayout xmlns:ns62="urn:pptxdsl:text-layout:v1" role="body"/>
+              </a:ext>
+            </a:extLst>
+          </a:bodyPr>
+          <a:lstStyle/>
+          <a:p>
+            <a:pPr algn="l">
+              <a:lnSpc>
+                <a:spcPct val="112000"/>
+              </a:lnSpc>
+            </a:pPr>
+            <a:r>
+              <a:rPr sz="1300" b="0" lang="ja-JP">
+                <a:solidFill>
+                  <a:srgbClr val="202729"/>
+                </a:solidFill>
+                <a:latin typeface="Yu Gothic"/>
+                <a:ea typeface="Yu Gothic"/>
+                <a:cs typeface="Yu Gothic"/>
+              </a:rPr>
+              <a:t>数値と効果の説明は表示検証用のサンプルであり、実績や測定結果ではありません。</a:t>
+            </a:r>
+          </a:p>
+        </p:txBody>
+      </p:sp>
+      <p:sp>
+        <p:nvSpPr>
+          <p:cNvPr id="19" name="Rectangle 18"/>
+          <p:cNvSpPr/>
+          <p:nvPr/>
+        </p:nvSpPr>
+        <p:spPr>
+          <a:xfrm>
+            <a:off x="658368" y="6327648"/>
+            <a:ext cx="10881360" cy="9144"/>
+          </a:xfrm>
+          <a:prstGeom prst="rect">
+            <a:avLst/>
+          </a:prstGeom>
+          <a:solidFill>
+            <a:srgbClr val="D1CFC8"/>
+          </a:solidFill>
+          <a:ln>
+            <a:noFill/>
+          </a:ln>
+          <a:effectLst/>
+        </p:spPr>
+        <p:style>
+          <a:lnRef idx="1">
+            <a:schemeClr val="accent1"/>
+          </a:lnRef>
+          <a:fillRef idx="3">
+            <a:schemeClr val="accent1"/>
+          </a:fillRef>
+          <a:effectRef idx="2">
+            <a:schemeClr val="accent1"/>
+          </a:effectRef>
+          <a:fontRef idx="minor">
+            <a:schemeClr val="lt1"/>
+          </a:fontRef>
+        </p:style>
+        <p:txBody>
+          <a:bodyPr rtlCol="0" anchor="ctr"/>
+          <a:lstStyle/>
+          <a:p>
+            <a:pPr algn="ctr"/>
+          </a:p>
+        </p:txBody>
+      </p:sp>
+      <p:sp>
+        <p:nvSpPr>
+          <p:cNvPr id="20" name="TextBox 19"/>
           <p:cNvSpPr txBox="1"/>
           <p:nvPr/>
         </p:nvSpPr>
@@ -62494,7 +62628,7 @@
             <a:spAutoFit/>
             <a:extLst>
               <a:ext uri="{8AF73BB6-5E31-4F0F-A399-3D98F3B95FD9}">
-                <ns57:textLayout xmlns:ns57="urn:pptxdsl:text-layout:v1" role="body"/>
+                <ns67:textLayout xmlns:ns67="urn:pptxdsl:text-layout:v1" role="body"/>
               </a:ext>
             </a:extLst>
           </a:bodyPr>
@@ -62521,7 +62655,7 @@
       </p:sp>
       <p:sp>
         <p:nvSpPr>
-          <p:cNvPr id="18" name="TextBox 17"/>
+          <p:cNvPr id="21" name="TextBox 20"/>
           <p:cNvSpPr txBox="1"/>
           <p:nvPr/>
         </p:nvSpPr>
@@ -62540,7 +62674,7 @@
             <a:spAutoFit/>
             <a:extLst>
               <a:ext uri="{8AF73BB6-5E31-4F0F-A399-3D98F3B95FD9}">
-                <ns62:textLayout xmlns:ns62="urn:pptxdsl:text-layout:v1" role="body"/>
+                <ns72:textLayout xmlns:ns72="urn:pptxdsl:text-layout:v1" role="body"/>
               </a:ext>
             </a:extLst>
           </a:bodyPr>
